--- a/PharmaCare_紹介資料.pptx
+++ b/PharmaCare_紹介資料.pptx
@@ -20,9 +20,12 @@
     <p:sldId id="268" r:id="rId14"/>
     <p:sldId id="269" r:id="rId15"/>
     <p:sldId id="270" r:id="rId16"/>
+    <p:sldId id="271" r:id="rId17"/>
+    <p:sldId id="272" r:id="rId18"/>
+    <p:sldId id="273" r:id="rId19"/>
   </p:sldIdLst>
   <p:notesMasterIdLst>
-    <p:notesMasterId r:id="rId17"/>
+    <p:notesMasterId r:id="rId20"/>
   </p:notesMasterIdLst>
   <p:sldSz cx="12192000" cy="6858000"/>
   <p:notesSz cx="6858000" cy="12192000"/>
@@ -1051,7 +1054,7 @@
           <a:p>
             <a:r>
               <a:rPr lang="en-US" dirty="0"/>
-              <a:t/>
+              <a:t>隠さず出すことが、医療情報を預かる事業者としての信頼につながる。指摘される前に自分から言う。</a:t>
             </a:r>
             <a:endParaRPr lang="en-US" dirty="0"/>
           </a:p>
@@ -1139,7 +1142,7 @@
           <a:p>
             <a:r>
               <a:rPr lang="en-US" dirty="0"/>
-              <a:t>この資料の中心メッセージ。データ→研究→現場の実践、という流れを示す。</a:t>
+              <a:t/>
             </a:r>
             <a:endParaRPr lang="en-US" dirty="0"/>
           </a:p>
@@ -1339,6 +1342,270 @@
             <a:fld id="{F7021451-1387-4CA6-816F-3879F97B5CBC}" type="slidenum">
               <a:rPr lang="en-US"/>
               <a:t>15</a:t>
+            </a:fld>
+            <a:endParaRPr lang="en-US"/>
+          </a:p>
+        </p:txBody>
+      </p:sp>
+    </p:spTree>
+    <p:extLst>
+      <p:ext uri="{BB962C8B-B14F-4D97-AF65-F5344CB8AC3E}">
+        <p14:creationId xmlns:p14="http://schemas.microsoft.com/office/powerpoint/2010/main" val="1024086991"/>
+      </p:ext>
+    </p:extLst>
+  </p:cSld>
+  <p:clrMapOvr>
+    <a:masterClrMapping/>
+  </p:clrMapOvr>
+</p:notes>
+</file>
+
+<file path=ppt/notesSlides/notesSlide16.xml><?xml version="1.0" encoding="utf-8"?>
+<p:notes xmlns:a="http://schemas.openxmlformats.org/drawingml/2006/main" xmlns:r="http://schemas.openxmlformats.org/officeDocument/2006/relationships" xmlns:p="http://schemas.openxmlformats.org/presentationml/2006/main">
+  <p:cSld>
+    <p:spTree>
+      <p:nvGrpSpPr>
+        <p:cNvPr id="1" name=""/>
+        <p:cNvGrpSpPr/>
+        <p:nvPr/>
+      </p:nvGrpSpPr>
+      <p:grpSpPr>
+        <a:xfrm>
+          <a:off x="0" y="0"/>
+          <a:ext cx="0" cy="0"/>
+          <a:chOff x="0" y="0"/>
+          <a:chExt cx="0" cy="0"/>
+        </a:xfrm>
+      </p:grpSpPr>
+      <p:sp>
+        <p:nvSpPr>
+          <p:cNvPr id="2" name="Slide Image Placeholder 1"/>
+          <p:cNvSpPr>
+            <a:spLocks noGrp="1" noRot="1" noChangeAspect="1"/>
+          </p:cNvSpPr>
+          <p:nvPr>
+            <p:ph type="sldImg"/>
+          </p:nvPr>
+        </p:nvSpPr>
+        <p:spPr/>
+      </p:sp>
+      <p:sp>
+        <p:nvSpPr>
+          <p:cNvPr id="3" name="Notes Placeholder 2"/>
+          <p:cNvSpPr>
+            <a:spLocks noGrp="1"/>
+          </p:cNvSpPr>
+          <p:nvPr>
+            <p:ph type="body" idx="1"/>
+          </p:nvPr>
+        </p:nvSpPr>
+        <p:spPr/>
+        <p:txBody>
+          <a:bodyPr/>
+          <a:lstStyle/>
+          <a:p>
+            <a:r>
+              <a:rPr lang="en-US" dirty="0"/>
+              <a:t>この資料の中心メッセージ。データ→研究→現場の実践、という流れを示す。</a:t>
+            </a:r>
+            <a:endParaRPr lang="en-US" dirty="0"/>
+          </a:p>
+        </p:txBody>
+      </p:sp>
+      <p:sp>
+        <p:nvSpPr>
+          <p:cNvPr id="4" name="Slide Number Placeholder 3"/>
+          <p:cNvSpPr>
+            <a:spLocks noGrp="1"/>
+          </p:cNvSpPr>
+          <p:nvPr>
+            <p:ph type="sldNum" sz="quarter" idx="10"/>
+          </p:nvPr>
+        </p:nvSpPr>
+        <p:spPr/>
+        <p:txBody>
+          <a:bodyPr/>
+          <a:lstStyle/>
+          <a:p>
+            <a:fld id="{F7021451-1387-4CA6-816F-3879F97B5CBC}" type="slidenum">
+              <a:rPr lang="en-US"/>
+              <a:t>16</a:t>
+            </a:fld>
+            <a:endParaRPr lang="en-US"/>
+          </a:p>
+        </p:txBody>
+      </p:sp>
+    </p:spTree>
+    <p:extLst>
+      <p:ext uri="{BB962C8B-B14F-4D97-AF65-F5344CB8AC3E}">
+        <p14:creationId xmlns:p14="http://schemas.microsoft.com/office/powerpoint/2010/main" val="1024086991"/>
+      </p:ext>
+    </p:extLst>
+  </p:cSld>
+  <p:clrMapOvr>
+    <a:masterClrMapping/>
+  </p:clrMapOvr>
+</p:notes>
+</file>
+
+<file path=ppt/notesSlides/notesSlide17.xml><?xml version="1.0" encoding="utf-8"?>
+<p:notes xmlns:a="http://schemas.openxmlformats.org/drawingml/2006/main" xmlns:r="http://schemas.openxmlformats.org/officeDocument/2006/relationships" xmlns:p="http://schemas.openxmlformats.org/presentationml/2006/main">
+  <p:cSld>
+    <p:spTree>
+      <p:nvGrpSpPr>
+        <p:cNvPr id="1" name=""/>
+        <p:cNvGrpSpPr/>
+        <p:nvPr/>
+      </p:nvGrpSpPr>
+      <p:grpSpPr>
+        <a:xfrm>
+          <a:off x="0" y="0"/>
+          <a:ext cx="0" cy="0"/>
+          <a:chOff x="0" y="0"/>
+          <a:chExt cx="0" cy="0"/>
+        </a:xfrm>
+      </p:grpSpPr>
+      <p:sp>
+        <p:nvSpPr>
+          <p:cNvPr id="2" name="Slide Image Placeholder 1"/>
+          <p:cNvSpPr>
+            <a:spLocks noGrp="1" noRot="1" noChangeAspect="1"/>
+          </p:cNvSpPr>
+          <p:nvPr>
+            <p:ph type="sldImg"/>
+          </p:nvPr>
+        </p:nvSpPr>
+        <p:spPr/>
+      </p:sp>
+      <p:sp>
+        <p:nvSpPr>
+          <p:cNvPr id="3" name="Notes Placeholder 2"/>
+          <p:cNvSpPr>
+            <a:spLocks noGrp="1"/>
+          </p:cNvSpPr>
+          <p:nvPr>
+            <p:ph type="body" idx="1"/>
+          </p:nvPr>
+        </p:nvSpPr>
+        <p:spPr/>
+        <p:txBody>
+          <a:bodyPr/>
+          <a:lstStyle/>
+          <a:p>
+            <a:r>
+              <a:rPr lang="en-US" dirty="0"/>
+              <a:t/>
+            </a:r>
+            <a:endParaRPr lang="en-US" dirty="0"/>
+          </a:p>
+        </p:txBody>
+      </p:sp>
+      <p:sp>
+        <p:nvSpPr>
+          <p:cNvPr id="4" name="Slide Number Placeholder 3"/>
+          <p:cNvSpPr>
+            <a:spLocks noGrp="1"/>
+          </p:cNvSpPr>
+          <p:nvPr>
+            <p:ph type="sldNum" sz="quarter" idx="10"/>
+          </p:nvPr>
+        </p:nvSpPr>
+        <p:spPr/>
+        <p:txBody>
+          <a:bodyPr/>
+          <a:lstStyle/>
+          <a:p>
+            <a:fld id="{F7021451-1387-4CA6-816F-3879F97B5CBC}" type="slidenum">
+              <a:rPr lang="en-US"/>
+              <a:t>17</a:t>
+            </a:fld>
+            <a:endParaRPr lang="en-US"/>
+          </a:p>
+        </p:txBody>
+      </p:sp>
+    </p:spTree>
+    <p:extLst>
+      <p:ext uri="{BB962C8B-B14F-4D97-AF65-F5344CB8AC3E}">
+        <p14:creationId xmlns:p14="http://schemas.microsoft.com/office/powerpoint/2010/main" val="1024086991"/>
+      </p:ext>
+    </p:extLst>
+  </p:cSld>
+  <p:clrMapOvr>
+    <a:masterClrMapping/>
+  </p:clrMapOvr>
+</p:notes>
+</file>
+
+<file path=ppt/notesSlides/notesSlide18.xml><?xml version="1.0" encoding="utf-8"?>
+<p:notes xmlns:a="http://schemas.openxmlformats.org/drawingml/2006/main" xmlns:r="http://schemas.openxmlformats.org/officeDocument/2006/relationships" xmlns:p="http://schemas.openxmlformats.org/presentationml/2006/main">
+  <p:cSld>
+    <p:spTree>
+      <p:nvGrpSpPr>
+        <p:cNvPr id="1" name=""/>
+        <p:cNvGrpSpPr/>
+        <p:nvPr/>
+      </p:nvGrpSpPr>
+      <p:grpSpPr>
+        <a:xfrm>
+          <a:off x="0" y="0"/>
+          <a:ext cx="0" cy="0"/>
+          <a:chOff x="0" y="0"/>
+          <a:chExt cx="0" cy="0"/>
+        </a:xfrm>
+      </p:grpSpPr>
+      <p:sp>
+        <p:nvSpPr>
+          <p:cNvPr id="2" name="Slide Image Placeholder 1"/>
+          <p:cNvSpPr>
+            <a:spLocks noGrp="1" noRot="1" noChangeAspect="1"/>
+          </p:cNvSpPr>
+          <p:nvPr>
+            <p:ph type="sldImg"/>
+          </p:nvPr>
+        </p:nvSpPr>
+        <p:spPr/>
+      </p:sp>
+      <p:sp>
+        <p:nvSpPr>
+          <p:cNvPr id="3" name="Notes Placeholder 2"/>
+          <p:cNvSpPr>
+            <a:spLocks noGrp="1"/>
+          </p:cNvSpPr>
+          <p:nvPr>
+            <p:ph type="body" idx="1"/>
+          </p:nvPr>
+        </p:nvSpPr>
+        <p:spPr/>
+        <p:txBody>
+          <a:bodyPr/>
+          <a:lstStyle/>
+          <a:p>
+            <a:r>
+              <a:rPr lang="en-US" dirty="0"/>
+              <a:t/>
+            </a:r>
+            <a:endParaRPr lang="en-US" dirty="0"/>
+          </a:p>
+        </p:txBody>
+      </p:sp>
+      <p:sp>
+        <p:nvSpPr>
+          <p:cNvPr id="4" name="Slide Number Placeholder 3"/>
+          <p:cNvSpPr>
+            <a:spLocks noGrp="1"/>
+          </p:cNvSpPr>
+          <p:nvPr>
+            <p:ph type="sldNum" sz="quarter" idx="10"/>
+          </p:nvPr>
+        </p:nvSpPr>
+        <p:spPr/>
+        <p:txBody>
+          <a:bodyPr/>
+          <a:lstStyle/>
+          <a:p>
+            <a:fld id="{F7021451-1387-4CA6-816F-3879F97B5CBC}" type="slidenum">
+              <a:rPr lang="en-US"/>
+              <a:t>18</a:t>
             </a:fld>
             <a:endParaRPr lang="en-US"/>
           </a:p>
@@ -2660,7 +2927,7 @@
     <p:bg>
       <p:bgPr>
         <a:solidFill>
-          <a:srgbClr val="14504B"/>
+          <a:srgbClr val="FFFFFF"/>
         </a:solidFill>
       </p:bgPr>
     </p:bg>
@@ -2680,24 +2947,182 @@
       </p:grpSpPr>
       <p:sp>
         <p:nvSpPr>
-          <p:cNvPr id="2" name="Shape 0"/>
-          <p:cNvSpPr/>
-          <p:nvPr/>
-        </p:nvSpPr>
-        <p:spPr>
-          <a:xfrm>
-            <a:off x="914400" y="2240280"/>
-            <a:ext cx="1005840" cy="1005840"/>
-          </a:xfrm>
-          <a:prstGeom prst="ellipse">
-            <a:avLst/>
+          <p:cNvPr id="2" name="Text 0"/>
+          <p:cNvSpPr/>
+          <p:nvPr/>
+        </p:nvSpPr>
+        <p:spPr>
+          <a:xfrm>
+            <a:off x="731520" y="411480"/>
+            <a:ext cx="10698480" cy="777240"/>
+          </a:xfrm>
+          <a:prstGeom prst="rect">
+            <a:avLst/>
+          </a:prstGeom>
+          <a:noFill/>
+          <a:ln/>
+        </p:spPr>
+        <p:txBody>
+          <a:bodyPr wrap="square" lIns="0" tIns="0" rIns="0" bIns="0" rtlCol="0" anchor="ctr"/>
+          <a:lstStyle/>
+          <a:p>
+            <a:pPr indent="0" marL="0">
+              <a:buNone/>
+            </a:pPr>
+            <a:r>
+              <a:rPr lang="en-US" sz="3600" b="1" dirty="0">
+                <a:solidFill>
+                  <a:srgbClr val="14504B"/>
+                </a:solidFill>
+                <a:latin typeface="Yu Gothic" pitchFamily="34" charset="0"/>
+                <a:ea typeface="Yu Gothic" pitchFamily="34" charset="-122"/>
+                <a:cs typeface="Yu Gothic" pitchFamily="34" charset="-120"/>
+              </a:rPr>
+              <a:t>施設が守る側の要求に、機能で応える</a:t>
+            </a:r>
+            <a:endParaRPr lang="en-US" sz="3600" dirty="0"/>
+          </a:p>
+        </p:txBody>
+      </p:sp>
+      <p:sp>
+        <p:nvSpPr>
+          <p:cNvPr id="3" name="Text 1"/>
+          <p:cNvSpPr/>
+          <p:nvPr/>
+        </p:nvSpPr>
+        <p:spPr>
+          <a:xfrm>
+            <a:off x="731520" y="1225296"/>
+            <a:ext cx="10698480" cy="411480"/>
+          </a:xfrm>
+          <a:prstGeom prst="rect">
+            <a:avLst/>
+          </a:prstGeom>
+          <a:noFill/>
+          <a:ln/>
+        </p:spPr>
+        <p:txBody>
+          <a:bodyPr wrap="square" lIns="0" tIns="0" rIns="0" bIns="0" rtlCol="0" anchor="ctr"/>
+          <a:lstStyle/>
+          <a:p>
+            <a:pPr indent="0" marL="0">
+              <a:buNone/>
+            </a:pPr>
+            <a:r>
+              <a:rPr lang="en-US" sz="1600" dirty="0">
+                <a:solidFill>
+                  <a:srgbClr val="5C6B68"/>
+                </a:solidFill>
+                <a:latin typeface="Yu Gothic" pitchFamily="34" charset="0"/>
+                <a:ea typeface="Yu Gothic" pitchFamily="34" charset="-122"/>
+                <a:cs typeface="Yu Gothic" pitchFamily="34" charset="-120"/>
+              </a:rPr>
+              <a:t>医療情報システムの安全管理に関するガイドライン 第7.0版（厚生労働省）</a:t>
+            </a:r>
+            <a:endParaRPr lang="en-US" sz="1600" dirty="0"/>
+          </a:p>
+        </p:txBody>
+      </p:sp>
+      <p:sp>
+        <p:nvSpPr>
+          <p:cNvPr id="4" name="Text 2"/>
+          <p:cNvSpPr/>
+          <p:nvPr/>
+        </p:nvSpPr>
+        <p:spPr>
+          <a:xfrm>
+            <a:off x="1005840" y="1874520"/>
+            <a:ext cx="5120640" cy="320040"/>
+          </a:xfrm>
+          <a:prstGeom prst="rect">
+            <a:avLst/>
+          </a:prstGeom>
+          <a:noFill/>
+          <a:ln/>
+        </p:spPr>
+        <p:txBody>
+          <a:bodyPr wrap="square" lIns="0" tIns="0" rIns="0" bIns="0" rtlCol="0" anchor="ctr"/>
+          <a:lstStyle/>
+          <a:p>
+            <a:pPr indent="0" marL="0">
+              <a:buNone/>
+            </a:pPr>
+            <a:r>
+              <a:rPr lang="en-US" sz="1300" b="1" dirty="0">
+                <a:solidFill>
+                  <a:srgbClr val="5C6B68"/>
+                </a:solidFill>
+                <a:latin typeface="Yu Gothic" pitchFamily="34" charset="0"/>
+                <a:ea typeface="Yu Gothic" pitchFamily="34" charset="-122"/>
+                <a:cs typeface="Yu Gothic" pitchFamily="34" charset="-120"/>
+              </a:rPr>
+              <a:t>ガイドラインが求めていること</a:t>
+            </a:r>
+            <a:endParaRPr lang="en-US" sz="1300" dirty="0"/>
+          </a:p>
+        </p:txBody>
+      </p:sp>
+      <p:sp>
+        <p:nvSpPr>
+          <p:cNvPr id="5" name="Text 3"/>
+          <p:cNvSpPr/>
+          <p:nvPr/>
+        </p:nvSpPr>
+        <p:spPr>
+          <a:xfrm>
+            <a:off x="6583680" y="1874520"/>
+            <a:ext cx="4846320" cy="320040"/>
+          </a:xfrm>
+          <a:prstGeom prst="rect">
+            <a:avLst/>
+          </a:prstGeom>
+          <a:noFill/>
+          <a:ln/>
+        </p:spPr>
+        <p:txBody>
+          <a:bodyPr wrap="square" lIns="0" tIns="0" rIns="0" bIns="0" rtlCol="0" anchor="ctr"/>
+          <a:lstStyle/>
+          <a:p>
+            <a:pPr indent="0" marL="0">
+              <a:buNone/>
+            </a:pPr>
+            <a:r>
+              <a:rPr lang="en-US" sz="1300" b="1" dirty="0">
+                <a:solidFill>
+                  <a:srgbClr val="5C6B68"/>
+                </a:solidFill>
+                <a:latin typeface="Yu Gothic" pitchFamily="34" charset="0"/>
+                <a:ea typeface="Yu Gothic" pitchFamily="34" charset="-122"/>
+                <a:cs typeface="Yu Gothic" pitchFamily="34" charset="-120"/>
+              </a:rPr>
+              <a:t>実装</a:t>
+            </a:r>
+            <a:endParaRPr lang="en-US" sz="1300" dirty="0"/>
+          </a:p>
+        </p:txBody>
+      </p:sp>
+      <p:sp>
+        <p:nvSpPr>
+          <p:cNvPr id="6" name="Shape 4"/>
+          <p:cNvSpPr/>
+          <p:nvPr/>
+        </p:nvSpPr>
+        <p:spPr>
+          <a:xfrm>
+            <a:off x="731520" y="2286000"/>
+            <a:ext cx="10698480" cy="694944"/>
+          </a:xfrm>
+          <a:prstGeom prst="roundRect">
+            <a:avLst>
+              <a:gd name="adj" fmla="val 10526"/>
+            </a:avLst>
           </a:prstGeom>
           <a:solidFill>
-            <a:srgbClr val="D98A2B"/>
+            <a:srgbClr val="F1F6F5"/>
           </a:solidFill>
           <a:ln w="12700">
             <a:solidFill>
-              <a:srgbClr val="D98A2B"/>
+              <a:srgbClr val="DCE6E4"/>
             </a:solidFill>
             <a:prstDash val="solid"/>
           </a:ln>
@@ -2705,154 +3130,53 @@
       </p:sp>
       <p:sp>
         <p:nvSpPr>
-          <p:cNvPr id="3" name="Text 1"/>
-          <p:cNvSpPr/>
-          <p:nvPr/>
-        </p:nvSpPr>
-        <p:spPr>
-          <a:xfrm>
-            <a:off x="914400" y="2240280"/>
-            <a:ext cx="1005840" cy="1005840"/>
-          </a:xfrm>
-          <a:prstGeom prst="rect">
-            <a:avLst/>
-          </a:prstGeom>
-          <a:noFill/>
-          <a:ln/>
-        </p:spPr>
-        <p:txBody>
-          <a:bodyPr wrap="square" lIns="0" tIns="0" rIns="0" bIns="0" rtlCol="0" anchor="ctr"/>
-          <a:lstStyle/>
-          <a:p>
-            <a:pPr algn="ctr" indent="0" marL="0">
-              <a:buNone/>
-            </a:pPr>
-            <a:r>
-              <a:rPr lang="en-US" sz="2600" b="1" dirty="0">
-                <a:solidFill>
-                  <a:srgbClr val="FFFFFF"/>
-                </a:solidFill>
-                <a:latin typeface="Yu Gothic" pitchFamily="34" charset="0"/>
-                <a:ea typeface="Yu Gothic" pitchFamily="34" charset="-122"/>
-                <a:cs typeface="Yu Gothic" pitchFamily="34" charset="-120"/>
-              </a:rPr>
-              <a:t>2</a:t>
-            </a:r>
-            <a:endParaRPr lang="en-US" sz="2600" dirty="0"/>
-          </a:p>
-        </p:txBody>
-      </p:sp>
-      <p:sp>
-        <p:nvSpPr>
-          <p:cNvPr id="4" name="Text 2"/>
-          <p:cNvSpPr/>
-          <p:nvPr/>
-        </p:nvSpPr>
-        <p:spPr>
-          <a:xfrm>
-            <a:off x="2286000" y="1874520"/>
-            <a:ext cx="9326880" cy="1828800"/>
-          </a:xfrm>
-          <a:prstGeom prst="rect">
-            <a:avLst/>
-          </a:prstGeom>
-          <a:noFill/>
-          <a:ln/>
-        </p:spPr>
-        <p:txBody>
-          <a:bodyPr wrap="square" lIns="0" tIns="0" rIns="0" bIns="0" rtlCol="0" anchor="ctr"/>
-          <a:lstStyle/>
-          <a:p>
-            <a:pPr indent="0" marL="0">
-              <a:lnSpc>
-                <a:spcPct val="125000"/>
-              </a:lnSpc>
-              <a:buNone/>
-            </a:pPr>
-            <a:r>
-              <a:rPr lang="en-US" sz="3800" b="1" dirty="0">
-                <a:solidFill>
-                  <a:srgbClr val="FFFFFF"/>
-                </a:solidFill>
-                <a:latin typeface="Yu Gothic" pitchFamily="34" charset="0"/>
-                <a:ea typeface="Yu Gothic" pitchFamily="34" charset="-122"/>
-                <a:cs typeface="Yu Gothic" pitchFamily="34" charset="-120"/>
-              </a:rPr>
-              <a:t>健診データを</a:t>
-            </a:r>
-            <a:endParaRPr lang="en-US" sz="3800" dirty="0"/>
-          </a:p>
-          <a:p>
-            <a:pPr indent="0" marL="0">
-              <a:lnSpc>
-                <a:spcPct val="125000"/>
-              </a:lnSpc>
-              <a:buNone/>
-            </a:pPr>
-            <a:r>
-              <a:rPr lang="en-US" sz="3800" b="1" dirty="0">
-                <a:solidFill>
-                  <a:srgbClr val="FFFFFF"/>
-                </a:solidFill>
-                <a:latin typeface="Yu Gothic" pitchFamily="34" charset="0"/>
-                <a:ea typeface="Yu Gothic" pitchFamily="34" charset="-122"/>
-                <a:cs typeface="Yu Gothic" pitchFamily="34" charset="-120"/>
-              </a:rPr>
-              <a:t>プライマリケアにどう活かすか</a:t>
-            </a:r>
-            <a:endParaRPr lang="en-US" sz="3800" dirty="0"/>
-          </a:p>
-        </p:txBody>
-      </p:sp>
-      <p:sp>
-        <p:nvSpPr>
-          <p:cNvPr id="5" name="Text 3"/>
-          <p:cNvSpPr/>
-          <p:nvPr/>
-        </p:nvSpPr>
-        <p:spPr>
-          <a:xfrm>
-            <a:off x="2286000" y="3931920"/>
-            <a:ext cx="9326880" cy="457200"/>
-          </a:xfrm>
-          <a:prstGeom prst="rect">
-            <a:avLst/>
-          </a:prstGeom>
-          <a:noFill/>
-          <a:ln/>
-        </p:spPr>
-        <p:txBody>
-          <a:bodyPr wrap="square" lIns="0" tIns="0" rIns="0" bIns="0" rtlCol="0" anchor="ctr"/>
-          <a:lstStyle/>
-          <a:p>
-            <a:pPr indent="0" marL="0">
-              <a:buNone/>
-            </a:pPr>
-            <a:r>
-              <a:rPr lang="en-US" sz="1800" dirty="0">
-                <a:solidFill>
-                  <a:srgbClr val="A8CFC9"/>
-                </a:solidFill>
-                <a:latin typeface="Yu Gothic" pitchFamily="34" charset="0"/>
-                <a:ea typeface="Yu Gothic" pitchFamily="34" charset="-122"/>
-                <a:cs typeface="Yu Gothic" pitchFamily="34" charset="-120"/>
-              </a:rPr>
-              <a:t>毎年集まっている特定健診データを、予防のための判断に変える</a:t>
-            </a:r>
-            <a:endParaRPr lang="en-US" sz="1800" dirty="0"/>
-          </a:p>
-        </p:txBody>
-      </p:sp>
-      <p:sp>
-        <p:nvSpPr>
-          <p:cNvPr id="6" name="Text 4"/>
-          <p:cNvSpPr/>
-          <p:nvPr/>
-        </p:nvSpPr>
-        <p:spPr>
-          <a:xfrm>
-            <a:off x="2286000" y="4892040"/>
-            <a:ext cx="9326880" cy="411480"/>
+          <p:cNvPr id="7" name="Text 5"/>
+          <p:cNvSpPr/>
+          <p:nvPr/>
+        </p:nvSpPr>
+        <p:spPr>
+          <a:xfrm>
+            <a:off x="1005840" y="2377440"/>
+            <a:ext cx="5120640" cy="274320"/>
+          </a:xfrm>
+          <a:prstGeom prst="rect">
+            <a:avLst/>
+          </a:prstGeom>
+          <a:noFill/>
+          <a:ln/>
+        </p:spPr>
+        <p:txBody>
+          <a:bodyPr wrap="square" lIns="0" tIns="0" rIns="0" bIns="0" rtlCol="0" anchor="ctr"/>
+          <a:lstStyle/>
+          <a:p>
+            <a:pPr indent="0" marL="0">
+              <a:buNone/>
+            </a:pPr>
+            <a:r>
+              <a:rPr lang="en-US" sz="1200" b="1" dirty="0">
+                <a:solidFill>
+                  <a:srgbClr val="D98A2B"/>
+                </a:solidFill>
+                <a:latin typeface="Yu Gothic" pitchFamily="34" charset="0"/>
+                <a:ea typeface="Yu Gothic" pitchFamily="34" charset="-122"/>
+                <a:cs typeface="Yu Gothic" pitchFamily="34" charset="-120"/>
+              </a:rPr>
+              <a:t>システム運用編 14 遵守事項⑤</a:t>
+            </a:r>
+            <a:endParaRPr lang="en-US" sz="1200" dirty="0"/>
+          </a:p>
+        </p:txBody>
+      </p:sp>
+      <p:sp>
+        <p:nvSpPr>
+          <p:cNvPr id="8" name="Text 6"/>
+          <p:cNvSpPr/>
+          <p:nvPr/>
+        </p:nvSpPr>
+        <p:spPr>
+          <a:xfrm>
+            <a:off x="1005840" y="2633472"/>
+            <a:ext cx="5120640" cy="329184"/>
           </a:xfrm>
           <a:prstGeom prst="rect">
             <a:avLst/>
@@ -2870,15 +3194,794 @@
             <a:r>
               <a:rPr lang="en-US" sz="1500" dirty="0">
                 <a:solidFill>
-                  <a:srgbClr val="FFFFFF"/>
-                </a:solidFill>
-                <a:latin typeface="Yu Gothic" pitchFamily="34" charset="0"/>
-                <a:ea typeface="Yu Gothic" pitchFamily="34" charset="-122"/>
-                <a:cs typeface="Yu Gothic" pitchFamily="34" charset="-120"/>
-              </a:rPr>
-              <a:t>事例：1年間のBRI変化と尿蛋白の新規発現（宮崎県延岡市 2020–2021年）</a:t>
+                  <a:srgbClr val="16211F"/>
+                </a:solidFill>
+                <a:latin typeface="Yu Gothic" pitchFamily="34" charset="0"/>
+                <a:ea typeface="Yu Gothic" pitchFamily="34" charset="-122"/>
+                <a:cs typeface="Yu Gothic" pitchFamily="34" charset="-120"/>
+              </a:rPr>
+              <a:t>令和9年4月までに二要素認証を採用</a:t>
             </a:r>
             <a:endParaRPr lang="en-US" sz="1500" dirty="0"/>
+          </a:p>
+        </p:txBody>
+      </p:sp>
+      <p:sp>
+        <p:nvSpPr>
+          <p:cNvPr id="9" name="Shape 7"/>
+          <p:cNvSpPr/>
+          <p:nvPr/>
+        </p:nvSpPr>
+        <p:spPr>
+          <a:xfrm>
+            <a:off x="6263640" y="2542032"/>
+            <a:ext cx="256032" cy="201168"/>
+          </a:xfrm>
+          <a:prstGeom prst="rightArrow">
+            <a:avLst/>
+          </a:prstGeom>
+          <a:solidFill>
+            <a:srgbClr val="A8CFC9"/>
+          </a:solidFill>
+          <a:ln w="12700">
+            <a:solidFill>
+              <a:srgbClr val="A8CFC9"/>
+            </a:solidFill>
+            <a:prstDash val="solid"/>
+          </a:ln>
+        </p:spPr>
+      </p:sp>
+      <p:sp>
+        <p:nvSpPr>
+          <p:cNvPr id="10" name="Text 8"/>
+          <p:cNvSpPr/>
+          <p:nvPr/>
+        </p:nvSpPr>
+        <p:spPr>
+          <a:xfrm>
+            <a:off x="6583680" y="2505456"/>
+            <a:ext cx="4754880" cy="384048"/>
+          </a:xfrm>
+          <a:prstGeom prst="rect">
+            <a:avLst/>
+          </a:prstGeom>
+          <a:noFill/>
+          <a:ln/>
+        </p:spPr>
+        <p:txBody>
+          <a:bodyPr wrap="square" lIns="0" tIns="0" rIns="0" bIns="0" rtlCol="0" anchor="ctr"/>
+          <a:lstStyle/>
+          <a:p>
+            <a:pPr indent="0" marL="0">
+              <a:buNone/>
+            </a:pPr>
+            <a:r>
+              <a:rPr lang="en-US" sz="1500" b="1" dirty="0">
+                <a:solidFill>
+                  <a:srgbClr val="14504B"/>
+                </a:solidFill>
+                <a:latin typeface="Yu Gothic" pitchFamily="34" charset="0"/>
+                <a:ea typeface="Yu Gothic" pitchFamily="34" charset="-122"/>
+                <a:cs typeface="Yu Gothic" pitchFamily="34" charset="-120"/>
+              </a:rPr>
+              <a:t>認証アプリの6桁（TOTP）</a:t>
+            </a:r>
+            <a:endParaRPr lang="en-US" sz="1500" dirty="0"/>
+          </a:p>
+        </p:txBody>
+      </p:sp>
+      <p:sp>
+        <p:nvSpPr>
+          <p:cNvPr id="11" name="Shape 9"/>
+          <p:cNvSpPr/>
+          <p:nvPr/>
+        </p:nvSpPr>
+        <p:spPr>
+          <a:xfrm>
+            <a:off x="731520" y="3072384"/>
+            <a:ext cx="10698480" cy="694944"/>
+          </a:xfrm>
+          <a:prstGeom prst="roundRect">
+            <a:avLst>
+              <a:gd name="adj" fmla="val 10526"/>
+            </a:avLst>
+          </a:prstGeom>
+          <a:solidFill>
+            <a:srgbClr val="FFFFFF"/>
+          </a:solidFill>
+          <a:ln w="12700">
+            <a:solidFill>
+              <a:srgbClr val="DCE6E4"/>
+            </a:solidFill>
+            <a:prstDash val="solid"/>
+          </a:ln>
+        </p:spPr>
+      </p:sp>
+      <p:sp>
+        <p:nvSpPr>
+          <p:cNvPr id="12" name="Text 10"/>
+          <p:cNvSpPr/>
+          <p:nvPr/>
+        </p:nvSpPr>
+        <p:spPr>
+          <a:xfrm>
+            <a:off x="1005840" y="3163824"/>
+            <a:ext cx="5120640" cy="274320"/>
+          </a:xfrm>
+          <a:prstGeom prst="rect">
+            <a:avLst/>
+          </a:prstGeom>
+          <a:noFill/>
+          <a:ln/>
+        </p:spPr>
+        <p:txBody>
+          <a:bodyPr wrap="square" lIns="0" tIns="0" rIns="0" bIns="0" rtlCol="0" anchor="ctr"/>
+          <a:lstStyle/>
+          <a:p>
+            <a:pPr indent="0" marL="0">
+              <a:buNone/>
+            </a:pPr>
+            <a:r>
+              <a:rPr lang="en-US" sz="1200" b="1" dirty="0">
+                <a:solidFill>
+                  <a:srgbClr val="D98A2B"/>
+                </a:solidFill>
+                <a:latin typeface="Yu Gothic" pitchFamily="34" charset="0"/>
+                <a:ea typeface="Yu Gothic" pitchFamily="34" charset="-122"/>
+                <a:cs typeface="Yu Gothic" pitchFamily="34" charset="-120"/>
+              </a:rPr>
+              <a:t>同 14.2</a:t>
+            </a:r>
+            <a:endParaRPr lang="en-US" sz="1200" dirty="0"/>
+          </a:p>
+        </p:txBody>
+      </p:sp>
+      <p:sp>
+        <p:nvSpPr>
+          <p:cNvPr id="13" name="Text 11"/>
+          <p:cNvSpPr/>
+          <p:nvPr/>
+        </p:nvSpPr>
+        <p:spPr>
+          <a:xfrm>
+            <a:off x="1005840" y="3419856"/>
+            <a:ext cx="5120640" cy="329184"/>
+          </a:xfrm>
+          <a:prstGeom prst="rect">
+            <a:avLst/>
+          </a:prstGeom>
+          <a:noFill/>
+          <a:ln/>
+        </p:spPr>
+        <p:txBody>
+          <a:bodyPr wrap="square" lIns="0" tIns="0" rIns="0" bIns="0" rtlCol="0" anchor="ctr"/>
+          <a:lstStyle/>
+          <a:p>
+            <a:pPr indent="0" marL="0">
+              <a:buNone/>
+            </a:pPr>
+            <a:r>
+              <a:rPr lang="en-US" sz="1500" dirty="0">
+                <a:solidFill>
+                  <a:srgbClr val="16211F"/>
+                </a:solidFill>
+                <a:latin typeface="Yu Gothic" pitchFamily="34" charset="0"/>
+                <a:ea typeface="Yu Gothic" pitchFamily="34" charset="-122"/>
+                <a:cs typeface="Yu Gothic" pitchFamily="34" charset="-120"/>
+              </a:rPr>
+              <a:t>アクセス権限は必要最小限に</a:t>
+            </a:r>
+            <a:endParaRPr lang="en-US" sz="1500" dirty="0"/>
+          </a:p>
+        </p:txBody>
+      </p:sp>
+      <p:sp>
+        <p:nvSpPr>
+          <p:cNvPr id="14" name="Shape 12"/>
+          <p:cNvSpPr/>
+          <p:nvPr/>
+        </p:nvSpPr>
+        <p:spPr>
+          <a:xfrm>
+            <a:off x="6263640" y="3328416"/>
+            <a:ext cx="256032" cy="201168"/>
+          </a:xfrm>
+          <a:prstGeom prst="rightArrow">
+            <a:avLst/>
+          </a:prstGeom>
+          <a:solidFill>
+            <a:srgbClr val="A8CFC9"/>
+          </a:solidFill>
+          <a:ln w="12700">
+            <a:solidFill>
+              <a:srgbClr val="A8CFC9"/>
+            </a:solidFill>
+            <a:prstDash val="solid"/>
+          </a:ln>
+        </p:spPr>
+      </p:sp>
+      <p:sp>
+        <p:nvSpPr>
+          <p:cNvPr id="15" name="Text 13"/>
+          <p:cNvSpPr/>
+          <p:nvPr/>
+        </p:nvSpPr>
+        <p:spPr>
+          <a:xfrm>
+            <a:off x="6583680" y="3291840"/>
+            <a:ext cx="4754880" cy="384048"/>
+          </a:xfrm>
+          <a:prstGeom prst="rect">
+            <a:avLst/>
+          </a:prstGeom>
+          <a:noFill/>
+          <a:ln/>
+        </p:spPr>
+        <p:txBody>
+          <a:bodyPr wrap="square" lIns="0" tIns="0" rIns="0" bIns="0" rtlCol="0" anchor="ctr"/>
+          <a:lstStyle/>
+          <a:p>
+            <a:pPr indent="0" marL="0">
+              <a:buNone/>
+            </a:pPr>
+            <a:r>
+              <a:rPr lang="en-US" sz="1500" b="1" dirty="0">
+                <a:solidFill>
+                  <a:srgbClr val="14504B"/>
+                </a:solidFill>
+                <a:latin typeface="Yu Gothic" pitchFamily="34" charset="0"/>
+                <a:ea typeface="Yu Gothic" pitchFamily="34" charset="-122"/>
+                <a:cs typeface="Yu Gothic" pitchFamily="34" charset="-120"/>
+              </a:rPr>
+              <a:t>Firestoreルールで施設・ロール単位に分離</a:t>
+            </a:r>
+            <a:endParaRPr lang="en-US" sz="1500" dirty="0"/>
+          </a:p>
+        </p:txBody>
+      </p:sp>
+      <p:sp>
+        <p:nvSpPr>
+          <p:cNvPr id="16" name="Shape 14"/>
+          <p:cNvSpPr/>
+          <p:nvPr/>
+        </p:nvSpPr>
+        <p:spPr>
+          <a:xfrm>
+            <a:off x="731520" y="3858768"/>
+            <a:ext cx="10698480" cy="694944"/>
+          </a:xfrm>
+          <a:prstGeom prst="roundRect">
+            <a:avLst>
+              <a:gd name="adj" fmla="val 10526"/>
+            </a:avLst>
+          </a:prstGeom>
+          <a:solidFill>
+            <a:srgbClr val="F1F6F5"/>
+          </a:solidFill>
+          <a:ln w="12700">
+            <a:solidFill>
+              <a:srgbClr val="DCE6E4"/>
+            </a:solidFill>
+            <a:prstDash val="solid"/>
+          </a:ln>
+        </p:spPr>
+      </p:sp>
+      <p:sp>
+        <p:nvSpPr>
+          <p:cNvPr id="17" name="Text 15"/>
+          <p:cNvSpPr/>
+          <p:nvPr/>
+        </p:nvSpPr>
+        <p:spPr>
+          <a:xfrm>
+            <a:off x="1005840" y="3950208"/>
+            <a:ext cx="5120640" cy="274320"/>
+          </a:xfrm>
+          <a:prstGeom prst="rect">
+            <a:avLst/>
+          </a:prstGeom>
+          <a:noFill/>
+          <a:ln/>
+        </p:spPr>
+        <p:txBody>
+          <a:bodyPr wrap="square" lIns="0" tIns="0" rIns="0" bIns="0" rtlCol="0" anchor="ctr"/>
+          <a:lstStyle/>
+          <a:p>
+            <a:pPr indent="0" marL="0">
+              <a:buNone/>
+            </a:pPr>
+            <a:r>
+              <a:rPr lang="en-US" sz="1200" b="1" dirty="0">
+                <a:solidFill>
+                  <a:srgbClr val="D98A2B"/>
+                </a:solidFill>
+                <a:latin typeface="Yu Gothic" pitchFamily="34" charset="0"/>
+                <a:ea typeface="Yu Gothic" pitchFamily="34" charset="-122"/>
+                <a:cs typeface="Yu Gothic" pitchFamily="34" charset="-120"/>
+              </a:rPr>
+              <a:t>同 17①</a:t>
+            </a:r>
+            <a:endParaRPr lang="en-US" sz="1200" dirty="0"/>
+          </a:p>
+        </p:txBody>
+      </p:sp>
+      <p:sp>
+        <p:nvSpPr>
+          <p:cNvPr id="18" name="Text 16"/>
+          <p:cNvSpPr/>
+          <p:nvPr/>
+        </p:nvSpPr>
+        <p:spPr>
+          <a:xfrm>
+            <a:off x="1005840" y="4206240"/>
+            <a:ext cx="5120640" cy="329184"/>
+          </a:xfrm>
+          <a:prstGeom prst="rect">
+            <a:avLst/>
+          </a:prstGeom>
+          <a:noFill/>
+          <a:ln/>
+        </p:spPr>
+        <p:txBody>
+          <a:bodyPr wrap="square" lIns="0" tIns="0" rIns="0" bIns="0" rtlCol="0" anchor="ctr"/>
+          <a:lstStyle/>
+          <a:p>
+            <a:pPr indent="0" marL="0">
+              <a:buNone/>
+            </a:pPr>
+            <a:r>
+              <a:rPr lang="en-US" sz="1500" dirty="0">
+                <a:solidFill>
+                  <a:srgbClr val="16211F"/>
+                </a:solidFill>
+                <a:latin typeface="Yu Gothic" pitchFamily="34" charset="0"/>
+                <a:ea typeface="Yu Gothic" pitchFamily="34" charset="-122"/>
+                <a:cs typeface="Yu Gothic" pitchFamily="34" charset="-120"/>
+              </a:rPr>
+              <a:t>誰がいつ何を見たかを残す</a:t>
+            </a:r>
+            <a:endParaRPr lang="en-US" sz="1500" dirty="0"/>
+          </a:p>
+        </p:txBody>
+      </p:sp>
+      <p:sp>
+        <p:nvSpPr>
+          <p:cNvPr id="19" name="Shape 17"/>
+          <p:cNvSpPr/>
+          <p:nvPr/>
+        </p:nvSpPr>
+        <p:spPr>
+          <a:xfrm>
+            <a:off x="6263640" y="4114800"/>
+            <a:ext cx="256032" cy="201168"/>
+          </a:xfrm>
+          <a:prstGeom prst="rightArrow">
+            <a:avLst/>
+          </a:prstGeom>
+          <a:solidFill>
+            <a:srgbClr val="A8CFC9"/>
+          </a:solidFill>
+          <a:ln w="12700">
+            <a:solidFill>
+              <a:srgbClr val="A8CFC9"/>
+            </a:solidFill>
+            <a:prstDash val="solid"/>
+          </a:ln>
+        </p:spPr>
+      </p:sp>
+      <p:sp>
+        <p:nvSpPr>
+          <p:cNvPr id="20" name="Text 18"/>
+          <p:cNvSpPr/>
+          <p:nvPr/>
+        </p:nvSpPr>
+        <p:spPr>
+          <a:xfrm>
+            <a:off x="6583680" y="4078224"/>
+            <a:ext cx="4754880" cy="384048"/>
+          </a:xfrm>
+          <a:prstGeom prst="rect">
+            <a:avLst/>
+          </a:prstGeom>
+          <a:noFill/>
+          <a:ln/>
+        </p:spPr>
+        <p:txBody>
+          <a:bodyPr wrap="square" lIns="0" tIns="0" rIns="0" bIns="0" rtlCol="0" anchor="ctr"/>
+          <a:lstStyle/>
+          <a:p>
+            <a:pPr indent="0" marL="0">
+              <a:buNone/>
+            </a:pPr>
+            <a:r>
+              <a:rPr lang="en-US" sz="1500" b="1" dirty="0">
+                <a:solidFill>
+                  <a:srgbClr val="14504B"/>
+                </a:solidFill>
+                <a:latin typeface="Yu Gothic" pitchFamily="34" charset="0"/>
+                <a:ea typeface="Yu Gothic" pitchFamily="34" charset="-122"/>
+                <a:cs typeface="Yu Gothic" pitchFamily="34" charset="-120"/>
+              </a:rPr>
+              <a:t>監査ログ。変更は前後の値まで記録</a:t>
+            </a:r>
+            <a:endParaRPr lang="en-US" sz="1500" dirty="0"/>
+          </a:p>
+        </p:txBody>
+      </p:sp>
+      <p:sp>
+        <p:nvSpPr>
+          <p:cNvPr id="21" name="Shape 19"/>
+          <p:cNvSpPr/>
+          <p:nvPr/>
+        </p:nvSpPr>
+        <p:spPr>
+          <a:xfrm>
+            <a:off x="731520" y="4645152"/>
+            <a:ext cx="10698480" cy="694944"/>
+          </a:xfrm>
+          <a:prstGeom prst="roundRect">
+            <a:avLst>
+              <a:gd name="adj" fmla="val 10526"/>
+            </a:avLst>
+          </a:prstGeom>
+          <a:solidFill>
+            <a:srgbClr val="FFFFFF"/>
+          </a:solidFill>
+          <a:ln w="12700">
+            <a:solidFill>
+              <a:srgbClr val="DCE6E4"/>
+            </a:solidFill>
+            <a:prstDash val="solid"/>
+          </a:ln>
+        </p:spPr>
+      </p:sp>
+      <p:sp>
+        <p:nvSpPr>
+          <p:cNvPr id="22" name="Text 20"/>
+          <p:cNvSpPr/>
+          <p:nvPr/>
+        </p:nvSpPr>
+        <p:spPr>
+          <a:xfrm>
+            <a:off x="1005840" y="4736592"/>
+            <a:ext cx="5120640" cy="274320"/>
+          </a:xfrm>
+          <a:prstGeom prst="rect">
+            <a:avLst/>
+          </a:prstGeom>
+          <a:noFill/>
+          <a:ln/>
+        </p:spPr>
+        <p:txBody>
+          <a:bodyPr wrap="square" lIns="0" tIns="0" rIns="0" bIns="0" rtlCol="0" anchor="ctr"/>
+          <a:lstStyle/>
+          <a:p>
+            <a:pPr indent="0" marL="0">
+              <a:buNone/>
+            </a:pPr>
+            <a:r>
+              <a:rPr lang="en-US" sz="1200" b="1" dirty="0">
+                <a:solidFill>
+                  <a:srgbClr val="D98A2B"/>
+                </a:solidFill>
+                <a:latin typeface="Yu Gothic" pitchFamily="34" charset="0"/>
+                <a:ea typeface="Yu Gothic" pitchFamily="34" charset="-122"/>
+                <a:cs typeface="Yu Gothic" pitchFamily="34" charset="-120"/>
+              </a:rPr>
+              <a:t>同 17②③</a:t>
+            </a:r>
+            <a:endParaRPr lang="en-US" sz="1200" dirty="0"/>
+          </a:p>
+        </p:txBody>
+      </p:sp>
+      <p:sp>
+        <p:nvSpPr>
+          <p:cNvPr id="23" name="Text 21"/>
+          <p:cNvSpPr/>
+          <p:nvPr/>
+        </p:nvSpPr>
+        <p:spPr>
+          <a:xfrm>
+            <a:off x="1005840" y="4992624"/>
+            <a:ext cx="5120640" cy="329184"/>
+          </a:xfrm>
+          <a:prstGeom prst="rect">
+            <a:avLst/>
+          </a:prstGeom>
+          <a:noFill/>
+          <a:ln/>
+        </p:spPr>
+        <p:txBody>
+          <a:bodyPr wrap="square" lIns="0" tIns="0" rIns="0" bIns="0" rtlCol="0" anchor="ctr"/>
+          <a:lstStyle/>
+          <a:p>
+            <a:pPr indent="0" marL="0">
+              <a:buNone/>
+            </a:pPr>
+            <a:r>
+              <a:rPr lang="en-US" sz="1500" dirty="0">
+                <a:solidFill>
+                  <a:srgbClr val="16211F"/>
+                </a:solidFill>
+                <a:latin typeface="Yu Gothic" pitchFamily="34" charset="0"/>
+                <a:ea typeface="Yu Gothic" pitchFamily="34" charset="-122"/>
+                <a:cs typeface="Yu Gothic" pitchFamily="34" charset="-120"/>
+              </a:rPr>
+              <a:t>ログの改ざんを防ぐ</a:t>
+            </a:r>
+            <a:endParaRPr lang="en-US" sz="1500" dirty="0"/>
+          </a:p>
+        </p:txBody>
+      </p:sp>
+      <p:sp>
+        <p:nvSpPr>
+          <p:cNvPr id="24" name="Shape 22"/>
+          <p:cNvSpPr/>
+          <p:nvPr/>
+        </p:nvSpPr>
+        <p:spPr>
+          <a:xfrm>
+            <a:off x="6263640" y="4901184"/>
+            <a:ext cx="256032" cy="201168"/>
+          </a:xfrm>
+          <a:prstGeom prst="rightArrow">
+            <a:avLst/>
+          </a:prstGeom>
+          <a:solidFill>
+            <a:srgbClr val="A8CFC9"/>
+          </a:solidFill>
+          <a:ln w="12700">
+            <a:solidFill>
+              <a:srgbClr val="A8CFC9"/>
+            </a:solidFill>
+            <a:prstDash val="solid"/>
+          </a:ln>
+        </p:spPr>
+      </p:sp>
+      <p:sp>
+        <p:nvSpPr>
+          <p:cNvPr id="25" name="Text 23"/>
+          <p:cNvSpPr/>
+          <p:nvPr/>
+        </p:nvSpPr>
+        <p:spPr>
+          <a:xfrm>
+            <a:off x="6583680" y="4864608"/>
+            <a:ext cx="4754880" cy="384048"/>
+          </a:xfrm>
+          <a:prstGeom prst="rect">
+            <a:avLst/>
+          </a:prstGeom>
+          <a:noFill/>
+          <a:ln/>
+        </p:spPr>
+        <p:txBody>
+          <a:bodyPr wrap="square" lIns="0" tIns="0" rIns="0" bIns="0" rtlCol="0" anchor="ctr"/>
+          <a:lstStyle/>
+          <a:p>
+            <a:pPr indent="0" marL="0">
+              <a:buNone/>
+            </a:pPr>
+            <a:r>
+              <a:rPr lang="en-US" sz="1500" b="1" dirty="0">
+                <a:solidFill>
+                  <a:srgbClr val="14504B"/>
+                </a:solidFill>
+                <a:latin typeface="Yu Gothic" pitchFamily="34" charset="0"/>
+                <a:ea typeface="Yu Gothic" pitchFamily="34" charset="-122"/>
+                <a:cs typeface="Yu Gothic" pitchFamily="34" charset="-120"/>
+              </a:rPr>
+              <a:t>追記のみ。更新と削除を禁止</a:t>
+            </a:r>
+            <a:endParaRPr lang="en-US" sz="1500" dirty="0"/>
+          </a:p>
+        </p:txBody>
+      </p:sp>
+      <p:sp>
+        <p:nvSpPr>
+          <p:cNvPr id="26" name="Shape 24"/>
+          <p:cNvSpPr/>
+          <p:nvPr/>
+        </p:nvSpPr>
+        <p:spPr>
+          <a:xfrm>
+            <a:off x="731520" y="5431536"/>
+            <a:ext cx="10698480" cy="694944"/>
+          </a:xfrm>
+          <a:prstGeom prst="roundRect">
+            <a:avLst>
+              <a:gd name="adj" fmla="val 10526"/>
+            </a:avLst>
+          </a:prstGeom>
+          <a:solidFill>
+            <a:srgbClr val="F1F6F5"/>
+          </a:solidFill>
+          <a:ln w="12700">
+            <a:solidFill>
+              <a:srgbClr val="DCE6E4"/>
+            </a:solidFill>
+            <a:prstDash val="solid"/>
+          </a:ln>
+        </p:spPr>
+      </p:sp>
+      <p:sp>
+        <p:nvSpPr>
+          <p:cNvPr id="27" name="Text 25"/>
+          <p:cNvSpPr/>
+          <p:nvPr/>
+        </p:nvSpPr>
+        <p:spPr>
+          <a:xfrm>
+            <a:off x="1005840" y="5522976"/>
+            <a:ext cx="5120640" cy="274320"/>
+          </a:xfrm>
+          <a:prstGeom prst="rect">
+            <a:avLst/>
+          </a:prstGeom>
+          <a:noFill/>
+          <a:ln/>
+        </p:spPr>
+        <p:txBody>
+          <a:bodyPr wrap="square" lIns="0" tIns="0" rIns="0" bIns="0" rtlCol="0" anchor="ctr"/>
+          <a:lstStyle/>
+          <a:p>
+            <a:pPr indent="0" marL="0">
+              <a:buNone/>
+            </a:pPr>
+            <a:r>
+              <a:rPr lang="en-US" sz="1200" b="1" dirty="0">
+                <a:solidFill>
+                  <a:srgbClr val="D98A2B"/>
+                </a:solidFill>
+                <a:latin typeface="Yu Gothic" pitchFamily="34" charset="0"/>
+                <a:ea typeface="Yu Gothic" pitchFamily="34" charset="-122"/>
+                <a:cs typeface="Yu Gothic" pitchFamily="34" charset="-120"/>
+              </a:rPr>
+              <a:t>同 12.3.2</a:t>
+            </a:r>
+            <a:endParaRPr lang="en-US" sz="1200" dirty="0"/>
+          </a:p>
+        </p:txBody>
+      </p:sp>
+      <p:sp>
+        <p:nvSpPr>
+          <p:cNvPr id="28" name="Text 26"/>
+          <p:cNvSpPr/>
+          <p:nvPr/>
+        </p:nvSpPr>
+        <p:spPr>
+          <a:xfrm>
+            <a:off x="1005840" y="5779008"/>
+            <a:ext cx="5120640" cy="329184"/>
+          </a:xfrm>
+          <a:prstGeom prst="rect">
+            <a:avLst/>
+          </a:prstGeom>
+          <a:noFill/>
+          <a:ln/>
+        </p:spPr>
+        <p:txBody>
+          <a:bodyPr wrap="square" lIns="0" tIns="0" rIns="0" bIns="0" rtlCol="0" anchor="ctr"/>
+          <a:lstStyle/>
+          <a:p>
+            <a:pPr indent="0" marL="0">
+              <a:buNone/>
+            </a:pPr>
+            <a:r>
+              <a:rPr lang="en-US" sz="1500" dirty="0">
+                <a:solidFill>
+                  <a:srgbClr val="16211F"/>
+                </a:solidFill>
+                <a:latin typeface="Yu Gothic" pitchFamily="34" charset="0"/>
+                <a:ea typeface="Yu Gothic" pitchFamily="34" charset="-122"/>
+                <a:cs typeface="Yu Gothic" pitchFamily="34" charset="-120"/>
+              </a:rPr>
+              <a:t>離席時に画面をロックする</a:t>
+            </a:r>
+            <a:endParaRPr lang="en-US" sz="1500" dirty="0"/>
+          </a:p>
+        </p:txBody>
+      </p:sp>
+      <p:sp>
+        <p:nvSpPr>
+          <p:cNvPr id="29" name="Shape 27"/>
+          <p:cNvSpPr/>
+          <p:nvPr/>
+        </p:nvSpPr>
+        <p:spPr>
+          <a:xfrm>
+            <a:off x="6263640" y="5687568"/>
+            <a:ext cx="256032" cy="201168"/>
+          </a:xfrm>
+          <a:prstGeom prst="rightArrow">
+            <a:avLst/>
+          </a:prstGeom>
+          <a:solidFill>
+            <a:srgbClr val="A8CFC9"/>
+          </a:solidFill>
+          <a:ln w="12700">
+            <a:solidFill>
+              <a:srgbClr val="A8CFC9"/>
+            </a:solidFill>
+            <a:prstDash val="solid"/>
+          </a:ln>
+        </p:spPr>
+      </p:sp>
+      <p:sp>
+        <p:nvSpPr>
+          <p:cNvPr id="30" name="Text 28"/>
+          <p:cNvSpPr/>
+          <p:nvPr/>
+        </p:nvSpPr>
+        <p:spPr>
+          <a:xfrm>
+            <a:off x="6583680" y="5650992"/>
+            <a:ext cx="4754880" cy="384048"/>
+          </a:xfrm>
+          <a:prstGeom prst="rect">
+            <a:avLst/>
+          </a:prstGeom>
+          <a:noFill/>
+          <a:ln/>
+        </p:spPr>
+        <p:txBody>
+          <a:bodyPr wrap="square" lIns="0" tIns="0" rIns="0" bIns="0" rtlCol="0" anchor="ctr"/>
+          <a:lstStyle/>
+          <a:p>
+            <a:pPr indent="0" marL="0">
+              <a:buNone/>
+            </a:pPr>
+            <a:r>
+              <a:rPr lang="en-US" sz="1500" b="1" dirty="0">
+                <a:solidFill>
+                  <a:srgbClr val="14504B"/>
+                </a:solidFill>
+                <a:latin typeface="Yu Gothic" pitchFamily="34" charset="0"/>
+                <a:ea typeface="Yu Gothic" pitchFamily="34" charset="-122"/>
+                <a:cs typeface="Yu Gothic" pitchFamily="34" charset="-120"/>
+              </a:rPr>
+              <a:t>15分の無操作で自動サインアウト</a:t>
+            </a:r>
+            <a:endParaRPr lang="en-US" sz="1500" dirty="0"/>
+          </a:p>
+        </p:txBody>
+      </p:sp>
+      <p:sp>
+        <p:nvSpPr>
+          <p:cNvPr id="31" name="Text 29"/>
+          <p:cNvSpPr/>
+          <p:nvPr/>
+        </p:nvSpPr>
+        <p:spPr>
+          <a:xfrm>
+            <a:off x="731520" y="6355080"/>
+            <a:ext cx="10698480" cy="365760"/>
+          </a:xfrm>
+          <a:prstGeom prst="rect">
+            <a:avLst/>
+          </a:prstGeom>
+          <a:noFill/>
+          <a:ln/>
+        </p:spPr>
+        <p:txBody>
+          <a:bodyPr wrap="square" lIns="0" tIns="0" rIns="0" bIns="0" rtlCol="0" anchor="ctr"/>
+          <a:lstStyle/>
+          <a:p>
+            <a:pPr indent="0" marL="0">
+              <a:buNone/>
+            </a:pPr>
+            <a:r>
+              <a:rPr lang="en-US" sz="1300" i="1" dirty="0">
+                <a:solidFill>
+                  <a:srgbClr val="5C6B68"/>
+                </a:solidFill>
+                <a:latin typeface="Yu Gothic" pitchFamily="34" charset="0"/>
+                <a:ea typeface="Yu Gothic" pitchFamily="34" charset="-122"/>
+                <a:cs typeface="Yu Gothic" pitchFamily="34" charset="-120"/>
+              </a:rPr>
+              <a:t>※ 二要素認証は新規アカウントで登録必須にしています。既存の利用者は締め出さず、案内から順に移行します。</a:t>
+            </a:r>
+            <a:endParaRPr lang="en-US" sz="1300" dirty="0"/>
           </a:p>
         </p:txBody>
       </p:sp>
@@ -2947,7 +4050,7 @@
                 <a:ea typeface="Yu Gothic" pitchFamily="34" charset="-122"/>
                 <a:cs typeface="Yu Gothic" pitchFamily="34" charset="-120"/>
               </a:rPr>
-              <a:t>特定健診は、毎年とられている</a:t>
+              <a:t>提供者として直接問われる要求</a:t>
             </a:r>
             <a:endParaRPr lang="en-US" sz="3600" dirty="0"/>
           </a:p>
@@ -2955,18 +4058,135 @@
       </p:sp>
       <p:sp>
         <p:nvSpPr>
-          <p:cNvPr id="3" name="Shape 1"/>
-          <p:cNvSpPr/>
-          <p:nvPr/>
-        </p:nvSpPr>
-        <p:spPr>
-          <a:xfrm>
-            <a:off x="731520" y="1965960"/>
-            <a:ext cx="2103120" cy="1554480"/>
+          <p:cNvPr id="3" name="Text 1"/>
+          <p:cNvSpPr/>
+          <p:nvPr/>
+        </p:nvSpPr>
+        <p:spPr>
+          <a:xfrm>
+            <a:off x="731520" y="1225296"/>
+            <a:ext cx="10698480" cy="411480"/>
+          </a:xfrm>
+          <a:prstGeom prst="rect">
+            <a:avLst/>
+          </a:prstGeom>
+          <a:noFill/>
+          <a:ln/>
+        </p:spPr>
+        <p:txBody>
+          <a:bodyPr wrap="square" lIns="0" tIns="0" rIns="0" bIns="0" rtlCol="0" anchor="ctr"/>
+          <a:lstStyle/>
+          <a:p>
+            <a:pPr indent="0" marL="0">
+              <a:buNone/>
+            </a:pPr>
+            <a:r>
+              <a:rPr lang="en-US" sz="1600" dirty="0">
+                <a:solidFill>
+                  <a:srgbClr val="5C6B68"/>
+                </a:solidFill>
+                <a:latin typeface="Yu Gothic" pitchFamily="34" charset="0"/>
+                <a:ea typeface="Yu Gothic" pitchFamily="34" charset="-122"/>
+                <a:cs typeface="Yu Gothic" pitchFamily="34" charset="-120"/>
+              </a:rPr>
+              <a:t>医療情報を取り扱う情報システム・サービスの提供事業者における安全管理ガイドライン 第2.0版</a:t>
+            </a:r>
+            <a:endParaRPr lang="en-US" sz="1600" dirty="0"/>
+          </a:p>
+        </p:txBody>
+      </p:sp>
+      <p:sp>
+        <p:nvSpPr>
+          <p:cNvPr id="4" name="Text 2"/>
+          <p:cNvSpPr/>
+          <p:nvPr/>
+        </p:nvSpPr>
+        <p:spPr>
+          <a:xfrm>
+            <a:off x="1005840" y="1874520"/>
+            <a:ext cx="5120640" cy="320040"/>
+          </a:xfrm>
+          <a:prstGeom prst="rect">
+            <a:avLst/>
+          </a:prstGeom>
+          <a:noFill/>
+          <a:ln/>
+        </p:spPr>
+        <p:txBody>
+          <a:bodyPr wrap="square" lIns="0" tIns="0" rIns="0" bIns="0" rtlCol="0" anchor="ctr"/>
+          <a:lstStyle/>
+          <a:p>
+            <a:pPr indent="0" marL="0">
+              <a:buNone/>
+            </a:pPr>
+            <a:r>
+              <a:rPr lang="en-US" sz="1300" b="1" dirty="0">
+                <a:solidFill>
+                  <a:srgbClr val="5C6B68"/>
+                </a:solidFill>
+                <a:latin typeface="Yu Gothic" pitchFamily="34" charset="0"/>
+                <a:ea typeface="Yu Gothic" pitchFamily="34" charset="-122"/>
+                <a:cs typeface="Yu Gothic" pitchFamily="34" charset="-120"/>
+              </a:rPr>
+              <a:t>ガイドラインが求めていること</a:t>
+            </a:r>
+            <a:endParaRPr lang="en-US" sz="1300" dirty="0"/>
+          </a:p>
+        </p:txBody>
+      </p:sp>
+      <p:sp>
+        <p:nvSpPr>
+          <p:cNvPr id="5" name="Text 3"/>
+          <p:cNvSpPr/>
+          <p:nvPr/>
+        </p:nvSpPr>
+        <p:spPr>
+          <a:xfrm>
+            <a:off x="6583680" y="1874520"/>
+            <a:ext cx="4846320" cy="320040"/>
+          </a:xfrm>
+          <a:prstGeom prst="rect">
+            <a:avLst/>
+          </a:prstGeom>
+          <a:noFill/>
+          <a:ln/>
+        </p:spPr>
+        <p:txBody>
+          <a:bodyPr wrap="square" lIns="0" tIns="0" rIns="0" bIns="0" rtlCol="0" anchor="ctr"/>
+          <a:lstStyle/>
+          <a:p>
+            <a:pPr indent="0" marL="0">
+              <a:buNone/>
+            </a:pPr>
+            <a:r>
+              <a:rPr lang="en-US" sz="1300" b="1" dirty="0">
+                <a:solidFill>
+                  <a:srgbClr val="5C6B68"/>
+                </a:solidFill>
+                <a:latin typeface="Yu Gothic" pitchFamily="34" charset="0"/>
+                <a:ea typeface="Yu Gothic" pitchFamily="34" charset="-122"/>
+                <a:cs typeface="Yu Gothic" pitchFamily="34" charset="-120"/>
+              </a:rPr>
+              <a:t>実装</a:t>
+            </a:r>
+            <a:endParaRPr lang="en-US" sz="1300" dirty="0"/>
+          </a:p>
+        </p:txBody>
+      </p:sp>
+      <p:sp>
+        <p:nvSpPr>
+          <p:cNvPr id="6" name="Shape 4"/>
+          <p:cNvSpPr/>
+          <p:nvPr/>
+        </p:nvSpPr>
+        <p:spPr>
+          <a:xfrm>
+            <a:off x="731520" y="2286000"/>
+            <a:ext cx="10698480" cy="694944"/>
           </a:xfrm>
           <a:prstGeom prst="roundRect">
             <a:avLst>
-              <a:gd name="adj" fmla="val 4706"/>
+              <a:gd name="adj" fmla="val 10526"/>
             </a:avLst>
           </a:prstGeom>
           <a:solidFill>
@@ -2974,7 +4194,7 @@
           </a:solidFill>
           <a:ln w="12700">
             <a:solidFill>
-              <a:srgbClr val="F1F6F5"/>
+              <a:srgbClr val="DCE6E4"/>
             </a:solidFill>
             <a:prstDash val="solid"/>
           </a:ln>
@@ -2982,92 +4202,92 @@
       </p:sp>
       <p:sp>
         <p:nvSpPr>
-          <p:cNvPr id="4" name="Text 2"/>
-          <p:cNvSpPr/>
-          <p:nvPr/>
-        </p:nvSpPr>
-        <p:spPr>
-          <a:xfrm>
-            <a:off x="777240" y="2194560"/>
-            <a:ext cx="2011680" cy="365760"/>
-          </a:xfrm>
-          <a:prstGeom prst="rect">
-            <a:avLst/>
-          </a:prstGeom>
-          <a:noFill/>
-          <a:ln/>
-        </p:spPr>
-        <p:txBody>
-          <a:bodyPr wrap="square" lIns="0" tIns="0" rIns="0" bIns="0" rtlCol="0" anchor="ctr"/>
-          <a:lstStyle/>
-          <a:p>
-            <a:pPr algn="ctr" indent="0" marL="0">
-              <a:buNone/>
-            </a:pPr>
-            <a:r>
-              <a:rPr lang="en-US" sz="1700" b="1" dirty="0">
-                <a:solidFill>
-                  <a:srgbClr val="14504B"/>
-                </a:solidFill>
-                <a:latin typeface="Yu Gothic" pitchFamily="34" charset="0"/>
-                <a:ea typeface="Yu Gothic" pitchFamily="34" charset="-122"/>
-                <a:cs typeface="Yu Gothic" pitchFamily="34" charset="-120"/>
-              </a:rPr>
-              <a:t>受ける</a:t>
-            </a:r>
-            <a:endParaRPr lang="en-US" sz="1700" dirty="0"/>
-          </a:p>
-        </p:txBody>
-      </p:sp>
-      <p:sp>
-        <p:nvSpPr>
-          <p:cNvPr id="5" name="Text 3"/>
-          <p:cNvSpPr/>
-          <p:nvPr/>
-        </p:nvSpPr>
-        <p:spPr>
-          <a:xfrm>
-            <a:off x="777240" y="2651760"/>
-            <a:ext cx="2011680" cy="640080"/>
-          </a:xfrm>
-          <a:prstGeom prst="rect">
-            <a:avLst/>
-          </a:prstGeom>
-          <a:noFill/>
-          <a:ln/>
-        </p:spPr>
-        <p:txBody>
-          <a:bodyPr wrap="square" lIns="0" tIns="0" rIns="0" bIns="0" rtlCol="0" anchor="ctr"/>
-          <a:lstStyle/>
-          <a:p>
-            <a:pPr algn="ctr" indent="0" marL="0">
-              <a:buNone/>
-            </a:pPr>
-            <a:r>
-              <a:rPr lang="en-US" sz="1300" dirty="0">
-                <a:solidFill>
-                  <a:srgbClr val="5C6B68"/>
-                </a:solidFill>
-                <a:latin typeface="Yu Gothic" pitchFamily="34" charset="0"/>
-                <a:ea typeface="Yu Gothic" pitchFamily="34" charset="-122"/>
-                <a:cs typeface="Yu Gothic" pitchFamily="34" charset="-120"/>
-              </a:rPr>
-              <a:t>腹囲・血圧・血液検査</a:t>
-            </a:r>
-            <a:endParaRPr lang="en-US" sz="1300" dirty="0"/>
-          </a:p>
-        </p:txBody>
-      </p:sp>
-      <p:sp>
-        <p:nvSpPr>
-          <p:cNvPr id="6" name="Shape 4"/>
-          <p:cNvSpPr/>
-          <p:nvPr/>
-        </p:nvSpPr>
-        <p:spPr>
-          <a:xfrm>
-            <a:off x="2871216" y="2670048"/>
-            <a:ext cx="201168" cy="237744"/>
+          <p:cNvPr id="7" name="Text 5"/>
+          <p:cNvSpPr/>
+          <p:nvPr/>
+        </p:nvSpPr>
+        <p:spPr>
+          <a:xfrm>
+            <a:off x="1005840" y="2377440"/>
+            <a:ext cx="5120640" cy="274320"/>
+          </a:xfrm>
+          <a:prstGeom prst="rect">
+            <a:avLst/>
+          </a:prstGeom>
+          <a:noFill/>
+          <a:ln/>
+        </p:spPr>
+        <p:txBody>
+          <a:bodyPr wrap="square" lIns="0" tIns="0" rIns="0" bIns="0" rtlCol="0" anchor="ctr"/>
+          <a:lstStyle/>
+          <a:p>
+            <a:pPr indent="0" marL="0">
+              <a:buNone/>
+            </a:pPr>
+            <a:r>
+              <a:rPr lang="en-US" sz="1200" b="1" dirty="0">
+                <a:solidFill>
+                  <a:srgbClr val="D98A2B"/>
+                </a:solidFill>
+                <a:latin typeface="Yu Gothic" pitchFamily="34" charset="0"/>
+                <a:ea typeface="Yu Gothic" pitchFamily="34" charset="-122"/>
+                <a:cs typeface="Yu Gothic" pitchFamily="34" charset="-120"/>
+              </a:rPr>
+              <a:t>6.1</a:t>
+            </a:r>
+            <a:endParaRPr lang="en-US" sz="1200" dirty="0"/>
+          </a:p>
+        </p:txBody>
+      </p:sp>
+      <p:sp>
+        <p:nvSpPr>
+          <p:cNvPr id="8" name="Text 6"/>
+          <p:cNvSpPr/>
+          <p:nvPr/>
+        </p:nvSpPr>
+        <p:spPr>
+          <a:xfrm>
+            <a:off x="1005840" y="2633472"/>
+            <a:ext cx="5120640" cy="329184"/>
+          </a:xfrm>
+          <a:prstGeom prst="rect">
+            <a:avLst/>
+          </a:prstGeom>
+          <a:noFill/>
+          <a:ln/>
+        </p:spPr>
+        <p:txBody>
+          <a:bodyPr wrap="square" lIns="0" tIns="0" rIns="0" bIns="0" rtlCol="0" anchor="ctr"/>
+          <a:lstStyle/>
+          <a:p>
+            <a:pPr indent="0" marL="0">
+              <a:buNone/>
+            </a:pPr>
+            <a:r>
+              <a:rPr lang="en-US" sz="1500" dirty="0">
+                <a:solidFill>
+                  <a:srgbClr val="16211F"/>
+                </a:solidFill>
+                <a:latin typeface="Yu Gothic" pitchFamily="34" charset="0"/>
+                <a:ea typeface="Yu Gothic" pitchFamily="34" charset="-122"/>
+                <a:cs typeface="Yu Gothic" pitchFamily="34" charset="-120"/>
+              </a:rPr>
+              <a:t>国内法の執行が及ぶ範囲に置く</a:t>
+            </a:r>
+            <a:endParaRPr lang="en-US" sz="1500" dirty="0"/>
+          </a:p>
+        </p:txBody>
+      </p:sp>
+      <p:sp>
+        <p:nvSpPr>
+          <p:cNvPr id="9" name="Shape 7"/>
+          <p:cNvSpPr/>
+          <p:nvPr/>
+        </p:nvSpPr>
+        <p:spPr>
+          <a:xfrm>
+            <a:off x="6263640" y="2542032"/>
+            <a:ext cx="256032" cy="201168"/>
           </a:xfrm>
           <a:prstGeom prst="rightArrow">
             <a:avLst/>
@@ -3085,26 +4305,65 @@
       </p:sp>
       <p:sp>
         <p:nvSpPr>
-          <p:cNvPr id="7" name="Shape 5"/>
-          <p:cNvSpPr/>
-          <p:nvPr/>
-        </p:nvSpPr>
-        <p:spPr>
-          <a:xfrm>
-            <a:off x="3108960" y="1965960"/>
-            <a:ext cx="2103120" cy="1554480"/>
+          <p:cNvPr id="10" name="Text 8"/>
+          <p:cNvSpPr/>
+          <p:nvPr/>
+        </p:nvSpPr>
+        <p:spPr>
+          <a:xfrm>
+            <a:off x="6583680" y="2505456"/>
+            <a:ext cx="4754880" cy="384048"/>
+          </a:xfrm>
+          <a:prstGeom prst="rect">
+            <a:avLst/>
+          </a:prstGeom>
+          <a:noFill/>
+          <a:ln/>
+        </p:spPr>
+        <p:txBody>
+          <a:bodyPr wrap="square" lIns="0" tIns="0" rIns="0" bIns="0" rtlCol="0" anchor="ctr"/>
+          <a:lstStyle/>
+          <a:p>
+            <a:pPr indent="0" marL="0">
+              <a:buNone/>
+            </a:pPr>
+            <a:r>
+              <a:rPr lang="en-US" sz="1500" b="1" dirty="0">
+                <a:solidFill>
+                  <a:srgbClr val="14504B"/>
+                </a:solidFill>
+                <a:latin typeface="Yu Gothic" pitchFamily="34" charset="0"/>
+                <a:ea typeface="Yu Gothic" pitchFamily="34" charset="-122"/>
+                <a:cs typeface="Yu Gothic" pitchFamily="34" charset="-120"/>
+              </a:rPr>
+              <a:t>データ・処理系とも東京リージョン</a:t>
+            </a:r>
+            <a:endParaRPr lang="en-US" sz="1500" dirty="0"/>
+          </a:p>
+        </p:txBody>
+      </p:sp>
+      <p:sp>
+        <p:nvSpPr>
+          <p:cNvPr id="11" name="Shape 9"/>
+          <p:cNvSpPr/>
+          <p:nvPr/>
+        </p:nvSpPr>
+        <p:spPr>
+          <a:xfrm>
+            <a:off x="731520" y="3072384"/>
+            <a:ext cx="10698480" cy="694944"/>
           </a:xfrm>
           <a:prstGeom prst="roundRect">
             <a:avLst>
-              <a:gd name="adj" fmla="val 4706"/>
+              <a:gd name="adj" fmla="val 10526"/>
             </a:avLst>
           </a:prstGeom>
           <a:solidFill>
-            <a:srgbClr val="F1F6F5"/>
+            <a:srgbClr val="FFFFFF"/>
           </a:solidFill>
           <a:ln w="12700">
             <a:solidFill>
-              <a:srgbClr val="F1F6F5"/>
+              <a:srgbClr val="DCE6E4"/>
             </a:solidFill>
             <a:prstDash val="solid"/>
           </a:ln>
@@ -3112,92 +4371,92 @@
       </p:sp>
       <p:sp>
         <p:nvSpPr>
-          <p:cNvPr id="8" name="Text 6"/>
-          <p:cNvSpPr/>
-          <p:nvPr/>
-        </p:nvSpPr>
-        <p:spPr>
-          <a:xfrm>
-            <a:off x="3154680" y="2194560"/>
-            <a:ext cx="2011680" cy="365760"/>
-          </a:xfrm>
-          <a:prstGeom prst="rect">
-            <a:avLst/>
-          </a:prstGeom>
-          <a:noFill/>
-          <a:ln/>
-        </p:spPr>
-        <p:txBody>
-          <a:bodyPr wrap="square" lIns="0" tIns="0" rIns="0" bIns="0" rtlCol="0" anchor="ctr"/>
-          <a:lstStyle/>
-          <a:p>
-            <a:pPr algn="ctr" indent="0" marL="0">
-              <a:buNone/>
-            </a:pPr>
-            <a:r>
-              <a:rPr lang="en-US" sz="1700" b="1" dirty="0">
-                <a:solidFill>
-                  <a:srgbClr val="14504B"/>
-                </a:solidFill>
-                <a:latin typeface="Yu Gothic" pitchFamily="34" charset="0"/>
-                <a:ea typeface="Yu Gothic" pitchFamily="34" charset="-122"/>
-                <a:cs typeface="Yu Gothic" pitchFamily="34" charset="-120"/>
-              </a:rPr>
-              <a:t>結果を渡す</a:t>
-            </a:r>
-            <a:endParaRPr lang="en-US" sz="1700" dirty="0"/>
-          </a:p>
-        </p:txBody>
-      </p:sp>
-      <p:sp>
-        <p:nvSpPr>
-          <p:cNvPr id="9" name="Text 7"/>
-          <p:cNvSpPr/>
-          <p:nvPr/>
-        </p:nvSpPr>
-        <p:spPr>
-          <a:xfrm>
-            <a:off x="3154680" y="2651760"/>
-            <a:ext cx="2011680" cy="640080"/>
-          </a:xfrm>
-          <a:prstGeom prst="rect">
-            <a:avLst/>
-          </a:prstGeom>
-          <a:noFill/>
-          <a:ln/>
-        </p:spPr>
-        <p:txBody>
-          <a:bodyPr wrap="square" lIns="0" tIns="0" rIns="0" bIns="0" rtlCol="0" anchor="ctr"/>
-          <a:lstStyle/>
-          <a:p>
-            <a:pPr algn="ctr" indent="0" marL="0">
-              <a:buNone/>
-            </a:pPr>
-            <a:r>
-              <a:rPr lang="en-US" sz="1300" dirty="0">
-                <a:solidFill>
-                  <a:srgbClr val="5C6B68"/>
-                </a:solidFill>
-                <a:latin typeface="Yu Gothic" pitchFamily="34" charset="0"/>
-                <a:ea typeface="Yu Gothic" pitchFamily="34" charset="-122"/>
-                <a:cs typeface="Yu Gothic" pitchFamily="34" charset="-120"/>
-              </a:rPr>
-              <a:t>基準値との比較</a:t>
-            </a:r>
-            <a:endParaRPr lang="en-US" sz="1300" dirty="0"/>
-          </a:p>
-        </p:txBody>
-      </p:sp>
-      <p:sp>
-        <p:nvSpPr>
-          <p:cNvPr id="10" name="Shape 8"/>
-          <p:cNvSpPr/>
-          <p:nvPr/>
-        </p:nvSpPr>
-        <p:spPr>
-          <a:xfrm>
-            <a:off x="5248656" y="2670048"/>
-            <a:ext cx="201168" cy="237744"/>
+          <p:cNvPr id="12" name="Text 10"/>
+          <p:cNvSpPr/>
+          <p:nvPr/>
+        </p:nvSpPr>
+        <p:spPr>
+          <a:xfrm>
+            <a:off x="1005840" y="3163824"/>
+            <a:ext cx="5120640" cy="274320"/>
+          </a:xfrm>
+          <a:prstGeom prst="rect">
+            <a:avLst/>
+          </a:prstGeom>
+          <a:noFill/>
+          <a:ln/>
+        </p:spPr>
+        <p:txBody>
+          <a:bodyPr wrap="square" lIns="0" tIns="0" rIns="0" bIns="0" rtlCol="0" anchor="ctr"/>
+          <a:lstStyle/>
+          <a:p>
+            <a:pPr indent="0" marL="0">
+              <a:buNone/>
+            </a:pPr>
+            <a:r>
+              <a:rPr lang="en-US" sz="1200" b="1" dirty="0">
+                <a:solidFill>
+                  <a:srgbClr val="D98A2B"/>
+                </a:solidFill>
+                <a:latin typeface="Yu Gothic" pitchFamily="34" charset="0"/>
+                <a:ea typeface="Yu Gothic" pitchFamily="34" charset="-122"/>
+                <a:cs typeface="Yu Gothic" pitchFamily="34" charset="-120"/>
+              </a:rPr>
+              <a:t>6.2 真正性</a:t>
+            </a:r>
+            <a:endParaRPr lang="en-US" sz="1200" dirty="0"/>
+          </a:p>
+        </p:txBody>
+      </p:sp>
+      <p:sp>
+        <p:nvSpPr>
+          <p:cNvPr id="13" name="Text 11"/>
+          <p:cNvSpPr/>
+          <p:nvPr/>
+        </p:nvSpPr>
+        <p:spPr>
+          <a:xfrm>
+            <a:off x="1005840" y="3419856"/>
+            <a:ext cx="5120640" cy="329184"/>
+          </a:xfrm>
+          <a:prstGeom prst="rect">
+            <a:avLst/>
+          </a:prstGeom>
+          <a:noFill/>
+          <a:ln/>
+        </p:spPr>
+        <p:txBody>
+          <a:bodyPr wrap="square" lIns="0" tIns="0" rIns="0" bIns="0" rtlCol="0" anchor="ctr"/>
+          <a:lstStyle/>
+          <a:p>
+            <a:pPr indent="0" marL="0">
+              <a:buNone/>
+            </a:pPr>
+            <a:r>
+              <a:rPr lang="en-US" sz="1500" dirty="0">
+                <a:solidFill>
+                  <a:srgbClr val="16211F"/>
+                </a:solidFill>
+                <a:latin typeface="Yu Gothic" pitchFamily="34" charset="0"/>
+                <a:ea typeface="Yu Gothic" pitchFamily="34" charset="-122"/>
+                <a:cs typeface="Yu Gothic" pitchFamily="34" charset="-120"/>
+              </a:rPr>
+              <a:t>改変の事実と、その内容を残す</a:t>
+            </a:r>
+            <a:endParaRPr lang="en-US" sz="1500" dirty="0"/>
+          </a:p>
+        </p:txBody>
+      </p:sp>
+      <p:sp>
+        <p:nvSpPr>
+          <p:cNvPr id="14" name="Shape 12"/>
+          <p:cNvSpPr/>
+          <p:nvPr/>
+        </p:nvSpPr>
+        <p:spPr>
+          <a:xfrm>
+            <a:off x="6263640" y="3328416"/>
+            <a:ext cx="256032" cy="201168"/>
           </a:xfrm>
           <a:prstGeom prst="rightArrow">
             <a:avLst/>
@@ -3215,18 +4474,57 @@
       </p:sp>
       <p:sp>
         <p:nvSpPr>
-          <p:cNvPr id="11" name="Shape 9"/>
-          <p:cNvSpPr/>
-          <p:nvPr/>
-        </p:nvSpPr>
-        <p:spPr>
-          <a:xfrm>
-            <a:off x="5486400" y="1965960"/>
-            <a:ext cx="2103120" cy="1554480"/>
+          <p:cNvPr id="15" name="Text 13"/>
+          <p:cNvSpPr/>
+          <p:nvPr/>
+        </p:nvSpPr>
+        <p:spPr>
+          <a:xfrm>
+            <a:off x="6583680" y="3291840"/>
+            <a:ext cx="4754880" cy="384048"/>
+          </a:xfrm>
+          <a:prstGeom prst="rect">
+            <a:avLst/>
+          </a:prstGeom>
+          <a:noFill/>
+          <a:ln/>
+        </p:spPr>
+        <p:txBody>
+          <a:bodyPr wrap="square" lIns="0" tIns="0" rIns="0" bIns="0" rtlCol="0" anchor="ctr"/>
+          <a:lstStyle/>
+          <a:p>
+            <a:pPr indent="0" marL="0">
+              <a:buNone/>
+            </a:pPr>
+            <a:r>
+              <a:rPr lang="en-US" sz="1500" b="1" dirty="0">
+                <a:solidFill>
+                  <a:srgbClr val="14504B"/>
+                </a:solidFill>
+                <a:latin typeface="Yu Gothic" pitchFamily="34" charset="0"/>
+                <a:ea typeface="Yu Gothic" pitchFamily="34" charset="-122"/>
+                <a:cs typeface="Yu Gothic" pitchFamily="34" charset="-120"/>
+              </a:rPr>
+              <a:t>変更前後の値・作成者・サーバー時刻</a:t>
+            </a:r>
+            <a:endParaRPr lang="en-US" sz="1500" dirty="0"/>
+          </a:p>
+        </p:txBody>
+      </p:sp>
+      <p:sp>
+        <p:nvSpPr>
+          <p:cNvPr id="16" name="Shape 14"/>
+          <p:cNvSpPr/>
+          <p:nvPr/>
+        </p:nvSpPr>
+        <p:spPr>
+          <a:xfrm>
+            <a:off x="731520" y="3858768"/>
+            <a:ext cx="10698480" cy="694944"/>
           </a:xfrm>
           <a:prstGeom prst="roundRect">
             <a:avLst>
-              <a:gd name="adj" fmla="val 4706"/>
+              <a:gd name="adj" fmla="val 10526"/>
             </a:avLst>
           </a:prstGeom>
           <a:solidFill>
@@ -3234,7 +4532,7 @@
           </a:solidFill>
           <a:ln w="12700">
             <a:solidFill>
-              <a:srgbClr val="F1F6F5"/>
+              <a:srgbClr val="DCE6E4"/>
             </a:solidFill>
             <a:prstDash val="solid"/>
           </a:ln>
@@ -3242,104 +4540,102 @@
       </p:sp>
       <p:sp>
         <p:nvSpPr>
-          <p:cNvPr id="12" name="Text 10"/>
-          <p:cNvSpPr/>
-          <p:nvPr/>
-        </p:nvSpPr>
-        <p:spPr>
-          <a:xfrm>
-            <a:off x="5532120" y="2194560"/>
-            <a:ext cx="2011680" cy="365760"/>
-          </a:xfrm>
-          <a:prstGeom prst="rect">
-            <a:avLst/>
-          </a:prstGeom>
-          <a:noFill/>
-          <a:ln/>
-        </p:spPr>
-        <p:txBody>
-          <a:bodyPr wrap="square" lIns="0" tIns="0" rIns="0" bIns="0" rtlCol="0" anchor="ctr"/>
-          <a:lstStyle/>
-          <a:p>
-            <a:pPr algn="ctr" indent="0" marL="0">
-              <a:buNone/>
-            </a:pPr>
-            <a:r>
-              <a:rPr lang="en-US" sz="1700" b="1" dirty="0">
-                <a:solidFill>
-                  <a:srgbClr val="14504B"/>
-                </a:solidFill>
-                <a:latin typeface="Yu Gothic" pitchFamily="34" charset="0"/>
-                <a:ea typeface="Yu Gothic" pitchFamily="34" charset="-122"/>
-                <a:cs typeface="Yu Gothic" pitchFamily="34" charset="-120"/>
-              </a:rPr>
-              <a:t>保健指導</a:t>
-            </a:r>
-            <a:endParaRPr lang="en-US" sz="1700" dirty="0"/>
-          </a:p>
-        </p:txBody>
-      </p:sp>
-      <p:sp>
-        <p:nvSpPr>
-          <p:cNvPr id="13" name="Text 11"/>
-          <p:cNvSpPr/>
-          <p:nvPr/>
-        </p:nvSpPr>
-        <p:spPr>
-          <a:xfrm>
-            <a:off x="5532120" y="2651760"/>
-            <a:ext cx="2011680" cy="640080"/>
-          </a:xfrm>
-          <a:prstGeom prst="rect">
-            <a:avLst/>
-          </a:prstGeom>
-          <a:noFill/>
-          <a:ln/>
-        </p:spPr>
-        <p:txBody>
-          <a:bodyPr wrap="square" lIns="0" tIns="0" rIns="0" bIns="0" rtlCol="0" anchor="ctr"/>
-          <a:lstStyle/>
-          <a:p>
-            <a:pPr algn="ctr" indent="0" marL="0">
-              <a:buNone/>
-            </a:pPr>
-            <a:r>
-              <a:rPr lang="en-US" sz="1300" dirty="0">
-                <a:solidFill>
-                  <a:srgbClr val="5C6B68"/>
-                </a:solidFill>
-                <a:latin typeface="Yu Gothic" pitchFamily="34" charset="0"/>
-                <a:ea typeface="Yu Gothic" pitchFamily="34" charset="-122"/>
-                <a:cs typeface="Yu Gothic" pitchFamily="34" charset="-120"/>
-              </a:rPr>
-              <a:t>該当者に案内</a:t>
-            </a:r>
-            <a:endParaRPr lang="en-US" sz="1300" dirty="0"/>
-          </a:p>
-        </p:txBody>
-      </p:sp>
-      <p:sp>
-        <p:nvSpPr>
-          <p:cNvPr id="14" name="Shape 12"/>
-          <p:cNvSpPr/>
-          <p:nvPr/>
-        </p:nvSpPr>
-        <p:spPr>
-          <a:xfrm>
-            <a:off x="7955280" y="1965960"/>
-            <a:ext cx="3474720" cy="1554480"/>
-          </a:xfrm>
-          <a:prstGeom prst="roundRect">
-            <a:avLst>
-              <a:gd name="adj" fmla="val 4706"/>
-            </a:avLst>
+          <p:cNvPr id="17" name="Text 15"/>
+          <p:cNvSpPr/>
+          <p:nvPr/>
+        </p:nvSpPr>
+        <p:spPr>
+          <a:xfrm>
+            <a:off x="1005840" y="3950208"/>
+            <a:ext cx="5120640" cy="274320"/>
+          </a:xfrm>
+          <a:prstGeom prst="rect">
+            <a:avLst/>
+          </a:prstGeom>
+          <a:noFill/>
+          <a:ln/>
+        </p:spPr>
+        <p:txBody>
+          <a:bodyPr wrap="square" lIns="0" tIns="0" rIns="0" bIns="0" rtlCol="0" anchor="ctr"/>
+          <a:lstStyle/>
+          <a:p>
+            <a:pPr indent="0" marL="0">
+              <a:buNone/>
+            </a:pPr>
+            <a:r>
+              <a:rPr lang="en-US" sz="1200" b="1" dirty="0">
+                <a:solidFill>
+                  <a:srgbClr val="D98A2B"/>
+                </a:solidFill>
+                <a:latin typeface="Yu Gothic" pitchFamily="34" charset="0"/>
+                <a:ea typeface="Yu Gothic" pitchFamily="34" charset="-122"/>
+                <a:cs typeface="Yu Gothic" pitchFamily="34" charset="-120"/>
+              </a:rPr>
+              <a:t>6.2 見読性</a:t>
+            </a:r>
+            <a:endParaRPr lang="en-US" sz="1200" dirty="0"/>
+          </a:p>
+        </p:txBody>
+      </p:sp>
+      <p:sp>
+        <p:nvSpPr>
+          <p:cNvPr id="18" name="Text 16"/>
+          <p:cNvSpPr/>
+          <p:nvPr/>
+        </p:nvSpPr>
+        <p:spPr>
+          <a:xfrm>
+            <a:off x="1005840" y="4206240"/>
+            <a:ext cx="5120640" cy="329184"/>
+          </a:xfrm>
+          <a:prstGeom prst="rect">
+            <a:avLst/>
+          </a:prstGeom>
+          <a:noFill/>
+          <a:ln/>
+        </p:spPr>
+        <p:txBody>
+          <a:bodyPr wrap="square" lIns="0" tIns="0" rIns="0" bIns="0" rtlCol="0" anchor="ctr"/>
+          <a:lstStyle/>
+          <a:p>
+            <a:pPr indent="0" marL="0">
+              <a:buNone/>
+            </a:pPr>
+            <a:r>
+              <a:rPr lang="en-US" sz="1500" dirty="0">
+                <a:solidFill>
+                  <a:srgbClr val="16211F"/>
+                </a:solidFill>
+                <a:latin typeface="Yu Gothic" pitchFamily="34" charset="0"/>
+                <a:ea typeface="Yu Gothic" pitchFamily="34" charset="-122"/>
+                <a:cs typeface="Yu Gothic" pitchFamily="34" charset="-120"/>
+              </a:rPr>
+              <a:t>画面表示に加え、書面を作成できる</a:t>
+            </a:r>
+            <a:endParaRPr lang="en-US" sz="1500" dirty="0"/>
+          </a:p>
+        </p:txBody>
+      </p:sp>
+      <p:sp>
+        <p:nvSpPr>
+          <p:cNvPr id="19" name="Shape 17"/>
+          <p:cNvSpPr/>
+          <p:nvPr/>
+        </p:nvSpPr>
+        <p:spPr>
+          <a:xfrm>
+            <a:off x="6263640" y="4114800"/>
+            <a:ext cx="256032" cy="201168"/>
+          </a:xfrm>
+          <a:prstGeom prst="rightArrow">
+            <a:avLst/>
           </a:prstGeom>
           <a:solidFill>
-            <a:srgbClr val="F7F2EC"/>
+            <a:srgbClr val="A8CFC9"/>
           </a:solidFill>
           <a:ln w="12700">
             <a:solidFill>
-              <a:srgbClr val="F7F2EC"/>
+              <a:srgbClr val="A8CFC9"/>
             </a:solidFill>
             <a:prstDash val="solid"/>
           </a:ln>
@@ -3347,127 +4643,65 @@
       </p:sp>
       <p:sp>
         <p:nvSpPr>
-          <p:cNvPr id="15" name="Text 13"/>
-          <p:cNvSpPr/>
-          <p:nvPr/>
-        </p:nvSpPr>
-        <p:spPr>
-          <a:xfrm>
-            <a:off x="8183880" y="2194560"/>
-            <a:ext cx="3017520" cy="365760"/>
-          </a:xfrm>
-          <a:prstGeom prst="rect">
-            <a:avLst/>
-          </a:prstGeom>
-          <a:noFill/>
-          <a:ln/>
-        </p:spPr>
-        <p:txBody>
-          <a:bodyPr wrap="square" lIns="0" tIns="0" rIns="0" bIns="0" rtlCol="0" anchor="ctr"/>
-          <a:lstStyle/>
-          <a:p>
-            <a:pPr indent="0" marL="0">
-              <a:buNone/>
-            </a:pPr>
-            <a:r>
-              <a:rPr lang="en-US" sz="1600" b="1" dirty="0">
-                <a:solidFill>
-                  <a:srgbClr val="8A6F52"/>
-                </a:solidFill>
-                <a:latin typeface="Yu Gothic" pitchFamily="34" charset="0"/>
-                <a:ea typeface="Yu Gothic" pitchFamily="34" charset="-122"/>
-                <a:cs typeface="Yu Gothic" pitchFamily="34" charset="-120"/>
-              </a:rPr>
-              <a:t>多くはここで終わる</a:t>
-            </a:r>
-            <a:endParaRPr lang="en-US" sz="1600" dirty="0"/>
-          </a:p>
-        </p:txBody>
-      </p:sp>
-      <p:sp>
-        <p:nvSpPr>
-          <p:cNvPr id="16" name="Text 14"/>
-          <p:cNvSpPr/>
-          <p:nvPr/>
-        </p:nvSpPr>
-        <p:spPr>
-          <a:xfrm>
-            <a:off x="8183880" y="2633472"/>
-            <a:ext cx="3108960" cy="685800"/>
-          </a:xfrm>
-          <a:prstGeom prst="rect">
-            <a:avLst/>
-          </a:prstGeom>
-          <a:noFill/>
-          <a:ln/>
-        </p:spPr>
-        <p:txBody>
-          <a:bodyPr wrap="square" lIns="0" tIns="0" rIns="0" bIns="0" rtlCol="0" anchor="ctr"/>
-          <a:lstStyle/>
-          <a:p>
-            <a:pPr indent="0" marL="0">
-              <a:lnSpc>
-                <a:spcPct val="115000"/>
-              </a:lnSpc>
-              <a:buNone/>
-            </a:pPr>
-            <a:r>
-              <a:rPr lang="en-US" sz="1300" dirty="0">
-                <a:solidFill>
-                  <a:srgbClr val="5A5044"/>
-                </a:solidFill>
-                <a:latin typeface="Yu Gothic" pitchFamily="34" charset="0"/>
-                <a:ea typeface="Yu Gothic" pitchFamily="34" charset="-122"/>
-                <a:cs typeface="Yu Gothic" pitchFamily="34" charset="-120"/>
-              </a:rPr>
-              <a:t>「今」の値は分かるが、</a:t>
-            </a:r>
-            <a:endParaRPr lang="en-US" sz="1300" dirty="0"/>
-          </a:p>
-          <a:p>
-            <a:pPr indent="0" marL="0">
-              <a:lnSpc>
-                <a:spcPct val="115000"/>
-              </a:lnSpc>
-              <a:buNone/>
-            </a:pPr>
-            <a:r>
-              <a:rPr lang="en-US" sz="1300" dirty="0">
-                <a:solidFill>
-                  <a:srgbClr val="5A5044"/>
-                </a:solidFill>
-                <a:latin typeface="Yu Gothic" pitchFamily="34" charset="0"/>
-                <a:ea typeface="Yu Gothic" pitchFamily="34" charset="-122"/>
-                <a:cs typeface="Yu Gothic" pitchFamily="34" charset="-120"/>
-              </a:rPr>
-              <a:t>変化は活かされにくい</a:t>
-            </a:r>
-            <a:endParaRPr lang="en-US" sz="1300" dirty="0"/>
-          </a:p>
-        </p:txBody>
-      </p:sp>
-      <p:sp>
-        <p:nvSpPr>
-          <p:cNvPr id="17" name="Shape 15"/>
-          <p:cNvSpPr/>
-          <p:nvPr/>
-        </p:nvSpPr>
-        <p:spPr>
-          <a:xfrm>
-            <a:off x="731520" y="3931920"/>
-            <a:ext cx="10698480" cy="2011680"/>
+          <p:cNvPr id="20" name="Text 18"/>
+          <p:cNvSpPr/>
+          <p:nvPr/>
+        </p:nvSpPr>
+        <p:spPr>
+          <a:xfrm>
+            <a:off x="6583680" y="4078224"/>
+            <a:ext cx="4754880" cy="384048"/>
+          </a:xfrm>
+          <a:prstGeom prst="rect">
+            <a:avLst/>
+          </a:prstGeom>
+          <a:noFill/>
+          <a:ln/>
+        </p:spPr>
+        <p:txBody>
+          <a:bodyPr wrap="square" lIns="0" tIns="0" rIns="0" bIns="0" rtlCol="0" anchor="ctr"/>
+          <a:lstStyle/>
+          <a:p>
+            <a:pPr indent="0" marL="0">
+              <a:buNone/>
+            </a:pPr>
+            <a:r>
+              <a:rPr lang="en-US" sz="1500" b="1" dirty="0">
+                <a:solidFill>
+                  <a:srgbClr val="14504B"/>
+                </a:solidFill>
+                <a:latin typeface="Yu Gothic" pitchFamily="34" charset="0"/>
+                <a:ea typeface="Yu Gothic" pitchFamily="34" charset="-122"/>
+                <a:cs typeface="Yu Gothic" pitchFamily="34" charset="-120"/>
+              </a:rPr>
+              <a:t>記録の印刷機能</a:t>
+            </a:r>
+            <a:endParaRPr lang="en-US" sz="1500" dirty="0"/>
+          </a:p>
+        </p:txBody>
+      </p:sp>
+      <p:sp>
+        <p:nvSpPr>
+          <p:cNvPr id="21" name="Shape 19"/>
+          <p:cNvSpPr/>
+          <p:nvPr/>
+        </p:nvSpPr>
+        <p:spPr>
+          <a:xfrm>
+            <a:off x="731520" y="4645152"/>
+            <a:ext cx="10698480" cy="694944"/>
           </a:xfrm>
           <a:prstGeom prst="roundRect">
             <a:avLst>
-              <a:gd name="adj" fmla="val 3636"/>
+              <a:gd name="adj" fmla="val 10526"/>
             </a:avLst>
           </a:prstGeom>
           <a:solidFill>
-            <a:srgbClr val="14504B"/>
+            <a:srgbClr val="FFFFFF"/>
           </a:solidFill>
           <a:ln w="12700">
             <a:solidFill>
-              <a:srgbClr val="14504B"/>
+              <a:srgbClr val="DCE6E4"/>
             </a:solidFill>
             <a:prstDash val="solid"/>
           </a:ln>
@@ -3475,14 +4709,117 @@
       </p:sp>
       <p:sp>
         <p:nvSpPr>
-          <p:cNvPr id="18" name="Text 16"/>
-          <p:cNvSpPr/>
-          <p:nvPr/>
-        </p:nvSpPr>
-        <p:spPr>
-          <a:xfrm>
-            <a:off x="1097280" y="4160520"/>
-            <a:ext cx="1828800" cy="384048"/>
+          <p:cNvPr id="22" name="Text 20"/>
+          <p:cNvSpPr/>
+          <p:nvPr/>
+        </p:nvSpPr>
+        <p:spPr>
+          <a:xfrm>
+            <a:off x="1005840" y="4736592"/>
+            <a:ext cx="5120640" cy="274320"/>
+          </a:xfrm>
+          <a:prstGeom prst="rect">
+            <a:avLst/>
+          </a:prstGeom>
+          <a:noFill/>
+          <a:ln/>
+        </p:spPr>
+        <p:txBody>
+          <a:bodyPr wrap="square" lIns="0" tIns="0" rIns="0" bIns="0" rtlCol="0" anchor="ctr"/>
+          <a:lstStyle/>
+          <a:p>
+            <a:pPr indent="0" marL="0">
+              <a:buNone/>
+            </a:pPr>
+            <a:r>
+              <a:rPr lang="en-US" sz="1200" b="1" dirty="0">
+                <a:solidFill>
+                  <a:srgbClr val="D98A2B"/>
+                </a:solidFill>
+                <a:latin typeface="Yu Gothic" pitchFamily="34" charset="0"/>
+                <a:ea typeface="Yu Gothic" pitchFamily="34" charset="-122"/>
+                <a:cs typeface="Yu Gothic" pitchFamily="34" charset="-120"/>
+              </a:rPr>
+              <a:t>6.2 保存性</a:t>
+            </a:r>
+            <a:endParaRPr lang="en-US" sz="1200" dirty="0"/>
+          </a:p>
+        </p:txBody>
+      </p:sp>
+      <p:sp>
+        <p:nvSpPr>
+          <p:cNvPr id="23" name="Text 21"/>
+          <p:cNvSpPr/>
+          <p:nvPr/>
+        </p:nvSpPr>
+        <p:spPr>
+          <a:xfrm>
+            <a:off x="1005840" y="4992624"/>
+            <a:ext cx="5120640" cy="329184"/>
+          </a:xfrm>
+          <a:prstGeom prst="rect">
+            <a:avLst/>
+          </a:prstGeom>
+          <a:noFill/>
+          <a:ln/>
+        </p:spPr>
+        <p:txBody>
+          <a:bodyPr wrap="square" lIns="0" tIns="0" rIns="0" bIns="0" rtlCol="0" anchor="ctr"/>
+          <a:lstStyle/>
+          <a:p>
+            <a:pPr indent="0" marL="0">
+              <a:buNone/>
+            </a:pPr>
+            <a:r>
+              <a:rPr lang="en-US" sz="1500" dirty="0">
+                <a:solidFill>
+                  <a:srgbClr val="16211F"/>
+                </a:solidFill>
+                <a:latin typeface="Yu Gothic" pitchFamily="34" charset="0"/>
+                <a:ea typeface="Yu Gothic" pitchFamily="34" charset="-122"/>
+                <a:cs typeface="Yu Gothic" pitchFamily="34" charset="-120"/>
+              </a:rPr>
+              <a:t>期間中は復元できる状態を保つ</a:t>
+            </a:r>
+            <a:endParaRPr lang="en-US" sz="1500" dirty="0"/>
+          </a:p>
+        </p:txBody>
+      </p:sp>
+      <p:sp>
+        <p:nvSpPr>
+          <p:cNvPr id="24" name="Shape 22"/>
+          <p:cNvSpPr/>
+          <p:nvPr/>
+        </p:nvSpPr>
+        <p:spPr>
+          <a:xfrm>
+            <a:off x="6263640" y="4901184"/>
+            <a:ext cx="256032" cy="201168"/>
+          </a:xfrm>
+          <a:prstGeom prst="rightArrow">
+            <a:avLst/>
+          </a:prstGeom>
+          <a:solidFill>
+            <a:srgbClr val="A8CFC9"/>
+          </a:solidFill>
+          <a:ln w="12700">
+            <a:solidFill>
+              <a:srgbClr val="A8CFC9"/>
+            </a:solidFill>
+            <a:prstDash val="solid"/>
+          </a:ln>
+        </p:spPr>
+      </p:sp>
+      <p:sp>
+        <p:nvSpPr>
+          <p:cNvPr id="25" name="Text 23"/>
+          <p:cNvSpPr/>
+          <p:nvPr/>
+        </p:nvSpPr>
+        <p:spPr>
+          <a:xfrm>
+            <a:off x="6583680" y="4864608"/>
+            <a:ext cx="4754880" cy="384048"/>
           </a:xfrm>
           <a:prstGeom prst="rect">
             <a:avLst/>
@@ -3500,13 +4837,118 @@
             <a:r>
               <a:rPr lang="en-US" sz="1500" b="1" dirty="0">
                 <a:solidFill>
+                  <a:srgbClr val="14504B"/>
+                </a:solidFill>
+                <a:latin typeface="Yu Gothic" pitchFamily="34" charset="0"/>
+                <a:ea typeface="Yu Gothic" pitchFamily="34" charset="-122"/>
+                <a:cs typeface="Yu Gothic" pitchFamily="34" charset="-120"/>
+              </a:rPr>
+              <a:t>任意時点への復元・削除保護</a:t>
+            </a:r>
+            <a:endParaRPr lang="en-US" sz="1500" dirty="0"/>
+          </a:p>
+        </p:txBody>
+      </p:sp>
+      <p:sp>
+        <p:nvSpPr>
+          <p:cNvPr id="26" name="Shape 24"/>
+          <p:cNvSpPr/>
+          <p:nvPr/>
+        </p:nvSpPr>
+        <p:spPr>
+          <a:xfrm>
+            <a:off x="731520" y="5431536"/>
+            <a:ext cx="10698480" cy="694944"/>
+          </a:xfrm>
+          <a:prstGeom prst="roundRect">
+            <a:avLst>
+              <a:gd name="adj" fmla="val 10526"/>
+            </a:avLst>
+          </a:prstGeom>
+          <a:solidFill>
+            <a:srgbClr val="F1F6F5"/>
+          </a:solidFill>
+          <a:ln w="12700">
+            <a:solidFill>
+              <a:srgbClr val="DCE6E4"/>
+            </a:solidFill>
+            <a:prstDash val="solid"/>
+          </a:ln>
+        </p:spPr>
+      </p:sp>
+      <p:sp>
+        <p:nvSpPr>
+          <p:cNvPr id="27" name="Text 25"/>
+          <p:cNvSpPr/>
+          <p:nvPr/>
+        </p:nvSpPr>
+        <p:spPr>
+          <a:xfrm>
+            <a:off x="1005840" y="5522976"/>
+            <a:ext cx="5120640" cy="274320"/>
+          </a:xfrm>
+          <a:prstGeom prst="rect">
+            <a:avLst/>
+          </a:prstGeom>
+          <a:noFill/>
+          <a:ln/>
+        </p:spPr>
+        <p:txBody>
+          <a:bodyPr wrap="square" lIns="0" tIns="0" rIns="0" bIns="0" rtlCol="0" anchor="ctr"/>
+          <a:lstStyle/>
+          <a:p>
+            <a:pPr indent="0" marL="0">
+              <a:buNone/>
+            </a:pPr>
+            <a:r>
+              <a:rPr lang="en-US" sz="1200" b="1" dirty="0">
+                <a:solidFill>
                   <a:srgbClr val="D98A2B"/>
                 </a:solidFill>
                 <a:latin typeface="Yu Gothic" pitchFamily="34" charset="0"/>
                 <a:ea typeface="Yu Gothic" pitchFamily="34" charset="-122"/>
                 <a:cs typeface="Yu Gothic" pitchFamily="34" charset="-120"/>
               </a:rPr>
-              <a:t>問い</a:t>
+              <a:t>4.1／4.2</a:t>
+            </a:r>
+            <a:endParaRPr lang="en-US" sz="1200" dirty="0"/>
+          </a:p>
+        </p:txBody>
+      </p:sp>
+      <p:sp>
+        <p:nvSpPr>
+          <p:cNvPr id="28" name="Text 26"/>
+          <p:cNvSpPr/>
+          <p:nvPr/>
+        </p:nvSpPr>
+        <p:spPr>
+          <a:xfrm>
+            <a:off x="1005840" y="5779008"/>
+            <a:ext cx="5120640" cy="329184"/>
+          </a:xfrm>
+          <a:prstGeom prst="rect">
+            <a:avLst/>
+          </a:prstGeom>
+          <a:noFill/>
+          <a:ln/>
+        </p:spPr>
+        <p:txBody>
+          <a:bodyPr wrap="square" lIns="0" tIns="0" rIns="0" bIns="0" rtlCol="0" anchor="ctr"/>
+          <a:lstStyle/>
+          <a:p>
+            <a:pPr indent="0" marL="0">
+              <a:buNone/>
+            </a:pPr>
+            <a:r>
+              <a:rPr lang="en-US" sz="1500" dirty="0">
+                <a:solidFill>
+                  <a:srgbClr val="16211F"/>
+                </a:solidFill>
+                <a:latin typeface="Yu Gothic" pitchFamily="34" charset="0"/>
+                <a:ea typeface="Yu Gothic" pitchFamily="34" charset="-122"/>
+                <a:cs typeface="Yu Gothic" pitchFamily="34" charset="-120"/>
+              </a:rPr>
+              <a:t>医療機関へ所定の項目を開示し、役割分担を明確にする</a:t>
             </a:r>
             <a:endParaRPr lang="en-US" sz="1500" dirty="0"/>
           </a:p>
@@ -3514,63 +4956,104 @@
       </p:sp>
       <p:sp>
         <p:nvSpPr>
-          <p:cNvPr id="19" name="Text 17"/>
-          <p:cNvSpPr/>
-          <p:nvPr/>
-        </p:nvSpPr>
-        <p:spPr>
-          <a:xfrm>
-            <a:off x="1097280" y="4590288"/>
-            <a:ext cx="10058400" cy="1097280"/>
-          </a:xfrm>
-          <a:prstGeom prst="rect">
-            <a:avLst/>
-          </a:prstGeom>
-          <a:noFill/>
-          <a:ln/>
-        </p:spPr>
-        <p:txBody>
-          <a:bodyPr wrap="square" lIns="0" tIns="0" rIns="0" bIns="0" rtlCol="0" anchor="ctr"/>
-          <a:lstStyle/>
-          <a:p>
-            <a:pPr indent="0" marL="0">
-              <a:lnSpc>
-                <a:spcPct val="130000"/>
-              </a:lnSpc>
-              <a:buNone/>
-            </a:pPr>
-            <a:r>
-              <a:rPr lang="en-US" sz="2400" b="1" dirty="0">
-                <a:solidFill>
-                  <a:srgbClr val="FFFFFF"/>
-                </a:solidFill>
-                <a:latin typeface="Yu Gothic" pitchFamily="34" charset="0"/>
-                <a:ea typeface="Yu Gothic" pitchFamily="34" charset="-122"/>
-                <a:cs typeface="Yu Gothic" pitchFamily="34" charset="-120"/>
-              </a:rPr>
-              <a:t>毎年同じ人を測っているのだから、</a:t>
-            </a:r>
-            <a:endParaRPr lang="en-US" sz="2400" dirty="0"/>
-          </a:p>
-          <a:p>
-            <a:pPr indent="0" marL="0">
-              <a:lnSpc>
-                <a:spcPct val="130000"/>
-              </a:lnSpc>
-              <a:buNone/>
-            </a:pPr>
-            <a:r>
-              <a:rPr lang="en-US" sz="2400" b="1" dirty="0">
-                <a:solidFill>
-                  <a:srgbClr val="FFFFFF"/>
-                </a:solidFill>
-                <a:latin typeface="Yu Gothic" pitchFamily="34" charset="0"/>
-                <a:ea typeface="Yu Gothic" pitchFamily="34" charset="-122"/>
-                <a:cs typeface="Yu Gothic" pitchFamily="34" charset="-120"/>
-              </a:rPr>
-              <a:t>「去年からどう変わったか」でリスクを見られないか。</a:t>
-            </a:r>
-            <a:endParaRPr lang="en-US" sz="2400" dirty="0"/>
+          <p:cNvPr id="29" name="Shape 27"/>
+          <p:cNvSpPr/>
+          <p:nvPr/>
+        </p:nvSpPr>
+        <p:spPr>
+          <a:xfrm>
+            <a:off x="6263640" y="5687568"/>
+            <a:ext cx="256032" cy="201168"/>
+          </a:xfrm>
+          <a:prstGeom prst="rightArrow">
+            <a:avLst/>
+          </a:prstGeom>
+          <a:solidFill>
+            <a:srgbClr val="A8CFC9"/>
+          </a:solidFill>
+          <a:ln w="12700">
+            <a:solidFill>
+              <a:srgbClr val="A8CFC9"/>
+            </a:solidFill>
+            <a:prstDash val="solid"/>
+          </a:ln>
+        </p:spPr>
+      </p:sp>
+      <p:sp>
+        <p:nvSpPr>
+          <p:cNvPr id="30" name="Text 28"/>
+          <p:cNvSpPr/>
+          <p:nvPr/>
+        </p:nvSpPr>
+        <p:spPr>
+          <a:xfrm>
+            <a:off x="6583680" y="5650992"/>
+            <a:ext cx="4754880" cy="384048"/>
+          </a:xfrm>
+          <a:prstGeom prst="rect">
+            <a:avLst/>
+          </a:prstGeom>
+          <a:noFill/>
+          <a:ln/>
+        </p:spPr>
+        <p:txBody>
+          <a:bodyPr wrap="square" lIns="0" tIns="0" rIns="0" bIns="0" rtlCol="0" anchor="ctr"/>
+          <a:lstStyle/>
+          <a:p>
+            <a:pPr indent="0" marL="0">
+              <a:buNone/>
+            </a:pPr>
+            <a:r>
+              <a:rPr lang="en-US" sz="1500" b="1" dirty="0">
+                <a:solidFill>
+                  <a:srgbClr val="14504B"/>
+                </a:solidFill>
+                <a:latin typeface="Yu Gothic" pitchFamily="34" charset="0"/>
+                <a:ea typeface="Yu Gothic" pitchFamily="34" charset="-122"/>
+                <a:cs typeface="Yu Gothic" pitchFamily="34" charset="-120"/>
+              </a:rPr>
+              <a:t>サービス仕様適合開示書</a:t>
+            </a:r>
+            <a:endParaRPr lang="en-US" sz="1500" dirty="0"/>
+          </a:p>
+        </p:txBody>
+      </p:sp>
+      <p:sp>
+        <p:nvSpPr>
+          <p:cNvPr id="31" name="Text 29"/>
+          <p:cNvSpPr/>
+          <p:nvPr/>
+        </p:nvSpPr>
+        <p:spPr>
+          <a:xfrm>
+            <a:off x="731520" y="6355080"/>
+            <a:ext cx="10698480" cy="365760"/>
+          </a:xfrm>
+          <a:prstGeom prst="rect">
+            <a:avLst/>
+          </a:prstGeom>
+          <a:noFill/>
+          <a:ln/>
+        </p:spPr>
+        <p:txBody>
+          <a:bodyPr wrap="square" lIns="0" tIns="0" rIns="0" bIns="0" rtlCol="0" anchor="ctr"/>
+          <a:lstStyle/>
+          <a:p>
+            <a:pPr indent="0" marL="0">
+              <a:buNone/>
+            </a:pPr>
+            <a:r>
+              <a:rPr lang="en-US" sz="1300" i="1" dirty="0">
+                <a:solidFill>
+                  <a:srgbClr val="5C6B68"/>
+                </a:solidFill>
+                <a:latin typeface="Yu Gothic" pitchFamily="34" charset="0"/>
+                <a:ea typeface="Yu Gothic" pitchFamily="34" charset="-122"/>
+                <a:cs typeface="Yu Gothic" pitchFamily="34" charset="-120"/>
+              </a:rPr>
+              <a:t>※ このガイドラインは医療機関ではなく、システムを提供する事業者そのものが名宛人です。</a:t>
+            </a:r>
+            <a:endParaRPr lang="en-US" sz="1300" dirty="0"/>
           </a:p>
         </p:txBody>
       </p:sp>
@@ -3639,7 +5122,7 @@
                 <a:ea typeface="Yu Gothic" pitchFamily="34" charset="-122"/>
                 <a:cs typeface="Yu Gothic" pitchFamily="34" charset="-120"/>
               </a:rPr>
-              <a:t>事例：からだの「まるみ」の変化を見る</a:t>
+              <a:t>できていないこと</a:t>
             </a:r>
             <a:endParaRPr lang="en-US" sz="3600" dirty="0"/>
           </a:p>
@@ -3678,7 +5161,7 @@
                 <a:ea typeface="Yu Gothic" pitchFamily="34" charset="-122"/>
                 <a:cs typeface="Yu Gothic" pitchFamily="34" charset="-120"/>
               </a:rPr>
-              <a:t>腹囲と身長だけで計算できる指標 BRI（Body Roundness Index）</a:t>
+              <a:t>導入をご検討いただく前に、こちらからお伝えします</a:t>
             </a:r>
             <a:endParaRPr lang="en-US" sz="1600" dirty="0"/>
           </a:p>
@@ -3692,12 +5175,12 @@
         </p:nvSpPr>
         <p:spPr>
           <a:xfrm>
-            <a:off x="731520" y="1920240"/>
-            <a:ext cx="3429000" cy="1783080"/>
+            <a:off x="731520" y="1965960"/>
+            <a:ext cx="10698480" cy="1207008"/>
           </a:xfrm>
           <a:prstGeom prst="roundRect">
             <a:avLst>
-              <a:gd name="adj" fmla="val 4103"/>
+              <a:gd name="adj" fmla="val 6061"/>
             </a:avLst>
           </a:prstGeom>
           <a:solidFill>
@@ -3719,24 +5202,24 @@
         </p:nvSpPr>
         <p:spPr>
           <a:xfrm>
-            <a:off x="987552" y="2103120"/>
-            <a:ext cx="2926080" cy="384048"/>
-          </a:xfrm>
-          <a:prstGeom prst="rect">
-            <a:avLst/>
-          </a:prstGeom>
-          <a:noFill/>
-          <a:ln/>
-        </p:spPr>
-        <p:txBody>
-          <a:bodyPr wrap="square" lIns="0" tIns="0" rIns="0" bIns="0" rtlCol="0" anchor="ctr"/>
-          <a:lstStyle/>
-          <a:p>
-            <a:pPr indent="0" marL="0">
-              <a:buNone/>
-            </a:pPr>
-            <a:r>
-              <a:rPr lang="en-US" sz="1700" b="1" dirty="0">
+            <a:off x="1051560" y="2112264"/>
+            <a:ext cx="5669280" cy="365760"/>
+          </a:xfrm>
+          <a:prstGeom prst="rect">
+            <a:avLst/>
+          </a:prstGeom>
+          <a:noFill/>
+          <a:ln/>
+        </p:spPr>
+        <p:txBody>
+          <a:bodyPr wrap="square" lIns="0" tIns="0" rIns="0" bIns="0" rtlCol="0" anchor="ctr"/>
+          <a:lstStyle/>
+          <a:p>
+            <a:pPr indent="0" marL="0">
+              <a:buNone/>
+            </a:pPr>
+            <a:r>
+              <a:rPr lang="en-US" sz="1900" b="1" dirty="0">
                 <a:solidFill>
                   <a:srgbClr val="14504B"/>
                 </a:solidFill>
@@ -3744,22 +5227,88 @@
                 <a:ea typeface="Yu Gothic" pitchFamily="34" charset="-122"/>
                 <a:cs typeface="Yu Gothic" pitchFamily="34" charset="-120"/>
               </a:rPr>
-              <a:t>見たもの</a:t>
-            </a:r>
-            <a:endParaRPr lang="en-US" sz="1700" dirty="0"/>
-          </a:p>
-        </p:txBody>
-      </p:sp>
-      <p:sp>
-        <p:nvSpPr>
-          <p:cNvPr id="6" name="Text 4"/>
-          <p:cNvSpPr/>
-          <p:nvPr/>
-        </p:nvSpPr>
-        <p:spPr>
-          <a:xfrm>
-            <a:off x="987552" y="2578608"/>
-            <a:ext cx="2971800" cy="868680"/>
+              <a:t>プライバシーマーク／ISMS認証</a:t>
+            </a:r>
+            <a:endParaRPr lang="en-US" sz="1900" dirty="0"/>
+          </a:p>
+        </p:txBody>
+      </p:sp>
+      <p:sp>
+        <p:nvSpPr>
+          <p:cNvPr id="6" name="Shape 4"/>
+          <p:cNvSpPr/>
+          <p:nvPr/>
+        </p:nvSpPr>
+        <p:spPr>
+          <a:xfrm>
+            <a:off x="6949440" y="2130552"/>
+            <a:ext cx="1371600" cy="384048"/>
+          </a:xfrm>
+          <a:prstGeom prst="roundRect">
+            <a:avLst>
+              <a:gd name="adj" fmla="val 19048"/>
+            </a:avLst>
+          </a:prstGeom>
+          <a:solidFill>
+            <a:srgbClr val="D98A2B"/>
+          </a:solidFill>
+          <a:ln w="12700">
+            <a:solidFill>
+              <a:srgbClr val="D98A2B"/>
+            </a:solidFill>
+            <a:prstDash val="solid"/>
+          </a:ln>
+        </p:spPr>
+      </p:sp>
+      <p:sp>
+        <p:nvSpPr>
+          <p:cNvPr id="7" name="Text 5"/>
+          <p:cNvSpPr/>
+          <p:nvPr/>
+        </p:nvSpPr>
+        <p:spPr>
+          <a:xfrm>
+            <a:off x="6949440" y="2130552"/>
+            <a:ext cx="1371600" cy="384048"/>
+          </a:xfrm>
+          <a:prstGeom prst="rect">
+            <a:avLst/>
+          </a:prstGeom>
+          <a:noFill/>
+          <a:ln/>
+        </p:spPr>
+        <p:txBody>
+          <a:bodyPr wrap="square" lIns="0" tIns="0" rIns="0" bIns="0" rtlCol="0" anchor="ctr"/>
+          <a:lstStyle/>
+          <a:p>
+            <a:pPr algn="ctr" indent="0" marL="0">
+              <a:buNone/>
+            </a:pPr>
+            <a:r>
+              <a:rPr lang="en-US" sz="1300" b="1" dirty="0">
+                <a:solidFill>
+                  <a:srgbClr val="FFFFFF"/>
+                </a:solidFill>
+                <a:latin typeface="Yu Gothic" pitchFamily="34" charset="0"/>
+                <a:ea typeface="Yu Gothic" pitchFamily="34" charset="-122"/>
+                <a:cs typeface="Yu Gothic" pitchFamily="34" charset="-120"/>
+              </a:rPr>
+              <a:t>未取得</a:t>
+            </a:r>
+            <a:endParaRPr lang="en-US" sz="1300" dirty="0"/>
+          </a:p>
+        </p:txBody>
+      </p:sp>
+      <p:sp>
+        <p:nvSpPr>
+          <p:cNvPr id="8" name="Text 6"/>
+          <p:cNvSpPr/>
+          <p:nvPr/>
+        </p:nvSpPr>
+        <p:spPr>
+          <a:xfrm>
+            <a:off x="1051560" y="2514600"/>
+            <a:ext cx="9966960" cy="566928"/>
           </a:xfrm>
           <a:prstGeom prst="rect">
             <a:avLst/>
@@ -3786,7 +5335,7 @@
                 <a:ea typeface="Yu Gothic" pitchFamily="34" charset="-122"/>
                 <a:cs typeface="Yu Gothic" pitchFamily="34" charset="-120"/>
               </a:rPr>
-              <a:t>延岡市の40歳以上</a:t>
+              <a:t>事業者ガイドライン4.4が求めています。技術的な工夫では</a:t>
             </a:r>
             <a:endParaRPr lang="en-US" sz="1400" dirty="0"/>
           </a:p>
@@ -3806,7 +5355,7 @@
                 <a:ea typeface="Yu Gothic" pitchFamily="34" charset="-122"/>
                 <a:cs typeface="Yu Gothic" pitchFamily="34" charset="-120"/>
               </a:rPr>
-              <a:t>3,819名の2年分</a:t>
+              <a:t>代替できず、審査期間と費用がかかるため事業判断が要ります。</a:t>
             </a:r>
             <a:endParaRPr lang="en-US" sz="1400" dirty="0"/>
           </a:p>
@@ -3814,18 +5363,18 @@
       </p:sp>
       <p:sp>
         <p:nvSpPr>
-          <p:cNvPr id="7" name="Shape 5"/>
-          <p:cNvSpPr/>
-          <p:nvPr/>
-        </p:nvSpPr>
-        <p:spPr>
-          <a:xfrm>
-            <a:off x="4434840" y="1920240"/>
-            <a:ext cx="3429000" cy="1783080"/>
+          <p:cNvPr id="9" name="Shape 7"/>
+          <p:cNvSpPr/>
+          <p:nvPr/>
+        </p:nvSpPr>
+        <p:spPr>
+          <a:xfrm>
+            <a:off x="731520" y="3337560"/>
+            <a:ext cx="10698480" cy="1207008"/>
           </a:xfrm>
           <a:prstGeom prst="roundRect">
             <a:avLst>
-              <a:gd name="adj" fmla="val 4103"/>
+              <a:gd name="adj" fmla="val 6061"/>
             </a:avLst>
           </a:prstGeom>
           <a:solidFill>
@@ -3841,30 +5390,30 @@
       </p:sp>
       <p:sp>
         <p:nvSpPr>
-          <p:cNvPr id="8" name="Text 6"/>
-          <p:cNvSpPr/>
-          <p:nvPr/>
-        </p:nvSpPr>
-        <p:spPr>
-          <a:xfrm>
-            <a:off x="4690872" y="2103120"/>
-            <a:ext cx="2926080" cy="384048"/>
-          </a:xfrm>
-          <a:prstGeom prst="rect">
-            <a:avLst/>
-          </a:prstGeom>
-          <a:noFill/>
-          <a:ln/>
-        </p:spPr>
-        <p:txBody>
-          <a:bodyPr wrap="square" lIns="0" tIns="0" rIns="0" bIns="0" rtlCol="0" anchor="ctr"/>
-          <a:lstStyle/>
-          <a:p>
-            <a:pPr indent="0" marL="0">
-              <a:buNone/>
-            </a:pPr>
-            <a:r>
-              <a:rPr lang="en-US" sz="1700" b="1" dirty="0">
+          <p:cNvPr id="10" name="Text 8"/>
+          <p:cNvSpPr/>
+          <p:nvPr/>
+        </p:nvSpPr>
+        <p:spPr>
+          <a:xfrm>
+            <a:off x="1051560" y="3483864"/>
+            <a:ext cx="5669280" cy="365760"/>
+          </a:xfrm>
+          <a:prstGeom prst="rect">
+            <a:avLst/>
+          </a:prstGeom>
+          <a:noFill/>
+          <a:ln/>
+        </p:spPr>
+        <p:txBody>
+          <a:bodyPr wrap="square" lIns="0" tIns="0" rIns="0" bIns="0" rtlCol="0" anchor="ctr"/>
+          <a:lstStyle/>
+          <a:p>
+            <a:pPr indent="0" marL="0">
+              <a:buNone/>
+            </a:pPr>
+            <a:r>
+              <a:rPr lang="en-US" sz="1900" b="1" dirty="0">
                 <a:solidFill>
                   <a:srgbClr val="14504B"/>
                 </a:solidFill>
@@ -3872,22 +5421,88 @@
                 <a:ea typeface="Yu Gothic" pitchFamily="34" charset="-122"/>
                 <a:cs typeface="Yu Gothic" pitchFamily="34" charset="-120"/>
               </a:rPr>
-              <a:t>調べたこと</a:t>
-            </a:r>
-            <a:endParaRPr lang="en-US" sz="1700" dirty="0"/>
-          </a:p>
-        </p:txBody>
-      </p:sp>
-      <p:sp>
-        <p:nvSpPr>
-          <p:cNvPr id="9" name="Text 7"/>
-          <p:cNvSpPr/>
-          <p:nvPr/>
-        </p:nvSpPr>
-        <p:spPr>
-          <a:xfrm>
-            <a:off x="4690872" y="2578608"/>
-            <a:ext cx="2971800" cy="868680"/>
+              <a:t>第三者による安全管理の評価</a:t>
+            </a:r>
+            <a:endParaRPr lang="en-US" sz="1900" dirty="0"/>
+          </a:p>
+        </p:txBody>
+      </p:sp>
+      <p:sp>
+        <p:nvSpPr>
+          <p:cNvPr id="11" name="Shape 9"/>
+          <p:cNvSpPr/>
+          <p:nvPr/>
+        </p:nvSpPr>
+        <p:spPr>
+          <a:xfrm>
+            <a:off x="6949440" y="3502152"/>
+            <a:ext cx="1371600" cy="384048"/>
+          </a:xfrm>
+          <a:prstGeom prst="roundRect">
+            <a:avLst>
+              <a:gd name="adj" fmla="val 19048"/>
+            </a:avLst>
+          </a:prstGeom>
+          <a:solidFill>
+            <a:srgbClr val="D98A2B"/>
+          </a:solidFill>
+          <a:ln w="12700">
+            <a:solidFill>
+              <a:srgbClr val="D98A2B"/>
+            </a:solidFill>
+            <a:prstDash val="solid"/>
+          </a:ln>
+        </p:spPr>
+      </p:sp>
+      <p:sp>
+        <p:nvSpPr>
+          <p:cNvPr id="12" name="Text 10"/>
+          <p:cNvSpPr/>
+          <p:nvPr/>
+        </p:nvSpPr>
+        <p:spPr>
+          <a:xfrm>
+            <a:off x="6949440" y="3502152"/>
+            <a:ext cx="1371600" cy="384048"/>
+          </a:xfrm>
+          <a:prstGeom prst="rect">
+            <a:avLst/>
+          </a:prstGeom>
+          <a:noFill/>
+          <a:ln/>
+        </p:spPr>
+        <p:txBody>
+          <a:bodyPr wrap="square" lIns="0" tIns="0" rIns="0" bIns="0" rtlCol="0" anchor="ctr"/>
+          <a:lstStyle/>
+          <a:p>
+            <a:pPr algn="ctr" indent="0" marL="0">
+              <a:buNone/>
+            </a:pPr>
+            <a:r>
+              <a:rPr lang="en-US" sz="1300" b="1" dirty="0">
+                <a:solidFill>
+                  <a:srgbClr val="FFFFFF"/>
+                </a:solidFill>
+                <a:latin typeface="Yu Gothic" pitchFamily="34" charset="0"/>
+                <a:ea typeface="Yu Gothic" pitchFamily="34" charset="-122"/>
+                <a:cs typeface="Yu Gothic" pitchFamily="34" charset="-120"/>
+              </a:rPr>
+              <a:t>未実施</a:t>
+            </a:r>
+            <a:endParaRPr lang="en-US" sz="1300" dirty="0"/>
+          </a:p>
+        </p:txBody>
+      </p:sp>
+      <p:sp>
+        <p:nvSpPr>
+          <p:cNvPr id="13" name="Text 11"/>
+          <p:cNvSpPr/>
+          <p:nvPr/>
+        </p:nvSpPr>
+        <p:spPr>
+          <a:xfrm>
+            <a:off x="1051560" y="3886200"/>
+            <a:ext cx="9966960" cy="566928"/>
           </a:xfrm>
           <a:prstGeom prst="rect">
             <a:avLst/>
@@ -3914,10 +5529,164 @@
                 <a:ea typeface="Yu Gothic" pitchFamily="34" charset="-122"/>
                 <a:cs typeface="Yu Gothic" pitchFamily="34" charset="-120"/>
               </a:rPr>
-              <a:t>1年間でBRIが</a:t>
+              <a:t>同4.3。現状は内部での確認に留まっています。</a:t>
             </a:r>
             <a:endParaRPr lang="en-US" sz="1400" dirty="0"/>
           </a:p>
+        </p:txBody>
+      </p:sp>
+      <p:sp>
+        <p:nvSpPr>
+          <p:cNvPr id="14" name="Shape 12"/>
+          <p:cNvSpPr/>
+          <p:nvPr/>
+        </p:nvSpPr>
+        <p:spPr>
+          <a:xfrm>
+            <a:off x="731520" y="4709160"/>
+            <a:ext cx="10698480" cy="1207008"/>
+          </a:xfrm>
+          <a:prstGeom prst="roundRect">
+            <a:avLst>
+              <a:gd name="adj" fmla="val 6061"/>
+            </a:avLst>
+          </a:prstGeom>
+          <a:solidFill>
+            <a:srgbClr val="F1F6F5"/>
+          </a:solidFill>
+          <a:ln w="12700">
+            <a:solidFill>
+              <a:srgbClr val="F1F6F5"/>
+            </a:solidFill>
+            <a:prstDash val="solid"/>
+          </a:ln>
+        </p:spPr>
+      </p:sp>
+      <p:sp>
+        <p:nvSpPr>
+          <p:cNvPr id="15" name="Text 13"/>
+          <p:cNvSpPr/>
+          <p:nvPr/>
+        </p:nvSpPr>
+        <p:spPr>
+          <a:xfrm>
+            <a:off x="1051560" y="4855464"/>
+            <a:ext cx="5669280" cy="365760"/>
+          </a:xfrm>
+          <a:prstGeom prst="rect">
+            <a:avLst/>
+          </a:prstGeom>
+          <a:noFill/>
+          <a:ln/>
+        </p:spPr>
+        <p:txBody>
+          <a:bodyPr wrap="square" lIns="0" tIns="0" rIns="0" bIns="0" rtlCol="0" anchor="ctr"/>
+          <a:lstStyle/>
+          <a:p>
+            <a:pPr indent="0" marL="0">
+              <a:buNone/>
+            </a:pPr>
+            <a:r>
+              <a:rPr lang="en-US" sz="1900" b="1" dirty="0">
+                <a:solidFill>
+                  <a:srgbClr val="14504B"/>
+                </a:solidFill>
+                <a:latin typeface="Yu Gothic" pitchFamily="34" charset="0"/>
+                <a:ea typeface="Yu Gothic" pitchFamily="34" charset="-122"/>
+                <a:cs typeface="Yu Gothic" pitchFamily="34" charset="-120"/>
+              </a:rPr>
+              <a:t>二要素認証の全員登録</a:t>
+            </a:r>
+            <a:endParaRPr lang="en-US" sz="1900" dirty="0"/>
+          </a:p>
+        </p:txBody>
+      </p:sp>
+      <p:sp>
+        <p:nvSpPr>
+          <p:cNvPr id="16" name="Shape 14"/>
+          <p:cNvSpPr/>
+          <p:nvPr/>
+        </p:nvSpPr>
+        <p:spPr>
+          <a:xfrm>
+            <a:off x="6949440" y="4873752"/>
+            <a:ext cx="1371600" cy="384048"/>
+          </a:xfrm>
+          <a:prstGeom prst="roundRect">
+            <a:avLst>
+              <a:gd name="adj" fmla="val 19048"/>
+            </a:avLst>
+          </a:prstGeom>
+          <a:solidFill>
+            <a:srgbClr val="D98A2B"/>
+          </a:solidFill>
+          <a:ln w="12700">
+            <a:solidFill>
+              <a:srgbClr val="D98A2B"/>
+            </a:solidFill>
+            <a:prstDash val="solid"/>
+          </a:ln>
+        </p:spPr>
+      </p:sp>
+      <p:sp>
+        <p:nvSpPr>
+          <p:cNvPr id="17" name="Text 15"/>
+          <p:cNvSpPr/>
+          <p:nvPr/>
+        </p:nvSpPr>
+        <p:spPr>
+          <a:xfrm>
+            <a:off x="6949440" y="4873752"/>
+            <a:ext cx="1371600" cy="384048"/>
+          </a:xfrm>
+          <a:prstGeom prst="rect">
+            <a:avLst/>
+          </a:prstGeom>
+          <a:noFill/>
+          <a:ln/>
+        </p:spPr>
+        <p:txBody>
+          <a:bodyPr wrap="square" lIns="0" tIns="0" rIns="0" bIns="0" rtlCol="0" anchor="ctr"/>
+          <a:lstStyle/>
+          <a:p>
+            <a:pPr algn="ctr" indent="0" marL="0">
+              <a:buNone/>
+            </a:pPr>
+            <a:r>
+              <a:rPr lang="en-US" sz="1300" b="1" dirty="0">
+                <a:solidFill>
+                  <a:srgbClr val="FFFFFF"/>
+                </a:solidFill>
+                <a:latin typeface="Yu Gothic" pitchFamily="34" charset="0"/>
+                <a:ea typeface="Yu Gothic" pitchFamily="34" charset="-122"/>
+                <a:cs typeface="Yu Gothic" pitchFamily="34" charset="-120"/>
+              </a:rPr>
+              <a:t>移行中</a:t>
+            </a:r>
+            <a:endParaRPr lang="en-US" sz="1300" dirty="0"/>
+          </a:p>
+        </p:txBody>
+      </p:sp>
+      <p:sp>
+        <p:nvSpPr>
+          <p:cNvPr id="18" name="Text 16"/>
+          <p:cNvSpPr/>
+          <p:nvPr/>
+        </p:nvSpPr>
+        <p:spPr>
+          <a:xfrm>
+            <a:off x="1051560" y="5257800"/>
+            <a:ext cx="9966960" cy="566928"/>
+          </a:xfrm>
+          <a:prstGeom prst="rect">
+            <a:avLst/>
+          </a:prstGeom>
+          <a:noFill/>
+          <a:ln/>
+        </p:spPr>
+        <p:txBody>
+          <a:bodyPr wrap="square" lIns="0" tIns="0" rIns="0" bIns="0" rtlCol="0" anchor="ctr"/>
+          <a:lstStyle/>
           <a:p>
             <a:pPr indent="0" marL="0">
               <a:lnSpc>
@@ -3934,26 +5703,46 @@
                 <a:ea typeface="Yu Gothic" pitchFamily="34" charset="-122"/>
                 <a:cs typeface="Yu Gothic" pitchFamily="34" charset="-120"/>
               </a:rPr>
-              <a:t>増えた／減った／横ばい</a:t>
+              <a:t>新規アカウントは登録必須にしました。既存の利用者は</a:t>
             </a:r>
             <a:endParaRPr lang="en-US" sz="1400" dirty="0"/>
           </a:p>
-        </p:txBody>
-      </p:sp>
-      <p:sp>
-        <p:nvSpPr>
-          <p:cNvPr id="10" name="Shape 8"/>
-          <p:cNvSpPr/>
-          <p:nvPr/>
-        </p:nvSpPr>
-        <p:spPr>
-          <a:xfrm>
-            <a:off x="8138160" y="1920240"/>
-            <a:ext cx="3429000" cy="1783080"/>
+          <a:p>
+            <a:pPr indent="0" marL="0">
+              <a:lnSpc>
+                <a:spcPct val="120000"/>
+              </a:lnSpc>
+              <a:buNone/>
+            </a:pPr>
+            <a:r>
+              <a:rPr lang="en-US" sz="1400" dirty="0">
+                <a:solidFill>
+                  <a:srgbClr val="5C6B68"/>
+                </a:solidFill>
+                <a:latin typeface="Yu Gothic" pitchFamily="34" charset="0"/>
+                <a:ea typeface="Yu Gothic" pitchFamily="34" charset="-122"/>
+                <a:cs typeface="Yu Gothic" pitchFamily="34" charset="-120"/>
+              </a:rPr>
+              <a:t>締め出さないよう、案内から順に進めています。</a:t>
+            </a:r>
+            <a:endParaRPr lang="en-US" sz="1400" dirty="0"/>
+          </a:p>
+        </p:txBody>
+      </p:sp>
+      <p:sp>
+        <p:nvSpPr>
+          <p:cNvPr id="19" name="Shape 17"/>
+          <p:cNvSpPr/>
+          <p:nvPr/>
+        </p:nvSpPr>
+        <p:spPr>
+          <a:xfrm>
+            <a:off x="731520" y="6126480"/>
+            <a:ext cx="10698480" cy="594360"/>
           </a:xfrm>
           <a:prstGeom prst="roundRect">
             <a:avLst>
-              <a:gd name="adj" fmla="val 4103"/>
+              <a:gd name="adj" fmla="val 12308"/>
             </a:avLst>
           </a:prstGeom>
           <a:solidFill>
@@ -3969,72 +5758,30 @@
       </p:sp>
       <p:sp>
         <p:nvSpPr>
-          <p:cNvPr id="11" name="Text 9"/>
-          <p:cNvSpPr/>
-          <p:nvPr/>
-        </p:nvSpPr>
-        <p:spPr>
-          <a:xfrm>
-            <a:off x="8394192" y="2103120"/>
-            <a:ext cx="2926080" cy="384048"/>
-          </a:xfrm>
-          <a:prstGeom prst="rect">
-            <a:avLst/>
-          </a:prstGeom>
-          <a:noFill/>
-          <a:ln/>
-        </p:spPr>
-        <p:txBody>
-          <a:bodyPr wrap="square" lIns="0" tIns="0" rIns="0" bIns="0" rtlCol="0" anchor="ctr"/>
-          <a:lstStyle/>
-          <a:p>
-            <a:pPr indent="0" marL="0">
-              <a:buNone/>
-            </a:pPr>
-            <a:r>
-              <a:rPr lang="en-US" sz="1700" b="1" dirty="0">
-                <a:solidFill>
-                  <a:srgbClr val="D98A2B"/>
-                </a:solidFill>
-                <a:latin typeface="Yu Gothic" pitchFamily="34" charset="0"/>
-                <a:ea typeface="Yu Gothic" pitchFamily="34" charset="-122"/>
-                <a:cs typeface="Yu Gothic" pitchFamily="34" charset="-120"/>
-              </a:rPr>
-              <a:t>分かったこと</a:t>
-            </a:r>
-            <a:endParaRPr lang="en-US" sz="1700" dirty="0"/>
-          </a:p>
-        </p:txBody>
-      </p:sp>
-      <p:sp>
-        <p:nvSpPr>
-          <p:cNvPr id="12" name="Text 10"/>
-          <p:cNvSpPr/>
-          <p:nvPr/>
-        </p:nvSpPr>
-        <p:spPr>
-          <a:xfrm>
-            <a:off x="8394192" y="2578608"/>
-            <a:ext cx="2971800" cy="868680"/>
-          </a:xfrm>
-          <a:prstGeom prst="rect">
-            <a:avLst/>
-          </a:prstGeom>
-          <a:noFill/>
-          <a:ln/>
-        </p:spPr>
-        <p:txBody>
-          <a:bodyPr wrap="square" lIns="0" tIns="0" rIns="0" bIns="0" rtlCol="0" anchor="ctr"/>
-          <a:lstStyle/>
-          <a:p>
-            <a:pPr indent="0" marL="0">
-              <a:lnSpc>
-                <a:spcPct val="120000"/>
-              </a:lnSpc>
-              <a:buNone/>
-            </a:pPr>
-            <a:r>
-              <a:rPr lang="en-US" sz="1400" dirty="0">
+          <p:cNvPr id="20" name="Text 18"/>
+          <p:cNvSpPr/>
+          <p:nvPr/>
+        </p:nvSpPr>
+        <p:spPr>
+          <a:xfrm>
+            <a:off x="1097280" y="6245352"/>
+            <a:ext cx="9875520" cy="365760"/>
+          </a:xfrm>
+          <a:prstGeom prst="rect">
+            <a:avLst/>
+          </a:prstGeom>
+          <a:noFill/>
+          <a:ln/>
+        </p:spPr>
+        <p:txBody>
+          <a:bodyPr wrap="square" lIns="0" tIns="0" rIns="0" bIns="0" rtlCol="0" anchor="ctr"/>
+          <a:lstStyle/>
+          <a:p>
+            <a:pPr indent="0" marL="0">
+              <a:buNone/>
+            </a:pPr>
+            <a:r>
+              <a:rPr lang="en-US" sz="1500" dirty="0">
                 <a:solidFill>
                   <a:srgbClr val="FFFFFF"/>
                 </a:solidFill>
@@ -4042,235 +5789,9 @@
                 <a:ea typeface="Yu Gothic" pitchFamily="34" charset="-122"/>
                 <a:cs typeface="Yu Gothic" pitchFamily="34" charset="-120"/>
               </a:rPr>
-              <a:t>増えた群で尿蛋白が</a:t>
-            </a:r>
-            <a:endParaRPr lang="en-US" sz="1400" dirty="0"/>
-          </a:p>
-          <a:p>
-            <a:pPr indent="0" marL="0">
-              <a:lnSpc>
-                <a:spcPct val="120000"/>
-              </a:lnSpc>
-              <a:buNone/>
-            </a:pPr>
-            <a:r>
-              <a:rPr lang="en-US" sz="1400" dirty="0">
-                <a:solidFill>
-                  <a:srgbClr val="FFFFFF"/>
-                </a:solidFill>
-                <a:latin typeface="Yu Gothic" pitchFamily="34" charset="0"/>
-                <a:ea typeface="Yu Gothic" pitchFamily="34" charset="-122"/>
-                <a:cs typeface="Yu Gothic" pitchFamily="34" charset="-120"/>
-              </a:rPr>
-              <a:t>新たに出やすかった</a:t>
-            </a:r>
-            <a:endParaRPr lang="en-US" sz="1400" dirty="0"/>
-          </a:p>
-        </p:txBody>
-      </p:sp>
-      <p:graphicFrame>
-        <p:nvGraphicFramePr>
-          <p:cNvPr id="13" name="Chart 0" descr=""/>
-          <p:cNvGraphicFramePr/>
-          <p:nvPr/>
-        </p:nvGraphicFramePr>
-        <p:xfrm>
-          <a:off x="731520" y="3886200"/>
-          <a:ext cx="6035040" cy="2286000"/>
-        </p:xfrm>
-        <a:graphic xmlns:a="http://schemas.openxmlformats.org/drawingml/2006/main">
-          <a:graphicData uri="http://schemas.openxmlformats.org/drawingml/2006/chart">
-            <c:chart xmlns:c="http://schemas.openxmlformats.org/drawingml/2006/chart" r:id="rId1"/>
-          </a:graphicData>
-        </a:graphic>
-      </p:graphicFrame>
-      <p:sp>
-        <p:nvSpPr>
-          <p:cNvPr id="14" name="Shape 11"/>
-          <p:cNvSpPr/>
-          <p:nvPr/>
-        </p:nvSpPr>
-        <p:spPr>
-          <a:xfrm>
-            <a:off x="7040880" y="3886200"/>
-            <a:ext cx="4389120" cy="2286000"/>
-          </a:xfrm>
-          <a:prstGeom prst="roundRect">
-            <a:avLst>
-              <a:gd name="adj" fmla="val 3200"/>
-            </a:avLst>
-          </a:prstGeom>
-          <a:solidFill>
-            <a:srgbClr val="F1F6F5"/>
-          </a:solidFill>
-          <a:ln w="12700">
-            <a:solidFill>
-              <a:srgbClr val="F1F6F5"/>
-            </a:solidFill>
-            <a:prstDash val="solid"/>
-          </a:ln>
-        </p:spPr>
-      </p:sp>
-      <p:sp>
-        <p:nvSpPr>
-          <p:cNvPr id="15" name="Text 12"/>
-          <p:cNvSpPr/>
-          <p:nvPr/>
-        </p:nvSpPr>
-        <p:spPr>
-          <a:xfrm>
-            <a:off x="7315200" y="4096512"/>
-            <a:ext cx="3931920" cy="365760"/>
-          </a:xfrm>
-          <a:prstGeom prst="rect">
-            <a:avLst/>
-          </a:prstGeom>
-          <a:noFill/>
-          <a:ln/>
-        </p:spPr>
-        <p:txBody>
-          <a:bodyPr wrap="square" lIns="0" tIns="0" rIns="0" bIns="0" rtlCol="0" anchor="ctr"/>
-          <a:lstStyle/>
-          <a:p>
-            <a:pPr indent="0" marL="0">
-              <a:buNone/>
-            </a:pPr>
-            <a:r>
-              <a:rPr lang="en-US" sz="1600" b="1" dirty="0">
-                <a:solidFill>
-                  <a:srgbClr val="14504B"/>
-                </a:solidFill>
-                <a:latin typeface="Yu Gothic" pitchFamily="34" charset="0"/>
-                <a:ea typeface="Yu Gothic" pitchFamily="34" charset="-122"/>
-                <a:cs typeface="Yu Gothic" pitchFamily="34" charset="-120"/>
-              </a:rPr>
-              <a:t>尿蛋白に注目する理由</a:t>
-            </a:r>
-            <a:endParaRPr lang="en-US" sz="1600" dirty="0"/>
-          </a:p>
-        </p:txBody>
-      </p:sp>
-      <p:sp>
-        <p:nvSpPr>
-          <p:cNvPr id="16" name="Text 13"/>
-          <p:cNvSpPr/>
-          <p:nvPr/>
-        </p:nvSpPr>
-        <p:spPr>
-          <a:xfrm>
-            <a:off x="7315200" y="4526280"/>
-            <a:ext cx="3931920" cy="731520"/>
-          </a:xfrm>
-          <a:prstGeom prst="rect">
-            <a:avLst/>
-          </a:prstGeom>
-          <a:noFill/>
-          <a:ln/>
-        </p:spPr>
-        <p:txBody>
-          <a:bodyPr wrap="square" lIns="0" tIns="0" rIns="0" bIns="0" rtlCol="0" anchor="ctr"/>
-          <a:lstStyle/>
-          <a:p>
-            <a:pPr indent="0" marL="0">
-              <a:lnSpc>
-                <a:spcPct val="125000"/>
-              </a:lnSpc>
-              <a:buNone/>
-            </a:pPr>
-            <a:r>
-              <a:rPr lang="en-US" sz="1400" dirty="0">
-                <a:solidFill>
-                  <a:srgbClr val="16211F"/>
-                </a:solidFill>
-                <a:latin typeface="Yu Gothic" pitchFamily="34" charset="0"/>
-                <a:ea typeface="Yu Gothic" pitchFamily="34" charset="-122"/>
-                <a:cs typeface="Yu Gothic" pitchFamily="34" charset="-120"/>
-              </a:rPr>
-              <a:t>腎機能の低下より先に出ることが</a:t>
-            </a:r>
-            <a:endParaRPr lang="en-US" sz="1400" dirty="0"/>
-          </a:p>
-          <a:p>
-            <a:pPr indent="0" marL="0">
-              <a:lnSpc>
-                <a:spcPct val="125000"/>
-              </a:lnSpc>
-              <a:buNone/>
-            </a:pPr>
-            <a:r>
-              <a:rPr lang="en-US" sz="1400" dirty="0">
-                <a:solidFill>
-                  <a:srgbClr val="16211F"/>
-                </a:solidFill>
-                <a:latin typeface="Yu Gothic" pitchFamily="34" charset="0"/>
-                <a:ea typeface="Yu Gothic" pitchFamily="34" charset="-122"/>
-                <a:cs typeface="Yu Gothic" pitchFamily="34" charset="-120"/>
-              </a:rPr>
-              <a:t>多く、早い段階で気づけます。</a:t>
-            </a:r>
-            <a:endParaRPr lang="en-US" sz="1400" dirty="0"/>
-          </a:p>
-        </p:txBody>
-      </p:sp>
-      <p:sp>
-        <p:nvSpPr>
-          <p:cNvPr id="17" name="Text 14"/>
-          <p:cNvSpPr/>
-          <p:nvPr/>
-        </p:nvSpPr>
-        <p:spPr>
-          <a:xfrm>
-            <a:off x="7315200" y="5349240"/>
-            <a:ext cx="3931920" cy="685800"/>
-          </a:xfrm>
-          <a:prstGeom prst="rect">
-            <a:avLst/>
-          </a:prstGeom>
-          <a:noFill/>
-          <a:ln/>
-        </p:spPr>
-        <p:txBody>
-          <a:bodyPr wrap="square" lIns="0" tIns="0" rIns="0" bIns="0" rtlCol="0" anchor="ctr"/>
-          <a:lstStyle/>
-          <a:p>
-            <a:pPr indent="0" marL="0">
-              <a:lnSpc>
-                <a:spcPct val="120000"/>
-              </a:lnSpc>
-              <a:buNone/>
-            </a:pPr>
-            <a:r>
-              <a:rPr lang="en-US" sz="1300" dirty="0">
-                <a:solidFill>
-                  <a:srgbClr val="5C6B68"/>
-                </a:solidFill>
-                <a:latin typeface="Yu Gothic" pitchFamily="34" charset="0"/>
-                <a:ea typeface="Yu Gothic" pitchFamily="34" charset="-122"/>
-                <a:cs typeface="Yu Gothic" pitchFamily="34" charset="-120"/>
-              </a:rPr>
-              <a:t>BRIが増えた群のリスク上昇は、</a:t>
-            </a:r>
-            <a:endParaRPr lang="en-US" sz="1300" dirty="0"/>
-          </a:p>
-          <a:p>
-            <a:pPr indent="0" marL="0">
-              <a:lnSpc>
-                <a:spcPct val="120000"/>
-              </a:lnSpc>
-              <a:buNone/>
-            </a:pPr>
-            <a:r>
-              <a:rPr lang="en-US" sz="1300" dirty="0">
-                <a:solidFill>
-                  <a:srgbClr val="5C6B68"/>
-                </a:solidFill>
-                <a:latin typeface="Yu Gothic" pitchFamily="34" charset="0"/>
-                <a:ea typeface="Yu Gothic" pitchFamily="34" charset="-122"/>
-                <a:cs typeface="Yu Gothic" pitchFamily="34" charset="-120"/>
-              </a:rPr>
-              <a:t>BMIの変化を調整しても残りました。</a:t>
-            </a:r>
-            <a:endParaRPr lang="en-US" sz="1300" dirty="0"/>
+              <a:t>未対応の一覧は開示書にそのまま載せています。ご確認のうえ判断してください。</a:t>
+            </a:r>
+            <a:endParaRPr lang="en-US" sz="1500" dirty="0"/>
           </a:p>
         </p:txBody>
       </p:sp>
@@ -4288,7 +5809,7 @@
     <p:bg>
       <p:bgPr>
         <a:solidFill>
-          <a:srgbClr val="FFFFFF"/>
+          <a:srgbClr val="14504B"/>
         </a:solidFill>
       </p:bgPr>
     </p:bg>
@@ -4308,119 +5829,14 @@
       </p:grpSpPr>
       <p:sp>
         <p:nvSpPr>
-          <p:cNvPr id="2" name="Text 0"/>
-          <p:cNvSpPr/>
-          <p:nvPr/>
-        </p:nvSpPr>
-        <p:spPr>
-          <a:xfrm>
-            <a:off x="731520" y="411480"/>
-            <a:ext cx="10698480" cy="777240"/>
-          </a:xfrm>
-          <a:prstGeom prst="rect">
-            <a:avLst/>
-          </a:prstGeom>
-          <a:noFill/>
-          <a:ln/>
-        </p:spPr>
-        <p:txBody>
-          <a:bodyPr wrap="square" lIns="0" tIns="0" rIns="0" bIns="0" rtlCol="0" anchor="ctr"/>
-          <a:lstStyle/>
-          <a:p>
-            <a:pPr indent="0" marL="0">
-              <a:buNone/>
-            </a:pPr>
-            <a:r>
-              <a:rPr lang="en-US" sz="3600" b="1" dirty="0">
-                <a:solidFill>
-                  <a:srgbClr val="14504B"/>
-                </a:solidFill>
-                <a:latin typeface="Yu Gothic" pitchFamily="34" charset="0"/>
-                <a:ea typeface="Yu Gothic" pitchFamily="34" charset="-122"/>
-                <a:cs typeface="Yu Gothic" pitchFamily="34" charset="-120"/>
-              </a:rPr>
-              <a:t>どう現場で使えるか</a:t>
-            </a:r>
-            <a:endParaRPr lang="en-US" sz="3600" dirty="0"/>
-          </a:p>
-        </p:txBody>
-      </p:sp>
-      <p:sp>
-        <p:nvSpPr>
-          <p:cNvPr id="3" name="Text 1"/>
-          <p:cNvSpPr/>
-          <p:nvPr/>
-        </p:nvSpPr>
-        <p:spPr>
-          <a:xfrm>
-            <a:off x="731520" y="1225296"/>
-            <a:ext cx="10698480" cy="411480"/>
-          </a:xfrm>
-          <a:prstGeom prst="rect">
-            <a:avLst/>
-          </a:prstGeom>
-          <a:noFill/>
-          <a:ln/>
-        </p:spPr>
-        <p:txBody>
-          <a:bodyPr wrap="square" lIns="0" tIns="0" rIns="0" bIns="0" rtlCol="0" anchor="ctr"/>
-          <a:lstStyle/>
-          <a:p>
-            <a:pPr indent="0" marL="0">
-              <a:buNone/>
-            </a:pPr>
-            <a:r>
-              <a:rPr lang="en-US" sz="1600" dirty="0">
-                <a:solidFill>
-                  <a:srgbClr val="5C6B68"/>
-                </a:solidFill>
-                <a:latin typeface="Yu Gothic" pitchFamily="34" charset="0"/>
-                <a:ea typeface="Yu Gothic" pitchFamily="34" charset="-122"/>
-                <a:cs typeface="Yu Gothic" pitchFamily="34" charset="-120"/>
-              </a:rPr>
-              <a:t>研究を、健診の場での実践につなげる</a:t>
-            </a:r>
-            <a:endParaRPr lang="en-US" sz="1600" dirty="0"/>
-          </a:p>
-        </p:txBody>
-      </p:sp>
-      <p:sp>
-        <p:nvSpPr>
-          <p:cNvPr id="4" name="Shape 2"/>
-          <p:cNvSpPr/>
-          <p:nvPr/>
-        </p:nvSpPr>
-        <p:spPr>
-          <a:xfrm>
-            <a:off x="731520" y="1920240"/>
-            <a:ext cx="3429000" cy="2743200"/>
-          </a:xfrm>
-          <a:prstGeom prst="roundRect">
-            <a:avLst>
-              <a:gd name="adj" fmla="val 2667"/>
-            </a:avLst>
-          </a:prstGeom>
-          <a:solidFill>
-            <a:srgbClr val="F1F6F5"/>
-          </a:solidFill>
-          <a:ln w="12700">
-            <a:solidFill>
-              <a:srgbClr val="F1F6F5"/>
-            </a:solidFill>
-            <a:prstDash val="solid"/>
-          </a:ln>
-        </p:spPr>
-      </p:sp>
-      <p:sp>
-        <p:nvSpPr>
-          <p:cNvPr id="5" name="Shape 3"/>
-          <p:cNvSpPr/>
-          <p:nvPr/>
-        </p:nvSpPr>
-        <p:spPr>
-          <a:xfrm>
-            <a:off x="987552" y="2148840"/>
-            <a:ext cx="502920" cy="502920"/>
+          <p:cNvPr id="2" name="Shape 0"/>
+          <p:cNvSpPr/>
+          <p:nvPr/>
+        </p:nvSpPr>
+        <p:spPr>
+          <a:xfrm>
+            <a:off x="914400" y="2240280"/>
+            <a:ext cx="1005840" cy="1005840"/>
           </a:xfrm>
           <a:prstGeom prst="ellipse">
             <a:avLst/>
@@ -4438,30 +5854,170 @@
       </p:sp>
       <p:sp>
         <p:nvSpPr>
+          <p:cNvPr id="3" name="Text 1"/>
+          <p:cNvSpPr/>
+          <p:nvPr/>
+        </p:nvSpPr>
+        <p:spPr>
+          <a:xfrm>
+            <a:off x="914400" y="2240280"/>
+            <a:ext cx="1005840" cy="1005840"/>
+          </a:xfrm>
+          <a:prstGeom prst="rect">
+            <a:avLst/>
+          </a:prstGeom>
+          <a:noFill/>
+          <a:ln/>
+        </p:spPr>
+        <p:txBody>
+          <a:bodyPr wrap="square" lIns="0" tIns="0" rIns="0" bIns="0" rtlCol="0" anchor="ctr"/>
+          <a:lstStyle/>
+          <a:p>
+            <a:pPr algn="ctr" indent="0" marL="0">
+              <a:buNone/>
+            </a:pPr>
+            <a:r>
+              <a:rPr lang="en-US" sz="2600" b="1" dirty="0">
+                <a:solidFill>
+                  <a:srgbClr val="FFFFFF"/>
+                </a:solidFill>
+                <a:latin typeface="Yu Gothic" pitchFamily="34" charset="0"/>
+                <a:ea typeface="Yu Gothic" pitchFamily="34" charset="-122"/>
+                <a:cs typeface="Yu Gothic" pitchFamily="34" charset="-120"/>
+              </a:rPr>
+              <a:t>2</a:t>
+            </a:r>
+            <a:endParaRPr lang="en-US" sz="2600" dirty="0"/>
+          </a:p>
+        </p:txBody>
+      </p:sp>
+      <p:sp>
+        <p:nvSpPr>
+          <p:cNvPr id="4" name="Text 2"/>
+          <p:cNvSpPr/>
+          <p:nvPr/>
+        </p:nvSpPr>
+        <p:spPr>
+          <a:xfrm>
+            <a:off x="2286000" y="1874520"/>
+            <a:ext cx="9326880" cy="1828800"/>
+          </a:xfrm>
+          <a:prstGeom prst="rect">
+            <a:avLst/>
+          </a:prstGeom>
+          <a:noFill/>
+          <a:ln/>
+        </p:spPr>
+        <p:txBody>
+          <a:bodyPr wrap="square" lIns="0" tIns="0" rIns="0" bIns="0" rtlCol="0" anchor="ctr"/>
+          <a:lstStyle/>
+          <a:p>
+            <a:pPr indent="0" marL="0">
+              <a:lnSpc>
+                <a:spcPct val="125000"/>
+              </a:lnSpc>
+              <a:buNone/>
+            </a:pPr>
+            <a:r>
+              <a:rPr lang="en-US" sz="3800" b="1" dirty="0">
+                <a:solidFill>
+                  <a:srgbClr val="FFFFFF"/>
+                </a:solidFill>
+                <a:latin typeface="Yu Gothic" pitchFamily="34" charset="0"/>
+                <a:ea typeface="Yu Gothic" pitchFamily="34" charset="-122"/>
+                <a:cs typeface="Yu Gothic" pitchFamily="34" charset="-120"/>
+              </a:rPr>
+              <a:t>健診データを</a:t>
+            </a:r>
+            <a:endParaRPr lang="en-US" sz="3800" dirty="0"/>
+          </a:p>
+          <a:p>
+            <a:pPr indent="0" marL="0">
+              <a:lnSpc>
+                <a:spcPct val="125000"/>
+              </a:lnSpc>
+              <a:buNone/>
+            </a:pPr>
+            <a:r>
+              <a:rPr lang="en-US" sz="3800" b="1" dirty="0">
+                <a:solidFill>
+                  <a:srgbClr val="FFFFFF"/>
+                </a:solidFill>
+                <a:latin typeface="Yu Gothic" pitchFamily="34" charset="0"/>
+                <a:ea typeface="Yu Gothic" pitchFamily="34" charset="-122"/>
+                <a:cs typeface="Yu Gothic" pitchFamily="34" charset="-120"/>
+              </a:rPr>
+              <a:t>プライマリケアにどう活かすか</a:t>
+            </a:r>
+            <a:endParaRPr lang="en-US" sz="3800" dirty="0"/>
+          </a:p>
+        </p:txBody>
+      </p:sp>
+      <p:sp>
+        <p:nvSpPr>
+          <p:cNvPr id="5" name="Text 3"/>
+          <p:cNvSpPr/>
+          <p:nvPr/>
+        </p:nvSpPr>
+        <p:spPr>
+          <a:xfrm>
+            <a:off x="2286000" y="3931920"/>
+            <a:ext cx="9326880" cy="457200"/>
+          </a:xfrm>
+          <a:prstGeom prst="rect">
+            <a:avLst/>
+          </a:prstGeom>
+          <a:noFill/>
+          <a:ln/>
+        </p:spPr>
+        <p:txBody>
+          <a:bodyPr wrap="square" lIns="0" tIns="0" rIns="0" bIns="0" rtlCol="0" anchor="ctr"/>
+          <a:lstStyle/>
+          <a:p>
+            <a:pPr indent="0" marL="0">
+              <a:buNone/>
+            </a:pPr>
+            <a:r>
+              <a:rPr lang="en-US" sz="1800" dirty="0">
+                <a:solidFill>
+                  <a:srgbClr val="A8CFC9"/>
+                </a:solidFill>
+                <a:latin typeface="Yu Gothic" pitchFamily="34" charset="0"/>
+                <a:ea typeface="Yu Gothic" pitchFamily="34" charset="-122"/>
+                <a:cs typeface="Yu Gothic" pitchFamily="34" charset="-120"/>
+              </a:rPr>
+              <a:t>毎年集まっている特定健診データを、予防のための判断に変える</a:t>
+            </a:r>
+            <a:endParaRPr lang="en-US" sz="1800" dirty="0"/>
+          </a:p>
+        </p:txBody>
+      </p:sp>
+      <p:sp>
+        <p:nvSpPr>
           <p:cNvPr id="6" name="Text 4"/>
           <p:cNvSpPr/>
           <p:nvPr/>
         </p:nvSpPr>
         <p:spPr>
           <a:xfrm>
-            <a:off x="987552" y="2148840"/>
-            <a:ext cx="502920" cy="502920"/>
-          </a:xfrm>
-          <a:prstGeom prst="rect">
-            <a:avLst/>
-          </a:prstGeom>
-          <a:noFill/>
-          <a:ln/>
-        </p:spPr>
-        <p:txBody>
-          <a:bodyPr wrap="square" lIns="0" tIns="0" rIns="0" bIns="0" rtlCol="0" anchor="ctr"/>
-          <a:lstStyle/>
-          <a:p>
-            <a:pPr algn="ctr" indent="0" marL="0">
-              <a:buNone/>
-            </a:pPr>
-            <a:r>
-              <a:rPr lang="en-US" sz="1700" b="1" dirty="0">
+            <a:off x="2286000" y="4892040"/>
+            <a:ext cx="9326880" cy="411480"/>
+          </a:xfrm>
+          <a:prstGeom prst="rect">
+            <a:avLst/>
+          </a:prstGeom>
+          <a:noFill/>
+          <a:ln/>
+        </p:spPr>
+        <p:txBody>
+          <a:bodyPr wrap="square" lIns="0" tIns="0" rIns="0" bIns="0" rtlCol="0" anchor="ctr"/>
+          <a:lstStyle/>
+          <a:p>
+            <a:pPr indent="0" marL="0">
+              <a:buNone/>
+            </a:pPr>
+            <a:r>
+              <a:rPr lang="en-US" sz="1500" dirty="0">
                 <a:solidFill>
                   <a:srgbClr val="FFFFFF"/>
                 </a:solidFill>
@@ -4469,620 +6025,9 @@
                 <a:ea typeface="Yu Gothic" pitchFamily="34" charset="-122"/>
                 <a:cs typeface="Yu Gothic" pitchFamily="34" charset="-120"/>
               </a:rPr>
-              <a:t>①</a:t>
-            </a:r>
-            <a:endParaRPr lang="en-US" sz="1700" dirty="0"/>
-          </a:p>
-        </p:txBody>
-      </p:sp>
-      <p:sp>
-        <p:nvSpPr>
-          <p:cNvPr id="7" name="Text 5"/>
-          <p:cNvSpPr/>
-          <p:nvPr/>
-        </p:nvSpPr>
-        <p:spPr>
-          <a:xfrm>
-            <a:off x="987552" y="2834640"/>
-            <a:ext cx="3017520" cy="411480"/>
-          </a:xfrm>
-          <a:prstGeom prst="rect">
-            <a:avLst/>
-          </a:prstGeom>
-          <a:noFill/>
-          <a:ln/>
-        </p:spPr>
-        <p:txBody>
-          <a:bodyPr wrap="square" lIns="0" tIns="0" rIns="0" bIns="0" rtlCol="0" anchor="ctr"/>
-          <a:lstStyle/>
-          <a:p>
-            <a:pPr indent="0" marL="0">
-              <a:buNone/>
-            </a:pPr>
-            <a:r>
-              <a:rPr lang="en-US" sz="1700" b="1" dirty="0">
-                <a:solidFill>
-                  <a:srgbClr val="14504B"/>
-                </a:solidFill>
-                <a:latin typeface="Yu Gothic" pitchFamily="34" charset="0"/>
-                <a:ea typeface="Yu Gothic" pitchFamily="34" charset="-122"/>
-                <a:cs typeface="Yu Gothic" pitchFamily="34" charset="-120"/>
-              </a:rPr>
-              <a:t>道具がいらない</a:t>
-            </a:r>
-            <a:endParaRPr lang="en-US" sz="1700" dirty="0"/>
-          </a:p>
-        </p:txBody>
-      </p:sp>
-      <p:sp>
-        <p:nvSpPr>
-          <p:cNvPr id="8" name="Text 6"/>
-          <p:cNvSpPr/>
-          <p:nvPr/>
-        </p:nvSpPr>
-        <p:spPr>
-          <a:xfrm>
-            <a:off x="987552" y="3346704"/>
-            <a:ext cx="3017520" cy="1188720"/>
-          </a:xfrm>
-          <a:prstGeom prst="rect">
-            <a:avLst/>
-          </a:prstGeom>
-          <a:noFill/>
-          <a:ln/>
-        </p:spPr>
-        <p:txBody>
-          <a:bodyPr wrap="square" lIns="0" tIns="0" rIns="0" bIns="0" rtlCol="0" anchor="ctr"/>
-          <a:lstStyle/>
-          <a:p>
-            <a:pPr indent="0" marL="0">
-              <a:lnSpc>
-                <a:spcPct val="130000"/>
-              </a:lnSpc>
-              <a:buNone/>
-            </a:pPr>
-            <a:r>
-              <a:rPr lang="en-US" sz="1400" dirty="0">
-                <a:solidFill>
-                  <a:srgbClr val="5C6B68"/>
-                </a:solidFill>
-                <a:latin typeface="Yu Gothic" pitchFamily="34" charset="0"/>
-                <a:ea typeface="Yu Gothic" pitchFamily="34" charset="-122"/>
-                <a:cs typeface="Yu Gothic" pitchFamily="34" charset="-120"/>
-              </a:rPr>
-              <a:t>メジャーと身長計だけ。</a:t>
-            </a:r>
-            <a:endParaRPr lang="en-US" sz="1400" dirty="0"/>
-          </a:p>
-          <a:p>
-            <a:pPr indent="0" marL="0">
-              <a:lnSpc>
-                <a:spcPct val="130000"/>
-              </a:lnSpc>
-              <a:buNone/>
-            </a:pPr>
-            <a:r>
-              <a:rPr lang="en-US" sz="1400" dirty="0">
-                <a:solidFill>
-                  <a:srgbClr val="5C6B68"/>
-                </a:solidFill>
-                <a:latin typeface="Yu Gothic" pitchFamily="34" charset="0"/>
-                <a:ea typeface="Yu Gothic" pitchFamily="34" charset="-122"/>
-                <a:cs typeface="Yu Gothic" pitchFamily="34" charset="-120"/>
-              </a:rPr>
-              <a:t>特別な機器がなくても</a:t>
-            </a:r>
-            <a:endParaRPr lang="en-US" sz="1400" dirty="0"/>
-          </a:p>
-          <a:p>
-            <a:pPr indent="0" marL="0">
-              <a:lnSpc>
-                <a:spcPct val="130000"/>
-              </a:lnSpc>
-              <a:buNone/>
-            </a:pPr>
-            <a:r>
-              <a:rPr lang="en-US" sz="1400" dirty="0">
-                <a:solidFill>
-                  <a:srgbClr val="5C6B68"/>
-                </a:solidFill>
-                <a:latin typeface="Yu Gothic" pitchFamily="34" charset="0"/>
-                <a:ea typeface="Yu Gothic" pitchFamily="34" charset="-122"/>
-                <a:cs typeface="Yu Gothic" pitchFamily="34" charset="-120"/>
-              </a:rPr>
-              <a:t>どの会場でも計算できる</a:t>
-            </a:r>
-            <a:endParaRPr lang="en-US" sz="1400" dirty="0"/>
-          </a:p>
-        </p:txBody>
-      </p:sp>
-      <p:sp>
-        <p:nvSpPr>
-          <p:cNvPr id="9" name="Shape 7"/>
-          <p:cNvSpPr/>
-          <p:nvPr/>
-        </p:nvSpPr>
-        <p:spPr>
-          <a:xfrm>
-            <a:off x="4434840" y="1920240"/>
-            <a:ext cx="3429000" cy="2743200"/>
-          </a:xfrm>
-          <a:prstGeom prst="roundRect">
-            <a:avLst>
-              <a:gd name="adj" fmla="val 2667"/>
-            </a:avLst>
-          </a:prstGeom>
-          <a:solidFill>
-            <a:srgbClr val="F1F6F5"/>
-          </a:solidFill>
-          <a:ln w="12700">
-            <a:solidFill>
-              <a:srgbClr val="F1F6F5"/>
-            </a:solidFill>
-            <a:prstDash val="solid"/>
-          </a:ln>
-        </p:spPr>
-      </p:sp>
-      <p:sp>
-        <p:nvSpPr>
-          <p:cNvPr id="10" name="Shape 8"/>
-          <p:cNvSpPr/>
-          <p:nvPr/>
-        </p:nvSpPr>
-        <p:spPr>
-          <a:xfrm>
-            <a:off x="4690872" y="2148840"/>
-            <a:ext cx="502920" cy="502920"/>
-          </a:xfrm>
-          <a:prstGeom prst="ellipse">
-            <a:avLst/>
-          </a:prstGeom>
-          <a:solidFill>
-            <a:srgbClr val="D98A2B"/>
-          </a:solidFill>
-          <a:ln w="12700">
-            <a:solidFill>
-              <a:srgbClr val="D98A2B"/>
-            </a:solidFill>
-            <a:prstDash val="solid"/>
-          </a:ln>
-        </p:spPr>
-      </p:sp>
-      <p:sp>
-        <p:nvSpPr>
-          <p:cNvPr id="11" name="Text 9"/>
-          <p:cNvSpPr/>
-          <p:nvPr/>
-        </p:nvSpPr>
-        <p:spPr>
-          <a:xfrm>
-            <a:off x="4690872" y="2148840"/>
-            <a:ext cx="502920" cy="502920"/>
-          </a:xfrm>
-          <a:prstGeom prst="rect">
-            <a:avLst/>
-          </a:prstGeom>
-          <a:noFill/>
-          <a:ln/>
-        </p:spPr>
-        <p:txBody>
-          <a:bodyPr wrap="square" lIns="0" tIns="0" rIns="0" bIns="0" rtlCol="0" anchor="ctr"/>
-          <a:lstStyle/>
-          <a:p>
-            <a:pPr algn="ctr" indent="0" marL="0">
-              <a:buNone/>
-            </a:pPr>
-            <a:r>
-              <a:rPr lang="en-US" sz="1700" b="1" dirty="0">
-                <a:solidFill>
-                  <a:srgbClr val="FFFFFF"/>
-                </a:solidFill>
-                <a:latin typeface="Yu Gothic" pitchFamily="34" charset="0"/>
-                <a:ea typeface="Yu Gothic" pitchFamily="34" charset="-122"/>
-                <a:cs typeface="Yu Gothic" pitchFamily="34" charset="-120"/>
-              </a:rPr>
-              <a:t>②</a:t>
-            </a:r>
-            <a:endParaRPr lang="en-US" sz="1700" dirty="0"/>
-          </a:p>
-        </p:txBody>
-      </p:sp>
-      <p:sp>
-        <p:nvSpPr>
-          <p:cNvPr id="12" name="Text 10"/>
-          <p:cNvSpPr/>
-          <p:nvPr/>
-        </p:nvSpPr>
-        <p:spPr>
-          <a:xfrm>
-            <a:off x="4690872" y="2834640"/>
-            <a:ext cx="3017520" cy="411480"/>
-          </a:xfrm>
-          <a:prstGeom prst="rect">
-            <a:avLst/>
-          </a:prstGeom>
-          <a:noFill/>
-          <a:ln/>
-        </p:spPr>
-        <p:txBody>
-          <a:bodyPr wrap="square" lIns="0" tIns="0" rIns="0" bIns="0" rtlCol="0" anchor="ctr"/>
-          <a:lstStyle/>
-          <a:p>
-            <a:pPr indent="0" marL="0">
-              <a:buNone/>
-            </a:pPr>
-            <a:r>
-              <a:rPr lang="en-US" sz="1700" b="1" dirty="0">
-                <a:solidFill>
-                  <a:srgbClr val="14504B"/>
-                </a:solidFill>
-                <a:latin typeface="Yu Gothic" pitchFamily="34" charset="0"/>
-                <a:ea typeface="Yu Gothic" pitchFamily="34" charset="-122"/>
-                <a:cs typeface="Yu Gothic" pitchFamily="34" charset="-120"/>
-              </a:rPr>
-              <a:t>声のかけ方が変わる</a:t>
-            </a:r>
-            <a:endParaRPr lang="en-US" sz="1700" dirty="0"/>
-          </a:p>
-        </p:txBody>
-      </p:sp>
-      <p:sp>
-        <p:nvSpPr>
-          <p:cNvPr id="13" name="Text 11"/>
-          <p:cNvSpPr/>
-          <p:nvPr/>
-        </p:nvSpPr>
-        <p:spPr>
-          <a:xfrm>
-            <a:off x="4690872" y="3346704"/>
-            <a:ext cx="3017520" cy="1188720"/>
-          </a:xfrm>
-          <a:prstGeom prst="rect">
-            <a:avLst/>
-          </a:prstGeom>
-          <a:noFill/>
-          <a:ln/>
-        </p:spPr>
-        <p:txBody>
-          <a:bodyPr wrap="square" lIns="0" tIns="0" rIns="0" bIns="0" rtlCol="0" anchor="ctr"/>
-          <a:lstStyle/>
-          <a:p>
-            <a:pPr indent="0" marL="0">
-              <a:lnSpc>
-                <a:spcPct val="130000"/>
-              </a:lnSpc>
-              <a:buNone/>
-            </a:pPr>
-            <a:r>
-              <a:rPr lang="en-US" sz="1400" dirty="0">
-                <a:solidFill>
-                  <a:srgbClr val="5C6B68"/>
-                </a:solidFill>
-                <a:latin typeface="Yu Gothic" pitchFamily="34" charset="0"/>
-                <a:ea typeface="Yu Gothic" pitchFamily="34" charset="-122"/>
-                <a:cs typeface="Yu Gothic" pitchFamily="34" charset="-120"/>
-              </a:rPr>
-              <a:t>「太っています」ではなく</a:t>
-            </a:r>
-            <a:endParaRPr lang="en-US" sz="1400" dirty="0"/>
-          </a:p>
-          <a:p>
-            <a:pPr indent="0" marL="0">
-              <a:lnSpc>
-                <a:spcPct val="130000"/>
-              </a:lnSpc>
-              <a:buNone/>
-            </a:pPr>
-            <a:r>
-              <a:rPr lang="en-US" sz="1400" dirty="0">
-                <a:solidFill>
-                  <a:srgbClr val="5C6B68"/>
-                </a:solidFill>
-                <a:latin typeface="Yu Gothic" pitchFamily="34" charset="0"/>
-                <a:ea typeface="Yu Gothic" pitchFamily="34" charset="-122"/>
-                <a:cs typeface="Yu Gothic" pitchFamily="34" charset="-120"/>
-              </a:rPr>
-              <a:t>「去年より増えています」。</a:t>
-            </a:r>
-            <a:endParaRPr lang="en-US" sz="1400" dirty="0"/>
-          </a:p>
-          <a:p>
-            <a:pPr indent="0" marL="0">
-              <a:lnSpc>
-                <a:spcPct val="130000"/>
-              </a:lnSpc>
-              <a:buNone/>
-            </a:pPr>
-            <a:r>
-              <a:rPr lang="en-US" sz="1400" dirty="0">
-                <a:solidFill>
-                  <a:srgbClr val="5C6B68"/>
-                </a:solidFill>
-                <a:latin typeface="Yu Gothic" pitchFamily="34" charset="0"/>
-                <a:ea typeface="Yu Gothic" pitchFamily="34" charset="-122"/>
-                <a:cs typeface="Yu Gothic" pitchFamily="34" charset="-120"/>
-              </a:rPr>
-              <a:t>本人も実感しやすい</a:t>
-            </a:r>
-            <a:endParaRPr lang="en-US" sz="1400" dirty="0"/>
-          </a:p>
-        </p:txBody>
-      </p:sp>
-      <p:sp>
-        <p:nvSpPr>
-          <p:cNvPr id="14" name="Shape 12"/>
-          <p:cNvSpPr/>
-          <p:nvPr/>
-        </p:nvSpPr>
-        <p:spPr>
-          <a:xfrm>
-            <a:off x="8138160" y="1920240"/>
-            <a:ext cx="3429000" cy="2743200"/>
-          </a:xfrm>
-          <a:prstGeom prst="roundRect">
-            <a:avLst>
-              <a:gd name="adj" fmla="val 2667"/>
-            </a:avLst>
-          </a:prstGeom>
-          <a:solidFill>
-            <a:srgbClr val="F1F6F5"/>
-          </a:solidFill>
-          <a:ln w="12700">
-            <a:solidFill>
-              <a:srgbClr val="F1F6F5"/>
-            </a:solidFill>
-            <a:prstDash val="solid"/>
-          </a:ln>
-        </p:spPr>
-      </p:sp>
-      <p:sp>
-        <p:nvSpPr>
-          <p:cNvPr id="15" name="Shape 13"/>
-          <p:cNvSpPr/>
-          <p:nvPr/>
-        </p:nvSpPr>
-        <p:spPr>
-          <a:xfrm>
-            <a:off x="8394192" y="2148840"/>
-            <a:ext cx="502920" cy="502920"/>
-          </a:xfrm>
-          <a:prstGeom prst="ellipse">
-            <a:avLst/>
-          </a:prstGeom>
-          <a:solidFill>
-            <a:srgbClr val="D98A2B"/>
-          </a:solidFill>
-          <a:ln w="12700">
-            <a:solidFill>
-              <a:srgbClr val="D98A2B"/>
-            </a:solidFill>
-            <a:prstDash val="solid"/>
-          </a:ln>
-        </p:spPr>
-      </p:sp>
-      <p:sp>
-        <p:nvSpPr>
-          <p:cNvPr id="16" name="Text 14"/>
-          <p:cNvSpPr/>
-          <p:nvPr/>
-        </p:nvSpPr>
-        <p:spPr>
-          <a:xfrm>
-            <a:off x="8394192" y="2148840"/>
-            <a:ext cx="502920" cy="502920"/>
-          </a:xfrm>
-          <a:prstGeom prst="rect">
-            <a:avLst/>
-          </a:prstGeom>
-          <a:noFill/>
-          <a:ln/>
-        </p:spPr>
-        <p:txBody>
-          <a:bodyPr wrap="square" lIns="0" tIns="0" rIns="0" bIns="0" rtlCol="0" anchor="ctr"/>
-          <a:lstStyle/>
-          <a:p>
-            <a:pPr algn="ctr" indent="0" marL="0">
-              <a:buNone/>
-            </a:pPr>
-            <a:r>
-              <a:rPr lang="en-US" sz="1700" b="1" dirty="0">
-                <a:solidFill>
-                  <a:srgbClr val="FFFFFF"/>
-                </a:solidFill>
-                <a:latin typeface="Yu Gothic" pitchFamily="34" charset="0"/>
-                <a:ea typeface="Yu Gothic" pitchFamily="34" charset="-122"/>
-                <a:cs typeface="Yu Gothic" pitchFamily="34" charset="-120"/>
-              </a:rPr>
-              <a:t>③</a:t>
-            </a:r>
-            <a:endParaRPr lang="en-US" sz="1700" dirty="0"/>
-          </a:p>
-        </p:txBody>
-      </p:sp>
-      <p:sp>
-        <p:nvSpPr>
-          <p:cNvPr id="17" name="Text 15"/>
-          <p:cNvSpPr/>
-          <p:nvPr/>
-        </p:nvSpPr>
-        <p:spPr>
-          <a:xfrm>
-            <a:off x="8394192" y="2834640"/>
-            <a:ext cx="3017520" cy="411480"/>
-          </a:xfrm>
-          <a:prstGeom prst="rect">
-            <a:avLst/>
-          </a:prstGeom>
-          <a:noFill/>
-          <a:ln/>
-        </p:spPr>
-        <p:txBody>
-          <a:bodyPr wrap="square" lIns="0" tIns="0" rIns="0" bIns="0" rtlCol="0" anchor="ctr"/>
-          <a:lstStyle/>
-          <a:p>
-            <a:pPr indent="0" marL="0">
-              <a:buNone/>
-            </a:pPr>
-            <a:r>
-              <a:rPr lang="en-US" sz="1700" b="1" dirty="0">
-                <a:solidFill>
-                  <a:srgbClr val="14504B"/>
-                </a:solidFill>
-                <a:latin typeface="Yu Gothic" pitchFamily="34" charset="0"/>
-                <a:ea typeface="Yu Gothic" pitchFamily="34" charset="-122"/>
-                <a:cs typeface="Yu Gothic" pitchFamily="34" charset="-120"/>
-              </a:rPr>
-              <a:t>優先順位がつけられる</a:t>
-            </a:r>
-            <a:endParaRPr lang="en-US" sz="1700" dirty="0"/>
-          </a:p>
-        </p:txBody>
-      </p:sp>
-      <p:sp>
-        <p:nvSpPr>
-          <p:cNvPr id="18" name="Text 16"/>
-          <p:cNvSpPr/>
-          <p:nvPr/>
-        </p:nvSpPr>
-        <p:spPr>
-          <a:xfrm>
-            <a:off x="8394192" y="3346704"/>
-            <a:ext cx="3017520" cy="1188720"/>
-          </a:xfrm>
-          <a:prstGeom prst="rect">
-            <a:avLst/>
-          </a:prstGeom>
-          <a:noFill/>
-          <a:ln/>
-        </p:spPr>
-        <p:txBody>
-          <a:bodyPr wrap="square" lIns="0" tIns="0" rIns="0" bIns="0" rtlCol="0" anchor="ctr"/>
-          <a:lstStyle/>
-          <a:p>
-            <a:pPr indent="0" marL="0">
-              <a:lnSpc>
-                <a:spcPct val="130000"/>
-              </a:lnSpc>
-              <a:buNone/>
-            </a:pPr>
-            <a:r>
-              <a:rPr lang="en-US" sz="1400" dirty="0">
-                <a:solidFill>
-                  <a:srgbClr val="5C6B68"/>
-                </a:solidFill>
-                <a:latin typeface="Yu Gothic" pitchFamily="34" charset="0"/>
-                <a:ea typeface="Yu Gothic" pitchFamily="34" charset="-122"/>
-                <a:cs typeface="Yu Gothic" pitchFamily="34" charset="-120"/>
-              </a:rPr>
-              <a:t>限られた保健指導の枠を、</a:t>
-            </a:r>
-            <a:endParaRPr lang="en-US" sz="1400" dirty="0"/>
-          </a:p>
-          <a:p>
-            <a:pPr indent="0" marL="0">
-              <a:lnSpc>
-                <a:spcPct val="130000"/>
-              </a:lnSpc>
-              <a:buNone/>
-            </a:pPr>
-            <a:r>
-              <a:rPr lang="en-US" sz="1400" dirty="0">
-                <a:solidFill>
-                  <a:srgbClr val="5C6B68"/>
-                </a:solidFill>
-                <a:latin typeface="Yu Gothic" pitchFamily="34" charset="0"/>
-                <a:ea typeface="Yu Gothic" pitchFamily="34" charset="-122"/>
-                <a:cs typeface="Yu Gothic" pitchFamily="34" charset="-120"/>
-              </a:rPr>
-              <a:t>リスクが上がった人に</a:t>
-            </a:r>
-            <a:endParaRPr lang="en-US" sz="1400" dirty="0"/>
-          </a:p>
-          <a:p>
-            <a:pPr indent="0" marL="0">
-              <a:lnSpc>
-                <a:spcPct val="130000"/>
-              </a:lnSpc>
-              <a:buNone/>
-            </a:pPr>
-            <a:r>
-              <a:rPr lang="en-US" sz="1400" dirty="0">
-                <a:solidFill>
-                  <a:srgbClr val="5C6B68"/>
-                </a:solidFill>
-                <a:latin typeface="Yu Gothic" pitchFamily="34" charset="0"/>
-                <a:ea typeface="Yu Gothic" pitchFamily="34" charset="-122"/>
-                <a:cs typeface="Yu Gothic" pitchFamily="34" charset="-120"/>
-              </a:rPr>
-              <a:t>優先して充てられる</a:t>
-            </a:r>
-            <a:endParaRPr lang="en-US" sz="1400" dirty="0"/>
-          </a:p>
-        </p:txBody>
-      </p:sp>
-      <p:sp>
-        <p:nvSpPr>
-          <p:cNvPr id="19" name="Shape 17"/>
-          <p:cNvSpPr/>
-          <p:nvPr/>
-        </p:nvSpPr>
-        <p:spPr>
-          <a:xfrm>
-            <a:off x="731520" y="4983480"/>
-            <a:ext cx="10698480" cy="1188720"/>
-          </a:xfrm>
-          <a:prstGeom prst="roundRect">
-            <a:avLst>
-              <a:gd name="adj" fmla="val 6154"/>
-            </a:avLst>
-          </a:prstGeom>
-          <a:solidFill>
-            <a:srgbClr val="14504B"/>
-          </a:solidFill>
-          <a:ln w="12700">
-            <a:solidFill>
-              <a:srgbClr val="14504B"/>
-            </a:solidFill>
-            <a:prstDash val="solid"/>
-          </a:ln>
-        </p:spPr>
-      </p:sp>
-      <p:sp>
-        <p:nvSpPr>
-          <p:cNvPr id="20" name="Text 18"/>
-          <p:cNvSpPr/>
-          <p:nvPr/>
-        </p:nvSpPr>
-        <p:spPr>
-          <a:xfrm>
-            <a:off x="1097280" y="5257800"/>
-            <a:ext cx="10058400" cy="502920"/>
-          </a:xfrm>
-          <a:prstGeom prst="rect">
-            <a:avLst/>
-          </a:prstGeom>
-          <a:noFill/>
-          <a:ln/>
-        </p:spPr>
-        <p:txBody>
-          <a:bodyPr wrap="square" lIns="0" tIns="0" rIns="0" bIns="0" rtlCol="0" anchor="ctr"/>
-          <a:lstStyle/>
-          <a:p>
-            <a:pPr indent="0" marL="0">
-              <a:buNone/>
-            </a:pPr>
-            <a:r>
-              <a:rPr lang="en-US" sz="2200" b="1" dirty="0">
-                <a:solidFill>
-                  <a:srgbClr val="FFFFFF"/>
-                </a:solidFill>
-                <a:latin typeface="Yu Gothic" pitchFamily="34" charset="0"/>
-                <a:ea typeface="Yu Gothic" pitchFamily="34" charset="-122"/>
-                <a:cs typeface="Yu Gothic" pitchFamily="34" charset="-120"/>
-              </a:rPr>
-              <a:t>研究の目的は、論文を書くことではなく、明日の声かけを変えること</a:t>
-            </a:r>
-            <a:endParaRPr lang="en-US" sz="2200" dirty="0"/>
+              <a:t>事例：1年間のBRI変化と尿蛋白の新規発現（宮崎県延岡市 2020–2021年）</a:t>
+            </a:r>
+            <a:endParaRPr lang="en-US" sz="1500" dirty="0"/>
           </a:p>
         </p:txBody>
       </p:sp>
@@ -5151,7 +6096,7 @@
                 <a:ea typeface="Yu Gothic" pitchFamily="34" charset="-122"/>
                 <a:cs typeface="Yu Gothic" pitchFamily="34" charset="-120"/>
               </a:rPr>
-              <a:t>言えること、言えないこと</a:t>
+              <a:t>特定健診は、毎年とられている</a:t>
             </a:r>
             <a:endParaRPr lang="en-US" sz="3600" dirty="0"/>
           </a:p>
@@ -5166,11 +6111,11 @@
         <p:spPr>
           <a:xfrm>
             <a:off x="731520" y="1965960"/>
-            <a:ext cx="5120640" cy="3200400"/>
+            <a:ext cx="2103120" cy="1554480"/>
           </a:xfrm>
           <a:prstGeom prst="roundRect">
             <a:avLst>
-              <a:gd name="adj" fmla="val 2286"/>
+              <a:gd name="adj" fmla="val 4706"/>
             </a:avLst>
           </a:prstGeom>
           <a:solidFill>
@@ -5192,24 +6137,24 @@
         </p:nvSpPr>
         <p:spPr>
           <a:xfrm>
-            <a:off x="1051560" y="2194560"/>
-            <a:ext cx="3657600" cy="411480"/>
-          </a:xfrm>
-          <a:prstGeom prst="rect">
-            <a:avLst/>
-          </a:prstGeom>
-          <a:noFill/>
-          <a:ln/>
-        </p:spPr>
-        <p:txBody>
-          <a:bodyPr wrap="square" lIns="0" tIns="0" rIns="0" bIns="0" rtlCol="0" anchor="ctr"/>
-          <a:lstStyle/>
-          <a:p>
-            <a:pPr indent="0" marL="0">
-              <a:buNone/>
-            </a:pPr>
-            <a:r>
-              <a:rPr lang="en-US" sz="1900" b="1" dirty="0">
+            <a:off x="777240" y="2194560"/>
+            <a:ext cx="2011680" cy="365760"/>
+          </a:xfrm>
+          <a:prstGeom prst="rect">
+            <a:avLst/>
+          </a:prstGeom>
+          <a:noFill/>
+          <a:ln/>
+        </p:spPr>
+        <p:txBody>
+          <a:bodyPr wrap="square" lIns="0" tIns="0" rIns="0" bIns="0" rtlCol="0" anchor="ctr"/>
+          <a:lstStyle/>
+          <a:p>
+            <a:pPr algn="ctr" indent="0" marL="0">
+              <a:buNone/>
+            </a:pPr>
+            <a:r>
+              <a:rPr lang="en-US" sz="1700" b="1" dirty="0">
                 <a:solidFill>
                   <a:srgbClr val="14504B"/>
                 </a:solidFill>
@@ -5217,9 +6162,9 @@
                 <a:ea typeface="Yu Gothic" pitchFamily="34" charset="-122"/>
                 <a:cs typeface="Yu Gothic" pitchFamily="34" charset="-120"/>
               </a:rPr>
-              <a:t>言えること</a:t>
-            </a:r>
-            <a:endParaRPr lang="en-US" sz="1900" dirty="0"/>
+              <a:t>受ける</a:t>
+            </a:r>
+            <a:endParaRPr lang="en-US" sz="1700" dirty="0"/>
           </a:p>
         </p:txBody>
       </p:sp>
@@ -5231,121 +6176,61 @@
         </p:nvSpPr>
         <p:spPr>
           <a:xfrm>
-            <a:off x="1051560" y="2834640"/>
-            <a:ext cx="4663440" cy="868680"/>
-          </a:xfrm>
-          <a:prstGeom prst="rect">
-            <a:avLst/>
-          </a:prstGeom>
-          <a:noFill/>
-          <a:ln/>
-        </p:spPr>
-        <p:txBody>
-          <a:bodyPr wrap="square" lIns="0" tIns="0" rIns="0" bIns="0" rtlCol="0" anchor="ctr"/>
-          <a:lstStyle/>
-          <a:p>
-            <a:pPr indent="0" marL="0">
-              <a:lnSpc>
-                <a:spcPct val="125000"/>
-              </a:lnSpc>
-              <a:buNone/>
-            </a:pPr>
-            <a:r>
-              <a:rPr lang="en-US" sz="1500" dirty="0">
-                <a:solidFill>
-                  <a:srgbClr val="16211F"/>
-                </a:solidFill>
-                <a:latin typeface="Yu Gothic" pitchFamily="34" charset="0"/>
-                <a:ea typeface="Yu Gothic" pitchFamily="34" charset="-122"/>
-                <a:cs typeface="Yu Gothic" pitchFamily="34" charset="-120"/>
-              </a:rPr>
-              <a:t>1年間でBRIが増えた人は、</a:t>
-            </a:r>
-            <a:endParaRPr lang="en-US" sz="1500" dirty="0"/>
-          </a:p>
-          <a:p>
-            <a:pPr indent="0" marL="0">
-              <a:lnSpc>
-                <a:spcPct val="125000"/>
-              </a:lnSpc>
-              <a:buNone/>
-            </a:pPr>
-            <a:r>
-              <a:rPr lang="en-US" sz="1500" dirty="0">
-                <a:solidFill>
-                  <a:srgbClr val="16211F"/>
-                </a:solidFill>
-                <a:latin typeface="Yu Gothic" pitchFamily="34" charset="0"/>
-                <a:ea typeface="Yu Gothic" pitchFamily="34" charset="-122"/>
-                <a:cs typeface="Yu Gothic" pitchFamily="34" charset="-120"/>
-              </a:rPr>
-              <a:t>尿蛋白が新たに出やすかった</a:t>
-            </a:r>
-            <a:endParaRPr lang="en-US" sz="1500" dirty="0"/>
-          </a:p>
-        </p:txBody>
-      </p:sp>
-      <p:sp>
-        <p:nvSpPr>
-          <p:cNvPr id="6" name="Text 4"/>
-          <p:cNvSpPr/>
-          <p:nvPr/>
-        </p:nvSpPr>
-        <p:spPr>
-          <a:xfrm>
-            <a:off x="1051560" y="3931920"/>
-            <a:ext cx="4663440" cy="868680"/>
-          </a:xfrm>
-          <a:prstGeom prst="rect">
-            <a:avLst/>
-          </a:prstGeom>
-          <a:noFill/>
-          <a:ln/>
-        </p:spPr>
-        <p:txBody>
-          <a:bodyPr wrap="square" lIns="0" tIns="0" rIns="0" bIns="0" rtlCol="0" anchor="ctr"/>
-          <a:lstStyle/>
-          <a:p>
-            <a:pPr indent="0" marL="0">
-              <a:lnSpc>
-                <a:spcPct val="125000"/>
-              </a:lnSpc>
-              <a:buNone/>
-            </a:pPr>
-            <a:r>
-              <a:rPr lang="en-US" sz="1500" dirty="0">
-                <a:solidFill>
-                  <a:srgbClr val="16211F"/>
-                </a:solidFill>
-                <a:latin typeface="Yu Gothic" pitchFamily="34" charset="0"/>
-                <a:ea typeface="Yu Gothic" pitchFamily="34" charset="-122"/>
-                <a:cs typeface="Yu Gothic" pitchFamily="34" charset="-120"/>
-              </a:rPr>
-              <a:t>体重やBMIの変化を</a:t>
-            </a:r>
-            <a:endParaRPr lang="en-US" sz="1500" dirty="0"/>
-          </a:p>
-          <a:p>
-            <a:pPr indent="0" marL="0">
-              <a:lnSpc>
-                <a:spcPct val="125000"/>
-              </a:lnSpc>
-              <a:buNone/>
-            </a:pPr>
-            <a:r>
-              <a:rPr lang="en-US" sz="1500" dirty="0">
-                <a:solidFill>
-                  <a:srgbClr val="16211F"/>
-                </a:solidFill>
-                <a:latin typeface="Yu Gothic" pitchFamily="34" charset="0"/>
-                <a:ea typeface="Yu Gothic" pitchFamily="34" charset="-122"/>
-                <a:cs typeface="Yu Gothic" pitchFamily="34" charset="-120"/>
-              </a:rPr>
-              <a:t>考慮しても傾向は残った</a:t>
-            </a:r>
-            <a:endParaRPr lang="en-US" sz="1500" dirty="0"/>
-          </a:p>
-        </p:txBody>
+            <a:off x="777240" y="2651760"/>
+            <a:ext cx="2011680" cy="640080"/>
+          </a:xfrm>
+          <a:prstGeom prst="rect">
+            <a:avLst/>
+          </a:prstGeom>
+          <a:noFill/>
+          <a:ln/>
+        </p:spPr>
+        <p:txBody>
+          <a:bodyPr wrap="square" lIns="0" tIns="0" rIns="0" bIns="0" rtlCol="0" anchor="ctr"/>
+          <a:lstStyle/>
+          <a:p>
+            <a:pPr algn="ctr" indent="0" marL="0">
+              <a:buNone/>
+            </a:pPr>
+            <a:r>
+              <a:rPr lang="en-US" sz="1300" dirty="0">
+                <a:solidFill>
+                  <a:srgbClr val="5C6B68"/>
+                </a:solidFill>
+                <a:latin typeface="Yu Gothic" pitchFamily="34" charset="0"/>
+                <a:ea typeface="Yu Gothic" pitchFamily="34" charset="-122"/>
+                <a:cs typeface="Yu Gothic" pitchFamily="34" charset="-120"/>
+              </a:rPr>
+              <a:t>腹囲・血圧・血液検査</a:t>
+            </a:r>
+            <a:endParaRPr lang="en-US" sz="1300" dirty="0"/>
+          </a:p>
+        </p:txBody>
+      </p:sp>
+      <p:sp>
+        <p:nvSpPr>
+          <p:cNvPr id="6" name="Shape 4"/>
+          <p:cNvSpPr/>
+          <p:nvPr/>
+        </p:nvSpPr>
+        <p:spPr>
+          <a:xfrm>
+            <a:off x="2871216" y="2670048"/>
+            <a:ext cx="201168" cy="237744"/>
+          </a:xfrm>
+          <a:prstGeom prst="rightArrow">
+            <a:avLst/>
+          </a:prstGeom>
+          <a:solidFill>
+            <a:srgbClr val="A8CFC9"/>
+          </a:solidFill>
+          <a:ln w="12700">
+            <a:solidFill>
+              <a:srgbClr val="A8CFC9"/>
+            </a:solidFill>
+            <a:prstDash val="solid"/>
+          </a:ln>
+        </p:spPr>
       </p:sp>
       <p:sp>
         <p:nvSpPr>
@@ -5355,12 +6240,247 @@
         </p:nvSpPr>
         <p:spPr>
           <a:xfrm>
-            <a:off x="6400800" y="1965960"/>
-            <a:ext cx="5029200" cy="3200400"/>
+            <a:off x="3108960" y="1965960"/>
+            <a:ext cx="2103120" cy="1554480"/>
           </a:xfrm>
           <a:prstGeom prst="roundRect">
             <a:avLst>
-              <a:gd name="adj" fmla="val 2286"/>
+              <a:gd name="adj" fmla="val 4706"/>
+            </a:avLst>
+          </a:prstGeom>
+          <a:solidFill>
+            <a:srgbClr val="F1F6F5"/>
+          </a:solidFill>
+          <a:ln w="12700">
+            <a:solidFill>
+              <a:srgbClr val="F1F6F5"/>
+            </a:solidFill>
+            <a:prstDash val="solid"/>
+          </a:ln>
+        </p:spPr>
+      </p:sp>
+      <p:sp>
+        <p:nvSpPr>
+          <p:cNvPr id="8" name="Text 6"/>
+          <p:cNvSpPr/>
+          <p:nvPr/>
+        </p:nvSpPr>
+        <p:spPr>
+          <a:xfrm>
+            <a:off x="3154680" y="2194560"/>
+            <a:ext cx="2011680" cy="365760"/>
+          </a:xfrm>
+          <a:prstGeom prst="rect">
+            <a:avLst/>
+          </a:prstGeom>
+          <a:noFill/>
+          <a:ln/>
+        </p:spPr>
+        <p:txBody>
+          <a:bodyPr wrap="square" lIns="0" tIns="0" rIns="0" bIns="0" rtlCol="0" anchor="ctr"/>
+          <a:lstStyle/>
+          <a:p>
+            <a:pPr algn="ctr" indent="0" marL="0">
+              <a:buNone/>
+            </a:pPr>
+            <a:r>
+              <a:rPr lang="en-US" sz="1700" b="1" dirty="0">
+                <a:solidFill>
+                  <a:srgbClr val="14504B"/>
+                </a:solidFill>
+                <a:latin typeface="Yu Gothic" pitchFamily="34" charset="0"/>
+                <a:ea typeface="Yu Gothic" pitchFamily="34" charset="-122"/>
+                <a:cs typeface="Yu Gothic" pitchFamily="34" charset="-120"/>
+              </a:rPr>
+              <a:t>結果を渡す</a:t>
+            </a:r>
+            <a:endParaRPr lang="en-US" sz="1700" dirty="0"/>
+          </a:p>
+        </p:txBody>
+      </p:sp>
+      <p:sp>
+        <p:nvSpPr>
+          <p:cNvPr id="9" name="Text 7"/>
+          <p:cNvSpPr/>
+          <p:nvPr/>
+        </p:nvSpPr>
+        <p:spPr>
+          <a:xfrm>
+            <a:off x="3154680" y="2651760"/>
+            <a:ext cx="2011680" cy="640080"/>
+          </a:xfrm>
+          <a:prstGeom prst="rect">
+            <a:avLst/>
+          </a:prstGeom>
+          <a:noFill/>
+          <a:ln/>
+        </p:spPr>
+        <p:txBody>
+          <a:bodyPr wrap="square" lIns="0" tIns="0" rIns="0" bIns="0" rtlCol="0" anchor="ctr"/>
+          <a:lstStyle/>
+          <a:p>
+            <a:pPr algn="ctr" indent="0" marL="0">
+              <a:buNone/>
+            </a:pPr>
+            <a:r>
+              <a:rPr lang="en-US" sz="1300" dirty="0">
+                <a:solidFill>
+                  <a:srgbClr val="5C6B68"/>
+                </a:solidFill>
+                <a:latin typeface="Yu Gothic" pitchFamily="34" charset="0"/>
+                <a:ea typeface="Yu Gothic" pitchFamily="34" charset="-122"/>
+                <a:cs typeface="Yu Gothic" pitchFamily="34" charset="-120"/>
+              </a:rPr>
+              <a:t>基準値との比較</a:t>
+            </a:r>
+            <a:endParaRPr lang="en-US" sz="1300" dirty="0"/>
+          </a:p>
+        </p:txBody>
+      </p:sp>
+      <p:sp>
+        <p:nvSpPr>
+          <p:cNvPr id="10" name="Shape 8"/>
+          <p:cNvSpPr/>
+          <p:nvPr/>
+        </p:nvSpPr>
+        <p:spPr>
+          <a:xfrm>
+            <a:off x="5248656" y="2670048"/>
+            <a:ext cx="201168" cy="237744"/>
+          </a:xfrm>
+          <a:prstGeom prst="rightArrow">
+            <a:avLst/>
+          </a:prstGeom>
+          <a:solidFill>
+            <a:srgbClr val="A8CFC9"/>
+          </a:solidFill>
+          <a:ln w="12700">
+            <a:solidFill>
+              <a:srgbClr val="A8CFC9"/>
+            </a:solidFill>
+            <a:prstDash val="solid"/>
+          </a:ln>
+        </p:spPr>
+      </p:sp>
+      <p:sp>
+        <p:nvSpPr>
+          <p:cNvPr id="11" name="Shape 9"/>
+          <p:cNvSpPr/>
+          <p:nvPr/>
+        </p:nvSpPr>
+        <p:spPr>
+          <a:xfrm>
+            <a:off x="5486400" y="1965960"/>
+            <a:ext cx="2103120" cy="1554480"/>
+          </a:xfrm>
+          <a:prstGeom prst="roundRect">
+            <a:avLst>
+              <a:gd name="adj" fmla="val 4706"/>
+            </a:avLst>
+          </a:prstGeom>
+          <a:solidFill>
+            <a:srgbClr val="F1F6F5"/>
+          </a:solidFill>
+          <a:ln w="12700">
+            <a:solidFill>
+              <a:srgbClr val="F1F6F5"/>
+            </a:solidFill>
+            <a:prstDash val="solid"/>
+          </a:ln>
+        </p:spPr>
+      </p:sp>
+      <p:sp>
+        <p:nvSpPr>
+          <p:cNvPr id="12" name="Text 10"/>
+          <p:cNvSpPr/>
+          <p:nvPr/>
+        </p:nvSpPr>
+        <p:spPr>
+          <a:xfrm>
+            <a:off x="5532120" y="2194560"/>
+            <a:ext cx="2011680" cy="365760"/>
+          </a:xfrm>
+          <a:prstGeom prst="rect">
+            <a:avLst/>
+          </a:prstGeom>
+          <a:noFill/>
+          <a:ln/>
+        </p:spPr>
+        <p:txBody>
+          <a:bodyPr wrap="square" lIns="0" tIns="0" rIns="0" bIns="0" rtlCol="0" anchor="ctr"/>
+          <a:lstStyle/>
+          <a:p>
+            <a:pPr algn="ctr" indent="0" marL="0">
+              <a:buNone/>
+            </a:pPr>
+            <a:r>
+              <a:rPr lang="en-US" sz="1700" b="1" dirty="0">
+                <a:solidFill>
+                  <a:srgbClr val="14504B"/>
+                </a:solidFill>
+                <a:latin typeface="Yu Gothic" pitchFamily="34" charset="0"/>
+                <a:ea typeface="Yu Gothic" pitchFamily="34" charset="-122"/>
+                <a:cs typeface="Yu Gothic" pitchFamily="34" charset="-120"/>
+              </a:rPr>
+              <a:t>保健指導</a:t>
+            </a:r>
+            <a:endParaRPr lang="en-US" sz="1700" dirty="0"/>
+          </a:p>
+        </p:txBody>
+      </p:sp>
+      <p:sp>
+        <p:nvSpPr>
+          <p:cNvPr id="13" name="Text 11"/>
+          <p:cNvSpPr/>
+          <p:nvPr/>
+        </p:nvSpPr>
+        <p:spPr>
+          <a:xfrm>
+            <a:off x="5532120" y="2651760"/>
+            <a:ext cx="2011680" cy="640080"/>
+          </a:xfrm>
+          <a:prstGeom prst="rect">
+            <a:avLst/>
+          </a:prstGeom>
+          <a:noFill/>
+          <a:ln/>
+        </p:spPr>
+        <p:txBody>
+          <a:bodyPr wrap="square" lIns="0" tIns="0" rIns="0" bIns="0" rtlCol="0" anchor="ctr"/>
+          <a:lstStyle/>
+          <a:p>
+            <a:pPr algn="ctr" indent="0" marL="0">
+              <a:buNone/>
+            </a:pPr>
+            <a:r>
+              <a:rPr lang="en-US" sz="1300" dirty="0">
+                <a:solidFill>
+                  <a:srgbClr val="5C6B68"/>
+                </a:solidFill>
+                <a:latin typeface="Yu Gothic" pitchFamily="34" charset="0"/>
+                <a:ea typeface="Yu Gothic" pitchFamily="34" charset="-122"/>
+                <a:cs typeface="Yu Gothic" pitchFamily="34" charset="-120"/>
+              </a:rPr>
+              <a:t>該当者に案内</a:t>
+            </a:r>
+            <a:endParaRPr lang="en-US" sz="1300" dirty="0"/>
+          </a:p>
+        </p:txBody>
+      </p:sp>
+      <p:sp>
+        <p:nvSpPr>
+          <p:cNvPr id="14" name="Shape 12"/>
+          <p:cNvSpPr/>
+          <p:nvPr/>
+        </p:nvSpPr>
+        <p:spPr>
+          <a:xfrm>
+            <a:off x="7955280" y="1965960"/>
+            <a:ext cx="3474720" cy="1554480"/>
+          </a:xfrm>
+          <a:prstGeom prst="roundRect">
+            <a:avLst>
+              <a:gd name="adj" fmla="val 4706"/>
             </a:avLst>
           </a:prstGeom>
           <a:solidFill>
@@ -5376,30 +6496,30 @@
       </p:sp>
       <p:sp>
         <p:nvSpPr>
-          <p:cNvPr id="8" name="Text 6"/>
-          <p:cNvSpPr/>
-          <p:nvPr/>
-        </p:nvSpPr>
-        <p:spPr>
-          <a:xfrm>
-            <a:off x="6720840" y="2194560"/>
-            <a:ext cx="3657600" cy="411480"/>
-          </a:xfrm>
-          <a:prstGeom prst="rect">
-            <a:avLst/>
-          </a:prstGeom>
-          <a:noFill/>
-          <a:ln/>
-        </p:spPr>
-        <p:txBody>
-          <a:bodyPr wrap="square" lIns="0" tIns="0" rIns="0" bIns="0" rtlCol="0" anchor="ctr"/>
-          <a:lstStyle/>
-          <a:p>
-            <a:pPr indent="0" marL="0">
-              <a:buNone/>
-            </a:pPr>
-            <a:r>
-              <a:rPr lang="en-US" sz="1900" b="1" dirty="0">
+          <p:cNvPr id="15" name="Text 13"/>
+          <p:cNvSpPr/>
+          <p:nvPr/>
+        </p:nvSpPr>
+        <p:spPr>
+          <a:xfrm>
+            <a:off x="8183880" y="2194560"/>
+            <a:ext cx="3017520" cy="365760"/>
+          </a:xfrm>
+          <a:prstGeom prst="rect">
+            <a:avLst/>
+          </a:prstGeom>
+          <a:noFill/>
+          <a:ln/>
+        </p:spPr>
+        <p:txBody>
+          <a:bodyPr wrap="square" lIns="0" tIns="0" rIns="0" bIns="0" rtlCol="0" anchor="ctr"/>
+          <a:lstStyle/>
+          <a:p>
+            <a:pPr indent="0" marL="0">
+              <a:buNone/>
+            </a:pPr>
+            <a:r>
+              <a:rPr lang="en-US" sz="1600" b="1" dirty="0">
                 <a:solidFill>
                   <a:srgbClr val="8A6F52"/>
                 </a:solidFill>
@@ -5407,22 +6527,22 @@
                 <a:ea typeface="Yu Gothic" pitchFamily="34" charset="-122"/>
                 <a:cs typeface="Yu Gothic" pitchFamily="34" charset="-120"/>
               </a:rPr>
-              <a:t>言えないこと</a:t>
-            </a:r>
-            <a:endParaRPr lang="en-US" sz="1900" dirty="0"/>
-          </a:p>
-        </p:txBody>
-      </p:sp>
-      <p:sp>
-        <p:nvSpPr>
-          <p:cNvPr id="9" name="Text 7"/>
-          <p:cNvSpPr/>
-          <p:nvPr/>
-        </p:nvSpPr>
-        <p:spPr>
-          <a:xfrm>
-            <a:off x="6720840" y="2788920"/>
-            <a:ext cx="4572000" cy="731520"/>
+              <a:t>多くはここで終わる</a:t>
+            </a:r>
+            <a:endParaRPr lang="en-US" sz="1600" dirty="0"/>
+          </a:p>
+        </p:txBody>
+      </p:sp>
+      <p:sp>
+        <p:nvSpPr>
+          <p:cNvPr id="16" name="Text 14"/>
+          <p:cNvSpPr/>
+          <p:nvPr/>
+        </p:nvSpPr>
+        <p:spPr>
+          <a:xfrm>
+            <a:off x="8183880" y="2633472"/>
+            <a:ext cx="3108960" cy="685800"/>
           </a:xfrm>
           <a:prstGeom prst="rect">
             <a:avLst/>
@@ -5436,12 +6556,12 @@
           <a:p>
             <a:pPr indent="0" marL="0">
               <a:lnSpc>
-                <a:spcPct val="120000"/>
+                <a:spcPct val="115000"/>
               </a:lnSpc>
               <a:buNone/>
             </a:pPr>
             <a:r>
-              <a:rPr lang="en-US" sz="1400" dirty="0">
+              <a:rPr lang="en-US" sz="1300" dirty="0">
                 <a:solidFill>
                   <a:srgbClr val="5A5044"/>
                 </a:solidFill>
@@ -5449,19 +6569,19 @@
                 <a:ea typeface="Yu Gothic" pitchFamily="34" charset="-122"/>
                 <a:cs typeface="Yu Gothic" pitchFamily="34" charset="-120"/>
               </a:rPr>
-              <a:t>BRIを下げれば腎臓が守れる、</a:t>
-            </a:r>
-            <a:endParaRPr lang="en-US" sz="1400" dirty="0"/>
+              <a:t>「今」の値は分かるが、</a:t>
+            </a:r>
+            <a:endParaRPr lang="en-US" sz="1300" dirty="0"/>
           </a:p>
           <a:p>
             <a:pPr indent="0" marL="0">
               <a:lnSpc>
-                <a:spcPct val="120000"/>
+                <a:spcPct val="115000"/>
               </a:lnSpc>
               <a:buNone/>
             </a:pPr>
             <a:r>
-              <a:rPr lang="en-US" sz="1400" dirty="0">
+              <a:rPr lang="en-US" sz="1300" dirty="0">
                 <a:solidFill>
                   <a:srgbClr val="5A5044"/>
                 </a:solidFill>
@@ -5469,22 +6589,88 @@
                 <a:ea typeface="Yu Gothic" pitchFamily="34" charset="-122"/>
                 <a:cs typeface="Yu Gothic" pitchFamily="34" charset="-120"/>
               </a:rPr>
-              <a:t>という因果関係</a:t>
-            </a:r>
-            <a:endParaRPr lang="en-US" sz="1400" dirty="0"/>
-          </a:p>
-        </p:txBody>
-      </p:sp>
-      <p:sp>
-        <p:nvSpPr>
-          <p:cNvPr id="10" name="Text 8"/>
-          <p:cNvSpPr/>
-          <p:nvPr/>
-        </p:nvSpPr>
-        <p:spPr>
-          <a:xfrm>
-            <a:off x="6720840" y="3611880"/>
-            <a:ext cx="4572000" cy="731520"/>
+              <a:t>変化は活かされにくい</a:t>
+            </a:r>
+            <a:endParaRPr lang="en-US" sz="1300" dirty="0"/>
+          </a:p>
+        </p:txBody>
+      </p:sp>
+      <p:sp>
+        <p:nvSpPr>
+          <p:cNvPr id="17" name="Shape 15"/>
+          <p:cNvSpPr/>
+          <p:nvPr/>
+        </p:nvSpPr>
+        <p:spPr>
+          <a:xfrm>
+            <a:off x="731520" y="3931920"/>
+            <a:ext cx="10698480" cy="2011680"/>
+          </a:xfrm>
+          <a:prstGeom prst="roundRect">
+            <a:avLst>
+              <a:gd name="adj" fmla="val 3636"/>
+            </a:avLst>
+          </a:prstGeom>
+          <a:solidFill>
+            <a:srgbClr val="14504B"/>
+          </a:solidFill>
+          <a:ln w="12700">
+            <a:solidFill>
+              <a:srgbClr val="14504B"/>
+            </a:solidFill>
+            <a:prstDash val="solid"/>
+          </a:ln>
+        </p:spPr>
+      </p:sp>
+      <p:sp>
+        <p:nvSpPr>
+          <p:cNvPr id="18" name="Text 16"/>
+          <p:cNvSpPr/>
+          <p:nvPr/>
+        </p:nvSpPr>
+        <p:spPr>
+          <a:xfrm>
+            <a:off x="1097280" y="4160520"/>
+            <a:ext cx="1828800" cy="384048"/>
+          </a:xfrm>
+          <a:prstGeom prst="rect">
+            <a:avLst/>
+          </a:prstGeom>
+          <a:noFill/>
+          <a:ln/>
+        </p:spPr>
+        <p:txBody>
+          <a:bodyPr wrap="square" lIns="0" tIns="0" rIns="0" bIns="0" rtlCol="0" anchor="ctr"/>
+          <a:lstStyle/>
+          <a:p>
+            <a:pPr indent="0" marL="0">
+              <a:buNone/>
+            </a:pPr>
+            <a:r>
+              <a:rPr lang="en-US" sz="1500" b="1" dirty="0">
+                <a:solidFill>
+                  <a:srgbClr val="D98A2B"/>
+                </a:solidFill>
+                <a:latin typeface="Yu Gothic" pitchFamily="34" charset="0"/>
+                <a:ea typeface="Yu Gothic" pitchFamily="34" charset="-122"/>
+                <a:cs typeface="Yu Gothic" pitchFamily="34" charset="-120"/>
+              </a:rPr>
+              <a:t>問い</a:t>
+            </a:r>
+            <a:endParaRPr lang="en-US" sz="1500" dirty="0"/>
+          </a:p>
+        </p:txBody>
+      </p:sp>
+      <p:sp>
+        <p:nvSpPr>
+          <p:cNvPr id="19" name="Text 17"/>
+          <p:cNvSpPr/>
+          <p:nvPr/>
+        </p:nvSpPr>
+        <p:spPr>
+          <a:xfrm>
+            <a:off x="1097280" y="4590288"/>
+            <a:ext cx="10058400" cy="1097280"/>
           </a:xfrm>
           <a:prstGeom prst="rect">
             <a:avLst/>
@@ -5498,143 +6684,42 @@
           <a:p>
             <a:pPr indent="0" marL="0">
               <a:lnSpc>
-                <a:spcPct val="120000"/>
+                <a:spcPct val="130000"/>
               </a:lnSpc>
               <a:buNone/>
             </a:pPr>
             <a:r>
-              <a:rPr lang="en-US" sz="1400" dirty="0">
-                <a:solidFill>
-                  <a:srgbClr val="5A5044"/>
-                </a:solidFill>
-                <a:latin typeface="Yu Gothic" pitchFamily="34" charset="0"/>
-                <a:ea typeface="Yu Gothic" pitchFamily="34" charset="-122"/>
-                <a:cs typeface="Yu Gothic" pitchFamily="34" charset="-120"/>
-              </a:rPr>
-              <a:t>1年の観察なので、一時的な</a:t>
-            </a:r>
-            <a:endParaRPr lang="en-US" sz="1400" dirty="0"/>
+              <a:rPr lang="en-US" sz="2400" b="1" dirty="0">
+                <a:solidFill>
+                  <a:srgbClr val="FFFFFF"/>
+                </a:solidFill>
+                <a:latin typeface="Yu Gothic" pitchFamily="34" charset="0"/>
+                <a:ea typeface="Yu Gothic" pitchFamily="34" charset="-122"/>
+                <a:cs typeface="Yu Gothic" pitchFamily="34" charset="-120"/>
+              </a:rPr>
+              <a:t>毎年同じ人を測っているのだから、</a:t>
+            </a:r>
+            <a:endParaRPr lang="en-US" sz="2400" dirty="0"/>
           </a:p>
           <a:p>
             <a:pPr indent="0" marL="0">
               <a:lnSpc>
-                <a:spcPct val="120000"/>
+                <a:spcPct val="130000"/>
               </a:lnSpc>
               <a:buNone/>
             </a:pPr>
             <a:r>
-              <a:rPr lang="en-US" sz="1400" dirty="0">
-                <a:solidFill>
-                  <a:srgbClr val="5A5044"/>
-                </a:solidFill>
-                <a:latin typeface="Yu Gothic" pitchFamily="34" charset="0"/>
-                <a:ea typeface="Yu Gothic" pitchFamily="34" charset="-122"/>
-                <a:cs typeface="Yu Gothic" pitchFamily="34" charset="-120"/>
-              </a:rPr>
-              <a:t>変動の影響もありうる</a:t>
-            </a:r>
-            <a:endParaRPr lang="en-US" sz="1400" dirty="0"/>
-          </a:p>
-        </p:txBody>
-      </p:sp>
-      <p:sp>
-        <p:nvSpPr>
-          <p:cNvPr id="11" name="Text 9"/>
-          <p:cNvSpPr/>
-          <p:nvPr/>
-        </p:nvSpPr>
-        <p:spPr>
-          <a:xfrm>
-            <a:off x="6720840" y="4434840"/>
-            <a:ext cx="4572000" cy="731520"/>
-          </a:xfrm>
-          <a:prstGeom prst="rect">
-            <a:avLst/>
-          </a:prstGeom>
-          <a:noFill/>
-          <a:ln/>
-        </p:spPr>
-        <p:txBody>
-          <a:bodyPr wrap="square" lIns="0" tIns="0" rIns="0" bIns="0" rtlCol="0" anchor="ctr"/>
-          <a:lstStyle/>
-          <a:p>
-            <a:pPr indent="0" marL="0">
-              <a:lnSpc>
-                <a:spcPct val="120000"/>
-              </a:lnSpc>
-              <a:buNone/>
-            </a:pPr>
-            <a:r>
-              <a:rPr lang="en-US" sz="1400" dirty="0">
-                <a:solidFill>
-                  <a:srgbClr val="5A5044"/>
-                </a:solidFill>
-                <a:latin typeface="Yu Gothic" pitchFamily="34" charset="0"/>
-                <a:ea typeface="Yu Gothic" pitchFamily="34" charset="-122"/>
-                <a:cs typeface="Yu Gothic" pitchFamily="34" charset="-120"/>
-              </a:rPr>
-              <a:t>延岡市の受診者が対象。</a:t>
-            </a:r>
-            <a:endParaRPr lang="en-US" sz="1400" dirty="0"/>
-          </a:p>
-          <a:p>
-            <a:pPr indent="0" marL="0">
-              <a:lnSpc>
-                <a:spcPct val="120000"/>
-              </a:lnSpc>
-              <a:buNone/>
-            </a:pPr>
-            <a:r>
-              <a:rPr lang="en-US" sz="1400" dirty="0">
-                <a:solidFill>
-                  <a:srgbClr val="5A5044"/>
-                </a:solidFill>
-                <a:latin typeface="Yu Gothic" pitchFamily="34" charset="0"/>
-                <a:ea typeface="Yu Gothic" pitchFamily="34" charset="-122"/>
-                <a:cs typeface="Yu Gothic" pitchFamily="34" charset="-120"/>
-              </a:rPr>
-              <a:t>そのまま他地域には広げられない</a:t>
-            </a:r>
-            <a:endParaRPr lang="en-US" sz="1400" dirty="0"/>
-          </a:p>
-        </p:txBody>
-      </p:sp>
-      <p:sp>
-        <p:nvSpPr>
-          <p:cNvPr id="12" name="Text 10"/>
-          <p:cNvSpPr/>
-          <p:nvPr/>
-        </p:nvSpPr>
-        <p:spPr>
-          <a:xfrm>
-            <a:off x="731520" y="5440680"/>
-            <a:ext cx="10698480" cy="411480"/>
-          </a:xfrm>
-          <a:prstGeom prst="rect">
-            <a:avLst/>
-          </a:prstGeom>
-          <a:noFill/>
-          <a:ln/>
-        </p:spPr>
-        <p:txBody>
-          <a:bodyPr wrap="square" lIns="0" tIns="0" rIns="0" bIns="0" rtlCol="0" anchor="ctr"/>
-          <a:lstStyle/>
-          <a:p>
-            <a:pPr indent="0" marL="0">
-              <a:buNone/>
-            </a:pPr>
-            <a:r>
-              <a:rPr lang="en-US" sz="1500" i="1" dirty="0">
-                <a:solidFill>
-                  <a:srgbClr val="5C6B68"/>
-                </a:solidFill>
-                <a:latin typeface="Yu Gothic" pitchFamily="34" charset="0"/>
-                <a:ea typeface="Yu Gothic" pitchFamily="34" charset="-122"/>
-                <a:cs typeface="Yu Gothic" pitchFamily="34" charset="-120"/>
-              </a:rPr>
-              <a:t>次に必要なのは、複数地域・長期の追跡と、介入して確かめる研究です。</a:t>
-            </a:r>
-            <a:endParaRPr lang="en-US" sz="1500" dirty="0"/>
+              <a:rPr lang="en-US" sz="2400" b="1" dirty="0">
+                <a:solidFill>
+                  <a:srgbClr val="FFFFFF"/>
+                </a:solidFill>
+                <a:latin typeface="Yu Gothic" pitchFamily="34" charset="0"/>
+                <a:ea typeface="Yu Gothic" pitchFamily="34" charset="-122"/>
+                <a:cs typeface="Yu Gothic" pitchFamily="34" charset="-120"/>
+              </a:rPr>
+              <a:t>「去年からどう変わったか」でリスクを見られないか。</a:t>
+            </a:r>
+            <a:endParaRPr lang="en-US" sz="2400" dirty="0"/>
           </a:p>
         </p:txBody>
       </p:sp>
@@ -5649,6 +6734,2070 @@
 <file path=ppt/slides/slide15.xml><?xml version="1.0" encoding="utf-8"?>
 <p:sld xmlns:a="http://schemas.openxmlformats.org/drawingml/2006/main" xmlns:r="http://schemas.openxmlformats.org/officeDocument/2006/relationships" xmlns:p="http://schemas.openxmlformats.org/presentationml/2006/main">
   <p:cSld name="Slide 15">
+    <p:bg>
+      <p:bgPr>
+        <a:solidFill>
+          <a:srgbClr val="FFFFFF"/>
+        </a:solidFill>
+      </p:bgPr>
+    </p:bg>
+    <p:spTree>
+      <p:nvGrpSpPr>
+        <p:cNvPr id="1" name=""/>
+        <p:cNvGrpSpPr/>
+        <p:nvPr/>
+      </p:nvGrpSpPr>
+      <p:grpSpPr>
+        <a:xfrm>
+          <a:off x="0" y="0"/>
+          <a:ext cx="0" cy="0"/>
+          <a:chOff x="0" y="0"/>
+          <a:chExt cx="0" cy="0"/>
+        </a:xfrm>
+      </p:grpSpPr>
+      <p:sp>
+        <p:nvSpPr>
+          <p:cNvPr id="2" name="Text 0"/>
+          <p:cNvSpPr/>
+          <p:nvPr/>
+        </p:nvSpPr>
+        <p:spPr>
+          <a:xfrm>
+            <a:off x="731520" y="411480"/>
+            <a:ext cx="10698480" cy="777240"/>
+          </a:xfrm>
+          <a:prstGeom prst="rect">
+            <a:avLst/>
+          </a:prstGeom>
+          <a:noFill/>
+          <a:ln/>
+        </p:spPr>
+        <p:txBody>
+          <a:bodyPr wrap="square" lIns="0" tIns="0" rIns="0" bIns="0" rtlCol="0" anchor="ctr"/>
+          <a:lstStyle/>
+          <a:p>
+            <a:pPr indent="0" marL="0">
+              <a:buNone/>
+            </a:pPr>
+            <a:r>
+              <a:rPr lang="en-US" sz="3600" b="1" dirty="0">
+                <a:solidFill>
+                  <a:srgbClr val="14504B"/>
+                </a:solidFill>
+                <a:latin typeface="Yu Gothic" pitchFamily="34" charset="0"/>
+                <a:ea typeface="Yu Gothic" pitchFamily="34" charset="-122"/>
+                <a:cs typeface="Yu Gothic" pitchFamily="34" charset="-120"/>
+              </a:rPr>
+              <a:t>事例：からだの「まるみ」の変化を見る</a:t>
+            </a:r>
+            <a:endParaRPr lang="en-US" sz="3600" dirty="0"/>
+          </a:p>
+        </p:txBody>
+      </p:sp>
+      <p:sp>
+        <p:nvSpPr>
+          <p:cNvPr id="3" name="Text 1"/>
+          <p:cNvSpPr/>
+          <p:nvPr/>
+        </p:nvSpPr>
+        <p:spPr>
+          <a:xfrm>
+            <a:off x="731520" y="1225296"/>
+            <a:ext cx="10698480" cy="411480"/>
+          </a:xfrm>
+          <a:prstGeom prst="rect">
+            <a:avLst/>
+          </a:prstGeom>
+          <a:noFill/>
+          <a:ln/>
+        </p:spPr>
+        <p:txBody>
+          <a:bodyPr wrap="square" lIns="0" tIns="0" rIns="0" bIns="0" rtlCol="0" anchor="ctr"/>
+          <a:lstStyle/>
+          <a:p>
+            <a:pPr indent="0" marL="0">
+              <a:buNone/>
+            </a:pPr>
+            <a:r>
+              <a:rPr lang="en-US" sz="1600" dirty="0">
+                <a:solidFill>
+                  <a:srgbClr val="5C6B68"/>
+                </a:solidFill>
+                <a:latin typeface="Yu Gothic" pitchFamily="34" charset="0"/>
+                <a:ea typeface="Yu Gothic" pitchFamily="34" charset="-122"/>
+                <a:cs typeface="Yu Gothic" pitchFamily="34" charset="-120"/>
+              </a:rPr>
+              <a:t>腹囲と身長だけで計算できる指標 BRI（Body Roundness Index）</a:t>
+            </a:r>
+            <a:endParaRPr lang="en-US" sz="1600" dirty="0"/>
+          </a:p>
+        </p:txBody>
+      </p:sp>
+      <p:sp>
+        <p:nvSpPr>
+          <p:cNvPr id="4" name="Shape 2"/>
+          <p:cNvSpPr/>
+          <p:nvPr/>
+        </p:nvSpPr>
+        <p:spPr>
+          <a:xfrm>
+            <a:off x="731520" y="1920240"/>
+            <a:ext cx="3429000" cy="1783080"/>
+          </a:xfrm>
+          <a:prstGeom prst="roundRect">
+            <a:avLst>
+              <a:gd name="adj" fmla="val 4103"/>
+            </a:avLst>
+          </a:prstGeom>
+          <a:solidFill>
+            <a:srgbClr val="F1F6F5"/>
+          </a:solidFill>
+          <a:ln w="12700">
+            <a:solidFill>
+              <a:srgbClr val="F1F6F5"/>
+            </a:solidFill>
+            <a:prstDash val="solid"/>
+          </a:ln>
+        </p:spPr>
+      </p:sp>
+      <p:sp>
+        <p:nvSpPr>
+          <p:cNvPr id="5" name="Text 3"/>
+          <p:cNvSpPr/>
+          <p:nvPr/>
+        </p:nvSpPr>
+        <p:spPr>
+          <a:xfrm>
+            <a:off x="987552" y="2103120"/>
+            <a:ext cx="2926080" cy="384048"/>
+          </a:xfrm>
+          <a:prstGeom prst="rect">
+            <a:avLst/>
+          </a:prstGeom>
+          <a:noFill/>
+          <a:ln/>
+        </p:spPr>
+        <p:txBody>
+          <a:bodyPr wrap="square" lIns="0" tIns="0" rIns="0" bIns="0" rtlCol="0" anchor="ctr"/>
+          <a:lstStyle/>
+          <a:p>
+            <a:pPr indent="0" marL="0">
+              <a:buNone/>
+            </a:pPr>
+            <a:r>
+              <a:rPr lang="en-US" sz="1700" b="1" dirty="0">
+                <a:solidFill>
+                  <a:srgbClr val="14504B"/>
+                </a:solidFill>
+                <a:latin typeface="Yu Gothic" pitchFamily="34" charset="0"/>
+                <a:ea typeface="Yu Gothic" pitchFamily="34" charset="-122"/>
+                <a:cs typeface="Yu Gothic" pitchFamily="34" charset="-120"/>
+              </a:rPr>
+              <a:t>見たもの</a:t>
+            </a:r>
+            <a:endParaRPr lang="en-US" sz="1700" dirty="0"/>
+          </a:p>
+        </p:txBody>
+      </p:sp>
+      <p:sp>
+        <p:nvSpPr>
+          <p:cNvPr id="6" name="Text 4"/>
+          <p:cNvSpPr/>
+          <p:nvPr/>
+        </p:nvSpPr>
+        <p:spPr>
+          <a:xfrm>
+            <a:off x="987552" y="2578608"/>
+            <a:ext cx="2971800" cy="868680"/>
+          </a:xfrm>
+          <a:prstGeom prst="rect">
+            <a:avLst/>
+          </a:prstGeom>
+          <a:noFill/>
+          <a:ln/>
+        </p:spPr>
+        <p:txBody>
+          <a:bodyPr wrap="square" lIns="0" tIns="0" rIns="0" bIns="0" rtlCol="0" anchor="ctr"/>
+          <a:lstStyle/>
+          <a:p>
+            <a:pPr indent="0" marL="0">
+              <a:lnSpc>
+                <a:spcPct val="120000"/>
+              </a:lnSpc>
+              <a:buNone/>
+            </a:pPr>
+            <a:r>
+              <a:rPr lang="en-US" sz="1400" dirty="0">
+                <a:solidFill>
+                  <a:srgbClr val="5C6B68"/>
+                </a:solidFill>
+                <a:latin typeface="Yu Gothic" pitchFamily="34" charset="0"/>
+                <a:ea typeface="Yu Gothic" pitchFamily="34" charset="-122"/>
+                <a:cs typeface="Yu Gothic" pitchFamily="34" charset="-120"/>
+              </a:rPr>
+              <a:t>延岡市の40歳以上</a:t>
+            </a:r>
+            <a:endParaRPr lang="en-US" sz="1400" dirty="0"/>
+          </a:p>
+          <a:p>
+            <a:pPr indent="0" marL="0">
+              <a:lnSpc>
+                <a:spcPct val="120000"/>
+              </a:lnSpc>
+              <a:buNone/>
+            </a:pPr>
+            <a:r>
+              <a:rPr lang="en-US" sz="1400" dirty="0">
+                <a:solidFill>
+                  <a:srgbClr val="5C6B68"/>
+                </a:solidFill>
+                <a:latin typeface="Yu Gothic" pitchFamily="34" charset="0"/>
+                <a:ea typeface="Yu Gothic" pitchFamily="34" charset="-122"/>
+                <a:cs typeface="Yu Gothic" pitchFamily="34" charset="-120"/>
+              </a:rPr>
+              <a:t>3,819名の2年分</a:t>
+            </a:r>
+            <a:endParaRPr lang="en-US" sz="1400" dirty="0"/>
+          </a:p>
+        </p:txBody>
+      </p:sp>
+      <p:sp>
+        <p:nvSpPr>
+          <p:cNvPr id="7" name="Shape 5"/>
+          <p:cNvSpPr/>
+          <p:nvPr/>
+        </p:nvSpPr>
+        <p:spPr>
+          <a:xfrm>
+            <a:off x="4434840" y="1920240"/>
+            <a:ext cx="3429000" cy="1783080"/>
+          </a:xfrm>
+          <a:prstGeom prst="roundRect">
+            <a:avLst>
+              <a:gd name="adj" fmla="val 4103"/>
+            </a:avLst>
+          </a:prstGeom>
+          <a:solidFill>
+            <a:srgbClr val="F1F6F5"/>
+          </a:solidFill>
+          <a:ln w="12700">
+            <a:solidFill>
+              <a:srgbClr val="F1F6F5"/>
+            </a:solidFill>
+            <a:prstDash val="solid"/>
+          </a:ln>
+        </p:spPr>
+      </p:sp>
+      <p:sp>
+        <p:nvSpPr>
+          <p:cNvPr id="8" name="Text 6"/>
+          <p:cNvSpPr/>
+          <p:nvPr/>
+        </p:nvSpPr>
+        <p:spPr>
+          <a:xfrm>
+            <a:off x="4690872" y="2103120"/>
+            <a:ext cx="2926080" cy="384048"/>
+          </a:xfrm>
+          <a:prstGeom prst="rect">
+            <a:avLst/>
+          </a:prstGeom>
+          <a:noFill/>
+          <a:ln/>
+        </p:spPr>
+        <p:txBody>
+          <a:bodyPr wrap="square" lIns="0" tIns="0" rIns="0" bIns="0" rtlCol="0" anchor="ctr"/>
+          <a:lstStyle/>
+          <a:p>
+            <a:pPr indent="0" marL="0">
+              <a:buNone/>
+            </a:pPr>
+            <a:r>
+              <a:rPr lang="en-US" sz="1700" b="1" dirty="0">
+                <a:solidFill>
+                  <a:srgbClr val="14504B"/>
+                </a:solidFill>
+                <a:latin typeface="Yu Gothic" pitchFamily="34" charset="0"/>
+                <a:ea typeface="Yu Gothic" pitchFamily="34" charset="-122"/>
+                <a:cs typeface="Yu Gothic" pitchFamily="34" charset="-120"/>
+              </a:rPr>
+              <a:t>調べたこと</a:t>
+            </a:r>
+            <a:endParaRPr lang="en-US" sz="1700" dirty="0"/>
+          </a:p>
+        </p:txBody>
+      </p:sp>
+      <p:sp>
+        <p:nvSpPr>
+          <p:cNvPr id="9" name="Text 7"/>
+          <p:cNvSpPr/>
+          <p:nvPr/>
+        </p:nvSpPr>
+        <p:spPr>
+          <a:xfrm>
+            <a:off x="4690872" y="2578608"/>
+            <a:ext cx="2971800" cy="868680"/>
+          </a:xfrm>
+          <a:prstGeom prst="rect">
+            <a:avLst/>
+          </a:prstGeom>
+          <a:noFill/>
+          <a:ln/>
+        </p:spPr>
+        <p:txBody>
+          <a:bodyPr wrap="square" lIns="0" tIns="0" rIns="0" bIns="0" rtlCol="0" anchor="ctr"/>
+          <a:lstStyle/>
+          <a:p>
+            <a:pPr indent="0" marL="0">
+              <a:lnSpc>
+                <a:spcPct val="120000"/>
+              </a:lnSpc>
+              <a:buNone/>
+            </a:pPr>
+            <a:r>
+              <a:rPr lang="en-US" sz="1400" dirty="0">
+                <a:solidFill>
+                  <a:srgbClr val="5C6B68"/>
+                </a:solidFill>
+                <a:latin typeface="Yu Gothic" pitchFamily="34" charset="0"/>
+                <a:ea typeface="Yu Gothic" pitchFamily="34" charset="-122"/>
+                <a:cs typeface="Yu Gothic" pitchFamily="34" charset="-120"/>
+              </a:rPr>
+              <a:t>1年間でBRIが</a:t>
+            </a:r>
+            <a:endParaRPr lang="en-US" sz="1400" dirty="0"/>
+          </a:p>
+          <a:p>
+            <a:pPr indent="0" marL="0">
+              <a:lnSpc>
+                <a:spcPct val="120000"/>
+              </a:lnSpc>
+              <a:buNone/>
+            </a:pPr>
+            <a:r>
+              <a:rPr lang="en-US" sz="1400" dirty="0">
+                <a:solidFill>
+                  <a:srgbClr val="5C6B68"/>
+                </a:solidFill>
+                <a:latin typeface="Yu Gothic" pitchFamily="34" charset="0"/>
+                <a:ea typeface="Yu Gothic" pitchFamily="34" charset="-122"/>
+                <a:cs typeface="Yu Gothic" pitchFamily="34" charset="-120"/>
+              </a:rPr>
+              <a:t>増えた／減った／横ばい</a:t>
+            </a:r>
+            <a:endParaRPr lang="en-US" sz="1400" dirty="0"/>
+          </a:p>
+        </p:txBody>
+      </p:sp>
+      <p:sp>
+        <p:nvSpPr>
+          <p:cNvPr id="10" name="Shape 8"/>
+          <p:cNvSpPr/>
+          <p:nvPr/>
+        </p:nvSpPr>
+        <p:spPr>
+          <a:xfrm>
+            <a:off x="8138160" y="1920240"/>
+            <a:ext cx="3429000" cy="1783080"/>
+          </a:xfrm>
+          <a:prstGeom prst="roundRect">
+            <a:avLst>
+              <a:gd name="adj" fmla="val 4103"/>
+            </a:avLst>
+          </a:prstGeom>
+          <a:solidFill>
+            <a:srgbClr val="14504B"/>
+          </a:solidFill>
+          <a:ln w="12700">
+            <a:solidFill>
+              <a:srgbClr val="14504B"/>
+            </a:solidFill>
+            <a:prstDash val="solid"/>
+          </a:ln>
+        </p:spPr>
+      </p:sp>
+      <p:sp>
+        <p:nvSpPr>
+          <p:cNvPr id="11" name="Text 9"/>
+          <p:cNvSpPr/>
+          <p:nvPr/>
+        </p:nvSpPr>
+        <p:spPr>
+          <a:xfrm>
+            <a:off x="8394192" y="2103120"/>
+            <a:ext cx="2926080" cy="384048"/>
+          </a:xfrm>
+          <a:prstGeom prst="rect">
+            <a:avLst/>
+          </a:prstGeom>
+          <a:noFill/>
+          <a:ln/>
+        </p:spPr>
+        <p:txBody>
+          <a:bodyPr wrap="square" lIns="0" tIns="0" rIns="0" bIns="0" rtlCol="0" anchor="ctr"/>
+          <a:lstStyle/>
+          <a:p>
+            <a:pPr indent="0" marL="0">
+              <a:buNone/>
+            </a:pPr>
+            <a:r>
+              <a:rPr lang="en-US" sz="1700" b="1" dirty="0">
+                <a:solidFill>
+                  <a:srgbClr val="D98A2B"/>
+                </a:solidFill>
+                <a:latin typeface="Yu Gothic" pitchFamily="34" charset="0"/>
+                <a:ea typeface="Yu Gothic" pitchFamily="34" charset="-122"/>
+                <a:cs typeface="Yu Gothic" pitchFamily="34" charset="-120"/>
+              </a:rPr>
+              <a:t>分かったこと</a:t>
+            </a:r>
+            <a:endParaRPr lang="en-US" sz="1700" dirty="0"/>
+          </a:p>
+        </p:txBody>
+      </p:sp>
+      <p:sp>
+        <p:nvSpPr>
+          <p:cNvPr id="12" name="Text 10"/>
+          <p:cNvSpPr/>
+          <p:nvPr/>
+        </p:nvSpPr>
+        <p:spPr>
+          <a:xfrm>
+            <a:off x="8394192" y="2578608"/>
+            <a:ext cx="2971800" cy="868680"/>
+          </a:xfrm>
+          <a:prstGeom prst="rect">
+            <a:avLst/>
+          </a:prstGeom>
+          <a:noFill/>
+          <a:ln/>
+        </p:spPr>
+        <p:txBody>
+          <a:bodyPr wrap="square" lIns="0" tIns="0" rIns="0" bIns="0" rtlCol="0" anchor="ctr"/>
+          <a:lstStyle/>
+          <a:p>
+            <a:pPr indent="0" marL="0">
+              <a:lnSpc>
+                <a:spcPct val="120000"/>
+              </a:lnSpc>
+              <a:buNone/>
+            </a:pPr>
+            <a:r>
+              <a:rPr lang="en-US" sz="1400" dirty="0">
+                <a:solidFill>
+                  <a:srgbClr val="FFFFFF"/>
+                </a:solidFill>
+                <a:latin typeface="Yu Gothic" pitchFamily="34" charset="0"/>
+                <a:ea typeface="Yu Gothic" pitchFamily="34" charset="-122"/>
+                <a:cs typeface="Yu Gothic" pitchFamily="34" charset="-120"/>
+              </a:rPr>
+              <a:t>増えた群で尿蛋白が</a:t>
+            </a:r>
+            <a:endParaRPr lang="en-US" sz="1400" dirty="0"/>
+          </a:p>
+          <a:p>
+            <a:pPr indent="0" marL="0">
+              <a:lnSpc>
+                <a:spcPct val="120000"/>
+              </a:lnSpc>
+              <a:buNone/>
+            </a:pPr>
+            <a:r>
+              <a:rPr lang="en-US" sz="1400" dirty="0">
+                <a:solidFill>
+                  <a:srgbClr val="FFFFFF"/>
+                </a:solidFill>
+                <a:latin typeface="Yu Gothic" pitchFamily="34" charset="0"/>
+                <a:ea typeface="Yu Gothic" pitchFamily="34" charset="-122"/>
+                <a:cs typeface="Yu Gothic" pitchFamily="34" charset="-120"/>
+              </a:rPr>
+              <a:t>新たに出やすかった</a:t>
+            </a:r>
+            <a:endParaRPr lang="en-US" sz="1400" dirty="0"/>
+          </a:p>
+        </p:txBody>
+      </p:sp>
+      <p:graphicFrame>
+        <p:nvGraphicFramePr>
+          <p:cNvPr id="13" name="Chart 0" descr=""/>
+          <p:cNvGraphicFramePr/>
+          <p:nvPr/>
+        </p:nvGraphicFramePr>
+        <p:xfrm>
+          <a:off x="731520" y="3886200"/>
+          <a:ext cx="6035040" cy="2286000"/>
+        </p:xfrm>
+        <a:graphic xmlns:a="http://schemas.openxmlformats.org/drawingml/2006/main">
+          <a:graphicData uri="http://schemas.openxmlformats.org/drawingml/2006/chart">
+            <c:chart xmlns:c="http://schemas.openxmlformats.org/drawingml/2006/chart" r:id="rId1"/>
+          </a:graphicData>
+        </a:graphic>
+      </p:graphicFrame>
+      <p:sp>
+        <p:nvSpPr>
+          <p:cNvPr id="14" name="Shape 11"/>
+          <p:cNvSpPr/>
+          <p:nvPr/>
+        </p:nvSpPr>
+        <p:spPr>
+          <a:xfrm>
+            <a:off x="7040880" y="3886200"/>
+            <a:ext cx="4389120" cy="2286000"/>
+          </a:xfrm>
+          <a:prstGeom prst="roundRect">
+            <a:avLst>
+              <a:gd name="adj" fmla="val 3200"/>
+            </a:avLst>
+          </a:prstGeom>
+          <a:solidFill>
+            <a:srgbClr val="F1F6F5"/>
+          </a:solidFill>
+          <a:ln w="12700">
+            <a:solidFill>
+              <a:srgbClr val="F1F6F5"/>
+            </a:solidFill>
+            <a:prstDash val="solid"/>
+          </a:ln>
+        </p:spPr>
+      </p:sp>
+      <p:sp>
+        <p:nvSpPr>
+          <p:cNvPr id="15" name="Text 12"/>
+          <p:cNvSpPr/>
+          <p:nvPr/>
+        </p:nvSpPr>
+        <p:spPr>
+          <a:xfrm>
+            <a:off x="7315200" y="4096512"/>
+            <a:ext cx="3931920" cy="365760"/>
+          </a:xfrm>
+          <a:prstGeom prst="rect">
+            <a:avLst/>
+          </a:prstGeom>
+          <a:noFill/>
+          <a:ln/>
+        </p:spPr>
+        <p:txBody>
+          <a:bodyPr wrap="square" lIns="0" tIns="0" rIns="0" bIns="0" rtlCol="0" anchor="ctr"/>
+          <a:lstStyle/>
+          <a:p>
+            <a:pPr indent="0" marL="0">
+              <a:buNone/>
+            </a:pPr>
+            <a:r>
+              <a:rPr lang="en-US" sz="1600" b="1" dirty="0">
+                <a:solidFill>
+                  <a:srgbClr val="14504B"/>
+                </a:solidFill>
+                <a:latin typeface="Yu Gothic" pitchFamily="34" charset="0"/>
+                <a:ea typeface="Yu Gothic" pitchFamily="34" charset="-122"/>
+                <a:cs typeface="Yu Gothic" pitchFamily="34" charset="-120"/>
+              </a:rPr>
+              <a:t>尿蛋白に注目する理由</a:t>
+            </a:r>
+            <a:endParaRPr lang="en-US" sz="1600" dirty="0"/>
+          </a:p>
+        </p:txBody>
+      </p:sp>
+      <p:sp>
+        <p:nvSpPr>
+          <p:cNvPr id="16" name="Text 13"/>
+          <p:cNvSpPr/>
+          <p:nvPr/>
+        </p:nvSpPr>
+        <p:spPr>
+          <a:xfrm>
+            <a:off x="7315200" y="4526280"/>
+            <a:ext cx="3931920" cy="731520"/>
+          </a:xfrm>
+          <a:prstGeom prst="rect">
+            <a:avLst/>
+          </a:prstGeom>
+          <a:noFill/>
+          <a:ln/>
+        </p:spPr>
+        <p:txBody>
+          <a:bodyPr wrap="square" lIns="0" tIns="0" rIns="0" bIns="0" rtlCol="0" anchor="ctr"/>
+          <a:lstStyle/>
+          <a:p>
+            <a:pPr indent="0" marL="0">
+              <a:lnSpc>
+                <a:spcPct val="125000"/>
+              </a:lnSpc>
+              <a:buNone/>
+            </a:pPr>
+            <a:r>
+              <a:rPr lang="en-US" sz="1400" dirty="0">
+                <a:solidFill>
+                  <a:srgbClr val="16211F"/>
+                </a:solidFill>
+                <a:latin typeface="Yu Gothic" pitchFamily="34" charset="0"/>
+                <a:ea typeface="Yu Gothic" pitchFamily="34" charset="-122"/>
+                <a:cs typeface="Yu Gothic" pitchFamily="34" charset="-120"/>
+              </a:rPr>
+              <a:t>腎機能の低下より先に出ることが</a:t>
+            </a:r>
+            <a:endParaRPr lang="en-US" sz="1400" dirty="0"/>
+          </a:p>
+          <a:p>
+            <a:pPr indent="0" marL="0">
+              <a:lnSpc>
+                <a:spcPct val="125000"/>
+              </a:lnSpc>
+              <a:buNone/>
+            </a:pPr>
+            <a:r>
+              <a:rPr lang="en-US" sz="1400" dirty="0">
+                <a:solidFill>
+                  <a:srgbClr val="16211F"/>
+                </a:solidFill>
+                <a:latin typeface="Yu Gothic" pitchFamily="34" charset="0"/>
+                <a:ea typeface="Yu Gothic" pitchFamily="34" charset="-122"/>
+                <a:cs typeface="Yu Gothic" pitchFamily="34" charset="-120"/>
+              </a:rPr>
+              <a:t>多く、早い段階で気づけます。</a:t>
+            </a:r>
+            <a:endParaRPr lang="en-US" sz="1400" dirty="0"/>
+          </a:p>
+        </p:txBody>
+      </p:sp>
+      <p:sp>
+        <p:nvSpPr>
+          <p:cNvPr id="17" name="Text 14"/>
+          <p:cNvSpPr/>
+          <p:nvPr/>
+        </p:nvSpPr>
+        <p:spPr>
+          <a:xfrm>
+            <a:off x="7315200" y="5349240"/>
+            <a:ext cx="3931920" cy="685800"/>
+          </a:xfrm>
+          <a:prstGeom prst="rect">
+            <a:avLst/>
+          </a:prstGeom>
+          <a:noFill/>
+          <a:ln/>
+        </p:spPr>
+        <p:txBody>
+          <a:bodyPr wrap="square" lIns="0" tIns="0" rIns="0" bIns="0" rtlCol="0" anchor="ctr"/>
+          <a:lstStyle/>
+          <a:p>
+            <a:pPr indent="0" marL="0">
+              <a:lnSpc>
+                <a:spcPct val="120000"/>
+              </a:lnSpc>
+              <a:buNone/>
+            </a:pPr>
+            <a:r>
+              <a:rPr lang="en-US" sz="1300" dirty="0">
+                <a:solidFill>
+                  <a:srgbClr val="5C6B68"/>
+                </a:solidFill>
+                <a:latin typeface="Yu Gothic" pitchFamily="34" charset="0"/>
+                <a:ea typeface="Yu Gothic" pitchFamily="34" charset="-122"/>
+                <a:cs typeface="Yu Gothic" pitchFamily="34" charset="-120"/>
+              </a:rPr>
+              <a:t>BRIが増えた群のリスク上昇は、</a:t>
+            </a:r>
+            <a:endParaRPr lang="en-US" sz="1300" dirty="0"/>
+          </a:p>
+          <a:p>
+            <a:pPr indent="0" marL="0">
+              <a:lnSpc>
+                <a:spcPct val="120000"/>
+              </a:lnSpc>
+              <a:buNone/>
+            </a:pPr>
+            <a:r>
+              <a:rPr lang="en-US" sz="1300" dirty="0">
+                <a:solidFill>
+                  <a:srgbClr val="5C6B68"/>
+                </a:solidFill>
+                <a:latin typeface="Yu Gothic" pitchFamily="34" charset="0"/>
+                <a:ea typeface="Yu Gothic" pitchFamily="34" charset="-122"/>
+                <a:cs typeface="Yu Gothic" pitchFamily="34" charset="-120"/>
+              </a:rPr>
+              <a:t>BMIの変化を調整しても残りました。</a:t>
+            </a:r>
+            <a:endParaRPr lang="en-US" sz="1300" dirty="0"/>
+          </a:p>
+        </p:txBody>
+      </p:sp>
+    </p:spTree>
+  </p:cSld>
+  <p:clrMapOvr>
+    <a:masterClrMapping/>
+  </p:clrMapOvr>
+</p:sld>
+</file>
+
+<file path=ppt/slides/slide16.xml><?xml version="1.0" encoding="utf-8"?>
+<p:sld xmlns:a="http://schemas.openxmlformats.org/drawingml/2006/main" xmlns:r="http://schemas.openxmlformats.org/officeDocument/2006/relationships" xmlns:p="http://schemas.openxmlformats.org/presentationml/2006/main">
+  <p:cSld name="Slide 16">
+    <p:bg>
+      <p:bgPr>
+        <a:solidFill>
+          <a:srgbClr val="FFFFFF"/>
+        </a:solidFill>
+      </p:bgPr>
+    </p:bg>
+    <p:spTree>
+      <p:nvGrpSpPr>
+        <p:cNvPr id="1" name=""/>
+        <p:cNvGrpSpPr/>
+        <p:nvPr/>
+      </p:nvGrpSpPr>
+      <p:grpSpPr>
+        <a:xfrm>
+          <a:off x="0" y="0"/>
+          <a:ext cx="0" cy="0"/>
+          <a:chOff x="0" y="0"/>
+          <a:chExt cx="0" cy="0"/>
+        </a:xfrm>
+      </p:grpSpPr>
+      <p:sp>
+        <p:nvSpPr>
+          <p:cNvPr id="2" name="Text 0"/>
+          <p:cNvSpPr/>
+          <p:nvPr/>
+        </p:nvSpPr>
+        <p:spPr>
+          <a:xfrm>
+            <a:off x="731520" y="411480"/>
+            <a:ext cx="10698480" cy="777240"/>
+          </a:xfrm>
+          <a:prstGeom prst="rect">
+            <a:avLst/>
+          </a:prstGeom>
+          <a:noFill/>
+          <a:ln/>
+        </p:spPr>
+        <p:txBody>
+          <a:bodyPr wrap="square" lIns="0" tIns="0" rIns="0" bIns="0" rtlCol="0" anchor="ctr"/>
+          <a:lstStyle/>
+          <a:p>
+            <a:pPr indent="0" marL="0">
+              <a:buNone/>
+            </a:pPr>
+            <a:r>
+              <a:rPr lang="en-US" sz="3600" b="1" dirty="0">
+                <a:solidFill>
+                  <a:srgbClr val="14504B"/>
+                </a:solidFill>
+                <a:latin typeface="Yu Gothic" pitchFamily="34" charset="0"/>
+                <a:ea typeface="Yu Gothic" pitchFamily="34" charset="-122"/>
+                <a:cs typeface="Yu Gothic" pitchFamily="34" charset="-120"/>
+              </a:rPr>
+              <a:t>どう現場で使えるか</a:t>
+            </a:r>
+            <a:endParaRPr lang="en-US" sz="3600" dirty="0"/>
+          </a:p>
+        </p:txBody>
+      </p:sp>
+      <p:sp>
+        <p:nvSpPr>
+          <p:cNvPr id="3" name="Text 1"/>
+          <p:cNvSpPr/>
+          <p:nvPr/>
+        </p:nvSpPr>
+        <p:spPr>
+          <a:xfrm>
+            <a:off x="731520" y="1225296"/>
+            <a:ext cx="10698480" cy="411480"/>
+          </a:xfrm>
+          <a:prstGeom prst="rect">
+            <a:avLst/>
+          </a:prstGeom>
+          <a:noFill/>
+          <a:ln/>
+        </p:spPr>
+        <p:txBody>
+          <a:bodyPr wrap="square" lIns="0" tIns="0" rIns="0" bIns="0" rtlCol="0" anchor="ctr"/>
+          <a:lstStyle/>
+          <a:p>
+            <a:pPr indent="0" marL="0">
+              <a:buNone/>
+            </a:pPr>
+            <a:r>
+              <a:rPr lang="en-US" sz="1600" dirty="0">
+                <a:solidFill>
+                  <a:srgbClr val="5C6B68"/>
+                </a:solidFill>
+                <a:latin typeface="Yu Gothic" pitchFamily="34" charset="0"/>
+                <a:ea typeface="Yu Gothic" pitchFamily="34" charset="-122"/>
+                <a:cs typeface="Yu Gothic" pitchFamily="34" charset="-120"/>
+              </a:rPr>
+              <a:t>研究を、健診の場での実践につなげる</a:t>
+            </a:r>
+            <a:endParaRPr lang="en-US" sz="1600" dirty="0"/>
+          </a:p>
+        </p:txBody>
+      </p:sp>
+      <p:sp>
+        <p:nvSpPr>
+          <p:cNvPr id="4" name="Shape 2"/>
+          <p:cNvSpPr/>
+          <p:nvPr/>
+        </p:nvSpPr>
+        <p:spPr>
+          <a:xfrm>
+            <a:off x="731520" y="1920240"/>
+            <a:ext cx="3429000" cy="2743200"/>
+          </a:xfrm>
+          <a:prstGeom prst="roundRect">
+            <a:avLst>
+              <a:gd name="adj" fmla="val 2667"/>
+            </a:avLst>
+          </a:prstGeom>
+          <a:solidFill>
+            <a:srgbClr val="F1F6F5"/>
+          </a:solidFill>
+          <a:ln w="12700">
+            <a:solidFill>
+              <a:srgbClr val="F1F6F5"/>
+            </a:solidFill>
+            <a:prstDash val="solid"/>
+          </a:ln>
+        </p:spPr>
+      </p:sp>
+      <p:sp>
+        <p:nvSpPr>
+          <p:cNvPr id="5" name="Shape 3"/>
+          <p:cNvSpPr/>
+          <p:nvPr/>
+        </p:nvSpPr>
+        <p:spPr>
+          <a:xfrm>
+            <a:off x="987552" y="2148840"/>
+            <a:ext cx="502920" cy="502920"/>
+          </a:xfrm>
+          <a:prstGeom prst="ellipse">
+            <a:avLst/>
+          </a:prstGeom>
+          <a:solidFill>
+            <a:srgbClr val="D98A2B"/>
+          </a:solidFill>
+          <a:ln w="12700">
+            <a:solidFill>
+              <a:srgbClr val="D98A2B"/>
+            </a:solidFill>
+            <a:prstDash val="solid"/>
+          </a:ln>
+        </p:spPr>
+      </p:sp>
+      <p:sp>
+        <p:nvSpPr>
+          <p:cNvPr id="6" name="Text 4"/>
+          <p:cNvSpPr/>
+          <p:nvPr/>
+        </p:nvSpPr>
+        <p:spPr>
+          <a:xfrm>
+            <a:off x="987552" y="2148840"/>
+            <a:ext cx="502920" cy="502920"/>
+          </a:xfrm>
+          <a:prstGeom prst="rect">
+            <a:avLst/>
+          </a:prstGeom>
+          <a:noFill/>
+          <a:ln/>
+        </p:spPr>
+        <p:txBody>
+          <a:bodyPr wrap="square" lIns="0" tIns="0" rIns="0" bIns="0" rtlCol="0" anchor="ctr"/>
+          <a:lstStyle/>
+          <a:p>
+            <a:pPr algn="ctr" indent="0" marL="0">
+              <a:buNone/>
+            </a:pPr>
+            <a:r>
+              <a:rPr lang="en-US" sz="1700" b="1" dirty="0">
+                <a:solidFill>
+                  <a:srgbClr val="FFFFFF"/>
+                </a:solidFill>
+                <a:latin typeface="Yu Gothic" pitchFamily="34" charset="0"/>
+                <a:ea typeface="Yu Gothic" pitchFamily="34" charset="-122"/>
+                <a:cs typeface="Yu Gothic" pitchFamily="34" charset="-120"/>
+              </a:rPr>
+              <a:t>①</a:t>
+            </a:r>
+            <a:endParaRPr lang="en-US" sz="1700" dirty="0"/>
+          </a:p>
+        </p:txBody>
+      </p:sp>
+      <p:sp>
+        <p:nvSpPr>
+          <p:cNvPr id="7" name="Text 5"/>
+          <p:cNvSpPr/>
+          <p:nvPr/>
+        </p:nvSpPr>
+        <p:spPr>
+          <a:xfrm>
+            <a:off x="987552" y="2834640"/>
+            <a:ext cx="3017520" cy="411480"/>
+          </a:xfrm>
+          <a:prstGeom prst="rect">
+            <a:avLst/>
+          </a:prstGeom>
+          <a:noFill/>
+          <a:ln/>
+        </p:spPr>
+        <p:txBody>
+          <a:bodyPr wrap="square" lIns="0" tIns="0" rIns="0" bIns="0" rtlCol="0" anchor="ctr"/>
+          <a:lstStyle/>
+          <a:p>
+            <a:pPr indent="0" marL="0">
+              <a:buNone/>
+            </a:pPr>
+            <a:r>
+              <a:rPr lang="en-US" sz="1700" b="1" dirty="0">
+                <a:solidFill>
+                  <a:srgbClr val="14504B"/>
+                </a:solidFill>
+                <a:latin typeface="Yu Gothic" pitchFamily="34" charset="0"/>
+                <a:ea typeface="Yu Gothic" pitchFamily="34" charset="-122"/>
+                <a:cs typeface="Yu Gothic" pitchFamily="34" charset="-120"/>
+              </a:rPr>
+              <a:t>道具がいらない</a:t>
+            </a:r>
+            <a:endParaRPr lang="en-US" sz="1700" dirty="0"/>
+          </a:p>
+        </p:txBody>
+      </p:sp>
+      <p:sp>
+        <p:nvSpPr>
+          <p:cNvPr id="8" name="Text 6"/>
+          <p:cNvSpPr/>
+          <p:nvPr/>
+        </p:nvSpPr>
+        <p:spPr>
+          <a:xfrm>
+            <a:off x="987552" y="3346704"/>
+            <a:ext cx="3017520" cy="1188720"/>
+          </a:xfrm>
+          <a:prstGeom prst="rect">
+            <a:avLst/>
+          </a:prstGeom>
+          <a:noFill/>
+          <a:ln/>
+        </p:spPr>
+        <p:txBody>
+          <a:bodyPr wrap="square" lIns="0" tIns="0" rIns="0" bIns="0" rtlCol="0" anchor="ctr"/>
+          <a:lstStyle/>
+          <a:p>
+            <a:pPr indent="0" marL="0">
+              <a:lnSpc>
+                <a:spcPct val="130000"/>
+              </a:lnSpc>
+              <a:buNone/>
+            </a:pPr>
+            <a:r>
+              <a:rPr lang="en-US" sz="1400" dirty="0">
+                <a:solidFill>
+                  <a:srgbClr val="5C6B68"/>
+                </a:solidFill>
+                <a:latin typeface="Yu Gothic" pitchFamily="34" charset="0"/>
+                <a:ea typeface="Yu Gothic" pitchFamily="34" charset="-122"/>
+                <a:cs typeface="Yu Gothic" pitchFamily="34" charset="-120"/>
+              </a:rPr>
+              <a:t>メジャーと身長計だけ。</a:t>
+            </a:r>
+            <a:endParaRPr lang="en-US" sz="1400" dirty="0"/>
+          </a:p>
+          <a:p>
+            <a:pPr indent="0" marL="0">
+              <a:lnSpc>
+                <a:spcPct val="130000"/>
+              </a:lnSpc>
+              <a:buNone/>
+            </a:pPr>
+            <a:r>
+              <a:rPr lang="en-US" sz="1400" dirty="0">
+                <a:solidFill>
+                  <a:srgbClr val="5C6B68"/>
+                </a:solidFill>
+                <a:latin typeface="Yu Gothic" pitchFamily="34" charset="0"/>
+                <a:ea typeface="Yu Gothic" pitchFamily="34" charset="-122"/>
+                <a:cs typeface="Yu Gothic" pitchFamily="34" charset="-120"/>
+              </a:rPr>
+              <a:t>特別な機器がなくても</a:t>
+            </a:r>
+            <a:endParaRPr lang="en-US" sz="1400" dirty="0"/>
+          </a:p>
+          <a:p>
+            <a:pPr indent="0" marL="0">
+              <a:lnSpc>
+                <a:spcPct val="130000"/>
+              </a:lnSpc>
+              <a:buNone/>
+            </a:pPr>
+            <a:r>
+              <a:rPr lang="en-US" sz="1400" dirty="0">
+                <a:solidFill>
+                  <a:srgbClr val="5C6B68"/>
+                </a:solidFill>
+                <a:latin typeface="Yu Gothic" pitchFamily="34" charset="0"/>
+                <a:ea typeface="Yu Gothic" pitchFamily="34" charset="-122"/>
+                <a:cs typeface="Yu Gothic" pitchFamily="34" charset="-120"/>
+              </a:rPr>
+              <a:t>どの会場でも計算できる</a:t>
+            </a:r>
+            <a:endParaRPr lang="en-US" sz="1400" dirty="0"/>
+          </a:p>
+        </p:txBody>
+      </p:sp>
+      <p:sp>
+        <p:nvSpPr>
+          <p:cNvPr id="9" name="Shape 7"/>
+          <p:cNvSpPr/>
+          <p:nvPr/>
+        </p:nvSpPr>
+        <p:spPr>
+          <a:xfrm>
+            <a:off x="4434840" y="1920240"/>
+            <a:ext cx="3429000" cy="2743200"/>
+          </a:xfrm>
+          <a:prstGeom prst="roundRect">
+            <a:avLst>
+              <a:gd name="adj" fmla="val 2667"/>
+            </a:avLst>
+          </a:prstGeom>
+          <a:solidFill>
+            <a:srgbClr val="F1F6F5"/>
+          </a:solidFill>
+          <a:ln w="12700">
+            <a:solidFill>
+              <a:srgbClr val="F1F6F5"/>
+            </a:solidFill>
+            <a:prstDash val="solid"/>
+          </a:ln>
+        </p:spPr>
+      </p:sp>
+      <p:sp>
+        <p:nvSpPr>
+          <p:cNvPr id="10" name="Shape 8"/>
+          <p:cNvSpPr/>
+          <p:nvPr/>
+        </p:nvSpPr>
+        <p:spPr>
+          <a:xfrm>
+            <a:off x="4690872" y="2148840"/>
+            <a:ext cx="502920" cy="502920"/>
+          </a:xfrm>
+          <a:prstGeom prst="ellipse">
+            <a:avLst/>
+          </a:prstGeom>
+          <a:solidFill>
+            <a:srgbClr val="D98A2B"/>
+          </a:solidFill>
+          <a:ln w="12700">
+            <a:solidFill>
+              <a:srgbClr val="D98A2B"/>
+            </a:solidFill>
+            <a:prstDash val="solid"/>
+          </a:ln>
+        </p:spPr>
+      </p:sp>
+      <p:sp>
+        <p:nvSpPr>
+          <p:cNvPr id="11" name="Text 9"/>
+          <p:cNvSpPr/>
+          <p:nvPr/>
+        </p:nvSpPr>
+        <p:spPr>
+          <a:xfrm>
+            <a:off x="4690872" y="2148840"/>
+            <a:ext cx="502920" cy="502920"/>
+          </a:xfrm>
+          <a:prstGeom prst="rect">
+            <a:avLst/>
+          </a:prstGeom>
+          <a:noFill/>
+          <a:ln/>
+        </p:spPr>
+        <p:txBody>
+          <a:bodyPr wrap="square" lIns="0" tIns="0" rIns="0" bIns="0" rtlCol="0" anchor="ctr"/>
+          <a:lstStyle/>
+          <a:p>
+            <a:pPr algn="ctr" indent="0" marL="0">
+              <a:buNone/>
+            </a:pPr>
+            <a:r>
+              <a:rPr lang="en-US" sz="1700" b="1" dirty="0">
+                <a:solidFill>
+                  <a:srgbClr val="FFFFFF"/>
+                </a:solidFill>
+                <a:latin typeface="Yu Gothic" pitchFamily="34" charset="0"/>
+                <a:ea typeface="Yu Gothic" pitchFamily="34" charset="-122"/>
+                <a:cs typeface="Yu Gothic" pitchFamily="34" charset="-120"/>
+              </a:rPr>
+              <a:t>②</a:t>
+            </a:r>
+            <a:endParaRPr lang="en-US" sz="1700" dirty="0"/>
+          </a:p>
+        </p:txBody>
+      </p:sp>
+      <p:sp>
+        <p:nvSpPr>
+          <p:cNvPr id="12" name="Text 10"/>
+          <p:cNvSpPr/>
+          <p:nvPr/>
+        </p:nvSpPr>
+        <p:spPr>
+          <a:xfrm>
+            <a:off x="4690872" y="2834640"/>
+            <a:ext cx="3017520" cy="411480"/>
+          </a:xfrm>
+          <a:prstGeom prst="rect">
+            <a:avLst/>
+          </a:prstGeom>
+          <a:noFill/>
+          <a:ln/>
+        </p:spPr>
+        <p:txBody>
+          <a:bodyPr wrap="square" lIns="0" tIns="0" rIns="0" bIns="0" rtlCol="0" anchor="ctr"/>
+          <a:lstStyle/>
+          <a:p>
+            <a:pPr indent="0" marL="0">
+              <a:buNone/>
+            </a:pPr>
+            <a:r>
+              <a:rPr lang="en-US" sz="1700" b="1" dirty="0">
+                <a:solidFill>
+                  <a:srgbClr val="14504B"/>
+                </a:solidFill>
+                <a:latin typeface="Yu Gothic" pitchFamily="34" charset="0"/>
+                <a:ea typeface="Yu Gothic" pitchFamily="34" charset="-122"/>
+                <a:cs typeface="Yu Gothic" pitchFamily="34" charset="-120"/>
+              </a:rPr>
+              <a:t>声のかけ方が変わる</a:t>
+            </a:r>
+            <a:endParaRPr lang="en-US" sz="1700" dirty="0"/>
+          </a:p>
+        </p:txBody>
+      </p:sp>
+      <p:sp>
+        <p:nvSpPr>
+          <p:cNvPr id="13" name="Text 11"/>
+          <p:cNvSpPr/>
+          <p:nvPr/>
+        </p:nvSpPr>
+        <p:spPr>
+          <a:xfrm>
+            <a:off x="4690872" y="3346704"/>
+            <a:ext cx="3017520" cy="1188720"/>
+          </a:xfrm>
+          <a:prstGeom prst="rect">
+            <a:avLst/>
+          </a:prstGeom>
+          <a:noFill/>
+          <a:ln/>
+        </p:spPr>
+        <p:txBody>
+          <a:bodyPr wrap="square" lIns="0" tIns="0" rIns="0" bIns="0" rtlCol="0" anchor="ctr"/>
+          <a:lstStyle/>
+          <a:p>
+            <a:pPr indent="0" marL="0">
+              <a:lnSpc>
+                <a:spcPct val="130000"/>
+              </a:lnSpc>
+              <a:buNone/>
+            </a:pPr>
+            <a:r>
+              <a:rPr lang="en-US" sz="1400" dirty="0">
+                <a:solidFill>
+                  <a:srgbClr val="5C6B68"/>
+                </a:solidFill>
+                <a:latin typeface="Yu Gothic" pitchFamily="34" charset="0"/>
+                <a:ea typeface="Yu Gothic" pitchFamily="34" charset="-122"/>
+                <a:cs typeface="Yu Gothic" pitchFamily="34" charset="-120"/>
+              </a:rPr>
+              <a:t>「太っています」ではなく</a:t>
+            </a:r>
+            <a:endParaRPr lang="en-US" sz="1400" dirty="0"/>
+          </a:p>
+          <a:p>
+            <a:pPr indent="0" marL="0">
+              <a:lnSpc>
+                <a:spcPct val="130000"/>
+              </a:lnSpc>
+              <a:buNone/>
+            </a:pPr>
+            <a:r>
+              <a:rPr lang="en-US" sz="1400" dirty="0">
+                <a:solidFill>
+                  <a:srgbClr val="5C6B68"/>
+                </a:solidFill>
+                <a:latin typeface="Yu Gothic" pitchFamily="34" charset="0"/>
+                <a:ea typeface="Yu Gothic" pitchFamily="34" charset="-122"/>
+                <a:cs typeface="Yu Gothic" pitchFamily="34" charset="-120"/>
+              </a:rPr>
+              <a:t>「去年より増えています」。</a:t>
+            </a:r>
+            <a:endParaRPr lang="en-US" sz="1400" dirty="0"/>
+          </a:p>
+          <a:p>
+            <a:pPr indent="0" marL="0">
+              <a:lnSpc>
+                <a:spcPct val="130000"/>
+              </a:lnSpc>
+              <a:buNone/>
+            </a:pPr>
+            <a:r>
+              <a:rPr lang="en-US" sz="1400" dirty="0">
+                <a:solidFill>
+                  <a:srgbClr val="5C6B68"/>
+                </a:solidFill>
+                <a:latin typeface="Yu Gothic" pitchFamily="34" charset="0"/>
+                <a:ea typeface="Yu Gothic" pitchFamily="34" charset="-122"/>
+                <a:cs typeface="Yu Gothic" pitchFamily="34" charset="-120"/>
+              </a:rPr>
+              <a:t>本人も実感しやすい</a:t>
+            </a:r>
+            <a:endParaRPr lang="en-US" sz="1400" dirty="0"/>
+          </a:p>
+        </p:txBody>
+      </p:sp>
+      <p:sp>
+        <p:nvSpPr>
+          <p:cNvPr id="14" name="Shape 12"/>
+          <p:cNvSpPr/>
+          <p:nvPr/>
+        </p:nvSpPr>
+        <p:spPr>
+          <a:xfrm>
+            <a:off x="8138160" y="1920240"/>
+            <a:ext cx="3429000" cy="2743200"/>
+          </a:xfrm>
+          <a:prstGeom prst="roundRect">
+            <a:avLst>
+              <a:gd name="adj" fmla="val 2667"/>
+            </a:avLst>
+          </a:prstGeom>
+          <a:solidFill>
+            <a:srgbClr val="F1F6F5"/>
+          </a:solidFill>
+          <a:ln w="12700">
+            <a:solidFill>
+              <a:srgbClr val="F1F6F5"/>
+            </a:solidFill>
+            <a:prstDash val="solid"/>
+          </a:ln>
+        </p:spPr>
+      </p:sp>
+      <p:sp>
+        <p:nvSpPr>
+          <p:cNvPr id="15" name="Shape 13"/>
+          <p:cNvSpPr/>
+          <p:nvPr/>
+        </p:nvSpPr>
+        <p:spPr>
+          <a:xfrm>
+            <a:off x="8394192" y="2148840"/>
+            <a:ext cx="502920" cy="502920"/>
+          </a:xfrm>
+          <a:prstGeom prst="ellipse">
+            <a:avLst/>
+          </a:prstGeom>
+          <a:solidFill>
+            <a:srgbClr val="D98A2B"/>
+          </a:solidFill>
+          <a:ln w="12700">
+            <a:solidFill>
+              <a:srgbClr val="D98A2B"/>
+            </a:solidFill>
+            <a:prstDash val="solid"/>
+          </a:ln>
+        </p:spPr>
+      </p:sp>
+      <p:sp>
+        <p:nvSpPr>
+          <p:cNvPr id="16" name="Text 14"/>
+          <p:cNvSpPr/>
+          <p:nvPr/>
+        </p:nvSpPr>
+        <p:spPr>
+          <a:xfrm>
+            <a:off x="8394192" y="2148840"/>
+            <a:ext cx="502920" cy="502920"/>
+          </a:xfrm>
+          <a:prstGeom prst="rect">
+            <a:avLst/>
+          </a:prstGeom>
+          <a:noFill/>
+          <a:ln/>
+        </p:spPr>
+        <p:txBody>
+          <a:bodyPr wrap="square" lIns="0" tIns="0" rIns="0" bIns="0" rtlCol="0" anchor="ctr"/>
+          <a:lstStyle/>
+          <a:p>
+            <a:pPr algn="ctr" indent="0" marL="0">
+              <a:buNone/>
+            </a:pPr>
+            <a:r>
+              <a:rPr lang="en-US" sz="1700" b="1" dirty="0">
+                <a:solidFill>
+                  <a:srgbClr val="FFFFFF"/>
+                </a:solidFill>
+                <a:latin typeface="Yu Gothic" pitchFamily="34" charset="0"/>
+                <a:ea typeface="Yu Gothic" pitchFamily="34" charset="-122"/>
+                <a:cs typeface="Yu Gothic" pitchFamily="34" charset="-120"/>
+              </a:rPr>
+              <a:t>③</a:t>
+            </a:r>
+            <a:endParaRPr lang="en-US" sz="1700" dirty="0"/>
+          </a:p>
+        </p:txBody>
+      </p:sp>
+      <p:sp>
+        <p:nvSpPr>
+          <p:cNvPr id="17" name="Text 15"/>
+          <p:cNvSpPr/>
+          <p:nvPr/>
+        </p:nvSpPr>
+        <p:spPr>
+          <a:xfrm>
+            <a:off x="8394192" y="2834640"/>
+            <a:ext cx="3017520" cy="411480"/>
+          </a:xfrm>
+          <a:prstGeom prst="rect">
+            <a:avLst/>
+          </a:prstGeom>
+          <a:noFill/>
+          <a:ln/>
+        </p:spPr>
+        <p:txBody>
+          <a:bodyPr wrap="square" lIns="0" tIns="0" rIns="0" bIns="0" rtlCol="0" anchor="ctr"/>
+          <a:lstStyle/>
+          <a:p>
+            <a:pPr indent="0" marL="0">
+              <a:buNone/>
+            </a:pPr>
+            <a:r>
+              <a:rPr lang="en-US" sz="1700" b="1" dirty="0">
+                <a:solidFill>
+                  <a:srgbClr val="14504B"/>
+                </a:solidFill>
+                <a:latin typeface="Yu Gothic" pitchFamily="34" charset="0"/>
+                <a:ea typeface="Yu Gothic" pitchFamily="34" charset="-122"/>
+                <a:cs typeface="Yu Gothic" pitchFamily="34" charset="-120"/>
+              </a:rPr>
+              <a:t>優先順位がつけられる</a:t>
+            </a:r>
+            <a:endParaRPr lang="en-US" sz="1700" dirty="0"/>
+          </a:p>
+        </p:txBody>
+      </p:sp>
+      <p:sp>
+        <p:nvSpPr>
+          <p:cNvPr id="18" name="Text 16"/>
+          <p:cNvSpPr/>
+          <p:nvPr/>
+        </p:nvSpPr>
+        <p:spPr>
+          <a:xfrm>
+            <a:off x="8394192" y="3346704"/>
+            <a:ext cx="3017520" cy="1188720"/>
+          </a:xfrm>
+          <a:prstGeom prst="rect">
+            <a:avLst/>
+          </a:prstGeom>
+          <a:noFill/>
+          <a:ln/>
+        </p:spPr>
+        <p:txBody>
+          <a:bodyPr wrap="square" lIns="0" tIns="0" rIns="0" bIns="0" rtlCol="0" anchor="ctr"/>
+          <a:lstStyle/>
+          <a:p>
+            <a:pPr indent="0" marL="0">
+              <a:lnSpc>
+                <a:spcPct val="130000"/>
+              </a:lnSpc>
+              <a:buNone/>
+            </a:pPr>
+            <a:r>
+              <a:rPr lang="en-US" sz="1400" dirty="0">
+                <a:solidFill>
+                  <a:srgbClr val="5C6B68"/>
+                </a:solidFill>
+                <a:latin typeface="Yu Gothic" pitchFamily="34" charset="0"/>
+                <a:ea typeface="Yu Gothic" pitchFamily="34" charset="-122"/>
+                <a:cs typeface="Yu Gothic" pitchFamily="34" charset="-120"/>
+              </a:rPr>
+              <a:t>限られた保健指導の枠を、</a:t>
+            </a:r>
+            <a:endParaRPr lang="en-US" sz="1400" dirty="0"/>
+          </a:p>
+          <a:p>
+            <a:pPr indent="0" marL="0">
+              <a:lnSpc>
+                <a:spcPct val="130000"/>
+              </a:lnSpc>
+              <a:buNone/>
+            </a:pPr>
+            <a:r>
+              <a:rPr lang="en-US" sz="1400" dirty="0">
+                <a:solidFill>
+                  <a:srgbClr val="5C6B68"/>
+                </a:solidFill>
+                <a:latin typeface="Yu Gothic" pitchFamily="34" charset="0"/>
+                <a:ea typeface="Yu Gothic" pitchFamily="34" charset="-122"/>
+                <a:cs typeface="Yu Gothic" pitchFamily="34" charset="-120"/>
+              </a:rPr>
+              <a:t>リスクが上がった人に</a:t>
+            </a:r>
+            <a:endParaRPr lang="en-US" sz="1400" dirty="0"/>
+          </a:p>
+          <a:p>
+            <a:pPr indent="0" marL="0">
+              <a:lnSpc>
+                <a:spcPct val="130000"/>
+              </a:lnSpc>
+              <a:buNone/>
+            </a:pPr>
+            <a:r>
+              <a:rPr lang="en-US" sz="1400" dirty="0">
+                <a:solidFill>
+                  <a:srgbClr val="5C6B68"/>
+                </a:solidFill>
+                <a:latin typeface="Yu Gothic" pitchFamily="34" charset="0"/>
+                <a:ea typeface="Yu Gothic" pitchFamily="34" charset="-122"/>
+                <a:cs typeface="Yu Gothic" pitchFamily="34" charset="-120"/>
+              </a:rPr>
+              <a:t>優先して充てられる</a:t>
+            </a:r>
+            <a:endParaRPr lang="en-US" sz="1400" dirty="0"/>
+          </a:p>
+        </p:txBody>
+      </p:sp>
+      <p:sp>
+        <p:nvSpPr>
+          <p:cNvPr id="19" name="Shape 17"/>
+          <p:cNvSpPr/>
+          <p:nvPr/>
+        </p:nvSpPr>
+        <p:spPr>
+          <a:xfrm>
+            <a:off x="731520" y="4983480"/>
+            <a:ext cx="10698480" cy="1188720"/>
+          </a:xfrm>
+          <a:prstGeom prst="roundRect">
+            <a:avLst>
+              <a:gd name="adj" fmla="val 6154"/>
+            </a:avLst>
+          </a:prstGeom>
+          <a:solidFill>
+            <a:srgbClr val="14504B"/>
+          </a:solidFill>
+          <a:ln w="12700">
+            <a:solidFill>
+              <a:srgbClr val="14504B"/>
+            </a:solidFill>
+            <a:prstDash val="solid"/>
+          </a:ln>
+        </p:spPr>
+      </p:sp>
+      <p:sp>
+        <p:nvSpPr>
+          <p:cNvPr id="20" name="Text 18"/>
+          <p:cNvSpPr/>
+          <p:nvPr/>
+        </p:nvSpPr>
+        <p:spPr>
+          <a:xfrm>
+            <a:off x="1097280" y="5257800"/>
+            <a:ext cx="10058400" cy="502920"/>
+          </a:xfrm>
+          <a:prstGeom prst="rect">
+            <a:avLst/>
+          </a:prstGeom>
+          <a:noFill/>
+          <a:ln/>
+        </p:spPr>
+        <p:txBody>
+          <a:bodyPr wrap="square" lIns="0" tIns="0" rIns="0" bIns="0" rtlCol="0" anchor="ctr"/>
+          <a:lstStyle/>
+          <a:p>
+            <a:pPr indent="0" marL="0">
+              <a:buNone/>
+            </a:pPr>
+            <a:r>
+              <a:rPr lang="en-US" sz="2200" b="1" dirty="0">
+                <a:solidFill>
+                  <a:srgbClr val="FFFFFF"/>
+                </a:solidFill>
+                <a:latin typeface="Yu Gothic" pitchFamily="34" charset="0"/>
+                <a:ea typeface="Yu Gothic" pitchFamily="34" charset="-122"/>
+                <a:cs typeface="Yu Gothic" pitchFamily="34" charset="-120"/>
+              </a:rPr>
+              <a:t>研究の目的は、論文を書くことではなく、明日の声かけを変えること</a:t>
+            </a:r>
+            <a:endParaRPr lang="en-US" sz="2200" dirty="0"/>
+          </a:p>
+        </p:txBody>
+      </p:sp>
+    </p:spTree>
+  </p:cSld>
+  <p:clrMapOvr>
+    <a:masterClrMapping/>
+  </p:clrMapOvr>
+</p:sld>
+</file>
+
+<file path=ppt/slides/slide17.xml><?xml version="1.0" encoding="utf-8"?>
+<p:sld xmlns:a="http://schemas.openxmlformats.org/drawingml/2006/main" xmlns:r="http://schemas.openxmlformats.org/officeDocument/2006/relationships" xmlns:p="http://schemas.openxmlformats.org/presentationml/2006/main">
+  <p:cSld name="Slide 17">
+    <p:bg>
+      <p:bgPr>
+        <a:solidFill>
+          <a:srgbClr val="FFFFFF"/>
+        </a:solidFill>
+      </p:bgPr>
+    </p:bg>
+    <p:spTree>
+      <p:nvGrpSpPr>
+        <p:cNvPr id="1" name=""/>
+        <p:cNvGrpSpPr/>
+        <p:nvPr/>
+      </p:nvGrpSpPr>
+      <p:grpSpPr>
+        <a:xfrm>
+          <a:off x="0" y="0"/>
+          <a:ext cx="0" cy="0"/>
+          <a:chOff x="0" y="0"/>
+          <a:chExt cx="0" cy="0"/>
+        </a:xfrm>
+      </p:grpSpPr>
+      <p:sp>
+        <p:nvSpPr>
+          <p:cNvPr id="2" name="Text 0"/>
+          <p:cNvSpPr/>
+          <p:nvPr/>
+        </p:nvSpPr>
+        <p:spPr>
+          <a:xfrm>
+            <a:off x="731520" y="411480"/>
+            <a:ext cx="10698480" cy="777240"/>
+          </a:xfrm>
+          <a:prstGeom prst="rect">
+            <a:avLst/>
+          </a:prstGeom>
+          <a:noFill/>
+          <a:ln/>
+        </p:spPr>
+        <p:txBody>
+          <a:bodyPr wrap="square" lIns="0" tIns="0" rIns="0" bIns="0" rtlCol="0" anchor="ctr"/>
+          <a:lstStyle/>
+          <a:p>
+            <a:pPr indent="0" marL="0">
+              <a:buNone/>
+            </a:pPr>
+            <a:r>
+              <a:rPr lang="en-US" sz="3600" b="1" dirty="0">
+                <a:solidFill>
+                  <a:srgbClr val="14504B"/>
+                </a:solidFill>
+                <a:latin typeface="Yu Gothic" pitchFamily="34" charset="0"/>
+                <a:ea typeface="Yu Gothic" pitchFamily="34" charset="-122"/>
+                <a:cs typeface="Yu Gothic" pitchFamily="34" charset="-120"/>
+              </a:rPr>
+              <a:t>言えること、言えないこと</a:t>
+            </a:r>
+            <a:endParaRPr lang="en-US" sz="3600" dirty="0"/>
+          </a:p>
+        </p:txBody>
+      </p:sp>
+      <p:sp>
+        <p:nvSpPr>
+          <p:cNvPr id="3" name="Shape 1"/>
+          <p:cNvSpPr/>
+          <p:nvPr/>
+        </p:nvSpPr>
+        <p:spPr>
+          <a:xfrm>
+            <a:off x="731520" y="1965960"/>
+            <a:ext cx="5120640" cy="3200400"/>
+          </a:xfrm>
+          <a:prstGeom prst="roundRect">
+            <a:avLst>
+              <a:gd name="adj" fmla="val 2286"/>
+            </a:avLst>
+          </a:prstGeom>
+          <a:solidFill>
+            <a:srgbClr val="F1F6F5"/>
+          </a:solidFill>
+          <a:ln w="12700">
+            <a:solidFill>
+              <a:srgbClr val="F1F6F5"/>
+            </a:solidFill>
+            <a:prstDash val="solid"/>
+          </a:ln>
+        </p:spPr>
+      </p:sp>
+      <p:sp>
+        <p:nvSpPr>
+          <p:cNvPr id="4" name="Text 2"/>
+          <p:cNvSpPr/>
+          <p:nvPr/>
+        </p:nvSpPr>
+        <p:spPr>
+          <a:xfrm>
+            <a:off x="1051560" y="2194560"/>
+            <a:ext cx="3657600" cy="411480"/>
+          </a:xfrm>
+          <a:prstGeom prst="rect">
+            <a:avLst/>
+          </a:prstGeom>
+          <a:noFill/>
+          <a:ln/>
+        </p:spPr>
+        <p:txBody>
+          <a:bodyPr wrap="square" lIns="0" tIns="0" rIns="0" bIns="0" rtlCol="0" anchor="ctr"/>
+          <a:lstStyle/>
+          <a:p>
+            <a:pPr indent="0" marL="0">
+              <a:buNone/>
+            </a:pPr>
+            <a:r>
+              <a:rPr lang="en-US" sz="1900" b="1" dirty="0">
+                <a:solidFill>
+                  <a:srgbClr val="14504B"/>
+                </a:solidFill>
+                <a:latin typeface="Yu Gothic" pitchFamily="34" charset="0"/>
+                <a:ea typeface="Yu Gothic" pitchFamily="34" charset="-122"/>
+                <a:cs typeface="Yu Gothic" pitchFamily="34" charset="-120"/>
+              </a:rPr>
+              <a:t>言えること</a:t>
+            </a:r>
+            <a:endParaRPr lang="en-US" sz="1900" dirty="0"/>
+          </a:p>
+        </p:txBody>
+      </p:sp>
+      <p:sp>
+        <p:nvSpPr>
+          <p:cNvPr id="5" name="Text 3"/>
+          <p:cNvSpPr/>
+          <p:nvPr/>
+        </p:nvSpPr>
+        <p:spPr>
+          <a:xfrm>
+            <a:off x="1051560" y="2834640"/>
+            <a:ext cx="4663440" cy="868680"/>
+          </a:xfrm>
+          <a:prstGeom prst="rect">
+            <a:avLst/>
+          </a:prstGeom>
+          <a:noFill/>
+          <a:ln/>
+        </p:spPr>
+        <p:txBody>
+          <a:bodyPr wrap="square" lIns="0" tIns="0" rIns="0" bIns="0" rtlCol="0" anchor="ctr"/>
+          <a:lstStyle/>
+          <a:p>
+            <a:pPr indent="0" marL="0">
+              <a:lnSpc>
+                <a:spcPct val="125000"/>
+              </a:lnSpc>
+              <a:buNone/>
+            </a:pPr>
+            <a:r>
+              <a:rPr lang="en-US" sz="1500" dirty="0">
+                <a:solidFill>
+                  <a:srgbClr val="16211F"/>
+                </a:solidFill>
+                <a:latin typeface="Yu Gothic" pitchFamily="34" charset="0"/>
+                <a:ea typeface="Yu Gothic" pitchFamily="34" charset="-122"/>
+                <a:cs typeface="Yu Gothic" pitchFamily="34" charset="-120"/>
+              </a:rPr>
+              <a:t>1年間でBRIが増えた人は、</a:t>
+            </a:r>
+            <a:endParaRPr lang="en-US" sz="1500" dirty="0"/>
+          </a:p>
+          <a:p>
+            <a:pPr indent="0" marL="0">
+              <a:lnSpc>
+                <a:spcPct val="125000"/>
+              </a:lnSpc>
+              <a:buNone/>
+            </a:pPr>
+            <a:r>
+              <a:rPr lang="en-US" sz="1500" dirty="0">
+                <a:solidFill>
+                  <a:srgbClr val="16211F"/>
+                </a:solidFill>
+                <a:latin typeface="Yu Gothic" pitchFamily="34" charset="0"/>
+                <a:ea typeface="Yu Gothic" pitchFamily="34" charset="-122"/>
+                <a:cs typeface="Yu Gothic" pitchFamily="34" charset="-120"/>
+              </a:rPr>
+              <a:t>尿蛋白が新たに出やすかった</a:t>
+            </a:r>
+            <a:endParaRPr lang="en-US" sz="1500" dirty="0"/>
+          </a:p>
+        </p:txBody>
+      </p:sp>
+      <p:sp>
+        <p:nvSpPr>
+          <p:cNvPr id="6" name="Text 4"/>
+          <p:cNvSpPr/>
+          <p:nvPr/>
+        </p:nvSpPr>
+        <p:spPr>
+          <a:xfrm>
+            <a:off x="1051560" y="3931920"/>
+            <a:ext cx="4663440" cy="868680"/>
+          </a:xfrm>
+          <a:prstGeom prst="rect">
+            <a:avLst/>
+          </a:prstGeom>
+          <a:noFill/>
+          <a:ln/>
+        </p:spPr>
+        <p:txBody>
+          <a:bodyPr wrap="square" lIns="0" tIns="0" rIns="0" bIns="0" rtlCol="0" anchor="ctr"/>
+          <a:lstStyle/>
+          <a:p>
+            <a:pPr indent="0" marL="0">
+              <a:lnSpc>
+                <a:spcPct val="125000"/>
+              </a:lnSpc>
+              <a:buNone/>
+            </a:pPr>
+            <a:r>
+              <a:rPr lang="en-US" sz="1500" dirty="0">
+                <a:solidFill>
+                  <a:srgbClr val="16211F"/>
+                </a:solidFill>
+                <a:latin typeface="Yu Gothic" pitchFamily="34" charset="0"/>
+                <a:ea typeface="Yu Gothic" pitchFamily="34" charset="-122"/>
+                <a:cs typeface="Yu Gothic" pitchFamily="34" charset="-120"/>
+              </a:rPr>
+              <a:t>体重やBMIの変化を</a:t>
+            </a:r>
+            <a:endParaRPr lang="en-US" sz="1500" dirty="0"/>
+          </a:p>
+          <a:p>
+            <a:pPr indent="0" marL="0">
+              <a:lnSpc>
+                <a:spcPct val="125000"/>
+              </a:lnSpc>
+              <a:buNone/>
+            </a:pPr>
+            <a:r>
+              <a:rPr lang="en-US" sz="1500" dirty="0">
+                <a:solidFill>
+                  <a:srgbClr val="16211F"/>
+                </a:solidFill>
+                <a:latin typeface="Yu Gothic" pitchFamily="34" charset="0"/>
+                <a:ea typeface="Yu Gothic" pitchFamily="34" charset="-122"/>
+                <a:cs typeface="Yu Gothic" pitchFamily="34" charset="-120"/>
+              </a:rPr>
+              <a:t>考慮しても傾向は残った</a:t>
+            </a:r>
+            <a:endParaRPr lang="en-US" sz="1500" dirty="0"/>
+          </a:p>
+        </p:txBody>
+      </p:sp>
+      <p:sp>
+        <p:nvSpPr>
+          <p:cNvPr id="7" name="Shape 5"/>
+          <p:cNvSpPr/>
+          <p:nvPr/>
+        </p:nvSpPr>
+        <p:spPr>
+          <a:xfrm>
+            <a:off x="6400800" y="1965960"/>
+            <a:ext cx="5029200" cy="3200400"/>
+          </a:xfrm>
+          <a:prstGeom prst="roundRect">
+            <a:avLst>
+              <a:gd name="adj" fmla="val 2286"/>
+            </a:avLst>
+          </a:prstGeom>
+          <a:solidFill>
+            <a:srgbClr val="F7F2EC"/>
+          </a:solidFill>
+          <a:ln w="12700">
+            <a:solidFill>
+              <a:srgbClr val="F7F2EC"/>
+            </a:solidFill>
+            <a:prstDash val="solid"/>
+          </a:ln>
+        </p:spPr>
+      </p:sp>
+      <p:sp>
+        <p:nvSpPr>
+          <p:cNvPr id="8" name="Text 6"/>
+          <p:cNvSpPr/>
+          <p:nvPr/>
+        </p:nvSpPr>
+        <p:spPr>
+          <a:xfrm>
+            <a:off x="6720840" y="2194560"/>
+            <a:ext cx="3657600" cy="411480"/>
+          </a:xfrm>
+          <a:prstGeom prst="rect">
+            <a:avLst/>
+          </a:prstGeom>
+          <a:noFill/>
+          <a:ln/>
+        </p:spPr>
+        <p:txBody>
+          <a:bodyPr wrap="square" lIns="0" tIns="0" rIns="0" bIns="0" rtlCol="0" anchor="ctr"/>
+          <a:lstStyle/>
+          <a:p>
+            <a:pPr indent="0" marL="0">
+              <a:buNone/>
+            </a:pPr>
+            <a:r>
+              <a:rPr lang="en-US" sz="1900" b="1" dirty="0">
+                <a:solidFill>
+                  <a:srgbClr val="8A6F52"/>
+                </a:solidFill>
+                <a:latin typeface="Yu Gothic" pitchFamily="34" charset="0"/>
+                <a:ea typeface="Yu Gothic" pitchFamily="34" charset="-122"/>
+                <a:cs typeface="Yu Gothic" pitchFamily="34" charset="-120"/>
+              </a:rPr>
+              <a:t>言えないこと</a:t>
+            </a:r>
+            <a:endParaRPr lang="en-US" sz="1900" dirty="0"/>
+          </a:p>
+        </p:txBody>
+      </p:sp>
+      <p:sp>
+        <p:nvSpPr>
+          <p:cNvPr id="9" name="Text 7"/>
+          <p:cNvSpPr/>
+          <p:nvPr/>
+        </p:nvSpPr>
+        <p:spPr>
+          <a:xfrm>
+            <a:off x="6720840" y="2788920"/>
+            <a:ext cx="4572000" cy="731520"/>
+          </a:xfrm>
+          <a:prstGeom prst="rect">
+            <a:avLst/>
+          </a:prstGeom>
+          <a:noFill/>
+          <a:ln/>
+        </p:spPr>
+        <p:txBody>
+          <a:bodyPr wrap="square" lIns="0" tIns="0" rIns="0" bIns="0" rtlCol="0" anchor="ctr"/>
+          <a:lstStyle/>
+          <a:p>
+            <a:pPr indent="0" marL="0">
+              <a:lnSpc>
+                <a:spcPct val="120000"/>
+              </a:lnSpc>
+              <a:buNone/>
+            </a:pPr>
+            <a:r>
+              <a:rPr lang="en-US" sz="1400" dirty="0">
+                <a:solidFill>
+                  <a:srgbClr val="5A5044"/>
+                </a:solidFill>
+                <a:latin typeface="Yu Gothic" pitchFamily="34" charset="0"/>
+                <a:ea typeface="Yu Gothic" pitchFamily="34" charset="-122"/>
+                <a:cs typeface="Yu Gothic" pitchFamily="34" charset="-120"/>
+              </a:rPr>
+              <a:t>BRIを下げれば腎臓が守れる、</a:t>
+            </a:r>
+            <a:endParaRPr lang="en-US" sz="1400" dirty="0"/>
+          </a:p>
+          <a:p>
+            <a:pPr indent="0" marL="0">
+              <a:lnSpc>
+                <a:spcPct val="120000"/>
+              </a:lnSpc>
+              <a:buNone/>
+            </a:pPr>
+            <a:r>
+              <a:rPr lang="en-US" sz="1400" dirty="0">
+                <a:solidFill>
+                  <a:srgbClr val="5A5044"/>
+                </a:solidFill>
+                <a:latin typeface="Yu Gothic" pitchFamily="34" charset="0"/>
+                <a:ea typeface="Yu Gothic" pitchFamily="34" charset="-122"/>
+                <a:cs typeface="Yu Gothic" pitchFamily="34" charset="-120"/>
+              </a:rPr>
+              <a:t>という因果関係</a:t>
+            </a:r>
+            <a:endParaRPr lang="en-US" sz="1400" dirty="0"/>
+          </a:p>
+        </p:txBody>
+      </p:sp>
+      <p:sp>
+        <p:nvSpPr>
+          <p:cNvPr id="10" name="Text 8"/>
+          <p:cNvSpPr/>
+          <p:nvPr/>
+        </p:nvSpPr>
+        <p:spPr>
+          <a:xfrm>
+            <a:off x="6720840" y="3611880"/>
+            <a:ext cx="4572000" cy="731520"/>
+          </a:xfrm>
+          <a:prstGeom prst="rect">
+            <a:avLst/>
+          </a:prstGeom>
+          <a:noFill/>
+          <a:ln/>
+        </p:spPr>
+        <p:txBody>
+          <a:bodyPr wrap="square" lIns="0" tIns="0" rIns="0" bIns="0" rtlCol="0" anchor="ctr"/>
+          <a:lstStyle/>
+          <a:p>
+            <a:pPr indent="0" marL="0">
+              <a:lnSpc>
+                <a:spcPct val="120000"/>
+              </a:lnSpc>
+              <a:buNone/>
+            </a:pPr>
+            <a:r>
+              <a:rPr lang="en-US" sz="1400" dirty="0">
+                <a:solidFill>
+                  <a:srgbClr val="5A5044"/>
+                </a:solidFill>
+                <a:latin typeface="Yu Gothic" pitchFamily="34" charset="0"/>
+                <a:ea typeface="Yu Gothic" pitchFamily="34" charset="-122"/>
+                <a:cs typeface="Yu Gothic" pitchFamily="34" charset="-120"/>
+              </a:rPr>
+              <a:t>1年の観察なので、一時的な</a:t>
+            </a:r>
+            <a:endParaRPr lang="en-US" sz="1400" dirty="0"/>
+          </a:p>
+          <a:p>
+            <a:pPr indent="0" marL="0">
+              <a:lnSpc>
+                <a:spcPct val="120000"/>
+              </a:lnSpc>
+              <a:buNone/>
+            </a:pPr>
+            <a:r>
+              <a:rPr lang="en-US" sz="1400" dirty="0">
+                <a:solidFill>
+                  <a:srgbClr val="5A5044"/>
+                </a:solidFill>
+                <a:latin typeface="Yu Gothic" pitchFamily="34" charset="0"/>
+                <a:ea typeface="Yu Gothic" pitchFamily="34" charset="-122"/>
+                <a:cs typeface="Yu Gothic" pitchFamily="34" charset="-120"/>
+              </a:rPr>
+              <a:t>変動の影響もありうる</a:t>
+            </a:r>
+            <a:endParaRPr lang="en-US" sz="1400" dirty="0"/>
+          </a:p>
+        </p:txBody>
+      </p:sp>
+      <p:sp>
+        <p:nvSpPr>
+          <p:cNvPr id="11" name="Text 9"/>
+          <p:cNvSpPr/>
+          <p:nvPr/>
+        </p:nvSpPr>
+        <p:spPr>
+          <a:xfrm>
+            <a:off x="6720840" y="4434840"/>
+            <a:ext cx="4572000" cy="731520"/>
+          </a:xfrm>
+          <a:prstGeom prst="rect">
+            <a:avLst/>
+          </a:prstGeom>
+          <a:noFill/>
+          <a:ln/>
+        </p:spPr>
+        <p:txBody>
+          <a:bodyPr wrap="square" lIns="0" tIns="0" rIns="0" bIns="0" rtlCol="0" anchor="ctr"/>
+          <a:lstStyle/>
+          <a:p>
+            <a:pPr indent="0" marL="0">
+              <a:lnSpc>
+                <a:spcPct val="120000"/>
+              </a:lnSpc>
+              <a:buNone/>
+            </a:pPr>
+            <a:r>
+              <a:rPr lang="en-US" sz="1400" dirty="0">
+                <a:solidFill>
+                  <a:srgbClr val="5A5044"/>
+                </a:solidFill>
+                <a:latin typeface="Yu Gothic" pitchFamily="34" charset="0"/>
+                <a:ea typeface="Yu Gothic" pitchFamily="34" charset="-122"/>
+                <a:cs typeface="Yu Gothic" pitchFamily="34" charset="-120"/>
+              </a:rPr>
+              <a:t>延岡市の受診者が対象。</a:t>
+            </a:r>
+            <a:endParaRPr lang="en-US" sz="1400" dirty="0"/>
+          </a:p>
+          <a:p>
+            <a:pPr indent="0" marL="0">
+              <a:lnSpc>
+                <a:spcPct val="120000"/>
+              </a:lnSpc>
+              <a:buNone/>
+            </a:pPr>
+            <a:r>
+              <a:rPr lang="en-US" sz="1400" dirty="0">
+                <a:solidFill>
+                  <a:srgbClr val="5A5044"/>
+                </a:solidFill>
+                <a:latin typeface="Yu Gothic" pitchFamily="34" charset="0"/>
+                <a:ea typeface="Yu Gothic" pitchFamily="34" charset="-122"/>
+                <a:cs typeface="Yu Gothic" pitchFamily="34" charset="-120"/>
+              </a:rPr>
+              <a:t>そのまま他地域には広げられない</a:t>
+            </a:r>
+            <a:endParaRPr lang="en-US" sz="1400" dirty="0"/>
+          </a:p>
+        </p:txBody>
+      </p:sp>
+      <p:sp>
+        <p:nvSpPr>
+          <p:cNvPr id="12" name="Text 10"/>
+          <p:cNvSpPr/>
+          <p:nvPr/>
+        </p:nvSpPr>
+        <p:spPr>
+          <a:xfrm>
+            <a:off x="731520" y="5440680"/>
+            <a:ext cx="10698480" cy="411480"/>
+          </a:xfrm>
+          <a:prstGeom prst="rect">
+            <a:avLst/>
+          </a:prstGeom>
+          <a:noFill/>
+          <a:ln/>
+        </p:spPr>
+        <p:txBody>
+          <a:bodyPr wrap="square" lIns="0" tIns="0" rIns="0" bIns="0" rtlCol="0" anchor="ctr"/>
+          <a:lstStyle/>
+          <a:p>
+            <a:pPr indent="0" marL="0">
+              <a:buNone/>
+            </a:pPr>
+            <a:r>
+              <a:rPr lang="en-US" sz="1500" i="1" dirty="0">
+                <a:solidFill>
+                  <a:srgbClr val="5C6B68"/>
+                </a:solidFill>
+                <a:latin typeface="Yu Gothic" pitchFamily="34" charset="0"/>
+                <a:ea typeface="Yu Gothic" pitchFamily="34" charset="-122"/>
+                <a:cs typeface="Yu Gothic" pitchFamily="34" charset="-120"/>
+              </a:rPr>
+              <a:t>次に必要なのは、複数地域・長期の追跡と、介入して確かめる研究です。</a:t>
+            </a:r>
+            <a:endParaRPr lang="en-US" sz="1500" dirty="0"/>
+          </a:p>
+        </p:txBody>
+      </p:sp>
+    </p:spTree>
+  </p:cSld>
+  <p:clrMapOvr>
+    <a:masterClrMapping/>
+  </p:clrMapOvr>
+</p:sld>
+</file>
+
+<file path=ppt/slides/slide18.xml><?xml version="1.0" encoding="utf-8"?>
+<p:sld xmlns:a="http://schemas.openxmlformats.org/drawingml/2006/main" xmlns:r="http://schemas.openxmlformats.org/officeDocument/2006/relationships" xmlns:p="http://schemas.openxmlformats.org/presentationml/2006/main">
+  <p:cSld name="Slide 18">
     <p:bg>
       <p:bgPr>
         <a:solidFill>
@@ -12073,532 +15222,12 @@
         </p:nvSpPr>
         <p:spPr>
           <a:xfrm>
-            <a:off x="731520" y="4114800"/>
-            <a:ext cx="2578608" cy="777240"/>
+            <a:off x="731520" y="4160520"/>
+            <a:ext cx="10698480" cy="2011680"/>
           </a:xfrm>
           <a:prstGeom prst="roundRect">
             <a:avLst>
-              <a:gd name="adj" fmla="val 9412"/>
-            </a:avLst>
-          </a:prstGeom>
-          <a:solidFill>
-            <a:srgbClr val="FFFFFF"/>
-          </a:solidFill>
-          <a:ln w="12700">
-            <a:solidFill>
-              <a:srgbClr val="A8CFC9"/>
-            </a:solidFill>
-            <a:prstDash val="solid"/>
-          </a:ln>
-        </p:spPr>
-      </p:sp>
-      <p:sp>
-        <p:nvSpPr>
-          <p:cNvPr id="13" name="Shape 11"/>
-          <p:cNvSpPr/>
-          <p:nvPr/>
-        </p:nvSpPr>
-        <p:spPr>
-          <a:xfrm>
-            <a:off x="960120" y="4315968"/>
-            <a:ext cx="365760" cy="365760"/>
-          </a:xfrm>
-          <a:prstGeom prst="ellipse">
-            <a:avLst/>
-          </a:prstGeom>
-          <a:solidFill>
-            <a:srgbClr val="3E8E84"/>
-          </a:solidFill>
-          <a:ln w="12700">
-            <a:solidFill>
-              <a:srgbClr val="3E8E84"/>
-            </a:solidFill>
-            <a:prstDash val="solid"/>
-          </a:ln>
-        </p:spPr>
-      </p:sp>
-      <p:sp>
-        <p:nvSpPr>
-          <p:cNvPr id="14" name="Text 12"/>
-          <p:cNvSpPr/>
-          <p:nvPr/>
-        </p:nvSpPr>
-        <p:spPr>
-          <a:xfrm>
-            <a:off x="960120" y="4315968"/>
-            <a:ext cx="365760" cy="365760"/>
-          </a:xfrm>
-          <a:prstGeom prst="rect">
-            <a:avLst/>
-          </a:prstGeom>
-          <a:noFill/>
-          <a:ln/>
-        </p:spPr>
-        <p:txBody>
-          <a:bodyPr wrap="square" lIns="0" tIns="0" rIns="0" bIns="0" rtlCol="0" anchor="ctr"/>
-          <a:lstStyle/>
-          <a:p>
-            <a:pPr algn="ctr" indent="0" marL="0">
-              <a:buNone/>
-            </a:pPr>
-            <a:r>
-              <a:rPr lang="en-US" sz="1300" b="1" dirty="0">
-                <a:solidFill>
-                  <a:srgbClr val="FFFFFF"/>
-                </a:solidFill>
-                <a:latin typeface="Yu Gothic" pitchFamily="34" charset="0"/>
-                <a:ea typeface="Yu Gothic" pitchFamily="34" charset="-122"/>
-                <a:cs typeface="Yu Gothic" pitchFamily="34" charset="-120"/>
-              </a:rPr>
-              <a:t>✓</a:t>
-            </a:r>
-            <a:endParaRPr lang="en-US" sz="1300" dirty="0"/>
-          </a:p>
-        </p:txBody>
-      </p:sp>
-      <p:sp>
-        <p:nvSpPr>
-          <p:cNvPr id="15" name="Text 13"/>
-          <p:cNvSpPr/>
-          <p:nvPr/>
-        </p:nvSpPr>
-        <p:spPr>
-          <a:xfrm>
-            <a:off x="1417320" y="4343400"/>
-            <a:ext cx="1828800" cy="365760"/>
-          </a:xfrm>
-          <a:prstGeom prst="rect">
-            <a:avLst/>
-          </a:prstGeom>
-          <a:noFill/>
-          <a:ln/>
-        </p:spPr>
-        <p:txBody>
-          <a:bodyPr wrap="square" lIns="0" tIns="0" rIns="0" bIns="0" rtlCol="0" anchor="ctr"/>
-          <a:lstStyle/>
-          <a:p>
-            <a:pPr indent="0" marL="0">
-              <a:buNone/>
-            </a:pPr>
-            <a:r>
-              <a:rPr lang="en-US" sz="1500" b="1" dirty="0">
-                <a:solidFill>
-                  <a:srgbClr val="14504B"/>
-                </a:solidFill>
-                <a:latin typeface="Yu Gothic" pitchFamily="34" charset="0"/>
-                <a:ea typeface="Yu Gothic" pitchFamily="34" charset="-122"/>
-                <a:cs typeface="Yu Gothic" pitchFamily="34" charset="-120"/>
-              </a:rPr>
-              <a:t>二要素認証</a:t>
-            </a:r>
-            <a:endParaRPr lang="en-US" sz="1500" dirty="0"/>
-          </a:p>
-        </p:txBody>
-      </p:sp>
-      <p:sp>
-        <p:nvSpPr>
-          <p:cNvPr id="16" name="Shape 14"/>
-          <p:cNvSpPr/>
-          <p:nvPr/>
-        </p:nvSpPr>
-        <p:spPr>
-          <a:xfrm>
-            <a:off x="3493008" y="4114800"/>
-            <a:ext cx="2578608" cy="777240"/>
-          </a:xfrm>
-          <a:prstGeom prst="roundRect">
-            <a:avLst>
-              <a:gd name="adj" fmla="val 9412"/>
-            </a:avLst>
-          </a:prstGeom>
-          <a:solidFill>
-            <a:srgbClr val="FFFFFF"/>
-          </a:solidFill>
-          <a:ln w="12700">
-            <a:solidFill>
-              <a:srgbClr val="A8CFC9"/>
-            </a:solidFill>
-            <a:prstDash val="solid"/>
-          </a:ln>
-        </p:spPr>
-      </p:sp>
-      <p:sp>
-        <p:nvSpPr>
-          <p:cNvPr id="17" name="Shape 15"/>
-          <p:cNvSpPr/>
-          <p:nvPr/>
-        </p:nvSpPr>
-        <p:spPr>
-          <a:xfrm>
-            <a:off x="3721608" y="4315968"/>
-            <a:ext cx="365760" cy="365760"/>
-          </a:xfrm>
-          <a:prstGeom prst="ellipse">
-            <a:avLst/>
-          </a:prstGeom>
-          <a:solidFill>
-            <a:srgbClr val="3E8E84"/>
-          </a:solidFill>
-          <a:ln w="12700">
-            <a:solidFill>
-              <a:srgbClr val="3E8E84"/>
-            </a:solidFill>
-            <a:prstDash val="solid"/>
-          </a:ln>
-        </p:spPr>
-      </p:sp>
-      <p:sp>
-        <p:nvSpPr>
-          <p:cNvPr id="18" name="Text 16"/>
-          <p:cNvSpPr/>
-          <p:nvPr/>
-        </p:nvSpPr>
-        <p:spPr>
-          <a:xfrm>
-            <a:off x="3721608" y="4315968"/>
-            <a:ext cx="365760" cy="365760"/>
-          </a:xfrm>
-          <a:prstGeom prst="rect">
-            <a:avLst/>
-          </a:prstGeom>
-          <a:noFill/>
-          <a:ln/>
-        </p:spPr>
-        <p:txBody>
-          <a:bodyPr wrap="square" lIns="0" tIns="0" rIns="0" bIns="0" rtlCol="0" anchor="ctr"/>
-          <a:lstStyle/>
-          <a:p>
-            <a:pPr algn="ctr" indent="0" marL="0">
-              <a:buNone/>
-            </a:pPr>
-            <a:r>
-              <a:rPr lang="en-US" sz="1300" b="1" dirty="0">
-                <a:solidFill>
-                  <a:srgbClr val="FFFFFF"/>
-                </a:solidFill>
-                <a:latin typeface="Yu Gothic" pitchFamily="34" charset="0"/>
-                <a:ea typeface="Yu Gothic" pitchFamily="34" charset="-122"/>
-                <a:cs typeface="Yu Gothic" pitchFamily="34" charset="-120"/>
-              </a:rPr>
-              <a:t>✓</a:t>
-            </a:r>
-            <a:endParaRPr lang="en-US" sz="1300" dirty="0"/>
-          </a:p>
-        </p:txBody>
-      </p:sp>
-      <p:sp>
-        <p:nvSpPr>
-          <p:cNvPr id="19" name="Text 17"/>
-          <p:cNvSpPr/>
-          <p:nvPr/>
-        </p:nvSpPr>
-        <p:spPr>
-          <a:xfrm>
-            <a:off x="4178808" y="4343400"/>
-            <a:ext cx="1828800" cy="365760"/>
-          </a:xfrm>
-          <a:prstGeom prst="rect">
-            <a:avLst/>
-          </a:prstGeom>
-          <a:noFill/>
-          <a:ln/>
-        </p:spPr>
-        <p:txBody>
-          <a:bodyPr wrap="square" lIns="0" tIns="0" rIns="0" bIns="0" rtlCol="0" anchor="ctr"/>
-          <a:lstStyle/>
-          <a:p>
-            <a:pPr indent="0" marL="0">
-              <a:buNone/>
-            </a:pPr>
-            <a:r>
-              <a:rPr lang="en-US" sz="1500" b="1" dirty="0">
-                <a:solidFill>
-                  <a:srgbClr val="14504B"/>
-                </a:solidFill>
-                <a:latin typeface="Yu Gothic" pitchFamily="34" charset="0"/>
-                <a:ea typeface="Yu Gothic" pitchFamily="34" charset="-122"/>
-                <a:cs typeface="Yu Gothic" pitchFamily="34" charset="-120"/>
-              </a:rPr>
-              <a:t>操作の記録</a:t>
-            </a:r>
-            <a:endParaRPr lang="en-US" sz="1500" dirty="0"/>
-          </a:p>
-        </p:txBody>
-      </p:sp>
-      <p:sp>
-        <p:nvSpPr>
-          <p:cNvPr id="20" name="Shape 18"/>
-          <p:cNvSpPr/>
-          <p:nvPr/>
-        </p:nvSpPr>
-        <p:spPr>
-          <a:xfrm>
-            <a:off x="6254496" y="4114800"/>
-            <a:ext cx="2578608" cy="777240"/>
-          </a:xfrm>
-          <a:prstGeom prst="roundRect">
-            <a:avLst>
-              <a:gd name="adj" fmla="val 9412"/>
-            </a:avLst>
-          </a:prstGeom>
-          <a:solidFill>
-            <a:srgbClr val="FFFFFF"/>
-          </a:solidFill>
-          <a:ln w="12700">
-            <a:solidFill>
-              <a:srgbClr val="A8CFC9"/>
-            </a:solidFill>
-            <a:prstDash val="solid"/>
-          </a:ln>
-        </p:spPr>
-      </p:sp>
-      <p:sp>
-        <p:nvSpPr>
-          <p:cNvPr id="21" name="Shape 19"/>
-          <p:cNvSpPr/>
-          <p:nvPr/>
-        </p:nvSpPr>
-        <p:spPr>
-          <a:xfrm>
-            <a:off x="6483096" y="4315968"/>
-            <a:ext cx="365760" cy="365760"/>
-          </a:xfrm>
-          <a:prstGeom prst="ellipse">
-            <a:avLst/>
-          </a:prstGeom>
-          <a:solidFill>
-            <a:srgbClr val="3E8E84"/>
-          </a:solidFill>
-          <a:ln w="12700">
-            <a:solidFill>
-              <a:srgbClr val="3E8E84"/>
-            </a:solidFill>
-            <a:prstDash val="solid"/>
-          </a:ln>
-        </p:spPr>
-      </p:sp>
-      <p:sp>
-        <p:nvSpPr>
-          <p:cNvPr id="22" name="Text 20"/>
-          <p:cNvSpPr/>
-          <p:nvPr/>
-        </p:nvSpPr>
-        <p:spPr>
-          <a:xfrm>
-            <a:off x="6483096" y="4315968"/>
-            <a:ext cx="365760" cy="365760"/>
-          </a:xfrm>
-          <a:prstGeom prst="rect">
-            <a:avLst/>
-          </a:prstGeom>
-          <a:noFill/>
-          <a:ln/>
-        </p:spPr>
-        <p:txBody>
-          <a:bodyPr wrap="square" lIns="0" tIns="0" rIns="0" bIns="0" rtlCol="0" anchor="ctr"/>
-          <a:lstStyle/>
-          <a:p>
-            <a:pPr algn="ctr" indent="0" marL="0">
-              <a:buNone/>
-            </a:pPr>
-            <a:r>
-              <a:rPr lang="en-US" sz="1300" b="1" dirty="0">
-                <a:solidFill>
-                  <a:srgbClr val="FFFFFF"/>
-                </a:solidFill>
-                <a:latin typeface="Yu Gothic" pitchFamily="34" charset="0"/>
-                <a:ea typeface="Yu Gothic" pitchFamily="34" charset="-122"/>
-                <a:cs typeface="Yu Gothic" pitchFamily="34" charset="-120"/>
-              </a:rPr>
-              <a:t>✓</a:t>
-            </a:r>
-            <a:endParaRPr lang="en-US" sz="1300" dirty="0"/>
-          </a:p>
-        </p:txBody>
-      </p:sp>
-      <p:sp>
-        <p:nvSpPr>
-          <p:cNvPr id="23" name="Text 21"/>
-          <p:cNvSpPr/>
-          <p:nvPr/>
-        </p:nvSpPr>
-        <p:spPr>
-          <a:xfrm>
-            <a:off x="6940296" y="4343400"/>
-            <a:ext cx="1828800" cy="365760"/>
-          </a:xfrm>
-          <a:prstGeom prst="rect">
-            <a:avLst/>
-          </a:prstGeom>
-          <a:noFill/>
-          <a:ln/>
-        </p:spPr>
-        <p:txBody>
-          <a:bodyPr wrap="square" lIns="0" tIns="0" rIns="0" bIns="0" rtlCol="0" anchor="ctr"/>
-          <a:lstStyle/>
-          <a:p>
-            <a:pPr indent="0" marL="0">
-              <a:buNone/>
-            </a:pPr>
-            <a:r>
-              <a:rPr lang="en-US" sz="1500" b="1" dirty="0">
-                <a:solidFill>
-                  <a:srgbClr val="14504B"/>
-                </a:solidFill>
-                <a:latin typeface="Yu Gothic" pitchFamily="34" charset="0"/>
-                <a:ea typeface="Yu Gothic" pitchFamily="34" charset="-122"/>
-                <a:cs typeface="Yu Gothic" pitchFamily="34" charset="-120"/>
-              </a:rPr>
-              <a:t>記録の書面出力</a:t>
-            </a:r>
-            <a:endParaRPr lang="en-US" sz="1500" dirty="0"/>
-          </a:p>
-        </p:txBody>
-      </p:sp>
-      <p:sp>
-        <p:nvSpPr>
-          <p:cNvPr id="24" name="Shape 22"/>
-          <p:cNvSpPr/>
-          <p:nvPr/>
-        </p:nvSpPr>
-        <p:spPr>
-          <a:xfrm>
-            <a:off x="9015984" y="4114800"/>
-            <a:ext cx="2578608" cy="777240"/>
-          </a:xfrm>
-          <a:prstGeom prst="roundRect">
-            <a:avLst>
-              <a:gd name="adj" fmla="val 9412"/>
-            </a:avLst>
-          </a:prstGeom>
-          <a:solidFill>
-            <a:srgbClr val="FFFFFF"/>
-          </a:solidFill>
-          <a:ln w="12700">
-            <a:solidFill>
-              <a:srgbClr val="A8CFC9"/>
-            </a:solidFill>
-            <a:prstDash val="solid"/>
-          </a:ln>
-        </p:spPr>
-      </p:sp>
-      <p:sp>
-        <p:nvSpPr>
-          <p:cNvPr id="25" name="Shape 23"/>
-          <p:cNvSpPr/>
-          <p:nvPr/>
-        </p:nvSpPr>
-        <p:spPr>
-          <a:xfrm>
-            <a:off x="9244584" y="4315968"/>
-            <a:ext cx="365760" cy="365760"/>
-          </a:xfrm>
-          <a:prstGeom prst="ellipse">
-            <a:avLst/>
-          </a:prstGeom>
-          <a:solidFill>
-            <a:srgbClr val="3E8E84"/>
-          </a:solidFill>
-          <a:ln w="12700">
-            <a:solidFill>
-              <a:srgbClr val="3E8E84"/>
-            </a:solidFill>
-            <a:prstDash val="solid"/>
-          </a:ln>
-        </p:spPr>
-      </p:sp>
-      <p:sp>
-        <p:nvSpPr>
-          <p:cNvPr id="26" name="Text 24"/>
-          <p:cNvSpPr/>
-          <p:nvPr/>
-        </p:nvSpPr>
-        <p:spPr>
-          <a:xfrm>
-            <a:off x="9244584" y="4315968"/>
-            <a:ext cx="365760" cy="365760"/>
-          </a:xfrm>
-          <a:prstGeom prst="rect">
-            <a:avLst/>
-          </a:prstGeom>
-          <a:noFill/>
-          <a:ln/>
-        </p:spPr>
-        <p:txBody>
-          <a:bodyPr wrap="square" lIns="0" tIns="0" rIns="0" bIns="0" rtlCol="0" anchor="ctr"/>
-          <a:lstStyle/>
-          <a:p>
-            <a:pPr algn="ctr" indent="0" marL="0">
-              <a:buNone/>
-            </a:pPr>
-            <a:r>
-              <a:rPr lang="en-US" sz="1300" b="1" dirty="0">
-                <a:solidFill>
-                  <a:srgbClr val="FFFFFF"/>
-                </a:solidFill>
-                <a:latin typeface="Yu Gothic" pitchFamily="34" charset="0"/>
-                <a:ea typeface="Yu Gothic" pitchFamily="34" charset="-122"/>
-                <a:cs typeface="Yu Gothic" pitchFamily="34" charset="-120"/>
-              </a:rPr>
-              <a:t>✓</a:t>
-            </a:r>
-            <a:endParaRPr lang="en-US" sz="1300" dirty="0"/>
-          </a:p>
-        </p:txBody>
-      </p:sp>
-      <p:sp>
-        <p:nvSpPr>
-          <p:cNvPr id="27" name="Text 25"/>
-          <p:cNvSpPr/>
-          <p:nvPr/>
-        </p:nvSpPr>
-        <p:spPr>
-          <a:xfrm>
-            <a:off x="9701784" y="4343400"/>
-            <a:ext cx="1828800" cy="365760"/>
-          </a:xfrm>
-          <a:prstGeom prst="rect">
-            <a:avLst/>
-          </a:prstGeom>
-          <a:noFill/>
-          <a:ln/>
-        </p:spPr>
-        <p:txBody>
-          <a:bodyPr wrap="square" lIns="0" tIns="0" rIns="0" bIns="0" rtlCol="0" anchor="ctr"/>
-          <a:lstStyle/>
-          <a:p>
-            <a:pPr indent="0" marL="0">
-              <a:buNone/>
-            </a:pPr>
-            <a:r>
-              <a:rPr lang="en-US" sz="1500" b="1" dirty="0">
-                <a:solidFill>
-                  <a:srgbClr val="14504B"/>
-                </a:solidFill>
-                <a:latin typeface="Yu Gothic" pitchFamily="34" charset="0"/>
-                <a:ea typeface="Yu Gothic" pitchFamily="34" charset="-122"/>
-                <a:cs typeface="Yu Gothic" pitchFamily="34" charset="-120"/>
-              </a:rPr>
-              <a:t>バックアップ</a:t>
-            </a:r>
-            <a:endParaRPr lang="en-US" sz="1500" dirty="0"/>
-          </a:p>
-        </p:txBody>
-      </p:sp>
-      <p:sp>
-        <p:nvSpPr>
-          <p:cNvPr id="28" name="Shape 26"/>
-          <p:cNvSpPr/>
-          <p:nvPr/>
-        </p:nvSpPr>
-        <p:spPr>
-          <a:xfrm>
-            <a:off x="731520" y="5166360"/>
-            <a:ext cx="10698480" cy="1005840"/>
-          </a:xfrm>
-          <a:prstGeom prst="roundRect">
-            <a:avLst>
-              <a:gd name="adj" fmla="val 7273"/>
+              <a:gd name="adj" fmla="val 3636"/>
             </a:avLst>
           </a:prstGeom>
           <a:solidFill>
@@ -12614,14 +15243,14 @@
       </p:sp>
       <p:sp>
         <p:nvSpPr>
-          <p:cNvPr id="29" name="Text 27"/>
-          <p:cNvSpPr/>
-          <p:nvPr/>
-        </p:nvSpPr>
-        <p:spPr>
-          <a:xfrm>
-            <a:off x="1097280" y="5349240"/>
-            <a:ext cx="6400800" cy="365760"/>
+          <p:cNvPr id="13" name="Text 11"/>
+          <p:cNvSpPr/>
+          <p:nvPr/>
+        </p:nvSpPr>
+        <p:spPr>
+          <a:xfrm>
+            <a:off x="1097280" y="4389120"/>
+            <a:ext cx="9601200" cy="411480"/>
           </a:xfrm>
           <a:prstGeom prst="rect">
             <a:avLst/>
@@ -12645,7 +15274,7 @@
                 <a:ea typeface="Yu Gothic" pitchFamily="34" charset="-122"/>
                 <a:cs typeface="Yu Gothic" pitchFamily="34" charset="-120"/>
               </a:rPr>
-              <a:t>できていないことも、隠さず書いています</a:t>
+              <a:t>どちらも「何を求めているか」から実装を決めています</a:t>
             </a:r>
             <a:endParaRPr lang="en-US" sz="1900" dirty="0"/>
           </a:p>
@@ -12653,14 +15282,14 @@
       </p:sp>
       <p:sp>
         <p:nvSpPr>
-          <p:cNvPr id="30" name="Text 28"/>
-          <p:cNvSpPr/>
-          <p:nvPr/>
-        </p:nvSpPr>
-        <p:spPr>
-          <a:xfrm>
-            <a:off x="1097280" y="5742432"/>
-            <a:ext cx="10058400" cy="365760"/>
+          <p:cNvPr id="14" name="Text 12"/>
+          <p:cNvSpPr/>
+          <p:nvPr/>
+        </p:nvSpPr>
+        <p:spPr>
+          <a:xfrm>
+            <a:off x="1097280" y="4846320"/>
+            <a:ext cx="9692640" cy="411480"/>
           </a:xfrm>
           <a:prstGeom prst="rect">
             <a:avLst/>
@@ -12684,7 +15313,46 @@
                 <a:ea typeface="Yu Gothic" pitchFamily="34" charset="-122"/>
                 <a:cs typeface="Yu Gothic" pitchFamily="34" charset="-120"/>
               </a:rPr>
-              <a:t>プライバシーマーク・ISMS認証は未取得です。開示書に未対応として明記しています。</a:t>
+              <a:t>条文を先に読み、そこから必要な機能を起こしました。次の2枚で、要求事項と実装の対応を示します。</a:t>
+            </a:r>
+            <a:endParaRPr lang="en-US" sz="1500" dirty="0"/>
+          </a:p>
+        </p:txBody>
+      </p:sp>
+      <p:sp>
+        <p:nvSpPr>
+          <p:cNvPr id="15" name="Text 13"/>
+          <p:cNvSpPr/>
+          <p:nvPr/>
+        </p:nvSpPr>
+        <p:spPr>
+          <a:xfrm>
+            <a:off x="1097280" y="5440680"/>
+            <a:ext cx="9692640" cy="411480"/>
+          </a:xfrm>
+          <a:prstGeom prst="rect">
+            <a:avLst/>
+          </a:prstGeom>
+          <a:noFill/>
+          <a:ln/>
+        </p:spPr>
+        <p:txBody>
+          <a:bodyPr wrap="square" lIns="0" tIns="0" rIns="0" bIns="0" rtlCol="0" anchor="ctr"/>
+          <a:lstStyle/>
+          <a:p>
+            <a:pPr indent="0" marL="0">
+              <a:buNone/>
+            </a:pPr>
+            <a:r>
+              <a:rPr lang="en-US" sz="1500" dirty="0">
+                <a:solidFill>
+                  <a:srgbClr val="D98A2B"/>
+                </a:solidFill>
+                <a:latin typeface="Yu Gothic" pitchFamily="34" charset="0"/>
+                <a:ea typeface="Yu Gothic" pitchFamily="34" charset="-122"/>
+                <a:cs typeface="Yu Gothic" pitchFamily="34" charset="-120"/>
+              </a:rPr>
+              <a:t>できていないことも、そのまま開示します（最後の1枚）。</a:t>
             </a:r>
             <a:endParaRPr lang="en-US" sz="1500" dirty="0"/>
           </a:p>

--- a/PharmaCare_紹介資料.pptx
+++ b/PharmaCare_紹介資料.pptx
@@ -3979,7 +3979,7 @@
                 <a:ea typeface="Yu Gothic" pitchFamily="34" charset="-122"/>
                 <a:cs typeface="Yu Gothic" pitchFamily="34" charset="-120"/>
               </a:rPr>
-              <a:t>※ 二要素認証は新規アカウントで登録必須にしています。既存の利用者は締め出さず、案内から順に移行します。</a:t>
+              <a:t>※ 二要素認証はアカウント作成時に登録必須です。設定を終えるまでアプリ本体には入れません。</a:t>
             </a:r>
             <a:endParaRPr lang="en-US" sz="1300" dirty="0"/>
           </a:p>
@@ -5595,7 +5595,7 @@
                 <a:ea typeface="Yu Gothic" pitchFamily="34" charset="-122"/>
                 <a:cs typeface="Yu Gothic" pitchFamily="34" charset="-120"/>
               </a:rPr>
-              <a:t>二要素認証の全員登録</a:t>
+              <a:t>監査ログを施設側で確認する画面</a:t>
             </a:r>
             <a:endParaRPr lang="en-US" sz="1900" dirty="0"/>
           </a:p>
@@ -5661,7 +5661,7 @@
                 <a:ea typeface="Yu Gothic" pitchFamily="34" charset="-122"/>
                 <a:cs typeface="Yu Gothic" pitchFamily="34" charset="-120"/>
               </a:rPr>
-              <a:t>移行中</a:t>
+              <a:t>未実装</a:t>
             </a:r>
             <a:endParaRPr lang="en-US" sz="1300" dirty="0"/>
           </a:p>
@@ -5703,7 +5703,7 @@
                 <a:ea typeface="Yu Gothic" pitchFamily="34" charset="-122"/>
                 <a:cs typeface="Yu Gothic" pitchFamily="34" charset="-120"/>
               </a:rPr>
-              <a:t>新規アカウントは登録必須にしました。既存の利用者は</a:t>
+              <a:t>システム運用編17①は、記録するだけでなく定期的に確認することまで</a:t>
             </a:r>
             <a:endParaRPr lang="en-US" sz="1400" dirty="0"/>
           </a:p>
@@ -5723,7 +5723,7 @@
                 <a:ea typeface="Yu Gothic" pitchFamily="34" charset="-122"/>
                 <a:cs typeface="Yu Gothic" pitchFamily="34" charset="-120"/>
               </a:rPr>
-              <a:t>締め出さないよう、案内から順に進めています。</a:t>
+              <a:t>求めています。記録と権限は揃っているので、閲覧画面を足せば満たせます。</a:t>
             </a:r>
             <a:endParaRPr lang="en-US" sz="1400" dirty="0"/>
           </a:p>

--- a/PharmaCare_紹介資料.pptx
+++ b/PharmaCare_紹介資料.pptx
@@ -23,9 +23,10 @@
     <p:sldId id="271" r:id="rId17"/>
     <p:sldId id="272" r:id="rId18"/>
     <p:sldId id="273" r:id="rId19"/>
+    <p:sldId id="274" r:id="rId20"/>
   </p:sldIdLst>
   <p:notesMasterIdLst>
-    <p:notesMasterId r:id="rId20"/>
+    <p:notesMasterId r:id="rId21"/>
   </p:notesMasterIdLst>
   <p:sldSz cx="12192000" cy="6858000"/>
   <p:notesSz cx="6858000" cy="12192000"/>
@@ -1054,7 +1055,7 @@
           <a:p>
             <a:r>
               <a:rPr lang="en-US" dirty="0"/>
-              <a:t>隠さず出すことが、医療情報を預かる事業者としての信頼につながる。指摘される前に自分から言う。</a:t>
+              <a:t/>
             </a:r>
             <a:endParaRPr lang="en-US" dirty="0"/>
           </a:p>
@@ -1142,7 +1143,7 @@
           <a:p>
             <a:r>
               <a:rPr lang="en-US" dirty="0"/>
-              <a:t/>
+              <a:t>隠さず出すことが、医療情報を預かる事業者としての信頼につながる。指摘される前に自分から言う。</a:t>
             </a:r>
             <a:endParaRPr lang="en-US" dirty="0"/>
           </a:p>
@@ -1406,7 +1407,7 @@
           <a:p>
             <a:r>
               <a:rPr lang="en-US" dirty="0"/>
-              <a:t>この資料の中心メッセージ。データ→研究→現場の実践、という流れを示す。</a:t>
+              <a:t/>
             </a:r>
             <a:endParaRPr lang="en-US" dirty="0"/>
           </a:p>
@@ -1494,7 +1495,7 @@
           <a:p>
             <a:r>
               <a:rPr lang="en-US" dirty="0"/>
-              <a:t/>
+              <a:t>この資料の中心メッセージ。データ→研究→現場の実践、という流れを示す。</a:t>
             </a:r>
             <a:endParaRPr lang="en-US" dirty="0"/>
           </a:p>
@@ -1624,6 +1625,94 @@
 </p:notes>
 </file>
 
+<file path=ppt/notesSlides/notesSlide19.xml><?xml version="1.0" encoding="utf-8"?>
+<p:notes xmlns:a="http://schemas.openxmlformats.org/drawingml/2006/main" xmlns:r="http://schemas.openxmlformats.org/officeDocument/2006/relationships" xmlns:p="http://schemas.openxmlformats.org/presentationml/2006/main">
+  <p:cSld>
+    <p:spTree>
+      <p:nvGrpSpPr>
+        <p:cNvPr id="1" name=""/>
+        <p:cNvGrpSpPr/>
+        <p:nvPr/>
+      </p:nvGrpSpPr>
+      <p:grpSpPr>
+        <a:xfrm>
+          <a:off x="0" y="0"/>
+          <a:ext cx="0" cy="0"/>
+          <a:chOff x="0" y="0"/>
+          <a:chExt cx="0" cy="0"/>
+        </a:xfrm>
+      </p:grpSpPr>
+      <p:sp>
+        <p:nvSpPr>
+          <p:cNvPr id="2" name="Slide Image Placeholder 1"/>
+          <p:cNvSpPr>
+            <a:spLocks noGrp="1" noRot="1" noChangeAspect="1"/>
+          </p:cNvSpPr>
+          <p:nvPr>
+            <p:ph type="sldImg"/>
+          </p:nvPr>
+        </p:nvSpPr>
+        <p:spPr/>
+      </p:sp>
+      <p:sp>
+        <p:nvSpPr>
+          <p:cNvPr id="3" name="Notes Placeholder 2"/>
+          <p:cNvSpPr>
+            <a:spLocks noGrp="1"/>
+          </p:cNvSpPr>
+          <p:nvPr>
+            <p:ph type="body" idx="1"/>
+          </p:nvPr>
+        </p:nvSpPr>
+        <p:spPr/>
+        <p:txBody>
+          <a:bodyPr/>
+          <a:lstStyle/>
+          <a:p>
+            <a:r>
+              <a:rPr lang="en-US" dirty="0"/>
+              <a:t/>
+            </a:r>
+            <a:endParaRPr lang="en-US" dirty="0"/>
+          </a:p>
+        </p:txBody>
+      </p:sp>
+      <p:sp>
+        <p:nvSpPr>
+          <p:cNvPr id="4" name="Slide Number Placeholder 3"/>
+          <p:cNvSpPr>
+            <a:spLocks noGrp="1"/>
+          </p:cNvSpPr>
+          <p:nvPr>
+            <p:ph type="sldNum" sz="quarter" idx="10"/>
+          </p:nvPr>
+        </p:nvSpPr>
+        <p:spPr/>
+        <p:txBody>
+          <a:bodyPr/>
+          <a:lstStyle/>
+          <a:p>
+            <a:fld id="{F7021451-1387-4CA6-816F-3879F97B5CBC}" type="slidenum">
+              <a:rPr lang="en-US"/>
+              <a:t>19</a:t>
+            </a:fld>
+            <a:endParaRPr lang="en-US"/>
+          </a:p>
+        </p:txBody>
+      </p:sp>
+    </p:spTree>
+    <p:extLst>
+      <p:ext uri="{BB962C8B-B14F-4D97-AF65-F5344CB8AC3E}">
+        <p14:creationId xmlns:p14="http://schemas.microsoft.com/office/powerpoint/2010/main" val="1024086991"/>
+      </p:ext>
+    </p:extLst>
+  </p:cSld>
+  <p:clrMapOvr>
+    <a:masterClrMapping/>
+  </p:clrMapOvr>
+</p:notes>
+</file>
+
 <file path=ppt/notesSlides/notesSlide2.xml><?xml version="1.0" encoding="utf-8"?>
 <p:notes xmlns:a="http://schemas.openxmlformats.org/drawingml/2006/main" xmlns:r="http://schemas.openxmlformats.org/officeDocument/2006/relationships" xmlns:p="http://schemas.openxmlformats.org/presentationml/2006/main">
   <p:cSld>
@@ -2110,7 +2199,7 @@
           <a:p>
             <a:r>
               <a:rPr lang="en-US" dirty="0"/>
-              <a:t>原本照合で危険信号を102→118に増やし、同時にめまいの過剰判定を是正した。増やすだけでなく減らしてもいる点が要旨。</a:t>
+              <a:t>資料の要点は「出典がある」ことではなく「専門職でなくても答えられる形に直した」こと。ここが一番手間のかかった部分。</a:t>
             </a:r>
             <a:endParaRPr lang="en-US" dirty="0"/>
           </a:p>
@@ -5122,7 +5211,7 @@
                 <a:ea typeface="Yu Gothic" pitchFamily="34" charset="-122"/>
                 <a:cs typeface="Yu Gothic" pitchFamily="34" charset="-120"/>
               </a:rPr>
-              <a:t>できていないこと</a:t>
+              <a:t>紙のカルテと同じ信頼を、データで担保する</a:t>
             </a:r>
             <a:endParaRPr lang="en-US" sz="3600" dirty="0"/>
           </a:p>
@@ -5161,7 +5250,7 @@
                 <a:ea typeface="Yu Gothic" pitchFamily="34" charset="-122"/>
                 <a:cs typeface="Yu Gothic" pitchFamily="34" charset="-120"/>
               </a:rPr>
-              <a:t>導入をご検討いただく前に、こちらからお伝えします</a:t>
+              <a:t>前ページの「真正性・見読性・保存性」は、かみ砕くとこの3つです</a:t>
             </a:r>
             <a:endParaRPr lang="en-US" sz="1600" dirty="0"/>
           </a:p>
@@ -5175,12 +5264,117 @@
         </p:nvSpPr>
         <p:spPr>
           <a:xfrm>
-            <a:off x="731520" y="1965960"/>
-            <a:ext cx="10698480" cy="1207008"/>
+            <a:off x="731520" y="1828800"/>
+            <a:ext cx="3429000" cy="841248"/>
           </a:xfrm>
           <a:prstGeom prst="roundRect">
             <a:avLst>
-              <a:gd name="adj" fmla="val 6061"/>
+              <a:gd name="adj" fmla="val 8696"/>
+            </a:avLst>
+          </a:prstGeom>
+          <a:solidFill>
+            <a:srgbClr val="14504B"/>
+          </a:solidFill>
+          <a:ln w="12700">
+            <a:solidFill>
+              <a:srgbClr val="14504B"/>
+            </a:solidFill>
+            <a:prstDash val="solid"/>
+          </a:ln>
+        </p:spPr>
+      </p:sp>
+      <p:sp>
+        <p:nvSpPr>
+          <p:cNvPr id="5" name="Text 3"/>
+          <p:cNvSpPr/>
+          <p:nvPr/>
+        </p:nvSpPr>
+        <p:spPr>
+          <a:xfrm>
+            <a:off x="960120" y="1920240"/>
+            <a:ext cx="2926080" cy="329184"/>
+          </a:xfrm>
+          <a:prstGeom prst="rect">
+            <a:avLst/>
+          </a:prstGeom>
+          <a:noFill/>
+          <a:ln/>
+        </p:spPr>
+        <p:txBody>
+          <a:bodyPr wrap="square" lIns="0" tIns="0" rIns="0" bIns="0" rtlCol="0" anchor="ctr"/>
+          <a:lstStyle/>
+          <a:p>
+            <a:pPr indent="0" marL="0">
+              <a:buNone/>
+            </a:pPr>
+            <a:r>
+              <a:rPr lang="en-US" sz="1900" b="1" dirty="0">
+                <a:solidFill>
+                  <a:srgbClr val="D98A2B"/>
+                </a:solidFill>
+                <a:latin typeface="Yu Gothic" pitchFamily="34" charset="0"/>
+                <a:ea typeface="Yu Gothic" pitchFamily="34" charset="-122"/>
+                <a:cs typeface="Yu Gothic" pitchFamily="34" charset="-120"/>
+              </a:rPr>
+              <a:t>真正性</a:t>
+            </a:r>
+            <a:endParaRPr lang="en-US" sz="1900" dirty="0"/>
+          </a:p>
+        </p:txBody>
+      </p:sp>
+      <p:sp>
+        <p:nvSpPr>
+          <p:cNvPr id="6" name="Text 4"/>
+          <p:cNvSpPr/>
+          <p:nvPr/>
+        </p:nvSpPr>
+        <p:spPr>
+          <a:xfrm>
+            <a:off x="960120" y="2286000"/>
+            <a:ext cx="3017520" cy="310896"/>
+          </a:xfrm>
+          <a:prstGeom prst="rect">
+            <a:avLst/>
+          </a:prstGeom>
+          <a:noFill/>
+          <a:ln/>
+        </p:spPr>
+        <p:txBody>
+          <a:bodyPr wrap="square" lIns="0" tIns="0" rIns="0" bIns="0" rtlCol="0" anchor="ctr"/>
+          <a:lstStyle/>
+          <a:p>
+            <a:pPr indent="0" marL="0">
+              <a:buNone/>
+            </a:pPr>
+            <a:r>
+              <a:rPr lang="en-US" sz="1300" dirty="0">
+                <a:solidFill>
+                  <a:srgbClr val="FFFFFF"/>
+                </a:solidFill>
+                <a:latin typeface="Yu Gothic" pitchFamily="34" charset="0"/>
+                <a:ea typeface="Yu Gothic" pitchFamily="34" charset="-122"/>
+                <a:cs typeface="Yu Gothic" pitchFamily="34" charset="-120"/>
+              </a:rPr>
+              <a:t>あとから書き換えられていないこと</a:t>
+            </a:r>
+            <a:endParaRPr lang="en-US" sz="1300" dirty="0"/>
+          </a:p>
+        </p:txBody>
+      </p:sp>
+      <p:sp>
+        <p:nvSpPr>
+          <p:cNvPr id="7" name="Shape 5"/>
+          <p:cNvSpPr/>
+          <p:nvPr/>
+        </p:nvSpPr>
+        <p:spPr>
+          <a:xfrm>
+            <a:off x="731520" y="2743200"/>
+            <a:ext cx="3429000" cy="1691640"/>
+          </a:xfrm>
+          <a:prstGeom prst="roundRect">
+            <a:avLst>
+              <a:gd name="adj" fmla="val 4324"/>
             </a:avLst>
           </a:prstGeom>
           <a:solidFill>
@@ -5196,65 +5390,167 @@
       </p:sp>
       <p:sp>
         <p:nvSpPr>
-          <p:cNvPr id="5" name="Text 3"/>
-          <p:cNvSpPr/>
-          <p:nvPr/>
-        </p:nvSpPr>
-        <p:spPr>
-          <a:xfrm>
-            <a:off x="1051560" y="2112264"/>
-            <a:ext cx="5669280" cy="365760"/>
-          </a:xfrm>
-          <a:prstGeom prst="rect">
-            <a:avLst/>
-          </a:prstGeom>
-          <a:noFill/>
-          <a:ln/>
-        </p:spPr>
-        <p:txBody>
-          <a:bodyPr wrap="square" lIns="0" tIns="0" rIns="0" bIns="0" rtlCol="0" anchor="ctr"/>
-          <a:lstStyle/>
-          <a:p>
-            <a:pPr indent="0" marL="0">
-              <a:buNone/>
-            </a:pPr>
-            <a:r>
-              <a:rPr lang="en-US" sz="1900" b="1" dirty="0">
-                <a:solidFill>
-                  <a:srgbClr val="14504B"/>
-                </a:solidFill>
-                <a:latin typeface="Yu Gothic" pitchFamily="34" charset="0"/>
-                <a:ea typeface="Yu Gothic" pitchFamily="34" charset="-122"/>
-                <a:cs typeface="Yu Gothic" pitchFamily="34" charset="-120"/>
-              </a:rPr>
-              <a:t>プライバシーマーク／ISMS認証</a:t>
-            </a:r>
-            <a:endParaRPr lang="en-US" sz="1900" dirty="0"/>
-          </a:p>
-        </p:txBody>
-      </p:sp>
-      <p:sp>
-        <p:nvSpPr>
-          <p:cNvPr id="6" name="Shape 4"/>
-          <p:cNvSpPr/>
-          <p:nvPr/>
-        </p:nvSpPr>
-        <p:spPr>
-          <a:xfrm>
-            <a:off x="6949440" y="2130552"/>
-            <a:ext cx="1371600" cy="384048"/>
+          <p:cNvPr id="8" name="Text 6"/>
+          <p:cNvSpPr/>
+          <p:nvPr/>
+        </p:nvSpPr>
+        <p:spPr>
+          <a:xfrm>
+            <a:off x="960120" y="2871216"/>
+            <a:ext cx="2926080" cy="274320"/>
+          </a:xfrm>
+          <a:prstGeom prst="rect">
+            <a:avLst/>
+          </a:prstGeom>
+          <a:noFill/>
+          <a:ln/>
+        </p:spPr>
+        <p:txBody>
+          <a:bodyPr wrap="square" lIns="0" tIns="0" rIns="0" bIns="0" rtlCol="0" anchor="ctr"/>
+          <a:lstStyle/>
+          <a:p>
+            <a:pPr indent="0" marL="0">
+              <a:buNone/>
+            </a:pPr>
+            <a:r>
+              <a:rPr lang="en-US" sz="1200" b="1" dirty="0">
+                <a:solidFill>
+                  <a:srgbClr val="5C6B68"/>
+                </a:solidFill>
+                <a:latin typeface="Yu Gothic" pitchFamily="34" charset="0"/>
+                <a:ea typeface="Yu Gothic" pitchFamily="34" charset="-122"/>
+                <a:cs typeface="Yu Gothic" pitchFamily="34" charset="-120"/>
+              </a:rPr>
+              <a:t>なぜ要るのか</a:t>
+            </a:r>
+            <a:endParaRPr lang="en-US" sz="1200" dirty="0"/>
+          </a:p>
+        </p:txBody>
+      </p:sp>
+      <p:sp>
+        <p:nvSpPr>
+          <p:cNvPr id="9" name="Text 7"/>
+          <p:cNvSpPr/>
+          <p:nvPr/>
+        </p:nvSpPr>
+        <p:spPr>
+          <a:xfrm>
+            <a:off x="960120" y="3163824"/>
+            <a:ext cx="3017520" cy="1188720"/>
+          </a:xfrm>
+          <a:prstGeom prst="rect">
+            <a:avLst/>
+          </a:prstGeom>
+          <a:noFill/>
+          <a:ln/>
+        </p:spPr>
+        <p:txBody>
+          <a:bodyPr wrap="square" lIns="0" tIns="0" rIns="0" bIns="0" rtlCol="0" anchor="ctr"/>
+          <a:lstStyle/>
+          <a:p>
+            <a:pPr indent="0" marL="0">
+              <a:lnSpc>
+                <a:spcPct val="125000"/>
+              </a:lnSpc>
+              <a:buNone/>
+            </a:pPr>
+            <a:r>
+              <a:rPr lang="en-US" sz="1300" dirty="0">
+                <a:solidFill>
+                  <a:srgbClr val="16211F"/>
+                </a:solidFill>
+                <a:latin typeface="Yu Gothic" pitchFamily="34" charset="0"/>
+                <a:ea typeface="Yu Gothic" pitchFamily="34" charset="-122"/>
+                <a:cs typeface="Yu Gothic" pitchFamily="34" charset="-120"/>
+              </a:rPr>
+              <a:t>アレルギーが「あり」から「なし」に</a:t>
+            </a:r>
+            <a:endParaRPr lang="en-US" sz="1300" dirty="0"/>
+          </a:p>
+          <a:p>
+            <a:pPr indent="0" marL="0">
+              <a:lnSpc>
+                <a:spcPct val="125000"/>
+              </a:lnSpc>
+              <a:buNone/>
+            </a:pPr>
+            <a:r>
+              <a:rPr lang="en-US" sz="1300" dirty="0">
+                <a:solidFill>
+                  <a:srgbClr val="16211F"/>
+                </a:solidFill>
+                <a:latin typeface="Yu Gothic" pitchFamily="34" charset="0"/>
+                <a:ea typeface="Yu Gothic" pitchFamily="34" charset="-122"/>
+                <a:cs typeface="Yu Gothic" pitchFamily="34" charset="-120"/>
+              </a:rPr>
+              <a:t>変わっていたとして、それが正規の</a:t>
+            </a:r>
+            <a:endParaRPr lang="en-US" sz="1300" dirty="0"/>
+          </a:p>
+          <a:p>
+            <a:pPr indent="0" marL="0">
+              <a:lnSpc>
+                <a:spcPct val="125000"/>
+              </a:lnSpc>
+              <a:buNone/>
+            </a:pPr>
+            <a:r>
+              <a:rPr lang="en-US" sz="1300" dirty="0">
+                <a:solidFill>
+                  <a:srgbClr val="16211F"/>
+                </a:solidFill>
+                <a:latin typeface="Yu Gothic" pitchFamily="34" charset="0"/>
+                <a:ea typeface="Yu Gothic" pitchFamily="34" charset="-122"/>
+                <a:cs typeface="Yu Gothic" pitchFamily="34" charset="-120"/>
+              </a:rPr>
+              <a:t>訂正なのか分からなければ、</a:t>
+            </a:r>
+            <a:endParaRPr lang="en-US" sz="1300" dirty="0"/>
+          </a:p>
+          <a:p>
+            <a:pPr indent="0" marL="0">
+              <a:lnSpc>
+                <a:spcPct val="125000"/>
+              </a:lnSpc>
+              <a:buNone/>
+            </a:pPr>
+            <a:r>
+              <a:rPr lang="en-US" sz="1300" dirty="0">
+                <a:solidFill>
+                  <a:srgbClr val="16211F"/>
+                </a:solidFill>
+                <a:latin typeface="Yu Gothic" pitchFamily="34" charset="0"/>
+                <a:ea typeface="Yu Gothic" pitchFamily="34" charset="-122"/>
+                <a:cs typeface="Yu Gothic" pitchFamily="34" charset="-120"/>
+              </a:rPr>
+              <a:t>その記録は使えません。</a:t>
+            </a:r>
+            <a:endParaRPr lang="en-US" sz="1300" dirty="0"/>
+          </a:p>
+        </p:txBody>
+      </p:sp>
+      <p:sp>
+        <p:nvSpPr>
+          <p:cNvPr id="10" name="Shape 8"/>
+          <p:cNvSpPr/>
+          <p:nvPr/>
+        </p:nvSpPr>
+        <p:spPr>
+          <a:xfrm>
+            <a:off x="731520" y="4526280"/>
+            <a:ext cx="3429000" cy="1691640"/>
           </a:xfrm>
           <a:prstGeom prst="roundRect">
             <a:avLst>
-              <a:gd name="adj" fmla="val 19048"/>
+              <a:gd name="adj" fmla="val 4324"/>
             </a:avLst>
           </a:prstGeom>
           <a:solidFill>
-            <a:srgbClr val="D98A2B"/>
+            <a:srgbClr val="FFFFFF"/>
           </a:solidFill>
           <a:ln w="12700">
             <a:solidFill>
-              <a:srgbClr val="D98A2B"/>
+              <a:srgbClr val="A8CFC9"/>
             </a:solidFill>
             <a:prstDash val="solid"/>
           </a:ln>
@@ -5262,119 +5558,264 @@
       </p:sp>
       <p:sp>
         <p:nvSpPr>
-          <p:cNvPr id="7" name="Text 5"/>
-          <p:cNvSpPr/>
-          <p:nvPr/>
-        </p:nvSpPr>
-        <p:spPr>
-          <a:xfrm>
-            <a:off x="6949440" y="2130552"/>
-            <a:ext cx="1371600" cy="384048"/>
-          </a:xfrm>
-          <a:prstGeom prst="rect">
-            <a:avLst/>
-          </a:prstGeom>
-          <a:noFill/>
-          <a:ln/>
-        </p:spPr>
-        <p:txBody>
-          <a:bodyPr wrap="square" lIns="0" tIns="0" rIns="0" bIns="0" rtlCol="0" anchor="ctr"/>
-          <a:lstStyle/>
-          <a:p>
-            <a:pPr algn="ctr" indent="0" marL="0">
-              <a:buNone/>
-            </a:pPr>
-            <a:r>
-              <a:rPr lang="en-US" sz="1300" b="1" dirty="0">
-                <a:solidFill>
-                  <a:srgbClr val="FFFFFF"/>
-                </a:solidFill>
-                <a:latin typeface="Yu Gothic" pitchFamily="34" charset="0"/>
-                <a:ea typeface="Yu Gothic" pitchFamily="34" charset="-122"/>
-                <a:cs typeface="Yu Gothic" pitchFamily="34" charset="-120"/>
-              </a:rPr>
-              <a:t>未取得</a:t>
+          <p:cNvPr id="11" name="Text 9"/>
+          <p:cNvSpPr/>
+          <p:nvPr/>
+        </p:nvSpPr>
+        <p:spPr>
+          <a:xfrm>
+            <a:off x="960120" y="4654296"/>
+            <a:ext cx="2926080" cy="274320"/>
+          </a:xfrm>
+          <a:prstGeom prst="rect">
+            <a:avLst/>
+          </a:prstGeom>
+          <a:noFill/>
+          <a:ln/>
+        </p:spPr>
+        <p:txBody>
+          <a:bodyPr wrap="square" lIns="0" tIns="0" rIns="0" bIns="0" rtlCol="0" anchor="ctr"/>
+          <a:lstStyle/>
+          <a:p>
+            <a:pPr indent="0" marL="0">
+              <a:buNone/>
+            </a:pPr>
+            <a:r>
+              <a:rPr lang="en-US" sz="1200" b="1" dirty="0">
+                <a:solidFill>
+                  <a:srgbClr val="1F6F78"/>
+                </a:solidFill>
+                <a:latin typeface="Yu Gothic" pitchFamily="34" charset="0"/>
+                <a:ea typeface="Yu Gothic" pitchFamily="34" charset="-122"/>
+                <a:cs typeface="Yu Gothic" pitchFamily="34" charset="-120"/>
+              </a:rPr>
+              <a:t>このアプリでは</a:t>
+            </a:r>
+            <a:endParaRPr lang="en-US" sz="1200" dirty="0"/>
+          </a:p>
+        </p:txBody>
+      </p:sp>
+      <p:sp>
+        <p:nvSpPr>
+          <p:cNvPr id="12" name="Text 10"/>
+          <p:cNvSpPr/>
+          <p:nvPr/>
+        </p:nvSpPr>
+        <p:spPr>
+          <a:xfrm>
+            <a:off x="960120" y="4946904"/>
+            <a:ext cx="3017520" cy="1188720"/>
+          </a:xfrm>
+          <a:prstGeom prst="rect">
+            <a:avLst/>
+          </a:prstGeom>
+          <a:noFill/>
+          <a:ln/>
+        </p:spPr>
+        <p:txBody>
+          <a:bodyPr wrap="square" lIns="0" tIns="0" rIns="0" bIns="0" rtlCol="0" anchor="ctr"/>
+          <a:lstStyle/>
+          <a:p>
+            <a:pPr indent="0" marL="0">
+              <a:lnSpc>
+                <a:spcPct val="125000"/>
+              </a:lnSpc>
+              <a:buNone/>
+            </a:pPr>
+            <a:r>
+              <a:rPr lang="en-US" sz="1300" dirty="0">
+                <a:solidFill>
+                  <a:srgbClr val="16211F"/>
+                </a:solidFill>
+                <a:latin typeface="Yu Gothic" pitchFamily="34" charset="0"/>
+                <a:ea typeface="Yu Gothic" pitchFamily="34" charset="-122"/>
+                <a:cs typeface="Yu Gothic" pitchFamily="34" charset="-120"/>
+              </a:rPr>
+              <a:t>誰が・いつ・何を・どう変えたかを</a:t>
             </a:r>
             <a:endParaRPr lang="en-US" sz="1300" dirty="0"/>
           </a:p>
-        </p:txBody>
-      </p:sp>
-      <p:sp>
-        <p:nvSpPr>
-          <p:cNvPr id="8" name="Text 6"/>
-          <p:cNvSpPr/>
-          <p:nvPr/>
-        </p:nvSpPr>
-        <p:spPr>
-          <a:xfrm>
-            <a:off x="1051560" y="2514600"/>
-            <a:ext cx="9966960" cy="566928"/>
-          </a:xfrm>
-          <a:prstGeom prst="rect">
-            <a:avLst/>
-          </a:prstGeom>
-          <a:noFill/>
-          <a:ln/>
-        </p:spPr>
-        <p:txBody>
-          <a:bodyPr wrap="square" lIns="0" tIns="0" rIns="0" bIns="0" rtlCol="0" anchor="ctr"/>
-          <a:lstStyle/>
           <a:p>
             <a:pPr indent="0" marL="0">
               <a:lnSpc>
-                <a:spcPct val="120000"/>
+                <a:spcPct val="125000"/>
               </a:lnSpc>
               <a:buNone/>
             </a:pPr>
             <a:r>
-              <a:rPr lang="en-US" sz="1400" dirty="0">
-                <a:solidFill>
-                  <a:srgbClr val="5C6B68"/>
-                </a:solidFill>
-                <a:latin typeface="Yu Gothic" pitchFamily="34" charset="0"/>
-                <a:ea typeface="Yu Gothic" pitchFamily="34" charset="-122"/>
-                <a:cs typeface="Yu Gothic" pitchFamily="34" charset="-120"/>
-              </a:rPr>
-              <a:t>事業者ガイドライン4.4が求めています。技術的な工夫では</a:t>
-            </a:r>
-            <a:endParaRPr lang="en-US" sz="1400" dirty="0"/>
+              <a:rPr lang="en-US" sz="1300" dirty="0">
+                <a:solidFill>
+                  <a:srgbClr val="16211F"/>
+                </a:solidFill>
+                <a:latin typeface="Yu Gothic" pitchFamily="34" charset="0"/>
+                <a:ea typeface="Yu Gothic" pitchFamily="34" charset="-122"/>
+                <a:cs typeface="Yu Gothic" pitchFamily="34" charset="-120"/>
+              </a:rPr>
+              <a:t>変更前の値ごと残します。</a:t>
+            </a:r>
+            <a:endParaRPr lang="en-US" sz="1300" dirty="0"/>
           </a:p>
           <a:p>
             <a:pPr indent="0" marL="0">
               <a:lnSpc>
-                <a:spcPct val="120000"/>
+                <a:spcPct val="125000"/>
               </a:lnSpc>
               <a:buNone/>
             </a:pPr>
             <a:r>
-              <a:rPr lang="en-US" sz="1400" dirty="0">
-                <a:solidFill>
-                  <a:srgbClr val="5C6B68"/>
-                </a:solidFill>
-                <a:latin typeface="Yu Gothic" pitchFamily="34" charset="0"/>
-                <a:ea typeface="Yu Gothic" pitchFamily="34" charset="-122"/>
-                <a:cs typeface="Yu Gothic" pitchFamily="34" charset="-120"/>
-              </a:rPr>
-              <a:t>代替できず、審査期間と費用がかかるため事業判断が要ります。</a:t>
-            </a:r>
-            <a:endParaRPr lang="en-US" sz="1400" dirty="0"/>
-          </a:p>
-        </p:txBody>
-      </p:sp>
-      <p:sp>
-        <p:nvSpPr>
-          <p:cNvPr id="9" name="Shape 7"/>
-          <p:cNvSpPr/>
-          <p:nvPr/>
-        </p:nvSpPr>
-        <p:spPr>
-          <a:xfrm>
-            <a:off x="731520" y="3337560"/>
-            <a:ext cx="10698480" cy="1207008"/>
+              <a:rPr lang="en-US" sz="1300" dirty="0">
+                <a:solidFill>
+                  <a:srgbClr val="16211F"/>
+                </a:solidFill>
+                <a:latin typeface="Yu Gothic" pitchFamily="34" charset="0"/>
+                <a:ea typeface="Yu Gothic" pitchFamily="34" charset="-122"/>
+                <a:cs typeface="Yu Gothic" pitchFamily="34" charset="-120"/>
+              </a:rPr>
+              <a:t>記録そのものの書き換えと削除は、</a:t>
+            </a:r>
+            <a:endParaRPr lang="en-US" sz="1300" dirty="0"/>
+          </a:p>
+          <a:p>
+            <a:pPr indent="0" marL="0">
+              <a:lnSpc>
+                <a:spcPct val="125000"/>
+              </a:lnSpc>
+              <a:buNone/>
+            </a:pPr>
+            <a:r>
+              <a:rPr lang="en-US" sz="1300" dirty="0">
+                <a:solidFill>
+                  <a:srgbClr val="16211F"/>
+                </a:solidFill>
+                <a:latin typeface="Yu Gothic" pitchFamily="34" charset="0"/>
+                <a:ea typeface="Yu Gothic" pitchFamily="34" charset="-122"/>
+                <a:cs typeface="Yu Gothic" pitchFamily="34" charset="-120"/>
+              </a:rPr>
+              <a:t>仕組みとして禁止しています。</a:t>
+            </a:r>
+            <a:endParaRPr lang="en-US" sz="1300" dirty="0"/>
+          </a:p>
+        </p:txBody>
+      </p:sp>
+      <p:sp>
+        <p:nvSpPr>
+          <p:cNvPr id="13" name="Shape 11"/>
+          <p:cNvSpPr/>
+          <p:nvPr/>
+        </p:nvSpPr>
+        <p:spPr>
+          <a:xfrm>
+            <a:off x="4434840" y="1828800"/>
+            <a:ext cx="3429000" cy="841248"/>
           </a:xfrm>
           <a:prstGeom prst="roundRect">
             <a:avLst>
-              <a:gd name="adj" fmla="val 6061"/>
+              <a:gd name="adj" fmla="val 8696"/>
+            </a:avLst>
+          </a:prstGeom>
+          <a:solidFill>
+            <a:srgbClr val="14504B"/>
+          </a:solidFill>
+          <a:ln w="12700">
+            <a:solidFill>
+              <a:srgbClr val="14504B"/>
+            </a:solidFill>
+            <a:prstDash val="solid"/>
+          </a:ln>
+        </p:spPr>
+      </p:sp>
+      <p:sp>
+        <p:nvSpPr>
+          <p:cNvPr id="14" name="Text 12"/>
+          <p:cNvSpPr/>
+          <p:nvPr/>
+        </p:nvSpPr>
+        <p:spPr>
+          <a:xfrm>
+            <a:off x="4663440" y="1920240"/>
+            <a:ext cx="2926080" cy="329184"/>
+          </a:xfrm>
+          <a:prstGeom prst="rect">
+            <a:avLst/>
+          </a:prstGeom>
+          <a:noFill/>
+          <a:ln/>
+        </p:spPr>
+        <p:txBody>
+          <a:bodyPr wrap="square" lIns="0" tIns="0" rIns="0" bIns="0" rtlCol="0" anchor="ctr"/>
+          <a:lstStyle/>
+          <a:p>
+            <a:pPr indent="0" marL="0">
+              <a:buNone/>
+            </a:pPr>
+            <a:r>
+              <a:rPr lang="en-US" sz="1900" b="1" dirty="0">
+                <a:solidFill>
+                  <a:srgbClr val="D98A2B"/>
+                </a:solidFill>
+                <a:latin typeface="Yu Gothic" pitchFamily="34" charset="0"/>
+                <a:ea typeface="Yu Gothic" pitchFamily="34" charset="-122"/>
+                <a:cs typeface="Yu Gothic" pitchFamily="34" charset="-120"/>
+              </a:rPr>
+              <a:t>見読性</a:t>
+            </a:r>
+            <a:endParaRPr lang="en-US" sz="1900" dirty="0"/>
+          </a:p>
+        </p:txBody>
+      </p:sp>
+      <p:sp>
+        <p:nvSpPr>
+          <p:cNvPr id="15" name="Text 13"/>
+          <p:cNvSpPr/>
+          <p:nvPr/>
+        </p:nvSpPr>
+        <p:spPr>
+          <a:xfrm>
+            <a:off x="4663440" y="2286000"/>
+            <a:ext cx="3017520" cy="310896"/>
+          </a:xfrm>
+          <a:prstGeom prst="rect">
+            <a:avLst/>
+          </a:prstGeom>
+          <a:noFill/>
+          <a:ln/>
+        </p:spPr>
+        <p:txBody>
+          <a:bodyPr wrap="square" lIns="0" tIns="0" rIns="0" bIns="0" rtlCol="0" anchor="ctr"/>
+          <a:lstStyle/>
+          <a:p>
+            <a:pPr indent="0" marL="0">
+              <a:buNone/>
+            </a:pPr>
+            <a:r>
+              <a:rPr lang="en-US" sz="1300" dirty="0">
+                <a:solidFill>
+                  <a:srgbClr val="FFFFFF"/>
+                </a:solidFill>
+                <a:latin typeface="Yu Gothic" pitchFamily="34" charset="0"/>
+                <a:ea typeface="Yu Gothic" pitchFamily="34" charset="-122"/>
+                <a:cs typeface="Yu Gothic" pitchFamily="34" charset="-120"/>
+              </a:rPr>
+              <a:t>必要なときに読み出せること</a:t>
+            </a:r>
+            <a:endParaRPr lang="en-US" sz="1300" dirty="0"/>
+          </a:p>
+        </p:txBody>
+      </p:sp>
+      <p:sp>
+        <p:nvSpPr>
+          <p:cNvPr id="16" name="Shape 14"/>
+          <p:cNvSpPr/>
+          <p:nvPr/>
+        </p:nvSpPr>
+        <p:spPr>
+          <a:xfrm>
+            <a:off x="4434840" y="2743200"/>
+            <a:ext cx="3429000" cy="1691640"/>
+          </a:xfrm>
+          <a:prstGeom prst="roundRect">
+            <a:avLst>
+              <a:gd name="adj" fmla="val 4324"/>
             </a:avLst>
           </a:prstGeom>
           <a:solidFill>
@@ -5390,65 +5831,167 @@
       </p:sp>
       <p:sp>
         <p:nvSpPr>
-          <p:cNvPr id="10" name="Text 8"/>
-          <p:cNvSpPr/>
-          <p:nvPr/>
-        </p:nvSpPr>
-        <p:spPr>
-          <a:xfrm>
-            <a:off x="1051560" y="3483864"/>
-            <a:ext cx="5669280" cy="365760"/>
-          </a:xfrm>
-          <a:prstGeom prst="rect">
-            <a:avLst/>
-          </a:prstGeom>
-          <a:noFill/>
-          <a:ln/>
-        </p:spPr>
-        <p:txBody>
-          <a:bodyPr wrap="square" lIns="0" tIns="0" rIns="0" bIns="0" rtlCol="0" anchor="ctr"/>
-          <a:lstStyle/>
-          <a:p>
-            <a:pPr indent="0" marL="0">
-              <a:buNone/>
-            </a:pPr>
-            <a:r>
-              <a:rPr lang="en-US" sz="1900" b="1" dirty="0">
-                <a:solidFill>
-                  <a:srgbClr val="14504B"/>
-                </a:solidFill>
-                <a:latin typeface="Yu Gothic" pitchFamily="34" charset="0"/>
-                <a:ea typeface="Yu Gothic" pitchFamily="34" charset="-122"/>
-                <a:cs typeface="Yu Gothic" pitchFamily="34" charset="-120"/>
-              </a:rPr>
-              <a:t>第三者による安全管理の評価</a:t>
-            </a:r>
-            <a:endParaRPr lang="en-US" sz="1900" dirty="0"/>
-          </a:p>
-        </p:txBody>
-      </p:sp>
-      <p:sp>
-        <p:nvSpPr>
-          <p:cNvPr id="11" name="Shape 9"/>
-          <p:cNvSpPr/>
-          <p:nvPr/>
-        </p:nvSpPr>
-        <p:spPr>
-          <a:xfrm>
-            <a:off x="6949440" y="3502152"/>
-            <a:ext cx="1371600" cy="384048"/>
+          <p:cNvPr id="17" name="Text 15"/>
+          <p:cNvSpPr/>
+          <p:nvPr/>
+        </p:nvSpPr>
+        <p:spPr>
+          <a:xfrm>
+            <a:off x="4663440" y="2871216"/>
+            <a:ext cx="2926080" cy="274320"/>
+          </a:xfrm>
+          <a:prstGeom prst="rect">
+            <a:avLst/>
+          </a:prstGeom>
+          <a:noFill/>
+          <a:ln/>
+        </p:spPr>
+        <p:txBody>
+          <a:bodyPr wrap="square" lIns="0" tIns="0" rIns="0" bIns="0" rtlCol="0" anchor="ctr"/>
+          <a:lstStyle/>
+          <a:p>
+            <a:pPr indent="0" marL="0">
+              <a:buNone/>
+            </a:pPr>
+            <a:r>
+              <a:rPr lang="en-US" sz="1200" b="1" dirty="0">
+                <a:solidFill>
+                  <a:srgbClr val="5C6B68"/>
+                </a:solidFill>
+                <a:latin typeface="Yu Gothic" pitchFamily="34" charset="0"/>
+                <a:ea typeface="Yu Gothic" pitchFamily="34" charset="-122"/>
+                <a:cs typeface="Yu Gothic" pitchFamily="34" charset="-120"/>
+              </a:rPr>
+              <a:t>なぜ要るのか</a:t>
+            </a:r>
+            <a:endParaRPr lang="en-US" sz="1200" dirty="0"/>
+          </a:p>
+        </p:txBody>
+      </p:sp>
+      <p:sp>
+        <p:nvSpPr>
+          <p:cNvPr id="18" name="Text 16"/>
+          <p:cNvSpPr/>
+          <p:nvPr/>
+        </p:nvSpPr>
+        <p:spPr>
+          <a:xfrm>
+            <a:off x="4663440" y="3163824"/>
+            <a:ext cx="3017520" cy="1188720"/>
+          </a:xfrm>
+          <a:prstGeom prst="rect">
+            <a:avLst/>
+          </a:prstGeom>
+          <a:noFill/>
+          <a:ln/>
+        </p:spPr>
+        <p:txBody>
+          <a:bodyPr wrap="square" lIns="0" tIns="0" rIns="0" bIns="0" rtlCol="0" anchor="ctr"/>
+          <a:lstStyle/>
+          <a:p>
+            <a:pPr indent="0" marL="0">
+              <a:lnSpc>
+                <a:spcPct val="125000"/>
+              </a:lnSpc>
+              <a:buNone/>
+            </a:pPr>
+            <a:r>
+              <a:rPr lang="en-US" sz="1300" dirty="0">
+                <a:solidFill>
+                  <a:srgbClr val="16211F"/>
+                </a:solidFill>
+                <a:latin typeface="Yu Gothic" pitchFamily="34" charset="0"/>
+                <a:ea typeface="Yu Gothic" pitchFamily="34" charset="-122"/>
+                <a:cs typeface="Yu Gothic" pitchFamily="34" charset="-120"/>
+              </a:rPr>
+              <a:t>行政の調査や監査では、記録の</a:t>
+            </a:r>
+            <a:endParaRPr lang="en-US" sz="1300" dirty="0"/>
+          </a:p>
+          <a:p>
+            <a:pPr indent="0" marL="0">
+              <a:lnSpc>
+                <a:spcPct val="125000"/>
+              </a:lnSpc>
+              <a:buNone/>
+            </a:pPr>
+            <a:r>
+              <a:rPr lang="en-US" sz="1300" dirty="0">
+                <a:solidFill>
+                  <a:srgbClr val="16211F"/>
+                </a:solidFill>
+                <a:latin typeface="Yu Gothic" pitchFamily="34" charset="0"/>
+                <a:ea typeface="Yu Gothic" pitchFamily="34" charset="-122"/>
+                <a:cs typeface="Yu Gothic" pitchFamily="34" charset="-120"/>
+              </a:rPr>
+              <a:t>提出を求められます。画面で</a:t>
+            </a:r>
+            <a:endParaRPr lang="en-US" sz="1300" dirty="0"/>
+          </a:p>
+          <a:p>
+            <a:pPr indent="0" marL="0">
+              <a:lnSpc>
+                <a:spcPct val="125000"/>
+              </a:lnSpc>
+              <a:buNone/>
+            </a:pPr>
+            <a:r>
+              <a:rPr lang="en-US" sz="1300" dirty="0">
+                <a:solidFill>
+                  <a:srgbClr val="16211F"/>
+                </a:solidFill>
+                <a:latin typeface="Yu Gothic" pitchFamily="34" charset="0"/>
+                <a:ea typeface="Yu Gothic" pitchFamily="34" charset="-122"/>
+                <a:cs typeface="Yu Gothic" pitchFamily="34" charset="-120"/>
+              </a:rPr>
+              <a:t>見えるだけでは足りず、紙に</a:t>
+            </a:r>
+            <a:endParaRPr lang="en-US" sz="1300" dirty="0"/>
+          </a:p>
+          <a:p>
+            <a:pPr indent="0" marL="0">
+              <a:lnSpc>
+                <a:spcPct val="125000"/>
+              </a:lnSpc>
+              <a:buNone/>
+            </a:pPr>
+            <a:r>
+              <a:rPr lang="en-US" sz="1300" dirty="0">
+                <a:solidFill>
+                  <a:srgbClr val="16211F"/>
+                </a:solidFill>
+                <a:latin typeface="Yu Gothic" pitchFamily="34" charset="0"/>
+                <a:ea typeface="Yu Gothic" pitchFamily="34" charset="-122"/>
+                <a:cs typeface="Yu Gothic" pitchFamily="34" charset="-120"/>
+              </a:rPr>
+              <a:t>出せる必要があります。</a:t>
+            </a:r>
+            <a:endParaRPr lang="en-US" sz="1300" dirty="0"/>
+          </a:p>
+        </p:txBody>
+      </p:sp>
+      <p:sp>
+        <p:nvSpPr>
+          <p:cNvPr id="19" name="Shape 17"/>
+          <p:cNvSpPr/>
+          <p:nvPr/>
+        </p:nvSpPr>
+        <p:spPr>
+          <a:xfrm>
+            <a:off x="4434840" y="4526280"/>
+            <a:ext cx="3429000" cy="1691640"/>
           </a:xfrm>
           <a:prstGeom prst="roundRect">
             <a:avLst>
-              <a:gd name="adj" fmla="val 19048"/>
+              <a:gd name="adj" fmla="val 4324"/>
             </a:avLst>
           </a:prstGeom>
           <a:solidFill>
-            <a:srgbClr val="D98A2B"/>
+            <a:srgbClr val="FFFFFF"/>
           </a:solidFill>
           <a:ln w="12700">
             <a:solidFill>
-              <a:srgbClr val="D98A2B"/>
+              <a:srgbClr val="A8CFC9"/>
             </a:solidFill>
             <a:prstDash val="solid"/>
           </a:ln>
@@ -5456,99 +5999,264 @@
       </p:sp>
       <p:sp>
         <p:nvSpPr>
-          <p:cNvPr id="12" name="Text 10"/>
-          <p:cNvSpPr/>
-          <p:nvPr/>
-        </p:nvSpPr>
-        <p:spPr>
-          <a:xfrm>
-            <a:off x="6949440" y="3502152"/>
-            <a:ext cx="1371600" cy="384048"/>
-          </a:xfrm>
-          <a:prstGeom prst="rect">
-            <a:avLst/>
-          </a:prstGeom>
-          <a:noFill/>
-          <a:ln/>
-        </p:spPr>
-        <p:txBody>
-          <a:bodyPr wrap="square" lIns="0" tIns="0" rIns="0" bIns="0" rtlCol="0" anchor="ctr"/>
-          <a:lstStyle/>
-          <a:p>
-            <a:pPr algn="ctr" indent="0" marL="0">
-              <a:buNone/>
-            </a:pPr>
-            <a:r>
-              <a:rPr lang="en-US" sz="1300" b="1" dirty="0">
-                <a:solidFill>
-                  <a:srgbClr val="FFFFFF"/>
-                </a:solidFill>
-                <a:latin typeface="Yu Gothic" pitchFamily="34" charset="0"/>
-                <a:ea typeface="Yu Gothic" pitchFamily="34" charset="-122"/>
-                <a:cs typeface="Yu Gothic" pitchFamily="34" charset="-120"/>
-              </a:rPr>
-              <a:t>未実施</a:t>
+          <p:cNvPr id="20" name="Text 18"/>
+          <p:cNvSpPr/>
+          <p:nvPr/>
+        </p:nvSpPr>
+        <p:spPr>
+          <a:xfrm>
+            <a:off x="4663440" y="4654296"/>
+            <a:ext cx="2926080" cy="274320"/>
+          </a:xfrm>
+          <a:prstGeom prst="rect">
+            <a:avLst/>
+          </a:prstGeom>
+          <a:noFill/>
+          <a:ln/>
+        </p:spPr>
+        <p:txBody>
+          <a:bodyPr wrap="square" lIns="0" tIns="0" rIns="0" bIns="0" rtlCol="0" anchor="ctr"/>
+          <a:lstStyle/>
+          <a:p>
+            <a:pPr indent="0" marL="0">
+              <a:buNone/>
+            </a:pPr>
+            <a:r>
+              <a:rPr lang="en-US" sz="1200" b="1" dirty="0">
+                <a:solidFill>
+                  <a:srgbClr val="1F6F78"/>
+                </a:solidFill>
+                <a:latin typeface="Yu Gothic" pitchFamily="34" charset="0"/>
+                <a:ea typeface="Yu Gothic" pitchFamily="34" charset="-122"/>
+                <a:cs typeface="Yu Gothic" pitchFamily="34" charset="-120"/>
+              </a:rPr>
+              <a:t>このアプリでは</a:t>
+            </a:r>
+            <a:endParaRPr lang="en-US" sz="1200" dirty="0"/>
+          </a:p>
+        </p:txBody>
+      </p:sp>
+      <p:sp>
+        <p:nvSpPr>
+          <p:cNvPr id="21" name="Text 19"/>
+          <p:cNvSpPr/>
+          <p:nvPr/>
+        </p:nvSpPr>
+        <p:spPr>
+          <a:xfrm>
+            <a:off x="4663440" y="4946904"/>
+            <a:ext cx="3017520" cy="1188720"/>
+          </a:xfrm>
+          <a:prstGeom prst="rect">
+            <a:avLst/>
+          </a:prstGeom>
+          <a:noFill/>
+          <a:ln/>
+        </p:spPr>
+        <p:txBody>
+          <a:bodyPr wrap="square" lIns="0" tIns="0" rIns="0" bIns="0" rtlCol="0" anchor="ctr"/>
+          <a:lstStyle/>
+          <a:p>
+            <a:pPr indent="0" marL="0">
+              <a:lnSpc>
+                <a:spcPct val="125000"/>
+              </a:lnSpc>
+              <a:buNone/>
+            </a:pPr>
+            <a:r>
+              <a:rPr lang="en-US" sz="1300" dirty="0">
+                <a:solidFill>
+                  <a:srgbClr val="16211F"/>
+                </a:solidFill>
+                <a:latin typeface="Yu Gothic" pitchFamily="34" charset="0"/>
+                <a:ea typeface="Yu Gothic" pitchFamily="34" charset="-122"/>
+                <a:cs typeface="Yu Gothic" pitchFamily="34" charset="-120"/>
+              </a:rPr>
+              <a:t>入居者ごとの記録を、そのまま</a:t>
             </a:r>
             <a:endParaRPr lang="en-US" sz="1300" dirty="0"/>
           </a:p>
-        </p:txBody>
-      </p:sp>
-      <p:sp>
-        <p:nvSpPr>
-          <p:cNvPr id="13" name="Text 11"/>
-          <p:cNvSpPr/>
-          <p:nvPr/>
-        </p:nvSpPr>
-        <p:spPr>
-          <a:xfrm>
-            <a:off x="1051560" y="3886200"/>
-            <a:ext cx="9966960" cy="566928"/>
-          </a:xfrm>
-          <a:prstGeom prst="rect">
-            <a:avLst/>
-          </a:prstGeom>
-          <a:noFill/>
-          <a:ln/>
-        </p:spPr>
-        <p:txBody>
-          <a:bodyPr wrap="square" lIns="0" tIns="0" rIns="0" bIns="0" rtlCol="0" anchor="ctr"/>
-          <a:lstStyle/>
           <a:p>
             <a:pPr indent="0" marL="0">
               <a:lnSpc>
-                <a:spcPct val="120000"/>
+                <a:spcPct val="125000"/>
               </a:lnSpc>
               <a:buNone/>
             </a:pPr>
             <a:r>
-              <a:rPr lang="en-US" sz="1400" dirty="0">
-                <a:solidFill>
-                  <a:srgbClr val="5C6B68"/>
-                </a:solidFill>
-                <a:latin typeface="Yu Gothic" pitchFamily="34" charset="0"/>
-                <a:ea typeface="Yu Gothic" pitchFamily="34" charset="-122"/>
-                <a:cs typeface="Yu Gothic" pitchFamily="34" charset="-120"/>
-              </a:rPr>
-              <a:t>同4.3。現状は内部での確認に留まっています。</a:t>
-            </a:r>
-            <a:endParaRPr lang="en-US" sz="1400" dirty="0"/>
-          </a:p>
-        </p:txBody>
-      </p:sp>
-      <p:sp>
-        <p:nvSpPr>
-          <p:cNvPr id="14" name="Shape 12"/>
-          <p:cNvSpPr/>
-          <p:nvPr/>
-        </p:nvSpPr>
-        <p:spPr>
-          <a:xfrm>
-            <a:off x="731520" y="4709160"/>
-            <a:ext cx="10698480" cy="1207008"/>
+              <a:rPr lang="en-US" sz="1300" dirty="0">
+                <a:solidFill>
+                  <a:srgbClr val="16211F"/>
+                </a:solidFill>
+                <a:latin typeface="Yu Gothic" pitchFamily="34" charset="0"/>
+                <a:ea typeface="Yu Gothic" pitchFamily="34" charset="-122"/>
+                <a:cs typeface="Yu Gothic" pitchFamily="34" charset="-120"/>
+              </a:rPr>
+              <a:t>印刷できるようにしました。</a:t>
+            </a:r>
+            <a:endParaRPr lang="en-US" sz="1300" dirty="0"/>
+          </a:p>
+          <a:p>
+            <a:pPr indent="0" marL="0">
+              <a:lnSpc>
+                <a:spcPct val="125000"/>
+              </a:lnSpc>
+              <a:buNone/>
+            </a:pPr>
+            <a:r>
+              <a:rPr lang="en-US" sz="1300" dirty="0">
+                <a:solidFill>
+                  <a:srgbClr val="16211F"/>
+                </a:solidFill>
+                <a:latin typeface="Yu Gothic" pitchFamily="34" charset="0"/>
+                <a:ea typeface="Yu Gothic" pitchFamily="34" charset="-122"/>
+                <a:cs typeface="Yu Gothic" pitchFamily="34" charset="-120"/>
+              </a:rPr>
+              <a:t>印刷したこと自体も、</a:t>
+            </a:r>
+            <a:endParaRPr lang="en-US" sz="1300" dirty="0"/>
+          </a:p>
+          <a:p>
+            <a:pPr indent="0" marL="0">
+              <a:lnSpc>
+                <a:spcPct val="125000"/>
+              </a:lnSpc>
+              <a:buNone/>
+            </a:pPr>
+            <a:r>
+              <a:rPr lang="en-US" sz="1300" dirty="0">
+                <a:solidFill>
+                  <a:srgbClr val="16211F"/>
+                </a:solidFill>
+                <a:latin typeface="Yu Gothic" pitchFamily="34" charset="0"/>
+                <a:ea typeface="Yu Gothic" pitchFamily="34" charset="-122"/>
+                <a:cs typeface="Yu Gothic" pitchFamily="34" charset="-120"/>
+              </a:rPr>
+              <a:t>持ち出しとして記録に残します。</a:t>
+            </a:r>
+            <a:endParaRPr lang="en-US" sz="1300" dirty="0"/>
+          </a:p>
+        </p:txBody>
+      </p:sp>
+      <p:sp>
+        <p:nvSpPr>
+          <p:cNvPr id="22" name="Shape 20"/>
+          <p:cNvSpPr/>
+          <p:nvPr/>
+        </p:nvSpPr>
+        <p:spPr>
+          <a:xfrm>
+            <a:off x="8138160" y="1828800"/>
+            <a:ext cx="3429000" cy="841248"/>
           </a:xfrm>
           <a:prstGeom prst="roundRect">
             <a:avLst>
-              <a:gd name="adj" fmla="val 6061"/>
+              <a:gd name="adj" fmla="val 8696"/>
+            </a:avLst>
+          </a:prstGeom>
+          <a:solidFill>
+            <a:srgbClr val="14504B"/>
+          </a:solidFill>
+          <a:ln w="12700">
+            <a:solidFill>
+              <a:srgbClr val="14504B"/>
+            </a:solidFill>
+            <a:prstDash val="solid"/>
+          </a:ln>
+        </p:spPr>
+      </p:sp>
+      <p:sp>
+        <p:nvSpPr>
+          <p:cNvPr id="23" name="Text 21"/>
+          <p:cNvSpPr/>
+          <p:nvPr/>
+        </p:nvSpPr>
+        <p:spPr>
+          <a:xfrm>
+            <a:off x="8366760" y="1920240"/>
+            <a:ext cx="2926080" cy="329184"/>
+          </a:xfrm>
+          <a:prstGeom prst="rect">
+            <a:avLst/>
+          </a:prstGeom>
+          <a:noFill/>
+          <a:ln/>
+        </p:spPr>
+        <p:txBody>
+          <a:bodyPr wrap="square" lIns="0" tIns="0" rIns="0" bIns="0" rtlCol="0" anchor="ctr"/>
+          <a:lstStyle/>
+          <a:p>
+            <a:pPr indent="0" marL="0">
+              <a:buNone/>
+            </a:pPr>
+            <a:r>
+              <a:rPr lang="en-US" sz="1900" b="1" dirty="0">
+                <a:solidFill>
+                  <a:srgbClr val="D98A2B"/>
+                </a:solidFill>
+                <a:latin typeface="Yu Gothic" pitchFamily="34" charset="0"/>
+                <a:ea typeface="Yu Gothic" pitchFamily="34" charset="-122"/>
+                <a:cs typeface="Yu Gothic" pitchFamily="34" charset="-120"/>
+              </a:rPr>
+              <a:t>保存性</a:t>
+            </a:r>
+            <a:endParaRPr lang="en-US" sz="1900" dirty="0"/>
+          </a:p>
+        </p:txBody>
+      </p:sp>
+      <p:sp>
+        <p:nvSpPr>
+          <p:cNvPr id="24" name="Text 22"/>
+          <p:cNvSpPr/>
+          <p:nvPr/>
+        </p:nvSpPr>
+        <p:spPr>
+          <a:xfrm>
+            <a:off x="8366760" y="2286000"/>
+            <a:ext cx="3017520" cy="310896"/>
+          </a:xfrm>
+          <a:prstGeom prst="rect">
+            <a:avLst/>
+          </a:prstGeom>
+          <a:noFill/>
+          <a:ln/>
+        </p:spPr>
+        <p:txBody>
+          <a:bodyPr wrap="square" lIns="0" tIns="0" rIns="0" bIns="0" rtlCol="0" anchor="ctr"/>
+          <a:lstStyle/>
+          <a:p>
+            <a:pPr indent="0" marL="0">
+              <a:buNone/>
+            </a:pPr>
+            <a:r>
+              <a:rPr lang="en-US" sz="1300" dirty="0">
+                <a:solidFill>
+                  <a:srgbClr val="FFFFFF"/>
+                </a:solidFill>
+                <a:latin typeface="Yu Gothic" pitchFamily="34" charset="0"/>
+                <a:ea typeface="Yu Gothic" pitchFamily="34" charset="-122"/>
+                <a:cs typeface="Yu Gothic" pitchFamily="34" charset="-120"/>
+              </a:rPr>
+              <a:t>保存期間中は失われないこと</a:t>
+            </a:r>
+            <a:endParaRPr lang="en-US" sz="1300" dirty="0"/>
+          </a:p>
+        </p:txBody>
+      </p:sp>
+      <p:sp>
+        <p:nvSpPr>
+          <p:cNvPr id="25" name="Shape 23"/>
+          <p:cNvSpPr/>
+          <p:nvPr/>
+        </p:nvSpPr>
+        <p:spPr>
+          <a:xfrm>
+            <a:off x="8138160" y="2743200"/>
+            <a:ext cx="3429000" cy="1691640"/>
+          </a:xfrm>
+          <a:prstGeom prst="roundRect">
+            <a:avLst>
+              <a:gd name="adj" fmla="val 4324"/>
             </a:avLst>
           </a:prstGeom>
           <a:solidFill>
@@ -5564,65 +6272,147 @@
       </p:sp>
       <p:sp>
         <p:nvSpPr>
-          <p:cNvPr id="15" name="Text 13"/>
-          <p:cNvSpPr/>
-          <p:nvPr/>
-        </p:nvSpPr>
-        <p:spPr>
-          <a:xfrm>
-            <a:off x="1051560" y="4855464"/>
-            <a:ext cx="5669280" cy="365760"/>
-          </a:xfrm>
-          <a:prstGeom prst="rect">
-            <a:avLst/>
-          </a:prstGeom>
-          <a:noFill/>
-          <a:ln/>
-        </p:spPr>
-        <p:txBody>
-          <a:bodyPr wrap="square" lIns="0" tIns="0" rIns="0" bIns="0" rtlCol="0" anchor="ctr"/>
-          <a:lstStyle/>
-          <a:p>
-            <a:pPr indent="0" marL="0">
-              <a:buNone/>
-            </a:pPr>
-            <a:r>
-              <a:rPr lang="en-US" sz="1900" b="1" dirty="0">
-                <a:solidFill>
-                  <a:srgbClr val="14504B"/>
-                </a:solidFill>
-                <a:latin typeface="Yu Gothic" pitchFamily="34" charset="0"/>
-                <a:ea typeface="Yu Gothic" pitchFamily="34" charset="-122"/>
-                <a:cs typeface="Yu Gothic" pitchFamily="34" charset="-120"/>
-              </a:rPr>
-              <a:t>監査ログを施設側で確認する画面</a:t>
-            </a:r>
-            <a:endParaRPr lang="en-US" sz="1900" dirty="0"/>
-          </a:p>
-        </p:txBody>
-      </p:sp>
-      <p:sp>
-        <p:nvSpPr>
-          <p:cNvPr id="16" name="Shape 14"/>
-          <p:cNvSpPr/>
-          <p:nvPr/>
-        </p:nvSpPr>
-        <p:spPr>
-          <a:xfrm>
-            <a:off x="6949440" y="4873752"/>
-            <a:ext cx="1371600" cy="384048"/>
+          <p:cNvPr id="26" name="Text 24"/>
+          <p:cNvSpPr/>
+          <p:nvPr/>
+        </p:nvSpPr>
+        <p:spPr>
+          <a:xfrm>
+            <a:off x="8366760" y="2871216"/>
+            <a:ext cx="2926080" cy="274320"/>
+          </a:xfrm>
+          <a:prstGeom prst="rect">
+            <a:avLst/>
+          </a:prstGeom>
+          <a:noFill/>
+          <a:ln/>
+        </p:spPr>
+        <p:txBody>
+          <a:bodyPr wrap="square" lIns="0" tIns="0" rIns="0" bIns="0" rtlCol="0" anchor="ctr"/>
+          <a:lstStyle/>
+          <a:p>
+            <a:pPr indent="0" marL="0">
+              <a:buNone/>
+            </a:pPr>
+            <a:r>
+              <a:rPr lang="en-US" sz="1200" b="1" dirty="0">
+                <a:solidFill>
+                  <a:srgbClr val="5C6B68"/>
+                </a:solidFill>
+                <a:latin typeface="Yu Gothic" pitchFamily="34" charset="0"/>
+                <a:ea typeface="Yu Gothic" pitchFamily="34" charset="-122"/>
+                <a:cs typeface="Yu Gothic" pitchFamily="34" charset="-120"/>
+              </a:rPr>
+              <a:t>なぜ要るのか</a:t>
+            </a:r>
+            <a:endParaRPr lang="en-US" sz="1200" dirty="0"/>
+          </a:p>
+        </p:txBody>
+      </p:sp>
+      <p:sp>
+        <p:nvSpPr>
+          <p:cNvPr id="27" name="Text 25"/>
+          <p:cNvSpPr/>
+          <p:nvPr/>
+        </p:nvSpPr>
+        <p:spPr>
+          <a:xfrm>
+            <a:off x="8366760" y="3163824"/>
+            <a:ext cx="3017520" cy="1188720"/>
+          </a:xfrm>
+          <a:prstGeom prst="rect">
+            <a:avLst/>
+          </a:prstGeom>
+          <a:noFill/>
+          <a:ln/>
+        </p:spPr>
+        <p:txBody>
+          <a:bodyPr wrap="square" lIns="0" tIns="0" rIns="0" bIns="0" rtlCol="0" anchor="ctr"/>
+          <a:lstStyle/>
+          <a:p>
+            <a:pPr indent="0" marL="0">
+              <a:lnSpc>
+                <a:spcPct val="125000"/>
+              </a:lnSpc>
+              <a:buNone/>
+            </a:pPr>
+            <a:r>
+              <a:rPr lang="en-US" sz="1300" dirty="0">
+                <a:solidFill>
+                  <a:srgbClr val="16211F"/>
+                </a:solidFill>
+                <a:latin typeface="Yu Gothic" pitchFamily="34" charset="0"/>
+                <a:ea typeface="Yu Gothic" pitchFamily="34" charset="-122"/>
+                <a:cs typeface="Yu Gothic" pitchFamily="34" charset="-120"/>
+              </a:rPr>
+              <a:t>誤操作や障害でデータが壊れても、</a:t>
+            </a:r>
+            <a:endParaRPr lang="en-US" sz="1300" dirty="0"/>
+          </a:p>
+          <a:p>
+            <a:pPr indent="0" marL="0">
+              <a:lnSpc>
+                <a:spcPct val="125000"/>
+              </a:lnSpc>
+              <a:buNone/>
+            </a:pPr>
+            <a:r>
+              <a:rPr lang="en-US" sz="1300" dirty="0">
+                <a:solidFill>
+                  <a:srgbClr val="16211F"/>
+                </a:solidFill>
+                <a:latin typeface="Yu Gothic" pitchFamily="34" charset="0"/>
+                <a:ea typeface="Yu Gothic" pitchFamily="34" charset="-122"/>
+                <a:cs typeface="Yu Gothic" pitchFamily="34" charset="-120"/>
+              </a:rPr>
+              <a:t>決められた期間は元に戻せなければ</a:t>
+            </a:r>
+            <a:endParaRPr lang="en-US" sz="1300" dirty="0"/>
+          </a:p>
+          <a:p>
+            <a:pPr indent="0" marL="0">
+              <a:lnSpc>
+                <a:spcPct val="125000"/>
+              </a:lnSpc>
+              <a:buNone/>
+            </a:pPr>
+            <a:r>
+              <a:rPr lang="en-US" sz="1300" dirty="0">
+                <a:solidFill>
+                  <a:srgbClr val="16211F"/>
+                </a:solidFill>
+                <a:latin typeface="Yu Gothic" pitchFamily="34" charset="0"/>
+                <a:ea typeface="Yu Gothic" pitchFamily="34" charset="-122"/>
+                <a:cs typeface="Yu Gothic" pitchFamily="34" charset="-120"/>
+              </a:rPr>
+              <a:t>なりません。</a:t>
+            </a:r>
+            <a:endParaRPr lang="en-US" sz="1300" dirty="0"/>
+          </a:p>
+        </p:txBody>
+      </p:sp>
+      <p:sp>
+        <p:nvSpPr>
+          <p:cNvPr id="28" name="Shape 26"/>
+          <p:cNvSpPr/>
+          <p:nvPr/>
+        </p:nvSpPr>
+        <p:spPr>
+          <a:xfrm>
+            <a:off x="8138160" y="4526280"/>
+            <a:ext cx="3429000" cy="1691640"/>
           </a:xfrm>
           <a:prstGeom prst="roundRect">
             <a:avLst>
-              <a:gd name="adj" fmla="val 19048"/>
+              <a:gd name="adj" fmla="val 4324"/>
             </a:avLst>
           </a:prstGeom>
           <a:solidFill>
-            <a:srgbClr val="D98A2B"/>
+            <a:srgbClr val="FFFFFF"/>
           </a:solidFill>
           <a:ln w="12700">
             <a:solidFill>
-              <a:srgbClr val="D98A2B"/>
+              <a:srgbClr val="A8CFC9"/>
             </a:solidFill>
             <a:prstDash val="solid"/>
           </a:ln>
@@ -5630,72 +6420,171 @@
       </p:sp>
       <p:sp>
         <p:nvSpPr>
-          <p:cNvPr id="17" name="Text 15"/>
-          <p:cNvSpPr/>
-          <p:nvPr/>
-        </p:nvSpPr>
-        <p:spPr>
-          <a:xfrm>
-            <a:off x="6949440" y="4873752"/>
-            <a:ext cx="1371600" cy="384048"/>
-          </a:xfrm>
-          <a:prstGeom prst="rect">
-            <a:avLst/>
-          </a:prstGeom>
-          <a:noFill/>
-          <a:ln/>
-        </p:spPr>
-        <p:txBody>
-          <a:bodyPr wrap="square" lIns="0" tIns="0" rIns="0" bIns="0" rtlCol="0" anchor="ctr"/>
-          <a:lstStyle/>
-          <a:p>
-            <a:pPr algn="ctr" indent="0" marL="0">
-              <a:buNone/>
-            </a:pPr>
-            <a:r>
-              <a:rPr lang="en-US" sz="1300" b="1" dirty="0">
-                <a:solidFill>
-                  <a:srgbClr val="FFFFFF"/>
-                </a:solidFill>
-                <a:latin typeface="Yu Gothic" pitchFamily="34" charset="0"/>
-                <a:ea typeface="Yu Gothic" pitchFamily="34" charset="-122"/>
-                <a:cs typeface="Yu Gothic" pitchFamily="34" charset="-120"/>
-              </a:rPr>
-              <a:t>未実装</a:t>
+          <p:cNvPr id="29" name="Text 27"/>
+          <p:cNvSpPr/>
+          <p:nvPr/>
+        </p:nvSpPr>
+        <p:spPr>
+          <a:xfrm>
+            <a:off x="8366760" y="4654296"/>
+            <a:ext cx="2926080" cy="274320"/>
+          </a:xfrm>
+          <a:prstGeom prst="rect">
+            <a:avLst/>
+          </a:prstGeom>
+          <a:noFill/>
+          <a:ln/>
+        </p:spPr>
+        <p:txBody>
+          <a:bodyPr wrap="square" lIns="0" tIns="0" rIns="0" bIns="0" rtlCol="0" anchor="ctr"/>
+          <a:lstStyle/>
+          <a:p>
+            <a:pPr indent="0" marL="0">
+              <a:buNone/>
+            </a:pPr>
+            <a:r>
+              <a:rPr lang="en-US" sz="1200" b="1" dirty="0">
+                <a:solidFill>
+                  <a:srgbClr val="1F6F78"/>
+                </a:solidFill>
+                <a:latin typeface="Yu Gothic" pitchFamily="34" charset="0"/>
+                <a:ea typeface="Yu Gothic" pitchFamily="34" charset="-122"/>
+                <a:cs typeface="Yu Gothic" pitchFamily="34" charset="-120"/>
+              </a:rPr>
+              <a:t>このアプリでは</a:t>
+            </a:r>
+            <a:endParaRPr lang="en-US" sz="1200" dirty="0"/>
+          </a:p>
+        </p:txBody>
+      </p:sp>
+      <p:sp>
+        <p:nvSpPr>
+          <p:cNvPr id="30" name="Text 28"/>
+          <p:cNvSpPr/>
+          <p:nvPr/>
+        </p:nvSpPr>
+        <p:spPr>
+          <a:xfrm>
+            <a:off x="8366760" y="4946904"/>
+            <a:ext cx="3017520" cy="1188720"/>
+          </a:xfrm>
+          <a:prstGeom prst="rect">
+            <a:avLst/>
+          </a:prstGeom>
+          <a:noFill/>
+          <a:ln/>
+        </p:spPr>
+        <p:txBody>
+          <a:bodyPr wrap="square" lIns="0" tIns="0" rIns="0" bIns="0" rtlCol="0" anchor="ctr"/>
+          <a:lstStyle/>
+          <a:p>
+            <a:pPr indent="0" marL="0">
+              <a:lnSpc>
+                <a:spcPct val="125000"/>
+              </a:lnSpc>
+              <a:buNone/>
+            </a:pPr>
+            <a:r>
+              <a:rPr lang="en-US" sz="1300" dirty="0">
+                <a:solidFill>
+                  <a:srgbClr val="16211F"/>
+                </a:solidFill>
+                <a:latin typeface="Yu Gothic" pitchFamily="34" charset="0"/>
+                <a:ea typeface="Yu Gothic" pitchFamily="34" charset="-122"/>
+                <a:cs typeface="Yu Gothic" pitchFamily="34" charset="-120"/>
+              </a:rPr>
+              <a:t>過去7日間の任意の時点まで</a:t>
             </a:r>
             <a:endParaRPr lang="en-US" sz="1300" dirty="0"/>
           </a:p>
-        </p:txBody>
-      </p:sp>
-      <p:sp>
-        <p:nvSpPr>
-          <p:cNvPr id="18" name="Text 16"/>
-          <p:cNvSpPr/>
-          <p:nvPr/>
-        </p:nvSpPr>
-        <p:spPr>
-          <a:xfrm>
-            <a:off x="1051560" y="5257800"/>
-            <a:ext cx="9966960" cy="566928"/>
-          </a:xfrm>
-          <a:prstGeom prst="rect">
-            <a:avLst/>
-          </a:prstGeom>
-          <a:noFill/>
-          <a:ln/>
-        </p:spPr>
-        <p:txBody>
-          <a:bodyPr wrap="square" lIns="0" tIns="0" rIns="0" bIns="0" rtlCol="0" anchor="ctr"/>
-          <a:lstStyle/>
           <a:p>
             <a:pPr indent="0" marL="0">
               <a:lnSpc>
-                <a:spcPct val="120000"/>
+                <a:spcPct val="125000"/>
               </a:lnSpc>
               <a:buNone/>
             </a:pPr>
             <a:r>
-              <a:rPr lang="en-US" sz="1400" dirty="0">
+              <a:rPr lang="en-US" sz="1300" dirty="0">
+                <a:solidFill>
+                  <a:srgbClr val="16211F"/>
+                </a:solidFill>
+                <a:latin typeface="Yu Gothic" pitchFamily="34" charset="0"/>
+                <a:ea typeface="Yu Gothic" pitchFamily="34" charset="-122"/>
+                <a:cs typeface="Yu Gothic" pitchFamily="34" charset="-120"/>
+              </a:rPr>
+              <a:t>巻き戻せます。データベース</a:t>
+            </a:r>
+            <a:endParaRPr lang="en-US" sz="1300" dirty="0"/>
+          </a:p>
+          <a:p>
+            <a:pPr indent="0" marL="0">
+              <a:lnSpc>
+                <a:spcPct val="125000"/>
+              </a:lnSpc>
+              <a:buNone/>
+            </a:pPr>
+            <a:r>
+              <a:rPr lang="en-US" sz="1300" dirty="0">
+                <a:solidFill>
+                  <a:srgbClr val="16211F"/>
+                </a:solidFill>
+                <a:latin typeface="Yu Gothic" pitchFamily="34" charset="0"/>
+                <a:ea typeface="Yu Gothic" pitchFamily="34" charset="-122"/>
+                <a:cs typeface="Yu Gothic" pitchFamily="34" charset="-120"/>
+              </a:rPr>
+              <a:t>自体の誤削除も、設定で</a:t>
+            </a:r>
+            <a:endParaRPr lang="en-US" sz="1300" dirty="0"/>
+          </a:p>
+          <a:p>
+            <a:pPr indent="0" marL="0">
+              <a:lnSpc>
+                <a:spcPct val="125000"/>
+              </a:lnSpc>
+              <a:buNone/>
+            </a:pPr>
+            <a:r>
+              <a:rPr lang="en-US" sz="1300" dirty="0">
+                <a:solidFill>
+                  <a:srgbClr val="16211F"/>
+                </a:solidFill>
+                <a:latin typeface="Yu Gothic" pitchFamily="34" charset="0"/>
+                <a:ea typeface="Yu Gothic" pitchFamily="34" charset="-122"/>
+                <a:cs typeface="Yu Gothic" pitchFamily="34" charset="-120"/>
+              </a:rPr>
+              <a:t>できないようにしています。</a:t>
+            </a:r>
+            <a:endParaRPr lang="en-US" sz="1300" dirty="0"/>
+          </a:p>
+        </p:txBody>
+      </p:sp>
+      <p:sp>
+        <p:nvSpPr>
+          <p:cNvPr id="31" name="Text 29"/>
+          <p:cNvSpPr/>
+          <p:nvPr/>
+        </p:nvSpPr>
+        <p:spPr>
+          <a:xfrm>
+            <a:off x="731520" y="6355080"/>
+            <a:ext cx="10698480" cy="365760"/>
+          </a:xfrm>
+          <a:prstGeom prst="rect">
+            <a:avLst/>
+          </a:prstGeom>
+          <a:noFill/>
+          <a:ln/>
+        </p:spPr>
+        <p:txBody>
+          <a:bodyPr wrap="square" lIns="0" tIns="0" rIns="0" bIns="0" rtlCol="0" anchor="ctr"/>
+          <a:lstStyle/>
+          <a:p>
+            <a:pPr indent="0" marL="0">
+              <a:buNone/>
+            </a:pPr>
+            <a:r>
+              <a:rPr lang="en-US" sz="1300" i="1" dirty="0">
                 <a:solidFill>
                   <a:srgbClr val="5C6B68"/>
                 </a:solidFill>
@@ -5703,95 +6592,9 @@
                 <a:ea typeface="Yu Gothic" pitchFamily="34" charset="-122"/>
                 <a:cs typeface="Yu Gothic" pitchFamily="34" charset="-120"/>
               </a:rPr>
-              <a:t>システム運用編17①は、記録するだけでなく定期的に確認することまで</a:t>
-            </a:r>
-            <a:endParaRPr lang="en-US" sz="1400" dirty="0"/>
-          </a:p>
-          <a:p>
-            <a:pPr indent="0" marL="0">
-              <a:lnSpc>
-                <a:spcPct val="120000"/>
-              </a:lnSpc>
-              <a:buNone/>
-            </a:pPr>
-            <a:r>
-              <a:rPr lang="en-US" sz="1400" dirty="0">
-                <a:solidFill>
-                  <a:srgbClr val="5C6B68"/>
-                </a:solidFill>
-                <a:latin typeface="Yu Gothic" pitchFamily="34" charset="0"/>
-                <a:ea typeface="Yu Gothic" pitchFamily="34" charset="-122"/>
-                <a:cs typeface="Yu Gothic" pitchFamily="34" charset="-120"/>
-              </a:rPr>
-              <a:t>求めています。記録と権限は揃っているので、閲覧画面を足せば満たせます。</a:t>
-            </a:r>
-            <a:endParaRPr lang="en-US" sz="1400" dirty="0"/>
-          </a:p>
-        </p:txBody>
-      </p:sp>
-      <p:sp>
-        <p:nvSpPr>
-          <p:cNvPr id="19" name="Shape 17"/>
-          <p:cNvSpPr/>
-          <p:nvPr/>
-        </p:nvSpPr>
-        <p:spPr>
-          <a:xfrm>
-            <a:off x="731520" y="6126480"/>
-            <a:ext cx="10698480" cy="594360"/>
-          </a:xfrm>
-          <a:prstGeom prst="roundRect">
-            <a:avLst>
-              <a:gd name="adj" fmla="val 12308"/>
-            </a:avLst>
-          </a:prstGeom>
-          <a:solidFill>
-            <a:srgbClr val="14504B"/>
-          </a:solidFill>
-          <a:ln w="12700">
-            <a:solidFill>
-              <a:srgbClr val="14504B"/>
-            </a:solidFill>
-            <a:prstDash val="solid"/>
-          </a:ln>
-        </p:spPr>
-      </p:sp>
-      <p:sp>
-        <p:nvSpPr>
-          <p:cNvPr id="20" name="Text 18"/>
-          <p:cNvSpPr/>
-          <p:nvPr/>
-        </p:nvSpPr>
-        <p:spPr>
-          <a:xfrm>
-            <a:off x="1097280" y="6245352"/>
-            <a:ext cx="9875520" cy="365760"/>
-          </a:xfrm>
-          <a:prstGeom prst="rect">
-            <a:avLst/>
-          </a:prstGeom>
-          <a:noFill/>
-          <a:ln/>
-        </p:spPr>
-        <p:txBody>
-          <a:bodyPr wrap="square" lIns="0" tIns="0" rIns="0" bIns="0" rtlCol="0" anchor="ctr"/>
-          <a:lstStyle/>
-          <a:p>
-            <a:pPr indent="0" marL="0">
-              <a:buNone/>
-            </a:pPr>
-            <a:r>
-              <a:rPr lang="en-US" sz="1500" dirty="0">
-                <a:solidFill>
-                  <a:srgbClr val="FFFFFF"/>
-                </a:solidFill>
-                <a:latin typeface="Yu Gothic" pitchFamily="34" charset="0"/>
-                <a:ea typeface="Yu Gothic" pitchFamily="34" charset="-122"/>
-                <a:cs typeface="Yu Gothic" pitchFamily="34" charset="-120"/>
-              </a:rPr>
-              <a:t>未対応の一覧は開示書にそのまま載せています。ご確認のうえ判断してください。</a:t>
-            </a:r>
-            <a:endParaRPr lang="en-US" sz="1500" dirty="0"/>
+              <a:t>この3つは、紙のカルテで当たり前に成り立っていたことを、電子でも同じ水準にするための決まりです。</a:t>
+            </a:r>
+            <a:endParaRPr lang="en-US" sz="1300" dirty="0"/>
           </a:p>
         </p:txBody>
       </p:sp>
@@ -5806,6 +6609,744 @@
 <file path=ppt/slides/slide13.xml><?xml version="1.0" encoding="utf-8"?>
 <p:sld xmlns:a="http://schemas.openxmlformats.org/drawingml/2006/main" xmlns:r="http://schemas.openxmlformats.org/officeDocument/2006/relationships" xmlns:p="http://schemas.openxmlformats.org/presentationml/2006/main">
   <p:cSld name="Slide 13">
+    <p:bg>
+      <p:bgPr>
+        <a:solidFill>
+          <a:srgbClr val="FFFFFF"/>
+        </a:solidFill>
+      </p:bgPr>
+    </p:bg>
+    <p:spTree>
+      <p:nvGrpSpPr>
+        <p:cNvPr id="1" name=""/>
+        <p:cNvGrpSpPr/>
+        <p:nvPr/>
+      </p:nvGrpSpPr>
+      <p:grpSpPr>
+        <a:xfrm>
+          <a:off x="0" y="0"/>
+          <a:ext cx="0" cy="0"/>
+          <a:chOff x="0" y="0"/>
+          <a:chExt cx="0" cy="0"/>
+        </a:xfrm>
+      </p:grpSpPr>
+      <p:sp>
+        <p:nvSpPr>
+          <p:cNvPr id="2" name="Text 0"/>
+          <p:cNvSpPr/>
+          <p:nvPr/>
+        </p:nvSpPr>
+        <p:spPr>
+          <a:xfrm>
+            <a:off x="731520" y="411480"/>
+            <a:ext cx="10698480" cy="777240"/>
+          </a:xfrm>
+          <a:prstGeom prst="rect">
+            <a:avLst/>
+          </a:prstGeom>
+          <a:noFill/>
+          <a:ln/>
+        </p:spPr>
+        <p:txBody>
+          <a:bodyPr wrap="square" lIns="0" tIns="0" rIns="0" bIns="0" rtlCol="0" anchor="ctr"/>
+          <a:lstStyle/>
+          <a:p>
+            <a:pPr indent="0" marL="0">
+              <a:buNone/>
+            </a:pPr>
+            <a:r>
+              <a:rPr lang="en-US" sz="3600" b="1" dirty="0">
+                <a:solidFill>
+                  <a:srgbClr val="14504B"/>
+                </a:solidFill>
+                <a:latin typeface="Yu Gothic" pitchFamily="34" charset="0"/>
+                <a:ea typeface="Yu Gothic" pitchFamily="34" charset="-122"/>
+                <a:cs typeface="Yu Gothic" pitchFamily="34" charset="-120"/>
+              </a:rPr>
+              <a:t>できていないこと</a:t>
+            </a:r>
+            <a:endParaRPr lang="en-US" sz="3600" dirty="0"/>
+          </a:p>
+        </p:txBody>
+      </p:sp>
+      <p:sp>
+        <p:nvSpPr>
+          <p:cNvPr id="3" name="Text 1"/>
+          <p:cNvSpPr/>
+          <p:nvPr/>
+        </p:nvSpPr>
+        <p:spPr>
+          <a:xfrm>
+            <a:off x="731520" y="1225296"/>
+            <a:ext cx="10698480" cy="411480"/>
+          </a:xfrm>
+          <a:prstGeom prst="rect">
+            <a:avLst/>
+          </a:prstGeom>
+          <a:noFill/>
+          <a:ln/>
+        </p:spPr>
+        <p:txBody>
+          <a:bodyPr wrap="square" lIns="0" tIns="0" rIns="0" bIns="0" rtlCol="0" anchor="ctr"/>
+          <a:lstStyle/>
+          <a:p>
+            <a:pPr indent="0" marL="0">
+              <a:buNone/>
+            </a:pPr>
+            <a:r>
+              <a:rPr lang="en-US" sz="1600" dirty="0">
+                <a:solidFill>
+                  <a:srgbClr val="5C6B68"/>
+                </a:solidFill>
+                <a:latin typeface="Yu Gothic" pitchFamily="34" charset="0"/>
+                <a:ea typeface="Yu Gothic" pitchFamily="34" charset="-122"/>
+                <a:cs typeface="Yu Gothic" pitchFamily="34" charset="-120"/>
+              </a:rPr>
+              <a:t>導入をご検討いただく前に、こちらからお伝えします</a:t>
+            </a:r>
+            <a:endParaRPr lang="en-US" sz="1600" dirty="0"/>
+          </a:p>
+        </p:txBody>
+      </p:sp>
+      <p:sp>
+        <p:nvSpPr>
+          <p:cNvPr id="4" name="Shape 2"/>
+          <p:cNvSpPr/>
+          <p:nvPr/>
+        </p:nvSpPr>
+        <p:spPr>
+          <a:xfrm>
+            <a:off x="731520" y="1965960"/>
+            <a:ext cx="10698480" cy="1207008"/>
+          </a:xfrm>
+          <a:prstGeom prst="roundRect">
+            <a:avLst>
+              <a:gd name="adj" fmla="val 6061"/>
+            </a:avLst>
+          </a:prstGeom>
+          <a:solidFill>
+            <a:srgbClr val="F1F6F5"/>
+          </a:solidFill>
+          <a:ln w="12700">
+            <a:solidFill>
+              <a:srgbClr val="F1F6F5"/>
+            </a:solidFill>
+            <a:prstDash val="solid"/>
+          </a:ln>
+        </p:spPr>
+      </p:sp>
+      <p:sp>
+        <p:nvSpPr>
+          <p:cNvPr id="5" name="Text 3"/>
+          <p:cNvSpPr/>
+          <p:nvPr/>
+        </p:nvSpPr>
+        <p:spPr>
+          <a:xfrm>
+            <a:off x="1051560" y="2112264"/>
+            <a:ext cx="5669280" cy="365760"/>
+          </a:xfrm>
+          <a:prstGeom prst="rect">
+            <a:avLst/>
+          </a:prstGeom>
+          <a:noFill/>
+          <a:ln/>
+        </p:spPr>
+        <p:txBody>
+          <a:bodyPr wrap="square" lIns="0" tIns="0" rIns="0" bIns="0" rtlCol="0" anchor="ctr"/>
+          <a:lstStyle/>
+          <a:p>
+            <a:pPr indent="0" marL="0">
+              <a:buNone/>
+            </a:pPr>
+            <a:r>
+              <a:rPr lang="en-US" sz="1900" b="1" dirty="0">
+                <a:solidFill>
+                  <a:srgbClr val="14504B"/>
+                </a:solidFill>
+                <a:latin typeface="Yu Gothic" pitchFamily="34" charset="0"/>
+                <a:ea typeface="Yu Gothic" pitchFamily="34" charset="-122"/>
+                <a:cs typeface="Yu Gothic" pitchFamily="34" charset="-120"/>
+              </a:rPr>
+              <a:t>プライバシーマーク／ISMS認証</a:t>
+            </a:r>
+            <a:endParaRPr lang="en-US" sz="1900" dirty="0"/>
+          </a:p>
+        </p:txBody>
+      </p:sp>
+      <p:sp>
+        <p:nvSpPr>
+          <p:cNvPr id="6" name="Shape 4"/>
+          <p:cNvSpPr/>
+          <p:nvPr/>
+        </p:nvSpPr>
+        <p:spPr>
+          <a:xfrm>
+            <a:off x="6949440" y="2130552"/>
+            <a:ext cx="1371600" cy="384048"/>
+          </a:xfrm>
+          <a:prstGeom prst="roundRect">
+            <a:avLst>
+              <a:gd name="adj" fmla="val 19048"/>
+            </a:avLst>
+          </a:prstGeom>
+          <a:solidFill>
+            <a:srgbClr val="D98A2B"/>
+          </a:solidFill>
+          <a:ln w="12700">
+            <a:solidFill>
+              <a:srgbClr val="D98A2B"/>
+            </a:solidFill>
+            <a:prstDash val="solid"/>
+          </a:ln>
+        </p:spPr>
+      </p:sp>
+      <p:sp>
+        <p:nvSpPr>
+          <p:cNvPr id="7" name="Text 5"/>
+          <p:cNvSpPr/>
+          <p:nvPr/>
+        </p:nvSpPr>
+        <p:spPr>
+          <a:xfrm>
+            <a:off x="6949440" y="2130552"/>
+            <a:ext cx="1371600" cy="384048"/>
+          </a:xfrm>
+          <a:prstGeom prst="rect">
+            <a:avLst/>
+          </a:prstGeom>
+          <a:noFill/>
+          <a:ln/>
+        </p:spPr>
+        <p:txBody>
+          <a:bodyPr wrap="square" lIns="0" tIns="0" rIns="0" bIns="0" rtlCol="0" anchor="ctr"/>
+          <a:lstStyle/>
+          <a:p>
+            <a:pPr algn="ctr" indent="0" marL="0">
+              <a:buNone/>
+            </a:pPr>
+            <a:r>
+              <a:rPr lang="en-US" sz="1300" b="1" dirty="0">
+                <a:solidFill>
+                  <a:srgbClr val="FFFFFF"/>
+                </a:solidFill>
+                <a:latin typeface="Yu Gothic" pitchFamily="34" charset="0"/>
+                <a:ea typeface="Yu Gothic" pitchFamily="34" charset="-122"/>
+                <a:cs typeface="Yu Gothic" pitchFamily="34" charset="-120"/>
+              </a:rPr>
+              <a:t>未取得</a:t>
+            </a:r>
+            <a:endParaRPr lang="en-US" sz="1300" dirty="0"/>
+          </a:p>
+        </p:txBody>
+      </p:sp>
+      <p:sp>
+        <p:nvSpPr>
+          <p:cNvPr id="8" name="Text 6"/>
+          <p:cNvSpPr/>
+          <p:nvPr/>
+        </p:nvSpPr>
+        <p:spPr>
+          <a:xfrm>
+            <a:off x="1051560" y="2514600"/>
+            <a:ext cx="9966960" cy="566928"/>
+          </a:xfrm>
+          <a:prstGeom prst="rect">
+            <a:avLst/>
+          </a:prstGeom>
+          <a:noFill/>
+          <a:ln/>
+        </p:spPr>
+        <p:txBody>
+          <a:bodyPr wrap="square" lIns="0" tIns="0" rIns="0" bIns="0" rtlCol="0" anchor="ctr"/>
+          <a:lstStyle/>
+          <a:p>
+            <a:pPr indent="0" marL="0">
+              <a:lnSpc>
+                <a:spcPct val="120000"/>
+              </a:lnSpc>
+              <a:buNone/>
+            </a:pPr>
+            <a:r>
+              <a:rPr lang="en-US" sz="1400" dirty="0">
+                <a:solidFill>
+                  <a:srgbClr val="5C6B68"/>
+                </a:solidFill>
+                <a:latin typeface="Yu Gothic" pitchFamily="34" charset="0"/>
+                <a:ea typeface="Yu Gothic" pitchFamily="34" charset="-122"/>
+                <a:cs typeface="Yu Gothic" pitchFamily="34" charset="-120"/>
+              </a:rPr>
+              <a:t>事業者ガイドライン4.4が求めています。技術的な工夫では</a:t>
+            </a:r>
+            <a:endParaRPr lang="en-US" sz="1400" dirty="0"/>
+          </a:p>
+          <a:p>
+            <a:pPr indent="0" marL="0">
+              <a:lnSpc>
+                <a:spcPct val="120000"/>
+              </a:lnSpc>
+              <a:buNone/>
+            </a:pPr>
+            <a:r>
+              <a:rPr lang="en-US" sz="1400" dirty="0">
+                <a:solidFill>
+                  <a:srgbClr val="5C6B68"/>
+                </a:solidFill>
+                <a:latin typeface="Yu Gothic" pitchFamily="34" charset="0"/>
+                <a:ea typeface="Yu Gothic" pitchFamily="34" charset="-122"/>
+                <a:cs typeface="Yu Gothic" pitchFamily="34" charset="-120"/>
+              </a:rPr>
+              <a:t>代替できず、審査期間と費用がかかるため事業判断が要ります。</a:t>
+            </a:r>
+            <a:endParaRPr lang="en-US" sz="1400" dirty="0"/>
+          </a:p>
+        </p:txBody>
+      </p:sp>
+      <p:sp>
+        <p:nvSpPr>
+          <p:cNvPr id="9" name="Shape 7"/>
+          <p:cNvSpPr/>
+          <p:nvPr/>
+        </p:nvSpPr>
+        <p:spPr>
+          <a:xfrm>
+            <a:off x="731520" y="3337560"/>
+            <a:ext cx="10698480" cy="1207008"/>
+          </a:xfrm>
+          <a:prstGeom prst="roundRect">
+            <a:avLst>
+              <a:gd name="adj" fmla="val 6061"/>
+            </a:avLst>
+          </a:prstGeom>
+          <a:solidFill>
+            <a:srgbClr val="F1F6F5"/>
+          </a:solidFill>
+          <a:ln w="12700">
+            <a:solidFill>
+              <a:srgbClr val="F1F6F5"/>
+            </a:solidFill>
+            <a:prstDash val="solid"/>
+          </a:ln>
+        </p:spPr>
+      </p:sp>
+      <p:sp>
+        <p:nvSpPr>
+          <p:cNvPr id="10" name="Text 8"/>
+          <p:cNvSpPr/>
+          <p:nvPr/>
+        </p:nvSpPr>
+        <p:spPr>
+          <a:xfrm>
+            <a:off x="1051560" y="3483864"/>
+            <a:ext cx="5669280" cy="365760"/>
+          </a:xfrm>
+          <a:prstGeom prst="rect">
+            <a:avLst/>
+          </a:prstGeom>
+          <a:noFill/>
+          <a:ln/>
+        </p:spPr>
+        <p:txBody>
+          <a:bodyPr wrap="square" lIns="0" tIns="0" rIns="0" bIns="0" rtlCol="0" anchor="ctr"/>
+          <a:lstStyle/>
+          <a:p>
+            <a:pPr indent="0" marL="0">
+              <a:buNone/>
+            </a:pPr>
+            <a:r>
+              <a:rPr lang="en-US" sz="1900" b="1" dirty="0">
+                <a:solidFill>
+                  <a:srgbClr val="14504B"/>
+                </a:solidFill>
+                <a:latin typeface="Yu Gothic" pitchFamily="34" charset="0"/>
+                <a:ea typeface="Yu Gothic" pitchFamily="34" charset="-122"/>
+                <a:cs typeface="Yu Gothic" pitchFamily="34" charset="-120"/>
+              </a:rPr>
+              <a:t>第三者による安全管理の評価</a:t>
+            </a:r>
+            <a:endParaRPr lang="en-US" sz="1900" dirty="0"/>
+          </a:p>
+        </p:txBody>
+      </p:sp>
+      <p:sp>
+        <p:nvSpPr>
+          <p:cNvPr id="11" name="Shape 9"/>
+          <p:cNvSpPr/>
+          <p:nvPr/>
+        </p:nvSpPr>
+        <p:spPr>
+          <a:xfrm>
+            <a:off x="6949440" y="3502152"/>
+            <a:ext cx="1371600" cy="384048"/>
+          </a:xfrm>
+          <a:prstGeom prst="roundRect">
+            <a:avLst>
+              <a:gd name="adj" fmla="val 19048"/>
+            </a:avLst>
+          </a:prstGeom>
+          <a:solidFill>
+            <a:srgbClr val="D98A2B"/>
+          </a:solidFill>
+          <a:ln w="12700">
+            <a:solidFill>
+              <a:srgbClr val="D98A2B"/>
+            </a:solidFill>
+            <a:prstDash val="solid"/>
+          </a:ln>
+        </p:spPr>
+      </p:sp>
+      <p:sp>
+        <p:nvSpPr>
+          <p:cNvPr id="12" name="Text 10"/>
+          <p:cNvSpPr/>
+          <p:nvPr/>
+        </p:nvSpPr>
+        <p:spPr>
+          <a:xfrm>
+            <a:off x="6949440" y="3502152"/>
+            <a:ext cx="1371600" cy="384048"/>
+          </a:xfrm>
+          <a:prstGeom prst="rect">
+            <a:avLst/>
+          </a:prstGeom>
+          <a:noFill/>
+          <a:ln/>
+        </p:spPr>
+        <p:txBody>
+          <a:bodyPr wrap="square" lIns="0" tIns="0" rIns="0" bIns="0" rtlCol="0" anchor="ctr"/>
+          <a:lstStyle/>
+          <a:p>
+            <a:pPr algn="ctr" indent="0" marL="0">
+              <a:buNone/>
+            </a:pPr>
+            <a:r>
+              <a:rPr lang="en-US" sz="1300" b="1" dirty="0">
+                <a:solidFill>
+                  <a:srgbClr val="FFFFFF"/>
+                </a:solidFill>
+                <a:latin typeface="Yu Gothic" pitchFamily="34" charset="0"/>
+                <a:ea typeface="Yu Gothic" pitchFamily="34" charset="-122"/>
+                <a:cs typeface="Yu Gothic" pitchFamily="34" charset="-120"/>
+              </a:rPr>
+              <a:t>未実施</a:t>
+            </a:r>
+            <a:endParaRPr lang="en-US" sz="1300" dirty="0"/>
+          </a:p>
+        </p:txBody>
+      </p:sp>
+      <p:sp>
+        <p:nvSpPr>
+          <p:cNvPr id="13" name="Text 11"/>
+          <p:cNvSpPr/>
+          <p:nvPr/>
+        </p:nvSpPr>
+        <p:spPr>
+          <a:xfrm>
+            <a:off x="1051560" y="3886200"/>
+            <a:ext cx="9966960" cy="566928"/>
+          </a:xfrm>
+          <a:prstGeom prst="rect">
+            <a:avLst/>
+          </a:prstGeom>
+          <a:noFill/>
+          <a:ln/>
+        </p:spPr>
+        <p:txBody>
+          <a:bodyPr wrap="square" lIns="0" tIns="0" rIns="0" bIns="0" rtlCol="0" anchor="ctr"/>
+          <a:lstStyle/>
+          <a:p>
+            <a:pPr indent="0" marL="0">
+              <a:lnSpc>
+                <a:spcPct val="120000"/>
+              </a:lnSpc>
+              <a:buNone/>
+            </a:pPr>
+            <a:r>
+              <a:rPr lang="en-US" sz="1400" dirty="0">
+                <a:solidFill>
+                  <a:srgbClr val="5C6B68"/>
+                </a:solidFill>
+                <a:latin typeface="Yu Gothic" pitchFamily="34" charset="0"/>
+                <a:ea typeface="Yu Gothic" pitchFamily="34" charset="-122"/>
+                <a:cs typeface="Yu Gothic" pitchFamily="34" charset="-120"/>
+              </a:rPr>
+              <a:t>同4.3。現状は内部での確認に留まっています。</a:t>
+            </a:r>
+            <a:endParaRPr lang="en-US" sz="1400" dirty="0"/>
+          </a:p>
+        </p:txBody>
+      </p:sp>
+      <p:sp>
+        <p:nvSpPr>
+          <p:cNvPr id="14" name="Shape 12"/>
+          <p:cNvSpPr/>
+          <p:nvPr/>
+        </p:nvSpPr>
+        <p:spPr>
+          <a:xfrm>
+            <a:off x="731520" y="4709160"/>
+            <a:ext cx="10698480" cy="1207008"/>
+          </a:xfrm>
+          <a:prstGeom prst="roundRect">
+            <a:avLst>
+              <a:gd name="adj" fmla="val 6061"/>
+            </a:avLst>
+          </a:prstGeom>
+          <a:solidFill>
+            <a:srgbClr val="F1F6F5"/>
+          </a:solidFill>
+          <a:ln w="12700">
+            <a:solidFill>
+              <a:srgbClr val="F1F6F5"/>
+            </a:solidFill>
+            <a:prstDash val="solid"/>
+          </a:ln>
+        </p:spPr>
+      </p:sp>
+      <p:sp>
+        <p:nvSpPr>
+          <p:cNvPr id="15" name="Text 13"/>
+          <p:cNvSpPr/>
+          <p:nvPr/>
+        </p:nvSpPr>
+        <p:spPr>
+          <a:xfrm>
+            <a:off x="1051560" y="4855464"/>
+            <a:ext cx="5669280" cy="365760"/>
+          </a:xfrm>
+          <a:prstGeom prst="rect">
+            <a:avLst/>
+          </a:prstGeom>
+          <a:noFill/>
+          <a:ln/>
+        </p:spPr>
+        <p:txBody>
+          <a:bodyPr wrap="square" lIns="0" tIns="0" rIns="0" bIns="0" rtlCol="0" anchor="ctr"/>
+          <a:lstStyle/>
+          <a:p>
+            <a:pPr indent="0" marL="0">
+              <a:buNone/>
+            </a:pPr>
+            <a:r>
+              <a:rPr lang="en-US" sz="1900" b="1" dirty="0">
+                <a:solidFill>
+                  <a:srgbClr val="14504B"/>
+                </a:solidFill>
+                <a:latin typeface="Yu Gothic" pitchFamily="34" charset="0"/>
+                <a:ea typeface="Yu Gothic" pitchFamily="34" charset="-122"/>
+                <a:cs typeface="Yu Gothic" pitchFamily="34" charset="-120"/>
+              </a:rPr>
+              <a:t>監査ログを施設側で確認する画面</a:t>
+            </a:r>
+            <a:endParaRPr lang="en-US" sz="1900" dirty="0"/>
+          </a:p>
+        </p:txBody>
+      </p:sp>
+      <p:sp>
+        <p:nvSpPr>
+          <p:cNvPr id="16" name="Shape 14"/>
+          <p:cNvSpPr/>
+          <p:nvPr/>
+        </p:nvSpPr>
+        <p:spPr>
+          <a:xfrm>
+            <a:off x="6949440" y="4873752"/>
+            <a:ext cx="1371600" cy="384048"/>
+          </a:xfrm>
+          <a:prstGeom prst="roundRect">
+            <a:avLst>
+              <a:gd name="adj" fmla="val 19048"/>
+            </a:avLst>
+          </a:prstGeom>
+          <a:solidFill>
+            <a:srgbClr val="D98A2B"/>
+          </a:solidFill>
+          <a:ln w="12700">
+            <a:solidFill>
+              <a:srgbClr val="D98A2B"/>
+            </a:solidFill>
+            <a:prstDash val="solid"/>
+          </a:ln>
+        </p:spPr>
+      </p:sp>
+      <p:sp>
+        <p:nvSpPr>
+          <p:cNvPr id="17" name="Text 15"/>
+          <p:cNvSpPr/>
+          <p:nvPr/>
+        </p:nvSpPr>
+        <p:spPr>
+          <a:xfrm>
+            <a:off x="6949440" y="4873752"/>
+            <a:ext cx="1371600" cy="384048"/>
+          </a:xfrm>
+          <a:prstGeom prst="rect">
+            <a:avLst/>
+          </a:prstGeom>
+          <a:noFill/>
+          <a:ln/>
+        </p:spPr>
+        <p:txBody>
+          <a:bodyPr wrap="square" lIns="0" tIns="0" rIns="0" bIns="0" rtlCol="0" anchor="ctr"/>
+          <a:lstStyle/>
+          <a:p>
+            <a:pPr algn="ctr" indent="0" marL="0">
+              <a:buNone/>
+            </a:pPr>
+            <a:r>
+              <a:rPr lang="en-US" sz="1300" b="1" dirty="0">
+                <a:solidFill>
+                  <a:srgbClr val="FFFFFF"/>
+                </a:solidFill>
+                <a:latin typeface="Yu Gothic" pitchFamily="34" charset="0"/>
+                <a:ea typeface="Yu Gothic" pitchFamily="34" charset="-122"/>
+                <a:cs typeface="Yu Gothic" pitchFamily="34" charset="-120"/>
+              </a:rPr>
+              <a:t>未実装</a:t>
+            </a:r>
+            <a:endParaRPr lang="en-US" sz="1300" dirty="0"/>
+          </a:p>
+        </p:txBody>
+      </p:sp>
+      <p:sp>
+        <p:nvSpPr>
+          <p:cNvPr id="18" name="Text 16"/>
+          <p:cNvSpPr/>
+          <p:nvPr/>
+        </p:nvSpPr>
+        <p:spPr>
+          <a:xfrm>
+            <a:off x="1051560" y="5257800"/>
+            <a:ext cx="9966960" cy="566928"/>
+          </a:xfrm>
+          <a:prstGeom prst="rect">
+            <a:avLst/>
+          </a:prstGeom>
+          <a:noFill/>
+          <a:ln/>
+        </p:spPr>
+        <p:txBody>
+          <a:bodyPr wrap="square" lIns="0" tIns="0" rIns="0" bIns="0" rtlCol="0" anchor="ctr"/>
+          <a:lstStyle/>
+          <a:p>
+            <a:pPr indent="0" marL="0">
+              <a:lnSpc>
+                <a:spcPct val="120000"/>
+              </a:lnSpc>
+              <a:buNone/>
+            </a:pPr>
+            <a:r>
+              <a:rPr lang="en-US" sz="1400" dirty="0">
+                <a:solidFill>
+                  <a:srgbClr val="5C6B68"/>
+                </a:solidFill>
+                <a:latin typeface="Yu Gothic" pitchFamily="34" charset="0"/>
+                <a:ea typeface="Yu Gothic" pitchFamily="34" charset="-122"/>
+                <a:cs typeface="Yu Gothic" pitchFamily="34" charset="-120"/>
+              </a:rPr>
+              <a:t>システム運用編17①は、記録するだけでなく定期的に確認することまで</a:t>
+            </a:r>
+            <a:endParaRPr lang="en-US" sz="1400" dirty="0"/>
+          </a:p>
+          <a:p>
+            <a:pPr indent="0" marL="0">
+              <a:lnSpc>
+                <a:spcPct val="120000"/>
+              </a:lnSpc>
+              <a:buNone/>
+            </a:pPr>
+            <a:r>
+              <a:rPr lang="en-US" sz="1400" dirty="0">
+                <a:solidFill>
+                  <a:srgbClr val="5C6B68"/>
+                </a:solidFill>
+                <a:latin typeface="Yu Gothic" pitchFamily="34" charset="0"/>
+                <a:ea typeface="Yu Gothic" pitchFamily="34" charset="-122"/>
+                <a:cs typeface="Yu Gothic" pitchFamily="34" charset="-120"/>
+              </a:rPr>
+              <a:t>求めています。記録と権限は揃っているので、閲覧画面を足せば満たせます。</a:t>
+            </a:r>
+            <a:endParaRPr lang="en-US" sz="1400" dirty="0"/>
+          </a:p>
+        </p:txBody>
+      </p:sp>
+      <p:sp>
+        <p:nvSpPr>
+          <p:cNvPr id="19" name="Shape 17"/>
+          <p:cNvSpPr/>
+          <p:nvPr/>
+        </p:nvSpPr>
+        <p:spPr>
+          <a:xfrm>
+            <a:off x="731520" y="6126480"/>
+            <a:ext cx="10698480" cy="594360"/>
+          </a:xfrm>
+          <a:prstGeom prst="roundRect">
+            <a:avLst>
+              <a:gd name="adj" fmla="val 12308"/>
+            </a:avLst>
+          </a:prstGeom>
+          <a:solidFill>
+            <a:srgbClr val="14504B"/>
+          </a:solidFill>
+          <a:ln w="12700">
+            <a:solidFill>
+              <a:srgbClr val="14504B"/>
+            </a:solidFill>
+            <a:prstDash val="solid"/>
+          </a:ln>
+        </p:spPr>
+      </p:sp>
+      <p:sp>
+        <p:nvSpPr>
+          <p:cNvPr id="20" name="Text 18"/>
+          <p:cNvSpPr/>
+          <p:nvPr/>
+        </p:nvSpPr>
+        <p:spPr>
+          <a:xfrm>
+            <a:off x="1097280" y="6245352"/>
+            <a:ext cx="9875520" cy="365760"/>
+          </a:xfrm>
+          <a:prstGeom prst="rect">
+            <a:avLst/>
+          </a:prstGeom>
+          <a:noFill/>
+          <a:ln/>
+        </p:spPr>
+        <p:txBody>
+          <a:bodyPr wrap="square" lIns="0" tIns="0" rIns="0" bIns="0" rtlCol="0" anchor="ctr"/>
+          <a:lstStyle/>
+          <a:p>
+            <a:pPr indent="0" marL="0">
+              <a:buNone/>
+            </a:pPr>
+            <a:r>
+              <a:rPr lang="en-US" sz="1500" dirty="0">
+                <a:solidFill>
+                  <a:srgbClr val="FFFFFF"/>
+                </a:solidFill>
+                <a:latin typeface="Yu Gothic" pitchFamily="34" charset="0"/>
+                <a:ea typeface="Yu Gothic" pitchFamily="34" charset="-122"/>
+                <a:cs typeface="Yu Gothic" pitchFamily="34" charset="-120"/>
+              </a:rPr>
+              <a:t>未対応の一覧は開示書にそのまま載せています。ご確認のうえ判断してください。</a:t>
+            </a:r>
+            <a:endParaRPr lang="en-US" sz="1500" dirty="0"/>
+          </a:p>
+        </p:txBody>
+      </p:sp>
+    </p:spTree>
+  </p:cSld>
+  <p:clrMapOvr>
+    <a:masterClrMapping/>
+  </p:clrMapOvr>
+</p:sld>
+</file>
+
+<file path=ppt/slides/slide14.xml><?xml version="1.0" encoding="utf-8"?>
+<p:sld xmlns:a="http://schemas.openxmlformats.org/drawingml/2006/main" xmlns:r="http://schemas.openxmlformats.org/officeDocument/2006/relationships" xmlns:p="http://schemas.openxmlformats.org/presentationml/2006/main">
+  <p:cSld name="Slide 14">
     <p:bg>
       <p:bgPr>
         <a:solidFill>
@@ -6028,698 +7569,6 @@
               <a:t>事例：1年間のBRI変化と尿蛋白の新規発現（宮崎県延岡市 2020–2021年）</a:t>
             </a:r>
             <a:endParaRPr lang="en-US" sz="1500" dirty="0"/>
-          </a:p>
-        </p:txBody>
-      </p:sp>
-    </p:spTree>
-  </p:cSld>
-  <p:clrMapOvr>
-    <a:masterClrMapping/>
-  </p:clrMapOvr>
-</p:sld>
-</file>
-
-<file path=ppt/slides/slide14.xml><?xml version="1.0" encoding="utf-8"?>
-<p:sld xmlns:a="http://schemas.openxmlformats.org/drawingml/2006/main" xmlns:r="http://schemas.openxmlformats.org/officeDocument/2006/relationships" xmlns:p="http://schemas.openxmlformats.org/presentationml/2006/main">
-  <p:cSld name="Slide 14">
-    <p:bg>
-      <p:bgPr>
-        <a:solidFill>
-          <a:srgbClr val="FFFFFF"/>
-        </a:solidFill>
-      </p:bgPr>
-    </p:bg>
-    <p:spTree>
-      <p:nvGrpSpPr>
-        <p:cNvPr id="1" name=""/>
-        <p:cNvGrpSpPr/>
-        <p:nvPr/>
-      </p:nvGrpSpPr>
-      <p:grpSpPr>
-        <a:xfrm>
-          <a:off x="0" y="0"/>
-          <a:ext cx="0" cy="0"/>
-          <a:chOff x="0" y="0"/>
-          <a:chExt cx="0" cy="0"/>
-        </a:xfrm>
-      </p:grpSpPr>
-      <p:sp>
-        <p:nvSpPr>
-          <p:cNvPr id="2" name="Text 0"/>
-          <p:cNvSpPr/>
-          <p:nvPr/>
-        </p:nvSpPr>
-        <p:spPr>
-          <a:xfrm>
-            <a:off x="731520" y="411480"/>
-            <a:ext cx="10698480" cy="777240"/>
-          </a:xfrm>
-          <a:prstGeom prst="rect">
-            <a:avLst/>
-          </a:prstGeom>
-          <a:noFill/>
-          <a:ln/>
-        </p:spPr>
-        <p:txBody>
-          <a:bodyPr wrap="square" lIns="0" tIns="0" rIns="0" bIns="0" rtlCol="0" anchor="ctr"/>
-          <a:lstStyle/>
-          <a:p>
-            <a:pPr indent="0" marL="0">
-              <a:buNone/>
-            </a:pPr>
-            <a:r>
-              <a:rPr lang="en-US" sz="3600" b="1" dirty="0">
-                <a:solidFill>
-                  <a:srgbClr val="14504B"/>
-                </a:solidFill>
-                <a:latin typeface="Yu Gothic" pitchFamily="34" charset="0"/>
-                <a:ea typeface="Yu Gothic" pitchFamily="34" charset="-122"/>
-                <a:cs typeface="Yu Gothic" pitchFamily="34" charset="-120"/>
-              </a:rPr>
-              <a:t>特定健診は、毎年とられている</a:t>
-            </a:r>
-            <a:endParaRPr lang="en-US" sz="3600" dirty="0"/>
-          </a:p>
-        </p:txBody>
-      </p:sp>
-      <p:sp>
-        <p:nvSpPr>
-          <p:cNvPr id="3" name="Shape 1"/>
-          <p:cNvSpPr/>
-          <p:nvPr/>
-        </p:nvSpPr>
-        <p:spPr>
-          <a:xfrm>
-            <a:off x="731520" y="1965960"/>
-            <a:ext cx="2103120" cy="1554480"/>
-          </a:xfrm>
-          <a:prstGeom prst="roundRect">
-            <a:avLst>
-              <a:gd name="adj" fmla="val 4706"/>
-            </a:avLst>
-          </a:prstGeom>
-          <a:solidFill>
-            <a:srgbClr val="F1F6F5"/>
-          </a:solidFill>
-          <a:ln w="12700">
-            <a:solidFill>
-              <a:srgbClr val="F1F6F5"/>
-            </a:solidFill>
-            <a:prstDash val="solid"/>
-          </a:ln>
-        </p:spPr>
-      </p:sp>
-      <p:sp>
-        <p:nvSpPr>
-          <p:cNvPr id="4" name="Text 2"/>
-          <p:cNvSpPr/>
-          <p:nvPr/>
-        </p:nvSpPr>
-        <p:spPr>
-          <a:xfrm>
-            <a:off x="777240" y="2194560"/>
-            <a:ext cx="2011680" cy="365760"/>
-          </a:xfrm>
-          <a:prstGeom prst="rect">
-            <a:avLst/>
-          </a:prstGeom>
-          <a:noFill/>
-          <a:ln/>
-        </p:spPr>
-        <p:txBody>
-          <a:bodyPr wrap="square" lIns="0" tIns="0" rIns="0" bIns="0" rtlCol="0" anchor="ctr"/>
-          <a:lstStyle/>
-          <a:p>
-            <a:pPr algn="ctr" indent="0" marL="0">
-              <a:buNone/>
-            </a:pPr>
-            <a:r>
-              <a:rPr lang="en-US" sz="1700" b="1" dirty="0">
-                <a:solidFill>
-                  <a:srgbClr val="14504B"/>
-                </a:solidFill>
-                <a:latin typeface="Yu Gothic" pitchFamily="34" charset="0"/>
-                <a:ea typeface="Yu Gothic" pitchFamily="34" charset="-122"/>
-                <a:cs typeface="Yu Gothic" pitchFamily="34" charset="-120"/>
-              </a:rPr>
-              <a:t>受ける</a:t>
-            </a:r>
-            <a:endParaRPr lang="en-US" sz="1700" dirty="0"/>
-          </a:p>
-        </p:txBody>
-      </p:sp>
-      <p:sp>
-        <p:nvSpPr>
-          <p:cNvPr id="5" name="Text 3"/>
-          <p:cNvSpPr/>
-          <p:nvPr/>
-        </p:nvSpPr>
-        <p:spPr>
-          <a:xfrm>
-            <a:off x="777240" y="2651760"/>
-            <a:ext cx="2011680" cy="640080"/>
-          </a:xfrm>
-          <a:prstGeom prst="rect">
-            <a:avLst/>
-          </a:prstGeom>
-          <a:noFill/>
-          <a:ln/>
-        </p:spPr>
-        <p:txBody>
-          <a:bodyPr wrap="square" lIns="0" tIns="0" rIns="0" bIns="0" rtlCol="0" anchor="ctr"/>
-          <a:lstStyle/>
-          <a:p>
-            <a:pPr algn="ctr" indent="0" marL="0">
-              <a:buNone/>
-            </a:pPr>
-            <a:r>
-              <a:rPr lang="en-US" sz="1300" dirty="0">
-                <a:solidFill>
-                  <a:srgbClr val="5C6B68"/>
-                </a:solidFill>
-                <a:latin typeface="Yu Gothic" pitchFamily="34" charset="0"/>
-                <a:ea typeface="Yu Gothic" pitchFamily="34" charset="-122"/>
-                <a:cs typeface="Yu Gothic" pitchFamily="34" charset="-120"/>
-              </a:rPr>
-              <a:t>腹囲・血圧・血液検査</a:t>
-            </a:r>
-            <a:endParaRPr lang="en-US" sz="1300" dirty="0"/>
-          </a:p>
-        </p:txBody>
-      </p:sp>
-      <p:sp>
-        <p:nvSpPr>
-          <p:cNvPr id="6" name="Shape 4"/>
-          <p:cNvSpPr/>
-          <p:nvPr/>
-        </p:nvSpPr>
-        <p:spPr>
-          <a:xfrm>
-            <a:off x="2871216" y="2670048"/>
-            <a:ext cx="201168" cy="237744"/>
-          </a:xfrm>
-          <a:prstGeom prst="rightArrow">
-            <a:avLst/>
-          </a:prstGeom>
-          <a:solidFill>
-            <a:srgbClr val="A8CFC9"/>
-          </a:solidFill>
-          <a:ln w="12700">
-            <a:solidFill>
-              <a:srgbClr val="A8CFC9"/>
-            </a:solidFill>
-            <a:prstDash val="solid"/>
-          </a:ln>
-        </p:spPr>
-      </p:sp>
-      <p:sp>
-        <p:nvSpPr>
-          <p:cNvPr id="7" name="Shape 5"/>
-          <p:cNvSpPr/>
-          <p:nvPr/>
-        </p:nvSpPr>
-        <p:spPr>
-          <a:xfrm>
-            <a:off x="3108960" y="1965960"/>
-            <a:ext cx="2103120" cy="1554480"/>
-          </a:xfrm>
-          <a:prstGeom prst="roundRect">
-            <a:avLst>
-              <a:gd name="adj" fmla="val 4706"/>
-            </a:avLst>
-          </a:prstGeom>
-          <a:solidFill>
-            <a:srgbClr val="F1F6F5"/>
-          </a:solidFill>
-          <a:ln w="12700">
-            <a:solidFill>
-              <a:srgbClr val="F1F6F5"/>
-            </a:solidFill>
-            <a:prstDash val="solid"/>
-          </a:ln>
-        </p:spPr>
-      </p:sp>
-      <p:sp>
-        <p:nvSpPr>
-          <p:cNvPr id="8" name="Text 6"/>
-          <p:cNvSpPr/>
-          <p:nvPr/>
-        </p:nvSpPr>
-        <p:spPr>
-          <a:xfrm>
-            <a:off x="3154680" y="2194560"/>
-            <a:ext cx="2011680" cy="365760"/>
-          </a:xfrm>
-          <a:prstGeom prst="rect">
-            <a:avLst/>
-          </a:prstGeom>
-          <a:noFill/>
-          <a:ln/>
-        </p:spPr>
-        <p:txBody>
-          <a:bodyPr wrap="square" lIns="0" tIns="0" rIns="0" bIns="0" rtlCol="0" anchor="ctr"/>
-          <a:lstStyle/>
-          <a:p>
-            <a:pPr algn="ctr" indent="0" marL="0">
-              <a:buNone/>
-            </a:pPr>
-            <a:r>
-              <a:rPr lang="en-US" sz="1700" b="1" dirty="0">
-                <a:solidFill>
-                  <a:srgbClr val="14504B"/>
-                </a:solidFill>
-                <a:latin typeface="Yu Gothic" pitchFamily="34" charset="0"/>
-                <a:ea typeface="Yu Gothic" pitchFamily="34" charset="-122"/>
-                <a:cs typeface="Yu Gothic" pitchFamily="34" charset="-120"/>
-              </a:rPr>
-              <a:t>結果を渡す</a:t>
-            </a:r>
-            <a:endParaRPr lang="en-US" sz="1700" dirty="0"/>
-          </a:p>
-        </p:txBody>
-      </p:sp>
-      <p:sp>
-        <p:nvSpPr>
-          <p:cNvPr id="9" name="Text 7"/>
-          <p:cNvSpPr/>
-          <p:nvPr/>
-        </p:nvSpPr>
-        <p:spPr>
-          <a:xfrm>
-            <a:off x="3154680" y="2651760"/>
-            <a:ext cx="2011680" cy="640080"/>
-          </a:xfrm>
-          <a:prstGeom prst="rect">
-            <a:avLst/>
-          </a:prstGeom>
-          <a:noFill/>
-          <a:ln/>
-        </p:spPr>
-        <p:txBody>
-          <a:bodyPr wrap="square" lIns="0" tIns="0" rIns="0" bIns="0" rtlCol="0" anchor="ctr"/>
-          <a:lstStyle/>
-          <a:p>
-            <a:pPr algn="ctr" indent="0" marL="0">
-              <a:buNone/>
-            </a:pPr>
-            <a:r>
-              <a:rPr lang="en-US" sz="1300" dirty="0">
-                <a:solidFill>
-                  <a:srgbClr val="5C6B68"/>
-                </a:solidFill>
-                <a:latin typeface="Yu Gothic" pitchFamily="34" charset="0"/>
-                <a:ea typeface="Yu Gothic" pitchFamily="34" charset="-122"/>
-                <a:cs typeface="Yu Gothic" pitchFamily="34" charset="-120"/>
-              </a:rPr>
-              <a:t>基準値との比較</a:t>
-            </a:r>
-            <a:endParaRPr lang="en-US" sz="1300" dirty="0"/>
-          </a:p>
-        </p:txBody>
-      </p:sp>
-      <p:sp>
-        <p:nvSpPr>
-          <p:cNvPr id="10" name="Shape 8"/>
-          <p:cNvSpPr/>
-          <p:nvPr/>
-        </p:nvSpPr>
-        <p:spPr>
-          <a:xfrm>
-            <a:off x="5248656" y="2670048"/>
-            <a:ext cx="201168" cy="237744"/>
-          </a:xfrm>
-          <a:prstGeom prst="rightArrow">
-            <a:avLst/>
-          </a:prstGeom>
-          <a:solidFill>
-            <a:srgbClr val="A8CFC9"/>
-          </a:solidFill>
-          <a:ln w="12700">
-            <a:solidFill>
-              <a:srgbClr val="A8CFC9"/>
-            </a:solidFill>
-            <a:prstDash val="solid"/>
-          </a:ln>
-        </p:spPr>
-      </p:sp>
-      <p:sp>
-        <p:nvSpPr>
-          <p:cNvPr id="11" name="Shape 9"/>
-          <p:cNvSpPr/>
-          <p:nvPr/>
-        </p:nvSpPr>
-        <p:spPr>
-          <a:xfrm>
-            <a:off x="5486400" y="1965960"/>
-            <a:ext cx="2103120" cy="1554480"/>
-          </a:xfrm>
-          <a:prstGeom prst="roundRect">
-            <a:avLst>
-              <a:gd name="adj" fmla="val 4706"/>
-            </a:avLst>
-          </a:prstGeom>
-          <a:solidFill>
-            <a:srgbClr val="F1F6F5"/>
-          </a:solidFill>
-          <a:ln w="12700">
-            <a:solidFill>
-              <a:srgbClr val="F1F6F5"/>
-            </a:solidFill>
-            <a:prstDash val="solid"/>
-          </a:ln>
-        </p:spPr>
-      </p:sp>
-      <p:sp>
-        <p:nvSpPr>
-          <p:cNvPr id="12" name="Text 10"/>
-          <p:cNvSpPr/>
-          <p:nvPr/>
-        </p:nvSpPr>
-        <p:spPr>
-          <a:xfrm>
-            <a:off x="5532120" y="2194560"/>
-            <a:ext cx="2011680" cy="365760"/>
-          </a:xfrm>
-          <a:prstGeom prst="rect">
-            <a:avLst/>
-          </a:prstGeom>
-          <a:noFill/>
-          <a:ln/>
-        </p:spPr>
-        <p:txBody>
-          <a:bodyPr wrap="square" lIns="0" tIns="0" rIns="0" bIns="0" rtlCol="0" anchor="ctr"/>
-          <a:lstStyle/>
-          <a:p>
-            <a:pPr algn="ctr" indent="0" marL="0">
-              <a:buNone/>
-            </a:pPr>
-            <a:r>
-              <a:rPr lang="en-US" sz="1700" b="1" dirty="0">
-                <a:solidFill>
-                  <a:srgbClr val="14504B"/>
-                </a:solidFill>
-                <a:latin typeface="Yu Gothic" pitchFamily="34" charset="0"/>
-                <a:ea typeface="Yu Gothic" pitchFamily="34" charset="-122"/>
-                <a:cs typeface="Yu Gothic" pitchFamily="34" charset="-120"/>
-              </a:rPr>
-              <a:t>保健指導</a:t>
-            </a:r>
-            <a:endParaRPr lang="en-US" sz="1700" dirty="0"/>
-          </a:p>
-        </p:txBody>
-      </p:sp>
-      <p:sp>
-        <p:nvSpPr>
-          <p:cNvPr id="13" name="Text 11"/>
-          <p:cNvSpPr/>
-          <p:nvPr/>
-        </p:nvSpPr>
-        <p:spPr>
-          <a:xfrm>
-            <a:off x="5532120" y="2651760"/>
-            <a:ext cx="2011680" cy="640080"/>
-          </a:xfrm>
-          <a:prstGeom prst="rect">
-            <a:avLst/>
-          </a:prstGeom>
-          <a:noFill/>
-          <a:ln/>
-        </p:spPr>
-        <p:txBody>
-          <a:bodyPr wrap="square" lIns="0" tIns="0" rIns="0" bIns="0" rtlCol="0" anchor="ctr"/>
-          <a:lstStyle/>
-          <a:p>
-            <a:pPr algn="ctr" indent="0" marL="0">
-              <a:buNone/>
-            </a:pPr>
-            <a:r>
-              <a:rPr lang="en-US" sz="1300" dirty="0">
-                <a:solidFill>
-                  <a:srgbClr val="5C6B68"/>
-                </a:solidFill>
-                <a:latin typeface="Yu Gothic" pitchFamily="34" charset="0"/>
-                <a:ea typeface="Yu Gothic" pitchFamily="34" charset="-122"/>
-                <a:cs typeface="Yu Gothic" pitchFamily="34" charset="-120"/>
-              </a:rPr>
-              <a:t>該当者に案内</a:t>
-            </a:r>
-            <a:endParaRPr lang="en-US" sz="1300" dirty="0"/>
-          </a:p>
-        </p:txBody>
-      </p:sp>
-      <p:sp>
-        <p:nvSpPr>
-          <p:cNvPr id="14" name="Shape 12"/>
-          <p:cNvSpPr/>
-          <p:nvPr/>
-        </p:nvSpPr>
-        <p:spPr>
-          <a:xfrm>
-            <a:off x="7955280" y="1965960"/>
-            <a:ext cx="3474720" cy="1554480"/>
-          </a:xfrm>
-          <a:prstGeom prst="roundRect">
-            <a:avLst>
-              <a:gd name="adj" fmla="val 4706"/>
-            </a:avLst>
-          </a:prstGeom>
-          <a:solidFill>
-            <a:srgbClr val="F7F2EC"/>
-          </a:solidFill>
-          <a:ln w="12700">
-            <a:solidFill>
-              <a:srgbClr val="F7F2EC"/>
-            </a:solidFill>
-            <a:prstDash val="solid"/>
-          </a:ln>
-        </p:spPr>
-      </p:sp>
-      <p:sp>
-        <p:nvSpPr>
-          <p:cNvPr id="15" name="Text 13"/>
-          <p:cNvSpPr/>
-          <p:nvPr/>
-        </p:nvSpPr>
-        <p:spPr>
-          <a:xfrm>
-            <a:off x="8183880" y="2194560"/>
-            <a:ext cx="3017520" cy="365760"/>
-          </a:xfrm>
-          <a:prstGeom prst="rect">
-            <a:avLst/>
-          </a:prstGeom>
-          <a:noFill/>
-          <a:ln/>
-        </p:spPr>
-        <p:txBody>
-          <a:bodyPr wrap="square" lIns="0" tIns="0" rIns="0" bIns="0" rtlCol="0" anchor="ctr"/>
-          <a:lstStyle/>
-          <a:p>
-            <a:pPr indent="0" marL="0">
-              <a:buNone/>
-            </a:pPr>
-            <a:r>
-              <a:rPr lang="en-US" sz="1600" b="1" dirty="0">
-                <a:solidFill>
-                  <a:srgbClr val="8A6F52"/>
-                </a:solidFill>
-                <a:latin typeface="Yu Gothic" pitchFamily="34" charset="0"/>
-                <a:ea typeface="Yu Gothic" pitchFamily="34" charset="-122"/>
-                <a:cs typeface="Yu Gothic" pitchFamily="34" charset="-120"/>
-              </a:rPr>
-              <a:t>多くはここで終わる</a:t>
-            </a:r>
-            <a:endParaRPr lang="en-US" sz="1600" dirty="0"/>
-          </a:p>
-        </p:txBody>
-      </p:sp>
-      <p:sp>
-        <p:nvSpPr>
-          <p:cNvPr id="16" name="Text 14"/>
-          <p:cNvSpPr/>
-          <p:nvPr/>
-        </p:nvSpPr>
-        <p:spPr>
-          <a:xfrm>
-            <a:off x="8183880" y="2633472"/>
-            <a:ext cx="3108960" cy="685800"/>
-          </a:xfrm>
-          <a:prstGeom prst="rect">
-            <a:avLst/>
-          </a:prstGeom>
-          <a:noFill/>
-          <a:ln/>
-        </p:spPr>
-        <p:txBody>
-          <a:bodyPr wrap="square" lIns="0" tIns="0" rIns="0" bIns="0" rtlCol="0" anchor="ctr"/>
-          <a:lstStyle/>
-          <a:p>
-            <a:pPr indent="0" marL="0">
-              <a:lnSpc>
-                <a:spcPct val="115000"/>
-              </a:lnSpc>
-              <a:buNone/>
-            </a:pPr>
-            <a:r>
-              <a:rPr lang="en-US" sz="1300" dirty="0">
-                <a:solidFill>
-                  <a:srgbClr val="5A5044"/>
-                </a:solidFill>
-                <a:latin typeface="Yu Gothic" pitchFamily="34" charset="0"/>
-                <a:ea typeface="Yu Gothic" pitchFamily="34" charset="-122"/>
-                <a:cs typeface="Yu Gothic" pitchFamily="34" charset="-120"/>
-              </a:rPr>
-              <a:t>「今」の値は分かるが、</a:t>
-            </a:r>
-            <a:endParaRPr lang="en-US" sz="1300" dirty="0"/>
-          </a:p>
-          <a:p>
-            <a:pPr indent="0" marL="0">
-              <a:lnSpc>
-                <a:spcPct val="115000"/>
-              </a:lnSpc>
-              <a:buNone/>
-            </a:pPr>
-            <a:r>
-              <a:rPr lang="en-US" sz="1300" dirty="0">
-                <a:solidFill>
-                  <a:srgbClr val="5A5044"/>
-                </a:solidFill>
-                <a:latin typeface="Yu Gothic" pitchFamily="34" charset="0"/>
-                <a:ea typeface="Yu Gothic" pitchFamily="34" charset="-122"/>
-                <a:cs typeface="Yu Gothic" pitchFamily="34" charset="-120"/>
-              </a:rPr>
-              <a:t>変化は活かされにくい</a:t>
-            </a:r>
-            <a:endParaRPr lang="en-US" sz="1300" dirty="0"/>
-          </a:p>
-        </p:txBody>
-      </p:sp>
-      <p:sp>
-        <p:nvSpPr>
-          <p:cNvPr id="17" name="Shape 15"/>
-          <p:cNvSpPr/>
-          <p:nvPr/>
-        </p:nvSpPr>
-        <p:spPr>
-          <a:xfrm>
-            <a:off x="731520" y="3931920"/>
-            <a:ext cx="10698480" cy="2011680"/>
-          </a:xfrm>
-          <a:prstGeom prst="roundRect">
-            <a:avLst>
-              <a:gd name="adj" fmla="val 3636"/>
-            </a:avLst>
-          </a:prstGeom>
-          <a:solidFill>
-            <a:srgbClr val="14504B"/>
-          </a:solidFill>
-          <a:ln w="12700">
-            <a:solidFill>
-              <a:srgbClr val="14504B"/>
-            </a:solidFill>
-            <a:prstDash val="solid"/>
-          </a:ln>
-        </p:spPr>
-      </p:sp>
-      <p:sp>
-        <p:nvSpPr>
-          <p:cNvPr id="18" name="Text 16"/>
-          <p:cNvSpPr/>
-          <p:nvPr/>
-        </p:nvSpPr>
-        <p:spPr>
-          <a:xfrm>
-            <a:off x="1097280" y="4160520"/>
-            <a:ext cx="1828800" cy="384048"/>
-          </a:xfrm>
-          <a:prstGeom prst="rect">
-            <a:avLst/>
-          </a:prstGeom>
-          <a:noFill/>
-          <a:ln/>
-        </p:spPr>
-        <p:txBody>
-          <a:bodyPr wrap="square" lIns="0" tIns="0" rIns="0" bIns="0" rtlCol="0" anchor="ctr"/>
-          <a:lstStyle/>
-          <a:p>
-            <a:pPr indent="0" marL="0">
-              <a:buNone/>
-            </a:pPr>
-            <a:r>
-              <a:rPr lang="en-US" sz="1500" b="1" dirty="0">
-                <a:solidFill>
-                  <a:srgbClr val="D98A2B"/>
-                </a:solidFill>
-                <a:latin typeface="Yu Gothic" pitchFamily="34" charset="0"/>
-                <a:ea typeface="Yu Gothic" pitchFamily="34" charset="-122"/>
-                <a:cs typeface="Yu Gothic" pitchFamily="34" charset="-120"/>
-              </a:rPr>
-              <a:t>問い</a:t>
-            </a:r>
-            <a:endParaRPr lang="en-US" sz="1500" dirty="0"/>
-          </a:p>
-        </p:txBody>
-      </p:sp>
-      <p:sp>
-        <p:nvSpPr>
-          <p:cNvPr id="19" name="Text 17"/>
-          <p:cNvSpPr/>
-          <p:nvPr/>
-        </p:nvSpPr>
-        <p:spPr>
-          <a:xfrm>
-            <a:off x="1097280" y="4590288"/>
-            <a:ext cx="10058400" cy="1097280"/>
-          </a:xfrm>
-          <a:prstGeom prst="rect">
-            <a:avLst/>
-          </a:prstGeom>
-          <a:noFill/>
-          <a:ln/>
-        </p:spPr>
-        <p:txBody>
-          <a:bodyPr wrap="square" lIns="0" tIns="0" rIns="0" bIns="0" rtlCol="0" anchor="ctr"/>
-          <a:lstStyle/>
-          <a:p>
-            <a:pPr indent="0" marL="0">
-              <a:lnSpc>
-                <a:spcPct val="130000"/>
-              </a:lnSpc>
-              <a:buNone/>
-            </a:pPr>
-            <a:r>
-              <a:rPr lang="en-US" sz="2400" b="1" dirty="0">
-                <a:solidFill>
-                  <a:srgbClr val="FFFFFF"/>
-                </a:solidFill>
-                <a:latin typeface="Yu Gothic" pitchFamily="34" charset="0"/>
-                <a:ea typeface="Yu Gothic" pitchFamily="34" charset="-122"/>
-                <a:cs typeface="Yu Gothic" pitchFamily="34" charset="-120"/>
-              </a:rPr>
-              <a:t>毎年同じ人を測っているのだから、</a:t>
-            </a:r>
-            <a:endParaRPr lang="en-US" sz="2400" dirty="0"/>
-          </a:p>
-          <a:p>
-            <a:pPr indent="0" marL="0">
-              <a:lnSpc>
-                <a:spcPct val="130000"/>
-              </a:lnSpc>
-              <a:buNone/>
-            </a:pPr>
-            <a:r>
-              <a:rPr lang="en-US" sz="2400" b="1" dirty="0">
-                <a:solidFill>
-                  <a:srgbClr val="FFFFFF"/>
-                </a:solidFill>
-                <a:latin typeface="Yu Gothic" pitchFamily="34" charset="0"/>
-                <a:ea typeface="Yu Gothic" pitchFamily="34" charset="-122"/>
-                <a:cs typeface="Yu Gothic" pitchFamily="34" charset="-120"/>
-              </a:rPr>
-              <a:t>「去年からどう変わったか」でリスクを見られないか。</a:t>
-            </a:r>
-            <a:endParaRPr lang="en-US" sz="2400" dirty="0"/>
           </a:p>
         </p:txBody>
       </p:sp>
@@ -6788,7 +7637,7 @@
                 <a:ea typeface="Yu Gothic" pitchFamily="34" charset="-122"/>
                 <a:cs typeface="Yu Gothic" pitchFamily="34" charset="-120"/>
               </a:rPr>
-              <a:t>事例：からだの「まるみ」の変化を見る</a:t>
+              <a:t>特定健診は、毎年とられている</a:t>
             </a:r>
             <a:endParaRPr lang="en-US" sz="3600" dirty="0"/>
           </a:p>
@@ -6796,57 +7645,18 @@
       </p:sp>
       <p:sp>
         <p:nvSpPr>
-          <p:cNvPr id="3" name="Text 1"/>
-          <p:cNvSpPr/>
-          <p:nvPr/>
-        </p:nvSpPr>
-        <p:spPr>
-          <a:xfrm>
-            <a:off x="731520" y="1225296"/>
-            <a:ext cx="10698480" cy="411480"/>
-          </a:xfrm>
-          <a:prstGeom prst="rect">
-            <a:avLst/>
-          </a:prstGeom>
-          <a:noFill/>
-          <a:ln/>
-        </p:spPr>
-        <p:txBody>
-          <a:bodyPr wrap="square" lIns="0" tIns="0" rIns="0" bIns="0" rtlCol="0" anchor="ctr"/>
-          <a:lstStyle/>
-          <a:p>
-            <a:pPr indent="0" marL="0">
-              <a:buNone/>
-            </a:pPr>
-            <a:r>
-              <a:rPr lang="en-US" sz="1600" dirty="0">
-                <a:solidFill>
-                  <a:srgbClr val="5C6B68"/>
-                </a:solidFill>
-                <a:latin typeface="Yu Gothic" pitchFamily="34" charset="0"/>
-                <a:ea typeface="Yu Gothic" pitchFamily="34" charset="-122"/>
-                <a:cs typeface="Yu Gothic" pitchFamily="34" charset="-120"/>
-              </a:rPr>
-              <a:t>腹囲と身長だけで計算できる指標 BRI（Body Roundness Index）</a:t>
-            </a:r>
-            <a:endParaRPr lang="en-US" sz="1600" dirty="0"/>
-          </a:p>
-        </p:txBody>
-      </p:sp>
-      <p:sp>
-        <p:nvSpPr>
-          <p:cNvPr id="4" name="Shape 2"/>
-          <p:cNvSpPr/>
-          <p:nvPr/>
-        </p:nvSpPr>
-        <p:spPr>
-          <a:xfrm>
-            <a:off x="731520" y="1920240"/>
-            <a:ext cx="3429000" cy="1783080"/>
+          <p:cNvPr id="3" name="Shape 1"/>
+          <p:cNvSpPr/>
+          <p:nvPr/>
+        </p:nvSpPr>
+        <p:spPr>
+          <a:xfrm>
+            <a:off x="731520" y="1965960"/>
+            <a:ext cx="2103120" cy="1554480"/>
           </a:xfrm>
           <a:prstGeom prst="roundRect">
             <a:avLst>
-              <a:gd name="adj" fmla="val 4103"/>
+              <a:gd name="adj" fmla="val 4706"/>
             </a:avLst>
           </a:prstGeom>
           <a:solidFill>
@@ -6862,72 +7672,69 @@
       </p:sp>
       <p:sp>
         <p:nvSpPr>
+          <p:cNvPr id="4" name="Text 2"/>
+          <p:cNvSpPr/>
+          <p:nvPr/>
+        </p:nvSpPr>
+        <p:spPr>
+          <a:xfrm>
+            <a:off x="777240" y="2194560"/>
+            <a:ext cx="2011680" cy="365760"/>
+          </a:xfrm>
+          <a:prstGeom prst="rect">
+            <a:avLst/>
+          </a:prstGeom>
+          <a:noFill/>
+          <a:ln/>
+        </p:spPr>
+        <p:txBody>
+          <a:bodyPr wrap="square" lIns="0" tIns="0" rIns="0" bIns="0" rtlCol="0" anchor="ctr"/>
+          <a:lstStyle/>
+          <a:p>
+            <a:pPr algn="ctr" indent="0" marL="0">
+              <a:buNone/>
+            </a:pPr>
+            <a:r>
+              <a:rPr lang="en-US" sz="1700" b="1" dirty="0">
+                <a:solidFill>
+                  <a:srgbClr val="14504B"/>
+                </a:solidFill>
+                <a:latin typeface="Yu Gothic" pitchFamily="34" charset="0"/>
+                <a:ea typeface="Yu Gothic" pitchFamily="34" charset="-122"/>
+                <a:cs typeface="Yu Gothic" pitchFamily="34" charset="-120"/>
+              </a:rPr>
+              <a:t>受ける</a:t>
+            </a:r>
+            <a:endParaRPr lang="en-US" sz="1700" dirty="0"/>
+          </a:p>
+        </p:txBody>
+      </p:sp>
+      <p:sp>
+        <p:nvSpPr>
           <p:cNvPr id="5" name="Text 3"/>
           <p:cNvSpPr/>
           <p:nvPr/>
         </p:nvSpPr>
         <p:spPr>
           <a:xfrm>
-            <a:off x="987552" y="2103120"/>
-            <a:ext cx="2926080" cy="384048"/>
-          </a:xfrm>
-          <a:prstGeom prst="rect">
-            <a:avLst/>
-          </a:prstGeom>
-          <a:noFill/>
-          <a:ln/>
-        </p:spPr>
-        <p:txBody>
-          <a:bodyPr wrap="square" lIns="0" tIns="0" rIns="0" bIns="0" rtlCol="0" anchor="ctr"/>
-          <a:lstStyle/>
-          <a:p>
-            <a:pPr indent="0" marL="0">
-              <a:buNone/>
-            </a:pPr>
-            <a:r>
-              <a:rPr lang="en-US" sz="1700" b="1" dirty="0">
-                <a:solidFill>
-                  <a:srgbClr val="14504B"/>
-                </a:solidFill>
-                <a:latin typeface="Yu Gothic" pitchFamily="34" charset="0"/>
-                <a:ea typeface="Yu Gothic" pitchFamily="34" charset="-122"/>
-                <a:cs typeface="Yu Gothic" pitchFamily="34" charset="-120"/>
-              </a:rPr>
-              <a:t>見たもの</a:t>
-            </a:r>
-            <a:endParaRPr lang="en-US" sz="1700" dirty="0"/>
-          </a:p>
-        </p:txBody>
-      </p:sp>
-      <p:sp>
-        <p:nvSpPr>
-          <p:cNvPr id="6" name="Text 4"/>
-          <p:cNvSpPr/>
-          <p:nvPr/>
-        </p:nvSpPr>
-        <p:spPr>
-          <a:xfrm>
-            <a:off x="987552" y="2578608"/>
-            <a:ext cx="2971800" cy="868680"/>
-          </a:xfrm>
-          <a:prstGeom prst="rect">
-            <a:avLst/>
-          </a:prstGeom>
-          <a:noFill/>
-          <a:ln/>
-        </p:spPr>
-        <p:txBody>
-          <a:bodyPr wrap="square" lIns="0" tIns="0" rIns="0" bIns="0" rtlCol="0" anchor="ctr"/>
-          <a:lstStyle/>
-          <a:p>
-            <a:pPr indent="0" marL="0">
-              <a:lnSpc>
-                <a:spcPct val="120000"/>
-              </a:lnSpc>
-              <a:buNone/>
-            </a:pPr>
-            <a:r>
-              <a:rPr lang="en-US" sz="1400" dirty="0">
+            <a:off x="777240" y="2651760"/>
+            <a:ext cx="2011680" cy="640080"/>
+          </a:xfrm>
+          <a:prstGeom prst="rect">
+            <a:avLst/>
+          </a:prstGeom>
+          <a:noFill/>
+          <a:ln/>
+        </p:spPr>
+        <p:txBody>
+          <a:bodyPr wrap="square" lIns="0" tIns="0" rIns="0" bIns="0" rtlCol="0" anchor="ctr"/>
+          <a:lstStyle/>
+          <a:p>
+            <a:pPr algn="ctr" indent="0" marL="0">
+              <a:buNone/>
+            </a:pPr>
+            <a:r>
+              <a:rPr lang="en-US" sz="1300" dirty="0">
                 <a:solidFill>
                   <a:srgbClr val="5C6B68"/>
                 </a:solidFill>
@@ -6935,31 +7742,36 @@
                 <a:ea typeface="Yu Gothic" pitchFamily="34" charset="-122"/>
                 <a:cs typeface="Yu Gothic" pitchFamily="34" charset="-120"/>
               </a:rPr>
-              <a:t>延岡市の40歳以上</a:t>
-            </a:r>
-            <a:endParaRPr lang="en-US" sz="1400" dirty="0"/>
-          </a:p>
-          <a:p>
-            <a:pPr indent="0" marL="0">
-              <a:lnSpc>
-                <a:spcPct val="120000"/>
-              </a:lnSpc>
-              <a:buNone/>
-            </a:pPr>
-            <a:r>
-              <a:rPr lang="en-US" sz="1400" dirty="0">
-                <a:solidFill>
-                  <a:srgbClr val="5C6B68"/>
-                </a:solidFill>
-                <a:latin typeface="Yu Gothic" pitchFamily="34" charset="0"/>
-                <a:ea typeface="Yu Gothic" pitchFamily="34" charset="-122"/>
-                <a:cs typeface="Yu Gothic" pitchFamily="34" charset="-120"/>
-              </a:rPr>
-              <a:t>3,819名の2年分</a:t>
-            </a:r>
-            <a:endParaRPr lang="en-US" sz="1400" dirty="0"/>
-          </a:p>
-        </p:txBody>
+              <a:t>腹囲・血圧・血液検査</a:t>
+            </a:r>
+            <a:endParaRPr lang="en-US" sz="1300" dirty="0"/>
+          </a:p>
+        </p:txBody>
+      </p:sp>
+      <p:sp>
+        <p:nvSpPr>
+          <p:cNvPr id="6" name="Shape 4"/>
+          <p:cNvSpPr/>
+          <p:nvPr/>
+        </p:nvSpPr>
+        <p:spPr>
+          <a:xfrm>
+            <a:off x="2871216" y="2670048"/>
+            <a:ext cx="201168" cy="237744"/>
+          </a:xfrm>
+          <a:prstGeom prst="rightArrow">
+            <a:avLst/>
+          </a:prstGeom>
+          <a:solidFill>
+            <a:srgbClr val="A8CFC9"/>
+          </a:solidFill>
+          <a:ln w="12700">
+            <a:solidFill>
+              <a:srgbClr val="A8CFC9"/>
+            </a:solidFill>
+            <a:prstDash val="solid"/>
+          </a:ln>
+        </p:spPr>
       </p:sp>
       <p:sp>
         <p:nvSpPr>
@@ -6969,12 +7781,12 @@
         </p:nvSpPr>
         <p:spPr>
           <a:xfrm>
-            <a:off x="4434840" y="1920240"/>
-            <a:ext cx="3429000" cy="1783080"/>
+            <a:off x="3108960" y="1965960"/>
+            <a:ext cx="2103120" cy="1554480"/>
           </a:xfrm>
           <a:prstGeom prst="roundRect">
             <a:avLst>
-              <a:gd name="adj" fmla="val 4103"/>
+              <a:gd name="adj" fmla="val 4706"/>
             </a:avLst>
           </a:prstGeom>
           <a:solidFill>
@@ -6996,20 +7808,20 @@
         </p:nvSpPr>
         <p:spPr>
           <a:xfrm>
-            <a:off x="4690872" y="2103120"/>
-            <a:ext cx="2926080" cy="384048"/>
-          </a:xfrm>
-          <a:prstGeom prst="rect">
-            <a:avLst/>
-          </a:prstGeom>
-          <a:noFill/>
-          <a:ln/>
-        </p:spPr>
-        <p:txBody>
-          <a:bodyPr wrap="square" lIns="0" tIns="0" rIns="0" bIns="0" rtlCol="0" anchor="ctr"/>
-          <a:lstStyle/>
-          <a:p>
-            <a:pPr indent="0" marL="0">
+            <a:off x="3154680" y="2194560"/>
+            <a:ext cx="2011680" cy="365760"/>
+          </a:xfrm>
+          <a:prstGeom prst="rect">
+            <a:avLst/>
+          </a:prstGeom>
+          <a:noFill/>
+          <a:ln/>
+        </p:spPr>
+        <p:txBody>
+          <a:bodyPr wrap="square" lIns="0" tIns="0" rIns="0" bIns="0" rtlCol="0" anchor="ctr"/>
+          <a:lstStyle/>
+          <a:p>
+            <a:pPr algn="ctr" indent="0" marL="0">
               <a:buNone/>
             </a:pPr>
             <a:r>
@@ -7021,7 +7833,7 @@
                 <a:ea typeface="Yu Gothic" pitchFamily="34" charset="-122"/>
                 <a:cs typeface="Yu Gothic" pitchFamily="34" charset="-120"/>
               </a:rPr>
-              <a:t>調べたこと</a:t>
+              <a:t>結果を渡す</a:t>
             </a:r>
             <a:endParaRPr lang="en-US" sz="1700" dirty="0"/>
           </a:p>
@@ -7035,27 +7847,24 @@
         </p:nvSpPr>
         <p:spPr>
           <a:xfrm>
-            <a:off x="4690872" y="2578608"/>
-            <a:ext cx="2971800" cy="868680"/>
-          </a:xfrm>
-          <a:prstGeom prst="rect">
-            <a:avLst/>
-          </a:prstGeom>
-          <a:noFill/>
-          <a:ln/>
-        </p:spPr>
-        <p:txBody>
-          <a:bodyPr wrap="square" lIns="0" tIns="0" rIns="0" bIns="0" rtlCol="0" anchor="ctr"/>
-          <a:lstStyle/>
-          <a:p>
-            <a:pPr indent="0" marL="0">
-              <a:lnSpc>
-                <a:spcPct val="120000"/>
-              </a:lnSpc>
-              <a:buNone/>
-            </a:pPr>
-            <a:r>
-              <a:rPr lang="en-US" sz="1400" dirty="0">
+            <a:off x="3154680" y="2651760"/>
+            <a:ext cx="2011680" cy="640080"/>
+          </a:xfrm>
+          <a:prstGeom prst="rect">
+            <a:avLst/>
+          </a:prstGeom>
+          <a:noFill/>
+          <a:ln/>
+        </p:spPr>
+        <p:txBody>
+          <a:bodyPr wrap="square" lIns="0" tIns="0" rIns="0" bIns="0" rtlCol="0" anchor="ctr"/>
+          <a:lstStyle/>
+          <a:p>
+            <a:pPr algn="ctr" indent="0" marL="0">
+              <a:buNone/>
+            </a:pPr>
+            <a:r>
+              <a:rPr lang="en-US" sz="1300" dirty="0">
                 <a:solidFill>
                   <a:srgbClr val="5C6B68"/>
                 </a:solidFill>
@@ -7063,29 +7872,9 @@
                 <a:ea typeface="Yu Gothic" pitchFamily="34" charset="-122"/>
                 <a:cs typeface="Yu Gothic" pitchFamily="34" charset="-120"/>
               </a:rPr>
-              <a:t>1年間でBRIが</a:t>
-            </a:r>
-            <a:endParaRPr lang="en-US" sz="1400" dirty="0"/>
-          </a:p>
-          <a:p>
-            <a:pPr indent="0" marL="0">
-              <a:lnSpc>
-                <a:spcPct val="120000"/>
-              </a:lnSpc>
-              <a:buNone/>
-            </a:pPr>
-            <a:r>
-              <a:rPr lang="en-US" sz="1400" dirty="0">
-                <a:solidFill>
-                  <a:srgbClr val="5C6B68"/>
-                </a:solidFill>
-                <a:latin typeface="Yu Gothic" pitchFamily="34" charset="0"/>
-                <a:ea typeface="Yu Gothic" pitchFamily="34" charset="-122"/>
-                <a:cs typeface="Yu Gothic" pitchFamily="34" charset="-120"/>
-              </a:rPr>
-              <a:t>増えた／減った／横ばい</a:t>
-            </a:r>
-            <a:endParaRPr lang="en-US" sz="1400" dirty="0"/>
+              <a:t>基準値との比較</a:t>
+            </a:r>
+            <a:endParaRPr lang="en-US" sz="1300" dirty="0"/>
           </a:p>
         </p:txBody>
       </p:sp>
@@ -7097,12 +7886,270 @@
         </p:nvSpPr>
         <p:spPr>
           <a:xfrm>
-            <a:off x="8138160" y="1920240"/>
-            <a:ext cx="3429000" cy="1783080"/>
+            <a:off x="5248656" y="2670048"/>
+            <a:ext cx="201168" cy="237744"/>
+          </a:xfrm>
+          <a:prstGeom prst="rightArrow">
+            <a:avLst/>
+          </a:prstGeom>
+          <a:solidFill>
+            <a:srgbClr val="A8CFC9"/>
+          </a:solidFill>
+          <a:ln w="12700">
+            <a:solidFill>
+              <a:srgbClr val="A8CFC9"/>
+            </a:solidFill>
+            <a:prstDash val="solid"/>
+          </a:ln>
+        </p:spPr>
+      </p:sp>
+      <p:sp>
+        <p:nvSpPr>
+          <p:cNvPr id="11" name="Shape 9"/>
+          <p:cNvSpPr/>
+          <p:nvPr/>
+        </p:nvSpPr>
+        <p:spPr>
+          <a:xfrm>
+            <a:off x="5486400" y="1965960"/>
+            <a:ext cx="2103120" cy="1554480"/>
           </a:xfrm>
           <a:prstGeom prst="roundRect">
             <a:avLst>
-              <a:gd name="adj" fmla="val 4103"/>
+              <a:gd name="adj" fmla="val 4706"/>
+            </a:avLst>
+          </a:prstGeom>
+          <a:solidFill>
+            <a:srgbClr val="F1F6F5"/>
+          </a:solidFill>
+          <a:ln w="12700">
+            <a:solidFill>
+              <a:srgbClr val="F1F6F5"/>
+            </a:solidFill>
+            <a:prstDash val="solid"/>
+          </a:ln>
+        </p:spPr>
+      </p:sp>
+      <p:sp>
+        <p:nvSpPr>
+          <p:cNvPr id="12" name="Text 10"/>
+          <p:cNvSpPr/>
+          <p:nvPr/>
+        </p:nvSpPr>
+        <p:spPr>
+          <a:xfrm>
+            <a:off x="5532120" y="2194560"/>
+            <a:ext cx="2011680" cy="365760"/>
+          </a:xfrm>
+          <a:prstGeom prst="rect">
+            <a:avLst/>
+          </a:prstGeom>
+          <a:noFill/>
+          <a:ln/>
+        </p:spPr>
+        <p:txBody>
+          <a:bodyPr wrap="square" lIns="0" tIns="0" rIns="0" bIns="0" rtlCol="0" anchor="ctr"/>
+          <a:lstStyle/>
+          <a:p>
+            <a:pPr algn="ctr" indent="0" marL="0">
+              <a:buNone/>
+            </a:pPr>
+            <a:r>
+              <a:rPr lang="en-US" sz="1700" b="1" dirty="0">
+                <a:solidFill>
+                  <a:srgbClr val="14504B"/>
+                </a:solidFill>
+                <a:latin typeface="Yu Gothic" pitchFamily="34" charset="0"/>
+                <a:ea typeface="Yu Gothic" pitchFamily="34" charset="-122"/>
+                <a:cs typeface="Yu Gothic" pitchFamily="34" charset="-120"/>
+              </a:rPr>
+              <a:t>保健指導</a:t>
+            </a:r>
+            <a:endParaRPr lang="en-US" sz="1700" dirty="0"/>
+          </a:p>
+        </p:txBody>
+      </p:sp>
+      <p:sp>
+        <p:nvSpPr>
+          <p:cNvPr id="13" name="Text 11"/>
+          <p:cNvSpPr/>
+          <p:nvPr/>
+        </p:nvSpPr>
+        <p:spPr>
+          <a:xfrm>
+            <a:off x="5532120" y="2651760"/>
+            <a:ext cx="2011680" cy="640080"/>
+          </a:xfrm>
+          <a:prstGeom prst="rect">
+            <a:avLst/>
+          </a:prstGeom>
+          <a:noFill/>
+          <a:ln/>
+        </p:spPr>
+        <p:txBody>
+          <a:bodyPr wrap="square" lIns="0" tIns="0" rIns="0" bIns="0" rtlCol="0" anchor="ctr"/>
+          <a:lstStyle/>
+          <a:p>
+            <a:pPr algn="ctr" indent="0" marL="0">
+              <a:buNone/>
+            </a:pPr>
+            <a:r>
+              <a:rPr lang="en-US" sz="1300" dirty="0">
+                <a:solidFill>
+                  <a:srgbClr val="5C6B68"/>
+                </a:solidFill>
+                <a:latin typeface="Yu Gothic" pitchFamily="34" charset="0"/>
+                <a:ea typeface="Yu Gothic" pitchFamily="34" charset="-122"/>
+                <a:cs typeface="Yu Gothic" pitchFamily="34" charset="-120"/>
+              </a:rPr>
+              <a:t>該当者に案内</a:t>
+            </a:r>
+            <a:endParaRPr lang="en-US" sz="1300" dirty="0"/>
+          </a:p>
+        </p:txBody>
+      </p:sp>
+      <p:sp>
+        <p:nvSpPr>
+          <p:cNvPr id="14" name="Shape 12"/>
+          <p:cNvSpPr/>
+          <p:nvPr/>
+        </p:nvSpPr>
+        <p:spPr>
+          <a:xfrm>
+            <a:off x="7955280" y="1965960"/>
+            <a:ext cx="3474720" cy="1554480"/>
+          </a:xfrm>
+          <a:prstGeom prst="roundRect">
+            <a:avLst>
+              <a:gd name="adj" fmla="val 4706"/>
+            </a:avLst>
+          </a:prstGeom>
+          <a:solidFill>
+            <a:srgbClr val="F7F2EC"/>
+          </a:solidFill>
+          <a:ln w="12700">
+            <a:solidFill>
+              <a:srgbClr val="F7F2EC"/>
+            </a:solidFill>
+            <a:prstDash val="solid"/>
+          </a:ln>
+        </p:spPr>
+      </p:sp>
+      <p:sp>
+        <p:nvSpPr>
+          <p:cNvPr id="15" name="Text 13"/>
+          <p:cNvSpPr/>
+          <p:nvPr/>
+        </p:nvSpPr>
+        <p:spPr>
+          <a:xfrm>
+            <a:off x="8183880" y="2194560"/>
+            <a:ext cx="3017520" cy="365760"/>
+          </a:xfrm>
+          <a:prstGeom prst="rect">
+            <a:avLst/>
+          </a:prstGeom>
+          <a:noFill/>
+          <a:ln/>
+        </p:spPr>
+        <p:txBody>
+          <a:bodyPr wrap="square" lIns="0" tIns="0" rIns="0" bIns="0" rtlCol="0" anchor="ctr"/>
+          <a:lstStyle/>
+          <a:p>
+            <a:pPr indent="0" marL="0">
+              <a:buNone/>
+            </a:pPr>
+            <a:r>
+              <a:rPr lang="en-US" sz="1600" b="1" dirty="0">
+                <a:solidFill>
+                  <a:srgbClr val="8A6F52"/>
+                </a:solidFill>
+                <a:latin typeface="Yu Gothic" pitchFamily="34" charset="0"/>
+                <a:ea typeface="Yu Gothic" pitchFamily="34" charset="-122"/>
+                <a:cs typeface="Yu Gothic" pitchFamily="34" charset="-120"/>
+              </a:rPr>
+              <a:t>多くはここで終わる</a:t>
+            </a:r>
+            <a:endParaRPr lang="en-US" sz="1600" dirty="0"/>
+          </a:p>
+        </p:txBody>
+      </p:sp>
+      <p:sp>
+        <p:nvSpPr>
+          <p:cNvPr id="16" name="Text 14"/>
+          <p:cNvSpPr/>
+          <p:nvPr/>
+        </p:nvSpPr>
+        <p:spPr>
+          <a:xfrm>
+            <a:off x="8183880" y="2633472"/>
+            <a:ext cx="3108960" cy="685800"/>
+          </a:xfrm>
+          <a:prstGeom prst="rect">
+            <a:avLst/>
+          </a:prstGeom>
+          <a:noFill/>
+          <a:ln/>
+        </p:spPr>
+        <p:txBody>
+          <a:bodyPr wrap="square" lIns="0" tIns="0" rIns="0" bIns="0" rtlCol="0" anchor="ctr"/>
+          <a:lstStyle/>
+          <a:p>
+            <a:pPr indent="0" marL="0">
+              <a:lnSpc>
+                <a:spcPct val="115000"/>
+              </a:lnSpc>
+              <a:buNone/>
+            </a:pPr>
+            <a:r>
+              <a:rPr lang="en-US" sz="1300" dirty="0">
+                <a:solidFill>
+                  <a:srgbClr val="5A5044"/>
+                </a:solidFill>
+                <a:latin typeface="Yu Gothic" pitchFamily="34" charset="0"/>
+                <a:ea typeface="Yu Gothic" pitchFamily="34" charset="-122"/>
+                <a:cs typeface="Yu Gothic" pitchFamily="34" charset="-120"/>
+              </a:rPr>
+              <a:t>「今」の値は分かるが、</a:t>
+            </a:r>
+            <a:endParaRPr lang="en-US" sz="1300" dirty="0"/>
+          </a:p>
+          <a:p>
+            <a:pPr indent="0" marL="0">
+              <a:lnSpc>
+                <a:spcPct val="115000"/>
+              </a:lnSpc>
+              <a:buNone/>
+            </a:pPr>
+            <a:r>
+              <a:rPr lang="en-US" sz="1300" dirty="0">
+                <a:solidFill>
+                  <a:srgbClr val="5A5044"/>
+                </a:solidFill>
+                <a:latin typeface="Yu Gothic" pitchFamily="34" charset="0"/>
+                <a:ea typeface="Yu Gothic" pitchFamily="34" charset="-122"/>
+                <a:cs typeface="Yu Gothic" pitchFamily="34" charset="-120"/>
+              </a:rPr>
+              <a:t>変化は活かされにくい</a:t>
+            </a:r>
+            <a:endParaRPr lang="en-US" sz="1300" dirty="0"/>
+          </a:p>
+        </p:txBody>
+      </p:sp>
+      <p:sp>
+        <p:nvSpPr>
+          <p:cNvPr id="17" name="Shape 15"/>
+          <p:cNvSpPr/>
+          <p:nvPr/>
+        </p:nvSpPr>
+        <p:spPr>
+          <a:xfrm>
+            <a:off x="731520" y="3931920"/>
+            <a:ext cx="10698480" cy="2011680"/>
+          </a:xfrm>
+          <a:prstGeom prst="roundRect">
+            <a:avLst>
+              <a:gd name="adj" fmla="val 3636"/>
             </a:avLst>
           </a:prstGeom>
           <a:solidFill>
@@ -7118,30 +8165,30 @@
       </p:sp>
       <p:sp>
         <p:nvSpPr>
-          <p:cNvPr id="11" name="Text 9"/>
-          <p:cNvSpPr/>
-          <p:nvPr/>
-        </p:nvSpPr>
-        <p:spPr>
-          <a:xfrm>
-            <a:off x="8394192" y="2103120"/>
-            <a:ext cx="2926080" cy="384048"/>
-          </a:xfrm>
-          <a:prstGeom prst="rect">
-            <a:avLst/>
-          </a:prstGeom>
-          <a:noFill/>
-          <a:ln/>
-        </p:spPr>
-        <p:txBody>
-          <a:bodyPr wrap="square" lIns="0" tIns="0" rIns="0" bIns="0" rtlCol="0" anchor="ctr"/>
-          <a:lstStyle/>
-          <a:p>
-            <a:pPr indent="0" marL="0">
-              <a:buNone/>
-            </a:pPr>
-            <a:r>
-              <a:rPr lang="en-US" sz="1700" b="1" dirty="0">
+          <p:cNvPr id="18" name="Text 16"/>
+          <p:cNvSpPr/>
+          <p:nvPr/>
+        </p:nvSpPr>
+        <p:spPr>
+          <a:xfrm>
+            <a:off x="1097280" y="4160520"/>
+            <a:ext cx="1828800" cy="384048"/>
+          </a:xfrm>
+          <a:prstGeom prst="rect">
+            <a:avLst/>
+          </a:prstGeom>
+          <a:noFill/>
+          <a:ln/>
+        </p:spPr>
+        <p:txBody>
+          <a:bodyPr wrap="square" lIns="0" tIns="0" rIns="0" bIns="0" rtlCol="0" anchor="ctr"/>
+          <a:lstStyle/>
+          <a:p>
+            <a:pPr indent="0" marL="0">
+              <a:buNone/>
+            </a:pPr>
+            <a:r>
+              <a:rPr lang="en-US" sz="1500" b="1" dirty="0">
                 <a:solidFill>
                   <a:srgbClr val="D98A2B"/>
                 </a:solidFill>
@@ -7149,22 +8196,22 @@
                 <a:ea typeface="Yu Gothic" pitchFamily="34" charset="-122"/>
                 <a:cs typeface="Yu Gothic" pitchFamily="34" charset="-120"/>
               </a:rPr>
-              <a:t>分かったこと</a:t>
-            </a:r>
-            <a:endParaRPr lang="en-US" sz="1700" dirty="0"/>
-          </a:p>
-        </p:txBody>
-      </p:sp>
-      <p:sp>
-        <p:nvSpPr>
-          <p:cNvPr id="12" name="Text 10"/>
-          <p:cNvSpPr/>
-          <p:nvPr/>
-        </p:nvSpPr>
-        <p:spPr>
-          <a:xfrm>
-            <a:off x="8394192" y="2578608"/>
-            <a:ext cx="2971800" cy="868680"/>
+              <a:t>問い</a:t>
+            </a:r>
+            <a:endParaRPr lang="en-US" sz="1500" dirty="0"/>
+          </a:p>
+        </p:txBody>
+      </p:sp>
+      <p:sp>
+        <p:nvSpPr>
+          <p:cNvPr id="19" name="Text 17"/>
+          <p:cNvSpPr/>
+          <p:nvPr/>
+        </p:nvSpPr>
+        <p:spPr>
+          <a:xfrm>
+            <a:off x="1097280" y="4590288"/>
+            <a:ext cx="10058400" cy="1097280"/>
           </a:xfrm>
           <a:prstGeom prst="rect">
             <a:avLst/>
@@ -7178,12 +8225,12 @@
           <a:p>
             <a:pPr indent="0" marL="0">
               <a:lnSpc>
-                <a:spcPct val="120000"/>
+                <a:spcPct val="130000"/>
               </a:lnSpc>
               <a:buNone/>
             </a:pPr>
             <a:r>
-              <a:rPr lang="en-US" sz="1400" dirty="0">
+              <a:rPr lang="en-US" sz="2400" b="1" dirty="0">
                 <a:solidFill>
                   <a:srgbClr val="FFFFFF"/>
                 </a:solidFill>
@@ -7191,19 +8238,19 @@
                 <a:ea typeface="Yu Gothic" pitchFamily="34" charset="-122"/>
                 <a:cs typeface="Yu Gothic" pitchFamily="34" charset="-120"/>
               </a:rPr>
-              <a:t>増えた群で尿蛋白が</a:t>
-            </a:r>
-            <a:endParaRPr lang="en-US" sz="1400" dirty="0"/>
+              <a:t>毎年同じ人を測っているのだから、</a:t>
+            </a:r>
+            <a:endParaRPr lang="en-US" sz="2400" dirty="0"/>
           </a:p>
           <a:p>
             <a:pPr indent="0" marL="0">
               <a:lnSpc>
-                <a:spcPct val="120000"/>
+                <a:spcPct val="130000"/>
               </a:lnSpc>
               <a:buNone/>
             </a:pPr>
             <a:r>
-              <a:rPr lang="en-US" sz="1400" dirty="0">
+              <a:rPr lang="en-US" sz="2400" b="1" dirty="0">
                 <a:solidFill>
                   <a:srgbClr val="FFFFFF"/>
                 </a:solidFill>
@@ -7211,215 +8258,9 @@
                 <a:ea typeface="Yu Gothic" pitchFamily="34" charset="-122"/>
                 <a:cs typeface="Yu Gothic" pitchFamily="34" charset="-120"/>
               </a:rPr>
-              <a:t>新たに出やすかった</a:t>
-            </a:r>
-            <a:endParaRPr lang="en-US" sz="1400" dirty="0"/>
-          </a:p>
-        </p:txBody>
-      </p:sp>
-      <p:graphicFrame>
-        <p:nvGraphicFramePr>
-          <p:cNvPr id="13" name="Chart 0" descr=""/>
-          <p:cNvGraphicFramePr/>
-          <p:nvPr/>
-        </p:nvGraphicFramePr>
-        <p:xfrm>
-          <a:off x="731520" y="3886200"/>
-          <a:ext cx="6035040" cy="2286000"/>
-        </p:xfrm>
-        <a:graphic xmlns:a="http://schemas.openxmlformats.org/drawingml/2006/main">
-          <a:graphicData uri="http://schemas.openxmlformats.org/drawingml/2006/chart">
-            <c:chart xmlns:c="http://schemas.openxmlformats.org/drawingml/2006/chart" r:id="rId1"/>
-          </a:graphicData>
-        </a:graphic>
-      </p:graphicFrame>
-      <p:sp>
-        <p:nvSpPr>
-          <p:cNvPr id="14" name="Shape 11"/>
-          <p:cNvSpPr/>
-          <p:nvPr/>
-        </p:nvSpPr>
-        <p:spPr>
-          <a:xfrm>
-            <a:off x="7040880" y="3886200"/>
-            <a:ext cx="4389120" cy="2286000"/>
-          </a:xfrm>
-          <a:prstGeom prst="roundRect">
-            <a:avLst>
-              <a:gd name="adj" fmla="val 3200"/>
-            </a:avLst>
-          </a:prstGeom>
-          <a:solidFill>
-            <a:srgbClr val="F1F6F5"/>
-          </a:solidFill>
-          <a:ln w="12700">
-            <a:solidFill>
-              <a:srgbClr val="F1F6F5"/>
-            </a:solidFill>
-            <a:prstDash val="solid"/>
-          </a:ln>
-        </p:spPr>
-      </p:sp>
-      <p:sp>
-        <p:nvSpPr>
-          <p:cNvPr id="15" name="Text 12"/>
-          <p:cNvSpPr/>
-          <p:nvPr/>
-        </p:nvSpPr>
-        <p:spPr>
-          <a:xfrm>
-            <a:off x="7315200" y="4096512"/>
-            <a:ext cx="3931920" cy="365760"/>
-          </a:xfrm>
-          <a:prstGeom prst="rect">
-            <a:avLst/>
-          </a:prstGeom>
-          <a:noFill/>
-          <a:ln/>
-        </p:spPr>
-        <p:txBody>
-          <a:bodyPr wrap="square" lIns="0" tIns="0" rIns="0" bIns="0" rtlCol="0" anchor="ctr"/>
-          <a:lstStyle/>
-          <a:p>
-            <a:pPr indent="0" marL="0">
-              <a:buNone/>
-            </a:pPr>
-            <a:r>
-              <a:rPr lang="en-US" sz="1600" b="1" dirty="0">
-                <a:solidFill>
-                  <a:srgbClr val="14504B"/>
-                </a:solidFill>
-                <a:latin typeface="Yu Gothic" pitchFamily="34" charset="0"/>
-                <a:ea typeface="Yu Gothic" pitchFamily="34" charset="-122"/>
-                <a:cs typeface="Yu Gothic" pitchFamily="34" charset="-120"/>
-              </a:rPr>
-              <a:t>尿蛋白に注目する理由</a:t>
-            </a:r>
-            <a:endParaRPr lang="en-US" sz="1600" dirty="0"/>
-          </a:p>
-        </p:txBody>
-      </p:sp>
-      <p:sp>
-        <p:nvSpPr>
-          <p:cNvPr id="16" name="Text 13"/>
-          <p:cNvSpPr/>
-          <p:nvPr/>
-        </p:nvSpPr>
-        <p:spPr>
-          <a:xfrm>
-            <a:off x="7315200" y="4526280"/>
-            <a:ext cx="3931920" cy="731520"/>
-          </a:xfrm>
-          <a:prstGeom prst="rect">
-            <a:avLst/>
-          </a:prstGeom>
-          <a:noFill/>
-          <a:ln/>
-        </p:spPr>
-        <p:txBody>
-          <a:bodyPr wrap="square" lIns="0" tIns="0" rIns="0" bIns="0" rtlCol="0" anchor="ctr"/>
-          <a:lstStyle/>
-          <a:p>
-            <a:pPr indent="0" marL="0">
-              <a:lnSpc>
-                <a:spcPct val="125000"/>
-              </a:lnSpc>
-              <a:buNone/>
-            </a:pPr>
-            <a:r>
-              <a:rPr lang="en-US" sz="1400" dirty="0">
-                <a:solidFill>
-                  <a:srgbClr val="16211F"/>
-                </a:solidFill>
-                <a:latin typeface="Yu Gothic" pitchFamily="34" charset="0"/>
-                <a:ea typeface="Yu Gothic" pitchFamily="34" charset="-122"/>
-                <a:cs typeface="Yu Gothic" pitchFamily="34" charset="-120"/>
-              </a:rPr>
-              <a:t>腎機能の低下より先に出ることが</a:t>
-            </a:r>
-            <a:endParaRPr lang="en-US" sz="1400" dirty="0"/>
-          </a:p>
-          <a:p>
-            <a:pPr indent="0" marL="0">
-              <a:lnSpc>
-                <a:spcPct val="125000"/>
-              </a:lnSpc>
-              <a:buNone/>
-            </a:pPr>
-            <a:r>
-              <a:rPr lang="en-US" sz="1400" dirty="0">
-                <a:solidFill>
-                  <a:srgbClr val="16211F"/>
-                </a:solidFill>
-                <a:latin typeface="Yu Gothic" pitchFamily="34" charset="0"/>
-                <a:ea typeface="Yu Gothic" pitchFamily="34" charset="-122"/>
-                <a:cs typeface="Yu Gothic" pitchFamily="34" charset="-120"/>
-              </a:rPr>
-              <a:t>多く、早い段階で気づけます。</a:t>
-            </a:r>
-            <a:endParaRPr lang="en-US" sz="1400" dirty="0"/>
-          </a:p>
-        </p:txBody>
-      </p:sp>
-      <p:sp>
-        <p:nvSpPr>
-          <p:cNvPr id="17" name="Text 14"/>
-          <p:cNvSpPr/>
-          <p:nvPr/>
-        </p:nvSpPr>
-        <p:spPr>
-          <a:xfrm>
-            <a:off x="7315200" y="5349240"/>
-            <a:ext cx="3931920" cy="685800"/>
-          </a:xfrm>
-          <a:prstGeom prst="rect">
-            <a:avLst/>
-          </a:prstGeom>
-          <a:noFill/>
-          <a:ln/>
-        </p:spPr>
-        <p:txBody>
-          <a:bodyPr wrap="square" lIns="0" tIns="0" rIns="0" bIns="0" rtlCol="0" anchor="ctr"/>
-          <a:lstStyle/>
-          <a:p>
-            <a:pPr indent="0" marL="0">
-              <a:lnSpc>
-                <a:spcPct val="120000"/>
-              </a:lnSpc>
-              <a:buNone/>
-            </a:pPr>
-            <a:r>
-              <a:rPr lang="en-US" sz="1300" dirty="0">
-                <a:solidFill>
-                  <a:srgbClr val="5C6B68"/>
-                </a:solidFill>
-                <a:latin typeface="Yu Gothic" pitchFamily="34" charset="0"/>
-                <a:ea typeface="Yu Gothic" pitchFamily="34" charset="-122"/>
-                <a:cs typeface="Yu Gothic" pitchFamily="34" charset="-120"/>
-              </a:rPr>
-              <a:t>BRIが増えた群のリスク上昇は、</a:t>
-            </a:r>
-            <a:endParaRPr lang="en-US" sz="1300" dirty="0"/>
-          </a:p>
-          <a:p>
-            <a:pPr indent="0" marL="0">
-              <a:lnSpc>
-                <a:spcPct val="120000"/>
-              </a:lnSpc>
-              <a:buNone/>
-            </a:pPr>
-            <a:r>
-              <a:rPr lang="en-US" sz="1300" dirty="0">
-                <a:solidFill>
-                  <a:srgbClr val="5C6B68"/>
-                </a:solidFill>
-                <a:latin typeface="Yu Gothic" pitchFamily="34" charset="0"/>
-                <a:ea typeface="Yu Gothic" pitchFamily="34" charset="-122"/>
-                <a:cs typeface="Yu Gothic" pitchFamily="34" charset="-120"/>
-              </a:rPr>
-              <a:t>BMIの変化を調整しても残りました。</a:t>
-            </a:r>
-            <a:endParaRPr lang="en-US" sz="1300" dirty="0"/>
+              <a:t>「去年からどう変わったか」でリスクを見られないか。</a:t>
+            </a:r>
+            <a:endParaRPr lang="en-US" sz="2400" dirty="0"/>
           </a:p>
         </p:txBody>
       </p:sp>
@@ -7488,7 +8329,7 @@
                 <a:ea typeface="Yu Gothic" pitchFamily="34" charset="-122"/>
                 <a:cs typeface="Yu Gothic" pitchFamily="34" charset="-120"/>
               </a:rPr>
-              <a:t>どう現場で使えるか</a:t>
+              <a:t>事例：からだの「まるみ」の変化を見る</a:t>
             </a:r>
             <a:endParaRPr lang="en-US" sz="3600" dirty="0"/>
           </a:p>
@@ -7527,7 +8368,7 @@
                 <a:ea typeface="Yu Gothic" pitchFamily="34" charset="-122"/>
                 <a:cs typeface="Yu Gothic" pitchFamily="34" charset="-120"/>
               </a:rPr>
-              <a:t>研究を、健診の場での実践につなげる</a:t>
+              <a:t>腹囲と身長だけで計算できる指標 BRI（Body Roundness Index）</a:t>
             </a:r>
             <a:endParaRPr lang="en-US" sz="1600" dirty="0"/>
           </a:p>
@@ -7542,11 +8383,11 @@
         <p:spPr>
           <a:xfrm>
             <a:off x="731520" y="1920240"/>
-            <a:ext cx="3429000" cy="2743200"/>
+            <a:ext cx="3429000" cy="1783080"/>
           </a:xfrm>
           <a:prstGeom prst="roundRect">
             <a:avLst>
-              <a:gd name="adj" fmla="val 2667"/>
+              <a:gd name="adj" fmla="val 4103"/>
             </a:avLst>
           </a:prstGeom>
           <a:solidFill>
@@ -7562,28 +8403,42 @@
       </p:sp>
       <p:sp>
         <p:nvSpPr>
-          <p:cNvPr id="5" name="Shape 3"/>
-          <p:cNvSpPr/>
-          <p:nvPr/>
-        </p:nvSpPr>
-        <p:spPr>
-          <a:xfrm>
-            <a:off x="987552" y="2148840"/>
-            <a:ext cx="502920" cy="502920"/>
-          </a:xfrm>
-          <a:prstGeom prst="ellipse">
-            <a:avLst/>
-          </a:prstGeom>
-          <a:solidFill>
-            <a:srgbClr val="D98A2B"/>
-          </a:solidFill>
-          <a:ln w="12700">
-            <a:solidFill>
-              <a:srgbClr val="D98A2B"/>
-            </a:solidFill>
-            <a:prstDash val="solid"/>
-          </a:ln>
-        </p:spPr>
+          <p:cNvPr id="5" name="Text 3"/>
+          <p:cNvSpPr/>
+          <p:nvPr/>
+        </p:nvSpPr>
+        <p:spPr>
+          <a:xfrm>
+            <a:off x="987552" y="2103120"/>
+            <a:ext cx="2926080" cy="384048"/>
+          </a:xfrm>
+          <a:prstGeom prst="rect">
+            <a:avLst/>
+          </a:prstGeom>
+          <a:noFill/>
+          <a:ln/>
+        </p:spPr>
+        <p:txBody>
+          <a:bodyPr wrap="square" lIns="0" tIns="0" rIns="0" bIns="0" rtlCol="0" anchor="ctr"/>
+          <a:lstStyle/>
+          <a:p>
+            <a:pPr indent="0" marL="0">
+              <a:buNone/>
+            </a:pPr>
+            <a:r>
+              <a:rPr lang="en-US" sz="1700" b="1" dirty="0">
+                <a:solidFill>
+                  <a:srgbClr val="14504B"/>
+                </a:solidFill>
+                <a:latin typeface="Yu Gothic" pitchFamily="34" charset="0"/>
+                <a:ea typeface="Yu Gothic" pitchFamily="34" charset="-122"/>
+                <a:cs typeface="Yu Gothic" pitchFamily="34" charset="-120"/>
+              </a:rPr>
+              <a:t>見たもの</a:t>
+            </a:r>
+            <a:endParaRPr lang="en-US" sz="1700" dirty="0"/>
+          </a:p>
+        </p:txBody>
       </p:sp>
       <p:sp>
         <p:nvSpPr>
@@ -7593,86 +8448,8 @@
         </p:nvSpPr>
         <p:spPr>
           <a:xfrm>
-            <a:off x="987552" y="2148840"/>
-            <a:ext cx="502920" cy="502920"/>
-          </a:xfrm>
-          <a:prstGeom prst="rect">
-            <a:avLst/>
-          </a:prstGeom>
-          <a:noFill/>
-          <a:ln/>
-        </p:spPr>
-        <p:txBody>
-          <a:bodyPr wrap="square" lIns="0" tIns="0" rIns="0" bIns="0" rtlCol="0" anchor="ctr"/>
-          <a:lstStyle/>
-          <a:p>
-            <a:pPr algn="ctr" indent="0" marL="0">
-              <a:buNone/>
-            </a:pPr>
-            <a:r>
-              <a:rPr lang="en-US" sz="1700" b="1" dirty="0">
-                <a:solidFill>
-                  <a:srgbClr val="FFFFFF"/>
-                </a:solidFill>
-                <a:latin typeface="Yu Gothic" pitchFamily="34" charset="0"/>
-                <a:ea typeface="Yu Gothic" pitchFamily="34" charset="-122"/>
-                <a:cs typeface="Yu Gothic" pitchFamily="34" charset="-120"/>
-              </a:rPr>
-              <a:t>①</a:t>
-            </a:r>
-            <a:endParaRPr lang="en-US" sz="1700" dirty="0"/>
-          </a:p>
-        </p:txBody>
-      </p:sp>
-      <p:sp>
-        <p:nvSpPr>
-          <p:cNvPr id="7" name="Text 5"/>
-          <p:cNvSpPr/>
-          <p:nvPr/>
-        </p:nvSpPr>
-        <p:spPr>
-          <a:xfrm>
-            <a:off x="987552" y="2834640"/>
-            <a:ext cx="3017520" cy="411480"/>
-          </a:xfrm>
-          <a:prstGeom prst="rect">
-            <a:avLst/>
-          </a:prstGeom>
-          <a:noFill/>
-          <a:ln/>
-        </p:spPr>
-        <p:txBody>
-          <a:bodyPr wrap="square" lIns="0" tIns="0" rIns="0" bIns="0" rtlCol="0" anchor="ctr"/>
-          <a:lstStyle/>
-          <a:p>
-            <a:pPr indent="0" marL="0">
-              <a:buNone/>
-            </a:pPr>
-            <a:r>
-              <a:rPr lang="en-US" sz="1700" b="1" dirty="0">
-                <a:solidFill>
-                  <a:srgbClr val="14504B"/>
-                </a:solidFill>
-                <a:latin typeface="Yu Gothic" pitchFamily="34" charset="0"/>
-                <a:ea typeface="Yu Gothic" pitchFamily="34" charset="-122"/>
-                <a:cs typeface="Yu Gothic" pitchFamily="34" charset="-120"/>
-              </a:rPr>
-              <a:t>道具がいらない</a:t>
-            </a:r>
-            <a:endParaRPr lang="en-US" sz="1700" dirty="0"/>
-          </a:p>
-        </p:txBody>
-      </p:sp>
-      <p:sp>
-        <p:nvSpPr>
-          <p:cNvPr id="8" name="Text 6"/>
-          <p:cNvSpPr/>
-          <p:nvPr/>
-        </p:nvSpPr>
-        <p:spPr>
-          <a:xfrm>
-            <a:off x="987552" y="3346704"/>
-            <a:ext cx="3017520" cy="1188720"/>
+            <a:off x="987552" y="2578608"/>
+            <a:ext cx="2971800" cy="868680"/>
           </a:xfrm>
           <a:prstGeom prst="rect">
             <a:avLst/>
@@ -7686,7 +8463,7 @@
           <a:p>
             <a:pPr indent="0" marL="0">
               <a:lnSpc>
-                <a:spcPct val="130000"/>
+                <a:spcPct val="120000"/>
               </a:lnSpc>
               <a:buNone/>
             </a:pPr>
@@ -7699,14 +8476,14 @@
                 <a:ea typeface="Yu Gothic" pitchFamily="34" charset="-122"/>
                 <a:cs typeface="Yu Gothic" pitchFamily="34" charset="-120"/>
               </a:rPr>
-              <a:t>メジャーと身長計だけ。</a:t>
+              <a:t>延岡市の40歳以上</a:t>
             </a:r>
             <a:endParaRPr lang="en-US" sz="1400" dirty="0"/>
           </a:p>
           <a:p>
             <a:pPr indent="0" marL="0">
               <a:lnSpc>
-                <a:spcPct val="130000"/>
+                <a:spcPct val="120000"/>
               </a:lnSpc>
               <a:buNone/>
             </a:pPr>
@@ -7719,46 +8496,26 @@
                 <a:ea typeface="Yu Gothic" pitchFamily="34" charset="-122"/>
                 <a:cs typeface="Yu Gothic" pitchFamily="34" charset="-120"/>
               </a:rPr>
-              <a:t>特別な機器がなくても</a:t>
+              <a:t>3,819名の2年分</a:t>
             </a:r>
             <a:endParaRPr lang="en-US" sz="1400" dirty="0"/>
           </a:p>
-          <a:p>
-            <a:pPr indent="0" marL="0">
-              <a:lnSpc>
-                <a:spcPct val="130000"/>
-              </a:lnSpc>
-              <a:buNone/>
-            </a:pPr>
-            <a:r>
-              <a:rPr lang="en-US" sz="1400" dirty="0">
-                <a:solidFill>
-                  <a:srgbClr val="5C6B68"/>
-                </a:solidFill>
-                <a:latin typeface="Yu Gothic" pitchFamily="34" charset="0"/>
-                <a:ea typeface="Yu Gothic" pitchFamily="34" charset="-122"/>
-                <a:cs typeface="Yu Gothic" pitchFamily="34" charset="-120"/>
-              </a:rPr>
-              <a:t>どの会場でも計算できる</a:t>
-            </a:r>
-            <a:endParaRPr lang="en-US" sz="1400" dirty="0"/>
-          </a:p>
-        </p:txBody>
-      </p:sp>
-      <p:sp>
-        <p:nvSpPr>
-          <p:cNvPr id="9" name="Shape 7"/>
+        </p:txBody>
+      </p:sp>
+      <p:sp>
+        <p:nvSpPr>
+          <p:cNvPr id="7" name="Shape 5"/>
           <p:cNvSpPr/>
           <p:nvPr/>
         </p:nvSpPr>
         <p:spPr>
           <a:xfrm>
             <a:off x="4434840" y="1920240"/>
-            <a:ext cx="3429000" cy="2743200"/>
+            <a:ext cx="3429000" cy="1783080"/>
           </a:xfrm>
           <a:prstGeom prst="roundRect">
             <a:avLst>
-              <a:gd name="adj" fmla="val 2667"/>
+              <a:gd name="adj" fmla="val 4103"/>
             </a:avLst>
           </a:prstGeom>
           <a:solidFill>
@@ -7774,24 +8531,127 @@
       </p:sp>
       <p:sp>
         <p:nvSpPr>
+          <p:cNvPr id="8" name="Text 6"/>
+          <p:cNvSpPr/>
+          <p:nvPr/>
+        </p:nvSpPr>
+        <p:spPr>
+          <a:xfrm>
+            <a:off x="4690872" y="2103120"/>
+            <a:ext cx="2926080" cy="384048"/>
+          </a:xfrm>
+          <a:prstGeom prst="rect">
+            <a:avLst/>
+          </a:prstGeom>
+          <a:noFill/>
+          <a:ln/>
+        </p:spPr>
+        <p:txBody>
+          <a:bodyPr wrap="square" lIns="0" tIns="0" rIns="0" bIns="0" rtlCol="0" anchor="ctr"/>
+          <a:lstStyle/>
+          <a:p>
+            <a:pPr indent="0" marL="0">
+              <a:buNone/>
+            </a:pPr>
+            <a:r>
+              <a:rPr lang="en-US" sz="1700" b="1" dirty="0">
+                <a:solidFill>
+                  <a:srgbClr val="14504B"/>
+                </a:solidFill>
+                <a:latin typeface="Yu Gothic" pitchFamily="34" charset="0"/>
+                <a:ea typeface="Yu Gothic" pitchFamily="34" charset="-122"/>
+                <a:cs typeface="Yu Gothic" pitchFamily="34" charset="-120"/>
+              </a:rPr>
+              <a:t>調べたこと</a:t>
+            </a:r>
+            <a:endParaRPr lang="en-US" sz="1700" dirty="0"/>
+          </a:p>
+        </p:txBody>
+      </p:sp>
+      <p:sp>
+        <p:nvSpPr>
+          <p:cNvPr id="9" name="Text 7"/>
+          <p:cNvSpPr/>
+          <p:nvPr/>
+        </p:nvSpPr>
+        <p:spPr>
+          <a:xfrm>
+            <a:off x="4690872" y="2578608"/>
+            <a:ext cx="2971800" cy="868680"/>
+          </a:xfrm>
+          <a:prstGeom prst="rect">
+            <a:avLst/>
+          </a:prstGeom>
+          <a:noFill/>
+          <a:ln/>
+        </p:spPr>
+        <p:txBody>
+          <a:bodyPr wrap="square" lIns="0" tIns="0" rIns="0" bIns="0" rtlCol="0" anchor="ctr"/>
+          <a:lstStyle/>
+          <a:p>
+            <a:pPr indent="0" marL="0">
+              <a:lnSpc>
+                <a:spcPct val="120000"/>
+              </a:lnSpc>
+              <a:buNone/>
+            </a:pPr>
+            <a:r>
+              <a:rPr lang="en-US" sz="1400" dirty="0">
+                <a:solidFill>
+                  <a:srgbClr val="5C6B68"/>
+                </a:solidFill>
+                <a:latin typeface="Yu Gothic" pitchFamily="34" charset="0"/>
+                <a:ea typeface="Yu Gothic" pitchFamily="34" charset="-122"/>
+                <a:cs typeface="Yu Gothic" pitchFamily="34" charset="-120"/>
+              </a:rPr>
+              <a:t>1年間でBRIが</a:t>
+            </a:r>
+            <a:endParaRPr lang="en-US" sz="1400" dirty="0"/>
+          </a:p>
+          <a:p>
+            <a:pPr indent="0" marL="0">
+              <a:lnSpc>
+                <a:spcPct val="120000"/>
+              </a:lnSpc>
+              <a:buNone/>
+            </a:pPr>
+            <a:r>
+              <a:rPr lang="en-US" sz="1400" dirty="0">
+                <a:solidFill>
+                  <a:srgbClr val="5C6B68"/>
+                </a:solidFill>
+                <a:latin typeface="Yu Gothic" pitchFamily="34" charset="0"/>
+                <a:ea typeface="Yu Gothic" pitchFamily="34" charset="-122"/>
+                <a:cs typeface="Yu Gothic" pitchFamily="34" charset="-120"/>
+              </a:rPr>
+              <a:t>増えた／減った／横ばい</a:t>
+            </a:r>
+            <a:endParaRPr lang="en-US" sz="1400" dirty="0"/>
+          </a:p>
+        </p:txBody>
+      </p:sp>
+      <p:sp>
+        <p:nvSpPr>
           <p:cNvPr id="10" name="Shape 8"/>
           <p:cNvSpPr/>
           <p:nvPr/>
         </p:nvSpPr>
         <p:spPr>
           <a:xfrm>
-            <a:off x="4690872" y="2148840"/>
-            <a:ext cx="502920" cy="502920"/>
-          </a:xfrm>
-          <a:prstGeom prst="ellipse">
-            <a:avLst/>
+            <a:off x="8138160" y="1920240"/>
+            <a:ext cx="3429000" cy="1783080"/>
+          </a:xfrm>
+          <a:prstGeom prst="roundRect">
+            <a:avLst>
+              <a:gd name="adj" fmla="val 4103"/>
+            </a:avLst>
           </a:prstGeom>
           <a:solidFill>
-            <a:srgbClr val="D98A2B"/>
+            <a:srgbClr val="14504B"/>
           </a:solidFill>
           <a:ln w="12700">
             <a:solidFill>
-              <a:srgbClr val="D98A2B"/>
+              <a:srgbClr val="14504B"/>
             </a:solidFill>
             <a:prstDash val="solid"/>
           </a:ln>
@@ -7805,172 +8665,129 @@
         </p:nvSpPr>
         <p:spPr>
           <a:xfrm>
-            <a:off x="4690872" y="2148840"/>
-            <a:ext cx="502920" cy="502920"/>
-          </a:xfrm>
-          <a:prstGeom prst="rect">
-            <a:avLst/>
-          </a:prstGeom>
-          <a:noFill/>
-          <a:ln/>
-        </p:spPr>
-        <p:txBody>
-          <a:bodyPr wrap="square" lIns="0" tIns="0" rIns="0" bIns="0" rtlCol="0" anchor="ctr"/>
-          <a:lstStyle/>
-          <a:p>
-            <a:pPr algn="ctr" indent="0" marL="0">
+            <a:off x="8394192" y="2103120"/>
+            <a:ext cx="2926080" cy="384048"/>
+          </a:xfrm>
+          <a:prstGeom prst="rect">
+            <a:avLst/>
+          </a:prstGeom>
+          <a:noFill/>
+          <a:ln/>
+        </p:spPr>
+        <p:txBody>
+          <a:bodyPr wrap="square" lIns="0" tIns="0" rIns="0" bIns="0" rtlCol="0" anchor="ctr"/>
+          <a:lstStyle/>
+          <a:p>
+            <a:pPr indent="0" marL="0">
               <a:buNone/>
             </a:pPr>
             <a:r>
               <a:rPr lang="en-US" sz="1700" b="1" dirty="0">
                 <a:solidFill>
+                  <a:srgbClr val="D98A2B"/>
+                </a:solidFill>
+                <a:latin typeface="Yu Gothic" pitchFamily="34" charset="0"/>
+                <a:ea typeface="Yu Gothic" pitchFamily="34" charset="-122"/>
+                <a:cs typeface="Yu Gothic" pitchFamily="34" charset="-120"/>
+              </a:rPr>
+              <a:t>分かったこと</a:t>
+            </a:r>
+            <a:endParaRPr lang="en-US" sz="1700" dirty="0"/>
+          </a:p>
+        </p:txBody>
+      </p:sp>
+      <p:sp>
+        <p:nvSpPr>
+          <p:cNvPr id="12" name="Text 10"/>
+          <p:cNvSpPr/>
+          <p:nvPr/>
+        </p:nvSpPr>
+        <p:spPr>
+          <a:xfrm>
+            <a:off x="8394192" y="2578608"/>
+            <a:ext cx="2971800" cy="868680"/>
+          </a:xfrm>
+          <a:prstGeom prst="rect">
+            <a:avLst/>
+          </a:prstGeom>
+          <a:noFill/>
+          <a:ln/>
+        </p:spPr>
+        <p:txBody>
+          <a:bodyPr wrap="square" lIns="0" tIns="0" rIns="0" bIns="0" rtlCol="0" anchor="ctr"/>
+          <a:lstStyle/>
+          <a:p>
+            <a:pPr indent="0" marL="0">
+              <a:lnSpc>
+                <a:spcPct val="120000"/>
+              </a:lnSpc>
+              <a:buNone/>
+            </a:pPr>
+            <a:r>
+              <a:rPr lang="en-US" sz="1400" dirty="0">
+                <a:solidFill>
                   <a:srgbClr val="FFFFFF"/>
                 </a:solidFill>
                 <a:latin typeface="Yu Gothic" pitchFamily="34" charset="0"/>
                 <a:ea typeface="Yu Gothic" pitchFamily="34" charset="-122"/>
                 <a:cs typeface="Yu Gothic" pitchFamily="34" charset="-120"/>
               </a:rPr>
-              <a:t>②</a:t>
-            </a:r>
-            <a:endParaRPr lang="en-US" sz="1700" dirty="0"/>
-          </a:p>
-        </p:txBody>
-      </p:sp>
-      <p:sp>
-        <p:nvSpPr>
-          <p:cNvPr id="12" name="Text 10"/>
-          <p:cNvSpPr/>
-          <p:nvPr/>
-        </p:nvSpPr>
-        <p:spPr>
-          <a:xfrm>
-            <a:off x="4690872" y="2834640"/>
-            <a:ext cx="3017520" cy="411480"/>
-          </a:xfrm>
-          <a:prstGeom prst="rect">
-            <a:avLst/>
-          </a:prstGeom>
-          <a:noFill/>
-          <a:ln/>
-        </p:spPr>
-        <p:txBody>
-          <a:bodyPr wrap="square" lIns="0" tIns="0" rIns="0" bIns="0" rtlCol="0" anchor="ctr"/>
-          <a:lstStyle/>
-          <a:p>
-            <a:pPr indent="0" marL="0">
-              <a:buNone/>
-            </a:pPr>
-            <a:r>
-              <a:rPr lang="en-US" sz="1700" b="1" dirty="0">
-                <a:solidFill>
-                  <a:srgbClr val="14504B"/>
-                </a:solidFill>
-                <a:latin typeface="Yu Gothic" pitchFamily="34" charset="0"/>
-                <a:ea typeface="Yu Gothic" pitchFamily="34" charset="-122"/>
-                <a:cs typeface="Yu Gothic" pitchFamily="34" charset="-120"/>
-              </a:rPr>
-              <a:t>声のかけ方が変わる</a:t>
-            </a:r>
-            <a:endParaRPr lang="en-US" sz="1700" dirty="0"/>
-          </a:p>
-        </p:txBody>
-      </p:sp>
-      <p:sp>
-        <p:nvSpPr>
-          <p:cNvPr id="13" name="Text 11"/>
-          <p:cNvSpPr/>
-          <p:nvPr/>
-        </p:nvSpPr>
-        <p:spPr>
-          <a:xfrm>
-            <a:off x="4690872" y="3346704"/>
-            <a:ext cx="3017520" cy="1188720"/>
-          </a:xfrm>
-          <a:prstGeom prst="rect">
-            <a:avLst/>
-          </a:prstGeom>
-          <a:noFill/>
-          <a:ln/>
-        </p:spPr>
-        <p:txBody>
-          <a:bodyPr wrap="square" lIns="0" tIns="0" rIns="0" bIns="0" rtlCol="0" anchor="ctr"/>
-          <a:lstStyle/>
+              <a:t>増えた群で尿蛋白が</a:t>
+            </a:r>
+            <a:endParaRPr lang="en-US" sz="1400" dirty="0"/>
+          </a:p>
           <a:p>
             <a:pPr indent="0" marL="0">
               <a:lnSpc>
-                <a:spcPct val="130000"/>
+                <a:spcPct val="120000"/>
               </a:lnSpc>
               <a:buNone/>
             </a:pPr>
             <a:r>
               <a:rPr lang="en-US" sz="1400" dirty="0">
                 <a:solidFill>
-                  <a:srgbClr val="5C6B68"/>
-                </a:solidFill>
-                <a:latin typeface="Yu Gothic" pitchFamily="34" charset="0"/>
-                <a:ea typeface="Yu Gothic" pitchFamily="34" charset="-122"/>
-                <a:cs typeface="Yu Gothic" pitchFamily="34" charset="-120"/>
-              </a:rPr>
-              <a:t>「太っています」ではなく</a:t>
+                  <a:srgbClr val="FFFFFF"/>
+                </a:solidFill>
+                <a:latin typeface="Yu Gothic" pitchFamily="34" charset="0"/>
+                <a:ea typeface="Yu Gothic" pitchFamily="34" charset="-122"/>
+                <a:cs typeface="Yu Gothic" pitchFamily="34" charset="-120"/>
+              </a:rPr>
+              <a:t>新たに出やすかった</a:t>
             </a:r>
             <a:endParaRPr lang="en-US" sz="1400" dirty="0"/>
           </a:p>
-          <a:p>
-            <a:pPr indent="0" marL="0">
-              <a:lnSpc>
-                <a:spcPct val="130000"/>
-              </a:lnSpc>
-              <a:buNone/>
-            </a:pPr>
-            <a:r>
-              <a:rPr lang="en-US" sz="1400" dirty="0">
-                <a:solidFill>
-                  <a:srgbClr val="5C6B68"/>
-                </a:solidFill>
-                <a:latin typeface="Yu Gothic" pitchFamily="34" charset="0"/>
-                <a:ea typeface="Yu Gothic" pitchFamily="34" charset="-122"/>
-                <a:cs typeface="Yu Gothic" pitchFamily="34" charset="-120"/>
-              </a:rPr>
-              <a:t>「去年より増えています」。</a:t>
-            </a:r>
-            <a:endParaRPr lang="en-US" sz="1400" dirty="0"/>
-          </a:p>
-          <a:p>
-            <a:pPr indent="0" marL="0">
-              <a:lnSpc>
-                <a:spcPct val="130000"/>
-              </a:lnSpc>
-              <a:buNone/>
-            </a:pPr>
-            <a:r>
-              <a:rPr lang="en-US" sz="1400" dirty="0">
-                <a:solidFill>
-                  <a:srgbClr val="5C6B68"/>
-                </a:solidFill>
-                <a:latin typeface="Yu Gothic" pitchFamily="34" charset="0"/>
-                <a:ea typeface="Yu Gothic" pitchFamily="34" charset="-122"/>
-                <a:cs typeface="Yu Gothic" pitchFamily="34" charset="-120"/>
-              </a:rPr>
-              <a:t>本人も実感しやすい</a:t>
-            </a:r>
-            <a:endParaRPr lang="en-US" sz="1400" dirty="0"/>
-          </a:p>
-        </p:txBody>
-      </p:sp>
-      <p:sp>
-        <p:nvSpPr>
-          <p:cNvPr id="14" name="Shape 12"/>
-          <p:cNvSpPr/>
-          <p:nvPr/>
-        </p:nvSpPr>
-        <p:spPr>
-          <a:xfrm>
-            <a:off x="8138160" y="1920240"/>
-            <a:ext cx="3429000" cy="2743200"/>
+        </p:txBody>
+      </p:sp>
+      <p:graphicFrame>
+        <p:nvGraphicFramePr>
+          <p:cNvPr id="13" name="Chart 0" descr=""/>
+          <p:cNvGraphicFramePr/>
+          <p:nvPr/>
+        </p:nvGraphicFramePr>
+        <p:xfrm>
+          <a:off x="731520" y="3886200"/>
+          <a:ext cx="6035040" cy="2286000"/>
+        </p:xfrm>
+        <a:graphic xmlns:a="http://schemas.openxmlformats.org/drawingml/2006/main">
+          <a:graphicData uri="http://schemas.openxmlformats.org/drawingml/2006/chart">
+            <c:chart xmlns:c="http://schemas.openxmlformats.org/drawingml/2006/chart" r:id="rId1"/>
+          </a:graphicData>
+        </a:graphic>
+      </p:graphicFrame>
+      <p:sp>
+        <p:nvSpPr>
+          <p:cNvPr id="14" name="Shape 11"/>
+          <p:cNvSpPr/>
+          <p:nvPr/>
+        </p:nvSpPr>
+        <p:spPr>
+          <a:xfrm>
+            <a:off x="7040880" y="3886200"/>
+            <a:ext cx="4389120" cy="2286000"/>
           </a:xfrm>
           <a:prstGeom prst="roundRect">
             <a:avLst>
-              <a:gd name="adj" fmla="val 2667"/>
+              <a:gd name="adj" fmla="val 3200"/>
             </a:avLst>
           </a:prstGeom>
           <a:solidFill>
@@ -7986,94 +8803,30 @@
       </p:sp>
       <p:sp>
         <p:nvSpPr>
-          <p:cNvPr id="15" name="Shape 13"/>
-          <p:cNvSpPr/>
-          <p:nvPr/>
-        </p:nvSpPr>
-        <p:spPr>
-          <a:xfrm>
-            <a:off x="8394192" y="2148840"/>
-            <a:ext cx="502920" cy="502920"/>
-          </a:xfrm>
-          <a:prstGeom prst="ellipse">
-            <a:avLst/>
-          </a:prstGeom>
-          <a:solidFill>
-            <a:srgbClr val="D98A2B"/>
-          </a:solidFill>
-          <a:ln w="12700">
-            <a:solidFill>
-              <a:srgbClr val="D98A2B"/>
-            </a:solidFill>
-            <a:prstDash val="solid"/>
-          </a:ln>
-        </p:spPr>
-      </p:sp>
-      <p:sp>
-        <p:nvSpPr>
-          <p:cNvPr id="16" name="Text 14"/>
-          <p:cNvSpPr/>
-          <p:nvPr/>
-        </p:nvSpPr>
-        <p:spPr>
-          <a:xfrm>
-            <a:off x="8394192" y="2148840"/>
-            <a:ext cx="502920" cy="502920"/>
-          </a:xfrm>
-          <a:prstGeom prst="rect">
-            <a:avLst/>
-          </a:prstGeom>
-          <a:noFill/>
-          <a:ln/>
-        </p:spPr>
-        <p:txBody>
-          <a:bodyPr wrap="square" lIns="0" tIns="0" rIns="0" bIns="0" rtlCol="0" anchor="ctr"/>
-          <a:lstStyle/>
-          <a:p>
-            <a:pPr algn="ctr" indent="0" marL="0">
-              <a:buNone/>
-            </a:pPr>
-            <a:r>
-              <a:rPr lang="en-US" sz="1700" b="1" dirty="0">
-                <a:solidFill>
-                  <a:srgbClr val="FFFFFF"/>
-                </a:solidFill>
-                <a:latin typeface="Yu Gothic" pitchFamily="34" charset="0"/>
-                <a:ea typeface="Yu Gothic" pitchFamily="34" charset="-122"/>
-                <a:cs typeface="Yu Gothic" pitchFamily="34" charset="-120"/>
-              </a:rPr>
-              <a:t>③</a:t>
-            </a:r>
-            <a:endParaRPr lang="en-US" sz="1700" dirty="0"/>
-          </a:p>
-        </p:txBody>
-      </p:sp>
-      <p:sp>
-        <p:nvSpPr>
-          <p:cNvPr id="17" name="Text 15"/>
-          <p:cNvSpPr/>
-          <p:nvPr/>
-        </p:nvSpPr>
-        <p:spPr>
-          <a:xfrm>
-            <a:off x="8394192" y="2834640"/>
-            <a:ext cx="3017520" cy="411480"/>
-          </a:xfrm>
-          <a:prstGeom prst="rect">
-            <a:avLst/>
-          </a:prstGeom>
-          <a:noFill/>
-          <a:ln/>
-        </p:spPr>
-        <p:txBody>
-          <a:bodyPr wrap="square" lIns="0" tIns="0" rIns="0" bIns="0" rtlCol="0" anchor="ctr"/>
-          <a:lstStyle/>
-          <a:p>
-            <a:pPr indent="0" marL="0">
-              <a:buNone/>
-            </a:pPr>
-            <a:r>
-              <a:rPr lang="en-US" sz="1700" b="1" dirty="0">
+          <p:cNvPr id="15" name="Text 12"/>
+          <p:cNvSpPr/>
+          <p:nvPr/>
+        </p:nvSpPr>
+        <p:spPr>
+          <a:xfrm>
+            <a:off x="7315200" y="4096512"/>
+            <a:ext cx="3931920" cy="365760"/>
+          </a:xfrm>
+          <a:prstGeom prst="rect">
+            <a:avLst/>
+          </a:prstGeom>
+          <a:noFill/>
+          <a:ln/>
+        </p:spPr>
+        <p:txBody>
+          <a:bodyPr wrap="square" lIns="0" tIns="0" rIns="0" bIns="0" rtlCol="0" anchor="ctr"/>
+          <a:lstStyle/>
+          <a:p>
+            <a:pPr indent="0" marL="0">
+              <a:buNone/>
+            </a:pPr>
+            <a:r>
+              <a:rPr lang="en-US" sz="1600" b="1" dirty="0">
                 <a:solidFill>
                   <a:srgbClr val="14504B"/>
                 </a:solidFill>
@@ -8081,22 +8834,22 @@
                 <a:ea typeface="Yu Gothic" pitchFamily="34" charset="-122"/>
                 <a:cs typeface="Yu Gothic" pitchFamily="34" charset="-120"/>
               </a:rPr>
-              <a:t>優先順位がつけられる</a:t>
-            </a:r>
-            <a:endParaRPr lang="en-US" sz="1700" dirty="0"/>
-          </a:p>
-        </p:txBody>
-      </p:sp>
-      <p:sp>
-        <p:nvSpPr>
-          <p:cNvPr id="18" name="Text 16"/>
-          <p:cNvSpPr/>
-          <p:nvPr/>
-        </p:nvSpPr>
-        <p:spPr>
-          <a:xfrm>
-            <a:off x="8394192" y="3346704"/>
-            <a:ext cx="3017520" cy="1188720"/>
+              <a:t>尿蛋白に注目する理由</a:t>
+            </a:r>
+            <a:endParaRPr lang="en-US" sz="1600" dirty="0"/>
+          </a:p>
+        </p:txBody>
+      </p:sp>
+      <p:sp>
+        <p:nvSpPr>
+          <p:cNvPr id="16" name="Text 13"/>
+          <p:cNvSpPr/>
+          <p:nvPr/>
+        </p:nvSpPr>
+        <p:spPr>
+          <a:xfrm>
+            <a:off x="7315200" y="4526280"/>
+            <a:ext cx="3931920" cy="731520"/>
           </a:xfrm>
           <a:prstGeom prst="rect">
             <a:avLst/>
@@ -8110,32 +8863,94 @@
           <a:p>
             <a:pPr indent="0" marL="0">
               <a:lnSpc>
-                <a:spcPct val="130000"/>
+                <a:spcPct val="125000"/>
               </a:lnSpc>
               <a:buNone/>
             </a:pPr>
             <a:r>
               <a:rPr lang="en-US" sz="1400" dirty="0">
                 <a:solidFill>
+                  <a:srgbClr val="16211F"/>
+                </a:solidFill>
+                <a:latin typeface="Yu Gothic" pitchFamily="34" charset="0"/>
+                <a:ea typeface="Yu Gothic" pitchFamily="34" charset="-122"/>
+                <a:cs typeface="Yu Gothic" pitchFamily="34" charset="-120"/>
+              </a:rPr>
+              <a:t>腎機能の低下より先に出ることが</a:t>
+            </a:r>
+            <a:endParaRPr lang="en-US" sz="1400" dirty="0"/>
+          </a:p>
+          <a:p>
+            <a:pPr indent="0" marL="0">
+              <a:lnSpc>
+                <a:spcPct val="125000"/>
+              </a:lnSpc>
+              <a:buNone/>
+            </a:pPr>
+            <a:r>
+              <a:rPr lang="en-US" sz="1400" dirty="0">
+                <a:solidFill>
+                  <a:srgbClr val="16211F"/>
+                </a:solidFill>
+                <a:latin typeface="Yu Gothic" pitchFamily="34" charset="0"/>
+                <a:ea typeface="Yu Gothic" pitchFamily="34" charset="-122"/>
+                <a:cs typeface="Yu Gothic" pitchFamily="34" charset="-120"/>
+              </a:rPr>
+              <a:t>多く、早い段階で気づけます。</a:t>
+            </a:r>
+            <a:endParaRPr lang="en-US" sz="1400" dirty="0"/>
+          </a:p>
+        </p:txBody>
+      </p:sp>
+      <p:sp>
+        <p:nvSpPr>
+          <p:cNvPr id="17" name="Text 14"/>
+          <p:cNvSpPr/>
+          <p:nvPr/>
+        </p:nvSpPr>
+        <p:spPr>
+          <a:xfrm>
+            <a:off x="7315200" y="5349240"/>
+            <a:ext cx="3931920" cy="685800"/>
+          </a:xfrm>
+          <a:prstGeom prst="rect">
+            <a:avLst/>
+          </a:prstGeom>
+          <a:noFill/>
+          <a:ln/>
+        </p:spPr>
+        <p:txBody>
+          <a:bodyPr wrap="square" lIns="0" tIns="0" rIns="0" bIns="0" rtlCol="0" anchor="ctr"/>
+          <a:lstStyle/>
+          <a:p>
+            <a:pPr indent="0" marL="0">
+              <a:lnSpc>
+                <a:spcPct val="120000"/>
+              </a:lnSpc>
+              <a:buNone/>
+            </a:pPr>
+            <a:r>
+              <a:rPr lang="en-US" sz="1300" dirty="0">
+                <a:solidFill>
                   <a:srgbClr val="5C6B68"/>
                 </a:solidFill>
                 <a:latin typeface="Yu Gothic" pitchFamily="34" charset="0"/>
                 <a:ea typeface="Yu Gothic" pitchFamily="34" charset="-122"/>
                 <a:cs typeface="Yu Gothic" pitchFamily="34" charset="-120"/>
               </a:rPr>
-              <a:t>限られた保健指導の枠を、</a:t>
-            </a:r>
-            <a:endParaRPr lang="en-US" sz="1400" dirty="0"/>
+              <a:t>BRIが増えた群のリスク上昇は、</a:t>
+            </a:r>
+            <a:endParaRPr lang="en-US" sz="1300" dirty="0"/>
           </a:p>
           <a:p>
             <a:pPr indent="0" marL="0">
               <a:lnSpc>
-                <a:spcPct val="130000"/>
+                <a:spcPct val="120000"/>
               </a:lnSpc>
               <a:buNone/>
             </a:pPr>
             <a:r>
-              <a:rPr lang="en-US" sz="1400" dirty="0">
+              <a:rPr lang="en-US" sz="1300" dirty="0">
                 <a:solidFill>
                   <a:srgbClr val="5C6B68"/>
                 </a:solidFill>
@@ -8143,95 +8958,9 @@
                 <a:ea typeface="Yu Gothic" pitchFamily="34" charset="-122"/>
                 <a:cs typeface="Yu Gothic" pitchFamily="34" charset="-120"/>
               </a:rPr>
-              <a:t>リスクが上がった人に</a:t>
-            </a:r>
-            <a:endParaRPr lang="en-US" sz="1400" dirty="0"/>
-          </a:p>
-          <a:p>
-            <a:pPr indent="0" marL="0">
-              <a:lnSpc>
-                <a:spcPct val="130000"/>
-              </a:lnSpc>
-              <a:buNone/>
-            </a:pPr>
-            <a:r>
-              <a:rPr lang="en-US" sz="1400" dirty="0">
-                <a:solidFill>
-                  <a:srgbClr val="5C6B68"/>
-                </a:solidFill>
-                <a:latin typeface="Yu Gothic" pitchFamily="34" charset="0"/>
-                <a:ea typeface="Yu Gothic" pitchFamily="34" charset="-122"/>
-                <a:cs typeface="Yu Gothic" pitchFamily="34" charset="-120"/>
-              </a:rPr>
-              <a:t>優先して充てられる</a:t>
-            </a:r>
-            <a:endParaRPr lang="en-US" sz="1400" dirty="0"/>
-          </a:p>
-        </p:txBody>
-      </p:sp>
-      <p:sp>
-        <p:nvSpPr>
-          <p:cNvPr id="19" name="Shape 17"/>
-          <p:cNvSpPr/>
-          <p:nvPr/>
-        </p:nvSpPr>
-        <p:spPr>
-          <a:xfrm>
-            <a:off x="731520" y="4983480"/>
-            <a:ext cx="10698480" cy="1188720"/>
-          </a:xfrm>
-          <a:prstGeom prst="roundRect">
-            <a:avLst>
-              <a:gd name="adj" fmla="val 6154"/>
-            </a:avLst>
-          </a:prstGeom>
-          <a:solidFill>
-            <a:srgbClr val="14504B"/>
-          </a:solidFill>
-          <a:ln w="12700">
-            <a:solidFill>
-              <a:srgbClr val="14504B"/>
-            </a:solidFill>
-            <a:prstDash val="solid"/>
-          </a:ln>
-        </p:spPr>
-      </p:sp>
-      <p:sp>
-        <p:nvSpPr>
-          <p:cNvPr id="20" name="Text 18"/>
-          <p:cNvSpPr/>
-          <p:nvPr/>
-        </p:nvSpPr>
-        <p:spPr>
-          <a:xfrm>
-            <a:off x="1097280" y="5257800"/>
-            <a:ext cx="10058400" cy="502920"/>
-          </a:xfrm>
-          <a:prstGeom prst="rect">
-            <a:avLst/>
-          </a:prstGeom>
-          <a:noFill/>
-          <a:ln/>
-        </p:spPr>
-        <p:txBody>
-          <a:bodyPr wrap="square" lIns="0" tIns="0" rIns="0" bIns="0" rtlCol="0" anchor="ctr"/>
-          <a:lstStyle/>
-          <a:p>
-            <a:pPr indent="0" marL="0">
-              <a:buNone/>
-            </a:pPr>
-            <a:r>
-              <a:rPr lang="en-US" sz="2200" b="1" dirty="0">
-                <a:solidFill>
-                  <a:srgbClr val="FFFFFF"/>
-                </a:solidFill>
-                <a:latin typeface="Yu Gothic" pitchFamily="34" charset="0"/>
-                <a:ea typeface="Yu Gothic" pitchFamily="34" charset="-122"/>
-                <a:cs typeface="Yu Gothic" pitchFamily="34" charset="-120"/>
-              </a:rPr>
-              <a:t>研究の目的は、論文を書くことではなく、明日の声かけを変えること</a:t>
-            </a:r>
-            <a:endParaRPr lang="en-US" sz="2200" dirty="0"/>
+              <a:t>BMIの変化を調整しても残りました。</a:t>
+            </a:r>
+            <a:endParaRPr lang="en-US" sz="1300" dirty="0"/>
           </a:p>
         </p:txBody>
       </p:sp>
@@ -8300,7 +9029,7 @@
                 <a:ea typeface="Yu Gothic" pitchFamily="34" charset="-122"/>
                 <a:cs typeface="Yu Gothic" pitchFamily="34" charset="-120"/>
               </a:rPr>
-              <a:t>言えること、言えないこと</a:t>
+              <a:t>どう現場で使えるか</a:t>
             </a:r>
             <a:endParaRPr lang="en-US" sz="3600" dirty="0"/>
           </a:p>
@@ -8308,18 +9037,57 @@
       </p:sp>
       <p:sp>
         <p:nvSpPr>
-          <p:cNvPr id="3" name="Shape 1"/>
-          <p:cNvSpPr/>
-          <p:nvPr/>
-        </p:nvSpPr>
-        <p:spPr>
-          <a:xfrm>
-            <a:off x="731520" y="1965960"/>
-            <a:ext cx="5120640" cy="3200400"/>
+          <p:cNvPr id="3" name="Text 1"/>
+          <p:cNvSpPr/>
+          <p:nvPr/>
+        </p:nvSpPr>
+        <p:spPr>
+          <a:xfrm>
+            <a:off x="731520" y="1225296"/>
+            <a:ext cx="10698480" cy="411480"/>
+          </a:xfrm>
+          <a:prstGeom prst="rect">
+            <a:avLst/>
+          </a:prstGeom>
+          <a:noFill/>
+          <a:ln/>
+        </p:spPr>
+        <p:txBody>
+          <a:bodyPr wrap="square" lIns="0" tIns="0" rIns="0" bIns="0" rtlCol="0" anchor="ctr"/>
+          <a:lstStyle/>
+          <a:p>
+            <a:pPr indent="0" marL="0">
+              <a:buNone/>
+            </a:pPr>
+            <a:r>
+              <a:rPr lang="en-US" sz="1600" dirty="0">
+                <a:solidFill>
+                  <a:srgbClr val="5C6B68"/>
+                </a:solidFill>
+                <a:latin typeface="Yu Gothic" pitchFamily="34" charset="0"/>
+                <a:ea typeface="Yu Gothic" pitchFamily="34" charset="-122"/>
+                <a:cs typeface="Yu Gothic" pitchFamily="34" charset="-120"/>
+              </a:rPr>
+              <a:t>研究を、健診の場での実践につなげる</a:t>
+            </a:r>
+            <a:endParaRPr lang="en-US" sz="1600" dirty="0"/>
+          </a:p>
+        </p:txBody>
+      </p:sp>
+      <p:sp>
+        <p:nvSpPr>
+          <p:cNvPr id="4" name="Shape 2"/>
+          <p:cNvSpPr/>
+          <p:nvPr/>
+        </p:nvSpPr>
+        <p:spPr>
+          <a:xfrm>
+            <a:off x="731520" y="1920240"/>
+            <a:ext cx="3429000" cy="2743200"/>
           </a:xfrm>
           <a:prstGeom prst="roundRect">
             <a:avLst>
-              <a:gd name="adj" fmla="val 2286"/>
+              <a:gd name="adj" fmla="val 2667"/>
             </a:avLst>
           </a:prstGeom>
           <a:solidFill>
@@ -8335,189 +9103,24 @@
       </p:sp>
       <p:sp>
         <p:nvSpPr>
-          <p:cNvPr id="4" name="Text 2"/>
-          <p:cNvSpPr/>
-          <p:nvPr/>
-        </p:nvSpPr>
-        <p:spPr>
-          <a:xfrm>
-            <a:off x="1051560" y="2194560"/>
-            <a:ext cx="3657600" cy="411480"/>
-          </a:xfrm>
-          <a:prstGeom prst="rect">
-            <a:avLst/>
-          </a:prstGeom>
-          <a:noFill/>
-          <a:ln/>
-        </p:spPr>
-        <p:txBody>
-          <a:bodyPr wrap="square" lIns="0" tIns="0" rIns="0" bIns="0" rtlCol="0" anchor="ctr"/>
-          <a:lstStyle/>
-          <a:p>
-            <a:pPr indent="0" marL="0">
-              <a:buNone/>
-            </a:pPr>
-            <a:r>
-              <a:rPr lang="en-US" sz="1900" b="1" dirty="0">
-                <a:solidFill>
-                  <a:srgbClr val="14504B"/>
-                </a:solidFill>
-                <a:latin typeface="Yu Gothic" pitchFamily="34" charset="0"/>
-                <a:ea typeface="Yu Gothic" pitchFamily="34" charset="-122"/>
-                <a:cs typeface="Yu Gothic" pitchFamily="34" charset="-120"/>
-              </a:rPr>
-              <a:t>言えること</a:t>
-            </a:r>
-            <a:endParaRPr lang="en-US" sz="1900" dirty="0"/>
-          </a:p>
-        </p:txBody>
-      </p:sp>
-      <p:sp>
-        <p:nvSpPr>
-          <p:cNvPr id="5" name="Text 3"/>
-          <p:cNvSpPr/>
-          <p:nvPr/>
-        </p:nvSpPr>
-        <p:spPr>
-          <a:xfrm>
-            <a:off x="1051560" y="2834640"/>
-            <a:ext cx="4663440" cy="868680"/>
-          </a:xfrm>
-          <a:prstGeom prst="rect">
-            <a:avLst/>
-          </a:prstGeom>
-          <a:noFill/>
-          <a:ln/>
-        </p:spPr>
-        <p:txBody>
-          <a:bodyPr wrap="square" lIns="0" tIns="0" rIns="0" bIns="0" rtlCol="0" anchor="ctr"/>
-          <a:lstStyle/>
-          <a:p>
-            <a:pPr indent="0" marL="0">
-              <a:lnSpc>
-                <a:spcPct val="125000"/>
-              </a:lnSpc>
-              <a:buNone/>
-            </a:pPr>
-            <a:r>
-              <a:rPr lang="en-US" sz="1500" dirty="0">
-                <a:solidFill>
-                  <a:srgbClr val="16211F"/>
-                </a:solidFill>
-                <a:latin typeface="Yu Gothic" pitchFamily="34" charset="0"/>
-                <a:ea typeface="Yu Gothic" pitchFamily="34" charset="-122"/>
-                <a:cs typeface="Yu Gothic" pitchFamily="34" charset="-120"/>
-              </a:rPr>
-              <a:t>1年間でBRIが増えた人は、</a:t>
-            </a:r>
-            <a:endParaRPr lang="en-US" sz="1500" dirty="0"/>
-          </a:p>
-          <a:p>
-            <a:pPr indent="0" marL="0">
-              <a:lnSpc>
-                <a:spcPct val="125000"/>
-              </a:lnSpc>
-              <a:buNone/>
-            </a:pPr>
-            <a:r>
-              <a:rPr lang="en-US" sz="1500" dirty="0">
-                <a:solidFill>
-                  <a:srgbClr val="16211F"/>
-                </a:solidFill>
-                <a:latin typeface="Yu Gothic" pitchFamily="34" charset="0"/>
-                <a:ea typeface="Yu Gothic" pitchFamily="34" charset="-122"/>
-                <a:cs typeface="Yu Gothic" pitchFamily="34" charset="-120"/>
-              </a:rPr>
-              <a:t>尿蛋白が新たに出やすかった</a:t>
-            </a:r>
-            <a:endParaRPr lang="en-US" sz="1500" dirty="0"/>
-          </a:p>
-        </p:txBody>
-      </p:sp>
-      <p:sp>
-        <p:nvSpPr>
-          <p:cNvPr id="6" name="Text 4"/>
-          <p:cNvSpPr/>
-          <p:nvPr/>
-        </p:nvSpPr>
-        <p:spPr>
-          <a:xfrm>
-            <a:off x="1051560" y="3931920"/>
-            <a:ext cx="4663440" cy="868680"/>
-          </a:xfrm>
-          <a:prstGeom prst="rect">
-            <a:avLst/>
-          </a:prstGeom>
-          <a:noFill/>
-          <a:ln/>
-        </p:spPr>
-        <p:txBody>
-          <a:bodyPr wrap="square" lIns="0" tIns="0" rIns="0" bIns="0" rtlCol="0" anchor="ctr"/>
-          <a:lstStyle/>
-          <a:p>
-            <a:pPr indent="0" marL="0">
-              <a:lnSpc>
-                <a:spcPct val="125000"/>
-              </a:lnSpc>
-              <a:buNone/>
-            </a:pPr>
-            <a:r>
-              <a:rPr lang="en-US" sz="1500" dirty="0">
-                <a:solidFill>
-                  <a:srgbClr val="16211F"/>
-                </a:solidFill>
-                <a:latin typeface="Yu Gothic" pitchFamily="34" charset="0"/>
-                <a:ea typeface="Yu Gothic" pitchFamily="34" charset="-122"/>
-                <a:cs typeface="Yu Gothic" pitchFamily="34" charset="-120"/>
-              </a:rPr>
-              <a:t>体重やBMIの変化を</a:t>
-            </a:r>
-            <a:endParaRPr lang="en-US" sz="1500" dirty="0"/>
-          </a:p>
-          <a:p>
-            <a:pPr indent="0" marL="0">
-              <a:lnSpc>
-                <a:spcPct val="125000"/>
-              </a:lnSpc>
-              <a:buNone/>
-            </a:pPr>
-            <a:r>
-              <a:rPr lang="en-US" sz="1500" dirty="0">
-                <a:solidFill>
-                  <a:srgbClr val="16211F"/>
-                </a:solidFill>
-                <a:latin typeface="Yu Gothic" pitchFamily="34" charset="0"/>
-                <a:ea typeface="Yu Gothic" pitchFamily="34" charset="-122"/>
-                <a:cs typeface="Yu Gothic" pitchFamily="34" charset="-120"/>
-              </a:rPr>
-              <a:t>考慮しても傾向は残った</a:t>
-            </a:r>
-            <a:endParaRPr lang="en-US" sz="1500" dirty="0"/>
-          </a:p>
-        </p:txBody>
-      </p:sp>
-      <p:sp>
-        <p:nvSpPr>
-          <p:cNvPr id="7" name="Shape 5"/>
-          <p:cNvSpPr/>
-          <p:nvPr/>
-        </p:nvSpPr>
-        <p:spPr>
-          <a:xfrm>
-            <a:off x="6400800" y="1965960"/>
-            <a:ext cx="5029200" cy="3200400"/>
-          </a:xfrm>
-          <a:prstGeom prst="roundRect">
-            <a:avLst>
-              <a:gd name="adj" fmla="val 2286"/>
-            </a:avLst>
+          <p:cNvPr id="5" name="Shape 3"/>
+          <p:cNvSpPr/>
+          <p:nvPr/>
+        </p:nvSpPr>
+        <p:spPr>
+          <a:xfrm>
+            <a:off x="987552" y="2148840"/>
+            <a:ext cx="502920" cy="502920"/>
+          </a:xfrm>
+          <a:prstGeom prst="ellipse">
+            <a:avLst/>
           </a:prstGeom>
           <a:solidFill>
-            <a:srgbClr val="F7F2EC"/>
+            <a:srgbClr val="D98A2B"/>
           </a:solidFill>
           <a:ln w="12700">
             <a:solidFill>
-              <a:srgbClr val="F7F2EC"/>
+              <a:srgbClr val="D98A2B"/>
             </a:solidFill>
             <a:prstDash val="solid"/>
           </a:ln>
@@ -8525,53 +9128,92 @@
       </p:sp>
       <p:sp>
         <p:nvSpPr>
+          <p:cNvPr id="6" name="Text 4"/>
+          <p:cNvSpPr/>
+          <p:nvPr/>
+        </p:nvSpPr>
+        <p:spPr>
+          <a:xfrm>
+            <a:off x="987552" y="2148840"/>
+            <a:ext cx="502920" cy="502920"/>
+          </a:xfrm>
+          <a:prstGeom prst="rect">
+            <a:avLst/>
+          </a:prstGeom>
+          <a:noFill/>
+          <a:ln/>
+        </p:spPr>
+        <p:txBody>
+          <a:bodyPr wrap="square" lIns="0" tIns="0" rIns="0" bIns="0" rtlCol="0" anchor="ctr"/>
+          <a:lstStyle/>
+          <a:p>
+            <a:pPr algn="ctr" indent="0" marL="0">
+              <a:buNone/>
+            </a:pPr>
+            <a:r>
+              <a:rPr lang="en-US" sz="1700" b="1" dirty="0">
+                <a:solidFill>
+                  <a:srgbClr val="FFFFFF"/>
+                </a:solidFill>
+                <a:latin typeface="Yu Gothic" pitchFamily="34" charset="0"/>
+                <a:ea typeface="Yu Gothic" pitchFamily="34" charset="-122"/>
+                <a:cs typeface="Yu Gothic" pitchFamily="34" charset="-120"/>
+              </a:rPr>
+              <a:t>①</a:t>
+            </a:r>
+            <a:endParaRPr lang="en-US" sz="1700" dirty="0"/>
+          </a:p>
+        </p:txBody>
+      </p:sp>
+      <p:sp>
+        <p:nvSpPr>
+          <p:cNvPr id="7" name="Text 5"/>
+          <p:cNvSpPr/>
+          <p:nvPr/>
+        </p:nvSpPr>
+        <p:spPr>
+          <a:xfrm>
+            <a:off x="987552" y="2834640"/>
+            <a:ext cx="3017520" cy="411480"/>
+          </a:xfrm>
+          <a:prstGeom prst="rect">
+            <a:avLst/>
+          </a:prstGeom>
+          <a:noFill/>
+          <a:ln/>
+        </p:spPr>
+        <p:txBody>
+          <a:bodyPr wrap="square" lIns="0" tIns="0" rIns="0" bIns="0" rtlCol="0" anchor="ctr"/>
+          <a:lstStyle/>
+          <a:p>
+            <a:pPr indent="0" marL="0">
+              <a:buNone/>
+            </a:pPr>
+            <a:r>
+              <a:rPr lang="en-US" sz="1700" b="1" dirty="0">
+                <a:solidFill>
+                  <a:srgbClr val="14504B"/>
+                </a:solidFill>
+                <a:latin typeface="Yu Gothic" pitchFamily="34" charset="0"/>
+                <a:ea typeface="Yu Gothic" pitchFamily="34" charset="-122"/>
+                <a:cs typeface="Yu Gothic" pitchFamily="34" charset="-120"/>
+              </a:rPr>
+              <a:t>道具がいらない</a:t>
+            </a:r>
+            <a:endParaRPr lang="en-US" sz="1700" dirty="0"/>
+          </a:p>
+        </p:txBody>
+      </p:sp>
+      <p:sp>
+        <p:nvSpPr>
           <p:cNvPr id="8" name="Text 6"/>
           <p:cNvSpPr/>
           <p:nvPr/>
         </p:nvSpPr>
         <p:spPr>
           <a:xfrm>
-            <a:off x="6720840" y="2194560"/>
-            <a:ext cx="3657600" cy="411480"/>
-          </a:xfrm>
-          <a:prstGeom prst="rect">
-            <a:avLst/>
-          </a:prstGeom>
-          <a:noFill/>
-          <a:ln/>
-        </p:spPr>
-        <p:txBody>
-          <a:bodyPr wrap="square" lIns="0" tIns="0" rIns="0" bIns="0" rtlCol="0" anchor="ctr"/>
-          <a:lstStyle/>
-          <a:p>
-            <a:pPr indent="0" marL="0">
-              <a:buNone/>
-            </a:pPr>
-            <a:r>
-              <a:rPr lang="en-US" sz="1900" b="1" dirty="0">
-                <a:solidFill>
-                  <a:srgbClr val="8A6F52"/>
-                </a:solidFill>
-                <a:latin typeface="Yu Gothic" pitchFamily="34" charset="0"/>
-                <a:ea typeface="Yu Gothic" pitchFamily="34" charset="-122"/>
-                <a:cs typeface="Yu Gothic" pitchFamily="34" charset="-120"/>
-              </a:rPr>
-              <a:t>言えないこと</a:t>
-            </a:r>
-            <a:endParaRPr lang="en-US" sz="1900" dirty="0"/>
-          </a:p>
-        </p:txBody>
-      </p:sp>
-      <p:sp>
-        <p:nvSpPr>
-          <p:cNvPr id="9" name="Text 7"/>
-          <p:cNvSpPr/>
-          <p:nvPr/>
-        </p:nvSpPr>
-        <p:spPr>
-          <a:xfrm>
-            <a:off x="6720840" y="2788920"/>
-            <a:ext cx="4572000" cy="731520"/>
+            <a:off x="987552" y="3346704"/>
+            <a:ext cx="3017520" cy="1188720"/>
           </a:xfrm>
           <a:prstGeom prst="rect">
             <a:avLst/>
@@ -8585,164 +9227,272 @@
           <a:p>
             <a:pPr indent="0" marL="0">
               <a:lnSpc>
-                <a:spcPct val="120000"/>
+                <a:spcPct val="130000"/>
               </a:lnSpc>
               <a:buNone/>
             </a:pPr>
             <a:r>
               <a:rPr lang="en-US" sz="1400" dirty="0">
                 <a:solidFill>
-                  <a:srgbClr val="5A5044"/>
-                </a:solidFill>
-                <a:latin typeface="Yu Gothic" pitchFamily="34" charset="0"/>
-                <a:ea typeface="Yu Gothic" pitchFamily="34" charset="-122"/>
-                <a:cs typeface="Yu Gothic" pitchFamily="34" charset="-120"/>
-              </a:rPr>
-              <a:t>BRIを下げれば腎臓が守れる、</a:t>
+                  <a:srgbClr val="5C6B68"/>
+                </a:solidFill>
+                <a:latin typeface="Yu Gothic" pitchFamily="34" charset="0"/>
+                <a:ea typeface="Yu Gothic" pitchFamily="34" charset="-122"/>
+                <a:cs typeface="Yu Gothic" pitchFamily="34" charset="-120"/>
+              </a:rPr>
+              <a:t>メジャーと身長計だけ。</a:t>
             </a:r>
             <a:endParaRPr lang="en-US" sz="1400" dirty="0"/>
           </a:p>
           <a:p>
             <a:pPr indent="0" marL="0">
               <a:lnSpc>
-                <a:spcPct val="120000"/>
+                <a:spcPct val="130000"/>
               </a:lnSpc>
               <a:buNone/>
             </a:pPr>
             <a:r>
               <a:rPr lang="en-US" sz="1400" dirty="0">
                 <a:solidFill>
-                  <a:srgbClr val="5A5044"/>
-                </a:solidFill>
-                <a:latin typeface="Yu Gothic" pitchFamily="34" charset="0"/>
-                <a:ea typeface="Yu Gothic" pitchFamily="34" charset="-122"/>
-                <a:cs typeface="Yu Gothic" pitchFamily="34" charset="-120"/>
-              </a:rPr>
-              <a:t>という因果関係</a:t>
+                  <a:srgbClr val="5C6B68"/>
+                </a:solidFill>
+                <a:latin typeface="Yu Gothic" pitchFamily="34" charset="0"/>
+                <a:ea typeface="Yu Gothic" pitchFamily="34" charset="-122"/>
+                <a:cs typeface="Yu Gothic" pitchFamily="34" charset="-120"/>
+              </a:rPr>
+              <a:t>特別な機器がなくても</a:t>
             </a:r>
             <a:endParaRPr lang="en-US" sz="1400" dirty="0"/>
           </a:p>
-        </p:txBody>
-      </p:sp>
-      <p:sp>
-        <p:nvSpPr>
-          <p:cNvPr id="10" name="Text 8"/>
-          <p:cNvSpPr/>
-          <p:nvPr/>
-        </p:nvSpPr>
-        <p:spPr>
-          <a:xfrm>
-            <a:off x="6720840" y="3611880"/>
-            <a:ext cx="4572000" cy="731520"/>
-          </a:xfrm>
-          <a:prstGeom prst="rect">
-            <a:avLst/>
-          </a:prstGeom>
-          <a:noFill/>
-          <a:ln/>
-        </p:spPr>
-        <p:txBody>
-          <a:bodyPr wrap="square" lIns="0" tIns="0" rIns="0" bIns="0" rtlCol="0" anchor="ctr"/>
-          <a:lstStyle/>
           <a:p>
             <a:pPr indent="0" marL="0">
               <a:lnSpc>
-                <a:spcPct val="120000"/>
+                <a:spcPct val="130000"/>
               </a:lnSpc>
               <a:buNone/>
             </a:pPr>
             <a:r>
               <a:rPr lang="en-US" sz="1400" dirty="0">
                 <a:solidFill>
-                  <a:srgbClr val="5A5044"/>
-                </a:solidFill>
-                <a:latin typeface="Yu Gothic" pitchFamily="34" charset="0"/>
-                <a:ea typeface="Yu Gothic" pitchFamily="34" charset="-122"/>
-                <a:cs typeface="Yu Gothic" pitchFamily="34" charset="-120"/>
-              </a:rPr>
-              <a:t>1年の観察なので、一時的な</a:t>
+                  <a:srgbClr val="5C6B68"/>
+                </a:solidFill>
+                <a:latin typeface="Yu Gothic" pitchFamily="34" charset="0"/>
+                <a:ea typeface="Yu Gothic" pitchFamily="34" charset="-122"/>
+                <a:cs typeface="Yu Gothic" pitchFamily="34" charset="-120"/>
+              </a:rPr>
+              <a:t>どの会場でも計算できる</a:t>
             </a:r>
             <a:endParaRPr lang="en-US" sz="1400" dirty="0"/>
           </a:p>
+        </p:txBody>
+      </p:sp>
+      <p:sp>
+        <p:nvSpPr>
+          <p:cNvPr id="9" name="Shape 7"/>
+          <p:cNvSpPr/>
+          <p:nvPr/>
+        </p:nvSpPr>
+        <p:spPr>
+          <a:xfrm>
+            <a:off x="4434840" y="1920240"/>
+            <a:ext cx="3429000" cy="2743200"/>
+          </a:xfrm>
+          <a:prstGeom prst="roundRect">
+            <a:avLst>
+              <a:gd name="adj" fmla="val 2667"/>
+            </a:avLst>
+          </a:prstGeom>
+          <a:solidFill>
+            <a:srgbClr val="F1F6F5"/>
+          </a:solidFill>
+          <a:ln w="12700">
+            <a:solidFill>
+              <a:srgbClr val="F1F6F5"/>
+            </a:solidFill>
+            <a:prstDash val="solid"/>
+          </a:ln>
+        </p:spPr>
+      </p:sp>
+      <p:sp>
+        <p:nvSpPr>
+          <p:cNvPr id="10" name="Shape 8"/>
+          <p:cNvSpPr/>
+          <p:nvPr/>
+        </p:nvSpPr>
+        <p:spPr>
+          <a:xfrm>
+            <a:off x="4690872" y="2148840"/>
+            <a:ext cx="502920" cy="502920"/>
+          </a:xfrm>
+          <a:prstGeom prst="ellipse">
+            <a:avLst/>
+          </a:prstGeom>
+          <a:solidFill>
+            <a:srgbClr val="D98A2B"/>
+          </a:solidFill>
+          <a:ln w="12700">
+            <a:solidFill>
+              <a:srgbClr val="D98A2B"/>
+            </a:solidFill>
+            <a:prstDash val="solid"/>
+          </a:ln>
+        </p:spPr>
+      </p:sp>
+      <p:sp>
+        <p:nvSpPr>
+          <p:cNvPr id="11" name="Text 9"/>
+          <p:cNvSpPr/>
+          <p:nvPr/>
+        </p:nvSpPr>
+        <p:spPr>
+          <a:xfrm>
+            <a:off x="4690872" y="2148840"/>
+            <a:ext cx="502920" cy="502920"/>
+          </a:xfrm>
+          <a:prstGeom prst="rect">
+            <a:avLst/>
+          </a:prstGeom>
+          <a:noFill/>
+          <a:ln/>
+        </p:spPr>
+        <p:txBody>
+          <a:bodyPr wrap="square" lIns="0" tIns="0" rIns="0" bIns="0" rtlCol="0" anchor="ctr"/>
+          <a:lstStyle/>
+          <a:p>
+            <a:pPr algn="ctr" indent="0" marL="0">
+              <a:buNone/>
+            </a:pPr>
+            <a:r>
+              <a:rPr lang="en-US" sz="1700" b="1" dirty="0">
+                <a:solidFill>
+                  <a:srgbClr val="FFFFFF"/>
+                </a:solidFill>
+                <a:latin typeface="Yu Gothic" pitchFamily="34" charset="0"/>
+                <a:ea typeface="Yu Gothic" pitchFamily="34" charset="-122"/>
+                <a:cs typeface="Yu Gothic" pitchFamily="34" charset="-120"/>
+              </a:rPr>
+              <a:t>②</a:t>
+            </a:r>
+            <a:endParaRPr lang="en-US" sz="1700" dirty="0"/>
+          </a:p>
+        </p:txBody>
+      </p:sp>
+      <p:sp>
+        <p:nvSpPr>
+          <p:cNvPr id="12" name="Text 10"/>
+          <p:cNvSpPr/>
+          <p:nvPr/>
+        </p:nvSpPr>
+        <p:spPr>
+          <a:xfrm>
+            <a:off x="4690872" y="2834640"/>
+            <a:ext cx="3017520" cy="411480"/>
+          </a:xfrm>
+          <a:prstGeom prst="rect">
+            <a:avLst/>
+          </a:prstGeom>
+          <a:noFill/>
+          <a:ln/>
+        </p:spPr>
+        <p:txBody>
+          <a:bodyPr wrap="square" lIns="0" tIns="0" rIns="0" bIns="0" rtlCol="0" anchor="ctr"/>
+          <a:lstStyle/>
+          <a:p>
+            <a:pPr indent="0" marL="0">
+              <a:buNone/>
+            </a:pPr>
+            <a:r>
+              <a:rPr lang="en-US" sz="1700" b="1" dirty="0">
+                <a:solidFill>
+                  <a:srgbClr val="14504B"/>
+                </a:solidFill>
+                <a:latin typeface="Yu Gothic" pitchFamily="34" charset="0"/>
+                <a:ea typeface="Yu Gothic" pitchFamily="34" charset="-122"/>
+                <a:cs typeface="Yu Gothic" pitchFamily="34" charset="-120"/>
+              </a:rPr>
+              <a:t>声のかけ方が変わる</a:t>
+            </a:r>
+            <a:endParaRPr lang="en-US" sz="1700" dirty="0"/>
+          </a:p>
+        </p:txBody>
+      </p:sp>
+      <p:sp>
+        <p:nvSpPr>
+          <p:cNvPr id="13" name="Text 11"/>
+          <p:cNvSpPr/>
+          <p:nvPr/>
+        </p:nvSpPr>
+        <p:spPr>
+          <a:xfrm>
+            <a:off x="4690872" y="3346704"/>
+            <a:ext cx="3017520" cy="1188720"/>
+          </a:xfrm>
+          <a:prstGeom prst="rect">
+            <a:avLst/>
+          </a:prstGeom>
+          <a:noFill/>
+          <a:ln/>
+        </p:spPr>
+        <p:txBody>
+          <a:bodyPr wrap="square" lIns="0" tIns="0" rIns="0" bIns="0" rtlCol="0" anchor="ctr"/>
+          <a:lstStyle/>
           <a:p>
             <a:pPr indent="0" marL="0">
               <a:lnSpc>
-                <a:spcPct val="120000"/>
+                <a:spcPct val="130000"/>
               </a:lnSpc>
               <a:buNone/>
             </a:pPr>
             <a:r>
               <a:rPr lang="en-US" sz="1400" dirty="0">
                 <a:solidFill>
-                  <a:srgbClr val="5A5044"/>
-                </a:solidFill>
-                <a:latin typeface="Yu Gothic" pitchFamily="34" charset="0"/>
-                <a:ea typeface="Yu Gothic" pitchFamily="34" charset="-122"/>
-                <a:cs typeface="Yu Gothic" pitchFamily="34" charset="-120"/>
-              </a:rPr>
-              <a:t>変動の影響もありうる</a:t>
+                  <a:srgbClr val="5C6B68"/>
+                </a:solidFill>
+                <a:latin typeface="Yu Gothic" pitchFamily="34" charset="0"/>
+                <a:ea typeface="Yu Gothic" pitchFamily="34" charset="-122"/>
+                <a:cs typeface="Yu Gothic" pitchFamily="34" charset="-120"/>
+              </a:rPr>
+              <a:t>「太っています」ではなく</a:t>
             </a:r>
             <a:endParaRPr lang="en-US" sz="1400" dirty="0"/>
           </a:p>
-        </p:txBody>
-      </p:sp>
-      <p:sp>
-        <p:nvSpPr>
-          <p:cNvPr id="11" name="Text 9"/>
-          <p:cNvSpPr/>
-          <p:nvPr/>
-        </p:nvSpPr>
-        <p:spPr>
-          <a:xfrm>
-            <a:off x="6720840" y="4434840"/>
-            <a:ext cx="4572000" cy="731520"/>
-          </a:xfrm>
-          <a:prstGeom prst="rect">
-            <a:avLst/>
-          </a:prstGeom>
-          <a:noFill/>
-          <a:ln/>
-        </p:spPr>
-        <p:txBody>
-          <a:bodyPr wrap="square" lIns="0" tIns="0" rIns="0" bIns="0" rtlCol="0" anchor="ctr"/>
-          <a:lstStyle/>
           <a:p>
             <a:pPr indent="0" marL="0">
               <a:lnSpc>
-                <a:spcPct val="120000"/>
+                <a:spcPct val="130000"/>
               </a:lnSpc>
               <a:buNone/>
             </a:pPr>
             <a:r>
               <a:rPr lang="en-US" sz="1400" dirty="0">
                 <a:solidFill>
-                  <a:srgbClr val="5A5044"/>
-                </a:solidFill>
-                <a:latin typeface="Yu Gothic" pitchFamily="34" charset="0"/>
-                <a:ea typeface="Yu Gothic" pitchFamily="34" charset="-122"/>
-                <a:cs typeface="Yu Gothic" pitchFamily="34" charset="-120"/>
-              </a:rPr>
-              <a:t>延岡市の受診者が対象。</a:t>
+                  <a:srgbClr val="5C6B68"/>
+                </a:solidFill>
+                <a:latin typeface="Yu Gothic" pitchFamily="34" charset="0"/>
+                <a:ea typeface="Yu Gothic" pitchFamily="34" charset="-122"/>
+                <a:cs typeface="Yu Gothic" pitchFamily="34" charset="-120"/>
+              </a:rPr>
+              <a:t>「去年より増えています」。</a:t>
             </a:r>
             <a:endParaRPr lang="en-US" sz="1400" dirty="0"/>
           </a:p>
           <a:p>
             <a:pPr indent="0" marL="0">
               <a:lnSpc>
-                <a:spcPct val="120000"/>
+                <a:spcPct val="130000"/>
               </a:lnSpc>
               <a:buNone/>
             </a:pPr>
             <a:r>
               <a:rPr lang="en-US" sz="1400" dirty="0">
                 <a:solidFill>
-                  <a:srgbClr val="5A5044"/>
-                </a:solidFill>
-                <a:latin typeface="Yu Gothic" pitchFamily="34" charset="0"/>
-                <a:ea typeface="Yu Gothic" pitchFamily="34" charset="-122"/>
-                <a:cs typeface="Yu Gothic" pitchFamily="34" charset="-120"/>
-              </a:rPr>
-              <a:t>そのまま他地域には広げられない</a:t>
+                  <a:srgbClr val="5C6B68"/>
+                </a:solidFill>
+                <a:latin typeface="Yu Gothic" pitchFamily="34" charset="0"/>
+                <a:ea typeface="Yu Gothic" pitchFamily="34" charset="-122"/>
+                <a:cs typeface="Yu Gothic" pitchFamily="34" charset="-120"/>
+              </a:rPr>
+              <a:t>本人も実感しやすい</a:t>
             </a:r>
             <a:endParaRPr lang="en-US" sz="1400" dirty="0"/>
           </a:p>
@@ -8750,30 +9500,163 @@
       </p:sp>
       <p:sp>
         <p:nvSpPr>
-          <p:cNvPr id="12" name="Text 10"/>
-          <p:cNvSpPr/>
-          <p:nvPr/>
-        </p:nvSpPr>
-        <p:spPr>
-          <a:xfrm>
-            <a:off x="731520" y="5440680"/>
-            <a:ext cx="10698480" cy="411480"/>
-          </a:xfrm>
-          <a:prstGeom prst="rect">
-            <a:avLst/>
-          </a:prstGeom>
-          <a:noFill/>
-          <a:ln/>
-        </p:spPr>
-        <p:txBody>
-          <a:bodyPr wrap="square" lIns="0" tIns="0" rIns="0" bIns="0" rtlCol="0" anchor="ctr"/>
-          <a:lstStyle/>
-          <a:p>
-            <a:pPr indent="0" marL="0">
-              <a:buNone/>
-            </a:pPr>
-            <a:r>
-              <a:rPr lang="en-US" sz="1500" i="1" dirty="0">
+          <p:cNvPr id="14" name="Shape 12"/>
+          <p:cNvSpPr/>
+          <p:nvPr/>
+        </p:nvSpPr>
+        <p:spPr>
+          <a:xfrm>
+            <a:off x="8138160" y="1920240"/>
+            <a:ext cx="3429000" cy="2743200"/>
+          </a:xfrm>
+          <a:prstGeom prst="roundRect">
+            <a:avLst>
+              <a:gd name="adj" fmla="val 2667"/>
+            </a:avLst>
+          </a:prstGeom>
+          <a:solidFill>
+            <a:srgbClr val="F1F6F5"/>
+          </a:solidFill>
+          <a:ln w="12700">
+            <a:solidFill>
+              <a:srgbClr val="F1F6F5"/>
+            </a:solidFill>
+            <a:prstDash val="solid"/>
+          </a:ln>
+        </p:spPr>
+      </p:sp>
+      <p:sp>
+        <p:nvSpPr>
+          <p:cNvPr id="15" name="Shape 13"/>
+          <p:cNvSpPr/>
+          <p:nvPr/>
+        </p:nvSpPr>
+        <p:spPr>
+          <a:xfrm>
+            <a:off x="8394192" y="2148840"/>
+            <a:ext cx="502920" cy="502920"/>
+          </a:xfrm>
+          <a:prstGeom prst="ellipse">
+            <a:avLst/>
+          </a:prstGeom>
+          <a:solidFill>
+            <a:srgbClr val="D98A2B"/>
+          </a:solidFill>
+          <a:ln w="12700">
+            <a:solidFill>
+              <a:srgbClr val="D98A2B"/>
+            </a:solidFill>
+            <a:prstDash val="solid"/>
+          </a:ln>
+        </p:spPr>
+      </p:sp>
+      <p:sp>
+        <p:nvSpPr>
+          <p:cNvPr id="16" name="Text 14"/>
+          <p:cNvSpPr/>
+          <p:nvPr/>
+        </p:nvSpPr>
+        <p:spPr>
+          <a:xfrm>
+            <a:off x="8394192" y="2148840"/>
+            <a:ext cx="502920" cy="502920"/>
+          </a:xfrm>
+          <a:prstGeom prst="rect">
+            <a:avLst/>
+          </a:prstGeom>
+          <a:noFill/>
+          <a:ln/>
+        </p:spPr>
+        <p:txBody>
+          <a:bodyPr wrap="square" lIns="0" tIns="0" rIns="0" bIns="0" rtlCol="0" anchor="ctr"/>
+          <a:lstStyle/>
+          <a:p>
+            <a:pPr algn="ctr" indent="0" marL="0">
+              <a:buNone/>
+            </a:pPr>
+            <a:r>
+              <a:rPr lang="en-US" sz="1700" b="1" dirty="0">
+                <a:solidFill>
+                  <a:srgbClr val="FFFFFF"/>
+                </a:solidFill>
+                <a:latin typeface="Yu Gothic" pitchFamily="34" charset="0"/>
+                <a:ea typeface="Yu Gothic" pitchFamily="34" charset="-122"/>
+                <a:cs typeface="Yu Gothic" pitchFamily="34" charset="-120"/>
+              </a:rPr>
+              <a:t>③</a:t>
+            </a:r>
+            <a:endParaRPr lang="en-US" sz="1700" dirty="0"/>
+          </a:p>
+        </p:txBody>
+      </p:sp>
+      <p:sp>
+        <p:nvSpPr>
+          <p:cNvPr id="17" name="Text 15"/>
+          <p:cNvSpPr/>
+          <p:nvPr/>
+        </p:nvSpPr>
+        <p:spPr>
+          <a:xfrm>
+            <a:off x="8394192" y="2834640"/>
+            <a:ext cx="3017520" cy="411480"/>
+          </a:xfrm>
+          <a:prstGeom prst="rect">
+            <a:avLst/>
+          </a:prstGeom>
+          <a:noFill/>
+          <a:ln/>
+        </p:spPr>
+        <p:txBody>
+          <a:bodyPr wrap="square" lIns="0" tIns="0" rIns="0" bIns="0" rtlCol="0" anchor="ctr"/>
+          <a:lstStyle/>
+          <a:p>
+            <a:pPr indent="0" marL="0">
+              <a:buNone/>
+            </a:pPr>
+            <a:r>
+              <a:rPr lang="en-US" sz="1700" b="1" dirty="0">
+                <a:solidFill>
+                  <a:srgbClr val="14504B"/>
+                </a:solidFill>
+                <a:latin typeface="Yu Gothic" pitchFamily="34" charset="0"/>
+                <a:ea typeface="Yu Gothic" pitchFamily="34" charset="-122"/>
+                <a:cs typeface="Yu Gothic" pitchFamily="34" charset="-120"/>
+              </a:rPr>
+              <a:t>優先順位がつけられる</a:t>
+            </a:r>
+            <a:endParaRPr lang="en-US" sz="1700" dirty="0"/>
+          </a:p>
+        </p:txBody>
+      </p:sp>
+      <p:sp>
+        <p:nvSpPr>
+          <p:cNvPr id="18" name="Text 16"/>
+          <p:cNvSpPr/>
+          <p:nvPr/>
+        </p:nvSpPr>
+        <p:spPr>
+          <a:xfrm>
+            <a:off x="8394192" y="3346704"/>
+            <a:ext cx="3017520" cy="1188720"/>
+          </a:xfrm>
+          <a:prstGeom prst="rect">
+            <a:avLst/>
+          </a:prstGeom>
+          <a:noFill/>
+          <a:ln/>
+        </p:spPr>
+        <p:txBody>
+          <a:bodyPr wrap="square" lIns="0" tIns="0" rIns="0" bIns="0" rtlCol="0" anchor="ctr"/>
+          <a:lstStyle/>
+          <a:p>
+            <a:pPr indent="0" marL="0">
+              <a:lnSpc>
+                <a:spcPct val="130000"/>
+              </a:lnSpc>
+              <a:buNone/>
+            </a:pPr>
+            <a:r>
+              <a:rPr lang="en-US" sz="1400" dirty="0">
                 <a:solidFill>
                   <a:srgbClr val="5C6B68"/>
                 </a:solidFill>
@@ -8781,9 +9664,115 @@
                 <a:ea typeface="Yu Gothic" pitchFamily="34" charset="-122"/>
                 <a:cs typeface="Yu Gothic" pitchFamily="34" charset="-120"/>
               </a:rPr>
-              <a:t>次に必要なのは、複数地域・長期の追跡と、介入して確かめる研究です。</a:t>
-            </a:r>
-            <a:endParaRPr lang="en-US" sz="1500" dirty="0"/>
+              <a:t>限られた保健指導の枠を、</a:t>
+            </a:r>
+            <a:endParaRPr lang="en-US" sz="1400" dirty="0"/>
+          </a:p>
+          <a:p>
+            <a:pPr indent="0" marL="0">
+              <a:lnSpc>
+                <a:spcPct val="130000"/>
+              </a:lnSpc>
+              <a:buNone/>
+            </a:pPr>
+            <a:r>
+              <a:rPr lang="en-US" sz="1400" dirty="0">
+                <a:solidFill>
+                  <a:srgbClr val="5C6B68"/>
+                </a:solidFill>
+                <a:latin typeface="Yu Gothic" pitchFamily="34" charset="0"/>
+                <a:ea typeface="Yu Gothic" pitchFamily="34" charset="-122"/>
+                <a:cs typeface="Yu Gothic" pitchFamily="34" charset="-120"/>
+              </a:rPr>
+              <a:t>リスクが上がった人に</a:t>
+            </a:r>
+            <a:endParaRPr lang="en-US" sz="1400" dirty="0"/>
+          </a:p>
+          <a:p>
+            <a:pPr indent="0" marL="0">
+              <a:lnSpc>
+                <a:spcPct val="130000"/>
+              </a:lnSpc>
+              <a:buNone/>
+            </a:pPr>
+            <a:r>
+              <a:rPr lang="en-US" sz="1400" dirty="0">
+                <a:solidFill>
+                  <a:srgbClr val="5C6B68"/>
+                </a:solidFill>
+                <a:latin typeface="Yu Gothic" pitchFamily="34" charset="0"/>
+                <a:ea typeface="Yu Gothic" pitchFamily="34" charset="-122"/>
+                <a:cs typeface="Yu Gothic" pitchFamily="34" charset="-120"/>
+              </a:rPr>
+              <a:t>優先して充てられる</a:t>
+            </a:r>
+            <a:endParaRPr lang="en-US" sz="1400" dirty="0"/>
+          </a:p>
+        </p:txBody>
+      </p:sp>
+      <p:sp>
+        <p:nvSpPr>
+          <p:cNvPr id="19" name="Shape 17"/>
+          <p:cNvSpPr/>
+          <p:nvPr/>
+        </p:nvSpPr>
+        <p:spPr>
+          <a:xfrm>
+            <a:off x="731520" y="4983480"/>
+            <a:ext cx="10698480" cy="1188720"/>
+          </a:xfrm>
+          <a:prstGeom prst="roundRect">
+            <a:avLst>
+              <a:gd name="adj" fmla="val 6154"/>
+            </a:avLst>
+          </a:prstGeom>
+          <a:solidFill>
+            <a:srgbClr val="14504B"/>
+          </a:solidFill>
+          <a:ln w="12700">
+            <a:solidFill>
+              <a:srgbClr val="14504B"/>
+            </a:solidFill>
+            <a:prstDash val="solid"/>
+          </a:ln>
+        </p:spPr>
+      </p:sp>
+      <p:sp>
+        <p:nvSpPr>
+          <p:cNvPr id="20" name="Text 18"/>
+          <p:cNvSpPr/>
+          <p:nvPr/>
+        </p:nvSpPr>
+        <p:spPr>
+          <a:xfrm>
+            <a:off x="1097280" y="5257800"/>
+            <a:ext cx="10058400" cy="502920"/>
+          </a:xfrm>
+          <a:prstGeom prst="rect">
+            <a:avLst/>
+          </a:prstGeom>
+          <a:noFill/>
+          <a:ln/>
+        </p:spPr>
+        <p:txBody>
+          <a:bodyPr wrap="square" lIns="0" tIns="0" rIns="0" bIns="0" rtlCol="0" anchor="ctr"/>
+          <a:lstStyle/>
+          <a:p>
+            <a:pPr indent="0" marL="0">
+              <a:buNone/>
+            </a:pPr>
+            <a:r>
+              <a:rPr lang="en-US" sz="2200" b="1" dirty="0">
+                <a:solidFill>
+                  <a:srgbClr val="FFFFFF"/>
+                </a:solidFill>
+                <a:latin typeface="Yu Gothic" pitchFamily="34" charset="0"/>
+                <a:ea typeface="Yu Gothic" pitchFamily="34" charset="-122"/>
+                <a:cs typeface="Yu Gothic" pitchFamily="34" charset="-120"/>
+              </a:rPr>
+              <a:t>研究の目的は、論文を書くことではなく、明日の声かけを変えること</a:t>
+            </a:r>
+            <a:endParaRPr lang="en-US" sz="2200" dirty="0"/>
           </a:p>
         </p:txBody>
       </p:sp>
@@ -8798,6 +9787,558 @@
 <file path=ppt/slides/slide18.xml><?xml version="1.0" encoding="utf-8"?>
 <p:sld xmlns:a="http://schemas.openxmlformats.org/drawingml/2006/main" xmlns:r="http://schemas.openxmlformats.org/officeDocument/2006/relationships" xmlns:p="http://schemas.openxmlformats.org/presentationml/2006/main">
   <p:cSld name="Slide 18">
+    <p:bg>
+      <p:bgPr>
+        <a:solidFill>
+          <a:srgbClr val="FFFFFF"/>
+        </a:solidFill>
+      </p:bgPr>
+    </p:bg>
+    <p:spTree>
+      <p:nvGrpSpPr>
+        <p:cNvPr id="1" name=""/>
+        <p:cNvGrpSpPr/>
+        <p:nvPr/>
+      </p:nvGrpSpPr>
+      <p:grpSpPr>
+        <a:xfrm>
+          <a:off x="0" y="0"/>
+          <a:ext cx="0" cy="0"/>
+          <a:chOff x="0" y="0"/>
+          <a:chExt cx="0" cy="0"/>
+        </a:xfrm>
+      </p:grpSpPr>
+      <p:sp>
+        <p:nvSpPr>
+          <p:cNvPr id="2" name="Text 0"/>
+          <p:cNvSpPr/>
+          <p:nvPr/>
+        </p:nvSpPr>
+        <p:spPr>
+          <a:xfrm>
+            <a:off x="731520" y="411480"/>
+            <a:ext cx="10698480" cy="777240"/>
+          </a:xfrm>
+          <a:prstGeom prst="rect">
+            <a:avLst/>
+          </a:prstGeom>
+          <a:noFill/>
+          <a:ln/>
+        </p:spPr>
+        <p:txBody>
+          <a:bodyPr wrap="square" lIns="0" tIns="0" rIns="0" bIns="0" rtlCol="0" anchor="ctr"/>
+          <a:lstStyle/>
+          <a:p>
+            <a:pPr indent="0" marL="0">
+              <a:buNone/>
+            </a:pPr>
+            <a:r>
+              <a:rPr lang="en-US" sz="3600" b="1" dirty="0">
+                <a:solidFill>
+                  <a:srgbClr val="14504B"/>
+                </a:solidFill>
+                <a:latin typeface="Yu Gothic" pitchFamily="34" charset="0"/>
+                <a:ea typeface="Yu Gothic" pitchFamily="34" charset="-122"/>
+                <a:cs typeface="Yu Gothic" pitchFamily="34" charset="-120"/>
+              </a:rPr>
+              <a:t>言えること、言えないこと</a:t>
+            </a:r>
+            <a:endParaRPr lang="en-US" sz="3600" dirty="0"/>
+          </a:p>
+        </p:txBody>
+      </p:sp>
+      <p:sp>
+        <p:nvSpPr>
+          <p:cNvPr id="3" name="Shape 1"/>
+          <p:cNvSpPr/>
+          <p:nvPr/>
+        </p:nvSpPr>
+        <p:spPr>
+          <a:xfrm>
+            <a:off x="731520" y="1965960"/>
+            <a:ext cx="5120640" cy="3200400"/>
+          </a:xfrm>
+          <a:prstGeom prst="roundRect">
+            <a:avLst>
+              <a:gd name="adj" fmla="val 2286"/>
+            </a:avLst>
+          </a:prstGeom>
+          <a:solidFill>
+            <a:srgbClr val="F1F6F5"/>
+          </a:solidFill>
+          <a:ln w="12700">
+            <a:solidFill>
+              <a:srgbClr val="F1F6F5"/>
+            </a:solidFill>
+            <a:prstDash val="solid"/>
+          </a:ln>
+        </p:spPr>
+      </p:sp>
+      <p:sp>
+        <p:nvSpPr>
+          <p:cNvPr id="4" name="Text 2"/>
+          <p:cNvSpPr/>
+          <p:nvPr/>
+        </p:nvSpPr>
+        <p:spPr>
+          <a:xfrm>
+            <a:off x="1051560" y="2194560"/>
+            <a:ext cx="3657600" cy="411480"/>
+          </a:xfrm>
+          <a:prstGeom prst="rect">
+            <a:avLst/>
+          </a:prstGeom>
+          <a:noFill/>
+          <a:ln/>
+        </p:spPr>
+        <p:txBody>
+          <a:bodyPr wrap="square" lIns="0" tIns="0" rIns="0" bIns="0" rtlCol="0" anchor="ctr"/>
+          <a:lstStyle/>
+          <a:p>
+            <a:pPr indent="0" marL="0">
+              <a:buNone/>
+            </a:pPr>
+            <a:r>
+              <a:rPr lang="en-US" sz="1900" b="1" dirty="0">
+                <a:solidFill>
+                  <a:srgbClr val="14504B"/>
+                </a:solidFill>
+                <a:latin typeface="Yu Gothic" pitchFamily="34" charset="0"/>
+                <a:ea typeface="Yu Gothic" pitchFamily="34" charset="-122"/>
+                <a:cs typeface="Yu Gothic" pitchFamily="34" charset="-120"/>
+              </a:rPr>
+              <a:t>言えること</a:t>
+            </a:r>
+            <a:endParaRPr lang="en-US" sz="1900" dirty="0"/>
+          </a:p>
+        </p:txBody>
+      </p:sp>
+      <p:sp>
+        <p:nvSpPr>
+          <p:cNvPr id="5" name="Text 3"/>
+          <p:cNvSpPr/>
+          <p:nvPr/>
+        </p:nvSpPr>
+        <p:spPr>
+          <a:xfrm>
+            <a:off x="1051560" y="2834640"/>
+            <a:ext cx="4663440" cy="868680"/>
+          </a:xfrm>
+          <a:prstGeom prst="rect">
+            <a:avLst/>
+          </a:prstGeom>
+          <a:noFill/>
+          <a:ln/>
+        </p:spPr>
+        <p:txBody>
+          <a:bodyPr wrap="square" lIns="0" tIns="0" rIns="0" bIns="0" rtlCol="0" anchor="ctr"/>
+          <a:lstStyle/>
+          <a:p>
+            <a:pPr indent="0" marL="0">
+              <a:lnSpc>
+                <a:spcPct val="125000"/>
+              </a:lnSpc>
+              <a:buNone/>
+            </a:pPr>
+            <a:r>
+              <a:rPr lang="en-US" sz="1500" dirty="0">
+                <a:solidFill>
+                  <a:srgbClr val="16211F"/>
+                </a:solidFill>
+                <a:latin typeface="Yu Gothic" pitchFamily="34" charset="0"/>
+                <a:ea typeface="Yu Gothic" pitchFamily="34" charset="-122"/>
+                <a:cs typeface="Yu Gothic" pitchFamily="34" charset="-120"/>
+              </a:rPr>
+              <a:t>1年間でBRIが増えた人は、</a:t>
+            </a:r>
+            <a:endParaRPr lang="en-US" sz="1500" dirty="0"/>
+          </a:p>
+          <a:p>
+            <a:pPr indent="0" marL="0">
+              <a:lnSpc>
+                <a:spcPct val="125000"/>
+              </a:lnSpc>
+              <a:buNone/>
+            </a:pPr>
+            <a:r>
+              <a:rPr lang="en-US" sz="1500" dirty="0">
+                <a:solidFill>
+                  <a:srgbClr val="16211F"/>
+                </a:solidFill>
+                <a:latin typeface="Yu Gothic" pitchFamily="34" charset="0"/>
+                <a:ea typeface="Yu Gothic" pitchFamily="34" charset="-122"/>
+                <a:cs typeface="Yu Gothic" pitchFamily="34" charset="-120"/>
+              </a:rPr>
+              <a:t>尿蛋白が新たに出やすかった</a:t>
+            </a:r>
+            <a:endParaRPr lang="en-US" sz="1500" dirty="0"/>
+          </a:p>
+        </p:txBody>
+      </p:sp>
+      <p:sp>
+        <p:nvSpPr>
+          <p:cNvPr id="6" name="Text 4"/>
+          <p:cNvSpPr/>
+          <p:nvPr/>
+        </p:nvSpPr>
+        <p:spPr>
+          <a:xfrm>
+            <a:off x="1051560" y="3931920"/>
+            <a:ext cx="4663440" cy="868680"/>
+          </a:xfrm>
+          <a:prstGeom prst="rect">
+            <a:avLst/>
+          </a:prstGeom>
+          <a:noFill/>
+          <a:ln/>
+        </p:spPr>
+        <p:txBody>
+          <a:bodyPr wrap="square" lIns="0" tIns="0" rIns="0" bIns="0" rtlCol="0" anchor="ctr"/>
+          <a:lstStyle/>
+          <a:p>
+            <a:pPr indent="0" marL="0">
+              <a:lnSpc>
+                <a:spcPct val="125000"/>
+              </a:lnSpc>
+              <a:buNone/>
+            </a:pPr>
+            <a:r>
+              <a:rPr lang="en-US" sz="1500" dirty="0">
+                <a:solidFill>
+                  <a:srgbClr val="16211F"/>
+                </a:solidFill>
+                <a:latin typeface="Yu Gothic" pitchFamily="34" charset="0"/>
+                <a:ea typeface="Yu Gothic" pitchFamily="34" charset="-122"/>
+                <a:cs typeface="Yu Gothic" pitchFamily="34" charset="-120"/>
+              </a:rPr>
+              <a:t>体重やBMIの変化を</a:t>
+            </a:r>
+            <a:endParaRPr lang="en-US" sz="1500" dirty="0"/>
+          </a:p>
+          <a:p>
+            <a:pPr indent="0" marL="0">
+              <a:lnSpc>
+                <a:spcPct val="125000"/>
+              </a:lnSpc>
+              <a:buNone/>
+            </a:pPr>
+            <a:r>
+              <a:rPr lang="en-US" sz="1500" dirty="0">
+                <a:solidFill>
+                  <a:srgbClr val="16211F"/>
+                </a:solidFill>
+                <a:latin typeface="Yu Gothic" pitchFamily="34" charset="0"/>
+                <a:ea typeface="Yu Gothic" pitchFamily="34" charset="-122"/>
+                <a:cs typeface="Yu Gothic" pitchFamily="34" charset="-120"/>
+              </a:rPr>
+              <a:t>考慮しても傾向は残った</a:t>
+            </a:r>
+            <a:endParaRPr lang="en-US" sz="1500" dirty="0"/>
+          </a:p>
+        </p:txBody>
+      </p:sp>
+      <p:sp>
+        <p:nvSpPr>
+          <p:cNvPr id="7" name="Shape 5"/>
+          <p:cNvSpPr/>
+          <p:nvPr/>
+        </p:nvSpPr>
+        <p:spPr>
+          <a:xfrm>
+            <a:off x="6400800" y="1965960"/>
+            <a:ext cx="5029200" cy="3200400"/>
+          </a:xfrm>
+          <a:prstGeom prst="roundRect">
+            <a:avLst>
+              <a:gd name="adj" fmla="val 2286"/>
+            </a:avLst>
+          </a:prstGeom>
+          <a:solidFill>
+            <a:srgbClr val="F7F2EC"/>
+          </a:solidFill>
+          <a:ln w="12700">
+            <a:solidFill>
+              <a:srgbClr val="F7F2EC"/>
+            </a:solidFill>
+            <a:prstDash val="solid"/>
+          </a:ln>
+        </p:spPr>
+      </p:sp>
+      <p:sp>
+        <p:nvSpPr>
+          <p:cNvPr id="8" name="Text 6"/>
+          <p:cNvSpPr/>
+          <p:nvPr/>
+        </p:nvSpPr>
+        <p:spPr>
+          <a:xfrm>
+            <a:off x="6720840" y="2194560"/>
+            <a:ext cx="3657600" cy="411480"/>
+          </a:xfrm>
+          <a:prstGeom prst="rect">
+            <a:avLst/>
+          </a:prstGeom>
+          <a:noFill/>
+          <a:ln/>
+        </p:spPr>
+        <p:txBody>
+          <a:bodyPr wrap="square" lIns="0" tIns="0" rIns="0" bIns="0" rtlCol="0" anchor="ctr"/>
+          <a:lstStyle/>
+          <a:p>
+            <a:pPr indent="0" marL="0">
+              <a:buNone/>
+            </a:pPr>
+            <a:r>
+              <a:rPr lang="en-US" sz="1900" b="1" dirty="0">
+                <a:solidFill>
+                  <a:srgbClr val="8A6F52"/>
+                </a:solidFill>
+                <a:latin typeface="Yu Gothic" pitchFamily="34" charset="0"/>
+                <a:ea typeface="Yu Gothic" pitchFamily="34" charset="-122"/>
+                <a:cs typeface="Yu Gothic" pitchFamily="34" charset="-120"/>
+              </a:rPr>
+              <a:t>言えないこと</a:t>
+            </a:r>
+            <a:endParaRPr lang="en-US" sz="1900" dirty="0"/>
+          </a:p>
+        </p:txBody>
+      </p:sp>
+      <p:sp>
+        <p:nvSpPr>
+          <p:cNvPr id="9" name="Text 7"/>
+          <p:cNvSpPr/>
+          <p:nvPr/>
+        </p:nvSpPr>
+        <p:spPr>
+          <a:xfrm>
+            <a:off x="6720840" y="2788920"/>
+            <a:ext cx="4572000" cy="731520"/>
+          </a:xfrm>
+          <a:prstGeom prst="rect">
+            <a:avLst/>
+          </a:prstGeom>
+          <a:noFill/>
+          <a:ln/>
+        </p:spPr>
+        <p:txBody>
+          <a:bodyPr wrap="square" lIns="0" tIns="0" rIns="0" bIns="0" rtlCol="0" anchor="ctr"/>
+          <a:lstStyle/>
+          <a:p>
+            <a:pPr indent="0" marL="0">
+              <a:lnSpc>
+                <a:spcPct val="120000"/>
+              </a:lnSpc>
+              <a:buNone/>
+            </a:pPr>
+            <a:r>
+              <a:rPr lang="en-US" sz="1400" dirty="0">
+                <a:solidFill>
+                  <a:srgbClr val="5A5044"/>
+                </a:solidFill>
+                <a:latin typeface="Yu Gothic" pitchFamily="34" charset="0"/>
+                <a:ea typeface="Yu Gothic" pitchFamily="34" charset="-122"/>
+                <a:cs typeface="Yu Gothic" pitchFamily="34" charset="-120"/>
+              </a:rPr>
+              <a:t>BRIを下げれば腎臓が守れる、</a:t>
+            </a:r>
+            <a:endParaRPr lang="en-US" sz="1400" dirty="0"/>
+          </a:p>
+          <a:p>
+            <a:pPr indent="0" marL="0">
+              <a:lnSpc>
+                <a:spcPct val="120000"/>
+              </a:lnSpc>
+              <a:buNone/>
+            </a:pPr>
+            <a:r>
+              <a:rPr lang="en-US" sz="1400" dirty="0">
+                <a:solidFill>
+                  <a:srgbClr val="5A5044"/>
+                </a:solidFill>
+                <a:latin typeface="Yu Gothic" pitchFamily="34" charset="0"/>
+                <a:ea typeface="Yu Gothic" pitchFamily="34" charset="-122"/>
+                <a:cs typeface="Yu Gothic" pitchFamily="34" charset="-120"/>
+              </a:rPr>
+              <a:t>という因果関係</a:t>
+            </a:r>
+            <a:endParaRPr lang="en-US" sz="1400" dirty="0"/>
+          </a:p>
+        </p:txBody>
+      </p:sp>
+      <p:sp>
+        <p:nvSpPr>
+          <p:cNvPr id="10" name="Text 8"/>
+          <p:cNvSpPr/>
+          <p:nvPr/>
+        </p:nvSpPr>
+        <p:spPr>
+          <a:xfrm>
+            <a:off x="6720840" y="3611880"/>
+            <a:ext cx="4572000" cy="731520"/>
+          </a:xfrm>
+          <a:prstGeom prst="rect">
+            <a:avLst/>
+          </a:prstGeom>
+          <a:noFill/>
+          <a:ln/>
+        </p:spPr>
+        <p:txBody>
+          <a:bodyPr wrap="square" lIns="0" tIns="0" rIns="0" bIns="0" rtlCol="0" anchor="ctr"/>
+          <a:lstStyle/>
+          <a:p>
+            <a:pPr indent="0" marL="0">
+              <a:lnSpc>
+                <a:spcPct val="120000"/>
+              </a:lnSpc>
+              <a:buNone/>
+            </a:pPr>
+            <a:r>
+              <a:rPr lang="en-US" sz="1400" dirty="0">
+                <a:solidFill>
+                  <a:srgbClr val="5A5044"/>
+                </a:solidFill>
+                <a:latin typeface="Yu Gothic" pitchFamily="34" charset="0"/>
+                <a:ea typeface="Yu Gothic" pitchFamily="34" charset="-122"/>
+                <a:cs typeface="Yu Gothic" pitchFamily="34" charset="-120"/>
+              </a:rPr>
+              <a:t>1年の観察なので、一時的な</a:t>
+            </a:r>
+            <a:endParaRPr lang="en-US" sz="1400" dirty="0"/>
+          </a:p>
+          <a:p>
+            <a:pPr indent="0" marL="0">
+              <a:lnSpc>
+                <a:spcPct val="120000"/>
+              </a:lnSpc>
+              <a:buNone/>
+            </a:pPr>
+            <a:r>
+              <a:rPr lang="en-US" sz="1400" dirty="0">
+                <a:solidFill>
+                  <a:srgbClr val="5A5044"/>
+                </a:solidFill>
+                <a:latin typeface="Yu Gothic" pitchFamily="34" charset="0"/>
+                <a:ea typeface="Yu Gothic" pitchFamily="34" charset="-122"/>
+                <a:cs typeface="Yu Gothic" pitchFamily="34" charset="-120"/>
+              </a:rPr>
+              <a:t>変動の影響もありうる</a:t>
+            </a:r>
+            <a:endParaRPr lang="en-US" sz="1400" dirty="0"/>
+          </a:p>
+        </p:txBody>
+      </p:sp>
+      <p:sp>
+        <p:nvSpPr>
+          <p:cNvPr id="11" name="Text 9"/>
+          <p:cNvSpPr/>
+          <p:nvPr/>
+        </p:nvSpPr>
+        <p:spPr>
+          <a:xfrm>
+            <a:off x="6720840" y="4434840"/>
+            <a:ext cx="4572000" cy="731520"/>
+          </a:xfrm>
+          <a:prstGeom prst="rect">
+            <a:avLst/>
+          </a:prstGeom>
+          <a:noFill/>
+          <a:ln/>
+        </p:spPr>
+        <p:txBody>
+          <a:bodyPr wrap="square" lIns="0" tIns="0" rIns="0" bIns="0" rtlCol="0" anchor="ctr"/>
+          <a:lstStyle/>
+          <a:p>
+            <a:pPr indent="0" marL="0">
+              <a:lnSpc>
+                <a:spcPct val="120000"/>
+              </a:lnSpc>
+              <a:buNone/>
+            </a:pPr>
+            <a:r>
+              <a:rPr lang="en-US" sz="1400" dirty="0">
+                <a:solidFill>
+                  <a:srgbClr val="5A5044"/>
+                </a:solidFill>
+                <a:latin typeface="Yu Gothic" pitchFamily="34" charset="0"/>
+                <a:ea typeface="Yu Gothic" pitchFamily="34" charset="-122"/>
+                <a:cs typeface="Yu Gothic" pitchFamily="34" charset="-120"/>
+              </a:rPr>
+              <a:t>延岡市の受診者が対象。</a:t>
+            </a:r>
+            <a:endParaRPr lang="en-US" sz="1400" dirty="0"/>
+          </a:p>
+          <a:p>
+            <a:pPr indent="0" marL="0">
+              <a:lnSpc>
+                <a:spcPct val="120000"/>
+              </a:lnSpc>
+              <a:buNone/>
+            </a:pPr>
+            <a:r>
+              <a:rPr lang="en-US" sz="1400" dirty="0">
+                <a:solidFill>
+                  <a:srgbClr val="5A5044"/>
+                </a:solidFill>
+                <a:latin typeface="Yu Gothic" pitchFamily="34" charset="0"/>
+                <a:ea typeface="Yu Gothic" pitchFamily="34" charset="-122"/>
+                <a:cs typeface="Yu Gothic" pitchFamily="34" charset="-120"/>
+              </a:rPr>
+              <a:t>そのまま他地域には広げられない</a:t>
+            </a:r>
+            <a:endParaRPr lang="en-US" sz="1400" dirty="0"/>
+          </a:p>
+        </p:txBody>
+      </p:sp>
+      <p:sp>
+        <p:nvSpPr>
+          <p:cNvPr id="12" name="Text 10"/>
+          <p:cNvSpPr/>
+          <p:nvPr/>
+        </p:nvSpPr>
+        <p:spPr>
+          <a:xfrm>
+            <a:off x="731520" y="5440680"/>
+            <a:ext cx="10698480" cy="411480"/>
+          </a:xfrm>
+          <a:prstGeom prst="rect">
+            <a:avLst/>
+          </a:prstGeom>
+          <a:noFill/>
+          <a:ln/>
+        </p:spPr>
+        <p:txBody>
+          <a:bodyPr wrap="square" lIns="0" tIns="0" rIns="0" bIns="0" rtlCol="0" anchor="ctr"/>
+          <a:lstStyle/>
+          <a:p>
+            <a:pPr indent="0" marL="0">
+              <a:buNone/>
+            </a:pPr>
+            <a:r>
+              <a:rPr lang="en-US" sz="1500" i="1" dirty="0">
+                <a:solidFill>
+                  <a:srgbClr val="5C6B68"/>
+                </a:solidFill>
+                <a:latin typeface="Yu Gothic" pitchFamily="34" charset="0"/>
+                <a:ea typeface="Yu Gothic" pitchFamily="34" charset="-122"/>
+                <a:cs typeface="Yu Gothic" pitchFamily="34" charset="-120"/>
+              </a:rPr>
+              <a:t>次に必要なのは、複数地域・長期の追跡と、介入して確かめる研究です。</a:t>
+            </a:r>
+            <a:endParaRPr lang="en-US" sz="1500" dirty="0"/>
+          </a:p>
+        </p:txBody>
+      </p:sp>
+    </p:spTree>
+  </p:cSld>
+  <p:clrMapOvr>
+    <a:masterClrMapping/>
+  </p:clrMapOvr>
+</p:sld>
+</file>
+
+<file path=ppt/slides/slide19.xml><?xml version="1.0" encoding="utf-8"?>
+<p:sld xmlns:a="http://schemas.openxmlformats.org/drawingml/2006/main" xmlns:r="http://schemas.openxmlformats.org/officeDocument/2006/relationships" xmlns:p="http://schemas.openxmlformats.org/presentationml/2006/main">
+  <p:cSld name="Slide 19">
     <p:bg>
       <p:bgPr>
         <a:solidFill>
@@ -13346,7 +14887,7 @@
                 <a:ea typeface="Yu Gothic" pitchFamily="34" charset="-122"/>
                 <a:cs typeface="Yu Gothic" pitchFamily="34" charset="-120"/>
               </a:rPr>
-              <a:t>判定の根拠は、原本まで遡って確かめている</a:t>
+              <a:t>医師向けの基準を、介護職が答えられる言葉に</a:t>
             </a:r>
             <a:endParaRPr lang="en-US" sz="3600" dirty="0"/>
           </a:p>
@@ -13354,7 +14895,46 @@
       </p:sp>
       <p:sp>
         <p:nvSpPr>
-          <p:cNvPr id="3" name="Shape 1"/>
+          <p:cNvPr id="3" name="Text 1"/>
+          <p:cNvSpPr/>
+          <p:nvPr/>
+        </p:nvSpPr>
+        <p:spPr>
+          <a:xfrm>
+            <a:off x="731520" y="1225296"/>
+            <a:ext cx="10698480" cy="411480"/>
+          </a:xfrm>
+          <a:prstGeom prst="rect">
+            <a:avLst/>
+          </a:prstGeom>
+          <a:noFill/>
+          <a:ln/>
+        </p:spPr>
+        <p:txBody>
+          <a:bodyPr wrap="square" lIns="0" tIns="0" rIns="0" bIns="0" rtlCol="0" anchor="ctr"/>
+          <a:lstStyle/>
+          <a:p>
+            <a:pPr indent="0" marL="0">
+              <a:buNone/>
+            </a:pPr>
+            <a:r>
+              <a:rPr lang="en-US" sz="1600" dirty="0">
+                <a:solidFill>
+                  <a:srgbClr val="5C6B68"/>
+                </a:solidFill>
+                <a:latin typeface="Yu Gothic" pitchFamily="34" charset="0"/>
+                <a:ea typeface="Yu Gothic" pitchFamily="34" charset="-122"/>
+                <a:cs typeface="Yu Gothic" pitchFamily="34" charset="-120"/>
+              </a:rPr>
+              <a:t>危険信号118項目は、すべて公開資料か医学書に紐づいています</a:t>
+            </a:r>
+            <a:endParaRPr lang="en-US" sz="1600" dirty="0"/>
+          </a:p>
+        </p:txBody>
+      </p:sp>
+      <p:sp>
+        <p:nvSpPr>
+          <p:cNvPr id="4" name="Shape 2"/>
           <p:cNvSpPr/>
           <p:nvPr/>
         </p:nvSpPr>
@@ -13381,7 +14961,7 @@
       </p:sp>
       <p:sp>
         <p:nvSpPr>
-          <p:cNvPr id="4" name="Text 2"/>
+          <p:cNvPr id="5" name="Text 3"/>
           <p:cNvSpPr/>
           <p:nvPr/>
         </p:nvSpPr>
@@ -13423,7 +15003,7 @@
       </p:sp>
       <p:sp>
         <p:nvSpPr>
-          <p:cNvPr id="5" name="Text 3"/>
+          <p:cNvPr id="6" name="Text 4"/>
           <p:cNvSpPr/>
           <p:nvPr/>
         </p:nvSpPr>
@@ -13485,7 +15065,7 @@
       </p:sp>
       <p:sp>
         <p:nvSpPr>
-          <p:cNvPr id="6" name="Shape 4"/>
+          <p:cNvPr id="7" name="Shape 5"/>
           <p:cNvSpPr/>
           <p:nvPr/>
         </p:nvSpPr>
@@ -13512,7 +15092,7 @@
       </p:sp>
       <p:sp>
         <p:nvSpPr>
-          <p:cNvPr id="7" name="Text 5"/>
+          <p:cNvPr id="8" name="Text 6"/>
           <p:cNvSpPr/>
           <p:nvPr/>
         </p:nvSpPr>
@@ -13574,7 +15154,7 @@
       </p:sp>
       <p:sp>
         <p:nvSpPr>
-          <p:cNvPr id="8" name="Text 6"/>
+          <p:cNvPr id="9" name="Text 7"/>
           <p:cNvSpPr/>
           <p:nvPr/>
         </p:nvSpPr>
@@ -13636,7 +15216,7 @@
       </p:sp>
       <p:sp>
         <p:nvSpPr>
-          <p:cNvPr id="9" name="Shape 7"/>
+          <p:cNvPr id="10" name="Shape 8"/>
           <p:cNvSpPr/>
           <p:nvPr/>
         </p:nvSpPr>
@@ -13663,7 +15243,7 @@
       </p:sp>
       <p:sp>
         <p:nvSpPr>
-          <p:cNvPr id="10" name="Text 8"/>
+          <p:cNvPr id="11" name="Text 9"/>
           <p:cNvSpPr/>
           <p:nvPr/>
         </p:nvSpPr>
@@ -13705,7 +15285,7 @@
       </p:sp>
       <p:sp>
         <p:nvSpPr>
-          <p:cNvPr id="11" name="Text 9"/>
+          <p:cNvPr id="12" name="Text 10"/>
           <p:cNvSpPr/>
           <p:nvPr/>
         </p:nvSpPr>
@@ -13767,7 +15347,7 @@
       </p:sp>
       <p:sp>
         <p:nvSpPr>
-          <p:cNvPr id="12" name="Text 10"/>
+          <p:cNvPr id="13" name="Text 11"/>
           <p:cNvSpPr/>
           <p:nvPr/>
         </p:nvSpPr>
@@ -13806,7 +15386,7 @@
       </p:sp>
       <p:sp>
         <p:nvSpPr>
-          <p:cNvPr id="13" name="Text 11"/>
+          <p:cNvPr id="14" name="Text 12"/>
           <p:cNvSpPr/>
           <p:nvPr/>
         </p:nvSpPr>
@@ -13845,7 +15425,7 @@
       </p:sp>
       <p:sp>
         <p:nvSpPr>
-          <p:cNvPr id="14" name="Text 12"/>
+          <p:cNvPr id="15" name="Text 13"/>
           <p:cNvSpPr/>
           <p:nvPr/>
         </p:nvSpPr>
@@ -13884,7 +15464,7 @@
       </p:sp>
       <p:sp>
         <p:nvSpPr>
-          <p:cNvPr id="15" name="Text 13"/>
+          <p:cNvPr id="16" name="Text 14"/>
           <p:cNvSpPr/>
           <p:nvPr/>
         </p:nvSpPr>
@@ -13923,7 +15503,7 @@
       </p:sp>
       <p:sp>
         <p:nvSpPr>
-          <p:cNvPr id="16" name="Text 14"/>
+          <p:cNvPr id="17" name="Text 15"/>
           <p:cNvSpPr/>
           <p:nvPr/>
         </p:nvSpPr>
@@ -13962,7 +15542,7 @@
       </p:sp>
       <p:sp>
         <p:nvSpPr>
-          <p:cNvPr id="17" name="Text 15"/>
+          <p:cNvPr id="18" name="Text 16"/>
           <p:cNvSpPr/>
           <p:nvPr/>
         </p:nvSpPr>
@@ -14001,18 +15581,18 @@
       </p:sp>
       <p:sp>
         <p:nvSpPr>
-          <p:cNvPr id="18" name="Shape 16"/>
-          <p:cNvSpPr/>
-          <p:nvPr/>
-        </p:nvSpPr>
-        <p:spPr>
-          <a:xfrm>
-            <a:off x="731520" y="5303520"/>
-            <a:ext cx="10698480" cy="914400"/>
+          <p:cNvPr id="19" name="Shape 17"/>
+          <p:cNvSpPr/>
+          <p:nvPr/>
+        </p:nvSpPr>
+        <p:spPr>
+          <a:xfrm>
+            <a:off x="731520" y="5257800"/>
+            <a:ext cx="10698480" cy="1051560"/>
           </a:xfrm>
           <a:prstGeom prst="roundRect">
             <a:avLst>
-              <a:gd name="adj" fmla="val 8000"/>
+              <a:gd name="adj" fmla="val 6957"/>
             </a:avLst>
           </a:prstGeom>
           <a:solidFill>
@@ -14028,40 +15608,79 @@
       </p:sp>
       <p:sp>
         <p:nvSpPr>
-          <p:cNvPr id="19" name="Text 17"/>
-          <p:cNvSpPr/>
-          <p:nvPr/>
-        </p:nvSpPr>
-        <p:spPr>
-          <a:xfrm>
-            <a:off x="1097280" y="5513832"/>
-            <a:ext cx="10058400" cy="457200"/>
-          </a:xfrm>
-          <a:prstGeom prst="rect">
-            <a:avLst/>
-          </a:prstGeom>
-          <a:noFill/>
-          <a:ln/>
-        </p:spPr>
-        <p:txBody>
-          <a:bodyPr wrap="square" lIns="0" tIns="0" rIns="0" bIns="0" rtlCol="0" anchor="ctr"/>
-          <a:lstStyle/>
-          <a:p>
-            <a:pPr indent="0" marL="0">
-              <a:buNone/>
-            </a:pPr>
-            <a:r>
-              <a:rPr lang="en-US" sz="1500" dirty="0">
-                <a:solidFill>
-                  <a:srgbClr val="16211F"/>
-                </a:solidFill>
-                <a:latin typeface="Yu Gothic" pitchFamily="34" charset="0"/>
-                <a:ea typeface="Yu Gothic" pitchFamily="34" charset="-122"/>
-                <a:cs typeface="Yu Gothic" pitchFamily="34" charset="-120"/>
-              </a:rPr>
-              <a:t>過剰な警告も直しました。ありふれた良性のめまいで「受診」が出ていた分を、相談レベルに戻しています。</a:t>
-            </a:r>
-            <a:endParaRPr lang="en-US" sz="1500" dirty="0"/>
+          <p:cNvPr id="20" name="Text 18"/>
+          <p:cNvSpPr/>
+          <p:nvPr/>
+        </p:nvSpPr>
+        <p:spPr>
+          <a:xfrm>
+            <a:off x="1097280" y="5413248"/>
+            <a:ext cx="10058400" cy="365760"/>
+          </a:xfrm>
+          <a:prstGeom prst="rect">
+            <a:avLst/>
+          </a:prstGeom>
+          <a:noFill/>
+          <a:ln/>
+        </p:spPr>
+        <p:txBody>
+          <a:bodyPr wrap="square" lIns="0" tIns="0" rIns="0" bIns="0" rtlCol="0" anchor="ctr"/>
+          <a:lstStyle/>
+          <a:p>
+            <a:pPr indent="0" marL="0">
+              <a:buNone/>
+            </a:pPr>
+            <a:r>
+              <a:rPr lang="en-US" sz="1700" b="1" dirty="0">
+                <a:solidFill>
+                  <a:srgbClr val="14504B"/>
+                </a:solidFill>
+                <a:latin typeface="Yu Gothic" pitchFamily="34" charset="0"/>
+                <a:ea typeface="Yu Gothic" pitchFamily="34" charset="-122"/>
+                <a:cs typeface="Yu Gothic" pitchFamily="34" charset="-120"/>
+              </a:rPr>
+              <a:t>例：「Centorの基準で3点以上」→「口を大きく開けられない」</a:t>
+            </a:r>
+            <a:endParaRPr lang="en-US" sz="1700" dirty="0"/>
+          </a:p>
+        </p:txBody>
+      </p:sp>
+      <p:sp>
+        <p:nvSpPr>
+          <p:cNvPr id="21" name="Text 19"/>
+          <p:cNvSpPr/>
+          <p:nvPr/>
+        </p:nvSpPr>
+        <p:spPr>
+          <a:xfrm>
+            <a:off x="1097280" y="5815584"/>
+            <a:ext cx="10058400" cy="365760"/>
+          </a:xfrm>
+          <a:prstGeom prst="rect">
+            <a:avLst/>
+          </a:prstGeom>
+          <a:noFill/>
+          <a:ln/>
+        </p:spPr>
+        <p:txBody>
+          <a:bodyPr wrap="square" lIns="0" tIns="0" rIns="0" bIns="0" rtlCol="0" anchor="ctr"/>
+          <a:lstStyle/>
+          <a:p>
+            <a:pPr indent="0" marL="0">
+              <a:buNone/>
+            </a:pPr>
+            <a:r>
+              <a:rPr lang="en-US" sz="1400" dirty="0">
+                <a:solidFill>
+                  <a:srgbClr val="5C6B68"/>
+                </a:solidFill>
+                <a:latin typeface="Yu Gothic" pitchFamily="34" charset="0"/>
+                <a:ea typeface="Yu Gothic" pitchFamily="34" charset="-122"/>
+                <a:cs typeface="Yu Gothic" pitchFamily="34" charset="-120"/>
+              </a:rPr>
+              <a:t>白苔を見る、リンパ節を触る。診察が要る指標は使えないので、見ればわかる質問に置き換えています。</a:t>
+            </a:r>
+            <a:endParaRPr lang="en-US" sz="1400" dirty="0"/>
           </a:p>
         </p:txBody>
       </p:sp>
@@ -15352,7 +16971,7 @@
                 <a:ea typeface="Yu Gothic" pitchFamily="34" charset="-122"/>
                 <a:cs typeface="Yu Gothic" pitchFamily="34" charset="-120"/>
               </a:rPr>
-              <a:t>できていないことも、そのまま開示します（最後の1枚）。</a:t>
+              <a:t>できていないことも、この章の最後にそのまま並べています。</a:t>
             </a:r>
             <a:endParaRPr lang="en-US" sz="1500" dirty="0"/>
           </a:p>

--- a/PharmaCare_紹介資料.pptx
+++ b/PharmaCare_紹介資料.pptx
@@ -137,7 +137,7 @@
           <a:lstStyle/>
           <a:p>
             <a:pPr>
-              <a:defRPr sz="1500" b="0" i="0" u="none" strike="noStrike">
+              <a:defRPr sz="1400" b="0" i="0" u="none" strike="noStrike">
                 <a:solidFill>
                   <a:srgbClr val="14504B"/>
                 </a:solidFill>
@@ -145,13 +145,13 @@
               </a:defRPr>
             </a:pPr>
             <a:r>
-              <a:rPr sz="1500" b="0" i="0" u="none" strike="noStrike">
+              <a:rPr sz="1400" b="0" i="0" u="none" strike="noStrike">
                 <a:solidFill>
                   <a:srgbClr val="14504B"/>
                 </a:solidFill>
                 <a:latin typeface="Yu Gothic"/>
               </a:rPr>
-              <a:t>尿蛋白が新たに出るリスク（オッズ比）</a:t>
+              <a:t>横ばいの群を1としたときの、尿蛋白の出やすさ</a:t>
             </a:r>
           </a:p>
         </c:rich>
@@ -175,14 +175,14 @@
               <c:strCache>
                 <c:ptCount val="1"/>
                 <c:pt idx="0">
-                  <c:v>オッズ比</c:v>
+                  <c:v>リスクの比</c:v>
                 </c:pt>
               </c:strCache>
             </c:strRef>
           </c:tx>
           <c:spPr>
             <a:solidFill>
-              <a:srgbClr val="3E8E84"/>
+              <a:srgbClr val="A8CFC9"/>
             </a:solidFill>
             <a:effectLst/>
           </c:spPr>
@@ -211,6 +211,39 @@
             <c:showBubbleSize val="0"/>
             <c:showLeaderLines val="0"/>
           </c:dLbls>
+          <c:dPt>
+            <c:idx val="0"/>
+            <c:invertIfNegative val="0"/>
+            <c:bubble3D val="0"/>
+            <c:spPr>
+              <a:solidFill>
+                <a:srgbClr val="A8CFC9"/>
+              </a:solidFill>
+              <a:effectLst/>
+            </c:spPr>
+          </c:dPt>
+          <c:dPt>
+            <c:idx val="1"/>
+            <c:invertIfNegative val="0"/>
+            <c:bubble3D val="0"/>
+            <c:spPr>
+              <a:solidFill>
+                <a:srgbClr val="A8CFC9"/>
+              </a:solidFill>
+              <a:effectLst/>
+            </c:spPr>
+          </c:dPt>
+          <c:dPt>
+            <c:idx val="2"/>
+            <c:invertIfNegative val="0"/>
+            <c:bubble3D val="0"/>
+            <c:spPr>
+              <a:solidFill>
+                <a:srgbClr val="3E8E84"/>
+              </a:solidFill>
+              <a:effectLst/>
+            </c:spPr>
+          </c:dPt>
           <c:cat>
             <c:multiLvlStrRef>
               <c:f>Sheet1!$A$2:$A$4</c:f>
@@ -7535,13 +7568,118 @@
       </p:sp>
       <p:sp>
         <p:nvSpPr>
-          <p:cNvPr id="6" name="Text 4"/>
-          <p:cNvSpPr/>
-          <p:nvPr/>
-        </p:nvSpPr>
-        <p:spPr>
-          <a:xfrm>
-            <a:off x="2286000" y="4892040"/>
+          <p:cNvPr id="6" name="Shape 4"/>
+          <p:cNvSpPr/>
+          <p:nvPr/>
+        </p:nvSpPr>
+        <p:spPr>
+          <a:xfrm>
+            <a:off x="2286000" y="4709160"/>
+            <a:ext cx="9326880" cy="1143000"/>
+          </a:xfrm>
+          <a:prstGeom prst="roundRect">
+            <a:avLst>
+              <a:gd name="adj" fmla="val 6400"/>
+            </a:avLst>
+          </a:prstGeom>
+          <a:solidFill>
+            <a:srgbClr val="1B635C"/>
+          </a:solidFill>
+          <a:ln w="12700">
+            <a:solidFill>
+              <a:srgbClr val="1B635C"/>
+            </a:solidFill>
+            <a:prstDash val="solid"/>
+          </a:ln>
+        </p:spPr>
+      </p:sp>
+      <p:sp>
+        <p:nvSpPr>
+          <p:cNvPr id="7" name="Text 5"/>
+          <p:cNvSpPr/>
+          <p:nvPr/>
+        </p:nvSpPr>
+        <p:spPr>
+          <a:xfrm>
+            <a:off x="2606040" y="4864608"/>
+            <a:ext cx="8778240" cy="365760"/>
+          </a:xfrm>
+          <a:prstGeom prst="rect">
+            <a:avLst/>
+          </a:prstGeom>
+          <a:noFill/>
+          <a:ln/>
+        </p:spPr>
+        <p:txBody>
+          <a:bodyPr wrap="square" lIns="0" tIns="0" rIns="0" bIns="0" rtlCol="0" anchor="ctr"/>
+          <a:lstStyle/>
+          <a:p>
+            <a:pPr indent="0" marL="0">
+              <a:buNone/>
+            </a:pPr>
+            <a:r>
+              <a:rPr lang="en-US" sz="1500" b="1" dirty="0">
+                <a:solidFill>
+                  <a:srgbClr val="D98A2B"/>
+                </a:solidFill>
+                <a:latin typeface="Yu Gothic" pitchFamily="34" charset="0"/>
+                <a:ea typeface="Yu Gothic" pitchFamily="34" charset="-122"/>
+                <a:cs typeface="Yu Gothic" pitchFamily="34" charset="-120"/>
+              </a:rPr>
+              <a:t>第1部と同じ考え方です。</a:t>
+            </a:r>
+            <a:endParaRPr lang="en-US" sz="1500" dirty="0"/>
+          </a:p>
+        </p:txBody>
+      </p:sp>
+      <p:sp>
+        <p:nvSpPr>
+          <p:cNvPr id="8" name="Text 6"/>
+          <p:cNvSpPr/>
+          <p:nvPr/>
+        </p:nvSpPr>
+        <p:spPr>
+          <a:xfrm>
+            <a:off x="2606040" y="5257800"/>
+            <a:ext cx="8778240" cy="411480"/>
+          </a:xfrm>
+          <a:prstGeom prst="rect">
+            <a:avLst/>
+          </a:prstGeom>
+          <a:noFill/>
+          <a:ln/>
+        </p:spPr>
+        <p:txBody>
+          <a:bodyPr wrap="square" lIns="0" tIns="0" rIns="0" bIns="0" rtlCol="0" anchor="ctr"/>
+          <a:lstStyle/>
+          <a:p>
+            <a:pPr indent="0" marL="0">
+              <a:buNone/>
+            </a:pPr>
+            <a:r>
+              <a:rPr lang="en-US" sz="1400" dirty="0">
+                <a:solidFill>
+                  <a:srgbClr val="FFFFFF"/>
+                </a:solidFill>
+                <a:latin typeface="Yu Gothic" pitchFamily="34" charset="0"/>
+                <a:ea typeface="Yu Gothic" pitchFamily="34" charset="-122"/>
+                <a:cs typeface="Yu Gothic" pitchFamily="34" charset="-120"/>
+              </a:rPr>
+              <a:t>すでに手元にあるデータを、その場の判断につなげる。第1部は施設の服薬記録で、第2部は健診の数値です。</a:t>
+            </a:r>
+            <a:endParaRPr lang="en-US" sz="1400" dirty="0"/>
+          </a:p>
+        </p:txBody>
+      </p:sp>
+      <p:sp>
+        <p:nvSpPr>
+          <p:cNvPr id="9" name="Text 7"/>
+          <p:cNvSpPr/>
+          <p:nvPr/>
+        </p:nvSpPr>
+        <p:spPr>
+          <a:xfrm>
+            <a:off x="2286000" y="6035040"/>
             <a:ext cx="9326880" cy="411480"/>
           </a:xfrm>
           <a:prstGeom prst="rect">
@@ -7558,9 +7696,9 @@
               <a:buNone/>
             </a:pPr>
             <a:r>
-              <a:rPr lang="en-US" sz="1500" dirty="0">
-                <a:solidFill>
-                  <a:srgbClr val="FFFFFF"/>
+              <a:rPr lang="en-US" sz="1400" dirty="0">
+                <a:solidFill>
+                  <a:srgbClr val="A8CFC9"/>
                 </a:solidFill>
                 <a:latin typeface="Yu Gothic" pitchFamily="34" charset="0"/>
                 <a:ea typeface="Yu Gothic" pitchFamily="34" charset="-122"/>
@@ -7568,7 +7706,7 @@
               </a:rPr>
               <a:t>事例：1年間のBRI変化と尿蛋白の新規発現（宮崎県延岡市 2020–2021年）</a:t>
             </a:r>
-            <a:endParaRPr lang="en-US" sz="1500" dirty="0"/>
+            <a:endParaRPr lang="en-US" sz="1400" dirty="0"/>
           </a:p>
         </p:txBody>
       </p:sp>
@@ -8765,8 +8903,8 @@
           <p:nvPr/>
         </p:nvGraphicFramePr>
         <p:xfrm>
-          <a:off x="731520" y="3886200"/>
-          <a:ext cx="6035040" cy="2286000"/>
+          <a:off x="731520" y="3840480"/>
+          <a:ext cx="6035040" cy="2011680"/>
         </p:xfrm>
         <a:graphic xmlns:a="http://schemas.openxmlformats.org/drawingml/2006/main">
           <a:graphicData uri="http://schemas.openxmlformats.org/drawingml/2006/chart">
@@ -8776,18 +8914,60 @@
       </p:graphicFrame>
       <p:sp>
         <p:nvSpPr>
-          <p:cNvPr id="14" name="Shape 11"/>
-          <p:cNvSpPr/>
-          <p:nvPr/>
-        </p:nvSpPr>
-        <p:spPr>
-          <a:xfrm>
-            <a:off x="7040880" y="3886200"/>
-            <a:ext cx="4389120" cy="2286000"/>
+          <p:cNvPr id="14" name="Text 11"/>
+          <p:cNvSpPr/>
+          <p:nvPr/>
+        </p:nvSpPr>
+        <p:spPr>
+          <a:xfrm>
+            <a:off x="731520" y="5897880"/>
+            <a:ext cx="6126480" cy="502920"/>
+          </a:xfrm>
+          <a:prstGeom prst="rect">
+            <a:avLst/>
+          </a:prstGeom>
+          <a:noFill/>
+          <a:ln/>
+        </p:spPr>
+        <p:txBody>
+          <a:bodyPr wrap="square" lIns="0" tIns="0" rIns="0" bIns="0" rtlCol="0" anchor="ctr"/>
+          <a:lstStyle/>
+          <a:p>
+            <a:pPr indent="0" marL="0">
+              <a:lnSpc>
+                <a:spcPct val="120000"/>
+              </a:lnSpc>
+              <a:buNone/>
+            </a:pPr>
+            <a:r>
+              <a:rPr lang="en-US" sz="1200" dirty="0">
+                <a:solidFill>
+                  <a:srgbClr val="5C6B68"/>
+                </a:solidFill>
+                <a:latin typeface="Yu Gothic" pitchFamily="34" charset="0"/>
+                <a:ea typeface="Yu Gothic" pitchFamily="34" charset="-122"/>
+                <a:cs typeface="Yu Gothic" pitchFamily="34" charset="-120"/>
+              </a:rPr>
+              <a:t>「増えた」だけが統計的に確かめられた差です。「減った」は 1.16 と出ていますが、ばらつきの範囲（0.85〜1.58）が1をまたぐため、差があるとは言えません。</a:t>
+            </a:r>
+            <a:endParaRPr lang="en-US" sz="1200" dirty="0"/>
+          </a:p>
+        </p:txBody>
+      </p:sp>
+      <p:sp>
+        <p:nvSpPr>
+          <p:cNvPr id="15" name="Shape 12"/>
+          <p:cNvSpPr/>
+          <p:nvPr/>
+        </p:nvSpPr>
+        <p:spPr>
+          <a:xfrm>
+            <a:off x="7040880" y="3840480"/>
+            <a:ext cx="4389120" cy="2560320"/>
           </a:xfrm>
           <a:prstGeom prst="roundRect">
             <a:avLst>
-              <a:gd name="adj" fmla="val 3200"/>
+              <a:gd name="adj" fmla="val 2857"/>
             </a:avLst>
           </a:prstGeom>
           <a:solidFill>
@@ -8803,13 +8983,13 @@
       </p:sp>
       <p:sp>
         <p:nvSpPr>
-          <p:cNvPr id="15" name="Text 12"/>
-          <p:cNvSpPr/>
-          <p:nvPr/>
-        </p:nvSpPr>
-        <p:spPr>
-          <a:xfrm>
-            <a:off x="7315200" y="4096512"/>
+          <p:cNvPr id="16" name="Text 13"/>
+          <p:cNvSpPr/>
+          <p:nvPr/>
+        </p:nvSpPr>
+        <p:spPr>
+          <a:xfrm>
+            <a:off x="7315200" y="4023360"/>
             <a:ext cx="3931920" cy="365760"/>
           </a:xfrm>
           <a:prstGeom prst="rect">
@@ -8842,13 +9022,13 @@
       </p:sp>
       <p:sp>
         <p:nvSpPr>
-          <p:cNvPr id="16" name="Text 13"/>
-          <p:cNvSpPr/>
-          <p:nvPr/>
-        </p:nvSpPr>
-        <p:spPr>
-          <a:xfrm>
-            <a:off x="7315200" y="4526280"/>
+          <p:cNvPr id="17" name="Text 14"/>
+          <p:cNvSpPr/>
+          <p:nvPr/>
+        </p:nvSpPr>
+        <p:spPr>
+          <a:xfrm>
+            <a:off x="7315200" y="4434840"/>
             <a:ext cx="3931920" cy="731520"/>
           </a:xfrm>
           <a:prstGeom prst="rect">
@@ -8904,14 +9084,53 @@
       </p:sp>
       <p:sp>
         <p:nvSpPr>
-          <p:cNvPr id="17" name="Text 14"/>
-          <p:cNvSpPr/>
-          <p:nvPr/>
-        </p:nvSpPr>
-        <p:spPr>
-          <a:xfrm>
-            <a:off x="7315200" y="5349240"/>
-            <a:ext cx="3931920" cy="685800"/>
+          <p:cNvPr id="18" name="Text 15"/>
+          <p:cNvSpPr/>
+          <p:nvPr/>
+        </p:nvSpPr>
+        <p:spPr>
+          <a:xfrm>
+            <a:off x="7315200" y="5193792"/>
+            <a:ext cx="3931920" cy="320040"/>
+          </a:xfrm>
+          <a:prstGeom prst="rect">
+            <a:avLst/>
+          </a:prstGeom>
+          <a:noFill/>
+          <a:ln/>
+        </p:spPr>
+        <p:txBody>
+          <a:bodyPr wrap="square" lIns="0" tIns="0" rIns="0" bIns="0" rtlCol="0" anchor="ctr"/>
+          <a:lstStyle/>
+          <a:p>
+            <a:pPr indent="0" marL="0">
+              <a:buNone/>
+            </a:pPr>
+            <a:r>
+              <a:rPr lang="en-US" sz="1200" b="1" dirty="0">
+                <a:solidFill>
+                  <a:srgbClr val="1F6F78"/>
+                </a:solidFill>
+                <a:latin typeface="Yu Gothic" pitchFamily="34" charset="0"/>
+                <a:ea typeface="Yu Gothic" pitchFamily="34" charset="-122"/>
+                <a:cs typeface="Yu Gothic" pitchFamily="34" charset="-120"/>
+              </a:rPr>
+              <a:t>1.38倍とは</a:t>
+            </a:r>
+            <a:endParaRPr lang="en-US" sz="1200" dirty="0"/>
+          </a:p>
+        </p:txBody>
+      </p:sp>
+      <p:sp>
+        <p:nvSpPr>
+          <p:cNvPr id="19" name="Text 16"/>
+          <p:cNvSpPr/>
+          <p:nvPr/>
+        </p:nvSpPr>
+        <p:spPr>
+          <a:xfrm>
+            <a:off x="7315200" y="5486400"/>
+            <a:ext cx="4023360" cy="868680"/>
           </a:xfrm>
           <a:prstGeom prst="rect">
             <a:avLst/>
@@ -8932,13 +9151,13 @@
             <a:r>
               <a:rPr lang="en-US" sz="1300" dirty="0">
                 <a:solidFill>
-                  <a:srgbClr val="5C6B68"/>
-                </a:solidFill>
-                <a:latin typeface="Yu Gothic" pitchFamily="34" charset="0"/>
-                <a:ea typeface="Yu Gothic" pitchFamily="34" charset="-122"/>
-                <a:cs typeface="Yu Gothic" pitchFamily="34" charset="-120"/>
-              </a:rPr>
-              <a:t>BRIが増えた群のリスク上昇は、</a:t>
+                  <a:srgbClr val="16211F"/>
+                </a:solidFill>
+                <a:latin typeface="Yu Gothic" pitchFamily="34" charset="0"/>
+                <a:ea typeface="Yu Gothic" pitchFamily="34" charset="-122"/>
+                <a:cs typeface="Yu Gothic" pitchFamily="34" charset="-120"/>
+              </a:rPr>
+              <a:t>横ばいだった人に比べ、尿蛋白が</a:t>
             </a:r>
             <a:endParaRPr lang="en-US" sz="1300" dirty="0"/>
           </a:p>
@@ -8952,13 +9171,53 @@
             <a:r>
               <a:rPr lang="en-US" sz="1300" dirty="0">
                 <a:solidFill>
-                  <a:srgbClr val="5C6B68"/>
-                </a:solidFill>
-                <a:latin typeface="Yu Gothic" pitchFamily="34" charset="0"/>
-                <a:ea typeface="Yu Gothic" pitchFamily="34" charset="-122"/>
-                <a:cs typeface="Yu Gothic" pitchFamily="34" charset="-120"/>
-              </a:rPr>
-              <a:t>BMIの変化を調整しても残りました。</a:t>
+                  <a:srgbClr val="16211F"/>
+                </a:solidFill>
+                <a:latin typeface="Yu Gothic" pitchFamily="34" charset="0"/>
+                <a:ea typeface="Yu Gothic" pitchFamily="34" charset="-122"/>
+                <a:cs typeface="Yu Gothic" pitchFamily="34" charset="-120"/>
+              </a:rPr>
+              <a:t>新たに出た人の割合が約1.4倍。</a:t>
+            </a:r>
+            <a:endParaRPr lang="en-US" sz="1300" dirty="0"/>
+          </a:p>
+          <a:p>
+            <a:pPr indent="0" marL="0">
+              <a:lnSpc>
+                <a:spcPct val="120000"/>
+              </a:lnSpc>
+              <a:buNone/>
+            </a:pPr>
+            <a:r>
+              <a:rPr lang="en-US" sz="1300" dirty="0">
+                <a:solidFill>
+                  <a:srgbClr val="16211F"/>
+                </a:solidFill>
+                <a:latin typeface="Yu Gothic" pitchFamily="34" charset="0"/>
+                <a:ea typeface="Yu Gothic" pitchFamily="34" charset="-122"/>
+                <a:cs typeface="Yu Gothic" pitchFamily="34" charset="-120"/>
+              </a:rPr>
+              <a:t>体重やBMIの変化を考慮しても</a:t>
+            </a:r>
+            <a:endParaRPr lang="en-US" sz="1300" dirty="0"/>
+          </a:p>
+          <a:p>
+            <a:pPr indent="0" marL="0">
+              <a:lnSpc>
+                <a:spcPct val="120000"/>
+              </a:lnSpc>
+              <a:buNone/>
+            </a:pPr>
+            <a:r>
+              <a:rPr lang="en-US" sz="1300" dirty="0">
+                <a:solidFill>
+                  <a:srgbClr val="16211F"/>
+                </a:solidFill>
+                <a:latin typeface="Yu Gothic" pitchFamily="34" charset="0"/>
+                <a:ea typeface="Yu Gothic" pitchFamily="34" charset="-122"/>
+                <a:cs typeface="Yu Gothic" pitchFamily="34" charset="-120"/>
+              </a:rPr>
+              <a:t>残った差です。</a:t>
             </a:r>
             <a:endParaRPr lang="en-US" sz="1300" dirty="0"/>
           </a:p>
@@ -10111,8 +10370,8 @@
         </p:nvSpPr>
         <p:spPr>
           <a:xfrm>
-            <a:off x="6720840" y="2788920"/>
-            <a:ext cx="4572000" cy="731520"/>
+            <a:off x="6720840" y="2697480"/>
+            <a:ext cx="4572000" cy="621792"/>
           </a:xfrm>
           <a:prstGeom prst="rect">
             <a:avLst/>
@@ -10126,12 +10385,12 @@
           <a:p>
             <a:pPr indent="0" marL="0">
               <a:lnSpc>
-                <a:spcPct val="120000"/>
+                <a:spcPct val="115000"/>
               </a:lnSpc>
               <a:buNone/>
             </a:pPr>
             <a:r>
-              <a:rPr lang="en-US" sz="1400" dirty="0">
+              <a:rPr lang="en-US" sz="1300" dirty="0">
                 <a:solidFill>
                   <a:srgbClr val="5A5044"/>
                 </a:solidFill>
@@ -10141,17 +10400,17 @@
               </a:rPr>
               <a:t>BRIを下げれば腎臓が守れる、</a:t>
             </a:r>
-            <a:endParaRPr lang="en-US" sz="1400" dirty="0"/>
+            <a:endParaRPr lang="en-US" sz="1300" dirty="0"/>
           </a:p>
           <a:p>
             <a:pPr indent="0" marL="0">
               <a:lnSpc>
-                <a:spcPct val="120000"/>
+                <a:spcPct val="115000"/>
               </a:lnSpc>
               <a:buNone/>
             </a:pPr>
             <a:r>
-              <a:rPr lang="en-US" sz="1400" dirty="0">
+              <a:rPr lang="en-US" sz="1300" dirty="0">
                 <a:solidFill>
                   <a:srgbClr val="5A5044"/>
                 </a:solidFill>
@@ -10161,7 +10420,7 @@
               </a:rPr>
               <a:t>という因果関係</a:t>
             </a:r>
-            <a:endParaRPr lang="en-US" sz="1400" dirty="0"/>
+            <a:endParaRPr lang="en-US" sz="1300" dirty="0"/>
           </a:p>
         </p:txBody>
       </p:sp>
@@ -10173,8 +10432,8 @@
         </p:nvSpPr>
         <p:spPr>
           <a:xfrm>
-            <a:off x="6720840" y="3611880"/>
-            <a:ext cx="4572000" cy="731520"/>
+            <a:off x="6720840" y="3355848"/>
+            <a:ext cx="4572000" cy="621792"/>
           </a:xfrm>
           <a:prstGeom prst="rect">
             <a:avLst/>
@@ -10188,12 +10447,12 @@
           <a:p>
             <a:pPr indent="0" marL="0">
               <a:lnSpc>
-                <a:spcPct val="120000"/>
+                <a:spcPct val="115000"/>
               </a:lnSpc>
               <a:buNone/>
             </a:pPr>
             <a:r>
-              <a:rPr lang="en-US" sz="1400" dirty="0">
+              <a:rPr lang="en-US" sz="1300" dirty="0">
                 <a:solidFill>
                   <a:srgbClr val="5A5044"/>
                 </a:solidFill>
@@ -10201,19 +10460,19 @@
                 <a:ea typeface="Yu Gothic" pitchFamily="34" charset="-122"/>
                 <a:cs typeface="Yu Gothic" pitchFamily="34" charset="-120"/>
               </a:rPr>
-              <a:t>1年の観察なので、一時的な</a:t>
-            </a:r>
-            <a:endParaRPr lang="en-US" sz="1400" dirty="0"/>
+              <a:t>「減った人も危ない」とは</a:t>
+            </a:r>
+            <a:endParaRPr lang="en-US" sz="1300" dirty="0"/>
           </a:p>
           <a:p>
             <a:pPr indent="0" marL="0">
               <a:lnSpc>
-                <a:spcPct val="120000"/>
+                <a:spcPct val="115000"/>
               </a:lnSpc>
               <a:buNone/>
             </a:pPr>
             <a:r>
-              <a:rPr lang="en-US" sz="1400" dirty="0">
+              <a:rPr lang="en-US" sz="1300" dirty="0">
                 <a:solidFill>
                   <a:srgbClr val="5A5044"/>
                 </a:solidFill>
@@ -10221,9 +10480,9 @@
                 <a:ea typeface="Yu Gothic" pitchFamily="34" charset="-122"/>
                 <a:cs typeface="Yu Gothic" pitchFamily="34" charset="-120"/>
               </a:rPr>
-              <a:t>変動の影響もありうる</a:t>
-            </a:r>
-            <a:endParaRPr lang="en-US" sz="1400" dirty="0"/>
+              <a:t>言えない（差が確かめられていない）</a:t>
+            </a:r>
+            <a:endParaRPr lang="en-US" sz="1300" dirty="0"/>
           </a:p>
         </p:txBody>
       </p:sp>
@@ -10235,8 +10494,8 @@
         </p:nvSpPr>
         <p:spPr>
           <a:xfrm>
-            <a:off x="6720840" y="4434840"/>
-            <a:ext cx="4572000" cy="731520"/>
+            <a:off x="6720840" y="4014216"/>
+            <a:ext cx="4572000" cy="621792"/>
           </a:xfrm>
           <a:prstGeom prst="rect">
             <a:avLst/>
@@ -10250,12 +10509,12 @@
           <a:p>
             <a:pPr indent="0" marL="0">
               <a:lnSpc>
-                <a:spcPct val="120000"/>
+                <a:spcPct val="115000"/>
               </a:lnSpc>
               <a:buNone/>
             </a:pPr>
             <a:r>
-              <a:rPr lang="en-US" sz="1400" dirty="0">
+              <a:rPr lang="en-US" sz="1300" dirty="0">
                 <a:solidFill>
                   <a:srgbClr val="5A5044"/>
                 </a:solidFill>
@@ -10263,19 +10522,19 @@
                 <a:ea typeface="Yu Gothic" pitchFamily="34" charset="-122"/>
                 <a:cs typeface="Yu Gothic" pitchFamily="34" charset="-120"/>
               </a:rPr>
-              <a:t>延岡市の受診者が対象。</a:t>
-            </a:r>
-            <a:endParaRPr lang="en-US" sz="1400" dirty="0"/>
+              <a:t>痩せた理由が生活改善なのか、</a:t>
+            </a:r>
+            <a:endParaRPr lang="en-US" sz="1300" dirty="0"/>
           </a:p>
           <a:p>
             <a:pPr indent="0" marL="0">
               <a:lnSpc>
-                <a:spcPct val="120000"/>
+                <a:spcPct val="115000"/>
               </a:lnSpc>
               <a:buNone/>
             </a:pPr>
             <a:r>
-              <a:rPr lang="en-US" sz="1400" dirty="0">
+              <a:rPr lang="en-US" sz="1300" dirty="0">
                 <a:solidFill>
                   <a:srgbClr val="5A5044"/>
                 </a:solidFill>
@@ -10283,15 +10542,77 @@
                 <a:ea typeface="Yu Gothic" pitchFamily="34" charset="-122"/>
                 <a:cs typeface="Yu Gothic" pitchFamily="34" charset="-120"/>
               </a:rPr>
+              <a:t>病気や低栄養なのかは区別できない</a:t>
+            </a:r>
+            <a:endParaRPr lang="en-US" sz="1300" dirty="0"/>
+          </a:p>
+        </p:txBody>
+      </p:sp>
+      <p:sp>
+        <p:nvSpPr>
+          <p:cNvPr id="12" name="Text 10"/>
+          <p:cNvSpPr/>
+          <p:nvPr/>
+        </p:nvSpPr>
+        <p:spPr>
+          <a:xfrm>
+            <a:off x="6720840" y="4672584"/>
+            <a:ext cx="4572000" cy="621792"/>
+          </a:xfrm>
+          <a:prstGeom prst="rect">
+            <a:avLst/>
+          </a:prstGeom>
+          <a:noFill/>
+          <a:ln/>
+        </p:spPr>
+        <p:txBody>
+          <a:bodyPr wrap="square" lIns="0" tIns="0" rIns="0" bIns="0" rtlCol="0" anchor="ctr"/>
+          <a:lstStyle/>
+          <a:p>
+            <a:pPr indent="0" marL="0">
+              <a:lnSpc>
+                <a:spcPct val="115000"/>
+              </a:lnSpc>
+              <a:buNone/>
+            </a:pPr>
+            <a:r>
+              <a:rPr lang="en-US" sz="1300" dirty="0">
+                <a:solidFill>
+                  <a:srgbClr val="5A5044"/>
+                </a:solidFill>
+                <a:latin typeface="Yu Gothic" pitchFamily="34" charset="0"/>
+                <a:ea typeface="Yu Gothic" pitchFamily="34" charset="-122"/>
+                <a:cs typeface="Yu Gothic" pitchFamily="34" charset="-120"/>
+              </a:rPr>
+              <a:t>1年・延岡市の受診者が対象。</a:t>
+            </a:r>
+            <a:endParaRPr lang="en-US" sz="1300" dirty="0"/>
+          </a:p>
+          <a:p>
+            <a:pPr indent="0" marL="0">
+              <a:lnSpc>
+                <a:spcPct val="115000"/>
+              </a:lnSpc>
+              <a:buNone/>
+            </a:pPr>
+            <a:r>
+              <a:rPr lang="en-US" sz="1300" dirty="0">
+                <a:solidFill>
+                  <a:srgbClr val="5A5044"/>
+                </a:solidFill>
+                <a:latin typeface="Yu Gothic" pitchFamily="34" charset="0"/>
+                <a:ea typeface="Yu Gothic" pitchFamily="34" charset="-122"/>
+                <a:cs typeface="Yu Gothic" pitchFamily="34" charset="-120"/>
+              </a:rPr>
               <a:t>そのまま他地域には広げられない</a:t>
             </a:r>
-            <a:endParaRPr lang="en-US" sz="1400" dirty="0"/>
-          </a:p>
-        </p:txBody>
-      </p:sp>
-      <p:sp>
-        <p:nvSpPr>
-          <p:cNvPr id="12" name="Text 10"/>
+            <a:endParaRPr lang="en-US" sz="1300" dirty="0"/>
+          </a:p>
+        </p:txBody>
+      </p:sp>
+      <p:sp>
+        <p:nvSpPr>
+          <p:cNvPr id="13" name="Text 11"/>
           <p:cNvSpPr/>
           <p:nvPr/>
         </p:nvSpPr>
@@ -13882,7 +14203,7 @@
                 <a:ea typeface="Yu Gothic" pitchFamily="34" charset="-122"/>
                 <a:cs typeface="Yu Gothic" pitchFamily="34" charset="-120"/>
               </a:rPr>
-              <a:t>症状トリアージ</a:t>
+              <a:t>体調不良のとき、様子を見てよいか迷わない</a:t>
             </a:r>
             <a:endParaRPr lang="en-US" sz="3600" dirty="0"/>
           </a:p>
@@ -13921,7 +14242,7 @@
                 <a:ea typeface="Yu Gothic" pitchFamily="34" charset="-122"/>
                 <a:cs typeface="Yu Gothic" pitchFamily="34" charset="-120"/>
               </a:rPr>
-              <a:t>体調不良のとき、その場で対応の目安がわかる</a:t>
+              <a:t>症状トリアージ ― 聞き取った内容から、対応の目安を3段階で示します</a:t>
             </a:r>
             <a:endParaRPr lang="en-US" sz="1600" dirty="0"/>
           </a:p>
@@ -14412,7 +14733,7 @@
                 <a:ea typeface="Yu Gothic" pitchFamily="34" charset="-122"/>
                 <a:cs typeface="Yu Gothic" pitchFamily="34" charset="-120"/>
               </a:rPr>
-              <a:t>OTC対応可</a:t>
+              <a:t>市販薬で様子を見る</a:t>
             </a:r>
             <a:endParaRPr lang="en-US" sz="1700" dirty="0"/>
           </a:p>
@@ -14451,7 +14772,7 @@
                 <a:ea typeface="Yu Gothic" pitchFamily="34" charset="-122"/>
                 <a:cs typeface="Yu Gothic" pitchFamily="34" charset="-120"/>
               </a:rPr>
-              <a:t>市販薬で様子を見る</a:t>
+              <a:t>緊急性は低いと考えられる</a:t>
             </a:r>
             <a:endParaRPr lang="en-US" sz="1300" dirty="0"/>
           </a:p>
@@ -14581,7 +14902,7 @@
                 <a:ea typeface="Yu Gothic" pitchFamily="34" charset="-122"/>
                 <a:cs typeface="Yu Gothic" pitchFamily="34" charset="-120"/>
               </a:rPr>
-              <a:t>ワンタップで相談へ</a:t>
+              <a:t>ワンタップで相談へつながる</a:t>
             </a:r>
             <a:endParaRPr lang="en-US" sz="1300" dirty="0"/>
           </a:p>
@@ -14711,7 +15032,7 @@
                 <a:ea typeface="Yu Gothic" pitchFamily="34" charset="-122"/>
                 <a:cs typeface="Yu Gothic" pitchFamily="34" charset="-120"/>
               </a:rPr>
-              <a:t>速やかに受診手配</a:t>
+              <a:t>速やかに受診の手配を</a:t>
             </a:r>
             <a:endParaRPr lang="en-US" sz="1300" dirty="0"/>
           </a:p>

--- a/PharmaCare_紹介資料.pptx
+++ b/PharmaCare_紹介資料.pptx
@@ -27,9 +27,10 @@
     <p:sldId id="275" r:id="rId21"/>
     <p:sldId id="276" r:id="rId22"/>
     <p:sldId id="277" r:id="rId23"/>
+    <p:sldId id="278" r:id="rId24"/>
   </p:sldIdLst>
   <p:notesMasterIdLst>
-    <p:notesMasterId r:id="rId24"/>
+    <p:notesMasterId r:id="rId25"/>
   </p:notesMasterIdLst>
   <p:sldSz cx="12192000" cy="6858000"/>
   <p:notesSz cx="6858000" cy="12192000"/>
@@ -1443,7 +1444,7 @@
           <a:p>
             <a:r>
               <a:rPr lang="en-US" dirty="0"/>
-              <a:t>隠さず出すことが、医療情報を預かる事業者としての信頼につながる。指摘される前に自分から言う。</a:t>
+              <a:t>「東京に置いています」で終わらせない。なぜ東京でなければならないかまで言えると、預ける側は判断できる。</a:t>
             </a:r>
             <a:endParaRPr lang="en-US" dirty="0"/>
           </a:p>
@@ -1531,7 +1532,7 @@
           <a:p>
             <a:r>
               <a:rPr lang="en-US" dirty="0"/>
-              <a:t/>
+              <a:t>隠さず出すことが、医療情報を預かる事業者としての信頼につながる。指摘される前に自分から言う。</a:t>
             </a:r>
             <a:endParaRPr lang="en-US" dirty="0"/>
           </a:p>
@@ -1883,7 +1884,7 @@
           <a:p>
             <a:r>
               <a:rPr lang="en-US" dirty="0"/>
-              <a:t>この資料の中心メッセージ。データ→研究→現場の実践、という流れを示す。</a:t>
+              <a:t/>
             </a:r>
             <a:endParaRPr lang="en-US" dirty="0"/>
           </a:p>
@@ -1971,7 +1972,7 @@
           <a:p>
             <a:r>
               <a:rPr lang="en-US" dirty="0"/>
-              <a:t/>
+              <a:t>この資料の中心メッセージ。データ→研究→現場の実践、という流れを示す。</a:t>
             </a:r>
             <a:endParaRPr lang="en-US" dirty="0"/>
           </a:p>
@@ -2083,6 +2084,94 @@
             <a:fld id="{F7021451-1387-4CA6-816F-3879F97B5CBC}" type="slidenum">
               <a:rPr lang="en-US"/>
               <a:t>22</a:t>
+            </a:fld>
+            <a:endParaRPr lang="en-US"/>
+          </a:p>
+        </p:txBody>
+      </p:sp>
+    </p:spTree>
+    <p:extLst>
+      <p:ext uri="{BB962C8B-B14F-4D97-AF65-F5344CB8AC3E}">
+        <p14:creationId xmlns:p14="http://schemas.microsoft.com/office/powerpoint/2010/main" val="1024086991"/>
+      </p:ext>
+    </p:extLst>
+  </p:cSld>
+  <p:clrMapOvr>
+    <a:masterClrMapping/>
+  </p:clrMapOvr>
+</p:notes>
+</file>
+
+<file path=ppt/notesSlides/notesSlide23.xml><?xml version="1.0" encoding="utf-8"?>
+<p:notes xmlns:a="http://schemas.openxmlformats.org/drawingml/2006/main" xmlns:r="http://schemas.openxmlformats.org/officeDocument/2006/relationships" xmlns:p="http://schemas.openxmlformats.org/presentationml/2006/main">
+  <p:cSld>
+    <p:spTree>
+      <p:nvGrpSpPr>
+        <p:cNvPr id="1" name=""/>
+        <p:cNvGrpSpPr/>
+        <p:nvPr/>
+      </p:nvGrpSpPr>
+      <p:grpSpPr>
+        <a:xfrm>
+          <a:off x="0" y="0"/>
+          <a:ext cx="0" cy="0"/>
+          <a:chOff x="0" y="0"/>
+          <a:chExt cx="0" cy="0"/>
+        </a:xfrm>
+      </p:grpSpPr>
+      <p:sp>
+        <p:nvSpPr>
+          <p:cNvPr id="2" name="Slide Image Placeholder 1"/>
+          <p:cNvSpPr>
+            <a:spLocks noGrp="1" noRot="1" noChangeAspect="1"/>
+          </p:cNvSpPr>
+          <p:nvPr>
+            <p:ph type="sldImg"/>
+          </p:nvPr>
+        </p:nvSpPr>
+        <p:spPr/>
+      </p:sp>
+      <p:sp>
+        <p:nvSpPr>
+          <p:cNvPr id="3" name="Notes Placeholder 2"/>
+          <p:cNvSpPr>
+            <a:spLocks noGrp="1"/>
+          </p:cNvSpPr>
+          <p:nvPr>
+            <p:ph type="body" idx="1"/>
+          </p:nvPr>
+        </p:nvSpPr>
+        <p:spPr/>
+        <p:txBody>
+          <a:bodyPr/>
+          <a:lstStyle/>
+          <a:p>
+            <a:r>
+              <a:rPr lang="en-US" dirty="0"/>
+              <a:t/>
+            </a:r>
+            <a:endParaRPr lang="en-US" dirty="0"/>
+          </a:p>
+        </p:txBody>
+      </p:sp>
+      <p:sp>
+        <p:nvSpPr>
+          <p:cNvPr id="4" name="Slide Number Placeholder 3"/>
+          <p:cNvSpPr>
+            <a:spLocks noGrp="1"/>
+          </p:cNvSpPr>
+          <p:nvPr>
+            <p:ph type="sldNum" sz="quarter" idx="10"/>
+          </p:nvPr>
+        </p:nvSpPr>
+        <p:spPr/>
+        <p:txBody>
+          <a:bodyPr/>
+          <a:lstStyle/>
+          <a:p>
+            <a:fld id="{F7021451-1387-4CA6-816F-3879F97B5CBC}" type="slidenum">
+              <a:rPr lang="en-US"/>
+              <a:t>23</a:t>
             </a:fld>
             <a:endParaRPr lang="en-US"/>
           </a:p>
@@ -9708,7 +9797,7 @@
                 <a:ea typeface="Yu Gothic" pitchFamily="34" charset="-122"/>
                 <a:cs typeface="Yu Gothic" pitchFamily="34" charset="-120"/>
               </a:rPr>
-              <a:t>できていないこと</a:t>
+              <a:t>どこに置いて、なぜそこなのか</a:t>
             </a:r>
             <a:endParaRPr lang="en-US" sz="3600" dirty="0"/>
           </a:p>
@@ -9747,7 +9836,7 @@
                 <a:ea typeface="Yu Gothic" pitchFamily="34" charset="-122"/>
                 <a:cs typeface="Yu Gothic" pitchFamily="34" charset="-120"/>
               </a:rPr>
-              <a:t>導入をご検討いただく前に、こちらからお伝えします</a:t>
+              <a:t>「記録します」「保存します」の中身を、保管先まで開きます</a:t>
             </a:r>
             <a:endParaRPr lang="en-US" sz="1600" dirty="0"/>
           </a:p>
@@ -9755,18 +9844,135 @@
       </p:sp>
       <p:sp>
         <p:nvSpPr>
-          <p:cNvPr id="4" name="Shape 2"/>
-          <p:cNvSpPr/>
-          <p:nvPr/>
-        </p:nvSpPr>
-        <p:spPr>
-          <a:xfrm>
-            <a:off x="731520" y="1965960"/>
-            <a:ext cx="10698480" cy="1207008"/>
+          <p:cNvPr id="4" name="Text 2"/>
+          <p:cNvSpPr/>
+          <p:nvPr/>
+        </p:nvSpPr>
+        <p:spPr>
+          <a:xfrm>
+            <a:off x="1005840" y="1783080"/>
+            <a:ext cx="2743200" cy="292608"/>
+          </a:xfrm>
+          <a:prstGeom prst="rect">
+            <a:avLst/>
+          </a:prstGeom>
+          <a:noFill/>
+          <a:ln/>
+        </p:spPr>
+        <p:txBody>
+          <a:bodyPr wrap="square" lIns="0" tIns="0" rIns="0" bIns="0" rtlCol="0" anchor="ctr"/>
+          <a:lstStyle/>
+          <a:p>
+            <a:pPr indent="0" marL="0">
+              <a:buNone/>
+            </a:pPr>
+            <a:r>
+              <a:rPr lang="en-US" sz="1300" b="1" dirty="0">
+                <a:solidFill>
+                  <a:srgbClr val="5C6B68"/>
+                </a:solidFill>
+                <a:latin typeface="Yu Gothic" pitchFamily="34" charset="0"/>
+                <a:ea typeface="Yu Gothic" pitchFamily="34" charset="-122"/>
+                <a:cs typeface="Yu Gothic" pitchFamily="34" charset="-120"/>
+              </a:rPr>
+              <a:t>何を</a:t>
+            </a:r>
+            <a:endParaRPr lang="en-US" sz="1300" dirty="0"/>
+          </a:p>
+        </p:txBody>
+      </p:sp>
+      <p:sp>
+        <p:nvSpPr>
+          <p:cNvPr id="5" name="Text 3"/>
+          <p:cNvSpPr/>
+          <p:nvPr/>
+        </p:nvSpPr>
+        <p:spPr>
+          <a:xfrm>
+            <a:off x="3931920" y="1783080"/>
+            <a:ext cx="3017520" cy="292608"/>
+          </a:xfrm>
+          <a:prstGeom prst="rect">
+            <a:avLst/>
+          </a:prstGeom>
+          <a:noFill/>
+          <a:ln/>
+        </p:spPr>
+        <p:txBody>
+          <a:bodyPr wrap="square" lIns="0" tIns="0" rIns="0" bIns="0" rtlCol="0" anchor="ctr"/>
+          <a:lstStyle/>
+          <a:p>
+            <a:pPr indent="0" marL="0">
+              <a:buNone/>
+            </a:pPr>
+            <a:r>
+              <a:rPr lang="en-US" sz="1300" b="1" dirty="0">
+                <a:solidFill>
+                  <a:srgbClr val="5C6B68"/>
+                </a:solidFill>
+                <a:latin typeface="Yu Gothic" pitchFamily="34" charset="0"/>
+                <a:ea typeface="Yu Gothic" pitchFamily="34" charset="-122"/>
+                <a:cs typeface="Yu Gothic" pitchFamily="34" charset="-120"/>
+              </a:rPr>
+              <a:t>どこに</a:t>
+            </a:r>
+            <a:endParaRPr lang="en-US" sz="1300" dirty="0"/>
+          </a:p>
+        </p:txBody>
+      </p:sp>
+      <p:sp>
+        <p:nvSpPr>
+          <p:cNvPr id="6" name="Text 4"/>
+          <p:cNvSpPr/>
+          <p:nvPr/>
+        </p:nvSpPr>
+        <p:spPr>
+          <a:xfrm>
+            <a:off x="7086600" y="1783080"/>
+            <a:ext cx="4617720" cy="292608"/>
+          </a:xfrm>
+          <a:prstGeom prst="rect">
+            <a:avLst/>
+          </a:prstGeom>
+          <a:noFill/>
+          <a:ln/>
+        </p:spPr>
+        <p:txBody>
+          <a:bodyPr wrap="square" lIns="0" tIns="0" rIns="0" bIns="0" rtlCol="0" anchor="ctr"/>
+          <a:lstStyle/>
+          <a:p>
+            <a:pPr indent="0" marL="0">
+              <a:buNone/>
+            </a:pPr>
+            <a:r>
+              <a:rPr lang="en-US" sz="1300" b="1" dirty="0">
+                <a:solidFill>
+                  <a:srgbClr val="5C6B68"/>
+                </a:solidFill>
+                <a:latin typeface="Yu Gothic" pitchFamily="34" charset="0"/>
+                <a:ea typeface="Yu Gothic" pitchFamily="34" charset="-122"/>
+                <a:cs typeface="Yu Gothic" pitchFamily="34" charset="-120"/>
+              </a:rPr>
+              <a:t>なぜ、そこなのか</a:t>
+            </a:r>
+            <a:endParaRPr lang="en-US" sz="1300" dirty="0"/>
+          </a:p>
+        </p:txBody>
+      </p:sp>
+      <p:sp>
+        <p:nvSpPr>
+          <p:cNvPr id="7" name="Shape 5"/>
+          <p:cNvSpPr/>
+          <p:nvPr/>
+        </p:nvSpPr>
+        <p:spPr>
+          <a:xfrm>
+            <a:off x="731520" y="2148840"/>
+            <a:ext cx="10698480" cy="658368"/>
           </a:xfrm>
           <a:prstGeom prst="roundRect">
             <a:avLst>
-              <a:gd name="adj" fmla="val 6061"/>
+              <a:gd name="adj" fmla="val 11111"/>
             </a:avLst>
           </a:prstGeom>
           <a:solidFill>
@@ -9774,7 +9980,7 @@
           </a:solidFill>
           <a:ln w="12700">
             <a:solidFill>
-              <a:srgbClr val="F1F6F5"/>
+              <a:srgbClr val="DCE6E4"/>
             </a:solidFill>
             <a:prstDash val="solid"/>
           </a:ln>
@@ -9782,30 +9988,30 @@
       </p:sp>
       <p:sp>
         <p:nvSpPr>
-          <p:cNvPr id="5" name="Text 3"/>
-          <p:cNvSpPr/>
-          <p:nvPr/>
-        </p:nvSpPr>
-        <p:spPr>
-          <a:xfrm>
-            <a:off x="1051560" y="2112264"/>
-            <a:ext cx="5669280" cy="365760"/>
-          </a:xfrm>
-          <a:prstGeom prst="rect">
-            <a:avLst/>
-          </a:prstGeom>
-          <a:noFill/>
-          <a:ln/>
-        </p:spPr>
-        <p:txBody>
-          <a:bodyPr wrap="square" lIns="0" tIns="0" rIns="0" bIns="0" rtlCol="0" anchor="ctr"/>
-          <a:lstStyle/>
-          <a:p>
-            <a:pPr indent="0" marL="0">
-              <a:buNone/>
-            </a:pPr>
-            <a:r>
-              <a:rPr lang="en-US" sz="1900" b="1" dirty="0">
+          <p:cNvPr id="8" name="Text 6"/>
+          <p:cNvSpPr/>
+          <p:nvPr/>
+        </p:nvSpPr>
+        <p:spPr>
+          <a:xfrm>
+            <a:off x="1005840" y="2240280"/>
+            <a:ext cx="2651760" cy="274320"/>
+          </a:xfrm>
+          <a:prstGeom prst="rect">
+            <a:avLst/>
+          </a:prstGeom>
+          <a:noFill/>
+          <a:ln/>
+        </p:spPr>
+        <p:txBody>
+          <a:bodyPr wrap="square" lIns="0" tIns="0" rIns="0" bIns="0" rtlCol="0" anchor="ctr"/>
+          <a:lstStyle/>
+          <a:p>
+            <a:pPr indent="0" marL="0">
+              <a:buNone/>
+            </a:pPr>
+            <a:r>
+              <a:rPr lang="en-US" sz="1500" b="1" dirty="0">
                 <a:solidFill>
                   <a:srgbClr val="14504B"/>
                 </a:solidFill>
@@ -9813,34 +10019,197 @@
                 <a:ea typeface="Yu Gothic" pitchFamily="34" charset="-122"/>
                 <a:cs typeface="Yu Gothic" pitchFamily="34" charset="-120"/>
               </a:rPr>
-              <a:t>プライバシーマーク／ISMS認証</a:t>
-            </a:r>
-            <a:endParaRPr lang="en-US" sz="1900" dirty="0"/>
-          </a:p>
-        </p:txBody>
-      </p:sp>
-      <p:sp>
-        <p:nvSpPr>
-          <p:cNvPr id="6" name="Shape 4"/>
-          <p:cNvSpPr/>
-          <p:nvPr/>
-        </p:nvSpPr>
-        <p:spPr>
-          <a:xfrm>
-            <a:off x="6949440" y="2130552"/>
-            <a:ext cx="1371600" cy="384048"/>
+              <a:t>入居者の記録</a:t>
+            </a:r>
+            <a:endParaRPr lang="en-US" sz="1500" dirty="0"/>
+          </a:p>
+        </p:txBody>
+      </p:sp>
+      <p:sp>
+        <p:nvSpPr>
+          <p:cNvPr id="9" name="Text 7"/>
+          <p:cNvSpPr/>
+          <p:nvPr/>
+        </p:nvSpPr>
+        <p:spPr>
+          <a:xfrm>
+            <a:off x="1005840" y="2514600"/>
+            <a:ext cx="2743200" cy="274320"/>
+          </a:xfrm>
+          <a:prstGeom prst="rect">
+            <a:avLst/>
+          </a:prstGeom>
+          <a:noFill/>
+          <a:ln/>
+        </p:spPr>
+        <p:txBody>
+          <a:bodyPr wrap="square" lIns="0" tIns="0" rIns="0" bIns="0" rtlCol="0" anchor="ctr"/>
+          <a:lstStyle/>
+          <a:p>
+            <a:pPr indent="0" marL="0">
+              <a:buNone/>
+            </a:pPr>
+            <a:r>
+              <a:rPr lang="en-US" sz="1100" dirty="0">
+                <a:solidFill>
+                  <a:srgbClr val="5C6B68"/>
+                </a:solidFill>
+                <a:latin typeface="Yu Gothic" pitchFamily="34" charset="0"/>
+                <a:ea typeface="Yu Gothic" pitchFamily="34" charset="-122"/>
+                <a:cs typeface="Yu Gothic" pitchFamily="34" charset="-120"/>
+              </a:rPr>
+              <a:t>服薬・バイタル・アレルギー・やり取り</a:t>
+            </a:r>
+            <a:endParaRPr lang="en-US" sz="1100" dirty="0"/>
+          </a:p>
+        </p:txBody>
+      </p:sp>
+      <p:sp>
+        <p:nvSpPr>
+          <p:cNvPr id="10" name="Text 8"/>
+          <p:cNvSpPr/>
+          <p:nvPr/>
+        </p:nvSpPr>
+        <p:spPr>
+          <a:xfrm>
+            <a:off x="3931920" y="2267712"/>
+            <a:ext cx="2926080" cy="548640"/>
+          </a:xfrm>
+          <a:prstGeom prst="rect">
+            <a:avLst/>
+          </a:prstGeom>
+          <a:noFill/>
+          <a:ln/>
+        </p:spPr>
+        <p:txBody>
+          <a:bodyPr wrap="square" lIns="0" tIns="0" rIns="0" bIns="0" rtlCol="0" anchor="ctr"/>
+          <a:lstStyle/>
+          <a:p>
+            <a:pPr indent="0" marL="0">
+              <a:lnSpc>
+                <a:spcPct val="115000"/>
+              </a:lnSpc>
+              <a:buNone/>
+            </a:pPr>
+            <a:r>
+              <a:rPr lang="en-US" sz="1200" b="1" dirty="0">
+                <a:solidFill>
+                  <a:srgbClr val="16211F"/>
+                </a:solidFill>
+                <a:latin typeface="Yu Gothic" pitchFamily="34" charset="0"/>
+                <a:ea typeface="Yu Gothic" pitchFamily="34" charset="-122"/>
+                <a:cs typeface="Yu Gothic" pitchFamily="34" charset="-120"/>
+              </a:rPr>
+              <a:t>Cloud Firestore</a:t>
+            </a:r>
+            <a:endParaRPr lang="en-US" sz="1200" dirty="0"/>
+          </a:p>
+          <a:p>
+            <a:pPr indent="0" marL="0">
+              <a:lnSpc>
+                <a:spcPct val="115000"/>
+              </a:lnSpc>
+              <a:buNone/>
+            </a:pPr>
+            <a:r>
+              <a:rPr lang="en-US" sz="1200" b="1" dirty="0">
+                <a:solidFill>
+                  <a:srgbClr val="16211F"/>
+                </a:solidFill>
+                <a:latin typeface="Yu Gothic" pitchFamily="34" charset="0"/>
+                <a:ea typeface="Yu Gothic" pitchFamily="34" charset="-122"/>
+                <a:cs typeface="Yu Gothic" pitchFamily="34" charset="-120"/>
+              </a:rPr>
+              <a:t>東京（asia-northeast1）</a:t>
+            </a:r>
+            <a:endParaRPr lang="en-US" sz="1200" dirty="0"/>
+          </a:p>
+        </p:txBody>
+      </p:sp>
+      <p:sp>
+        <p:nvSpPr>
+          <p:cNvPr id="11" name="Text 9"/>
+          <p:cNvSpPr/>
+          <p:nvPr/>
+        </p:nvSpPr>
+        <p:spPr>
+          <a:xfrm>
+            <a:off x="7086600" y="2267712"/>
+            <a:ext cx="4480560" cy="548640"/>
+          </a:xfrm>
+          <a:prstGeom prst="rect">
+            <a:avLst/>
+          </a:prstGeom>
+          <a:noFill/>
+          <a:ln/>
+        </p:spPr>
+        <p:txBody>
+          <a:bodyPr wrap="square" lIns="0" tIns="0" rIns="0" bIns="0" rtlCol="0" anchor="ctr"/>
+          <a:lstStyle/>
+          <a:p>
+            <a:pPr indent="0" marL="0">
+              <a:lnSpc>
+                <a:spcPct val="115000"/>
+              </a:lnSpc>
+              <a:buNone/>
+            </a:pPr>
+            <a:r>
+              <a:rPr lang="en-US" sz="1200" dirty="0">
+                <a:solidFill>
+                  <a:srgbClr val="16211F"/>
+                </a:solidFill>
+                <a:latin typeface="Yu Gothic" pitchFamily="34" charset="0"/>
+                <a:ea typeface="Yu Gothic" pitchFamily="34" charset="-122"/>
+                <a:cs typeface="Yu Gothic" pitchFamily="34" charset="-120"/>
+              </a:rPr>
+              <a:t>国内法の執行が及ぶ範囲に置くことが要求事項です。</a:t>
+            </a:r>
+            <a:endParaRPr lang="en-US" sz="1200" dirty="0"/>
+          </a:p>
+          <a:p>
+            <a:pPr indent="0" marL="0">
+              <a:lnSpc>
+                <a:spcPct val="115000"/>
+              </a:lnSpc>
+              <a:buNone/>
+            </a:pPr>
+            <a:r>
+              <a:rPr lang="en-US" sz="1200" dirty="0">
+                <a:solidFill>
+                  <a:srgbClr val="16211F"/>
+                </a:solidFill>
+                <a:latin typeface="Yu Gothic" pitchFamily="34" charset="0"/>
+                <a:ea typeface="Yu Gothic" pitchFamily="34" charset="-122"/>
+                <a:cs typeface="Yu Gothic" pitchFamily="34" charset="-120"/>
+              </a:rPr>
+              <a:t>海外だと、いざというとき日本の法律が届きません。</a:t>
+            </a:r>
+            <a:endParaRPr lang="en-US" sz="1200" dirty="0"/>
+          </a:p>
+        </p:txBody>
+      </p:sp>
+      <p:sp>
+        <p:nvSpPr>
+          <p:cNvPr id="12" name="Shape 10"/>
+          <p:cNvSpPr/>
+          <p:nvPr/>
+        </p:nvSpPr>
+        <p:spPr>
+          <a:xfrm>
+            <a:off x="731520" y="2898648"/>
+            <a:ext cx="10698480" cy="658368"/>
           </a:xfrm>
           <a:prstGeom prst="roundRect">
             <a:avLst>
-              <a:gd name="adj" fmla="val 19048"/>
+              <a:gd name="adj" fmla="val 11111"/>
             </a:avLst>
           </a:prstGeom>
           <a:solidFill>
-            <a:srgbClr val="D98A2B"/>
+            <a:srgbClr val="FFFFFF"/>
           </a:solidFill>
           <a:ln w="12700">
             <a:solidFill>
-              <a:srgbClr val="D98A2B"/>
+              <a:srgbClr val="DCE6E4"/>
             </a:solidFill>
             <a:prstDash val="solid"/>
           </a:ln>
@@ -9848,53 +10217,92 @@
       </p:sp>
       <p:sp>
         <p:nvSpPr>
-          <p:cNvPr id="7" name="Text 5"/>
-          <p:cNvSpPr/>
-          <p:nvPr/>
-        </p:nvSpPr>
-        <p:spPr>
-          <a:xfrm>
-            <a:off x="6949440" y="2130552"/>
-            <a:ext cx="1371600" cy="384048"/>
-          </a:xfrm>
-          <a:prstGeom prst="rect">
-            <a:avLst/>
-          </a:prstGeom>
-          <a:noFill/>
-          <a:ln/>
-        </p:spPr>
-        <p:txBody>
-          <a:bodyPr wrap="square" lIns="0" tIns="0" rIns="0" bIns="0" rtlCol="0" anchor="ctr"/>
-          <a:lstStyle/>
-          <a:p>
-            <a:pPr algn="ctr" indent="0" marL="0">
-              <a:buNone/>
-            </a:pPr>
-            <a:r>
-              <a:rPr lang="en-US" sz="1300" b="1" dirty="0">
-                <a:solidFill>
-                  <a:srgbClr val="FFFFFF"/>
-                </a:solidFill>
-                <a:latin typeface="Yu Gothic" pitchFamily="34" charset="0"/>
-                <a:ea typeface="Yu Gothic" pitchFamily="34" charset="-122"/>
-                <a:cs typeface="Yu Gothic" pitchFamily="34" charset="-120"/>
-              </a:rPr>
-              <a:t>未取得</a:t>
-            </a:r>
-            <a:endParaRPr lang="en-US" sz="1300" dirty="0"/>
-          </a:p>
-        </p:txBody>
-      </p:sp>
-      <p:sp>
-        <p:nvSpPr>
-          <p:cNvPr id="8" name="Text 6"/>
-          <p:cNvSpPr/>
-          <p:nvPr/>
-        </p:nvSpPr>
-        <p:spPr>
-          <a:xfrm>
-            <a:off x="1051560" y="2514600"/>
-            <a:ext cx="9966960" cy="566928"/>
+          <p:cNvPr id="13" name="Text 11"/>
+          <p:cNvSpPr/>
+          <p:nvPr/>
+        </p:nvSpPr>
+        <p:spPr>
+          <a:xfrm>
+            <a:off x="1005840" y="2990088"/>
+            <a:ext cx="2651760" cy="274320"/>
+          </a:xfrm>
+          <a:prstGeom prst="rect">
+            <a:avLst/>
+          </a:prstGeom>
+          <a:noFill/>
+          <a:ln/>
+        </p:spPr>
+        <p:txBody>
+          <a:bodyPr wrap="square" lIns="0" tIns="0" rIns="0" bIns="0" rtlCol="0" anchor="ctr"/>
+          <a:lstStyle/>
+          <a:p>
+            <a:pPr indent="0" marL="0">
+              <a:buNone/>
+            </a:pPr>
+            <a:r>
+              <a:rPr lang="en-US" sz="1500" b="1" dirty="0">
+                <a:solidFill>
+                  <a:srgbClr val="14504B"/>
+                </a:solidFill>
+                <a:latin typeface="Yu Gothic" pitchFamily="34" charset="0"/>
+                <a:ea typeface="Yu Gothic" pitchFamily="34" charset="-122"/>
+                <a:cs typeface="Yu Gothic" pitchFamily="34" charset="-120"/>
+              </a:rPr>
+              <a:t>監査ログ</a:t>
+            </a:r>
+            <a:endParaRPr lang="en-US" sz="1500" dirty="0"/>
+          </a:p>
+        </p:txBody>
+      </p:sp>
+      <p:sp>
+        <p:nvSpPr>
+          <p:cNvPr id="14" name="Text 12"/>
+          <p:cNvSpPr/>
+          <p:nvPr/>
+        </p:nvSpPr>
+        <p:spPr>
+          <a:xfrm>
+            <a:off x="1005840" y="3264408"/>
+            <a:ext cx="2743200" cy="274320"/>
+          </a:xfrm>
+          <a:prstGeom prst="rect">
+            <a:avLst/>
+          </a:prstGeom>
+          <a:noFill/>
+          <a:ln/>
+        </p:spPr>
+        <p:txBody>
+          <a:bodyPr wrap="square" lIns="0" tIns="0" rIns="0" bIns="0" rtlCol="0" anchor="ctr"/>
+          <a:lstStyle/>
+          <a:p>
+            <a:pPr indent="0" marL="0">
+              <a:buNone/>
+            </a:pPr>
+            <a:r>
+              <a:rPr lang="en-US" sz="1100" dirty="0">
+                <a:solidFill>
+                  <a:srgbClr val="5C6B68"/>
+                </a:solidFill>
+                <a:latin typeface="Yu Gothic" pitchFamily="34" charset="0"/>
+                <a:ea typeface="Yu Gothic" pitchFamily="34" charset="-122"/>
+                <a:cs typeface="Yu Gothic" pitchFamily="34" charset="-120"/>
+              </a:rPr>
+              <a:t>誰が・いつ・何を見たか</a:t>
+            </a:r>
+            <a:endParaRPr lang="en-US" sz="1100" dirty="0"/>
+          </a:p>
+        </p:txBody>
+      </p:sp>
+      <p:sp>
+        <p:nvSpPr>
+          <p:cNvPr id="15" name="Text 13"/>
+          <p:cNvSpPr/>
+          <p:nvPr/>
+        </p:nvSpPr>
+        <p:spPr>
+          <a:xfrm>
+            <a:off x="3931920" y="3017520"/>
+            <a:ext cx="2926080" cy="548640"/>
           </a:xfrm>
           <a:prstGeom prst="rect">
             <a:avLst/>
@@ -9908,59 +10316,121 @@
           <a:p>
             <a:pPr indent="0" marL="0">
               <a:lnSpc>
-                <a:spcPct val="120000"/>
+                <a:spcPct val="115000"/>
               </a:lnSpc>
               <a:buNone/>
             </a:pPr>
             <a:r>
-              <a:rPr lang="en-US" sz="1400" dirty="0">
-                <a:solidFill>
-                  <a:srgbClr val="5C6B68"/>
-                </a:solidFill>
-                <a:latin typeface="Yu Gothic" pitchFamily="34" charset="0"/>
-                <a:ea typeface="Yu Gothic" pitchFamily="34" charset="-122"/>
-                <a:cs typeface="Yu Gothic" pitchFamily="34" charset="-120"/>
-              </a:rPr>
-              <a:t>事業者ガイドライン4.4が求めています。技術的な工夫では</a:t>
-            </a:r>
-            <a:endParaRPr lang="en-US" sz="1400" dirty="0"/>
+              <a:rPr lang="en-US" sz="1200" b="1" dirty="0">
+                <a:solidFill>
+                  <a:srgbClr val="16211F"/>
+                </a:solidFill>
+                <a:latin typeface="Yu Gothic" pitchFamily="34" charset="0"/>
+                <a:ea typeface="Yu Gothic" pitchFamily="34" charset="-122"/>
+                <a:cs typeface="Yu Gothic" pitchFamily="34" charset="-120"/>
+              </a:rPr>
+              <a:t>同じ東京リージョン</a:t>
+            </a:r>
+            <a:endParaRPr lang="en-US" sz="1200" dirty="0"/>
           </a:p>
           <a:p>
             <a:pPr indent="0" marL="0">
               <a:lnSpc>
-                <a:spcPct val="120000"/>
+                <a:spcPct val="115000"/>
               </a:lnSpc>
               <a:buNone/>
             </a:pPr>
             <a:r>
-              <a:rPr lang="en-US" sz="1400" dirty="0">
-                <a:solidFill>
-                  <a:srgbClr val="5C6B68"/>
-                </a:solidFill>
-                <a:latin typeface="Yu Gothic" pitchFamily="34" charset="0"/>
-                <a:ea typeface="Yu Gothic" pitchFamily="34" charset="-122"/>
-                <a:cs typeface="Yu Gothic" pitchFamily="34" charset="-120"/>
-              </a:rPr>
-              <a:t>代替できず、審査期間と費用がかかるため事業判断が要ります。</a:t>
-            </a:r>
-            <a:endParaRPr lang="en-US" sz="1400" dirty="0"/>
-          </a:p>
-        </p:txBody>
-      </p:sp>
-      <p:sp>
-        <p:nvSpPr>
-          <p:cNvPr id="9" name="Shape 7"/>
-          <p:cNvSpPr/>
-          <p:nvPr/>
-        </p:nvSpPr>
-        <p:spPr>
-          <a:xfrm>
-            <a:off x="731520" y="3337560"/>
-            <a:ext cx="10698480" cy="1207008"/>
+              <a:rPr lang="en-US" sz="1200" b="1" dirty="0">
+                <a:solidFill>
+                  <a:srgbClr val="16211F"/>
+                </a:solidFill>
+                <a:latin typeface="Yu Gothic" pitchFamily="34" charset="0"/>
+                <a:ea typeface="Yu Gothic" pitchFamily="34" charset="-122"/>
+                <a:cs typeface="Yu Gothic" pitchFamily="34" charset="-120"/>
+              </a:rPr>
+              <a:t>（専用の領域）</a:t>
+            </a:r>
+            <a:endParaRPr lang="en-US" sz="1200" dirty="0"/>
+          </a:p>
+        </p:txBody>
+      </p:sp>
+      <p:sp>
+        <p:nvSpPr>
+          <p:cNvPr id="16" name="Text 14"/>
+          <p:cNvSpPr/>
+          <p:nvPr/>
+        </p:nvSpPr>
+        <p:spPr>
+          <a:xfrm>
+            <a:off x="7086600" y="3017520"/>
+            <a:ext cx="4480560" cy="548640"/>
+          </a:xfrm>
+          <a:prstGeom prst="rect">
+            <a:avLst/>
+          </a:prstGeom>
+          <a:noFill/>
+          <a:ln/>
+        </p:spPr>
+        <p:txBody>
+          <a:bodyPr wrap="square" lIns="0" tIns="0" rIns="0" bIns="0" rtlCol="0" anchor="ctr"/>
+          <a:lstStyle/>
+          <a:p>
+            <a:pPr indent="0" marL="0">
+              <a:lnSpc>
+                <a:spcPct val="115000"/>
+              </a:lnSpc>
+              <a:buNone/>
+            </a:pPr>
+            <a:r>
+              <a:rPr lang="en-US" sz="1200" dirty="0">
+                <a:solidFill>
+                  <a:srgbClr val="16211F"/>
+                </a:solidFill>
+                <a:latin typeface="Yu Gothic" pitchFamily="34" charset="0"/>
+                <a:ea typeface="Yu Gothic" pitchFamily="34" charset="-122"/>
+                <a:cs typeface="Yu Gothic" pitchFamily="34" charset="-120"/>
+              </a:rPr>
+              <a:t>書き足すことしかできない設定にしています。</a:t>
+            </a:r>
+            <a:endParaRPr lang="en-US" sz="1200" dirty="0"/>
+          </a:p>
+          <a:p>
+            <a:pPr indent="0" marL="0">
+              <a:lnSpc>
+                <a:spcPct val="115000"/>
+              </a:lnSpc>
+              <a:buNone/>
+            </a:pPr>
+            <a:r>
+              <a:rPr lang="en-US" sz="1200" dirty="0">
+                <a:solidFill>
+                  <a:srgbClr val="16211F"/>
+                </a:solidFill>
+                <a:latin typeface="Yu Gothic" pitchFamily="34" charset="0"/>
+                <a:ea typeface="Yu Gothic" pitchFamily="34" charset="-122"/>
+                <a:cs typeface="Yu Gothic" pitchFamily="34" charset="-120"/>
+              </a:rPr>
+              <a:t>運営者の手でも、後から書き換え・削除ができません。</a:t>
+            </a:r>
+            <a:endParaRPr lang="en-US" sz="1200" dirty="0"/>
+          </a:p>
+        </p:txBody>
+      </p:sp>
+      <p:sp>
+        <p:nvSpPr>
+          <p:cNvPr id="17" name="Shape 15"/>
+          <p:cNvSpPr/>
+          <p:nvPr/>
+        </p:nvSpPr>
+        <p:spPr>
+          <a:xfrm>
+            <a:off x="731520" y="3648456"/>
+            <a:ext cx="10698480" cy="658368"/>
           </a:xfrm>
           <a:prstGeom prst="roundRect">
             <a:avLst>
-              <a:gd name="adj" fmla="val 6061"/>
+              <a:gd name="adj" fmla="val 11111"/>
             </a:avLst>
           </a:prstGeom>
           <a:solidFill>
@@ -9968,7 +10438,7 @@
           </a:solidFill>
           <a:ln w="12700">
             <a:solidFill>
-              <a:srgbClr val="F1F6F5"/>
+              <a:srgbClr val="DCE6E4"/>
             </a:solidFill>
             <a:prstDash val="solid"/>
           </a:ln>
@@ -9976,30 +10446,30 @@
       </p:sp>
       <p:sp>
         <p:nvSpPr>
-          <p:cNvPr id="10" name="Text 8"/>
-          <p:cNvSpPr/>
-          <p:nvPr/>
-        </p:nvSpPr>
-        <p:spPr>
-          <a:xfrm>
-            <a:off x="1051560" y="3483864"/>
-            <a:ext cx="5669280" cy="365760"/>
-          </a:xfrm>
-          <a:prstGeom prst="rect">
-            <a:avLst/>
-          </a:prstGeom>
-          <a:noFill/>
-          <a:ln/>
-        </p:spPr>
-        <p:txBody>
-          <a:bodyPr wrap="square" lIns="0" tIns="0" rIns="0" bIns="0" rtlCol="0" anchor="ctr"/>
-          <a:lstStyle/>
-          <a:p>
-            <a:pPr indent="0" marL="0">
-              <a:buNone/>
-            </a:pPr>
-            <a:r>
-              <a:rPr lang="en-US" sz="1900" b="1" dirty="0">
+          <p:cNvPr id="18" name="Text 16"/>
+          <p:cNvSpPr/>
+          <p:nvPr/>
+        </p:nvSpPr>
+        <p:spPr>
+          <a:xfrm>
+            <a:off x="1005840" y="3739896"/>
+            <a:ext cx="2651760" cy="274320"/>
+          </a:xfrm>
+          <a:prstGeom prst="rect">
+            <a:avLst/>
+          </a:prstGeom>
+          <a:noFill/>
+          <a:ln/>
+        </p:spPr>
+        <p:txBody>
+          <a:bodyPr wrap="square" lIns="0" tIns="0" rIns="0" bIns="0" rtlCol="0" anchor="ctr"/>
+          <a:lstStyle/>
+          <a:p>
+            <a:pPr indent="0" marL="0">
+              <a:buNone/>
+            </a:pPr>
+            <a:r>
+              <a:rPr lang="en-US" sz="1500" b="1" dirty="0">
                 <a:solidFill>
                   <a:srgbClr val="14504B"/>
                 </a:solidFill>
@@ -10007,34 +10477,197 @@
                 <a:ea typeface="Yu Gothic" pitchFamily="34" charset="-122"/>
                 <a:cs typeface="Yu Gothic" pitchFamily="34" charset="-120"/>
               </a:rPr>
-              <a:t>第三者による安全管理の評価</a:t>
-            </a:r>
-            <a:endParaRPr lang="en-US" sz="1900" dirty="0"/>
-          </a:p>
-        </p:txBody>
-      </p:sp>
-      <p:sp>
-        <p:nvSpPr>
-          <p:cNvPr id="11" name="Shape 9"/>
-          <p:cNvSpPr/>
-          <p:nvPr/>
-        </p:nvSpPr>
-        <p:spPr>
-          <a:xfrm>
-            <a:off x="6949440" y="3502152"/>
-            <a:ext cx="1371600" cy="384048"/>
+              <a:t>アプリの画面</a:t>
+            </a:r>
+            <a:endParaRPr lang="en-US" sz="1500" dirty="0"/>
+          </a:p>
+        </p:txBody>
+      </p:sp>
+      <p:sp>
+        <p:nvSpPr>
+          <p:cNvPr id="19" name="Text 17"/>
+          <p:cNvSpPr/>
+          <p:nvPr/>
+        </p:nvSpPr>
+        <p:spPr>
+          <a:xfrm>
+            <a:off x="1005840" y="4014216"/>
+            <a:ext cx="2743200" cy="274320"/>
+          </a:xfrm>
+          <a:prstGeom prst="rect">
+            <a:avLst/>
+          </a:prstGeom>
+          <a:noFill/>
+          <a:ln/>
+        </p:spPr>
+        <p:txBody>
+          <a:bodyPr wrap="square" lIns="0" tIns="0" rIns="0" bIns="0" rtlCol="0" anchor="ctr"/>
+          <a:lstStyle/>
+          <a:p>
+            <a:pPr indent="0" marL="0">
+              <a:buNone/>
+            </a:pPr>
+            <a:r>
+              <a:rPr lang="en-US" sz="1100" dirty="0">
+                <a:solidFill>
+                  <a:srgbClr val="5C6B68"/>
+                </a:solidFill>
+                <a:latin typeface="Yu Gothic" pitchFamily="34" charset="0"/>
+                <a:ea typeface="Yu Gothic" pitchFamily="34" charset="-122"/>
+                <a:cs typeface="Yu Gothic" pitchFamily="34" charset="-120"/>
+              </a:rPr>
+              <a:t>ブラウザに配信される本体</a:t>
+            </a:r>
+            <a:endParaRPr lang="en-US" sz="1100" dirty="0"/>
+          </a:p>
+        </p:txBody>
+      </p:sp>
+      <p:sp>
+        <p:nvSpPr>
+          <p:cNvPr id="20" name="Text 18"/>
+          <p:cNvSpPr/>
+          <p:nvPr/>
+        </p:nvSpPr>
+        <p:spPr>
+          <a:xfrm>
+            <a:off x="3931920" y="3767328"/>
+            <a:ext cx="2926080" cy="548640"/>
+          </a:xfrm>
+          <a:prstGeom prst="rect">
+            <a:avLst/>
+          </a:prstGeom>
+          <a:noFill/>
+          <a:ln/>
+        </p:spPr>
+        <p:txBody>
+          <a:bodyPr wrap="square" lIns="0" tIns="0" rIns="0" bIns="0" rtlCol="0" anchor="ctr"/>
+          <a:lstStyle/>
+          <a:p>
+            <a:pPr indent="0" marL="0">
+              <a:lnSpc>
+                <a:spcPct val="115000"/>
+              </a:lnSpc>
+              <a:buNone/>
+            </a:pPr>
+            <a:r>
+              <a:rPr lang="en-US" sz="1200" b="1" dirty="0">
+                <a:solidFill>
+                  <a:srgbClr val="16211F"/>
+                </a:solidFill>
+                <a:latin typeface="Yu Gothic" pitchFamily="34" charset="0"/>
+                <a:ea typeface="Yu Gothic" pitchFamily="34" charset="-122"/>
+                <a:cs typeface="Yu Gothic" pitchFamily="34" charset="-120"/>
+              </a:rPr>
+              <a:t>Firebase Hosting</a:t>
+            </a:r>
+            <a:endParaRPr lang="en-US" sz="1200" dirty="0"/>
+          </a:p>
+          <a:p>
+            <a:pPr indent="0" marL="0">
+              <a:lnSpc>
+                <a:spcPct val="115000"/>
+              </a:lnSpc>
+              <a:buNone/>
+            </a:pPr>
+            <a:r>
+              <a:rPr lang="en-US" sz="1200" b="1" dirty="0">
+                <a:solidFill>
+                  <a:srgbClr val="16211F"/>
+                </a:solidFill>
+                <a:latin typeface="Yu Gothic" pitchFamily="34" charset="0"/>
+                <a:ea typeface="Yu Gothic" pitchFamily="34" charset="-122"/>
+                <a:cs typeface="Yu Gothic" pitchFamily="34" charset="-120"/>
+              </a:rPr>
+              <a:t>全通信を HTTPS に強制</a:t>
+            </a:r>
+            <a:endParaRPr lang="en-US" sz="1200" dirty="0"/>
+          </a:p>
+        </p:txBody>
+      </p:sp>
+      <p:sp>
+        <p:nvSpPr>
+          <p:cNvPr id="21" name="Text 19"/>
+          <p:cNvSpPr/>
+          <p:nvPr/>
+        </p:nvSpPr>
+        <p:spPr>
+          <a:xfrm>
+            <a:off x="7086600" y="3767328"/>
+            <a:ext cx="4480560" cy="548640"/>
+          </a:xfrm>
+          <a:prstGeom prst="rect">
+            <a:avLst/>
+          </a:prstGeom>
+          <a:noFill/>
+          <a:ln/>
+        </p:spPr>
+        <p:txBody>
+          <a:bodyPr wrap="square" lIns="0" tIns="0" rIns="0" bIns="0" rtlCol="0" anchor="ctr"/>
+          <a:lstStyle/>
+          <a:p>
+            <a:pPr indent="0" marL="0">
+              <a:lnSpc>
+                <a:spcPct val="115000"/>
+              </a:lnSpc>
+              <a:buNone/>
+            </a:pPr>
+            <a:r>
+              <a:rPr lang="en-US" sz="1200" dirty="0">
+                <a:solidFill>
+                  <a:srgbClr val="16211F"/>
+                </a:solidFill>
+                <a:latin typeface="Yu Gothic" pitchFamily="34" charset="0"/>
+                <a:ea typeface="Yu Gothic" pitchFamily="34" charset="-122"/>
+                <a:cs typeface="Yu Gothic" pitchFamily="34" charset="-120"/>
+              </a:rPr>
+              <a:t>施設の端末と保管先のあいだを暗号化します。</a:t>
+            </a:r>
+            <a:endParaRPr lang="en-US" sz="1200" dirty="0"/>
+          </a:p>
+          <a:p>
+            <a:pPr indent="0" marL="0">
+              <a:lnSpc>
+                <a:spcPct val="115000"/>
+              </a:lnSpc>
+              <a:buNone/>
+            </a:pPr>
+            <a:r>
+              <a:rPr lang="en-US" sz="1200" dirty="0">
+                <a:solidFill>
+                  <a:srgbClr val="16211F"/>
+                </a:solidFill>
+                <a:latin typeface="Yu Gothic" pitchFamily="34" charset="0"/>
+                <a:ea typeface="Yu Gothic" pitchFamily="34" charset="-122"/>
+                <a:cs typeface="Yu Gothic" pitchFamily="34" charset="-120"/>
+              </a:rPr>
+              <a:t>途中の経路で中身を読まれることはありません。</a:t>
+            </a:r>
+            <a:endParaRPr lang="en-US" sz="1200" dirty="0"/>
+          </a:p>
+        </p:txBody>
+      </p:sp>
+      <p:sp>
+        <p:nvSpPr>
+          <p:cNvPr id="22" name="Shape 20"/>
+          <p:cNvSpPr/>
+          <p:nvPr/>
+        </p:nvSpPr>
+        <p:spPr>
+          <a:xfrm>
+            <a:off x="731520" y="4398264"/>
+            <a:ext cx="10698480" cy="658368"/>
           </a:xfrm>
           <a:prstGeom prst="roundRect">
             <a:avLst>
-              <a:gd name="adj" fmla="val 19048"/>
+              <a:gd name="adj" fmla="val 11111"/>
             </a:avLst>
           </a:prstGeom>
           <a:solidFill>
-            <a:srgbClr val="D98A2B"/>
+            <a:srgbClr val="FFFFFF"/>
           </a:solidFill>
           <a:ln w="12700">
             <a:solidFill>
-              <a:srgbClr val="D98A2B"/>
+              <a:srgbClr val="DCE6E4"/>
             </a:solidFill>
             <a:prstDash val="solid"/>
           </a:ln>
@@ -10042,53 +10675,92 @@
       </p:sp>
       <p:sp>
         <p:nvSpPr>
-          <p:cNvPr id="12" name="Text 10"/>
-          <p:cNvSpPr/>
-          <p:nvPr/>
-        </p:nvSpPr>
-        <p:spPr>
-          <a:xfrm>
-            <a:off x="6949440" y="3502152"/>
-            <a:ext cx="1371600" cy="384048"/>
-          </a:xfrm>
-          <a:prstGeom prst="rect">
-            <a:avLst/>
-          </a:prstGeom>
-          <a:noFill/>
-          <a:ln/>
-        </p:spPr>
-        <p:txBody>
-          <a:bodyPr wrap="square" lIns="0" tIns="0" rIns="0" bIns="0" rtlCol="0" anchor="ctr"/>
-          <a:lstStyle/>
-          <a:p>
-            <a:pPr algn="ctr" indent="0" marL="0">
-              <a:buNone/>
-            </a:pPr>
-            <a:r>
-              <a:rPr lang="en-US" sz="1300" b="1" dirty="0">
-                <a:solidFill>
-                  <a:srgbClr val="FFFFFF"/>
-                </a:solidFill>
-                <a:latin typeface="Yu Gothic" pitchFamily="34" charset="0"/>
-                <a:ea typeface="Yu Gothic" pitchFamily="34" charset="-122"/>
-                <a:cs typeface="Yu Gothic" pitchFamily="34" charset="-120"/>
-              </a:rPr>
-              <a:t>未実施</a:t>
-            </a:r>
-            <a:endParaRPr lang="en-US" sz="1300" dirty="0"/>
-          </a:p>
-        </p:txBody>
-      </p:sp>
-      <p:sp>
-        <p:nvSpPr>
-          <p:cNvPr id="13" name="Text 11"/>
-          <p:cNvSpPr/>
-          <p:nvPr/>
-        </p:nvSpPr>
-        <p:spPr>
-          <a:xfrm>
-            <a:off x="1051560" y="3886200"/>
-            <a:ext cx="9966960" cy="566928"/>
+          <p:cNvPr id="23" name="Text 21"/>
+          <p:cNvSpPr/>
+          <p:nvPr/>
+        </p:nvSpPr>
+        <p:spPr>
+          <a:xfrm>
+            <a:off x="1005840" y="4489704"/>
+            <a:ext cx="2651760" cy="274320"/>
+          </a:xfrm>
+          <a:prstGeom prst="rect">
+            <a:avLst/>
+          </a:prstGeom>
+          <a:noFill/>
+          <a:ln/>
+        </p:spPr>
+        <p:txBody>
+          <a:bodyPr wrap="square" lIns="0" tIns="0" rIns="0" bIns="0" rtlCol="0" anchor="ctr"/>
+          <a:lstStyle/>
+          <a:p>
+            <a:pPr indent="0" marL="0">
+              <a:buNone/>
+            </a:pPr>
+            <a:r>
+              <a:rPr lang="en-US" sz="1500" b="1" dirty="0">
+                <a:solidFill>
+                  <a:srgbClr val="14504B"/>
+                </a:solidFill>
+                <a:latin typeface="Yu Gothic" pitchFamily="34" charset="0"/>
+                <a:ea typeface="Yu Gothic" pitchFamily="34" charset="-122"/>
+                <a:cs typeface="Yu Gothic" pitchFamily="34" charset="-120"/>
+              </a:rPr>
+              <a:t>AIに送る内容</a:t>
+            </a:r>
+            <a:endParaRPr lang="en-US" sz="1500" dirty="0"/>
+          </a:p>
+        </p:txBody>
+      </p:sp>
+      <p:sp>
+        <p:nvSpPr>
+          <p:cNvPr id="24" name="Text 22"/>
+          <p:cNvSpPr/>
+          <p:nvPr/>
+        </p:nvSpPr>
+        <p:spPr>
+          <a:xfrm>
+            <a:off x="1005840" y="4764024"/>
+            <a:ext cx="2743200" cy="274320"/>
+          </a:xfrm>
+          <a:prstGeom prst="rect">
+            <a:avLst/>
+          </a:prstGeom>
+          <a:noFill/>
+          <a:ln/>
+        </p:spPr>
+        <p:txBody>
+          <a:bodyPr wrap="square" lIns="0" tIns="0" rIns="0" bIns="0" rtlCol="0" anchor="ctr"/>
+          <a:lstStyle/>
+          <a:p>
+            <a:pPr indent="0" marL="0">
+              <a:buNone/>
+            </a:pPr>
+            <a:r>
+              <a:rPr lang="en-US" sz="1100" dirty="0">
+                <a:solidFill>
+                  <a:srgbClr val="5C6B68"/>
+                </a:solidFill>
+                <a:latin typeface="Yu Gothic" pitchFamily="34" charset="0"/>
+                <a:ea typeface="Yu Gothic" pitchFamily="34" charset="-122"/>
+                <a:cs typeface="Yu Gothic" pitchFamily="34" charset="-120"/>
+              </a:rPr>
+              <a:t>説明文を組み立てる分だけ</a:t>
+            </a:r>
+            <a:endParaRPr lang="en-US" sz="1100" dirty="0"/>
+          </a:p>
+        </p:txBody>
+      </p:sp>
+      <p:sp>
+        <p:nvSpPr>
+          <p:cNvPr id="25" name="Text 23"/>
+          <p:cNvSpPr/>
+          <p:nvPr/>
+        </p:nvSpPr>
+        <p:spPr>
+          <a:xfrm>
+            <a:off x="3931920" y="4517136"/>
+            <a:ext cx="2926080" cy="548640"/>
           </a:xfrm>
           <a:prstGeom prst="rect">
             <a:avLst/>
@@ -10102,233 +10774,121 @@
           <a:p>
             <a:pPr indent="0" marL="0">
               <a:lnSpc>
-                <a:spcPct val="120000"/>
+                <a:spcPct val="115000"/>
               </a:lnSpc>
               <a:buNone/>
             </a:pPr>
             <a:r>
-              <a:rPr lang="en-US" sz="1400" dirty="0">
-                <a:solidFill>
-                  <a:srgbClr val="5C6B68"/>
-                </a:solidFill>
-                <a:latin typeface="Yu Gothic" pitchFamily="34" charset="0"/>
-                <a:ea typeface="Yu Gothic" pitchFamily="34" charset="-122"/>
-                <a:cs typeface="Yu Gothic" pitchFamily="34" charset="-120"/>
-              </a:rPr>
-              <a:t>同4.3。現状は内部での確認に留まっています。</a:t>
-            </a:r>
-            <a:endParaRPr lang="en-US" sz="1400" dirty="0"/>
-          </a:p>
-        </p:txBody>
-      </p:sp>
-      <p:sp>
-        <p:nvSpPr>
-          <p:cNvPr id="14" name="Shape 12"/>
-          <p:cNvSpPr/>
-          <p:nvPr/>
-        </p:nvSpPr>
-        <p:spPr>
-          <a:xfrm>
-            <a:off x="731520" y="4709160"/>
-            <a:ext cx="10698480" cy="1207008"/>
+              <a:rPr lang="en-US" sz="1200" b="1" dirty="0">
+                <a:solidFill>
+                  <a:srgbClr val="16211F"/>
+                </a:solidFill>
+                <a:latin typeface="Yu Gothic" pitchFamily="34" charset="0"/>
+                <a:ea typeface="Yu Gothic" pitchFamily="34" charset="-122"/>
+                <a:cs typeface="Yu Gothic" pitchFamily="34" charset="-120"/>
+              </a:rPr>
+              <a:t>自社のプロキシ経由</a:t>
+            </a:r>
+            <a:endParaRPr lang="en-US" sz="1200" dirty="0"/>
+          </a:p>
+          <a:p>
+            <a:pPr indent="0" marL="0">
+              <a:lnSpc>
+                <a:spcPct val="115000"/>
+              </a:lnSpc>
+              <a:buNone/>
+            </a:pPr>
+            <a:r>
+              <a:rPr lang="en-US" sz="1200" b="1" dirty="0">
+                <a:solidFill>
+                  <a:srgbClr val="16211F"/>
+                </a:solidFill>
+                <a:latin typeface="Yu Gothic" pitchFamily="34" charset="0"/>
+                <a:ea typeface="Yu Gothic" pitchFamily="34" charset="-122"/>
+                <a:cs typeface="Yu Gothic" pitchFamily="34" charset="-120"/>
+              </a:rPr>
+              <a:t>Cloud Run 東京</a:t>
+            </a:r>
+            <a:endParaRPr lang="en-US" sz="1200" dirty="0"/>
+          </a:p>
+        </p:txBody>
+      </p:sp>
+      <p:sp>
+        <p:nvSpPr>
+          <p:cNvPr id="26" name="Text 24"/>
+          <p:cNvSpPr/>
+          <p:nvPr/>
+        </p:nvSpPr>
+        <p:spPr>
+          <a:xfrm>
+            <a:off x="7086600" y="4517136"/>
+            <a:ext cx="4480560" cy="548640"/>
+          </a:xfrm>
+          <a:prstGeom prst="rect">
+            <a:avLst/>
+          </a:prstGeom>
+          <a:noFill/>
+          <a:ln/>
+        </p:spPr>
+        <p:txBody>
+          <a:bodyPr wrap="square" lIns="0" tIns="0" rIns="0" bIns="0" rtlCol="0" anchor="ctr"/>
+          <a:lstStyle/>
+          <a:p>
+            <a:pPr indent="0" marL="0">
+              <a:lnSpc>
+                <a:spcPct val="115000"/>
+              </a:lnSpc>
+              <a:buNone/>
+            </a:pPr>
+            <a:r>
+              <a:rPr lang="en-US" sz="1200" dirty="0">
+                <a:solidFill>
+                  <a:srgbClr val="16211F"/>
+                </a:solidFill>
+                <a:latin typeface="Yu Gothic" pitchFamily="34" charset="0"/>
+                <a:ea typeface="Yu Gothic" pitchFamily="34" charset="-122"/>
+                <a:cs typeface="Yu Gothic" pitchFamily="34" charset="-120"/>
+              </a:rPr>
+              <a:t>氏名・生年月日・居室番号は送りません。送るのは症状と</a:t>
+            </a:r>
+            <a:endParaRPr lang="en-US" sz="1200" dirty="0"/>
+          </a:p>
+          <a:p>
+            <a:pPr indent="0" marL="0">
+              <a:lnSpc>
+                <a:spcPct val="115000"/>
+              </a:lnSpc>
+              <a:buNone/>
+            </a:pPr>
+            <a:r>
+              <a:rPr lang="en-US" sz="1200" dirty="0">
+                <a:solidFill>
+                  <a:srgbClr val="16211F"/>
+                </a:solidFill>
+                <a:latin typeface="Yu Gothic" pitchFamily="34" charset="0"/>
+                <a:ea typeface="Yu Gothic" pitchFamily="34" charset="-122"/>
+                <a:cs typeface="Yu Gothic" pitchFamily="34" charset="-120"/>
+              </a:rPr>
+              <a:t>薬剤名だけです。判定自体はAIではなくルールが決めます。</a:t>
+            </a:r>
+            <a:endParaRPr lang="en-US" sz="1200" dirty="0"/>
+          </a:p>
+        </p:txBody>
+      </p:sp>
+      <p:sp>
+        <p:nvSpPr>
+          <p:cNvPr id="27" name="Shape 25"/>
+          <p:cNvSpPr/>
+          <p:nvPr/>
+        </p:nvSpPr>
+        <p:spPr>
+          <a:xfrm>
+            <a:off x="731520" y="5193792"/>
+            <a:ext cx="10698480" cy="1005840"/>
           </a:xfrm>
           <a:prstGeom prst="roundRect">
             <a:avLst>
-              <a:gd name="adj" fmla="val 6061"/>
-            </a:avLst>
-          </a:prstGeom>
-          <a:solidFill>
-            <a:srgbClr val="F1F6F5"/>
-          </a:solidFill>
-          <a:ln w="12700">
-            <a:solidFill>
-              <a:srgbClr val="F1F6F5"/>
-            </a:solidFill>
-            <a:prstDash val="solid"/>
-          </a:ln>
-        </p:spPr>
-      </p:sp>
-      <p:sp>
-        <p:nvSpPr>
-          <p:cNvPr id="15" name="Text 13"/>
-          <p:cNvSpPr/>
-          <p:nvPr/>
-        </p:nvSpPr>
-        <p:spPr>
-          <a:xfrm>
-            <a:off x="1051560" y="4855464"/>
-            <a:ext cx="5669280" cy="365760"/>
-          </a:xfrm>
-          <a:prstGeom prst="rect">
-            <a:avLst/>
-          </a:prstGeom>
-          <a:noFill/>
-          <a:ln/>
-        </p:spPr>
-        <p:txBody>
-          <a:bodyPr wrap="square" lIns="0" tIns="0" rIns="0" bIns="0" rtlCol="0" anchor="ctr"/>
-          <a:lstStyle/>
-          <a:p>
-            <a:pPr indent="0" marL="0">
-              <a:buNone/>
-            </a:pPr>
-            <a:r>
-              <a:rPr lang="en-US" sz="1900" b="1" dirty="0">
-                <a:solidFill>
-                  <a:srgbClr val="14504B"/>
-                </a:solidFill>
-                <a:latin typeface="Yu Gothic" pitchFamily="34" charset="0"/>
-                <a:ea typeface="Yu Gothic" pitchFamily="34" charset="-122"/>
-                <a:cs typeface="Yu Gothic" pitchFamily="34" charset="-120"/>
-              </a:rPr>
-              <a:t>監査ログを施設側で確認する画面</a:t>
-            </a:r>
-            <a:endParaRPr lang="en-US" sz="1900" dirty="0"/>
-          </a:p>
-        </p:txBody>
-      </p:sp>
-      <p:sp>
-        <p:nvSpPr>
-          <p:cNvPr id="16" name="Shape 14"/>
-          <p:cNvSpPr/>
-          <p:nvPr/>
-        </p:nvSpPr>
-        <p:spPr>
-          <a:xfrm>
-            <a:off x="6949440" y="4873752"/>
-            <a:ext cx="1371600" cy="384048"/>
-          </a:xfrm>
-          <a:prstGeom prst="roundRect">
-            <a:avLst>
-              <a:gd name="adj" fmla="val 19048"/>
-            </a:avLst>
-          </a:prstGeom>
-          <a:solidFill>
-            <a:srgbClr val="D98A2B"/>
-          </a:solidFill>
-          <a:ln w="12700">
-            <a:solidFill>
-              <a:srgbClr val="D98A2B"/>
-            </a:solidFill>
-            <a:prstDash val="solid"/>
-          </a:ln>
-        </p:spPr>
-      </p:sp>
-      <p:sp>
-        <p:nvSpPr>
-          <p:cNvPr id="17" name="Text 15"/>
-          <p:cNvSpPr/>
-          <p:nvPr/>
-        </p:nvSpPr>
-        <p:spPr>
-          <a:xfrm>
-            <a:off x="6949440" y="4873752"/>
-            <a:ext cx="1371600" cy="384048"/>
-          </a:xfrm>
-          <a:prstGeom prst="rect">
-            <a:avLst/>
-          </a:prstGeom>
-          <a:noFill/>
-          <a:ln/>
-        </p:spPr>
-        <p:txBody>
-          <a:bodyPr wrap="square" lIns="0" tIns="0" rIns="0" bIns="0" rtlCol="0" anchor="ctr"/>
-          <a:lstStyle/>
-          <a:p>
-            <a:pPr algn="ctr" indent="0" marL="0">
-              <a:buNone/>
-            </a:pPr>
-            <a:r>
-              <a:rPr lang="en-US" sz="1300" b="1" dirty="0">
-                <a:solidFill>
-                  <a:srgbClr val="FFFFFF"/>
-                </a:solidFill>
-                <a:latin typeface="Yu Gothic" pitchFamily="34" charset="0"/>
-                <a:ea typeface="Yu Gothic" pitchFamily="34" charset="-122"/>
-                <a:cs typeface="Yu Gothic" pitchFamily="34" charset="-120"/>
-              </a:rPr>
-              <a:t>未実装</a:t>
-            </a:r>
-            <a:endParaRPr lang="en-US" sz="1300" dirty="0"/>
-          </a:p>
-        </p:txBody>
-      </p:sp>
-      <p:sp>
-        <p:nvSpPr>
-          <p:cNvPr id="18" name="Text 16"/>
-          <p:cNvSpPr/>
-          <p:nvPr/>
-        </p:nvSpPr>
-        <p:spPr>
-          <a:xfrm>
-            <a:off x="1051560" y="5257800"/>
-            <a:ext cx="9966960" cy="566928"/>
-          </a:xfrm>
-          <a:prstGeom prst="rect">
-            <a:avLst/>
-          </a:prstGeom>
-          <a:noFill/>
-          <a:ln/>
-        </p:spPr>
-        <p:txBody>
-          <a:bodyPr wrap="square" lIns="0" tIns="0" rIns="0" bIns="0" rtlCol="0" anchor="ctr"/>
-          <a:lstStyle/>
-          <a:p>
-            <a:pPr indent="0" marL="0">
-              <a:lnSpc>
-                <a:spcPct val="120000"/>
-              </a:lnSpc>
-              <a:buNone/>
-            </a:pPr>
-            <a:r>
-              <a:rPr lang="en-US" sz="1400" dirty="0">
-                <a:solidFill>
-                  <a:srgbClr val="5C6B68"/>
-                </a:solidFill>
-                <a:latin typeface="Yu Gothic" pitchFamily="34" charset="0"/>
-                <a:ea typeface="Yu Gothic" pitchFamily="34" charset="-122"/>
-                <a:cs typeface="Yu Gothic" pitchFamily="34" charset="-120"/>
-              </a:rPr>
-              <a:t>システム運用編17①は、記録するだけでなく定期的に確認することまで</a:t>
-            </a:r>
-            <a:endParaRPr lang="en-US" sz="1400" dirty="0"/>
-          </a:p>
-          <a:p>
-            <a:pPr indent="0" marL="0">
-              <a:lnSpc>
-                <a:spcPct val="120000"/>
-              </a:lnSpc>
-              <a:buNone/>
-            </a:pPr>
-            <a:r>
-              <a:rPr lang="en-US" sz="1400" dirty="0">
-                <a:solidFill>
-                  <a:srgbClr val="5C6B68"/>
-                </a:solidFill>
-                <a:latin typeface="Yu Gothic" pitchFamily="34" charset="0"/>
-                <a:ea typeface="Yu Gothic" pitchFamily="34" charset="-122"/>
-                <a:cs typeface="Yu Gothic" pitchFamily="34" charset="-120"/>
-              </a:rPr>
-              <a:t>求めています。記録と権限は揃っているので、閲覧画面を足せば満たせます。</a:t>
-            </a:r>
-            <a:endParaRPr lang="en-US" sz="1400" dirty="0"/>
-          </a:p>
-        </p:txBody>
-      </p:sp>
-      <p:sp>
-        <p:nvSpPr>
-          <p:cNvPr id="19" name="Shape 17"/>
-          <p:cNvSpPr/>
-          <p:nvPr/>
-        </p:nvSpPr>
-        <p:spPr>
-          <a:xfrm>
-            <a:off x="731520" y="6126480"/>
-            <a:ext cx="10698480" cy="594360"/>
-          </a:xfrm>
-          <a:prstGeom prst="roundRect">
-            <a:avLst>
-              <a:gd name="adj" fmla="val 12308"/>
+              <a:gd name="adj" fmla="val 7273"/>
             </a:avLst>
           </a:prstGeom>
           <a:solidFill>
@@ -10344,30 +10904,69 @@
       </p:sp>
       <p:sp>
         <p:nvSpPr>
-          <p:cNvPr id="20" name="Text 18"/>
-          <p:cNvSpPr/>
-          <p:nvPr/>
-        </p:nvSpPr>
-        <p:spPr>
-          <a:xfrm>
-            <a:off x="1097280" y="6245352"/>
-            <a:ext cx="9875520" cy="365760"/>
-          </a:xfrm>
-          <a:prstGeom prst="rect">
-            <a:avLst/>
-          </a:prstGeom>
-          <a:noFill/>
-          <a:ln/>
-        </p:spPr>
-        <p:txBody>
-          <a:bodyPr wrap="square" lIns="0" tIns="0" rIns="0" bIns="0" rtlCol="0" anchor="ctr"/>
-          <a:lstStyle/>
-          <a:p>
-            <a:pPr indent="0" marL="0">
-              <a:buNone/>
-            </a:pPr>
-            <a:r>
-              <a:rPr lang="en-US" sz="1500" dirty="0">
+          <p:cNvPr id="28" name="Text 26"/>
+          <p:cNvSpPr/>
+          <p:nvPr/>
+        </p:nvSpPr>
+        <p:spPr>
+          <a:xfrm>
+            <a:off x="1051560" y="5303520"/>
+            <a:ext cx="2011680" cy="292608"/>
+          </a:xfrm>
+          <a:prstGeom prst="rect">
+            <a:avLst/>
+          </a:prstGeom>
+          <a:noFill/>
+          <a:ln/>
+        </p:spPr>
+        <p:txBody>
+          <a:bodyPr wrap="square" lIns="0" tIns="0" rIns="0" bIns="0" rtlCol="0" anchor="ctr"/>
+          <a:lstStyle/>
+          <a:p>
+            <a:pPr indent="0" marL="0">
+              <a:buNone/>
+            </a:pPr>
+            <a:r>
+              <a:rPr lang="en-US" sz="1300" b="1" dirty="0">
+                <a:solidFill>
+                  <a:srgbClr val="D98A2B"/>
+                </a:solidFill>
+                <a:latin typeface="Yu Gothic" pitchFamily="34" charset="0"/>
+                <a:ea typeface="Yu Gothic" pitchFamily="34" charset="-122"/>
+                <a:cs typeface="Yu Gothic" pitchFamily="34" charset="-120"/>
+              </a:rPr>
+              <a:t>消えないこと</a:t>
+            </a:r>
+            <a:endParaRPr lang="en-US" sz="1300" dirty="0"/>
+          </a:p>
+        </p:txBody>
+      </p:sp>
+      <p:sp>
+        <p:nvSpPr>
+          <p:cNvPr id="29" name="Text 27"/>
+          <p:cNvSpPr/>
+          <p:nvPr/>
+        </p:nvSpPr>
+        <p:spPr>
+          <a:xfrm>
+            <a:off x="2743200" y="5303520"/>
+            <a:ext cx="8503920" cy="292608"/>
+          </a:xfrm>
+          <a:prstGeom prst="rect">
+            <a:avLst/>
+          </a:prstGeom>
+          <a:noFill/>
+          <a:ln/>
+        </p:spPr>
+        <p:txBody>
+          <a:bodyPr wrap="square" lIns="0" tIns="0" rIns="0" bIns="0" rtlCol="0" anchor="ctr"/>
+          <a:lstStyle/>
+          <a:p>
+            <a:pPr indent="0" marL="0">
+              <a:buNone/>
+            </a:pPr>
+            <a:r>
+              <a:rPr lang="en-US" sz="1250" dirty="0">
                 <a:solidFill>
                   <a:srgbClr val="FFFFFF"/>
                 </a:solidFill>
@@ -10375,9 +10974,126 @@
                 <a:ea typeface="Yu Gothic" pitchFamily="34" charset="-122"/>
                 <a:cs typeface="Yu Gothic" pitchFamily="34" charset="-120"/>
               </a:rPr>
-              <a:t>未対応の一覧は開示書にそのまま載せています。ご確認のうえ判断してください。</a:t>
-            </a:r>
-            <a:endParaRPr lang="en-US" sz="1500" dirty="0"/>
+              <a:t>過去7日間の任意の時点まで戻せます。データベースそのものの削除も、設定で禁止しています。</a:t>
+            </a:r>
+            <a:endParaRPr lang="en-US" sz="1250" dirty="0"/>
+          </a:p>
+        </p:txBody>
+      </p:sp>
+      <p:sp>
+        <p:nvSpPr>
+          <p:cNvPr id="30" name="Text 28"/>
+          <p:cNvSpPr/>
+          <p:nvPr/>
+        </p:nvSpPr>
+        <p:spPr>
+          <a:xfrm>
+            <a:off x="1051560" y="5724144"/>
+            <a:ext cx="2011680" cy="292608"/>
+          </a:xfrm>
+          <a:prstGeom prst="rect">
+            <a:avLst/>
+          </a:prstGeom>
+          <a:noFill/>
+          <a:ln/>
+        </p:spPr>
+        <p:txBody>
+          <a:bodyPr wrap="square" lIns="0" tIns="0" rIns="0" bIns="0" rtlCol="0" anchor="ctr"/>
+          <a:lstStyle/>
+          <a:p>
+            <a:pPr indent="0" marL="0">
+              <a:buNone/>
+            </a:pPr>
+            <a:r>
+              <a:rPr lang="en-US" sz="1300" b="1" dirty="0">
+                <a:solidFill>
+                  <a:srgbClr val="D98A2B"/>
+                </a:solidFill>
+                <a:latin typeface="Yu Gothic" pitchFamily="34" charset="0"/>
+                <a:ea typeface="Yu Gothic" pitchFamily="34" charset="-122"/>
+                <a:cs typeface="Yu Gothic" pitchFamily="34" charset="-120"/>
+              </a:rPr>
+              <a:t>読まれないこと</a:t>
+            </a:r>
+            <a:endParaRPr lang="en-US" sz="1300" dirty="0"/>
+          </a:p>
+        </p:txBody>
+      </p:sp>
+      <p:sp>
+        <p:nvSpPr>
+          <p:cNvPr id="31" name="Text 29"/>
+          <p:cNvSpPr/>
+          <p:nvPr/>
+        </p:nvSpPr>
+        <p:spPr>
+          <a:xfrm>
+            <a:off x="2743200" y="5724144"/>
+            <a:ext cx="8503920" cy="292608"/>
+          </a:xfrm>
+          <a:prstGeom prst="rect">
+            <a:avLst/>
+          </a:prstGeom>
+          <a:noFill/>
+          <a:ln/>
+        </p:spPr>
+        <p:txBody>
+          <a:bodyPr wrap="square" lIns="0" tIns="0" rIns="0" bIns="0" rtlCol="0" anchor="ctr"/>
+          <a:lstStyle/>
+          <a:p>
+            <a:pPr indent="0" marL="0">
+              <a:buNone/>
+            </a:pPr>
+            <a:r>
+              <a:rPr lang="en-US" sz="1250" dirty="0">
+                <a:solidFill>
+                  <a:srgbClr val="FFFFFF"/>
+                </a:solidFill>
+                <a:latin typeface="Yu Gothic" pitchFamily="34" charset="0"/>
+                <a:ea typeface="Yu Gothic" pitchFamily="34" charset="-122"/>
+                <a:cs typeface="Yu Gothic" pitchFamily="34" charset="-120"/>
+              </a:rPr>
+              <a:t>保存時は Google Cloud の既定で暗号化。基盤は ISO/IEC 27001・27017・27018 と SOC 2/3 を取得しています。</a:t>
+            </a:r>
+            <a:endParaRPr lang="en-US" sz="1250" dirty="0"/>
+          </a:p>
+        </p:txBody>
+      </p:sp>
+      <p:sp>
+        <p:nvSpPr>
+          <p:cNvPr id="32" name="Text 30"/>
+          <p:cNvSpPr/>
+          <p:nvPr/>
+        </p:nvSpPr>
+        <p:spPr>
+          <a:xfrm>
+            <a:off x="731520" y="6309360"/>
+            <a:ext cx="10698480" cy="365760"/>
+          </a:xfrm>
+          <a:prstGeom prst="rect">
+            <a:avLst/>
+          </a:prstGeom>
+          <a:noFill/>
+          <a:ln/>
+        </p:spPr>
+        <p:txBody>
+          <a:bodyPr wrap="square" lIns="0" tIns="0" rIns="0" bIns="0" rtlCol="0" anchor="ctr"/>
+          <a:lstStyle/>
+          <a:p>
+            <a:pPr indent="0" marL="0">
+              <a:buNone/>
+            </a:pPr>
+            <a:r>
+              <a:rPr lang="en-US" sz="1200" i="1" dirty="0">
+                <a:solidFill>
+                  <a:srgbClr val="5C6B68"/>
+                </a:solidFill>
+                <a:latin typeface="Yu Gothic" pitchFamily="34" charset="0"/>
+                <a:ea typeface="Yu Gothic" pitchFamily="34" charset="-122"/>
+                <a:cs typeface="Yu Gothic" pitchFamily="34" charset="-120"/>
+              </a:rPr>
+              <a:t>※ 基盤事業者は Google Cloud Japan ですが、米国法の適用可能性は完全には排除できません。当社自身のPマーク／ISMSも未取得です（次ページ）。</a:t>
+            </a:r>
+            <a:endParaRPr lang="en-US" sz="1200" dirty="0"/>
           </a:p>
         </p:txBody>
       </p:sp>
@@ -10392,6 +11108,744 @@
 <file path=ppt/slides/slide17.xml><?xml version="1.0" encoding="utf-8"?>
 <p:sld xmlns:a="http://schemas.openxmlformats.org/drawingml/2006/main" xmlns:r="http://schemas.openxmlformats.org/officeDocument/2006/relationships" xmlns:p="http://schemas.openxmlformats.org/presentationml/2006/main">
   <p:cSld name="Slide 17">
+    <p:bg>
+      <p:bgPr>
+        <a:solidFill>
+          <a:srgbClr val="FFFFFF"/>
+        </a:solidFill>
+      </p:bgPr>
+    </p:bg>
+    <p:spTree>
+      <p:nvGrpSpPr>
+        <p:cNvPr id="1" name=""/>
+        <p:cNvGrpSpPr/>
+        <p:nvPr/>
+      </p:nvGrpSpPr>
+      <p:grpSpPr>
+        <a:xfrm>
+          <a:off x="0" y="0"/>
+          <a:ext cx="0" cy="0"/>
+          <a:chOff x="0" y="0"/>
+          <a:chExt cx="0" cy="0"/>
+        </a:xfrm>
+      </p:grpSpPr>
+      <p:sp>
+        <p:nvSpPr>
+          <p:cNvPr id="2" name="Text 0"/>
+          <p:cNvSpPr/>
+          <p:nvPr/>
+        </p:nvSpPr>
+        <p:spPr>
+          <a:xfrm>
+            <a:off x="731520" y="411480"/>
+            <a:ext cx="10698480" cy="777240"/>
+          </a:xfrm>
+          <a:prstGeom prst="rect">
+            <a:avLst/>
+          </a:prstGeom>
+          <a:noFill/>
+          <a:ln/>
+        </p:spPr>
+        <p:txBody>
+          <a:bodyPr wrap="square" lIns="0" tIns="0" rIns="0" bIns="0" rtlCol="0" anchor="ctr"/>
+          <a:lstStyle/>
+          <a:p>
+            <a:pPr indent="0" marL="0">
+              <a:buNone/>
+            </a:pPr>
+            <a:r>
+              <a:rPr lang="en-US" sz="3600" b="1" dirty="0">
+                <a:solidFill>
+                  <a:srgbClr val="14504B"/>
+                </a:solidFill>
+                <a:latin typeface="Yu Gothic" pitchFamily="34" charset="0"/>
+                <a:ea typeface="Yu Gothic" pitchFamily="34" charset="-122"/>
+                <a:cs typeface="Yu Gothic" pitchFamily="34" charset="-120"/>
+              </a:rPr>
+              <a:t>できていないこと</a:t>
+            </a:r>
+            <a:endParaRPr lang="en-US" sz="3600" dirty="0"/>
+          </a:p>
+        </p:txBody>
+      </p:sp>
+      <p:sp>
+        <p:nvSpPr>
+          <p:cNvPr id="3" name="Text 1"/>
+          <p:cNvSpPr/>
+          <p:nvPr/>
+        </p:nvSpPr>
+        <p:spPr>
+          <a:xfrm>
+            <a:off x="731520" y="1225296"/>
+            <a:ext cx="10698480" cy="411480"/>
+          </a:xfrm>
+          <a:prstGeom prst="rect">
+            <a:avLst/>
+          </a:prstGeom>
+          <a:noFill/>
+          <a:ln/>
+        </p:spPr>
+        <p:txBody>
+          <a:bodyPr wrap="square" lIns="0" tIns="0" rIns="0" bIns="0" rtlCol="0" anchor="ctr"/>
+          <a:lstStyle/>
+          <a:p>
+            <a:pPr indent="0" marL="0">
+              <a:buNone/>
+            </a:pPr>
+            <a:r>
+              <a:rPr lang="en-US" sz="1600" dirty="0">
+                <a:solidFill>
+                  <a:srgbClr val="5C6B68"/>
+                </a:solidFill>
+                <a:latin typeface="Yu Gothic" pitchFamily="34" charset="0"/>
+                <a:ea typeface="Yu Gothic" pitchFamily="34" charset="-122"/>
+                <a:cs typeface="Yu Gothic" pitchFamily="34" charset="-120"/>
+              </a:rPr>
+              <a:t>導入をご検討いただく前に、こちらからお伝えします</a:t>
+            </a:r>
+            <a:endParaRPr lang="en-US" sz="1600" dirty="0"/>
+          </a:p>
+        </p:txBody>
+      </p:sp>
+      <p:sp>
+        <p:nvSpPr>
+          <p:cNvPr id="4" name="Shape 2"/>
+          <p:cNvSpPr/>
+          <p:nvPr/>
+        </p:nvSpPr>
+        <p:spPr>
+          <a:xfrm>
+            <a:off x="731520" y="1965960"/>
+            <a:ext cx="10698480" cy="1207008"/>
+          </a:xfrm>
+          <a:prstGeom prst="roundRect">
+            <a:avLst>
+              <a:gd name="adj" fmla="val 6061"/>
+            </a:avLst>
+          </a:prstGeom>
+          <a:solidFill>
+            <a:srgbClr val="F1F6F5"/>
+          </a:solidFill>
+          <a:ln w="12700">
+            <a:solidFill>
+              <a:srgbClr val="F1F6F5"/>
+            </a:solidFill>
+            <a:prstDash val="solid"/>
+          </a:ln>
+        </p:spPr>
+      </p:sp>
+      <p:sp>
+        <p:nvSpPr>
+          <p:cNvPr id="5" name="Text 3"/>
+          <p:cNvSpPr/>
+          <p:nvPr/>
+        </p:nvSpPr>
+        <p:spPr>
+          <a:xfrm>
+            <a:off x="1051560" y="2112264"/>
+            <a:ext cx="5669280" cy="365760"/>
+          </a:xfrm>
+          <a:prstGeom prst="rect">
+            <a:avLst/>
+          </a:prstGeom>
+          <a:noFill/>
+          <a:ln/>
+        </p:spPr>
+        <p:txBody>
+          <a:bodyPr wrap="square" lIns="0" tIns="0" rIns="0" bIns="0" rtlCol="0" anchor="ctr"/>
+          <a:lstStyle/>
+          <a:p>
+            <a:pPr indent="0" marL="0">
+              <a:buNone/>
+            </a:pPr>
+            <a:r>
+              <a:rPr lang="en-US" sz="1900" b="1" dirty="0">
+                <a:solidFill>
+                  <a:srgbClr val="14504B"/>
+                </a:solidFill>
+                <a:latin typeface="Yu Gothic" pitchFamily="34" charset="0"/>
+                <a:ea typeface="Yu Gothic" pitchFamily="34" charset="-122"/>
+                <a:cs typeface="Yu Gothic" pitchFamily="34" charset="-120"/>
+              </a:rPr>
+              <a:t>プライバシーマーク／ISMS認証</a:t>
+            </a:r>
+            <a:endParaRPr lang="en-US" sz="1900" dirty="0"/>
+          </a:p>
+        </p:txBody>
+      </p:sp>
+      <p:sp>
+        <p:nvSpPr>
+          <p:cNvPr id="6" name="Shape 4"/>
+          <p:cNvSpPr/>
+          <p:nvPr/>
+        </p:nvSpPr>
+        <p:spPr>
+          <a:xfrm>
+            <a:off x="6949440" y="2130552"/>
+            <a:ext cx="1371600" cy="384048"/>
+          </a:xfrm>
+          <a:prstGeom prst="roundRect">
+            <a:avLst>
+              <a:gd name="adj" fmla="val 19048"/>
+            </a:avLst>
+          </a:prstGeom>
+          <a:solidFill>
+            <a:srgbClr val="D98A2B"/>
+          </a:solidFill>
+          <a:ln w="12700">
+            <a:solidFill>
+              <a:srgbClr val="D98A2B"/>
+            </a:solidFill>
+            <a:prstDash val="solid"/>
+          </a:ln>
+        </p:spPr>
+      </p:sp>
+      <p:sp>
+        <p:nvSpPr>
+          <p:cNvPr id="7" name="Text 5"/>
+          <p:cNvSpPr/>
+          <p:nvPr/>
+        </p:nvSpPr>
+        <p:spPr>
+          <a:xfrm>
+            <a:off x="6949440" y="2130552"/>
+            <a:ext cx="1371600" cy="384048"/>
+          </a:xfrm>
+          <a:prstGeom prst="rect">
+            <a:avLst/>
+          </a:prstGeom>
+          <a:noFill/>
+          <a:ln/>
+        </p:spPr>
+        <p:txBody>
+          <a:bodyPr wrap="square" lIns="0" tIns="0" rIns="0" bIns="0" rtlCol="0" anchor="ctr"/>
+          <a:lstStyle/>
+          <a:p>
+            <a:pPr algn="ctr" indent="0" marL="0">
+              <a:buNone/>
+            </a:pPr>
+            <a:r>
+              <a:rPr lang="en-US" sz="1300" b="1" dirty="0">
+                <a:solidFill>
+                  <a:srgbClr val="FFFFFF"/>
+                </a:solidFill>
+                <a:latin typeface="Yu Gothic" pitchFamily="34" charset="0"/>
+                <a:ea typeface="Yu Gothic" pitchFamily="34" charset="-122"/>
+                <a:cs typeface="Yu Gothic" pitchFamily="34" charset="-120"/>
+              </a:rPr>
+              <a:t>未取得</a:t>
+            </a:r>
+            <a:endParaRPr lang="en-US" sz="1300" dirty="0"/>
+          </a:p>
+        </p:txBody>
+      </p:sp>
+      <p:sp>
+        <p:nvSpPr>
+          <p:cNvPr id="8" name="Text 6"/>
+          <p:cNvSpPr/>
+          <p:nvPr/>
+        </p:nvSpPr>
+        <p:spPr>
+          <a:xfrm>
+            <a:off x="1051560" y="2514600"/>
+            <a:ext cx="9966960" cy="566928"/>
+          </a:xfrm>
+          <a:prstGeom prst="rect">
+            <a:avLst/>
+          </a:prstGeom>
+          <a:noFill/>
+          <a:ln/>
+        </p:spPr>
+        <p:txBody>
+          <a:bodyPr wrap="square" lIns="0" tIns="0" rIns="0" bIns="0" rtlCol="0" anchor="ctr"/>
+          <a:lstStyle/>
+          <a:p>
+            <a:pPr indent="0" marL="0">
+              <a:lnSpc>
+                <a:spcPct val="120000"/>
+              </a:lnSpc>
+              <a:buNone/>
+            </a:pPr>
+            <a:r>
+              <a:rPr lang="en-US" sz="1400" dirty="0">
+                <a:solidFill>
+                  <a:srgbClr val="5C6B68"/>
+                </a:solidFill>
+                <a:latin typeface="Yu Gothic" pitchFamily="34" charset="0"/>
+                <a:ea typeface="Yu Gothic" pitchFamily="34" charset="-122"/>
+                <a:cs typeface="Yu Gothic" pitchFamily="34" charset="-120"/>
+              </a:rPr>
+              <a:t>事業者ガイドライン4.4が求めています。技術的な工夫では</a:t>
+            </a:r>
+            <a:endParaRPr lang="en-US" sz="1400" dirty="0"/>
+          </a:p>
+          <a:p>
+            <a:pPr indent="0" marL="0">
+              <a:lnSpc>
+                <a:spcPct val="120000"/>
+              </a:lnSpc>
+              <a:buNone/>
+            </a:pPr>
+            <a:r>
+              <a:rPr lang="en-US" sz="1400" dirty="0">
+                <a:solidFill>
+                  <a:srgbClr val="5C6B68"/>
+                </a:solidFill>
+                <a:latin typeface="Yu Gothic" pitchFamily="34" charset="0"/>
+                <a:ea typeface="Yu Gothic" pitchFamily="34" charset="-122"/>
+                <a:cs typeface="Yu Gothic" pitchFamily="34" charset="-120"/>
+              </a:rPr>
+              <a:t>代替できず、審査期間と費用がかかるため事業判断が要ります。</a:t>
+            </a:r>
+            <a:endParaRPr lang="en-US" sz="1400" dirty="0"/>
+          </a:p>
+        </p:txBody>
+      </p:sp>
+      <p:sp>
+        <p:nvSpPr>
+          <p:cNvPr id="9" name="Shape 7"/>
+          <p:cNvSpPr/>
+          <p:nvPr/>
+        </p:nvSpPr>
+        <p:spPr>
+          <a:xfrm>
+            <a:off x="731520" y="3337560"/>
+            <a:ext cx="10698480" cy="1207008"/>
+          </a:xfrm>
+          <a:prstGeom prst="roundRect">
+            <a:avLst>
+              <a:gd name="adj" fmla="val 6061"/>
+            </a:avLst>
+          </a:prstGeom>
+          <a:solidFill>
+            <a:srgbClr val="F1F6F5"/>
+          </a:solidFill>
+          <a:ln w="12700">
+            <a:solidFill>
+              <a:srgbClr val="F1F6F5"/>
+            </a:solidFill>
+            <a:prstDash val="solid"/>
+          </a:ln>
+        </p:spPr>
+      </p:sp>
+      <p:sp>
+        <p:nvSpPr>
+          <p:cNvPr id="10" name="Text 8"/>
+          <p:cNvSpPr/>
+          <p:nvPr/>
+        </p:nvSpPr>
+        <p:spPr>
+          <a:xfrm>
+            <a:off x="1051560" y="3483864"/>
+            <a:ext cx="5669280" cy="365760"/>
+          </a:xfrm>
+          <a:prstGeom prst="rect">
+            <a:avLst/>
+          </a:prstGeom>
+          <a:noFill/>
+          <a:ln/>
+        </p:spPr>
+        <p:txBody>
+          <a:bodyPr wrap="square" lIns="0" tIns="0" rIns="0" bIns="0" rtlCol="0" anchor="ctr"/>
+          <a:lstStyle/>
+          <a:p>
+            <a:pPr indent="0" marL="0">
+              <a:buNone/>
+            </a:pPr>
+            <a:r>
+              <a:rPr lang="en-US" sz="1900" b="1" dirty="0">
+                <a:solidFill>
+                  <a:srgbClr val="14504B"/>
+                </a:solidFill>
+                <a:latin typeface="Yu Gothic" pitchFamily="34" charset="0"/>
+                <a:ea typeface="Yu Gothic" pitchFamily="34" charset="-122"/>
+                <a:cs typeface="Yu Gothic" pitchFamily="34" charset="-120"/>
+              </a:rPr>
+              <a:t>第三者による安全管理の評価</a:t>
+            </a:r>
+            <a:endParaRPr lang="en-US" sz="1900" dirty="0"/>
+          </a:p>
+        </p:txBody>
+      </p:sp>
+      <p:sp>
+        <p:nvSpPr>
+          <p:cNvPr id="11" name="Shape 9"/>
+          <p:cNvSpPr/>
+          <p:nvPr/>
+        </p:nvSpPr>
+        <p:spPr>
+          <a:xfrm>
+            <a:off x="6949440" y="3502152"/>
+            <a:ext cx="1371600" cy="384048"/>
+          </a:xfrm>
+          <a:prstGeom prst="roundRect">
+            <a:avLst>
+              <a:gd name="adj" fmla="val 19048"/>
+            </a:avLst>
+          </a:prstGeom>
+          <a:solidFill>
+            <a:srgbClr val="D98A2B"/>
+          </a:solidFill>
+          <a:ln w="12700">
+            <a:solidFill>
+              <a:srgbClr val="D98A2B"/>
+            </a:solidFill>
+            <a:prstDash val="solid"/>
+          </a:ln>
+        </p:spPr>
+      </p:sp>
+      <p:sp>
+        <p:nvSpPr>
+          <p:cNvPr id="12" name="Text 10"/>
+          <p:cNvSpPr/>
+          <p:nvPr/>
+        </p:nvSpPr>
+        <p:spPr>
+          <a:xfrm>
+            <a:off x="6949440" y="3502152"/>
+            <a:ext cx="1371600" cy="384048"/>
+          </a:xfrm>
+          <a:prstGeom prst="rect">
+            <a:avLst/>
+          </a:prstGeom>
+          <a:noFill/>
+          <a:ln/>
+        </p:spPr>
+        <p:txBody>
+          <a:bodyPr wrap="square" lIns="0" tIns="0" rIns="0" bIns="0" rtlCol="0" anchor="ctr"/>
+          <a:lstStyle/>
+          <a:p>
+            <a:pPr algn="ctr" indent="0" marL="0">
+              <a:buNone/>
+            </a:pPr>
+            <a:r>
+              <a:rPr lang="en-US" sz="1300" b="1" dirty="0">
+                <a:solidFill>
+                  <a:srgbClr val="FFFFFF"/>
+                </a:solidFill>
+                <a:latin typeface="Yu Gothic" pitchFamily="34" charset="0"/>
+                <a:ea typeface="Yu Gothic" pitchFamily="34" charset="-122"/>
+                <a:cs typeface="Yu Gothic" pitchFamily="34" charset="-120"/>
+              </a:rPr>
+              <a:t>未実施</a:t>
+            </a:r>
+            <a:endParaRPr lang="en-US" sz="1300" dirty="0"/>
+          </a:p>
+        </p:txBody>
+      </p:sp>
+      <p:sp>
+        <p:nvSpPr>
+          <p:cNvPr id="13" name="Text 11"/>
+          <p:cNvSpPr/>
+          <p:nvPr/>
+        </p:nvSpPr>
+        <p:spPr>
+          <a:xfrm>
+            <a:off x="1051560" y="3886200"/>
+            <a:ext cx="9966960" cy="566928"/>
+          </a:xfrm>
+          <a:prstGeom prst="rect">
+            <a:avLst/>
+          </a:prstGeom>
+          <a:noFill/>
+          <a:ln/>
+        </p:spPr>
+        <p:txBody>
+          <a:bodyPr wrap="square" lIns="0" tIns="0" rIns="0" bIns="0" rtlCol="0" anchor="ctr"/>
+          <a:lstStyle/>
+          <a:p>
+            <a:pPr indent="0" marL="0">
+              <a:lnSpc>
+                <a:spcPct val="120000"/>
+              </a:lnSpc>
+              <a:buNone/>
+            </a:pPr>
+            <a:r>
+              <a:rPr lang="en-US" sz="1400" dirty="0">
+                <a:solidFill>
+                  <a:srgbClr val="5C6B68"/>
+                </a:solidFill>
+                <a:latin typeface="Yu Gothic" pitchFamily="34" charset="0"/>
+                <a:ea typeface="Yu Gothic" pitchFamily="34" charset="-122"/>
+                <a:cs typeface="Yu Gothic" pitchFamily="34" charset="-120"/>
+              </a:rPr>
+              <a:t>同4.3。現状は内部での確認に留まっています。</a:t>
+            </a:r>
+            <a:endParaRPr lang="en-US" sz="1400" dirty="0"/>
+          </a:p>
+        </p:txBody>
+      </p:sp>
+      <p:sp>
+        <p:nvSpPr>
+          <p:cNvPr id="14" name="Shape 12"/>
+          <p:cNvSpPr/>
+          <p:nvPr/>
+        </p:nvSpPr>
+        <p:spPr>
+          <a:xfrm>
+            <a:off x="731520" y="4709160"/>
+            <a:ext cx="10698480" cy="1207008"/>
+          </a:xfrm>
+          <a:prstGeom prst="roundRect">
+            <a:avLst>
+              <a:gd name="adj" fmla="val 6061"/>
+            </a:avLst>
+          </a:prstGeom>
+          <a:solidFill>
+            <a:srgbClr val="F1F6F5"/>
+          </a:solidFill>
+          <a:ln w="12700">
+            <a:solidFill>
+              <a:srgbClr val="F1F6F5"/>
+            </a:solidFill>
+            <a:prstDash val="solid"/>
+          </a:ln>
+        </p:spPr>
+      </p:sp>
+      <p:sp>
+        <p:nvSpPr>
+          <p:cNvPr id="15" name="Text 13"/>
+          <p:cNvSpPr/>
+          <p:nvPr/>
+        </p:nvSpPr>
+        <p:spPr>
+          <a:xfrm>
+            <a:off x="1051560" y="4855464"/>
+            <a:ext cx="5669280" cy="365760"/>
+          </a:xfrm>
+          <a:prstGeom prst="rect">
+            <a:avLst/>
+          </a:prstGeom>
+          <a:noFill/>
+          <a:ln/>
+        </p:spPr>
+        <p:txBody>
+          <a:bodyPr wrap="square" lIns="0" tIns="0" rIns="0" bIns="0" rtlCol="0" anchor="ctr"/>
+          <a:lstStyle/>
+          <a:p>
+            <a:pPr indent="0" marL="0">
+              <a:buNone/>
+            </a:pPr>
+            <a:r>
+              <a:rPr lang="en-US" sz="1900" b="1" dirty="0">
+                <a:solidFill>
+                  <a:srgbClr val="14504B"/>
+                </a:solidFill>
+                <a:latin typeface="Yu Gothic" pitchFamily="34" charset="0"/>
+                <a:ea typeface="Yu Gothic" pitchFamily="34" charset="-122"/>
+                <a:cs typeface="Yu Gothic" pitchFamily="34" charset="-120"/>
+              </a:rPr>
+              <a:t>監査ログを施設側で確認する画面</a:t>
+            </a:r>
+            <a:endParaRPr lang="en-US" sz="1900" dirty="0"/>
+          </a:p>
+        </p:txBody>
+      </p:sp>
+      <p:sp>
+        <p:nvSpPr>
+          <p:cNvPr id="16" name="Shape 14"/>
+          <p:cNvSpPr/>
+          <p:nvPr/>
+        </p:nvSpPr>
+        <p:spPr>
+          <a:xfrm>
+            <a:off x="6949440" y="4873752"/>
+            <a:ext cx="1371600" cy="384048"/>
+          </a:xfrm>
+          <a:prstGeom prst="roundRect">
+            <a:avLst>
+              <a:gd name="adj" fmla="val 19048"/>
+            </a:avLst>
+          </a:prstGeom>
+          <a:solidFill>
+            <a:srgbClr val="D98A2B"/>
+          </a:solidFill>
+          <a:ln w="12700">
+            <a:solidFill>
+              <a:srgbClr val="D98A2B"/>
+            </a:solidFill>
+            <a:prstDash val="solid"/>
+          </a:ln>
+        </p:spPr>
+      </p:sp>
+      <p:sp>
+        <p:nvSpPr>
+          <p:cNvPr id="17" name="Text 15"/>
+          <p:cNvSpPr/>
+          <p:nvPr/>
+        </p:nvSpPr>
+        <p:spPr>
+          <a:xfrm>
+            <a:off x="6949440" y="4873752"/>
+            <a:ext cx="1371600" cy="384048"/>
+          </a:xfrm>
+          <a:prstGeom prst="rect">
+            <a:avLst/>
+          </a:prstGeom>
+          <a:noFill/>
+          <a:ln/>
+        </p:spPr>
+        <p:txBody>
+          <a:bodyPr wrap="square" lIns="0" tIns="0" rIns="0" bIns="0" rtlCol="0" anchor="ctr"/>
+          <a:lstStyle/>
+          <a:p>
+            <a:pPr algn="ctr" indent="0" marL="0">
+              <a:buNone/>
+            </a:pPr>
+            <a:r>
+              <a:rPr lang="en-US" sz="1300" b="1" dirty="0">
+                <a:solidFill>
+                  <a:srgbClr val="FFFFFF"/>
+                </a:solidFill>
+                <a:latin typeface="Yu Gothic" pitchFamily="34" charset="0"/>
+                <a:ea typeface="Yu Gothic" pitchFamily="34" charset="-122"/>
+                <a:cs typeface="Yu Gothic" pitchFamily="34" charset="-120"/>
+              </a:rPr>
+              <a:t>未実装</a:t>
+            </a:r>
+            <a:endParaRPr lang="en-US" sz="1300" dirty="0"/>
+          </a:p>
+        </p:txBody>
+      </p:sp>
+      <p:sp>
+        <p:nvSpPr>
+          <p:cNvPr id="18" name="Text 16"/>
+          <p:cNvSpPr/>
+          <p:nvPr/>
+        </p:nvSpPr>
+        <p:spPr>
+          <a:xfrm>
+            <a:off x="1051560" y="5257800"/>
+            <a:ext cx="9966960" cy="566928"/>
+          </a:xfrm>
+          <a:prstGeom prst="rect">
+            <a:avLst/>
+          </a:prstGeom>
+          <a:noFill/>
+          <a:ln/>
+        </p:spPr>
+        <p:txBody>
+          <a:bodyPr wrap="square" lIns="0" tIns="0" rIns="0" bIns="0" rtlCol="0" anchor="ctr"/>
+          <a:lstStyle/>
+          <a:p>
+            <a:pPr indent="0" marL="0">
+              <a:lnSpc>
+                <a:spcPct val="120000"/>
+              </a:lnSpc>
+              <a:buNone/>
+            </a:pPr>
+            <a:r>
+              <a:rPr lang="en-US" sz="1400" dirty="0">
+                <a:solidFill>
+                  <a:srgbClr val="5C6B68"/>
+                </a:solidFill>
+                <a:latin typeface="Yu Gothic" pitchFamily="34" charset="0"/>
+                <a:ea typeface="Yu Gothic" pitchFamily="34" charset="-122"/>
+                <a:cs typeface="Yu Gothic" pitchFamily="34" charset="-120"/>
+              </a:rPr>
+              <a:t>システム運用編17①は、記録するだけでなく定期的に確認することまで</a:t>
+            </a:r>
+            <a:endParaRPr lang="en-US" sz="1400" dirty="0"/>
+          </a:p>
+          <a:p>
+            <a:pPr indent="0" marL="0">
+              <a:lnSpc>
+                <a:spcPct val="120000"/>
+              </a:lnSpc>
+              <a:buNone/>
+            </a:pPr>
+            <a:r>
+              <a:rPr lang="en-US" sz="1400" dirty="0">
+                <a:solidFill>
+                  <a:srgbClr val="5C6B68"/>
+                </a:solidFill>
+                <a:latin typeface="Yu Gothic" pitchFamily="34" charset="0"/>
+                <a:ea typeface="Yu Gothic" pitchFamily="34" charset="-122"/>
+                <a:cs typeface="Yu Gothic" pitchFamily="34" charset="-120"/>
+              </a:rPr>
+              <a:t>求めています。記録と権限は揃っているので、閲覧画面を足せば満たせます。</a:t>
+            </a:r>
+            <a:endParaRPr lang="en-US" sz="1400" dirty="0"/>
+          </a:p>
+        </p:txBody>
+      </p:sp>
+      <p:sp>
+        <p:nvSpPr>
+          <p:cNvPr id="19" name="Shape 17"/>
+          <p:cNvSpPr/>
+          <p:nvPr/>
+        </p:nvSpPr>
+        <p:spPr>
+          <a:xfrm>
+            <a:off x="731520" y="6126480"/>
+            <a:ext cx="10698480" cy="594360"/>
+          </a:xfrm>
+          <a:prstGeom prst="roundRect">
+            <a:avLst>
+              <a:gd name="adj" fmla="val 12308"/>
+            </a:avLst>
+          </a:prstGeom>
+          <a:solidFill>
+            <a:srgbClr val="14504B"/>
+          </a:solidFill>
+          <a:ln w="12700">
+            <a:solidFill>
+              <a:srgbClr val="14504B"/>
+            </a:solidFill>
+            <a:prstDash val="solid"/>
+          </a:ln>
+        </p:spPr>
+      </p:sp>
+      <p:sp>
+        <p:nvSpPr>
+          <p:cNvPr id="20" name="Text 18"/>
+          <p:cNvSpPr/>
+          <p:nvPr/>
+        </p:nvSpPr>
+        <p:spPr>
+          <a:xfrm>
+            <a:off x="1097280" y="6245352"/>
+            <a:ext cx="9875520" cy="365760"/>
+          </a:xfrm>
+          <a:prstGeom prst="rect">
+            <a:avLst/>
+          </a:prstGeom>
+          <a:noFill/>
+          <a:ln/>
+        </p:spPr>
+        <p:txBody>
+          <a:bodyPr wrap="square" lIns="0" tIns="0" rIns="0" bIns="0" rtlCol="0" anchor="ctr"/>
+          <a:lstStyle/>
+          <a:p>
+            <a:pPr indent="0" marL="0">
+              <a:buNone/>
+            </a:pPr>
+            <a:r>
+              <a:rPr lang="en-US" sz="1500" dirty="0">
+                <a:solidFill>
+                  <a:srgbClr val="FFFFFF"/>
+                </a:solidFill>
+                <a:latin typeface="Yu Gothic" pitchFamily="34" charset="0"/>
+                <a:ea typeface="Yu Gothic" pitchFamily="34" charset="-122"/>
+                <a:cs typeface="Yu Gothic" pitchFamily="34" charset="-120"/>
+              </a:rPr>
+              <a:t>未対応の一覧は開示書にそのまま載せています。ご確認のうえ判断してください。</a:t>
+            </a:r>
+            <a:endParaRPr lang="en-US" sz="1500" dirty="0"/>
+          </a:p>
+        </p:txBody>
+      </p:sp>
+    </p:spTree>
+  </p:cSld>
+  <p:clrMapOvr>
+    <a:masterClrMapping/>
+  </p:clrMapOvr>
+</p:sld>
+</file>
+
+<file path=ppt/slides/slide18.xml><?xml version="1.0" encoding="utf-8"?>
+<p:sld xmlns:a="http://schemas.openxmlformats.org/drawingml/2006/main" xmlns:r="http://schemas.openxmlformats.org/officeDocument/2006/relationships" xmlns:p="http://schemas.openxmlformats.org/presentationml/2006/main">
+  <p:cSld name="Slide 18">
     <p:bg>
       <p:bgPr>
         <a:solidFill>
@@ -10719,698 +12173,6 @@
               <a:t>事例：1年間のBRI変化と尿蛋白の新規発現（宮崎県延岡市 2020–2021年）</a:t>
             </a:r>
             <a:endParaRPr lang="en-US" sz="1400" dirty="0"/>
-          </a:p>
-        </p:txBody>
-      </p:sp>
-    </p:spTree>
-  </p:cSld>
-  <p:clrMapOvr>
-    <a:masterClrMapping/>
-  </p:clrMapOvr>
-</p:sld>
-</file>
-
-<file path=ppt/slides/slide18.xml><?xml version="1.0" encoding="utf-8"?>
-<p:sld xmlns:a="http://schemas.openxmlformats.org/drawingml/2006/main" xmlns:r="http://schemas.openxmlformats.org/officeDocument/2006/relationships" xmlns:p="http://schemas.openxmlformats.org/presentationml/2006/main">
-  <p:cSld name="Slide 18">
-    <p:bg>
-      <p:bgPr>
-        <a:solidFill>
-          <a:srgbClr val="FFFFFF"/>
-        </a:solidFill>
-      </p:bgPr>
-    </p:bg>
-    <p:spTree>
-      <p:nvGrpSpPr>
-        <p:cNvPr id="1" name=""/>
-        <p:cNvGrpSpPr/>
-        <p:nvPr/>
-      </p:nvGrpSpPr>
-      <p:grpSpPr>
-        <a:xfrm>
-          <a:off x="0" y="0"/>
-          <a:ext cx="0" cy="0"/>
-          <a:chOff x="0" y="0"/>
-          <a:chExt cx="0" cy="0"/>
-        </a:xfrm>
-      </p:grpSpPr>
-      <p:sp>
-        <p:nvSpPr>
-          <p:cNvPr id="2" name="Text 0"/>
-          <p:cNvSpPr/>
-          <p:nvPr/>
-        </p:nvSpPr>
-        <p:spPr>
-          <a:xfrm>
-            <a:off x="731520" y="411480"/>
-            <a:ext cx="10698480" cy="777240"/>
-          </a:xfrm>
-          <a:prstGeom prst="rect">
-            <a:avLst/>
-          </a:prstGeom>
-          <a:noFill/>
-          <a:ln/>
-        </p:spPr>
-        <p:txBody>
-          <a:bodyPr wrap="square" lIns="0" tIns="0" rIns="0" bIns="0" rtlCol="0" anchor="ctr"/>
-          <a:lstStyle/>
-          <a:p>
-            <a:pPr indent="0" marL="0">
-              <a:buNone/>
-            </a:pPr>
-            <a:r>
-              <a:rPr lang="en-US" sz="3600" b="1" dirty="0">
-                <a:solidFill>
-                  <a:srgbClr val="14504B"/>
-                </a:solidFill>
-                <a:latin typeface="Yu Gothic" pitchFamily="34" charset="0"/>
-                <a:ea typeface="Yu Gothic" pitchFamily="34" charset="-122"/>
-                <a:cs typeface="Yu Gothic" pitchFamily="34" charset="-120"/>
-              </a:rPr>
-              <a:t>特定健診は、毎年とられている</a:t>
-            </a:r>
-            <a:endParaRPr lang="en-US" sz="3600" dirty="0"/>
-          </a:p>
-        </p:txBody>
-      </p:sp>
-      <p:sp>
-        <p:nvSpPr>
-          <p:cNvPr id="3" name="Shape 1"/>
-          <p:cNvSpPr/>
-          <p:nvPr/>
-        </p:nvSpPr>
-        <p:spPr>
-          <a:xfrm>
-            <a:off x="731520" y="1965960"/>
-            <a:ext cx="2103120" cy="1554480"/>
-          </a:xfrm>
-          <a:prstGeom prst="roundRect">
-            <a:avLst>
-              <a:gd name="adj" fmla="val 4706"/>
-            </a:avLst>
-          </a:prstGeom>
-          <a:solidFill>
-            <a:srgbClr val="F1F6F5"/>
-          </a:solidFill>
-          <a:ln w="12700">
-            <a:solidFill>
-              <a:srgbClr val="F1F6F5"/>
-            </a:solidFill>
-            <a:prstDash val="solid"/>
-          </a:ln>
-        </p:spPr>
-      </p:sp>
-      <p:sp>
-        <p:nvSpPr>
-          <p:cNvPr id="4" name="Text 2"/>
-          <p:cNvSpPr/>
-          <p:nvPr/>
-        </p:nvSpPr>
-        <p:spPr>
-          <a:xfrm>
-            <a:off x="777240" y="2194560"/>
-            <a:ext cx="2011680" cy="365760"/>
-          </a:xfrm>
-          <a:prstGeom prst="rect">
-            <a:avLst/>
-          </a:prstGeom>
-          <a:noFill/>
-          <a:ln/>
-        </p:spPr>
-        <p:txBody>
-          <a:bodyPr wrap="square" lIns="0" tIns="0" rIns="0" bIns="0" rtlCol="0" anchor="ctr"/>
-          <a:lstStyle/>
-          <a:p>
-            <a:pPr algn="ctr" indent="0" marL="0">
-              <a:buNone/>
-            </a:pPr>
-            <a:r>
-              <a:rPr lang="en-US" sz="1700" b="1" dirty="0">
-                <a:solidFill>
-                  <a:srgbClr val="14504B"/>
-                </a:solidFill>
-                <a:latin typeface="Yu Gothic" pitchFamily="34" charset="0"/>
-                <a:ea typeface="Yu Gothic" pitchFamily="34" charset="-122"/>
-                <a:cs typeface="Yu Gothic" pitchFamily="34" charset="-120"/>
-              </a:rPr>
-              <a:t>受ける</a:t>
-            </a:r>
-            <a:endParaRPr lang="en-US" sz="1700" dirty="0"/>
-          </a:p>
-        </p:txBody>
-      </p:sp>
-      <p:sp>
-        <p:nvSpPr>
-          <p:cNvPr id="5" name="Text 3"/>
-          <p:cNvSpPr/>
-          <p:nvPr/>
-        </p:nvSpPr>
-        <p:spPr>
-          <a:xfrm>
-            <a:off x="777240" y="2651760"/>
-            <a:ext cx="2011680" cy="640080"/>
-          </a:xfrm>
-          <a:prstGeom prst="rect">
-            <a:avLst/>
-          </a:prstGeom>
-          <a:noFill/>
-          <a:ln/>
-        </p:spPr>
-        <p:txBody>
-          <a:bodyPr wrap="square" lIns="0" tIns="0" rIns="0" bIns="0" rtlCol="0" anchor="ctr"/>
-          <a:lstStyle/>
-          <a:p>
-            <a:pPr algn="ctr" indent="0" marL="0">
-              <a:buNone/>
-            </a:pPr>
-            <a:r>
-              <a:rPr lang="en-US" sz="1300" dirty="0">
-                <a:solidFill>
-                  <a:srgbClr val="5C6B68"/>
-                </a:solidFill>
-                <a:latin typeface="Yu Gothic" pitchFamily="34" charset="0"/>
-                <a:ea typeface="Yu Gothic" pitchFamily="34" charset="-122"/>
-                <a:cs typeface="Yu Gothic" pitchFamily="34" charset="-120"/>
-              </a:rPr>
-              <a:t>腹囲・血圧・血液検査</a:t>
-            </a:r>
-            <a:endParaRPr lang="en-US" sz="1300" dirty="0"/>
-          </a:p>
-        </p:txBody>
-      </p:sp>
-      <p:sp>
-        <p:nvSpPr>
-          <p:cNvPr id="6" name="Shape 4"/>
-          <p:cNvSpPr/>
-          <p:nvPr/>
-        </p:nvSpPr>
-        <p:spPr>
-          <a:xfrm>
-            <a:off x="2871216" y="2670048"/>
-            <a:ext cx="201168" cy="237744"/>
-          </a:xfrm>
-          <a:prstGeom prst="rightArrow">
-            <a:avLst/>
-          </a:prstGeom>
-          <a:solidFill>
-            <a:srgbClr val="A8CFC9"/>
-          </a:solidFill>
-          <a:ln w="12700">
-            <a:solidFill>
-              <a:srgbClr val="A8CFC9"/>
-            </a:solidFill>
-            <a:prstDash val="solid"/>
-          </a:ln>
-        </p:spPr>
-      </p:sp>
-      <p:sp>
-        <p:nvSpPr>
-          <p:cNvPr id="7" name="Shape 5"/>
-          <p:cNvSpPr/>
-          <p:nvPr/>
-        </p:nvSpPr>
-        <p:spPr>
-          <a:xfrm>
-            <a:off x="3108960" y="1965960"/>
-            <a:ext cx="2103120" cy="1554480"/>
-          </a:xfrm>
-          <a:prstGeom prst="roundRect">
-            <a:avLst>
-              <a:gd name="adj" fmla="val 4706"/>
-            </a:avLst>
-          </a:prstGeom>
-          <a:solidFill>
-            <a:srgbClr val="F1F6F5"/>
-          </a:solidFill>
-          <a:ln w="12700">
-            <a:solidFill>
-              <a:srgbClr val="F1F6F5"/>
-            </a:solidFill>
-            <a:prstDash val="solid"/>
-          </a:ln>
-        </p:spPr>
-      </p:sp>
-      <p:sp>
-        <p:nvSpPr>
-          <p:cNvPr id="8" name="Text 6"/>
-          <p:cNvSpPr/>
-          <p:nvPr/>
-        </p:nvSpPr>
-        <p:spPr>
-          <a:xfrm>
-            <a:off x="3154680" y="2194560"/>
-            <a:ext cx="2011680" cy="365760"/>
-          </a:xfrm>
-          <a:prstGeom prst="rect">
-            <a:avLst/>
-          </a:prstGeom>
-          <a:noFill/>
-          <a:ln/>
-        </p:spPr>
-        <p:txBody>
-          <a:bodyPr wrap="square" lIns="0" tIns="0" rIns="0" bIns="0" rtlCol="0" anchor="ctr"/>
-          <a:lstStyle/>
-          <a:p>
-            <a:pPr algn="ctr" indent="0" marL="0">
-              <a:buNone/>
-            </a:pPr>
-            <a:r>
-              <a:rPr lang="en-US" sz="1700" b="1" dirty="0">
-                <a:solidFill>
-                  <a:srgbClr val="14504B"/>
-                </a:solidFill>
-                <a:latin typeface="Yu Gothic" pitchFamily="34" charset="0"/>
-                <a:ea typeface="Yu Gothic" pitchFamily="34" charset="-122"/>
-                <a:cs typeface="Yu Gothic" pitchFamily="34" charset="-120"/>
-              </a:rPr>
-              <a:t>結果を渡す</a:t>
-            </a:r>
-            <a:endParaRPr lang="en-US" sz="1700" dirty="0"/>
-          </a:p>
-        </p:txBody>
-      </p:sp>
-      <p:sp>
-        <p:nvSpPr>
-          <p:cNvPr id="9" name="Text 7"/>
-          <p:cNvSpPr/>
-          <p:nvPr/>
-        </p:nvSpPr>
-        <p:spPr>
-          <a:xfrm>
-            <a:off x="3154680" y="2651760"/>
-            <a:ext cx="2011680" cy="640080"/>
-          </a:xfrm>
-          <a:prstGeom prst="rect">
-            <a:avLst/>
-          </a:prstGeom>
-          <a:noFill/>
-          <a:ln/>
-        </p:spPr>
-        <p:txBody>
-          <a:bodyPr wrap="square" lIns="0" tIns="0" rIns="0" bIns="0" rtlCol="0" anchor="ctr"/>
-          <a:lstStyle/>
-          <a:p>
-            <a:pPr algn="ctr" indent="0" marL="0">
-              <a:buNone/>
-            </a:pPr>
-            <a:r>
-              <a:rPr lang="en-US" sz="1300" dirty="0">
-                <a:solidFill>
-                  <a:srgbClr val="5C6B68"/>
-                </a:solidFill>
-                <a:latin typeface="Yu Gothic" pitchFamily="34" charset="0"/>
-                <a:ea typeface="Yu Gothic" pitchFamily="34" charset="-122"/>
-                <a:cs typeface="Yu Gothic" pitchFamily="34" charset="-120"/>
-              </a:rPr>
-              <a:t>基準値との比較</a:t>
-            </a:r>
-            <a:endParaRPr lang="en-US" sz="1300" dirty="0"/>
-          </a:p>
-        </p:txBody>
-      </p:sp>
-      <p:sp>
-        <p:nvSpPr>
-          <p:cNvPr id="10" name="Shape 8"/>
-          <p:cNvSpPr/>
-          <p:nvPr/>
-        </p:nvSpPr>
-        <p:spPr>
-          <a:xfrm>
-            <a:off x="5248656" y="2670048"/>
-            <a:ext cx="201168" cy="237744"/>
-          </a:xfrm>
-          <a:prstGeom prst="rightArrow">
-            <a:avLst/>
-          </a:prstGeom>
-          <a:solidFill>
-            <a:srgbClr val="A8CFC9"/>
-          </a:solidFill>
-          <a:ln w="12700">
-            <a:solidFill>
-              <a:srgbClr val="A8CFC9"/>
-            </a:solidFill>
-            <a:prstDash val="solid"/>
-          </a:ln>
-        </p:spPr>
-      </p:sp>
-      <p:sp>
-        <p:nvSpPr>
-          <p:cNvPr id="11" name="Shape 9"/>
-          <p:cNvSpPr/>
-          <p:nvPr/>
-        </p:nvSpPr>
-        <p:spPr>
-          <a:xfrm>
-            <a:off x="5486400" y="1965960"/>
-            <a:ext cx="2103120" cy="1554480"/>
-          </a:xfrm>
-          <a:prstGeom prst="roundRect">
-            <a:avLst>
-              <a:gd name="adj" fmla="val 4706"/>
-            </a:avLst>
-          </a:prstGeom>
-          <a:solidFill>
-            <a:srgbClr val="F1F6F5"/>
-          </a:solidFill>
-          <a:ln w="12700">
-            <a:solidFill>
-              <a:srgbClr val="F1F6F5"/>
-            </a:solidFill>
-            <a:prstDash val="solid"/>
-          </a:ln>
-        </p:spPr>
-      </p:sp>
-      <p:sp>
-        <p:nvSpPr>
-          <p:cNvPr id="12" name="Text 10"/>
-          <p:cNvSpPr/>
-          <p:nvPr/>
-        </p:nvSpPr>
-        <p:spPr>
-          <a:xfrm>
-            <a:off x="5532120" y="2194560"/>
-            <a:ext cx="2011680" cy="365760"/>
-          </a:xfrm>
-          <a:prstGeom prst="rect">
-            <a:avLst/>
-          </a:prstGeom>
-          <a:noFill/>
-          <a:ln/>
-        </p:spPr>
-        <p:txBody>
-          <a:bodyPr wrap="square" lIns="0" tIns="0" rIns="0" bIns="0" rtlCol="0" anchor="ctr"/>
-          <a:lstStyle/>
-          <a:p>
-            <a:pPr algn="ctr" indent="0" marL="0">
-              <a:buNone/>
-            </a:pPr>
-            <a:r>
-              <a:rPr lang="en-US" sz="1700" b="1" dirty="0">
-                <a:solidFill>
-                  <a:srgbClr val="14504B"/>
-                </a:solidFill>
-                <a:latin typeface="Yu Gothic" pitchFamily="34" charset="0"/>
-                <a:ea typeface="Yu Gothic" pitchFamily="34" charset="-122"/>
-                <a:cs typeface="Yu Gothic" pitchFamily="34" charset="-120"/>
-              </a:rPr>
-              <a:t>保健指導</a:t>
-            </a:r>
-            <a:endParaRPr lang="en-US" sz="1700" dirty="0"/>
-          </a:p>
-        </p:txBody>
-      </p:sp>
-      <p:sp>
-        <p:nvSpPr>
-          <p:cNvPr id="13" name="Text 11"/>
-          <p:cNvSpPr/>
-          <p:nvPr/>
-        </p:nvSpPr>
-        <p:spPr>
-          <a:xfrm>
-            <a:off x="5532120" y="2651760"/>
-            <a:ext cx="2011680" cy="640080"/>
-          </a:xfrm>
-          <a:prstGeom prst="rect">
-            <a:avLst/>
-          </a:prstGeom>
-          <a:noFill/>
-          <a:ln/>
-        </p:spPr>
-        <p:txBody>
-          <a:bodyPr wrap="square" lIns="0" tIns="0" rIns="0" bIns="0" rtlCol="0" anchor="ctr"/>
-          <a:lstStyle/>
-          <a:p>
-            <a:pPr algn="ctr" indent="0" marL="0">
-              <a:buNone/>
-            </a:pPr>
-            <a:r>
-              <a:rPr lang="en-US" sz="1300" dirty="0">
-                <a:solidFill>
-                  <a:srgbClr val="5C6B68"/>
-                </a:solidFill>
-                <a:latin typeface="Yu Gothic" pitchFamily="34" charset="0"/>
-                <a:ea typeface="Yu Gothic" pitchFamily="34" charset="-122"/>
-                <a:cs typeface="Yu Gothic" pitchFamily="34" charset="-120"/>
-              </a:rPr>
-              <a:t>該当者に案内</a:t>
-            </a:r>
-            <a:endParaRPr lang="en-US" sz="1300" dirty="0"/>
-          </a:p>
-        </p:txBody>
-      </p:sp>
-      <p:sp>
-        <p:nvSpPr>
-          <p:cNvPr id="14" name="Shape 12"/>
-          <p:cNvSpPr/>
-          <p:nvPr/>
-        </p:nvSpPr>
-        <p:spPr>
-          <a:xfrm>
-            <a:off x="7955280" y="1965960"/>
-            <a:ext cx="3474720" cy="1554480"/>
-          </a:xfrm>
-          <a:prstGeom prst="roundRect">
-            <a:avLst>
-              <a:gd name="adj" fmla="val 4706"/>
-            </a:avLst>
-          </a:prstGeom>
-          <a:solidFill>
-            <a:srgbClr val="F7F2EC"/>
-          </a:solidFill>
-          <a:ln w="12700">
-            <a:solidFill>
-              <a:srgbClr val="F7F2EC"/>
-            </a:solidFill>
-            <a:prstDash val="solid"/>
-          </a:ln>
-        </p:spPr>
-      </p:sp>
-      <p:sp>
-        <p:nvSpPr>
-          <p:cNvPr id="15" name="Text 13"/>
-          <p:cNvSpPr/>
-          <p:nvPr/>
-        </p:nvSpPr>
-        <p:spPr>
-          <a:xfrm>
-            <a:off x="8183880" y="2194560"/>
-            <a:ext cx="3017520" cy="365760"/>
-          </a:xfrm>
-          <a:prstGeom prst="rect">
-            <a:avLst/>
-          </a:prstGeom>
-          <a:noFill/>
-          <a:ln/>
-        </p:spPr>
-        <p:txBody>
-          <a:bodyPr wrap="square" lIns="0" tIns="0" rIns="0" bIns="0" rtlCol="0" anchor="ctr"/>
-          <a:lstStyle/>
-          <a:p>
-            <a:pPr indent="0" marL="0">
-              <a:buNone/>
-            </a:pPr>
-            <a:r>
-              <a:rPr lang="en-US" sz="1600" b="1" dirty="0">
-                <a:solidFill>
-                  <a:srgbClr val="8A6F52"/>
-                </a:solidFill>
-                <a:latin typeface="Yu Gothic" pitchFamily="34" charset="0"/>
-                <a:ea typeface="Yu Gothic" pitchFamily="34" charset="-122"/>
-                <a:cs typeface="Yu Gothic" pitchFamily="34" charset="-120"/>
-              </a:rPr>
-              <a:t>多くはここで終わる</a:t>
-            </a:r>
-            <a:endParaRPr lang="en-US" sz="1600" dirty="0"/>
-          </a:p>
-        </p:txBody>
-      </p:sp>
-      <p:sp>
-        <p:nvSpPr>
-          <p:cNvPr id="16" name="Text 14"/>
-          <p:cNvSpPr/>
-          <p:nvPr/>
-        </p:nvSpPr>
-        <p:spPr>
-          <a:xfrm>
-            <a:off x="8183880" y="2633472"/>
-            <a:ext cx="3108960" cy="685800"/>
-          </a:xfrm>
-          <a:prstGeom prst="rect">
-            <a:avLst/>
-          </a:prstGeom>
-          <a:noFill/>
-          <a:ln/>
-        </p:spPr>
-        <p:txBody>
-          <a:bodyPr wrap="square" lIns="0" tIns="0" rIns="0" bIns="0" rtlCol="0" anchor="ctr"/>
-          <a:lstStyle/>
-          <a:p>
-            <a:pPr indent="0" marL="0">
-              <a:lnSpc>
-                <a:spcPct val="115000"/>
-              </a:lnSpc>
-              <a:buNone/>
-            </a:pPr>
-            <a:r>
-              <a:rPr lang="en-US" sz="1300" dirty="0">
-                <a:solidFill>
-                  <a:srgbClr val="5A5044"/>
-                </a:solidFill>
-                <a:latin typeface="Yu Gothic" pitchFamily="34" charset="0"/>
-                <a:ea typeface="Yu Gothic" pitchFamily="34" charset="-122"/>
-                <a:cs typeface="Yu Gothic" pitchFamily="34" charset="-120"/>
-              </a:rPr>
-              <a:t>「今」の値は分かるが、</a:t>
-            </a:r>
-            <a:endParaRPr lang="en-US" sz="1300" dirty="0"/>
-          </a:p>
-          <a:p>
-            <a:pPr indent="0" marL="0">
-              <a:lnSpc>
-                <a:spcPct val="115000"/>
-              </a:lnSpc>
-              <a:buNone/>
-            </a:pPr>
-            <a:r>
-              <a:rPr lang="en-US" sz="1300" dirty="0">
-                <a:solidFill>
-                  <a:srgbClr val="5A5044"/>
-                </a:solidFill>
-                <a:latin typeface="Yu Gothic" pitchFamily="34" charset="0"/>
-                <a:ea typeface="Yu Gothic" pitchFamily="34" charset="-122"/>
-                <a:cs typeface="Yu Gothic" pitchFamily="34" charset="-120"/>
-              </a:rPr>
-              <a:t>変化は活かされにくい</a:t>
-            </a:r>
-            <a:endParaRPr lang="en-US" sz="1300" dirty="0"/>
-          </a:p>
-        </p:txBody>
-      </p:sp>
-      <p:sp>
-        <p:nvSpPr>
-          <p:cNvPr id="17" name="Shape 15"/>
-          <p:cNvSpPr/>
-          <p:nvPr/>
-        </p:nvSpPr>
-        <p:spPr>
-          <a:xfrm>
-            <a:off x="731520" y="3931920"/>
-            <a:ext cx="10698480" cy="2011680"/>
-          </a:xfrm>
-          <a:prstGeom prst="roundRect">
-            <a:avLst>
-              <a:gd name="adj" fmla="val 3636"/>
-            </a:avLst>
-          </a:prstGeom>
-          <a:solidFill>
-            <a:srgbClr val="14504B"/>
-          </a:solidFill>
-          <a:ln w="12700">
-            <a:solidFill>
-              <a:srgbClr val="14504B"/>
-            </a:solidFill>
-            <a:prstDash val="solid"/>
-          </a:ln>
-        </p:spPr>
-      </p:sp>
-      <p:sp>
-        <p:nvSpPr>
-          <p:cNvPr id="18" name="Text 16"/>
-          <p:cNvSpPr/>
-          <p:nvPr/>
-        </p:nvSpPr>
-        <p:spPr>
-          <a:xfrm>
-            <a:off x="1097280" y="4160520"/>
-            <a:ext cx="1828800" cy="384048"/>
-          </a:xfrm>
-          <a:prstGeom prst="rect">
-            <a:avLst/>
-          </a:prstGeom>
-          <a:noFill/>
-          <a:ln/>
-        </p:spPr>
-        <p:txBody>
-          <a:bodyPr wrap="square" lIns="0" tIns="0" rIns="0" bIns="0" rtlCol="0" anchor="ctr"/>
-          <a:lstStyle/>
-          <a:p>
-            <a:pPr indent="0" marL="0">
-              <a:buNone/>
-            </a:pPr>
-            <a:r>
-              <a:rPr lang="en-US" sz="1500" b="1" dirty="0">
-                <a:solidFill>
-                  <a:srgbClr val="D98A2B"/>
-                </a:solidFill>
-                <a:latin typeface="Yu Gothic" pitchFamily="34" charset="0"/>
-                <a:ea typeface="Yu Gothic" pitchFamily="34" charset="-122"/>
-                <a:cs typeface="Yu Gothic" pitchFamily="34" charset="-120"/>
-              </a:rPr>
-              <a:t>問い</a:t>
-            </a:r>
-            <a:endParaRPr lang="en-US" sz="1500" dirty="0"/>
-          </a:p>
-        </p:txBody>
-      </p:sp>
-      <p:sp>
-        <p:nvSpPr>
-          <p:cNvPr id="19" name="Text 17"/>
-          <p:cNvSpPr/>
-          <p:nvPr/>
-        </p:nvSpPr>
-        <p:spPr>
-          <a:xfrm>
-            <a:off x="1097280" y="4590288"/>
-            <a:ext cx="10058400" cy="1097280"/>
-          </a:xfrm>
-          <a:prstGeom prst="rect">
-            <a:avLst/>
-          </a:prstGeom>
-          <a:noFill/>
-          <a:ln/>
-        </p:spPr>
-        <p:txBody>
-          <a:bodyPr wrap="square" lIns="0" tIns="0" rIns="0" bIns="0" rtlCol="0" anchor="ctr"/>
-          <a:lstStyle/>
-          <a:p>
-            <a:pPr indent="0" marL="0">
-              <a:lnSpc>
-                <a:spcPct val="130000"/>
-              </a:lnSpc>
-              <a:buNone/>
-            </a:pPr>
-            <a:r>
-              <a:rPr lang="en-US" sz="2400" b="1" dirty="0">
-                <a:solidFill>
-                  <a:srgbClr val="FFFFFF"/>
-                </a:solidFill>
-                <a:latin typeface="Yu Gothic" pitchFamily="34" charset="0"/>
-                <a:ea typeface="Yu Gothic" pitchFamily="34" charset="-122"/>
-                <a:cs typeface="Yu Gothic" pitchFamily="34" charset="-120"/>
-              </a:rPr>
-              <a:t>毎年同じ人を測っているのだから、</a:t>
-            </a:r>
-            <a:endParaRPr lang="en-US" sz="2400" dirty="0"/>
-          </a:p>
-          <a:p>
-            <a:pPr indent="0" marL="0">
-              <a:lnSpc>
-                <a:spcPct val="130000"/>
-              </a:lnSpc>
-              <a:buNone/>
-            </a:pPr>
-            <a:r>
-              <a:rPr lang="en-US" sz="2400" b="1" dirty="0">
-                <a:solidFill>
-                  <a:srgbClr val="FFFFFF"/>
-                </a:solidFill>
-                <a:latin typeface="Yu Gothic" pitchFamily="34" charset="0"/>
-                <a:ea typeface="Yu Gothic" pitchFamily="34" charset="-122"/>
-                <a:cs typeface="Yu Gothic" pitchFamily="34" charset="-120"/>
-              </a:rPr>
-              <a:t>「去年からどう変わったか」でリスクを見られないか。</a:t>
-            </a:r>
-            <a:endParaRPr lang="en-US" sz="2400" dirty="0"/>
           </a:p>
         </p:txBody>
       </p:sp>
@@ -11479,7 +12241,7 @@
                 <a:ea typeface="Yu Gothic" pitchFamily="34" charset="-122"/>
                 <a:cs typeface="Yu Gothic" pitchFamily="34" charset="-120"/>
               </a:rPr>
-              <a:t>事例：からだの「まるみ」の変化を見る</a:t>
+              <a:t>特定健診は、毎年とられている</a:t>
             </a:r>
             <a:endParaRPr lang="en-US" sz="3600" dirty="0"/>
           </a:p>
@@ -11487,57 +12249,18 @@
       </p:sp>
       <p:sp>
         <p:nvSpPr>
-          <p:cNvPr id="3" name="Text 1"/>
-          <p:cNvSpPr/>
-          <p:nvPr/>
-        </p:nvSpPr>
-        <p:spPr>
-          <a:xfrm>
-            <a:off x="731520" y="1225296"/>
-            <a:ext cx="10698480" cy="411480"/>
-          </a:xfrm>
-          <a:prstGeom prst="rect">
-            <a:avLst/>
-          </a:prstGeom>
-          <a:noFill/>
-          <a:ln/>
-        </p:spPr>
-        <p:txBody>
-          <a:bodyPr wrap="square" lIns="0" tIns="0" rIns="0" bIns="0" rtlCol="0" anchor="ctr"/>
-          <a:lstStyle/>
-          <a:p>
-            <a:pPr indent="0" marL="0">
-              <a:buNone/>
-            </a:pPr>
-            <a:r>
-              <a:rPr lang="en-US" sz="1600" dirty="0">
-                <a:solidFill>
-                  <a:srgbClr val="5C6B68"/>
-                </a:solidFill>
-                <a:latin typeface="Yu Gothic" pitchFamily="34" charset="0"/>
-                <a:ea typeface="Yu Gothic" pitchFamily="34" charset="-122"/>
-                <a:cs typeface="Yu Gothic" pitchFamily="34" charset="-120"/>
-              </a:rPr>
-              <a:t>腹囲と身長だけで計算できる指標 BRI（Body Roundness Index）</a:t>
-            </a:r>
-            <a:endParaRPr lang="en-US" sz="1600" dirty="0"/>
-          </a:p>
-        </p:txBody>
-      </p:sp>
-      <p:sp>
-        <p:nvSpPr>
-          <p:cNvPr id="4" name="Shape 2"/>
-          <p:cNvSpPr/>
-          <p:nvPr/>
-        </p:nvSpPr>
-        <p:spPr>
-          <a:xfrm>
-            <a:off x="731520" y="1920240"/>
-            <a:ext cx="3429000" cy="1783080"/>
+          <p:cNvPr id="3" name="Shape 1"/>
+          <p:cNvSpPr/>
+          <p:nvPr/>
+        </p:nvSpPr>
+        <p:spPr>
+          <a:xfrm>
+            <a:off x="731520" y="1965960"/>
+            <a:ext cx="2103120" cy="1554480"/>
           </a:xfrm>
           <a:prstGeom prst="roundRect">
             <a:avLst>
-              <a:gd name="adj" fmla="val 4103"/>
+              <a:gd name="adj" fmla="val 4706"/>
             </a:avLst>
           </a:prstGeom>
           <a:solidFill>
@@ -11553,72 +12276,69 @@
       </p:sp>
       <p:sp>
         <p:nvSpPr>
+          <p:cNvPr id="4" name="Text 2"/>
+          <p:cNvSpPr/>
+          <p:nvPr/>
+        </p:nvSpPr>
+        <p:spPr>
+          <a:xfrm>
+            <a:off x="777240" y="2194560"/>
+            <a:ext cx="2011680" cy="365760"/>
+          </a:xfrm>
+          <a:prstGeom prst="rect">
+            <a:avLst/>
+          </a:prstGeom>
+          <a:noFill/>
+          <a:ln/>
+        </p:spPr>
+        <p:txBody>
+          <a:bodyPr wrap="square" lIns="0" tIns="0" rIns="0" bIns="0" rtlCol="0" anchor="ctr"/>
+          <a:lstStyle/>
+          <a:p>
+            <a:pPr algn="ctr" indent="0" marL="0">
+              <a:buNone/>
+            </a:pPr>
+            <a:r>
+              <a:rPr lang="en-US" sz="1700" b="1" dirty="0">
+                <a:solidFill>
+                  <a:srgbClr val="14504B"/>
+                </a:solidFill>
+                <a:latin typeface="Yu Gothic" pitchFamily="34" charset="0"/>
+                <a:ea typeface="Yu Gothic" pitchFamily="34" charset="-122"/>
+                <a:cs typeface="Yu Gothic" pitchFamily="34" charset="-120"/>
+              </a:rPr>
+              <a:t>受ける</a:t>
+            </a:r>
+            <a:endParaRPr lang="en-US" sz="1700" dirty="0"/>
+          </a:p>
+        </p:txBody>
+      </p:sp>
+      <p:sp>
+        <p:nvSpPr>
           <p:cNvPr id="5" name="Text 3"/>
           <p:cNvSpPr/>
           <p:nvPr/>
         </p:nvSpPr>
         <p:spPr>
           <a:xfrm>
-            <a:off x="987552" y="2103120"/>
-            <a:ext cx="2926080" cy="384048"/>
-          </a:xfrm>
-          <a:prstGeom prst="rect">
-            <a:avLst/>
-          </a:prstGeom>
-          <a:noFill/>
-          <a:ln/>
-        </p:spPr>
-        <p:txBody>
-          <a:bodyPr wrap="square" lIns="0" tIns="0" rIns="0" bIns="0" rtlCol="0" anchor="ctr"/>
-          <a:lstStyle/>
-          <a:p>
-            <a:pPr indent="0" marL="0">
-              <a:buNone/>
-            </a:pPr>
-            <a:r>
-              <a:rPr lang="en-US" sz="1700" b="1" dirty="0">
-                <a:solidFill>
-                  <a:srgbClr val="14504B"/>
-                </a:solidFill>
-                <a:latin typeface="Yu Gothic" pitchFamily="34" charset="0"/>
-                <a:ea typeface="Yu Gothic" pitchFamily="34" charset="-122"/>
-                <a:cs typeface="Yu Gothic" pitchFamily="34" charset="-120"/>
-              </a:rPr>
-              <a:t>見たもの</a:t>
-            </a:r>
-            <a:endParaRPr lang="en-US" sz="1700" dirty="0"/>
-          </a:p>
-        </p:txBody>
-      </p:sp>
-      <p:sp>
-        <p:nvSpPr>
-          <p:cNvPr id="6" name="Text 4"/>
-          <p:cNvSpPr/>
-          <p:nvPr/>
-        </p:nvSpPr>
-        <p:spPr>
-          <a:xfrm>
-            <a:off x="987552" y="2578608"/>
-            <a:ext cx="2971800" cy="868680"/>
-          </a:xfrm>
-          <a:prstGeom prst="rect">
-            <a:avLst/>
-          </a:prstGeom>
-          <a:noFill/>
-          <a:ln/>
-        </p:spPr>
-        <p:txBody>
-          <a:bodyPr wrap="square" lIns="0" tIns="0" rIns="0" bIns="0" rtlCol="0" anchor="ctr"/>
-          <a:lstStyle/>
-          <a:p>
-            <a:pPr indent="0" marL="0">
-              <a:lnSpc>
-                <a:spcPct val="120000"/>
-              </a:lnSpc>
-              <a:buNone/>
-            </a:pPr>
-            <a:r>
-              <a:rPr lang="en-US" sz="1400" dirty="0">
+            <a:off x="777240" y="2651760"/>
+            <a:ext cx="2011680" cy="640080"/>
+          </a:xfrm>
+          <a:prstGeom prst="rect">
+            <a:avLst/>
+          </a:prstGeom>
+          <a:noFill/>
+          <a:ln/>
+        </p:spPr>
+        <p:txBody>
+          <a:bodyPr wrap="square" lIns="0" tIns="0" rIns="0" bIns="0" rtlCol="0" anchor="ctr"/>
+          <a:lstStyle/>
+          <a:p>
+            <a:pPr algn="ctr" indent="0" marL="0">
+              <a:buNone/>
+            </a:pPr>
+            <a:r>
+              <a:rPr lang="en-US" sz="1300" dirty="0">
                 <a:solidFill>
                   <a:srgbClr val="5C6B68"/>
                 </a:solidFill>
@@ -11626,31 +12346,36 @@
                 <a:ea typeface="Yu Gothic" pitchFamily="34" charset="-122"/>
                 <a:cs typeface="Yu Gothic" pitchFamily="34" charset="-120"/>
               </a:rPr>
-              <a:t>延岡市の40歳以上</a:t>
-            </a:r>
-            <a:endParaRPr lang="en-US" sz="1400" dirty="0"/>
-          </a:p>
-          <a:p>
-            <a:pPr indent="0" marL="0">
-              <a:lnSpc>
-                <a:spcPct val="120000"/>
-              </a:lnSpc>
-              <a:buNone/>
-            </a:pPr>
-            <a:r>
-              <a:rPr lang="en-US" sz="1400" dirty="0">
-                <a:solidFill>
-                  <a:srgbClr val="5C6B68"/>
-                </a:solidFill>
-                <a:latin typeface="Yu Gothic" pitchFamily="34" charset="0"/>
-                <a:ea typeface="Yu Gothic" pitchFamily="34" charset="-122"/>
-                <a:cs typeface="Yu Gothic" pitchFamily="34" charset="-120"/>
-              </a:rPr>
-              <a:t>3,819名の2年分</a:t>
-            </a:r>
-            <a:endParaRPr lang="en-US" sz="1400" dirty="0"/>
-          </a:p>
-        </p:txBody>
+              <a:t>腹囲・血圧・血液検査</a:t>
+            </a:r>
+            <a:endParaRPr lang="en-US" sz="1300" dirty="0"/>
+          </a:p>
+        </p:txBody>
+      </p:sp>
+      <p:sp>
+        <p:nvSpPr>
+          <p:cNvPr id="6" name="Shape 4"/>
+          <p:cNvSpPr/>
+          <p:nvPr/>
+        </p:nvSpPr>
+        <p:spPr>
+          <a:xfrm>
+            <a:off x="2871216" y="2670048"/>
+            <a:ext cx="201168" cy="237744"/>
+          </a:xfrm>
+          <a:prstGeom prst="rightArrow">
+            <a:avLst/>
+          </a:prstGeom>
+          <a:solidFill>
+            <a:srgbClr val="A8CFC9"/>
+          </a:solidFill>
+          <a:ln w="12700">
+            <a:solidFill>
+              <a:srgbClr val="A8CFC9"/>
+            </a:solidFill>
+            <a:prstDash val="solid"/>
+          </a:ln>
+        </p:spPr>
       </p:sp>
       <p:sp>
         <p:nvSpPr>
@@ -11660,12 +12385,12 @@
         </p:nvSpPr>
         <p:spPr>
           <a:xfrm>
-            <a:off x="4434840" y="1920240"/>
-            <a:ext cx="3429000" cy="1783080"/>
+            <a:off x="3108960" y="1965960"/>
+            <a:ext cx="2103120" cy="1554480"/>
           </a:xfrm>
           <a:prstGeom prst="roundRect">
             <a:avLst>
-              <a:gd name="adj" fmla="val 4103"/>
+              <a:gd name="adj" fmla="val 4706"/>
             </a:avLst>
           </a:prstGeom>
           <a:solidFill>
@@ -11687,20 +12412,20 @@
         </p:nvSpPr>
         <p:spPr>
           <a:xfrm>
-            <a:off x="4690872" y="2103120"/>
-            <a:ext cx="2926080" cy="384048"/>
-          </a:xfrm>
-          <a:prstGeom prst="rect">
-            <a:avLst/>
-          </a:prstGeom>
-          <a:noFill/>
-          <a:ln/>
-        </p:spPr>
-        <p:txBody>
-          <a:bodyPr wrap="square" lIns="0" tIns="0" rIns="0" bIns="0" rtlCol="0" anchor="ctr"/>
-          <a:lstStyle/>
-          <a:p>
-            <a:pPr indent="0" marL="0">
+            <a:off x="3154680" y="2194560"/>
+            <a:ext cx="2011680" cy="365760"/>
+          </a:xfrm>
+          <a:prstGeom prst="rect">
+            <a:avLst/>
+          </a:prstGeom>
+          <a:noFill/>
+          <a:ln/>
+        </p:spPr>
+        <p:txBody>
+          <a:bodyPr wrap="square" lIns="0" tIns="0" rIns="0" bIns="0" rtlCol="0" anchor="ctr"/>
+          <a:lstStyle/>
+          <a:p>
+            <a:pPr algn="ctr" indent="0" marL="0">
               <a:buNone/>
             </a:pPr>
             <a:r>
@@ -11712,7 +12437,7 @@
                 <a:ea typeface="Yu Gothic" pitchFamily="34" charset="-122"/>
                 <a:cs typeface="Yu Gothic" pitchFamily="34" charset="-120"/>
               </a:rPr>
-              <a:t>調べたこと</a:t>
+              <a:t>結果を渡す</a:t>
             </a:r>
             <a:endParaRPr lang="en-US" sz="1700" dirty="0"/>
           </a:p>
@@ -11726,27 +12451,24 @@
         </p:nvSpPr>
         <p:spPr>
           <a:xfrm>
-            <a:off x="4690872" y="2578608"/>
-            <a:ext cx="2971800" cy="868680"/>
-          </a:xfrm>
-          <a:prstGeom prst="rect">
-            <a:avLst/>
-          </a:prstGeom>
-          <a:noFill/>
-          <a:ln/>
-        </p:spPr>
-        <p:txBody>
-          <a:bodyPr wrap="square" lIns="0" tIns="0" rIns="0" bIns="0" rtlCol="0" anchor="ctr"/>
-          <a:lstStyle/>
-          <a:p>
-            <a:pPr indent="0" marL="0">
-              <a:lnSpc>
-                <a:spcPct val="120000"/>
-              </a:lnSpc>
-              <a:buNone/>
-            </a:pPr>
-            <a:r>
-              <a:rPr lang="en-US" sz="1400" dirty="0">
+            <a:off x="3154680" y="2651760"/>
+            <a:ext cx="2011680" cy="640080"/>
+          </a:xfrm>
+          <a:prstGeom prst="rect">
+            <a:avLst/>
+          </a:prstGeom>
+          <a:noFill/>
+          <a:ln/>
+        </p:spPr>
+        <p:txBody>
+          <a:bodyPr wrap="square" lIns="0" tIns="0" rIns="0" bIns="0" rtlCol="0" anchor="ctr"/>
+          <a:lstStyle/>
+          <a:p>
+            <a:pPr algn="ctr" indent="0" marL="0">
+              <a:buNone/>
+            </a:pPr>
+            <a:r>
+              <a:rPr lang="en-US" sz="1300" dirty="0">
                 <a:solidFill>
                   <a:srgbClr val="5C6B68"/>
                 </a:solidFill>
@@ -11754,29 +12476,9 @@
                 <a:ea typeface="Yu Gothic" pitchFamily="34" charset="-122"/>
                 <a:cs typeface="Yu Gothic" pitchFamily="34" charset="-120"/>
               </a:rPr>
-              <a:t>1年間でBRIが</a:t>
-            </a:r>
-            <a:endParaRPr lang="en-US" sz="1400" dirty="0"/>
-          </a:p>
-          <a:p>
-            <a:pPr indent="0" marL="0">
-              <a:lnSpc>
-                <a:spcPct val="120000"/>
-              </a:lnSpc>
-              <a:buNone/>
-            </a:pPr>
-            <a:r>
-              <a:rPr lang="en-US" sz="1400" dirty="0">
-                <a:solidFill>
-                  <a:srgbClr val="5C6B68"/>
-                </a:solidFill>
-                <a:latin typeface="Yu Gothic" pitchFamily="34" charset="0"/>
-                <a:ea typeface="Yu Gothic" pitchFamily="34" charset="-122"/>
-                <a:cs typeface="Yu Gothic" pitchFamily="34" charset="-120"/>
-              </a:rPr>
-              <a:t>増えた／減った／横ばい</a:t>
-            </a:r>
-            <a:endParaRPr lang="en-US" sz="1400" dirty="0"/>
+              <a:t>基準値との比較</a:t>
+            </a:r>
+            <a:endParaRPr lang="en-US" sz="1300" dirty="0"/>
           </a:p>
         </p:txBody>
       </p:sp>
@@ -11788,12 +12490,270 @@
         </p:nvSpPr>
         <p:spPr>
           <a:xfrm>
-            <a:off x="8138160" y="1920240"/>
-            <a:ext cx="3429000" cy="1783080"/>
+            <a:off x="5248656" y="2670048"/>
+            <a:ext cx="201168" cy="237744"/>
+          </a:xfrm>
+          <a:prstGeom prst="rightArrow">
+            <a:avLst/>
+          </a:prstGeom>
+          <a:solidFill>
+            <a:srgbClr val="A8CFC9"/>
+          </a:solidFill>
+          <a:ln w="12700">
+            <a:solidFill>
+              <a:srgbClr val="A8CFC9"/>
+            </a:solidFill>
+            <a:prstDash val="solid"/>
+          </a:ln>
+        </p:spPr>
+      </p:sp>
+      <p:sp>
+        <p:nvSpPr>
+          <p:cNvPr id="11" name="Shape 9"/>
+          <p:cNvSpPr/>
+          <p:nvPr/>
+        </p:nvSpPr>
+        <p:spPr>
+          <a:xfrm>
+            <a:off x="5486400" y="1965960"/>
+            <a:ext cx="2103120" cy="1554480"/>
           </a:xfrm>
           <a:prstGeom prst="roundRect">
             <a:avLst>
-              <a:gd name="adj" fmla="val 4103"/>
+              <a:gd name="adj" fmla="val 4706"/>
+            </a:avLst>
+          </a:prstGeom>
+          <a:solidFill>
+            <a:srgbClr val="F1F6F5"/>
+          </a:solidFill>
+          <a:ln w="12700">
+            <a:solidFill>
+              <a:srgbClr val="F1F6F5"/>
+            </a:solidFill>
+            <a:prstDash val="solid"/>
+          </a:ln>
+        </p:spPr>
+      </p:sp>
+      <p:sp>
+        <p:nvSpPr>
+          <p:cNvPr id="12" name="Text 10"/>
+          <p:cNvSpPr/>
+          <p:nvPr/>
+        </p:nvSpPr>
+        <p:spPr>
+          <a:xfrm>
+            <a:off x="5532120" y="2194560"/>
+            <a:ext cx="2011680" cy="365760"/>
+          </a:xfrm>
+          <a:prstGeom prst="rect">
+            <a:avLst/>
+          </a:prstGeom>
+          <a:noFill/>
+          <a:ln/>
+        </p:spPr>
+        <p:txBody>
+          <a:bodyPr wrap="square" lIns="0" tIns="0" rIns="0" bIns="0" rtlCol="0" anchor="ctr"/>
+          <a:lstStyle/>
+          <a:p>
+            <a:pPr algn="ctr" indent="0" marL="0">
+              <a:buNone/>
+            </a:pPr>
+            <a:r>
+              <a:rPr lang="en-US" sz="1700" b="1" dirty="0">
+                <a:solidFill>
+                  <a:srgbClr val="14504B"/>
+                </a:solidFill>
+                <a:latin typeface="Yu Gothic" pitchFamily="34" charset="0"/>
+                <a:ea typeface="Yu Gothic" pitchFamily="34" charset="-122"/>
+                <a:cs typeface="Yu Gothic" pitchFamily="34" charset="-120"/>
+              </a:rPr>
+              <a:t>保健指導</a:t>
+            </a:r>
+            <a:endParaRPr lang="en-US" sz="1700" dirty="0"/>
+          </a:p>
+        </p:txBody>
+      </p:sp>
+      <p:sp>
+        <p:nvSpPr>
+          <p:cNvPr id="13" name="Text 11"/>
+          <p:cNvSpPr/>
+          <p:nvPr/>
+        </p:nvSpPr>
+        <p:spPr>
+          <a:xfrm>
+            <a:off x="5532120" y="2651760"/>
+            <a:ext cx="2011680" cy="640080"/>
+          </a:xfrm>
+          <a:prstGeom prst="rect">
+            <a:avLst/>
+          </a:prstGeom>
+          <a:noFill/>
+          <a:ln/>
+        </p:spPr>
+        <p:txBody>
+          <a:bodyPr wrap="square" lIns="0" tIns="0" rIns="0" bIns="0" rtlCol="0" anchor="ctr"/>
+          <a:lstStyle/>
+          <a:p>
+            <a:pPr algn="ctr" indent="0" marL="0">
+              <a:buNone/>
+            </a:pPr>
+            <a:r>
+              <a:rPr lang="en-US" sz="1300" dirty="0">
+                <a:solidFill>
+                  <a:srgbClr val="5C6B68"/>
+                </a:solidFill>
+                <a:latin typeface="Yu Gothic" pitchFamily="34" charset="0"/>
+                <a:ea typeface="Yu Gothic" pitchFamily="34" charset="-122"/>
+                <a:cs typeface="Yu Gothic" pitchFamily="34" charset="-120"/>
+              </a:rPr>
+              <a:t>該当者に案内</a:t>
+            </a:r>
+            <a:endParaRPr lang="en-US" sz="1300" dirty="0"/>
+          </a:p>
+        </p:txBody>
+      </p:sp>
+      <p:sp>
+        <p:nvSpPr>
+          <p:cNvPr id="14" name="Shape 12"/>
+          <p:cNvSpPr/>
+          <p:nvPr/>
+        </p:nvSpPr>
+        <p:spPr>
+          <a:xfrm>
+            <a:off x="7955280" y="1965960"/>
+            <a:ext cx="3474720" cy="1554480"/>
+          </a:xfrm>
+          <a:prstGeom prst="roundRect">
+            <a:avLst>
+              <a:gd name="adj" fmla="val 4706"/>
+            </a:avLst>
+          </a:prstGeom>
+          <a:solidFill>
+            <a:srgbClr val="F7F2EC"/>
+          </a:solidFill>
+          <a:ln w="12700">
+            <a:solidFill>
+              <a:srgbClr val="F7F2EC"/>
+            </a:solidFill>
+            <a:prstDash val="solid"/>
+          </a:ln>
+        </p:spPr>
+      </p:sp>
+      <p:sp>
+        <p:nvSpPr>
+          <p:cNvPr id="15" name="Text 13"/>
+          <p:cNvSpPr/>
+          <p:nvPr/>
+        </p:nvSpPr>
+        <p:spPr>
+          <a:xfrm>
+            <a:off x="8183880" y="2194560"/>
+            <a:ext cx="3017520" cy="365760"/>
+          </a:xfrm>
+          <a:prstGeom prst="rect">
+            <a:avLst/>
+          </a:prstGeom>
+          <a:noFill/>
+          <a:ln/>
+        </p:spPr>
+        <p:txBody>
+          <a:bodyPr wrap="square" lIns="0" tIns="0" rIns="0" bIns="0" rtlCol="0" anchor="ctr"/>
+          <a:lstStyle/>
+          <a:p>
+            <a:pPr indent="0" marL="0">
+              <a:buNone/>
+            </a:pPr>
+            <a:r>
+              <a:rPr lang="en-US" sz="1600" b="1" dirty="0">
+                <a:solidFill>
+                  <a:srgbClr val="8A6F52"/>
+                </a:solidFill>
+                <a:latin typeface="Yu Gothic" pitchFamily="34" charset="0"/>
+                <a:ea typeface="Yu Gothic" pitchFamily="34" charset="-122"/>
+                <a:cs typeface="Yu Gothic" pitchFamily="34" charset="-120"/>
+              </a:rPr>
+              <a:t>多くはここで終わる</a:t>
+            </a:r>
+            <a:endParaRPr lang="en-US" sz="1600" dirty="0"/>
+          </a:p>
+        </p:txBody>
+      </p:sp>
+      <p:sp>
+        <p:nvSpPr>
+          <p:cNvPr id="16" name="Text 14"/>
+          <p:cNvSpPr/>
+          <p:nvPr/>
+        </p:nvSpPr>
+        <p:spPr>
+          <a:xfrm>
+            <a:off x="8183880" y="2633472"/>
+            <a:ext cx="3108960" cy="685800"/>
+          </a:xfrm>
+          <a:prstGeom prst="rect">
+            <a:avLst/>
+          </a:prstGeom>
+          <a:noFill/>
+          <a:ln/>
+        </p:spPr>
+        <p:txBody>
+          <a:bodyPr wrap="square" lIns="0" tIns="0" rIns="0" bIns="0" rtlCol="0" anchor="ctr"/>
+          <a:lstStyle/>
+          <a:p>
+            <a:pPr indent="0" marL="0">
+              <a:lnSpc>
+                <a:spcPct val="115000"/>
+              </a:lnSpc>
+              <a:buNone/>
+            </a:pPr>
+            <a:r>
+              <a:rPr lang="en-US" sz="1300" dirty="0">
+                <a:solidFill>
+                  <a:srgbClr val="5A5044"/>
+                </a:solidFill>
+                <a:latin typeface="Yu Gothic" pitchFamily="34" charset="0"/>
+                <a:ea typeface="Yu Gothic" pitchFamily="34" charset="-122"/>
+                <a:cs typeface="Yu Gothic" pitchFamily="34" charset="-120"/>
+              </a:rPr>
+              <a:t>「今」の値は分かるが、</a:t>
+            </a:r>
+            <a:endParaRPr lang="en-US" sz="1300" dirty="0"/>
+          </a:p>
+          <a:p>
+            <a:pPr indent="0" marL="0">
+              <a:lnSpc>
+                <a:spcPct val="115000"/>
+              </a:lnSpc>
+              <a:buNone/>
+            </a:pPr>
+            <a:r>
+              <a:rPr lang="en-US" sz="1300" dirty="0">
+                <a:solidFill>
+                  <a:srgbClr val="5A5044"/>
+                </a:solidFill>
+                <a:latin typeface="Yu Gothic" pitchFamily="34" charset="0"/>
+                <a:ea typeface="Yu Gothic" pitchFamily="34" charset="-122"/>
+                <a:cs typeface="Yu Gothic" pitchFamily="34" charset="-120"/>
+              </a:rPr>
+              <a:t>変化は活かされにくい</a:t>
+            </a:r>
+            <a:endParaRPr lang="en-US" sz="1300" dirty="0"/>
+          </a:p>
+        </p:txBody>
+      </p:sp>
+      <p:sp>
+        <p:nvSpPr>
+          <p:cNvPr id="17" name="Shape 15"/>
+          <p:cNvSpPr/>
+          <p:nvPr/>
+        </p:nvSpPr>
+        <p:spPr>
+          <a:xfrm>
+            <a:off x="731520" y="3931920"/>
+            <a:ext cx="10698480" cy="2011680"/>
+          </a:xfrm>
+          <a:prstGeom prst="roundRect">
+            <a:avLst>
+              <a:gd name="adj" fmla="val 3636"/>
             </a:avLst>
           </a:prstGeom>
           <a:solidFill>
@@ -11809,30 +12769,30 @@
       </p:sp>
       <p:sp>
         <p:nvSpPr>
-          <p:cNvPr id="11" name="Text 9"/>
-          <p:cNvSpPr/>
-          <p:nvPr/>
-        </p:nvSpPr>
-        <p:spPr>
-          <a:xfrm>
-            <a:off x="8394192" y="2103120"/>
-            <a:ext cx="2926080" cy="384048"/>
-          </a:xfrm>
-          <a:prstGeom prst="rect">
-            <a:avLst/>
-          </a:prstGeom>
-          <a:noFill/>
-          <a:ln/>
-        </p:spPr>
-        <p:txBody>
-          <a:bodyPr wrap="square" lIns="0" tIns="0" rIns="0" bIns="0" rtlCol="0" anchor="ctr"/>
-          <a:lstStyle/>
-          <a:p>
-            <a:pPr indent="0" marL="0">
-              <a:buNone/>
-            </a:pPr>
-            <a:r>
-              <a:rPr lang="en-US" sz="1700" b="1" dirty="0">
+          <p:cNvPr id="18" name="Text 16"/>
+          <p:cNvSpPr/>
+          <p:nvPr/>
+        </p:nvSpPr>
+        <p:spPr>
+          <a:xfrm>
+            <a:off x="1097280" y="4160520"/>
+            <a:ext cx="1828800" cy="384048"/>
+          </a:xfrm>
+          <a:prstGeom prst="rect">
+            <a:avLst/>
+          </a:prstGeom>
+          <a:noFill/>
+          <a:ln/>
+        </p:spPr>
+        <p:txBody>
+          <a:bodyPr wrap="square" lIns="0" tIns="0" rIns="0" bIns="0" rtlCol="0" anchor="ctr"/>
+          <a:lstStyle/>
+          <a:p>
+            <a:pPr indent="0" marL="0">
+              <a:buNone/>
+            </a:pPr>
+            <a:r>
+              <a:rPr lang="en-US" sz="1500" b="1" dirty="0">
                 <a:solidFill>
                   <a:srgbClr val="D98A2B"/>
                 </a:solidFill>
@@ -11840,22 +12800,22 @@
                 <a:ea typeface="Yu Gothic" pitchFamily="34" charset="-122"/>
                 <a:cs typeface="Yu Gothic" pitchFamily="34" charset="-120"/>
               </a:rPr>
-              <a:t>分かったこと</a:t>
-            </a:r>
-            <a:endParaRPr lang="en-US" sz="1700" dirty="0"/>
-          </a:p>
-        </p:txBody>
-      </p:sp>
-      <p:sp>
-        <p:nvSpPr>
-          <p:cNvPr id="12" name="Text 10"/>
-          <p:cNvSpPr/>
-          <p:nvPr/>
-        </p:nvSpPr>
-        <p:spPr>
-          <a:xfrm>
-            <a:off x="8394192" y="2578608"/>
-            <a:ext cx="2971800" cy="868680"/>
+              <a:t>問い</a:t>
+            </a:r>
+            <a:endParaRPr lang="en-US" sz="1500" dirty="0"/>
+          </a:p>
+        </p:txBody>
+      </p:sp>
+      <p:sp>
+        <p:nvSpPr>
+          <p:cNvPr id="19" name="Text 17"/>
+          <p:cNvSpPr/>
+          <p:nvPr/>
+        </p:nvSpPr>
+        <p:spPr>
+          <a:xfrm>
+            <a:off x="1097280" y="4590288"/>
+            <a:ext cx="10058400" cy="1097280"/>
           </a:xfrm>
           <a:prstGeom prst="rect">
             <a:avLst/>
@@ -11869,12 +12829,12 @@
           <a:p>
             <a:pPr indent="0" marL="0">
               <a:lnSpc>
-                <a:spcPct val="120000"/>
+                <a:spcPct val="130000"/>
               </a:lnSpc>
               <a:buNone/>
             </a:pPr>
             <a:r>
-              <a:rPr lang="en-US" sz="1400" dirty="0">
+              <a:rPr lang="en-US" sz="2400" b="1" dirty="0">
                 <a:solidFill>
                   <a:srgbClr val="FFFFFF"/>
                 </a:solidFill>
@@ -11882,19 +12842,19 @@
                 <a:ea typeface="Yu Gothic" pitchFamily="34" charset="-122"/>
                 <a:cs typeface="Yu Gothic" pitchFamily="34" charset="-120"/>
               </a:rPr>
-              <a:t>増えた群で尿蛋白が</a:t>
-            </a:r>
-            <a:endParaRPr lang="en-US" sz="1400" dirty="0"/>
+              <a:t>毎年同じ人を測っているのだから、</a:t>
+            </a:r>
+            <a:endParaRPr lang="en-US" sz="2400" dirty="0"/>
           </a:p>
           <a:p>
             <a:pPr indent="0" marL="0">
               <a:lnSpc>
-                <a:spcPct val="120000"/>
+                <a:spcPct val="130000"/>
               </a:lnSpc>
               <a:buNone/>
             </a:pPr>
             <a:r>
-              <a:rPr lang="en-US" sz="1400" dirty="0">
+              <a:rPr lang="en-US" sz="2400" b="1" dirty="0">
                 <a:solidFill>
                   <a:srgbClr val="FFFFFF"/>
                 </a:solidFill>
@@ -11902,336 +12862,9 @@
                 <a:ea typeface="Yu Gothic" pitchFamily="34" charset="-122"/>
                 <a:cs typeface="Yu Gothic" pitchFamily="34" charset="-120"/>
               </a:rPr>
-              <a:t>新たに出やすかった</a:t>
-            </a:r>
-            <a:endParaRPr lang="en-US" sz="1400" dirty="0"/>
-          </a:p>
-        </p:txBody>
-      </p:sp>
-      <p:graphicFrame>
-        <p:nvGraphicFramePr>
-          <p:cNvPr id="13" name="Chart 0" descr=""/>
-          <p:cNvGraphicFramePr/>
-          <p:nvPr/>
-        </p:nvGraphicFramePr>
-        <p:xfrm>
-          <a:off x="731520" y="3840480"/>
-          <a:ext cx="6035040" cy="2011680"/>
-        </p:xfrm>
-        <a:graphic xmlns:a="http://schemas.openxmlformats.org/drawingml/2006/main">
-          <a:graphicData uri="http://schemas.openxmlformats.org/drawingml/2006/chart">
-            <c:chart xmlns:c="http://schemas.openxmlformats.org/drawingml/2006/chart" r:id="rId1"/>
-          </a:graphicData>
-        </a:graphic>
-      </p:graphicFrame>
-      <p:sp>
-        <p:nvSpPr>
-          <p:cNvPr id="14" name="Text 11"/>
-          <p:cNvSpPr/>
-          <p:nvPr/>
-        </p:nvSpPr>
-        <p:spPr>
-          <a:xfrm>
-            <a:off x="731520" y="5897880"/>
-            <a:ext cx="6126480" cy="502920"/>
-          </a:xfrm>
-          <a:prstGeom prst="rect">
-            <a:avLst/>
-          </a:prstGeom>
-          <a:noFill/>
-          <a:ln/>
-        </p:spPr>
-        <p:txBody>
-          <a:bodyPr wrap="square" lIns="0" tIns="0" rIns="0" bIns="0" rtlCol="0" anchor="ctr"/>
-          <a:lstStyle/>
-          <a:p>
-            <a:pPr indent="0" marL="0">
-              <a:lnSpc>
-                <a:spcPct val="120000"/>
-              </a:lnSpc>
-              <a:buNone/>
-            </a:pPr>
-            <a:r>
-              <a:rPr lang="en-US" sz="1200" dirty="0">
-                <a:solidFill>
-                  <a:srgbClr val="5C6B68"/>
-                </a:solidFill>
-                <a:latin typeface="Yu Gothic" pitchFamily="34" charset="0"/>
-                <a:ea typeface="Yu Gothic" pitchFamily="34" charset="-122"/>
-                <a:cs typeface="Yu Gothic" pitchFamily="34" charset="-120"/>
-              </a:rPr>
-              <a:t>「増えた」だけが統計的に確かめられた差です。「減った」は 1.16 と出ていますが、ばらつきの範囲（0.85〜1.58）が1をまたぐため、差があるとは言えません。</a:t>
-            </a:r>
-            <a:endParaRPr lang="en-US" sz="1200" dirty="0"/>
-          </a:p>
-        </p:txBody>
-      </p:sp>
-      <p:sp>
-        <p:nvSpPr>
-          <p:cNvPr id="15" name="Shape 12"/>
-          <p:cNvSpPr/>
-          <p:nvPr/>
-        </p:nvSpPr>
-        <p:spPr>
-          <a:xfrm>
-            <a:off x="7040880" y="3840480"/>
-            <a:ext cx="4389120" cy="2560320"/>
-          </a:xfrm>
-          <a:prstGeom prst="roundRect">
-            <a:avLst>
-              <a:gd name="adj" fmla="val 2857"/>
-            </a:avLst>
-          </a:prstGeom>
-          <a:solidFill>
-            <a:srgbClr val="F1F6F5"/>
-          </a:solidFill>
-          <a:ln w="12700">
-            <a:solidFill>
-              <a:srgbClr val="F1F6F5"/>
-            </a:solidFill>
-            <a:prstDash val="solid"/>
-          </a:ln>
-        </p:spPr>
-      </p:sp>
-      <p:sp>
-        <p:nvSpPr>
-          <p:cNvPr id="16" name="Text 13"/>
-          <p:cNvSpPr/>
-          <p:nvPr/>
-        </p:nvSpPr>
-        <p:spPr>
-          <a:xfrm>
-            <a:off x="7315200" y="4023360"/>
-            <a:ext cx="3931920" cy="365760"/>
-          </a:xfrm>
-          <a:prstGeom prst="rect">
-            <a:avLst/>
-          </a:prstGeom>
-          <a:noFill/>
-          <a:ln/>
-        </p:spPr>
-        <p:txBody>
-          <a:bodyPr wrap="square" lIns="0" tIns="0" rIns="0" bIns="0" rtlCol="0" anchor="ctr"/>
-          <a:lstStyle/>
-          <a:p>
-            <a:pPr indent="0" marL="0">
-              <a:buNone/>
-            </a:pPr>
-            <a:r>
-              <a:rPr lang="en-US" sz="1600" b="1" dirty="0">
-                <a:solidFill>
-                  <a:srgbClr val="14504B"/>
-                </a:solidFill>
-                <a:latin typeface="Yu Gothic" pitchFamily="34" charset="0"/>
-                <a:ea typeface="Yu Gothic" pitchFamily="34" charset="-122"/>
-                <a:cs typeface="Yu Gothic" pitchFamily="34" charset="-120"/>
-              </a:rPr>
-              <a:t>尿蛋白に注目する理由</a:t>
-            </a:r>
-            <a:endParaRPr lang="en-US" sz="1600" dirty="0"/>
-          </a:p>
-        </p:txBody>
-      </p:sp>
-      <p:sp>
-        <p:nvSpPr>
-          <p:cNvPr id="17" name="Text 14"/>
-          <p:cNvSpPr/>
-          <p:nvPr/>
-        </p:nvSpPr>
-        <p:spPr>
-          <a:xfrm>
-            <a:off x="7315200" y="4434840"/>
-            <a:ext cx="3931920" cy="731520"/>
-          </a:xfrm>
-          <a:prstGeom prst="rect">
-            <a:avLst/>
-          </a:prstGeom>
-          <a:noFill/>
-          <a:ln/>
-        </p:spPr>
-        <p:txBody>
-          <a:bodyPr wrap="square" lIns="0" tIns="0" rIns="0" bIns="0" rtlCol="0" anchor="ctr"/>
-          <a:lstStyle/>
-          <a:p>
-            <a:pPr indent="0" marL="0">
-              <a:lnSpc>
-                <a:spcPct val="125000"/>
-              </a:lnSpc>
-              <a:buNone/>
-            </a:pPr>
-            <a:r>
-              <a:rPr lang="en-US" sz="1400" dirty="0">
-                <a:solidFill>
-                  <a:srgbClr val="16211F"/>
-                </a:solidFill>
-                <a:latin typeface="Yu Gothic" pitchFamily="34" charset="0"/>
-                <a:ea typeface="Yu Gothic" pitchFamily="34" charset="-122"/>
-                <a:cs typeface="Yu Gothic" pitchFamily="34" charset="-120"/>
-              </a:rPr>
-              <a:t>腎機能の低下より先に出ることが</a:t>
-            </a:r>
-            <a:endParaRPr lang="en-US" sz="1400" dirty="0"/>
-          </a:p>
-          <a:p>
-            <a:pPr indent="0" marL="0">
-              <a:lnSpc>
-                <a:spcPct val="125000"/>
-              </a:lnSpc>
-              <a:buNone/>
-            </a:pPr>
-            <a:r>
-              <a:rPr lang="en-US" sz="1400" dirty="0">
-                <a:solidFill>
-                  <a:srgbClr val="16211F"/>
-                </a:solidFill>
-                <a:latin typeface="Yu Gothic" pitchFamily="34" charset="0"/>
-                <a:ea typeface="Yu Gothic" pitchFamily="34" charset="-122"/>
-                <a:cs typeface="Yu Gothic" pitchFamily="34" charset="-120"/>
-              </a:rPr>
-              <a:t>多く、早い段階で気づけます。</a:t>
-            </a:r>
-            <a:endParaRPr lang="en-US" sz="1400" dirty="0"/>
-          </a:p>
-        </p:txBody>
-      </p:sp>
-      <p:sp>
-        <p:nvSpPr>
-          <p:cNvPr id="18" name="Text 15"/>
-          <p:cNvSpPr/>
-          <p:nvPr/>
-        </p:nvSpPr>
-        <p:spPr>
-          <a:xfrm>
-            <a:off x="7315200" y="5193792"/>
-            <a:ext cx="3931920" cy="320040"/>
-          </a:xfrm>
-          <a:prstGeom prst="rect">
-            <a:avLst/>
-          </a:prstGeom>
-          <a:noFill/>
-          <a:ln/>
-        </p:spPr>
-        <p:txBody>
-          <a:bodyPr wrap="square" lIns="0" tIns="0" rIns="0" bIns="0" rtlCol="0" anchor="ctr"/>
-          <a:lstStyle/>
-          <a:p>
-            <a:pPr indent="0" marL="0">
-              <a:buNone/>
-            </a:pPr>
-            <a:r>
-              <a:rPr lang="en-US" sz="1200" b="1" dirty="0">
-                <a:solidFill>
-                  <a:srgbClr val="1F6F78"/>
-                </a:solidFill>
-                <a:latin typeface="Yu Gothic" pitchFamily="34" charset="0"/>
-                <a:ea typeface="Yu Gothic" pitchFamily="34" charset="-122"/>
-                <a:cs typeface="Yu Gothic" pitchFamily="34" charset="-120"/>
-              </a:rPr>
-              <a:t>1.38倍とは</a:t>
-            </a:r>
-            <a:endParaRPr lang="en-US" sz="1200" dirty="0"/>
-          </a:p>
-        </p:txBody>
-      </p:sp>
-      <p:sp>
-        <p:nvSpPr>
-          <p:cNvPr id="19" name="Text 16"/>
-          <p:cNvSpPr/>
-          <p:nvPr/>
-        </p:nvSpPr>
-        <p:spPr>
-          <a:xfrm>
-            <a:off x="7315200" y="5486400"/>
-            <a:ext cx="4023360" cy="868680"/>
-          </a:xfrm>
-          <a:prstGeom prst="rect">
-            <a:avLst/>
-          </a:prstGeom>
-          <a:noFill/>
-          <a:ln/>
-        </p:spPr>
-        <p:txBody>
-          <a:bodyPr wrap="square" lIns="0" tIns="0" rIns="0" bIns="0" rtlCol="0" anchor="ctr"/>
-          <a:lstStyle/>
-          <a:p>
-            <a:pPr indent="0" marL="0">
-              <a:lnSpc>
-                <a:spcPct val="120000"/>
-              </a:lnSpc>
-              <a:buNone/>
-            </a:pPr>
-            <a:r>
-              <a:rPr lang="en-US" sz="1300" dirty="0">
-                <a:solidFill>
-                  <a:srgbClr val="16211F"/>
-                </a:solidFill>
-                <a:latin typeface="Yu Gothic" pitchFamily="34" charset="0"/>
-                <a:ea typeface="Yu Gothic" pitchFamily="34" charset="-122"/>
-                <a:cs typeface="Yu Gothic" pitchFamily="34" charset="-120"/>
-              </a:rPr>
-              <a:t>横ばいだった人に比べ、尿蛋白が</a:t>
-            </a:r>
-            <a:endParaRPr lang="en-US" sz="1300" dirty="0"/>
-          </a:p>
-          <a:p>
-            <a:pPr indent="0" marL="0">
-              <a:lnSpc>
-                <a:spcPct val="120000"/>
-              </a:lnSpc>
-              <a:buNone/>
-            </a:pPr>
-            <a:r>
-              <a:rPr lang="en-US" sz="1300" dirty="0">
-                <a:solidFill>
-                  <a:srgbClr val="16211F"/>
-                </a:solidFill>
-                <a:latin typeface="Yu Gothic" pitchFamily="34" charset="0"/>
-                <a:ea typeface="Yu Gothic" pitchFamily="34" charset="-122"/>
-                <a:cs typeface="Yu Gothic" pitchFamily="34" charset="-120"/>
-              </a:rPr>
-              <a:t>新たに出た人の割合が約1.4倍。</a:t>
-            </a:r>
-            <a:endParaRPr lang="en-US" sz="1300" dirty="0"/>
-          </a:p>
-          <a:p>
-            <a:pPr indent="0" marL="0">
-              <a:lnSpc>
-                <a:spcPct val="120000"/>
-              </a:lnSpc>
-              <a:buNone/>
-            </a:pPr>
-            <a:r>
-              <a:rPr lang="en-US" sz="1300" dirty="0">
-                <a:solidFill>
-                  <a:srgbClr val="16211F"/>
-                </a:solidFill>
-                <a:latin typeface="Yu Gothic" pitchFamily="34" charset="0"/>
-                <a:ea typeface="Yu Gothic" pitchFamily="34" charset="-122"/>
-                <a:cs typeface="Yu Gothic" pitchFamily="34" charset="-120"/>
-              </a:rPr>
-              <a:t>体重やBMIの変化を考慮しても</a:t>
-            </a:r>
-            <a:endParaRPr lang="en-US" sz="1300" dirty="0"/>
-          </a:p>
-          <a:p>
-            <a:pPr indent="0" marL="0">
-              <a:lnSpc>
-                <a:spcPct val="120000"/>
-              </a:lnSpc>
-              <a:buNone/>
-            </a:pPr>
-            <a:r>
-              <a:rPr lang="en-US" sz="1300" dirty="0">
-                <a:solidFill>
-                  <a:srgbClr val="16211F"/>
-                </a:solidFill>
-                <a:latin typeface="Yu Gothic" pitchFamily="34" charset="0"/>
-                <a:ea typeface="Yu Gothic" pitchFamily="34" charset="-122"/>
-                <a:cs typeface="Yu Gothic" pitchFamily="34" charset="-120"/>
-              </a:rPr>
-              <a:t>残った差です。</a:t>
-            </a:r>
-            <a:endParaRPr lang="en-US" sz="1300" dirty="0"/>
+              <a:t>「去年からどう変わったか」でリスクを見られないか。</a:t>
+            </a:r>
+            <a:endParaRPr lang="en-US" sz="2400" dirty="0"/>
           </a:p>
         </p:txBody>
       </p:sp>
@@ -12474,7 +13107,7 @@
                 <a:ea typeface="Yu Gothic" pitchFamily="34" charset="-122"/>
                 <a:cs typeface="Yu Gothic" pitchFamily="34" charset="-120"/>
               </a:rPr>
-              <a:t>どう現場で使えるか</a:t>
+              <a:t>事例：からだの「まるみ」の変化を見る</a:t>
             </a:r>
             <a:endParaRPr lang="en-US" sz="3600" dirty="0"/>
           </a:p>
@@ -12513,7 +13146,7 @@
                 <a:ea typeface="Yu Gothic" pitchFamily="34" charset="-122"/>
                 <a:cs typeface="Yu Gothic" pitchFamily="34" charset="-120"/>
               </a:rPr>
-              <a:t>研究を、健診の場での実践につなげる</a:t>
+              <a:t>腹囲と身長だけで計算できる指標 BRI（Body Roundness Index）</a:t>
             </a:r>
             <a:endParaRPr lang="en-US" sz="1600" dirty="0"/>
           </a:p>
@@ -12528,11 +13161,11 @@
         <p:spPr>
           <a:xfrm>
             <a:off x="731520" y="1920240"/>
-            <a:ext cx="3429000" cy="2743200"/>
+            <a:ext cx="3429000" cy="1783080"/>
           </a:xfrm>
           <a:prstGeom prst="roundRect">
             <a:avLst>
-              <a:gd name="adj" fmla="val 2667"/>
+              <a:gd name="adj" fmla="val 4103"/>
             </a:avLst>
           </a:prstGeom>
           <a:solidFill>
@@ -12548,28 +13181,42 @@
       </p:sp>
       <p:sp>
         <p:nvSpPr>
-          <p:cNvPr id="5" name="Shape 3"/>
-          <p:cNvSpPr/>
-          <p:nvPr/>
-        </p:nvSpPr>
-        <p:spPr>
-          <a:xfrm>
-            <a:off x="987552" y="2148840"/>
-            <a:ext cx="502920" cy="502920"/>
-          </a:xfrm>
-          <a:prstGeom prst="ellipse">
-            <a:avLst/>
-          </a:prstGeom>
-          <a:solidFill>
-            <a:srgbClr val="D98A2B"/>
-          </a:solidFill>
-          <a:ln w="12700">
-            <a:solidFill>
-              <a:srgbClr val="D98A2B"/>
-            </a:solidFill>
-            <a:prstDash val="solid"/>
-          </a:ln>
-        </p:spPr>
+          <p:cNvPr id="5" name="Text 3"/>
+          <p:cNvSpPr/>
+          <p:nvPr/>
+        </p:nvSpPr>
+        <p:spPr>
+          <a:xfrm>
+            <a:off x="987552" y="2103120"/>
+            <a:ext cx="2926080" cy="384048"/>
+          </a:xfrm>
+          <a:prstGeom prst="rect">
+            <a:avLst/>
+          </a:prstGeom>
+          <a:noFill/>
+          <a:ln/>
+        </p:spPr>
+        <p:txBody>
+          <a:bodyPr wrap="square" lIns="0" tIns="0" rIns="0" bIns="0" rtlCol="0" anchor="ctr"/>
+          <a:lstStyle/>
+          <a:p>
+            <a:pPr indent="0" marL="0">
+              <a:buNone/>
+            </a:pPr>
+            <a:r>
+              <a:rPr lang="en-US" sz="1700" b="1" dirty="0">
+                <a:solidFill>
+                  <a:srgbClr val="14504B"/>
+                </a:solidFill>
+                <a:latin typeface="Yu Gothic" pitchFamily="34" charset="0"/>
+                <a:ea typeface="Yu Gothic" pitchFamily="34" charset="-122"/>
+                <a:cs typeface="Yu Gothic" pitchFamily="34" charset="-120"/>
+              </a:rPr>
+              <a:t>見たもの</a:t>
+            </a:r>
+            <a:endParaRPr lang="en-US" sz="1700" dirty="0"/>
+          </a:p>
+        </p:txBody>
       </p:sp>
       <p:sp>
         <p:nvSpPr>
@@ -12579,86 +13226,8 @@
         </p:nvSpPr>
         <p:spPr>
           <a:xfrm>
-            <a:off x="987552" y="2148840"/>
-            <a:ext cx="502920" cy="502920"/>
-          </a:xfrm>
-          <a:prstGeom prst="rect">
-            <a:avLst/>
-          </a:prstGeom>
-          <a:noFill/>
-          <a:ln/>
-        </p:spPr>
-        <p:txBody>
-          <a:bodyPr wrap="square" lIns="0" tIns="0" rIns="0" bIns="0" rtlCol="0" anchor="ctr"/>
-          <a:lstStyle/>
-          <a:p>
-            <a:pPr algn="ctr" indent="0" marL="0">
-              <a:buNone/>
-            </a:pPr>
-            <a:r>
-              <a:rPr lang="en-US" sz="1700" b="1" dirty="0">
-                <a:solidFill>
-                  <a:srgbClr val="FFFFFF"/>
-                </a:solidFill>
-                <a:latin typeface="Yu Gothic" pitchFamily="34" charset="0"/>
-                <a:ea typeface="Yu Gothic" pitchFamily="34" charset="-122"/>
-                <a:cs typeface="Yu Gothic" pitchFamily="34" charset="-120"/>
-              </a:rPr>
-              <a:t>①</a:t>
-            </a:r>
-            <a:endParaRPr lang="en-US" sz="1700" dirty="0"/>
-          </a:p>
-        </p:txBody>
-      </p:sp>
-      <p:sp>
-        <p:nvSpPr>
-          <p:cNvPr id="7" name="Text 5"/>
-          <p:cNvSpPr/>
-          <p:nvPr/>
-        </p:nvSpPr>
-        <p:spPr>
-          <a:xfrm>
-            <a:off x="987552" y="2834640"/>
-            <a:ext cx="3017520" cy="411480"/>
-          </a:xfrm>
-          <a:prstGeom prst="rect">
-            <a:avLst/>
-          </a:prstGeom>
-          <a:noFill/>
-          <a:ln/>
-        </p:spPr>
-        <p:txBody>
-          <a:bodyPr wrap="square" lIns="0" tIns="0" rIns="0" bIns="0" rtlCol="0" anchor="ctr"/>
-          <a:lstStyle/>
-          <a:p>
-            <a:pPr indent="0" marL="0">
-              <a:buNone/>
-            </a:pPr>
-            <a:r>
-              <a:rPr lang="en-US" sz="1700" b="1" dirty="0">
-                <a:solidFill>
-                  <a:srgbClr val="14504B"/>
-                </a:solidFill>
-                <a:latin typeface="Yu Gothic" pitchFamily="34" charset="0"/>
-                <a:ea typeface="Yu Gothic" pitchFamily="34" charset="-122"/>
-                <a:cs typeface="Yu Gothic" pitchFamily="34" charset="-120"/>
-              </a:rPr>
-              <a:t>道具がいらない</a:t>
-            </a:r>
-            <a:endParaRPr lang="en-US" sz="1700" dirty="0"/>
-          </a:p>
-        </p:txBody>
-      </p:sp>
-      <p:sp>
-        <p:nvSpPr>
-          <p:cNvPr id="8" name="Text 6"/>
-          <p:cNvSpPr/>
-          <p:nvPr/>
-        </p:nvSpPr>
-        <p:spPr>
-          <a:xfrm>
-            <a:off x="987552" y="3346704"/>
-            <a:ext cx="3017520" cy="1188720"/>
+            <a:off x="987552" y="2578608"/>
+            <a:ext cx="2971800" cy="868680"/>
           </a:xfrm>
           <a:prstGeom prst="rect">
             <a:avLst/>
@@ -12672,7 +13241,7 @@
           <a:p>
             <a:pPr indent="0" marL="0">
               <a:lnSpc>
-                <a:spcPct val="130000"/>
+                <a:spcPct val="120000"/>
               </a:lnSpc>
               <a:buNone/>
             </a:pPr>
@@ -12685,14 +13254,14 @@
                 <a:ea typeface="Yu Gothic" pitchFamily="34" charset="-122"/>
                 <a:cs typeface="Yu Gothic" pitchFamily="34" charset="-120"/>
               </a:rPr>
-              <a:t>メジャーと身長計だけ。</a:t>
+              <a:t>延岡市の40歳以上</a:t>
             </a:r>
             <a:endParaRPr lang="en-US" sz="1400" dirty="0"/>
           </a:p>
           <a:p>
             <a:pPr indent="0" marL="0">
               <a:lnSpc>
-                <a:spcPct val="130000"/>
+                <a:spcPct val="120000"/>
               </a:lnSpc>
               <a:buNone/>
             </a:pPr>
@@ -12705,46 +13274,26 @@
                 <a:ea typeface="Yu Gothic" pitchFamily="34" charset="-122"/>
                 <a:cs typeface="Yu Gothic" pitchFamily="34" charset="-120"/>
               </a:rPr>
-              <a:t>特別な機器がなくても</a:t>
+              <a:t>3,819名の2年分</a:t>
             </a:r>
             <a:endParaRPr lang="en-US" sz="1400" dirty="0"/>
           </a:p>
-          <a:p>
-            <a:pPr indent="0" marL="0">
-              <a:lnSpc>
-                <a:spcPct val="130000"/>
-              </a:lnSpc>
-              <a:buNone/>
-            </a:pPr>
-            <a:r>
-              <a:rPr lang="en-US" sz="1400" dirty="0">
-                <a:solidFill>
-                  <a:srgbClr val="5C6B68"/>
-                </a:solidFill>
-                <a:latin typeface="Yu Gothic" pitchFamily="34" charset="0"/>
-                <a:ea typeface="Yu Gothic" pitchFamily="34" charset="-122"/>
-                <a:cs typeface="Yu Gothic" pitchFamily="34" charset="-120"/>
-              </a:rPr>
-              <a:t>どの会場でも計算できる</a:t>
-            </a:r>
-            <a:endParaRPr lang="en-US" sz="1400" dirty="0"/>
-          </a:p>
-        </p:txBody>
-      </p:sp>
-      <p:sp>
-        <p:nvSpPr>
-          <p:cNvPr id="9" name="Shape 7"/>
+        </p:txBody>
+      </p:sp>
+      <p:sp>
+        <p:nvSpPr>
+          <p:cNvPr id="7" name="Shape 5"/>
           <p:cNvSpPr/>
           <p:nvPr/>
         </p:nvSpPr>
         <p:spPr>
           <a:xfrm>
             <a:off x="4434840" y="1920240"/>
-            <a:ext cx="3429000" cy="2743200"/>
+            <a:ext cx="3429000" cy="1783080"/>
           </a:xfrm>
           <a:prstGeom prst="roundRect">
             <a:avLst>
-              <a:gd name="adj" fmla="val 2667"/>
+              <a:gd name="adj" fmla="val 4103"/>
             </a:avLst>
           </a:prstGeom>
           <a:solidFill>
@@ -12760,24 +13309,127 @@
       </p:sp>
       <p:sp>
         <p:nvSpPr>
+          <p:cNvPr id="8" name="Text 6"/>
+          <p:cNvSpPr/>
+          <p:nvPr/>
+        </p:nvSpPr>
+        <p:spPr>
+          <a:xfrm>
+            <a:off x="4690872" y="2103120"/>
+            <a:ext cx="2926080" cy="384048"/>
+          </a:xfrm>
+          <a:prstGeom prst="rect">
+            <a:avLst/>
+          </a:prstGeom>
+          <a:noFill/>
+          <a:ln/>
+        </p:spPr>
+        <p:txBody>
+          <a:bodyPr wrap="square" lIns="0" tIns="0" rIns="0" bIns="0" rtlCol="0" anchor="ctr"/>
+          <a:lstStyle/>
+          <a:p>
+            <a:pPr indent="0" marL="0">
+              <a:buNone/>
+            </a:pPr>
+            <a:r>
+              <a:rPr lang="en-US" sz="1700" b="1" dirty="0">
+                <a:solidFill>
+                  <a:srgbClr val="14504B"/>
+                </a:solidFill>
+                <a:latin typeface="Yu Gothic" pitchFamily="34" charset="0"/>
+                <a:ea typeface="Yu Gothic" pitchFamily="34" charset="-122"/>
+                <a:cs typeface="Yu Gothic" pitchFamily="34" charset="-120"/>
+              </a:rPr>
+              <a:t>調べたこと</a:t>
+            </a:r>
+            <a:endParaRPr lang="en-US" sz="1700" dirty="0"/>
+          </a:p>
+        </p:txBody>
+      </p:sp>
+      <p:sp>
+        <p:nvSpPr>
+          <p:cNvPr id="9" name="Text 7"/>
+          <p:cNvSpPr/>
+          <p:nvPr/>
+        </p:nvSpPr>
+        <p:spPr>
+          <a:xfrm>
+            <a:off x="4690872" y="2578608"/>
+            <a:ext cx="2971800" cy="868680"/>
+          </a:xfrm>
+          <a:prstGeom prst="rect">
+            <a:avLst/>
+          </a:prstGeom>
+          <a:noFill/>
+          <a:ln/>
+        </p:spPr>
+        <p:txBody>
+          <a:bodyPr wrap="square" lIns="0" tIns="0" rIns="0" bIns="0" rtlCol="0" anchor="ctr"/>
+          <a:lstStyle/>
+          <a:p>
+            <a:pPr indent="0" marL="0">
+              <a:lnSpc>
+                <a:spcPct val="120000"/>
+              </a:lnSpc>
+              <a:buNone/>
+            </a:pPr>
+            <a:r>
+              <a:rPr lang="en-US" sz="1400" dirty="0">
+                <a:solidFill>
+                  <a:srgbClr val="5C6B68"/>
+                </a:solidFill>
+                <a:latin typeface="Yu Gothic" pitchFamily="34" charset="0"/>
+                <a:ea typeface="Yu Gothic" pitchFamily="34" charset="-122"/>
+                <a:cs typeface="Yu Gothic" pitchFamily="34" charset="-120"/>
+              </a:rPr>
+              <a:t>1年間でBRIが</a:t>
+            </a:r>
+            <a:endParaRPr lang="en-US" sz="1400" dirty="0"/>
+          </a:p>
+          <a:p>
+            <a:pPr indent="0" marL="0">
+              <a:lnSpc>
+                <a:spcPct val="120000"/>
+              </a:lnSpc>
+              <a:buNone/>
+            </a:pPr>
+            <a:r>
+              <a:rPr lang="en-US" sz="1400" dirty="0">
+                <a:solidFill>
+                  <a:srgbClr val="5C6B68"/>
+                </a:solidFill>
+                <a:latin typeface="Yu Gothic" pitchFamily="34" charset="0"/>
+                <a:ea typeface="Yu Gothic" pitchFamily="34" charset="-122"/>
+                <a:cs typeface="Yu Gothic" pitchFamily="34" charset="-120"/>
+              </a:rPr>
+              <a:t>増えた／減った／横ばい</a:t>
+            </a:r>
+            <a:endParaRPr lang="en-US" sz="1400" dirty="0"/>
+          </a:p>
+        </p:txBody>
+      </p:sp>
+      <p:sp>
+        <p:nvSpPr>
           <p:cNvPr id="10" name="Shape 8"/>
           <p:cNvSpPr/>
           <p:nvPr/>
         </p:nvSpPr>
         <p:spPr>
           <a:xfrm>
-            <a:off x="4690872" y="2148840"/>
-            <a:ext cx="502920" cy="502920"/>
-          </a:xfrm>
-          <a:prstGeom prst="ellipse">
-            <a:avLst/>
+            <a:off x="8138160" y="1920240"/>
+            <a:ext cx="3429000" cy="1783080"/>
+          </a:xfrm>
+          <a:prstGeom prst="roundRect">
+            <a:avLst>
+              <a:gd name="adj" fmla="val 4103"/>
+            </a:avLst>
           </a:prstGeom>
           <a:solidFill>
-            <a:srgbClr val="D98A2B"/>
+            <a:srgbClr val="14504B"/>
           </a:solidFill>
           <a:ln w="12700">
             <a:solidFill>
-              <a:srgbClr val="D98A2B"/>
+              <a:srgbClr val="14504B"/>
             </a:solidFill>
             <a:prstDash val="solid"/>
           </a:ln>
@@ -12791,172 +13443,171 @@
         </p:nvSpPr>
         <p:spPr>
           <a:xfrm>
-            <a:off x="4690872" y="2148840"/>
-            <a:ext cx="502920" cy="502920"/>
-          </a:xfrm>
-          <a:prstGeom prst="rect">
-            <a:avLst/>
-          </a:prstGeom>
-          <a:noFill/>
-          <a:ln/>
-        </p:spPr>
-        <p:txBody>
-          <a:bodyPr wrap="square" lIns="0" tIns="0" rIns="0" bIns="0" rtlCol="0" anchor="ctr"/>
-          <a:lstStyle/>
-          <a:p>
-            <a:pPr algn="ctr" indent="0" marL="0">
+            <a:off x="8394192" y="2103120"/>
+            <a:ext cx="2926080" cy="384048"/>
+          </a:xfrm>
+          <a:prstGeom prst="rect">
+            <a:avLst/>
+          </a:prstGeom>
+          <a:noFill/>
+          <a:ln/>
+        </p:spPr>
+        <p:txBody>
+          <a:bodyPr wrap="square" lIns="0" tIns="0" rIns="0" bIns="0" rtlCol="0" anchor="ctr"/>
+          <a:lstStyle/>
+          <a:p>
+            <a:pPr indent="0" marL="0">
               <a:buNone/>
             </a:pPr>
             <a:r>
               <a:rPr lang="en-US" sz="1700" b="1" dirty="0">
                 <a:solidFill>
+                  <a:srgbClr val="D98A2B"/>
+                </a:solidFill>
+                <a:latin typeface="Yu Gothic" pitchFamily="34" charset="0"/>
+                <a:ea typeface="Yu Gothic" pitchFamily="34" charset="-122"/>
+                <a:cs typeface="Yu Gothic" pitchFamily="34" charset="-120"/>
+              </a:rPr>
+              <a:t>分かったこと</a:t>
+            </a:r>
+            <a:endParaRPr lang="en-US" sz="1700" dirty="0"/>
+          </a:p>
+        </p:txBody>
+      </p:sp>
+      <p:sp>
+        <p:nvSpPr>
+          <p:cNvPr id="12" name="Text 10"/>
+          <p:cNvSpPr/>
+          <p:nvPr/>
+        </p:nvSpPr>
+        <p:spPr>
+          <a:xfrm>
+            <a:off x="8394192" y="2578608"/>
+            <a:ext cx="2971800" cy="868680"/>
+          </a:xfrm>
+          <a:prstGeom prst="rect">
+            <a:avLst/>
+          </a:prstGeom>
+          <a:noFill/>
+          <a:ln/>
+        </p:spPr>
+        <p:txBody>
+          <a:bodyPr wrap="square" lIns="0" tIns="0" rIns="0" bIns="0" rtlCol="0" anchor="ctr"/>
+          <a:lstStyle/>
+          <a:p>
+            <a:pPr indent="0" marL="0">
+              <a:lnSpc>
+                <a:spcPct val="120000"/>
+              </a:lnSpc>
+              <a:buNone/>
+            </a:pPr>
+            <a:r>
+              <a:rPr lang="en-US" sz="1400" dirty="0">
+                <a:solidFill>
                   <a:srgbClr val="FFFFFF"/>
                 </a:solidFill>
                 <a:latin typeface="Yu Gothic" pitchFamily="34" charset="0"/>
                 <a:ea typeface="Yu Gothic" pitchFamily="34" charset="-122"/>
                 <a:cs typeface="Yu Gothic" pitchFamily="34" charset="-120"/>
               </a:rPr>
-              <a:t>②</a:t>
-            </a:r>
-            <a:endParaRPr lang="en-US" sz="1700" dirty="0"/>
-          </a:p>
-        </p:txBody>
-      </p:sp>
-      <p:sp>
-        <p:nvSpPr>
-          <p:cNvPr id="12" name="Text 10"/>
-          <p:cNvSpPr/>
-          <p:nvPr/>
-        </p:nvSpPr>
-        <p:spPr>
-          <a:xfrm>
-            <a:off x="4690872" y="2834640"/>
-            <a:ext cx="3017520" cy="411480"/>
-          </a:xfrm>
-          <a:prstGeom prst="rect">
-            <a:avLst/>
-          </a:prstGeom>
-          <a:noFill/>
-          <a:ln/>
-        </p:spPr>
-        <p:txBody>
-          <a:bodyPr wrap="square" lIns="0" tIns="0" rIns="0" bIns="0" rtlCol="0" anchor="ctr"/>
-          <a:lstStyle/>
-          <a:p>
-            <a:pPr indent="0" marL="0">
-              <a:buNone/>
-            </a:pPr>
-            <a:r>
-              <a:rPr lang="en-US" sz="1700" b="1" dirty="0">
-                <a:solidFill>
-                  <a:srgbClr val="14504B"/>
-                </a:solidFill>
-                <a:latin typeface="Yu Gothic" pitchFamily="34" charset="0"/>
-                <a:ea typeface="Yu Gothic" pitchFamily="34" charset="-122"/>
-                <a:cs typeface="Yu Gothic" pitchFamily="34" charset="-120"/>
-              </a:rPr>
-              <a:t>声のかけ方が変わる</a:t>
-            </a:r>
-            <a:endParaRPr lang="en-US" sz="1700" dirty="0"/>
-          </a:p>
-        </p:txBody>
-      </p:sp>
-      <p:sp>
-        <p:nvSpPr>
-          <p:cNvPr id="13" name="Text 11"/>
-          <p:cNvSpPr/>
-          <p:nvPr/>
-        </p:nvSpPr>
-        <p:spPr>
-          <a:xfrm>
-            <a:off x="4690872" y="3346704"/>
-            <a:ext cx="3017520" cy="1188720"/>
-          </a:xfrm>
-          <a:prstGeom prst="rect">
-            <a:avLst/>
-          </a:prstGeom>
-          <a:noFill/>
-          <a:ln/>
-        </p:spPr>
-        <p:txBody>
-          <a:bodyPr wrap="square" lIns="0" tIns="0" rIns="0" bIns="0" rtlCol="0" anchor="ctr"/>
-          <a:lstStyle/>
+              <a:t>増えた群で尿蛋白が</a:t>
+            </a:r>
+            <a:endParaRPr lang="en-US" sz="1400" dirty="0"/>
+          </a:p>
           <a:p>
             <a:pPr indent="0" marL="0">
               <a:lnSpc>
-                <a:spcPct val="130000"/>
+                <a:spcPct val="120000"/>
               </a:lnSpc>
               <a:buNone/>
             </a:pPr>
             <a:r>
               <a:rPr lang="en-US" sz="1400" dirty="0">
                 <a:solidFill>
+                  <a:srgbClr val="FFFFFF"/>
+                </a:solidFill>
+                <a:latin typeface="Yu Gothic" pitchFamily="34" charset="0"/>
+                <a:ea typeface="Yu Gothic" pitchFamily="34" charset="-122"/>
+                <a:cs typeface="Yu Gothic" pitchFamily="34" charset="-120"/>
+              </a:rPr>
+              <a:t>新たに出やすかった</a:t>
+            </a:r>
+            <a:endParaRPr lang="en-US" sz="1400" dirty="0"/>
+          </a:p>
+        </p:txBody>
+      </p:sp>
+      <p:graphicFrame>
+        <p:nvGraphicFramePr>
+          <p:cNvPr id="13" name="Chart 0" descr=""/>
+          <p:cNvGraphicFramePr/>
+          <p:nvPr/>
+        </p:nvGraphicFramePr>
+        <p:xfrm>
+          <a:off x="731520" y="3840480"/>
+          <a:ext cx="6035040" cy="2011680"/>
+        </p:xfrm>
+        <a:graphic xmlns:a="http://schemas.openxmlformats.org/drawingml/2006/main">
+          <a:graphicData uri="http://schemas.openxmlformats.org/drawingml/2006/chart">
+            <c:chart xmlns:c="http://schemas.openxmlformats.org/drawingml/2006/chart" r:id="rId1"/>
+          </a:graphicData>
+        </a:graphic>
+      </p:graphicFrame>
+      <p:sp>
+        <p:nvSpPr>
+          <p:cNvPr id="14" name="Text 11"/>
+          <p:cNvSpPr/>
+          <p:nvPr/>
+        </p:nvSpPr>
+        <p:spPr>
+          <a:xfrm>
+            <a:off x="731520" y="5897880"/>
+            <a:ext cx="6126480" cy="502920"/>
+          </a:xfrm>
+          <a:prstGeom prst="rect">
+            <a:avLst/>
+          </a:prstGeom>
+          <a:noFill/>
+          <a:ln/>
+        </p:spPr>
+        <p:txBody>
+          <a:bodyPr wrap="square" lIns="0" tIns="0" rIns="0" bIns="0" rtlCol="0" anchor="ctr"/>
+          <a:lstStyle/>
+          <a:p>
+            <a:pPr indent="0" marL="0">
+              <a:lnSpc>
+                <a:spcPct val="120000"/>
+              </a:lnSpc>
+              <a:buNone/>
+            </a:pPr>
+            <a:r>
+              <a:rPr lang="en-US" sz="1200" dirty="0">
+                <a:solidFill>
                   <a:srgbClr val="5C6B68"/>
                 </a:solidFill>
                 <a:latin typeface="Yu Gothic" pitchFamily="34" charset="0"/>
                 <a:ea typeface="Yu Gothic" pitchFamily="34" charset="-122"/>
                 <a:cs typeface="Yu Gothic" pitchFamily="34" charset="-120"/>
               </a:rPr>
-              <a:t>「太っています」ではなく</a:t>
-            </a:r>
-            <a:endParaRPr lang="en-US" sz="1400" dirty="0"/>
-          </a:p>
-          <a:p>
-            <a:pPr indent="0" marL="0">
-              <a:lnSpc>
-                <a:spcPct val="130000"/>
-              </a:lnSpc>
-              <a:buNone/>
-            </a:pPr>
-            <a:r>
-              <a:rPr lang="en-US" sz="1400" dirty="0">
-                <a:solidFill>
-                  <a:srgbClr val="5C6B68"/>
-                </a:solidFill>
-                <a:latin typeface="Yu Gothic" pitchFamily="34" charset="0"/>
-                <a:ea typeface="Yu Gothic" pitchFamily="34" charset="-122"/>
-                <a:cs typeface="Yu Gothic" pitchFamily="34" charset="-120"/>
-              </a:rPr>
-              <a:t>「去年より増えています」。</a:t>
-            </a:r>
-            <a:endParaRPr lang="en-US" sz="1400" dirty="0"/>
-          </a:p>
-          <a:p>
-            <a:pPr indent="0" marL="0">
-              <a:lnSpc>
-                <a:spcPct val="130000"/>
-              </a:lnSpc>
-              <a:buNone/>
-            </a:pPr>
-            <a:r>
-              <a:rPr lang="en-US" sz="1400" dirty="0">
-                <a:solidFill>
-                  <a:srgbClr val="5C6B68"/>
-                </a:solidFill>
-                <a:latin typeface="Yu Gothic" pitchFamily="34" charset="0"/>
-                <a:ea typeface="Yu Gothic" pitchFamily="34" charset="-122"/>
-                <a:cs typeface="Yu Gothic" pitchFamily="34" charset="-120"/>
-              </a:rPr>
-              <a:t>本人も実感しやすい</a:t>
-            </a:r>
-            <a:endParaRPr lang="en-US" sz="1400" dirty="0"/>
-          </a:p>
-        </p:txBody>
-      </p:sp>
-      <p:sp>
-        <p:nvSpPr>
-          <p:cNvPr id="14" name="Shape 12"/>
-          <p:cNvSpPr/>
-          <p:nvPr/>
-        </p:nvSpPr>
-        <p:spPr>
-          <a:xfrm>
-            <a:off x="8138160" y="1920240"/>
-            <a:ext cx="3429000" cy="2743200"/>
+              <a:t>「増えた」だけが統計的に確かめられた差です。「減った」は 1.16 と出ていますが、ばらつきの範囲（0.85〜1.58）が1をまたぐため、差があるとは言えません。</a:t>
+            </a:r>
+            <a:endParaRPr lang="en-US" sz="1200" dirty="0"/>
+          </a:p>
+        </p:txBody>
+      </p:sp>
+      <p:sp>
+        <p:nvSpPr>
+          <p:cNvPr id="15" name="Shape 12"/>
+          <p:cNvSpPr/>
+          <p:nvPr/>
+        </p:nvSpPr>
+        <p:spPr>
+          <a:xfrm>
+            <a:off x="7040880" y="3840480"/>
+            <a:ext cx="4389120" cy="2560320"/>
           </a:xfrm>
           <a:prstGeom prst="roundRect">
             <a:avLst>
-              <a:gd name="adj" fmla="val 2667"/>
+              <a:gd name="adj" fmla="val 2857"/>
             </a:avLst>
           </a:prstGeom>
           <a:solidFill>
@@ -12972,94 +13623,30 @@
       </p:sp>
       <p:sp>
         <p:nvSpPr>
-          <p:cNvPr id="15" name="Shape 13"/>
-          <p:cNvSpPr/>
-          <p:nvPr/>
-        </p:nvSpPr>
-        <p:spPr>
-          <a:xfrm>
-            <a:off x="8394192" y="2148840"/>
-            <a:ext cx="502920" cy="502920"/>
-          </a:xfrm>
-          <a:prstGeom prst="ellipse">
-            <a:avLst/>
-          </a:prstGeom>
-          <a:solidFill>
-            <a:srgbClr val="D98A2B"/>
-          </a:solidFill>
-          <a:ln w="12700">
-            <a:solidFill>
-              <a:srgbClr val="D98A2B"/>
-            </a:solidFill>
-            <a:prstDash val="solid"/>
-          </a:ln>
-        </p:spPr>
-      </p:sp>
-      <p:sp>
-        <p:nvSpPr>
-          <p:cNvPr id="16" name="Text 14"/>
-          <p:cNvSpPr/>
-          <p:nvPr/>
-        </p:nvSpPr>
-        <p:spPr>
-          <a:xfrm>
-            <a:off x="8394192" y="2148840"/>
-            <a:ext cx="502920" cy="502920"/>
-          </a:xfrm>
-          <a:prstGeom prst="rect">
-            <a:avLst/>
-          </a:prstGeom>
-          <a:noFill/>
-          <a:ln/>
-        </p:spPr>
-        <p:txBody>
-          <a:bodyPr wrap="square" lIns="0" tIns="0" rIns="0" bIns="0" rtlCol="0" anchor="ctr"/>
-          <a:lstStyle/>
-          <a:p>
-            <a:pPr algn="ctr" indent="0" marL="0">
-              <a:buNone/>
-            </a:pPr>
-            <a:r>
-              <a:rPr lang="en-US" sz="1700" b="1" dirty="0">
-                <a:solidFill>
-                  <a:srgbClr val="FFFFFF"/>
-                </a:solidFill>
-                <a:latin typeface="Yu Gothic" pitchFamily="34" charset="0"/>
-                <a:ea typeface="Yu Gothic" pitchFamily="34" charset="-122"/>
-                <a:cs typeface="Yu Gothic" pitchFamily="34" charset="-120"/>
-              </a:rPr>
-              <a:t>③</a:t>
-            </a:r>
-            <a:endParaRPr lang="en-US" sz="1700" dirty="0"/>
-          </a:p>
-        </p:txBody>
-      </p:sp>
-      <p:sp>
-        <p:nvSpPr>
-          <p:cNvPr id="17" name="Text 15"/>
-          <p:cNvSpPr/>
-          <p:nvPr/>
-        </p:nvSpPr>
-        <p:spPr>
-          <a:xfrm>
-            <a:off x="8394192" y="2834640"/>
-            <a:ext cx="3017520" cy="411480"/>
-          </a:xfrm>
-          <a:prstGeom prst="rect">
-            <a:avLst/>
-          </a:prstGeom>
-          <a:noFill/>
-          <a:ln/>
-        </p:spPr>
-        <p:txBody>
-          <a:bodyPr wrap="square" lIns="0" tIns="0" rIns="0" bIns="0" rtlCol="0" anchor="ctr"/>
-          <a:lstStyle/>
-          <a:p>
-            <a:pPr indent="0" marL="0">
-              <a:buNone/>
-            </a:pPr>
-            <a:r>
-              <a:rPr lang="en-US" sz="1700" b="1" dirty="0">
+          <p:cNvPr id="16" name="Text 13"/>
+          <p:cNvSpPr/>
+          <p:nvPr/>
+        </p:nvSpPr>
+        <p:spPr>
+          <a:xfrm>
+            <a:off x="7315200" y="4023360"/>
+            <a:ext cx="3931920" cy="365760"/>
+          </a:xfrm>
+          <a:prstGeom prst="rect">
+            <a:avLst/>
+          </a:prstGeom>
+          <a:noFill/>
+          <a:ln/>
+        </p:spPr>
+        <p:txBody>
+          <a:bodyPr wrap="square" lIns="0" tIns="0" rIns="0" bIns="0" rtlCol="0" anchor="ctr"/>
+          <a:lstStyle/>
+          <a:p>
+            <a:pPr indent="0" marL="0">
+              <a:buNone/>
+            </a:pPr>
+            <a:r>
+              <a:rPr lang="en-US" sz="1600" b="1" dirty="0">
                 <a:solidFill>
                   <a:srgbClr val="14504B"/>
                 </a:solidFill>
@@ -13067,22 +13654,22 @@
                 <a:ea typeface="Yu Gothic" pitchFamily="34" charset="-122"/>
                 <a:cs typeface="Yu Gothic" pitchFamily="34" charset="-120"/>
               </a:rPr>
-              <a:t>優先順位がつけられる</a:t>
-            </a:r>
-            <a:endParaRPr lang="en-US" sz="1700" dirty="0"/>
-          </a:p>
-        </p:txBody>
-      </p:sp>
-      <p:sp>
-        <p:nvSpPr>
-          <p:cNvPr id="18" name="Text 16"/>
-          <p:cNvSpPr/>
-          <p:nvPr/>
-        </p:nvSpPr>
-        <p:spPr>
-          <a:xfrm>
-            <a:off x="8394192" y="3346704"/>
-            <a:ext cx="3017520" cy="1188720"/>
+              <a:t>尿蛋白に注目する理由</a:t>
+            </a:r>
+            <a:endParaRPr lang="en-US" sz="1600" dirty="0"/>
+          </a:p>
+        </p:txBody>
+      </p:sp>
+      <p:sp>
+        <p:nvSpPr>
+          <p:cNvPr id="17" name="Text 14"/>
+          <p:cNvSpPr/>
+          <p:nvPr/>
+        </p:nvSpPr>
+        <p:spPr>
+          <a:xfrm>
+            <a:off x="7315200" y="4434840"/>
+            <a:ext cx="3931920" cy="731520"/>
           </a:xfrm>
           <a:prstGeom prst="rect">
             <a:avLst/>
@@ -13096,128 +13683,183 @@
           <a:p>
             <a:pPr indent="0" marL="0">
               <a:lnSpc>
-                <a:spcPct val="130000"/>
+                <a:spcPct val="125000"/>
               </a:lnSpc>
               <a:buNone/>
             </a:pPr>
             <a:r>
               <a:rPr lang="en-US" sz="1400" dirty="0">
                 <a:solidFill>
-                  <a:srgbClr val="5C6B68"/>
-                </a:solidFill>
-                <a:latin typeface="Yu Gothic" pitchFamily="34" charset="0"/>
-                <a:ea typeface="Yu Gothic" pitchFamily="34" charset="-122"/>
-                <a:cs typeface="Yu Gothic" pitchFamily="34" charset="-120"/>
-              </a:rPr>
-              <a:t>限られた保健指導の枠を、</a:t>
+                  <a:srgbClr val="16211F"/>
+                </a:solidFill>
+                <a:latin typeface="Yu Gothic" pitchFamily="34" charset="0"/>
+                <a:ea typeface="Yu Gothic" pitchFamily="34" charset="-122"/>
+                <a:cs typeface="Yu Gothic" pitchFamily="34" charset="-120"/>
+              </a:rPr>
+              <a:t>腎機能の低下より先に出ることが</a:t>
             </a:r>
             <a:endParaRPr lang="en-US" sz="1400" dirty="0"/>
           </a:p>
           <a:p>
             <a:pPr indent="0" marL="0">
               <a:lnSpc>
-                <a:spcPct val="130000"/>
+                <a:spcPct val="125000"/>
               </a:lnSpc>
               <a:buNone/>
             </a:pPr>
             <a:r>
               <a:rPr lang="en-US" sz="1400" dirty="0">
                 <a:solidFill>
-                  <a:srgbClr val="5C6B68"/>
-                </a:solidFill>
-                <a:latin typeface="Yu Gothic" pitchFamily="34" charset="0"/>
-                <a:ea typeface="Yu Gothic" pitchFamily="34" charset="-122"/>
-                <a:cs typeface="Yu Gothic" pitchFamily="34" charset="-120"/>
-              </a:rPr>
-              <a:t>リスクが上がった人に</a:t>
+                  <a:srgbClr val="16211F"/>
+                </a:solidFill>
+                <a:latin typeface="Yu Gothic" pitchFamily="34" charset="0"/>
+                <a:ea typeface="Yu Gothic" pitchFamily="34" charset="-122"/>
+                <a:cs typeface="Yu Gothic" pitchFamily="34" charset="-120"/>
+              </a:rPr>
+              <a:t>多く、早い段階で気づけます。</a:t>
             </a:r>
             <a:endParaRPr lang="en-US" sz="1400" dirty="0"/>
           </a:p>
+        </p:txBody>
+      </p:sp>
+      <p:sp>
+        <p:nvSpPr>
+          <p:cNvPr id="18" name="Text 15"/>
+          <p:cNvSpPr/>
+          <p:nvPr/>
+        </p:nvSpPr>
+        <p:spPr>
+          <a:xfrm>
+            <a:off x="7315200" y="5193792"/>
+            <a:ext cx="3931920" cy="320040"/>
+          </a:xfrm>
+          <a:prstGeom prst="rect">
+            <a:avLst/>
+          </a:prstGeom>
+          <a:noFill/>
+          <a:ln/>
+        </p:spPr>
+        <p:txBody>
+          <a:bodyPr wrap="square" lIns="0" tIns="0" rIns="0" bIns="0" rtlCol="0" anchor="ctr"/>
+          <a:lstStyle/>
+          <a:p>
+            <a:pPr indent="0" marL="0">
+              <a:buNone/>
+            </a:pPr>
+            <a:r>
+              <a:rPr lang="en-US" sz="1200" b="1" dirty="0">
+                <a:solidFill>
+                  <a:srgbClr val="1F6F78"/>
+                </a:solidFill>
+                <a:latin typeface="Yu Gothic" pitchFamily="34" charset="0"/>
+                <a:ea typeface="Yu Gothic" pitchFamily="34" charset="-122"/>
+                <a:cs typeface="Yu Gothic" pitchFamily="34" charset="-120"/>
+              </a:rPr>
+              <a:t>1.38倍とは</a:t>
+            </a:r>
+            <a:endParaRPr lang="en-US" sz="1200" dirty="0"/>
+          </a:p>
+        </p:txBody>
+      </p:sp>
+      <p:sp>
+        <p:nvSpPr>
+          <p:cNvPr id="19" name="Text 16"/>
+          <p:cNvSpPr/>
+          <p:nvPr/>
+        </p:nvSpPr>
+        <p:spPr>
+          <a:xfrm>
+            <a:off x="7315200" y="5486400"/>
+            <a:ext cx="4023360" cy="868680"/>
+          </a:xfrm>
+          <a:prstGeom prst="rect">
+            <a:avLst/>
+          </a:prstGeom>
+          <a:noFill/>
+          <a:ln/>
+        </p:spPr>
+        <p:txBody>
+          <a:bodyPr wrap="square" lIns="0" tIns="0" rIns="0" bIns="0" rtlCol="0" anchor="ctr"/>
+          <a:lstStyle/>
           <a:p>
             <a:pPr indent="0" marL="0">
               <a:lnSpc>
-                <a:spcPct val="130000"/>
+                <a:spcPct val="120000"/>
               </a:lnSpc>
               <a:buNone/>
             </a:pPr>
             <a:r>
-              <a:rPr lang="en-US" sz="1400" dirty="0">
-                <a:solidFill>
-                  <a:srgbClr val="5C6B68"/>
-                </a:solidFill>
-                <a:latin typeface="Yu Gothic" pitchFamily="34" charset="0"/>
-                <a:ea typeface="Yu Gothic" pitchFamily="34" charset="-122"/>
-                <a:cs typeface="Yu Gothic" pitchFamily="34" charset="-120"/>
-              </a:rPr>
-              <a:t>優先して充てられる</a:t>
-            </a:r>
-            <a:endParaRPr lang="en-US" sz="1400" dirty="0"/>
-          </a:p>
-        </p:txBody>
-      </p:sp>
-      <p:sp>
-        <p:nvSpPr>
-          <p:cNvPr id="19" name="Shape 17"/>
-          <p:cNvSpPr/>
-          <p:nvPr/>
-        </p:nvSpPr>
-        <p:spPr>
-          <a:xfrm>
-            <a:off x="731520" y="4983480"/>
-            <a:ext cx="10698480" cy="1188720"/>
-          </a:xfrm>
-          <a:prstGeom prst="roundRect">
-            <a:avLst>
-              <a:gd name="adj" fmla="val 6154"/>
-            </a:avLst>
-          </a:prstGeom>
-          <a:solidFill>
-            <a:srgbClr val="14504B"/>
-          </a:solidFill>
-          <a:ln w="12700">
-            <a:solidFill>
-              <a:srgbClr val="14504B"/>
-            </a:solidFill>
-            <a:prstDash val="solid"/>
-          </a:ln>
-        </p:spPr>
-      </p:sp>
-      <p:sp>
-        <p:nvSpPr>
-          <p:cNvPr id="20" name="Text 18"/>
-          <p:cNvSpPr/>
-          <p:nvPr/>
-        </p:nvSpPr>
-        <p:spPr>
-          <a:xfrm>
-            <a:off x="1097280" y="5257800"/>
-            <a:ext cx="10058400" cy="502920"/>
-          </a:xfrm>
-          <a:prstGeom prst="rect">
-            <a:avLst/>
-          </a:prstGeom>
-          <a:noFill/>
-          <a:ln/>
-        </p:spPr>
-        <p:txBody>
-          <a:bodyPr wrap="square" lIns="0" tIns="0" rIns="0" bIns="0" rtlCol="0" anchor="ctr"/>
-          <a:lstStyle/>
-          <a:p>
-            <a:pPr indent="0" marL="0">
-              <a:buNone/>
-            </a:pPr>
-            <a:r>
-              <a:rPr lang="en-US" sz="2200" b="1" dirty="0">
-                <a:solidFill>
-                  <a:srgbClr val="FFFFFF"/>
-                </a:solidFill>
-                <a:latin typeface="Yu Gothic" pitchFamily="34" charset="0"/>
-                <a:ea typeface="Yu Gothic" pitchFamily="34" charset="-122"/>
-                <a:cs typeface="Yu Gothic" pitchFamily="34" charset="-120"/>
-              </a:rPr>
-              <a:t>研究の目的は、論文を書くことではなく、明日の声かけを変えること</a:t>
-            </a:r>
-            <a:endParaRPr lang="en-US" sz="2200" dirty="0"/>
+              <a:rPr lang="en-US" sz="1300" dirty="0">
+                <a:solidFill>
+                  <a:srgbClr val="16211F"/>
+                </a:solidFill>
+                <a:latin typeface="Yu Gothic" pitchFamily="34" charset="0"/>
+                <a:ea typeface="Yu Gothic" pitchFamily="34" charset="-122"/>
+                <a:cs typeface="Yu Gothic" pitchFamily="34" charset="-120"/>
+              </a:rPr>
+              <a:t>横ばいだった人に比べ、尿蛋白が</a:t>
+            </a:r>
+            <a:endParaRPr lang="en-US" sz="1300" dirty="0"/>
+          </a:p>
+          <a:p>
+            <a:pPr indent="0" marL="0">
+              <a:lnSpc>
+                <a:spcPct val="120000"/>
+              </a:lnSpc>
+              <a:buNone/>
+            </a:pPr>
+            <a:r>
+              <a:rPr lang="en-US" sz="1300" dirty="0">
+                <a:solidFill>
+                  <a:srgbClr val="16211F"/>
+                </a:solidFill>
+                <a:latin typeface="Yu Gothic" pitchFamily="34" charset="0"/>
+                <a:ea typeface="Yu Gothic" pitchFamily="34" charset="-122"/>
+                <a:cs typeface="Yu Gothic" pitchFamily="34" charset="-120"/>
+              </a:rPr>
+              <a:t>新たに出た人の割合が約1.4倍。</a:t>
+            </a:r>
+            <a:endParaRPr lang="en-US" sz="1300" dirty="0"/>
+          </a:p>
+          <a:p>
+            <a:pPr indent="0" marL="0">
+              <a:lnSpc>
+                <a:spcPct val="120000"/>
+              </a:lnSpc>
+              <a:buNone/>
+            </a:pPr>
+            <a:r>
+              <a:rPr lang="en-US" sz="1300" dirty="0">
+                <a:solidFill>
+                  <a:srgbClr val="16211F"/>
+                </a:solidFill>
+                <a:latin typeface="Yu Gothic" pitchFamily="34" charset="0"/>
+                <a:ea typeface="Yu Gothic" pitchFamily="34" charset="-122"/>
+                <a:cs typeface="Yu Gothic" pitchFamily="34" charset="-120"/>
+              </a:rPr>
+              <a:t>体重やBMIの変化を考慮しても</a:t>
+            </a:r>
+            <a:endParaRPr lang="en-US" sz="1300" dirty="0"/>
+          </a:p>
+          <a:p>
+            <a:pPr indent="0" marL="0">
+              <a:lnSpc>
+                <a:spcPct val="120000"/>
+              </a:lnSpc>
+              <a:buNone/>
+            </a:pPr>
+            <a:r>
+              <a:rPr lang="en-US" sz="1300" dirty="0">
+                <a:solidFill>
+                  <a:srgbClr val="16211F"/>
+                </a:solidFill>
+                <a:latin typeface="Yu Gothic" pitchFamily="34" charset="0"/>
+                <a:ea typeface="Yu Gothic" pitchFamily="34" charset="-122"/>
+                <a:cs typeface="Yu Gothic" pitchFamily="34" charset="-120"/>
+              </a:rPr>
+              <a:t>残った差です。</a:t>
+            </a:r>
+            <a:endParaRPr lang="en-US" sz="1300" dirty="0"/>
           </a:p>
         </p:txBody>
       </p:sp>
@@ -13286,7 +13928,7 @@
                 <a:ea typeface="Yu Gothic" pitchFamily="34" charset="-122"/>
                 <a:cs typeface="Yu Gothic" pitchFamily="34" charset="-120"/>
               </a:rPr>
-              <a:t>言えること、言えないこと</a:t>
+              <a:t>どう現場で使えるか</a:t>
             </a:r>
             <a:endParaRPr lang="en-US" sz="3600" dirty="0"/>
           </a:p>
@@ -13294,18 +13936,57 @@
       </p:sp>
       <p:sp>
         <p:nvSpPr>
-          <p:cNvPr id="3" name="Shape 1"/>
-          <p:cNvSpPr/>
-          <p:nvPr/>
-        </p:nvSpPr>
-        <p:spPr>
-          <a:xfrm>
-            <a:off x="731520" y="1965960"/>
-            <a:ext cx="5120640" cy="3200400"/>
+          <p:cNvPr id="3" name="Text 1"/>
+          <p:cNvSpPr/>
+          <p:nvPr/>
+        </p:nvSpPr>
+        <p:spPr>
+          <a:xfrm>
+            <a:off x="731520" y="1225296"/>
+            <a:ext cx="10698480" cy="411480"/>
+          </a:xfrm>
+          <a:prstGeom prst="rect">
+            <a:avLst/>
+          </a:prstGeom>
+          <a:noFill/>
+          <a:ln/>
+        </p:spPr>
+        <p:txBody>
+          <a:bodyPr wrap="square" lIns="0" tIns="0" rIns="0" bIns="0" rtlCol="0" anchor="ctr"/>
+          <a:lstStyle/>
+          <a:p>
+            <a:pPr indent="0" marL="0">
+              <a:buNone/>
+            </a:pPr>
+            <a:r>
+              <a:rPr lang="en-US" sz="1600" dirty="0">
+                <a:solidFill>
+                  <a:srgbClr val="5C6B68"/>
+                </a:solidFill>
+                <a:latin typeface="Yu Gothic" pitchFamily="34" charset="0"/>
+                <a:ea typeface="Yu Gothic" pitchFamily="34" charset="-122"/>
+                <a:cs typeface="Yu Gothic" pitchFamily="34" charset="-120"/>
+              </a:rPr>
+              <a:t>研究を、健診の場での実践につなげる</a:t>
+            </a:r>
+            <a:endParaRPr lang="en-US" sz="1600" dirty="0"/>
+          </a:p>
+        </p:txBody>
+      </p:sp>
+      <p:sp>
+        <p:nvSpPr>
+          <p:cNvPr id="4" name="Shape 2"/>
+          <p:cNvSpPr/>
+          <p:nvPr/>
+        </p:nvSpPr>
+        <p:spPr>
+          <a:xfrm>
+            <a:off x="731520" y="1920240"/>
+            <a:ext cx="3429000" cy="2743200"/>
           </a:xfrm>
           <a:prstGeom prst="roundRect">
             <a:avLst>
-              <a:gd name="adj" fmla="val 2286"/>
+              <a:gd name="adj" fmla="val 2667"/>
             </a:avLst>
           </a:prstGeom>
           <a:solidFill>
@@ -13321,189 +14002,24 @@
       </p:sp>
       <p:sp>
         <p:nvSpPr>
-          <p:cNvPr id="4" name="Text 2"/>
-          <p:cNvSpPr/>
-          <p:nvPr/>
-        </p:nvSpPr>
-        <p:spPr>
-          <a:xfrm>
-            <a:off x="1051560" y="2194560"/>
-            <a:ext cx="3657600" cy="411480"/>
-          </a:xfrm>
-          <a:prstGeom prst="rect">
-            <a:avLst/>
-          </a:prstGeom>
-          <a:noFill/>
-          <a:ln/>
-        </p:spPr>
-        <p:txBody>
-          <a:bodyPr wrap="square" lIns="0" tIns="0" rIns="0" bIns="0" rtlCol="0" anchor="ctr"/>
-          <a:lstStyle/>
-          <a:p>
-            <a:pPr indent="0" marL="0">
-              <a:buNone/>
-            </a:pPr>
-            <a:r>
-              <a:rPr lang="en-US" sz="1900" b="1" dirty="0">
-                <a:solidFill>
-                  <a:srgbClr val="14504B"/>
-                </a:solidFill>
-                <a:latin typeface="Yu Gothic" pitchFamily="34" charset="0"/>
-                <a:ea typeface="Yu Gothic" pitchFamily="34" charset="-122"/>
-                <a:cs typeface="Yu Gothic" pitchFamily="34" charset="-120"/>
-              </a:rPr>
-              <a:t>言えること</a:t>
-            </a:r>
-            <a:endParaRPr lang="en-US" sz="1900" dirty="0"/>
-          </a:p>
-        </p:txBody>
-      </p:sp>
-      <p:sp>
-        <p:nvSpPr>
-          <p:cNvPr id="5" name="Text 3"/>
-          <p:cNvSpPr/>
-          <p:nvPr/>
-        </p:nvSpPr>
-        <p:spPr>
-          <a:xfrm>
-            <a:off x="1051560" y="2834640"/>
-            <a:ext cx="4663440" cy="868680"/>
-          </a:xfrm>
-          <a:prstGeom prst="rect">
-            <a:avLst/>
-          </a:prstGeom>
-          <a:noFill/>
-          <a:ln/>
-        </p:spPr>
-        <p:txBody>
-          <a:bodyPr wrap="square" lIns="0" tIns="0" rIns="0" bIns="0" rtlCol="0" anchor="ctr"/>
-          <a:lstStyle/>
-          <a:p>
-            <a:pPr indent="0" marL="0">
-              <a:lnSpc>
-                <a:spcPct val="125000"/>
-              </a:lnSpc>
-              <a:buNone/>
-            </a:pPr>
-            <a:r>
-              <a:rPr lang="en-US" sz="1500" dirty="0">
-                <a:solidFill>
-                  <a:srgbClr val="16211F"/>
-                </a:solidFill>
-                <a:latin typeface="Yu Gothic" pitchFamily="34" charset="0"/>
-                <a:ea typeface="Yu Gothic" pitchFamily="34" charset="-122"/>
-                <a:cs typeface="Yu Gothic" pitchFamily="34" charset="-120"/>
-              </a:rPr>
-              <a:t>1年間でBRIが増えた人は、</a:t>
-            </a:r>
-            <a:endParaRPr lang="en-US" sz="1500" dirty="0"/>
-          </a:p>
-          <a:p>
-            <a:pPr indent="0" marL="0">
-              <a:lnSpc>
-                <a:spcPct val="125000"/>
-              </a:lnSpc>
-              <a:buNone/>
-            </a:pPr>
-            <a:r>
-              <a:rPr lang="en-US" sz="1500" dirty="0">
-                <a:solidFill>
-                  <a:srgbClr val="16211F"/>
-                </a:solidFill>
-                <a:latin typeface="Yu Gothic" pitchFamily="34" charset="0"/>
-                <a:ea typeface="Yu Gothic" pitchFamily="34" charset="-122"/>
-                <a:cs typeface="Yu Gothic" pitchFamily="34" charset="-120"/>
-              </a:rPr>
-              <a:t>尿蛋白が新たに出やすかった</a:t>
-            </a:r>
-            <a:endParaRPr lang="en-US" sz="1500" dirty="0"/>
-          </a:p>
-        </p:txBody>
-      </p:sp>
-      <p:sp>
-        <p:nvSpPr>
-          <p:cNvPr id="6" name="Text 4"/>
-          <p:cNvSpPr/>
-          <p:nvPr/>
-        </p:nvSpPr>
-        <p:spPr>
-          <a:xfrm>
-            <a:off x="1051560" y="3931920"/>
-            <a:ext cx="4663440" cy="868680"/>
-          </a:xfrm>
-          <a:prstGeom prst="rect">
-            <a:avLst/>
-          </a:prstGeom>
-          <a:noFill/>
-          <a:ln/>
-        </p:spPr>
-        <p:txBody>
-          <a:bodyPr wrap="square" lIns="0" tIns="0" rIns="0" bIns="0" rtlCol="0" anchor="ctr"/>
-          <a:lstStyle/>
-          <a:p>
-            <a:pPr indent="0" marL="0">
-              <a:lnSpc>
-                <a:spcPct val="125000"/>
-              </a:lnSpc>
-              <a:buNone/>
-            </a:pPr>
-            <a:r>
-              <a:rPr lang="en-US" sz="1500" dirty="0">
-                <a:solidFill>
-                  <a:srgbClr val="16211F"/>
-                </a:solidFill>
-                <a:latin typeface="Yu Gothic" pitchFamily="34" charset="0"/>
-                <a:ea typeface="Yu Gothic" pitchFamily="34" charset="-122"/>
-                <a:cs typeface="Yu Gothic" pitchFamily="34" charset="-120"/>
-              </a:rPr>
-              <a:t>体重やBMIの変化を</a:t>
-            </a:r>
-            <a:endParaRPr lang="en-US" sz="1500" dirty="0"/>
-          </a:p>
-          <a:p>
-            <a:pPr indent="0" marL="0">
-              <a:lnSpc>
-                <a:spcPct val="125000"/>
-              </a:lnSpc>
-              <a:buNone/>
-            </a:pPr>
-            <a:r>
-              <a:rPr lang="en-US" sz="1500" dirty="0">
-                <a:solidFill>
-                  <a:srgbClr val="16211F"/>
-                </a:solidFill>
-                <a:latin typeface="Yu Gothic" pitchFamily="34" charset="0"/>
-                <a:ea typeface="Yu Gothic" pitchFamily="34" charset="-122"/>
-                <a:cs typeface="Yu Gothic" pitchFamily="34" charset="-120"/>
-              </a:rPr>
-              <a:t>考慮しても傾向は残った</a:t>
-            </a:r>
-            <a:endParaRPr lang="en-US" sz="1500" dirty="0"/>
-          </a:p>
-        </p:txBody>
-      </p:sp>
-      <p:sp>
-        <p:nvSpPr>
-          <p:cNvPr id="7" name="Shape 5"/>
-          <p:cNvSpPr/>
-          <p:nvPr/>
-        </p:nvSpPr>
-        <p:spPr>
-          <a:xfrm>
-            <a:off x="6400800" y="1965960"/>
-            <a:ext cx="5029200" cy="3200400"/>
-          </a:xfrm>
-          <a:prstGeom prst="roundRect">
-            <a:avLst>
-              <a:gd name="adj" fmla="val 2286"/>
-            </a:avLst>
+          <p:cNvPr id="5" name="Shape 3"/>
+          <p:cNvSpPr/>
+          <p:nvPr/>
+        </p:nvSpPr>
+        <p:spPr>
+          <a:xfrm>
+            <a:off x="987552" y="2148840"/>
+            <a:ext cx="502920" cy="502920"/>
+          </a:xfrm>
+          <a:prstGeom prst="ellipse">
+            <a:avLst/>
           </a:prstGeom>
           <a:solidFill>
-            <a:srgbClr val="F7F2EC"/>
+            <a:srgbClr val="D98A2B"/>
           </a:solidFill>
           <a:ln w="12700">
             <a:solidFill>
-              <a:srgbClr val="F7F2EC"/>
+              <a:srgbClr val="D98A2B"/>
             </a:solidFill>
             <a:prstDash val="solid"/>
           </a:ln>
@@ -13511,53 +14027,92 @@
       </p:sp>
       <p:sp>
         <p:nvSpPr>
+          <p:cNvPr id="6" name="Text 4"/>
+          <p:cNvSpPr/>
+          <p:nvPr/>
+        </p:nvSpPr>
+        <p:spPr>
+          <a:xfrm>
+            <a:off x="987552" y="2148840"/>
+            <a:ext cx="502920" cy="502920"/>
+          </a:xfrm>
+          <a:prstGeom prst="rect">
+            <a:avLst/>
+          </a:prstGeom>
+          <a:noFill/>
+          <a:ln/>
+        </p:spPr>
+        <p:txBody>
+          <a:bodyPr wrap="square" lIns="0" tIns="0" rIns="0" bIns="0" rtlCol="0" anchor="ctr"/>
+          <a:lstStyle/>
+          <a:p>
+            <a:pPr algn="ctr" indent="0" marL="0">
+              <a:buNone/>
+            </a:pPr>
+            <a:r>
+              <a:rPr lang="en-US" sz="1700" b="1" dirty="0">
+                <a:solidFill>
+                  <a:srgbClr val="FFFFFF"/>
+                </a:solidFill>
+                <a:latin typeface="Yu Gothic" pitchFamily="34" charset="0"/>
+                <a:ea typeface="Yu Gothic" pitchFamily="34" charset="-122"/>
+                <a:cs typeface="Yu Gothic" pitchFamily="34" charset="-120"/>
+              </a:rPr>
+              <a:t>①</a:t>
+            </a:r>
+            <a:endParaRPr lang="en-US" sz="1700" dirty="0"/>
+          </a:p>
+        </p:txBody>
+      </p:sp>
+      <p:sp>
+        <p:nvSpPr>
+          <p:cNvPr id="7" name="Text 5"/>
+          <p:cNvSpPr/>
+          <p:nvPr/>
+        </p:nvSpPr>
+        <p:spPr>
+          <a:xfrm>
+            <a:off x="987552" y="2834640"/>
+            <a:ext cx="3017520" cy="411480"/>
+          </a:xfrm>
+          <a:prstGeom prst="rect">
+            <a:avLst/>
+          </a:prstGeom>
+          <a:noFill/>
+          <a:ln/>
+        </p:spPr>
+        <p:txBody>
+          <a:bodyPr wrap="square" lIns="0" tIns="0" rIns="0" bIns="0" rtlCol="0" anchor="ctr"/>
+          <a:lstStyle/>
+          <a:p>
+            <a:pPr indent="0" marL="0">
+              <a:buNone/>
+            </a:pPr>
+            <a:r>
+              <a:rPr lang="en-US" sz="1700" b="1" dirty="0">
+                <a:solidFill>
+                  <a:srgbClr val="14504B"/>
+                </a:solidFill>
+                <a:latin typeface="Yu Gothic" pitchFamily="34" charset="0"/>
+                <a:ea typeface="Yu Gothic" pitchFamily="34" charset="-122"/>
+                <a:cs typeface="Yu Gothic" pitchFamily="34" charset="-120"/>
+              </a:rPr>
+              <a:t>道具がいらない</a:t>
+            </a:r>
+            <a:endParaRPr lang="en-US" sz="1700" dirty="0"/>
+          </a:p>
+        </p:txBody>
+      </p:sp>
+      <p:sp>
+        <p:nvSpPr>
           <p:cNvPr id="8" name="Text 6"/>
           <p:cNvSpPr/>
           <p:nvPr/>
         </p:nvSpPr>
         <p:spPr>
           <a:xfrm>
-            <a:off x="6720840" y="2194560"/>
-            <a:ext cx="3657600" cy="411480"/>
-          </a:xfrm>
-          <a:prstGeom prst="rect">
-            <a:avLst/>
-          </a:prstGeom>
-          <a:noFill/>
-          <a:ln/>
-        </p:spPr>
-        <p:txBody>
-          <a:bodyPr wrap="square" lIns="0" tIns="0" rIns="0" bIns="0" rtlCol="0" anchor="ctr"/>
-          <a:lstStyle/>
-          <a:p>
-            <a:pPr indent="0" marL="0">
-              <a:buNone/>
-            </a:pPr>
-            <a:r>
-              <a:rPr lang="en-US" sz="1900" b="1" dirty="0">
-                <a:solidFill>
-                  <a:srgbClr val="8A6F52"/>
-                </a:solidFill>
-                <a:latin typeface="Yu Gothic" pitchFamily="34" charset="0"/>
-                <a:ea typeface="Yu Gothic" pitchFamily="34" charset="-122"/>
-                <a:cs typeface="Yu Gothic" pitchFamily="34" charset="-120"/>
-              </a:rPr>
-              <a:t>言えないこと</a:t>
-            </a:r>
-            <a:endParaRPr lang="en-US" sz="1900" dirty="0"/>
-          </a:p>
-        </p:txBody>
-      </p:sp>
-      <p:sp>
-        <p:nvSpPr>
-          <p:cNvPr id="9" name="Text 7"/>
-          <p:cNvSpPr/>
-          <p:nvPr/>
-        </p:nvSpPr>
-        <p:spPr>
-          <a:xfrm>
-            <a:off x="6720840" y="2697480"/>
-            <a:ext cx="4572000" cy="621792"/>
+            <a:off x="987552" y="3346704"/>
+            <a:ext cx="3017520" cy="1188720"/>
           </a:xfrm>
           <a:prstGeom prst="rect">
             <a:avLst/>
@@ -13571,179 +14126,417 @@
           <a:p>
             <a:pPr indent="0" marL="0">
               <a:lnSpc>
-                <a:spcPct val="115000"/>
+                <a:spcPct val="130000"/>
               </a:lnSpc>
               <a:buNone/>
             </a:pPr>
             <a:r>
-              <a:rPr lang="en-US" sz="1300" dirty="0">
-                <a:solidFill>
-                  <a:srgbClr val="5A5044"/>
-                </a:solidFill>
-                <a:latin typeface="Yu Gothic" pitchFamily="34" charset="0"/>
-                <a:ea typeface="Yu Gothic" pitchFamily="34" charset="-122"/>
-                <a:cs typeface="Yu Gothic" pitchFamily="34" charset="-120"/>
-              </a:rPr>
-              <a:t>BRIを下げれば腎臓が守れる、</a:t>
-            </a:r>
-            <a:endParaRPr lang="en-US" sz="1300" dirty="0"/>
+              <a:rPr lang="en-US" sz="1400" dirty="0">
+                <a:solidFill>
+                  <a:srgbClr val="5C6B68"/>
+                </a:solidFill>
+                <a:latin typeface="Yu Gothic" pitchFamily="34" charset="0"/>
+                <a:ea typeface="Yu Gothic" pitchFamily="34" charset="-122"/>
+                <a:cs typeface="Yu Gothic" pitchFamily="34" charset="-120"/>
+              </a:rPr>
+              <a:t>メジャーと身長計だけ。</a:t>
+            </a:r>
+            <a:endParaRPr lang="en-US" sz="1400" dirty="0"/>
           </a:p>
           <a:p>
             <a:pPr indent="0" marL="0">
               <a:lnSpc>
-                <a:spcPct val="115000"/>
+                <a:spcPct val="130000"/>
               </a:lnSpc>
               <a:buNone/>
             </a:pPr>
             <a:r>
-              <a:rPr lang="en-US" sz="1300" dirty="0">
-                <a:solidFill>
-                  <a:srgbClr val="5A5044"/>
-                </a:solidFill>
-                <a:latin typeface="Yu Gothic" pitchFamily="34" charset="0"/>
-                <a:ea typeface="Yu Gothic" pitchFamily="34" charset="-122"/>
-                <a:cs typeface="Yu Gothic" pitchFamily="34" charset="-120"/>
-              </a:rPr>
-              <a:t>という因果関係</a:t>
-            </a:r>
-            <a:endParaRPr lang="en-US" sz="1300" dirty="0"/>
-          </a:p>
-        </p:txBody>
-      </p:sp>
-      <p:sp>
-        <p:nvSpPr>
-          <p:cNvPr id="10" name="Text 8"/>
-          <p:cNvSpPr/>
-          <p:nvPr/>
-        </p:nvSpPr>
-        <p:spPr>
-          <a:xfrm>
-            <a:off x="6720840" y="3355848"/>
-            <a:ext cx="4572000" cy="621792"/>
-          </a:xfrm>
-          <a:prstGeom prst="rect">
-            <a:avLst/>
-          </a:prstGeom>
-          <a:noFill/>
-          <a:ln/>
-        </p:spPr>
-        <p:txBody>
-          <a:bodyPr wrap="square" lIns="0" tIns="0" rIns="0" bIns="0" rtlCol="0" anchor="ctr"/>
-          <a:lstStyle/>
+              <a:rPr lang="en-US" sz="1400" dirty="0">
+                <a:solidFill>
+                  <a:srgbClr val="5C6B68"/>
+                </a:solidFill>
+                <a:latin typeface="Yu Gothic" pitchFamily="34" charset="0"/>
+                <a:ea typeface="Yu Gothic" pitchFamily="34" charset="-122"/>
+                <a:cs typeface="Yu Gothic" pitchFamily="34" charset="-120"/>
+              </a:rPr>
+              <a:t>特別な機器がなくても</a:t>
+            </a:r>
+            <a:endParaRPr lang="en-US" sz="1400" dirty="0"/>
+          </a:p>
           <a:p>
             <a:pPr indent="0" marL="0">
               <a:lnSpc>
-                <a:spcPct val="115000"/>
+                <a:spcPct val="130000"/>
               </a:lnSpc>
               <a:buNone/>
             </a:pPr>
             <a:r>
-              <a:rPr lang="en-US" sz="1300" dirty="0">
-                <a:solidFill>
-                  <a:srgbClr val="5A5044"/>
-                </a:solidFill>
-                <a:latin typeface="Yu Gothic" pitchFamily="34" charset="0"/>
-                <a:ea typeface="Yu Gothic" pitchFamily="34" charset="-122"/>
-                <a:cs typeface="Yu Gothic" pitchFamily="34" charset="-120"/>
-              </a:rPr>
-              <a:t>「減った人も危ない」とは</a:t>
-            </a:r>
-            <a:endParaRPr lang="en-US" sz="1300" dirty="0"/>
-          </a:p>
+              <a:rPr lang="en-US" sz="1400" dirty="0">
+                <a:solidFill>
+                  <a:srgbClr val="5C6B68"/>
+                </a:solidFill>
+                <a:latin typeface="Yu Gothic" pitchFamily="34" charset="0"/>
+                <a:ea typeface="Yu Gothic" pitchFamily="34" charset="-122"/>
+                <a:cs typeface="Yu Gothic" pitchFamily="34" charset="-120"/>
+              </a:rPr>
+              <a:t>どの会場でも計算できる</a:t>
+            </a:r>
+            <a:endParaRPr lang="en-US" sz="1400" dirty="0"/>
+          </a:p>
+        </p:txBody>
+      </p:sp>
+      <p:sp>
+        <p:nvSpPr>
+          <p:cNvPr id="9" name="Shape 7"/>
+          <p:cNvSpPr/>
+          <p:nvPr/>
+        </p:nvSpPr>
+        <p:spPr>
+          <a:xfrm>
+            <a:off x="4434840" y="1920240"/>
+            <a:ext cx="3429000" cy="2743200"/>
+          </a:xfrm>
+          <a:prstGeom prst="roundRect">
+            <a:avLst>
+              <a:gd name="adj" fmla="val 2667"/>
+            </a:avLst>
+          </a:prstGeom>
+          <a:solidFill>
+            <a:srgbClr val="F1F6F5"/>
+          </a:solidFill>
+          <a:ln w="12700">
+            <a:solidFill>
+              <a:srgbClr val="F1F6F5"/>
+            </a:solidFill>
+            <a:prstDash val="solid"/>
+          </a:ln>
+        </p:spPr>
+      </p:sp>
+      <p:sp>
+        <p:nvSpPr>
+          <p:cNvPr id="10" name="Shape 8"/>
+          <p:cNvSpPr/>
+          <p:nvPr/>
+        </p:nvSpPr>
+        <p:spPr>
+          <a:xfrm>
+            <a:off x="4690872" y="2148840"/>
+            <a:ext cx="502920" cy="502920"/>
+          </a:xfrm>
+          <a:prstGeom prst="ellipse">
+            <a:avLst/>
+          </a:prstGeom>
+          <a:solidFill>
+            <a:srgbClr val="D98A2B"/>
+          </a:solidFill>
+          <a:ln w="12700">
+            <a:solidFill>
+              <a:srgbClr val="D98A2B"/>
+            </a:solidFill>
+            <a:prstDash val="solid"/>
+          </a:ln>
+        </p:spPr>
+      </p:sp>
+      <p:sp>
+        <p:nvSpPr>
+          <p:cNvPr id="11" name="Text 9"/>
+          <p:cNvSpPr/>
+          <p:nvPr/>
+        </p:nvSpPr>
+        <p:spPr>
+          <a:xfrm>
+            <a:off x="4690872" y="2148840"/>
+            <a:ext cx="502920" cy="502920"/>
+          </a:xfrm>
+          <a:prstGeom prst="rect">
+            <a:avLst/>
+          </a:prstGeom>
+          <a:noFill/>
+          <a:ln/>
+        </p:spPr>
+        <p:txBody>
+          <a:bodyPr wrap="square" lIns="0" tIns="0" rIns="0" bIns="0" rtlCol="0" anchor="ctr"/>
+          <a:lstStyle/>
+          <a:p>
+            <a:pPr algn="ctr" indent="0" marL="0">
+              <a:buNone/>
+            </a:pPr>
+            <a:r>
+              <a:rPr lang="en-US" sz="1700" b="1" dirty="0">
+                <a:solidFill>
+                  <a:srgbClr val="FFFFFF"/>
+                </a:solidFill>
+                <a:latin typeface="Yu Gothic" pitchFamily="34" charset="0"/>
+                <a:ea typeface="Yu Gothic" pitchFamily="34" charset="-122"/>
+                <a:cs typeface="Yu Gothic" pitchFamily="34" charset="-120"/>
+              </a:rPr>
+              <a:t>②</a:t>
+            </a:r>
+            <a:endParaRPr lang="en-US" sz="1700" dirty="0"/>
+          </a:p>
+        </p:txBody>
+      </p:sp>
+      <p:sp>
+        <p:nvSpPr>
+          <p:cNvPr id="12" name="Text 10"/>
+          <p:cNvSpPr/>
+          <p:nvPr/>
+        </p:nvSpPr>
+        <p:spPr>
+          <a:xfrm>
+            <a:off x="4690872" y="2834640"/>
+            <a:ext cx="3017520" cy="411480"/>
+          </a:xfrm>
+          <a:prstGeom prst="rect">
+            <a:avLst/>
+          </a:prstGeom>
+          <a:noFill/>
+          <a:ln/>
+        </p:spPr>
+        <p:txBody>
+          <a:bodyPr wrap="square" lIns="0" tIns="0" rIns="0" bIns="0" rtlCol="0" anchor="ctr"/>
+          <a:lstStyle/>
+          <a:p>
+            <a:pPr indent="0" marL="0">
+              <a:buNone/>
+            </a:pPr>
+            <a:r>
+              <a:rPr lang="en-US" sz="1700" b="1" dirty="0">
+                <a:solidFill>
+                  <a:srgbClr val="14504B"/>
+                </a:solidFill>
+                <a:latin typeface="Yu Gothic" pitchFamily="34" charset="0"/>
+                <a:ea typeface="Yu Gothic" pitchFamily="34" charset="-122"/>
+                <a:cs typeface="Yu Gothic" pitchFamily="34" charset="-120"/>
+              </a:rPr>
+              <a:t>声のかけ方が変わる</a:t>
+            </a:r>
+            <a:endParaRPr lang="en-US" sz="1700" dirty="0"/>
+          </a:p>
+        </p:txBody>
+      </p:sp>
+      <p:sp>
+        <p:nvSpPr>
+          <p:cNvPr id="13" name="Text 11"/>
+          <p:cNvSpPr/>
+          <p:nvPr/>
+        </p:nvSpPr>
+        <p:spPr>
+          <a:xfrm>
+            <a:off x="4690872" y="3346704"/>
+            <a:ext cx="3017520" cy="1188720"/>
+          </a:xfrm>
+          <a:prstGeom prst="rect">
+            <a:avLst/>
+          </a:prstGeom>
+          <a:noFill/>
+          <a:ln/>
+        </p:spPr>
+        <p:txBody>
+          <a:bodyPr wrap="square" lIns="0" tIns="0" rIns="0" bIns="0" rtlCol="0" anchor="ctr"/>
+          <a:lstStyle/>
           <a:p>
             <a:pPr indent="0" marL="0">
               <a:lnSpc>
-                <a:spcPct val="115000"/>
+                <a:spcPct val="130000"/>
               </a:lnSpc>
               <a:buNone/>
             </a:pPr>
             <a:r>
-              <a:rPr lang="en-US" sz="1300" dirty="0">
-                <a:solidFill>
-                  <a:srgbClr val="5A5044"/>
-                </a:solidFill>
-                <a:latin typeface="Yu Gothic" pitchFamily="34" charset="0"/>
-                <a:ea typeface="Yu Gothic" pitchFamily="34" charset="-122"/>
-                <a:cs typeface="Yu Gothic" pitchFamily="34" charset="-120"/>
-              </a:rPr>
-              <a:t>言えない（差が確かめられていない）</a:t>
-            </a:r>
-            <a:endParaRPr lang="en-US" sz="1300" dirty="0"/>
-          </a:p>
-        </p:txBody>
-      </p:sp>
-      <p:sp>
-        <p:nvSpPr>
-          <p:cNvPr id="11" name="Text 9"/>
-          <p:cNvSpPr/>
-          <p:nvPr/>
-        </p:nvSpPr>
-        <p:spPr>
-          <a:xfrm>
-            <a:off x="6720840" y="4014216"/>
-            <a:ext cx="4572000" cy="621792"/>
-          </a:xfrm>
-          <a:prstGeom prst="rect">
-            <a:avLst/>
-          </a:prstGeom>
-          <a:noFill/>
-          <a:ln/>
-        </p:spPr>
-        <p:txBody>
-          <a:bodyPr wrap="square" lIns="0" tIns="0" rIns="0" bIns="0" rtlCol="0" anchor="ctr"/>
-          <a:lstStyle/>
+              <a:rPr lang="en-US" sz="1400" dirty="0">
+                <a:solidFill>
+                  <a:srgbClr val="5C6B68"/>
+                </a:solidFill>
+                <a:latin typeface="Yu Gothic" pitchFamily="34" charset="0"/>
+                <a:ea typeface="Yu Gothic" pitchFamily="34" charset="-122"/>
+                <a:cs typeface="Yu Gothic" pitchFamily="34" charset="-120"/>
+              </a:rPr>
+              <a:t>「太っています」ではなく</a:t>
+            </a:r>
+            <a:endParaRPr lang="en-US" sz="1400" dirty="0"/>
+          </a:p>
           <a:p>
             <a:pPr indent="0" marL="0">
               <a:lnSpc>
-                <a:spcPct val="115000"/>
+                <a:spcPct val="130000"/>
               </a:lnSpc>
               <a:buNone/>
             </a:pPr>
             <a:r>
-              <a:rPr lang="en-US" sz="1300" dirty="0">
-                <a:solidFill>
-                  <a:srgbClr val="5A5044"/>
-                </a:solidFill>
-                <a:latin typeface="Yu Gothic" pitchFamily="34" charset="0"/>
-                <a:ea typeface="Yu Gothic" pitchFamily="34" charset="-122"/>
-                <a:cs typeface="Yu Gothic" pitchFamily="34" charset="-120"/>
-              </a:rPr>
-              <a:t>痩せた理由が生活改善なのか、</a:t>
-            </a:r>
-            <a:endParaRPr lang="en-US" sz="1300" dirty="0"/>
+              <a:rPr lang="en-US" sz="1400" dirty="0">
+                <a:solidFill>
+                  <a:srgbClr val="5C6B68"/>
+                </a:solidFill>
+                <a:latin typeface="Yu Gothic" pitchFamily="34" charset="0"/>
+                <a:ea typeface="Yu Gothic" pitchFamily="34" charset="-122"/>
+                <a:cs typeface="Yu Gothic" pitchFamily="34" charset="-120"/>
+              </a:rPr>
+              <a:t>「去年より増えています」。</a:t>
+            </a:r>
+            <a:endParaRPr lang="en-US" sz="1400" dirty="0"/>
           </a:p>
           <a:p>
             <a:pPr indent="0" marL="0">
               <a:lnSpc>
-                <a:spcPct val="115000"/>
+                <a:spcPct val="130000"/>
               </a:lnSpc>
               <a:buNone/>
             </a:pPr>
             <a:r>
-              <a:rPr lang="en-US" sz="1300" dirty="0">
-                <a:solidFill>
-                  <a:srgbClr val="5A5044"/>
-                </a:solidFill>
-                <a:latin typeface="Yu Gothic" pitchFamily="34" charset="0"/>
-                <a:ea typeface="Yu Gothic" pitchFamily="34" charset="-122"/>
-                <a:cs typeface="Yu Gothic" pitchFamily="34" charset="-120"/>
-              </a:rPr>
-              <a:t>病気や低栄養なのかは区別できない</a:t>
-            </a:r>
-            <a:endParaRPr lang="en-US" sz="1300" dirty="0"/>
-          </a:p>
-        </p:txBody>
-      </p:sp>
-      <p:sp>
-        <p:nvSpPr>
-          <p:cNvPr id="12" name="Text 10"/>
-          <p:cNvSpPr/>
-          <p:nvPr/>
-        </p:nvSpPr>
-        <p:spPr>
-          <a:xfrm>
-            <a:off x="6720840" y="4672584"/>
-            <a:ext cx="4572000" cy="621792"/>
+              <a:rPr lang="en-US" sz="1400" dirty="0">
+                <a:solidFill>
+                  <a:srgbClr val="5C6B68"/>
+                </a:solidFill>
+                <a:latin typeface="Yu Gothic" pitchFamily="34" charset="0"/>
+                <a:ea typeface="Yu Gothic" pitchFamily="34" charset="-122"/>
+                <a:cs typeface="Yu Gothic" pitchFamily="34" charset="-120"/>
+              </a:rPr>
+              <a:t>本人も実感しやすい</a:t>
+            </a:r>
+            <a:endParaRPr lang="en-US" sz="1400" dirty="0"/>
+          </a:p>
+        </p:txBody>
+      </p:sp>
+      <p:sp>
+        <p:nvSpPr>
+          <p:cNvPr id="14" name="Shape 12"/>
+          <p:cNvSpPr/>
+          <p:nvPr/>
+        </p:nvSpPr>
+        <p:spPr>
+          <a:xfrm>
+            <a:off x="8138160" y="1920240"/>
+            <a:ext cx="3429000" cy="2743200"/>
+          </a:xfrm>
+          <a:prstGeom prst="roundRect">
+            <a:avLst>
+              <a:gd name="adj" fmla="val 2667"/>
+            </a:avLst>
+          </a:prstGeom>
+          <a:solidFill>
+            <a:srgbClr val="F1F6F5"/>
+          </a:solidFill>
+          <a:ln w="12700">
+            <a:solidFill>
+              <a:srgbClr val="F1F6F5"/>
+            </a:solidFill>
+            <a:prstDash val="solid"/>
+          </a:ln>
+        </p:spPr>
+      </p:sp>
+      <p:sp>
+        <p:nvSpPr>
+          <p:cNvPr id="15" name="Shape 13"/>
+          <p:cNvSpPr/>
+          <p:nvPr/>
+        </p:nvSpPr>
+        <p:spPr>
+          <a:xfrm>
+            <a:off x="8394192" y="2148840"/>
+            <a:ext cx="502920" cy="502920"/>
+          </a:xfrm>
+          <a:prstGeom prst="ellipse">
+            <a:avLst/>
+          </a:prstGeom>
+          <a:solidFill>
+            <a:srgbClr val="D98A2B"/>
+          </a:solidFill>
+          <a:ln w="12700">
+            <a:solidFill>
+              <a:srgbClr val="D98A2B"/>
+            </a:solidFill>
+            <a:prstDash val="solid"/>
+          </a:ln>
+        </p:spPr>
+      </p:sp>
+      <p:sp>
+        <p:nvSpPr>
+          <p:cNvPr id="16" name="Text 14"/>
+          <p:cNvSpPr/>
+          <p:nvPr/>
+        </p:nvSpPr>
+        <p:spPr>
+          <a:xfrm>
+            <a:off x="8394192" y="2148840"/>
+            <a:ext cx="502920" cy="502920"/>
+          </a:xfrm>
+          <a:prstGeom prst="rect">
+            <a:avLst/>
+          </a:prstGeom>
+          <a:noFill/>
+          <a:ln/>
+        </p:spPr>
+        <p:txBody>
+          <a:bodyPr wrap="square" lIns="0" tIns="0" rIns="0" bIns="0" rtlCol="0" anchor="ctr"/>
+          <a:lstStyle/>
+          <a:p>
+            <a:pPr algn="ctr" indent="0" marL="0">
+              <a:buNone/>
+            </a:pPr>
+            <a:r>
+              <a:rPr lang="en-US" sz="1700" b="1" dirty="0">
+                <a:solidFill>
+                  <a:srgbClr val="FFFFFF"/>
+                </a:solidFill>
+                <a:latin typeface="Yu Gothic" pitchFamily="34" charset="0"/>
+                <a:ea typeface="Yu Gothic" pitchFamily="34" charset="-122"/>
+                <a:cs typeface="Yu Gothic" pitchFamily="34" charset="-120"/>
+              </a:rPr>
+              <a:t>③</a:t>
+            </a:r>
+            <a:endParaRPr lang="en-US" sz="1700" dirty="0"/>
+          </a:p>
+        </p:txBody>
+      </p:sp>
+      <p:sp>
+        <p:nvSpPr>
+          <p:cNvPr id="17" name="Text 15"/>
+          <p:cNvSpPr/>
+          <p:nvPr/>
+        </p:nvSpPr>
+        <p:spPr>
+          <a:xfrm>
+            <a:off x="8394192" y="2834640"/>
+            <a:ext cx="3017520" cy="411480"/>
+          </a:xfrm>
+          <a:prstGeom prst="rect">
+            <a:avLst/>
+          </a:prstGeom>
+          <a:noFill/>
+          <a:ln/>
+        </p:spPr>
+        <p:txBody>
+          <a:bodyPr wrap="square" lIns="0" tIns="0" rIns="0" bIns="0" rtlCol="0" anchor="ctr"/>
+          <a:lstStyle/>
+          <a:p>
+            <a:pPr indent="0" marL="0">
+              <a:buNone/>
+            </a:pPr>
+            <a:r>
+              <a:rPr lang="en-US" sz="1700" b="1" dirty="0">
+                <a:solidFill>
+                  <a:srgbClr val="14504B"/>
+                </a:solidFill>
+                <a:latin typeface="Yu Gothic" pitchFamily="34" charset="0"/>
+                <a:ea typeface="Yu Gothic" pitchFamily="34" charset="-122"/>
+                <a:cs typeface="Yu Gothic" pitchFamily="34" charset="-120"/>
+              </a:rPr>
+              <a:t>優先順位がつけられる</a:t>
+            </a:r>
+            <a:endParaRPr lang="en-US" sz="1700" dirty="0"/>
+          </a:p>
+        </p:txBody>
+      </p:sp>
+      <p:sp>
+        <p:nvSpPr>
+          <p:cNvPr id="18" name="Text 16"/>
+          <p:cNvSpPr/>
+          <p:nvPr/>
+        </p:nvSpPr>
+        <p:spPr>
+          <a:xfrm>
+            <a:off x="8394192" y="3346704"/>
+            <a:ext cx="3017520" cy="1188720"/>
           </a:xfrm>
           <a:prstGeom prst="rect">
             <a:avLst/>
@@ -13757,71 +14550,32 @@
           <a:p>
             <a:pPr indent="0" marL="0">
               <a:lnSpc>
-                <a:spcPct val="115000"/>
+                <a:spcPct val="130000"/>
               </a:lnSpc>
               <a:buNone/>
             </a:pPr>
             <a:r>
-              <a:rPr lang="en-US" sz="1300" dirty="0">
-                <a:solidFill>
-                  <a:srgbClr val="5A5044"/>
-                </a:solidFill>
-                <a:latin typeface="Yu Gothic" pitchFamily="34" charset="0"/>
-                <a:ea typeface="Yu Gothic" pitchFamily="34" charset="-122"/>
-                <a:cs typeface="Yu Gothic" pitchFamily="34" charset="-120"/>
-              </a:rPr>
-              <a:t>1年・延岡市の受診者が対象。</a:t>
-            </a:r>
-            <a:endParaRPr lang="en-US" sz="1300" dirty="0"/>
+              <a:rPr lang="en-US" sz="1400" dirty="0">
+                <a:solidFill>
+                  <a:srgbClr val="5C6B68"/>
+                </a:solidFill>
+                <a:latin typeface="Yu Gothic" pitchFamily="34" charset="0"/>
+                <a:ea typeface="Yu Gothic" pitchFamily="34" charset="-122"/>
+                <a:cs typeface="Yu Gothic" pitchFamily="34" charset="-120"/>
+              </a:rPr>
+              <a:t>限られた保健指導の枠を、</a:t>
+            </a:r>
+            <a:endParaRPr lang="en-US" sz="1400" dirty="0"/>
           </a:p>
           <a:p>
             <a:pPr indent="0" marL="0">
               <a:lnSpc>
-                <a:spcPct val="115000"/>
+                <a:spcPct val="130000"/>
               </a:lnSpc>
               <a:buNone/>
             </a:pPr>
             <a:r>
-              <a:rPr lang="en-US" sz="1300" dirty="0">
-                <a:solidFill>
-                  <a:srgbClr val="5A5044"/>
-                </a:solidFill>
-                <a:latin typeface="Yu Gothic" pitchFamily="34" charset="0"/>
-                <a:ea typeface="Yu Gothic" pitchFamily="34" charset="-122"/>
-                <a:cs typeface="Yu Gothic" pitchFamily="34" charset="-120"/>
-              </a:rPr>
-              <a:t>そのまま他地域には広げられない</a:t>
-            </a:r>
-            <a:endParaRPr lang="en-US" sz="1300" dirty="0"/>
-          </a:p>
-        </p:txBody>
-      </p:sp>
-      <p:sp>
-        <p:nvSpPr>
-          <p:cNvPr id="13" name="Text 11"/>
-          <p:cNvSpPr/>
-          <p:nvPr/>
-        </p:nvSpPr>
-        <p:spPr>
-          <a:xfrm>
-            <a:off x="731520" y="5440680"/>
-            <a:ext cx="10698480" cy="411480"/>
-          </a:xfrm>
-          <a:prstGeom prst="rect">
-            <a:avLst/>
-          </a:prstGeom>
-          <a:noFill/>
-          <a:ln/>
-        </p:spPr>
-        <p:txBody>
-          <a:bodyPr wrap="square" lIns="0" tIns="0" rIns="0" bIns="0" rtlCol="0" anchor="ctr"/>
-          <a:lstStyle/>
-          <a:p>
-            <a:pPr indent="0" marL="0">
-              <a:buNone/>
-            </a:pPr>
-            <a:r>
-              <a:rPr lang="en-US" sz="1500" i="1" dirty="0">
+              <a:rPr lang="en-US" sz="1400" dirty="0">
                 <a:solidFill>
                   <a:srgbClr val="5C6B68"/>
                 </a:solidFill>
@@ -13829,9 +14583,95 @@
                 <a:ea typeface="Yu Gothic" pitchFamily="34" charset="-122"/>
                 <a:cs typeface="Yu Gothic" pitchFamily="34" charset="-120"/>
               </a:rPr>
-              <a:t>次に必要なのは、複数地域・長期の追跡と、介入して確かめる研究です。</a:t>
-            </a:r>
-            <a:endParaRPr lang="en-US" sz="1500" dirty="0"/>
+              <a:t>リスクが上がった人に</a:t>
+            </a:r>
+            <a:endParaRPr lang="en-US" sz="1400" dirty="0"/>
+          </a:p>
+          <a:p>
+            <a:pPr indent="0" marL="0">
+              <a:lnSpc>
+                <a:spcPct val="130000"/>
+              </a:lnSpc>
+              <a:buNone/>
+            </a:pPr>
+            <a:r>
+              <a:rPr lang="en-US" sz="1400" dirty="0">
+                <a:solidFill>
+                  <a:srgbClr val="5C6B68"/>
+                </a:solidFill>
+                <a:latin typeface="Yu Gothic" pitchFamily="34" charset="0"/>
+                <a:ea typeface="Yu Gothic" pitchFamily="34" charset="-122"/>
+                <a:cs typeface="Yu Gothic" pitchFamily="34" charset="-120"/>
+              </a:rPr>
+              <a:t>優先して充てられる</a:t>
+            </a:r>
+            <a:endParaRPr lang="en-US" sz="1400" dirty="0"/>
+          </a:p>
+        </p:txBody>
+      </p:sp>
+      <p:sp>
+        <p:nvSpPr>
+          <p:cNvPr id="19" name="Shape 17"/>
+          <p:cNvSpPr/>
+          <p:nvPr/>
+        </p:nvSpPr>
+        <p:spPr>
+          <a:xfrm>
+            <a:off x="731520" y="4983480"/>
+            <a:ext cx="10698480" cy="1188720"/>
+          </a:xfrm>
+          <a:prstGeom prst="roundRect">
+            <a:avLst>
+              <a:gd name="adj" fmla="val 6154"/>
+            </a:avLst>
+          </a:prstGeom>
+          <a:solidFill>
+            <a:srgbClr val="14504B"/>
+          </a:solidFill>
+          <a:ln w="12700">
+            <a:solidFill>
+              <a:srgbClr val="14504B"/>
+            </a:solidFill>
+            <a:prstDash val="solid"/>
+          </a:ln>
+        </p:spPr>
+      </p:sp>
+      <p:sp>
+        <p:nvSpPr>
+          <p:cNvPr id="20" name="Text 18"/>
+          <p:cNvSpPr/>
+          <p:nvPr/>
+        </p:nvSpPr>
+        <p:spPr>
+          <a:xfrm>
+            <a:off x="1097280" y="5257800"/>
+            <a:ext cx="10058400" cy="502920"/>
+          </a:xfrm>
+          <a:prstGeom prst="rect">
+            <a:avLst/>
+          </a:prstGeom>
+          <a:noFill/>
+          <a:ln/>
+        </p:spPr>
+        <p:txBody>
+          <a:bodyPr wrap="square" lIns="0" tIns="0" rIns="0" bIns="0" rtlCol="0" anchor="ctr"/>
+          <a:lstStyle/>
+          <a:p>
+            <a:pPr indent="0" marL="0">
+              <a:buNone/>
+            </a:pPr>
+            <a:r>
+              <a:rPr lang="en-US" sz="2200" b="1" dirty="0">
+                <a:solidFill>
+                  <a:srgbClr val="FFFFFF"/>
+                </a:solidFill>
+                <a:latin typeface="Yu Gothic" pitchFamily="34" charset="0"/>
+                <a:ea typeface="Yu Gothic" pitchFamily="34" charset="-122"/>
+                <a:cs typeface="Yu Gothic" pitchFamily="34" charset="-120"/>
+              </a:rPr>
+              <a:t>研究の目的は、論文を書くことではなく、明日の声かけを変えること</a:t>
+            </a:r>
+            <a:endParaRPr lang="en-US" sz="2200" dirty="0"/>
           </a:p>
         </p:txBody>
       </p:sp>
@@ -13846,6 +14686,620 @@
 <file path=ppt/slides/slide22.xml><?xml version="1.0" encoding="utf-8"?>
 <p:sld xmlns:a="http://schemas.openxmlformats.org/drawingml/2006/main" xmlns:r="http://schemas.openxmlformats.org/officeDocument/2006/relationships" xmlns:p="http://schemas.openxmlformats.org/presentationml/2006/main">
   <p:cSld name="Slide 22">
+    <p:bg>
+      <p:bgPr>
+        <a:solidFill>
+          <a:srgbClr val="FFFFFF"/>
+        </a:solidFill>
+      </p:bgPr>
+    </p:bg>
+    <p:spTree>
+      <p:nvGrpSpPr>
+        <p:cNvPr id="1" name=""/>
+        <p:cNvGrpSpPr/>
+        <p:nvPr/>
+      </p:nvGrpSpPr>
+      <p:grpSpPr>
+        <a:xfrm>
+          <a:off x="0" y="0"/>
+          <a:ext cx="0" cy="0"/>
+          <a:chOff x="0" y="0"/>
+          <a:chExt cx="0" cy="0"/>
+        </a:xfrm>
+      </p:grpSpPr>
+      <p:sp>
+        <p:nvSpPr>
+          <p:cNvPr id="2" name="Text 0"/>
+          <p:cNvSpPr/>
+          <p:nvPr/>
+        </p:nvSpPr>
+        <p:spPr>
+          <a:xfrm>
+            <a:off x="731520" y="411480"/>
+            <a:ext cx="10698480" cy="777240"/>
+          </a:xfrm>
+          <a:prstGeom prst="rect">
+            <a:avLst/>
+          </a:prstGeom>
+          <a:noFill/>
+          <a:ln/>
+        </p:spPr>
+        <p:txBody>
+          <a:bodyPr wrap="square" lIns="0" tIns="0" rIns="0" bIns="0" rtlCol="0" anchor="ctr"/>
+          <a:lstStyle/>
+          <a:p>
+            <a:pPr indent="0" marL="0">
+              <a:buNone/>
+            </a:pPr>
+            <a:r>
+              <a:rPr lang="en-US" sz="3600" b="1" dirty="0">
+                <a:solidFill>
+                  <a:srgbClr val="14504B"/>
+                </a:solidFill>
+                <a:latin typeface="Yu Gothic" pitchFamily="34" charset="0"/>
+                <a:ea typeface="Yu Gothic" pitchFamily="34" charset="-122"/>
+                <a:cs typeface="Yu Gothic" pitchFamily="34" charset="-120"/>
+              </a:rPr>
+              <a:t>言えること、言えないこと</a:t>
+            </a:r>
+            <a:endParaRPr lang="en-US" sz="3600" dirty="0"/>
+          </a:p>
+        </p:txBody>
+      </p:sp>
+      <p:sp>
+        <p:nvSpPr>
+          <p:cNvPr id="3" name="Shape 1"/>
+          <p:cNvSpPr/>
+          <p:nvPr/>
+        </p:nvSpPr>
+        <p:spPr>
+          <a:xfrm>
+            <a:off x="731520" y="1965960"/>
+            <a:ext cx="5120640" cy="3200400"/>
+          </a:xfrm>
+          <a:prstGeom prst="roundRect">
+            <a:avLst>
+              <a:gd name="adj" fmla="val 2286"/>
+            </a:avLst>
+          </a:prstGeom>
+          <a:solidFill>
+            <a:srgbClr val="F1F6F5"/>
+          </a:solidFill>
+          <a:ln w="12700">
+            <a:solidFill>
+              <a:srgbClr val="F1F6F5"/>
+            </a:solidFill>
+            <a:prstDash val="solid"/>
+          </a:ln>
+        </p:spPr>
+      </p:sp>
+      <p:sp>
+        <p:nvSpPr>
+          <p:cNvPr id="4" name="Text 2"/>
+          <p:cNvSpPr/>
+          <p:nvPr/>
+        </p:nvSpPr>
+        <p:spPr>
+          <a:xfrm>
+            <a:off x="1051560" y="2194560"/>
+            <a:ext cx="3657600" cy="411480"/>
+          </a:xfrm>
+          <a:prstGeom prst="rect">
+            <a:avLst/>
+          </a:prstGeom>
+          <a:noFill/>
+          <a:ln/>
+        </p:spPr>
+        <p:txBody>
+          <a:bodyPr wrap="square" lIns="0" tIns="0" rIns="0" bIns="0" rtlCol="0" anchor="ctr"/>
+          <a:lstStyle/>
+          <a:p>
+            <a:pPr indent="0" marL="0">
+              <a:buNone/>
+            </a:pPr>
+            <a:r>
+              <a:rPr lang="en-US" sz="1900" b="1" dirty="0">
+                <a:solidFill>
+                  <a:srgbClr val="14504B"/>
+                </a:solidFill>
+                <a:latin typeface="Yu Gothic" pitchFamily="34" charset="0"/>
+                <a:ea typeface="Yu Gothic" pitchFamily="34" charset="-122"/>
+                <a:cs typeface="Yu Gothic" pitchFamily="34" charset="-120"/>
+              </a:rPr>
+              <a:t>言えること</a:t>
+            </a:r>
+            <a:endParaRPr lang="en-US" sz="1900" dirty="0"/>
+          </a:p>
+        </p:txBody>
+      </p:sp>
+      <p:sp>
+        <p:nvSpPr>
+          <p:cNvPr id="5" name="Text 3"/>
+          <p:cNvSpPr/>
+          <p:nvPr/>
+        </p:nvSpPr>
+        <p:spPr>
+          <a:xfrm>
+            <a:off x="1051560" y="2834640"/>
+            <a:ext cx="4663440" cy="868680"/>
+          </a:xfrm>
+          <a:prstGeom prst="rect">
+            <a:avLst/>
+          </a:prstGeom>
+          <a:noFill/>
+          <a:ln/>
+        </p:spPr>
+        <p:txBody>
+          <a:bodyPr wrap="square" lIns="0" tIns="0" rIns="0" bIns="0" rtlCol="0" anchor="ctr"/>
+          <a:lstStyle/>
+          <a:p>
+            <a:pPr indent="0" marL="0">
+              <a:lnSpc>
+                <a:spcPct val="125000"/>
+              </a:lnSpc>
+              <a:buNone/>
+            </a:pPr>
+            <a:r>
+              <a:rPr lang="en-US" sz="1500" dirty="0">
+                <a:solidFill>
+                  <a:srgbClr val="16211F"/>
+                </a:solidFill>
+                <a:latin typeface="Yu Gothic" pitchFamily="34" charset="0"/>
+                <a:ea typeface="Yu Gothic" pitchFamily="34" charset="-122"/>
+                <a:cs typeface="Yu Gothic" pitchFamily="34" charset="-120"/>
+              </a:rPr>
+              <a:t>1年間でBRIが増えた人は、</a:t>
+            </a:r>
+            <a:endParaRPr lang="en-US" sz="1500" dirty="0"/>
+          </a:p>
+          <a:p>
+            <a:pPr indent="0" marL="0">
+              <a:lnSpc>
+                <a:spcPct val="125000"/>
+              </a:lnSpc>
+              <a:buNone/>
+            </a:pPr>
+            <a:r>
+              <a:rPr lang="en-US" sz="1500" dirty="0">
+                <a:solidFill>
+                  <a:srgbClr val="16211F"/>
+                </a:solidFill>
+                <a:latin typeface="Yu Gothic" pitchFamily="34" charset="0"/>
+                <a:ea typeface="Yu Gothic" pitchFamily="34" charset="-122"/>
+                <a:cs typeface="Yu Gothic" pitchFamily="34" charset="-120"/>
+              </a:rPr>
+              <a:t>尿蛋白が新たに出やすかった</a:t>
+            </a:r>
+            <a:endParaRPr lang="en-US" sz="1500" dirty="0"/>
+          </a:p>
+        </p:txBody>
+      </p:sp>
+      <p:sp>
+        <p:nvSpPr>
+          <p:cNvPr id="6" name="Text 4"/>
+          <p:cNvSpPr/>
+          <p:nvPr/>
+        </p:nvSpPr>
+        <p:spPr>
+          <a:xfrm>
+            <a:off x="1051560" y="3931920"/>
+            <a:ext cx="4663440" cy="868680"/>
+          </a:xfrm>
+          <a:prstGeom prst="rect">
+            <a:avLst/>
+          </a:prstGeom>
+          <a:noFill/>
+          <a:ln/>
+        </p:spPr>
+        <p:txBody>
+          <a:bodyPr wrap="square" lIns="0" tIns="0" rIns="0" bIns="0" rtlCol="0" anchor="ctr"/>
+          <a:lstStyle/>
+          <a:p>
+            <a:pPr indent="0" marL="0">
+              <a:lnSpc>
+                <a:spcPct val="125000"/>
+              </a:lnSpc>
+              <a:buNone/>
+            </a:pPr>
+            <a:r>
+              <a:rPr lang="en-US" sz="1500" dirty="0">
+                <a:solidFill>
+                  <a:srgbClr val="16211F"/>
+                </a:solidFill>
+                <a:latin typeface="Yu Gothic" pitchFamily="34" charset="0"/>
+                <a:ea typeface="Yu Gothic" pitchFamily="34" charset="-122"/>
+                <a:cs typeface="Yu Gothic" pitchFamily="34" charset="-120"/>
+              </a:rPr>
+              <a:t>体重やBMIの変化を</a:t>
+            </a:r>
+            <a:endParaRPr lang="en-US" sz="1500" dirty="0"/>
+          </a:p>
+          <a:p>
+            <a:pPr indent="0" marL="0">
+              <a:lnSpc>
+                <a:spcPct val="125000"/>
+              </a:lnSpc>
+              <a:buNone/>
+            </a:pPr>
+            <a:r>
+              <a:rPr lang="en-US" sz="1500" dirty="0">
+                <a:solidFill>
+                  <a:srgbClr val="16211F"/>
+                </a:solidFill>
+                <a:latin typeface="Yu Gothic" pitchFamily="34" charset="0"/>
+                <a:ea typeface="Yu Gothic" pitchFamily="34" charset="-122"/>
+                <a:cs typeface="Yu Gothic" pitchFamily="34" charset="-120"/>
+              </a:rPr>
+              <a:t>考慮しても傾向は残った</a:t>
+            </a:r>
+            <a:endParaRPr lang="en-US" sz="1500" dirty="0"/>
+          </a:p>
+        </p:txBody>
+      </p:sp>
+      <p:sp>
+        <p:nvSpPr>
+          <p:cNvPr id="7" name="Shape 5"/>
+          <p:cNvSpPr/>
+          <p:nvPr/>
+        </p:nvSpPr>
+        <p:spPr>
+          <a:xfrm>
+            <a:off x="6400800" y="1965960"/>
+            <a:ext cx="5029200" cy="3200400"/>
+          </a:xfrm>
+          <a:prstGeom prst="roundRect">
+            <a:avLst>
+              <a:gd name="adj" fmla="val 2286"/>
+            </a:avLst>
+          </a:prstGeom>
+          <a:solidFill>
+            <a:srgbClr val="F7F2EC"/>
+          </a:solidFill>
+          <a:ln w="12700">
+            <a:solidFill>
+              <a:srgbClr val="F7F2EC"/>
+            </a:solidFill>
+            <a:prstDash val="solid"/>
+          </a:ln>
+        </p:spPr>
+      </p:sp>
+      <p:sp>
+        <p:nvSpPr>
+          <p:cNvPr id="8" name="Text 6"/>
+          <p:cNvSpPr/>
+          <p:nvPr/>
+        </p:nvSpPr>
+        <p:spPr>
+          <a:xfrm>
+            <a:off x="6720840" y="2194560"/>
+            <a:ext cx="3657600" cy="411480"/>
+          </a:xfrm>
+          <a:prstGeom prst="rect">
+            <a:avLst/>
+          </a:prstGeom>
+          <a:noFill/>
+          <a:ln/>
+        </p:spPr>
+        <p:txBody>
+          <a:bodyPr wrap="square" lIns="0" tIns="0" rIns="0" bIns="0" rtlCol="0" anchor="ctr"/>
+          <a:lstStyle/>
+          <a:p>
+            <a:pPr indent="0" marL="0">
+              <a:buNone/>
+            </a:pPr>
+            <a:r>
+              <a:rPr lang="en-US" sz="1900" b="1" dirty="0">
+                <a:solidFill>
+                  <a:srgbClr val="8A6F52"/>
+                </a:solidFill>
+                <a:latin typeface="Yu Gothic" pitchFamily="34" charset="0"/>
+                <a:ea typeface="Yu Gothic" pitchFamily="34" charset="-122"/>
+                <a:cs typeface="Yu Gothic" pitchFamily="34" charset="-120"/>
+              </a:rPr>
+              <a:t>言えないこと</a:t>
+            </a:r>
+            <a:endParaRPr lang="en-US" sz="1900" dirty="0"/>
+          </a:p>
+        </p:txBody>
+      </p:sp>
+      <p:sp>
+        <p:nvSpPr>
+          <p:cNvPr id="9" name="Text 7"/>
+          <p:cNvSpPr/>
+          <p:nvPr/>
+        </p:nvSpPr>
+        <p:spPr>
+          <a:xfrm>
+            <a:off x="6720840" y="2697480"/>
+            <a:ext cx="4572000" cy="621792"/>
+          </a:xfrm>
+          <a:prstGeom prst="rect">
+            <a:avLst/>
+          </a:prstGeom>
+          <a:noFill/>
+          <a:ln/>
+        </p:spPr>
+        <p:txBody>
+          <a:bodyPr wrap="square" lIns="0" tIns="0" rIns="0" bIns="0" rtlCol="0" anchor="ctr"/>
+          <a:lstStyle/>
+          <a:p>
+            <a:pPr indent="0" marL="0">
+              <a:lnSpc>
+                <a:spcPct val="115000"/>
+              </a:lnSpc>
+              <a:buNone/>
+            </a:pPr>
+            <a:r>
+              <a:rPr lang="en-US" sz="1300" dirty="0">
+                <a:solidFill>
+                  <a:srgbClr val="5A5044"/>
+                </a:solidFill>
+                <a:latin typeface="Yu Gothic" pitchFamily="34" charset="0"/>
+                <a:ea typeface="Yu Gothic" pitchFamily="34" charset="-122"/>
+                <a:cs typeface="Yu Gothic" pitchFamily="34" charset="-120"/>
+              </a:rPr>
+              <a:t>BRIを下げれば腎臓が守れる、</a:t>
+            </a:r>
+            <a:endParaRPr lang="en-US" sz="1300" dirty="0"/>
+          </a:p>
+          <a:p>
+            <a:pPr indent="0" marL="0">
+              <a:lnSpc>
+                <a:spcPct val="115000"/>
+              </a:lnSpc>
+              <a:buNone/>
+            </a:pPr>
+            <a:r>
+              <a:rPr lang="en-US" sz="1300" dirty="0">
+                <a:solidFill>
+                  <a:srgbClr val="5A5044"/>
+                </a:solidFill>
+                <a:latin typeface="Yu Gothic" pitchFamily="34" charset="0"/>
+                <a:ea typeface="Yu Gothic" pitchFamily="34" charset="-122"/>
+                <a:cs typeface="Yu Gothic" pitchFamily="34" charset="-120"/>
+              </a:rPr>
+              <a:t>という因果関係</a:t>
+            </a:r>
+            <a:endParaRPr lang="en-US" sz="1300" dirty="0"/>
+          </a:p>
+        </p:txBody>
+      </p:sp>
+      <p:sp>
+        <p:nvSpPr>
+          <p:cNvPr id="10" name="Text 8"/>
+          <p:cNvSpPr/>
+          <p:nvPr/>
+        </p:nvSpPr>
+        <p:spPr>
+          <a:xfrm>
+            <a:off x="6720840" y="3355848"/>
+            <a:ext cx="4572000" cy="621792"/>
+          </a:xfrm>
+          <a:prstGeom prst="rect">
+            <a:avLst/>
+          </a:prstGeom>
+          <a:noFill/>
+          <a:ln/>
+        </p:spPr>
+        <p:txBody>
+          <a:bodyPr wrap="square" lIns="0" tIns="0" rIns="0" bIns="0" rtlCol="0" anchor="ctr"/>
+          <a:lstStyle/>
+          <a:p>
+            <a:pPr indent="0" marL="0">
+              <a:lnSpc>
+                <a:spcPct val="115000"/>
+              </a:lnSpc>
+              <a:buNone/>
+            </a:pPr>
+            <a:r>
+              <a:rPr lang="en-US" sz="1300" dirty="0">
+                <a:solidFill>
+                  <a:srgbClr val="5A5044"/>
+                </a:solidFill>
+                <a:latin typeface="Yu Gothic" pitchFamily="34" charset="0"/>
+                <a:ea typeface="Yu Gothic" pitchFamily="34" charset="-122"/>
+                <a:cs typeface="Yu Gothic" pitchFamily="34" charset="-120"/>
+              </a:rPr>
+              <a:t>「減った人も危ない」とは</a:t>
+            </a:r>
+            <a:endParaRPr lang="en-US" sz="1300" dirty="0"/>
+          </a:p>
+          <a:p>
+            <a:pPr indent="0" marL="0">
+              <a:lnSpc>
+                <a:spcPct val="115000"/>
+              </a:lnSpc>
+              <a:buNone/>
+            </a:pPr>
+            <a:r>
+              <a:rPr lang="en-US" sz="1300" dirty="0">
+                <a:solidFill>
+                  <a:srgbClr val="5A5044"/>
+                </a:solidFill>
+                <a:latin typeface="Yu Gothic" pitchFamily="34" charset="0"/>
+                <a:ea typeface="Yu Gothic" pitchFamily="34" charset="-122"/>
+                <a:cs typeface="Yu Gothic" pitchFamily="34" charset="-120"/>
+              </a:rPr>
+              <a:t>言えない（差が確かめられていない）</a:t>
+            </a:r>
+            <a:endParaRPr lang="en-US" sz="1300" dirty="0"/>
+          </a:p>
+        </p:txBody>
+      </p:sp>
+      <p:sp>
+        <p:nvSpPr>
+          <p:cNvPr id="11" name="Text 9"/>
+          <p:cNvSpPr/>
+          <p:nvPr/>
+        </p:nvSpPr>
+        <p:spPr>
+          <a:xfrm>
+            <a:off x="6720840" y="4014216"/>
+            <a:ext cx="4572000" cy="621792"/>
+          </a:xfrm>
+          <a:prstGeom prst="rect">
+            <a:avLst/>
+          </a:prstGeom>
+          <a:noFill/>
+          <a:ln/>
+        </p:spPr>
+        <p:txBody>
+          <a:bodyPr wrap="square" lIns="0" tIns="0" rIns="0" bIns="0" rtlCol="0" anchor="ctr"/>
+          <a:lstStyle/>
+          <a:p>
+            <a:pPr indent="0" marL="0">
+              <a:lnSpc>
+                <a:spcPct val="115000"/>
+              </a:lnSpc>
+              <a:buNone/>
+            </a:pPr>
+            <a:r>
+              <a:rPr lang="en-US" sz="1300" dirty="0">
+                <a:solidFill>
+                  <a:srgbClr val="5A5044"/>
+                </a:solidFill>
+                <a:latin typeface="Yu Gothic" pitchFamily="34" charset="0"/>
+                <a:ea typeface="Yu Gothic" pitchFamily="34" charset="-122"/>
+                <a:cs typeface="Yu Gothic" pitchFamily="34" charset="-120"/>
+              </a:rPr>
+              <a:t>痩せた理由が生活改善なのか、</a:t>
+            </a:r>
+            <a:endParaRPr lang="en-US" sz="1300" dirty="0"/>
+          </a:p>
+          <a:p>
+            <a:pPr indent="0" marL="0">
+              <a:lnSpc>
+                <a:spcPct val="115000"/>
+              </a:lnSpc>
+              <a:buNone/>
+            </a:pPr>
+            <a:r>
+              <a:rPr lang="en-US" sz="1300" dirty="0">
+                <a:solidFill>
+                  <a:srgbClr val="5A5044"/>
+                </a:solidFill>
+                <a:latin typeface="Yu Gothic" pitchFamily="34" charset="0"/>
+                <a:ea typeface="Yu Gothic" pitchFamily="34" charset="-122"/>
+                <a:cs typeface="Yu Gothic" pitchFamily="34" charset="-120"/>
+              </a:rPr>
+              <a:t>病気や低栄養なのかは区別できない</a:t>
+            </a:r>
+            <a:endParaRPr lang="en-US" sz="1300" dirty="0"/>
+          </a:p>
+        </p:txBody>
+      </p:sp>
+      <p:sp>
+        <p:nvSpPr>
+          <p:cNvPr id="12" name="Text 10"/>
+          <p:cNvSpPr/>
+          <p:nvPr/>
+        </p:nvSpPr>
+        <p:spPr>
+          <a:xfrm>
+            <a:off x="6720840" y="4672584"/>
+            <a:ext cx="4572000" cy="621792"/>
+          </a:xfrm>
+          <a:prstGeom prst="rect">
+            <a:avLst/>
+          </a:prstGeom>
+          <a:noFill/>
+          <a:ln/>
+        </p:spPr>
+        <p:txBody>
+          <a:bodyPr wrap="square" lIns="0" tIns="0" rIns="0" bIns="0" rtlCol="0" anchor="ctr"/>
+          <a:lstStyle/>
+          <a:p>
+            <a:pPr indent="0" marL="0">
+              <a:lnSpc>
+                <a:spcPct val="115000"/>
+              </a:lnSpc>
+              <a:buNone/>
+            </a:pPr>
+            <a:r>
+              <a:rPr lang="en-US" sz="1300" dirty="0">
+                <a:solidFill>
+                  <a:srgbClr val="5A5044"/>
+                </a:solidFill>
+                <a:latin typeface="Yu Gothic" pitchFamily="34" charset="0"/>
+                <a:ea typeface="Yu Gothic" pitchFamily="34" charset="-122"/>
+                <a:cs typeface="Yu Gothic" pitchFamily="34" charset="-120"/>
+              </a:rPr>
+              <a:t>1年・延岡市の受診者が対象。</a:t>
+            </a:r>
+            <a:endParaRPr lang="en-US" sz="1300" dirty="0"/>
+          </a:p>
+          <a:p>
+            <a:pPr indent="0" marL="0">
+              <a:lnSpc>
+                <a:spcPct val="115000"/>
+              </a:lnSpc>
+              <a:buNone/>
+            </a:pPr>
+            <a:r>
+              <a:rPr lang="en-US" sz="1300" dirty="0">
+                <a:solidFill>
+                  <a:srgbClr val="5A5044"/>
+                </a:solidFill>
+                <a:latin typeface="Yu Gothic" pitchFamily="34" charset="0"/>
+                <a:ea typeface="Yu Gothic" pitchFamily="34" charset="-122"/>
+                <a:cs typeface="Yu Gothic" pitchFamily="34" charset="-120"/>
+              </a:rPr>
+              <a:t>そのまま他地域には広げられない</a:t>
+            </a:r>
+            <a:endParaRPr lang="en-US" sz="1300" dirty="0"/>
+          </a:p>
+        </p:txBody>
+      </p:sp>
+      <p:sp>
+        <p:nvSpPr>
+          <p:cNvPr id="13" name="Text 11"/>
+          <p:cNvSpPr/>
+          <p:nvPr/>
+        </p:nvSpPr>
+        <p:spPr>
+          <a:xfrm>
+            <a:off x="731520" y="5440680"/>
+            <a:ext cx="10698480" cy="411480"/>
+          </a:xfrm>
+          <a:prstGeom prst="rect">
+            <a:avLst/>
+          </a:prstGeom>
+          <a:noFill/>
+          <a:ln/>
+        </p:spPr>
+        <p:txBody>
+          <a:bodyPr wrap="square" lIns="0" tIns="0" rIns="0" bIns="0" rtlCol="0" anchor="ctr"/>
+          <a:lstStyle/>
+          <a:p>
+            <a:pPr indent="0" marL="0">
+              <a:buNone/>
+            </a:pPr>
+            <a:r>
+              <a:rPr lang="en-US" sz="1500" i="1" dirty="0">
+                <a:solidFill>
+                  <a:srgbClr val="5C6B68"/>
+                </a:solidFill>
+                <a:latin typeface="Yu Gothic" pitchFamily="34" charset="0"/>
+                <a:ea typeface="Yu Gothic" pitchFamily="34" charset="-122"/>
+                <a:cs typeface="Yu Gothic" pitchFamily="34" charset="-120"/>
+              </a:rPr>
+              <a:t>次に必要なのは、複数地域・長期の追跡と、介入して確かめる研究です。</a:t>
+            </a:r>
+            <a:endParaRPr lang="en-US" sz="1500" dirty="0"/>
+          </a:p>
+        </p:txBody>
+      </p:sp>
+    </p:spTree>
+  </p:cSld>
+  <p:clrMapOvr>
+    <a:masterClrMapping/>
+  </p:clrMapOvr>
+</p:sld>
+</file>
+
+<file path=ppt/slides/slide23.xml><?xml version="1.0" encoding="utf-8"?>
+<p:sld xmlns:a="http://schemas.openxmlformats.org/drawingml/2006/main" xmlns:r="http://schemas.openxmlformats.org/officeDocument/2006/relationships" xmlns:p="http://schemas.openxmlformats.org/presentationml/2006/main">
+  <p:cSld name="Slide 23">
     <p:bg>
       <p:bgPr>
         <a:solidFill>

--- a/PharmaCare_紹介資料.pptx
+++ b/PharmaCare_紹介資料.pptx
@@ -16822,7 +16822,7 @@
                 <a:ea typeface="Yu Gothic" pitchFamily="34" charset="-122"/>
                 <a:cs typeface="Yu Gothic" pitchFamily="34" charset="-120"/>
               </a:rPr>
-              <a:t>つなぐと、その人に合わせられる</a:t>
+              <a:t>なぜ、今つくるのか</a:t>
             </a:r>
             <a:endParaRPr lang="en-US" sz="3600" dirty="0"/>
           </a:p>
@@ -16861,7 +16861,7 @@
                 <a:ea typeface="Yu Gothic" pitchFamily="34" charset="-122"/>
                 <a:cs typeface="Yu Gothic" pitchFamily="34" charset="-120"/>
               </a:rPr>
-              <a:t>同じ画面に薬と体調があるから、一般論ではなく目の前の人の話にできる</a:t>
+              <a:t>制度の流れが、施設と薬局を近づけている</a:t>
             </a:r>
             <a:endParaRPr lang="en-US" sz="1600" dirty="0"/>
           </a:p>
@@ -16875,12 +16875,547 @@
         </p:nvSpPr>
         <p:spPr>
           <a:xfrm>
-            <a:off x="731520" y="1920240"/>
-            <a:ext cx="3413455" cy="2651760"/>
+            <a:off x="731520" y="1874520"/>
+            <a:ext cx="475488" cy="475488"/>
+          </a:xfrm>
+          <a:prstGeom prst="ellipse">
+            <a:avLst/>
+          </a:prstGeom>
+          <a:solidFill>
+            <a:srgbClr val="3E8E84"/>
+          </a:solidFill>
+          <a:ln w="12700">
+            <a:solidFill>
+              <a:srgbClr val="3E8E84"/>
+            </a:solidFill>
+            <a:prstDash val="solid"/>
+          </a:ln>
+        </p:spPr>
+      </p:sp>
+      <p:sp>
+        <p:nvSpPr>
+          <p:cNvPr id="5" name="Text 3"/>
+          <p:cNvSpPr/>
+          <p:nvPr/>
+        </p:nvSpPr>
+        <p:spPr>
+          <a:xfrm>
+            <a:off x="731520" y="1874520"/>
+            <a:ext cx="475488" cy="475488"/>
+          </a:xfrm>
+          <a:prstGeom prst="rect">
+            <a:avLst/>
+          </a:prstGeom>
+          <a:noFill/>
+          <a:ln/>
+        </p:spPr>
+        <p:txBody>
+          <a:bodyPr wrap="square" lIns="0" tIns="0" rIns="0" bIns="0" rtlCol="0" anchor="ctr"/>
+          <a:lstStyle/>
+          <a:p>
+            <a:pPr algn="ctr" indent="0" marL="0">
+              <a:buNone/>
+            </a:pPr>
+            <a:r>
+              <a:rPr lang="en-US" sz="1500" b="1" dirty="0">
+                <a:solidFill>
+                  <a:srgbClr val="FFFFFF"/>
+                </a:solidFill>
+                <a:latin typeface="Yu Gothic" pitchFamily="34" charset="0"/>
+                <a:ea typeface="Yu Gothic" pitchFamily="34" charset="-122"/>
+                <a:cs typeface="Yu Gothic" pitchFamily="34" charset="-120"/>
+              </a:rPr>
+              <a:t>1</a:t>
+            </a:r>
+            <a:endParaRPr lang="en-US" sz="1500" dirty="0"/>
+          </a:p>
+        </p:txBody>
+      </p:sp>
+      <p:sp>
+        <p:nvSpPr>
+          <p:cNvPr id="6" name="Text 4"/>
+          <p:cNvSpPr/>
+          <p:nvPr/>
+        </p:nvSpPr>
+        <p:spPr>
+          <a:xfrm>
+            <a:off x="1417320" y="1828800"/>
+            <a:ext cx="9966960" cy="411480"/>
+          </a:xfrm>
+          <a:prstGeom prst="rect">
+            <a:avLst/>
+          </a:prstGeom>
+          <a:noFill/>
+          <a:ln/>
+        </p:spPr>
+        <p:txBody>
+          <a:bodyPr wrap="square" lIns="0" tIns="0" rIns="0" bIns="0" rtlCol="0" anchor="ctr"/>
+          <a:lstStyle/>
+          <a:p>
+            <a:pPr indent="0" marL="0">
+              <a:buNone/>
+            </a:pPr>
+            <a:r>
+              <a:rPr lang="en-US" sz="1800" b="1" dirty="0">
+                <a:solidFill>
+                  <a:srgbClr val="14504B"/>
+                </a:solidFill>
+                <a:latin typeface="Yu Gothic" pitchFamily="34" charset="0"/>
+                <a:ea typeface="Yu Gothic" pitchFamily="34" charset="-122"/>
+                <a:cs typeface="Yu Gothic" pitchFamily="34" charset="-120"/>
+              </a:rPr>
+              <a:t>在宅・施設への訪問が国の方向</a:t>
+            </a:r>
+            <a:endParaRPr lang="en-US" sz="1800" dirty="0"/>
+          </a:p>
+        </p:txBody>
+      </p:sp>
+      <p:sp>
+        <p:nvSpPr>
+          <p:cNvPr id="7" name="Text 5"/>
+          <p:cNvSpPr/>
+          <p:nvPr/>
+        </p:nvSpPr>
+        <p:spPr>
+          <a:xfrm>
+            <a:off x="1417320" y="2240280"/>
+            <a:ext cx="9966960" cy="822960"/>
+          </a:xfrm>
+          <a:prstGeom prst="rect">
+            <a:avLst/>
+          </a:prstGeom>
+          <a:noFill/>
+          <a:ln/>
+        </p:spPr>
+        <p:txBody>
+          <a:bodyPr wrap="square" lIns="0" tIns="0" rIns="0" bIns="0" rtlCol="0" anchor="ctr"/>
+          <a:lstStyle/>
+          <a:p>
+            <a:pPr indent="0" marL="0">
+              <a:lnSpc>
+                <a:spcPct val="120000"/>
+              </a:lnSpc>
+              <a:buNone/>
+            </a:pPr>
+            <a:r>
+              <a:rPr lang="en-US" sz="1350" dirty="0">
+                <a:solidFill>
+                  <a:srgbClr val="16211F"/>
+                </a:solidFill>
+                <a:latin typeface="Yu Gothic" pitchFamily="34" charset="0"/>
+                <a:ea typeface="Yu Gothic" pitchFamily="34" charset="-122"/>
+                <a:cs typeface="Yu Gothic" pitchFamily="34" charset="-120"/>
+              </a:rPr>
+              <a:t>薬剤師の役割は「薬を渡す」から「渡したあとを見る」へ移っている。</a:t>
+            </a:r>
+            <a:endParaRPr lang="en-US" sz="1350" dirty="0"/>
+          </a:p>
+          <a:p>
+            <a:pPr indent="0" marL="0">
+              <a:lnSpc>
+                <a:spcPct val="120000"/>
+              </a:lnSpc>
+              <a:buNone/>
+            </a:pPr>
+            <a:r>
+              <a:rPr lang="en-US" sz="1350" dirty="0">
+                <a:solidFill>
+                  <a:srgbClr val="16211F"/>
+                </a:solidFill>
+                <a:latin typeface="Yu Gothic" pitchFamily="34" charset="0"/>
+                <a:ea typeface="Yu Gothic" pitchFamily="34" charset="-122"/>
+                <a:cs typeface="Yu Gothic" pitchFamily="34" charset="-120"/>
+              </a:rPr>
+              <a:t>施設に足を運ぶ機会は今後さらに増える。</a:t>
+            </a:r>
+            <a:endParaRPr lang="en-US" sz="1350" dirty="0"/>
+          </a:p>
+        </p:txBody>
+      </p:sp>
+      <p:sp>
+        <p:nvSpPr>
+          <p:cNvPr id="8" name="Shape 6"/>
+          <p:cNvSpPr/>
+          <p:nvPr/>
+        </p:nvSpPr>
+        <p:spPr>
+          <a:xfrm>
+            <a:off x="731520" y="3172968"/>
+            <a:ext cx="475488" cy="475488"/>
+          </a:xfrm>
+          <a:prstGeom prst="ellipse">
+            <a:avLst/>
+          </a:prstGeom>
+          <a:solidFill>
+            <a:srgbClr val="3E8E84"/>
+          </a:solidFill>
+          <a:ln w="12700">
+            <a:solidFill>
+              <a:srgbClr val="3E8E84"/>
+            </a:solidFill>
+            <a:prstDash val="solid"/>
+          </a:ln>
+        </p:spPr>
+      </p:sp>
+      <p:sp>
+        <p:nvSpPr>
+          <p:cNvPr id="9" name="Text 7"/>
+          <p:cNvSpPr/>
+          <p:nvPr/>
+        </p:nvSpPr>
+        <p:spPr>
+          <a:xfrm>
+            <a:off x="731520" y="3172968"/>
+            <a:ext cx="475488" cy="475488"/>
+          </a:xfrm>
+          <a:prstGeom prst="rect">
+            <a:avLst/>
+          </a:prstGeom>
+          <a:noFill/>
+          <a:ln/>
+        </p:spPr>
+        <p:txBody>
+          <a:bodyPr wrap="square" lIns="0" tIns="0" rIns="0" bIns="0" rtlCol="0" anchor="ctr"/>
+          <a:lstStyle/>
+          <a:p>
+            <a:pPr algn="ctr" indent="0" marL="0">
+              <a:buNone/>
+            </a:pPr>
+            <a:r>
+              <a:rPr lang="en-US" sz="1500" b="1" dirty="0">
+                <a:solidFill>
+                  <a:srgbClr val="FFFFFF"/>
+                </a:solidFill>
+                <a:latin typeface="Yu Gothic" pitchFamily="34" charset="0"/>
+                <a:ea typeface="Yu Gothic" pitchFamily="34" charset="-122"/>
+                <a:cs typeface="Yu Gothic" pitchFamily="34" charset="-120"/>
+              </a:rPr>
+              <a:t>2</a:t>
+            </a:r>
+            <a:endParaRPr lang="en-US" sz="1500" dirty="0"/>
+          </a:p>
+        </p:txBody>
+      </p:sp>
+      <p:sp>
+        <p:nvSpPr>
+          <p:cNvPr id="10" name="Text 8"/>
+          <p:cNvSpPr/>
+          <p:nvPr/>
+        </p:nvSpPr>
+        <p:spPr>
+          <a:xfrm>
+            <a:off x="1417320" y="3127248"/>
+            <a:ext cx="9966960" cy="411480"/>
+          </a:xfrm>
+          <a:prstGeom prst="rect">
+            <a:avLst/>
+          </a:prstGeom>
+          <a:noFill/>
+          <a:ln/>
+        </p:spPr>
+        <p:txBody>
+          <a:bodyPr wrap="square" lIns="0" tIns="0" rIns="0" bIns="0" rtlCol="0" anchor="ctr"/>
+          <a:lstStyle/>
+          <a:p>
+            <a:pPr indent="0" marL="0">
+              <a:buNone/>
+            </a:pPr>
+            <a:r>
+              <a:rPr lang="en-US" sz="1800" b="1" dirty="0">
+                <a:solidFill>
+                  <a:srgbClr val="14504B"/>
+                </a:solidFill>
+                <a:latin typeface="Yu Gothic" pitchFamily="34" charset="0"/>
+                <a:ea typeface="Yu Gothic" pitchFamily="34" charset="-122"/>
+                <a:cs typeface="Yu Gothic" pitchFamily="34" charset="-120"/>
+              </a:rPr>
+              <a:t>門前から面へ</a:t>
+            </a:r>
+            <a:endParaRPr lang="en-US" sz="1800" dirty="0"/>
+          </a:p>
+        </p:txBody>
+      </p:sp>
+      <p:sp>
+        <p:nvSpPr>
+          <p:cNvPr id="11" name="Text 9"/>
+          <p:cNvSpPr/>
+          <p:nvPr/>
+        </p:nvSpPr>
+        <p:spPr>
+          <a:xfrm>
+            <a:off x="1417320" y="3538728"/>
+            <a:ext cx="9966960" cy="822960"/>
+          </a:xfrm>
+          <a:prstGeom prst="rect">
+            <a:avLst/>
+          </a:prstGeom>
+          <a:noFill/>
+          <a:ln/>
+        </p:spPr>
+        <p:txBody>
+          <a:bodyPr wrap="square" lIns="0" tIns="0" rIns="0" bIns="0" rtlCol="0" anchor="ctr"/>
+          <a:lstStyle/>
+          <a:p>
+            <a:pPr indent="0" marL="0">
+              <a:lnSpc>
+                <a:spcPct val="120000"/>
+              </a:lnSpc>
+              <a:buNone/>
+            </a:pPr>
+            <a:r>
+              <a:rPr lang="en-US" sz="1350" dirty="0">
+                <a:solidFill>
+                  <a:srgbClr val="16211F"/>
+                </a:solidFill>
+                <a:latin typeface="Yu Gothic" pitchFamily="34" charset="0"/>
+                <a:ea typeface="Yu Gothic" pitchFamily="34" charset="-122"/>
+                <a:cs typeface="Yu Gothic" pitchFamily="34" charset="-120"/>
+              </a:rPr>
+              <a:t>特定の病院の前に構える薬局から、地域のどの処方箋も受ける薬局へ。</a:t>
+            </a:r>
+            <a:endParaRPr lang="en-US" sz="1350" dirty="0"/>
+          </a:p>
+          <a:p>
+            <a:pPr indent="0" marL="0">
+              <a:lnSpc>
+                <a:spcPct val="120000"/>
+              </a:lnSpc>
+              <a:buNone/>
+            </a:pPr>
+            <a:r>
+              <a:rPr lang="en-US" sz="1350" dirty="0">
+                <a:solidFill>
+                  <a:srgbClr val="16211F"/>
+                </a:solidFill>
+                <a:latin typeface="Yu Gothic" pitchFamily="34" charset="0"/>
+                <a:ea typeface="Yu Gothic" pitchFamily="34" charset="-122"/>
+                <a:cs typeface="Yu Gothic" pitchFamily="34" charset="-120"/>
+              </a:rPr>
+              <a:t>処方元に電話すれば済んでいたことが、済まなくなる。</a:t>
+            </a:r>
+            <a:endParaRPr lang="en-US" sz="1350" dirty="0"/>
+          </a:p>
+          <a:p>
+            <a:pPr indent="0" marL="0">
+              <a:lnSpc>
+                <a:spcPct val="120000"/>
+              </a:lnSpc>
+              <a:buNone/>
+            </a:pPr>
+            <a:r>
+              <a:rPr lang="en-US" sz="1350" dirty="0">
+                <a:solidFill>
+                  <a:srgbClr val="16211F"/>
+                </a:solidFill>
+                <a:latin typeface="Yu Gothic" pitchFamily="34" charset="0"/>
+                <a:ea typeface="Yu Gothic" pitchFamily="34" charset="-122"/>
+                <a:cs typeface="Yu Gothic" pitchFamily="34" charset="-120"/>
+              </a:rPr>
+              <a:t>患者の薬を薬局側で一元的に把握する必要が出てくる。</a:t>
+            </a:r>
+            <a:endParaRPr lang="en-US" sz="1350" dirty="0"/>
+          </a:p>
+        </p:txBody>
+      </p:sp>
+      <p:sp>
+        <p:nvSpPr>
+          <p:cNvPr id="12" name="Shape 10"/>
+          <p:cNvSpPr/>
+          <p:nvPr/>
+        </p:nvSpPr>
+        <p:spPr>
+          <a:xfrm>
+            <a:off x="731520" y="4471416"/>
+            <a:ext cx="475488" cy="475488"/>
+          </a:xfrm>
+          <a:prstGeom prst="ellipse">
+            <a:avLst/>
+          </a:prstGeom>
+          <a:solidFill>
+            <a:srgbClr val="3E8E84"/>
+          </a:solidFill>
+          <a:ln w="12700">
+            <a:solidFill>
+              <a:srgbClr val="3E8E84"/>
+            </a:solidFill>
+            <a:prstDash val="solid"/>
+          </a:ln>
+        </p:spPr>
+      </p:sp>
+      <p:sp>
+        <p:nvSpPr>
+          <p:cNvPr id="13" name="Text 11"/>
+          <p:cNvSpPr/>
+          <p:nvPr/>
+        </p:nvSpPr>
+        <p:spPr>
+          <a:xfrm>
+            <a:off x="731520" y="4471416"/>
+            <a:ext cx="475488" cy="475488"/>
+          </a:xfrm>
+          <a:prstGeom prst="rect">
+            <a:avLst/>
+          </a:prstGeom>
+          <a:noFill/>
+          <a:ln/>
+        </p:spPr>
+        <p:txBody>
+          <a:bodyPr wrap="square" lIns="0" tIns="0" rIns="0" bIns="0" rtlCol="0" anchor="ctr"/>
+          <a:lstStyle/>
+          <a:p>
+            <a:pPr algn="ctr" indent="0" marL="0">
+              <a:buNone/>
+            </a:pPr>
+            <a:r>
+              <a:rPr lang="en-US" sz="1500" b="1" dirty="0">
+                <a:solidFill>
+                  <a:srgbClr val="FFFFFF"/>
+                </a:solidFill>
+                <a:latin typeface="Yu Gothic" pitchFamily="34" charset="0"/>
+                <a:ea typeface="Yu Gothic" pitchFamily="34" charset="-122"/>
+                <a:cs typeface="Yu Gothic" pitchFamily="34" charset="-120"/>
+              </a:rPr>
+              <a:t>3</a:t>
+            </a:r>
+            <a:endParaRPr lang="en-US" sz="1500" dirty="0"/>
+          </a:p>
+        </p:txBody>
+      </p:sp>
+      <p:sp>
+        <p:nvSpPr>
+          <p:cNvPr id="14" name="Text 12"/>
+          <p:cNvSpPr/>
+          <p:nvPr/>
+        </p:nvSpPr>
+        <p:spPr>
+          <a:xfrm>
+            <a:off x="1417320" y="4425696"/>
+            <a:ext cx="9966960" cy="411480"/>
+          </a:xfrm>
+          <a:prstGeom prst="rect">
+            <a:avLst/>
+          </a:prstGeom>
+          <a:noFill/>
+          <a:ln/>
+        </p:spPr>
+        <p:txBody>
+          <a:bodyPr wrap="square" lIns="0" tIns="0" rIns="0" bIns="0" rtlCol="0" anchor="ctr"/>
+          <a:lstStyle/>
+          <a:p>
+            <a:pPr indent="0" marL="0">
+              <a:buNone/>
+            </a:pPr>
+            <a:r>
+              <a:rPr lang="en-US" sz="1800" b="1" dirty="0">
+                <a:solidFill>
+                  <a:srgbClr val="14504B"/>
+                </a:solidFill>
+                <a:latin typeface="Yu Gothic" pitchFamily="34" charset="0"/>
+                <a:ea typeface="Yu Gothic" pitchFamily="34" charset="-122"/>
+                <a:cs typeface="Yu Gothic" pitchFamily="34" charset="-120"/>
+              </a:rPr>
+              <a:t>服薬期間中のフォローアップは、すでに義務</a:t>
+            </a:r>
+            <a:endParaRPr lang="en-US" sz="1800" dirty="0"/>
+          </a:p>
+        </p:txBody>
+      </p:sp>
+      <p:sp>
+        <p:nvSpPr>
+          <p:cNvPr id="15" name="Text 13"/>
+          <p:cNvSpPr/>
+          <p:nvPr/>
+        </p:nvSpPr>
+        <p:spPr>
+          <a:xfrm>
+            <a:off x="1417320" y="4837176"/>
+            <a:ext cx="9966960" cy="822960"/>
+          </a:xfrm>
+          <a:prstGeom prst="rect">
+            <a:avLst/>
+          </a:prstGeom>
+          <a:noFill/>
+          <a:ln/>
+        </p:spPr>
+        <p:txBody>
+          <a:bodyPr wrap="square" lIns="0" tIns="0" rIns="0" bIns="0" rtlCol="0" anchor="ctr"/>
+          <a:lstStyle/>
+          <a:p>
+            <a:pPr indent="0" marL="0">
+              <a:lnSpc>
+                <a:spcPct val="120000"/>
+              </a:lnSpc>
+              <a:buNone/>
+            </a:pPr>
+            <a:r>
+              <a:rPr lang="en-US" sz="1350" dirty="0">
+                <a:solidFill>
+                  <a:srgbClr val="16211F"/>
+                </a:solidFill>
+                <a:latin typeface="Yu Gothic" pitchFamily="34" charset="0"/>
+                <a:ea typeface="Yu Gothic" pitchFamily="34" charset="-122"/>
+                <a:cs typeface="Yu Gothic" pitchFamily="34" charset="-120"/>
+              </a:rPr>
+              <a:t>2020年9月施行の改正薬機法・薬剤師法で、渡したあとの服薬状況を</a:t>
+            </a:r>
+            <a:endParaRPr lang="en-US" sz="1350" dirty="0"/>
+          </a:p>
+          <a:p>
+            <a:pPr indent="0" marL="0">
+              <a:lnSpc>
+                <a:spcPct val="120000"/>
+              </a:lnSpc>
+              <a:buNone/>
+            </a:pPr>
+            <a:r>
+              <a:rPr lang="en-US" sz="1350" dirty="0">
+                <a:solidFill>
+                  <a:srgbClr val="16211F"/>
+                </a:solidFill>
+                <a:latin typeface="Yu Gothic" pitchFamily="34" charset="0"/>
+                <a:ea typeface="Yu Gothic" pitchFamily="34" charset="-122"/>
+                <a:cs typeface="Yu Gothic" pitchFamily="34" charset="-120"/>
+              </a:rPr>
+              <a:t>継続的に把握することが薬剤師の責務になった。</a:t>
+            </a:r>
+            <a:endParaRPr lang="en-US" sz="1350" dirty="0"/>
+          </a:p>
+          <a:p>
+            <a:pPr indent="0" marL="0">
+              <a:lnSpc>
+                <a:spcPct val="120000"/>
+              </a:lnSpc>
+              <a:buNone/>
+            </a:pPr>
+            <a:r>
+              <a:rPr lang="en-US" sz="1350" dirty="0">
+                <a:solidFill>
+                  <a:srgbClr val="16211F"/>
+                </a:solidFill>
+                <a:latin typeface="Yu Gothic" pitchFamily="34" charset="0"/>
+                <a:ea typeface="Yu Gothic" pitchFamily="34" charset="-122"/>
+                <a:cs typeface="Yu Gothic" pitchFamily="34" charset="-120"/>
+              </a:rPr>
+              <a:t>ただし現場の手段は電話が中心で、続けるのが難しい。</a:t>
+            </a:r>
+            <a:endParaRPr lang="en-US" sz="1350" dirty="0"/>
+          </a:p>
+        </p:txBody>
+      </p:sp>
+      <p:sp>
+        <p:nvSpPr>
+          <p:cNvPr id="16" name="Shape 14"/>
+          <p:cNvSpPr/>
+          <p:nvPr/>
+        </p:nvSpPr>
+        <p:spPr>
+          <a:xfrm>
+            <a:off x="731520" y="5760720"/>
+            <a:ext cx="10698480" cy="777240"/>
           </a:xfrm>
           <a:prstGeom prst="roundRect">
             <a:avLst>
-              <a:gd name="adj" fmla="val 2759"/>
+              <a:gd name="adj" fmla="val 9412"/>
             </a:avLst>
           </a:prstGeom>
           <a:solidFill>
@@ -16896,847 +17431,40 @@
       </p:sp>
       <p:sp>
         <p:nvSpPr>
-          <p:cNvPr id="5" name="Shape 3"/>
-          <p:cNvSpPr/>
-          <p:nvPr/>
-        </p:nvSpPr>
-        <p:spPr>
-          <a:xfrm>
-            <a:off x="1005840" y="2148840"/>
-            <a:ext cx="457200" cy="457200"/>
-          </a:xfrm>
-          <a:prstGeom prst="ellipse">
-            <a:avLst/>
-          </a:prstGeom>
-          <a:solidFill>
-            <a:srgbClr val="14504B"/>
-          </a:solidFill>
-          <a:ln w="12700">
-            <a:solidFill>
-              <a:srgbClr val="14504B"/>
-            </a:solidFill>
-            <a:prstDash val="solid"/>
-          </a:ln>
-        </p:spPr>
-      </p:sp>
-      <p:sp>
-        <p:nvSpPr>
-          <p:cNvPr id="6" name="Text 4"/>
-          <p:cNvSpPr/>
-          <p:nvPr/>
-        </p:nvSpPr>
-        <p:spPr>
-          <a:xfrm>
-            <a:off x="1005840" y="2148840"/>
-            <a:ext cx="457200" cy="457200"/>
-          </a:xfrm>
-          <a:prstGeom prst="rect">
-            <a:avLst/>
-          </a:prstGeom>
-          <a:noFill/>
-          <a:ln/>
-        </p:spPr>
-        <p:txBody>
-          <a:bodyPr wrap="square" lIns="0" tIns="0" rIns="0" bIns="0" rtlCol="0" anchor="ctr"/>
-          <a:lstStyle/>
-          <a:p>
-            <a:pPr algn="ctr" indent="0" marL="0">
+          <p:cNvPr id="17" name="Text 15"/>
+          <p:cNvSpPr/>
+          <p:nvPr/>
+        </p:nvSpPr>
+        <p:spPr>
+          <a:xfrm>
+            <a:off x="1051560" y="5760720"/>
+            <a:ext cx="10058400" cy="777240"/>
+          </a:xfrm>
+          <a:prstGeom prst="rect">
+            <a:avLst/>
+          </a:prstGeom>
+          <a:noFill/>
+          <a:ln/>
+        </p:spPr>
+        <p:txBody>
+          <a:bodyPr wrap="square" lIns="0" tIns="0" rIns="0" bIns="0" rtlCol="0" anchor="ctr"/>
+          <a:lstStyle/>
+          <a:p>
+            <a:pPr indent="0" marL="0">
               <a:buNone/>
             </a:pPr>
             <a:r>
               <a:rPr lang="en-US" sz="1500" b="1" dirty="0">
                 <a:solidFill>
-                  <a:srgbClr val="FFFFFF"/>
-                </a:solidFill>
-                <a:latin typeface="Yu Gothic" pitchFamily="34" charset="0"/>
-                <a:ea typeface="Yu Gothic" pitchFamily="34" charset="-122"/>
-                <a:cs typeface="Yu Gothic" pitchFamily="34" charset="-120"/>
-              </a:rPr>
-              <a:t>1</a:t>
+                  <a:srgbClr val="14504B"/>
+                </a:solidFill>
+                <a:latin typeface="Yu Gothic" pitchFamily="34" charset="0"/>
+                <a:ea typeface="Yu Gothic" pitchFamily="34" charset="-122"/>
+                <a:cs typeface="Yu Gothic" pitchFamily="34" charset="-120"/>
+              </a:rPr>
+              <a:t>義務だから電話をかけるのではなく、続けられる形にする。それが結果として、選ばれる薬局につながる</a:t>
             </a:r>
             <a:endParaRPr lang="en-US" sz="1500" dirty="0"/>
-          </a:p>
-        </p:txBody>
-      </p:sp>
-      <p:sp>
-        <p:nvSpPr>
-          <p:cNvPr id="7" name="Text 5"/>
-          <p:cNvSpPr/>
-          <p:nvPr/>
-        </p:nvSpPr>
-        <p:spPr>
-          <a:xfrm>
-            <a:off x="1600200" y="2176272"/>
-            <a:ext cx="2316175" cy="411480"/>
-          </a:xfrm>
-          <a:prstGeom prst="rect">
-            <a:avLst/>
-          </a:prstGeom>
-          <a:noFill/>
-          <a:ln/>
-        </p:spPr>
-        <p:txBody>
-          <a:bodyPr wrap="square" lIns="0" tIns="0" rIns="0" bIns="0" rtlCol="0" anchor="ctr"/>
-          <a:lstStyle/>
-          <a:p>
-            <a:pPr indent="0" marL="0">
-              <a:buNone/>
-            </a:pPr>
-            <a:r>
-              <a:rPr lang="en-US" sz="1700" b="1" dirty="0">
-                <a:solidFill>
-                  <a:srgbClr val="14504B"/>
-                </a:solidFill>
-                <a:latin typeface="Yu Gothic" pitchFamily="34" charset="0"/>
-                <a:ea typeface="Yu Gothic" pitchFamily="34" charset="-122"/>
-                <a:cs typeface="Yu Gothic" pitchFamily="34" charset="-120"/>
-              </a:rPr>
-              <a:t>施設が記録する</a:t>
-            </a:r>
-            <a:endParaRPr lang="en-US" sz="1700" dirty="0"/>
-          </a:p>
-        </p:txBody>
-      </p:sp>
-      <p:sp>
-        <p:nvSpPr>
-          <p:cNvPr id="8" name="Text 6"/>
-          <p:cNvSpPr/>
-          <p:nvPr/>
-        </p:nvSpPr>
-        <p:spPr>
-          <a:xfrm>
-            <a:off x="1005840" y="2724912"/>
-            <a:ext cx="2956255" cy="1554480"/>
-          </a:xfrm>
-          <a:prstGeom prst="rect">
-            <a:avLst/>
-          </a:prstGeom>
-          <a:noFill/>
-          <a:ln/>
-        </p:spPr>
-        <p:txBody>
-          <a:bodyPr wrap="square" lIns="0" tIns="0" rIns="0" bIns="0" rtlCol="0" anchor="ctr"/>
-          <a:lstStyle/>
-          <a:p>
-            <a:pPr indent="0" marL="0">
-              <a:lnSpc>
-                <a:spcPct val="125000"/>
-              </a:lnSpc>
-              <a:buNone/>
-            </a:pPr>
-            <a:r>
-              <a:rPr lang="en-US" sz="1350" dirty="0">
-                <a:solidFill>
-                  <a:srgbClr val="16211F"/>
-                </a:solidFill>
-                <a:latin typeface="Yu Gothic" pitchFamily="34" charset="0"/>
-                <a:ea typeface="Yu Gothic" pitchFamily="34" charset="-122"/>
-                <a:cs typeface="Yu Gothic" pitchFamily="34" charset="-120"/>
-              </a:rPr>
-              <a:t>服薬の実施、血圧・体温・SpO₂。</a:t>
-            </a:r>
-            <a:endParaRPr lang="en-US" sz="1350" dirty="0"/>
-          </a:p>
-          <a:p>
-            <a:pPr indent="0" marL="0">
-              <a:lnSpc>
-                <a:spcPct val="125000"/>
-              </a:lnSpc>
-              <a:buNone/>
-            </a:pPr>
-            <a:r>
-              <a:rPr lang="en-US" sz="1350" dirty="0">
-                <a:solidFill>
-                  <a:srgbClr val="16211F"/>
-                </a:solidFill>
-                <a:latin typeface="Yu Gothic" pitchFamily="34" charset="0"/>
-                <a:ea typeface="Yu Gothic" pitchFamily="34" charset="-122"/>
-                <a:cs typeface="Yu Gothic" pitchFamily="34" charset="-120"/>
-              </a:rPr>
-              <a:t>いつも職員がつけている記録を、</a:t>
-            </a:r>
-            <a:endParaRPr lang="en-US" sz="1350" dirty="0"/>
-          </a:p>
-          <a:p>
-            <a:pPr indent="0" marL="0">
-              <a:lnSpc>
-                <a:spcPct val="125000"/>
-              </a:lnSpc>
-              <a:buNone/>
-            </a:pPr>
-            <a:r>
-              <a:rPr lang="en-US" sz="1350" dirty="0">
-                <a:solidFill>
-                  <a:srgbClr val="16211F"/>
-                </a:solidFill>
-                <a:latin typeface="Yu Gothic" pitchFamily="34" charset="0"/>
-                <a:ea typeface="Yu Gothic" pitchFamily="34" charset="-122"/>
-                <a:cs typeface="Yu Gothic" pitchFamily="34" charset="-120"/>
-              </a:rPr>
-              <a:t>そのまま入れる。</a:t>
-            </a:r>
-            <a:endParaRPr lang="en-US" sz="1350" dirty="0"/>
-          </a:p>
-        </p:txBody>
-      </p:sp>
-      <p:sp>
-        <p:nvSpPr>
-          <p:cNvPr id="9" name="Shape 7"/>
-          <p:cNvSpPr/>
-          <p:nvPr/>
-        </p:nvSpPr>
-        <p:spPr>
-          <a:xfrm>
-            <a:off x="4163263" y="3154680"/>
-            <a:ext cx="182880" cy="237744"/>
-          </a:xfrm>
-          <a:prstGeom prst="rightArrow">
-            <a:avLst/>
-          </a:prstGeom>
-          <a:solidFill>
-            <a:srgbClr val="A8CFC9"/>
-          </a:solidFill>
-          <a:ln w="12700">
-            <a:solidFill>
-              <a:srgbClr val="A8CFC9"/>
-            </a:solidFill>
-            <a:prstDash val="solid"/>
-          </a:ln>
-        </p:spPr>
-      </p:sp>
-      <p:sp>
-        <p:nvSpPr>
-          <p:cNvPr id="10" name="Shape 8"/>
-          <p:cNvSpPr/>
-          <p:nvPr/>
-        </p:nvSpPr>
-        <p:spPr>
-          <a:xfrm>
-            <a:off x="4373575" y="1920240"/>
-            <a:ext cx="3413455" cy="2651760"/>
-          </a:xfrm>
-          <a:prstGeom prst="roundRect">
-            <a:avLst>
-              <a:gd name="adj" fmla="val 2759"/>
-            </a:avLst>
-          </a:prstGeom>
-          <a:solidFill>
-            <a:srgbClr val="F1F6F5"/>
-          </a:solidFill>
-          <a:ln w="12700">
-            <a:solidFill>
-              <a:srgbClr val="F1F6F5"/>
-            </a:solidFill>
-            <a:prstDash val="solid"/>
-          </a:ln>
-        </p:spPr>
-      </p:sp>
-      <p:sp>
-        <p:nvSpPr>
-          <p:cNvPr id="11" name="Shape 9"/>
-          <p:cNvSpPr/>
-          <p:nvPr/>
-        </p:nvSpPr>
-        <p:spPr>
-          <a:xfrm>
-            <a:off x="4647895" y="2148840"/>
-            <a:ext cx="457200" cy="457200"/>
-          </a:xfrm>
-          <a:prstGeom prst="ellipse">
-            <a:avLst/>
-          </a:prstGeom>
-          <a:solidFill>
-            <a:srgbClr val="14504B"/>
-          </a:solidFill>
-          <a:ln w="12700">
-            <a:solidFill>
-              <a:srgbClr val="14504B"/>
-            </a:solidFill>
-            <a:prstDash val="solid"/>
-          </a:ln>
-        </p:spPr>
-      </p:sp>
-      <p:sp>
-        <p:nvSpPr>
-          <p:cNvPr id="12" name="Text 10"/>
-          <p:cNvSpPr/>
-          <p:nvPr/>
-        </p:nvSpPr>
-        <p:spPr>
-          <a:xfrm>
-            <a:off x="4647895" y="2148840"/>
-            <a:ext cx="457200" cy="457200"/>
-          </a:xfrm>
-          <a:prstGeom prst="rect">
-            <a:avLst/>
-          </a:prstGeom>
-          <a:noFill/>
-          <a:ln/>
-        </p:spPr>
-        <p:txBody>
-          <a:bodyPr wrap="square" lIns="0" tIns="0" rIns="0" bIns="0" rtlCol="0" anchor="ctr"/>
-          <a:lstStyle/>
-          <a:p>
-            <a:pPr algn="ctr" indent="0" marL="0">
-              <a:buNone/>
-            </a:pPr>
-            <a:r>
-              <a:rPr lang="en-US" sz="1500" b="1" dirty="0">
-                <a:solidFill>
-                  <a:srgbClr val="FFFFFF"/>
-                </a:solidFill>
-                <a:latin typeface="Yu Gothic" pitchFamily="34" charset="0"/>
-                <a:ea typeface="Yu Gothic" pitchFamily="34" charset="-122"/>
-                <a:cs typeface="Yu Gothic" pitchFamily="34" charset="-120"/>
-              </a:rPr>
-              <a:t>2</a:t>
-            </a:r>
-            <a:endParaRPr lang="en-US" sz="1500" dirty="0"/>
-          </a:p>
-        </p:txBody>
-      </p:sp>
-      <p:sp>
-        <p:nvSpPr>
-          <p:cNvPr id="13" name="Text 11"/>
-          <p:cNvSpPr/>
-          <p:nvPr/>
-        </p:nvSpPr>
-        <p:spPr>
-          <a:xfrm>
-            <a:off x="5242255" y="2176272"/>
-            <a:ext cx="2316175" cy="411480"/>
-          </a:xfrm>
-          <a:prstGeom prst="rect">
-            <a:avLst/>
-          </a:prstGeom>
-          <a:noFill/>
-          <a:ln/>
-        </p:spPr>
-        <p:txBody>
-          <a:bodyPr wrap="square" lIns="0" tIns="0" rIns="0" bIns="0" rtlCol="0" anchor="ctr"/>
-          <a:lstStyle/>
-          <a:p>
-            <a:pPr indent="0" marL="0">
-              <a:buNone/>
-            </a:pPr>
-            <a:r>
-              <a:rPr lang="en-US" sz="1700" b="1" dirty="0">
-                <a:solidFill>
-                  <a:srgbClr val="14504B"/>
-                </a:solidFill>
-                <a:latin typeface="Yu Gothic" pitchFamily="34" charset="0"/>
-                <a:ea typeface="Yu Gothic" pitchFamily="34" charset="-122"/>
-                <a:cs typeface="Yu Gothic" pitchFamily="34" charset="-120"/>
-              </a:rPr>
-              <a:t>薬剤師に相談する</a:t>
-            </a:r>
-            <a:endParaRPr lang="en-US" sz="1700" dirty="0"/>
-          </a:p>
-        </p:txBody>
-      </p:sp>
-      <p:sp>
-        <p:nvSpPr>
-          <p:cNvPr id="14" name="Text 12"/>
-          <p:cNvSpPr/>
-          <p:nvPr/>
-        </p:nvSpPr>
-        <p:spPr>
-          <a:xfrm>
-            <a:off x="4647895" y="2724912"/>
-            <a:ext cx="2956255" cy="1554480"/>
-          </a:xfrm>
-          <a:prstGeom prst="rect">
-            <a:avLst/>
-          </a:prstGeom>
-          <a:noFill/>
-          <a:ln/>
-        </p:spPr>
-        <p:txBody>
-          <a:bodyPr wrap="square" lIns="0" tIns="0" rIns="0" bIns="0" rtlCol="0" anchor="ctr"/>
-          <a:lstStyle/>
-          <a:p>
-            <a:pPr indent="0" marL="0">
-              <a:lnSpc>
-                <a:spcPct val="125000"/>
-              </a:lnSpc>
-              <a:buNone/>
-            </a:pPr>
-            <a:r>
-              <a:rPr lang="en-US" sz="1350" dirty="0">
-                <a:solidFill>
-                  <a:srgbClr val="16211F"/>
-                </a:solidFill>
-                <a:latin typeface="Yu Gothic" pitchFamily="34" charset="0"/>
-                <a:ea typeface="Yu Gothic" pitchFamily="34" charset="-122"/>
-                <a:cs typeface="Yu Gothic" pitchFamily="34" charset="-120"/>
-              </a:rPr>
-              <a:t>電話と違い、何の薬の話かを</a:t>
-            </a:r>
-            <a:endParaRPr lang="en-US" sz="1350" dirty="0"/>
-          </a:p>
-          <a:p>
-            <a:pPr indent="0" marL="0">
-              <a:lnSpc>
-                <a:spcPct val="125000"/>
-              </a:lnSpc>
-              <a:buNone/>
-            </a:pPr>
-            <a:r>
-              <a:rPr lang="en-US" sz="1350" dirty="0">
-                <a:solidFill>
-                  <a:srgbClr val="16211F"/>
-                </a:solidFill>
-                <a:latin typeface="Yu Gothic" pitchFamily="34" charset="0"/>
-                <a:ea typeface="Yu Gothic" pitchFamily="34" charset="-122"/>
-                <a:cs typeface="Yu Gothic" pitchFamily="34" charset="-120"/>
-              </a:rPr>
-              <a:t>説明し直さなくていい。</a:t>
-            </a:r>
-            <a:endParaRPr lang="en-US" sz="1350" dirty="0"/>
-          </a:p>
-          <a:p>
-            <a:pPr indent="0" marL="0">
-              <a:lnSpc>
-                <a:spcPct val="125000"/>
-              </a:lnSpc>
-              <a:buNone/>
-            </a:pPr>
-            <a:r>
-              <a:rPr lang="en-US" sz="1350" dirty="0">
-                <a:solidFill>
-                  <a:srgbClr val="16211F"/>
-                </a:solidFill>
-                <a:latin typeface="Yu Gothic" pitchFamily="34" charset="0"/>
-                <a:ea typeface="Yu Gothic" pitchFamily="34" charset="-122"/>
-                <a:cs typeface="Yu Gothic" pitchFamily="34" charset="-120"/>
-              </a:rPr>
-              <a:t>やり取りは記録として残る。</a:t>
-            </a:r>
-            <a:endParaRPr lang="en-US" sz="1350" dirty="0"/>
-          </a:p>
-        </p:txBody>
-      </p:sp>
-      <p:sp>
-        <p:nvSpPr>
-          <p:cNvPr id="15" name="Shape 13"/>
-          <p:cNvSpPr/>
-          <p:nvPr/>
-        </p:nvSpPr>
-        <p:spPr>
-          <a:xfrm>
-            <a:off x="7805318" y="3154680"/>
-            <a:ext cx="182880" cy="237744"/>
-          </a:xfrm>
-          <a:prstGeom prst="rightArrow">
-            <a:avLst/>
-          </a:prstGeom>
-          <a:solidFill>
-            <a:srgbClr val="A8CFC9"/>
-          </a:solidFill>
-          <a:ln w="12700">
-            <a:solidFill>
-              <a:srgbClr val="A8CFC9"/>
-            </a:solidFill>
-            <a:prstDash val="solid"/>
-          </a:ln>
-        </p:spPr>
-      </p:sp>
-      <p:sp>
-        <p:nvSpPr>
-          <p:cNvPr id="16" name="Shape 14"/>
-          <p:cNvSpPr/>
-          <p:nvPr/>
-        </p:nvSpPr>
-        <p:spPr>
-          <a:xfrm>
-            <a:off x="8015630" y="1920240"/>
-            <a:ext cx="3413455" cy="2651760"/>
-          </a:xfrm>
-          <a:prstGeom prst="roundRect">
-            <a:avLst>
-              <a:gd name="adj" fmla="val 2759"/>
-            </a:avLst>
-          </a:prstGeom>
-          <a:solidFill>
-            <a:srgbClr val="F1F6F5"/>
-          </a:solidFill>
-          <a:ln w="12700">
-            <a:solidFill>
-              <a:srgbClr val="F1F6F5"/>
-            </a:solidFill>
-            <a:prstDash val="solid"/>
-          </a:ln>
-        </p:spPr>
-      </p:sp>
-      <p:sp>
-        <p:nvSpPr>
-          <p:cNvPr id="17" name="Shape 15"/>
-          <p:cNvSpPr/>
-          <p:nvPr/>
-        </p:nvSpPr>
-        <p:spPr>
-          <a:xfrm>
-            <a:off x="8289950" y="2148840"/>
-            <a:ext cx="457200" cy="457200"/>
-          </a:xfrm>
-          <a:prstGeom prst="ellipse">
-            <a:avLst/>
-          </a:prstGeom>
-          <a:solidFill>
-            <a:srgbClr val="14504B"/>
-          </a:solidFill>
-          <a:ln w="12700">
-            <a:solidFill>
-              <a:srgbClr val="14504B"/>
-            </a:solidFill>
-            <a:prstDash val="solid"/>
-          </a:ln>
-        </p:spPr>
-      </p:sp>
-      <p:sp>
-        <p:nvSpPr>
-          <p:cNvPr id="18" name="Text 16"/>
-          <p:cNvSpPr/>
-          <p:nvPr/>
-        </p:nvSpPr>
-        <p:spPr>
-          <a:xfrm>
-            <a:off x="8289950" y="2148840"/>
-            <a:ext cx="457200" cy="457200"/>
-          </a:xfrm>
-          <a:prstGeom prst="rect">
-            <a:avLst/>
-          </a:prstGeom>
-          <a:noFill/>
-          <a:ln/>
-        </p:spPr>
-        <p:txBody>
-          <a:bodyPr wrap="square" lIns="0" tIns="0" rIns="0" bIns="0" rtlCol="0" anchor="ctr"/>
-          <a:lstStyle/>
-          <a:p>
-            <a:pPr algn="ctr" indent="0" marL="0">
-              <a:buNone/>
-            </a:pPr>
-            <a:r>
-              <a:rPr lang="en-US" sz="1500" b="1" dirty="0">
-                <a:solidFill>
-                  <a:srgbClr val="FFFFFF"/>
-                </a:solidFill>
-                <a:latin typeface="Yu Gothic" pitchFamily="34" charset="0"/>
-                <a:ea typeface="Yu Gothic" pitchFamily="34" charset="-122"/>
-                <a:cs typeface="Yu Gothic" pitchFamily="34" charset="-120"/>
-              </a:rPr>
-              <a:t>3</a:t>
-            </a:r>
-            <a:endParaRPr lang="en-US" sz="1500" dirty="0"/>
-          </a:p>
-        </p:txBody>
-      </p:sp>
-      <p:sp>
-        <p:nvSpPr>
-          <p:cNvPr id="19" name="Text 17"/>
-          <p:cNvSpPr/>
-          <p:nvPr/>
-        </p:nvSpPr>
-        <p:spPr>
-          <a:xfrm>
-            <a:off x="8884310" y="2176272"/>
-            <a:ext cx="2316175" cy="411480"/>
-          </a:xfrm>
-          <a:prstGeom prst="rect">
-            <a:avLst/>
-          </a:prstGeom>
-          <a:noFill/>
-          <a:ln/>
-        </p:spPr>
-        <p:txBody>
-          <a:bodyPr wrap="square" lIns="0" tIns="0" rIns="0" bIns="0" rtlCol="0" anchor="ctr"/>
-          <a:lstStyle/>
-          <a:p>
-            <a:pPr indent="0" marL="0">
-              <a:buNone/>
-            </a:pPr>
-            <a:r>
-              <a:rPr lang="en-US" sz="1700" b="1" dirty="0">
-                <a:solidFill>
-                  <a:srgbClr val="14504B"/>
-                </a:solidFill>
-                <a:latin typeface="Yu Gothic" pitchFamily="34" charset="0"/>
-                <a:ea typeface="Yu Gothic" pitchFamily="34" charset="-122"/>
-                <a:cs typeface="Yu Gothic" pitchFamily="34" charset="-120"/>
-              </a:rPr>
-              <a:t>その人に合わせて返す</a:t>
-            </a:r>
-            <a:endParaRPr lang="en-US" sz="1700" dirty="0"/>
-          </a:p>
-        </p:txBody>
-      </p:sp>
-      <p:sp>
-        <p:nvSpPr>
-          <p:cNvPr id="20" name="Text 18"/>
-          <p:cNvSpPr/>
-          <p:nvPr/>
-        </p:nvSpPr>
-        <p:spPr>
-          <a:xfrm>
-            <a:off x="8289950" y="2724912"/>
-            <a:ext cx="2956255" cy="1554480"/>
-          </a:xfrm>
-          <a:prstGeom prst="rect">
-            <a:avLst/>
-          </a:prstGeom>
-          <a:noFill/>
-          <a:ln/>
-        </p:spPr>
-        <p:txBody>
-          <a:bodyPr wrap="square" lIns="0" tIns="0" rIns="0" bIns="0" rtlCol="0" anchor="ctr"/>
-          <a:lstStyle/>
-          <a:p>
-            <a:pPr indent="0" marL="0">
-              <a:lnSpc>
-                <a:spcPct val="125000"/>
-              </a:lnSpc>
-              <a:buNone/>
-            </a:pPr>
-            <a:r>
-              <a:rPr lang="en-US" sz="1350" dirty="0">
-                <a:solidFill>
-                  <a:srgbClr val="16211F"/>
-                </a:solidFill>
-                <a:latin typeface="Yu Gothic" pitchFamily="34" charset="0"/>
-                <a:ea typeface="Yu Gothic" pitchFamily="34" charset="-122"/>
-                <a:cs typeface="Yu Gothic" pitchFamily="34" charset="-120"/>
-              </a:rPr>
-              <a:t>腎機能・肝機能・年齢を見て</a:t>
-            </a:r>
-            <a:endParaRPr lang="en-US" sz="1350" dirty="0"/>
-          </a:p>
-          <a:p>
-            <a:pPr indent="0" marL="0">
-              <a:lnSpc>
-                <a:spcPct val="125000"/>
-              </a:lnSpc>
-              <a:buNone/>
-            </a:pPr>
-            <a:r>
-              <a:rPr lang="en-US" sz="1350" dirty="0">
-                <a:solidFill>
-                  <a:srgbClr val="16211F"/>
-                </a:solidFill>
-                <a:latin typeface="Yu Gothic" pitchFamily="34" charset="0"/>
-                <a:ea typeface="Yu Gothic" pitchFamily="34" charset="-122"/>
-                <a:cs typeface="Yu Gothic" pitchFamily="34" charset="-120"/>
-              </a:rPr>
-              <a:t>注意点を出し分ける。</a:t>
-            </a:r>
-            <a:endParaRPr lang="en-US" sz="1350" dirty="0"/>
-          </a:p>
-          <a:p>
-            <a:pPr indent="0" marL="0">
-              <a:lnSpc>
-                <a:spcPct val="125000"/>
-              </a:lnSpc>
-              <a:buNone/>
-            </a:pPr>
-            <a:r>
-              <a:rPr lang="en-US" sz="1350" dirty="0">
-                <a:solidFill>
-                  <a:srgbClr val="16211F"/>
-                </a:solidFill>
-                <a:latin typeface="Yu Gothic" pitchFamily="34" charset="0"/>
-                <a:ea typeface="Yu Gothic" pitchFamily="34" charset="-122"/>
-                <a:cs typeface="Yu Gothic" pitchFamily="34" charset="-120"/>
-              </a:rPr>
-              <a:t>症状からは、受診かOTCかの</a:t>
-            </a:r>
-            <a:endParaRPr lang="en-US" sz="1350" dirty="0"/>
-          </a:p>
-          <a:p>
-            <a:pPr indent="0" marL="0">
-              <a:lnSpc>
-                <a:spcPct val="125000"/>
-              </a:lnSpc>
-              <a:buNone/>
-            </a:pPr>
-            <a:r>
-              <a:rPr lang="en-US" sz="1350" dirty="0">
-                <a:solidFill>
-                  <a:srgbClr val="16211F"/>
-                </a:solidFill>
-                <a:latin typeface="Yu Gothic" pitchFamily="34" charset="0"/>
-                <a:ea typeface="Yu Gothic" pitchFamily="34" charset="-122"/>
-                <a:cs typeface="Yu Gothic" pitchFamily="34" charset="-120"/>
-              </a:rPr>
-              <a:t>目安を出す。</a:t>
-            </a:r>
-            <a:endParaRPr lang="en-US" sz="1350" dirty="0"/>
-          </a:p>
-        </p:txBody>
-      </p:sp>
-      <p:sp>
-        <p:nvSpPr>
-          <p:cNvPr id="21" name="Text 19"/>
-          <p:cNvSpPr/>
-          <p:nvPr/>
-        </p:nvSpPr>
-        <p:spPr>
-          <a:xfrm>
-            <a:off x="731520" y="4846320"/>
-            <a:ext cx="10698480" cy="365760"/>
-          </a:xfrm>
-          <a:prstGeom prst="rect">
-            <a:avLst/>
-          </a:prstGeom>
-          <a:noFill/>
-          <a:ln/>
-        </p:spPr>
-        <p:txBody>
-          <a:bodyPr wrap="square" lIns="0" tIns="0" rIns="0" bIns="0" rtlCol="0" anchor="ctr"/>
-          <a:lstStyle/>
-          <a:p>
-            <a:pPr indent="0" marL="0">
-              <a:buNone/>
-            </a:pPr>
-            <a:r>
-              <a:rPr lang="en-US" sz="1300" b="1" dirty="0">
-                <a:solidFill>
-                  <a:srgbClr val="1F6F78"/>
-                </a:solidFill>
-                <a:latin typeface="Yu Gothic" pitchFamily="34" charset="0"/>
-                <a:ea typeface="Yu Gothic" pitchFamily="34" charset="-122"/>
-                <a:cs typeface="Yu Gothic" pitchFamily="34" charset="-120"/>
-              </a:rPr>
-              <a:t>ここが既存サービスとの違い</a:t>
-            </a:r>
-            <a:endParaRPr lang="en-US" sz="1300" dirty="0"/>
-          </a:p>
-        </p:txBody>
-      </p:sp>
-      <p:sp>
-        <p:nvSpPr>
-          <p:cNvPr id="22" name="Shape 20"/>
-          <p:cNvSpPr/>
-          <p:nvPr/>
-        </p:nvSpPr>
-        <p:spPr>
-          <a:xfrm>
-            <a:off x="731520" y="5321808"/>
-            <a:ext cx="36576" cy="384048"/>
-          </a:xfrm>
-          <a:prstGeom prst="rect">
-            <a:avLst/>
-          </a:prstGeom>
-          <a:solidFill>
-            <a:srgbClr val="D98A2B"/>
-          </a:solidFill>
-          <a:ln w="12700">
-            <a:solidFill>
-              <a:srgbClr val="D98A2B"/>
-            </a:solidFill>
-            <a:prstDash val="solid"/>
-          </a:ln>
-        </p:spPr>
-      </p:sp>
-      <p:sp>
-        <p:nvSpPr>
-          <p:cNvPr id="23" name="Text 21"/>
-          <p:cNvSpPr/>
-          <p:nvPr/>
-        </p:nvSpPr>
-        <p:spPr>
-          <a:xfrm>
-            <a:off x="960120" y="5285232"/>
-            <a:ext cx="10424160" cy="457200"/>
-          </a:xfrm>
-          <a:prstGeom prst="rect">
-            <a:avLst/>
-          </a:prstGeom>
-          <a:noFill/>
-          <a:ln/>
-        </p:spPr>
-        <p:txBody>
-          <a:bodyPr wrap="square" lIns="0" tIns="0" rIns="0" bIns="0" rtlCol="0" anchor="ctr"/>
-          <a:lstStyle/>
-          <a:p>
-            <a:pPr indent="0" marL="0">
-              <a:buNone/>
-            </a:pPr>
-            <a:r>
-              <a:rPr lang="en-US" sz="1400" dirty="0">
-                <a:solidFill>
-                  <a:srgbClr val="16211F"/>
-                </a:solidFill>
-                <a:latin typeface="Yu Gothic" pitchFamily="34" charset="0"/>
-                <a:ea typeface="Yu Gothic" pitchFamily="34" charset="-122"/>
-                <a:cs typeface="Yu Gothic" pitchFamily="34" charset="-120"/>
-              </a:rPr>
-              <a:t>バイタルが薬の話とつながっている — 「血圧が下がってきたので降圧薬を見直しては」という会話が、数字を見ながらできる</a:t>
-            </a:r>
-            <a:endParaRPr lang="en-US" sz="1400" dirty="0"/>
-          </a:p>
-        </p:txBody>
-      </p:sp>
-      <p:sp>
-        <p:nvSpPr>
-          <p:cNvPr id="24" name="Shape 22"/>
-          <p:cNvSpPr/>
-          <p:nvPr/>
-        </p:nvSpPr>
-        <p:spPr>
-          <a:xfrm>
-            <a:off x="731520" y="5870448"/>
-            <a:ext cx="36576" cy="384048"/>
-          </a:xfrm>
-          <a:prstGeom prst="rect">
-            <a:avLst/>
-          </a:prstGeom>
-          <a:solidFill>
-            <a:srgbClr val="D98A2B"/>
-          </a:solidFill>
-          <a:ln w="12700">
-            <a:solidFill>
-              <a:srgbClr val="D98A2B"/>
-            </a:solidFill>
-            <a:prstDash val="solid"/>
-          </a:ln>
-        </p:spPr>
-      </p:sp>
-      <p:sp>
-        <p:nvSpPr>
-          <p:cNvPr id="25" name="Text 23"/>
-          <p:cNvSpPr/>
-          <p:nvPr/>
-        </p:nvSpPr>
-        <p:spPr>
-          <a:xfrm>
-            <a:off x="960120" y="5833872"/>
-            <a:ext cx="10424160" cy="457200"/>
-          </a:xfrm>
-          <a:prstGeom prst="rect">
-            <a:avLst/>
-          </a:prstGeom>
-          <a:noFill/>
-          <a:ln/>
-        </p:spPr>
-        <p:txBody>
-          <a:bodyPr wrap="square" lIns="0" tIns="0" rIns="0" bIns="0" rtlCol="0" anchor="ctr"/>
-          <a:lstStyle/>
-          <a:p>
-            <a:pPr indent="0" marL="0">
-              <a:buNone/>
-            </a:pPr>
-            <a:r>
-              <a:rPr lang="en-US" sz="1400" dirty="0">
-                <a:solidFill>
-                  <a:srgbClr val="16211F"/>
-                </a:solidFill>
-                <a:latin typeface="Yu Gothic" pitchFamily="34" charset="0"/>
-                <a:ea typeface="Yu Gothic" pitchFamily="34" charset="-122"/>
-                <a:cs typeface="Yu Gothic" pitchFamily="34" charset="-120"/>
-              </a:rPr>
-              <a:t>症状が出たときの入口がある — 受診すべきか、市販薬で様子を見てよいかの目安を、危険な兆候の有無から出す</a:t>
-            </a:r>
-            <a:endParaRPr lang="en-US" sz="1400" dirty="0"/>
           </a:p>
         </p:txBody>
       </p:sp>
@@ -17805,7 +17533,7 @@
                 <a:ea typeface="Yu Gothic" pitchFamily="34" charset="-122"/>
                 <a:cs typeface="Yu Gothic" pitchFamily="34" charset="-120"/>
               </a:rPr>
-              <a:t>なぜ、今つくるのか</a:t>
+              <a:t>つなぐと、その人に合わせられる</a:t>
             </a:r>
             <a:endParaRPr lang="en-US" sz="3600" dirty="0"/>
           </a:p>
@@ -17844,7 +17572,7 @@
                 <a:ea typeface="Yu Gothic" pitchFamily="34" charset="-122"/>
                 <a:cs typeface="Yu Gothic" pitchFamily="34" charset="-120"/>
               </a:rPr>
-              <a:t>制度の流れが、施設と薬局を近づけている</a:t>
+              <a:t>同じ画面に薬と体調があるから、一般論ではなく目の前の人の話にできる</a:t>
             </a:r>
             <a:endParaRPr lang="en-US" sz="1600" dirty="0"/>
           </a:p>
@@ -17858,547 +17586,12 @@
         </p:nvSpPr>
         <p:spPr>
           <a:xfrm>
-            <a:off x="731520" y="1874520"/>
-            <a:ext cx="475488" cy="475488"/>
-          </a:xfrm>
-          <a:prstGeom prst="ellipse">
-            <a:avLst/>
-          </a:prstGeom>
-          <a:solidFill>
-            <a:srgbClr val="3E8E84"/>
-          </a:solidFill>
-          <a:ln w="12700">
-            <a:solidFill>
-              <a:srgbClr val="3E8E84"/>
-            </a:solidFill>
-            <a:prstDash val="solid"/>
-          </a:ln>
-        </p:spPr>
-      </p:sp>
-      <p:sp>
-        <p:nvSpPr>
-          <p:cNvPr id="5" name="Text 3"/>
-          <p:cNvSpPr/>
-          <p:nvPr/>
-        </p:nvSpPr>
-        <p:spPr>
-          <a:xfrm>
-            <a:off x="731520" y="1874520"/>
-            <a:ext cx="475488" cy="475488"/>
-          </a:xfrm>
-          <a:prstGeom prst="rect">
-            <a:avLst/>
-          </a:prstGeom>
-          <a:noFill/>
-          <a:ln/>
-        </p:spPr>
-        <p:txBody>
-          <a:bodyPr wrap="square" lIns="0" tIns="0" rIns="0" bIns="0" rtlCol="0" anchor="ctr"/>
-          <a:lstStyle/>
-          <a:p>
-            <a:pPr algn="ctr" indent="0" marL="0">
-              <a:buNone/>
-            </a:pPr>
-            <a:r>
-              <a:rPr lang="en-US" sz="1500" b="1" dirty="0">
-                <a:solidFill>
-                  <a:srgbClr val="FFFFFF"/>
-                </a:solidFill>
-                <a:latin typeface="Yu Gothic" pitchFamily="34" charset="0"/>
-                <a:ea typeface="Yu Gothic" pitchFamily="34" charset="-122"/>
-                <a:cs typeface="Yu Gothic" pitchFamily="34" charset="-120"/>
-              </a:rPr>
-              <a:t>1</a:t>
-            </a:r>
-            <a:endParaRPr lang="en-US" sz="1500" dirty="0"/>
-          </a:p>
-        </p:txBody>
-      </p:sp>
-      <p:sp>
-        <p:nvSpPr>
-          <p:cNvPr id="6" name="Text 4"/>
-          <p:cNvSpPr/>
-          <p:nvPr/>
-        </p:nvSpPr>
-        <p:spPr>
-          <a:xfrm>
-            <a:off x="1417320" y="1828800"/>
-            <a:ext cx="9966960" cy="411480"/>
-          </a:xfrm>
-          <a:prstGeom prst="rect">
-            <a:avLst/>
-          </a:prstGeom>
-          <a:noFill/>
-          <a:ln/>
-        </p:spPr>
-        <p:txBody>
-          <a:bodyPr wrap="square" lIns="0" tIns="0" rIns="0" bIns="0" rtlCol="0" anchor="ctr"/>
-          <a:lstStyle/>
-          <a:p>
-            <a:pPr indent="0" marL="0">
-              <a:buNone/>
-            </a:pPr>
-            <a:r>
-              <a:rPr lang="en-US" sz="1800" b="1" dirty="0">
-                <a:solidFill>
-                  <a:srgbClr val="14504B"/>
-                </a:solidFill>
-                <a:latin typeface="Yu Gothic" pitchFamily="34" charset="0"/>
-                <a:ea typeface="Yu Gothic" pitchFamily="34" charset="-122"/>
-                <a:cs typeface="Yu Gothic" pitchFamily="34" charset="-120"/>
-              </a:rPr>
-              <a:t>在宅・施設への訪問が国の方向</a:t>
-            </a:r>
-            <a:endParaRPr lang="en-US" sz="1800" dirty="0"/>
-          </a:p>
-        </p:txBody>
-      </p:sp>
-      <p:sp>
-        <p:nvSpPr>
-          <p:cNvPr id="7" name="Text 5"/>
-          <p:cNvSpPr/>
-          <p:nvPr/>
-        </p:nvSpPr>
-        <p:spPr>
-          <a:xfrm>
-            <a:off x="1417320" y="2240280"/>
-            <a:ext cx="9966960" cy="822960"/>
-          </a:xfrm>
-          <a:prstGeom prst="rect">
-            <a:avLst/>
-          </a:prstGeom>
-          <a:noFill/>
-          <a:ln/>
-        </p:spPr>
-        <p:txBody>
-          <a:bodyPr wrap="square" lIns="0" tIns="0" rIns="0" bIns="0" rtlCol="0" anchor="ctr"/>
-          <a:lstStyle/>
-          <a:p>
-            <a:pPr indent="0" marL="0">
-              <a:lnSpc>
-                <a:spcPct val="120000"/>
-              </a:lnSpc>
-              <a:buNone/>
-            </a:pPr>
-            <a:r>
-              <a:rPr lang="en-US" sz="1350" dirty="0">
-                <a:solidFill>
-                  <a:srgbClr val="16211F"/>
-                </a:solidFill>
-                <a:latin typeface="Yu Gothic" pitchFamily="34" charset="0"/>
-                <a:ea typeface="Yu Gothic" pitchFamily="34" charset="-122"/>
-                <a:cs typeface="Yu Gothic" pitchFamily="34" charset="-120"/>
-              </a:rPr>
-              <a:t>薬剤師の役割は「薬を渡す」から「渡したあとを見る」へ移っている。</a:t>
-            </a:r>
-            <a:endParaRPr lang="en-US" sz="1350" dirty="0"/>
-          </a:p>
-          <a:p>
-            <a:pPr indent="0" marL="0">
-              <a:lnSpc>
-                <a:spcPct val="120000"/>
-              </a:lnSpc>
-              <a:buNone/>
-            </a:pPr>
-            <a:r>
-              <a:rPr lang="en-US" sz="1350" dirty="0">
-                <a:solidFill>
-                  <a:srgbClr val="16211F"/>
-                </a:solidFill>
-                <a:latin typeface="Yu Gothic" pitchFamily="34" charset="0"/>
-                <a:ea typeface="Yu Gothic" pitchFamily="34" charset="-122"/>
-                <a:cs typeface="Yu Gothic" pitchFamily="34" charset="-120"/>
-              </a:rPr>
-              <a:t>施設に足を運ぶ機会は今後さらに増える。</a:t>
-            </a:r>
-            <a:endParaRPr lang="en-US" sz="1350" dirty="0"/>
-          </a:p>
-        </p:txBody>
-      </p:sp>
-      <p:sp>
-        <p:nvSpPr>
-          <p:cNvPr id="8" name="Shape 6"/>
-          <p:cNvSpPr/>
-          <p:nvPr/>
-        </p:nvSpPr>
-        <p:spPr>
-          <a:xfrm>
-            <a:off x="731520" y="3172968"/>
-            <a:ext cx="475488" cy="475488"/>
-          </a:xfrm>
-          <a:prstGeom prst="ellipse">
-            <a:avLst/>
-          </a:prstGeom>
-          <a:solidFill>
-            <a:srgbClr val="3E8E84"/>
-          </a:solidFill>
-          <a:ln w="12700">
-            <a:solidFill>
-              <a:srgbClr val="3E8E84"/>
-            </a:solidFill>
-            <a:prstDash val="solid"/>
-          </a:ln>
-        </p:spPr>
-      </p:sp>
-      <p:sp>
-        <p:nvSpPr>
-          <p:cNvPr id="9" name="Text 7"/>
-          <p:cNvSpPr/>
-          <p:nvPr/>
-        </p:nvSpPr>
-        <p:spPr>
-          <a:xfrm>
-            <a:off x="731520" y="3172968"/>
-            <a:ext cx="475488" cy="475488"/>
-          </a:xfrm>
-          <a:prstGeom prst="rect">
-            <a:avLst/>
-          </a:prstGeom>
-          <a:noFill/>
-          <a:ln/>
-        </p:spPr>
-        <p:txBody>
-          <a:bodyPr wrap="square" lIns="0" tIns="0" rIns="0" bIns="0" rtlCol="0" anchor="ctr"/>
-          <a:lstStyle/>
-          <a:p>
-            <a:pPr algn="ctr" indent="0" marL="0">
-              <a:buNone/>
-            </a:pPr>
-            <a:r>
-              <a:rPr lang="en-US" sz="1500" b="1" dirty="0">
-                <a:solidFill>
-                  <a:srgbClr val="FFFFFF"/>
-                </a:solidFill>
-                <a:latin typeface="Yu Gothic" pitchFamily="34" charset="0"/>
-                <a:ea typeface="Yu Gothic" pitchFamily="34" charset="-122"/>
-                <a:cs typeface="Yu Gothic" pitchFamily="34" charset="-120"/>
-              </a:rPr>
-              <a:t>2</a:t>
-            </a:r>
-            <a:endParaRPr lang="en-US" sz="1500" dirty="0"/>
-          </a:p>
-        </p:txBody>
-      </p:sp>
-      <p:sp>
-        <p:nvSpPr>
-          <p:cNvPr id="10" name="Text 8"/>
-          <p:cNvSpPr/>
-          <p:nvPr/>
-        </p:nvSpPr>
-        <p:spPr>
-          <a:xfrm>
-            <a:off x="1417320" y="3127248"/>
-            <a:ext cx="9966960" cy="411480"/>
-          </a:xfrm>
-          <a:prstGeom prst="rect">
-            <a:avLst/>
-          </a:prstGeom>
-          <a:noFill/>
-          <a:ln/>
-        </p:spPr>
-        <p:txBody>
-          <a:bodyPr wrap="square" lIns="0" tIns="0" rIns="0" bIns="0" rtlCol="0" anchor="ctr"/>
-          <a:lstStyle/>
-          <a:p>
-            <a:pPr indent="0" marL="0">
-              <a:buNone/>
-            </a:pPr>
-            <a:r>
-              <a:rPr lang="en-US" sz="1800" b="1" dirty="0">
-                <a:solidFill>
-                  <a:srgbClr val="14504B"/>
-                </a:solidFill>
-                <a:latin typeface="Yu Gothic" pitchFamily="34" charset="0"/>
-                <a:ea typeface="Yu Gothic" pitchFamily="34" charset="-122"/>
-                <a:cs typeface="Yu Gothic" pitchFamily="34" charset="-120"/>
-              </a:rPr>
-              <a:t>門前から面へ</a:t>
-            </a:r>
-            <a:endParaRPr lang="en-US" sz="1800" dirty="0"/>
-          </a:p>
-        </p:txBody>
-      </p:sp>
-      <p:sp>
-        <p:nvSpPr>
-          <p:cNvPr id="11" name="Text 9"/>
-          <p:cNvSpPr/>
-          <p:nvPr/>
-        </p:nvSpPr>
-        <p:spPr>
-          <a:xfrm>
-            <a:off x="1417320" y="3538728"/>
-            <a:ext cx="9966960" cy="822960"/>
-          </a:xfrm>
-          <a:prstGeom prst="rect">
-            <a:avLst/>
-          </a:prstGeom>
-          <a:noFill/>
-          <a:ln/>
-        </p:spPr>
-        <p:txBody>
-          <a:bodyPr wrap="square" lIns="0" tIns="0" rIns="0" bIns="0" rtlCol="0" anchor="ctr"/>
-          <a:lstStyle/>
-          <a:p>
-            <a:pPr indent="0" marL="0">
-              <a:lnSpc>
-                <a:spcPct val="120000"/>
-              </a:lnSpc>
-              <a:buNone/>
-            </a:pPr>
-            <a:r>
-              <a:rPr lang="en-US" sz="1350" dirty="0">
-                <a:solidFill>
-                  <a:srgbClr val="16211F"/>
-                </a:solidFill>
-                <a:latin typeface="Yu Gothic" pitchFamily="34" charset="0"/>
-                <a:ea typeface="Yu Gothic" pitchFamily="34" charset="-122"/>
-                <a:cs typeface="Yu Gothic" pitchFamily="34" charset="-120"/>
-              </a:rPr>
-              <a:t>特定の病院の前に構える薬局から、地域のどの処方箋も受ける薬局へ。</a:t>
-            </a:r>
-            <a:endParaRPr lang="en-US" sz="1350" dirty="0"/>
-          </a:p>
-          <a:p>
-            <a:pPr indent="0" marL="0">
-              <a:lnSpc>
-                <a:spcPct val="120000"/>
-              </a:lnSpc>
-              <a:buNone/>
-            </a:pPr>
-            <a:r>
-              <a:rPr lang="en-US" sz="1350" dirty="0">
-                <a:solidFill>
-                  <a:srgbClr val="16211F"/>
-                </a:solidFill>
-                <a:latin typeface="Yu Gothic" pitchFamily="34" charset="0"/>
-                <a:ea typeface="Yu Gothic" pitchFamily="34" charset="-122"/>
-                <a:cs typeface="Yu Gothic" pitchFamily="34" charset="-120"/>
-              </a:rPr>
-              <a:t>処方元に電話すれば済んでいたことが、済まなくなる。</a:t>
-            </a:r>
-            <a:endParaRPr lang="en-US" sz="1350" dirty="0"/>
-          </a:p>
-          <a:p>
-            <a:pPr indent="0" marL="0">
-              <a:lnSpc>
-                <a:spcPct val="120000"/>
-              </a:lnSpc>
-              <a:buNone/>
-            </a:pPr>
-            <a:r>
-              <a:rPr lang="en-US" sz="1350" dirty="0">
-                <a:solidFill>
-                  <a:srgbClr val="16211F"/>
-                </a:solidFill>
-                <a:latin typeface="Yu Gothic" pitchFamily="34" charset="0"/>
-                <a:ea typeface="Yu Gothic" pitchFamily="34" charset="-122"/>
-                <a:cs typeface="Yu Gothic" pitchFamily="34" charset="-120"/>
-              </a:rPr>
-              <a:t>患者の薬を薬局側で一元的に把握する必要が出てくる。</a:t>
-            </a:r>
-            <a:endParaRPr lang="en-US" sz="1350" dirty="0"/>
-          </a:p>
-        </p:txBody>
-      </p:sp>
-      <p:sp>
-        <p:nvSpPr>
-          <p:cNvPr id="12" name="Shape 10"/>
-          <p:cNvSpPr/>
-          <p:nvPr/>
-        </p:nvSpPr>
-        <p:spPr>
-          <a:xfrm>
-            <a:off x="731520" y="4471416"/>
-            <a:ext cx="475488" cy="475488"/>
-          </a:xfrm>
-          <a:prstGeom prst="ellipse">
-            <a:avLst/>
-          </a:prstGeom>
-          <a:solidFill>
-            <a:srgbClr val="3E8E84"/>
-          </a:solidFill>
-          <a:ln w="12700">
-            <a:solidFill>
-              <a:srgbClr val="3E8E84"/>
-            </a:solidFill>
-            <a:prstDash val="solid"/>
-          </a:ln>
-        </p:spPr>
-      </p:sp>
-      <p:sp>
-        <p:nvSpPr>
-          <p:cNvPr id="13" name="Text 11"/>
-          <p:cNvSpPr/>
-          <p:nvPr/>
-        </p:nvSpPr>
-        <p:spPr>
-          <a:xfrm>
-            <a:off x="731520" y="4471416"/>
-            <a:ext cx="475488" cy="475488"/>
-          </a:xfrm>
-          <a:prstGeom prst="rect">
-            <a:avLst/>
-          </a:prstGeom>
-          <a:noFill/>
-          <a:ln/>
-        </p:spPr>
-        <p:txBody>
-          <a:bodyPr wrap="square" lIns="0" tIns="0" rIns="0" bIns="0" rtlCol="0" anchor="ctr"/>
-          <a:lstStyle/>
-          <a:p>
-            <a:pPr algn="ctr" indent="0" marL="0">
-              <a:buNone/>
-            </a:pPr>
-            <a:r>
-              <a:rPr lang="en-US" sz="1500" b="1" dirty="0">
-                <a:solidFill>
-                  <a:srgbClr val="FFFFFF"/>
-                </a:solidFill>
-                <a:latin typeface="Yu Gothic" pitchFamily="34" charset="0"/>
-                <a:ea typeface="Yu Gothic" pitchFamily="34" charset="-122"/>
-                <a:cs typeface="Yu Gothic" pitchFamily="34" charset="-120"/>
-              </a:rPr>
-              <a:t>3</a:t>
-            </a:r>
-            <a:endParaRPr lang="en-US" sz="1500" dirty="0"/>
-          </a:p>
-        </p:txBody>
-      </p:sp>
-      <p:sp>
-        <p:nvSpPr>
-          <p:cNvPr id="14" name="Text 12"/>
-          <p:cNvSpPr/>
-          <p:nvPr/>
-        </p:nvSpPr>
-        <p:spPr>
-          <a:xfrm>
-            <a:off x="1417320" y="4425696"/>
-            <a:ext cx="9966960" cy="411480"/>
-          </a:xfrm>
-          <a:prstGeom prst="rect">
-            <a:avLst/>
-          </a:prstGeom>
-          <a:noFill/>
-          <a:ln/>
-        </p:spPr>
-        <p:txBody>
-          <a:bodyPr wrap="square" lIns="0" tIns="0" rIns="0" bIns="0" rtlCol="0" anchor="ctr"/>
-          <a:lstStyle/>
-          <a:p>
-            <a:pPr indent="0" marL="0">
-              <a:buNone/>
-            </a:pPr>
-            <a:r>
-              <a:rPr lang="en-US" sz="1800" b="1" dirty="0">
-                <a:solidFill>
-                  <a:srgbClr val="14504B"/>
-                </a:solidFill>
-                <a:latin typeface="Yu Gothic" pitchFamily="34" charset="0"/>
-                <a:ea typeface="Yu Gothic" pitchFamily="34" charset="-122"/>
-                <a:cs typeface="Yu Gothic" pitchFamily="34" charset="-120"/>
-              </a:rPr>
-              <a:t>服薬期間中のフォローアップは、すでに義務</a:t>
-            </a:r>
-            <a:endParaRPr lang="en-US" sz="1800" dirty="0"/>
-          </a:p>
-        </p:txBody>
-      </p:sp>
-      <p:sp>
-        <p:nvSpPr>
-          <p:cNvPr id="15" name="Text 13"/>
-          <p:cNvSpPr/>
-          <p:nvPr/>
-        </p:nvSpPr>
-        <p:spPr>
-          <a:xfrm>
-            <a:off x="1417320" y="4837176"/>
-            <a:ext cx="9966960" cy="822960"/>
-          </a:xfrm>
-          <a:prstGeom prst="rect">
-            <a:avLst/>
-          </a:prstGeom>
-          <a:noFill/>
-          <a:ln/>
-        </p:spPr>
-        <p:txBody>
-          <a:bodyPr wrap="square" lIns="0" tIns="0" rIns="0" bIns="0" rtlCol="0" anchor="ctr"/>
-          <a:lstStyle/>
-          <a:p>
-            <a:pPr indent="0" marL="0">
-              <a:lnSpc>
-                <a:spcPct val="120000"/>
-              </a:lnSpc>
-              <a:buNone/>
-            </a:pPr>
-            <a:r>
-              <a:rPr lang="en-US" sz="1350" dirty="0">
-                <a:solidFill>
-                  <a:srgbClr val="16211F"/>
-                </a:solidFill>
-                <a:latin typeface="Yu Gothic" pitchFamily="34" charset="0"/>
-                <a:ea typeface="Yu Gothic" pitchFamily="34" charset="-122"/>
-                <a:cs typeface="Yu Gothic" pitchFamily="34" charset="-120"/>
-              </a:rPr>
-              <a:t>2020年9月施行の改正薬機法・薬剤師法で、渡したあとの服薬状況を</a:t>
-            </a:r>
-            <a:endParaRPr lang="en-US" sz="1350" dirty="0"/>
-          </a:p>
-          <a:p>
-            <a:pPr indent="0" marL="0">
-              <a:lnSpc>
-                <a:spcPct val="120000"/>
-              </a:lnSpc>
-              <a:buNone/>
-            </a:pPr>
-            <a:r>
-              <a:rPr lang="en-US" sz="1350" dirty="0">
-                <a:solidFill>
-                  <a:srgbClr val="16211F"/>
-                </a:solidFill>
-                <a:latin typeface="Yu Gothic" pitchFamily="34" charset="0"/>
-                <a:ea typeface="Yu Gothic" pitchFamily="34" charset="-122"/>
-                <a:cs typeface="Yu Gothic" pitchFamily="34" charset="-120"/>
-              </a:rPr>
-              <a:t>継続的に把握することが薬剤師の責務になった。</a:t>
-            </a:r>
-            <a:endParaRPr lang="en-US" sz="1350" dirty="0"/>
-          </a:p>
-          <a:p>
-            <a:pPr indent="0" marL="0">
-              <a:lnSpc>
-                <a:spcPct val="120000"/>
-              </a:lnSpc>
-              <a:buNone/>
-            </a:pPr>
-            <a:r>
-              <a:rPr lang="en-US" sz="1350" dirty="0">
-                <a:solidFill>
-                  <a:srgbClr val="16211F"/>
-                </a:solidFill>
-                <a:latin typeface="Yu Gothic" pitchFamily="34" charset="0"/>
-                <a:ea typeface="Yu Gothic" pitchFamily="34" charset="-122"/>
-                <a:cs typeface="Yu Gothic" pitchFamily="34" charset="-120"/>
-              </a:rPr>
-              <a:t>ただし現場の手段は電話が中心で、続けるのが難しい。</a:t>
-            </a:r>
-            <a:endParaRPr lang="en-US" sz="1350" dirty="0"/>
-          </a:p>
-        </p:txBody>
-      </p:sp>
-      <p:sp>
-        <p:nvSpPr>
-          <p:cNvPr id="16" name="Shape 14"/>
-          <p:cNvSpPr/>
-          <p:nvPr/>
-        </p:nvSpPr>
-        <p:spPr>
-          <a:xfrm>
-            <a:off x="731520" y="5760720"/>
-            <a:ext cx="10698480" cy="777240"/>
+            <a:off x="731520" y="1920240"/>
+            <a:ext cx="3413455" cy="2651760"/>
           </a:xfrm>
           <a:prstGeom prst="roundRect">
             <a:avLst>
-              <a:gd name="adj" fmla="val 9412"/>
+              <a:gd name="adj" fmla="val 2759"/>
             </a:avLst>
           </a:prstGeom>
           <a:solidFill>
@@ -18414,40 +17607,847 @@
       </p:sp>
       <p:sp>
         <p:nvSpPr>
-          <p:cNvPr id="17" name="Text 15"/>
-          <p:cNvSpPr/>
-          <p:nvPr/>
-        </p:nvSpPr>
-        <p:spPr>
-          <a:xfrm>
-            <a:off x="1051560" y="5760720"/>
-            <a:ext cx="10058400" cy="777240"/>
-          </a:xfrm>
-          <a:prstGeom prst="rect">
-            <a:avLst/>
-          </a:prstGeom>
-          <a:noFill/>
-          <a:ln/>
-        </p:spPr>
-        <p:txBody>
-          <a:bodyPr wrap="square" lIns="0" tIns="0" rIns="0" bIns="0" rtlCol="0" anchor="ctr"/>
-          <a:lstStyle/>
-          <a:p>
-            <a:pPr indent="0" marL="0">
+          <p:cNvPr id="5" name="Shape 3"/>
+          <p:cNvSpPr/>
+          <p:nvPr/>
+        </p:nvSpPr>
+        <p:spPr>
+          <a:xfrm>
+            <a:off x="1005840" y="2148840"/>
+            <a:ext cx="457200" cy="457200"/>
+          </a:xfrm>
+          <a:prstGeom prst="ellipse">
+            <a:avLst/>
+          </a:prstGeom>
+          <a:solidFill>
+            <a:srgbClr val="14504B"/>
+          </a:solidFill>
+          <a:ln w="12700">
+            <a:solidFill>
+              <a:srgbClr val="14504B"/>
+            </a:solidFill>
+            <a:prstDash val="solid"/>
+          </a:ln>
+        </p:spPr>
+      </p:sp>
+      <p:sp>
+        <p:nvSpPr>
+          <p:cNvPr id="6" name="Text 4"/>
+          <p:cNvSpPr/>
+          <p:nvPr/>
+        </p:nvSpPr>
+        <p:spPr>
+          <a:xfrm>
+            <a:off x="1005840" y="2148840"/>
+            <a:ext cx="457200" cy="457200"/>
+          </a:xfrm>
+          <a:prstGeom prst="rect">
+            <a:avLst/>
+          </a:prstGeom>
+          <a:noFill/>
+          <a:ln/>
+        </p:spPr>
+        <p:txBody>
+          <a:bodyPr wrap="square" lIns="0" tIns="0" rIns="0" bIns="0" rtlCol="0" anchor="ctr"/>
+          <a:lstStyle/>
+          <a:p>
+            <a:pPr algn="ctr" indent="0" marL="0">
               <a:buNone/>
             </a:pPr>
             <a:r>
               <a:rPr lang="en-US" sz="1500" b="1" dirty="0">
                 <a:solidFill>
+                  <a:srgbClr val="FFFFFF"/>
+                </a:solidFill>
+                <a:latin typeface="Yu Gothic" pitchFamily="34" charset="0"/>
+                <a:ea typeface="Yu Gothic" pitchFamily="34" charset="-122"/>
+                <a:cs typeface="Yu Gothic" pitchFamily="34" charset="-120"/>
+              </a:rPr>
+              <a:t>1</a:t>
+            </a:r>
+            <a:endParaRPr lang="en-US" sz="1500" dirty="0"/>
+          </a:p>
+        </p:txBody>
+      </p:sp>
+      <p:sp>
+        <p:nvSpPr>
+          <p:cNvPr id="7" name="Text 5"/>
+          <p:cNvSpPr/>
+          <p:nvPr/>
+        </p:nvSpPr>
+        <p:spPr>
+          <a:xfrm>
+            <a:off x="1600200" y="2176272"/>
+            <a:ext cx="2316175" cy="411480"/>
+          </a:xfrm>
+          <a:prstGeom prst="rect">
+            <a:avLst/>
+          </a:prstGeom>
+          <a:noFill/>
+          <a:ln/>
+        </p:spPr>
+        <p:txBody>
+          <a:bodyPr wrap="square" lIns="0" tIns="0" rIns="0" bIns="0" rtlCol="0" anchor="ctr"/>
+          <a:lstStyle/>
+          <a:p>
+            <a:pPr indent="0" marL="0">
+              <a:buNone/>
+            </a:pPr>
+            <a:r>
+              <a:rPr lang="en-US" sz="1700" b="1" dirty="0">
+                <a:solidFill>
                   <a:srgbClr val="14504B"/>
                 </a:solidFill>
                 <a:latin typeface="Yu Gothic" pitchFamily="34" charset="0"/>
                 <a:ea typeface="Yu Gothic" pitchFamily="34" charset="-122"/>
                 <a:cs typeface="Yu Gothic" pitchFamily="34" charset="-120"/>
               </a:rPr>
-              <a:t>義務だから電話をかけるのではなく、続けられる形にする。それが結果として、選ばれる薬局につながる</a:t>
+              <a:t>施設が記録する</a:t>
+            </a:r>
+            <a:endParaRPr lang="en-US" sz="1700" dirty="0"/>
+          </a:p>
+        </p:txBody>
+      </p:sp>
+      <p:sp>
+        <p:nvSpPr>
+          <p:cNvPr id="8" name="Text 6"/>
+          <p:cNvSpPr/>
+          <p:nvPr/>
+        </p:nvSpPr>
+        <p:spPr>
+          <a:xfrm>
+            <a:off x="1005840" y="2724912"/>
+            <a:ext cx="2956255" cy="1554480"/>
+          </a:xfrm>
+          <a:prstGeom prst="rect">
+            <a:avLst/>
+          </a:prstGeom>
+          <a:noFill/>
+          <a:ln/>
+        </p:spPr>
+        <p:txBody>
+          <a:bodyPr wrap="square" lIns="0" tIns="0" rIns="0" bIns="0" rtlCol="0" anchor="ctr"/>
+          <a:lstStyle/>
+          <a:p>
+            <a:pPr indent="0" marL="0">
+              <a:lnSpc>
+                <a:spcPct val="125000"/>
+              </a:lnSpc>
+              <a:buNone/>
+            </a:pPr>
+            <a:r>
+              <a:rPr lang="en-US" sz="1350" dirty="0">
+                <a:solidFill>
+                  <a:srgbClr val="16211F"/>
+                </a:solidFill>
+                <a:latin typeface="Yu Gothic" pitchFamily="34" charset="0"/>
+                <a:ea typeface="Yu Gothic" pitchFamily="34" charset="-122"/>
+                <a:cs typeface="Yu Gothic" pitchFamily="34" charset="-120"/>
+              </a:rPr>
+              <a:t>服薬の実施、血圧・体温・SpO₂。</a:t>
+            </a:r>
+            <a:endParaRPr lang="en-US" sz="1350" dirty="0"/>
+          </a:p>
+          <a:p>
+            <a:pPr indent="0" marL="0">
+              <a:lnSpc>
+                <a:spcPct val="125000"/>
+              </a:lnSpc>
+              <a:buNone/>
+            </a:pPr>
+            <a:r>
+              <a:rPr lang="en-US" sz="1350" dirty="0">
+                <a:solidFill>
+                  <a:srgbClr val="16211F"/>
+                </a:solidFill>
+                <a:latin typeface="Yu Gothic" pitchFamily="34" charset="0"/>
+                <a:ea typeface="Yu Gothic" pitchFamily="34" charset="-122"/>
+                <a:cs typeface="Yu Gothic" pitchFamily="34" charset="-120"/>
+              </a:rPr>
+              <a:t>いつも職員がつけている記録を、</a:t>
+            </a:r>
+            <a:endParaRPr lang="en-US" sz="1350" dirty="0"/>
+          </a:p>
+          <a:p>
+            <a:pPr indent="0" marL="0">
+              <a:lnSpc>
+                <a:spcPct val="125000"/>
+              </a:lnSpc>
+              <a:buNone/>
+            </a:pPr>
+            <a:r>
+              <a:rPr lang="en-US" sz="1350" dirty="0">
+                <a:solidFill>
+                  <a:srgbClr val="16211F"/>
+                </a:solidFill>
+                <a:latin typeface="Yu Gothic" pitchFamily="34" charset="0"/>
+                <a:ea typeface="Yu Gothic" pitchFamily="34" charset="-122"/>
+                <a:cs typeface="Yu Gothic" pitchFamily="34" charset="-120"/>
+              </a:rPr>
+              <a:t>そのまま入れる。</a:t>
+            </a:r>
+            <a:endParaRPr lang="en-US" sz="1350" dirty="0"/>
+          </a:p>
+        </p:txBody>
+      </p:sp>
+      <p:sp>
+        <p:nvSpPr>
+          <p:cNvPr id="9" name="Shape 7"/>
+          <p:cNvSpPr/>
+          <p:nvPr/>
+        </p:nvSpPr>
+        <p:spPr>
+          <a:xfrm>
+            <a:off x="4163263" y="3154680"/>
+            <a:ext cx="182880" cy="237744"/>
+          </a:xfrm>
+          <a:prstGeom prst="rightArrow">
+            <a:avLst/>
+          </a:prstGeom>
+          <a:solidFill>
+            <a:srgbClr val="A8CFC9"/>
+          </a:solidFill>
+          <a:ln w="12700">
+            <a:solidFill>
+              <a:srgbClr val="A8CFC9"/>
+            </a:solidFill>
+            <a:prstDash val="solid"/>
+          </a:ln>
+        </p:spPr>
+      </p:sp>
+      <p:sp>
+        <p:nvSpPr>
+          <p:cNvPr id="10" name="Shape 8"/>
+          <p:cNvSpPr/>
+          <p:nvPr/>
+        </p:nvSpPr>
+        <p:spPr>
+          <a:xfrm>
+            <a:off x="4373575" y="1920240"/>
+            <a:ext cx="3413455" cy="2651760"/>
+          </a:xfrm>
+          <a:prstGeom prst="roundRect">
+            <a:avLst>
+              <a:gd name="adj" fmla="val 2759"/>
+            </a:avLst>
+          </a:prstGeom>
+          <a:solidFill>
+            <a:srgbClr val="F1F6F5"/>
+          </a:solidFill>
+          <a:ln w="12700">
+            <a:solidFill>
+              <a:srgbClr val="F1F6F5"/>
+            </a:solidFill>
+            <a:prstDash val="solid"/>
+          </a:ln>
+        </p:spPr>
+      </p:sp>
+      <p:sp>
+        <p:nvSpPr>
+          <p:cNvPr id="11" name="Shape 9"/>
+          <p:cNvSpPr/>
+          <p:nvPr/>
+        </p:nvSpPr>
+        <p:spPr>
+          <a:xfrm>
+            <a:off x="4647895" y="2148840"/>
+            <a:ext cx="457200" cy="457200"/>
+          </a:xfrm>
+          <a:prstGeom prst="ellipse">
+            <a:avLst/>
+          </a:prstGeom>
+          <a:solidFill>
+            <a:srgbClr val="14504B"/>
+          </a:solidFill>
+          <a:ln w="12700">
+            <a:solidFill>
+              <a:srgbClr val="14504B"/>
+            </a:solidFill>
+            <a:prstDash val="solid"/>
+          </a:ln>
+        </p:spPr>
+      </p:sp>
+      <p:sp>
+        <p:nvSpPr>
+          <p:cNvPr id="12" name="Text 10"/>
+          <p:cNvSpPr/>
+          <p:nvPr/>
+        </p:nvSpPr>
+        <p:spPr>
+          <a:xfrm>
+            <a:off x="4647895" y="2148840"/>
+            <a:ext cx="457200" cy="457200"/>
+          </a:xfrm>
+          <a:prstGeom prst="rect">
+            <a:avLst/>
+          </a:prstGeom>
+          <a:noFill/>
+          <a:ln/>
+        </p:spPr>
+        <p:txBody>
+          <a:bodyPr wrap="square" lIns="0" tIns="0" rIns="0" bIns="0" rtlCol="0" anchor="ctr"/>
+          <a:lstStyle/>
+          <a:p>
+            <a:pPr algn="ctr" indent="0" marL="0">
+              <a:buNone/>
+            </a:pPr>
+            <a:r>
+              <a:rPr lang="en-US" sz="1500" b="1" dirty="0">
+                <a:solidFill>
+                  <a:srgbClr val="FFFFFF"/>
+                </a:solidFill>
+                <a:latin typeface="Yu Gothic" pitchFamily="34" charset="0"/>
+                <a:ea typeface="Yu Gothic" pitchFamily="34" charset="-122"/>
+                <a:cs typeface="Yu Gothic" pitchFamily="34" charset="-120"/>
+              </a:rPr>
+              <a:t>2</a:t>
             </a:r>
             <a:endParaRPr lang="en-US" sz="1500" dirty="0"/>
+          </a:p>
+        </p:txBody>
+      </p:sp>
+      <p:sp>
+        <p:nvSpPr>
+          <p:cNvPr id="13" name="Text 11"/>
+          <p:cNvSpPr/>
+          <p:nvPr/>
+        </p:nvSpPr>
+        <p:spPr>
+          <a:xfrm>
+            <a:off x="5242255" y="2176272"/>
+            <a:ext cx="2316175" cy="411480"/>
+          </a:xfrm>
+          <a:prstGeom prst="rect">
+            <a:avLst/>
+          </a:prstGeom>
+          <a:noFill/>
+          <a:ln/>
+        </p:spPr>
+        <p:txBody>
+          <a:bodyPr wrap="square" lIns="0" tIns="0" rIns="0" bIns="0" rtlCol="0" anchor="ctr"/>
+          <a:lstStyle/>
+          <a:p>
+            <a:pPr indent="0" marL="0">
+              <a:buNone/>
+            </a:pPr>
+            <a:r>
+              <a:rPr lang="en-US" sz="1700" b="1" dirty="0">
+                <a:solidFill>
+                  <a:srgbClr val="14504B"/>
+                </a:solidFill>
+                <a:latin typeface="Yu Gothic" pitchFamily="34" charset="0"/>
+                <a:ea typeface="Yu Gothic" pitchFamily="34" charset="-122"/>
+                <a:cs typeface="Yu Gothic" pitchFamily="34" charset="-120"/>
+              </a:rPr>
+              <a:t>薬剤師に相談する</a:t>
+            </a:r>
+            <a:endParaRPr lang="en-US" sz="1700" dirty="0"/>
+          </a:p>
+        </p:txBody>
+      </p:sp>
+      <p:sp>
+        <p:nvSpPr>
+          <p:cNvPr id="14" name="Text 12"/>
+          <p:cNvSpPr/>
+          <p:nvPr/>
+        </p:nvSpPr>
+        <p:spPr>
+          <a:xfrm>
+            <a:off x="4647895" y="2724912"/>
+            <a:ext cx="2956255" cy="1554480"/>
+          </a:xfrm>
+          <a:prstGeom prst="rect">
+            <a:avLst/>
+          </a:prstGeom>
+          <a:noFill/>
+          <a:ln/>
+        </p:spPr>
+        <p:txBody>
+          <a:bodyPr wrap="square" lIns="0" tIns="0" rIns="0" bIns="0" rtlCol="0" anchor="ctr"/>
+          <a:lstStyle/>
+          <a:p>
+            <a:pPr indent="0" marL="0">
+              <a:lnSpc>
+                <a:spcPct val="125000"/>
+              </a:lnSpc>
+              <a:buNone/>
+            </a:pPr>
+            <a:r>
+              <a:rPr lang="en-US" sz="1350" dirty="0">
+                <a:solidFill>
+                  <a:srgbClr val="16211F"/>
+                </a:solidFill>
+                <a:latin typeface="Yu Gothic" pitchFamily="34" charset="0"/>
+                <a:ea typeface="Yu Gothic" pitchFamily="34" charset="-122"/>
+                <a:cs typeface="Yu Gothic" pitchFamily="34" charset="-120"/>
+              </a:rPr>
+              <a:t>電話と違い、何の薬の話かを</a:t>
+            </a:r>
+            <a:endParaRPr lang="en-US" sz="1350" dirty="0"/>
+          </a:p>
+          <a:p>
+            <a:pPr indent="0" marL="0">
+              <a:lnSpc>
+                <a:spcPct val="125000"/>
+              </a:lnSpc>
+              <a:buNone/>
+            </a:pPr>
+            <a:r>
+              <a:rPr lang="en-US" sz="1350" dirty="0">
+                <a:solidFill>
+                  <a:srgbClr val="16211F"/>
+                </a:solidFill>
+                <a:latin typeface="Yu Gothic" pitchFamily="34" charset="0"/>
+                <a:ea typeface="Yu Gothic" pitchFamily="34" charset="-122"/>
+                <a:cs typeface="Yu Gothic" pitchFamily="34" charset="-120"/>
+              </a:rPr>
+              <a:t>説明し直さなくていい。</a:t>
+            </a:r>
+            <a:endParaRPr lang="en-US" sz="1350" dirty="0"/>
+          </a:p>
+          <a:p>
+            <a:pPr indent="0" marL="0">
+              <a:lnSpc>
+                <a:spcPct val="125000"/>
+              </a:lnSpc>
+              <a:buNone/>
+            </a:pPr>
+            <a:r>
+              <a:rPr lang="en-US" sz="1350" dirty="0">
+                <a:solidFill>
+                  <a:srgbClr val="16211F"/>
+                </a:solidFill>
+                <a:latin typeface="Yu Gothic" pitchFamily="34" charset="0"/>
+                <a:ea typeface="Yu Gothic" pitchFamily="34" charset="-122"/>
+                <a:cs typeface="Yu Gothic" pitchFamily="34" charset="-120"/>
+              </a:rPr>
+              <a:t>やり取りは記録として残る。</a:t>
+            </a:r>
+            <a:endParaRPr lang="en-US" sz="1350" dirty="0"/>
+          </a:p>
+        </p:txBody>
+      </p:sp>
+      <p:sp>
+        <p:nvSpPr>
+          <p:cNvPr id="15" name="Shape 13"/>
+          <p:cNvSpPr/>
+          <p:nvPr/>
+        </p:nvSpPr>
+        <p:spPr>
+          <a:xfrm>
+            <a:off x="7805318" y="3154680"/>
+            <a:ext cx="182880" cy="237744"/>
+          </a:xfrm>
+          <a:prstGeom prst="rightArrow">
+            <a:avLst/>
+          </a:prstGeom>
+          <a:solidFill>
+            <a:srgbClr val="A8CFC9"/>
+          </a:solidFill>
+          <a:ln w="12700">
+            <a:solidFill>
+              <a:srgbClr val="A8CFC9"/>
+            </a:solidFill>
+            <a:prstDash val="solid"/>
+          </a:ln>
+        </p:spPr>
+      </p:sp>
+      <p:sp>
+        <p:nvSpPr>
+          <p:cNvPr id="16" name="Shape 14"/>
+          <p:cNvSpPr/>
+          <p:nvPr/>
+        </p:nvSpPr>
+        <p:spPr>
+          <a:xfrm>
+            <a:off x="8015630" y="1920240"/>
+            <a:ext cx="3413455" cy="2651760"/>
+          </a:xfrm>
+          <a:prstGeom prst="roundRect">
+            <a:avLst>
+              <a:gd name="adj" fmla="val 2759"/>
+            </a:avLst>
+          </a:prstGeom>
+          <a:solidFill>
+            <a:srgbClr val="F1F6F5"/>
+          </a:solidFill>
+          <a:ln w="12700">
+            <a:solidFill>
+              <a:srgbClr val="F1F6F5"/>
+            </a:solidFill>
+            <a:prstDash val="solid"/>
+          </a:ln>
+        </p:spPr>
+      </p:sp>
+      <p:sp>
+        <p:nvSpPr>
+          <p:cNvPr id="17" name="Shape 15"/>
+          <p:cNvSpPr/>
+          <p:nvPr/>
+        </p:nvSpPr>
+        <p:spPr>
+          <a:xfrm>
+            <a:off x="8289950" y="2148840"/>
+            <a:ext cx="457200" cy="457200"/>
+          </a:xfrm>
+          <a:prstGeom prst="ellipse">
+            <a:avLst/>
+          </a:prstGeom>
+          <a:solidFill>
+            <a:srgbClr val="14504B"/>
+          </a:solidFill>
+          <a:ln w="12700">
+            <a:solidFill>
+              <a:srgbClr val="14504B"/>
+            </a:solidFill>
+            <a:prstDash val="solid"/>
+          </a:ln>
+        </p:spPr>
+      </p:sp>
+      <p:sp>
+        <p:nvSpPr>
+          <p:cNvPr id="18" name="Text 16"/>
+          <p:cNvSpPr/>
+          <p:nvPr/>
+        </p:nvSpPr>
+        <p:spPr>
+          <a:xfrm>
+            <a:off x="8289950" y="2148840"/>
+            <a:ext cx="457200" cy="457200"/>
+          </a:xfrm>
+          <a:prstGeom prst="rect">
+            <a:avLst/>
+          </a:prstGeom>
+          <a:noFill/>
+          <a:ln/>
+        </p:spPr>
+        <p:txBody>
+          <a:bodyPr wrap="square" lIns="0" tIns="0" rIns="0" bIns="0" rtlCol="0" anchor="ctr"/>
+          <a:lstStyle/>
+          <a:p>
+            <a:pPr algn="ctr" indent="0" marL="0">
+              <a:buNone/>
+            </a:pPr>
+            <a:r>
+              <a:rPr lang="en-US" sz="1500" b="1" dirty="0">
+                <a:solidFill>
+                  <a:srgbClr val="FFFFFF"/>
+                </a:solidFill>
+                <a:latin typeface="Yu Gothic" pitchFamily="34" charset="0"/>
+                <a:ea typeface="Yu Gothic" pitchFamily="34" charset="-122"/>
+                <a:cs typeface="Yu Gothic" pitchFamily="34" charset="-120"/>
+              </a:rPr>
+              <a:t>3</a:t>
+            </a:r>
+            <a:endParaRPr lang="en-US" sz="1500" dirty="0"/>
+          </a:p>
+        </p:txBody>
+      </p:sp>
+      <p:sp>
+        <p:nvSpPr>
+          <p:cNvPr id="19" name="Text 17"/>
+          <p:cNvSpPr/>
+          <p:nvPr/>
+        </p:nvSpPr>
+        <p:spPr>
+          <a:xfrm>
+            <a:off x="8884310" y="2176272"/>
+            <a:ext cx="2316175" cy="411480"/>
+          </a:xfrm>
+          <a:prstGeom prst="rect">
+            <a:avLst/>
+          </a:prstGeom>
+          <a:noFill/>
+          <a:ln/>
+        </p:spPr>
+        <p:txBody>
+          <a:bodyPr wrap="square" lIns="0" tIns="0" rIns="0" bIns="0" rtlCol="0" anchor="ctr"/>
+          <a:lstStyle/>
+          <a:p>
+            <a:pPr indent="0" marL="0">
+              <a:buNone/>
+            </a:pPr>
+            <a:r>
+              <a:rPr lang="en-US" sz="1700" b="1" dirty="0">
+                <a:solidFill>
+                  <a:srgbClr val="14504B"/>
+                </a:solidFill>
+                <a:latin typeface="Yu Gothic" pitchFamily="34" charset="0"/>
+                <a:ea typeface="Yu Gothic" pitchFamily="34" charset="-122"/>
+                <a:cs typeface="Yu Gothic" pitchFamily="34" charset="-120"/>
+              </a:rPr>
+              <a:t>その人に合わせて返す</a:t>
+            </a:r>
+            <a:endParaRPr lang="en-US" sz="1700" dirty="0"/>
+          </a:p>
+        </p:txBody>
+      </p:sp>
+      <p:sp>
+        <p:nvSpPr>
+          <p:cNvPr id="20" name="Text 18"/>
+          <p:cNvSpPr/>
+          <p:nvPr/>
+        </p:nvSpPr>
+        <p:spPr>
+          <a:xfrm>
+            <a:off x="8289950" y="2724912"/>
+            <a:ext cx="2956255" cy="1554480"/>
+          </a:xfrm>
+          <a:prstGeom prst="rect">
+            <a:avLst/>
+          </a:prstGeom>
+          <a:noFill/>
+          <a:ln/>
+        </p:spPr>
+        <p:txBody>
+          <a:bodyPr wrap="square" lIns="0" tIns="0" rIns="0" bIns="0" rtlCol="0" anchor="ctr"/>
+          <a:lstStyle/>
+          <a:p>
+            <a:pPr indent="0" marL="0">
+              <a:lnSpc>
+                <a:spcPct val="125000"/>
+              </a:lnSpc>
+              <a:buNone/>
+            </a:pPr>
+            <a:r>
+              <a:rPr lang="en-US" sz="1350" dirty="0">
+                <a:solidFill>
+                  <a:srgbClr val="16211F"/>
+                </a:solidFill>
+                <a:latin typeface="Yu Gothic" pitchFamily="34" charset="0"/>
+                <a:ea typeface="Yu Gothic" pitchFamily="34" charset="-122"/>
+                <a:cs typeface="Yu Gothic" pitchFamily="34" charset="-120"/>
+              </a:rPr>
+              <a:t>腎機能・肝機能・年齢を見て</a:t>
+            </a:r>
+            <a:endParaRPr lang="en-US" sz="1350" dirty="0"/>
+          </a:p>
+          <a:p>
+            <a:pPr indent="0" marL="0">
+              <a:lnSpc>
+                <a:spcPct val="125000"/>
+              </a:lnSpc>
+              <a:buNone/>
+            </a:pPr>
+            <a:r>
+              <a:rPr lang="en-US" sz="1350" dirty="0">
+                <a:solidFill>
+                  <a:srgbClr val="16211F"/>
+                </a:solidFill>
+                <a:latin typeface="Yu Gothic" pitchFamily="34" charset="0"/>
+                <a:ea typeface="Yu Gothic" pitchFamily="34" charset="-122"/>
+                <a:cs typeface="Yu Gothic" pitchFamily="34" charset="-120"/>
+              </a:rPr>
+              <a:t>注意点を出し分ける。</a:t>
+            </a:r>
+            <a:endParaRPr lang="en-US" sz="1350" dirty="0"/>
+          </a:p>
+          <a:p>
+            <a:pPr indent="0" marL="0">
+              <a:lnSpc>
+                <a:spcPct val="125000"/>
+              </a:lnSpc>
+              <a:buNone/>
+            </a:pPr>
+            <a:r>
+              <a:rPr lang="en-US" sz="1350" dirty="0">
+                <a:solidFill>
+                  <a:srgbClr val="16211F"/>
+                </a:solidFill>
+                <a:latin typeface="Yu Gothic" pitchFamily="34" charset="0"/>
+                <a:ea typeface="Yu Gothic" pitchFamily="34" charset="-122"/>
+                <a:cs typeface="Yu Gothic" pitchFamily="34" charset="-120"/>
+              </a:rPr>
+              <a:t>症状からは、受診かOTCかの</a:t>
+            </a:r>
+            <a:endParaRPr lang="en-US" sz="1350" dirty="0"/>
+          </a:p>
+          <a:p>
+            <a:pPr indent="0" marL="0">
+              <a:lnSpc>
+                <a:spcPct val="125000"/>
+              </a:lnSpc>
+              <a:buNone/>
+            </a:pPr>
+            <a:r>
+              <a:rPr lang="en-US" sz="1350" dirty="0">
+                <a:solidFill>
+                  <a:srgbClr val="16211F"/>
+                </a:solidFill>
+                <a:latin typeface="Yu Gothic" pitchFamily="34" charset="0"/>
+                <a:ea typeface="Yu Gothic" pitchFamily="34" charset="-122"/>
+                <a:cs typeface="Yu Gothic" pitchFamily="34" charset="-120"/>
+              </a:rPr>
+              <a:t>目安を出す。</a:t>
+            </a:r>
+            <a:endParaRPr lang="en-US" sz="1350" dirty="0"/>
+          </a:p>
+        </p:txBody>
+      </p:sp>
+      <p:sp>
+        <p:nvSpPr>
+          <p:cNvPr id="21" name="Text 19"/>
+          <p:cNvSpPr/>
+          <p:nvPr/>
+        </p:nvSpPr>
+        <p:spPr>
+          <a:xfrm>
+            <a:off x="731520" y="4846320"/>
+            <a:ext cx="10698480" cy="365760"/>
+          </a:xfrm>
+          <a:prstGeom prst="rect">
+            <a:avLst/>
+          </a:prstGeom>
+          <a:noFill/>
+          <a:ln/>
+        </p:spPr>
+        <p:txBody>
+          <a:bodyPr wrap="square" lIns="0" tIns="0" rIns="0" bIns="0" rtlCol="0" anchor="ctr"/>
+          <a:lstStyle/>
+          <a:p>
+            <a:pPr indent="0" marL="0">
+              <a:buNone/>
+            </a:pPr>
+            <a:r>
+              <a:rPr lang="en-US" sz="1300" b="1" dirty="0">
+                <a:solidFill>
+                  <a:srgbClr val="1F6F78"/>
+                </a:solidFill>
+                <a:latin typeface="Yu Gothic" pitchFamily="34" charset="0"/>
+                <a:ea typeface="Yu Gothic" pitchFamily="34" charset="-122"/>
+                <a:cs typeface="Yu Gothic" pitchFamily="34" charset="-120"/>
+              </a:rPr>
+              <a:t>ここが既存サービスとの違い</a:t>
+            </a:r>
+            <a:endParaRPr lang="en-US" sz="1300" dirty="0"/>
+          </a:p>
+        </p:txBody>
+      </p:sp>
+      <p:sp>
+        <p:nvSpPr>
+          <p:cNvPr id="22" name="Shape 20"/>
+          <p:cNvSpPr/>
+          <p:nvPr/>
+        </p:nvSpPr>
+        <p:spPr>
+          <a:xfrm>
+            <a:off x="731520" y="5321808"/>
+            <a:ext cx="36576" cy="384048"/>
+          </a:xfrm>
+          <a:prstGeom prst="rect">
+            <a:avLst/>
+          </a:prstGeom>
+          <a:solidFill>
+            <a:srgbClr val="D98A2B"/>
+          </a:solidFill>
+          <a:ln w="12700">
+            <a:solidFill>
+              <a:srgbClr val="D98A2B"/>
+            </a:solidFill>
+            <a:prstDash val="solid"/>
+          </a:ln>
+        </p:spPr>
+      </p:sp>
+      <p:sp>
+        <p:nvSpPr>
+          <p:cNvPr id="23" name="Text 21"/>
+          <p:cNvSpPr/>
+          <p:nvPr/>
+        </p:nvSpPr>
+        <p:spPr>
+          <a:xfrm>
+            <a:off x="960120" y="5285232"/>
+            <a:ext cx="10424160" cy="457200"/>
+          </a:xfrm>
+          <a:prstGeom prst="rect">
+            <a:avLst/>
+          </a:prstGeom>
+          <a:noFill/>
+          <a:ln/>
+        </p:spPr>
+        <p:txBody>
+          <a:bodyPr wrap="square" lIns="0" tIns="0" rIns="0" bIns="0" rtlCol="0" anchor="ctr"/>
+          <a:lstStyle/>
+          <a:p>
+            <a:pPr indent="0" marL="0">
+              <a:buNone/>
+            </a:pPr>
+            <a:r>
+              <a:rPr lang="en-US" sz="1400" dirty="0">
+                <a:solidFill>
+                  <a:srgbClr val="16211F"/>
+                </a:solidFill>
+                <a:latin typeface="Yu Gothic" pitchFamily="34" charset="0"/>
+                <a:ea typeface="Yu Gothic" pitchFamily="34" charset="-122"/>
+                <a:cs typeface="Yu Gothic" pitchFamily="34" charset="-120"/>
+              </a:rPr>
+              <a:t>バイタルが薬の話とつながっている — 「血圧が下がってきたので降圧薬を見直しては」という会話が、数字を見ながらできる</a:t>
+            </a:r>
+            <a:endParaRPr lang="en-US" sz="1400" dirty="0"/>
+          </a:p>
+        </p:txBody>
+      </p:sp>
+      <p:sp>
+        <p:nvSpPr>
+          <p:cNvPr id="24" name="Shape 22"/>
+          <p:cNvSpPr/>
+          <p:nvPr/>
+        </p:nvSpPr>
+        <p:spPr>
+          <a:xfrm>
+            <a:off x="731520" y="5870448"/>
+            <a:ext cx="36576" cy="384048"/>
+          </a:xfrm>
+          <a:prstGeom prst="rect">
+            <a:avLst/>
+          </a:prstGeom>
+          <a:solidFill>
+            <a:srgbClr val="D98A2B"/>
+          </a:solidFill>
+          <a:ln w="12700">
+            <a:solidFill>
+              <a:srgbClr val="D98A2B"/>
+            </a:solidFill>
+            <a:prstDash val="solid"/>
+          </a:ln>
+        </p:spPr>
+      </p:sp>
+      <p:sp>
+        <p:nvSpPr>
+          <p:cNvPr id="25" name="Text 23"/>
+          <p:cNvSpPr/>
+          <p:nvPr/>
+        </p:nvSpPr>
+        <p:spPr>
+          <a:xfrm>
+            <a:off x="960120" y="5833872"/>
+            <a:ext cx="10424160" cy="457200"/>
+          </a:xfrm>
+          <a:prstGeom prst="rect">
+            <a:avLst/>
+          </a:prstGeom>
+          <a:noFill/>
+          <a:ln/>
+        </p:spPr>
+        <p:txBody>
+          <a:bodyPr wrap="square" lIns="0" tIns="0" rIns="0" bIns="0" rtlCol="0" anchor="ctr"/>
+          <a:lstStyle/>
+          <a:p>
+            <a:pPr indent="0" marL="0">
+              <a:buNone/>
+            </a:pPr>
+            <a:r>
+              <a:rPr lang="en-US" sz="1400" dirty="0">
+                <a:solidFill>
+                  <a:srgbClr val="16211F"/>
+                </a:solidFill>
+                <a:latin typeface="Yu Gothic" pitchFamily="34" charset="0"/>
+                <a:ea typeface="Yu Gothic" pitchFamily="34" charset="-122"/>
+                <a:cs typeface="Yu Gothic" pitchFamily="34" charset="-120"/>
+              </a:rPr>
+              <a:t>症状が出たときの入口がある — 受診すべきか、市販薬で様子を見てよいかの目安を、危険な兆候の有無から出す</a:t>
+            </a:r>
+            <a:endParaRPr lang="en-US" sz="1400" dirty="0"/>
           </a:p>
         </p:txBody>
       </p:sp>

--- a/PharmaCare_紹介資料.pptx
+++ b/PharmaCare_紹介資料.pptx
@@ -16785,7 +16785,7 @@
                 <a:ea typeface="Yu Gothic" pitchFamily="34" charset="-122"/>
                 <a:cs typeface="Yu Gothic" pitchFamily="34" charset="-120"/>
               </a:rPr>
-              <a:t>日々の記録から、判断の支援まで</a:t>
+              <a:t>施設を単位に、関わる人が集まる</a:t>
             </a:r>
             <a:endParaRPr lang="en-US" sz="3600" dirty="0"/>
           </a:p>
@@ -16824,7 +16824,7 @@
                 <a:ea typeface="Yu Gothic" pitchFamily="34" charset="-122"/>
                 <a:cs typeface="Yu Gothic" pitchFamily="34" charset="-120"/>
               </a:rPr>
-              <a:t>記録する・相談する・判断を助ける。ばらばらだったものが、ひとつの画面の中でつながります</a:t>
+              <a:t>作るのは施設ひとつ。あとは招待コードで、職員・薬剤師・ご家族が加わります</a:t>
             </a:r>
             <a:endParaRPr lang="en-US" sz="1600" dirty="0"/>
           </a:p>
@@ -16838,12 +16838,12 @@
         </p:nvSpPr>
         <p:spPr>
           <a:xfrm>
-            <a:off x="731520" y="1920240"/>
-            <a:ext cx="2503170" cy="1965960"/>
+            <a:off x="731520" y="2057400"/>
+            <a:ext cx="1920240" cy="1828800"/>
           </a:xfrm>
           <a:prstGeom prst="roundRect">
             <a:avLst>
-              <a:gd name="adj" fmla="val 3721"/>
+              <a:gd name="adj" fmla="val 4000"/>
             </a:avLst>
           </a:prstGeom>
           <a:solidFill>
@@ -16865,8 +16865,163 @@
         </p:nvSpPr>
         <p:spPr>
           <a:xfrm>
-            <a:off x="950976" y="2121408"/>
-            <a:ext cx="402336" cy="402336"/>
+            <a:off x="1417320" y="2286000"/>
+            <a:ext cx="566928" cy="566928"/>
+          </a:xfrm>
+          <a:prstGeom prst="ellipse">
+            <a:avLst/>
+          </a:prstGeom>
+          <a:solidFill>
+            <a:srgbClr val="14504B"/>
+          </a:solidFill>
+          <a:ln w="12700">
+            <a:solidFill>
+              <a:srgbClr val="14504B"/>
+            </a:solidFill>
+            <a:prstDash val="solid"/>
+          </a:ln>
+        </p:spPr>
+      </p:sp>
+      <p:sp>
+        <p:nvSpPr>
+          <p:cNvPr id="6" name="Text 4"/>
+          <p:cNvSpPr/>
+          <p:nvPr/>
+        </p:nvSpPr>
+        <p:spPr>
+          <a:xfrm>
+            <a:off x="1417320" y="2286000"/>
+            <a:ext cx="566928" cy="566928"/>
+          </a:xfrm>
+          <a:prstGeom prst="rect">
+            <a:avLst/>
+          </a:prstGeom>
+          <a:noFill/>
+          <a:ln/>
+        </p:spPr>
+        <p:txBody>
+          <a:bodyPr wrap="square" lIns="0" tIns="0" rIns="0" bIns="0" rtlCol="0" anchor="ctr"/>
+          <a:lstStyle/>
+          <a:p>
+            <a:pPr algn="ctr" indent="0" marL="0">
+              <a:buNone/>
+            </a:pPr>
+            <a:r>
+              <a:rPr lang="en-US" sz="2000" b="1" dirty="0">
+                <a:solidFill>
+                  <a:srgbClr val="FFFFFF"/>
+                </a:solidFill>
+                <a:latin typeface="Yu Gothic" pitchFamily="34" charset="0"/>
+                <a:ea typeface="Yu Gothic" pitchFamily="34" charset="-122"/>
+                <a:cs typeface="Yu Gothic" pitchFamily="34" charset="-120"/>
+              </a:rPr>
+              <a:t>1</a:t>
+            </a:r>
+            <a:endParaRPr lang="en-US" sz="2000" dirty="0"/>
+          </a:p>
+        </p:txBody>
+      </p:sp>
+      <p:sp>
+        <p:nvSpPr>
+          <p:cNvPr id="7" name="Text 5"/>
+          <p:cNvSpPr/>
+          <p:nvPr/>
+        </p:nvSpPr>
+        <p:spPr>
+          <a:xfrm>
+            <a:off x="749808" y="3063240"/>
+            <a:ext cx="1883664" cy="685800"/>
+          </a:xfrm>
+          <a:prstGeom prst="rect">
+            <a:avLst/>
+          </a:prstGeom>
+          <a:noFill/>
+          <a:ln/>
+        </p:spPr>
+        <p:txBody>
+          <a:bodyPr wrap="square" lIns="0" tIns="0" rIns="0" bIns="0" rtlCol="0" anchor="ctr"/>
+          <a:lstStyle/>
+          <a:p>
+            <a:pPr algn="ctr" indent="0" marL="0">
+              <a:buNone/>
+            </a:pPr>
+            <a:r>
+              <a:rPr lang="en-US" sz="1500" b="1" dirty="0">
+                <a:solidFill>
+                  <a:srgbClr val="14504B"/>
+                </a:solidFill>
+                <a:latin typeface="Yu Gothic" pitchFamily="34" charset="0"/>
+                <a:ea typeface="Yu Gothic" pitchFamily="34" charset="-122"/>
+                <a:cs typeface="Yu Gothic" pitchFamily="34" charset="-120"/>
+              </a:rPr>
+              <a:t>施設をつくる</a:t>
+            </a:r>
+            <a:endParaRPr lang="en-US" sz="1500" dirty="0"/>
+          </a:p>
+        </p:txBody>
+      </p:sp>
+      <p:sp>
+        <p:nvSpPr>
+          <p:cNvPr id="8" name="Shape 6"/>
+          <p:cNvSpPr/>
+          <p:nvPr/>
+        </p:nvSpPr>
+        <p:spPr>
+          <a:xfrm>
+            <a:off x="2688336" y="2880360"/>
+            <a:ext cx="219456" cy="237744"/>
+          </a:xfrm>
+          <a:prstGeom prst="rightArrow">
+            <a:avLst/>
+          </a:prstGeom>
+          <a:solidFill>
+            <a:srgbClr val="A8CFC9"/>
+          </a:solidFill>
+          <a:ln w="12700">
+            <a:solidFill>
+              <a:srgbClr val="A8CFC9"/>
+            </a:solidFill>
+            <a:prstDash val="solid"/>
+          </a:ln>
+        </p:spPr>
+      </p:sp>
+      <p:sp>
+        <p:nvSpPr>
+          <p:cNvPr id="9" name="Shape 7"/>
+          <p:cNvSpPr/>
+          <p:nvPr/>
+        </p:nvSpPr>
+        <p:spPr>
+          <a:xfrm>
+            <a:off x="2971800" y="2057400"/>
+            <a:ext cx="1920240" cy="1828800"/>
+          </a:xfrm>
+          <a:prstGeom prst="roundRect">
+            <a:avLst>
+              <a:gd name="adj" fmla="val 4000"/>
+            </a:avLst>
+          </a:prstGeom>
+          <a:solidFill>
+            <a:srgbClr val="F1F6F5"/>
+          </a:solidFill>
+          <a:ln w="12700">
+            <a:solidFill>
+              <a:srgbClr val="F1F6F5"/>
+            </a:solidFill>
+            <a:prstDash val="solid"/>
+          </a:ln>
+        </p:spPr>
+      </p:sp>
+      <p:sp>
+        <p:nvSpPr>
+          <p:cNvPr id="10" name="Shape 8"/>
+          <p:cNvSpPr/>
+          <p:nvPr/>
+        </p:nvSpPr>
+        <p:spPr>
+          <a:xfrm>
+            <a:off x="3657600" y="2286000"/>
+            <a:ext cx="566928" cy="566928"/>
           </a:xfrm>
           <a:prstGeom prst="ellipse">
             <a:avLst/>
@@ -16884,14 +17039,14 @@
       </p:sp>
       <p:sp>
         <p:nvSpPr>
-          <p:cNvPr id="6" name="Text 4"/>
-          <p:cNvSpPr/>
-          <p:nvPr/>
-        </p:nvSpPr>
-        <p:spPr>
-          <a:xfrm>
-            <a:off x="950976" y="2121408"/>
-            <a:ext cx="402336" cy="402336"/>
+          <p:cNvPr id="11" name="Text 9"/>
+          <p:cNvSpPr/>
+          <p:nvPr/>
+        </p:nvSpPr>
+        <p:spPr>
+          <a:xfrm>
+            <a:off x="3657600" y="2286000"/>
+            <a:ext cx="566928" cy="566928"/>
           </a:xfrm>
           <a:prstGeom prst="rect">
             <a:avLst/>
@@ -16907,7 +17062,7 @@
               <a:buNone/>
             </a:pPr>
             <a:r>
-              <a:rPr lang="en-US" sz="1300" b="1" dirty="0">
+              <a:rPr lang="en-US" sz="2000" b="1" dirty="0">
                 <a:solidFill>
                   <a:srgbClr val="FFFFFF"/>
                 </a:solidFill>
@@ -16915,34 +17070,34 @@
                 <a:ea typeface="Yu Gothic" pitchFamily="34" charset="-122"/>
                 <a:cs typeface="Yu Gothic" pitchFamily="34" charset="-120"/>
               </a:rPr>
-              <a:t>1</a:t>
-            </a:r>
-            <a:endParaRPr lang="en-US" sz="1300" dirty="0"/>
-          </a:p>
-        </p:txBody>
-      </p:sp>
-      <p:sp>
-        <p:nvSpPr>
-          <p:cNvPr id="7" name="Text 5"/>
-          <p:cNvSpPr/>
-          <p:nvPr/>
-        </p:nvSpPr>
-        <p:spPr>
-          <a:xfrm>
-            <a:off x="932688" y="2615184"/>
-            <a:ext cx="2183130" cy="347472"/>
-          </a:xfrm>
-          <a:prstGeom prst="rect">
-            <a:avLst/>
-          </a:prstGeom>
-          <a:noFill/>
-          <a:ln/>
-        </p:spPr>
-        <p:txBody>
-          <a:bodyPr wrap="square" lIns="0" tIns="0" rIns="0" bIns="0" rtlCol="0" anchor="ctr"/>
-          <a:lstStyle/>
-          <a:p>
-            <a:pPr indent="0" marL="0">
+              <a:t>2</a:t>
+            </a:r>
+            <a:endParaRPr lang="en-US" sz="2000" dirty="0"/>
+          </a:p>
+        </p:txBody>
+      </p:sp>
+      <p:sp>
+        <p:nvSpPr>
+          <p:cNvPr id="12" name="Text 10"/>
+          <p:cNvSpPr/>
+          <p:nvPr/>
+        </p:nvSpPr>
+        <p:spPr>
+          <a:xfrm>
+            <a:off x="2990088" y="3063240"/>
+            <a:ext cx="1883664" cy="685800"/>
+          </a:xfrm>
+          <a:prstGeom prst="rect">
+            <a:avLst/>
+          </a:prstGeom>
+          <a:noFill/>
+          <a:ln/>
+        </p:spPr>
+        <p:txBody>
+          <a:bodyPr wrap="square" lIns="0" tIns="0" rIns="0" bIns="0" rtlCol="0" anchor="ctr"/>
+          <a:lstStyle/>
+          <a:p>
+            <a:pPr algn="ctr" indent="0" marL="0">
               <a:buNone/>
             </a:pPr>
             <a:r>
@@ -16954,7 +17109,7 @@
                 <a:ea typeface="Yu Gothic" pitchFamily="34" charset="-122"/>
                 <a:cs typeface="Yu Gothic" pitchFamily="34" charset="-120"/>
               </a:rPr>
-              <a:t>お薬手帳</a:t>
+              <a:t>招待コード発行</a:t>
             </a:r>
             <a:endParaRPr lang="en-US" sz="1500" dirty="0"/>
           </a:p>
@@ -16962,80 +17117,43 @@
       </p:sp>
       <p:sp>
         <p:nvSpPr>
-          <p:cNvPr id="8" name="Text 6"/>
-          <p:cNvSpPr/>
-          <p:nvPr/>
-        </p:nvSpPr>
-        <p:spPr>
-          <a:xfrm>
-            <a:off x="932688" y="2999232"/>
-            <a:ext cx="2228850" cy="777240"/>
-          </a:xfrm>
-          <a:prstGeom prst="rect">
-            <a:avLst/>
-          </a:prstGeom>
-          <a:noFill/>
-          <a:ln/>
-        </p:spPr>
-        <p:txBody>
-          <a:bodyPr wrap="square" lIns="0" tIns="0" rIns="0" bIns="0" rtlCol="0" anchor="ctr"/>
-          <a:lstStyle/>
-          <a:p>
-            <a:pPr indent="0" marL="0">
-              <a:lnSpc>
-                <a:spcPct val="120000"/>
-              </a:lnSpc>
-              <a:buNone/>
-            </a:pPr>
-            <a:r>
-              <a:rPr lang="en-US" sz="1200" dirty="0">
-                <a:solidFill>
-                  <a:srgbClr val="5C6B68"/>
-                </a:solidFill>
-                <a:latin typeface="Yu Gothic" pitchFamily="34" charset="0"/>
-                <a:ea typeface="Yu Gothic" pitchFamily="34" charset="-122"/>
-                <a:cs typeface="Yu Gothic" pitchFamily="34" charset="-120"/>
-              </a:rPr>
-              <a:t>QRコードで5秒登録。</a:t>
-            </a:r>
-            <a:endParaRPr lang="en-US" sz="1200" dirty="0"/>
-          </a:p>
-          <a:p>
-            <a:pPr indent="0" marL="0">
-              <a:lnSpc>
-                <a:spcPct val="120000"/>
-              </a:lnSpc>
-              <a:buNone/>
-            </a:pPr>
-            <a:r>
-              <a:rPr lang="en-US" sz="1200" dirty="0">
-                <a:solidFill>
-                  <a:srgbClr val="5C6B68"/>
-                </a:solidFill>
-                <a:latin typeface="Yu Gothic" pitchFamily="34" charset="0"/>
-                <a:ea typeface="Yu Gothic" pitchFamily="34" charset="-122"/>
-                <a:cs typeface="Yu Gothic" pitchFamily="34" charset="-120"/>
-              </a:rPr>
-              <a:t>変更履歴も自動で残る</a:t>
-            </a:r>
-            <a:endParaRPr lang="en-US" sz="1200" dirty="0"/>
-          </a:p>
-        </p:txBody>
-      </p:sp>
-      <p:sp>
-        <p:nvSpPr>
-          <p:cNvPr id="9" name="Shape 7"/>
-          <p:cNvSpPr/>
-          <p:nvPr/>
-        </p:nvSpPr>
-        <p:spPr>
-          <a:xfrm>
-            <a:off x="3463290" y="1920240"/>
-            <a:ext cx="2503170" cy="1965960"/>
+          <p:cNvPr id="13" name="Shape 11"/>
+          <p:cNvSpPr/>
+          <p:nvPr/>
+        </p:nvSpPr>
+        <p:spPr>
+          <a:xfrm>
+            <a:off x="4928616" y="2880360"/>
+            <a:ext cx="219456" cy="237744"/>
+          </a:xfrm>
+          <a:prstGeom prst="rightArrow">
+            <a:avLst/>
+          </a:prstGeom>
+          <a:solidFill>
+            <a:srgbClr val="A8CFC9"/>
+          </a:solidFill>
+          <a:ln w="12700">
+            <a:solidFill>
+              <a:srgbClr val="A8CFC9"/>
+            </a:solidFill>
+            <a:prstDash val="solid"/>
+          </a:ln>
+        </p:spPr>
+      </p:sp>
+      <p:sp>
+        <p:nvSpPr>
+          <p:cNvPr id="14" name="Shape 12"/>
+          <p:cNvSpPr/>
+          <p:nvPr/>
+        </p:nvSpPr>
+        <p:spPr>
+          <a:xfrm>
+            <a:off x="5212080" y="2057400"/>
+            <a:ext cx="1920240" cy="1828800"/>
           </a:xfrm>
           <a:prstGeom prst="roundRect">
             <a:avLst>
-              <a:gd name="adj" fmla="val 3721"/>
+              <a:gd name="adj" fmla="val 4000"/>
             </a:avLst>
           </a:prstGeom>
           <a:solidFill>
@@ -17051,14 +17169,14 @@
       </p:sp>
       <p:sp>
         <p:nvSpPr>
-          <p:cNvPr id="10" name="Shape 8"/>
-          <p:cNvSpPr/>
-          <p:nvPr/>
-        </p:nvSpPr>
-        <p:spPr>
-          <a:xfrm>
-            <a:off x="3682746" y="2121408"/>
-            <a:ext cx="402336" cy="402336"/>
+          <p:cNvPr id="15" name="Shape 13"/>
+          <p:cNvSpPr/>
+          <p:nvPr/>
+        </p:nvSpPr>
+        <p:spPr>
+          <a:xfrm>
+            <a:off x="5897880" y="2286000"/>
+            <a:ext cx="566928" cy="566928"/>
           </a:xfrm>
           <a:prstGeom prst="ellipse">
             <a:avLst/>
@@ -17076,14 +17194,14 @@
       </p:sp>
       <p:sp>
         <p:nvSpPr>
-          <p:cNvPr id="11" name="Text 9"/>
-          <p:cNvSpPr/>
-          <p:nvPr/>
-        </p:nvSpPr>
-        <p:spPr>
-          <a:xfrm>
-            <a:off x="3682746" y="2121408"/>
-            <a:ext cx="402336" cy="402336"/>
+          <p:cNvPr id="16" name="Text 14"/>
+          <p:cNvSpPr/>
+          <p:nvPr/>
+        </p:nvSpPr>
+        <p:spPr>
+          <a:xfrm>
+            <a:off x="5897880" y="2286000"/>
+            <a:ext cx="566928" cy="566928"/>
           </a:xfrm>
           <a:prstGeom prst="rect">
             <a:avLst/>
@@ -17099,7 +17217,7 @@
               <a:buNone/>
             </a:pPr>
             <a:r>
-              <a:rPr lang="en-US" sz="1300" b="1" dirty="0">
+              <a:rPr lang="en-US" sz="2000" b="1" dirty="0">
                 <a:solidFill>
                   <a:srgbClr val="FFFFFF"/>
                 </a:solidFill>
@@ -17107,34 +17225,34 @@
                 <a:ea typeface="Yu Gothic" pitchFamily="34" charset="-122"/>
                 <a:cs typeface="Yu Gothic" pitchFamily="34" charset="-120"/>
               </a:rPr>
-              <a:t>2</a:t>
-            </a:r>
-            <a:endParaRPr lang="en-US" sz="1300" dirty="0"/>
-          </a:p>
-        </p:txBody>
-      </p:sp>
-      <p:sp>
-        <p:nvSpPr>
-          <p:cNvPr id="12" name="Text 10"/>
-          <p:cNvSpPr/>
-          <p:nvPr/>
-        </p:nvSpPr>
-        <p:spPr>
-          <a:xfrm>
-            <a:off x="3664458" y="2615184"/>
-            <a:ext cx="2183130" cy="347472"/>
-          </a:xfrm>
-          <a:prstGeom prst="rect">
-            <a:avLst/>
-          </a:prstGeom>
-          <a:noFill/>
-          <a:ln/>
-        </p:spPr>
-        <p:txBody>
-          <a:bodyPr wrap="square" lIns="0" tIns="0" rIns="0" bIns="0" rtlCol="0" anchor="ctr"/>
-          <a:lstStyle/>
-          <a:p>
-            <a:pPr indent="0" marL="0">
+              <a:t>3</a:t>
+            </a:r>
+            <a:endParaRPr lang="en-US" sz="2000" dirty="0"/>
+          </a:p>
+        </p:txBody>
+      </p:sp>
+      <p:sp>
+        <p:nvSpPr>
+          <p:cNvPr id="17" name="Text 15"/>
+          <p:cNvSpPr/>
+          <p:nvPr/>
+        </p:nvSpPr>
+        <p:spPr>
+          <a:xfrm>
+            <a:off x="5230368" y="3063240"/>
+            <a:ext cx="1883664" cy="685800"/>
+          </a:xfrm>
+          <a:prstGeom prst="rect">
+            <a:avLst/>
+          </a:prstGeom>
+          <a:noFill/>
+          <a:ln/>
+        </p:spPr>
+        <p:txBody>
+          <a:bodyPr wrap="square" lIns="0" tIns="0" rIns="0" bIns="0" rtlCol="0" anchor="ctr"/>
+          <a:lstStyle/>
+          <a:p>
+            <a:pPr algn="ctr" indent="0" marL="0">
               <a:buNone/>
             </a:pPr>
             <a:r>
@@ -17146,7 +17264,7 @@
                 <a:ea typeface="Yu Gothic" pitchFamily="34" charset="-122"/>
                 <a:cs typeface="Yu Gothic" pitchFamily="34" charset="-120"/>
               </a:rPr>
-              <a:t>服薬記録・バイタル</a:t>
+              <a:t>職員が参加</a:t>
             </a:r>
             <a:endParaRPr lang="en-US" sz="1500" dirty="0"/>
           </a:p>
@@ -17154,80 +17272,43 @@
       </p:sp>
       <p:sp>
         <p:nvSpPr>
-          <p:cNvPr id="13" name="Text 11"/>
-          <p:cNvSpPr/>
-          <p:nvPr/>
-        </p:nvSpPr>
-        <p:spPr>
-          <a:xfrm>
-            <a:off x="3664458" y="2999232"/>
-            <a:ext cx="2228850" cy="777240"/>
-          </a:xfrm>
-          <a:prstGeom prst="rect">
-            <a:avLst/>
-          </a:prstGeom>
-          <a:noFill/>
-          <a:ln/>
-        </p:spPr>
-        <p:txBody>
-          <a:bodyPr wrap="square" lIns="0" tIns="0" rIns="0" bIns="0" rtlCol="0" anchor="ctr"/>
-          <a:lstStyle/>
-          <a:p>
-            <a:pPr indent="0" marL="0">
-              <a:lnSpc>
-                <a:spcPct val="120000"/>
-              </a:lnSpc>
-              <a:buNone/>
-            </a:pPr>
-            <a:r>
-              <a:rPr lang="en-US" sz="1200" dirty="0">
-                <a:solidFill>
-                  <a:srgbClr val="5C6B68"/>
-                </a:solidFill>
-                <a:latin typeface="Yu Gothic" pitchFamily="34" charset="0"/>
-                <a:ea typeface="Yu Gothic" pitchFamily="34" charset="-122"/>
-                <a:cs typeface="Yu Gothic" pitchFamily="34" charset="-120"/>
-              </a:rPr>
-              <a:t>服薬の実施、血圧・体温・</a:t>
-            </a:r>
-            <a:endParaRPr lang="en-US" sz="1200" dirty="0"/>
-          </a:p>
-          <a:p>
-            <a:pPr indent="0" marL="0">
-              <a:lnSpc>
-                <a:spcPct val="120000"/>
-              </a:lnSpc>
-              <a:buNone/>
-            </a:pPr>
-            <a:r>
-              <a:rPr lang="en-US" sz="1200" dirty="0">
-                <a:solidFill>
-                  <a:srgbClr val="5C6B68"/>
-                </a:solidFill>
-                <a:latin typeface="Yu Gothic" pitchFamily="34" charset="0"/>
-                <a:ea typeface="Yu Gothic" pitchFamily="34" charset="-122"/>
-                <a:cs typeface="Yu Gothic" pitchFamily="34" charset="-120"/>
-              </a:rPr>
-              <a:t>SpO₂を日々の記録として</a:t>
-            </a:r>
-            <a:endParaRPr lang="en-US" sz="1200" dirty="0"/>
-          </a:p>
-        </p:txBody>
-      </p:sp>
-      <p:sp>
-        <p:nvSpPr>
-          <p:cNvPr id="14" name="Shape 12"/>
-          <p:cNvSpPr/>
-          <p:nvPr/>
-        </p:nvSpPr>
-        <p:spPr>
-          <a:xfrm>
-            <a:off x="6195060" y="1920240"/>
-            <a:ext cx="2503170" cy="1965960"/>
+          <p:cNvPr id="18" name="Shape 16"/>
+          <p:cNvSpPr/>
+          <p:nvPr/>
+        </p:nvSpPr>
+        <p:spPr>
+          <a:xfrm>
+            <a:off x="7168896" y="2880360"/>
+            <a:ext cx="219456" cy="237744"/>
+          </a:xfrm>
+          <a:prstGeom prst="rightArrow">
+            <a:avLst/>
+          </a:prstGeom>
+          <a:solidFill>
+            <a:srgbClr val="A8CFC9"/>
+          </a:solidFill>
+          <a:ln w="12700">
+            <a:solidFill>
+              <a:srgbClr val="A8CFC9"/>
+            </a:solidFill>
+            <a:prstDash val="solid"/>
+          </a:ln>
+        </p:spPr>
+      </p:sp>
+      <p:sp>
+        <p:nvSpPr>
+          <p:cNvPr id="19" name="Shape 17"/>
+          <p:cNvSpPr/>
+          <p:nvPr/>
+        </p:nvSpPr>
+        <p:spPr>
+          <a:xfrm>
+            <a:off x="7452360" y="2057400"/>
+            <a:ext cx="1920240" cy="1828800"/>
           </a:xfrm>
           <a:prstGeom prst="roundRect">
             <a:avLst>
-              <a:gd name="adj" fmla="val 3721"/>
+              <a:gd name="adj" fmla="val 4000"/>
             </a:avLst>
           </a:prstGeom>
           <a:solidFill>
@@ -17243,14 +17324,14 @@
       </p:sp>
       <p:sp>
         <p:nvSpPr>
-          <p:cNvPr id="15" name="Shape 13"/>
-          <p:cNvSpPr/>
-          <p:nvPr/>
-        </p:nvSpPr>
-        <p:spPr>
-          <a:xfrm>
-            <a:off x="6414516" y="2121408"/>
-            <a:ext cx="402336" cy="402336"/>
+          <p:cNvPr id="20" name="Shape 18"/>
+          <p:cNvSpPr/>
+          <p:nvPr/>
+        </p:nvSpPr>
+        <p:spPr>
+          <a:xfrm>
+            <a:off x="8138160" y="2286000"/>
+            <a:ext cx="566928" cy="566928"/>
           </a:xfrm>
           <a:prstGeom prst="ellipse">
             <a:avLst/>
@@ -17268,14 +17349,14 @@
       </p:sp>
       <p:sp>
         <p:nvSpPr>
-          <p:cNvPr id="16" name="Text 14"/>
-          <p:cNvSpPr/>
-          <p:nvPr/>
-        </p:nvSpPr>
-        <p:spPr>
-          <a:xfrm>
-            <a:off x="6414516" y="2121408"/>
-            <a:ext cx="402336" cy="402336"/>
+          <p:cNvPr id="21" name="Text 19"/>
+          <p:cNvSpPr/>
+          <p:nvPr/>
+        </p:nvSpPr>
+        <p:spPr>
+          <a:xfrm>
+            <a:off x="8138160" y="2286000"/>
+            <a:ext cx="566928" cy="566928"/>
           </a:xfrm>
           <a:prstGeom prst="rect">
             <a:avLst/>
@@ -17291,7 +17372,7 @@
               <a:buNone/>
             </a:pPr>
             <a:r>
-              <a:rPr lang="en-US" sz="1300" b="1" dirty="0">
+              <a:rPr lang="en-US" sz="2000" b="1" dirty="0">
                 <a:solidFill>
                   <a:srgbClr val="FFFFFF"/>
                 </a:solidFill>
@@ -17299,34 +17380,34 @@
                 <a:ea typeface="Yu Gothic" pitchFamily="34" charset="-122"/>
                 <a:cs typeface="Yu Gothic" pitchFamily="34" charset="-120"/>
               </a:rPr>
-              <a:t>3</a:t>
-            </a:r>
-            <a:endParaRPr lang="en-US" sz="1300" dirty="0"/>
-          </a:p>
-        </p:txBody>
-      </p:sp>
-      <p:sp>
-        <p:nvSpPr>
-          <p:cNvPr id="17" name="Text 15"/>
-          <p:cNvSpPr/>
-          <p:nvPr/>
-        </p:nvSpPr>
-        <p:spPr>
-          <a:xfrm>
-            <a:off x="6396228" y="2615184"/>
-            <a:ext cx="2183130" cy="347472"/>
-          </a:xfrm>
-          <a:prstGeom prst="rect">
-            <a:avLst/>
-          </a:prstGeom>
-          <a:noFill/>
-          <a:ln/>
-        </p:spPr>
-        <p:txBody>
-          <a:bodyPr wrap="square" lIns="0" tIns="0" rIns="0" bIns="0" rtlCol="0" anchor="ctr"/>
-          <a:lstStyle/>
-          <a:p>
-            <a:pPr indent="0" marL="0">
+              <a:t>4</a:t>
+            </a:r>
+            <a:endParaRPr lang="en-US" sz="2000" dirty="0"/>
+          </a:p>
+        </p:txBody>
+      </p:sp>
+      <p:sp>
+        <p:nvSpPr>
+          <p:cNvPr id="22" name="Text 20"/>
+          <p:cNvSpPr/>
+          <p:nvPr/>
+        </p:nvSpPr>
+        <p:spPr>
+          <a:xfrm>
+            <a:off x="7470648" y="3063240"/>
+            <a:ext cx="1883664" cy="685800"/>
+          </a:xfrm>
+          <a:prstGeom prst="rect">
+            <a:avLst/>
+          </a:prstGeom>
+          <a:noFill/>
+          <a:ln/>
+        </p:spPr>
+        <p:txBody>
+          <a:bodyPr wrap="square" lIns="0" tIns="0" rIns="0" bIns="0" rtlCol="0" anchor="ctr"/>
+          <a:lstStyle/>
+          <a:p>
+            <a:pPr algn="ctr" indent="0" marL="0">
               <a:buNone/>
             </a:pPr>
             <a:r>
@@ -17338,7 +17419,7 @@
                 <a:ea typeface="Yu Gothic" pitchFamily="34" charset="-122"/>
                 <a:cs typeface="Yu Gothic" pitchFamily="34" charset="-120"/>
               </a:rPr>
-              <a:t>チャット</a:t>
+              <a:t>入居者を登録</a:t>
             </a:r>
             <a:endParaRPr lang="en-US" sz="1500" dirty="0"/>
           </a:p>
@@ -17346,100 +17427,43 @@
       </p:sp>
       <p:sp>
         <p:nvSpPr>
-          <p:cNvPr id="18" name="Text 16"/>
-          <p:cNvSpPr/>
-          <p:nvPr/>
-        </p:nvSpPr>
-        <p:spPr>
-          <a:xfrm>
-            <a:off x="6396228" y="2999232"/>
-            <a:ext cx="2228850" cy="777240"/>
-          </a:xfrm>
-          <a:prstGeom prst="rect">
-            <a:avLst/>
-          </a:prstGeom>
-          <a:noFill/>
-          <a:ln/>
-        </p:spPr>
-        <p:txBody>
-          <a:bodyPr wrap="square" lIns="0" tIns="0" rIns="0" bIns="0" rtlCol="0" anchor="ctr"/>
-          <a:lstStyle/>
-          <a:p>
-            <a:pPr indent="0" marL="0">
-              <a:lnSpc>
-                <a:spcPct val="120000"/>
-              </a:lnSpc>
-              <a:buNone/>
-            </a:pPr>
-            <a:r>
-              <a:rPr lang="en-US" sz="1200" dirty="0">
-                <a:solidFill>
-                  <a:srgbClr val="5C6B68"/>
-                </a:solidFill>
-                <a:latin typeface="Yu Gothic" pitchFamily="34" charset="0"/>
-                <a:ea typeface="Yu Gothic" pitchFamily="34" charset="-122"/>
-                <a:cs typeface="Yu Gothic" pitchFamily="34" charset="-120"/>
-              </a:rPr>
-              <a:t>入居者ごとの相談ルーム。</a:t>
-            </a:r>
-            <a:endParaRPr lang="en-US" sz="1200" dirty="0"/>
-          </a:p>
-          <a:p>
-            <a:pPr indent="0" marL="0">
-              <a:lnSpc>
-                <a:spcPct val="120000"/>
-              </a:lnSpc>
-              <a:buNone/>
-            </a:pPr>
-            <a:r>
-              <a:rPr lang="en-US" sz="1200" dirty="0">
-                <a:solidFill>
-                  <a:srgbClr val="5C6B68"/>
-                </a:solidFill>
-                <a:latin typeface="Yu Gothic" pitchFamily="34" charset="0"/>
-                <a:ea typeface="Yu Gothic" pitchFamily="34" charset="-122"/>
-                <a:cs typeface="Yu Gothic" pitchFamily="34" charset="-120"/>
-              </a:rPr>
-              <a:t>何の薬の話かが</a:t>
-            </a:r>
-            <a:endParaRPr lang="en-US" sz="1200" dirty="0"/>
-          </a:p>
-          <a:p>
-            <a:pPr indent="0" marL="0">
-              <a:lnSpc>
-                <a:spcPct val="120000"/>
-              </a:lnSpc>
-              <a:buNone/>
-            </a:pPr>
-            <a:r>
-              <a:rPr lang="en-US" sz="1200" dirty="0">
-                <a:solidFill>
-                  <a:srgbClr val="5C6B68"/>
-                </a:solidFill>
-                <a:latin typeface="Yu Gothic" pitchFamily="34" charset="0"/>
-                <a:ea typeface="Yu Gothic" pitchFamily="34" charset="-122"/>
-                <a:cs typeface="Yu Gothic" pitchFamily="34" charset="-120"/>
-              </a:rPr>
-              <a:t>最初から共有されている</a:t>
-            </a:r>
-            <a:endParaRPr lang="en-US" sz="1200" dirty="0"/>
-          </a:p>
-        </p:txBody>
-      </p:sp>
-      <p:sp>
-        <p:nvSpPr>
-          <p:cNvPr id="19" name="Shape 17"/>
-          <p:cNvSpPr/>
-          <p:nvPr/>
-        </p:nvSpPr>
-        <p:spPr>
-          <a:xfrm>
-            <a:off x="8926830" y="1920240"/>
-            <a:ext cx="2503170" cy="1965960"/>
+          <p:cNvPr id="23" name="Shape 21"/>
+          <p:cNvSpPr/>
+          <p:nvPr/>
+        </p:nvSpPr>
+        <p:spPr>
+          <a:xfrm>
+            <a:off x="9409176" y="2880360"/>
+            <a:ext cx="219456" cy="237744"/>
+          </a:xfrm>
+          <a:prstGeom prst="rightArrow">
+            <a:avLst/>
+          </a:prstGeom>
+          <a:solidFill>
+            <a:srgbClr val="A8CFC9"/>
+          </a:solidFill>
+          <a:ln w="12700">
+            <a:solidFill>
+              <a:srgbClr val="A8CFC9"/>
+            </a:solidFill>
+            <a:prstDash val="solid"/>
+          </a:ln>
+        </p:spPr>
+      </p:sp>
+      <p:sp>
+        <p:nvSpPr>
+          <p:cNvPr id="24" name="Shape 22"/>
+          <p:cNvSpPr/>
+          <p:nvPr/>
+        </p:nvSpPr>
+        <p:spPr>
+          <a:xfrm>
+            <a:off x="9692640" y="2057400"/>
+            <a:ext cx="1920240" cy="1828800"/>
           </a:xfrm>
           <a:prstGeom prst="roundRect">
             <a:avLst>
-              <a:gd name="adj" fmla="val 3721"/>
+              <a:gd name="adj" fmla="val 4000"/>
             </a:avLst>
           </a:prstGeom>
           <a:solidFill>
@@ -17455,206 +17479,14 @@
       </p:sp>
       <p:sp>
         <p:nvSpPr>
-          <p:cNvPr id="20" name="Shape 18"/>
-          <p:cNvSpPr/>
-          <p:nvPr/>
-        </p:nvSpPr>
-        <p:spPr>
-          <a:xfrm>
-            <a:off x="9146286" y="2121408"/>
-            <a:ext cx="402336" cy="402336"/>
-          </a:xfrm>
-          <a:prstGeom prst="ellipse">
-            <a:avLst/>
-          </a:prstGeom>
-          <a:solidFill>
-            <a:srgbClr val="3E8E84"/>
-          </a:solidFill>
-          <a:ln w="12700">
-            <a:solidFill>
-              <a:srgbClr val="3E8E84"/>
-            </a:solidFill>
-            <a:prstDash val="solid"/>
-          </a:ln>
-        </p:spPr>
-      </p:sp>
-      <p:sp>
-        <p:nvSpPr>
-          <p:cNvPr id="21" name="Text 19"/>
-          <p:cNvSpPr/>
-          <p:nvPr/>
-        </p:nvSpPr>
-        <p:spPr>
-          <a:xfrm>
-            <a:off x="9146286" y="2121408"/>
-            <a:ext cx="402336" cy="402336"/>
-          </a:xfrm>
-          <a:prstGeom prst="rect">
-            <a:avLst/>
-          </a:prstGeom>
-          <a:noFill/>
-          <a:ln/>
-        </p:spPr>
-        <p:txBody>
-          <a:bodyPr wrap="square" lIns="0" tIns="0" rIns="0" bIns="0" rtlCol="0" anchor="ctr"/>
-          <a:lstStyle/>
-          <a:p>
-            <a:pPr algn="ctr" indent="0" marL="0">
-              <a:buNone/>
-            </a:pPr>
-            <a:r>
-              <a:rPr lang="en-US" sz="1300" b="1" dirty="0">
-                <a:solidFill>
-                  <a:srgbClr val="FFFFFF"/>
-                </a:solidFill>
-                <a:latin typeface="Yu Gothic" pitchFamily="34" charset="0"/>
-                <a:ea typeface="Yu Gothic" pitchFamily="34" charset="-122"/>
-                <a:cs typeface="Yu Gothic" pitchFamily="34" charset="-120"/>
-              </a:rPr>
-              <a:t>4</a:t>
-            </a:r>
-            <a:endParaRPr lang="en-US" sz="1300" dirty="0"/>
-          </a:p>
-        </p:txBody>
-      </p:sp>
-      <p:sp>
-        <p:nvSpPr>
-          <p:cNvPr id="22" name="Text 20"/>
-          <p:cNvSpPr/>
-          <p:nvPr/>
-        </p:nvSpPr>
-        <p:spPr>
-          <a:xfrm>
-            <a:off x="9127998" y="2615184"/>
-            <a:ext cx="2183130" cy="347472"/>
-          </a:xfrm>
-          <a:prstGeom prst="rect">
-            <a:avLst/>
-          </a:prstGeom>
-          <a:noFill/>
-          <a:ln/>
-        </p:spPr>
-        <p:txBody>
-          <a:bodyPr wrap="square" lIns="0" tIns="0" rIns="0" bIns="0" rtlCol="0" anchor="ctr"/>
-          <a:lstStyle/>
-          <a:p>
-            <a:pPr indent="0" marL="0">
-              <a:buNone/>
-            </a:pPr>
-            <a:r>
-              <a:rPr lang="en-US" sz="1500" b="1" dirty="0">
-                <a:solidFill>
-                  <a:srgbClr val="14504B"/>
-                </a:solidFill>
-                <a:latin typeface="Yu Gothic" pitchFamily="34" charset="0"/>
-                <a:ea typeface="Yu Gothic" pitchFamily="34" charset="-122"/>
-                <a:cs typeface="Yu Gothic" pitchFamily="34" charset="-120"/>
-              </a:rPr>
-              <a:t>カレンダー</a:t>
-            </a:r>
-            <a:endParaRPr lang="en-US" sz="1500" dirty="0"/>
-          </a:p>
-        </p:txBody>
-      </p:sp>
-      <p:sp>
-        <p:nvSpPr>
-          <p:cNvPr id="23" name="Text 21"/>
-          <p:cNvSpPr/>
-          <p:nvPr/>
-        </p:nvSpPr>
-        <p:spPr>
-          <a:xfrm>
-            <a:off x="9127998" y="2999232"/>
-            <a:ext cx="2228850" cy="777240"/>
-          </a:xfrm>
-          <a:prstGeom prst="rect">
-            <a:avLst/>
-          </a:prstGeom>
-          <a:noFill/>
-          <a:ln/>
-        </p:spPr>
-        <p:txBody>
-          <a:bodyPr wrap="square" lIns="0" tIns="0" rIns="0" bIns="0" rtlCol="0" anchor="ctr"/>
-          <a:lstStyle/>
-          <a:p>
-            <a:pPr indent="0" marL="0">
-              <a:lnSpc>
-                <a:spcPct val="120000"/>
-              </a:lnSpc>
-              <a:buNone/>
-            </a:pPr>
-            <a:r>
-              <a:rPr lang="en-US" sz="1200" dirty="0">
-                <a:solidFill>
-                  <a:srgbClr val="5C6B68"/>
-                </a:solidFill>
-                <a:latin typeface="Yu Gothic" pitchFamily="34" charset="0"/>
-                <a:ea typeface="Yu Gothic" pitchFamily="34" charset="-122"/>
-                <a:cs typeface="Yu Gothic" pitchFamily="34" charset="-120"/>
-              </a:rPr>
-              <a:t>薬剤師の訪問予定を</a:t>
-            </a:r>
-            <a:endParaRPr lang="en-US" sz="1200" dirty="0"/>
-          </a:p>
-          <a:p>
-            <a:pPr indent="0" marL="0">
-              <a:lnSpc>
-                <a:spcPct val="120000"/>
-              </a:lnSpc>
-              <a:buNone/>
-            </a:pPr>
-            <a:r>
-              <a:rPr lang="en-US" sz="1200" dirty="0">
-                <a:solidFill>
-                  <a:srgbClr val="5C6B68"/>
-                </a:solidFill>
-                <a:latin typeface="Yu Gothic" pitchFamily="34" charset="0"/>
-                <a:ea typeface="Yu Gothic" pitchFamily="34" charset="-122"/>
-                <a:cs typeface="Yu Gothic" pitchFamily="34" charset="-120"/>
-              </a:rPr>
-              <a:t>施設側にも表示</a:t>
-            </a:r>
-            <a:endParaRPr lang="en-US" sz="1200" dirty="0"/>
-          </a:p>
-        </p:txBody>
-      </p:sp>
-      <p:sp>
-        <p:nvSpPr>
-          <p:cNvPr id="24" name="Shape 22"/>
-          <p:cNvSpPr/>
-          <p:nvPr/>
-        </p:nvSpPr>
-        <p:spPr>
-          <a:xfrm>
-            <a:off x="731520" y="4069080"/>
-            <a:ext cx="2503170" cy="1965960"/>
-          </a:xfrm>
-          <a:prstGeom prst="roundRect">
-            <a:avLst>
-              <a:gd name="adj" fmla="val 3721"/>
-            </a:avLst>
-          </a:prstGeom>
-          <a:solidFill>
-            <a:srgbClr val="F1F6F5"/>
-          </a:solidFill>
-          <a:ln w="12700">
-            <a:solidFill>
-              <a:srgbClr val="F1F6F5"/>
-            </a:solidFill>
-            <a:prstDash val="solid"/>
-          </a:ln>
-        </p:spPr>
-      </p:sp>
-      <p:sp>
-        <p:nvSpPr>
           <p:cNvPr id="25" name="Shape 23"/>
           <p:cNvSpPr/>
           <p:nvPr/>
         </p:nvSpPr>
         <p:spPr>
           <a:xfrm>
-            <a:off x="950976" y="4270248"/>
-            <a:ext cx="402336" cy="402336"/>
+            <a:off x="10378440" y="2286000"/>
+            <a:ext cx="566928" cy="566928"/>
           </a:xfrm>
           <a:prstGeom prst="ellipse">
             <a:avLst/>
@@ -17678,8 +17510,8 @@
         </p:nvSpPr>
         <p:spPr>
           <a:xfrm>
-            <a:off x="950976" y="4270248"/>
-            <a:ext cx="402336" cy="402336"/>
+            <a:off x="10378440" y="2286000"/>
+            <a:ext cx="566928" cy="566928"/>
           </a:xfrm>
           <a:prstGeom prst="rect">
             <a:avLst/>
@@ -17695,7 +17527,7 @@
               <a:buNone/>
             </a:pPr>
             <a:r>
-              <a:rPr lang="en-US" sz="1300" b="1" dirty="0">
+              <a:rPr lang="en-US" sz="2000" b="1" dirty="0">
                 <a:solidFill>
                   <a:srgbClr val="FFFFFF"/>
                 </a:solidFill>
@@ -17705,7 +17537,7 @@
               </a:rPr>
               <a:t>5</a:t>
             </a:r>
-            <a:endParaRPr lang="en-US" sz="1300" dirty="0"/>
+            <a:endParaRPr lang="en-US" sz="2000" dirty="0"/>
           </a:p>
         </p:txBody>
       </p:sp>
@@ -17717,20 +17549,20 @@
         </p:nvSpPr>
         <p:spPr>
           <a:xfrm>
-            <a:off x="932688" y="4764024"/>
-            <a:ext cx="2183130" cy="347472"/>
-          </a:xfrm>
-          <a:prstGeom prst="rect">
-            <a:avLst/>
-          </a:prstGeom>
-          <a:noFill/>
-          <a:ln/>
-        </p:spPr>
-        <p:txBody>
-          <a:bodyPr wrap="square" lIns="0" tIns="0" rIns="0" bIns="0" rtlCol="0" anchor="ctr"/>
-          <a:lstStyle/>
-          <a:p>
-            <a:pPr indent="0" marL="0">
+            <a:off x="9710928" y="3063240"/>
+            <a:ext cx="1883664" cy="685800"/>
+          </a:xfrm>
+          <a:prstGeom prst="rect">
+            <a:avLst/>
+          </a:prstGeom>
+          <a:noFill/>
+          <a:ln/>
+        </p:spPr>
+        <p:txBody>
+          <a:bodyPr wrap="square" lIns="0" tIns="0" rIns="0" bIns="0" rtlCol="0" anchor="ctr"/>
+          <a:lstStyle/>
+          <a:p>
+            <a:pPr algn="ctr" indent="0" marL="0">
               <a:buNone/>
             </a:pPr>
             <a:r>
@@ -17742,7 +17574,7 @@
                 <a:ea typeface="Yu Gothic" pitchFamily="34" charset="-122"/>
                 <a:cs typeface="Yu Gothic" pitchFamily="34" charset="-120"/>
               </a:rPr>
-              <a:t>服薬の注意点</a:t>
+              <a:t>家族を招待</a:t>
             </a:r>
             <a:endParaRPr lang="en-US" sz="1500" dirty="0"/>
           </a:p>
@@ -17750,108 +17582,26 @@
       </p:sp>
       <p:sp>
         <p:nvSpPr>
-          <p:cNvPr id="28" name="Text 26"/>
-          <p:cNvSpPr/>
-          <p:nvPr/>
-        </p:nvSpPr>
-        <p:spPr>
-          <a:xfrm>
-            <a:off x="932688" y="5148072"/>
-            <a:ext cx="2228850" cy="777240"/>
-          </a:xfrm>
-          <a:prstGeom prst="rect">
-            <a:avLst/>
-          </a:prstGeom>
-          <a:noFill/>
-          <a:ln/>
-        </p:spPr>
-        <p:txBody>
-          <a:bodyPr wrap="square" lIns="0" tIns="0" rIns="0" bIns="0" rtlCol="0" anchor="ctr"/>
-          <a:lstStyle/>
-          <a:p>
-            <a:pPr indent="0" marL="0">
-              <a:lnSpc>
-                <a:spcPct val="120000"/>
-              </a:lnSpc>
-              <a:buNone/>
-            </a:pPr>
-            <a:r>
-              <a:rPr lang="en-US" sz="1200" dirty="0">
-                <a:solidFill>
-                  <a:srgbClr val="5C6B68"/>
-                </a:solidFill>
-                <a:latin typeface="Yu Gothic" pitchFamily="34" charset="0"/>
-                <a:ea typeface="Yu Gothic" pitchFamily="34" charset="-122"/>
-                <a:cs typeface="Yu Gothic" pitchFamily="34" charset="-120"/>
-              </a:rPr>
-              <a:t>添付文書から該当箇所だけ。</a:t>
-            </a:r>
-            <a:endParaRPr lang="en-US" sz="1200" dirty="0"/>
-          </a:p>
-          <a:p>
-            <a:pPr indent="0" marL="0">
-              <a:lnSpc>
-                <a:spcPct val="120000"/>
-              </a:lnSpc>
-              <a:buNone/>
-            </a:pPr>
-            <a:r>
-              <a:rPr lang="en-US" sz="1200" dirty="0">
-                <a:solidFill>
-                  <a:srgbClr val="5C6B68"/>
-                </a:solidFill>
-                <a:latin typeface="Yu Gothic" pitchFamily="34" charset="0"/>
-                <a:ea typeface="Yu Gothic" pitchFamily="34" charset="-122"/>
-                <a:cs typeface="Yu Gothic" pitchFamily="34" charset="-120"/>
-              </a:rPr>
-              <a:t>腎機能・肝機能・年齢に</a:t>
-            </a:r>
-            <a:endParaRPr lang="en-US" sz="1200" dirty="0"/>
-          </a:p>
-          <a:p>
-            <a:pPr indent="0" marL="0">
-              <a:lnSpc>
-                <a:spcPct val="120000"/>
-              </a:lnSpc>
-              <a:buNone/>
-            </a:pPr>
-            <a:r>
-              <a:rPr lang="en-US" sz="1200" dirty="0">
-                <a:solidFill>
-                  <a:srgbClr val="5C6B68"/>
-                </a:solidFill>
-                <a:latin typeface="Yu Gothic" pitchFamily="34" charset="0"/>
-                <a:ea typeface="Yu Gothic" pitchFamily="34" charset="-122"/>
-                <a:cs typeface="Yu Gothic" pitchFamily="34" charset="-120"/>
-              </a:rPr>
-              <a:t>合わせて出し分ける</a:t>
-            </a:r>
-            <a:endParaRPr lang="en-US" sz="1200" dirty="0"/>
-          </a:p>
-        </p:txBody>
-      </p:sp>
-      <p:sp>
-        <p:nvSpPr>
-          <p:cNvPr id="29" name="Shape 27"/>
-          <p:cNvSpPr/>
-          <p:nvPr/>
-        </p:nvSpPr>
-        <p:spPr>
-          <a:xfrm>
-            <a:off x="3463290" y="4069080"/>
-            <a:ext cx="2503170" cy="1965960"/>
+          <p:cNvPr id="28" name="Shape 26"/>
+          <p:cNvSpPr/>
+          <p:nvPr/>
+        </p:nvSpPr>
+        <p:spPr>
+          <a:xfrm>
+            <a:off x="731520" y="4343400"/>
+            <a:ext cx="10698480" cy="1645920"/>
           </a:xfrm>
           <a:prstGeom prst="roundRect">
             <a:avLst>
-              <a:gd name="adj" fmla="val 3721"/>
+              <a:gd name="adj" fmla="val 4444"/>
             </a:avLst>
           </a:prstGeom>
           <a:solidFill>
-            <a:srgbClr val="F1F6F5"/>
+            <a:srgbClr val="FFFFFF"/>
           </a:solidFill>
           <a:ln w="12700">
             <a:solidFill>
-              <a:srgbClr val="F1F6F5"/>
+              <a:srgbClr val="DCE6E4"/>
             </a:solidFill>
             <a:prstDash val="solid"/>
           </a:ln>
@@ -17859,28 +17609,81 @@
       </p:sp>
       <p:sp>
         <p:nvSpPr>
-          <p:cNvPr id="30" name="Shape 28"/>
-          <p:cNvSpPr/>
-          <p:nvPr/>
-        </p:nvSpPr>
-        <p:spPr>
-          <a:xfrm>
-            <a:off x="3682746" y="4270248"/>
-            <a:ext cx="402336" cy="402336"/>
-          </a:xfrm>
-          <a:prstGeom prst="ellipse">
-            <a:avLst/>
-          </a:prstGeom>
-          <a:solidFill>
-            <a:srgbClr val="D98A2B"/>
-          </a:solidFill>
-          <a:ln w="12700">
-            <a:solidFill>
-              <a:srgbClr val="D98A2B"/>
-            </a:solidFill>
-            <a:prstDash val="solid"/>
-          </a:ln>
-        </p:spPr>
+          <p:cNvPr id="29" name="Text 27"/>
+          <p:cNvSpPr/>
+          <p:nvPr/>
+        </p:nvSpPr>
+        <p:spPr>
+          <a:xfrm>
+            <a:off x="1051560" y="4553712"/>
+            <a:ext cx="5486400" cy="365760"/>
+          </a:xfrm>
+          <a:prstGeom prst="rect">
+            <a:avLst/>
+          </a:prstGeom>
+          <a:noFill/>
+          <a:ln/>
+        </p:spPr>
+        <p:txBody>
+          <a:bodyPr wrap="square" lIns="0" tIns="0" rIns="0" bIns="0" rtlCol="0" anchor="ctr"/>
+          <a:lstStyle/>
+          <a:p>
+            <a:pPr indent="0" marL="0">
+              <a:buNone/>
+            </a:pPr>
+            <a:r>
+              <a:rPr lang="en-US" sz="1900" b="1" dirty="0">
+                <a:solidFill>
+                  <a:srgbClr val="14504B"/>
+                </a:solidFill>
+                <a:latin typeface="Yu Gothic" pitchFamily="34" charset="0"/>
+                <a:ea typeface="Yu Gothic" pitchFamily="34" charset="-122"/>
+                <a:cs typeface="Yu Gothic" pitchFamily="34" charset="-120"/>
+              </a:rPr>
+              <a:t>役割ごとに、見えるものが違う</a:t>
+            </a:r>
+            <a:endParaRPr lang="en-US" sz="1900" dirty="0"/>
+          </a:p>
+        </p:txBody>
+      </p:sp>
+      <p:sp>
+        <p:nvSpPr>
+          <p:cNvPr id="30" name="Text 28"/>
+          <p:cNvSpPr/>
+          <p:nvPr/>
+        </p:nvSpPr>
+        <p:spPr>
+          <a:xfrm>
+            <a:off x="1051560" y="5029200"/>
+            <a:ext cx="3291840" cy="320040"/>
+          </a:xfrm>
+          <a:prstGeom prst="rect">
+            <a:avLst/>
+          </a:prstGeom>
+          <a:noFill/>
+          <a:ln/>
+        </p:spPr>
+        <p:txBody>
+          <a:bodyPr wrap="square" lIns="0" tIns="0" rIns="0" bIns="0" rtlCol="0" anchor="ctr"/>
+          <a:lstStyle/>
+          <a:p>
+            <a:pPr indent="0" marL="0">
+              <a:buNone/>
+            </a:pPr>
+            <a:r>
+              <a:rPr lang="en-US" sz="1500" b="1" dirty="0">
+                <a:solidFill>
+                  <a:srgbClr val="3E8E84"/>
+                </a:solidFill>
+                <a:latin typeface="Yu Gothic" pitchFamily="34" charset="0"/>
+                <a:ea typeface="Yu Gothic" pitchFamily="34" charset="-122"/>
+                <a:cs typeface="Yu Gothic" pitchFamily="34" charset="-120"/>
+              </a:rPr>
+              <a:t>薬剤師</a:t>
+            </a:r>
+            <a:endParaRPr lang="en-US" sz="1500" dirty="0"/>
+          </a:p>
+        </p:txBody>
       </p:sp>
       <p:sp>
         <p:nvSpPr>
@@ -17890,32 +17693,32 @@
         </p:nvSpPr>
         <p:spPr>
           <a:xfrm>
-            <a:off x="3682746" y="4270248"/>
-            <a:ext cx="402336" cy="402336"/>
-          </a:xfrm>
-          <a:prstGeom prst="rect">
-            <a:avLst/>
-          </a:prstGeom>
-          <a:noFill/>
-          <a:ln/>
-        </p:spPr>
-        <p:txBody>
-          <a:bodyPr wrap="square" lIns="0" tIns="0" rIns="0" bIns="0" rtlCol="0" anchor="ctr"/>
-          <a:lstStyle/>
-          <a:p>
-            <a:pPr algn="ctr" indent="0" marL="0">
-              <a:buNone/>
-            </a:pPr>
-            <a:r>
-              <a:rPr lang="en-US" sz="1300" b="1" dirty="0">
-                <a:solidFill>
-                  <a:srgbClr val="FFFFFF"/>
-                </a:solidFill>
-                <a:latin typeface="Yu Gothic" pitchFamily="34" charset="0"/>
-                <a:ea typeface="Yu Gothic" pitchFamily="34" charset="-122"/>
-                <a:cs typeface="Yu Gothic" pitchFamily="34" charset="-120"/>
-              </a:rPr>
-              <a:t>6</a:t>
+            <a:off x="1051560" y="5394960"/>
+            <a:ext cx="3337560" cy="411480"/>
+          </a:xfrm>
+          <a:prstGeom prst="rect">
+            <a:avLst/>
+          </a:prstGeom>
+          <a:noFill/>
+          <a:ln/>
+        </p:spPr>
+        <p:txBody>
+          <a:bodyPr wrap="square" lIns="0" tIns="0" rIns="0" bIns="0" rtlCol="0" anchor="ctr"/>
+          <a:lstStyle/>
+          <a:p>
+            <a:pPr indent="0" marL="0">
+              <a:buNone/>
+            </a:pPr>
+            <a:r>
+              <a:rPr lang="en-US" sz="1300" dirty="0">
+                <a:solidFill>
+                  <a:srgbClr val="5C6B68"/>
+                </a:solidFill>
+                <a:latin typeface="Yu Gothic" pitchFamily="34" charset="0"/>
+                <a:ea typeface="Yu Gothic" pitchFamily="34" charset="-122"/>
+                <a:cs typeface="Yu Gothic" pitchFamily="34" charset="-120"/>
+              </a:rPr>
+              <a:t>薬の登録・変更、相談対応</a:t>
             </a:r>
             <a:endParaRPr lang="en-US" sz="1300" dirty="0"/>
           </a:p>
@@ -17929,8 +17732,8 @@
         </p:nvSpPr>
         <p:spPr>
           <a:xfrm>
-            <a:off x="3664458" y="4764024"/>
-            <a:ext cx="2183130" cy="347472"/>
+            <a:off x="4526280" y="5029200"/>
+            <a:ext cx="3291840" cy="320040"/>
           </a:xfrm>
           <a:prstGeom prst="rect">
             <a:avLst/>
@@ -17948,13 +17751,13 @@
             <a:r>
               <a:rPr lang="en-US" sz="1500" b="1" dirty="0">
                 <a:solidFill>
-                  <a:srgbClr val="14504B"/>
-                </a:solidFill>
-                <a:latin typeface="Yu Gothic" pitchFamily="34" charset="0"/>
-                <a:ea typeface="Yu Gothic" pitchFamily="34" charset="-122"/>
-                <a:cs typeface="Yu Gothic" pitchFamily="34" charset="-120"/>
-              </a:rPr>
-              <a:t>症状トリアージ</a:t>
+                  <a:srgbClr val="3E8E84"/>
+                </a:solidFill>
+                <a:latin typeface="Yu Gothic" pitchFamily="34" charset="0"/>
+                <a:ea typeface="Yu Gothic" pitchFamily="34" charset="-122"/>
+                <a:cs typeface="Yu Gothic" pitchFamily="34" charset="-120"/>
+              </a:rPr>
+              <a:t>介護士・看護師</a:t>
             </a:r>
             <a:endParaRPr lang="en-US" sz="1500" dirty="0"/>
           </a:p>
@@ -17968,27 +17771,24 @@
         </p:nvSpPr>
         <p:spPr>
           <a:xfrm>
-            <a:off x="3664458" y="5148072"/>
-            <a:ext cx="2228850" cy="777240"/>
-          </a:xfrm>
-          <a:prstGeom prst="rect">
-            <a:avLst/>
-          </a:prstGeom>
-          <a:noFill/>
-          <a:ln/>
-        </p:spPr>
-        <p:txBody>
-          <a:bodyPr wrap="square" lIns="0" tIns="0" rIns="0" bIns="0" rtlCol="0" anchor="ctr"/>
-          <a:lstStyle/>
-          <a:p>
-            <a:pPr indent="0" marL="0">
-              <a:lnSpc>
-                <a:spcPct val="120000"/>
-              </a:lnSpc>
-              <a:buNone/>
-            </a:pPr>
-            <a:r>
-              <a:rPr lang="en-US" sz="1200" dirty="0">
+            <a:off x="4526280" y="5394960"/>
+            <a:ext cx="3337560" cy="411480"/>
+          </a:xfrm>
+          <a:prstGeom prst="rect">
+            <a:avLst/>
+          </a:prstGeom>
+          <a:noFill/>
+          <a:ln/>
+        </p:spPr>
+        <p:txBody>
+          <a:bodyPr wrap="square" lIns="0" tIns="0" rIns="0" bIns="0" rtlCol="0" anchor="ctr"/>
+          <a:lstStyle/>
+          <a:p>
+            <a:pPr indent="0" marL="0">
+              <a:buNone/>
+            </a:pPr>
+            <a:r>
+              <a:rPr lang="en-US" sz="1300" dirty="0">
                 <a:solidFill>
                   <a:srgbClr val="5C6B68"/>
                 </a:solidFill>
@@ -17996,19 +17796,77 @@
                 <a:ea typeface="Yu Gothic" pitchFamily="34" charset="-122"/>
                 <a:cs typeface="Yu Gothic" pitchFamily="34" charset="-120"/>
               </a:rPr>
-              <a:t>体調不良時の対応の目安を</a:t>
-            </a:r>
-            <a:endParaRPr lang="en-US" sz="1200" dirty="0"/>
-          </a:p>
-          <a:p>
-            <a:pPr indent="0" marL="0">
-              <a:lnSpc>
-                <a:spcPct val="120000"/>
-              </a:lnSpc>
-              <a:buNone/>
-            </a:pPr>
-            <a:r>
-              <a:rPr lang="en-US" sz="1200" dirty="0">
+              <a:t>服薬記録、バイタル、症状相談</a:t>
+            </a:r>
+            <a:endParaRPr lang="en-US" sz="1300" dirty="0"/>
+          </a:p>
+        </p:txBody>
+      </p:sp>
+      <p:sp>
+        <p:nvSpPr>
+          <p:cNvPr id="34" name="Text 32"/>
+          <p:cNvSpPr/>
+          <p:nvPr/>
+        </p:nvSpPr>
+        <p:spPr>
+          <a:xfrm>
+            <a:off x="8001000" y="5029200"/>
+            <a:ext cx="3291840" cy="320040"/>
+          </a:xfrm>
+          <a:prstGeom prst="rect">
+            <a:avLst/>
+          </a:prstGeom>
+          <a:noFill/>
+          <a:ln/>
+        </p:spPr>
+        <p:txBody>
+          <a:bodyPr wrap="square" lIns="0" tIns="0" rIns="0" bIns="0" rtlCol="0" anchor="ctr"/>
+          <a:lstStyle/>
+          <a:p>
+            <a:pPr indent="0" marL="0">
+              <a:buNone/>
+            </a:pPr>
+            <a:r>
+              <a:rPr lang="en-US" sz="1500" b="1" dirty="0">
+                <a:solidFill>
+                  <a:srgbClr val="3E8E84"/>
+                </a:solidFill>
+                <a:latin typeface="Yu Gothic" pitchFamily="34" charset="0"/>
+                <a:ea typeface="Yu Gothic" pitchFamily="34" charset="-122"/>
+                <a:cs typeface="Yu Gothic" pitchFamily="34" charset="-120"/>
+              </a:rPr>
+              <a:t>家族</a:t>
+            </a:r>
+            <a:endParaRPr lang="en-US" sz="1500" dirty="0"/>
+          </a:p>
+        </p:txBody>
+      </p:sp>
+      <p:sp>
+        <p:nvSpPr>
+          <p:cNvPr id="35" name="Text 33"/>
+          <p:cNvSpPr/>
+          <p:nvPr/>
+        </p:nvSpPr>
+        <p:spPr>
+          <a:xfrm>
+            <a:off x="8001000" y="5394960"/>
+            <a:ext cx="3337560" cy="411480"/>
+          </a:xfrm>
+          <a:prstGeom prst="rect">
+            <a:avLst/>
+          </a:prstGeom>
+          <a:noFill/>
+          <a:ln/>
+        </p:spPr>
+        <p:txBody>
+          <a:bodyPr wrap="square" lIns="0" tIns="0" rIns="0" bIns="0" rtlCol="0" anchor="ctr"/>
+          <a:lstStyle/>
+          <a:p>
+            <a:pPr indent="0" marL="0">
+              <a:buNone/>
+            </a:pPr>
+            <a:r>
+              <a:rPr lang="en-US" sz="1300" dirty="0">
                 <a:solidFill>
                   <a:srgbClr val="5C6B68"/>
                 </a:solidFill>
@@ -18016,63 +17874,11 @@
                 <a:ea typeface="Yu Gothic" pitchFamily="34" charset="-122"/>
                 <a:cs typeface="Yu Gothic" pitchFamily="34" charset="-120"/>
               </a:rPr>
-              <a:t>3段階で提示</a:t>
-            </a:r>
-            <a:endParaRPr lang="en-US" sz="1200" dirty="0"/>
-          </a:p>
-        </p:txBody>
-      </p:sp>
-      <p:sp>
-        <p:nvSpPr>
-          <p:cNvPr id="34" name="Shape 32"/>
-          <p:cNvSpPr/>
-          <p:nvPr/>
-        </p:nvSpPr>
-        <p:spPr>
-          <a:xfrm>
-            <a:off x="6195060" y="4069080"/>
-            <a:ext cx="2503170" cy="1965960"/>
-          </a:xfrm>
-          <a:prstGeom prst="roundRect">
-            <a:avLst>
-              <a:gd name="adj" fmla="val 3721"/>
-            </a:avLst>
-          </a:prstGeom>
-          <a:solidFill>
-            <a:srgbClr val="F1F6F5"/>
-          </a:solidFill>
-          <a:ln w="12700">
-            <a:solidFill>
-              <a:srgbClr val="F1F6F5"/>
-            </a:solidFill>
-            <a:prstDash val="solid"/>
-          </a:ln>
-        </p:spPr>
-      </p:sp>
-      <p:sp>
-        <p:nvSpPr>
-          <p:cNvPr id="35" name="Shape 33"/>
-          <p:cNvSpPr/>
-          <p:nvPr/>
-        </p:nvSpPr>
-        <p:spPr>
-          <a:xfrm>
-            <a:off x="6414516" y="4270248"/>
-            <a:ext cx="402336" cy="402336"/>
-          </a:xfrm>
-          <a:prstGeom prst="ellipse">
-            <a:avLst/>
-          </a:prstGeom>
-          <a:solidFill>
-            <a:srgbClr val="3E8E84"/>
-          </a:solidFill>
-          <a:ln w="12700">
-            <a:solidFill>
-              <a:srgbClr val="3E8E84"/>
-            </a:solidFill>
-            <a:prstDash val="solid"/>
-          </a:ln>
-        </p:spPr>
+              <a:t>処方とバイタルの閲覧のみ</a:t>
+            </a:r>
+            <a:endParaRPr lang="en-US" sz="1300" dirty="0"/>
+          </a:p>
+        </p:txBody>
       </p:sp>
       <p:sp>
         <p:nvSpPr>
@@ -18082,379 +17888,8 @@
         </p:nvSpPr>
         <p:spPr>
           <a:xfrm>
-            <a:off x="6414516" y="4270248"/>
-            <a:ext cx="402336" cy="402336"/>
-          </a:xfrm>
-          <a:prstGeom prst="rect">
-            <a:avLst/>
-          </a:prstGeom>
-          <a:noFill/>
-          <a:ln/>
-        </p:spPr>
-        <p:txBody>
-          <a:bodyPr wrap="square" lIns="0" tIns="0" rIns="0" bIns="0" rtlCol="0" anchor="ctr"/>
-          <a:lstStyle/>
-          <a:p>
-            <a:pPr algn="ctr" indent="0" marL="0">
-              <a:buNone/>
-            </a:pPr>
-            <a:r>
-              <a:rPr lang="en-US" sz="1300" b="1" dirty="0">
-                <a:solidFill>
-                  <a:srgbClr val="FFFFFF"/>
-                </a:solidFill>
-                <a:latin typeface="Yu Gothic" pitchFamily="34" charset="0"/>
-                <a:ea typeface="Yu Gothic" pitchFamily="34" charset="-122"/>
-                <a:cs typeface="Yu Gothic" pitchFamily="34" charset="-120"/>
-              </a:rPr>
-              <a:t>7</a:t>
-            </a:r>
-            <a:endParaRPr lang="en-US" sz="1300" dirty="0"/>
-          </a:p>
-        </p:txBody>
-      </p:sp>
-      <p:sp>
-        <p:nvSpPr>
-          <p:cNvPr id="37" name="Text 35"/>
-          <p:cNvSpPr/>
-          <p:nvPr/>
-        </p:nvSpPr>
-        <p:spPr>
-          <a:xfrm>
-            <a:off x="6396228" y="4764024"/>
-            <a:ext cx="2183130" cy="347472"/>
-          </a:xfrm>
-          <a:prstGeom prst="rect">
-            <a:avLst/>
-          </a:prstGeom>
-          <a:noFill/>
-          <a:ln/>
-        </p:spPr>
-        <p:txBody>
-          <a:bodyPr wrap="square" lIns="0" tIns="0" rIns="0" bIns="0" rtlCol="0" anchor="ctr"/>
-          <a:lstStyle/>
-          <a:p>
-            <a:pPr indent="0" marL="0">
-              <a:buNone/>
-            </a:pPr>
-            <a:r>
-              <a:rPr lang="en-US" sz="1500" b="1" dirty="0">
-                <a:solidFill>
-                  <a:srgbClr val="14504B"/>
-                </a:solidFill>
-                <a:latin typeface="Yu Gothic" pitchFamily="34" charset="0"/>
-                <a:ea typeface="Yu Gothic" pitchFamily="34" charset="-122"/>
-                <a:cs typeface="Yu Gothic" pitchFamily="34" charset="-120"/>
-              </a:rPr>
-              <a:t>家族への共有</a:t>
-            </a:r>
-            <a:endParaRPr lang="en-US" sz="1500" dirty="0"/>
-          </a:p>
-        </p:txBody>
-      </p:sp>
-      <p:sp>
-        <p:nvSpPr>
-          <p:cNvPr id="38" name="Text 36"/>
-          <p:cNvSpPr/>
-          <p:nvPr/>
-        </p:nvSpPr>
-        <p:spPr>
-          <a:xfrm>
-            <a:off x="6396228" y="5148072"/>
-            <a:ext cx="2228850" cy="777240"/>
-          </a:xfrm>
-          <a:prstGeom prst="rect">
-            <a:avLst/>
-          </a:prstGeom>
-          <a:noFill/>
-          <a:ln/>
-        </p:spPr>
-        <p:txBody>
-          <a:bodyPr wrap="square" lIns="0" tIns="0" rIns="0" bIns="0" rtlCol="0" anchor="ctr"/>
-          <a:lstStyle/>
-          <a:p>
-            <a:pPr indent="0" marL="0">
-              <a:lnSpc>
-                <a:spcPct val="120000"/>
-              </a:lnSpc>
-              <a:buNone/>
-            </a:pPr>
-            <a:r>
-              <a:rPr lang="en-US" sz="1200" dirty="0">
-                <a:solidFill>
-                  <a:srgbClr val="5C6B68"/>
-                </a:solidFill>
-                <a:latin typeface="Yu Gothic" pitchFamily="34" charset="0"/>
-                <a:ea typeface="Yu Gothic" pitchFamily="34" charset="-122"/>
-                <a:cs typeface="Yu Gothic" pitchFamily="34" charset="-120"/>
-              </a:rPr>
-              <a:t>処方とバイタルを</a:t>
-            </a:r>
-            <a:endParaRPr lang="en-US" sz="1200" dirty="0"/>
-          </a:p>
-          <a:p>
-            <a:pPr indent="0" marL="0">
-              <a:lnSpc>
-                <a:spcPct val="120000"/>
-              </a:lnSpc>
-              <a:buNone/>
-            </a:pPr>
-            <a:r>
-              <a:rPr lang="en-US" sz="1200" dirty="0">
-                <a:solidFill>
-                  <a:srgbClr val="5C6B68"/>
-                </a:solidFill>
-                <a:latin typeface="Yu Gothic" pitchFamily="34" charset="0"/>
-                <a:ea typeface="Yu Gothic" pitchFamily="34" charset="-122"/>
-                <a:cs typeface="Yu Gothic" pitchFamily="34" charset="-120"/>
-              </a:rPr>
-              <a:t>ご家族が閲覧できる</a:t>
-            </a:r>
-            <a:endParaRPr lang="en-US" sz="1200" dirty="0"/>
-          </a:p>
-        </p:txBody>
-      </p:sp>
-      <p:sp>
-        <p:nvSpPr>
-          <p:cNvPr id="39" name="Shape 37"/>
-          <p:cNvSpPr/>
-          <p:nvPr/>
-        </p:nvSpPr>
-        <p:spPr>
-          <a:xfrm>
-            <a:off x="8926830" y="4069080"/>
-            <a:ext cx="2503170" cy="1965960"/>
-          </a:xfrm>
-          <a:prstGeom prst="roundRect">
-            <a:avLst>
-              <a:gd name="adj" fmla="val 3721"/>
-            </a:avLst>
-          </a:prstGeom>
-          <a:solidFill>
-            <a:srgbClr val="F1F6F5"/>
-          </a:solidFill>
-          <a:ln w="12700">
-            <a:solidFill>
-              <a:srgbClr val="F1F6F5"/>
-            </a:solidFill>
-            <a:prstDash val="solid"/>
-          </a:ln>
-        </p:spPr>
-      </p:sp>
-      <p:sp>
-        <p:nvSpPr>
-          <p:cNvPr id="40" name="Shape 38"/>
-          <p:cNvSpPr/>
-          <p:nvPr/>
-        </p:nvSpPr>
-        <p:spPr>
-          <a:xfrm>
-            <a:off x="9146286" y="4270248"/>
-            <a:ext cx="402336" cy="402336"/>
-          </a:xfrm>
-          <a:prstGeom prst="ellipse">
-            <a:avLst/>
-          </a:prstGeom>
-          <a:solidFill>
-            <a:srgbClr val="3E8E84"/>
-          </a:solidFill>
-          <a:ln w="12700">
-            <a:solidFill>
-              <a:srgbClr val="3E8E84"/>
-            </a:solidFill>
-            <a:prstDash val="solid"/>
-          </a:ln>
-        </p:spPr>
-      </p:sp>
-      <p:sp>
-        <p:nvSpPr>
-          <p:cNvPr id="41" name="Text 39"/>
-          <p:cNvSpPr/>
-          <p:nvPr/>
-        </p:nvSpPr>
-        <p:spPr>
-          <a:xfrm>
-            <a:off x="9146286" y="4270248"/>
-            <a:ext cx="402336" cy="402336"/>
-          </a:xfrm>
-          <a:prstGeom prst="rect">
-            <a:avLst/>
-          </a:prstGeom>
-          <a:noFill/>
-          <a:ln/>
-        </p:spPr>
-        <p:txBody>
-          <a:bodyPr wrap="square" lIns="0" tIns="0" rIns="0" bIns="0" rtlCol="0" anchor="ctr"/>
-          <a:lstStyle/>
-          <a:p>
-            <a:pPr algn="ctr" indent="0" marL="0">
-              <a:buNone/>
-            </a:pPr>
-            <a:r>
-              <a:rPr lang="en-US" sz="1300" b="1" dirty="0">
-                <a:solidFill>
-                  <a:srgbClr val="FFFFFF"/>
-                </a:solidFill>
-                <a:latin typeface="Yu Gothic" pitchFamily="34" charset="0"/>
-                <a:ea typeface="Yu Gothic" pitchFamily="34" charset="-122"/>
-                <a:cs typeface="Yu Gothic" pitchFamily="34" charset="-120"/>
-              </a:rPr>
-              <a:t>8</a:t>
-            </a:r>
-            <a:endParaRPr lang="en-US" sz="1300" dirty="0"/>
-          </a:p>
-        </p:txBody>
-      </p:sp>
-      <p:sp>
-        <p:nvSpPr>
-          <p:cNvPr id="42" name="Text 40"/>
-          <p:cNvSpPr/>
-          <p:nvPr/>
-        </p:nvSpPr>
-        <p:spPr>
-          <a:xfrm>
-            <a:off x="9127998" y="4764024"/>
-            <a:ext cx="2183130" cy="347472"/>
-          </a:xfrm>
-          <a:prstGeom prst="rect">
-            <a:avLst/>
-          </a:prstGeom>
-          <a:noFill/>
-          <a:ln/>
-        </p:spPr>
-        <p:txBody>
-          <a:bodyPr wrap="square" lIns="0" tIns="0" rIns="0" bIns="0" rtlCol="0" anchor="ctr"/>
-          <a:lstStyle/>
-          <a:p>
-            <a:pPr indent="0" marL="0">
-              <a:buNone/>
-            </a:pPr>
-            <a:r>
-              <a:rPr lang="en-US" sz="1500" b="1" dirty="0">
-                <a:solidFill>
-                  <a:srgbClr val="14504B"/>
-                </a:solidFill>
-                <a:latin typeface="Yu Gothic" pitchFamily="34" charset="0"/>
-                <a:ea typeface="Yu Gothic" pitchFamily="34" charset="-122"/>
-                <a:cs typeface="Yu Gothic" pitchFamily="34" charset="-120"/>
-              </a:rPr>
-              <a:t>記録の書面出力</a:t>
-            </a:r>
-            <a:endParaRPr lang="en-US" sz="1500" dirty="0"/>
-          </a:p>
-        </p:txBody>
-      </p:sp>
-      <p:sp>
-        <p:nvSpPr>
-          <p:cNvPr id="43" name="Text 41"/>
-          <p:cNvSpPr/>
-          <p:nvPr/>
-        </p:nvSpPr>
-        <p:spPr>
-          <a:xfrm>
-            <a:off x="9127998" y="5148072"/>
-            <a:ext cx="2228850" cy="777240"/>
-          </a:xfrm>
-          <a:prstGeom prst="rect">
-            <a:avLst/>
-          </a:prstGeom>
-          <a:noFill/>
-          <a:ln/>
-        </p:spPr>
-        <p:txBody>
-          <a:bodyPr wrap="square" lIns="0" tIns="0" rIns="0" bIns="0" rtlCol="0" anchor="ctr"/>
-          <a:lstStyle/>
-          <a:p>
-            <a:pPr indent="0" marL="0">
-              <a:lnSpc>
-                <a:spcPct val="120000"/>
-              </a:lnSpc>
-              <a:buNone/>
-            </a:pPr>
-            <a:r>
-              <a:rPr lang="en-US" sz="1200" dirty="0">
-                <a:solidFill>
-                  <a:srgbClr val="5C6B68"/>
-                </a:solidFill>
-                <a:latin typeface="Yu Gothic" pitchFamily="34" charset="0"/>
-                <a:ea typeface="Yu Gothic" pitchFamily="34" charset="-122"/>
-                <a:cs typeface="Yu Gothic" pitchFamily="34" charset="-120"/>
-              </a:rPr>
-              <a:t>保管中の記録を</a:t>
-            </a:r>
-            <a:endParaRPr lang="en-US" sz="1200" dirty="0"/>
-          </a:p>
-          <a:p>
-            <a:pPr indent="0" marL="0">
-              <a:lnSpc>
-                <a:spcPct val="120000"/>
-              </a:lnSpc>
-              <a:buNone/>
-            </a:pPr>
-            <a:r>
-              <a:rPr lang="en-US" sz="1200" dirty="0">
-                <a:solidFill>
-                  <a:srgbClr val="5C6B68"/>
-                </a:solidFill>
-                <a:latin typeface="Yu Gothic" pitchFamily="34" charset="0"/>
-                <a:ea typeface="Yu Gothic" pitchFamily="34" charset="-122"/>
-                <a:cs typeface="Yu Gothic" pitchFamily="34" charset="-120"/>
-              </a:rPr>
-              <a:t>そのまま印刷できる</a:t>
-            </a:r>
-            <a:endParaRPr lang="en-US" sz="1200" dirty="0"/>
-          </a:p>
-        </p:txBody>
-      </p:sp>
-      <p:sp>
-        <p:nvSpPr>
-          <p:cNvPr id="44" name="Text 42"/>
-          <p:cNvSpPr/>
-          <p:nvPr/>
-        </p:nvSpPr>
-        <p:spPr>
-          <a:xfrm>
-            <a:off x="731520" y="6108192"/>
-            <a:ext cx="5486400" cy="292608"/>
-          </a:xfrm>
-          <a:prstGeom prst="rect">
-            <a:avLst/>
-          </a:prstGeom>
-          <a:noFill/>
-          <a:ln/>
-        </p:spPr>
-        <p:txBody>
-          <a:bodyPr wrap="square" lIns="0" tIns="0" rIns="0" bIns="0" rtlCol="0" anchor="ctr"/>
-          <a:lstStyle/>
-          <a:p>
-            <a:pPr indent="0" marL="0">
-              <a:buNone/>
-            </a:pPr>
-            <a:r>
-              <a:rPr lang="en-US" sz="1300" b="1" dirty="0">
-                <a:solidFill>
-                  <a:srgbClr val="D98A2B"/>
-                </a:solidFill>
-                <a:latin typeface="Yu Gothic" pitchFamily="34" charset="0"/>
-                <a:ea typeface="Yu Gothic" pitchFamily="34" charset="-122"/>
-                <a:cs typeface="Yu Gothic" pitchFamily="34" charset="-120"/>
-              </a:rPr>
-              <a:t>⑤⑥はAIを使う機能</a:t>
-            </a:r>
-            <a:endParaRPr lang="en-US" sz="1300" dirty="0"/>
-          </a:p>
-        </p:txBody>
-      </p:sp>
-      <p:sp>
-        <p:nvSpPr>
-          <p:cNvPr id="45" name="Text 43"/>
-          <p:cNvSpPr/>
-          <p:nvPr/>
-        </p:nvSpPr>
-        <p:spPr>
-          <a:xfrm>
-            <a:off x="731520" y="6400800"/>
-            <a:ext cx="10698480" cy="320040"/>
+            <a:off x="731520" y="6144768"/>
+            <a:ext cx="10698480" cy="365760"/>
           </a:xfrm>
           <a:prstGeom prst="rect">
             <a:avLst/>
@@ -18478,7 +17913,7 @@
                 <a:ea typeface="Yu Gothic" pitchFamily="34" charset="-122"/>
                 <a:cs typeface="Yu Gothic" pitchFamily="34" charset="-120"/>
               </a:rPr>
-              <a:t>②と⑤がつながっているのがこのアプリの要。「血圧が下がってきたので降圧薬を見直しては」という相談が、数字を見ながらできます。</a:t>
+              <a:t>Webブラウザだけで使えます。専用アプリのインストールは要りません。施設の共用パソコンでも、タブレットでも同じ画面です。</a:t>
             </a:r>
             <a:endParaRPr lang="en-US" sz="1300" dirty="0"/>
           </a:p>
@@ -18549,7 +17984,7 @@
                 <a:ea typeface="Yu Gothic" pitchFamily="34" charset="-122"/>
                 <a:cs typeface="Yu Gothic" pitchFamily="34" charset="-120"/>
               </a:rPr>
-              <a:t>施設をつくり、招待コードでつながる</a:t>
+              <a:t>日々の記録から、判断の支援まで</a:t>
             </a:r>
             <a:endParaRPr lang="en-US" sz="3600" dirty="0"/>
           </a:p>
@@ -18557,18 +17992,57 @@
       </p:sp>
       <p:sp>
         <p:nvSpPr>
-          <p:cNvPr id="3" name="Shape 1"/>
-          <p:cNvSpPr/>
-          <p:nvPr/>
-        </p:nvSpPr>
-        <p:spPr>
-          <a:xfrm>
-            <a:off x="731520" y="2057400"/>
-            <a:ext cx="1920240" cy="1828800"/>
+          <p:cNvPr id="3" name="Text 1"/>
+          <p:cNvSpPr/>
+          <p:nvPr/>
+        </p:nvSpPr>
+        <p:spPr>
+          <a:xfrm>
+            <a:off x="731520" y="1225296"/>
+            <a:ext cx="10698480" cy="411480"/>
+          </a:xfrm>
+          <a:prstGeom prst="rect">
+            <a:avLst/>
+          </a:prstGeom>
+          <a:noFill/>
+          <a:ln/>
+        </p:spPr>
+        <p:txBody>
+          <a:bodyPr wrap="square" lIns="0" tIns="0" rIns="0" bIns="0" rtlCol="0" anchor="ctr"/>
+          <a:lstStyle/>
+          <a:p>
+            <a:pPr indent="0" marL="0">
+              <a:buNone/>
+            </a:pPr>
+            <a:r>
+              <a:rPr lang="en-US" sz="1600" dirty="0">
+                <a:solidFill>
+                  <a:srgbClr val="5C6B68"/>
+                </a:solidFill>
+                <a:latin typeface="Yu Gothic" pitchFamily="34" charset="0"/>
+                <a:ea typeface="Yu Gothic" pitchFamily="34" charset="-122"/>
+                <a:cs typeface="Yu Gothic" pitchFamily="34" charset="-120"/>
+              </a:rPr>
+              <a:t>記録する・相談する・判断を助ける。ばらばらだったものが、ひとつの画面の中でつながります</a:t>
+            </a:r>
+            <a:endParaRPr lang="en-US" sz="1600" dirty="0"/>
+          </a:p>
+        </p:txBody>
+      </p:sp>
+      <p:sp>
+        <p:nvSpPr>
+          <p:cNvPr id="4" name="Shape 2"/>
+          <p:cNvSpPr/>
+          <p:nvPr/>
+        </p:nvSpPr>
+        <p:spPr>
+          <a:xfrm>
+            <a:off x="731520" y="1920240"/>
+            <a:ext cx="2503170" cy="1965960"/>
           </a:xfrm>
           <a:prstGeom prst="roundRect">
             <a:avLst>
-              <a:gd name="adj" fmla="val 4000"/>
+              <a:gd name="adj" fmla="val 3721"/>
             </a:avLst>
           </a:prstGeom>
           <a:solidFill>
@@ -18584,24 +18058,24 @@
       </p:sp>
       <p:sp>
         <p:nvSpPr>
-          <p:cNvPr id="4" name="Shape 2"/>
-          <p:cNvSpPr/>
-          <p:nvPr/>
-        </p:nvSpPr>
-        <p:spPr>
-          <a:xfrm>
-            <a:off x="1417320" y="2286000"/>
-            <a:ext cx="566928" cy="566928"/>
+          <p:cNvPr id="5" name="Shape 3"/>
+          <p:cNvSpPr/>
+          <p:nvPr/>
+        </p:nvSpPr>
+        <p:spPr>
+          <a:xfrm>
+            <a:off x="950976" y="2121408"/>
+            <a:ext cx="402336" cy="402336"/>
           </a:xfrm>
           <a:prstGeom prst="ellipse">
             <a:avLst/>
           </a:prstGeom>
           <a:solidFill>
-            <a:srgbClr val="14504B"/>
+            <a:srgbClr val="3E8E84"/>
           </a:solidFill>
           <a:ln w="12700">
             <a:solidFill>
-              <a:srgbClr val="14504B"/>
+              <a:srgbClr val="3E8E84"/>
             </a:solidFill>
             <a:prstDash val="solid"/>
           </a:ln>
@@ -18609,14 +18083,14 @@
       </p:sp>
       <p:sp>
         <p:nvSpPr>
-          <p:cNvPr id="5" name="Text 3"/>
-          <p:cNvSpPr/>
-          <p:nvPr/>
-        </p:nvSpPr>
-        <p:spPr>
-          <a:xfrm>
-            <a:off x="1417320" y="2286000"/>
-            <a:ext cx="566928" cy="566928"/>
+          <p:cNvPr id="6" name="Text 4"/>
+          <p:cNvSpPr/>
+          <p:nvPr/>
+        </p:nvSpPr>
+        <p:spPr>
+          <a:xfrm>
+            <a:off x="950976" y="2121408"/>
+            <a:ext cx="402336" cy="402336"/>
           </a:xfrm>
           <a:prstGeom prst="rect">
             <a:avLst/>
@@ -18632,7 +18106,7 @@
               <a:buNone/>
             </a:pPr>
             <a:r>
-              <a:rPr lang="en-US" sz="2000" b="1" dirty="0">
+              <a:rPr lang="en-US" sz="1300" b="1" dirty="0">
                 <a:solidFill>
                   <a:srgbClr val="FFFFFF"/>
                 </a:solidFill>
@@ -18642,32 +18116,32 @@
               </a:rPr>
               <a:t>1</a:t>
             </a:r>
-            <a:endParaRPr lang="en-US" sz="2000" dirty="0"/>
-          </a:p>
-        </p:txBody>
-      </p:sp>
-      <p:sp>
-        <p:nvSpPr>
-          <p:cNvPr id="6" name="Text 4"/>
-          <p:cNvSpPr/>
-          <p:nvPr/>
-        </p:nvSpPr>
-        <p:spPr>
-          <a:xfrm>
-            <a:off x="749808" y="3063240"/>
-            <a:ext cx="1883664" cy="685800"/>
-          </a:xfrm>
-          <a:prstGeom prst="rect">
-            <a:avLst/>
-          </a:prstGeom>
-          <a:noFill/>
-          <a:ln/>
-        </p:spPr>
-        <p:txBody>
-          <a:bodyPr wrap="square" lIns="0" tIns="0" rIns="0" bIns="0" rtlCol="0" anchor="ctr"/>
-          <a:lstStyle/>
-          <a:p>
-            <a:pPr algn="ctr" indent="0" marL="0">
+            <a:endParaRPr lang="en-US" sz="1300" dirty="0"/>
+          </a:p>
+        </p:txBody>
+      </p:sp>
+      <p:sp>
+        <p:nvSpPr>
+          <p:cNvPr id="7" name="Text 5"/>
+          <p:cNvSpPr/>
+          <p:nvPr/>
+        </p:nvSpPr>
+        <p:spPr>
+          <a:xfrm>
+            <a:off x="932688" y="2615184"/>
+            <a:ext cx="2183130" cy="347472"/>
+          </a:xfrm>
+          <a:prstGeom prst="rect">
+            <a:avLst/>
+          </a:prstGeom>
+          <a:noFill/>
+          <a:ln/>
+        </p:spPr>
+        <p:txBody>
+          <a:bodyPr wrap="square" lIns="0" tIns="0" rIns="0" bIns="0" rtlCol="0" anchor="ctr"/>
+          <a:lstStyle/>
+          <a:p>
+            <a:pPr indent="0" marL="0">
               <a:buNone/>
             </a:pPr>
             <a:r>
@@ -18679,7 +18153,7 @@
                 <a:ea typeface="Yu Gothic" pitchFamily="34" charset="-122"/>
                 <a:cs typeface="Yu Gothic" pitchFamily="34" charset="-120"/>
               </a:rPr>
-              <a:t>施設をつくる</a:t>
+              <a:t>お薬手帳</a:t>
             </a:r>
             <a:endParaRPr lang="en-US" sz="1500" dirty="0"/>
           </a:p>
@@ -18687,43 +18161,80 @@
       </p:sp>
       <p:sp>
         <p:nvSpPr>
-          <p:cNvPr id="7" name="Shape 5"/>
-          <p:cNvSpPr/>
-          <p:nvPr/>
-        </p:nvSpPr>
-        <p:spPr>
-          <a:xfrm>
-            <a:off x="2688336" y="2880360"/>
-            <a:ext cx="219456" cy="237744"/>
-          </a:xfrm>
-          <a:prstGeom prst="rightArrow">
-            <a:avLst/>
-          </a:prstGeom>
-          <a:solidFill>
-            <a:srgbClr val="A8CFC9"/>
-          </a:solidFill>
-          <a:ln w="12700">
-            <a:solidFill>
-              <a:srgbClr val="A8CFC9"/>
-            </a:solidFill>
-            <a:prstDash val="solid"/>
-          </a:ln>
-        </p:spPr>
-      </p:sp>
-      <p:sp>
-        <p:nvSpPr>
-          <p:cNvPr id="8" name="Shape 6"/>
-          <p:cNvSpPr/>
-          <p:nvPr/>
-        </p:nvSpPr>
-        <p:spPr>
-          <a:xfrm>
-            <a:off x="2971800" y="2057400"/>
-            <a:ext cx="1920240" cy="1828800"/>
+          <p:cNvPr id="8" name="Text 6"/>
+          <p:cNvSpPr/>
+          <p:nvPr/>
+        </p:nvSpPr>
+        <p:spPr>
+          <a:xfrm>
+            <a:off x="932688" y="2999232"/>
+            <a:ext cx="2228850" cy="777240"/>
+          </a:xfrm>
+          <a:prstGeom prst="rect">
+            <a:avLst/>
+          </a:prstGeom>
+          <a:noFill/>
+          <a:ln/>
+        </p:spPr>
+        <p:txBody>
+          <a:bodyPr wrap="square" lIns="0" tIns="0" rIns="0" bIns="0" rtlCol="0" anchor="ctr"/>
+          <a:lstStyle/>
+          <a:p>
+            <a:pPr indent="0" marL="0">
+              <a:lnSpc>
+                <a:spcPct val="120000"/>
+              </a:lnSpc>
+              <a:buNone/>
+            </a:pPr>
+            <a:r>
+              <a:rPr lang="en-US" sz="1200" dirty="0">
+                <a:solidFill>
+                  <a:srgbClr val="5C6B68"/>
+                </a:solidFill>
+                <a:latin typeface="Yu Gothic" pitchFamily="34" charset="0"/>
+                <a:ea typeface="Yu Gothic" pitchFamily="34" charset="-122"/>
+                <a:cs typeface="Yu Gothic" pitchFamily="34" charset="-120"/>
+              </a:rPr>
+              <a:t>QRコードで5秒登録。</a:t>
+            </a:r>
+            <a:endParaRPr lang="en-US" sz="1200" dirty="0"/>
+          </a:p>
+          <a:p>
+            <a:pPr indent="0" marL="0">
+              <a:lnSpc>
+                <a:spcPct val="120000"/>
+              </a:lnSpc>
+              <a:buNone/>
+            </a:pPr>
+            <a:r>
+              <a:rPr lang="en-US" sz="1200" dirty="0">
+                <a:solidFill>
+                  <a:srgbClr val="5C6B68"/>
+                </a:solidFill>
+                <a:latin typeface="Yu Gothic" pitchFamily="34" charset="0"/>
+                <a:ea typeface="Yu Gothic" pitchFamily="34" charset="-122"/>
+                <a:cs typeface="Yu Gothic" pitchFamily="34" charset="-120"/>
+              </a:rPr>
+              <a:t>変更履歴も自動で残る</a:t>
+            </a:r>
+            <a:endParaRPr lang="en-US" sz="1200" dirty="0"/>
+          </a:p>
+        </p:txBody>
+      </p:sp>
+      <p:sp>
+        <p:nvSpPr>
+          <p:cNvPr id="9" name="Shape 7"/>
+          <p:cNvSpPr/>
+          <p:nvPr/>
+        </p:nvSpPr>
+        <p:spPr>
+          <a:xfrm>
+            <a:off x="3463290" y="1920240"/>
+            <a:ext cx="2503170" cy="1965960"/>
           </a:xfrm>
           <a:prstGeom prst="roundRect">
             <a:avLst>
-              <a:gd name="adj" fmla="val 4000"/>
+              <a:gd name="adj" fmla="val 3721"/>
             </a:avLst>
           </a:prstGeom>
           <a:solidFill>
@@ -18739,14 +18250,14 @@
       </p:sp>
       <p:sp>
         <p:nvSpPr>
-          <p:cNvPr id="9" name="Shape 7"/>
-          <p:cNvSpPr/>
-          <p:nvPr/>
-        </p:nvSpPr>
-        <p:spPr>
-          <a:xfrm>
-            <a:off x="3657600" y="2286000"/>
-            <a:ext cx="566928" cy="566928"/>
+          <p:cNvPr id="10" name="Shape 8"/>
+          <p:cNvSpPr/>
+          <p:nvPr/>
+        </p:nvSpPr>
+        <p:spPr>
+          <a:xfrm>
+            <a:off x="3682746" y="2121408"/>
+            <a:ext cx="402336" cy="402336"/>
           </a:xfrm>
           <a:prstGeom prst="ellipse">
             <a:avLst/>
@@ -18764,14 +18275,14 @@
       </p:sp>
       <p:sp>
         <p:nvSpPr>
-          <p:cNvPr id="10" name="Text 8"/>
-          <p:cNvSpPr/>
-          <p:nvPr/>
-        </p:nvSpPr>
-        <p:spPr>
-          <a:xfrm>
-            <a:off x="3657600" y="2286000"/>
-            <a:ext cx="566928" cy="566928"/>
+          <p:cNvPr id="11" name="Text 9"/>
+          <p:cNvSpPr/>
+          <p:nvPr/>
+        </p:nvSpPr>
+        <p:spPr>
+          <a:xfrm>
+            <a:off x="3682746" y="2121408"/>
+            <a:ext cx="402336" cy="402336"/>
           </a:xfrm>
           <a:prstGeom prst="rect">
             <a:avLst/>
@@ -18787,7 +18298,7 @@
               <a:buNone/>
             </a:pPr>
             <a:r>
-              <a:rPr lang="en-US" sz="2000" b="1" dirty="0">
+              <a:rPr lang="en-US" sz="1300" b="1" dirty="0">
                 <a:solidFill>
                   <a:srgbClr val="FFFFFF"/>
                 </a:solidFill>
@@ -18797,32 +18308,32 @@
               </a:rPr>
               <a:t>2</a:t>
             </a:r>
-            <a:endParaRPr lang="en-US" sz="2000" dirty="0"/>
-          </a:p>
-        </p:txBody>
-      </p:sp>
-      <p:sp>
-        <p:nvSpPr>
-          <p:cNvPr id="11" name="Text 9"/>
-          <p:cNvSpPr/>
-          <p:nvPr/>
-        </p:nvSpPr>
-        <p:spPr>
-          <a:xfrm>
-            <a:off x="2990088" y="3063240"/>
-            <a:ext cx="1883664" cy="685800"/>
-          </a:xfrm>
-          <a:prstGeom prst="rect">
-            <a:avLst/>
-          </a:prstGeom>
-          <a:noFill/>
-          <a:ln/>
-        </p:spPr>
-        <p:txBody>
-          <a:bodyPr wrap="square" lIns="0" tIns="0" rIns="0" bIns="0" rtlCol="0" anchor="ctr"/>
-          <a:lstStyle/>
-          <a:p>
-            <a:pPr algn="ctr" indent="0" marL="0">
+            <a:endParaRPr lang="en-US" sz="1300" dirty="0"/>
+          </a:p>
+        </p:txBody>
+      </p:sp>
+      <p:sp>
+        <p:nvSpPr>
+          <p:cNvPr id="12" name="Text 10"/>
+          <p:cNvSpPr/>
+          <p:nvPr/>
+        </p:nvSpPr>
+        <p:spPr>
+          <a:xfrm>
+            <a:off x="3664458" y="2615184"/>
+            <a:ext cx="2183130" cy="347472"/>
+          </a:xfrm>
+          <a:prstGeom prst="rect">
+            <a:avLst/>
+          </a:prstGeom>
+          <a:noFill/>
+          <a:ln/>
+        </p:spPr>
+        <p:txBody>
+          <a:bodyPr wrap="square" lIns="0" tIns="0" rIns="0" bIns="0" rtlCol="0" anchor="ctr"/>
+          <a:lstStyle/>
+          <a:p>
+            <a:pPr indent="0" marL="0">
               <a:buNone/>
             </a:pPr>
             <a:r>
@@ -18834,7 +18345,7 @@
                 <a:ea typeface="Yu Gothic" pitchFamily="34" charset="-122"/>
                 <a:cs typeface="Yu Gothic" pitchFamily="34" charset="-120"/>
               </a:rPr>
-              <a:t>招待コード発行</a:t>
+              <a:t>服薬記録・バイタル</a:t>
             </a:r>
             <a:endParaRPr lang="en-US" sz="1500" dirty="0"/>
           </a:p>
@@ -18842,43 +18353,80 @@
       </p:sp>
       <p:sp>
         <p:nvSpPr>
-          <p:cNvPr id="12" name="Shape 10"/>
-          <p:cNvSpPr/>
-          <p:nvPr/>
-        </p:nvSpPr>
-        <p:spPr>
-          <a:xfrm>
-            <a:off x="4928616" y="2880360"/>
-            <a:ext cx="219456" cy="237744"/>
-          </a:xfrm>
-          <a:prstGeom prst="rightArrow">
-            <a:avLst/>
-          </a:prstGeom>
-          <a:solidFill>
-            <a:srgbClr val="A8CFC9"/>
-          </a:solidFill>
-          <a:ln w="12700">
-            <a:solidFill>
-              <a:srgbClr val="A8CFC9"/>
-            </a:solidFill>
-            <a:prstDash val="solid"/>
-          </a:ln>
-        </p:spPr>
-      </p:sp>
-      <p:sp>
-        <p:nvSpPr>
-          <p:cNvPr id="13" name="Shape 11"/>
-          <p:cNvSpPr/>
-          <p:nvPr/>
-        </p:nvSpPr>
-        <p:spPr>
-          <a:xfrm>
-            <a:off x="5212080" y="2057400"/>
-            <a:ext cx="1920240" cy="1828800"/>
+          <p:cNvPr id="13" name="Text 11"/>
+          <p:cNvSpPr/>
+          <p:nvPr/>
+        </p:nvSpPr>
+        <p:spPr>
+          <a:xfrm>
+            <a:off x="3664458" y="2999232"/>
+            <a:ext cx="2228850" cy="777240"/>
+          </a:xfrm>
+          <a:prstGeom prst="rect">
+            <a:avLst/>
+          </a:prstGeom>
+          <a:noFill/>
+          <a:ln/>
+        </p:spPr>
+        <p:txBody>
+          <a:bodyPr wrap="square" lIns="0" tIns="0" rIns="0" bIns="0" rtlCol="0" anchor="ctr"/>
+          <a:lstStyle/>
+          <a:p>
+            <a:pPr indent="0" marL="0">
+              <a:lnSpc>
+                <a:spcPct val="120000"/>
+              </a:lnSpc>
+              <a:buNone/>
+            </a:pPr>
+            <a:r>
+              <a:rPr lang="en-US" sz="1200" dirty="0">
+                <a:solidFill>
+                  <a:srgbClr val="5C6B68"/>
+                </a:solidFill>
+                <a:latin typeface="Yu Gothic" pitchFamily="34" charset="0"/>
+                <a:ea typeface="Yu Gothic" pitchFamily="34" charset="-122"/>
+                <a:cs typeface="Yu Gothic" pitchFamily="34" charset="-120"/>
+              </a:rPr>
+              <a:t>服薬の実施、血圧・体温・</a:t>
+            </a:r>
+            <a:endParaRPr lang="en-US" sz="1200" dirty="0"/>
+          </a:p>
+          <a:p>
+            <a:pPr indent="0" marL="0">
+              <a:lnSpc>
+                <a:spcPct val="120000"/>
+              </a:lnSpc>
+              <a:buNone/>
+            </a:pPr>
+            <a:r>
+              <a:rPr lang="en-US" sz="1200" dirty="0">
+                <a:solidFill>
+                  <a:srgbClr val="5C6B68"/>
+                </a:solidFill>
+                <a:latin typeface="Yu Gothic" pitchFamily="34" charset="0"/>
+                <a:ea typeface="Yu Gothic" pitchFamily="34" charset="-122"/>
+                <a:cs typeface="Yu Gothic" pitchFamily="34" charset="-120"/>
+              </a:rPr>
+              <a:t>SpO₂を日々の記録として</a:t>
+            </a:r>
+            <a:endParaRPr lang="en-US" sz="1200" dirty="0"/>
+          </a:p>
+        </p:txBody>
+      </p:sp>
+      <p:sp>
+        <p:nvSpPr>
+          <p:cNvPr id="14" name="Shape 12"/>
+          <p:cNvSpPr/>
+          <p:nvPr/>
+        </p:nvSpPr>
+        <p:spPr>
+          <a:xfrm>
+            <a:off x="6195060" y="1920240"/>
+            <a:ext cx="2503170" cy="1965960"/>
           </a:xfrm>
           <a:prstGeom prst="roundRect">
             <a:avLst>
-              <a:gd name="adj" fmla="val 4000"/>
+              <a:gd name="adj" fmla="val 3721"/>
             </a:avLst>
           </a:prstGeom>
           <a:solidFill>
@@ -18894,14 +18442,14 @@
       </p:sp>
       <p:sp>
         <p:nvSpPr>
-          <p:cNvPr id="14" name="Shape 12"/>
-          <p:cNvSpPr/>
-          <p:nvPr/>
-        </p:nvSpPr>
-        <p:spPr>
-          <a:xfrm>
-            <a:off x="5897880" y="2286000"/>
-            <a:ext cx="566928" cy="566928"/>
+          <p:cNvPr id="15" name="Shape 13"/>
+          <p:cNvSpPr/>
+          <p:nvPr/>
+        </p:nvSpPr>
+        <p:spPr>
+          <a:xfrm>
+            <a:off x="6414516" y="2121408"/>
+            <a:ext cx="402336" cy="402336"/>
           </a:xfrm>
           <a:prstGeom prst="ellipse">
             <a:avLst/>
@@ -18919,14 +18467,14 @@
       </p:sp>
       <p:sp>
         <p:nvSpPr>
-          <p:cNvPr id="15" name="Text 13"/>
-          <p:cNvSpPr/>
-          <p:nvPr/>
-        </p:nvSpPr>
-        <p:spPr>
-          <a:xfrm>
-            <a:off x="5897880" y="2286000"/>
-            <a:ext cx="566928" cy="566928"/>
+          <p:cNvPr id="16" name="Text 14"/>
+          <p:cNvSpPr/>
+          <p:nvPr/>
+        </p:nvSpPr>
+        <p:spPr>
+          <a:xfrm>
+            <a:off x="6414516" y="2121408"/>
+            <a:ext cx="402336" cy="402336"/>
           </a:xfrm>
           <a:prstGeom prst="rect">
             <a:avLst/>
@@ -18942,7 +18490,7 @@
               <a:buNone/>
             </a:pPr>
             <a:r>
-              <a:rPr lang="en-US" sz="2000" b="1" dirty="0">
+              <a:rPr lang="en-US" sz="1300" b="1" dirty="0">
                 <a:solidFill>
                   <a:srgbClr val="FFFFFF"/>
                 </a:solidFill>
@@ -18952,32 +18500,32 @@
               </a:rPr>
               <a:t>3</a:t>
             </a:r>
-            <a:endParaRPr lang="en-US" sz="2000" dirty="0"/>
-          </a:p>
-        </p:txBody>
-      </p:sp>
-      <p:sp>
-        <p:nvSpPr>
-          <p:cNvPr id="16" name="Text 14"/>
-          <p:cNvSpPr/>
-          <p:nvPr/>
-        </p:nvSpPr>
-        <p:spPr>
-          <a:xfrm>
-            <a:off x="5230368" y="3063240"/>
-            <a:ext cx="1883664" cy="685800"/>
-          </a:xfrm>
-          <a:prstGeom prst="rect">
-            <a:avLst/>
-          </a:prstGeom>
-          <a:noFill/>
-          <a:ln/>
-        </p:spPr>
-        <p:txBody>
-          <a:bodyPr wrap="square" lIns="0" tIns="0" rIns="0" bIns="0" rtlCol="0" anchor="ctr"/>
-          <a:lstStyle/>
-          <a:p>
-            <a:pPr algn="ctr" indent="0" marL="0">
+            <a:endParaRPr lang="en-US" sz="1300" dirty="0"/>
+          </a:p>
+        </p:txBody>
+      </p:sp>
+      <p:sp>
+        <p:nvSpPr>
+          <p:cNvPr id="17" name="Text 15"/>
+          <p:cNvSpPr/>
+          <p:nvPr/>
+        </p:nvSpPr>
+        <p:spPr>
+          <a:xfrm>
+            <a:off x="6396228" y="2615184"/>
+            <a:ext cx="2183130" cy="347472"/>
+          </a:xfrm>
+          <a:prstGeom prst="rect">
+            <a:avLst/>
+          </a:prstGeom>
+          <a:noFill/>
+          <a:ln/>
+        </p:spPr>
+        <p:txBody>
+          <a:bodyPr wrap="square" lIns="0" tIns="0" rIns="0" bIns="0" rtlCol="0" anchor="ctr"/>
+          <a:lstStyle/>
+          <a:p>
+            <a:pPr indent="0" marL="0">
               <a:buNone/>
             </a:pPr>
             <a:r>
@@ -18989,7 +18537,7 @@
                 <a:ea typeface="Yu Gothic" pitchFamily="34" charset="-122"/>
                 <a:cs typeface="Yu Gothic" pitchFamily="34" charset="-120"/>
               </a:rPr>
-              <a:t>職員が参加</a:t>
+              <a:t>チャット</a:t>
             </a:r>
             <a:endParaRPr lang="en-US" sz="1500" dirty="0"/>
           </a:p>
@@ -18997,43 +18545,100 @@
       </p:sp>
       <p:sp>
         <p:nvSpPr>
-          <p:cNvPr id="17" name="Shape 15"/>
-          <p:cNvSpPr/>
-          <p:nvPr/>
-        </p:nvSpPr>
-        <p:spPr>
-          <a:xfrm>
-            <a:off x="7168896" y="2880360"/>
-            <a:ext cx="219456" cy="237744"/>
-          </a:xfrm>
-          <a:prstGeom prst="rightArrow">
-            <a:avLst/>
-          </a:prstGeom>
-          <a:solidFill>
-            <a:srgbClr val="A8CFC9"/>
-          </a:solidFill>
-          <a:ln w="12700">
-            <a:solidFill>
-              <a:srgbClr val="A8CFC9"/>
-            </a:solidFill>
-            <a:prstDash val="solid"/>
-          </a:ln>
-        </p:spPr>
-      </p:sp>
-      <p:sp>
-        <p:nvSpPr>
-          <p:cNvPr id="18" name="Shape 16"/>
-          <p:cNvSpPr/>
-          <p:nvPr/>
-        </p:nvSpPr>
-        <p:spPr>
-          <a:xfrm>
-            <a:off x="7452360" y="2057400"/>
-            <a:ext cx="1920240" cy="1828800"/>
+          <p:cNvPr id="18" name="Text 16"/>
+          <p:cNvSpPr/>
+          <p:nvPr/>
+        </p:nvSpPr>
+        <p:spPr>
+          <a:xfrm>
+            <a:off x="6396228" y="2999232"/>
+            <a:ext cx="2228850" cy="777240"/>
+          </a:xfrm>
+          <a:prstGeom prst="rect">
+            <a:avLst/>
+          </a:prstGeom>
+          <a:noFill/>
+          <a:ln/>
+        </p:spPr>
+        <p:txBody>
+          <a:bodyPr wrap="square" lIns="0" tIns="0" rIns="0" bIns="0" rtlCol="0" anchor="ctr"/>
+          <a:lstStyle/>
+          <a:p>
+            <a:pPr indent="0" marL="0">
+              <a:lnSpc>
+                <a:spcPct val="120000"/>
+              </a:lnSpc>
+              <a:buNone/>
+            </a:pPr>
+            <a:r>
+              <a:rPr lang="en-US" sz="1200" dirty="0">
+                <a:solidFill>
+                  <a:srgbClr val="5C6B68"/>
+                </a:solidFill>
+                <a:latin typeface="Yu Gothic" pitchFamily="34" charset="0"/>
+                <a:ea typeface="Yu Gothic" pitchFamily="34" charset="-122"/>
+                <a:cs typeface="Yu Gothic" pitchFamily="34" charset="-120"/>
+              </a:rPr>
+              <a:t>入居者ごとの相談ルーム。</a:t>
+            </a:r>
+            <a:endParaRPr lang="en-US" sz="1200" dirty="0"/>
+          </a:p>
+          <a:p>
+            <a:pPr indent="0" marL="0">
+              <a:lnSpc>
+                <a:spcPct val="120000"/>
+              </a:lnSpc>
+              <a:buNone/>
+            </a:pPr>
+            <a:r>
+              <a:rPr lang="en-US" sz="1200" dirty="0">
+                <a:solidFill>
+                  <a:srgbClr val="5C6B68"/>
+                </a:solidFill>
+                <a:latin typeface="Yu Gothic" pitchFamily="34" charset="0"/>
+                <a:ea typeface="Yu Gothic" pitchFamily="34" charset="-122"/>
+                <a:cs typeface="Yu Gothic" pitchFamily="34" charset="-120"/>
+              </a:rPr>
+              <a:t>何の薬の話かが</a:t>
+            </a:r>
+            <a:endParaRPr lang="en-US" sz="1200" dirty="0"/>
+          </a:p>
+          <a:p>
+            <a:pPr indent="0" marL="0">
+              <a:lnSpc>
+                <a:spcPct val="120000"/>
+              </a:lnSpc>
+              <a:buNone/>
+            </a:pPr>
+            <a:r>
+              <a:rPr lang="en-US" sz="1200" dirty="0">
+                <a:solidFill>
+                  <a:srgbClr val="5C6B68"/>
+                </a:solidFill>
+                <a:latin typeface="Yu Gothic" pitchFamily="34" charset="0"/>
+                <a:ea typeface="Yu Gothic" pitchFamily="34" charset="-122"/>
+                <a:cs typeface="Yu Gothic" pitchFamily="34" charset="-120"/>
+              </a:rPr>
+              <a:t>最初から共有されている</a:t>
+            </a:r>
+            <a:endParaRPr lang="en-US" sz="1200" dirty="0"/>
+          </a:p>
+        </p:txBody>
+      </p:sp>
+      <p:sp>
+        <p:nvSpPr>
+          <p:cNvPr id="19" name="Shape 17"/>
+          <p:cNvSpPr/>
+          <p:nvPr/>
+        </p:nvSpPr>
+        <p:spPr>
+          <a:xfrm>
+            <a:off x="8926830" y="1920240"/>
+            <a:ext cx="2503170" cy="1965960"/>
           </a:xfrm>
           <a:prstGeom prst="roundRect">
             <a:avLst>
-              <a:gd name="adj" fmla="val 4000"/>
+              <a:gd name="adj" fmla="val 3721"/>
             </a:avLst>
           </a:prstGeom>
           <a:solidFill>
@@ -19049,14 +18654,14 @@
       </p:sp>
       <p:sp>
         <p:nvSpPr>
-          <p:cNvPr id="19" name="Shape 17"/>
-          <p:cNvSpPr/>
-          <p:nvPr/>
-        </p:nvSpPr>
-        <p:spPr>
-          <a:xfrm>
-            <a:off x="8138160" y="2286000"/>
-            <a:ext cx="566928" cy="566928"/>
+          <p:cNvPr id="20" name="Shape 18"/>
+          <p:cNvSpPr/>
+          <p:nvPr/>
+        </p:nvSpPr>
+        <p:spPr>
+          <a:xfrm>
+            <a:off x="9146286" y="2121408"/>
+            <a:ext cx="402336" cy="402336"/>
           </a:xfrm>
           <a:prstGeom prst="ellipse">
             <a:avLst/>
@@ -19074,14 +18679,14 @@
       </p:sp>
       <p:sp>
         <p:nvSpPr>
-          <p:cNvPr id="20" name="Text 18"/>
-          <p:cNvSpPr/>
-          <p:nvPr/>
-        </p:nvSpPr>
-        <p:spPr>
-          <a:xfrm>
-            <a:off x="8138160" y="2286000"/>
-            <a:ext cx="566928" cy="566928"/>
+          <p:cNvPr id="21" name="Text 19"/>
+          <p:cNvSpPr/>
+          <p:nvPr/>
+        </p:nvSpPr>
+        <p:spPr>
+          <a:xfrm>
+            <a:off x="9146286" y="2121408"/>
+            <a:ext cx="402336" cy="402336"/>
           </a:xfrm>
           <a:prstGeom prst="rect">
             <a:avLst/>
@@ -19097,7 +18702,7 @@
               <a:buNone/>
             </a:pPr>
             <a:r>
-              <a:rPr lang="en-US" sz="2000" b="1" dirty="0">
+              <a:rPr lang="en-US" sz="1300" b="1" dirty="0">
                 <a:solidFill>
                   <a:srgbClr val="FFFFFF"/>
                 </a:solidFill>
@@ -19107,32 +18712,32 @@
               </a:rPr>
               <a:t>4</a:t>
             </a:r>
-            <a:endParaRPr lang="en-US" sz="2000" dirty="0"/>
-          </a:p>
-        </p:txBody>
-      </p:sp>
-      <p:sp>
-        <p:nvSpPr>
-          <p:cNvPr id="21" name="Text 19"/>
-          <p:cNvSpPr/>
-          <p:nvPr/>
-        </p:nvSpPr>
-        <p:spPr>
-          <a:xfrm>
-            <a:off x="7470648" y="3063240"/>
-            <a:ext cx="1883664" cy="685800"/>
-          </a:xfrm>
-          <a:prstGeom prst="rect">
-            <a:avLst/>
-          </a:prstGeom>
-          <a:noFill/>
-          <a:ln/>
-        </p:spPr>
-        <p:txBody>
-          <a:bodyPr wrap="square" lIns="0" tIns="0" rIns="0" bIns="0" rtlCol="0" anchor="ctr"/>
-          <a:lstStyle/>
-          <a:p>
-            <a:pPr algn="ctr" indent="0" marL="0">
+            <a:endParaRPr lang="en-US" sz="1300" dirty="0"/>
+          </a:p>
+        </p:txBody>
+      </p:sp>
+      <p:sp>
+        <p:nvSpPr>
+          <p:cNvPr id="22" name="Text 20"/>
+          <p:cNvSpPr/>
+          <p:nvPr/>
+        </p:nvSpPr>
+        <p:spPr>
+          <a:xfrm>
+            <a:off x="9127998" y="2615184"/>
+            <a:ext cx="2183130" cy="347472"/>
+          </a:xfrm>
+          <a:prstGeom prst="rect">
+            <a:avLst/>
+          </a:prstGeom>
+          <a:noFill/>
+          <a:ln/>
+        </p:spPr>
+        <p:txBody>
+          <a:bodyPr wrap="square" lIns="0" tIns="0" rIns="0" bIns="0" rtlCol="0" anchor="ctr"/>
+          <a:lstStyle/>
+          <a:p>
+            <a:pPr indent="0" marL="0">
               <a:buNone/>
             </a:pPr>
             <a:r>
@@ -19144,7 +18749,7 @@
                 <a:ea typeface="Yu Gothic" pitchFamily="34" charset="-122"/>
                 <a:cs typeface="Yu Gothic" pitchFamily="34" charset="-120"/>
               </a:rPr>
-              <a:t>入居者を登録</a:t>
+              <a:t>カレンダー</a:t>
             </a:r>
             <a:endParaRPr lang="en-US" sz="1500" dirty="0"/>
           </a:p>
@@ -19152,43 +18757,80 @@
       </p:sp>
       <p:sp>
         <p:nvSpPr>
-          <p:cNvPr id="22" name="Shape 20"/>
-          <p:cNvSpPr/>
-          <p:nvPr/>
-        </p:nvSpPr>
-        <p:spPr>
-          <a:xfrm>
-            <a:off x="9409176" y="2880360"/>
-            <a:ext cx="219456" cy="237744"/>
-          </a:xfrm>
-          <a:prstGeom prst="rightArrow">
-            <a:avLst/>
-          </a:prstGeom>
-          <a:solidFill>
-            <a:srgbClr val="A8CFC9"/>
-          </a:solidFill>
-          <a:ln w="12700">
-            <a:solidFill>
-              <a:srgbClr val="A8CFC9"/>
-            </a:solidFill>
-            <a:prstDash val="solid"/>
-          </a:ln>
-        </p:spPr>
-      </p:sp>
-      <p:sp>
-        <p:nvSpPr>
-          <p:cNvPr id="23" name="Shape 21"/>
-          <p:cNvSpPr/>
-          <p:nvPr/>
-        </p:nvSpPr>
-        <p:spPr>
-          <a:xfrm>
-            <a:off x="9692640" y="2057400"/>
-            <a:ext cx="1920240" cy="1828800"/>
+          <p:cNvPr id="23" name="Text 21"/>
+          <p:cNvSpPr/>
+          <p:nvPr/>
+        </p:nvSpPr>
+        <p:spPr>
+          <a:xfrm>
+            <a:off x="9127998" y="2999232"/>
+            <a:ext cx="2228850" cy="777240"/>
+          </a:xfrm>
+          <a:prstGeom prst="rect">
+            <a:avLst/>
+          </a:prstGeom>
+          <a:noFill/>
+          <a:ln/>
+        </p:spPr>
+        <p:txBody>
+          <a:bodyPr wrap="square" lIns="0" tIns="0" rIns="0" bIns="0" rtlCol="0" anchor="ctr"/>
+          <a:lstStyle/>
+          <a:p>
+            <a:pPr indent="0" marL="0">
+              <a:lnSpc>
+                <a:spcPct val="120000"/>
+              </a:lnSpc>
+              <a:buNone/>
+            </a:pPr>
+            <a:r>
+              <a:rPr lang="en-US" sz="1200" dirty="0">
+                <a:solidFill>
+                  <a:srgbClr val="5C6B68"/>
+                </a:solidFill>
+                <a:latin typeface="Yu Gothic" pitchFamily="34" charset="0"/>
+                <a:ea typeface="Yu Gothic" pitchFamily="34" charset="-122"/>
+                <a:cs typeface="Yu Gothic" pitchFamily="34" charset="-120"/>
+              </a:rPr>
+              <a:t>薬剤師の訪問予定を</a:t>
+            </a:r>
+            <a:endParaRPr lang="en-US" sz="1200" dirty="0"/>
+          </a:p>
+          <a:p>
+            <a:pPr indent="0" marL="0">
+              <a:lnSpc>
+                <a:spcPct val="120000"/>
+              </a:lnSpc>
+              <a:buNone/>
+            </a:pPr>
+            <a:r>
+              <a:rPr lang="en-US" sz="1200" dirty="0">
+                <a:solidFill>
+                  <a:srgbClr val="5C6B68"/>
+                </a:solidFill>
+                <a:latin typeface="Yu Gothic" pitchFamily="34" charset="0"/>
+                <a:ea typeface="Yu Gothic" pitchFamily="34" charset="-122"/>
+                <a:cs typeface="Yu Gothic" pitchFamily="34" charset="-120"/>
+              </a:rPr>
+              <a:t>施設側にも表示</a:t>
+            </a:r>
+            <a:endParaRPr lang="en-US" sz="1200" dirty="0"/>
+          </a:p>
+        </p:txBody>
+      </p:sp>
+      <p:sp>
+        <p:nvSpPr>
+          <p:cNvPr id="24" name="Shape 22"/>
+          <p:cNvSpPr/>
+          <p:nvPr/>
+        </p:nvSpPr>
+        <p:spPr>
+          <a:xfrm>
+            <a:off x="731520" y="4069080"/>
+            <a:ext cx="2503170" cy="1965960"/>
           </a:xfrm>
           <a:prstGeom prst="roundRect">
             <a:avLst>
-              <a:gd name="adj" fmla="val 4000"/>
+              <a:gd name="adj" fmla="val 3721"/>
             </a:avLst>
           </a:prstGeom>
           <a:solidFill>
@@ -19204,14 +18846,14 @@
       </p:sp>
       <p:sp>
         <p:nvSpPr>
-          <p:cNvPr id="24" name="Shape 22"/>
-          <p:cNvSpPr/>
-          <p:nvPr/>
-        </p:nvSpPr>
-        <p:spPr>
-          <a:xfrm>
-            <a:off x="10378440" y="2286000"/>
-            <a:ext cx="566928" cy="566928"/>
+          <p:cNvPr id="25" name="Shape 23"/>
+          <p:cNvSpPr/>
+          <p:nvPr/>
+        </p:nvSpPr>
+        <p:spPr>
+          <a:xfrm>
+            <a:off x="950976" y="4270248"/>
+            <a:ext cx="402336" cy="402336"/>
           </a:xfrm>
           <a:prstGeom prst="ellipse">
             <a:avLst/>
@@ -19229,14 +18871,14 @@
       </p:sp>
       <p:sp>
         <p:nvSpPr>
-          <p:cNvPr id="25" name="Text 23"/>
-          <p:cNvSpPr/>
-          <p:nvPr/>
-        </p:nvSpPr>
-        <p:spPr>
-          <a:xfrm>
-            <a:off x="10378440" y="2286000"/>
-            <a:ext cx="566928" cy="566928"/>
+          <p:cNvPr id="26" name="Text 24"/>
+          <p:cNvSpPr/>
+          <p:nvPr/>
+        </p:nvSpPr>
+        <p:spPr>
+          <a:xfrm>
+            <a:off x="950976" y="4270248"/>
+            <a:ext cx="402336" cy="402336"/>
           </a:xfrm>
           <a:prstGeom prst="rect">
             <a:avLst/>
@@ -19252,7 +18894,7 @@
               <a:buNone/>
             </a:pPr>
             <a:r>
-              <a:rPr lang="en-US" sz="2000" b="1" dirty="0">
+              <a:rPr lang="en-US" sz="1300" b="1" dirty="0">
                 <a:solidFill>
                   <a:srgbClr val="FFFFFF"/>
                 </a:solidFill>
@@ -19262,32 +18904,32 @@
               </a:rPr>
               <a:t>5</a:t>
             </a:r>
-            <a:endParaRPr lang="en-US" sz="2000" dirty="0"/>
-          </a:p>
-        </p:txBody>
-      </p:sp>
-      <p:sp>
-        <p:nvSpPr>
-          <p:cNvPr id="26" name="Text 24"/>
-          <p:cNvSpPr/>
-          <p:nvPr/>
-        </p:nvSpPr>
-        <p:spPr>
-          <a:xfrm>
-            <a:off x="9710928" y="3063240"/>
-            <a:ext cx="1883664" cy="685800"/>
-          </a:xfrm>
-          <a:prstGeom prst="rect">
-            <a:avLst/>
-          </a:prstGeom>
-          <a:noFill/>
-          <a:ln/>
-        </p:spPr>
-        <p:txBody>
-          <a:bodyPr wrap="square" lIns="0" tIns="0" rIns="0" bIns="0" rtlCol="0" anchor="ctr"/>
-          <a:lstStyle/>
-          <a:p>
-            <a:pPr algn="ctr" indent="0" marL="0">
+            <a:endParaRPr lang="en-US" sz="1300" dirty="0"/>
+          </a:p>
+        </p:txBody>
+      </p:sp>
+      <p:sp>
+        <p:nvSpPr>
+          <p:cNvPr id="27" name="Text 25"/>
+          <p:cNvSpPr/>
+          <p:nvPr/>
+        </p:nvSpPr>
+        <p:spPr>
+          <a:xfrm>
+            <a:off x="932688" y="4764024"/>
+            <a:ext cx="2183130" cy="347472"/>
+          </a:xfrm>
+          <a:prstGeom prst="rect">
+            <a:avLst/>
+          </a:prstGeom>
+          <a:noFill/>
+          <a:ln/>
+        </p:spPr>
+        <p:txBody>
+          <a:bodyPr wrap="square" lIns="0" tIns="0" rIns="0" bIns="0" rtlCol="0" anchor="ctr"/>
+          <a:lstStyle/>
+          <a:p>
+            <a:pPr indent="0" marL="0">
               <a:buNone/>
             </a:pPr>
             <a:r>
@@ -19299,7 +18941,7 @@
                 <a:ea typeface="Yu Gothic" pitchFamily="34" charset="-122"/>
                 <a:cs typeface="Yu Gothic" pitchFamily="34" charset="-120"/>
               </a:rPr>
-              <a:t>家族を招待</a:t>
+              <a:t>服薬の注意点</a:t>
             </a:r>
             <a:endParaRPr lang="en-US" sz="1500" dirty="0"/>
           </a:p>
@@ -19307,26 +18949,108 @@
       </p:sp>
       <p:sp>
         <p:nvSpPr>
-          <p:cNvPr id="27" name="Shape 25"/>
-          <p:cNvSpPr/>
-          <p:nvPr/>
-        </p:nvSpPr>
-        <p:spPr>
-          <a:xfrm>
-            <a:off x="731520" y="4343400"/>
-            <a:ext cx="10698480" cy="1645920"/>
+          <p:cNvPr id="28" name="Text 26"/>
+          <p:cNvSpPr/>
+          <p:nvPr/>
+        </p:nvSpPr>
+        <p:spPr>
+          <a:xfrm>
+            <a:off x="932688" y="5148072"/>
+            <a:ext cx="2228850" cy="777240"/>
+          </a:xfrm>
+          <a:prstGeom prst="rect">
+            <a:avLst/>
+          </a:prstGeom>
+          <a:noFill/>
+          <a:ln/>
+        </p:spPr>
+        <p:txBody>
+          <a:bodyPr wrap="square" lIns="0" tIns="0" rIns="0" bIns="0" rtlCol="0" anchor="ctr"/>
+          <a:lstStyle/>
+          <a:p>
+            <a:pPr indent="0" marL="0">
+              <a:lnSpc>
+                <a:spcPct val="120000"/>
+              </a:lnSpc>
+              <a:buNone/>
+            </a:pPr>
+            <a:r>
+              <a:rPr lang="en-US" sz="1200" dirty="0">
+                <a:solidFill>
+                  <a:srgbClr val="5C6B68"/>
+                </a:solidFill>
+                <a:latin typeface="Yu Gothic" pitchFamily="34" charset="0"/>
+                <a:ea typeface="Yu Gothic" pitchFamily="34" charset="-122"/>
+                <a:cs typeface="Yu Gothic" pitchFamily="34" charset="-120"/>
+              </a:rPr>
+              <a:t>添付文書から該当箇所だけ。</a:t>
+            </a:r>
+            <a:endParaRPr lang="en-US" sz="1200" dirty="0"/>
+          </a:p>
+          <a:p>
+            <a:pPr indent="0" marL="0">
+              <a:lnSpc>
+                <a:spcPct val="120000"/>
+              </a:lnSpc>
+              <a:buNone/>
+            </a:pPr>
+            <a:r>
+              <a:rPr lang="en-US" sz="1200" dirty="0">
+                <a:solidFill>
+                  <a:srgbClr val="5C6B68"/>
+                </a:solidFill>
+                <a:latin typeface="Yu Gothic" pitchFamily="34" charset="0"/>
+                <a:ea typeface="Yu Gothic" pitchFamily="34" charset="-122"/>
+                <a:cs typeface="Yu Gothic" pitchFamily="34" charset="-120"/>
+              </a:rPr>
+              <a:t>腎機能・肝機能・年齢に</a:t>
+            </a:r>
+            <a:endParaRPr lang="en-US" sz="1200" dirty="0"/>
+          </a:p>
+          <a:p>
+            <a:pPr indent="0" marL="0">
+              <a:lnSpc>
+                <a:spcPct val="120000"/>
+              </a:lnSpc>
+              <a:buNone/>
+            </a:pPr>
+            <a:r>
+              <a:rPr lang="en-US" sz="1200" dirty="0">
+                <a:solidFill>
+                  <a:srgbClr val="5C6B68"/>
+                </a:solidFill>
+                <a:latin typeface="Yu Gothic" pitchFamily="34" charset="0"/>
+                <a:ea typeface="Yu Gothic" pitchFamily="34" charset="-122"/>
+                <a:cs typeface="Yu Gothic" pitchFamily="34" charset="-120"/>
+              </a:rPr>
+              <a:t>合わせて出し分ける</a:t>
+            </a:r>
+            <a:endParaRPr lang="en-US" sz="1200" dirty="0"/>
+          </a:p>
+        </p:txBody>
+      </p:sp>
+      <p:sp>
+        <p:nvSpPr>
+          <p:cNvPr id="29" name="Shape 27"/>
+          <p:cNvSpPr/>
+          <p:nvPr/>
+        </p:nvSpPr>
+        <p:spPr>
+          <a:xfrm>
+            <a:off x="3463290" y="4069080"/>
+            <a:ext cx="2503170" cy="1965960"/>
           </a:xfrm>
           <a:prstGeom prst="roundRect">
             <a:avLst>
-              <a:gd name="adj" fmla="val 4444"/>
+              <a:gd name="adj" fmla="val 3721"/>
             </a:avLst>
           </a:prstGeom>
           <a:solidFill>
-            <a:srgbClr val="FFFFFF"/>
+            <a:srgbClr val="F1F6F5"/>
           </a:solidFill>
           <a:ln w="12700">
             <a:solidFill>
-              <a:srgbClr val="DCE6E4"/>
+              <a:srgbClr val="F1F6F5"/>
             </a:solidFill>
             <a:prstDash val="solid"/>
           </a:ln>
@@ -19334,30 +19058,94 @@
       </p:sp>
       <p:sp>
         <p:nvSpPr>
-          <p:cNvPr id="28" name="Text 26"/>
-          <p:cNvSpPr/>
-          <p:nvPr/>
-        </p:nvSpPr>
-        <p:spPr>
-          <a:xfrm>
-            <a:off x="1051560" y="4553712"/>
-            <a:ext cx="5486400" cy="365760"/>
-          </a:xfrm>
-          <a:prstGeom prst="rect">
-            <a:avLst/>
-          </a:prstGeom>
-          <a:noFill/>
-          <a:ln/>
-        </p:spPr>
-        <p:txBody>
-          <a:bodyPr wrap="square" lIns="0" tIns="0" rIns="0" bIns="0" rtlCol="0" anchor="ctr"/>
-          <a:lstStyle/>
-          <a:p>
-            <a:pPr indent="0" marL="0">
-              <a:buNone/>
-            </a:pPr>
-            <a:r>
-              <a:rPr lang="en-US" sz="1900" b="1" dirty="0">
+          <p:cNvPr id="30" name="Shape 28"/>
+          <p:cNvSpPr/>
+          <p:nvPr/>
+        </p:nvSpPr>
+        <p:spPr>
+          <a:xfrm>
+            <a:off x="3682746" y="4270248"/>
+            <a:ext cx="402336" cy="402336"/>
+          </a:xfrm>
+          <a:prstGeom prst="ellipse">
+            <a:avLst/>
+          </a:prstGeom>
+          <a:solidFill>
+            <a:srgbClr val="D98A2B"/>
+          </a:solidFill>
+          <a:ln w="12700">
+            <a:solidFill>
+              <a:srgbClr val="D98A2B"/>
+            </a:solidFill>
+            <a:prstDash val="solid"/>
+          </a:ln>
+        </p:spPr>
+      </p:sp>
+      <p:sp>
+        <p:nvSpPr>
+          <p:cNvPr id="31" name="Text 29"/>
+          <p:cNvSpPr/>
+          <p:nvPr/>
+        </p:nvSpPr>
+        <p:spPr>
+          <a:xfrm>
+            <a:off x="3682746" y="4270248"/>
+            <a:ext cx="402336" cy="402336"/>
+          </a:xfrm>
+          <a:prstGeom prst="rect">
+            <a:avLst/>
+          </a:prstGeom>
+          <a:noFill/>
+          <a:ln/>
+        </p:spPr>
+        <p:txBody>
+          <a:bodyPr wrap="square" lIns="0" tIns="0" rIns="0" bIns="0" rtlCol="0" anchor="ctr"/>
+          <a:lstStyle/>
+          <a:p>
+            <a:pPr algn="ctr" indent="0" marL="0">
+              <a:buNone/>
+            </a:pPr>
+            <a:r>
+              <a:rPr lang="en-US" sz="1300" b="1" dirty="0">
+                <a:solidFill>
+                  <a:srgbClr val="FFFFFF"/>
+                </a:solidFill>
+                <a:latin typeface="Yu Gothic" pitchFamily="34" charset="0"/>
+                <a:ea typeface="Yu Gothic" pitchFamily="34" charset="-122"/>
+                <a:cs typeface="Yu Gothic" pitchFamily="34" charset="-120"/>
+              </a:rPr>
+              <a:t>6</a:t>
+            </a:r>
+            <a:endParaRPr lang="en-US" sz="1300" dirty="0"/>
+          </a:p>
+        </p:txBody>
+      </p:sp>
+      <p:sp>
+        <p:nvSpPr>
+          <p:cNvPr id="32" name="Text 30"/>
+          <p:cNvSpPr/>
+          <p:nvPr/>
+        </p:nvSpPr>
+        <p:spPr>
+          <a:xfrm>
+            <a:off x="3664458" y="4764024"/>
+            <a:ext cx="2183130" cy="347472"/>
+          </a:xfrm>
+          <a:prstGeom prst="rect">
+            <a:avLst/>
+          </a:prstGeom>
+          <a:noFill/>
+          <a:ln/>
+        </p:spPr>
+        <p:txBody>
+          <a:bodyPr wrap="square" lIns="0" tIns="0" rIns="0" bIns="0" rtlCol="0" anchor="ctr"/>
+          <a:lstStyle/>
+          <a:p>
+            <a:pPr indent="0" marL="0">
+              <a:buNone/>
+            </a:pPr>
+            <a:r>
+              <a:rPr lang="en-US" sz="1500" b="1" dirty="0">
                 <a:solidFill>
                   <a:srgbClr val="14504B"/>
                 </a:solidFill>
@@ -19365,22 +19153,175 @@
                 <a:ea typeface="Yu Gothic" pitchFamily="34" charset="-122"/>
                 <a:cs typeface="Yu Gothic" pitchFamily="34" charset="-120"/>
               </a:rPr>
-              <a:t>役割ごとに、見えるものが違う</a:t>
-            </a:r>
-            <a:endParaRPr lang="en-US" sz="1900" dirty="0"/>
-          </a:p>
-        </p:txBody>
-      </p:sp>
-      <p:sp>
-        <p:nvSpPr>
-          <p:cNvPr id="29" name="Text 27"/>
-          <p:cNvSpPr/>
-          <p:nvPr/>
-        </p:nvSpPr>
-        <p:spPr>
-          <a:xfrm>
-            <a:off x="1051560" y="5029200"/>
-            <a:ext cx="3291840" cy="320040"/>
+              <a:t>症状トリアージ</a:t>
+            </a:r>
+            <a:endParaRPr lang="en-US" sz="1500" dirty="0"/>
+          </a:p>
+        </p:txBody>
+      </p:sp>
+      <p:sp>
+        <p:nvSpPr>
+          <p:cNvPr id="33" name="Text 31"/>
+          <p:cNvSpPr/>
+          <p:nvPr/>
+        </p:nvSpPr>
+        <p:spPr>
+          <a:xfrm>
+            <a:off x="3664458" y="5148072"/>
+            <a:ext cx="2228850" cy="777240"/>
+          </a:xfrm>
+          <a:prstGeom prst="rect">
+            <a:avLst/>
+          </a:prstGeom>
+          <a:noFill/>
+          <a:ln/>
+        </p:spPr>
+        <p:txBody>
+          <a:bodyPr wrap="square" lIns="0" tIns="0" rIns="0" bIns="0" rtlCol="0" anchor="ctr"/>
+          <a:lstStyle/>
+          <a:p>
+            <a:pPr indent="0" marL="0">
+              <a:lnSpc>
+                <a:spcPct val="120000"/>
+              </a:lnSpc>
+              <a:buNone/>
+            </a:pPr>
+            <a:r>
+              <a:rPr lang="en-US" sz="1200" dirty="0">
+                <a:solidFill>
+                  <a:srgbClr val="5C6B68"/>
+                </a:solidFill>
+                <a:latin typeface="Yu Gothic" pitchFamily="34" charset="0"/>
+                <a:ea typeface="Yu Gothic" pitchFamily="34" charset="-122"/>
+                <a:cs typeface="Yu Gothic" pitchFamily="34" charset="-120"/>
+              </a:rPr>
+              <a:t>体調不良時の対応の目安を</a:t>
+            </a:r>
+            <a:endParaRPr lang="en-US" sz="1200" dirty="0"/>
+          </a:p>
+          <a:p>
+            <a:pPr indent="0" marL="0">
+              <a:lnSpc>
+                <a:spcPct val="120000"/>
+              </a:lnSpc>
+              <a:buNone/>
+            </a:pPr>
+            <a:r>
+              <a:rPr lang="en-US" sz="1200" dirty="0">
+                <a:solidFill>
+                  <a:srgbClr val="5C6B68"/>
+                </a:solidFill>
+                <a:latin typeface="Yu Gothic" pitchFamily="34" charset="0"/>
+                <a:ea typeface="Yu Gothic" pitchFamily="34" charset="-122"/>
+                <a:cs typeface="Yu Gothic" pitchFamily="34" charset="-120"/>
+              </a:rPr>
+              <a:t>3段階で提示</a:t>
+            </a:r>
+            <a:endParaRPr lang="en-US" sz="1200" dirty="0"/>
+          </a:p>
+        </p:txBody>
+      </p:sp>
+      <p:sp>
+        <p:nvSpPr>
+          <p:cNvPr id="34" name="Shape 32"/>
+          <p:cNvSpPr/>
+          <p:nvPr/>
+        </p:nvSpPr>
+        <p:spPr>
+          <a:xfrm>
+            <a:off x="6195060" y="4069080"/>
+            <a:ext cx="2503170" cy="1965960"/>
+          </a:xfrm>
+          <a:prstGeom prst="roundRect">
+            <a:avLst>
+              <a:gd name="adj" fmla="val 3721"/>
+            </a:avLst>
+          </a:prstGeom>
+          <a:solidFill>
+            <a:srgbClr val="F1F6F5"/>
+          </a:solidFill>
+          <a:ln w="12700">
+            <a:solidFill>
+              <a:srgbClr val="F1F6F5"/>
+            </a:solidFill>
+            <a:prstDash val="solid"/>
+          </a:ln>
+        </p:spPr>
+      </p:sp>
+      <p:sp>
+        <p:nvSpPr>
+          <p:cNvPr id="35" name="Shape 33"/>
+          <p:cNvSpPr/>
+          <p:nvPr/>
+        </p:nvSpPr>
+        <p:spPr>
+          <a:xfrm>
+            <a:off x="6414516" y="4270248"/>
+            <a:ext cx="402336" cy="402336"/>
+          </a:xfrm>
+          <a:prstGeom prst="ellipse">
+            <a:avLst/>
+          </a:prstGeom>
+          <a:solidFill>
+            <a:srgbClr val="3E8E84"/>
+          </a:solidFill>
+          <a:ln w="12700">
+            <a:solidFill>
+              <a:srgbClr val="3E8E84"/>
+            </a:solidFill>
+            <a:prstDash val="solid"/>
+          </a:ln>
+        </p:spPr>
+      </p:sp>
+      <p:sp>
+        <p:nvSpPr>
+          <p:cNvPr id="36" name="Text 34"/>
+          <p:cNvSpPr/>
+          <p:nvPr/>
+        </p:nvSpPr>
+        <p:spPr>
+          <a:xfrm>
+            <a:off x="6414516" y="4270248"/>
+            <a:ext cx="402336" cy="402336"/>
+          </a:xfrm>
+          <a:prstGeom prst="rect">
+            <a:avLst/>
+          </a:prstGeom>
+          <a:noFill/>
+          <a:ln/>
+        </p:spPr>
+        <p:txBody>
+          <a:bodyPr wrap="square" lIns="0" tIns="0" rIns="0" bIns="0" rtlCol="0" anchor="ctr"/>
+          <a:lstStyle/>
+          <a:p>
+            <a:pPr algn="ctr" indent="0" marL="0">
+              <a:buNone/>
+            </a:pPr>
+            <a:r>
+              <a:rPr lang="en-US" sz="1300" b="1" dirty="0">
+                <a:solidFill>
+                  <a:srgbClr val="FFFFFF"/>
+                </a:solidFill>
+                <a:latin typeface="Yu Gothic" pitchFamily="34" charset="0"/>
+                <a:ea typeface="Yu Gothic" pitchFamily="34" charset="-122"/>
+                <a:cs typeface="Yu Gothic" pitchFamily="34" charset="-120"/>
+              </a:rPr>
+              <a:t>7</a:t>
+            </a:r>
+            <a:endParaRPr lang="en-US" sz="1300" dirty="0"/>
+          </a:p>
+        </p:txBody>
+      </p:sp>
+      <p:sp>
+        <p:nvSpPr>
+          <p:cNvPr id="37" name="Text 35"/>
+          <p:cNvSpPr/>
+          <p:nvPr/>
+        </p:nvSpPr>
+        <p:spPr>
+          <a:xfrm>
+            <a:off x="6396228" y="4764024"/>
+            <a:ext cx="2183130" cy="347472"/>
           </a:xfrm>
           <a:prstGeom prst="rect">
             <a:avLst/>
@@ -19398,13 +19339,13 @@
             <a:r>
               <a:rPr lang="en-US" sz="1500" b="1" dirty="0">
                 <a:solidFill>
-                  <a:srgbClr val="3E8E84"/>
-                </a:solidFill>
-                <a:latin typeface="Yu Gothic" pitchFamily="34" charset="0"/>
-                <a:ea typeface="Yu Gothic" pitchFamily="34" charset="-122"/>
-                <a:cs typeface="Yu Gothic" pitchFamily="34" charset="-120"/>
-              </a:rPr>
-              <a:t>薬剤師</a:t>
+                  <a:srgbClr val="14504B"/>
+                </a:solidFill>
+                <a:latin typeface="Yu Gothic" pitchFamily="34" charset="0"/>
+                <a:ea typeface="Yu Gothic" pitchFamily="34" charset="-122"/>
+                <a:cs typeface="Yu Gothic" pitchFamily="34" charset="-120"/>
+              </a:rPr>
+              <a:t>家族への共有</a:t>
             </a:r>
             <a:endParaRPr lang="en-US" sz="1500" dirty="0"/>
           </a:p>
@@ -19412,14 +19353,307 @@
       </p:sp>
       <p:sp>
         <p:nvSpPr>
-          <p:cNvPr id="30" name="Text 28"/>
-          <p:cNvSpPr/>
-          <p:nvPr/>
-        </p:nvSpPr>
-        <p:spPr>
-          <a:xfrm>
-            <a:off x="1051560" y="5394960"/>
-            <a:ext cx="3337560" cy="411480"/>
+          <p:cNvPr id="38" name="Text 36"/>
+          <p:cNvSpPr/>
+          <p:nvPr/>
+        </p:nvSpPr>
+        <p:spPr>
+          <a:xfrm>
+            <a:off x="6396228" y="5148072"/>
+            <a:ext cx="2228850" cy="777240"/>
+          </a:xfrm>
+          <a:prstGeom prst="rect">
+            <a:avLst/>
+          </a:prstGeom>
+          <a:noFill/>
+          <a:ln/>
+        </p:spPr>
+        <p:txBody>
+          <a:bodyPr wrap="square" lIns="0" tIns="0" rIns="0" bIns="0" rtlCol="0" anchor="ctr"/>
+          <a:lstStyle/>
+          <a:p>
+            <a:pPr indent="0" marL="0">
+              <a:lnSpc>
+                <a:spcPct val="120000"/>
+              </a:lnSpc>
+              <a:buNone/>
+            </a:pPr>
+            <a:r>
+              <a:rPr lang="en-US" sz="1200" dirty="0">
+                <a:solidFill>
+                  <a:srgbClr val="5C6B68"/>
+                </a:solidFill>
+                <a:latin typeface="Yu Gothic" pitchFamily="34" charset="0"/>
+                <a:ea typeface="Yu Gothic" pitchFamily="34" charset="-122"/>
+                <a:cs typeface="Yu Gothic" pitchFamily="34" charset="-120"/>
+              </a:rPr>
+              <a:t>処方とバイタルを</a:t>
+            </a:r>
+            <a:endParaRPr lang="en-US" sz="1200" dirty="0"/>
+          </a:p>
+          <a:p>
+            <a:pPr indent="0" marL="0">
+              <a:lnSpc>
+                <a:spcPct val="120000"/>
+              </a:lnSpc>
+              <a:buNone/>
+            </a:pPr>
+            <a:r>
+              <a:rPr lang="en-US" sz="1200" dirty="0">
+                <a:solidFill>
+                  <a:srgbClr val="5C6B68"/>
+                </a:solidFill>
+                <a:latin typeface="Yu Gothic" pitchFamily="34" charset="0"/>
+                <a:ea typeface="Yu Gothic" pitchFamily="34" charset="-122"/>
+                <a:cs typeface="Yu Gothic" pitchFamily="34" charset="-120"/>
+              </a:rPr>
+              <a:t>ご家族が閲覧できる</a:t>
+            </a:r>
+            <a:endParaRPr lang="en-US" sz="1200" dirty="0"/>
+          </a:p>
+        </p:txBody>
+      </p:sp>
+      <p:sp>
+        <p:nvSpPr>
+          <p:cNvPr id="39" name="Shape 37"/>
+          <p:cNvSpPr/>
+          <p:nvPr/>
+        </p:nvSpPr>
+        <p:spPr>
+          <a:xfrm>
+            <a:off x="8926830" y="4069080"/>
+            <a:ext cx="2503170" cy="1965960"/>
+          </a:xfrm>
+          <a:prstGeom prst="roundRect">
+            <a:avLst>
+              <a:gd name="adj" fmla="val 3721"/>
+            </a:avLst>
+          </a:prstGeom>
+          <a:solidFill>
+            <a:srgbClr val="F1F6F5"/>
+          </a:solidFill>
+          <a:ln w="12700">
+            <a:solidFill>
+              <a:srgbClr val="F1F6F5"/>
+            </a:solidFill>
+            <a:prstDash val="solid"/>
+          </a:ln>
+        </p:spPr>
+      </p:sp>
+      <p:sp>
+        <p:nvSpPr>
+          <p:cNvPr id="40" name="Shape 38"/>
+          <p:cNvSpPr/>
+          <p:nvPr/>
+        </p:nvSpPr>
+        <p:spPr>
+          <a:xfrm>
+            <a:off x="9146286" y="4270248"/>
+            <a:ext cx="402336" cy="402336"/>
+          </a:xfrm>
+          <a:prstGeom prst="ellipse">
+            <a:avLst/>
+          </a:prstGeom>
+          <a:solidFill>
+            <a:srgbClr val="3E8E84"/>
+          </a:solidFill>
+          <a:ln w="12700">
+            <a:solidFill>
+              <a:srgbClr val="3E8E84"/>
+            </a:solidFill>
+            <a:prstDash val="solid"/>
+          </a:ln>
+        </p:spPr>
+      </p:sp>
+      <p:sp>
+        <p:nvSpPr>
+          <p:cNvPr id="41" name="Text 39"/>
+          <p:cNvSpPr/>
+          <p:nvPr/>
+        </p:nvSpPr>
+        <p:spPr>
+          <a:xfrm>
+            <a:off x="9146286" y="4270248"/>
+            <a:ext cx="402336" cy="402336"/>
+          </a:xfrm>
+          <a:prstGeom prst="rect">
+            <a:avLst/>
+          </a:prstGeom>
+          <a:noFill/>
+          <a:ln/>
+        </p:spPr>
+        <p:txBody>
+          <a:bodyPr wrap="square" lIns="0" tIns="0" rIns="0" bIns="0" rtlCol="0" anchor="ctr"/>
+          <a:lstStyle/>
+          <a:p>
+            <a:pPr algn="ctr" indent="0" marL="0">
+              <a:buNone/>
+            </a:pPr>
+            <a:r>
+              <a:rPr lang="en-US" sz="1300" b="1" dirty="0">
+                <a:solidFill>
+                  <a:srgbClr val="FFFFFF"/>
+                </a:solidFill>
+                <a:latin typeface="Yu Gothic" pitchFamily="34" charset="0"/>
+                <a:ea typeface="Yu Gothic" pitchFamily="34" charset="-122"/>
+                <a:cs typeface="Yu Gothic" pitchFamily="34" charset="-120"/>
+              </a:rPr>
+              <a:t>8</a:t>
+            </a:r>
+            <a:endParaRPr lang="en-US" sz="1300" dirty="0"/>
+          </a:p>
+        </p:txBody>
+      </p:sp>
+      <p:sp>
+        <p:nvSpPr>
+          <p:cNvPr id="42" name="Text 40"/>
+          <p:cNvSpPr/>
+          <p:nvPr/>
+        </p:nvSpPr>
+        <p:spPr>
+          <a:xfrm>
+            <a:off x="9127998" y="4764024"/>
+            <a:ext cx="2183130" cy="347472"/>
+          </a:xfrm>
+          <a:prstGeom prst="rect">
+            <a:avLst/>
+          </a:prstGeom>
+          <a:noFill/>
+          <a:ln/>
+        </p:spPr>
+        <p:txBody>
+          <a:bodyPr wrap="square" lIns="0" tIns="0" rIns="0" bIns="0" rtlCol="0" anchor="ctr"/>
+          <a:lstStyle/>
+          <a:p>
+            <a:pPr indent="0" marL="0">
+              <a:buNone/>
+            </a:pPr>
+            <a:r>
+              <a:rPr lang="en-US" sz="1500" b="1" dirty="0">
+                <a:solidFill>
+                  <a:srgbClr val="14504B"/>
+                </a:solidFill>
+                <a:latin typeface="Yu Gothic" pitchFamily="34" charset="0"/>
+                <a:ea typeface="Yu Gothic" pitchFamily="34" charset="-122"/>
+                <a:cs typeface="Yu Gothic" pitchFamily="34" charset="-120"/>
+              </a:rPr>
+              <a:t>記録の書面出力</a:t>
+            </a:r>
+            <a:endParaRPr lang="en-US" sz="1500" dirty="0"/>
+          </a:p>
+        </p:txBody>
+      </p:sp>
+      <p:sp>
+        <p:nvSpPr>
+          <p:cNvPr id="43" name="Text 41"/>
+          <p:cNvSpPr/>
+          <p:nvPr/>
+        </p:nvSpPr>
+        <p:spPr>
+          <a:xfrm>
+            <a:off x="9127998" y="5148072"/>
+            <a:ext cx="2228850" cy="777240"/>
+          </a:xfrm>
+          <a:prstGeom prst="rect">
+            <a:avLst/>
+          </a:prstGeom>
+          <a:noFill/>
+          <a:ln/>
+        </p:spPr>
+        <p:txBody>
+          <a:bodyPr wrap="square" lIns="0" tIns="0" rIns="0" bIns="0" rtlCol="0" anchor="ctr"/>
+          <a:lstStyle/>
+          <a:p>
+            <a:pPr indent="0" marL="0">
+              <a:lnSpc>
+                <a:spcPct val="120000"/>
+              </a:lnSpc>
+              <a:buNone/>
+            </a:pPr>
+            <a:r>
+              <a:rPr lang="en-US" sz="1200" dirty="0">
+                <a:solidFill>
+                  <a:srgbClr val="5C6B68"/>
+                </a:solidFill>
+                <a:latin typeface="Yu Gothic" pitchFamily="34" charset="0"/>
+                <a:ea typeface="Yu Gothic" pitchFamily="34" charset="-122"/>
+                <a:cs typeface="Yu Gothic" pitchFamily="34" charset="-120"/>
+              </a:rPr>
+              <a:t>保管中の記録を</a:t>
+            </a:r>
+            <a:endParaRPr lang="en-US" sz="1200" dirty="0"/>
+          </a:p>
+          <a:p>
+            <a:pPr indent="0" marL="0">
+              <a:lnSpc>
+                <a:spcPct val="120000"/>
+              </a:lnSpc>
+              <a:buNone/>
+            </a:pPr>
+            <a:r>
+              <a:rPr lang="en-US" sz="1200" dirty="0">
+                <a:solidFill>
+                  <a:srgbClr val="5C6B68"/>
+                </a:solidFill>
+                <a:latin typeface="Yu Gothic" pitchFamily="34" charset="0"/>
+                <a:ea typeface="Yu Gothic" pitchFamily="34" charset="-122"/>
+                <a:cs typeface="Yu Gothic" pitchFamily="34" charset="-120"/>
+              </a:rPr>
+              <a:t>そのまま印刷できる</a:t>
+            </a:r>
+            <a:endParaRPr lang="en-US" sz="1200" dirty="0"/>
+          </a:p>
+        </p:txBody>
+      </p:sp>
+      <p:sp>
+        <p:nvSpPr>
+          <p:cNvPr id="44" name="Text 42"/>
+          <p:cNvSpPr/>
+          <p:nvPr/>
+        </p:nvSpPr>
+        <p:spPr>
+          <a:xfrm>
+            <a:off x="731520" y="6108192"/>
+            <a:ext cx="5486400" cy="292608"/>
+          </a:xfrm>
+          <a:prstGeom prst="rect">
+            <a:avLst/>
+          </a:prstGeom>
+          <a:noFill/>
+          <a:ln/>
+        </p:spPr>
+        <p:txBody>
+          <a:bodyPr wrap="square" lIns="0" tIns="0" rIns="0" bIns="0" rtlCol="0" anchor="ctr"/>
+          <a:lstStyle/>
+          <a:p>
+            <a:pPr indent="0" marL="0">
+              <a:buNone/>
+            </a:pPr>
+            <a:r>
+              <a:rPr lang="en-US" sz="1300" b="1" dirty="0">
+                <a:solidFill>
+                  <a:srgbClr val="D98A2B"/>
+                </a:solidFill>
+                <a:latin typeface="Yu Gothic" pitchFamily="34" charset="0"/>
+                <a:ea typeface="Yu Gothic" pitchFamily="34" charset="-122"/>
+                <a:cs typeface="Yu Gothic" pitchFamily="34" charset="-120"/>
+              </a:rPr>
+              <a:t>⑤⑥はAIを使う機能</a:t>
+            </a:r>
+            <a:endParaRPr lang="en-US" sz="1300" dirty="0"/>
+          </a:p>
+        </p:txBody>
+      </p:sp>
+      <p:sp>
+        <p:nvSpPr>
+          <p:cNvPr id="45" name="Text 43"/>
+          <p:cNvSpPr/>
+          <p:nvPr/>
+        </p:nvSpPr>
+        <p:spPr>
+          <a:xfrm>
+            <a:off x="731520" y="6400800"/>
+            <a:ext cx="10698480" cy="320040"/>
           </a:xfrm>
           <a:prstGeom prst="rect">
             <a:avLst/>
@@ -19437,169 +19671,13 @@
             <a:r>
               <a:rPr lang="en-US" sz="1300" dirty="0">
                 <a:solidFill>
-                  <a:srgbClr val="5C6B68"/>
-                </a:solidFill>
-                <a:latin typeface="Yu Gothic" pitchFamily="34" charset="0"/>
-                <a:ea typeface="Yu Gothic" pitchFamily="34" charset="-122"/>
-                <a:cs typeface="Yu Gothic" pitchFamily="34" charset="-120"/>
-              </a:rPr>
-              <a:t>薬の登録・変更、相談対応</a:t>
-            </a:r>
-            <a:endParaRPr lang="en-US" sz="1300" dirty="0"/>
-          </a:p>
-        </p:txBody>
-      </p:sp>
-      <p:sp>
-        <p:nvSpPr>
-          <p:cNvPr id="31" name="Text 29"/>
-          <p:cNvSpPr/>
-          <p:nvPr/>
-        </p:nvSpPr>
-        <p:spPr>
-          <a:xfrm>
-            <a:off x="4526280" y="5029200"/>
-            <a:ext cx="3291840" cy="320040"/>
-          </a:xfrm>
-          <a:prstGeom prst="rect">
-            <a:avLst/>
-          </a:prstGeom>
-          <a:noFill/>
-          <a:ln/>
-        </p:spPr>
-        <p:txBody>
-          <a:bodyPr wrap="square" lIns="0" tIns="0" rIns="0" bIns="0" rtlCol="0" anchor="ctr"/>
-          <a:lstStyle/>
-          <a:p>
-            <a:pPr indent="0" marL="0">
-              <a:buNone/>
-            </a:pPr>
-            <a:r>
-              <a:rPr lang="en-US" sz="1500" b="1" dirty="0">
-                <a:solidFill>
-                  <a:srgbClr val="3E8E84"/>
-                </a:solidFill>
-                <a:latin typeface="Yu Gothic" pitchFamily="34" charset="0"/>
-                <a:ea typeface="Yu Gothic" pitchFamily="34" charset="-122"/>
-                <a:cs typeface="Yu Gothic" pitchFamily="34" charset="-120"/>
-              </a:rPr>
-              <a:t>介護士・看護師</a:t>
-            </a:r>
-            <a:endParaRPr lang="en-US" sz="1500" dirty="0"/>
-          </a:p>
-        </p:txBody>
-      </p:sp>
-      <p:sp>
-        <p:nvSpPr>
-          <p:cNvPr id="32" name="Text 30"/>
-          <p:cNvSpPr/>
-          <p:nvPr/>
-        </p:nvSpPr>
-        <p:spPr>
-          <a:xfrm>
-            <a:off x="4526280" y="5394960"/>
-            <a:ext cx="3337560" cy="411480"/>
-          </a:xfrm>
-          <a:prstGeom prst="rect">
-            <a:avLst/>
-          </a:prstGeom>
-          <a:noFill/>
-          <a:ln/>
-        </p:spPr>
-        <p:txBody>
-          <a:bodyPr wrap="square" lIns="0" tIns="0" rIns="0" bIns="0" rtlCol="0" anchor="ctr"/>
-          <a:lstStyle/>
-          <a:p>
-            <a:pPr indent="0" marL="0">
-              <a:buNone/>
-            </a:pPr>
-            <a:r>
-              <a:rPr lang="en-US" sz="1300" dirty="0">
-                <a:solidFill>
-                  <a:srgbClr val="5C6B68"/>
-                </a:solidFill>
-                <a:latin typeface="Yu Gothic" pitchFamily="34" charset="0"/>
-                <a:ea typeface="Yu Gothic" pitchFamily="34" charset="-122"/>
-                <a:cs typeface="Yu Gothic" pitchFamily="34" charset="-120"/>
-              </a:rPr>
-              <a:t>服薬記録、バイタル、症状相談</a:t>
-            </a:r>
-            <a:endParaRPr lang="en-US" sz="1300" dirty="0"/>
-          </a:p>
-        </p:txBody>
-      </p:sp>
-      <p:sp>
-        <p:nvSpPr>
-          <p:cNvPr id="33" name="Text 31"/>
-          <p:cNvSpPr/>
-          <p:nvPr/>
-        </p:nvSpPr>
-        <p:spPr>
-          <a:xfrm>
-            <a:off x="8001000" y="5029200"/>
-            <a:ext cx="3291840" cy="320040"/>
-          </a:xfrm>
-          <a:prstGeom prst="rect">
-            <a:avLst/>
-          </a:prstGeom>
-          <a:noFill/>
-          <a:ln/>
-        </p:spPr>
-        <p:txBody>
-          <a:bodyPr wrap="square" lIns="0" tIns="0" rIns="0" bIns="0" rtlCol="0" anchor="ctr"/>
-          <a:lstStyle/>
-          <a:p>
-            <a:pPr indent="0" marL="0">
-              <a:buNone/>
-            </a:pPr>
-            <a:r>
-              <a:rPr lang="en-US" sz="1500" b="1" dirty="0">
-                <a:solidFill>
-                  <a:srgbClr val="3E8E84"/>
-                </a:solidFill>
-                <a:latin typeface="Yu Gothic" pitchFamily="34" charset="0"/>
-                <a:ea typeface="Yu Gothic" pitchFamily="34" charset="-122"/>
-                <a:cs typeface="Yu Gothic" pitchFamily="34" charset="-120"/>
-              </a:rPr>
-              <a:t>家族</a:t>
-            </a:r>
-            <a:endParaRPr lang="en-US" sz="1500" dirty="0"/>
-          </a:p>
-        </p:txBody>
-      </p:sp>
-      <p:sp>
-        <p:nvSpPr>
-          <p:cNvPr id="34" name="Text 32"/>
-          <p:cNvSpPr/>
-          <p:nvPr/>
-        </p:nvSpPr>
-        <p:spPr>
-          <a:xfrm>
-            <a:off x="8001000" y="5394960"/>
-            <a:ext cx="3337560" cy="411480"/>
-          </a:xfrm>
-          <a:prstGeom prst="rect">
-            <a:avLst/>
-          </a:prstGeom>
-          <a:noFill/>
-          <a:ln/>
-        </p:spPr>
-        <p:txBody>
-          <a:bodyPr wrap="square" lIns="0" tIns="0" rIns="0" bIns="0" rtlCol="0" anchor="ctr"/>
-          <a:lstStyle/>
-          <a:p>
-            <a:pPr indent="0" marL="0">
-              <a:buNone/>
-            </a:pPr>
-            <a:r>
-              <a:rPr lang="en-US" sz="1300" dirty="0">
-                <a:solidFill>
-                  <a:srgbClr val="5C6B68"/>
-                </a:solidFill>
-                <a:latin typeface="Yu Gothic" pitchFamily="34" charset="0"/>
-                <a:ea typeface="Yu Gothic" pitchFamily="34" charset="-122"/>
-                <a:cs typeface="Yu Gothic" pitchFamily="34" charset="-120"/>
-              </a:rPr>
-              <a:t>処方とバイタルの閲覧のみ</a:t>
+                  <a:srgbClr val="16211F"/>
+                </a:solidFill>
+                <a:latin typeface="Yu Gothic" pitchFamily="34" charset="0"/>
+                <a:ea typeface="Yu Gothic" pitchFamily="34" charset="-122"/>
+                <a:cs typeface="Yu Gothic" pitchFamily="34" charset="-120"/>
+              </a:rPr>
+              <a:t>②と⑤がつながっているのがこのアプリの要。「血圧が下がってきたので降圧薬を見直しては」という相談が、数字を見ながらできます。</a:t>
             </a:r>
             <a:endParaRPr lang="en-US" sz="1300" dirty="0"/>
           </a:p>

--- a/PharmaCare_紹介資料.pptx
+++ b/PharmaCare_紹介資料.pptx
@@ -3801,11 +3801,11 @@
         <p:spPr>
           <a:xfrm>
             <a:off x="731520" y="4160520"/>
-            <a:ext cx="10698480" cy="2011680"/>
+            <a:ext cx="10698480" cy="1463040"/>
           </a:xfrm>
           <a:prstGeom prst="roundRect">
             <a:avLst>
-              <a:gd name="adj" fmla="val 3636"/>
+              <a:gd name="adj" fmla="val 5000"/>
             </a:avLst>
           </a:prstGeom>
           <a:solidFill>
@@ -3827,7 +3827,7 @@
         </p:nvSpPr>
         <p:spPr>
           <a:xfrm>
-            <a:off x="1097280" y="4389120"/>
+            <a:off x="1097280" y="4407408"/>
             <a:ext cx="9601200" cy="411480"/>
           </a:xfrm>
           <a:prstGeom prst="rect">
@@ -3866,46 +3866,7 @@
         </p:nvSpPr>
         <p:spPr>
           <a:xfrm>
-            <a:off x="1097280" y="4846320"/>
-            <a:ext cx="9692640" cy="411480"/>
-          </a:xfrm>
-          <a:prstGeom prst="rect">
-            <a:avLst/>
-          </a:prstGeom>
-          <a:noFill/>
-          <a:ln/>
-        </p:spPr>
-        <p:txBody>
-          <a:bodyPr wrap="square" lIns="0" tIns="0" rIns="0" bIns="0" rtlCol="0" anchor="ctr"/>
-          <a:lstStyle/>
-          <a:p>
-            <a:pPr indent="0" marL="0">
-              <a:buNone/>
-            </a:pPr>
-            <a:r>
-              <a:rPr lang="en-US" sz="1500" dirty="0">
-                <a:solidFill>
-                  <a:srgbClr val="A8CFC9"/>
-                </a:solidFill>
-                <a:latin typeface="Yu Gothic" pitchFamily="34" charset="0"/>
-                <a:ea typeface="Yu Gothic" pitchFamily="34" charset="-122"/>
-                <a:cs typeface="Yu Gothic" pitchFamily="34" charset="-120"/>
-              </a:rPr>
-              <a:t>条文を先に読み、そこから必要な機能を起こしました。ガイドラインごとに、対応表と、その中身をかみ砕いた解説を1枚ずつ置きます。</a:t>
-            </a:r>
-            <a:endParaRPr lang="en-US" sz="1500" dirty="0"/>
-          </a:p>
-        </p:txBody>
-      </p:sp>
-      <p:sp>
-        <p:nvSpPr>
-          <p:cNvPr id="15" name="Text 13"/>
-          <p:cNvSpPr/>
-          <p:nvPr/>
-        </p:nvSpPr>
-        <p:spPr>
-          <a:xfrm>
-            <a:off x="1097280" y="5440680"/>
+            <a:off x="1097280" y="4937760"/>
             <a:ext cx="9692640" cy="411480"/>
           </a:xfrm>
           <a:prstGeom prst="rect">
@@ -22167,45 +22128,6 @@
               <a:t>トリアージの判定を決める</a:t>
             </a:r>
             <a:endParaRPr lang="en-US" sz="1400" dirty="0"/>
-          </a:p>
-        </p:txBody>
-      </p:sp>
-      <p:sp>
-        <p:nvSpPr>
-          <p:cNvPr id="17" name="Text 15"/>
-          <p:cNvSpPr/>
-          <p:nvPr/>
-        </p:nvSpPr>
-        <p:spPr>
-          <a:xfrm>
-            <a:off x="822960" y="5989320"/>
-            <a:ext cx="10515600" cy="411480"/>
-          </a:xfrm>
-          <a:prstGeom prst="rect">
-            <a:avLst/>
-          </a:prstGeom>
-          <a:noFill/>
-          <a:ln/>
-        </p:spPr>
-        <p:txBody>
-          <a:bodyPr wrap="square" lIns="0" tIns="0" rIns="0" bIns="0" rtlCol="0" anchor="ctr"/>
-          <a:lstStyle/>
-          <a:p>
-            <a:pPr indent="0" marL="0">
-              <a:buNone/>
-            </a:pPr>
-            <a:r>
-              <a:rPr lang="en-US" sz="1500" i="1" dirty="0">
-                <a:solidFill>
-                  <a:srgbClr val="FFFFFF"/>
-                </a:solidFill>
-                <a:latin typeface="Yu Gothic" pitchFamily="34" charset="0"/>
-                <a:ea typeface="Yu Gothic" pitchFamily="34" charset="-122"/>
-                <a:cs typeface="Yu Gothic" pitchFamily="34" charset="-120"/>
-              </a:rPr>
-              <a:t>AIが使えない状況でも、判定そのものはアプリだけで返ります。</a:t>
-            </a:r>
-            <a:endParaRPr lang="en-US" sz="1500" dirty="0"/>
           </a:p>
         </p:txBody>
       </p:sp>

--- a/PharmaCare_紹介資料.pptx
+++ b/PharmaCare_紹介資料.pptx
@@ -1267,7 +1267,7 @@
           <a:p>
             <a:r>
               <a:rPr lang="en-US" dirty="0"/>
-              <a:t/>
+              <a:t>「東京に置いています」で終わらせない。なぜ東京でなければならないかまで言えると、預ける側は判断できる。</a:t>
             </a:r>
             <a:endParaRPr lang="en-US" dirty="0"/>
           </a:p>
@@ -1355,7 +1355,7 @@
           <a:p>
             <a:r>
               <a:rPr lang="en-US" dirty="0"/>
-              <a:t>「東京に置いています」で終わらせない。なぜ東京でなければならないかまで言えると、預ける側は判断できる。</a:t>
+              <a:t/>
             </a:r>
             <a:endParaRPr lang="en-US" dirty="0"/>
           </a:p>
@@ -7558,7 +7558,7 @@
                 <a:ea typeface="Yu Gothic" pitchFamily="34" charset="-122"/>
                 <a:cs typeface="Yu Gothic" pitchFamily="34" charset="-120"/>
               </a:rPr>
-              <a:t>紙のカルテと同じ信頼を、データで担保する</a:t>
+              <a:t>どこに置いて、なぜそこなのか</a:t>
             </a:r>
             <a:endParaRPr lang="en-US" sz="3600" dirty="0"/>
           </a:p>
@@ -7597,7 +7597,7 @@
                 <a:ea typeface="Yu Gothic" pitchFamily="34" charset="-122"/>
                 <a:cs typeface="Yu Gothic" pitchFamily="34" charset="-120"/>
               </a:rPr>
-              <a:t>前ページの「真正性・見読性・保存性」は、かみ砕くとこの3つです</a:t>
+              <a:t>前ページ 6.1「国内法の執行が及ぶ範囲に置く」が、実際にどうなっているか</a:t>
             </a:r>
             <a:endParaRPr lang="en-US" sz="1600" dirty="0"/>
           </a:p>
@@ -7605,18 +7605,1051 @@
       </p:sp>
       <p:sp>
         <p:nvSpPr>
-          <p:cNvPr id="4" name="Shape 2"/>
-          <p:cNvSpPr/>
-          <p:nvPr/>
-        </p:nvSpPr>
-        <p:spPr>
-          <a:xfrm>
-            <a:off x="731520" y="1828800"/>
-            <a:ext cx="3429000" cy="841248"/>
+          <p:cNvPr id="4" name="Text 2"/>
+          <p:cNvSpPr/>
+          <p:nvPr/>
+        </p:nvSpPr>
+        <p:spPr>
+          <a:xfrm>
+            <a:off x="1005840" y="1783080"/>
+            <a:ext cx="2743200" cy="292608"/>
+          </a:xfrm>
+          <a:prstGeom prst="rect">
+            <a:avLst/>
+          </a:prstGeom>
+          <a:noFill/>
+          <a:ln/>
+        </p:spPr>
+        <p:txBody>
+          <a:bodyPr wrap="square" lIns="0" tIns="0" rIns="0" bIns="0" rtlCol="0" anchor="ctr"/>
+          <a:lstStyle/>
+          <a:p>
+            <a:pPr indent="0" marL="0">
+              <a:buNone/>
+            </a:pPr>
+            <a:r>
+              <a:rPr lang="en-US" sz="1300" b="1" dirty="0">
+                <a:solidFill>
+                  <a:srgbClr val="5C6B68"/>
+                </a:solidFill>
+                <a:latin typeface="Yu Gothic" pitchFamily="34" charset="0"/>
+                <a:ea typeface="Yu Gothic" pitchFamily="34" charset="-122"/>
+                <a:cs typeface="Yu Gothic" pitchFamily="34" charset="-120"/>
+              </a:rPr>
+              <a:t>何を</a:t>
+            </a:r>
+            <a:endParaRPr lang="en-US" sz="1300" dirty="0"/>
+          </a:p>
+        </p:txBody>
+      </p:sp>
+      <p:sp>
+        <p:nvSpPr>
+          <p:cNvPr id="5" name="Text 3"/>
+          <p:cNvSpPr/>
+          <p:nvPr/>
+        </p:nvSpPr>
+        <p:spPr>
+          <a:xfrm>
+            <a:off x="3931920" y="1783080"/>
+            <a:ext cx="3017520" cy="292608"/>
+          </a:xfrm>
+          <a:prstGeom prst="rect">
+            <a:avLst/>
+          </a:prstGeom>
+          <a:noFill/>
+          <a:ln/>
+        </p:spPr>
+        <p:txBody>
+          <a:bodyPr wrap="square" lIns="0" tIns="0" rIns="0" bIns="0" rtlCol="0" anchor="ctr"/>
+          <a:lstStyle/>
+          <a:p>
+            <a:pPr indent="0" marL="0">
+              <a:buNone/>
+            </a:pPr>
+            <a:r>
+              <a:rPr lang="en-US" sz="1300" b="1" dirty="0">
+                <a:solidFill>
+                  <a:srgbClr val="5C6B68"/>
+                </a:solidFill>
+                <a:latin typeface="Yu Gothic" pitchFamily="34" charset="0"/>
+                <a:ea typeface="Yu Gothic" pitchFamily="34" charset="-122"/>
+                <a:cs typeface="Yu Gothic" pitchFamily="34" charset="-120"/>
+              </a:rPr>
+              <a:t>どこに</a:t>
+            </a:r>
+            <a:endParaRPr lang="en-US" sz="1300" dirty="0"/>
+          </a:p>
+        </p:txBody>
+      </p:sp>
+      <p:sp>
+        <p:nvSpPr>
+          <p:cNvPr id="6" name="Text 4"/>
+          <p:cNvSpPr/>
+          <p:nvPr/>
+        </p:nvSpPr>
+        <p:spPr>
+          <a:xfrm>
+            <a:off x="7086600" y="1783080"/>
+            <a:ext cx="4617720" cy="292608"/>
+          </a:xfrm>
+          <a:prstGeom prst="rect">
+            <a:avLst/>
+          </a:prstGeom>
+          <a:noFill/>
+          <a:ln/>
+        </p:spPr>
+        <p:txBody>
+          <a:bodyPr wrap="square" lIns="0" tIns="0" rIns="0" bIns="0" rtlCol="0" anchor="ctr"/>
+          <a:lstStyle/>
+          <a:p>
+            <a:pPr indent="0" marL="0">
+              <a:buNone/>
+            </a:pPr>
+            <a:r>
+              <a:rPr lang="en-US" sz="1300" b="1" dirty="0">
+                <a:solidFill>
+                  <a:srgbClr val="5C6B68"/>
+                </a:solidFill>
+                <a:latin typeface="Yu Gothic" pitchFamily="34" charset="0"/>
+                <a:ea typeface="Yu Gothic" pitchFamily="34" charset="-122"/>
+                <a:cs typeface="Yu Gothic" pitchFamily="34" charset="-120"/>
+              </a:rPr>
+              <a:t>なぜ、そこなのか</a:t>
+            </a:r>
+            <a:endParaRPr lang="en-US" sz="1300" dirty="0"/>
+          </a:p>
+        </p:txBody>
+      </p:sp>
+      <p:sp>
+        <p:nvSpPr>
+          <p:cNvPr id="7" name="Shape 5"/>
+          <p:cNvSpPr/>
+          <p:nvPr/>
+        </p:nvSpPr>
+        <p:spPr>
+          <a:xfrm>
+            <a:off x="731520" y="2148840"/>
+            <a:ext cx="10698480" cy="658368"/>
           </a:xfrm>
           <a:prstGeom prst="roundRect">
             <a:avLst>
-              <a:gd name="adj" fmla="val 8696"/>
+              <a:gd name="adj" fmla="val 11111"/>
+            </a:avLst>
+          </a:prstGeom>
+          <a:solidFill>
+            <a:srgbClr val="F1F6F5"/>
+          </a:solidFill>
+          <a:ln w="12700">
+            <a:solidFill>
+              <a:srgbClr val="DCE6E4"/>
+            </a:solidFill>
+            <a:prstDash val="solid"/>
+          </a:ln>
+        </p:spPr>
+      </p:sp>
+      <p:sp>
+        <p:nvSpPr>
+          <p:cNvPr id="8" name="Text 6"/>
+          <p:cNvSpPr/>
+          <p:nvPr/>
+        </p:nvSpPr>
+        <p:spPr>
+          <a:xfrm>
+            <a:off x="1005840" y="2240280"/>
+            <a:ext cx="2651760" cy="274320"/>
+          </a:xfrm>
+          <a:prstGeom prst="rect">
+            <a:avLst/>
+          </a:prstGeom>
+          <a:noFill/>
+          <a:ln/>
+        </p:spPr>
+        <p:txBody>
+          <a:bodyPr wrap="square" lIns="0" tIns="0" rIns="0" bIns="0" rtlCol="0" anchor="ctr"/>
+          <a:lstStyle/>
+          <a:p>
+            <a:pPr indent="0" marL="0">
+              <a:buNone/>
+            </a:pPr>
+            <a:r>
+              <a:rPr lang="en-US" sz="1500" b="1" dirty="0">
+                <a:solidFill>
+                  <a:srgbClr val="14504B"/>
+                </a:solidFill>
+                <a:latin typeface="Yu Gothic" pitchFamily="34" charset="0"/>
+                <a:ea typeface="Yu Gothic" pitchFamily="34" charset="-122"/>
+                <a:cs typeface="Yu Gothic" pitchFamily="34" charset="-120"/>
+              </a:rPr>
+              <a:t>入居者の記録</a:t>
+            </a:r>
+            <a:endParaRPr lang="en-US" sz="1500" dirty="0"/>
+          </a:p>
+        </p:txBody>
+      </p:sp>
+      <p:sp>
+        <p:nvSpPr>
+          <p:cNvPr id="9" name="Text 7"/>
+          <p:cNvSpPr/>
+          <p:nvPr/>
+        </p:nvSpPr>
+        <p:spPr>
+          <a:xfrm>
+            <a:off x="1005840" y="2514600"/>
+            <a:ext cx="2743200" cy="274320"/>
+          </a:xfrm>
+          <a:prstGeom prst="rect">
+            <a:avLst/>
+          </a:prstGeom>
+          <a:noFill/>
+          <a:ln/>
+        </p:spPr>
+        <p:txBody>
+          <a:bodyPr wrap="square" lIns="0" tIns="0" rIns="0" bIns="0" rtlCol="0" anchor="ctr"/>
+          <a:lstStyle/>
+          <a:p>
+            <a:pPr indent="0" marL="0">
+              <a:buNone/>
+            </a:pPr>
+            <a:r>
+              <a:rPr lang="en-US" sz="1100" dirty="0">
+                <a:solidFill>
+                  <a:srgbClr val="5C6B68"/>
+                </a:solidFill>
+                <a:latin typeface="Yu Gothic" pitchFamily="34" charset="0"/>
+                <a:ea typeface="Yu Gothic" pitchFamily="34" charset="-122"/>
+                <a:cs typeface="Yu Gothic" pitchFamily="34" charset="-120"/>
+              </a:rPr>
+              <a:t>服薬・バイタル・アレルギー・やり取り</a:t>
+            </a:r>
+            <a:endParaRPr lang="en-US" sz="1100" dirty="0"/>
+          </a:p>
+        </p:txBody>
+      </p:sp>
+      <p:sp>
+        <p:nvSpPr>
+          <p:cNvPr id="10" name="Text 8"/>
+          <p:cNvSpPr/>
+          <p:nvPr/>
+        </p:nvSpPr>
+        <p:spPr>
+          <a:xfrm>
+            <a:off x="3931920" y="2267712"/>
+            <a:ext cx="2926080" cy="548640"/>
+          </a:xfrm>
+          <a:prstGeom prst="rect">
+            <a:avLst/>
+          </a:prstGeom>
+          <a:noFill/>
+          <a:ln/>
+        </p:spPr>
+        <p:txBody>
+          <a:bodyPr wrap="square" lIns="0" tIns="0" rIns="0" bIns="0" rtlCol="0" anchor="ctr"/>
+          <a:lstStyle/>
+          <a:p>
+            <a:pPr indent="0" marL="0">
+              <a:lnSpc>
+                <a:spcPct val="115000"/>
+              </a:lnSpc>
+              <a:buNone/>
+            </a:pPr>
+            <a:r>
+              <a:rPr lang="en-US" sz="1200" b="1" dirty="0">
+                <a:solidFill>
+                  <a:srgbClr val="16211F"/>
+                </a:solidFill>
+                <a:latin typeface="Yu Gothic" pitchFamily="34" charset="0"/>
+                <a:ea typeface="Yu Gothic" pitchFamily="34" charset="-122"/>
+                <a:cs typeface="Yu Gothic" pitchFamily="34" charset="-120"/>
+              </a:rPr>
+              <a:t>Cloud Firestore</a:t>
+            </a:r>
+            <a:endParaRPr lang="en-US" sz="1200" dirty="0"/>
+          </a:p>
+          <a:p>
+            <a:pPr indent="0" marL="0">
+              <a:lnSpc>
+                <a:spcPct val="115000"/>
+              </a:lnSpc>
+              <a:buNone/>
+            </a:pPr>
+            <a:r>
+              <a:rPr lang="en-US" sz="1200" b="1" dirty="0">
+                <a:solidFill>
+                  <a:srgbClr val="16211F"/>
+                </a:solidFill>
+                <a:latin typeface="Yu Gothic" pitchFamily="34" charset="0"/>
+                <a:ea typeface="Yu Gothic" pitchFamily="34" charset="-122"/>
+                <a:cs typeface="Yu Gothic" pitchFamily="34" charset="-120"/>
+              </a:rPr>
+              <a:t>東京（asia-northeast1）</a:t>
+            </a:r>
+            <a:endParaRPr lang="en-US" sz="1200" dirty="0"/>
+          </a:p>
+        </p:txBody>
+      </p:sp>
+      <p:sp>
+        <p:nvSpPr>
+          <p:cNvPr id="11" name="Text 9"/>
+          <p:cNvSpPr/>
+          <p:nvPr/>
+        </p:nvSpPr>
+        <p:spPr>
+          <a:xfrm>
+            <a:off x="7086600" y="2267712"/>
+            <a:ext cx="4480560" cy="548640"/>
+          </a:xfrm>
+          <a:prstGeom prst="rect">
+            <a:avLst/>
+          </a:prstGeom>
+          <a:noFill/>
+          <a:ln/>
+        </p:spPr>
+        <p:txBody>
+          <a:bodyPr wrap="square" lIns="0" tIns="0" rIns="0" bIns="0" rtlCol="0" anchor="ctr"/>
+          <a:lstStyle/>
+          <a:p>
+            <a:pPr indent="0" marL="0">
+              <a:lnSpc>
+                <a:spcPct val="115000"/>
+              </a:lnSpc>
+              <a:buNone/>
+            </a:pPr>
+            <a:r>
+              <a:rPr lang="en-US" sz="1200" dirty="0">
+                <a:solidFill>
+                  <a:srgbClr val="16211F"/>
+                </a:solidFill>
+                <a:latin typeface="Yu Gothic" pitchFamily="34" charset="0"/>
+                <a:ea typeface="Yu Gothic" pitchFamily="34" charset="-122"/>
+                <a:cs typeface="Yu Gothic" pitchFamily="34" charset="-120"/>
+              </a:rPr>
+              <a:t>国内法の執行が及ぶ範囲に置くことが要求事項です。</a:t>
+            </a:r>
+            <a:endParaRPr lang="en-US" sz="1200" dirty="0"/>
+          </a:p>
+          <a:p>
+            <a:pPr indent="0" marL="0">
+              <a:lnSpc>
+                <a:spcPct val="115000"/>
+              </a:lnSpc>
+              <a:buNone/>
+            </a:pPr>
+            <a:r>
+              <a:rPr lang="en-US" sz="1200" dirty="0">
+                <a:solidFill>
+                  <a:srgbClr val="16211F"/>
+                </a:solidFill>
+                <a:latin typeface="Yu Gothic" pitchFamily="34" charset="0"/>
+                <a:ea typeface="Yu Gothic" pitchFamily="34" charset="-122"/>
+                <a:cs typeface="Yu Gothic" pitchFamily="34" charset="-120"/>
+              </a:rPr>
+              <a:t>海外だと、いざというとき日本の法律が届きません。</a:t>
+            </a:r>
+            <a:endParaRPr lang="en-US" sz="1200" dirty="0"/>
+          </a:p>
+        </p:txBody>
+      </p:sp>
+      <p:sp>
+        <p:nvSpPr>
+          <p:cNvPr id="12" name="Shape 10"/>
+          <p:cNvSpPr/>
+          <p:nvPr/>
+        </p:nvSpPr>
+        <p:spPr>
+          <a:xfrm>
+            <a:off x="731520" y="2898648"/>
+            <a:ext cx="10698480" cy="658368"/>
+          </a:xfrm>
+          <a:prstGeom prst="roundRect">
+            <a:avLst>
+              <a:gd name="adj" fmla="val 11111"/>
+            </a:avLst>
+          </a:prstGeom>
+          <a:solidFill>
+            <a:srgbClr val="FFFFFF"/>
+          </a:solidFill>
+          <a:ln w="12700">
+            <a:solidFill>
+              <a:srgbClr val="DCE6E4"/>
+            </a:solidFill>
+            <a:prstDash val="solid"/>
+          </a:ln>
+        </p:spPr>
+      </p:sp>
+      <p:sp>
+        <p:nvSpPr>
+          <p:cNvPr id="13" name="Text 11"/>
+          <p:cNvSpPr/>
+          <p:nvPr/>
+        </p:nvSpPr>
+        <p:spPr>
+          <a:xfrm>
+            <a:off x="1005840" y="2990088"/>
+            <a:ext cx="2651760" cy="274320"/>
+          </a:xfrm>
+          <a:prstGeom prst="rect">
+            <a:avLst/>
+          </a:prstGeom>
+          <a:noFill/>
+          <a:ln/>
+        </p:spPr>
+        <p:txBody>
+          <a:bodyPr wrap="square" lIns="0" tIns="0" rIns="0" bIns="0" rtlCol="0" anchor="ctr"/>
+          <a:lstStyle/>
+          <a:p>
+            <a:pPr indent="0" marL="0">
+              <a:buNone/>
+            </a:pPr>
+            <a:r>
+              <a:rPr lang="en-US" sz="1500" b="1" dirty="0">
+                <a:solidFill>
+                  <a:srgbClr val="14504B"/>
+                </a:solidFill>
+                <a:latin typeface="Yu Gothic" pitchFamily="34" charset="0"/>
+                <a:ea typeface="Yu Gothic" pitchFamily="34" charset="-122"/>
+                <a:cs typeface="Yu Gothic" pitchFamily="34" charset="-120"/>
+              </a:rPr>
+              <a:t>監査ログ</a:t>
+            </a:r>
+            <a:endParaRPr lang="en-US" sz="1500" dirty="0"/>
+          </a:p>
+        </p:txBody>
+      </p:sp>
+      <p:sp>
+        <p:nvSpPr>
+          <p:cNvPr id="14" name="Text 12"/>
+          <p:cNvSpPr/>
+          <p:nvPr/>
+        </p:nvSpPr>
+        <p:spPr>
+          <a:xfrm>
+            <a:off x="1005840" y="3264408"/>
+            <a:ext cx="2743200" cy="274320"/>
+          </a:xfrm>
+          <a:prstGeom prst="rect">
+            <a:avLst/>
+          </a:prstGeom>
+          <a:noFill/>
+          <a:ln/>
+        </p:spPr>
+        <p:txBody>
+          <a:bodyPr wrap="square" lIns="0" tIns="0" rIns="0" bIns="0" rtlCol="0" anchor="ctr"/>
+          <a:lstStyle/>
+          <a:p>
+            <a:pPr indent="0" marL="0">
+              <a:buNone/>
+            </a:pPr>
+            <a:r>
+              <a:rPr lang="en-US" sz="1100" dirty="0">
+                <a:solidFill>
+                  <a:srgbClr val="5C6B68"/>
+                </a:solidFill>
+                <a:latin typeface="Yu Gothic" pitchFamily="34" charset="0"/>
+                <a:ea typeface="Yu Gothic" pitchFamily="34" charset="-122"/>
+                <a:cs typeface="Yu Gothic" pitchFamily="34" charset="-120"/>
+              </a:rPr>
+              <a:t>誰が・いつ・何を見たか</a:t>
+            </a:r>
+            <a:endParaRPr lang="en-US" sz="1100" dirty="0"/>
+          </a:p>
+        </p:txBody>
+      </p:sp>
+      <p:sp>
+        <p:nvSpPr>
+          <p:cNvPr id="15" name="Text 13"/>
+          <p:cNvSpPr/>
+          <p:nvPr/>
+        </p:nvSpPr>
+        <p:spPr>
+          <a:xfrm>
+            <a:off x="3931920" y="3017520"/>
+            <a:ext cx="2926080" cy="548640"/>
+          </a:xfrm>
+          <a:prstGeom prst="rect">
+            <a:avLst/>
+          </a:prstGeom>
+          <a:noFill/>
+          <a:ln/>
+        </p:spPr>
+        <p:txBody>
+          <a:bodyPr wrap="square" lIns="0" tIns="0" rIns="0" bIns="0" rtlCol="0" anchor="ctr"/>
+          <a:lstStyle/>
+          <a:p>
+            <a:pPr indent="0" marL="0">
+              <a:lnSpc>
+                <a:spcPct val="115000"/>
+              </a:lnSpc>
+              <a:buNone/>
+            </a:pPr>
+            <a:r>
+              <a:rPr lang="en-US" sz="1200" b="1" dirty="0">
+                <a:solidFill>
+                  <a:srgbClr val="16211F"/>
+                </a:solidFill>
+                <a:latin typeface="Yu Gothic" pitchFamily="34" charset="0"/>
+                <a:ea typeface="Yu Gothic" pitchFamily="34" charset="-122"/>
+                <a:cs typeface="Yu Gothic" pitchFamily="34" charset="-120"/>
+              </a:rPr>
+              <a:t>同じ東京リージョン</a:t>
+            </a:r>
+            <a:endParaRPr lang="en-US" sz="1200" dirty="0"/>
+          </a:p>
+          <a:p>
+            <a:pPr indent="0" marL="0">
+              <a:lnSpc>
+                <a:spcPct val="115000"/>
+              </a:lnSpc>
+              <a:buNone/>
+            </a:pPr>
+            <a:r>
+              <a:rPr lang="en-US" sz="1200" b="1" dirty="0">
+                <a:solidFill>
+                  <a:srgbClr val="16211F"/>
+                </a:solidFill>
+                <a:latin typeface="Yu Gothic" pitchFamily="34" charset="0"/>
+                <a:ea typeface="Yu Gothic" pitchFamily="34" charset="-122"/>
+                <a:cs typeface="Yu Gothic" pitchFamily="34" charset="-120"/>
+              </a:rPr>
+              <a:t>（専用の領域）</a:t>
+            </a:r>
+            <a:endParaRPr lang="en-US" sz="1200" dirty="0"/>
+          </a:p>
+        </p:txBody>
+      </p:sp>
+      <p:sp>
+        <p:nvSpPr>
+          <p:cNvPr id="16" name="Text 14"/>
+          <p:cNvSpPr/>
+          <p:nvPr/>
+        </p:nvSpPr>
+        <p:spPr>
+          <a:xfrm>
+            <a:off x="7086600" y="3017520"/>
+            <a:ext cx="4480560" cy="548640"/>
+          </a:xfrm>
+          <a:prstGeom prst="rect">
+            <a:avLst/>
+          </a:prstGeom>
+          <a:noFill/>
+          <a:ln/>
+        </p:spPr>
+        <p:txBody>
+          <a:bodyPr wrap="square" lIns="0" tIns="0" rIns="0" bIns="0" rtlCol="0" anchor="ctr"/>
+          <a:lstStyle/>
+          <a:p>
+            <a:pPr indent="0" marL="0">
+              <a:lnSpc>
+                <a:spcPct val="115000"/>
+              </a:lnSpc>
+              <a:buNone/>
+            </a:pPr>
+            <a:r>
+              <a:rPr lang="en-US" sz="1200" dirty="0">
+                <a:solidFill>
+                  <a:srgbClr val="16211F"/>
+                </a:solidFill>
+                <a:latin typeface="Yu Gothic" pitchFamily="34" charset="0"/>
+                <a:ea typeface="Yu Gothic" pitchFamily="34" charset="-122"/>
+                <a:cs typeface="Yu Gothic" pitchFamily="34" charset="-120"/>
+              </a:rPr>
+              <a:t>書き足すことしかできない設定にしています。</a:t>
+            </a:r>
+            <a:endParaRPr lang="en-US" sz="1200" dirty="0"/>
+          </a:p>
+          <a:p>
+            <a:pPr indent="0" marL="0">
+              <a:lnSpc>
+                <a:spcPct val="115000"/>
+              </a:lnSpc>
+              <a:buNone/>
+            </a:pPr>
+            <a:r>
+              <a:rPr lang="en-US" sz="1200" dirty="0">
+                <a:solidFill>
+                  <a:srgbClr val="16211F"/>
+                </a:solidFill>
+                <a:latin typeface="Yu Gothic" pitchFamily="34" charset="0"/>
+                <a:ea typeface="Yu Gothic" pitchFamily="34" charset="-122"/>
+                <a:cs typeface="Yu Gothic" pitchFamily="34" charset="-120"/>
+              </a:rPr>
+              <a:t>運営者の手でも、後から書き換え・削除ができません。</a:t>
+            </a:r>
+            <a:endParaRPr lang="en-US" sz="1200" dirty="0"/>
+          </a:p>
+        </p:txBody>
+      </p:sp>
+      <p:sp>
+        <p:nvSpPr>
+          <p:cNvPr id="17" name="Shape 15"/>
+          <p:cNvSpPr/>
+          <p:nvPr/>
+        </p:nvSpPr>
+        <p:spPr>
+          <a:xfrm>
+            <a:off x="731520" y="3648456"/>
+            <a:ext cx="10698480" cy="658368"/>
+          </a:xfrm>
+          <a:prstGeom prst="roundRect">
+            <a:avLst>
+              <a:gd name="adj" fmla="val 11111"/>
+            </a:avLst>
+          </a:prstGeom>
+          <a:solidFill>
+            <a:srgbClr val="F1F6F5"/>
+          </a:solidFill>
+          <a:ln w="12700">
+            <a:solidFill>
+              <a:srgbClr val="DCE6E4"/>
+            </a:solidFill>
+            <a:prstDash val="solid"/>
+          </a:ln>
+        </p:spPr>
+      </p:sp>
+      <p:sp>
+        <p:nvSpPr>
+          <p:cNvPr id="18" name="Text 16"/>
+          <p:cNvSpPr/>
+          <p:nvPr/>
+        </p:nvSpPr>
+        <p:spPr>
+          <a:xfrm>
+            <a:off x="1005840" y="3739896"/>
+            <a:ext cx="2651760" cy="274320"/>
+          </a:xfrm>
+          <a:prstGeom prst="rect">
+            <a:avLst/>
+          </a:prstGeom>
+          <a:noFill/>
+          <a:ln/>
+        </p:spPr>
+        <p:txBody>
+          <a:bodyPr wrap="square" lIns="0" tIns="0" rIns="0" bIns="0" rtlCol="0" anchor="ctr"/>
+          <a:lstStyle/>
+          <a:p>
+            <a:pPr indent="0" marL="0">
+              <a:buNone/>
+            </a:pPr>
+            <a:r>
+              <a:rPr lang="en-US" sz="1500" b="1" dirty="0">
+                <a:solidFill>
+                  <a:srgbClr val="14504B"/>
+                </a:solidFill>
+                <a:latin typeface="Yu Gothic" pitchFamily="34" charset="0"/>
+                <a:ea typeface="Yu Gothic" pitchFamily="34" charset="-122"/>
+                <a:cs typeface="Yu Gothic" pitchFamily="34" charset="-120"/>
+              </a:rPr>
+              <a:t>アプリの画面</a:t>
+            </a:r>
+            <a:endParaRPr lang="en-US" sz="1500" dirty="0"/>
+          </a:p>
+        </p:txBody>
+      </p:sp>
+      <p:sp>
+        <p:nvSpPr>
+          <p:cNvPr id="19" name="Text 17"/>
+          <p:cNvSpPr/>
+          <p:nvPr/>
+        </p:nvSpPr>
+        <p:spPr>
+          <a:xfrm>
+            <a:off x="1005840" y="4014216"/>
+            <a:ext cx="2743200" cy="274320"/>
+          </a:xfrm>
+          <a:prstGeom prst="rect">
+            <a:avLst/>
+          </a:prstGeom>
+          <a:noFill/>
+          <a:ln/>
+        </p:spPr>
+        <p:txBody>
+          <a:bodyPr wrap="square" lIns="0" tIns="0" rIns="0" bIns="0" rtlCol="0" anchor="ctr"/>
+          <a:lstStyle/>
+          <a:p>
+            <a:pPr indent="0" marL="0">
+              <a:buNone/>
+            </a:pPr>
+            <a:r>
+              <a:rPr lang="en-US" sz="1100" dirty="0">
+                <a:solidFill>
+                  <a:srgbClr val="5C6B68"/>
+                </a:solidFill>
+                <a:latin typeface="Yu Gothic" pitchFamily="34" charset="0"/>
+                <a:ea typeface="Yu Gothic" pitchFamily="34" charset="-122"/>
+                <a:cs typeface="Yu Gothic" pitchFamily="34" charset="-120"/>
+              </a:rPr>
+              <a:t>ブラウザに配信される本体</a:t>
+            </a:r>
+            <a:endParaRPr lang="en-US" sz="1100" dirty="0"/>
+          </a:p>
+        </p:txBody>
+      </p:sp>
+      <p:sp>
+        <p:nvSpPr>
+          <p:cNvPr id="20" name="Text 18"/>
+          <p:cNvSpPr/>
+          <p:nvPr/>
+        </p:nvSpPr>
+        <p:spPr>
+          <a:xfrm>
+            <a:off x="3931920" y="3767328"/>
+            <a:ext cx="2926080" cy="548640"/>
+          </a:xfrm>
+          <a:prstGeom prst="rect">
+            <a:avLst/>
+          </a:prstGeom>
+          <a:noFill/>
+          <a:ln/>
+        </p:spPr>
+        <p:txBody>
+          <a:bodyPr wrap="square" lIns="0" tIns="0" rIns="0" bIns="0" rtlCol="0" anchor="ctr"/>
+          <a:lstStyle/>
+          <a:p>
+            <a:pPr indent="0" marL="0">
+              <a:lnSpc>
+                <a:spcPct val="115000"/>
+              </a:lnSpc>
+              <a:buNone/>
+            </a:pPr>
+            <a:r>
+              <a:rPr lang="en-US" sz="1200" b="1" dirty="0">
+                <a:solidFill>
+                  <a:srgbClr val="16211F"/>
+                </a:solidFill>
+                <a:latin typeface="Yu Gothic" pitchFamily="34" charset="0"/>
+                <a:ea typeface="Yu Gothic" pitchFamily="34" charset="-122"/>
+                <a:cs typeface="Yu Gothic" pitchFamily="34" charset="-120"/>
+              </a:rPr>
+              <a:t>Firebase Hosting</a:t>
+            </a:r>
+            <a:endParaRPr lang="en-US" sz="1200" dirty="0"/>
+          </a:p>
+          <a:p>
+            <a:pPr indent="0" marL="0">
+              <a:lnSpc>
+                <a:spcPct val="115000"/>
+              </a:lnSpc>
+              <a:buNone/>
+            </a:pPr>
+            <a:r>
+              <a:rPr lang="en-US" sz="1200" b="1" dirty="0">
+                <a:solidFill>
+                  <a:srgbClr val="16211F"/>
+                </a:solidFill>
+                <a:latin typeface="Yu Gothic" pitchFamily="34" charset="0"/>
+                <a:ea typeface="Yu Gothic" pitchFamily="34" charset="-122"/>
+                <a:cs typeface="Yu Gothic" pitchFamily="34" charset="-120"/>
+              </a:rPr>
+              <a:t>全通信を HTTPS に強制</a:t>
+            </a:r>
+            <a:endParaRPr lang="en-US" sz="1200" dirty="0"/>
+          </a:p>
+        </p:txBody>
+      </p:sp>
+      <p:sp>
+        <p:nvSpPr>
+          <p:cNvPr id="21" name="Text 19"/>
+          <p:cNvSpPr/>
+          <p:nvPr/>
+        </p:nvSpPr>
+        <p:spPr>
+          <a:xfrm>
+            <a:off x="7086600" y="3767328"/>
+            <a:ext cx="4480560" cy="548640"/>
+          </a:xfrm>
+          <a:prstGeom prst="rect">
+            <a:avLst/>
+          </a:prstGeom>
+          <a:noFill/>
+          <a:ln/>
+        </p:spPr>
+        <p:txBody>
+          <a:bodyPr wrap="square" lIns="0" tIns="0" rIns="0" bIns="0" rtlCol="0" anchor="ctr"/>
+          <a:lstStyle/>
+          <a:p>
+            <a:pPr indent="0" marL="0">
+              <a:lnSpc>
+                <a:spcPct val="115000"/>
+              </a:lnSpc>
+              <a:buNone/>
+            </a:pPr>
+            <a:r>
+              <a:rPr lang="en-US" sz="1200" dirty="0">
+                <a:solidFill>
+                  <a:srgbClr val="16211F"/>
+                </a:solidFill>
+                <a:latin typeface="Yu Gothic" pitchFamily="34" charset="0"/>
+                <a:ea typeface="Yu Gothic" pitchFamily="34" charset="-122"/>
+                <a:cs typeface="Yu Gothic" pitchFamily="34" charset="-120"/>
+              </a:rPr>
+              <a:t>施設の端末と保管先のあいだを暗号化します。</a:t>
+            </a:r>
+            <a:endParaRPr lang="en-US" sz="1200" dirty="0"/>
+          </a:p>
+          <a:p>
+            <a:pPr indent="0" marL="0">
+              <a:lnSpc>
+                <a:spcPct val="115000"/>
+              </a:lnSpc>
+              <a:buNone/>
+            </a:pPr>
+            <a:r>
+              <a:rPr lang="en-US" sz="1200" dirty="0">
+                <a:solidFill>
+                  <a:srgbClr val="16211F"/>
+                </a:solidFill>
+                <a:latin typeface="Yu Gothic" pitchFamily="34" charset="0"/>
+                <a:ea typeface="Yu Gothic" pitchFamily="34" charset="-122"/>
+                <a:cs typeface="Yu Gothic" pitchFamily="34" charset="-120"/>
+              </a:rPr>
+              <a:t>途中の経路で中身を読まれることはありません。</a:t>
+            </a:r>
+            <a:endParaRPr lang="en-US" sz="1200" dirty="0"/>
+          </a:p>
+        </p:txBody>
+      </p:sp>
+      <p:sp>
+        <p:nvSpPr>
+          <p:cNvPr id="22" name="Shape 20"/>
+          <p:cNvSpPr/>
+          <p:nvPr/>
+        </p:nvSpPr>
+        <p:spPr>
+          <a:xfrm>
+            <a:off x="731520" y="4398264"/>
+            <a:ext cx="10698480" cy="658368"/>
+          </a:xfrm>
+          <a:prstGeom prst="roundRect">
+            <a:avLst>
+              <a:gd name="adj" fmla="val 11111"/>
+            </a:avLst>
+          </a:prstGeom>
+          <a:solidFill>
+            <a:srgbClr val="FFFFFF"/>
+          </a:solidFill>
+          <a:ln w="12700">
+            <a:solidFill>
+              <a:srgbClr val="DCE6E4"/>
+            </a:solidFill>
+            <a:prstDash val="solid"/>
+          </a:ln>
+        </p:spPr>
+      </p:sp>
+      <p:sp>
+        <p:nvSpPr>
+          <p:cNvPr id="23" name="Text 21"/>
+          <p:cNvSpPr/>
+          <p:nvPr/>
+        </p:nvSpPr>
+        <p:spPr>
+          <a:xfrm>
+            <a:off x="1005840" y="4489704"/>
+            <a:ext cx="2651760" cy="274320"/>
+          </a:xfrm>
+          <a:prstGeom prst="rect">
+            <a:avLst/>
+          </a:prstGeom>
+          <a:noFill/>
+          <a:ln/>
+        </p:spPr>
+        <p:txBody>
+          <a:bodyPr wrap="square" lIns="0" tIns="0" rIns="0" bIns="0" rtlCol="0" anchor="ctr"/>
+          <a:lstStyle/>
+          <a:p>
+            <a:pPr indent="0" marL="0">
+              <a:buNone/>
+            </a:pPr>
+            <a:r>
+              <a:rPr lang="en-US" sz="1500" b="1" dirty="0">
+                <a:solidFill>
+                  <a:srgbClr val="14504B"/>
+                </a:solidFill>
+                <a:latin typeface="Yu Gothic" pitchFamily="34" charset="0"/>
+                <a:ea typeface="Yu Gothic" pitchFamily="34" charset="-122"/>
+                <a:cs typeface="Yu Gothic" pitchFamily="34" charset="-120"/>
+              </a:rPr>
+              <a:t>AIに送る内容</a:t>
+            </a:r>
+            <a:endParaRPr lang="en-US" sz="1500" dirty="0"/>
+          </a:p>
+        </p:txBody>
+      </p:sp>
+      <p:sp>
+        <p:nvSpPr>
+          <p:cNvPr id="24" name="Text 22"/>
+          <p:cNvSpPr/>
+          <p:nvPr/>
+        </p:nvSpPr>
+        <p:spPr>
+          <a:xfrm>
+            <a:off x="1005840" y="4764024"/>
+            <a:ext cx="2743200" cy="274320"/>
+          </a:xfrm>
+          <a:prstGeom prst="rect">
+            <a:avLst/>
+          </a:prstGeom>
+          <a:noFill/>
+          <a:ln/>
+        </p:spPr>
+        <p:txBody>
+          <a:bodyPr wrap="square" lIns="0" tIns="0" rIns="0" bIns="0" rtlCol="0" anchor="ctr"/>
+          <a:lstStyle/>
+          <a:p>
+            <a:pPr indent="0" marL="0">
+              <a:buNone/>
+            </a:pPr>
+            <a:r>
+              <a:rPr lang="en-US" sz="1100" dirty="0">
+                <a:solidFill>
+                  <a:srgbClr val="5C6B68"/>
+                </a:solidFill>
+                <a:latin typeface="Yu Gothic" pitchFamily="34" charset="0"/>
+                <a:ea typeface="Yu Gothic" pitchFamily="34" charset="-122"/>
+                <a:cs typeface="Yu Gothic" pitchFamily="34" charset="-120"/>
+              </a:rPr>
+              <a:t>説明文を組み立てる分だけ</a:t>
+            </a:r>
+            <a:endParaRPr lang="en-US" sz="1100" dirty="0"/>
+          </a:p>
+        </p:txBody>
+      </p:sp>
+      <p:sp>
+        <p:nvSpPr>
+          <p:cNvPr id="25" name="Text 23"/>
+          <p:cNvSpPr/>
+          <p:nvPr/>
+        </p:nvSpPr>
+        <p:spPr>
+          <a:xfrm>
+            <a:off x="3931920" y="4517136"/>
+            <a:ext cx="2926080" cy="548640"/>
+          </a:xfrm>
+          <a:prstGeom prst="rect">
+            <a:avLst/>
+          </a:prstGeom>
+          <a:noFill/>
+          <a:ln/>
+        </p:spPr>
+        <p:txBody>
+          <a:bodyPr wrap="square" lIns="0" tIns="0" rIns="0" bIns="0" rtlCol="0" anchor="ctr"/>
+          <a:lstStyle/>
+          <a:p>
+            <a:pPr indent="0" marL="0">
+              <a:lnSpc>
+                <a:spcPct val="115000"/>
+              </a:lnSpc>
+              <a:buNone/>
+            </a:pPr>
+            <a:r>
+              <a:rPr lang="en-US" sz="1200" b="1" dirty="0">
+                <a:solidFill>
+                  <a:srgbClr val="16211F"/>
+                </a:solidFill>
+                <a:latin typeface="Yu Gothic" pitchFamily="34" charset="0"/>
+                <a:ea typeface="Yu Gothic" pitchFamily="34" charset="-122"/>
+                <a:cs typeface="Yu Gothic" pitchFamily="34" charset="-120"/>
+              </a:rPr>
+              <a:t>自社のプロキシ経由</a:t>
+            </a:r>
+            <a:endParaRPr lang="en-US" sz="1200" dirty="0"/>
+          </a:p>
+          <a:p>
+            <a:pPr indent="0" marL="0">
+              <a:lnSpc>
+                <a:spcPct val="115000"/>
+              </a:lnSpc>
+              <a:buNone/>
+            </a:pPr>
+            <a:r>
+              <a:rPr lang="en-US" sz="1200" b="1" dirty="0">
+                <a:solidFill>
+                  <a:srgbClr val="16211F"/>
+                </a:solidFill>
+                <a:latin typeface="Yu Gothic" pitchFamily="34" charset="0"/>
+                <a:ea typeface="Yu Gothic" pitchFamily="34" charset="-122"/>
+                <a:cs typeface="Yu Gothic" pitchFamily="34" charset="-120"/>
+              </a:rPr>
+              <a:t>Cloud Run 東京</a:t>
+            </a:r>
+            <a:endParaRPr lang="en-US" sz="1200" dirty="0"/>
+          </a:p>
+        </p:txBody>
+      </p:sp>
+      <p:sp>
+        <p:nvSpPr>
+          <p:cNvPr id="26" name="Text 24"/>
+          <p:cNvSpPr/>
+          <p:nvPr/>
+        </p:nvSpPr>
+        <p:spPr>
+          <a:xfrm>
+            <a:off x="7086600" y="4517136"/>
+            <a:ext cx="4480560" cy="548640"/>
+          </a:xfrm>
+          <a:prstGeom prst="rect">
+            <a:avLst/>
+          </a:prstGeom>
+          <a:noFill/>
+          <a:ln/>
+        </p:spPr>
+        <p:txBody>
+          <a:bodyPr wrap="square" lIns="0" tIns="0" rIns="0" bIns="0" rtlCol="0" anchor="ctr"/>
+          <a:lstStyle/>
+          <a:p>
+            <a:pPr indent="0" marL="0">
+              <a:lnSpc>
+                <a:spcPct val="115000"/>
+              </a:lnSpc>
+              <a:buNone/>
+            </a:pPr>
+            <a:r>
+              <a:rPr lang="en-US" sz="1200" dirty="0">
+                <a:solidFill>
+                  <a:srgbClr val="16211F"/>
+                </a:solidFill>
+                <a:latin typeface="Yu Gothic" pitchFamily="34" charset="0"/>
+                <a:ea typeface="Yu Gothic" pitchFamily="34" charset="-122"/>
+                <a:cs typeface="Yu Gothic" pitchFamily="34" charset="-120"/>
+              </a:rPr>
+              <a:t>氏名・生年月日・居室番号は送りません。送るのは症状と</a:t>
+            </a:r>
+            <a:endParaRPr lang="en-US" sz="1200" dirty="0"/>
+          </a:p>
+          <a:p>
+            <a:pPr indent="0" marL="0">
+              <a:lnSpc>
+                <a:spcPct val="115000"/>
+              </a:lnSpc>
+              <a:buNone/>
+            </a:pPr>
+            <a:r>
+              <a:rPr lang="en-US" sz="1200" dirty="0">
+                <a:solidFill>
+                  <a:srgbClr val="16211F"/>
+                </a:solidFill>
+                <a:latin typeface="Yu Gothic" pitchFamily="34" charset="0"/>
+                <a:ea typeface="Yu Gothic" pitchFamily="34" charset="-122"/>
+                <a:cs typeface="Yu Gothic" pitchFamily="34" charset="-120"/>
+              </a:rPr>
+              <a:t>薬剤名だけです。判定自体はAIではなくルールが決めます。</a:t>
+            </a:r>
+            <a:endParaRPr lang="en-US" sz="1200" dirty="0"/>
+          </a:p>
+        </p:txBody>
+      </p:sp>
+      <p:sp>
+        <p:nvSpPr>
+          <p:cNvPr id="27" name="Shape 25"/>
+          <p:cNvSpPr/>
+          <p:nvPr/>
+        </p:nvSpPr>
+        <p:spPr>
+          <a:xfrm>
+            <a:off x="731520" y="5193792"/>
+            <a:ext cx="10698480" cy="1005840"/>
+          </a:xfrm>
+          <a:prstGeom prst="roundRect">
+            <a:avLst>
+              <a:gd name="adj" fmla="val 7273"/>
             </a:avLst>
           </a:prstGeom>
           <a:solidFill>
@@ -7632,30 +8665,30 @@
       </p:sp>
       <p:sp>
         <p:nvSpPr>
-          <p:cNvPr id="5" name="Text 3"/>
-          <p:cNvSpPr/>
-          <p:nvPr/>
-        </p:nvSpPr>
-        <p:spPr>
-          <a:xfrm>
-            <a:off x="960120" y="1920240"/>
-            <a:ext cx="2926080" cy="329184"/>
-          </a:xfrm>
-          <a:prstGeom prst="rect">
-            <a:avLst/>
-          </a:prstGeom>
-          <a:noFill/>
-          <a:ln/>
-        </p:spPr>
-        <p:txBody>
-          <a:bodyPr wrap="square" lIns="0" tIns="0" rIns="0" bIns="0" rtlCol="0" anchor="ctr"/>
-          <a:lstStyle/>
-          <a:p>
-            <a:pPr indent="0" marL="0">
-              <a:buNone/>
-            </a:pPr>
-            <a:r>
-              <a:rPr lang="en-US" sz="1900" b="1" dirty="0">
+          <p:cNvPr id="28" name="Text 26"/>
+          <p:cNvSpPr/>
+          <p:nvPr/>
+        </p:nvSpPr>
+        <p:spPr>
+          <a:xfrm>
+            <a:off x="1051560" y="5303520"/>
+            <a:ext cx="2011680" cy="292608"/>
+          </a:xfrm>
+          <a:prstGeom prst="rect">
+            <a:avLst/>
+          </a:prstGeom>
+          <a:noFill/>
+          <a:ln/>
+        </p:spPr>
+        <p:txBody>
+          <a:bodyPr wrap="square" lIns="0" tIns="0" rIns="0" bIns="0" rtlCol="0" anchor="ctr"/>
+          <a:lstStyle/>
+          <a:p>
+            <a:pPr indent="0" marL="0">
+              <a:buNone/>
+            </a:pPr>
+            <a:r>
+              <a:rPr lang="en-US" sz="1300" b="1" dirty="0">
                 <a:solidFill>
                   <a:srgbClr val="D98A2B"/>
                 </a:solidFill>
@@ -7663,38 +8696,38 @@
                 <a:ea typeface="Yu Gothic" pitchFamily="34" charset="-122"/>
                 <a:cs typeface="Yu Gothic" pitchFamily="34" charset="-120"/>
               </a:rPr>
-              <a:t>真正性</a:t>
-            </a:r>
-            <a:endParaRPr lang="en-US" sz="1900" dirty="0"/>
-          </a:p>
-        </p:txBody>
-      </p:sp>
-      <p:sp>
-        <p:nvSpPr>
-          <p:cNvPr id="6" name="Text 4"/>
-          <p:cNvSpPr/>
-          <p:nvPr/>
-        </p:nvSpPr>
-        <p:spPr>
-          <a:xfrm>
-            <a:off x="960120" y="2286000"/>
-            <a:ext cx="3017520" cy="310896"/>
-          </a:xfrm>
-          <a:prstGeom prst="rect">
-            <a:avLst/>
-          </a:prstGeom>
-          <a:noFill/>
-          <a:ln/>
-        </p:spPr>
-        <p:txBody>
-          <a:bodyPr wrap="square" lIns="0" tIns="0" rIns="0" bIns="0" rtlCol="0" anchor="ctr"/>
-          <a:lstStyle/>
-          <a:p>
-            <a:pPr indent="0" marL="0">
-              <a:buNone/>
-            </a:pPr>
-            <a:r>
-              <a:rPr lang="en-US" sz="1300" dirty="0">
+              <a:t>消えないこと</a:t>
+            </a:r>
+            <a:endParaRPr lang="en-US" sz="1300" dirty="0"/>
+          </a:p>
+        </p:txBody>
+      </p:sp>
+      <p:sp>
+        <p:nvSpPr>
+          <p:cNvPr id="29" name="Text 27"/>
+          <p:cNvSpPr/>
+          <p:nvPr/>
+        </p:nvSpPr>
+        <p:spPr>
+          <a:xfrm>
+            <a:off x="2743200" y="5303520"/>
+            <a:ext cx="8503920" cy="292608"/>
+          </a:xfrm>
+          <a:prstGeom prst="rect">
+            <a:avLst/>
+          </a:prstGeom>
+          <a:noFill/>
+          <a:ln/>
+        </p:spPr>
+        <p:txBody>
+          <a:bodyPr wrap="square" lIns="0" tIns="0" rIns="0" bIns="0" rtlCol="0" anchor="ctr"/>
+          <a:lstStyle/>
+          <a:p>
+            <a:pPr indent="0" marL="0">
+              <a:buNone/>
+            </a:pPr>
+            <a:r>
+              <a:rPr lang="en-US" sz="1250" dirty="0">
                 <a:solidFill>
                   <a:srgbClr val="FFFFFF"/>
                 </a:solidFill>
@@ -7702,7 +8735,46 @@
                 <a:ea typeface="Yu Gothic" pitchFamily="34" charset="-122"/>
                 <a:cs typeface="Yu Gothic" pitchFamily="34" charset="-120"/>
               </a:rPr>
-              <a:t>あとから書き換えられていないこと</a:t>
+              <a:t>過去7日間の任意の時点まで戻せます。データベースそのものの削除も、設定で禁止しています。</a:t>
+            </a:r>
+            <a:endParaRPr lang="en-US" sz="1250" dirty="0"/>
+          </a:p>
+        </p:txBody>
+      </p:sp>
+      <p:sp>
+        <p:nvSpPr>
+          <p:cNvPr id="30" name="Text 28"/>
+          <p:cNvSpPr/>
+          <p:nvPr/>
+        </p:nvSpPr>
+        <p:spPr>
+          <a:xfrm>
+            <a:off x="1051560" y="5724144"/>
+            <a:ext cx="2011680" cy="292608"/>
+          </a:xfrm>
+          <a:prstGeom prst="rect">
+            <a:avLst/>
+          </a:prstGeom>
+          <a:noFill/>
+          <a:ln/>
+        </p:spPr>
+        <p:txBody>
+          <a:bodyPr wrap="square" lIns="0" tIns="0" rIns="0" bIns="0" rtlCol="0" anchor="ctr"/>
+          <a:lstStyle/>
+          <a:p>
+            <a:pPr indent="0" marL="0">
+              <a:buNone/>
+            </a:pPr>
+            <a:r>
+              <a:rPr lang="en-US" sz="1300" b="1" dirty="0">
+                <a:solidFill>
+                  <a:srgbClr val="D98A2B"/>
+                </a:solidFill>
+                <a:latin typeface="Yu Gothic" pitchFamily="34" charset="0"/>
+                <a:ea typeface="Yu Gothic" pitchFamily="34" charset="-122"/>
+                <a:cs typeface="Yu Gothic" pitchFamily="34" charset="-120"/>
+              </a:rPr>
+              <a:t>読まれないこと</a:t>
             </a:r>
             <a:endParaRPr lang="en-US" sz="1300" dirty="0"/>
           </a:p>
@@ -7710,57 +8782,69 @@
       </p:sp>
       <p:sp>
         <p:nvSpPr>
-          <p:cNvPr id="7" name="Shape 5"/>
-          <p:cNvSpPr/>
-          <p:nvPr/>
-        </p:nvSpPr>
-        <p:spPr>
-          <a:xfrm>
-            <a:off x="731520" y="2743200"/>
-            <a:ext cx="3429000" cy="1691640"/>
-          </a:xfrm>
-          <a:prstGeom prst="roundRect">
-            <a:avLst>
-              <a:gd name="adj" fmla="val 4324"/>
-            </a:avLst>
-          </a:prstGeom>
-          <a:solidFill>
-            <a:srgbClr val="F1F6F5"/>
-          </a:solidFill>
-          <a:ln w="12700">
-            <a:solidFill>
-              <a:srgbClr val="F1F6F5"/>
-            </a:solidFill>
-            <a:prstDash val="solid"/>
-          </a:ln>
-        </p:spPr>
-      </p:sp>
-      <p:sp>
-        <p:nvSpPr>
-          <p:cNvPr id="8" name="Text 6"/>
-          <p:cNvSpPr/>
-          <p:nvPr/>
-        </p:nvSpPr>
-        <p:spPr>
-          <a:xfrm>
-            <a:off x="960120" y="2871216"/>
-            <a:ext cx="2926080" cy="274320"/>
-          </a:xfrm>
-          <a:prstGeom prst="rect">
-            <a:avLst/>
-          </a:prstGeom>
-          <a:noFill/>
-          <a:ln/>
-        </p:spPr>
-        <p:txBody>
-          <a:bodyPr wrap="square" lIns="0" tIns="0" rIns="0" bIns="0" rtlCol="0" anchor="ctr"/>
-          <a:lstStyle/>
-          <a:p>
-            <a:pPr indent="0" marL="0">
-              <a:buNone/>
-            </a:pPr>
-            <a:r>
-              <a:rPr lang="en-US" sz="1200" b="1" dirty="0">
+          <p:cNvPr id="31" name="Text 29"/>
+          <p:cNvSpPr/>
+          <p:nvPr/>
+        </p:nvSpPr>
+        <p:spPr>
+          <a:xfrm>
+            <a:off x="2743200" y="5724144"/>
+            <a:ext cx="8503920" cy="292608"/>
+          </a:xfrm>
+          <a:prstGeom prst="rect">
+            <a:avLst/>
+          </a:prstGeom>
+          <a:noFill/>
+          <a:ln/>
+        </p:spPr>
+        <p:txBody>
+          <a:bodyPr wrap="square" lIns="0" tIns="0" rIns="0" bIns="0" rtlCol="0" anchor="ctr"/>
+          <a:lstStyle/>
+          <a:p>
+            <a:pPr indent="0" marL="0">
+              <a:buNone/>
+            </a:pPr>
+            <a:r>
+              <a:rPr lang="en-US" sz="1250" dirty="0">
+                <a:solidFill>
+                  <a:srgbClr val="FFFFFF"/>
+                </a:solidFill>
+                <a:latin typeface="Yu Gothic" pitchFamily="34" charset="0"/>
+                <a:ea typeface="Yu Gothic" pitchFamily="34" charset="-122"/>
+                <a:cs typeface="Yu Gothic" pitchFamily="34" charset="-120"/>
+              </a:rPr>
+              <a:t>保存時は Google Cloud の既定で暗号化。基盤は ISO/IEC 27001・27017・27018 と SOC 2/3 を取得しています。</a:t>
+            </a:r>
+            <a:endParaRPr lang="en-US" sz="1250" dirty="0"/>
+          </a:p>
+        </p:txBody>
+      </p:sp>
+      <p:sp>
+        <p:nvSpPr>
+          <p:cNvPr id="32" name="Text 30"/>
+          <p:cNvSpPr/>
+          <p:nvPr/>
+        </p:nvSpPr>
+        <p:spPr>
+          <a:xfrm>
+            <a:off x="731520" y="6309360"/>
+            <a:ext cx="10698480" cy="365760"/>
+          </a:xfrm>
+          <a:prstGeom prst="rect">
+            <a:avLst/>
+          </a:prstGeom>
+          <a:noFill/>
+          <a:ln/>
+        </p:spPr>
+        <p:txBody>
+          <a:bodyPr wrap="square" lIns="0" tIns="0" rIns="0" bIns="0" rtlCol="0" anchor="ctr"/>
+          <a:lstStyle/>
+          <a:p>
+            <a:pPr indent="0" marL="0">
+              <a:buNone/>
+            </a:pPr>
+            <a:r>
+              <a:rPr lang="en-US" sz="1200" i="1" dirty="0">
                 <a:solidFill>
                   <a:srgbClr val="5C6B68"/>
                 </a:solidFill>
@@ -7768,1180 +8852,9 @@
                 <a:ea typeface="Yu Gothic" pitchFamily="34" charset="-122"/>
                 <a:cs typeface="Yu Gothic" pitchFamily="34" charset="-120"/>
               </a:rPr>
-              <a:t>なぜ要るのか</a:t>
+              <a:t>※ 基盤事業者は Google Cloud Japan ですが、米国法の適用可能性は完全には排除できません。当社自身のPマーク／ISMSも未取得です（この章の最後に記載）。</a:t>
             </a:r>
             <a:endParaRPr lang="en-US" sz="1200" dirty="0"/>
-          </a:p>
-        </p:txBody>
-      </p:sp>
-      <p:sp>
-        <p:nvSpPr>
-          <p:cNvPr id="9" name="Text 7"/>
-          <p:cNvSpPr/>
-          <p:nvPr/>
-        </p:nvSpPr>
-        <p:spPr>
-          <a:xfrm>
-            <a:off x="960120" y="3163824"/>
-            <a:ext cx="3017520" cy="1188720"/>
-          </a:xfrm>
-          <a:prstGeom prst="rect">
-            <a:avLst/>
-          </a:prstGeom>
-          <a:noFill/>
-          <a:ln/>
-        </p:spPr>
-        <p:txBody>
-          <a:bodyPr wrap="square" lIns="0" tIns="0" rIns="0" bIns="0" rtlCol="0" anchor="ctr"/>
-          <a:lstStyle/>
-          <a:p>
-            <a:pPr indent="0" marL="0">
-              <a:lnSpc>
-                <a:spcPct val="125000"/>
-              </a:lnSpc>
-              <a:buNone/>
-            </a:pPr>
-            <a:r>
-              <a:rPr lang="en-US" sz="1300" dirty="0">
-                <a:solidFill>
-                  <a:srgbClr val="16211F"/>
-                </a:solidFill>
-                <a:latin typeface="Yu Gothic" pitchFamily="34" charset="0"/>
-                <a:ea typeface="Yu Gothic" pitchFamily="34" charset="-122"/>
-                <a:cs typeface="Yu Gothic" pitchFamily="34" charset="-120"/>
-              </a:rPr>
-              <a:t>アレルギーが「あり」から「なし」に</a:t>
-            </a:r>
-            <a:endParaRPr lang="en-US" sz="1300" dirty="0"/>
-          </a:p>
-          <a:p>
-            <a:pPr indent="0" marL="0">
-              <a:lnSpc>
-                <a:spcPct val="125000"/>
-              </a:lnSpc>
-              <a:buNone/>
-            </a:pPr>
-            <a:r>
-              <a:rPr lang="en-US" sz="1300" dirty="0">
-                <a:solidFill>
-                  <a:srgbClr val="16211F"/>
-                </a:solidFill>
-                <a:latin typeface="Yu Gothic" pitchFamily="34" charset="0"/>
-                <a:ea typeface="Yu Gothic" pitchFamily="34" charset="-122"/>
-                <a:cs typeface="Yu Gothic" pitchFamily="34" charset="-120"/>
-              </a:rPr>
-              <a:t>変わっていたとして、それが正規の</a:t>
-            </a:r>
-            <a:endParaRPr lang="en-US" sz="1300" dirty="0"/>
-          </a:p>
-          <a:p>
-            <a:pPr indent="0" marL="0">
-              <a:lnSpc>
-                <a:spcPct val="125000"/>
-              </a:lnSpc>
-              <a:buNone/>
-            </a:pPr>
-            <a:r>
-              <a:rPr lang="en-US" sz="1300" dirty="0">
-                <a:solidFill>
-                  <a:srgbClr val="16211F"/>
-                </a:solidFill>
-                <a:latin typeface="Yu Gothic" pitchFamily="34" charset="0"/>
-                <a:ea typeface="Yu Gothic" pitchFamily="34" charset="-122"/>
-                <a:cs typeface="Yu Gothic" pitchFamily="34" charset="-120"/>
-              </a:rPr>
-              <a:t>訂正なのか分からなければ、</a:t>
-            </a:r>
-            <a:endParaRPr lang="en-US" sz="1300" dirty="0"/>
-          </a:p>
-          <a:p>
-            <a:pPr indent="0" marL="0">
-              <a:lnSpc>
-                <a:spcPct val="125000"/>
-              </a:lnSpc>
-              <a:buNone/>
-            </a:pPr>
-            <a:r>
-              <a:rPr lang="en-US" sz="1300" dirty="0">
-                <a:solidFill>
-                  <a:srgbClr val="16211F"/>
-                </a:solidFill>
-                <a:latin typeface="Yu Gothic" pitchFamily="34" charset="0"/>
-                <a:ea typeface="Yu Gothic" pitchFamily="34" charset="-122"/>
-                <a:cs typeface="Yu Gothic" pitchFamily="34" charset="-120"/>
-              </a:rPr>
-              <a:t>その記録は使えません。</a:t>
-            </a:r>
-            <a:endParaRPr lang="en-US" sz="1300" dirty="0"/>
-          </a:p>
-        </p:txBody>
-      </p:sp>
-      <p:sp>
-        <p:nvSpPr>
-          <p:cNvPr id="10" name="Shape 8"/>
-          <p:cNvSpPr/>
-          <p:nvPr/>
-        </p:nvSpPr>
-        <p:spPr>
-          <a:xfrm>
-            <a:off x="731520" y="4526280"/>
-            <a:ext cx="3429000" cy="1691640"/>
-          </a:xfrm>
-          <a:prstGeom prst="roundRect">
-            <a:avLst>
-              <a:gd name="adj" fmla="val 4324"/>
-            </a:avLst>
-          </a:prstGeom>
-          <a:solidFill>
-            <a:srgbClr val="FFFFFF"/>
-          </a:solidFill>
-          <a:ln w="12700">
-            <a:solidFill>
-              <a:srgbClr val="A8CFC9"/>
-            </a:solidFill>
-            <a:prstDash val="solid"/>
-          </a:ln>
-        </p:spPr>
-      </p:sp>
-      <p:sp>
-        <p:nvSpPr>
-          <p:cNvPr id="11" name="Text 9"/>
-          <p:cNvSpPr/>
-          <p:nvPr/>
-        </p:nvSpPr>
-        <p:spPr>
-          <a:xfrm>
-            <a:off x="960120" y="4654296"/>
-            <a:ext cx="2926080" cy="274320"/>
-          </a:xfrm>
-          <a:prstGeom prst="rect">
-            <a:avLst/>
-          </a:prstGeom>
-          <a:noFill/>
-          <a:ln/>
-        </p:spPr>
-        <p:txBody>
-          <a:bodyPr wrap="square" lIns="0" tIns="0" rIns="0" bIns="0" rtlCol="0" anchor="ctr"/>
-          <a:lstStyle/>
-          <a:p>
-            <a:pPr indent="0" marL="0">
-              <a:buNone/>
-            </a:pPr>
-            <a:r>
-              <a:rPr lang="en-US" sz="1200" b="1" dirty="0">
-                <a:solidFill>
-                  <a:srgbClr val="1F6F78"/>
-                </a:solidFill>
-                <a:latin typeface="Yu Gothic" pitchFamily="34" charset="0"/>
-                <a:ea typeface="Yu Gothic" pitchFamily="34" charset="-122"/>
-                <a:cs typeface="Yu Gothic" pitchFamily="34" charset="-120"/>
-              </a:rPr>
-              <a:t>このアプリでは</a:t>
-            </a:r>
-            <a:endParaRPr lang="en-US" sz="1200" dirty="0"/>
-          </a:p>
-        </p:txBody>
-      </p:sp>
-      <p:sp>
-        <p:nvSpPr>
-          <p:cNvPr id="12" name="Text 10"/>
-          <p:cNvSpPr/>
-          <p:nvPr/>
-        </p:nvSpPr>
-        <p:spPr>
-          <a:xfrm>
-            <a:off x="960120" y="4946904"/>
-            <a:ext cx="3017520" cy="1188720"/>
-          </a:xfrm>
-          <a:prstGeom prst="rect">
-            <a:avLst/>
-          </a:prstGeom>
-          <a:noFill/>
-          <a:ln/>
-        </p:spPr>
-        <p:txBody>
-          <a:bodyPr wrap="square" lIns="0" tIns="0" rIns="0" bIns="0" rtlCol="0" anchor="ctr"/>
-          <a:lstStyle/>
-          <a:p>
-            <a:pPr indent="0" marL="0">
-              <a:lnSpc>
-                <a:spcPct val="125000"/>
-              </a:lnSpc>
-              <a:buNone/>
-            </a:pPr>
-            <a:r>
-              <a:rPr lang="en-US" sz="1300" dirty="0">
-                <a:solidFill>
-                  <a:srgbClr val="16211F"/>
-                </a:solidFill>
-                <a:latin typeface="Yu Gothic" pitchFamily="34" charset="0"/>
-                <a:ea typeface="Yu Gothic" pitchFamily="34" charset="-122"/>
-                <a:cs typeface="Yu Gothic" pitchFamily="34" charset="-120"/>
-              </a:rPr>
-              <a:t>誰が・いつ・何を・どう変えたかを</a:t>
-            </a:r>
-            <a:endParaRPr lang="en-US" sz="1300" dirty="0"/>
-          </a:p>
-          <a:p>
-            <a:pPr indent="0" marL="0">
-              <a:lnSpc>
-                <a:spcPct val="125000"/>
-              </a:lnSpc>
-              <a:buNone/>
-            </a:pPr>
-            <a:r>
-              <a:rPr lang="en-US" sz="1300" dirty="0">
-                <a:solidFill>
-                  <a:srgbClr val="16211F"/>
-                </a:solidFill>
-                <a:latin typeface="Yu Gothic" pitchFamily="34" charset="0"/>
-                <a:ea typeface="Yu Gothic" pitchFamily="34" charset="-122"/>
-                <a:cs typeface="Yu Gothic" pitchFamily="34" charset="-120"/>
-              </a:rPr>
-              <a:t>変更前の値ごと残します。</a:t>
-            </a:r>
-            <a:endParaRPr lang="en-US" sz="1300" dirty="0"/>
-          </a:p>
-          <a:p>
-            <a:pPr indent="0" marL="0">
-              <a:lnSpc>
-                <a:spcPct val="125000"/>
-              </a:lnSpc>
-              <a:buNone/>
-            </a:pPr>
-            <a:r>
-              <a:rPr lang="en-US" sz="1300" dirty="0">
-                <a:solidFill>
-                  <a:srgbClr val="16211F"/>
-                </a:solidFill>
-                <a:latin typeface="Yu Gothic" pitchFamily="34" charset="0"/>
-                <a:ea typeface="Yu Gothic" pitchFamily="34" charset="-122"/>
-                <a:cs typeface="Yu Gothic" pitchFamily="34" charset="-120"/>
-              </a:rPr>
-              <a:t>記録そのものの書き換えと削除は、</a:t>
-            </a:r>
-            <a:endParaRPr lang="en-US" sz="1300" dirty="0"/>
-          </a:p>
-          <a:p>
-            <a:pPr indent="0" marL="0">
-              <a:lnSpc>
-                <a:spcPct val="125000"/>
-              </a:lnSpc>
-              <a:buNone/>
-            </a:pPr>
-            <a:r>
-              <a:rPr lang="en-US" sz="1300" dirty="0">
-                <a:solidFill>
-                  <a:srgbClr val="16211F"/>
-                </a:solidFill>
-                <a:latin typeface="Yu Gothic" pitchFamily="34" charset="0"/>
-                <a:ea typeface="Yu Gothic" pitchFamily="34" charset="-122"/>
-                <a:cs typeface="Yu Gothic" pitchFamily="34" charset="-120"/>
-              </a:rPr>
-              <a:t>仕組みとして禁止しています。</a:t>
-            </a:r>
-            <a:endParaRPr lang="en-US" sz="1300" dirty="0"/>
-          </a:p>
-        </p:txBody>
-      </p:sp>
-      <p:sp>
-        <p:nvSpPr>
-          <p:cNvPr id="13" name="Shape 11"/>
-          <p:cNvSpPr/>
-          <p:nvPr/>
-        </p:nvSpPr>
-        <p:spPr>
-          <a:xfrm>
-            <a:off x="4434840" y="1828800"/>
-            <a:ext cx="3429000" cy="841248"/>
-          </a:xfrm>
-          <a:prstGeom prst="roundRect">
-            <a:avLst>
-              <a:gd name="adj" fmla="val 8696"/>
-            </a:avLst>
-          </a:prstGeom>
-          <a:solidFill>
-            <a:srgbClr val="14504B"/>
-          </a:solidFill>
-          <a:ln w="12700">
-            <a:solidFill>
-              <a:srgbClr val="14504B"/>
-            </a:solidFill>
-            <a:prstDash val="solid"/>
-          </a:ln>
-        </p:spPr>
-      </p:sp>
-      <p:sp>
-        <p:nvSpPr>
-          <p:cNvPr id="14" name="Text 12"/>
-          <p:cNvSpPr/>
-          <p:nvPr/>
-        </p:nvSpPr>
-        <p:spPr>
-          <a:xfrm>
-            <a:off x="4663440" y="1920240"/>
-            <a:ext cx="2926080" cy="329184"/>
-          </a:xfrm>
-          <a:prstGeom prst="rect">
-            <a:avLst/>
-          </a:prstGeom>
-          <a:noFill/>
-          <a:ln/>
-        </p:spPr>
-        <p:txBody>
-          <a:bodyPr wrap="square" lIns="0" tIns="0" rIns="0" bIns="0" rtlCol="0" anchor="ctr"/>
-          <a:lstStyle/>
-          <a:p>
-            <a:pPr indent="0" marL="0">
-              <a:buNone/>
-            </a:pPr>
-            <a:r>
-              <a:rPr lang="en-US" sz="1900" b="1" dirty="0">
-                <a:solidFill>
-                  <a:srgbClr val="D98A2B"/>
-                </a:solidFill>
-                <a:latin typeface="Yu Gothic" pitchFamily="34" charset="0"/>
-                <a:ea typeface="Yu Gothic" pitchFamily="34" charset="-122"/>
-                <a:cs typeface="Yu Gothic" pitchFamily="34" charset="-120"/>
-              </a:rPr>
-              <a:t>見読性</a:t>
-            </a:r>
-            <a:endParaRPr lang="en-US" sz="1900" dirty="0"/>
-          </a:p>
-        </p:txBody>
-      </p:sp>
-      <p:sp>
-        <p:nvSpPr>
-          <p:cNvPr id="15" name="Text 13"/>
-          <p:cNvSpPr/>
-          <p:nvPr/>
-        </p:nvSpPr>
-        <p:spPr>
-          <a:xfrm>
-            <a:off x="4663440" y="2286000"/>
-            <a:ext cx="3017520" cy="310896"/>
-          </a:xfrm>
-          <a:prstGeom prst="rect">
-            <a:avLst/>
-          </a:prstGeom>
-          <a:noFill/>
-          <a:ln/>
-        </p:spPr>
-        <p:txBody>
-          <a:bodyPr wrap="square" lIns="0" tIns="0" rIns="0" bIns="0" rtlCol="0" anchor="ctr"/>
-          <a:lstStyle/>
-          <a:p>
-            <a:pPr indent="0" marL="0">
-              <a:buNone/>
-            </a:pPr>
-            <a:r>
-              <a:rPr lang="en-US" sz="1300" dirty="0">
-                <a:solidFill>
-                  <a:srgbClr val="FFFFFF"/>
-                </a:solidFill>
-                <a:latin typeface="Yu Gothic" pitchFamily="34" charset="0"/>
-                <a:ea typeface="Yu Gothic" pitchFamily="34" charset="-122"/>
-                <a:cs typeface="Yu Gothic" pitchFamily="34" charset="-120"/>
-              </a:rPr>
-              <a:t>必要なときに読み出せること</a:t>
-            </a:r>
-            <a:endParaRPr lang="en-US" sz="1300" dirty="0"/>
-          </a:p>
-        </p:txBody>
-      </p:sp>
-      <p:sp>
-        <p:nvSpPr>
-          <p:cNvPr id="16" name="Shape 14"/>
-          <p:cNvSpPr/>
-          <p:nvPr/>
-        </p:nvSpPr>
-        <p:spPr>
-          <a:xfrm>
-            <a:off x="4434840" y="2743200"/>
-            <a:ext cx="3429000" cy="1691640"/>
-          </a:xfrm>
-          <a:prstGeom prst="roundRect">
-            <a:avLst>
-              <a:gd name="adj" fmla="val 4324"/>
-            </a:avLst>
-          </a:prstGeom>
-          <a:solidFill>
-            <a:srgbClr val="F1F6F5"/>
-          </a:solidFill>
-          <a:ln w="12700">
-            <a:solidFill>
-              <a:srgbClr val="F1F6F5"/>
-            </a:solidFill>
-            <a:prstDash val="solid"/>
-          </a:ln>
-        </p:spPr>
-      </p:sp>
-      <p:sp>
-        <p:nvSpPr>
-          <p:cNvPr id="17" name="Text 15"/>
-          <p:cNvSpPr/>
-          <p:nvPr/>
-        </p:nvSpPr>
-        <p:spPr>
-          <a:xfrm>
-            <a:off x="4663440" y="2871216"/>
-            <a:ext cx="2926080" cy="274320"/>
-          </a:xfrm>
-          <a:prstGeom prst="rect">
-            <a:avLst/>
-          </a:prstGeom>
-          <a:noFill/>
-          <a:ln/>
-        </p:spPr>
-        <p:txBody>
-          <a:bodyPr wrap="square" lIns="0" tIns="0" rIns="0" bIns="0" rtlCol="0" anchor="ctr"/>
-          <a:lstStyle/>
-          <a:p>
-            <a:pPr indent="0" marL="0">
-              <a:buNone/>
-            </a:pPr>
-            <a:r>
-              <a:rPr lang="en-US" sz="1200" b="1" dirty="0">
-                <a:solidFill>
-                  <a:srgbClr val="5C6B68"/>
-                </a:solidFill>
-                <a:latin typeface="Yu Gothic" pitchFamily="34" charset="0"/>
-                <a:ea typeface="Yu Gothic" pitchFamily="34" charset="-122"/>
-                <a:cs typeface="Yu Gothic" pitchFamily="34" charset="-120"/>
-              </a:rPr>
-              <a:t>なぜ要るのか</a:t>
-            </a:r>
-            <a:endParaRPr lang="en-US" sz="1200" dirty="0"/>
-          </a:p>
-        </p:txBody>
-      </p:sp>
-      <p:sp>
-        <p:nvSpPr>
-          <p:cNvPr id="18" name="Text 16"/>
-          <p:cNvSpPr/>
-          <p:nvPr/>
-        </p:nvSpPr>
-        <p:spPr>
-          <a:xfrm>
-            <a:off x="4663440" y="3163824"/>
-            <a:ext cx="3017520" cy="1188720"/>
-          </a:xfrm>
-          <a:prstGeom prst="rect">
-            <a:avLst/>
-          </a:prstGeom>
-          <a:noFill/>
-          <a:ln/>
-        </p:spPr>
-        <p:txBody>
-          <a:bodyPr wrap="square" lIns="0" tIns="0" rIns="0" bIns="0" rtlCol="0" anchor="ctr"/>
-          <a:lstStyle/>
-          <a:p>
-            <a:pPr indent="0" marL="0">
-              <a:lnSpc>
-                <a:spcPct val="125000"/>
-              </a:lnSpc>
-              <a:buNone/>
-            </a:pPr>
-            <a:r>
-              <a:rPr lang="en-US" sz="1300" dirty="0">
-                <a:solidFill>
-                  <a:srgbClr val="16211F"/>
-                </a:solidFill>
-                <a:latin typeface="Yu Gothic" pitchFamily="34" charset="0"/>
-                <a:ea typeface="Yu Gothic" pitchFamily="34" charset="-122"/>
-                <a:cs typeface="Yu Gothic" pitchFamily="34" charset="-120"/>
-              </a:rPr>
-              <a:t>行政の調査や監査では、記録の</a:t>
-            </a:r>
-            <a:endParaRPr lang="en-US" sz="1300" dirty="0"/>
-          </a:p>
-          <a:p>
-            <a:pPr indent="0" marL="0">
-              <a:lnSpc>
-                <a:spcPct val="125000"/>
-              </a:lnSpc>
-              <a:buNone/>
-            </a:pPr>
-            <a:r>
-              <a:rPr lang="en-US" sz="1300" dirty="0">
-                <a:solidFill>
-                  <a:srgbClr val="16211F"/>
-                </a:solidFill>
-                <a:latin typeface="Yu Gothic" pitchFamily="34" charset="0"/>
-                <a:ea typeface="Yu Gothic" pitchFamily="34" charset="-122"/>
-                <a:cs typeface="Yu Gothic" pitchFamily="34" charset="-120"/>
-              </a:rPr>
-              <a:t>提出を求められます。画面で</a:t>
-            </a:r>
-            <a:endParaRPr lang="en-US" sz="1300" dirty="0"/>
-          </a:p>
-          <a:p>
-            <a:pPr indent="0" marL="0">
-              <a:lnSpc>
-                <a:spcPct val="125000"/>
-              </a:lnSpc>
-              <a:buNone/>
-            </a:pPr>
-            <a:r>
-              <a:rPr lang="en-US" sz="1300" dirty="0">
-                <a:solidFill>
-                  <a:srgbClr val="16211F"/>
-                </a:solidFill>
-                <a:latin typeface="Yu Gothic" pitchFamily="34" charset="0"/>
-                <a:ea typeface="Yu Gothic" pitchFamily="34" charset="-122"/>
-                <a:cs typeface="Yu Gothic" pitchFamily="34" charset="-120"/>
-              </a:rPr>
-              <a:t>見えるだけでは足りず、紙に</a:t>
-            </a:r>
-            <a:endParaRPr lang="en-US" sz="1300" dirty="0"/>
-          </a:p>
-          <a:p>
-            <a:pPr indent="0" marL="0">
-              <a:lnSpc>
-                <a:spcPct val="125000"/>
-              </a:lnSpc>
-              <a:buNone/>
-            </a:pPr>
-            <a:r>
-              <a:rPr lang="en-US" sz="1300" dirty="0">
-                <a:solidFill>
-                  <a:srgbClr val="16211F"/>
-                </a:solidFill>
-                <a:latin typeface="Yu Gothic" pitchFamily="34" charset="0"/>
-                <a:ea typeface="Yu Gothic" pitchFamily="34" charset="-122"/>
-                <a:cs typeface="Yu Gothic" pitchFamily="34" charset="-120"/>
-              </a:rPr>
-              <a:t>出せる必要があります。</a:t>
-            </a:r>
-            <a:endParaRPr lang="en-US" sz="1300" dirty="0"/>
-          </a:p>
-        </p:txBody>
-      </p:sp>
-      <p:sp>
-        <p:nvSpPr>
-          <p:cNvPr id="19" name="Shape 17"/>
-          <p:cNvSpPr/>
-          <p:nvPr/>
-        </p:nvSpPr>
-        <p:spPr>
-          <a:xfrm>
-            <a:off x="4434840" y="4526280"/>
-            <a:ext cx="3429000" cy="1691640"/>
-          </a:xfrm>
-          <a:prstGeom prst="roundRect">
-            <a:avLst>
-              <a:gd name="adj" fmla="val 4324"/>
-            </a:avLst>
-          </a:prstGeom>
-          <a:solidFill>
-            <a:srgbClr val="FFFFFF"/>
-          </a:solidFill>
-          <a:ln w="12700">
-            <a:solidFill>
-              <a:srgbClr val="A8CFC9"/>
-            </a:solidFill>
-            <a:prstDash val="solid"/>
-          </a:ln>
-        </p:spPr>
-      </p:sp>
-      <p:sp>
-        <p:nvSpPr>
-          <p:cNvPr id="20" name="Text 18"/>
-          <p:cNvSpPr/>
-          <p:nvPr/>
-        </p:nvSpPr>
-        <p:spPr>
-          <a:xfrm>
-            <a:off x="4663440" y="4654296"/>
-            <a:ext cx="2926080" cy="274320"/>
-          </a:xfrm>
-          <a:prstGeom prst="rect">
-            <a:avLst/>
-          </a:prstGeom>
-          <a:noFill/>
-          <a:ln/>
-        </p:spPr>
-        <p:txBody>
-          <a:bodyPr wrap="square" lIns="0" tIns="0" rIns="0" bIns="0" rtlCol="0" anchor="ctr"/>
-          <a:lstStyle/>
-          <a:p>
-            <a:pPr indent="0" marL="0">
-              <a:buNone/>
-            </a:pPr>
-            <a:r>
-              <a:rPr lang="en-US" sz="1200" b="1" dirty="0">
-                <a:solidFill>
-                  <a:srgbClr val="1F6F78"/>
-                </a:solidFill>
-                <a:latin typeface="Yu Gothic" pitchFamily="34" charset="0"/>
-                <a:ea typeface="Yu Gothic" pitchFamily="34" charset="-122"/>
-                <a:cs typeface="Yu Gothic" pitchFamily="34" charset="-120"/>
-              </a:rPr>
-              <a:t>このアプリでは</a:t>
-            </a:r>
-            <a:endParaRPr lang="en-US" sz="1200" dirty="0"/>
-          </a:p>
-        </p:txBody>
-      </p:sp>
-      <p:sp>
-        <p:nvSpPr>
-          <p:cNvPr id="21" name="Text 19"/>
-          <p:cNvSpPr/>
-          <p:nvPr/>
-        </p:nvSpPr>
-        <p:spPr>
-          <a:xfrm>
-            <a:off x="4663440" y="4946904"/>
-            <a:ext cx="3017520" cy="1188720"/>
-          </a:xfrm>
-          <a:prstGeom prst="rect">
-            <a:avLst/>
-          </a:prstGeom>
-          <a:noFill/>
-          <a:ln/>
-        </p:spPr>
-        <p:txBody>
-          <a:bodyPr wrap="square" lIns="0" tIns="0" rIns="0" bIns="0" rtlCol="0" anchor="ctr"/>
-          <a:lstStyle/>
-          <a:p>
-            <a:pPr indent="0" marL="0">
-              <a:lnSpc>
-                <a:spcPct val="125000"/>
-              </a:lnSpc>
-              <a:buNone/>
-            </a:pPr>
-            <a:r>
-              <a:rPr lang="en-US" sz="1300" dirty="0">
-                <a:solidFill>
-                  <a:srgbClr val="16211F"/>
-                </a:solidFill>
-                <a:latin typeface="Yu Gothic" pitchFamily="34" charset="0"/>
-                <a:ea typeface="Yu Gothic" pitchFamily="34" charset="-122"/>
-                <a:cs typeface="Yu Gothic" pitchFamily="34" charset="-120"/>
-              </a:rPr>
-              <a:t>入居者ごとの記録を、そのまま</a:t>
-            </a:r>
-            <a:endParaRPr lang="en-US" sz="1300" dirty="0"/>
-          </a:p>
-          <a:p>
-            <a:pPr indent="0" marL="0">
-              <a:lnSpc>
-                <a:spcPct val="125000"/>
-              </a:lnSpc>
-              <a:buNone/>
-            </a:pPr>
-            <a:r>
-              <a:rPr lang="en-US" sz="1300" dirty="0">
-                <a:solidFill>
-                  <a:srgbClr val="16211F"/>
-                </a:solidFill>
-                <a:latin typeface="Yu Gothic" pitchFamily="34" charset="0"/>
-                <a:ea typeface="Yu Gothic" pitchFamily="34" charset="-122"/>
-                <a:cs typeface="Yu Gothic" pitchFamily="34" charset="-120"/>
-              </a:rPr>
-              <a:t>印刷できるようにしました。</a:t>
-            </a:r>
-            <a:endParaRPr lang="en-US" sz="1300" dirty="0"/>
-          </a:p>
-          <a:p>
-            <a:pPr indent="0" marL="0">
-              <a:lnSpc>
-                <a:spcPct val="125000"/>
-              </a:lnSpc>
-              <a:buNone/>
-            </a:pPr>
-            <a:r>
-              <a:rPr lang="en-US" sz="1300" dirty="0">
-                <a:solidFill>
-                  <a:srgbClr val="16211F"/>
-                </a:solidFill>
-                <a:latin typeface="Yu Gothic" pitchFamily="34" charset="0"/>
-                <a:ea typeface="Yu Gothic" pitchFamily="34" charset="-122"/>
-                <a:cs typeface="Yu Gothic" pitchFamily="34" charset="-120"/>
-              </a:rPr>
-              <a:t>印刷したこと自体も、</a:t>
-            </a:r>
-            <a:endParaRPr lang="en-US" sz="1300" dirty="0"/>
-          </a:p>
-          <a:p>
-            <a:pPr indent="0" marL="0">
-              <a:lnSpc>
-                <a:spcPct val="125000"/>
-              </a:lnSpc>
-              <a:buNone/>
-            </a:pPr>
-            <a:r>
-              <a:rPr lang="en-US" sz="1300" dirty="0">
-                <a:solidFill>
-                  <a:srgbClr val="16211F"/>
-                </a:solidFill>
-                <a:latin typeface="Yu Gothic" pitchFamily="34" charset="0"/>
-                <a:ea typeface="Yu Gothic" pitchFamily="34" charset="-122"/>
-                <a:cs typeface="Yu Gothic" pitchFamily="34" charset="-120"/>
-              </a:rPr>
-              <a:t>持ち出しとして記録に残します。</a:t>
-            </a:r>
-            <a:endParaRPr lang="en-US" sz="1300" dirty="0"/>
-          </a:p>
-        </p:txBody>
-      </p:sp>
-      <p:sp>
-        <p:nvSpPr>
-          <p:cNvPr id="22" name="Shape 20"/>
-          <p:cNvSpPr/>
-          <p:nvPr/>
-        </p:nvSpPr>
-        <p:spPr>
-          <a:xfrm>
-            <a:off x="8138160" y="1828800"/>
-            <a:ext cx="3429000" cy="841248"/>
-          </a:xfrm>
-          <a:prstGeom prst="roundRect">
-            <a:avLst>
-              <a:gd name="adj" fmla="val 8696"/>
-            </a:avLst>
-          </a:prstGeom>
-          <a:solidFill>
-            <a:srgbClr val="14504B"/>
-          </a:solidFill>
-          <a:ln w="12700">
-            <a:solidFill>
-              <a:srgbClr val="14504B"/>
-            </a:solidFill>
-            <a:prstDash val="solid"/>
-          </a:ln>
-        </p:spPr>
-      </p:sp>
-      <p:sp>
-        <p:nvSpPr>
-          <p:cNvPr id="23" name="Text 21"/>
-          <p:cNvSpPr/>
-          <p:nvPr/>
-        </p:nvSpPr>
-        <p:spPr>
-          <a:xfrm>
-            <a:off x="8366760" y="1920240"/>
-            <a:ext cx="2926080" cy="329184"/>
-          </a:xfrm>
-          <a:prstGeom prst="rect">
-            <a:avLst/>
-          </a:prstGeom>
-          <a:noFill/>
-          <a:ln/>
-        </p:spPr>
-        <p:txBody>
-          <a:bodyPr wrap="square" lIns="0" tIns="0" rIns="0" bIns="0" rtlCol="0" anchor="ctr"/>
-          <a:lstStyle/>
-          <a:p>
-            <a:pPr indent="0" marL="0">
-              <a:buNone/>
-            </a:pPr>
-            <a:r>
-              <a:rPr lang="en-US" sz="1900" b="1" dirty="0">
-                <a:solidFill>
-                  <a:srgbClr val="D98A2B"/>
-                </a:solidFill>
-                <a:latin typeface="Yu Gothic" pitchFamily="34" charset="0"/>
-                <a:ea typeface="Yu Gothic" pitchFamily="34" charset="-122"/>
-                <a:cs typeface="Yu Gothic" pitchFamily="34" charset="-120"/>
-              </a:rPr>
-              <a:t>保存性</a:t>
-            </a:r>
-            <a:endParaRPr lang="en-US" sz="1900" dirty="0"/>
-          </a:p>
-        </p:txBody>
-      </p:sp>
-      <p:sp>
-        <p:nvSpPr>
-          <p:cNvPr id="24" name="Text 22"/>
-          <p:cNvSpPr/>
-          <p:nvPr/>
-        </p:nvSpPr>
-        <p:spPr>
-          <a:xfrm>
-            <a:off x="8366760" y="2286000"/>
-            <a:ext cx="3017520" cy="310896"/>
-          </a:xfrm>
-          <a:prstGeom prst="rect">
-            <a:avLst/>
-          </a:prstGeom>
-          <a:noFill/>
-          <a:ln/>
-        </p:spPr>
-        <p:txBody>
-          <a:bodyPr wrap="square" lIns="0" tIns="0" rIns="0" bIns="0" rtlCol="0" anchor="ctr"/>
-          <a:lstStyle/>
-          <a:p>
-            <a:pPr indent="0" marL="0">
-              <a:buNone/>
-            </a:pPr>
-            <a:r>
-              <a:rPr lang="en-US" sz="1300" dirty="0">
-                <a:solidFill>
-                  <a:srgbClr val="FFFFFF"/>
-                </a:solidFill>
-                <a:latin typeface="Yu Gothic" pitchFamily="34" charset="0"/>
-                <a:ea typeface="Yu Gothic" pitchFamily="34" charset="-122"/>
-                <a:cs typeface="Yu Gothic" pitchFamily="34" charset="-120"/>
-              </a:rPr>
-              <a:t>保存期間中は失われないこと</a:t>
-            </a:r>
-            <a:endParaRPr lang="en-US" sz="1300" dirty="0"/>
-          </a:p>
-        </p:txBody>
-      </p:sp>
-      <p:sp>
-        <p:nvSpPr>
-          <p:cNvPr id="25" name="Shape 23"/>
-          <p:cNvSpPr/>
-          <p:nvPr/>
-        </p:nvSpPr>
-        <p:spPr>
-          <a:xfrm>
-            <a:off x="8138160" y="2743200"/>
-            <a:ext cx="3429000" cy="1691640"/>
-          </a:xfrm>
-          <a:prstGeom prst="roundRect">
-            <a:avLst>
-              <a:gd name="adj" fmla="val 4324"/>
-            </a:avLst>
-          </a:prstGeom>
-          <a:solidFill>
-            <a:srgbClr val="F1F6F5"/>
-          </a:solidFill>
-          <a:ln w="12700">
-            <a:solidFill>
-              <a:srgbClr val="F1F6F5"/>
-            </a:solidFill>
-            <a:prstDash val="solid"/>
-          </a:ln>
-        </p:spPr>
-      </p:sp>
-      <p:sp>
-        <p:nvSpPr>
-          <p:cNvPr id="26" name="Text 24"/>
-          <p:cNvSpPr/>
-          <p:nvPr/>
-        </p:nvSpPr>
-        <p:spPr>
-          <a:xfrm>
-            <a:off x="8366760" y="2871216"/>
-            <a:ext cx="2926080" cy="274320"/>
-          </a:xfrm>
-          <a:prstGeom prst="rect">
-            <a:avLst/>
-          </a:prstGeom>
-          <a:noFill/>
-          <a:ln/>
-        </p:spPr>
-        <p:txBody>
-          <a:bodyPr wrap="square" lIns="0" tIns="0" rIns="0" bIns="0" rtlCol="0" anchor="ctr"/>
-          <a:lstStyle/>
-          <a:p>
-            <a:pPr indent="0" marL="0">
-              <a:buNone/>
-            </a:pPr>
-            <a:r>
-              <a:rPr lang="en-US" sz="1200" b="1" dirty="0">
-                <a:solidFill>
-                  <a:srgbClr val="5C6B68"/>
-                </a:solidFill>
-                <a:latin typeface="Yu Gothic" pitchFamily="34" charset="0"/>
-                <a:ea typeface="Yu Gothic" pitchFamily="34" charset="-122"/>
-                <a:cs typeface="Yu Gothic" pitchFamily="34" charset="-120"/>
-              </a:rPr>
-              <a:t>なぜ要るのか</a:t>
-            </a:r>
-            <a:endParaRPr lang="en-US" sz="1200" dirty="0"/>
-          </a:p>
-        </p:txBody>
-      </p:sp>
-      <p:sp>
-        <p:nvSpPr>
-          <p:cNvPr id="27" name="Text 25"/>
-          <p:cNvSpPr/>
-          <p:nvPr/>
-        </p:nvSpPr>
-        <p:spPr>
-          <a:xfrm>
-            <a:off x="8366760" y="3163824"/>
-            <a:ext cx="3017520" cy="1188720"/>
-          </a:xfrm>
-          <a:prstGeom prst="rect">
-            <a:avLst/>
-          </a:prstGeom>
-          <a:noFill/>
-          <a:ln/>
-        </p:spPr>
-        <p:txBody>
-          <a:bodyPr wrap="square" lIns="0" tIns="0" rIns="0" bIns="0" rtlCol="0" anchor="ctr"/>
-          <a:lstStyle/>
-          <a:p>
-            <a:pPr indent="0" marL="0">
-              <a:lnSpc>
-                <a:spcPct val="125000"/>
-              </a:lnSpc>
-              <a:buNone/>
-            </a:pPr>
-            <a:r>
-              <a:rPr lang="en-US" sz="1300" dirty="0">
-                <a:solidFill>
-                  <a:srgbClr val="16211F"/>
-                </a:solidFill>
-                <a:latin typeface="Yu Gothic" pitchFamily="34" charset="0"/>
-                <a:ea typeface="Yu Gothic" pitchFamily="34" charset="-122"/>
-                <a:cs typeface="Yu Gothic" pitchFamily="34" charset="-120"/>
-              </a:rPr>
-              <a:t>誤操作や障害でデータが壊れても、</a:t>
-            </a:r>
-            <a:endParaRPr lang="en-US" sz="1300" dirty="0"/>
-          </a:p>
-          <a:p>
-            <a:pPr indent="0" marL="0">
-              <a:lnSpc>
-                <a:spcPct val="125000"/>
-              </a:lnSpc>
-              <a:buNone/>
-            </a:pPr>
-            <a:r>
-              <a:rPr lang="en-US" sz="1300" dirty="0">
-                <a:solidFill>
-                  <a:srgbClr val="16211F"/>
-                </a:solidFill>
-                <a:latin typeface="Yu Gothic" pitchFamily="34" charset="0"/>
-                <a:ea typeface="Yu Gothic" pitchFamily="34" charset="-122"/>
-                <a:cs typeface="Yu Gothic" pitchFamily="34" charset="-120"/>
-              </a:rPr>
-              <a:t>決められた期間は元に戻せなければ</a:t>
-            </a:r>
-            <a:endParaRPr lang="en-US" sz="1300" dirty="0"/>
-          </a:p>
-          <a:p>
-            <a:pPr indent="0" marL="0">
-              <a:lnSpc>
-                <a:spcPct val="125000"/>
-              </a:lnSpc>
-              <a:buNone/>
-            </a:pPr>
-            <a:r>
-              <a:rPr lang="en-US" sz="1300" dirty="0">
-                <a:solidFill>
-                  <a:srgbClr val="16211F"/>
-                </a:solidFill>
-                <a:latin typeface="Yu Gothic" pitchFamily="34" charset="0"/>
-                <a:ea typeface="Yu Gothic" pitchFamily="34" charset="-122"/>
-                <a:cs typeface="Yu Gothic" pitchFamily="34" charset="-120"/>
-              </a:rPr>
-              <a:t>なりません。</a:t>
-            </a:r>
-            <a:endParaRPr lang="en-US" sz="1300" dirty="0"/>
-          </a:p>
-        </p:txBody>
-      </p:sp>
-      <p:sp>
-        <p:nvSpPr>
-          <p:cNvPr id="28" name="Shape 26"/>
-          <p:cNvSpPr/>
-          <p:nvPr/>
-        </p:nvSpPr>
-        <p:spPr>
-          <a:xfrm>
-            <a:off x="8138160" y="4526280"/>
-            <a:ext cx="3429000" cy="1691640"/>
-          </a:xfrm>
-          <a:prstGeom prst="roundRect">
-            <a:avLst>
-              <a:gd name="adj" fmla="val 4324"/>
-            </a:avLst>
-          </a:prstGeom>
-          <a:solidFill>
-            <a:srgbClr val="FFFFFF"/>
-          </a:solidFill>
-          <a:ln w="12700">
-            <a:solidFill>
-              <a:srgbClr val="A8CFC9"/>
-            </a:solidFill>
-            <a:prstDash val="solid"/>
-          </a:ln>
-        </p:spPr>
-      </p:sp>
-      <p:sp>
-        <p:nvSpPr>
-          <p:cNvPr id="29" name="Text 27"/>
-          <p:cNvSpPr/>
-          <p:nvPr/>
-        </p:nvSpPr>
-        <p:spPr>
-          <a:xfrm>
-            <a:off x="8366760" y="4654296"/>
-            <a:ext cx="2926080" cy="274320"/>
-          </a:xfrm>
-          <a:prstGeom prst="rect">
-            <a:avLst/>
-          </a:prstGeom>
-          <a:noFill/>
-          <a:ln/>
-        </p:spPr>
-        <p:txBody>
-          <a:bodyPr wrap="square" lIns="0" tIns="0" rIns="0" bIns="0" rtlCol="0" anchor="ctr"/>
-          <a:lstStyle/>
-          <a:p>
-            <a:pPr indent="0" marL="0">
-              <a:buNone/>
-            </a:pPr>
-            <a:r>
-              <a:rPr lang="en-US" sz="1200" b="1" dirty="0">
-                <a:solidFill>
-                  <a:srgbClr val="1F6F78"/>
-                </a:solidFill>
-                <a:latin typeface="Yu Gothic" pitchFamily="34" charset="0"/>
-                <a:ea typeface="Yu Gothic" pitchFamily="34" charset="-122"/>
-                <a:cs typeface="Yu Gothic" pitchFamily="34" charset="-120"/>
-              </a:rPr>
-              <a:t>このアプリでは</a:t>
-            </a:r>
-            <a:endParaRPr lang="en-US" sz="1200" dirty="0"/>
-          </a:p>
-        </p:txBody>
-      </p:sp>
-      <p:sp>
-        <p:nvSpPr>
-          <p:cNvPr id="30" name="Text 28"/>
-          <p:cNvSpPr/>
-          <p:nvPr/>
-        </p:nvSpPr>
-        <p:spPr>
-          <a:xfrm>
-            <a:off x="8366760" y="4946904"/>
-            <a:ext cx="3017520" cy="1188720"/>
-          </a:xfrm>
-          <a:prstGeom prst="rect">
-            <a:avLst/>
-          </a:prstGeom>
-          <a:noFill/>
-          <a:ln/>
-        </p:spPr>
-        <p:txBody>
-          <a:bodyPr wrap="square" lIns="0" tIns="0" rIns="0" bIns="0" rtlCol="0" anchor="ctr"/>
-          <a:lstStyle/>
-          <a:p>
-            <a:pPr indent="0" marL="0">
-              <a:lnSpc>
-                <a:spcPct val="125000"/>
-              </a:lnSpc>
-              <a:buNone/>
-            </a:pPr>
-            <a:r>
-              <a:rPr lang="en-US" sz="1300" dirty="0">
-                <a:solidFill>
-                  <a:srgbClr val="16211F"/>
-                </a:solidFill>
-                <a:latin typeface="Yu Gothic" pitchFamily="34" charset="0"/>
-                <a:ea typeface="Yu Gothic" pitchFamily="34" charset="-122"/>
-                <a:cs typeface="Yu Gothic" pitchFamily="34" charset="-120"/>
-              </a:rPr>
-              <a:t>過去7日間の任意の時点まで</a:t>
-            </a:r>
-            <a:endParaRPr lang="en-US" sz="1300" dirty="0"/>
-          </a:p>
-          <a:p>
-            <a:pPr indent="0" marL="0">
-              <a:lnSpc>
-                <a:spcPct val="125000"/>
-              </a:lnSpc>
-              <a:buNone/>
-            </a:pPr>
-            <a:r>
-              <a:rPr lang="en-US" sz="1300" dirty="0">
-                <a:solidFill>
-                  <a:srgbClr val="16211F"/>
-                </a:solidFill>
-                <a:latin typeface="Yu Gothic" pitchFamily="34" charset="0"/>
-                <a:ea typeface="Yu Gothic" pitchFamily="34" charset="-122"/>
-                <a:cs typeface="Yu Gothic" pitchFamily="34" charset="-120"/>
-              </a:rPr>
-              <a:t>巻き戻せます。データベース</a:t>
-            </a:r>
-            <a:endParaRPr lang="en-US" sz="1300" dirty="0"/>
-          </a:p>
-          <a:p>
-            <a:pPr indent="0" marL="0">
-              <a:lnSpc>
-                <a:spcPct val="125000"/>
-              </a:lnSpc>
-              <a:buNone/>
-            </a:pPr>
-            <a:r>
-              <a:rPr lang="en-US" sz="1300" dirty="0">
-                <a:solidFill>
-                  <a:srgbClr val="16211F"/>
-                </a:solidFill>
-                <a:latin typeface="Yu Gothic" pitchFamily="34" charset="0"/>
-                <a:ea typeface="Yu Gothic" pitchFamily="34" charset="-122"/>
-                <a:cs typeface="Yu Gothic" pitchFamily="34" charset="-120"/>
-              </a:rPr>
-              <a:t>自体の誤削除も、設定で</a:t>
-            </a:r>
-            <a:endParaRPr lang="en-US" sz="1300" dirty="0"/>
-          </a:p>
-          <a:p>
-            <a:pPr indent="0" marL="0">
-              <a:lnSpc>
-                <a:spcPct val="125000"/>
-              </a:lnSpc>
-              <a:buNone/>
-            </a:pPr>
-            <a:r>
-              <a:rPr lang="en-US" sz="1300" dirty="0">
-                <a:solidFill>
-                  <a:srgbClr val="16211F"/>
-                </a:solidFill>
-                <a:latin typeface="Yu Gothic" pitchFamily="34" charset="0"/>
-                <a:ea typeface="Yu Gothic" pitchFamily="34" charset="-122"/>
-                <a:cs typeface="Yu Gothic" pitchFamily="34" charset="-120"/>
-              </a:rPr>
-              <a:t>できないようにしています。</a:t>
-            </a:r>
-            <a:endParaRPr lang="en-US" sz="1300" dirty="0"/>
-          </a:p>
-        </p:txBody>
-      </p:sp>
-      <p:sp>
-        <p:nvSpPr>
-          <p:cNvPr id="31" name="Text 29"/>
-          <p:cNvSpPr/>
-          <p:nvPr/>
-        </p:nvSpPr>
-        <p:spPr>
-          <a:xfrm>
-            <a:off x="731520" y="6355080"/>
-            <a:ext cx="10698480" cy="365760"/>
-          </a:xfrm>
-          <a:prstGeom prst="rect">
-            <a:avLst/>
-          </a:prstGeom>
-          <a:noFill/>
-          <a:ln/>
-        </p:spPr>
-        <p:txBody>
-          <a:bodyPr wrap="square" lIns="0" tIns="0" rIns="0" bIns="0" rtlCol="0" anchor="ctr"/>
-          <a:lstStyle/>
-          <a:p>
-            <a:pPr indent="0" marL="0">
-              <a:buNone/>
-            </a:pPr>
-            <a:r>
-              <a:rPr lang="en-US" sz="1300" i="1" dirty="0">
-                <a:solidFill>
-                  <a:srgbClr val="5C6B68"/>
-                </a:solidFill>
-                <a:latin typeface="Yu Gothic" pitchFamily="34" charset="0"/>
-                <a:ea typeface="Yu Gothic" pitchFamily="34" charset="-122"/>
-                <a:cs typeface="Yu Gothic" pitchFamily="34" charset="-120"/>
-              </a:rPr>
-              <a:t>この3つは、紙のカルテで当たり前に成り立っていたことを、電子でも同じ水準にするための決まりです。</a:t>
-            </a:r>
-            <a:endParaRPr lang="en-US" sz="1300" dirty="0"/>
           </a:p>
         </p:txBody>
       </p:sp>
@@ -9010,7 +8923,7 @@
                 <a:ea typeface="Yu Gothic" pitchFamily="34" charset="-122"/>
                 <a:cs typeface="Yu Gothic" pitchFamily="34" charset="-120"/>
               </a:rPr>
-              <a:t>どこに置いて、なぜそこなのか</a:t>
+              <a:t>紙のカルテと同じ信頼を、データで担保する</a:t>
             </a:r>
             <a:endParaRPr lang="en-US" sz="3600" dirty="0"/>
           </a:p>
@@ -9049,7 +8962,7 @@
                 <a:ea typeface="Yu Gothic" pitchFamily="34" charset="-122"/>
                 <a:cs typeface="Yu Gothic" pitchFamily="34" charset="-120"/>
               </a:rPr>
-              <a:t>「記録します」「保存します」の中身を、保管先まで開きます</a:t>
+              <a:t>同じ表の「真正性・見読性・保存性」は、かみ砕くとこの3つです</a:t>
             </a:r>
             <a:endParaRPr lang="en-US" sz="1600" dirty="0"/>
           </a:p>
@@ -9057,1051 +8970,18 @@
       </p:sp>
       <p:sp>
         <p:nvSpPr>
-          <p:cNvPr id="4" name="Text 2"/>
-          <p:cNvSpPr/>
-          <p:nvPr/>
-        </p:nvSpPr>
-        <p:spPr>
-          <a:xfrm>
-            <a:off x="1005840" y="1783080"/>
-            <a:ext cx="2743200" cy="292608"/>
-          </a:xfrm>
-          <a:prstGeom prst="rect">
-            <a:avLst/>
-          </a:prstGeom>
-          <a:noFill/>
-          <a:ln/>
-        </p:spPr>
-        <p:txBody>
-          <a:bodyPr wrap="square" lIns="0" tIns="0" rIns="0" bIns="0" rtlCol="0" anchor="ctr"/>
-          <a:lstStyle/>
-          <a:p>
-            <a:pPr indent="0" marL="0">
-              <a:buNone/>
-            </a:pPr>
-            <a:r>
-              <a:rPr lang="en-US" sz="1300" b="1" dirty="0">
-                <a:solidFill>
-                  <a:srgbClr val="5C6B68"/>
-                </a:solidFill>
-                <a:latin typeface="Yu Gothic" pitchFamily="34" charset="0"/>
-                <a:ea typeface="Yu Gothic" pitchFamily="34" charset="-122"/>
-                <a:cs typeface="Yu Gothic" pitchFamily="34" charset="-120"/>
-              </a:rPr>
-              <a:t>何を</a:t>
-            </a:r>
-            <a:endParaRPr lang="en-US" sz="1300" dirty="0"/>
-          </a:p>
-        </p:txBody>
-      </p:sp>
-      <p:sp>
-        <p:nvSpPr>
-          <p:cNvPr id="5" name="Text 3"/>
-          <p:cNvSpPr/>
-          <p:nvPr/>
-        </p:nvSpPr>
-        <p:spPr>
-          <a:xfrm>
-            <a:off x="3931920" y="1783080"/>
-            <a:ext cx="3017520" cy="292608"/>
-          </a:xfrm>
-          <a:prstGeom prst="rect">
-            <a:avLst/>
-          </a:prstGeom>
-          <a:noFill/>
-          <a:ln/>
-        </p:spPr>
-        <p:txBody>
-          <a:bodyPr wrap="square" lIns="0" tIns="0" rIns="0" bIns="0" rtlCol="0" anchor="ctr"/>
-          <a:lstStyle/>
-          <a:p>
-            <a:pPr indent="0" marL="0">
-              <a:buNone/>
-            </a:pPr>
-            <a:r>
-              <a:rPr lang="en-US" sz="1300" b="1" dirty="0">
-                <a:solidFill>
-                  <a:srgbClr val="5C6B68"/>
-                </a:solidFill>
-                <a:latin typeface="Yu Gothic" pitchFamily="34" charset="0"/>
-                <a:ea typeface="Yu Gothic" pitchFamily="34" charset="-122"/>
-                <a:cs typeface="Yu Gothic" pitchFamily="34" charset="-120"/>
-              </a:rPr>
-              <a:t>どこに</a:t>
-            </a:r>
-            <a:endParaRPr lang="en-US" sz="1300" dirty="0"/>
-          </a:p>
-        </p:txBody>
-      </p:sp>
-      <p:sp>
-        <p:nvSpPr>
-          <p:cNvPr id="6" name="Text 4"/>
-          <p:cNvSpPr/>
-          <p:nvPr/>
-        </p:nvSpPr>
-        <p:spPr>
-          <a:xfrm>
-            <a:off x="7086600" y="1783080"/>
-            <a:ext cx="4617720" cy="292608"/>
-          </a:xfrm>
-          <a:prstGeom prst="rect">
-            <a:avLst/>
-          </a:prstGeom>
-          <a:noFill/>
-          <a:ln/>
-        </p:spPr>
-        <p:txBody>
-          <a:bodyPr wrap="square" lIns="0" tIns="0" rIns="0" bIns="0" rtlCol="0" anchor="ctr"/>
-          <a:lstStyle/>
-          <a:p>
-            <a:pPr indent="0" marL="0">
-              <a:buNone/>
-            </a:pPr>
-            <a:r>
-              <a:rPr lang="en-US" sz="1300" b="1" dirty="0">
-                <a:solidFill>
-                  <a:srgbClr val="5C6B68"/>
-                </a:solidFill>
-                <a:latin typeface="Yu Gothic" pitchFamily="34" charset="0"/>
-                <a:ea typeface="Yu Gothic" pitchFamily="34" charset="-122"/>
-                <a:cs typeface="Yu Gothic" pitchFamily="34" charset="-120"/>
-              </a:rPr>
-              <a:t>なぜ、そこなのか</a:t>
-            </a:r>
-            <a:endParaRPr lang="en-US" sz="1300" dirty="0"/>
-          </a:p>
-        </p:txBody>
-      </p:sp>
-      <p:sp>
-        <p:nvSpPr>
-          <p:cNvPr id="7" name="Shape 5"/>
-          <p:cNvSpPr/>
-          <p:nvPr/>
-        </p:nvSpPr>
-        <p:spPr>
-          <a:xfrm>
-            <a:off x="731520" y="2148840"/>
-            <a:ext cx="10698480" cy="658368"/>
+          <p:cNvPr id="4" name="Shape 2"/>
+          <p:cNvSpPr/>
+          <p:nvPr/>
+        </p:nvSpPr>
+        <p:spPr>
+          <a:xfrm>
+            <a:off x="731520" y="1828800"/>
+            <a:ext cx="3429000" cy="841248"/>
           </a:xfrm>
           <a:prstGeom prst="roundRect">
             <a:avLst>
-              <a:gd name="adj" fmla="val 11111"/>
-            </a:avLst>
-          </a:prstGeom>
-          <a:solidFill>
-            <a:srgbClr val="F1F6F5"/>
-          </a:solidFill>
-          <a:ln w="12700">
-            <a:solidFill>
-              <a:srgbClr val="DCE6E4"/>
-            </a:solidFill>
-            <a:prstDash val="solid"/>
-          </a:ln>
-        </p:spPr>
-      </p:sp>
-      <p:sp>
-        <p:nvSpPr>
-          <p:cNvPr id="8" name="Text 6"/>
-          <p:cNvSpPr/>
-          <p:nvPr/>
-        </p:nvSpPr>
-        <p:spPr>
-          <a:xfrm>
-            <a:off x="1005840" y="2240280"/>
-            <a:ext cx="2651760" cy="274320"/>
-          </a:xfrm>
-          <a:prstGeom prst="rect">
-            <a:avLst/>
-          </a:prstGeom>
-          <a:noFill/>
-          <a:ln/>
-        </p:spPr>
-        <p:txBody>
-          <a:bodyPr wrap="square" lIns="0" tIns="0" rIns="0" bIns="0" rtlCol="0" anchor="ctr"/>
-          <a:lstStyle/>
-          <a:p>
-            <a:pPr indent="0" marL="0">
-              <a:buNone/>
-            </a:pPr>
-            <a:r>
-              <a:rPr lang="en-US" sz="1500" b="1" dirty="0">
-                <a:solidFill>
-                  <a:srgbClr val="14504B"/>
-                </a:solidFill>
-                <a:latin typeface="Yu Gothic" pitchFamily="34" charset="0"/>
-                <a:ea typeface="Yu Gothic" pitchFamily="34" charset="-122"/>
-                <a:cs typeface="Yu Gothic" pitchFamily="34" charset="-120"/>
-              </a:rPr>
-              <a:t>入居者の記録</a:t>
-            </a:r>
-            <a:endParaRPr lang="en-US" sz="1500" dirty="0"/>
-          </a:p>
-        </p:txBody>
-      </p:sp>
-      <p:sp>
-        <p:nvSpPr>
-          <p:cNvPr id="9" name="Text 7"/>
-          <p:cNvSpPr/>
-          <p:nvPr/>
-        </p:nvSpPr>
-        <p:spPr>
-          <a:xfrm>
-            <a:off x="1005840" y="2514600"/>
-            <a:ext cx="2743200" cy="274320"/>
-          </a:xfrm>
-          <a:prstGeom prst="rect">
-            <a:avLst/>
-          </a:prstGeom>
-          <a:noFill/>
-          <a:ln/>
-        </p:spPr>
-        <p:txBody>
-          <a:bodyPr wrap="square" lIns="0" tIns="0" rIns="0" bIns="0" rtlCol="0" anchor="ctr"/>
-          <a:lstStyle/>
-          <a:p>
-            <a:pPr indent="0" marL="0">
-              <a:buNone/>
-            </a:pPr>
-            <a:r>
-              <a:rPr lang="en-US" sz="1100" dirty="0">
-                <a:solidFill>
-                  <a:srgbClr val="5C6B68"/>
-                </a:solidFill>
-                <a:latin typeface="Yu Gothic" pitchFamily="34" charset="0"/>
-                <a:ea typeface="Yu Gothic" pitchFamily="34" charset="-122"/>
-                <a:cs typeface="Yu Gothic" pitchFamily="34" charset="-120"/>
-              </a:rPr>
-              <a:t>服薬・バイタル・アレルギー・やり取り</a:t>
-            </a:r>
-            <a:endParaRPr lang="en-US" sz="1100" dirty="0"/>
-          </a:p>
-        </p:txBody>
-      </p:sp>
-      <p:sp>
-        <p:nvSpPr>
-          <p:cNvPr id="10" name="Text 8"/>
-          <p:cNvSpPr/>
-          <p:nvPr/>
-        </p:nvSpPr>
-        <p:spPr>
-          <a:xfrm>
-            <a:off x="3931920" y="2267712"/>
-            <a:ext cx="2926080" cy="548640"/>
-          </a:xfrm>
-          <a:prstGeom prst="rect">
-            <a:avLst/>
-          </a:prstGeom>
-          <a:noFill/>
-          <a:ln/>
-        </p:spPr>
-        <p:txBody>
-          <a:bodyPr wrap="square" lIns="0" tIns="0" rIns="0" bIns="0" rtlCol="0" anchor="ctr"/>
-          <a:lstStyle/>
-          <a:p>
-            <a:pPr indent="0" marL="0">
-              <a:lnSpc>
-                <a:spcPct val="115000"/>
-              </a:lnSpc>
-              <a:buNone/>
-            </a:pPr>
-            <a:r>
-              <a:rPr lang="en-US" sz="1200" b="1" dirty="0">
-                <a:solidFill>
-                  <a:srgbClr val="16211F"/>
-                </a:solidFill>
-                <a:latin typeface="Yu Gothic" pitchFamily="34" charset="0"/>
-                <a:ea typeface="Yu Gothic" pitchFamily="34" charset="-122"/>
-                <a:cs typeface="Yu Gothic" pitchFamily="34" charset="-120"/>
-              </a:rPr>
-              <a:t>Cloud Firestore</a:t>
-            </a:r>
-            <a:endParaRPr lang="en-US" sz="1200" dirty="0"/>
-          </a:p>
-          <a:p>
-            <a:pPr indent="0" marL="0">
-              <a:lnSpc>
-                <a:spcPct val="115000"/>
-              </a:lnSpc>
-              <a:buNone/>
-            </a:pPr>
-            <a:r>
-              <a:rPr lang="en-US" sz="1200" b="1" dirty="0">
-                <a:solidFill>
-                  <a:srgbClr val="16211F"/>
-                </a:solidFill>
-                <a:latin typeface="Yu Gothic" pitchFamily="34" charset="0"/>
-                <a:ea typeface="Yu Gothic" pitchFamily="34" charset="-122"/>
-                <a:cs typeface="Yu Gothic" pitchFamily="34" charset="-120"/>
-              </a:rPr>
-              <a:t>東京（asia-northeast1）</a:t>
-            </a:r>
-            <a:endParaRPr lang="en-US" sz="1200" dirty="0"/>
-          </a:p>
-        </p:txBody>
-      </p:sp>
-      <p:sp>
-        <p:nvSpPr>
-          <p:cNvPr id="11" name="Text 9"/>
-          <p:cNvSpPr/>
-          <p:nvPr/>
-        </p:nvSpPr>
-        <p:spPr>
-          <a:xfrm>
-            <a:off x="7086600" y="2267712"/>
-            <a:ext cx="4480560" cy="548640"/>
-          </a:xfrm>
-          <a:prstGeom prst="rect">
-            <a:avLst/>
-          </a:prstGeom>
-          <a:noFill/>
-          <a:ln/>
-        </p:spPr>
-        <p:txBody>
-          <a:bodyPr wrap="square" lIns="0" tIns="0" rIns="0" bIns="0" rtlCol="0" anchor="ctr"/>
-          <a:lstStyle/>
-          <a:p>
-            <a:pPr indent="0" marL="0">
-              <a:lnSpc>
-                <a:spcPct val="115000"/>
-              </a:lnSpc>
-              <a:buNone/>
-            </a:pPr>
-            <a:r>
-              <a:rPr lang="en-US" sz="1200" dirty="0">
-                <a:solidFill>
-                  <a:srgbClr val="16211F"/>
-                </a:solidFill>
-                <a:latin typeface="Yu Gothic" pitchFamily="34" charset="0"/>
-                <a:ea typeface="Yu Gothic" pitchFamily="34" charset="-122"/>
-                <a:cs typeface="Yu Gothic" pitchFamily="34" charset="-120"/>
-              </a:rPr>
-              <a:t>国内法の執行が及ぶ範囲に置くことが要求事項です。</a:t>
-            </a:r>
-            <a:endParaRPr lang="en-US" sz="1200" dirty="0"/>
-          </a:p>
-          <a:p>
-            <a:pPr indent="0" marL="0">
-              <a:lnSpc>
-                <a:spcPct val="115000"/>
-              </a:lnSpc>
-              <a:buNone/>
-            </a:pPr>
-            <a:r>
-              <a:rPr lang="en-US" sz="1200" dirty="0">
-                <a:solidFill>
-                  <a:srgbClr val="16211F"/>
-                </a:solidFill>
-                <a:latin typeface="Yu Gothic" pitchFamily="34" charset="0"/>
-                <a:ea typeface="Yu Gothic" pitchFamily="34" charset="-122"/>
-                <a:cs typeface="Yu Gothic" pitchFamily="34" charset="-120"/>
-              </a:rPr>
-              <a:t>海外だと、いざというとき日本の法律が届きません。</a:t>
-            </a:r>
-            <a:endParaRPr lang="en-US" sz="1200" dirty="0"/>
-          </a:p>
-        </p:txBody>
-      </p:sp>
-      <p:sp>
-        <p:nvSpPr>
-          <p:cNvPr id="12" name="Shape 10"/>
-          <p:cNvSpPr/>
-          <p:nvPr/>
-        </p:nvSpPr>
-        <p:spPr>
-          <a:xfrm>
-            <a:off x="731520" y="2898648"/>
-            <a:ext cx="10698480" cy="658368"/>
-          </a:xfrm>
-          <a:prstGeom prst="roundRect">
-            <a:avLst>
-              <a:gd name="adj" fmla="val 11111"/>
-            </a:avLst>
-          </a:prstGeom>
-          <a:solidFill>
-            <a:srgbClr val="FFFFFF"/>
-          </a:solidFill>
-          <a:ln w="12700">
-            <a:solidFill>
-              <a:srgbClr val="DCE6E4"/>
-            </a:solidFill>
-            <a:prstDash val="solid"/>
-          </a:ln>
-        </p:spPr>
-      </p:sp>
-      <p:sp>
-        <p:nvSpPr>
-          <p:cNvPr id="13" name="Text 11"/>
-          <p:cNvSpPr/>
-          <p:nvPr/>
-        </p:nvSpPr>
-        <p:spPr>
-          <a:xfrm>
-            <a:off x="1005840" y="2990088"/>
-            <a:ext cx="2651760" cy="274320"/>
-          </a:xfrm>
-          <a:prstGeom prst="rect">
-            <a:avLst/>
-          </a:prstGeom>
-          <a:noFill/>
-          <a:ln/>
-        </p:spPr>
-        <p:txBody>
-          <a:bodyPr wrap="square" lIns="0" tIns="0" rIns="0" bIns="0" rtlCol="0" anchor="ctr"/>
-          <a:lstStyle/>
-          <a:p>
-            <a:pPr indent="0" marL="0">
-              <a:buNone/>
-            </a:pPr>
-            <a:r>
-              <a:rPr lang="en-US" sz="1500" b="1" dirty="0">
-                <a:solidFill>
-                  <a:srgbClr val="14504B"/>
-                </a:solidFill>
-                <a:latin typeface="Yu Gothic" pitchFamily="34" charset="0"/>
-                <a:ea typeface="Yu Gothic" pitchFamily="34" charset="-122"/>
-                <a:cs typeface="Yu Gothic" pitchFamily="34" charset="-120"/>
-              </a:rPr>
-              <a:t>監査ログ</a:t>
-            </a:r>
-            <a:endParaRPr lang="en-US" sz="1500" dirty="0"/>
-          </a:p>
-        </p:txBody>
-      </p:sp>
-      <p:sp>
-        <p:nvSpPr>
-          <p:cNvPr id="14" name="Text 12"/>
-          <p:cNvSpPr/>
-          <p:nvPr/>
-        </p:nvSpPr>
-        <p:spPr>
-          <a:xfrm>
-            <a:off x="1005840" y="3264408"/>
-            <a:ext cx="2743200" cy="274320"/>
-          </a:xfrm>
-          <a:prstGeom prst="rect">
-            <a:avLst/>
-          </a:prstGeom>
-          <a:noFill/>
-          <a:ln/>
-        </p:spPr>
-        <p:txBody>
-          <a:bodyPr wrap="square" lIns="0" tIns="0" rIns="0" bIns="0" rtlCol="0" anchor="ctr"/>
-          <a:lstStyle/>
-          <a:p>
-            <a:pPr indent="0" marL="0">
-              <a:buNone/>
-            </a:pPr>
-            <a:r>
-              <a:rPr lang="en-US" sz="1100" dirty="0">
-                <a:solidFill>
-                  <a:srgbClr val="5C6B68"/>
-                </a:solidFill>
-                <a:latin typeface="Yu Gothic" pitchFamily="34" charset="0"/>
-                <a:ea typeface="Yu Gothic" pitchFamily="34" charset="-122"/>
-                <a:cs typeface="Yu Gothic" pitchFamily="34" charset="-120"/>
-              </a:rPr>
-              <a:t>誰が・いつ・何を見たか</a:t>
-            </a:r>
-            <a:endParaRPr lang="en-US" sz="1100" dirty="0"/>
-          </a:p>
-        </p:txBody>
-      </p:sp>
-      <p:sp>
-        <p:nvSpPr>
-          <p:cNvPr id="15" name="Text 13"/>
-          <p:cNvSpPr/>
-          <p:nvPr/>
-        </p:nvSpPr>
-        <p:spPr>
-          <a:xfrm>
-            <a:off x="3931920" y="3017520"/>
-            <a:ext cx="2926080" cy="548640"/>
-          </a:xfrm>
-          <a:prstGeom prst="rect">
-            <a:avLst/>
-          </a:prstGeom>
-          <a:noFill/>
-          <a:ln/>
-        </p:spPr>
-        <p:txBody>
-          <a:bodyPr wrap="square" lIns="0" tIns="0" rIns="0" bIns="0" rtlCol="0" anchor="ctr"/>
-          <a:lstStyle/>
-          <a:p>
-            <a:pPr indent="0" marL="0">
-              <a:lnSpc>
-                <a:spcPct val="115000"/>
-              </a:lnSpc>
-              <a:buNone/>
-            </a:pPr>
-            <a:r>
-              <a:rPr lang="en-US" sz="1200" b="1" dirty="0">
-                <a:solidFill>
-                  <a:srgbClr val="16211F"/>
-                </a:solidFill>
-                <a:latin typeface="Yu Gothic" pitchFamily="34" charset="0"/>
-                <a:ea typeface="Yu Gothic" pitchFamily="34" charset="-122"/>
-                <a:cs typeface="Yu Gothic" pitchFamily="34" charset="-120"/>
-              </a:rPr>
-              <a:t>同じ東京リージョン</a:t>
-            </a:r>
-            <a:endParaRPr lang="en-US" sz="1200" dirty="0"/>
-          </a:p>
-          <a:p>
-            <a:pPr indent="0" marL="0">
-              <a:lnSpc>
-                <a:spcPct val="115000"/>
-              </a:lnSpc>
-              <a:buNone/>
-            </a:pPr>
-            <a:r>
-              <a:rPr lang="en-US" sz="1200" b="1" dirty="0">
-                <a:solidFill>
-                  <a:srgbClr val="16211F"/>
-                </a:solidFill>
-                <a:latin typeface="Yu Gothic" pitchFamily="34" charset="0"/>
-                <a:ea typeface="Yu Gothic" pitchFamily="34" charset="-122"/>
-                <a:cs typeface="Yu Gothic" pitchFamily="34" charset="-120"/>
-              </a:rPr>
-              <a:t>（専用の領域）</a:t>
-            </a:r>
-            <a:endParaRPr lang="en-US" sz="1200" dirty="0"/>
-          </a:p>
-        </p:txBody>
-      </p:sp>
-      <p:sp>
-        <p:nvSpPr>
-          <p:cNvPr id="16" name="Text 14"/>
-          <p:cNvSpPr/>
-          <p:nvPr/>
-        </p:nvSpPr>
-        <p:spPr>
-          <a:xfrm>
-            <a:off x="7086600" y="3017520"/>
-            <a:ext cx="4480560" cy="548640"/>
-          </a:xfrm>
-          <a:prstGeom prst="rect">
-            <a:avLst/>
-          </a:prstGeom>
-          <a:noFill/>
-          <a:ln/>
-        </p:spPr>
-        <p:txBody>
-          <a:bodyPr wrap="square" lIns="0" tIns="0" rIns="0" bIns="0" rtlCol="0" anchor="ctr"/>
-          <a:lstStyle/>
-          <a:p>
-            <a:pPr indent="0" marL="0">
-              <a:lnSpc>
-                <a:spcPct val="115000"/>
-              </a:lnSpc>
-              <a:buNone/>
-            </a:pPr>
-            <a:r>
-              <a:rPr lang="en-US" sz="1200" dirty="0">
-                <a:solidFill>
-                  <a:srgbClr val="16211F"/>
-                </a:solidFill>
-                <a:latin typeface="Yu Gothic" pitchFamily="34" charset="0"/>
-                <a:ea typeface="Yu Gothic" pitchFamily="34" charset="-122"/>
-                <a:cs typeface="Yu Gothic" pitchFamily="34" charset="-120"/>
-              </a:rPr>
-              <a:t>書き足すことしかできない設定にしています。</a:t>
-            </a:r>
-            <a:endParaRPr lang="en-US" sz="1200" dirty="0"/>
-          </a:p>
-          <a:p>
-            <a:pPr indent="0" marL="0">
-              <a:lnSpc>
-                <a:spcPct val="115000"/>
-              </a:lnSpc>
-              <a:buNone/>
-            </a:pPr>
-            <a:r>
-              <a:rPr lang="en-US" sz="1200" dirty="0">
-                <a:solidFill>
-                  <a:srgbClr val="16211F"/>
-                </a:solidFill>
-                <a:latin typeface="Yu Gothic" pitchFamily="34" charset="0"/>
-                <a:ea typeface="Yu Gothic" pitchFamily="34" charset="-122"/>
-                <a:cs typeface="Yu Gothic" pitchFamily="34" charset="-120"/>
-              </a:rPr>
-              <a:t>運営者の手でも、後から書き換え・削除ができません。</a:t>
-            </a:r>
-            <a:endParaRPr lang="en-US" sz="1200" dirty="0"/>
-          </a:p>
-        </p:txBody>
-      </p:sp>
-      <p:sp>
-        <p:nvSpPr>
-          <p:cNvPr id="17" name="Shape 15"/>
-          <p:cNvSpPr/>
-          <p:nvPr/>
-        </p:nvSpPr>
-        <p:spPr>
-          <a:xfrm>
-            <a:off x="731520" y="3648456"/>
-            <a:ext cx="10698480" cy="658368"/>
-          </a:xfrm>
-          <a:prstGeom prst="roundRect">
-            <a:avLst>
-              <a:gd name="adj" fmla="val 11111"/>
-            </a:avLst>
-          </a:prstGeom>
-          <a:solidFill>
-            <a:srgbClr val="F1F6F5"/>
-          </a:solidFill>
-          <a:ln w="12700">
-            <a:solidFill>
-              <a:srgbClr val="DCE6E4"/>
-            </a:solidFill>
-            <a:prstDash val="solid"/>
-          </a:ln>
-        </p:spPr>
-      </p:sp>
-      <p:sp>
-        <p:nvSpPr>
-          <p:cNvPr id="18" name="Text 16"/>
-          <p:cNvSpPr/>
-          <p:nvPr/>
-        </p:nvSpPr>
-        <p:spPr>
-          <a:xfrm>
-            <a:off x="1005840" y="3739896"/>
-            <a:ext cx="2651760" cy="274320"/>
-          </a:xfrm>
-          <a:prstGeom prst="rect">
-            <a:avLst/>
-          </a:prstGeom>
-          <a:noFill/>
-          <a:ln/>
-        </p:spPr>
-        <p:txBody>
-          <a:bodyPr wrap="square" lIns="0" tIns="0" rIns="0" bIns="0" rtlCol="0" anchor="ctr"/>
-          <a:lstStyle/>
-          <a:p>
-            <a:pPr indent="0" marL="0">
-              <a:buNone/>
-            </a:pPr>
-            <a:r>
-              <a:rPr lang="en-US" sz="1500" b="1" dirty="0">
-                <a:solidFill>
-                  <a:srgbClr val="14504B"/>
-                </a:solidFill>
-                <a:latin typeface="Yu Gothic" pitchFamily="34" charset="0"/>
-                <a:ea typeface="Yu Gothic" pitchFamily="34" charset="-122"/>
-                <a:cs typeface="Yu Gothic" pitchFamily="34" charset="-120"/>
-              </a:rPr>
-              <a:t>アプリの画面</a:t>
-            </a:r>
-            <a:endParaRPr lang="en-US" sz="1500" dirty="0"/>
-          </a:p>
-        </p:txBody>
-      </p:sp>
-      <p:sp>
-        <p:nvSpPr>
-          <p:cNvPr id="19" name="Text 17"/>
-          <p:cNvSpPr/>
-          <p:nvPr/>
-        </p:nvSpPr>
-        <p:spPr>
-          <a:xfrm>
-            <a:off x="1005840" y="4014216"/>
-            <a:ext cx="2743200" cy="274320"/>
-          </a:xfrm>
-          <a:prstGeom prst="rect">
-            <a:avLst/>
-          </a:prstGeom>
-          <a:noFill/>
-          <a:ln/>
-        </p:spPr>
-        <p:txBody>
-          <a:bodyPr wrap="square" lIns="0" tIns="0" rIns="0" bIns="0" rtlCol="0" anchor="ctr"/>
-          <a:lstStyle/>
-          <a:p>
-            <a:pPr indent="0" marL="0">
-              <a:buNone/>
-            </a:pPr>
-            <a:r>
-              <a:rPr lang="en-US" sz="1100" dirty="0">
-                <a:solidFill>
-                  <a:srgbClr val="5C6B68"/>
-                </a:solidFill>
-                <a:latin typeface="Yu Gothic" pitchFamily="34" charset="0"/>
-                <a:ea typeface="Yu Gothic" pitchFamily="34" charset="-122"/>
-                <a:cs typeface="Yu Gothic" pitchFamily="34" charset="-120"/>
-              </a:rPr>
-              <a:t>ブラウザに配信される本体</a:t>
-            </a:r>
-            <a:endParaRPr lang="en-US" sz="1100" dirty="0"/>
-          </a:p>
-        </p:txBody>
-      </p:sp>
-      <p:sp>
-        <p:nvSpPr>
-          <p:cNvPr id="20" name="Text 18"/>
-          <p:cNvSpPr/>
-          <p:nvPr/>
-        </p:nvSpPr>
-        <p:spPr>
-          <a:xfrm>
-            <a:off x="3931920" y="3767328"/>
-            <a:ext cx="2926080" cy="548640"/>
-          </a:xfrm>
-          <a:prstGeom prst="rect">
-            <a:avLst/>
-          </a:prstGeom>
-          <a:noFill/>
-          <a:ln/>
-        </p:spPr>
-        <p:txBody>
-          <a:bodyPr wrap="square" lIns="0" tIns="0" rIns="0" bIns="0" rtlCol="0" anchor="ctr"/>
-          <a:lstStyle/>
-          <a:p>
-            <a:pPr indent="0" marL="0">
-              <a:lnSpc>
-                <a:spcPct val="115000"/>
-              </a:lnSpc>
-              <a:buNone/>
-            </a:pPr>
-            <a:r>
-              <a:rPr lang="en-US" sz="1200" b="1" dirty="0">
-                <a:solidFill>
-                  <a:srgbClr val="16211F"/>
-                </a:solidFill>
-                <a:latin typeface="Yu Gothic" pitchFamily="34" charset="0"/>
-                <a:ea typeface="Yu Gothic" pitchFamily="34" charset="-122"/>
-                <a:cs typeface="Yu Gothic" pitchFamily="34" charset="-120"/>
-              </a:rPr>
-              <a:t>Firebase Hosting</a:t>
-            </a:r>
-            <a:endParaRPr lang="en-US" sz="1200" dirty="0"/>
-          </a:p>
-          <a:p>
-            <a:pPr indent="0" marL="0">
-              <a:lnSpc>
-                <a:spcPct val="115000"/>
-              </a:lnSpc>
-              <a:buNone/>
-            </a:pPr>
-            <a:r>
-              <a:rPr lang="en-US" sz="1200" b="1" dirty="0">
-                <a:solidFill>
-                  <a:srgbClr val="16211F"/>
-                </a:solidFill>
-                <a:latin typeface="Yu Gothic" pitchFamily="34" charset="0"/>
-                <a:ea typeface="Yu Gothic" pitchFamily="34" charset="-122"/>
-                <a:cs typeface="Yu Gothic" pitchFamily="34" charset="-120"/>
-              </a:rPr>
-              <a:t>全通信を HTTPS に強制</a:t>
-            </a:r>
-            <a:endParaRPr lang="en-US" sz="1200" dirty="0"/>
-          </a:p>
-        </p:txBody>
-      </p:sp>
-      <p:sp>
-        <p:nvSpPr>
-          <p:cNvPr id="21" name="Text 19"/>
-          <p:cNvSpPr/>
-          <p:nvPr/>
-        </p:nvSpPr>
-        <p:spPr>
-          <a:xfrm>
-            <a:off x="7086600" y="3767328"/>
-            <a:ext cx="4480560" cy="548640"/>
-          </a:xfrm>
-          <a:prstGeom prst="rect">
-            <a:avLst/>
-          </a:prstGeom>
-          <a:noFill/>
-          <a:ln/>
-        </p:spPr>
-        <p:txBody>
-          <a:bodyPr wrap="square" lIns="0" tIns="0" rIns="0" bIns="0" rtlCol="0" anchor="ctr"/>
-          <a:lstStyle/>
-          <a:p>
-            <a:pPr indent="0" marL="0">
-              <a:lnSpc>
-                <a:spcPct val="115000"/>
-              </a:lnSpc>
-              <a:buNone/>
-            </a:pPr>
-            <a:r>
-              <a:rPr lang="en-US" sz="1200" dirty="0">
-                <a:solidFill>
-                  <a:srgbClr val="16211F"/>
-                </a:solidFill>
-                <a:latin typeface="Yu Gothic" pitchFamily="34" charset="0"/>
-                <a:ea typeface="Yu Gothic" pitchFamily="34" charset="-122"/>
-                <a:cs typeface="Yu Gothic" pitchFamily="34" charset="-120"/>
-              </a:rPr>
-              <a:t>施設の端末と保管先のあいだを暗号化します。</a:t>
-            </a:r>
-            <a:endParaRPr lang="en-US" sz="1200" dirty="0"/>
-          </a:p>
-          <a:p>
-            <a:pPr indent="0" marL="0">
-              <a:lnSpc>
-                <a:spcPct val="115000"/>
-              </a:lnSpc>
-              <a:buNone/>
-            </a:pPr>
-            <a:r>
-              <a:rPr lang="en-US" sz="1200" dirty="0">
-                <a:solidFill>
-                  <a:srgbClr val="16211F"/>
-                </a:solidFill>
-                <a:latin typeface="Yu Gothic" pitchFamily="34" charset="0"/>
-                <a:ea typeface="Yu Gothic" pitchFamily="34" charset="-122"/>
-                <a:cs typeface="Yu Gothic" pitchFamily="34" charset="-120"/>
-              </a:rPr>
-              <a:t>途中の経路で中身を読まれることはありません。</a:t>
-            </a:r>
-            <a:endParaRPr lang="en-US" sz="1200" dirty="0"/>
-          </a:p>
-        </p:txBody>
-      </p:sp>
-      <p:sp>
-        <p:nvSpPr>
-          <p:cNvPr id="22" name="Shape 20"/>
-          <p:cNvSpPr/>
-          <p:nvPr/>
-        </p:nvSpPr>
-        <p:spPr>
-          <a:xfrm>
-            <a:off x="731520" y="4398264"/>
-            <a:ext cx="10698480" cy="658368"/>
-          </a:xfrm>
-          <a:prstGeom prst="roundRect">
-            <a:avLst>
-              <a:gd name="adj" fmla="val 11111"/>
-            </a:avLst>
-          </a:prstGeom>
-          <a:solidFill>
-            <a:srgbClr val="FFFFFF"/>
-          </a:solidFill>
-          <a:ln w="12700">
-            <a:solidFill>
-              <a:srgbClr val="DCE6E4"/>
-            </a:solidFill>
-            <a:prstDash val="solid"/>
-          </a:ln>
-        </p:spPr>
-      </p:sp>
-      <p:sp>
-        <p:nvSpPr>
-          <p:cNvPr id="23" name="Text 21"/>
-          <p:cNvSpPr/>
-          <p:nvPr/>
-        </p:nvSpPr>
-        <p:spPr>
-          <a:xfrm>
-            <a:off x="1005840" y="4489704"/>
-            <a:ext cx="2651760" cy="274320"/>
-          </a:xfrm>
-          <a:prstGeom prst="rect">
-            <a:avLst/>
-          </a:prstGeom>
-          <a:noFill/>
-          <a:ln/>
-        </p:spPr>
-        <p:txBody>
-          <a:bodyPr wrap="square" lIns="0" tIns="0" rIns="0" bIns="0" rtlCol="0" anchor="ctr"/>
-          <a:lstStyle/>
-          <a:p>
-            <a:pPr indent="0" marL="0">
-              <a:buNone/>
-            </a:pPr>
-            <a:r>
-              <a:rPr lang="en-US" sz="1500" b="1" dirty="0">
-                <a:solidFill>
-                  <a:srgbClr val="14504B"/>
-                </a:solidFill>
-                <a:latin typeface="Yu Gothic" pitchFamily="34" charset="0"/>
-                <a:ea typeface="Yu Gothic" pitchFamily="34" charset="-122"/>
-                <a:cs typeface="Yu Gothic" pitchFamily="34" charset="-120"/>
-              </a:rPr>
-              <a:t>AIに送る内容</a:t>
-            </a:r>
-            <a:endParaRPr lang="en-US" sz="1500" dirty="0"/>
-          </a:p>
-        </p:txBody>
-      </p:sp>
-      <p:sp>
-        <p:nvSpPr>
-          <p:cNvPr id="24" name="Text 22"/>
-          <p:cNvSpPr/>
-          <p:nvPr/>
-        </p:nvSpPr>
-        <p:spPr>
-          <a:xfrm>
-            <a:off x="1005840" y="4764024"/>
-            <a:ext cx="2743200" cy="274320"/>
-          </a:xfrm>
-          <a:prstGeom prst="rect">
-            <a:avLst/>
-          </a:prstGeom>
-          <a:noFill/>
-          <a:ln/>
-        </p:spPr>
-        <p:txBody>
-          <a:bodyPr wrap="square" lIns="0" tIns="0" rIns="0" bIns="0" rtlCol="0" anchor="ctr"/>
-          <a:lstStyle/>
-          <a:p>
-            <a:pPr indent="0" marL="0">
-              <a:buNone/>
-            </a:pPr>
-            <a:r>
-              <a:rPr lang="en-US" sz="1100" dirty="0">
-                <a:solidFill>
-                  <a:srgbClr val="5C6B68"/>
-                </a:solidFill>
-                <a:latin typeface="Yu Gothic" pitchFamily="34" charset="0"/>
-                <a:ea typeface="Yu Gothic" pitchFamily="34" charset="-122"/>
-                <a:cs typeface="Yu Gothic" pitchFamily="34" charset="-120"/>
-              </a:rPr>
-              <a:t>説明文を組み立てる分だけ</a:t>
-            </a:r>
-            <a:endParaRPr lang="en-US" sz="1100" dirty="0"/>
-          </a:p>
-        </p:txBody>
-      </p:sp>
-      <p:sp>
-        <p:nvSpPr>
-          <p:cNvPr id="25" name="Text 23"/>
-          <p:cNvSpPr/>
-          <p:nvPr/>
-        </p:nvSpPr>
-        <p:spPr>
-          <a:xfrm>
-            <a:off x="3931920" y="4517136"/>
-            <a:ext cx="2926080" cy="548640"/>
-          </a:xfrm>
-          <a:prstGeom prst="rect">
-            <a:avLst/>
-          </a:prstGeom>
-          <a:noFill/>
-          <a:ln/>
-        </p:spPr>
-        <p:txBody>
-          <a:bodyPr wrap="square" lIns="0" tIns="0" rIns="0" bIns="0" rtlCol="0" anchor="ctr"/>
-          <a:lstStyle/>
-          <a:p>
-            <a:pPr indent="0" marL="0">
-              <a:lnSpc>
-                <a:spcPct val="115000"/>
-              </a:lnSpc>
-              <a:buNone/>
-            </a:pPr>
-            <a:r>
-              <a:rPr lang="en-US" sz="1200" b="1" dirty="0">
-                <a:solidFill>
-                  <a:srgbClr val="16211F"/>
-                </a:solidFill>
-                <a:latin typeface="Yu Gothic" pitchFamily="34" charset="0"/>
-                <a:ea typeface="Yu Gothic" pitchFamily="34" charset="-122"/>
-                <a:cs typeface="Yu Gothic" pitchFamily="34" charset="-120"/>
-              </a:rPr>
-              <a:t>自社のプロキシ経由</a:t>
-            </a:r>
-            <a:endParaRPr lang="en-US" sz="1200" dirty="0"/>
-          </a:p>
-          <a:p>
-            <a:pPr indent="0" marL="0">
-              <a:lnSpc>
-                <a:spcPct val="115000"/>
-              </a:lnSpc>
-              <a:buNone/>
-            </a:pPr>
-            <a:r>
-              <a:rPr lang="en-US" sz="1200" b="1" dirty="0">
-                <a:solidFill>
-                  <a:srgbClr val="16211F"/>
-                </a:solidFill>
-                <a:latin typeface="Yu Gothic" pitchFamily="34" charset="0"/>
-                <a:ea typeface="Yu Gothic" pitchFamily="34" charset="-122"/>
-                <a:cs typeface="Yu Gothic" pitchFamily="34" charset="-120"/>
-              </a:rPr>
-              <a:t>Cloud Run 東京</a:t>
-            </a:r>
-            <a:endParaRPr lang="en-US" sz="1200" dirty="0"/>
-          </a:p>
-        </p:txBody>
-      </p:sp>
-      <p:sp>
-        <p:nvSpPr>
-          <p:cNvPr id="26" name="Text 24"/>
-          <p:cNvSpPr/>
-          <p:nvPr/>
-        </p:nvSpPr>
-        <p:spPr>
-          <a:xfrm>
-            <a:off x="7086600" y="4517136"/>
-            <a:ext cx="4480560" cy="548640"/>
-          </a:xfrm>
-          <a:prstGeom prst="rect">
-            <a:avLst/>
-          </a:prstGeom>
-          <a:noFill/>
-          <a:ln/>
-        </p:spPr>
-        <p:txBody>
-          <a:bodyPr wrap="square" lIns="0" tIns="0" rIns="0" bIns="0" rtlCol="0" anchor="ctr"/>
-          <a:lstStyle/>
-          <a:p>
-            <a:pPr indent="0" marL="0">
-              <a:lnSpc>
-                <a:spcPct val="115000"/>
-              </a:lnSpc>
-              <a:buNone/>
-            </a:pPr>
-            <a:r>
-              <a:rPr lang="en-US" sz="1200" dirty="0">
-                <a:solidFill>
-                  <a:srgbClr val="16211F"/>
-                </a:solidFill>
-                <a:latin typeface="Yu Gothic" pitchFamily="34" charset="0"/>
-                <a:ea typeface="Yu Gothic" pitchFamily="34" charset="-122"/>
-                <a:cs typeface="Yu Gothic" pitchFamily="34" charset="-120"/>
-              </a:rPr>
-              <a:t>氏名・生年月日・居室番号は送りません。送るのは症状と</a:t>
-            </a:r>
-            <a:endParaRPr lang="en-US" sz="1200" dirty="0"/>
-          </a:p>
-          <a:p>
-            <a:pPr indent="0" marL="0">
-              <a:lnSpc>
-                <a:spcPct val="115000"/>
-              </a:lnSpc>
-              <a:buNone/>
-            </a:pPr>
-            <a:r>
-              <a:rPr lang="en-US" sz="1200" dirty="0">
-                <a:solidFill>
-                  <a:srgbClr val="16211F"/>
-                </a:solidFill>
-                <a:latin typeface="Yu Gothic" pitchFamily="34" charset="0"/>
-                <a:ea typeface="Yu Gothic" pitchFamily="34" charset="-122"/>
-                <a:cs typeface="Yu Gothic" pitchFamily="34" charset="-120"/>
-              </a:rPr>
-              <a:t>薬剤名だけです。判定自体はAIではなくルールが決めます。</a:t>
-            </a:r>
-            <a:endParaRPr lang="en-US" sz="1200" dirty="0"/>
-          </a:p>
-        </p:txBody>
-      </p:sp>
-      <p:sp>
-        <p:nvSpPr>
-          <p:cNvPr id="27" name="Shape 25"/>
-          <p:cNvSpPr/>
-          <p:nvPr/>
-        </p:nvSpPr>
-        <p:spPr>
-          <a:xfrm>
-            <a:off x="731520" y="5193792"/>
-            <a:ext cx="10698480" cy="1005840"/>
-          </a:xfrm>
-          <a:prstGeom prst="roundRect">
-            <a:avLst>
-              <a:gd name="adj" fmla="val 7273"/>
+              <a:gd name="adj" fmla="val 8696"/>
             </a:avLst>
           </a:prstGeom>
           <a:solidFill>
@@ -10117,30 +8997,30 @@
       </p:sp>
       <p:sp>
         <p:nvSpPr>
-          <p:cNvPr id="28" name="Text 26"/>
-          <p:cNvSpPr/>
-          <p:nvPr/>
-        </p:nvSpPr>
-        <p:spPr>
-          <a:xfrm>
-            <a:off x="1051560" y="5303520"/>
-            <a:ext cx="2011680" cy="292608"/>
-          </a:xfrm>
-          <a:prstGeom prst="rect">
-            <a:avLst/>
-          </a:prstGeom>
-          <a:noFill/>
-          <a:ln/>
-        </p:spPr>
-        <p:txBody>
-          <a:bodyPr wrap="square" lIns="0" tIns="0" rIns="0" bIns="0" rtlCol="0" anchor="ctr"/>
-          <a:lstStyle/>
-          <a:p>
-            <a:pPr indent="0" marL="0">
-              <a:buNone/>
-            </a:pPr>
-            <a:r>
-              <a:rPr lang="en-US" sz="1300" b="1" dirty="0">
+          <p:cNvPr id="5" name="Text 3"/>
+          <p:cNvSpPr/>
+          <p:nvPr/>
+        </p:nvSpPr>
+        <p:spPr>
+          <a:xfrm>
+            <a:off x="960120" y="1920240"/>
+            <a:ext cx="2926080" cy="329184"/>
+          </a:xfrm>
+          <a:prstGeom prst="rect">
+            <a:avLst/>
+          </a:prstGeom>
+          <a:noFill/>
+          <a:ln/>
+        </p:spPr>
+        <p:txBody>
+          <a:bodyPr wrap="square" lIns="0" tIns="0" rIns="0" bIns="0" rtlCol="0" anchor="ctr"/>
+          <a:lstStyle/>
+          <a:p>
+            <a:pPr indent="0" marL="0">
+              <a:buNone/>
+            </a:pPr>
+            <a:r>
+              <a:rPr lang="en-US" sz="1900" b="1" dirty="0">
                 <a:solidFill>
                   <a:srgbClr val="D98A2B"/>
                 </a:solidFill>
@@ -10148,7 +9028,46 @@
                 <a:ea typeface="Yu Gothic" pitchFamily="34" charset="-122"/>
                 <a:cs typeface="Yu Gothic" pitchFamily="34" charset="-120"/>
               </a:rPr>
-              <a:t>消えないこと</a:t>
+              <a:t>真正性</a:t>
+            </a:r>
+            <a:endParaRPr lang="en-US" sz="1900" dirty="0"/>
+          </a:p>
+        </p:txBody>
+      </p:sp>
+      <p:sp>
+        <p:nvSpPr>
+          <p:cNvPr id="6" name="Text 4"/>
+          <p:cNvSpPr/>
+          <p:nvPr/>
+        </p:nvSpPr>
+        <p:spPr>
+          <a:xfrm>
+            <a:off x="960120" y="2286000"/>
+            <a:ext cx="3017520" cy="310896"/>
+          </a:xfrm>
+          <a:prstGeom prst="rect">
+            <a:avLst/>
+          </a:prstGeom>
+          <a:noFill/>
+          <a:ln/>
+        </p:spPr>
+        <p:txBody>
+          <a:bodyPr wrap="square" lIns="0" tIns="0" rIns="0" bIns="0" rtlCol="0" anchor="ctr"/>
+          <a:lstStyle/>
+          <a:p>
+            <a:pPr indent="0" marL="0">
+              <a:buNone/>
+            </a:pPr>
+            <a:r>
+              <a:rPr lang="en-US" sz="1300" dirty="0">
+                <a:solidFill>
+                  <a:srgbClr val="FFFFFF"/>
+                </a:solidFill>
+                <a:latin typeface="Yu Gothic" pitchFamily="34" charset="0"/>
+                <a:ea typeface="Yu Gothic" pitchFamily="34" charset="-122"/>
+                <a:cs typeface="Yu Gothic" pitchFamily="34" charset="-120"/>
+              </a:rPr>
+              <a:t>あとから書き換えられていないこと</a:t>
             </a:r>
             <a:endParaRPr lang="en-US" sz="1300" dirty="0"/>
           </a:p>
@@ -10156,40 +9075,1097 @@
       </p:sp>
       <p:sp>
         <p:nvSpPr>
+          <p:cNvPr id="7" name="Shape 5"/>
+          <p:cNvSpPr/>
+          <p:nvPr/>
+        </p:nvSpPr>
+        <p:spPr>
+          <a:xfrm>
+            <a:off x="731520" y="2743200"/>
+            <a:ext cx="3429000" cy="1691640"/>
+          </a:xfrm>
+          <a:prstGeom prst="roundRect">
+            <a:avLst>
+              <a:gd name="adj" fmla="val 4324"/>
+            </a:avLst>
+          </a:prstGeom>
+          <a:solidFill>
+            <a:srgbClr val="F1F6F5"/>
+          </a:solidFill>
+          <a:ln w="12700">
+            <a:solidFill>
+              <a:srgbClr val="F1F6F5"/>
+            </a:solidFill>
+            <a:prstDash val="solid"/>
+          </a:ln>
+        </p:spPr>
+      </p:sp>
+      <p:sp>
+        <p:nvSpPr>
+          <p:cNvPr id="8" name="Text 6"/>
+          <p:cNvSpPr/>
+          <p:nvPr/>
+        </p:nvSpPr>
+        <p:spPr>
+          <a:xfrm>
+            <a:off x="960120" y="2871216"/>
+            <a:ext cx="2926080" cy="274320"/>
+          </a:xfrm>
+          <a:prstGeom prst="rect">
+            <a:avLst/>
+          </a:prstGeom>
+          <a:noFill/>
+          <a:ln/>
+        </p:spPr>
+        <p:txBody>
+          <a:bodyPr wrap="square" lIns="0" tIns="0" rIns="0" bIns="0" rtlCol="0" anchor="ctr"/>
+          <a:lstStyle/>
+          <a:p>
+            <a:pPr indent="0" marL="0">
+              <a:buNone/>
+            </a:pPr>
+            <a:r>
+              <a:rPr lang="en-US" sz="1200" b="1" dirty="0">
+                <a:solidFill>
+                  <a:srgbClr val="5C6B68"/>
+                </a:solidFill>
+                <a:latin typeface="Yu Gothic" pitchFamily="34" charset="0"/>
+                <a:ea typeface="Yu Gothic" pitchFamily="34" charset="-122"/>
+                <a:cs typeface="Yu Gothic" pitchFamily="34" charset="-120"/>
+              </a:rPr>
+              <a:t>なぜ要るのか</a:t>
+            </a:r>
+            <a:endParaRPr lang="en-US" sz="1200" dirty="0"/>
+          </a:p>
+        </p:txBody>
+      </p:sp>
+      <p:sp>
+        <p:nvSpPr>
+          <p:cNvPr id="9" name="Text 7"/>
+          <p:cNvSpPr/>
+          <p:nvPr/>
+        </p:nvSpPr>
+        <p:spPr>
+          <a:xfrm>
+            <a:off x="960120" y="3163824"/>
+            <a:ext cx="3017520" cy="1188720"/>
+          </a:xfrm>
+          <a:prstGeom prst="rect">
+            <a:avLst/>
+          </a:prstGeom>
+          <a:noFill/>
+          <a:ln/>
+        </p:spPr>
+        <p:txBody>
+          <a:bodyPr wrap="square" lIns="0" tIns="0" rIns="0" bIns="0" rtlCol="0" anchor="ctr"/>
+          <a:lstStyle/>
+          <a:p>
+            <a:pPr indent="0" marL="0">
+              <a:lnSpc>
+                <a:spcPct val="125000"/>
+              </a:lnSpc>
+              <a:buNone/>
+            </a:pPr>
+            <a:r>
+              <a:rPr lang="en-US" sz="1300" dirty="0">
+                <a:solidFill>
+                  <a:srgbClr val="16211F"/>
+                </a:solidFill>
+                <a:latin typeface="Yu Gothic" pitchFamily="34" charset="0"/>
+                <a:ea typeface="Yu Gothic" pitchFamily="34" charset="-122"/>
+                <a:cs typeface="Yu Gothic" pitchFamily="34" charset="-120"/>
+              </a:rPr>
+              <a:t>アレルギーが「あり」から「なし」に</a:t>
+            </a:r>
+            <a:endParaRPr lang="en-US" sz="1300" dirty="0"/>
+          </a:p>
+          <a:p>
+            <a:pPr indent="0" marL="0">
+              <a:lnSpc>
+                <a:spcPct val="125000"/>
+              </a:lnSpc>
+              <a:buNone/>
+            </a:pPr>
+            <a:r>
+              <a:rPr lang="en-US" sz="1300" dirty="0">
+                <a:solidFill>
+                  <a:srgbClr val="16211F"/>
+                </a:solidFill>
+                <a:latin typeface="Yu Gothic" pitchFamily="34" charset="0"/>
+                <a:ea typeface="Yu Gothic" pitchFamily="34" charset="-122"/>
+                <a:cs typeface="Yu Gothic" pitchFamily="34" charset="-120"/>
+              </a:rPr>
+              <a:t>変わっていたとして、それが正規の</a:t>
+            </a:r>
+            <a:endParaRPr lang="en-US" sz="1300" dirty="0"/>
+          </a:p>
+          <a:p>
+            <a:pPr indent="0" marL="0">
+              <a:lnSpc>
+                <a:spcPct val="125000"/>
+              </a:lnSpc>
+              <a:buNone/>
+            </a:pPr>
+            <a:r>
+              <a:rPr lang="en-US" sz="1300" dirty="0">
+                <a:solidFill>
+                  <a:srgbClr val="16211F"/>
+                </a:solidFill>
+                <a:latin typeface="Yu Gothic" pitchFamily="34" charset="0"/>
+                <a:ea typeface="Yu Gothic" pitchFamily="34" charset="-122"/>
+                <a:cs typeface="Yu Gothic" pitchFamily="34" charset="-120"/>
+              </a:rPr>
+              <a:t>訂正なのか分からなければ、</a:t>
+            </a:r>
+            <a:endParaRPr lang="en-US" sz="1300" dirty="0"/>
+          </a:p>
+          <a:p>
+            <a:pPr indent="0" marL="0">
+              <a:lnSpc>
+                <a:spcPct val="125000"/>
+              </a:lnSpc>
+              <a:buNone/>
+            </a:pPr>
+            <a:r>
+              <a:rPr lang="en-US" sz="1300" dirty="0">
+                <a:solidFill>
+                  <a:srgbClr val="16211F"/>
+                </a:solidFill>
+                <a:latin typeface="Yu Gothic" pitchFamily="34" charset="0"/>
+                <a:ea typeface="Yu Gothic" pitchFamily="34" charset="-122"/>
+                <a:cs typeface="Yu Gothic" pitchFamily="34" charset="-120"/>
+              </a:rPr>
+              <a:t>その記録は使えません。</a:t>
+            </a:r>
+            <a:endParaRPr lang="en-US" sz="1300" dirty="0"/>
+          </a:p>
+        </p:txBody>
+      </p:sp>
+      <p:sp>
+        <p:nvSpPr>
+          <p:cNvPr id="10" name="Shape 8"/>
+          <p:cNvSpPr/>
+          <p:nvPr/>
+        </p:nvSpPr>
+        <p:spPr>
+          <a:xfrm>
+            <a:off x="731520" y="4526280"/>
+            <a:ext cx="3429000" cy="1691640"/>
+          </a:xfrm>
+          <a:prstGeom prst="roundRect">
+            <a:avLst>
+              <a:gd name="adj" fmla="val 4324"/>
+            </a:avLst>
+          </a:prstGeom>
+          <a:solidFill>
+            <a:srgbClr val="FFFFFF"/>
+          </a:solidFill>
+          <a:ln w="12700">
+            <a:solidFill>
+              <a:srgbClr val="A8CFC9"/>
+            </a:solidFill>
+            <a:prstDash val="solid"/>
+          </a:ln>
+        </p:spPr>
+      </p:sp>
+      <p:sp>
+        <p:nvSpPr>
+          <p:cNvPr id="11" name="Text 9"/>
+          <p:cNvSpPr/>
+          <p:nvPr/>
+        </p:nvSpPr>
+        <p:spPr>
+          <a:xfrm>
+            <a:off x="960120" y="4654296"/>
+            <a:ext cx="2926080" cy="274320"/>
+          </a:xfrm>
+          <a:prstGeom prst="rect">
+            <a:avLst/>
+          </a:prstGeom>
+          <a:noFill/>
+          <a:ln/>
+        </p:spPr>
+        <p:txBody>
+          <a:bodyPr wrap="square" lIns="0" tIns="0" rIns="0" bIns="0" rtlCol="0" anchor="ctr"/>
+          <a:lstStyle/>
+          <a:p>
+            <a:pPr indent="0" marL="0">
+              <a:buNone/>
+            </a:pPr>
+            <a:r>
+              <a:rPr lang="en-US" sz="1200" b="1" dirty="0">
+                <a:solidFill>
+                  <a:srgbClr val="1F6F78"/>
+                </a:solidFill>
+                <a:latin typeface="Yu Gothic" pitchFamily="34" charset="0"/>
+                <a:ea typeface="Yu Gothic" pitchFamily="34" charset="-122"/>
+                <a:cs typeface="Yu Gothic" pitchFamily="34" charset="-120"/>
+              </a:rPr>
+              <a:t>このアプリでは</a:t>
+            </a:r>
+            <a:endParaRPr lang="en-US" sz="1200" dirty="0"/>
+          </a:p>
+        </p:txBody>
+      </p:sp>
+      <p:sp>
+        <p:nvSpPr>
+          <p:cNvPr id="12" name="Text 10"/>
+          <p:cNvSpPr/>
+          <p:nvPr/>
+        </p:nvSpPr>
+        <p:spPr>
+          <a:xfrm>
+            <a:off x="960120" y="4946904"/>
+            <a:ext cx="3017520" cy="1188720"/>
+          </a:xfrm>
+          <a:prstGeom prst="rect">
+            <a:avLst/>
+          </a:prstGeom>
+          <a:noFill/>
+          <a:ln/>
+        </p:spPr>
+        <p:txBody>
+          <a:bodyPr wrap="square" lIns="0" tIns="0" rIns="0" bIns="0" rtlCol="0" anchor="ctr"/>
+          <a:lstStyle/>
+          <a:p>
+            <a:pPr indent="0" marL="0">
+              <a:lnSpc>
+                <a:spcPct val="125000"/>
+              </a:lnSpc>
+              <a:buNone/>
+            </a:pPr>
+            <a:r>
+              <a:rPr lang="en-US" sz="1300" dirty="0">
+                <a:solidFill>
+                  <a:srgbClr val="16211F"/>
+                </a:solidFill>
+                <a:latin typeface="Yu Gothic" pitchFamily="34" charset="0"/>
+                <a:ea typeface="Yu Gothic" pitchFamily="34" charset="-122"/>
+                <a:cs typeface="Yu Gothic" pitchFamily="34" charset="-120"/>
+              </a:rPr>
+              <a:t>誰が・いつ・何を・どう変えたかを</a:t>
+            </a:r>
+            <a:endParaRPr lang="en-US" sz="1300" dirty="0"/>
+          </a:p>
+          <a:p>
+            <a:pPr indent="0" marL="0">
+              <a:lnSpc>
+                <a:spcPct val="125000"/>
+              </a:lnSpc>
+              <a:buNone/>
+            </a:pPr>
+            <a:r>
+              <a:rPr lang="en-US" sz="1300" dirty="0">
+                <a:solidFill>
+                  <a:srgbClr val="16211F"/>
+                </a:solidFill>
+                <a:latin typeface="Yu Gothic" pitchFamily="34" charset="0"/>
+                <a:ea typeface="Yu Gothic" pitchFamily="34" charset="-122"/>
+                <a:cs typeface="Yu Gothic" pitchFamily="34" charset="-120"/>
+              </a:rPr>
+              <a:t>変更前の値ごと残します。</a:t>
+            </a:r>
+            <a:endParaRPr lang="en-US" sz="1300" dirty="0"/>
+          </a:p>
+          <a:p>
+            <a:pPr indent="0" marL="0">
+              <a:lnSpc>
+                <a:spcPct val="125000"/>
+              </a:lnSpc>
+              <a:buNone/>
+            </a:pPr>
+            <a:r>
+              <a:rPr lang="en-US" sz="1300" dirty="0">
+                <a:solidFill>
+                  <a:srgbClr val="16211F"/>
+                </a:solidFill>
+                <a:latin typeface="Yu Gothic" pitchFamily="34" charset="0"/>
+                <a:ea typeface="Yu Gothic" pitchFamily="34" charset="-122"/>
+                <a:cs typeface="Yu Gothic" pitchFamily="34" charset="-120"/>
+              </a:rPr>
+              <a:t>記録そのものの書き換えと削除は、</a:t>
+            </a:r>
+            <a:endParaRPr lang="en-US" sz="1300" dirty="0"/>
+          </a:p>
+          <a:p>
+            <a:pPr indent="0" marL="0">
+              <a:lnSpc>
+                <a:spcPct val="125000"/>
+              </a:lnSpc>
+              <a:buNone/>
+            </a:pPr>
+            <a:r>
+              <a:rPr lang="en-US" sz="1300" dirty="0">
+                <a:solidFill>
+                  <a:srgbClr val="16211F"/>
+                </a:solidFill>
+                <a:latin typeface="Yu Gothic" pitchFamily="34" charset="0"/>
+                <a:ea typeface="Yu Gothic" pitchFamily="34" charset="-122"/>
+                <a:cs typeface="Yu Gothic" pitchFamily="34" charset="-120"/>
+              </a:rPr>
+              <a:t>仕組みとして禁止しています。</a:t>
+            </a:r>
+            <a:endParaRPr lang="en-US" sz="1300" dirty="0"/>
+          </a:p>
+        </p:txBody>
+      </p:sp>
+      <p:sp>
+        <p:nvSpPr>
+          <p:cNvPr id="13" name="Shape 11"/>
+          <p:cNvSpPr/>
+          <p:nvPr/>
+        </p:nvSpPr>
+        <p:spPr>
+          <a:xfrm>
+            <a:off x="4434840" y="1828800"/>
+            <a:ext cx="3429000" cy="841248"/>
+          </a:xfrm>
+          <a:prstGeom prst="roundRect">
+            <a:avLst>
+              <a:gd name="adj" fmla="val 8696"/>
+            </a:avLst>
+          </a:prstGeom>
+          <a:solidFill>
+            <a:srgbClr val="14504B"/>
+          </a:solidFill>
+          <a:ln w="12700">
+            <a:solidFill>
+              <a:srgbClr val="14504B"/>
+            </a:solidFill>
+            <a:prstDash val="solid"/>
+          </a:ln>
+        </p:spPr>
+      </p:sp>
+      <p:sp>
+        <p:nvSpPr>
+          <p:cNvPr id="14" name="Text 12"/>
+          <p:cNvSpPr/>
+          <p:nvPr/>
+        </p:nvSpPr>
+        <p:spPr>
+          <a:xfrm>
+            <a:off x="4663440" y="1920240"/>
+            <a:ext cx="2926080" cy="329184"/>
+          </a:xfrm>
+          <a:prstGeom prst="rect">
+            <a:avLst/>
+          </a:prstGeom>
+          <a:noFill/>
+          <a:ln/>
+        </p:spPr>
+        <p:txBody>
+          <a:bodyPr wrap="square" lIns="0" tIns="0" rIns="0" bIns="0" rtlCol="0" anchor="ctr"/>
+          <a:lstStyle/>
+          <a:p>
+            <a:pPr indent="0" marL="0">
+              <a:buNone/>
+            </a:pPr>
+            <a:r>
+              <a:rPr lang="en-US" sz="1900" b="1" dirty="0">
+                <a:solidFill>
+                  <a:srgbClr val="D98A2B"/>
+                </a:solidFill>
+                <a:latin typeface="Yu Gothic" pitchFamily="34" charset="0"/>
+                <a:ea typeface="Yu Gothic" pitchFamily="34" charset="-122"/>
+                <a:cs typeface="Yu Gothic" pitchFamily="34" charset="-120"/>
+              </a:rPr>
+              <a:t>見読性</a:t>
+            </a:r>
+            <a:endParaRPr lang="en-US" sz="1900" dirty="0"/>
+          </a:p>
+        </p:txBody>
+      </p:sp>
+      <p:sp>
+        <p:nvSpPr>
+          <p:cNvPr id="15" name="Text 13"/>
+          <p:cNvSpPr/>
+          <p:nvPr/>
+        </p:nvSpPr>
+        <p:spPr>
+          <a:xfrm>
+            <a:off x="4663440" y="2286000"/>
+            <a:ext cx="3017520" cy="310896"/>
+          </a:xfrm>
+          <a:prstGeom prst="rect">
+            <a:avLst/>
+          </a:prstGeom>
+          <a:noFill/>
+          <a:ln/>
+        </p:spPr>
+        <p:txBody>
+          <a:bodyPr wrap="square" lIns="0" tIns="0" rIns="0" bIns="0" rtlCol="0" anchor="ctr"/>
+          <a:lstStyle/>
+          <a:p>
+            <a:pPr indent="0" marL="0">
+              <a:buNone/>
+            </a:pPr>
+            <a:r>
+              <a:rPr lang="en-US" sz="1300" dirty="0">
+                <a:solidFill>
+                  <a:srgbClr val="FFFFFF"/>
+                </a:solidFill>
+                <a:latin typeface="Yu Gothic" pitchFamily="34" charset="0"/>
+                <a:ea typeface="Yu Gothic" pitchFamily="34" charset="-122"/>
+                <a:cs typeface="Yu Gothic" pitchFamily="34" charset="-120"/>
+              </a:rPr>
+              <a:t>必要なときに読み出せること</a:t>
+            </a:r>
+            <a:endParaRPr lang="en-US" sz="1300" dirty="0"/>
+          </a:p>
+        </p:txBody>
+      </p:sp>
+      <p:sp>
+        <p:nvSpPr>
+          <p:cNvPr id="16" name="Shape 14"/>
+          <p:cNvSpPr/>
+          <p:nvPr/>
+        </p:nvSpPr>
+        <p:spPr>
+          <a:xfrm>
+            <a:off x="4434840" y="2743200"/>
+            <a:ext cx="3429000" cy="1691640"/>
+          </a:xfrm>
+          <a:prstGeom prst="roundRect">
+            <a:avLst>
+              <a:gd name="adj" fmla="val 4324"/>
+            </a:avLst>
+          </a:prstGeom>
+          <a:solidFill>
+            <a:srgbClr val="F1F6F5"/>
+          </a:solidFill>
+          <a:ln w="12700">
+            <a:solidFill>
+              <a:srgbClr val="F1F6F5"/>
+            </a:solidFill>
+            <a:prstDash val="solid"/>
+          </a:ln>
+        </p:spPr>
+      </p:sp>
+      <p:sp>
+        <p:nvSpPr>
+          <p:cNvPr id="17" name="Text 15"/>
+          <p:cNvSpPr/>
+          <p:nvPr/>
+        </p:nvSpPr>
+        <p:spPr>
+          <a:xfrm>
+            <a:off x="4663440" y="2871216"/>
+            <a:ext cx="2926080" cy="274320"/>
+          </a:xfrm>
+          <a:prstGeom prst="rect">
+            <a:avLst/>
+          </a:prstGeom>
+          <a:noFill/>
+          <a:ln/>
+        </p:spPr>
+        <p:txBody>
+          <a:bodyPr wrap="square" lIns="0" tIns="0" rIns="0" bIns="0" rtlCol="0" anchor="ctr"/>
+          <a:lstStyle/>
+          <a:p>
+            <a:pPr indent="0" marL="0">
+              <a:buNone/>
+            </a:pPr>
+            <a:r>
+              <a:rPr lang="en-US" sz="1200" b="1" dirty="0">
+                <a:solidFill>
+                  <a:srgbClr val="5C6B68"/>
+                </a:solidFill>
+                <a:latin typeface="Yu Gothic" pitchFamily="34" charset="0"/>
+                <a:ea typeface="Yu Gothic" pitchFamily="34" charset="-122"/>
+                <a:cs typeface="Yu Gothic" pitchFamily="34" charset="-120"/>
+              </a:rPr>
+              <a:t>なぜ要るのか</a:t>
+            </a:r>
+            <a:endParaRPr lang="en-US" sz="1200" dirty="0"/>
+          </a:p>
+        </p:txBody>
+      </p:sp>
+      <p:sp>
+        <p:nvSpPr>
+          <p:cNvPr id="18" name="Text 16"/>
+          <p:cNvSpPr/>
+          <p:nvPr/>
+        </p:nvSpPr>
+        <p:spPr>
+          <a:xfrm>
+            <a:off x="4663440" y="3163824"/>
+            <a:ext cx="3017520" cy="1188720"/>
+          </a:xfrm>
+          <a:prstGeom prst="rect">
+            <a:avLst/>
+          </a:prstGeom>
+          <a:noFill/>
+          <a:ln/>
+        </p:spPr>
+        <p:txBody>
+          <a:bodyPr wrap="square" lIns="0" tIns="0" rIns="0" bIns="0" rtlCol="0" anchor="ctr"/>
+          <a:lstStyle/>
+          <a:p>
+            <a:pPr indent="0" marL="0">
+              <a:lnSpc>
+                <a:spcPct val="125000"/>
+              </a:lnSpc>
+              <a:buNone/>
+            </a:pPr>
+            <a:r>
+              <a:rPr lang="en-US" sz="1300" dirty="0">
+                <a:solidFill>
+                  <a:srgbClr val="16211F"/>
+                </a:solidFill>
+                <a:latin typeface="Yu Gothic" pitchFamily="34" charset="0"/>
+                <a:ea typeface="Yu Gothic" pitchFamily="34" charset="-122"/>
+                <a:cs typeface="Yu Gothic" pitchFamily="34" charset="-120"/>
+              </a:rPr>
+              <a:t>行政の調査や監査では、記録の</a:t>
+            </a:r>
+            <a:endParaRPr lang="en-US" sz="1300" dirty="0"/>
+          </a:p>
+          <a:p>
+            <a:pPr indent="0" marL="0">
+              <a:lnSpc>
+                <a:spcPct val="125000"/>
+              </a:lnSpc>
+              <a:buNone/>
+            </a:pPr>
+            <a:r>
+              <a:rPr lang="en-US" sz="1300" dirty="0">
+                <a:solidFill>
+                  <a:srgbClr val="16211F"/>
+                </a:solidFill>
+                <a:latin typeface="Yu Gothic" pitchFamily="34" charset="0"/>
+                <a:ea typeface="Yu Gothic" pitchFamily="34" charset="-122"/>
+                <a:cs typeface="Yu Gothic" pitchFamily="34" charset="-120"/>
+              </a:rPr>
+              <a:t>提出を求められます。画面で</a:t>
+            </a:r>
+            <a:endParaRPr lang="en-US" sz="1300" dirty="0"/>
+          </a:p>
+          <a:p>
+            <a:pPr indent="0" marL="0">
+              <a:lnSpc>
+                <a:spcPct val="125000"/>
+              </a:lnSpc>
+              <a:buNone/>
+            </a:pPr>
+            <a:r>
+              <a:rPr lang="en-US" sz="1300" dirty="0">
+                <a:solidFill>
+                  <a:srgbClr val="16211F"/>
+                </a:solidFill>
+                <a:latin typeface="Yu Gothic" pitchFamily="34" charset="0"/>
+                <a:ea typeface="Yu Gothic" pitchFamily="34" charset="-122"/>
+                <a:cs typeface="Yu Gothic" pitchFamily="34" charset="-120"/>
+              </a:rPr>
+              <a:t>見えるだけでは足りず、紙に</a:t>
+            </a:r>
+            <a:endParaRPr lang="en-US" sz="1300" dirty="0"/>
+          </a:p>
+          <a:p>
+            <a:pPr indent="0" marL="0">
+              <a:lnSpc>
+                <a:spcPct val="125000"/>
+              </a:lnSpc>
+              <a:buNone/>
+            </a:pPr>
+            <a:r>
+              <a:rPr lang="en-US" sz="1300" dirty="0">
+                <a:solidFill>
+                  <a:srgbClr val="16211F"/>
+                </a:solidFill>
+                <a:latin typeface="Yu Gothic" pitchFamily="34" charset="0"/>
+                <a:ea typeface="Yu Gothic" pitchFamily="34" charset="-122"/>
+                <a:cs typeface="Yu Gothic" pitchFamily="34" charset="-120"/>
+              </a:rPr>
+              <a:t>出せる必要があります。</a:t>
+            </a:r>
+            <a:endParaRPr lang="en-US" sz="1300" dirty="0"/>
+          </a:p>
+        </p:txBody>
+      </p:sp>
+      <p:sp>
+        <p:nvSpPr>
+          <p:cNvPr id="19" name="Shape 17"/>
+          <p:cNvSpPr/>
+          <p:nvPr/>
+        </p:nvSpPr>
+        <p:spPr>
+          <a:xfrm>
+            <a:off x="4434840" y="4526280"/>
+            <a:ext cx="3429000" cy="1691640"/>
+          </a:xfrm>
+          <a:prstGeom prst="roundRect">
+            <a:avLst>
+              <a:gd name="adj" fmla="val 4324"/>
+            </a:avLst>
+          </a:prstGeom>
+          <a:solidFill>
+            <a:srgbClr val="FFFFFF"/>
+          </a:solidFill>
+          <a:ln w="12700">
+            <a:solidFill>
+              <a:srgbClr val="A8CFC9"/>
+            </a:solidFill>
+            <a:prstDash val="solid"/>
+          </a:ln>
+        </p:spPr>
+      </p:sp>
+      <p:sp>
+        <p:nvSpPr>
+          <p:cNvPr id="20" name="Text 18"/>
+          <p:cNvSpPr/>
+          <p:nvPr/>
+        </p:nvSpPr>
+        <p:spPr>
+          <a:xfrm>
+            <a:off x="4663440" y="4654296"/>
+            <a:ext cx="2926080" cy="274320"/>
+          </a:xfrm>
+          <a:prstGeom prst="rect">
+            <a:avLst/>
+          </a:prstGeom>
+          <a:noFill/>
+          <a:ln/>
+        </p:spPr>
+        <p:txBody>
+          <a:bodyPr wrap="square" lIns="0" tIns="0" rIns="0" bIns="0" rtlCol="0" anchor="ctr"/>
+          <a:lstStyle/>
+          <a:p>
+            <a:pPr indent="0" marL="0">
+              <a:buNone/>
+            </a:pPr>
+            <a:r>
+              <a:rPr lang="en-US" sz="1200" b="1" dirty="0">
+                <a:solidFill>
+                  <a:srgbClr val="1F6F78"/>
+                </a:solidFill>
+                <a:latin typeface="Yu Gothic" pitchFamily="34" charset="0"/>
+                <a:ea typeface="Yu Gothic" pitchFamily="34" charset="-122"/>
+                <a:cs typeface="Yu Gothic" pitchFamily="34" charset="-120"/>
+              </a:rPr>
+              <a:t>このアプリでは</a:t>
+            </a:r>
+            <a:endParaRPr lang="en-US" sz="1200" dirty="0"/>
+          </a:p>
+        </p:txBody>
+      </p:sp>
+      <p:sp>
+        <p:nvSpPr>
+          <p:cNvPr id="21" name="Text 19"/>
+          <p:cNvSpPr/>
+          <p:nvPr/>
+        </p:nvSpPr>
+        <p:spPr>
+          <a:xfrm>
+            <a:off x="4663440" y="4946904"/>
+            <a:ext cx="3017520" cy="1188720"/>
+          </a:xfrm>
+          <a:prstGeom prst="rect">
+            <a:avLst/>
+          </a:prstGeom>
+          <a:noFill/>
+          <a:ln/>
+        </p:spPr>
+        <p:txBody>
+          <a:bodyPr wrap="square" lIns="0" tIns="0" rIns="0" bIns="0" rtlCol="0" anchor="ctr"/>
+          <a:lstStyle/>
+          <a:p>
+            <a:pPr indent="0" marL="0">
+              <a:lnSpc>
+                <a:spcPct val="125000"/>
+              </a:lnSpc>
+              <a:buNone/>
+            </a:pPr>
+            <a:r>
+              <a:rPr lang="en-US" sz="1300" dirty="0">
+                <a:solidFill>
+                  <a:srgbClr val="16211F"/>
+                </a:solidFill>
+                <a:latin typeface="Yu Gothic" pitchFamily="34" charset="0"/>
+                <a:ea typeface="Yu Gothic" pitchFamily="34" charset="-122"/>
+                <a:cs typeface="Yu Gothic" pitchFamily="34" charset="-120"/>
+              </a:rPr>
+              <a:t>入居者ごとの記録を、そのまま</a:t>
+            </a:r>
+            <a:endParaRPr lang="en-US" sz="1300" dirty="0"/>
+          </a:p>
+          <a:p>
+            <a:pPr indent="0" marL="0">
+              <a:lnSpc>
+                <a:spcPct val="125000"/>
+              </a:lnSpc>
+              <a:buNone/>
+            </a:pPr>
+            <a:r>
+              <a:rPr lang="en-US" sz="1300" dirty="0">
+                <a:solidFill>
+                  <a:srgbClr val="16211F"/>
+                </a:solidFill>
+                <a:latin typeface="Yu Gothic" pitchFamily="34" charset="0"/>
+                <a:ea typeface="Yu Gothic" pitchFamily="34" charset="-122"/>
+                <a:cs typeface="Yu Gothic" pitchFamily="34" charset="-120"/>
+              </a:rPr>
+              <a:t>印刷できるようにしました。</a:t>
+            </a:r>
+            <a:endParaRPr lang="en-US" sz="1300" dirty="0"/>
+          </a:p>
+          <a:p>
+            <a:pPr indent="0" marL="0">
+              <a:lnSpc>
+                <a:spcPct val="125000"/>
+              </a:lnSpc>
+              <a:buNone/>
+            </a:pPr>
+            <a:r>
+              <a:rPr lang="en-US" sz="1300" dirty="0">
+                <a:solidFill>
+                  <a:srgbClr val="16211F"/>
+                </a:solidFill>
+                <a:latin typeface="Yu Gothic" pitchFamily="34" charset="0"/>
+                <a:ea typeface="Yu Gothic" pitchFamily="34" charset="-122"/>
+                <a:cs typeface="Yu Gothic" pitchFamily="34" charset="-120"/>
+              </a:rPr>
+              <a:t>印刷したこと自体も、</a:t>
+            </a:r>
+            <a:endParaRPr lang="en-US" sz="1300" dirty="0"/>
+          </a:p>
+          <a:p>
+            <a:pPr indent="0" marL="0">
+              <a:lnSpc>
+                <a:spcPct val="125000"/>
+              </a:lnSpc>
+              <a:buNone/>
+            </a:pPr>
+            <a:r>
+              <a:rPr lang="en-US" sz="1300" dirty="0">
+                <a:solidFill>
+                  <a:srgbClr val="16211F"/>
+                </a:solidFill>
+                <a:latin typeface="Yu Gothic" pitchFamily="34" charset="0"/>
+                <a:ea typeface="Yu Gothic" pitchFamily="34" charset="-122"/>
+                <a:cs typeface="Yu Gothic" pitchFamily="34" charset="-120"/>
+              </a:rPr>
+              <a:t>持ち出しとして記録に残します。</a:t>
+            </a:r>
+            <a:endParaRPr lang="en-US" sz="1300" dirty="0"/>
+          </a:p>
+        </p:txBody>
+      </p:sp>
+      <p:sp>
+        <p:nvSpPr>
+          <p:cNvPr id="22" name="Shape 20"/>
+          <p:cNvSpPr/>
+          <p:nvPr/>
+        </p:nvSpPr>
+        <p:spPr>
+          <a:xfrm>
+            <a:off x="8138160" y="1828800"/>
+            <a:ext cx="3429000" cy="841248"/>
+          </a:xfrm>
+          <a:prstGeom prst="roundRect">
+            <a:avLst>
+              <a:gd name="adj" fmla="val 8696"/>
+            </a:avLst>
+          </a:prstGeom>
+          <a:solidFill>
+            <a:srgbClr val="14504B"/>
+          </a:solidFill>
+          <a:ln w="12700">
+            <a:solidFill>
+              <a:srgbClr val="14504B"/>
+            </a:solidFill>
+            <a:prstDash val="solid"/>
+          </a:ln>
+        </p:spPr>
+      </p:sp>
+      <p:sp>
+        <p:nvSpPr>
+          <p:cNvPr id="23" name="Text 21"/>
+          <p:cNvSpPr/>
+          <p:nvPr/>
+        </p:nvSpPr>
+        <p:spPr>
+          <a:xfrm>
+            <a:off x="8366760" y="1920240"/>
+            <a:ext cx="2926080" cy="329184"/>
+          </a:xfrm>
+          <a:prstGeom prst="rect">
+            <a:avLst/>
+          </a:prstGeom>
+          <a:noFill/>
+          <a:ln/>
+        </p:spPr>
+        <p:txBody>
+          <a:bodyPr wrap="square" lIns="0" tIns="0" rIns="0" bIns="0" rtlCol="0" anchor="ctr"/>
+          <a:lstStyle/>
+          <a:p>
+            <a:pPr indent="0" marL="0">
+              <a:buNone/>
+            </a:pPr>
+            <a:r>
+              <a:rPr lang="en-US" sz="1900" b="1" dirty="0">
+                <a:solidFill>
+                  <a:srgbClr val="D98A2B"/>
+                </a:solidFill>
+                <a:latin typeface="Yu Gothic" pitchFamily="34" charset="0"/>
+                <a:ea typeface="Yu Gothic" pitchFamily="34" charset="-122"/>
+                <a:cs typeface="Yu Gothic" pitchFamily="34" charset="-120"/>
+              </a:rPr>
+              <a:t>保存性</a:t>
+            </a:r>
+            <a:endParaRPr lang="en-US" sz="1900" dirty="0"/>
+          </a:p>
+        </p:txBody>
+      </p:sp>
+      <p:sp>
+        <p:nvSpPr>
+          <p:cNvPr id="24" name="Text 22"/>
+          <p:cNvSpPr/>
+          <p:nvPr/>
+        </p:nvSpPr>
+        <p:spPr>
+          <a:xfrm>
+            <a:off x="8366760" y="2286000"/>
+            <a:ext cx="3017520" cy="310896"/>
+          </a:xfrm>
+          <a:prstGeom prst="rect">
+            <a:avLst/>
+          </a:prstGeom>
+          <a:noFill/>
+          <a:ln/>
+        </p:spPr>
+        <p:txBody>
+          <a:bodyPr wrap="square" lIns="0" tIns="0" rIns="0" bIns="0" rtlCol="0" anchor="ctr"/>
+          <a:lstStyle/>
+          <a:p>
+            <a:pPr indent="0" marL="0">
+              <a:buNone/>
+            </a:pPr>
+            <a:r>
+              <a:rPr lang="en-US" sz="1300" dirty="0">
+                <a:solidFill>
+                  <a:srgbClr val="FFFFFF"/>
+                </a:solidFill>
+                <a:latin typeface="Yu Gothic" pitchFamily="34" charset="0"/>
+                <a:ea typeface="Yu Gothic" pitchFamily="34" charset="-122"/>
+                <a:cs typeface="Yu Gothic" pitchFamily="34" charset="-120"/>
+              </a:rPr>
+              <a:t>保存期間中は失われないこと</a:t>
+            </a:r>
+            <a:endParaRPr lang="en-US" sz="1300" dirty="0"/>
+          </a:p>
+        </p:txBody>
+      </p:sp>
+      <p:sp>
+        <p:nvSpPr>
+          <p:cNvPr id="25" name="Shape 23"/>
+          <p:cNvSpPr/>
+          <p:nvPr/>
+        </p:nvSpPr>
+        <p:spPr>
+          <a:xfrm>
+            <a:off x="8138160" y="2743200"/>
+            <a:ext cx="3429000" cy="1691640"/>
+          </a:xfrm>
+          <a:prstGeom prst="roundRect">
+            <a:avLst>
+              <a:gd name="adj" fmla="val 4324"/>
+            </a:avLst>
+          </a:prstGeom>
+          <a:solidFill>
+            <a:srgbClr val="F1F6F5"/>
+          </a:solidFill>
+          <a:ln w="12700">
+            <a:solidFill>
+              <a:srgbClr val="F1F6F5"/>
+            </a:solidFill>
+            <a:prstDash val="solid"/>
+          </a:ln>
+        </p:spPr>
+      </p:sp>
+      <p:sp>
+        <p:nvSpPr>
+          <p:cNvPr id="26" name="Text 24"/>
+          <p:cNvSpPr/>
+          <p:nvPr/>
+        </p:nvSpPr>
+        <p:spPr>
+          <a:xfrm>
+            <a:off x="8366760" y="2871216"/>
+            <a:ext cx="2926080" cy="274320"/>
+          </a:xfrm>
+          <a:prstGeom prst="rect">
+            <a:avLst/>
+          </a:prstGeom>
+          <a:noFill/>
+          <a:ln/>
+        </p:spPr>
+        <p:txBody>
+          <a:bodyPr wrap="square" lIns="0" tIns="0" rIns="0" bIns="0" rtlCol="0" anchor="ctr"/>
+          <a:lstStyle/>
+          <a:p>
+            <a:pPr indent="0" marL="0">
+              <a:buNone/>
+            </a:pPr>
+            <a:r>
+              <a:rPr lang="en-US" sz="1200" b="1" dirty="0">
+                <a:solidFill>
+                  <a:srgbClr val="5C6B68"/>
+                </a:solidFill>
+                <a:latin typeface="Yu Gothic" pitchFamily="34" charset="0"/>
+                <a:ea typeface="Yu Gothic" pitchFamily="34" charset="-122"/>
+                <a:cs typeface="Yu Gothic" pitchFamily="34" charset="-120"/>
+              </a:rPr>
+              <a:t>なぜ要るのか</a:t>
+            </a:r>
+            <a:endParaRPr lang="en-US" sz="1200" dirty="0"/>
+          </a:p>
+        </p:txBody>
+      </p:sp>
+      <p:sp>
+        <p:nvSpPr>
+          <p:cNvPr id="27" name="Text 25"/>
+          <p:cNvSpPr/>
+          <p:nvPr/>
+        </p:nvSpPr>
+        <p:spPr>
+          <a:xfrm>
+            <a:off x="8366760" y="3163824"/>
+            <a:ext cx="3017520" cy="1188720"/>
+          </a:xfrm>
+          <a:prstGeom prst="rect">
+            <a:avLst/>
+          </a:prstGeom>
+          <a:noFill/>
+          <a:ln/>
+        </p:spPr>
+        <p:txBody>
+          <a:bodyPr wrap="square" lIns="0" tIns="0" rIns="0" bIns="0" rtlCol="0" anchor="ctr"/>
+          <a:lstStyle/>
+          <a:p>
+            <a:pPr indent="0" marL="0">
+              <a:lnSpc>
+                <a:spcPct val="125000"/>
+              </a:lnSpc>
+              <a:buNone/>
+            </a:pPr>
+            <a:r>
+              <a:rPr lang="en-US" sz="1300" dirty="0">
+                <a:solidFill>
+                  <a:srgbClr val="16211F"/>
+                </a:solidFill>
+                <a:latin typeface="Yu Gothic" pitchFamily="34" charset="0"/>
+                <a:ea typeface="Yu Gothic" pitchFamily="34" charset="-122"/>
+                <a:cs typeface="Yu Gothic" pitchFamily="34" charset="-120"/>
+              </a:rPr>
+              <a:t>誤操作や障害でデータが壊れても、</a:t>
+            </a:r>
+            <a:endParaRPr lang="en-US" sz="1300" dirty="0"/>
+          </a:p>
+          <a:p>
+            <a:pPr indent="0" marL="0">
+              <a:lnSpc>
+                <a:spcPct val="125000"/>
+              </a:lnSpc>
+              <a:buNone/>
+            </a:pPr>
+            <a:r>
+              <a:rPr lang="en-US" sz="1300" dirty="0">
+                <a:solidFill>
+                  <a:srgbClr val="16211F"/>
+                </a:solidFill>
+                <a:latin typeface="Yu Gothic" pitchFamily="34" charset="0"/>
+                <a:ea typeface="Yu Gothic" pitchFamily="34" charset="-122"/>
+                <a:cs typeface="Yu Gothic" pitchFamily="34" charset="-120"/>
+              </a:rPr>
+              <a:t>決められた期間は元に戻せなければ</a:t>
+            </a:r>
+            <a:endParaRPr lang="en-US" sz="1300" dirty="0"/>
+          </a:p>
+          <a:p>
+            <a:pPr indent="0" marL="0">
+              <a:lnSpc>
+                <a:spcPct val="125000"/>
+              </a:lnSpc>
+              <a:buNone/>
+            </a:pPr>
+            <a:r>
+              <a:rPr lang="en-US" sz="1300" dirty="0">
+                <a:solidFill>
+                  <a:srgbClr val="16211F"/>
+                </a:solidFill>
+                <a:latin typeface="Yu Gothic" pitchFamily="34" charset="0"/>
+                <a:ea typeface="Yu Gothic" pitchFamily="34" charset="-122"/>
+                <a:cs typeface="Yu Gothic" pitchFamily="34" charset="-120"/>
+              </a:rPr>
+              <a:t>なりません。</a:t>
+            </a:r>
+            <a:endParaRPr lang="en-US" sz="1300" dirty="0"/>
+          </a:p>
+        </p:txBody>
+      </p:sp>
+      <p:sp>
+        <p:nvSpPr>
+          <p:cNvPr id="28" name="Shape 26"/>
+          <p:cNvSpPr/>
+          <p:nvPr/>
+        </p:nvSpPr>
+        <p:spPr>
+          <a:xfrm>
+            <a:off x="8138160" y="4526280"/>
+            <a:ext cx="3429000" cy="1691640"/>
+          </a:xfrm>
+          <a:prstGeom prst="roundRect">
+            <a:avLst>
+              <a:gd name="adj" fmla="val 4324"/>
+            </a:avLst>
+          </a:prstGeom>
+          <a:solidFill>
+            <a:srgbClr val="FFFFFF"/>
+          </a:solidFill>
+          <a:ln w="12700">
+            <a:solidFill>
+              <a:srgbClr val="A8CFC9"/>
+            </a:solidFill>
+            <a:prstDash val="solid"/>
+          </a:ln>
+        </p:spPr>
+      </p:sp>
+      <p:sp>
+        <p:nvSpPr>
           <p:cNvPr id="29" name="Text 27"/>
           <p:cNvSpPr/>
           <p:nvPr/>
         </p:nvSpPr>
         <p:spPr>
           <a:xfrm>
-            <a:off x="2743200" y="5303520"/>
-            <a:ext cx="8503920" cy="292608"/>
-          </a:xfrm>
-          <a:prstGeom prst="rect">
-            <a:avLst/>
-          </a:prstGeom>
-          <a:noFill/>
-          <a:ln/>
-        </p:spPr>
-        <p:txBody>
-          <a:bodyPr wrap="square" lIns="0" tIns="0" rIns="0" bIns="0" rtlCol="0" anchor="ctr"/>
-          <a:lstStyle/>
-          <a:p>
-            <a:pPr indent="0" marL="0">
-              <a:buNone/>
-            </a:pPr>
-            <a:r>
-              <a:rPr lang="en-US" sz="1250" dirty="0">
-                <a:solidFill>
-                  <a:srgbClr val="FFFFFF"/>
-                </a:solidFill>
-                <a:latin typeface="Yu Gothic" pitchFamily="34" charset="0"/>
-                <a:ea typeface="Yu Gothic" pitchFamily="34" charset="-122"/>
-                <a:cs typeface="Yu Gothic" pitchFamily="34" charset="-120"/>
-              </a:rPr>
-              <a:t>過去7日間の任意の時点まで戻せます。データベースそのものの削除も、設定で禁止しています。</a:t>
-            </a:r>
-            <a:endParaRPr lang="en-US" sz="1250" dirty="0"/>
+            <a:off x="8366760" y="4654296"/>
+            <a:ext cx="2926080" cy="274320"/>
+          </a:xfrm>
+          <a:prstGeom prst="rect">
+            <a:avLst/>
+          </a:prstGeom>
+          <a:noFill/>
+          <a:ln/>
+        </p:spPr>
+        <p:txBody>
+          <a:bodyPr wrap="square" lIns="0" tIns="0" rIns="0" bIns="0" rtlCol="0" anchor="ctr"/>
+          <a:lstStyle/>
+          <a:p>
+            <a:pPr indent="0" marL="0">
+              <a:buNone/>
+            </a:pPr>
+            <a:r>
+              <a:rPr lang="en-US" sz="1200" b="1" dirty="0">
+                <a:solidFill>
+                  <a:srgbClr val="1F6F78"/>
+                </a:solidFill>
+                <a:latin typeface="Yu Gothic" pitchFamily="34" charset="0"/>
+                <a:ea typeface="Yu Gothic" pitchFamily="34" charset="-122"/>
+                <a:cs typeface="Yu Gothic" pitchFamily="34" charset="-120"/>
+              </a:rPr>
+              <a:t>このアプリでは</a:t>
+            </a:r>
+            <a:endParaRPr lang="en-US" sz="1200" dirty="0"/>
           </a:p>
         </p:txBody>
       </p:sp>
@@ -10201,35 +10177,98 @@
         </p:nvSpPr>
         <p:spPr>
           <a:xfrm>
-            <a:off x="1051560" y="5724144"/>
-            <a:ext cx="2011680" cy="292608"/>
-          </a:xfrm>
-          <a:prstGeom prst="rect">
-            <a:avLst/>
-          </a:prstGeom>
-          <a:noFill/>
-          <a:ln/>
-        </p:spPr>
-        <p:txBody>
-          <a:bodyPr wrap="square" lIns="0" tIns="0" rIns="0" bIns="0" rtlCol="0" anchor="ctr"/>
-          <a:lstStyle/>
-          <a:p>
-            <a:pPr indent="0" marL="0">
-              <a:buNone/>
-            </a:pPr>
-            <a:r>
-              <a:rPr lang="en-US" sz="1300" b="1" dirty="0">
-                <a:solidFill>
-                  <a:srgbClr val="D98A2B"/>
-                </a:solidFill>
-                <a:latin typeface="Yu Gothic" pitchFamily="34" charset="0"/>
-                <a:ea typeface="Yu Gothic" pitchFamily="34" charset="-122"/>
-                <a:cs typeface="Yu Gothic" pitchFamily="34" charset="-120"/>
-              </a:rPr>
-              <a:t>読まれないこと</a:t>
+            <a:off x="8366760" y="4946904"/>
+            <a:ext cx="3017520" cy="1188720"/>
+          </a:xfrm>
+          <a:prstGeom prst="rect">
+            <a:avLst/>
+          </a:prstGeom>
+          <a:noFill/>
+          <a:ln/>
+        </p:spPr>
+        <p:txBody>
+          <a:bodyPr wrap="square" lIns="0" tIns="0" rIns="0" bIns="0" rtlCol="0" anchor="ctr"/>
+          <a:lstStyle/>
+          <a:p>
+            <a:pPr indent="0" marL="0">
+              <a:lnSpc>
+                <a:spcPct val="125000"/>
+              </a:lnSpc>
+              <a:buNone/>
+            </a:pPr>
+            <a:r>
+              <a:rPr lang="en-US" sz="1300" dirty="0">
+                <a:solidFill>
+                  <a:srgbClr val="16211F"/>
+                </a:solidFill>
+                <a:latin typeface="Yu Gothic" pitchFamily="34" charset="0"/>
+                <a:ea typeface="Yu Gothic" pitchFamily="34" charset="-122"/>
+                <a:cs typeface="Yu Gothic" pitchFamily="34" charset="-120"/>
+              </a:rPr>
+              <a:t>過去7日間の任意の時点まで</a:t>
             </a:r>
             <a:endParaRPr lang="en-US" sz="1300" dirty="0"/>
           </a:p>
+          <a:p>
+            <a:pPr indent="0" marL="0">
+              <a:lnSpc>
+                <a:spcPct val="125000"/>
+              </a:lnSpc>
+              <a:buNone/>
+            </a:pPr>
+            <a:r>
+              <a:rPr lang="en-US" sz="1300" dirty="0">
+                <a:solidFill>
+                  <a:srgbClr val="16211F"/>
+                </a:solidFill>
+                <a:latin typeface="Yu Gothic" pitchFamily="34" charset="0"/>
+                <a:ea typeface="Yu Gothic" pitchFamily="34" charset="-122"/>
+                <a:cs typeface="Yu Gothic" pitchFamily="34" charset="-120"/>
+              </a:rPr>
+              <a:t>巻き戻せます。データベース</a:t>
+            </a:r>
+            <a:endParaRPr lang="en-US" sz="1300" dirty="0"/>
+          </a:p>
+          <a:p>
+            <a:pPr indent="0" marL="0">
+              <a:lnSpc>
+                <a:spcPct val="125000"/>
+              </a:lnSpc>
+              <a:buNone/>
+            </a:pPr>
+            <a:r>
+              <a:rPr lang="en-US" sz="1300" dirty="0">
+                <a:solidFill>
+                  <a:srgbClr val="16211F"/>
+                </a:solidFill>
+                <a:latin typeface="Yu Gothic" pitchFamily="34" charset="0"/>
+                <a:ea typeface="Yu Gothic" pitchFamily="34" charset="-122"/>
+                <a:cs typeface="Yu Gothic" pitchFamily="34" charset="-120"/>
+              </a:rPr>
+              <a:t>自体の誤削除も、設定で</a:t>
+            </a:r>
+            <a:endParaRPr lang="en-US" sz="1300" dirty="0"/>
+          </a:p>
+          <a:p>
+            <a:pPr indent="0" marL="0">
+              <a:lnSpc>
+                <a:spcPct val="125000"/>
+              </a:lnSpc>
+              <a:buNone/>
+            </a:pPr>
+            <a:r>
+              <a:rPr lang="en-US" sz="1300" dirty="0">
+                <a:solidFill>
+                  <a:srgbClr val="16211F"/>
+                </a:solidFill>
+                <a:latin typeface="Yu Gothic" pitchFamily="34" charset="0"/>
+                <a:ea typeface="Yu Gothic" pitchFamily="34" charset="-122"/>
+                <a:cs typeface="Yu Gothic" pitchFamily="34" charset="-120"/>
+              </a:rPr>
+              <a:t>できないようにしています。</a:t>
+            </a:r>
+            <a:endParaRPr lang="en-US" sz="1300" dirty="0"/>
+          </a:p>
         </p:txBody>
       </p:sp>
       <p:sp>
@@ -10240,46 +10279,7 @@
         </p:nvSpPr>
         <p:spPr>
           <a:xfrm>
-            <a:off x="2743200" y="5724144"/>
-            <a:ext cx="8503920" cy="292608"/>
-          </a:xfrm>
-          <a:prstGeom prst="rect">
-            <a:avLst/>
-          </a:prstGeom>
-          <a:noFill/>
-          <a:ln/>
-        </p:spPr>
-        <p:txBody>
-          <a:bodyPr wrap="square" lIns="0" tIns="0" rIns="0" bIns="0" rtlCol="0" anchor="ctr"/>
-          <a:lstStyle/>
-          <a:p>
-            <a:pPr indent="0" marL="0">
-              <a:buNone/>
-            </a:pPr>
-            <a:r>
-              <a:rPr lang="en-US" sz="1250" dirty="0">
-                <a:solidFill>
-                  <a:srgbClr val="FFFFFF"/>
-                </a:solidFill>
-                <a:latin typeface="Yu Gothic" pitchFamily="34" charset="0"/>
-                <a:ea typeface="Yu Gothic" pitchFamily="34" charset="-122"/>
-                <a:cs typeface="Yu Gothic" pitchFamily="34" charset="-120"/>
-              </a:rPr>
-              <a:t>保存時は Google Cloud の既定で暗号化。基盤は ISO/IEC 27001・27017・27018 と SOC 2/3 を取得しています。</a:t>
-            </a:r>
-            <a:endParaRPr lang="en-US" sz="1250" dirty="0"/>
-          </a:p>
-        </p:txBody>
-      </p:sp>
-      <p:sp>
-        <p:nvSpPr>
-          <p:cNvPr id="32" name="Text 30"/>
-          <p:cNvSpPr/>
-          <p:nvPr/>
-        </p:nvSpPr>
-        <p:spPr>
-          <a:xfrm>
-            <a:off x="731520" y="6309360"/>
+            <a:off x="731520" y="6355080"/>
             <a:ext cx="10698480" cy="365760"/>
           </a:xfrm>
           <a:prstGeom prst="rect">
@@ -10296,7 +10296,7 @@
               <a:buNone/>
             </a:pPr>
             <a:r>
-              <a:rPr lang="en-US" sz="1200" i="1" dirty="0">
+              <a:rPr lang="en-US" sz="1300" i="1" dirty="0">
                 <a:solidFill>
                   <a:srgbClr val="5C6B68"/>
                 </a:solidFill>
@@ -10304,9 +10304,9 @@
                 <a:ea typeface="Yu Gothic" pitchFamily="34" charset="-122"/>
                 <a:cs typeface="Yu Gothic" pitchFamily="34" charset="-120"/>
               </a:rPr>
-              <a:t>※ 基盤事業者は Google Cloud Japan ですが、米国法の適用可能性は完全には排除できません。当社自身のPマーク／ISMSも未取得です（次ページ）。</a:t>
-            </a:r>
-            <a:endParaRPr lang="en-US" sz="1200" dirty="0"/>
+              <a:t>この3つは、紙のカルテで当たり前に成り立っていたことを、電子でも同じ水準にするための決まりです。</a:t>
+            </a:r>
+            <a:endParaRPr lang="en-US" sz="1300" dirty="0"/>
           </a:p>
         </p:txBody>
       </p:sp>

--- a/PharmaCare_紹介資料.pptx
+++ b/PharmaCare_紹介資料.pptx
@@ -4,6 +4,9 @@
   <p:sldMasterIdLst>
     <p:sldMasterId id="2147483648" r:id="rId1"/>
   </p:sldMasterIdLst>
+  <p:notesMasterIdLst>
+    <p:notesMasterId r:id="rId26"/>
+  </p:notesMasterIdLst>
   <p:sldIdLst>
     <p:sldId id="256" r:id="rId2"/>
     <p:sldId id="257" r:id="rId3"/>
@@ -27,10 +30,9 @@
     <p:sldId id="275" r:id="rId21"/>
     <p:sldId id="276" r:id="rId22"/>
     <p:sldId id="277" r:id="rId23"/>
+    <p:sldId id="278" r:id="rId24"/>
+    <p:sldId id="279" r:id="rId25"/>
   </p:sldIdLst>
-  <p:notesMasterIdLst>
-    <p:notesMasterId r:id="rId24"/>
-  </p:notesMasterIdLst>
   <p:sldSz cx="12192000" cy="6858000"/>
   <p:notesSz cx="6858000" cy="12192000"/>
   <p:defaultTextStyle>
@@ -125,13 +127,20 @@
       </a:defRPr>
     </a:lvl9pPr>
   </p:defaultTextStyle>
+  <p:extLst>
+    <p:ext uri="{EFAFB233-063F-42B5-8137-9DF3F51BA10A}">
+      <p15:sldGuideLst xmlns:p15="http://schemas.microsoft.com/office/powerpoint/2012/main"/>
+    </p:ext>
+  </p:extLst>
 </p:presentation>
 </file>
 
 <file path=ppt/charts/chart1.xml><?xml version="1.0" encoding="utf-8"?>
-<c:chartSpace xmlns:c="http://schemas.openxmlformats.org/drawingml/2006/chart" xmlns:a="http://schemas.openxmlformats.org/drawingml/2006/main" xmlns:r="http://schemas.openxmlformats.org/officeDocument/2006/relationships">
+<c:chartSpace xmlns:c="http://schemas.openxmlformats.org/drawingml/2006/chart" xmlns:a="http://schemas.openxmlformats.org/drawingml/2006/main" xmlns:r="http://schemas.openxmlformats.org/officeDocument/2006/relationships" xmlns:c16r2="http://schemas.microsoft.com/office/drawing/2015/06/chart">
   <c:date1904 val="0"/>
+  <c:lang val="ja-JP"/>
   <c:roundedCorners val="1"/>
+  <c:style val="2"/>
   <c:chart>
     <c:title>
       <c:tx>
@@ -148,18 +157,35 @@
               </a:defRPr>
             </a:pPr>
             <a:r>
-              <a:rPr sz="1400" b="0" i="0" u="none" strike="noStrike">
+              <a:rPr lang="ja-JP" altLang="en-US" sz="1400" b="0" i="0" u="none" strike="noStrike">
                 <a:solidFill>
                   <a:srgbClr val="14504B"/>
                 </a:solidFill>
                 <a:latin typeface="Yu Gothic"/>
               </a:rPr>
-              <a:t>横ばいの群を1としたときの、尿蛋白の出やすさ</a:t>
+              <a:t>横ばいの群を</a:t>
+            </a:r>
+            <a:r>
+              <a:rPr lang="en-US" altLang="ja-JP" sz="1400" b="0" i="0" u="none" strike="noStrike">
+                <a:solidFill>
+                  <a:srgbClr val="14504B"/>
+                </a:solidFill>
+                <a:latin typeface="Yu Gothic"/>
+              </a:rPr>
+              <a:t>1</a:t>
+            </a:r>
+            <a:r>
+              <a:rPr lang="ja-JP" altLang="en-US" sz="1400" b="0" i="0" u="none" strike="noStrike">
+                <a:solidFill>
+                  <a:srgbClr val="14504B"/>
+                </a:solidFill>
+                <a:latin typeface="Yu Gothic"/>
+              </a:rPr>
+              <a:t>としたときの、尿蛋白の出やすさ</a:t>
             </a:r>
           </a:p>
         </c:rich>
       </c:tx>
-      <c:layout/>
       <c:overlay val="0"/>
     </c:title>
     <c:autoTitleDeleted val="0"/>
@@ -190,51 +216,25 @@
             <a:effectLst/>
           </c:spPr>
           <c:invertIfNegative val="0"/>
-          <c:dLbls>
-            <c:numFmt formatCode="0.00" sourceLinked="0"/>
-            <c:txPr>
-              <a:bodyPr/>
-              <a:lstStyle/>
-              <a:p>
-                <a:pPr>
-                  <a:defRPr b="0" i="0" strike="noStrike" sz="1400" u="none">
-                    <a:solidFill>
-                      <a:srgbClr val="16211F"/>
-                    </a:solidFill>
-                    <a:latin typeface="Calibri"/>
-                  </a:defRPr>
-                </a:pPr>
-              </a:p>
-            </c:txPr>
-            <c:showLegendKey val="0"/>
-            <c:showVal val="1"/>
-            <c:showCatName val="0"/>
-            <c:showSerName val="0"/>
-            <c:showPercent val="0"/>
-            <c:showBubbleSize val="0"/>
-            <c:showLeaderLines val="0"/>
-          </c:dLbls>
           <c:dPt>
             <c:idx val="0"/>
             <c:invertIfNegative val="0"/>
             <c:bubble3D val="0"/>
-            <c:spPr>
-              <a:solidFill>
-                <a:srgbClr val="A8CFC9"/>
-              </a:solidFill>
-              <a:effectLst/>
-            </c:spPr>
+            <c:extLst>
+              <c:ext xmlns:c16="http://schemas.microsoft.com/office/drawing/2014/chart" uri="{C3380CC4-5D6E-409C-BE32-E72D297353CC}">
+                <c16:uniqueId val="{00000001-1E4F-43E4-9F80-FAB207C45401}"/>
+              </c:ext>
+            </c:extLst>
           </c:dPt>
           <c:dPt>
             <c:idx val="1"/>
             <c:invertIfNegative val="0"/>
             <c:bubble3D val="0"/>
-            <c:spPr>
-              <a:solidFill>
-                <a:srgbClr val="A8CFC9"/>
-              </a:solidFill>
-              <a:effectLst/>
-            </c:spPr>
+            <c:extLst>
+              <c:ext xmlns:c16="http://schemas.microsoft.com/office/drawing/2014/chart" uri="{C3380CC4-5D6E-409C-BE32-E72D297353CC}">
+                <c16:uniqueId val="{00000003-1E4F-43E4-9F80-FAB207C45401}"/>
+              </c:ext>
+            </c:extLst>
           </c:dPt>
           <c:dPt>
             <c:idx val="2"/>
@@ -246,25 +246,65 @@
               </a:solidFill>
               <a:effectLst/>
             </c:spPr>
+            <c:extLst>
+              <c:ext xmlns:c16="http://schemas.microsoft.com/office/drawing/2014/chart" uri="{C3380CC4-5D6E-409C-BE32-E72D297353CC}">
+                <c16:uniqueId val="{00000005-1E4F-43E4-9F80-FAB207C45401}"/>
+              </c:ext>
+            </c:extLst>
           </c:dPt>
+          <c:dLbls>
+            <c:numFmt formatCode="0.00" sourceLinked="0"/>
+            <c:spPr>
+              <a:noFill/>
+              <a:ln>
+                <a:noFill/>
+              </a:ln>
+              <a:effectLst/>
+            </c:spPr>
+            <c:txPr>
+              <a:bodyPr/>
+              <a:lstStyle/>
+              <a:p>
+                <a:pPr>
+                  <a:defRPr sz="1400" b="0" i="0" u="none" strike="noStrike">
+                    <a:solidFill>
+                      <a:srgbClr val="16211F"/>
+                    </a:solidFill>
+                    <a:latin typeface="Calibri"/>
+                  </a:defRPr>
+                </a:pPr>
+                <a:endParaRPr lang="ja-JP"/>
+              </a:p>
+            </c:txPr>
+            <c:showLegendKey val="0"/>
+            <c:showVal val="1"/>
+            <c:showCatName val="0"/>
+            <c:showSerName val="0"/>
+            <c:showPercent val="0"/>
+            <c:showBubbleSize val="0"/>
+            <c:showLeaderLines val="0"/>
+            <c:extLst>
+              <c:ext xmlns:c15="http://schemas.microsoft.com/office/drawing/2012/chart" uri="{CE6537A1-D6FC-4f65-9D91-7224C49458BB}">
+                <c15:showLeaderLines val="0"/>
+              </c:ext>
+            </c:extLst>
+          </c:dLbls>
           <c:cat>
-            <c:multiLvlStrRef>
+            <c:strRef>
               <c:f>Sheet1!$A$2:$A$4</c:f>
-              <c:multiLvlStrCache>
+              <c:strCache>
                 <c:ptCount val="3"/>
-                <c:lvl>
-                  <c:pt idx="0">
-                    <c:v>減った</c:v>
-                  </c:pt>
-                  <c:pt idx="1">
-                    <c:v>横ばい（基準）</c:v>
-                  </c:pt>
-                  <c:pt idx="2">
-                    <c:v>増えた</c:v>
-                  </c:pt>
-                </c:lvl>
-              </c:multiLvlStrCache>
-            </c:multiLvlStrRef>
+                <c:pt idx="0">
+                  <c:v>減った</c:v>
+                </c:pt>
+                <c:pt idx="1">
+                  <c:v>横ばい（基準）</c:v>
+                </c:pt>
+                <c:pt idx="2">
+                  <c:v>増えた</c:v>
+                </c:pt>
+              </c:strCache>
+            </c:strRef>
           </c:cat>
           <c:val>
             <c:numRef>
@@ -273,7 +313,7 @@
                 <c:formatCode>General</c:formatCode>
                 <c:ptCount val="3"/>
                 <c:pt idx="0">
-                  <c:v>1.16</c:v>
+                  <c:v>1.1599999999999999</c:v>
                 </c:pt>
                 <c:pt idx="1">
                   <c:v>1</c:v>
@@ -284,36 +324,23 @@
               </c:numCache>
             </c:numRef>
           </c:val>
+          <c:extLst>
+            <c:ext xmlns:c16="http://schemas.microsoft.com/office/drawing/2014/chart" uri="{C3380CC4-5D6E-409C-BE32-E72D297353CC}">
+              <c16:uniqueId val="{00000006-1E4F-43E4-9F80-FAB207C45401}"/>
+            </c:ext>
+          </c:extLst>
         </c:ser>
         <c:dLbls>
-          <c:numFmt formatCode="0.00" sourceLinked="0"/>
-          <c:txPr>
-            <a:bodyPr/>
-            <a:lstStyle/>
-            <a:p>
-              <a:pPr>
-                <a:defRPr b="0" i="0" strike="noStrike" sz="1400" u="none">
-                  <a:solidFill>
-                    <a:srgbClr val="16211F"/>
-                  </a:solidFill>
-                  <a:latin typeface="Calibri"/>
-                </a:defRPr>
-              </a:pPr>
-            </a:p>
-          </c:txPr>
           <c:showLegendKey val="0"/>
           <c:showVal val="1"/>
           <c:showCatName val="0"/>
           <c:showSerName val="0"/>
           <c:showPercent val="0"/>
           <c:showBubbleSize val="0"/>
-          <c:showLeaderLines val="0"/>
         </c:dLbls>
         <c:gapWidth val="55"/>
-        <c:overlap val="0"/>
         <c:axId val="2094734554"/>
         <c:axId val="2094734552"/>
-        <c:axId val="2094734556"/>
       </c:barChart>
       <c:catAx>
         <c:axId val="2094734554"/>
@@ -354,6 +381,7 @@
         <c:crosses val="autoZero"/>
         <c:auto val="1"/>
         <c:lblAlgn val="ctr"/>
+        <c:lblOffset val="100"/>
         <c:noMultiLvlLbl val="1"/>
       </c:catAx>
       <c:valAx>
@@ -418,6 +446,7 @@
     </c:plotArea>
     <c:plotVisOnly val="1"/>
     <c:dispBlanksAs val="span"/>
+    <c:showDLblsOverMax val="1"/>
   </c:chart>
   <c:spPr>
     <a:noFill/>
@@ -454,241 +483,17 @@
           <a:chExt cx="0" cy="0"/>
         </a:xfrm>
       </p:grpSpPr>
-      <p:sp>
-        <p:nvSpPr>
-          <p:cNvPr id="2" name="Header Placeholder 1"/>
-          <p:cNvSpPr>
-            <a:spLocks noGrp="1"/>
-          </p:cNvSpPr>
-          <p:nvPr>
-            <p:ph type="hdr" sz="quarter"/>
-          </p:nvPr>
-        </p:nvSpPr>
-        <p:spPr>
-          <a:xfrm>
-            <a:off x="0" y="0"/>
-            <a:ext cx="2971800" cy="458788"/>
-          </a:xfrm>
-          <a:prstGeom prst="rect">
-            <a:avLst/>
-          </a:prstGeom>
-        </p:spPr>
-        <p:txBody>
-          <a:bodyPr vert="horz" lIns="91440" tIns="45720" rIns="91440" bIns="45720" rtlCol="0"/>
-          <a:lstStyle>
-            <a:lvl1pPr algn="l">
-              <a:defRPr sz="1200"/>
-            </a:lvl1pPr>
-          </a:lstStyle>
-          <a:p>
-            <a:endParaRPr lang="en-US"/>
-          </a:p>
-        </p:txBody>
-      </p:sp>
-      <p:sp>
-        <p:nvSpPr>
-          <p:cNvPr id="3" name="Date Placeholder 2"/>
-          <p:cNvSpPr>
-            <a:spLocks noGrp="1"/>
-          </p:cNvSpPr>
-          <p:nvPr>
-            <p:ph type="dt" idx="1"/>
-          </p:nvPr>
-        </p:nvSpPr>
-        <p:spPr>
-          <a:xfrm>
-            <a:off x="3884613" y="0"/>
-            <a:ext cx="2971800" cy="458788"/>
-          </a:xfrm>
-          <a:prstGeom prst="rect">
-            <a:avLst/>
-          </a:prstGeom>
-        </p:spPr>
-        <p:txBody>
-          <a:bodyPr vert="horz" lIns="91440" tIns="45720" rIns="91440" bIns="45720" rtlCol="0"/>
-          <a:lstStyle>
-            <a:lvl1pPr algn="r">
-              <a:defRPr sz="1200"/>
-            </a:lvl1pPr>
-          </a:lstStyle>
-          <a:p>
-            <a:fld id="{5282F153-3F37-0F45-9E97-73ACFA13230C}" type="datetimeFigureOut">
-              <a:rPr lang="en-US"/>
-              <a:t>7/23/19</a:t>
-            </a:fld>
-            <a:endParaRPr lang="en-US"/>
-          </a:p>
-        </p:txBody>
-      </p:sp>
-      <p:sp>
-        <p:nvSpPr>
-          <p:cNvPr id="4" name="Slide Image Placeholder 3"/>
-          <p:cNvSpPr>
-            <a:spLocks noGrp="1" noRot="1" noChangeAspect="1"/>
-          </p:cNvSpPr>
-          <p:nvPr>
-            <p:ph type="sldImg" idx="2"/>
-          </p:nvPr>
-        </p:nvSpPr>
-        <p:spPr>
-          <a:xfrm>
-            <a:off x="685800" y="1143000"/>
-            <a:ext cx="5486400" cy="3086100"/>
-          </a:xfrm>
-          <a:prstGeom prst="rect">
-            <a:avLst/>
-          </a:prstGeom>
-          <a:noFill/>
-          <a:ln w="12700">
-            <a:solidFill>
-              <a:prstClr val="black"/>
-            </a:solidFill>
-          </a:ln>
-        </p:spPr>
-        <p:txBody>
-          <a:bodyPr vert="horz" lIns="91440" tIns="45720" rIns="91440" bIns="45720" rtlCol="0" anchor="ctr"/>
-          <a:lstStyle/>
-          <a:p>
-            <a:endParaRPr lang="en-US"/>
-          </a:p>
-        </p:txBody>
-      </p:sp>
-      <p:sp>
-        <p:nvSpPr>
-          <p:cNvPr id="5" name="Notes Placeholder 4"/>
-          <p:cNvSpPr>
-            <a:spLocks noGrp="1"/>
-          </p:cNvSpPr>
-          <p:nvPr>
-            <p:ph type="body" sz="quarter" idx="3"/>
-          </p:nvPr>
-        </p:nvSpPr>
-        <p:spPr>
-          <a:xfrm>
-            <a:off x="685800" y="4400550"/>
-            <a:ext cx="5486400" cy="3600450"/>
-          </a:xfrm>
-          <a:prstGeom prst="rect">
-            <a:avLst/>
-          </a:prstGeom>
-        </p:spPr>
-        <p:txBody>
-          <a:bodyPr vert="horz" lIns="91440" tIns="45720" rIns="91440" bIns="45720" rtlCol="0"/>
-          <a:lstStyle/>
-          <a:p>
-            <a:pPr lvl="0"/>
-            <a:r>
-              <a:rPr lang="en-US"/>
-              <a:t>Click to edit Master text styles</a:t>
-            </a:r>
-          </a:p>
-          <a:p>
-            <a:pPr lvl="1"/>
-            <a:r>
-              <a:rPr lang="en-US"/>
-              <a:t>Second level</a:t>
-            </a:r>
-          </a:p>
-          <a:p>
-            <a:pPr lvl="2"/>
-            <a:r>
-              <a:rPr lang="en-US"/>
-              <a:t>Third level</a:t>
-            </a:r>
-          </a:p>
-          <a:p>
-            <a:pPr lvl="3"/>
-            <a:r>
-              <a:rPr lang="en-US"/>
-              <a:t>Fourth level</a:t>
-            </a:r>
-          </a:p>
-          <a:p>
-            <a:pPr lvl="4"/>
-            <a:r>
-              <a:rPr lang="en-US"/>
-              <a:t>Fifth level</a:t>
-            </a:r>
-          </a:p>
-        </p:txBody>
-      </p:sp>
-      <p:sp>
-        <p:nvSpPr>
-          <p:cNvPr id="6" name="Footer Placeholder 5"/>
-          <p:cNvSpPr>
-            <a:spLocks noGrp="1"/>
-          </p:cNvSpPr>
-          <p:nvPr>
-            <p:ph type="ftr" sz="quarter" idx="4"/>
-          </p:nvPr>
-        </p:nvSpPr>
-        <p:spPr>
-          <a:xfrm>
-            <a:off x="0" y="8685213"/>
-            <a:ext cx="2971800" cy="458787"/>
-          </a:xfrm>
-          <a:prstGeom prst="rect">
-            <a:avLst/>
-          </a:prstGeom>
-        </p:spPr>
-        <p:txBody>
-          <a:bodyPr vert="horz" lIns="91440" tIns="45720" rIns="91440" bIns="45720" rtlCol="0" anchor="b"/>
-          <a:lstStyle>
-            <a:lvl1pPr algn="l">
-              <a:defRPr sz="1200"/>
-            </a:lvl1pPr>
-          </a:lstStyle>
-          <a:p>
-            <a:endParaRPr lang="en-US"/>
-          </a:p>
-        </p:txBody>
-      </p:sp>
-      <p:sp>
-        <p:nvSpPr>
-          <p:cNvPr id="7" name="Slide Number Placeholder 6"/>
-          <p:cNvSpPr>
-            <a:spLocks noGrp="1"/>
-          </p:cNvSpPr>
-          <p:nvPr>
-            <p:ph type="sldNum" sz="quarter" idx="5"/>
-          </p:nvPr>
-        </p:nvSpPr>
-        <p:spPr>
-          <a:xfrm>
-            <a:off x="3884613" y="8685213"/>
-            <a:ext cx="2971800" cy="458787"/>
-          </a:xfrm>
-          <a:prstGeom prst="rect">
-            <a:avLst/>
-          </a:prstGeom>
-        </p:spPr>
-        <p:txBody>
-          <a:bodyPr vert="horz" lIns="91440" tIns="45720" rIns="91440" bIns="45720" rtlCol="0" anchor="b"/>
-          <a:lstStyle>
-            <a:lvl1pPr algn="r">
-              <a:defRPr sz="1200"/>
-            </a:lvl1pPr>
-          </a:lstStyle>
-          <a:p>
-            <a:fld id="{CE5E9CC1-C706-0F49-92D6-E571CC5EEA8F}" type="slidenum">
-              <a:rPr lang="en-US"/>
-              <a:t>‹#›</a:t>
-            </a:fld>
-            <a:endParaRPr lang="en-US"/>
-          </a:p>
-        </p:txBody>
-      </p:sp>
     </p:spTree>
     <p:extLst>
       <p:ext uri="{BB962C8B-B14F-4D97-AF65-F5344CB8AC3E}">
-        <p14:creationId xmlns:p14="http://schemas.microsoft.com/office/powerpoint/2010/main" val="1024086991"/>
+        <p14:creationId xmlns:p14="http://schemas.microsoft.com/office/powerpoint/2010/main" val="2214276984"/>
       </p:ext>
     </p:extLst>
   </p:cSld>
   <p:clrMap bg1="lt1" tx1="dk1" bg2="lt2" tx2="dk2" accent1="accent1" accent2="accent2" accent3="accent3" accent4="accent4" accent5="accent5" accent6="accent6" hlink="hlink" folHlink="folHlink"/>
   <p:notesStyle>
     <a:lvl1pPr marL="0" algn="l" defTabSz="914400" rtl="0" eaLnBrk="1" latinLnBrk="0" hangingPunct="1">
-      <a:defRPr sz="1200" kern="1200">
+      <a:defRPr kumimoji="1" sz="1200" kern="1200">
         <a:solidFill>
           <a:schemeClr val="tx1"/>
         </a:solidFill>
@@ -698,7 +503,7 @@
       </a:defRPr>
     </a:lvl1pPr>
     <a:lvl2pPr marL="457200" algn="l" defTabSz="914400" rtl="0" eaLnBrk="1" latinLnBrk="0" hangingPunct="1">
-      <a:defRPr sz="1200" kern="1200">
+      <a:defRPr kumimoji="1" sz="1200" kern="1200">
         <a:solidFill>
           <a:schemeClr val="tx1"/>
         </a:solidFill>
@@ -708,7 +513,7 @@
       </a:defRPr>
     </a:lvl2pPr>
     <a:lvl3pPr marL="914400" algn="l" defTabSz="914400" rtl="0" eaLnBrk="1" latinLnBrk="0" hangingPunct="1">
-      <a:defRPr sz="1200" kern="1200">
+      <a:defRPr kumimoji="1" sz="1200" kern="1200">
         <a:solidFill>
           <a:schemeClr val="tx1"/>
         </a:solidFill>
@@ -718,7 +523,7 @@
       </a:defRPr>
     </a:lvl3pPr>
     <a:lvl4pPr marL="1371600" algn="l" defTabSz="914400" rtl="0" eaLnBrk="1" latinLnBrk="0" hangingPunct="1">
-      <a:defRPr sz="1200" kern="1200">
+      <a:defRPr kumimoji="1" sz="1200" kern="1200">
         <a:solidFill>
           <a:schemeClr val="tx1"/>
         </a:solidFill>
@@ -728,7 +533,7 @@
       </a:defRPr>
     </a:lvl4pPr>
     <a:lvl5pPr marL="1828800" algn="l" defTabSz="914400" rtl="0" eaLnBrk="1" latinLnBrk="0" hangingPunct="1">
-      <a:defRPr sz="1200" kern="1200">
+      <a:defRPr kumimoji="1" sz="1200" kern="1200">
         <a:solidFill>
           <a:schemeClr val="tx1"/>
         </a:solidFill>
@@ -738,7 +543,7 @@
       </a:defRPr>
     </a:lvl5pPr>
     <a:lvl6pPr marL="2286000" algn="l" defTabSz="914400" rtl="0" eaLnBrk="1" latinLnBrk="0" hangingPunct="1">
-      <a:defRPr sz="1200" kern="1200">
+      <a:defRPr kumimoji="1" sz="1200" kern="1200">
         <a:solidFill>
           <a:schemeClr val="tx1"/>
         </a:solidFill>
@@ -748,7 +553,7 @@
       </a:defRPr>
     </a:lvl6pPr>
     <a:lvl7pPr marL="2743200" algn="l" defTabSz="914400" rtl="0" eaLnBrk="1" latinLnBrk="0" hangingPunct="1">
-      <a:defRPr sz="1200" kern="1200">
+      <a:defRPr kumimoji="1" sz="1200" kern="1200">
         <a:solidFill>
           <a:schemeClr val="tx1"/>
         </a:solidFill>
@@ -758,7 +563,7 @@
       </a:defRPr>
     </a:lvl7pPr>
     <a:lvl8pPr marL="3200400" algn="l" defTabSz="914400" rtl="0" eaLnBrk="1" latinLnBrk="0" hangingPunct="1">
-      <a:defRPr sz="1200" kern="1200">
+      <a:defRPr kumimoji="1" sz="1200" kern="1200">
         <a:solidFill>
           <a:schemeClr val="tx1"/>
         </a:solidFill>
@@ -768,7 +573,7 @@
       </a:defRPr>
     </a:lvl8pPr>
     <a:lvl9pPr marL="3657600" algn="l" defTabSz="914400" rtl="0" eaLnBrk="1" latinLnBrk="0" hangingPunct="1">
-      <a:defRPr sz="1200" kern="1200">
+      <a:defRPr kumimoji="1" sz="1200" kern="1200">
         <a:solidFill>
           <a:schemeClr val="tx1"/>
         </a:solidFill>
@@ -825,10 +630,6 @@
           <a:bodyPr/>
           <a:lstStyle/>
           <a:p>
-            <a:r>
-              <a:rPr lang="en-US" dirty="0"/>
-              <a:t/>
-            </a:r>
             <a:endParaRPr lang="en-US" dirty="0"/>
           </a:p>
         </p:txBody>
@@ -913,10 +714,6 @@
           <a:bodyPr/>
           <a:lstStyle/>
           <a:p>
-            <a:r>
-              <a:rPr lang="en-US" dirty="0"/>
-              <a:t/>
-            </a:r>
             <a:endParaRPr lang="en-US" dirty="0"/>
           </a:p>
         </p:txBody>
@@ -1001,10 +798,6 @@
           <a:bodyPr/>
           <a:lstStyle/>
           <a:p>
-            <a:r>
-              <a:rPr lang="en-US" dirty="0"/>
-              <a:t/>
-            </a:r>
             <a:endParaRPr lang="en-US" dirty="0"/>
           </a:p>
         </p:txBody>
@@ -1089,10 +882,6 @@
           <a:bodyPr/>
           <a:lstStyle/>
           <a:p>
-            <a:r>
-              <a:rPr lang="en-US" dirty="0"/>
-              <a:t/>
-            </a:r>
             <a:endParaRPr lang="en-US" dirty="0"/>
           </a:p>
         </p:txBody>
@@ -1177,10 +966,6 @@
           <a:bodyPr/>
           <a:lstStyle/>
           <a:p>
-            <a:r>
-              <a:rPr lang="en-US" dirty="0"/>
-              <a:t/>
-            </a:r>
             <a:endParaRPr lang="en-US" dirty="0"/>
           </a:p>
         </p:txBody>
@@ -1269,7 +1054,6 @@
               <a:rPr lang="en-US" dirty="0"/>
               <a:t>「東京に置いています」で終わらせない。なぜ東京でなければならないかまで言えると、預ける側は判断できる。</a:t>
             </a:r>
-            <a:endParaRPr lang="en-US" dirty="0"/>
           </a:p>
         </p:txBody>
       </p:sp>
@@ -1353,10 +1137,6 @@
           <a:bodyPr/>
           <a:lstStyle/>
           <a:p>
-            <a:r>
-              <a:rPr lang="en-US" dirty="0"/>
-              <a:t/>
-            </a:r>
             <a:endParaRPr lang="en-US" dirty="0"/>
           </a:p>
         </p:txBody>
@@ -1445,7 +1225,6 @@
               <a:rPr lang="en-US" dirty="0"/>
               <a:t>隠さず出すことが、医療情報を預かる事業者としての信頼につながる。指摘される前に自分から言う。</a:t>
             </a:r>
-            <a:endParaRPr lang="en-US" dirty="0"/>
           </a:p>
         </p:txBody>
       </p:sp>
@@ -1529,10 +1308,6 @@
           <a:bodyPr/>
           <a:lstStyle/>
           <a:p>
-            <a:r>
-              <a:rPr lang="en-US" dirty="0"/>
-              <a:t/>
-            </a:r>
             <a:endParaRPr lang="en-US" dirty="0"/>
           </a:p>
         </p:txBody>
@@ -1617,10 +1392,6 @@
           <a:bodyPr/>
           <a:lstStyle/>
           <a:p>
-            <a:r>
-              <a:rPr lang="en-US" dirty="0"/>
-              <a:t/>
-            </a:r>
             <a:endParaRPr lang="en-US" dirty="0"/>
           </a:p>
         </p:txBody>
@@ -1705,10 +1476,6 @@
           <a:bodyPr/>
           <a:lstStyle/>
           <a:p>
-            <a:r>
-              <a:rPr lang="en-US" dirty="0"/>
-              <a:t/>
-            </a:r>
             <a:endParaRPr lang="en-US" dirty="0"/>
           </a:p>
         </p:txBody>
@@ -1793,10 +1560,6 @@
           <a:bodyPr/>
           <a:lstStyle/>
           <a:p>
-            <a:r>
-              <a:rPr lang="en-US" dirty="0"/>
-              <a:t/>
-            </a:r>
             <a:endParaRPr lang="en-US" dirty="0"/>
           </a:p>
         </p:txBody>
@@ -1885,7 +1648,6 @@
               <a:rPr lang="en-US" dirty="0"/>
               <a:t>この資料の中心メッセージ。データ→研究→現場の実践、という流れを示す。</a:t>
             </a:r>
-            <a:endParaRPr lang="en-US" dirty="0"/>
           </a:p>
         </p:txBody>
       </p:sp>
@@ -1969,10 +1731,6 @@
           <a:bodyPr/>
           <a:lstStyle/>
           <a:p>
-            <a:r>
-              <a:rPr lang="en-US" dirty="0"/>
-              <a:t/>
-            </a:r>
             <a:endParaRPr lang="en-US" dirty="0"/>
           </a:p>
         </p:txBody>
@@ -2057,10 +1815,6 @@
           <a:bodyPr/>
           <a:lstStyle/>
           <a:p>
-            <a:r>
-              <a:rPr lang="en-US" dirty="0"/>
-              <a:t/>
-            </a:r>
             <a:endParaRPr lang="en-US" dirty="0"/>
           </a:p>
         </p:txBody>
@@ -2145,10 +1899,6 @@
           <a:bodyPr/>
           <a:lstStyle/>
           <a:p>
-            <a:r>
-              <a:rPr lang="en-US" dirty="0"/>
-              <a:t/>
-            </a:r>
             <a:endParaRPr lang="en-US" dirty="0"/>
           </a:p>
         </p:txBody>
@@ -2233,10 +1983,6 @@
           <a:bodyPr/>
           <a:lstStyle/>
           <a:p>
-            <a:r>
-              <a:rPr lang="en-US" dirty="0"/>
-              <a:t/>
-            </a:r>
             <a:endParaRPr lang="en-US" dirty="0"/>
           </a:p>
         </p:txBody>
@@ -2321,10 +2067,6 @@
           <a:bodyPr/>
           <a:lstStyle/>
           <a:p>
-            <a:r>
-              <a:rPr lang="en-US" dirty="0"/>
-              <a:t/>
-            </a:r>
             <a:endParaRPr lang="en-US" dirty="0"/>
           </a:p>
         </p:txBody>
@@ -2409,10 +2151,6 @@
           <a:bodyPr/>
           <a:lstStyle/>
           <a:p>
-            <a:r>
-              <a:rPr lang="en-US" dirty="0"/>
-              <a:t/>
-            </a:r>
             <a:endParaRPr lang="en-US" dirty="0"/>
           </a:p>
         </p:txBody>
@@ -2497,10 +2235,6 @@
           <a:bodyPr/>
           <a:lstStyle/>
           <a:p>
-            <a:r>
-              <a:rPr lang="en-US" dirty="0"/>
-              <a:t/>
-            </a:r>
             <a:endParaRPr lang="en-US" dirty="0"/>
           </a:p>
         </p:txBody>
@@ -2589,7 +2323,6 @@
               <a:rPr lang="en-US" dirty="0"/>
               <a:t>資料の要点は「出典がある」ことではなく「専門職でなくても答えられる形に直した」こと。ここが一番手間のかかった部分。</a:t>
             </a:r>
-            <a:endParaRPr lang="en-US" dirty="0"/>
           </a:p>
         </p:txBody>
       </p:sp>
@@ -2673,10 +2406,6 @@
           <a:bodyPr/>
           <a:lstStyle/>
           <a:p>
-            <a:r>
-              <a:rPr lang="en-US" dirty="0"/>
-              <a:t/>
-            </a:r>
             <a:endParaRPr lang="en-US" dirty="0"/>
           </a:p>
         </p:txBody>
@@ -2750,6 +2479,11 @@
 <file path=ppt/slideMasters/slideMaster1.xml><?xml version="1.0" encoding="utf-8"?>
 <p:sldMaster xmlns:a="http://schemas.openxmlformats.org/drawingml/2006/main" xmlns:r="http://schemas.openxmlformats.org/officeDocument/2006/relationships" xmlns:p="http://schemas.openxmlformats.org/presentationml/2006/main">
   <p:cSld>
+    <p:bg>
+      <p:bgRef idx="1001">
+        <a:schemeClr val="bg1"/>
+      </p:bgRef>
+    </p:bg>
     <p:spTree>
       <p:nvGrpSpPr>
         <p:cNvPr id="1" name=""/>
@@ -3032,6 +2766,7 @@
         <a:solidFill>
           <a:srgbClr val="14504B"/>
         </a:solidFill>
+        <a:effectLst/>
       </p:bgPr>
     </p:bg>
     <p:spTree>
@@ -3119,7 +2854,7 @@
           <a:bodyPr wrap="square" lIns="0" tIns="0" rIns="0" bIns="0" rtlCol="0" anchor="ctr"/>
           <a:lstStyle/>
           <a:p>
-            <a:pPr indent="0" marL="0">
+            <a:pPr marL="0" indent="0">
               <a:lnSpc>
                 <a:spcPct val="125000"/>
               </a:lnSpc>
@@ -3139,7 +2874,7 @@
             <a:endParaRPr lang="en-US" sz="4400" dirty="0"/>
           </a:p>
           <a:p>
-            <a:pPr indent="0" marL="0">
+            <a:pPr marL="0" indent="0">
               <a:lnSpc>
                 <a:spcPct val="125000"/>
               </a:lnSpc>
@@ -3206,7 +2941,7 @@
           <a:bodyPr wrap="square" lIns="0" tIns="0" rIns="0" bIns="0" rtlCol="0" anchor="ctr"/>
           <a:lstStyle/>
           <a:p>
-            <a:pPr indent="0" marL="0">
+            <a:pPr marL="0" indent="0">
               <a:buNone/>
             </a:pPr>
             <a:r>
@@ -3245,7 +2980,7 @@
           <a:bodyPr wrap="square" lIns="0" tIns="0" rIns="0" bIns="0" rtlCol="0" anchor="ctr"/>
           <a:lstStyle/>
           <a:p>
-            <a:pPr indent="0" marL="0">
+            <a:pPr marL="0" indent="0">
               <a:buNone/>
             </a:pPr>
             <a:r>
@@ -3284,7 +3019,7 @@
           <a:bodyPr wrap="square" lIns="0" tIns="0" rIns="0" bIns="0" rtlCol="0" anchor="ctr"/>
           <a:lstStyle/>
           <a:p>
-            <a:pPr indent="0" marL="0">
+            <a:pPr marL="0" indent="0">
               <a:buNone/>
             </a:pPr>
             <a:r>
@@ -3318,6 +3053,7 @@
         <a:solidFill>
           <a:srgbClr val="FFFFFF"/>
         </a:solidFill>
+        <a:effectLst/>
       </p:bgPr>
     </p:bg>
     <p:spTree>
@@ -3355,7 +3091,7 @@
           <a:bodyPr wrap="square" lIns="0" tIns="0" rIns="0" bIns="0" rtlCol="0" anchor="ctr"/>
           <a:lstStyle/>
           <a:p>
-            <a:pPr indent="0" marL="0">
+            <a:pPr marL="0" indent="0">
               <a:buNone/>
             </a:pPr>
             <a:r>
@@ -3394,7 +3130,7 @@
           <a:bodyPr wrap="square" lIns="0" tIns="0" rIns="0" bIns="0" rtlCol="0" anchor="ctr"/>
           <a:lstStyle/>
           <a:p>
-            <a:pPr indent="0" marL="0">
+            <a:pPr marL="0" indent="0">
               <a:buNone/>
             </a:pPr>
             <a:r>
@@ -3460,7 +3196,7 @@
           <a:bodyPr wrap="square" lIns="0" tIns="0" rIns="0" bIns="0" rtlCol="0" anchor="ctr"/>
           <a:lstStyle/>
           <a:p>
-            <a:pPr indent="0" marL="0">
+            <a:pPr marL="0" indent="0">
               <a:buNone/>
             </a:pPr>
             <a:r>
@@ -3499,7 +3235,7 @@
           <a:bodyPr wrap="square" lIns="0" tIns="0" rIns="0" bIns="0" rtlCol="0" anchor="ctr"/>
           <a:lstStyle/>
           <a:p>
-            <a:pPr indent="0" marL="0">
+            <a:pPr marL="0" indent="0">
               <a:lnSpc>
                 <a:spcPct val="110000"/>
               </a:lnSpc>
@@ -3519,7 +3255,7 @@
             <a:endParaRPr lang="en-US" sz="1400" dirty="0"/>
           </a:p>
           <a:p>
-            <a:pPr indent="0" marL="0">
+            <a:pPr marL="0" indent="0">
               <a:lnSpc>
                 <a:spcPct val="110000"/>
               </a:lnSpc>
@@ -3561,7 +3297,7 @@
           <a:bodyPr wrap="square" lIns="0" tIns="0" rIns="0" bIns="0" rtlCol="0" anchor="ctr"/>
           <a:lstStyle/>
           <a:p>
-            <a:pPr indent="0" marL="0">
+            <a:pPr marL="0" indent="0">
               <a:lnSpc>
                 <a:spcPct val="115000"/>
               </a:lnSpc>
@@ -3581,7 +3317,7 @@
             <a:endParaRPr lang="en-US" sz="1400" dirty="0"/>
           </a:p>
           <a:p>
-            <a:pPr indent="0" marL="0">
+            <a:pPr marL="0" indent="0">
               <a:lnSpc>
                 <a:spcPct val="115000"/>
               </a:lnSpc>
@@ -3650,7 +3386,7 @@
           <a:bodyPr wrap="square" lIns="0" tIns="0" rIns="0" bIns="0" rtlCol="0" anchor="ctr"/>
           <a:lstStyle/>
           <a:p>
-            <a:pPr indent="0" marL="0">
+            <a:pPr marL="0" indent="0">
               <a:buNone/>
             </a:pPr>
             <a:r>
@@ -3689,7 +3425,7 @@
           <a:bodyPr wrap="square" lIns="0" tIns="0" rIns="0" bIns="0" rtlCol="0" anchor="ctr"/>
           <a:lstStyle/>
           <a:p>
-            <a:pPr indent="0" marL="0">
+            <a:pPr marL="0" indent="0">
               <a:lnSpc>
                 <a:spcPct val="110000"/>
               </a:lnSpc>
@@ -3709,7 +3445,7 @@
             <a:endParaRPr lang="en-US" sz="1400" dirty="0"/>
           </a:p>
           <a:p>
-            <a:pPr indent="0" marL="0">
+            <a:pPr marL="0" indent="0">
               <a:lnSpc>
                 <a:spcPct val="110000"/>
               </a:lnSpc>
@@ -3751,7 +3487,7 @@
           <a:bodyPr wrap="square" lIns="0" tIns="0" rIns="0" bIns="0" rtlCol="0" anchor="ctr"/>
           <a:lstStyle/>
           <a:p>
-            <a:pPr indent="0" marL="0">
+            <a:pPr marL="0" indent="0">
               <a:lnSpc>
                 <a:spcPct val="115000"/>
               </a:lnSpc>
@@ -3771,7 +3507,7 @@
             <a:endParaRPr lang="en-US" sz="1400" dirty="0"/>
           </a:p>
           <a:p>
-            <a:pPr indent="0" marL="0">
+            <a:pPr marL="0" indent="0">
               <a:lnSpc>
                 <a:spcPct val="115000"/>
               </a:lnSpc>
@@ -3840,7 +3576,7 @@
           <a:bodyPr wrap="square" lIns="0" tIns="0" rIns="0" bIns="0" rtlCol="0" anchor="ctr"/>
           <a:lstStyle/>
           <a:p>
-            <a:pPr indent="0" marL="0">
+            <a:pPr marL="0" indent="0">
               <a:buNone/>
             </a:pPr>
             <a:r>
@@ -3879,7 +3615,7 @@
           <a:bodyPr wrap="square" lIns="0" tIns="0" rIns="0" bIns="0" rtlCol="0" anchor="ctr"/>
           <a:lstStyle/>
           <a:p>
-            <a:pPr indent="0" marL="0">
+            <a:pPr marL="0" indent="0">
               <a:buNone/>
             </a:pPr>
             <a:r>
@@ -3913,6 +3649,7 @@
         <a:solidFill>
           <a:srgbClr val="FFFFFF"/>
         </a:solidFill>
+        <a:effectLst/>
       </p:bgPr>
     </p:bg>
     <p:spTree>
@@ -3950,7 +3687,7 @@
           <a:bodyPr wrap="square" lIns="0" tIns="0" rIns="0" bIns="0" rtlCol="0" anchor="ctr"/>
           <a:lstStyle/>
           <a:p>
-            <a:pPr indent="0" marL="0">
+            <a:pPr marL="0" indent="0">
               <a:buNone/>
             </a:pPr>
             <a:r>
@@ -3989,7 +3726,7 @@
           <a:bodyPr wrap="square" lIns="0" tIns="0" rIns="0" bIns="0" rtlCol="0" anchor="ctr"/>
           <a:lstStyle/>
           <a:p>
-            <a:pPr indent="0" marL="0">
+            <a:pPr marL="0" indent="0">
               <a:buNone/>
             </a:pPr>
             <a:r>
@@ -4028,7 +3765,7 @@
           <a:bodyPr wrap="square" lIns="0" tIns="0" rIns="0" bIns="0" rtlCol="0" anchor="ctr"/>
           <a:lstStyle/>
           <a:p>
-            <a:pPr indent="0" marL="0">
+            <a:pPr marL="0" indent="0">
               <a:buNone/>
             </a:pPr>
             <a:r>
@@ -4067,7 +3804,7 @@
           <a:bodyPr wrap="square" lIns="0" tIns="0" rIns="0" bIns="0" rtlCol="0" anchor="ctr"/>
           <a:lstStyle/>
           <a:p>
-            <a:pPr indent="0" marL="0">
+            <a:pPr marL="0" indent="0">
               <a:buNone/>
             </a:pPr>
             <a:r>
@@ -4133,7 +3870,7 @@
           <a:bodyPr wrap="square" lIns="0" tIns="0" rIns="0" bIns="0" rtlCol="0" anchor="ctr"/>
           <a:lstStyle/>
           <a:p>
-            <a:pPr indent="0" marL="0">
+            <a:pPr marL="0" indent="0">
               <a:buNone/>
             </a:pPr>
             <a:r>
@@ -4172,7 +3909,7 @@
           <a:bodyPr wrap="square" lIns="0" tIns="0" rIns="0" bIns="0" rtlCol="0" anchor="ctr"/>
           <a:lstStyle/>
           <a:p>
-            <a:pPr indent="0" marL="0">
+            <a:pPr marL="0" indent="0">
               <a:buNone/>
             </a:pPr>
             <a:r>
@@ -4236,7 +3973,7 @@
           <a:bodyPr wrap="square" lIns="0" tIns="0" rIns="0" bIns="0" rtlCol="0" anchor="ctr"/>
           <a:lstStyle/>
           <a:p>
-            <a:pPr indent="0" marL="0">
+            <a:pPr marL="0" indent="0">
               <a:buNone/>
             </a:pPr>
             <a:r>
@@ -4302,7 +4039,7 @@
           <a:bodyPr wrap="square" lIns="0" tIns="0" rIns="0" bIns="0" rtlCol="0" anchor="ctr"/>
           <a:lstStyle/>
           <a:p>
-            <a:pPr indent="0" marL="0">
+            <a:pPr marL="0" indent="0">
               <a:buNone/>
             </a:pPr>
             <a:r>
@@ -4341,7 +4078,7 @@
           <a:bodyPr wrap="square" lIns="0" tIns="0" rIns="0" bIns="0" rtlCol="0" anchor="ctr"/>
           <a:lstStyle/>
           <a:p>
-            <a:pPr indent="0" marL="0">
+            <a:pPr marL="0" indent="0">
               <a:buNone/>
             </a:pPr>
             <a:r>
@@ -4405,7 +4142,7 @@
           <a:bodyPr wrap="square" lIns="0" tIns="0" rIns="0" bIns="0" rtlCol="0" anchor="ctr"/>
           <a:lstStyle/>
           <a:p>
-            <a:pPr indent="0" marL="0">
+            <a:pPr marL="0" indent="0">
               <a:buNone/>
             </a:pPr>
             <a:r>
@@ -4471,7 +4208,7 @@
           <a:bodyPr wrap="square" lIns="0" tIns="0" rIns="0" bIns="0" rtlCol="0" anchor="ctr"/>
           <a:lstStyle/>
           <a:p>
-            <a:pPr indent="0" marL="0">
+            <a:pPr marL="0" indent="0">
               <a:buNone/>
             </a:pPr>
             <a:r>
@@ -4510,7 +4247,7 @@
           <a:bodyPr wrap="square" lIns="0" tIns="0" rIns="0" bIns="0" rtlCol="0" anchor="ctr"/>
           <a:lstStyle/>
           <a:p>
-            <a:pPr indent="0" marL="0">
+            <a:pPr marL="0" indent="0">
               <a:buNone/>
             </a:pPr>
             <a:r>
@@ -4574,7 +4311,7 @@
           <a:bodyPr wrap="square" lIns="0" tIns="0" rIns="0" bIns="0" rtlCol="0" anchor="ctr"/>
           <a:lstStyle/>
           <a:p>
-            <a:pPr indent="0" marL="0">
+            <a:pPr marL="0" indent="0">
               <a:buNone/>
             </a:pPr>
             <a:r>
@@ -4640,7 +4377,7 @@
           <a:bodyPr wrap="square" lIns="0" tIns="0" rIns="0" bIns="0" rtlCol="0" anchor="ctr"/>
           <a:lstStyle/>
           <a:p>
-            <a:pPr indent="0" marL="0">
+            <a:pPr marL="0" indent="0">
               <a:buNone/>
             </a:pPr>
             <a:r>
@@ -4679,7 +4416,7 @@
           <a:bodyPr wrap="square" lIns="0" tIns="0" rIns="0" bIns="0" rtlCol="0" anchor="ctr"/>
           <a:lstStyle/>
           <a:p>
-            <a:pPr indent="0" marL="0">
+            <a:pPr marL="0" indent="0">
               <a:buNone/>
             </a:pPr>
             <a:r>
@@ -4743,7 +4480,7 @@
           <a:bodyPr wrap="square" lIns="0" tIns="0" rIns="0" bIns="0" rtlCol="0" anchor="ctr"/>
           <a:lstStyle/>
           <a:p>
-            <a:pPr indent="0" marL="0">
+            <a:pPr marL="0" indent="0">
               <a:buNone/>
             </a:pPr>
             <a:r>
@@ -4809,7 +4546,7 @@
           <a:bodyPr wrap="square" lIns="0" tIns="0" rIns="0" bIns="0" rtlCol="0" anchor="ctr"/>
           <a:lstStyle/>
           <a:p>
-            <a:pPr indent="0" marL="0">
+            <a:pPr marL="0" indent="0">
               <a:buNone/>
             </a:pPr>
             <a:r>
@@ -4848,7 +4585,7 @@
           <a:bodyPr wrap="square" lIns="0" tIns="0" rIns="0" bIns="0" rtlCol="0" anchor="ctr"/>
           <a:lstStyle/>
           <a:p>
-            <a:pPr indent="0" marL="0">
+            <a:pPr marL="0" indent="0">
               <a:buNone/>
             </a:pPr>
             <a:r>
@@ -4912,7 +4649,7 @@
           <a:bodyPr wrap="square" lIns="0" tIns="0" rIns="0" bIns="0" rtlCol="0" anchor="ctr"/>
           <a:lstStyle/>
           <a:p>
-            <a:pPr indent="0" marL="0">
+            <a:pPr marL="0" indent="0">
               <a:buNone/>
             </a:pPr>
             <a:r>
@@ -4951,7 +4688,7 @@
           <a:bodyPr wrap="square" lIns="0" tIns="0" rIns="0" bIns="0" rtlCol="0" anchor="ctr"/>
           <a:lstStyle/>
           <a:p>
-            <a:pPr indent="0" marL="0">
+            <a:pPr marL="0" indent="0">
               <a:buNone/>
             </a:pPr>
             <a:r>
@@ -4985,6 +4722,7 @@
         <a:solidFill>
           <a:srgbClr val="FFFFFF"/>
         </a:solidFill>
+        <a:effectLst/>
       </p:bgPr>
     </p:bg>
     <p:spTree>
@@ -5022,7 +4760,7 @@
           <a:bodyPr wrap="square" lIns="0" tIns="0" rIns="0" bIns="0" rtlCol="0" anchor="ctr"/>
           <a:lstStyle/>
           <a:p>
-            <a:pPr indent="0" marL="0">
+            <a:pPr marL="0" indent="0">
               <a:buNone/>
             </a:pPr>
             <a:r>
@@ -5061,7 +4799,7 @@
           <a:bodyPr wrap="square" lIns="0" tIns="0" rIns="0" bIns="0" rtlCol="0" anchor="ctr"/>
           <a:lstStyle/>
           <a:p>
-            <a:pPr indent="0" marL="0">
+            <a:pPr marL="0" indent="0">
               <a:buNone/>
             </a:pPr>
             <a:r>
@@ -5127,7 +4865,7 @@
           <a:bodyPr wrap="square" lIns="0" tIns="0" rIns="0" bIns="0" rtlCol="0" anchor="ctr"/>
           <a:lstStyle/>
           <a:p>
-            <a:pPr indent="0" marL="0">
+            <a:pPr marL="0" indent="0">
               <a:buNone/>
             </a:pPr>
             <a:r>
@@ -5166,7 +4904,7 @@
           <a:bodyPr wrap="square" lIns="0" tIns="0" rIns="0" bIns="0" rtlCol="0" anchor="ctr"/>
           <a:lstStyle/>
           <a:p>
-            <a:pPr indent="0" marL="0">
+            <a:pPr marL="0" indent="0">
               <a:buNone/>
             </a:pPr>
             <a:r>
@@ -5232,7 +4970,7 @@
           <a:bodyPr wrap="square" lIns="0" tIns="0" rIns="0" bIns="0" rtlCol="0" anchor="ctr"/>
           <a:lstStyle/>
           <a:p>
-            <a:pPr indent="0" marL="0">
+            <a:pPr marL="0" indent="0">
               <a:buNone/>
             </a:pPr>
             <a:r>
@@ -5271,7 +5009,7 @@
           <a:bodyPr wrap="square" lIns="0" tIns="0" rIns="0" bIns="0" rtlCol="0" anchor="ctr"/>
           <a:lstStyle/>
           <a:p>
-            <a:pPr indent="0" marL="0">
+            <a:pPr marL="0" indent="0">
               <a:lnSpc>
                 <a:spcPct val="125000"/>
               </a:lnSpc>
@@ -5291,7 +5029,7 @@
             <a:endParaRPr lang="en-US" sz="1300" dirty="0"/>
           </a:p>
           <a:p>
-            <a:pPr indent="0" marL="0">
+            <a:pPr marL="0" indent="0">
               <a:lnSpc>
                 <a:spcPct val="125000"/>
               </a:lnSpc>
@@ -5311,7 +5049,7 @@
             <a:endParaRPr lang="en-US" sz="1300" dirty="0"/>
           </a:p>
           <a:p>
-            <a:pPr indent="0" marL="0">
+            <a:pPr marL="0" indent="0">
               <a:lnSpc>
                 <a:spcPct val="125000"/>
               </a:lnSpc>
@@ -5331,7 +5069,7 @@
             <a:endParaRPr lang="en-US" sz="1300" dirty="0"/>
           </a:p>
           <a:p>
-            <a:pPr indent="0" marL="0">
+            <a:pPr marL="0" indent="0">
               <a:lnSpc>
                 <a:spcPct val="125000"/>
               </a:lnSpc>
@@ -5400,7 +5138,7 @@
           <a:bodyPr wrap="square" lIns="0" tIns="0" rIns="0" bIns="0" rtlCol="0" anchor="ctr"/>
           <a:lstStyle/>
           <a:p>
-            <a:pPr indent="0" marL="0">
+            <a:pPr marL="0" indent="0">
               <a:buNone/>
             </a:pPr>
             <a:r>
@@ -5439,7 +5177,7 @@
           <a:bodyPr wrap="square" lIns="0" tIns="0" rIns="0" bIns="0" rtlCol="0" anchor="ctr"/>
           <a:lstStyle/>
           <a:p>
-            <a:pPr indent="0" marL="0">
+            <a:pPr marL="0" indent="0">
               <a:lnSpc>
                 <a:spcPct val="125000"/>
               </a:lnSpc>
@@ -5459,7 +5197,7 @@
             <a:endParaRPr lang="en-US" sz="1300" dirty="0"/>
           </a:p>
           <a:p>
-            <a:pPr indent="0" marL="0">
+            <a:pPr marL="0" indent="0">
               <a:lnSpc>
                 <a:spcPct val="125000"/>
               </a:lnSpc>
@@ -5479,7 +5217,7 @@
             <a:endParaRPr lang="en-US" sz="1300" dirty="0"/>
           </a:p>
           <a:p>
-            <a:pPr indent="0" marL="0">
+            <a:pPr marL="0" indent="0">
               <a:lnSpc>
                 <a:spcPct val="125000"/>
               </a:lnSpc>
@@ -5499,7 +5237,7 @@
             <a:endParaRPr lang="en-US" sz="1300" dirty="0"/>
           </a:p>
           <a:p>
-            <a:pPr indent="0" marL="0">
+            <a:pPr marL="0" indent="0">
               <a:lnSpc>
                 <a:spcPct val="125000"/>
               </a:lnSpc>
@@ -5568,7 +5306,7 @@
           <a:bodyPr wrap="square" lIns="0" tIns="0" rIns="0" bIns="0" rtlCol="0" anchor="ctr"/>
           <a:lstStyle/>
           <a:p>
-            <a:pPr indent="0" marL="0">
+            <a:pPr marL="0" indent="0">
               <a:buNone/>
             </a:pPr>
             <a:r>
@@ -5607,7 +5345,7 @@
           <a:bodyPr wrap="square" lIns="0" tIns="0" rIns="0" bIns="0" rtlCol="0" anchor="ctr"/>
           <a:lstStyle/>
           <a:p>
-            <a:pPr indent="0" marL="0">
+            <a:pPr marL="0" indent="0">
               <a:buNone/>
             </a:pPr>
             <a:r>
@@ -5673,7 +5411,7 @@
           <a:bodyPr wrap="square" lIns="0" tIns="0" rIns="0" bIns="0" rtlCol="0" anchor="ctr"/>
           <a:lstStyle/>
           <a:p>
-            <a:pPr indent="0" marL="0">
+            <a:pPr marL="0" indent="0">
               <a:buNone/>
             </a:pPr>
             <a:r>
@@ -5712,7 +5450,7 @@
           <a:bodyPr wrap="square" lIns="0" tIns="0" rIns="0" bIns="0" rtlCol="0" anchor="ctr"/>
           <a:lstStyle/>
           <a:p>
-            <a:pPr indent="0" marL="0">
+            <a:pPr marL="0" indent="0">
               <a:lnSpc>
                 <a:spcPct val="125000"/>
               </a:lnSpc>
@@ -5732,7 +5470,7 @@
             <a:endParaRPr lang="en-US" sz="1300" dirty="0"/>
           </a:p>
           <a:p>
-            <a:pPr indent="0" marL="0">
+            <a:pPr marL="0" indent="0">
               <a:lnSpc>
                 <a:spcPct val="125000"/>
               </a:lnSpc>
@@ -5752,7 +5490,7 @@
             <a:endParaRPr lang="en-US" sz="1300" dirty="0"/>
           </a:p>
           <a:p>
-            <a:pPr indent="0" marL="0">
+            <a:pPr marL="0" indent="0">
               <a:lnSpc>
                 <a:spcPct val="125000"/>
               </a:lnSpc>
@@ -5821,7 +5559,7 @@
           <a:bodyPr wrap="square" lIns="0" tIns="0" rIns="0" bIns="0" rtlCol="0" anchor="ctr"/>
           <a:lstStyle/>
           <a:p>
-            <a:pPr indent="0" marL="0">
+            <a:pPr marL="0" indent="0">
               <a:buNone/>
             </a:pPr>
             <a:r>
@@ -5860,7 +5598,7 @@
           <a:bodyPr wrap="square" lIns="0" tIns="0" rIns="0" bIns="0" rtlCol="0" anchor="ctr"/>
           <a:lstStyle/>
           <a:p>
-            <a:pPr indent="0" marL="0">
+            <a:pPr marL="0" indent="0">
               <a:lnSpc>
                 <a:spcPct val="125000"/>
               </a:lnSpc>
@@ -5880,7 +5618,7 @@
             <a:endParaRPr lang="en-US" sz="1300" dirty="0"/>
           </a:p>
           <a:p>
-            <a:pPr indent="0" marL="0">
+            <a:pPr marL="0" indent="0">
               <a:lnSpc>
                 <a:spcPct val="125000"/>
               </a:lnSpc>
@@ -5900,7 +5638,7 @@
             <a:endParaRPr lang="en-US" sz="1300" dirty="0"/>
           </a:p>
           <a:p>
-            <a:pPr indent="0" marL="0">
+            <a:pPr marL="0" indent="0">
               <a:lnSpc>
                 <a:spcPct val="125000"/>
               </a:lnSpc>
@@ -5920,7 +5658,7 @@
             <a:endParaRPr lang="en-US" sz="1300" dirty="0"/>
           </a:p>
           <a:p>
-            <a:pPr indent="0" marL="0">
+            <a:pPr marL="0" indent="0">
               <a:lnSpc>
                 <a:spcPct val="125000"/>
               </a:lnSpc>
@@ -5989,7 +5727,7 @@
           <a:bodyPr wrap="square" lIns="0" tIns="0" rIns="0" bIns="0" rtlCol="0" anchor="ctr"/>
           <a:lstStyle/>
           <a:p>
-            <a:pPr indent="0" marL="0">
+            <a:pPr marL="0" indent="0">
               <a:buNone/>
             </a:pPr>
             <a:r>
@@ -6028,7 +5766,7 @@
           <a:bodyPr wrap="square" lIns="0" tIns="0" rIns="0" bIns="0" rtlCol="0" anchor="ctr"/>
           <a:lstStyle/>
           <a:p>
-            <a:pPr indent="0" marL="0">
+            <a:pPr marL="0" indent="0">
               <a:buNone/>
             </a:pPr>
             <a:r>
@@ -6094,7 +5832,7 @@
           <a:bodyPr wrap="square" lIns="0" tIns="0" rIns="0" bIns="0" rtlCol="0" anchor="ctr"/>
           <a:lstStyle/>
           <a:p>
-            <a:pPr indent="0" marL="0">
+            <a:pPr marL="0" indent="0">
               <a:buNone/>
             </a:pPr>
             <a:r>
@@ -6133,7 +5871,7 @@
           <a:bodyPr wrap="square" lIns="0" tIns="0" rIns="0" bIns="0" rtlCol="0" anchor="ctr"/>
           <a:lstStyle/>
           <a:p>
-            <a:pPr indent="0" marL="0">
+            <a:pPr marL="0" indent="0">
               <a:lnSpc>
                 <a:spcPct val="125000"/>
               </a:lnSpc>
@@ -6153,7 +5891,7 @@
             <a:endParaRPr lang="en-US" sz="1300" dirty="0"/>
           </a:p>
           <a:p>
-            <a:pPr indent="0" marL="0">
+            <a:pPr marL="0" indent="0">
               <a:lnSpc>
                 <a:spcPct val="125000"/>
               </a:lnSpc>
@@ -6173,7 +5911,7 @@
             <a:endParaRPr lang="en-US" sz="1300" dirty="0"/>
           </a:p>
           <a:p>
-            <a:pPr indent="0" marL="0">
+            <a:pPr marL="0" indent="0">
               <a:lnSpc>
                 <a:spcPct val="125000"/>
               </a:lnSpc>
@@ -6193,7 +5931,7 @@
             <a:endParaRPr lang="en-US" sz="1300" dirty="0"/>
           </a:p>
           <a:p>
-            <a:pPr indent="0" marL="0">
+            <a:pPr marL="0" indent="0">
               <a:lnSpc>
                 <a:spcPct val="125000"/>
               </a:lnSpc>
@@ -6262,7 +6000,7 @@
           <a:bodyPr wrap="square" lIns="0" tIns="0" rIns="0" bIns="0" rtlCol="0" anchor="ctr"/>
           <a:lstStyle/>
           <a:p>
-            <a:pPr indent="0" marL="0">
+            <a:pPr marL="0" indent="0">
               <a:buNone/>
             </a:pPr>
             <a:r>
@@ -6301,7 +6039,7 @@
           <a:bodyPr wrap="square" lIns="0" tIns="0" rIns="0" bIns="0" rtlCol="0" anchor="ctr"/>
           <a:lstStyle/>
           <a:p>
-            <a:pPr indent="0" marL="0">
+            <a:pPr marL="0" indent="0">
               <a:lnSpc>
                 <a:spcPct val="125000"/>
               </a:lnSpc>
@@ -6321,7 +6059,7 @@
             <a:endParaRPr lang="en-US" sz="1300" dirty="0"/>
           </a:p>
           <a:p>
-            <a:pPr indent="0" marL="0">
+            <a:pPr marL="0" indent="0">
               <a:lnSpc>
                 <a:spcPct val="125000"/>
               </a:lnSpc>
@@ -6341,7 +6079,7 @@
             <a:endParaRPr lang="en-US" sz="1300" dirty="0"/>
           </a:p>
           <a:p>
-            <a:pPr indent="0" marL="0">
+            <a:pPr marL="0" indent="0">
               <a:lnSpc>
                 <a:spcPct val="125000"/>
               </a:lnSpc>
@@ -6361,7 +6099,7 @@
             <a:endParaRPr lang="en-US" sz="1300" dirty="0"/>
           </a:p>
           <a:p>
-            <a:pPr indent="0" marL="0">
+            <a:pPr marL="0" indent="0">
               <a:lnSpc>
                 <a:spcPct val="125000"/>
               </a:lnSpc>
@@ -6403,7 +6141,7 @@
           <a:bodyPr wrap="square" lIns="0" tIns="0" rIns="0" bIns="0" rtlCol="0" anchor="ctr"/>
           <a:lstStyle/>
           <a:p>
-            <a:pPr indent="0" marL="0">
+            <a:pPr marL="0" indent="0">
               <a:buNone/>
             </a:pPr>
             <a:r>
@@ -6437,6 +6175,7 @@
         <a:solidFill>
           <a:srgbClr val="FFFFFF"/>
         </a:solidFill>
+        <a:effectLst/>
       </p:bgPr>
     </p:bg>
     <p:spTree>
@@ -6474,7 +6213,7 @@
           <a:bodyPr wrap="square" lIns="0" tIns="0" rIns="0" bIns="0" rtlCol="0" anchor="ctr"/>
           <a:lstStyle/>
           <a:p>
-            <a:pPr indent="0" marL="0">
+            <a:pPr marL="0" indent="0">
               <a:buNone/>
             </a:pPr>
             <a:r>
@@ -6513,7 +6252,7 @@
           <a:bodyPr wrap="square" lIns="0" tIns="0" rIns="0" bIns="0" rtlCol="0" anchor="ctr"/>
           <a:lstStyle/>
           <a:p>
-            <a:pPr indent="0" marL="0">
+            <a:pPr marL="0" indent="0">
               <a:buNone/>
             </a:pPr>
             <a:r>
@@ -6552,7 +6291,7 @@
           <a:bodyPr wrap="square" lIns="0" tIns="0" rIns="0" bIns="0" rtlCol="0" anchor="ctr"/>
           <a:lstStyle/>
           <a:p>
-            <a:pPr indent="0" marL="0">
+            <a:pPr marL="0" indent="0">
               <a:buNone/>
             </a:pPr>
             <a:r>
@@ -6591,7 +6330,7 @@
           <a:bodyPr wrap="square" lIns="0" tIns="0" rIns="0" bIns="0" rtlCol="0" anchor="ctr"/>
           <a:lstStyle/>
           <a:p>
-            <a:pPr indent="0" marL="0">
+            <a:pPr marL="0" indent="0">
               <a:buNone/>
             </a:pPr>
             <a:r>
@@ -6657,7 +6396,7 @@
           <a:bodyPr wrap="square" lIns="0" tIns="0" rIns="0" bIns="0" rtlCol="0" anchor="ctr"/>
           <a:lstStyle/>
           <a:p>
-            <a:pPr indent="0" marL="0">
+            <a:pPr marL="0" indent="0">
               <a:buNone/>
             </a:pPr>
             <a:r>
@@ -6696,7 +6435,7 @@
           <a:bodyPr wrap="square" lIns="0" tIns="0" rIns="0" bIns="0" rtlCol="0" anchor="ctr"/>
           <a:lstStyle/>
           <a:p>
-            <a:pPr indent="0" marL="0">
+            <a:pPr marL="0" indent="0">
               <a:buNone/>
             </a:pPr>
             <a:r>
@@ -6760,7 +6499,7 @@
           <a:bodyPr wrap="square" lIns="0" tIns="0" rIns="0" bIns="0" rtlCol="0" anchor="ctr"/>
           <a:lstStyle/>
           <a:p>
-            <a:pPr indent="0" marL="0">
+            <a:pPr marL="0" indent="0">
               <a:buNone/>
             </a:pPr>
             <a:r>
@@ -6826,7 +6565,7 @@
           <a:bodyPr wrap="square" lIns="0" tIns="0" rIns="0" bIns="0" rtlCol="0" anchor="ctr"/>
           <a:lstStyle/>
           <a:p>
-            <a:pPr indent="0" marL="0">
+            <a:pPr marL="0" indent="0">
               <a:buNone/>
             </a:pPr>
             <a:r>
@@ -6865,7 +6604,7 @@
           <a:bodyPr wrap="square" lIns="0" tIns="0" rIns="0" bIns="0" rtlCol="0" anchor="ctr"/>
           <a:lstStyle/>
           <a:p>
-            <a:pPr indent="0" marL="0">
+            <a:pPr marL="0" indent="0">
               <a:buNone/>
             </a:pPr>
             <a:r>
@@ -6929,7 +6668,7 @@
           <a:bodyPr wrap="square" lIns="0" tIns="0" rIns="0" bIns="0" rtlCol="0" anchor="ctr"/>
           <a:lstStyle/>
           <a:p>
-            <a:pPr indent="0" marL="0">
+            <a:pPr marL="0" indent="0">
               <a:buNone/>
             </a:pPr>
             <a:r>
@@ -6995,7 +6734,7 @@
           <a:bodyPr wrap="square" lIns="0" tIns="0" rIns="0" bIns="0" rtlCol="0" anchor="ctr"/>
           <a:lstStyle/>
           <a:p>
-            <a:pPr indent="0" marL="0">
+            <a:pPr marL="0" indent="0">
               <a:buNone/>
             </a:pPr>
             <a:r>
@@ -7034,7 +6773,7 @@
           <a:bodyPr wrap="square" lIns="0" tIns="0" rIns="0" bIns="0" rtlCol="0" anchor="ctr"/>
           <a:lstStyle/>
           <a:p>
-            <a:pPr indent="0" marL="0">
+            <a:pPr marL="0" indent="0">
               <a:buNone/>
             </a:pPr>
             <a:r>
@@ -7098,7 +6837,7 @@
           <a:bodyPr wrap="square" lIns="0" tIns="0" rIns="0" bIns="0" rtlCol="0" anchor="ctr"/>
           <a:lstStyle/>
           <a:p>
-            <a:pPr indent="0" marL="0">
+            <a:pPr marL="0" indent="0">
               <a:buNone/>
             </a:pPr>
             <a:r>
@@ -7164,7 +6903,7 @@
           <a:bodyPr wrap="square" lIns="0" tIns="0" rIns="0" bIns="0" rtlCol="0" anchor="ctr"/>
           <a:lstStyle/>
           <a:p>
-            <a:pPr indent="0" marL="0">
+            <a:pPr marL="0" indent="0">
               <a:buNone/>
             </a:pPr>
             <a:r>
@@ -7203,7 +6942,7 @@
           <a:bodyPr wrap="square" lIns="0" tIns="0" rIns="0" bIns="0" rtlCol="0" anchor="ctr"/>
           <a:lstStyle/>
           <a:p>
-            <a:pPr indent="0" marL="0">
+            <a:pPr marL="0" indent="0">
               <a:buNone/>
             </a:pPr>
             <a:r>
@@ -7267,7 +7006,7 @@
           <a:bodyPr wrap="square" lIns="0" tIns="0" rIns="0" bIns="0" rtlCol="0" anchor="ctr"/>
           <a:lstStyle/>
           <a:p>
-            <a:pPr indent="0" marL="0">
+            <a:pPr marL="0" indent="0">
               <a:buNone/>
             </a:pPr>
             <a:r>
@@ -7333,7 +7072,7 @@
           <a:bodyPr wrap="square" lIns="0" tIns="0" rIns="0" bIns="0" rtlCol="0" anchor="ctr"/>
           <a:lstStyle/>
           <a:p>
-            <a:pPr indent="0" marL="0">
+            <a:pPr marL="0" indent="0">
               <a:buNone/>
             </a:pPr>
             <a:r>
@@ -7372,7 +7111,7 @@
           <a:bodyPr wrap="square" lIns="0" tIns="0" rIns="0" bIns="0" rtlCol="0" anchor="ctr"/>
           <a:lstStyle/>
           <a:p>
-            <a:pPr indent="0" marL="0">
+            <a:pPr marL="0" indent="0">
               <a:buNone/>
             </a:pPr>
             <a:r>
@@ -7436,7 +7175,7 @@
           <a:bodyPr wrap="square" lIns="0" tIns="0" rIns="0" bIns="0" rtlCol="0" anchor="ctr"/>
           <a:lstStyle/>
           <a:p>
-            <a:pPr indent="0" marL="0">
+            <a:pPr marL="0" indent="0">
               <a:buNone/>
             </a:pPr>
             <a:r>
@@ -7475,7 +7214,7 @@
           <a:bodyPr wrap="square" lIns="0" tIns="0" rIns="0" bIns="0" rtlCol="0" anchor="ctr"/>
           <a:lstStyle/>
           <a:p>
-            <a:pPr indent="0" marL="0">
+            <a:pPr marL="0" indent="0">
               <a:buNone/>
             </a:pPr>
             <a:r>
@@ -7509,6 +7248,7 @@
         <a:solidFill>
           <a:srgbClr val="FFFFFF"/>
         </a:solidFill>
+        <a:effectLst/>
       </p:bgPr>
     </p:bg>
     <p:spTree>
@@ -7546,7 +7286,7 @@
           <a:bodyPr wrap="square" lIns="0" tIns="0" rIns="0" bIns="0" rtlCol="0" anchor="ctr"/>
           <a:lstStyle/>
           <a:p>
-            <a:pPr indent="0" marL="0">
+            <a:pPr marL="0" indent="0">
               <a:buNone/>
             </a:pPr>
             <a:r>
@@ -7585,7 +7325,7 @@
           <a:bodyPr wrap="square" lIns="0" tIns="0" rIns="0" bIns="0" rtlCol="0" anchor="ctr"/>
           <a:lstStyle/>
           <a:p>
-            <a:pPr indent="0" marL="0">
+            <a:pPr marL="0" indent="0">
               <a:buNone/>
             </a:pPr>
             <a:r>
@@ -7624,7 +7364,7 @@
           <a:bodyPr wrap="square" lIns="0" tIns="0" rIns="0" bIns="0" rtlCol="0" anchor="ctr"/>
           <a:lstStyle/>
           <a:p>
-            <a:pPr indent="0" marL="0">
+            <a:pPr marL="0" indent="0">
               <a:buNone/>
             </a:pPr>
             <a:r>
@@ -7663,7 +7403,7 @@
           <a:bodyPr wrap="square" lIns="0" tIns="0" rIns="0" bIns="0" rtlCol="0" anchor="ctr"/>
           <a:lstStyle/>
           <a:p>
-            <a:pPr indent="0" marL="0">
+            <a:pPr marL="0" indent="0">
               <a:buNone/>
             </a:pPr>
             <a:r>
@@ -7702,7 +7442,7 @@
           <a:bodyPr wrap="square" lIns="0" tIns="0" rIns="0" bIns="0" rtlCol="0" anchor="ctr"/>
           <a:lstStyle/>
           <a:p>
-            <a:pPr indent="0" marL="0">
+            <a:pPr marL="0" indent="0">
               <a:buNone/>
             </a:pPr>
             <a:r>
@@ -7768,7 +7508,7 @@
           <a:bodyPr wrap="square" lIns="0" tIns="0" rIns="0" bIns="0" rtlCol="0" anchor="ctr"/>
           <a:lstStyle/>
           <a:p>
-            <a:pPr indent="0" marL="0">
+            <a:pPr marL="0" indent="0">
               <a:buNone/>
             </a:pPr>
             <a:r>
@@ -7807,7 +7547,7 @@
           <a:bodyPr wrap="square" lIns="0" tIns="0" rIns="0" bIns="0" rtlCol="0" anchor="ctr"/>
           <a:lstStyle/>
           <a:p>
-            <a:pPr indent="0" marL="0">
+            <a:pPr marL="0" indent="0">
               <a:buNone/>
             </a:pPr>
             <a:r>
@@ -7846,7 +7586,7 @@
           <a:bodyPr wrap="square" lIns="0" tIns="0" rIns="0" bIns="0" rtlCol="0" anchor="ctr"/>
           <a:lstStyle/>
           <a:p>
-            <a:pPr indent="0" marL="0">
+            <a:pPr marL="0" indent="0">
               <a:lnSpc>
                 <a:spcPct val="115000"/>
               </a:lnSpc>
@@ -7866,7 +7606,7 @@
             <a:endParaRPr lang="en-US" sz="1200" dirty="0"/>
           </a:p>
           <a:p>
-            <a:pPr indent="0" marL="0">
+            <a:pPr marL="0" indent="0">
               <a:lnSpc>
                 <a:spcPct val="115000"/>
               </a:lnSpc>
@@ -7908,7 +7648,7 @@
           <a:bodyPr wrap="square" lIns="0" tIns="0" rIns="0" bIns="0" rtlCol="0" anchor="ctr"/>
           <a:lstStyle/>
           <a:p>
-            <a:pPr indent="0" marL="0">
+            <a:pPr marL="0" indent="0">
               <a:lnSpc>
                 <a:spcPct val="115000"/>
               </a:lnSpc>
@@ -7928,7 +7668,7 @@
             <a:endParaRPr lang="en-US" sz="1200" dirty="0"/>
           </a:p>
           <a:p>
-            <a:pPr indent="0" marL="0">
+            <a:pPr marL="0" indent="0">
               <a:lnSpc>
                 <a:spcPct val="115000"/>
               </a:lnSpc>
@@ -7997,7 +7737,7 @@
           <a:bodyPr wrap="square" lIns="0" tIns="0" rIns="0" bIns="0" rtlCol="0" anchor="ctr"/>
           <a:lstStyle/>
           <a:p>
-            <a:pPr indent="0" marL="0">
+            <a:pPr marL="0" indent="0">
               <a:buNone/>
             </a:pPr>
             <a:r>
@@ -8036,7 +7776,7 @@
           <a:bodyPr wrap="square" lIns="0" tIns="0" rIns="0" bIns="0" rtlCol="0" anchor="ctr"/>
           <a:lstStyle/>
           <a:p>
-            <a:pPr indent="0" marL="0">
+            <a:pPr marL="0" indent="0">
               <a:buNone/>
             </a:pPr>
             <a:r>
@@ -8075,7 +7815,7 @@
           <a:bodyPr wrap="square" lIns="0" tIns="0" rIns="0" bIns="0" rtlCol="0" anchor="ctr"/>
           <a:lstStyle/>
           <a:p>
-            <a:pPr indent="0" marL="0">
+            <a:pPr marL="0" indent="0">
               <a:lnSpc>
                 <a:spcPct val="115000"/>
               </a:lnSpc>
@@ -8095,7 +7835,7 @@
             <a:endParaRPr lang="en-US" sz="1200" dirty="0"/>
           </a:p>
           <a:p>
-            <a:pPr indent="0" marL="0">
+            <a:pPr marL="0" indent="0">
               <a:lnSpc>
                 <a:spcPct val="115000"/>
               </a:lnSpc>
@@ -8137,7 +7877,7 @@
           <a:bodyPr wrap="square" lIns="0" tIns="0" rIns="0" bIns="0" rtlCol="0" anchor="ctr"/>
           <a:lstStyle/>
           <a:p>
-            <a:pPr indent="0" marL="0">
+            <a:pPr marL="0" indent="0">
               <a:lnSpc>
                 <a:spcPct val="115000"/>
               </a:lnSpc>
@@ -8157,7 +7897,7 @@
             <a:endParaRPr lang="en-US" sz="1200" dirty="0"/>
           </a:p>
           <a:p>
-            <a:pPr indent="0" marL="0">
+            <a:pPr marL="0" indent="0">
               <a:lnSpc>
                 <a:spcPct val="115000"/>
               </a:lnSpc>
@@ -8226,7 +7966,7 @@
           <a:bodyPr wrap="square" lIns="0" tIns="0" rIns="0" bIns="0" rtlCol="0" anchor="ctr"/>
           <a:lstStyle/>
           <a:p>
-            <a:pPr indent="0" marL="0">
+            <a:pPr marL="0" indent="0">
               <a:buNone/>
             </a:pPr>
             <a:r>
@@ -8265,7 +8005,7 @@
           <a:bodyPr wrap="square" lIns="0" tIns="0" rIns="0" bIns="0" rtlCol="0" anchor="ctr"/>
           <a:lstStyle/>
           <a:p>
-            <a:pPr indent="0" marL="0">
+            <a:pPr marL="0" indent="0">
               <a:buNone/>
             </a:pPr>
             <a:r>
@@ -8304,7 +8044,7 @@
           <a:bodyPr wrap="square" lIns="0" tIns="0" rIns="0" bIns="0" rtlCol="0" anchor="ctr"/>
           <a:lstStyle/>
           <a:p>
-            <a:pPr indent="0" marL="0">
+            <a:pPr marL="0" indent="0">
               <a:lnSpc>
                 <a:spcPct val="115000"/>
               </a:lnSpc>
@@ -8324,7 +8064,7 @@
             <a:endParaRPr lang="en-US" sz="1200" dirty="0"/>
           </a:p>
           <a:p>
-            <a:pPr indent="0" marL="0">
+            <a:pPr marL="0" indent="0">
               <a:lnSpc>
                 <a:spcPct val="115000"/>
               </a:lnSpc>
@@ -8366,7 +8106,7 @@
           <a:bodyPr wrap="square" lIns="0" tIns="0" rIns="0" bIns="0" rtlCol="0" anchor="ctr"/>
           <a:lstStyle/>
           <a:p>
-            <a:pPr indent="0" marL="0">
+            <a:pPr marL="0" indent="0">
               <a:lnSpc>
                 <a:spcPct val="115000"/>
               </a:lnSpc>
@@ -8386,7 +8126,7 @@
             <a:endParaRPr lang="en-US" sz="1200" dirty="0"/>
           </a:p>
           <a:p>
-            <a:pPr indent="0" marL="0">
+            <a:pPr marL="0" indent="0">
               <a:lnSpc>
                 <a:spcPct val="115000"/>
               </a:lnSpc>
@@ -8455,7 +8195,7 @@
           <a:bodyPr wrap="square" lIns="0" tIns="0" rIns="0" bIns="0" rtlCol="0" anchor="ctr"/>
           <a:lstStyle/>
           <a:p>
-            <a:pPr indent="0" marL="0">
+            <a:pPr marL="0" indent="0">
               <a:buNone/>
             </a:pPr>
             <a:r>
@@ -8494,7 +8234,7 @@
           <a:bodyPr wrap="square" lIns="0" tIns="0" rIns="0" bIns="0" rtlCol="0" anchor="ctr"/>
           <a:lstStyle/>
           <a:p>
-            <a:pPr indent="0" marL="0">
+            <a:pPr marL="0" indent="0">
               <a:buNone/>
             </a:pPr>
             <a:r>
@@ -8533,7 +8273,7 @@
           <a:bodyPr wrap="square" lIns="0" tIns="0" rIns="0" bIns="0" rtlCol="0" anchor="ctr"/>
           <a:lstStyle/>
           <a:p>
-            <a:pPr indent="0" marL="0">
+            <a:pPr marL="0" indent="0">
               <a:lnSpc>
                 <a:spcPct val="115000"/>
               </a:lnSpc>
@@ -8553,7 +8293,7 @@
             <a:endParaRPr lang="en-US" sz="1200" dirty="0"/>
           </a:p>
           <a:p>
-            <a:pPr indent="0" marL="0">
+            <a:pPr marL="0" indent="0">
               <a:lnSpc>
                 <a:spcPct val="115000"/>
               </a:lnSpc>
@@ -8595,7 +8335,7 @@
           <a:bodyPr wrap="square" lIns="0" tIns="0" rIns="0" bIns="0" rtlCol="0" anchor="ctr"/>
           <a:lstStyle/>
           <a:p>
-            <a:pPr indent="0" marL="0">
+            <a:pPr marL="0" indent="0">
               <a:lnSpc>
                 <a:spcPct val="115000"/>
               </a:lnSpc>
@@ -8615,7 +8355,7 @@
             <a:endParaRPr lang="en-US" sz="1200" dirty="0"/>
           </a:p>
           <a:p>
-            <a:pPr indent="0" marL="0">
+            <a:pPr marL="0" indent="0">
               <a:lnSpc>
                 <a:spcPct val="115000"/>
               </a:lnSpc>
@@ -8684,7 +8424,7 @@
           <a:bodyPr wrap="square" lIns="0" tIns="0" rIns="0" bIns="0" rtlCol="0" anchor="ctr"/>
           <a:lstStyle/>
           <a:p>
-            <a:pPr indent="0" marL="0">
+            <a:pPr marL="0" indent="0">
               <a:buNone/>
             </a:pPr>
             <a:r>
@@ -8723,7 +8463,7 @@
           <a:bodyPr wrap="square" lIns="0" tIns="0" rIns="0" bIns="0" rtlCol="0" anchor="ctr"/>
           <a:lstStyle/>
           <a:p>
-            <a:pPr indent="0" marL="0">
+            <a:pPr marL="0" indent="0">
               <a:buNone/>
             </a:pPr>
             <a:r>
@@ -8762,7 +8502,7 @@
           <a:bodyPr wrap="square" lIns="0" tIns="0" rIns="0" bIns="0" rtlCol="0" anchor="ctr"/>
           <a:lstStyle/>
           <a:p>
-            <a:pPr indent="0" marL="0">
+            <a:pPr marL="0" indent="0">
               <a:buNone/>
             </a:pPr>
             <a:r>
@@ -8801,7 +8541,7 @@
           <a:bodyPr wrap="square" lIns="0" tIns="0" rIns="0" bIns="0" rtlCol="0" anchor="ctr"/>
           <a:lstStyle/>
           <a:p>
-            <a:pPr indent="0" marL="0">
+            <a:pPr marL="0" indent="0">
               <a:buNone/>
             </a:pPr>
             <a:r>
@@ -8840,7 +8580,7 @@
           <a:bodyPr wrap="square" lIns="0" tIns="0" rIns="0" bIns="0" rtlCol="0" anchor="ctr"/>
           <a:lstStyle/>
           <a:p>
-            <a:pPr indent="0" marL="0">
+            <a:pPr marL="0" indent="0">
               <a:buNone/>
             </a:pPr>
             <a:r>
@@ -8874,6 +8614,7 @@
         <a:solidFill>
           <a:srgbClr val="FFFFFF"/>
         </a:solidFill>
+        <a:effectLst/>
       </p:bgPr>
     </p:bg>
     <p:spTree>
@@ -8911,7 +8652,7 @@
           <a:bodyPr wrap="square" lIns="0" tIns="0" rIns="0" bIns="0" rtlCol="0" anchor="ctr"/>
           <a:lstStyle/>
           <a:p>
-            <a:pPr indent="0" marL="0">
+            <a:pPr marL="0" indent="0">
               <a:buNone/>
             </a:pPr>
             <a:r>
@@ -8950,7 +8691,7 @@
           <a:bodyPr wrap="square" lIns="0" tIns="0" rIns="0" bIns="0" rtlCol="0" anchor="ctr"/>
           <a:lstStyle/>
           <a:p>
-            <a:pPr indent="0" marL="0">
+            <a:pPr marL="0" indent="0">
               <a:buNone/>
             </a:pPr>
             <a:r>
@@ -9016,7 +8757,7 @@
           <a:bodyPr wrap="square" lIns="0" tIns="0" rIns="0" bIns="0" rtlCol="0" anchor="ctr"/>
           <a:lstStyle/>
           <a:p>
-            <a:pPr indent="0" marL="0">
+            <a:pPr marL="0" indent="0">
               <a:buNone/>
             </a:pPr>
             <a:r>
@@ -9055,7 +8796,7 @@
           <a:bodyPr wrap="square" lIns="0" tIns="0" rIns="0" bIns="0" rtlCol="0" anchor="ctr"/>
           <a:lstStyle/>
           <a:p>
-            <a:pPr indent="0" marL="0">
+            <a:pPr marL="0" indent="0">
               <a:buNone/>
             </a:pPr>
             <a:r>
@@ -9121,7 +8862,7 @@
           <a:bodyPr wrap="square" lIns="0" tIns="0" rIns="0" bIns="0" rtlCol="0" anchor="ctr"/>
           <a:lstStyle/>
           <a:p>
-            <a:pPr indent="0" marL="0">
+            <a:pPr marL="0" indent="0">
               <a:buNone/>
             </a:pPr>
             <a:r>
@@ -9160,7 +8901,7 @@
           <a:bodyPr wrap="square" lIns="0" tIns="0" rIns="0" bIns="0" rtlCol="0" anchor="ctr"/>
           <a:lstStyle/>
           <a:p>
-            <a:pPr indent="0" marL="0">
+            <a:pPr marL="0" indent="0">
               <a:lnSpc>
                 <a:spcPct val="125000"/>
               </a:lnSpc>
@@ -9180,7 +8921,7 @@
             <a:endParaRPr lang="en-US" sz="1300" dirty="0"/>
           </a:p>
           <a:p>
-            <a:pPr indent="0" marL="0">
+            <a:pPr marL="0" indent="0">
               <a:lnSpc>
                 <a:spcPct val="125000"/>
               </a:lnSpc>
@@ -9200,7 +8941,7 @@
             <a:endParaRPr lang="en-US" sz="1300" dirty="0"/>
           </a:p>
           <a:p>
-            <a:pPr indent="0" marL="0">
+            <a:pPr marL="0" indent="0">
               <a:lnSpc>
                 <a:spcPct val="125000"/>
               </a:lnSpc>
@@ -9220,7 +8961,7 @@
             <a:endParaRPr lang="en-US" sz="1300" dirty="0"/>
           </a:p>
           <a:p>
-            <a:pPr indent="0" marL="0">
+            <a:pPr marL="0" indent="0">
               <a:lnSpc>
                 <a:spcPct val="125000"/>
               </a:lnSpc>
@@ -9289,7 +9030,7 @@
           <a:bodyPr wrap="square" lIns="0" tIns="0" rIns="0" bIns="0" rtlCol="0" anchor="ctr"/>
           <a:lstStyle/>
           <a:p>
-            <a:pPr indent="0" marL="0">
+            <a:pPr marL="0" indent="0">
               <a:buNone/>
             </a:pPr>
             <a:r>
@@ -9328,7 +9069,7 @@
           <a:bodyPr wrap="square" lIns="0" tIns="0" rIns="0" bIns="0" rtlCol="0" anchor="ctr"/>
           <a:lstStyle/>
           <a:p>
-            <a:pPr indent="0" marL="0">
+            <a:pPr marL="0" indent="0">
               <a:lnSpc>
                 <a:spcPct val="125000"/>
               </a:lnSpc>
@@ -9348,7 +9089,7 @@
             <a:endParaRPr lang="en-US" sz="1300" dirty="0"/>
           </a:p>
           <a:p>
-            <a:pPr indent="0" marL="0">
+            <a:pPr marL="0" indent="0">
               <a:lnSpc>
                 <a:spcPct val="125000"/>
               </a:lnSpc>
@@ -9368,7 +9109,7 @@
             <a:endParaRPr lang="en-US" sz="1300" dirty="0"/>
           </a:p>
           <a:p>
-            <a:pPr indent="0" marL="0">
+            <a:pPr marL="0" indent="0">
               <a:lnSpc>
                 <a:spcPct val="125000"/>
               </a:lnSpc>
@@ -9388,7 +9129,7 @@
             <a:endParaRPr lang="en-US" sz="1300" dirty="0"/>
           </a:p>
           <a:p>
-            <a:pPr indent="0" marL="0">
+            <a:pPr marL="0" indent="0">
               <a:lnSpc>
                 <a:spcPct val="125000"/>
               </a:lnSpc>
@@ -9457,7 +9198,7 @@
           <a:bodyPr wrap="square" lIns="0" tIns="0" rIns="0" bIns="0" rtlCol="0" anchor="ctr"/>
           <a:lstStyle/>
           <a:p>
-            <a:pPr indent="0" marL="0">
+            <a:pPr marL="0" indent="0">
               <a:buNone/>
             </a:pPr>
             <a:r>
@@ -9496,7 +9237,7 @@
           <a:bodyPr wrap="square" lIns="0" tIns="0" rIns="0" bIns="0" rtlCol="0" anchor="ctr"/>
           <a:lstStyle/>
           <a:p>
-            <a:pPr indent="0" marL="0">
+            <a:pPr marL="0" indent="0">
               <a:buNone/>
             </a:pPr>
             <a:r>
@@ -9562,7 +9303,7 @@
           <a:bodyPr wrap="square" lIns="0" tIns="0" rIns="0" bIns="0" rtlCol="0" anchor="ctr"/>
           <a:lstStyle/>
           <a:p>
-            <a:pPr indent="0" marL="0">
+            <a:pPr marL="0" indent="0">
               <a:buNone/>
             </a:pPr>
             <a:r>
@@ -9601,7 +9342,7 @@
           <a:bodyPr wrap="square" lIns="0" tIns="0" rIns="0" bIns="0" rtlCol="0" anchor="ctr"/>
           <a:lstStyle/>
           <a:p>
-            <a:pPr indent="0" marL="0">
+            <a:pPr marL="0" indent="0">
               <a:lnSpc>
                 <a:spcPct val="125000"/>
               </a:lnSpc>
@@ -9621,7 +9362,7 @@
             <a:endParaRPr lang="en-US" sz="1300" dirty="0"/>
           </a:p>
           <a:p>
-            <a:pPr indent="0" marL="0">
+            <a:pPr marL="0" indent="0">
               <a:lnSpc>
                 <a:spcPct val="125000"/>
               </a:lnSpc>
@@ -9641,7 +9382,7 @@
             <a:endParaRPr lang="en-US" sz="1300" dirty="0"/>
           </a:p>
           <a:p>
-            <a:pPr indent="0" marL="0">
+            <a:pPr marL="0" indent="0">
               <a:lnSpc>
                 <a:spcPct val="125000"/>
               </a:lnSpc>
@@ -9661,7 +9402,7 @@
             <a:endParaRPr lang="en-US" sz="1300" dirty="0"/>
           </a:p>
           <a:p>
-            <a:pPr indent="0" marL="0">
+            <a:pPr marL="0" indent="0">
               <a:lnSpc>
                 <a:spcPct val="125000"/>
               </a:lnSpc>
@@ -9730,7 +9471,7 @@
           <a:bodyPr wrap="square" lIns="0" tIns="0" rIns="0" bIns="0" rtlCol="0" anchor="ctr"/>
           <a:lstStyle/>
           <a:p>
-            <a:pPr indent="0" marL="0">
+            <a:pPr marL="0" indent="0">
               <a:buNone/>
             </a:pPr>
             <a:r>
@@ -9769,7 +9510,7 @@
           <a:bodyPr wrap="square" lIns="0" tIns="0" rIns="0" bIns="0" rtlCol="0" anchor="ctr"/>
           <a:lstStyle/>
           <a:p>
-            <a:pPr indent="0" marL="0">
+            <a:pPr marL="0" indent="0">
               <a:lnSpc>
                 <a:spcPct val="125000"/>
               </a:lnSpc>
@@ -9789,7 +9530,7 @@
             <a:endParaRPr lang="en-US" sz="1300" dirty="0"/>
           </a:p>
           <a:p>
-            <a:pPr indent="0" marL="0">
+            <a:pPr marL="0" indent="0">
               <a:lnSpc>
                 <a:spcPct val="125000"/>
               </a:lnSpc>
@@ -9809,7 +9550,7 @@
             <a:endParaRPr lang="en-US" sz="1300" dirty="0"/>
           </a:p>
           <a:p>
-            <a:pPr indent="0" marL="0">
+            <a:pPr marL="0" indent="0">
               <a:lnSpc>
                 <a:spcPct val="125000"/>
               </a:lnSpc>
@@ -9829,7 +9570,7 @@
             <a:endParaRPr lang="en-US" sz="1300" dirty="0"/>
           </a:p>
           <a:p>
-            <a:pPr indent="0" marL="0">
+            <a:pPr marL="0" indent="0">
               <a:lnSpc>
                 <a:spcPct val="125000"/>
               </a:lnSpc>
@@ -9898,7 +9639,7 @@
           <a:bodyPr wrap="square" lIns="0" tIns="0" rIns="0" bIns="0" rtlCol="0" anchor="ctr"/>
           <a:lstStyle/>
           <a:p>
-            <a:pPr indent="0" marL="0">
+            <a:pPr marL="0" indent="0">
               <a:buNone/>
             </a:pPr>
             <a:r>
@@ -9937,7 +9678,7 @@
           <a:bodyPr wrap="square" lIns="0" tIns="0" rIns="0" bIns="0" rtlCol="0" anchor="ctr"/>
           <a:lstStyle/>
           <a:p>
-            <a:pPr indent="0" marL="0">
+            <a:pPr marL="0" indent="0">
               <a:buNone/>
             </a:pPr>
             <a:r>
@@ -10003,7 +9744,7 @@
           <a:bodyPr wrap="square" lIns="0" tIns="0" rIns="0" bIns="0" rtlCol="0" anchor="ctr"/>
           <a:lstStyle/>
           <a:p>
-            <a:pPr indent="0" marL="0">
+            <a:pPr marL="0" indent="0">
               <a:buNone/>
             </a:pPr>
             <a:r>
@@ -10042,7 +9783,7 @@
           <a:bodyPr wrap="square" lIns="0" tIns="0" rIns="0" bIns="0" rtlCol="0" anchor="ctr"/>
           <a:lstStyle/>
           <a:p>
-            <a:pPr indent="0" marL="0">
+            <a:pPr marL="0" indent="0">
               <a:lnSpc>
                 <a:spcPct val="125000"/>
               </a:lnSpc>
@@ -10062,7 +9803,7 @@
             <a:endParaRPr lang="en-US" sz="1300" dirty="0"/>
           </a:p>
           <a:p>
-            <a:pPr indent="0" marL="0">
+            <a:pPr marL="0" indent="0">
               <a:lnSpc>
                 <a:spcPct val="125000"/>
               </a:lnSpc>
@@ -10082,7 +9823,7 @@
             <a:endParaRPr lang="en-US" sz="1300" dirty="0"/>
           </a:p>
           <a:p>
-            <a:pPr indent="0" marL="0">
+            <a:pPr marL="0" indent="0">
               <a:lnSpc>
                 <a:spcPct val="125000"/>
               </a:lnSpc>
@@ -10151,7 +9892,7 @@
           <a:bodyPr wrap="square" lIns="0" tIns="0" rIns="0" bIns="0" rtlCol="0" anchor="ctr"/>
           <a:lstStyle/>
           <a:p>
-            <a:pPr indent="0" marL="0">
+            <a:pPr marL="0" indent="0">
               <a:buNone/>
             </a:pPr>
             <a:r>
@@ -10190,7 +9931,7 @@
           <a:bodyPr wrap="square" lIns="0" tIns="0" rIns="0" bIns="0" rtlCol="0" anchor="ctr"/>
           <a:lstStyle/>
           <a:p>
-            <a:pPr indent="0" marL="0">
+            <a:pPr marL="0" indent="0">
               <a:lnSpc>
                 <a:spcPct val="125000"/>
               </a:lnSpc>
@@ -10210,7 +9951,7 @@
             <a:endParaRPr lang="en-US" sz="1300" dirty="0"/>
           </a:p>
           <a:p>
-            <a:pPr indent="0" marL="0">
+            <a:pPr marL="0" indent="0">
               <a:lnSpc>
                 <a:spcPct val="125000"/>
               </a:lnSpc>
@@ -10230,7 +9971,7 @@
             <a:endParaRPr lang="en-US" sz="1300" dirty="0"/>
           </a:p>
           <a:p>
-            <a:pPr indent="0" marL="0">
+            <a:pPr marL="0" indent="0">
               <a:lnSpc>
                 <a:spcPct val="125000"/>
               </a:lnSpc>
@@ -10250,7 +9991,7 @@
             <a:endParaRPr lang="en-US" sz="1300" dirty="0"/>
           </a:p>
           <a:p>
-            <a:pPr indent="0" marL="0">
+            <a:pPr marL="0" indent="0">
               <a:lnSpc>
                 <a:spcPct val="125000"/>
               </a:lnSpc>
@@ -10292,7 +10033,7 @@
           <a:bodyPr wrap="square" lIns="0" tIns="0" rIns="0" bIns="0" rtlCol="0" anchor="ctr"/>
           <a:lstStyle/>
           <a:p>
-            <a:pPr indent="0" marL="0">
+            <a:pPr marL="0" indent="0">
               <a:buNone/>
             </a:pPr>
             <a:r>
@@ -10326,6 +10067,7 @@
         <a:solidFill>
           <a:srgbClr val="FFFFFF"/>
         </a:solidFill>
+        <a:effectLst/>
       </p:bgPr>
     </p:bg>
     <p:spTree>
@@ -10363,7 +10105,7 @@
           <a:bodyPr wrap="square" lIns="0" tIns="0" rIns="0" bIns="0" rtlCol="0" anchor="ctr"/>
           <a:lstStyle/>
           <a:p>
-            <a:pPr indent="0" marL="0">
+            <a:pPr marL="0" indent="0">
               <a:buNone/>
             </a:pPr>
             <a:r>
@@ -10402,7 +10144,7 @@
           <a:bodyPr wrap="square" lIns="0" tIns="0" rIns="0" bIns="0" rtlCol="0" anchor="ctr"/>
           <a:lstStyle/>
           <a:p>
-            <a:pPr indent="0" marL="0">
+            <a:pPr marL="0" indent="0">
               <a:buNone/>
             </a:pPr>
             <a:r>
@@ -10468,7 +10210,7 @@
           <a:bodyPr wrap="square" lIns="0" tIns="0" rIns="0" bIns="0" rtlCol="0" anchor="ctr"/>
           <a:lstStyle/>
           <a:p>
-            <a:pPr indent="0" marL="0">
+            <a:pPr marL="0" indent="0">
               <a:buNone/>
             </a:pPr>
             <a:r>
@@ -10534,7 +10276,7 @@
           <a:bodyPr wrap="square" lIns="0" tIns="0" rIns="0" bIns="0" rtlCol="0" anchor="ctr"/>
           <a:lstStyle/>
           <a:p>
-            <a:pPr algn="ctr" indent="0" marL="0">
+            <a:pPr marL="0" indent="0" algn="ctr">
               <a:buNone/>
             </a:pPr>
             <a:r>
@@ -10573,7 +10315,7 @@
           <a:bodyPr wrap="square" lIns="0" tIns="0" rIns="0" bIns="0" rtlCol="0" anchor="ctr"/>
           <a:lstStyle/>
           <a:p>
-            <a:pPr indent="0" marL="0">
+            <a:pPr marL="0" indent="0">
               <a:lnSpc>
                 <a:spcPct val="120000"/>
               </a:lnSpc>
@@ -10593,7 +10335,7 @@
             <a:endParaRPr lang="en-US" sz="1400" dirty="0"/>
           </a:p>
           <a:p>
-            <a:pPr indent="0" marL="0">
+            <a:pPr marL="0" indent="0">
               <a:lnSpc>
                 <a:spcPct val="120000"/>
               </a:lnSpc>
@@ -10662,7 +10404,7 @@
           <a:bodyPr wrap="square" lIns="0" tIns="0" rIns="0" bIns="0" rtlCol="0" anchor="ctr"/>
           <a:lstStyle/>
           <a:p>
-            <a:pPr indent="0" marL="0">
+            <a:pPr marL="0" indent="0">
               <a:buNone/>
             </a:pPr>
             <a:r>
@@ -10728,7 +10470,7 @@
           <a:bodyPr wrap="square" lIns="0" tIns="0" rIns="0" bIns="0" rtlCol="0" anchor="ctr"/>
           <a:lstStyle/>
           <a:p>
-            <a:pPr algn="ctr" indent="0" marL="0">
+            <a:pPr marL="0" indent="0" algn="ctr">
               <a:buNone/>
             </a:pPr>
             <a:r>
@@ -10767,7 +10509,7 @@
           <a:bodyPr wrap="square" lIns="0" tIns="0" rIns="0" bIns="0" rtlCol="0" anchor="ctr"/>
           <a:lstStyle/>
           <a:p>
-            <a:pPr indent="0" marL="0">
+            <a:pPr marL="0" indent="0">
               <a:lnSpc>
                 <a:spcPct val="120000"/>
               </a:lnSpc>
@@ -10836,7 +10578,7 @@
           <a:bodyPr wrap="square" lIns="0" tIns="0" rIns="0" bIns="0" rtlCol="0" anchor="ctr"/>
           <a:lstStyle/>
           <a:p>
-            <a:pPr indent="0" marL="0">
+            <a:pPr marL="0" indent="0">
               <a:buNone/>
             </a:pPr>
             <a:r>
@@ -10902,7 +10644,7 @@
           <a:bodyPr wrap="square" lIns="0" tIns="0" rIns="0" bIns="0" rtlCol="0" anchor="ctr"/>
           <a:lstStyle/>
           <a:p>
-            <a:pPr algn="ctr" indent="0" marL="0">
+            <a:pPr marL="0" indent="0" algn="ctr">
               <a:buNone/>
             </a:pPr>
             <a:r>
@@ -10941,7 +10683,7 @@
           <a:bodyPr wrap="square" lIns="0" tIns="0" rIns="0" bIns="0" rtlCol="0" anchor="ctr"/>
           <a:lstStyle/>
           <a:p>
-            <a:pPr indent="0" marL="0">
+            <a:pPr marL="0" indent="0">
               <a:lnSpc>
                 <a:spcPct val="120000"/>
               </a:lnSpc>
@@ -10961,7 +10703,7 @@
             <a:endParaRPr lang="en-US" sz="1400" dirty="0"/>
           </a:p>
           <a:p>
-            <a:pPr indent="0" marL="0">
+            <a:pPr marL="0" indent="0">
               <a:lnSpc>
                 <a:spcPct val="120000"/>
               </a:lnSpc>
@@ -11030,7 +10772,7 @@
           <a:bodyPr wrap="square" lIns="0" tIns="0" rIns="0" bIns="0" rtlCol="0" anchor="ctr"/>
           <a:lstStyle/>
           <a:p>
-            <a:pPr indent="0" marL="0">
+            <a:pPr marL="0" indent="0">
               <a:buNone/>
             </a:pPr>
             <a:r>
@@ -11064,6 +10806,7 @@
         <a:solidFill>
           <a:srgbClr val="14504B"/>
         </a:solidFill>
+        <a:effectLst/>
       </p:bgPr>
     </p:bg>
     <p:spTree>
@@ -11126,7 +10869,7 @@
           <a:bodyPr wrap="square" lIns="0" tIns="0" rIns="0" bIns="0" rtlCol="0" anchor="ctr"/>
           <a:lstStyle/>
           <a:p>
-            <a:pPr algn="ctr" indent="0" marL="0">
+            <a:pPr marL="0" indent="0" algn="ctr">
               <a:buNone/>
             </a:pPr>
             <a:r>
@@ -11165,7 +10908,7 @@
           <a:bodyPr wrap="square" lIns="0" tIns="0" rIns="0" bIns="0" rtlCol="0" anchor="ctr"/>
           <a:lstStyle/>
           <a:p>
-            <a:pPr indent="0" marL="0">
+            <a:pPr marL="0" indent="0">
               <a:lnSpc>
                 <a:spcPct val="125000"/>
               </a:lnSpc>
@@ -11185,7 +10928,7 @@
             <a:endParaRPr lang="en-US" sz="3800" dirty="0"/>
           </a:p>
           <a:p>
-            <a:pPr indent="0" marL="0">
+            <a:pPr marL="0" indent="0">
               <a:lnSpc>
                 <a:spcPct val="125000"/>
               </a:lnSpc>
@@ -11227,7 +10970,7 @@
           <a:bodyPr wrap="square" lIns="0" tIns="0" rIns="0" bIns="0" rtlCol="0" anchor="ctr"/>
           <a:lstStyle/>
           <a:p>
-            <a:pPr indent="0" marL="0">
+            <a:pPr marL="0" indent="0">
               <a:buNone/>
             </a:pPr>
             <a:r>
@@ -11293,7 +11036,7 @@
           <a:bodyPr wrap="square" lIns="0" tIns="0" rIns="0" bIns="0" rtlCol="0" anchor="ctr"/>
           <a:lstStyle/>
           <a:p>
-            <a:pPr indent="0" marL="0">
+            <a:pPr marL="0" indent="0">
               <a:buNone/>
             </a:pPr>
             <a:r>
@@ -11332,7 +11075,7 @@
           <a:bodyPr wrap="square" lIns="0" tIns="0" rIns="0" bIns="0" rtlCol="0" anchor="ctr"/>
           <a:lstStyle/>
           <a:p>
-            <a:pPr indent="0" marL="0">
+            <a:pPr marL="0" indent="0">
               <a:buNone/>
             </a:pPr>
             <a:r>
@@ -11371,7 +11114,7 @@
           <a:bodyPr wrap="square" lIns="0" tIns="0" rIns="0" bIns="0" rtlCol="0" anchor="ctr"/>
           <a:lstStyle/>
           <a:p>
-            <a:pPr indent="0" marL="0">
+            <a:pPr marL="0" indent="0">
               <a:buNone/>
             </a:pPr>
             <a:r>
@@ -11405,6 +11148,7 @@
         <a:solidFill>
           <a:srgbClr val="FFFFFF"/>
         </a:solidFill>
+        <a:effectLst/>
       </p:bgPr>
     </p:bg>
     <p:spTree>
@@ -11442,7 +11186,7 @@
           <a:bodyPr wrap="square" lIns="0" tIns="0" rIns="0" bIns="0" rtlCol="0" anchor="ctr"/>
           <a:lstStyle/>
           <a:p>
-            <a:pPr indent="0" marL="0">
+            <a:pPr marL="0" indent="0">
               <a:buNone/>
             </a:pPr>
             <a:r>
@@ -11508,7 +11252,7 @@
           <a:bodyPr wrap="square" lIns="0" tIns="0" rIns="0" bIns="0" rtlCol="0" anchor="ctr"/>
           <a:lstStyle/>
           <a:p>
-            <a:pPr algn="ctr" indent="0" marL="0">
+            <a:pPr marL="0" indent="0" algn="ctr">
               <a:buNone/>
             </a:pPr>
             <a:r>
@@ -11547,7 +11291,7 @@
           <a:bodyPr wrap="square" lIns="0" tIns="0" rIns="0" bIns="0" rtlCol="0" anchor="ctr"/>
           <a:lstStyle/>
           <a:p>
-            <a:pPr algn="ctr" indent="0" marL="0">
+            <a:pPr marL="0" indent="0" algn="ctr">
               <a:buNone/>
             </a:pPr>
             <a:r>
@@ -11638,7 +11382,7 @@
           <a:bodyPr wrap="square" lIns="0" tIns="0" rIns="0" bIns="0" rtlCol="0" anchor="ctr"/>
           <a:lstStyle/>
           <a:p>
-            <a:pPr algn="ctr" indent="0" marL="0">
+            <a:pPr marL="0" indent="0" algn="ctr">
               <a:buNone/>
             </a:pPr>
             <a:r>
@@ -11677,7 +11421,7 @@
           <a:bodyPr wrap="square" lIns="0" tIns="0" rIns="0" bIns="0" rtlCol="0" anchor="ctr"/>
           <a:lstStyle/>
           <a:p>
-            <a:pPr algn="ctr" indent="0" marL="0">
+            <a:pPr marL="0" indent="0" algn="ctr">
               <a:buNone/>
             </a:pPr>
             <a:r>
@@ -11768,7 +11512,7 @@
           <a:bodyPr wrap="square" lIns="0" tIns="0" rIns="0" bIns="0" rtlCol="0" anchor="ctr"/>
           <a:lstStyle/>
           <a:p>
-            <a:pPr algn="ctr" indent="0" marL="0">
+            <a:pPr marL="0" indent="0" algn="ctr">
               <a:buNone/>
             </a:pPr>
             <a:r>
@@ -11807,7 +11551,7 @@
           <a:bodyPr wrap="square" lIns="0" tIns="0" rIns="0" bIns="0" rtlCol="0" anchor="ctr"/>
           <a:lstStyle/>
           <a:p>
-            <a:pPr algn="ctr" indent="0" marL="0">
+            <a:pPr marL="0" indent="0" algn="ctr">
               <a:buNone/>
             </a:pPr>
             <a:r>
@@ -11873,7 +11617,7 @@
           <a:bodyPr wrap="square" lIns="0" tIns="0" rIns="0" bIns="0" rtlCol="0" anchor="ctr"/>
           <a:lstStyle/>
           <a:p>
-            <a:pPr indent="0" marL="0">
+            <a:pPr marL="0" indent="0">
               <a:buNone/>
             </a:pPr>
             <a:r>
@@ -11912,7 +11656,7 @@
           <a:bodyPr wrap="square" lIns="0" tIns="0" rIns="0" bIns="0" rtlCol="0" anchor="ctr"/>
           <a:lstStyle/>
           <a:p>
-            <a:pPr indent="0" marL="0">
+            <a:pPr marL="0" indent="0">
               <a:lnSpc>
                 <a:spcPct val="115000"/>
               </a:lnSpc>
@@ -11932,7 +11676,7 @@
             <a:endParaRPr lang="en-US" sz="1300" dirty="0"/>
           </a:p>
           <a:p>
-            <a:pPr indent="0" marL="0">
+            <a:pPr marL="0" indent="0">
               <a:lnSpc>
                 <a:spcPct val="115000"/>
               </a:lnSpc>
@@ -12001,7 +11745,7 @@
           <a:bodyPr wrap="square" lIns="0" tIns="0" rIns="0" bIns="0" rtlCol="0" anchor="ctr"/>
           <a:lstStyle/>
           <a:p>
-            <a:pPr indent="0" marL="0">
+            <a:pPr marL="0" indent="0">
               <a:buNone/>
             </a:pPr>
             <a:r>
@@ -12040,7 +11784,7 @@
           <a:bodyPr wrap="square" lIns="0" tIns="0" rIns="0" bIns="0" rtlCol="0" anchor="ctr"/>
           <a:lstStyle/>
           <a:p>
-            <a:pPr indent="0" marL="0">
+            <a:pPr marL="0" indent="0">
               <a:lnSpc>
                 <a:spcPct val="130000"/>
               </a:lnSpc>
@@ -12060,7 +11804,7 @@
             <a:endParaRPr lang="en-US" sz="2400" dirty="0"/>
           </a:p>
           <a:p>
-            <a:pPr indent="0" marL="0">
+            <a:pPr marL="0" indent="0">
               <a:lnSpc>
                 <a:spcPct val="130000"/>
               </a:lnSpc>
@@ -12097,6 +11841,7 @@
         <a:solidFill>
           <a:srgbClr val="FFFFFF"/>
         </a:solidFill>
+        <a:effectLst/>
       </p:bgPr>
     </p:bg>
     <p:spTree>
@@ -12134,7 +11879,7 @@
           <a:bodyPr wrap="square" lIns="0" tIns="0" rIns="0" bIns="0" rtlCol="0" anchor="ctr"/>
           <a:lstStyle/>
           <a:p>
-            <a:pPr indent="0" marL="0">
+            <a:pPr marL="0" indent="0">
               <a:buNone/>
             </a:pPr>
             <a:r>
@@ -12173,7 +11918,7 @@
           <a:bodyPr wrap="square" lIns="0" tIns="0" rIns="0" bIns="0" rtlCol="0" anchor="ctr"/>
           <a:lstStyle/>
           <a:p>
-            <a:pPr indent="0" marL="0">
+            <a:pPr marL="0" indent="0">
               <a:buNone/>
             </a:pPr>
             <a:r>
@@ -12239,7 +11984,7 @@
           <a:bodyPr wrap="square" lIns="0" tIns="0" rIns="0" bIns="0" rtlCol="0" anchor="ctr"/>
           <a:lstStyle/>
           <a:p>
-            <a:pPr indent="0" marL="0">
+            <a:pPr marL="0" indent="0">
               <a:buNone/>
             </a:pPr>
             <a:r>
@@ -12278,7 +12023,7 @@
           <a:bodyPr wrap="square" lIns="0" tIns="0" rIns="0" bIns="0" rtlCol="0" anchor="ctr"/>
           <a:lstStyle/>
           <a:p>
-            <a:pPr indent="0" marL="0">
+            <a:pPr marL="0" indent="0">
               <a:lnSpc>
                 <a:spcPct val="120000"/>
               </a:lnSpc>
@@ -12298,7 +12043,7 @@
             <a:endParaRPr lang="en-US" sz="1400" dirty="0"/>
           </a:p>
           <a:p>
-            <a:pPr indent="0" marL="0">
+            <a:pPr marL="0" indent="0">
               <a:lnSpc>
                 <a:spcPct val="120000"/>
               </a:lnSpc>
@@ -12367,7 +12112,7 @@
           <a:bodyPr wrap="square" lIns="0" tIns="0" rIns="0" bIns="0" rtlCol="0" anchor="ctr"/>
           <a:lstStyle/>
           <a:p>
-            <a:pPr indent="0" marL="0">
+            <a:pPr marL="0" indent="0">
               <a:buNone/>
             </a:pPr>
             <a:r>
@@ -12406,7 +12151,7 @@
           <a:bodyPr wrap="square" lIns="0" tIns="0" rIns="0" bIns="0" rtlCol="0" anchor="ctr"/>
           <a:lstStyle/>
           <a:p>
-            <a:pPr indent="0" marL="0">
+            <a:pPr marL="0" indent="0">
               <a:lnSpc>
                 <a:spcPct val="120000"/>
               </a:lnSpc>
@@ -12426,7 +12171,7 @@
             <a:endParaRPr lang="en-US" sz="1400" dirty="0"/>
           </a:p>
           <a:p>
-            <a:pPr indent="0" marL="0">
+            <a:pPr marL="0" indent="0">
               <a:lnSpc>
                 <a:spcPct val="120000"/>
               </a:lnSpc>
@@ -12495,7 +12240,7 @@
           <a:bodyPr wrap="square" lIns="0" tIns="0" rIns="0" bIns="0" rtlCol="0" anchor="ctr"/>
           <a:lstStyle/>
           <a:p>
-            <a:pPr indent="0" marL="0">
+            <a:pPr marL="0" indent="0">
               <a:buNone/>
             </a:pPr>
             <a:r>
@@ -12534,7 +12279,7 @@
           <a:bodyPr wrap="square" lIns="0" tIns="0" rIns="0" bIns="0" rtlCol="0" anchor="ctr"/>
           <a:lstStyle/>
           <a:p>
-            <a:pPr indent="0" marL="0">
+            <a:pPr marL="0" indent="0">
               <a:lnSpc>
                 <a:spcPct val="120000"/>
               </a:lnSpc>
@@ -12554,7 +12299,7 @@
             <a:endParaRPr lang="en-US" sz="1400" dirty="0"/>
           </a:p>
           <a:p>
-            <a:pPr indent="0" marL="0">
+            <a:pPr marL="0" indent="0">
               <a:lnSpc>
                 <a:spcPct val="120000"/>
               </a:lnSpc>
@@ -12577,7 +12322,7 @@
       </p:sp>
       <p:graphicFrame>
         <p:nvGraphicFramePr>
-          <p:cNvPr id="13" name="Chart 0" descr=""/>
+          <p:cNvPr id="13" name="Chart 0"/>
           <p:cNvGraphicFramePr/>
           <p:nvPr/>
         </p:nvGraphicFramePr>
@@ -12585,9 +12330,9 @@
           <a:off x="731520" y="3840480"/>
           <a:ext cx="6035040" cy="2011680"/>
         </p:xfrm>
-        <a:graphic xmlns:a="http://schemas.openxmlformats.org/drawingml/2006/main">
+        <a:graphic>
           <a:graphicData uri="http://schemas.openxmlformats.org/drawingml/2006/chart">
-            <c:chart xmlns:c="http://schemas.openxmlformats.org/drawingml/2006/chart" r:id="rId1"/>
+            <c:chart xmlns:c="http://schemas.openxmlformats.org/drawingml/2006/chart" xmlns:r="http://schemas.openxmlformats.org/officeDocument/2006/relationships" r:id="rId3"/>
           </a:graphicData>
         </a:graphic>
       </p:graphicFrame>
@@ -12612,7 +12357,7 @@
           <a:bodyPr wrap="square" lIns="0" tIns="0" rIns="0" bIns="0" rtlCol="0" anchor="ctr"/>
           <a:lstStyle/>
           <a:p>
-            <a:pPr indent="0" marL="0">
+            <a:pPr marL="0" indent="0">
               <a:lnSpc>
                 <a:spcPct val="120000"/>
               </a:lnSpc>
@@ -12681,7 +12426,7 @@
           <a:bodyPr wrap="square" lIns="0" tIns="0" rIns="0" bIns="0" rtlCol="0" anchor="ctr"/>
           <a:lstStyle/>
           <a:p>
-            <a:pPr indent="0" marL="0">
+            <a:pPr marL="0" indent="0">
               <a:buNone/>
             </a:pPr>
             <a:r>
@@ -12720,7 +12465,7 @@
           <a:bodyPr wrap="square" lIns="0" tIns="0" rIns="0" bIns="0" rtlCol="0" anchor="ctr"/>
           <a:lstStyle/>
           <a:p>
-            <a:pPr indent="0" marL="0">
+            <a:pPr marL="0" indent="0">
               <a:lnSpc>
                 <a:spcPct val="125000"/>
               </a:lnSpc>
@@ -12740,7 +12485,7 @@
             <a:endParaRPr lang="en-US" sz="1400" dirty="0"/>
           </a:p>
           <a:p>
-            <a:pPr indent="0" marL="0">
+            <a:pPr marL="0" indent="0">
               <a:lnSpc>
                 <a:spcPct val="125000"/>
               </a:lnSpc>
@@ -12782,7 +12527,7 @@
           <a:bodyPr wrap="square" lIns="0" tIns="0" rIns="0" bIns="0" rtlCol="0" anchor="ctr"/>
           <a:lstStyle/>
           <a:p>
-            <a:pPr indent="0" marL="0">
+            <a:pPr marL="0" indent="0">
               <a:buNone/>
             </a:pPr>
             <a:r>
@@ -12821,7 +12566,7 @@
           <a:bodyPr wrap="square" lIns="0" tIns="0" rIns="0" bIns="0" rtlCol="0" anchor="ctr"/>
           <a:lstStyle/>
           <a:p>
-            <a:pPr indent="0" marL="0">
+            <a:pPr marL="0" indent="0">
               <a:lnSpc>
                 <a:spcPct val="120000"/>
               </a:lnSpc>
@@ -12841,7 +12586,7 @@
             <a:endParaRPr lang="en-US" sz="1300" dirty="0"/>
           </a:p>
           <a:p>
-            <a:pPr indent="0" marL="0">
+            <a:pPr marL="0" indent="0">
               <a:lnSpc>
                 <a:spcPct val="120000"/>
               </a:lnSpc>
@@ -12861,7 +12606,7 @@
             <a:endParaRPr lang="en-US" sz="1300" dirty="0"/>
           </a:p>
           <a:p>
-            <a:pPr indent="0" marL="0">
+            <a:pPr marL="0" indent="0">
               <a:lnSpc>
                 <a:spcPct val="120000"/>
               </a:lnSpc>
@@ -12881,7 +12626,7 @@
             <a:endParaRPr lang="en-US" sz="1300" dirty="0"/>
           </a:p>
           <a:p>
-            <a:pPr indent="0" marL="0">
+            <a:pPr marL="0" indent="0">
               <a:lnSpc>
                 <a:spcPct val="120000"/>
               </a:lnSpc>
@@ -12918,6 +12663,7 @@
         <a:solidFill>
           <a:srgbClr val="14504B"/>
         </a:solidFill>
+        <a:effectLst/>
       </p:bgPr>
     </p:bg>
     <p:spTree>
@@ -12980,7 +12726,7 @@
           <a:bodyPr wrap="square" lIns="0" tIns="0" rIns="0" bIns="0" rtlCol="0" anchor="ctr"/>
           <a:lstStyle/>
           <a:p>
-            <a:pPr algn="ctr" indent="0" marL="0">
+            <a:pPr marL="0" indent="0" algn="ctr">
               <a:buNone/>
             </a:pPr>
             <a:r>
@@ -13019,7 +12765,7 @@
           <a:bodyPr wrap="square" lIns="0" tIns="0" rIns="0" bIns="0" rtlCol="0" anchor="ctr"/>
           <a:lstStyle/>
           <a:p>
-            <a:pPr indent="0" marL="0">
+            <a:pPr marL="0" indent="0">
               <a:buNone/>
             </a:pPr>
             <a:r>
@@ -13058,7 +12804,7 @@
           <a:bodyPr wrap="square" lIns="0" tIns="0" rIns="0" bIns="0" rtlCol="0" anchor="ctr"/>
           <a:lstStyle/>
           <a:p>
-            <a:pPr indent="0" marL="0">
+            <a:pPr marL="0" indent="0">
               <a:buNone/>
             </a:pPr>
             <a:r>
@@ -13092,6 +12838,7 @@
         <a:solidFill>
           <a:srgbClr val="FFFFFF"/>
         </a:solidFill>
+        <a:effectLst/>
       </p:bgPr>
     </p:bg>
     <p:spTree>
@@ -13129,7 +12876,7 @@
           <a:bodyPr wrap="square" lIns="0" tIns="0" rIns="0" bIns="0" rtlCol="0" anchor="ctr"/>
           <a:lstStyle/>
           <a:p>
-            <a:pPr indent="0" marL="0">
+            <a:pPr marL="0" indent="0">
               <a:buNone/>
             </a:pPr>
             <a:r>
@@ -13168,7 +12915,7 @@
           <a:bodyPr wrap="square" lIns="0" tIns="0" rIns="0" bIns="0" rtlCol="0" anchor="ctr"/>
           <a:lstStyle/>
           <a:p>
-            <a:pPr indent="0" marL="0">
+            <a:pPr marL="0" indent="0">
               <a:buNone/>
             </a:pPr>
             <a:r>
@@ -13259,7 +13006,7 @@
           <a:bodyPr wrap="square" lIns="0" tIns="0" rIns="0" bIns="0" rtlCol="0" anchor="ctr"/>
           <a:lstStyle/>
           <a:p>
-            <a:pPr algn="ctr" indent="0" marL="0">
+            <a:pPr marL="0" indent="0" algn="ctr">
               <a:buNone/>
             </a:pPr>
             <a:r>
@@ -13298,7 +13045,7 @@
           <a:bodyPr wrap="square" lIns="0" tIns="0" rIns="0" bIns="0" rtlCol="0" anchor="ctr"/>
           <a:lstStyle/>
           <a:p>
-            <a:pPr indent="0" marL="0">
+            <a:pPr marL="0" indent="0">
               <a:buNone/>
             </a:pPr>
             <a:r>
@@ -13337,7 +13084,7 @@
           <a:bodyPr wrap="square" lIns="0" tIns="0" rIns="0" bIns="0" rtlCol="0" anchor="ctr"/>
           <a:lstStyle/>
           <a:p>
-            <a:pPr indent="0" marL="0">
+            <a:pPr marL="0" indent="0">
               <a:lnSpc>
                 <a:spcPct val="130000"/>
               </a:lnSpc>
@@ -13357,7 +13104,7 @@
             <a:endParaRPr lang="en-US" sz="1400" dirty="0"/>
           </a:p>
           <a:p>
-            <a:pPr indent="0" marL="0">
+            <a:pPr marL="0" indent="0">
               <a:lnSpc>
                 <a:spcPct val="130000"/>
               </a:lnSpc>
@@ -13377,7 +13124,7 @@
             <a:endParaRPr lang="en-US" sz="1400" dirty="0"/>
           </a:p>
           <a:p>
-            <a:pPr indent="0" marL="0">
+            <a:pPr marL="0" indent="0">
               <a:lnSpc>
                 <a:spcPct val="130000"/>
               </a:lnSpc>
@@ -13471,7 +13218,7 @@
           <a:bodyPr wrap="square" lIns="0" tIns="0" rIns="0" bIns="0" rtlCol="0" anchor="ctr"/>
           <a:lstStyle/>
           <a:p>
-            <a:pPr algn="ctr" indent="0" marL="0">
+            <a:pPr marL="0" indent="0" algn="ctr">
               <a:buNone/>
             </a:pPr>
             <a:r>
@@ -13510,7 +13257,7 @@
           <a:bodyPr wrap="square" lIns="0" tIns="0" rIns="0" bIns="0" rtlCol="0" anchor="ctr"/>
           <a:lstStyle/>
           <a:p>
-            <a:pPr indent="0" marL="0">
+            <a:pPr marL="0" indent="0">
               <a:buNone/>
             </a:pPr>
             <a:r>
@@ -13549,7 +13296,7 @@
           <a:bodyPr wrap="square" lIns="0" tIns="0" rIns="0" bIns="0" rtlCol="0" anchor="ctr"/>
           <a:lstStyle/>
           <a:p>
-            <a:pPr indent="0" marL="0">
+            <a:pPr marL="0" indent="0">
               <a:lnSpc>
                 <a:spcPct val="130000"/>
               </a:lnSpc>
@@ -13569,7 +13316,7 @@
             <a:endParaRPr lang="en-US" sz="1400" dirty="0"/>
           </a:p>
           <a:p>
-            <a:pPr indent="0" marL="0">
+            <a:pPr marL="0" indent="0">
               <a:lnSpc>
                 <a:spcPct val="130000"/>
               </a:lnSpc>
@@ -13589,7 +13336,7 @@
             <a:endParaRPr lang="en-US" sz="1400" dirty="0"/>
           </a:p>
           <a:p>
-            <a:pPr indent="0" marL="0">
+            <a:pPr marL="0" indent="0">
               <a:lnSpc>
                 <a:spcPct val="130000"/>
               </a:lnSpc>
@@ -13683,7 +13430,7 @@
           <a:bodyPr wrap="square" lIns="0" tIns="0" rIns="0" bIns="0" rtlCol="0" anchor="ctr"/>
           <a:lstStyle/>
           <a:p>
-            <a:pPr algn="ctr" indent="0" marL="0">
+            <a:pPr marL="0" indent="0" algn="ctr">
               <a:buNone/>
             </a:pPr>
             <a:r>
@@ -13722,7 +13469,7 @@
           <a:bodyPr wrap="square" lIns="0" tIns="0" rIns="0" bIns="0" rtlCol="0" anchor="ctr"/>
           <a:lstStyle/>
           <a:p>
-            <a:pPr indent="0" marL="0">
+            <a:pPr marL="0" indent="0">
               <a:buNone/>
             </a:pPr>
             <a:r>
@@ -13761,7 +13508,7 @@
           <a:bodyPr wrap="square" lIns="0" tIns="0" rIns="0" bIns="0" rtlCol="0" anchor="ctr"/>
           <a:lstStyle/>
           <a:p>
-            <a:pPr indent="0" marL="0">
+            <a:pPr marL="0" indent="0">
               <a:lnSpc>
                 <a:spcPct val="130000"/>
               </a:lnSpc>
@@ -13781,7 +13528,7 @@
             <a:endParaRPr lang="en-US" sz="1400" dirty="0"/>
           </a:p>
           <a:p>
-            <a:pPr indent="0" marL="0">
+            <a:pPr marL="0" indent="0">
               <a:lnSpc>
                 <a:spcPct val="130000"/>
               </a:lnSpc>
@@ -13801,7 +13548,7 @@
             <a:endParaRPr lang="en-US" sz="1400" dirty="0"/>
           </a:p>
           <a:p>
-            <a:pPr indent="0" marL="0">
+            <a:pPr marL="0" indent="0">
               <a:lnSpc>
                 <a:spcPct val="130000"/>
               </a:lnSpc>
@@ -13870,7 +13617,7 @@
           <a:bodyPr wrap="square" lIns="0" tIns="0" rIns="0" bIns="0" rtlCol="0" anchor="ctr"/>
           <a:lstStyle/>
           <a:p>
-            <a:pPr indent="0" marL="0">
+            <a:pPr marL="0" indent="0">
               <a:buNone/>
             </a:pPr>
             <a:r>
@@ -13904,6 +13651,7 @@
         <a:solidFill>
           <a:srgbClr val="FFFFFF"/>
         </a:solidFill>
+        <a:effectLst/>
       </p:bgPr>
     </p:bg>
     <p:spTree>
@@ -13941,7 +13689,7 @@
           <a:bodyPr wrap="square" lIns="0" tIns="0" rIns="0" bIns="0" rtlCol="0" anchor="ctr"/>
           <a:lstStyle/>
           <a:p>
-            <a:pPr indent="0" marL="0">
+            <a:pPr marL="0" indent="0">
               <a:buNone/>
             </a:pPr>
             <a:r>
@@ -14007,7 +13755,7 @@
           <a:bodyPr wrap="square" lIns="0" tIns="0" rIns="0" bIns="0" rtlCol="0" anchor="ctr"/>
           <a:lstStyle/>
           <a:p>
-            <a:pPr indent="0" marL="0">
+            <a:pPr marL="0" indent="0">
               <a:buNone/>
             </a:pPr>
             <a:r>
@@ -14046,7 +13794,7 @@
           <a:bodyPr wrap="square" lIns="0" tIns="0" rIns="0" bIns="0" rtlCol="0" anchor="ctr"/>
           <a:lstStyle/>
           <a:p>
-            <a:pPr indent="0" marL="0">
+            <a:pPr marL="0" indent="0">
               <a:lnSpc>
                 <a:spcPct val="125000"/>
               </a:lnSpc>
@@ -14066,7 +13814,7 @@
             <a:endParaRPr lang="en-US" sz="1500" dirty="0"/>
           </a:p>
           <a:p>
-            <a:pPr indent="0" marL="0">
+            <a:pPr marL="0" indent="0">
               <a:lnSpc>
                 <a:spcPct val="125000"/>
               </a:lnSpc>
@@ -14108,7 +13856,7 @@
           <a:bodyPr wrap="square" lIns="0" tIns="0" rIns="0" bIns="0" rtlCol="0" anchor="ctr"/>
           <a:lstStyle/>
           <a:p>
-            <a:pPr indent="0" marL="0">
+            <a:pPr marL="0" indent="0">
               <a:lnSpc>
                 <a:spcPct val="125000"/>
               </a:lnSpc>
@@ -14128,7 +13876,7 @@
             <a:endParaRPr lang="en-US" sz="1500" dirty="0"/>
           </a:p>
           <a:p>
-            <a:pPr indent="0" marL="0">
+            <a:pPr marL="0" indent="0">
               <a:lnSpc>
                 <a:spcPct val="125000"/>
               </a:lnSpc>
@@ -14197,7 +13945,7 @@
           <a:bodyPr wrap="square" lIns="0" tIns="0" rIns="0" bIns="0" rtlCol="0" anchor="ctr"/>
           <a:lstStyle/>
           <a:p>
-            <a:pPr indent="0" marL="0">
+            <a:pPr marL="0" indent="0">
               <a:buNone/>
             </a:pPr>
             <a:r>
@@ -14236,7 +13984,7 @@
           <a:bodyPr wrap="square" lIns="0" tIns="0" rIns="0" bIns="0" rtlCol="0" anchor="ctr"/>
           <a:lstStyle/>
           <a:p>
-            <a:pPr indent="0" marL="0">
+            <a:pPr marL="0" indent="0">
               <a:lnSpc>
                 <a:spcPct val="115000"/>
               </a:lnSpc>
@@ -14256,7 +14004,7 @@
             <a:endParaRPr lang="en-US" sz="1300" dirty="0"/>
           </a:p>
           <a:p>
-            <a:pPr indent="0" marL="0">
+            <a:pPr marL="0" indent="0">
               <a:lnSpc>
                 <a:spcPct val="115000"/>
               </a:lnSpc>
@@ -14298,7 +14046,7 @@
           <a:bodyPr wrap="square" lIns="0" tIns="0" rIns="0" bIns="0" rtlCol="0" anchor="ctr"/>
           <a:lstStyle/>
           <a:p>
-            <a:pPr indent="0" marL="0">
+            <a:pPr marL="0" indent="0">
               <a:lnSpc>
                 <a:spcPct val="115000"/>
               </a:lnSpc>
@@ -14318,7 +14066,7 @@
             <a:endParaRPr lang="en-US" sz="1300" dirty="0"/>
           </a:p>
           <a:p>
-            <a:pPr indent="0" marL="0">
+            <a:pPr marL="0" indent="0">
               <a:lnSpc>
                 <a:spcPct val="115000"/>
               </a:lnSpc>
@@ -14360,7 +14108,7 @@
           <a:bodyPr wrap="square" lIns="0" tIns="0" rIns="0" bIns="0" rtlCol="0" anchor="ctr"/>
           <a:lstStyle/>
           <a:p>
-            <a:pPr indent="0" marL="0">
+            <a:pPr marL="0" indent="0">
               <a:lnSpc>
                 <a:spcPct val="115000"/>
               </a:lnSpc>
@@ -14380,7 +14128,7 @@
             <a:endParaRPr lang="en-US" sz="1300" dirty="0"/>
           </a:p>
           <a:p>
-            <a:pPr indent="0" marL="0">
+            <a:pPr marL="0" indent="0">
               <a:lnSpc>
                 <a:spcPct val="115000"/>
               </a:lnSpc>
@@ -14422,7 +14170,7 @@
           <a:bodyPr wrap="square" lIns="0" tIns="0" rIns="0" bIns="0" rtlCol="0" anchor="ctr"/>
           <a:lstStyle/>
           <a:p>
-            <a:pPr indent="0" marL="0">
+            <a:pPr marL="0" indent="0">
               <a:lnSpc>
                 <a:spcPct val="115000"/>
               </a:lnSpc>
@@ -14442,7 +14190,7 @@
             <a:endParaRPr lang="en-US" sz="1300" dirty="0"/>
           </a:p>
           <a:p>
-            <a:pPr indent="0" marL="0">
+            <a:pPr marL="0" indent="0">
               <a:lnSpc>
                 <a:spcPct val="115000"/>
               </a:lnSpc>
@@ -14484,7 +14232,7 @@
           <a:bodyPr wrap="square" lIns="0" tIns="0" rIns="0" bIns="0" rtlCol="0" anchor="ctr"/>
           <a:lstStyle/>
           <a:p>
-            <a:pPr indent="0" marL="0">
+            <a:pPr marL="0" indent="0">
               <a:buNone/>
             </a:pPr>
             <a:r>
@@ -14518,6 +14266,7 @@
         <a:solidFill>
           <a:srgbClr val="14504B"/>
         </a:solidFill>
+        <a:effectLst/>
       </p:bgPr>
     </p:bg>
     <p:spTree>
@@ -14580,7 +14329,7 @@
           <a:bodyPr wrap="square" lIns="0" tIns="0" rIns="0" bIns="0" rtlCol="0" anchor="ctr"/>
           <a:lstStyle/>
           <a:p>
-            <a:pPr indent="0" marL="0">
+            <a:pPr marL="0" indent="0">
               <a:buNone/>
             </a:pPr>
             <a:r>
@@ -14646,7 +14395,7 @@
           <a:bodyPr wrap="square" lIns="0" tIns="0" rIns="0" bIns="0" rtlCol="0" anchor="ctr"/>
           <a:lstStyle/>
           <a:p>
-            <a:pPr indent="0" marL="0">
+            <a:pPr marL="0" indent="0">
               <a:buNone/>
             </a:pPr>
             <a:r>
@@ -14685,7 +14434,7 @@
           <a:bodyPr wrap="square" lIns="0" tIns="0" rIns="0" bIns="0" rtlCol="0" anchor="ctr"/>
           <a:lstStyle/>
           <a:p>
-            <a:pPr indent="0" marL="0">
+            <a:pPr marL="0" indent="0">
               <a:lnSpc>
                 <a:spcPct val="130000"/>
               </a:lnSpc>
@@ -14705,7 +14454,7 @@
             <a:endParaRPr lang="en-US" sz="1500" dirty="0"/>
           </a:p>
           <a:p>
-            <a:pPr indent="0" marL="0">
+            <a:pPr marL="0" indent="0">
               <a:lnSpc>
                 <a:spcPct val="130000"/>
               </a:lnSpc>
@@ -14725,7 +14474,7 @@
             <a:endParaRPr lang="en-US" sz="1500" dirty="0"/>
           </a:p>
           <a:p>
-            <a:pPr indent="0" marL="0">
+            <a:pPr marL="0" indent="0">
               <a:lnSpc>
                 <a:spcPct val="130000"/>
               </a:lnSpc>
@@ -14794,7 +14543,7 @@
           <a:bodyPr wrap="square" lIns="0" tIns="0" rIns="0" bIns="0" rtlCol="0" anchor="ctr"/>
           <a:lstStyle/>
           <a:p>
-            <a:pPr indent="0" marL="0">
+            <a:pPr marL="0" indent="0">
               <a:buNone/>
             </a:pPr>
             <a:r>
@@ -14833,7 +14582,7 @@
           <a:bodyPr wrap="square" lIns="0" tIns="0" rIns="0" bIns="0" rtlCol="0" anchor="ctr"/>
           <a:lstStyle/>
           <a:p>
-            <a:pPr indent="0" marL="0">
+            <a:pPr marL="0" indent="0">
               <a:lnSpc>
                 <a:spcPct val="130000"/>
               </a:lnSpc>
@@ -14853,7 +14602,7 @@
             <a:endParaRPr lang="en-US" sz="1500" dirty="0"/>
           </a:p>
           <a:p>
-            <a:pPr indent="0" marL="0">
+            <a:pPr marL="0" indent="0">
               <a:lnSpc>
                 <a:spcPct val="130000"/>
               </a:lnSpc>
@@ -14873,7 +14622,7 @@
             <a:endParaRPr lang="en-US" sz="1500" dirty="0"/>
           </a:p>
           <a:p>
-            <a:pPr indent="0" marL="0">
+            <a:pPr marL="0" indent="0">
               <a:lnSpc>
                 <a:spcPct val="130000"/>
               </a:lnSpc>
@@ -14915,7 +14664,7 @@
           <a:bodyPr wrap="square" lIns="0" tIns="0" rIns="0" bIns="0" rtlCol="0" anchor="ctr"/>
           <a:lstStyle/>
           <a:p>
-            <a:pPr indent="0" marL="0">
+            <a:pPr marL="0" indent="0">
               <a:buNone/>
             </a:pPr>
             <a:r>
@@ -14934,6 +14683,153 @@
         </p:txBody>
       </p:sp>
     </p:spTree>
+  </p:cSld>
+  <p:clrMapOvr>
+    <a:masterClrMapping/>
+  </p:clrMapOvr>
+</p:sld>
+</file>
+
+<file path=ppt/slides/slide23.xml><?xml version="1.0" encoding="utf-8"?>
+<p:sld xmlns:a="http://schemas.openxmlformats.org/drawingml/2006/main" xmlns:r="http://schemas.openxmlformats.org/officeDocument/2006/relationships" xmlns:p="http://schemas.openxmlformats.org/presentationml/2006/main">
+  <p:cSld>
+    <p:spTree>
+      <p:nvGrpSpPr>
+        <p:cNvPr id="1" name=""/>
+        <p:cNvGrpSpPr/>
+        <p:nvPr/>
+      </p:nvGrpSpPr>
+      <p:grpSpPr>
+        <a:xfrm>
+          <a:off x="0" y="0"/>
+          <a:ext cx="0" cy="0"/>
+          <a:chOff x="0" y="0"/>
+          <a:chExt cx="0" cy="0"/>
+        </a:xfrm>
+      </p:grpSpPr>
+    </p:spTree>
+    <p:extLst>
+      <p:ext uri="{BB962C8B-B14F-4D97-AF65-F5344CB8AC3E}">
+        <p14:creationId xmlns:p14="http://schemas.microsoft.com/office/powerpoint/2010/main" val="3598118314"/>
+      </p:ext>
+    </p:extLst>
+  </p:cSld>
+  <p:clrMapOvr>
+    <a:masterClrMapping/>
+  </p:clrMapOvr>
+</p:sld>
+</file>
+
+<file path=ppt/slides/slide24.xml><?xml version="1.0" encoding="utf-8"?>
+<p:sld xmlns:a="http://schemas.openxmlformats.org/drawingml/2006/main" xmlns:r="http://schemas.openxmlformats.org/officeDocument/2006/relationships" xmlns:p="http://schemas.openxmlformats.org/presentationml/2006/main">
+  <p:cSld>
+    <p:spTree>
+      <p:nvGrpSpPr>
+        <p:cNvPr id="1" name=""/>
+        <p:cNvGrpSpPr/>
+        <p:nvPr/>
+      </p:nvGrpSpPr>
+      <p:grpSpPr>
+        <a:xfrm>
+          <a:off x="0" y="0"/>
+          <a:ext cx="0" cy="0"/>
+          <a:chOff x="0" y="0"/>
+          <a:chExt cx="0" cy="0"/>
+        </a:xfrm>
+      </p:grpSpPr>
+      <p:sp>
+        <p:nvSpPr>
+          <p:cNvPr id="2" name="テキスト ボックス 1">
+            <a:extLst>
+              <a:ext uri="{FF2B5EF4-FFF2-40B4-BE49-F238E27FC236}">
+                <a16:creationId xmlns:a16="http://schemas.microsoft.com/office/drawing/2014/main" id="{EB30D185-8540-3F50-7CE7-9653A3B72228}"/>
+              </a:ext>
+            </a:extLst>
+          </p:cNvPr>
+          <p:cNvSpPr txBox="1"/>
+          <p:nvPr/>
+        </p:nvSpPr>
+        <p:spPr>
+          <a:xfrm>
+            <a:off x="957943" y="854529"/>
+            <a:ext cx="6221186" cy="2862322"/>
+          </a:xfrm>
+          <a:prstGeom prst="rect">
+            <a:avLst/>
+          </a:prstGeom>
+          <a:noFill/>
+        </p:spPr>
+        <p:txBody>
+          <a:bodyPr wrap="square" rtlCol="0">
+            <a:spAutoFit/>
+          </a:bodyPr>
+          <a:lstStyle/>
+          <a:p>
+            <a:r>
+              <a:rPr kumimoji="1" lang="ja-JP" altLang="en-US" dirty="0"/>
+              <a:t>オンライン診療</a:t>
+            </a:r>
+            <a:endParaRPr kumimoji="1" lang="en-US" altLang="ja-JP" dirty="0"/>
+          </a:p>
+          <a:p>
+            <a:r>
+              <a:rPr kumimoji="1" lang="ja-JP" altLang="en-US" dirty="0"/>
+              <a:t>→トリアージになる</a:t>
+            </a:r>
+            <a:endParaRPr kumimoji="1" lang="en-US" altLang="ja-JP" dirty="0"/>
+          </a:p>
+          <a:p>
+            <a:endParaRPr kumimoji="1" lang="en-US" altLang="ja-JP" dirty="0"/>
+          </a:p>
+          <a:p>
+            <a:r>
+              <a:rPr kumimoji="1" lang="ja-JP" altLang="en-US" dirty="0"/>
+              <a:t>ハザマ薬局が在宅分野は連携している</a:t>
+            </a:r>
+            <a:endParaRPr kumimoji="1" lang="en-US" altLang="ja-JP" dirty="0"/>
+          </a:p>
+          <a:p>
+            <a:endParaRPr kumimoji="1" lang="en-US" altLang="ja-JP" dirty="0"/>
+          </a:p>
+          <a:p>
+            <a:r>
+              <a:rPr kumimoji="1" lang="ja-JP" altLang="en-US" dirty="0"/>
+              <a:t>佐賀電子</a:t>
+            </a:r>
+            <a:endParaRPr kumimoji="1" lang="en-US" altLang="ja-JP" dirty="0"/>
+          </a:p>
+          <a:p>
+            <a:r>
+              <a:rPr kumimoji="1" lang="ja-JP" altLang="en-US" dirty="0"/>
+              <a:t>特許　　　</a:t>
+            </a:r>
+            <a:endParaRPr kumimoji="1" lang="en-US" altLang="ja-JP" dirty="0"/>
+          </a:p>
+          <a:p>
+            <a:r>
+              <a:rPr kumimoji="1" lang="ja-JP" altLang="en-US" dirty="0"/>
+              <a:t>グーグルワークスペース→アプリの開発</a:t>
+            </a:r>
+            <a:endParaRPr kumimoji="1" lang="en-US" altLang="ja-JP" dirty="0"/>
+          </a:p>
+          <a:p>
+            <a:r>
+              <a:rPr kumimoji="1" lang="ja-JP" altLang="en-US" dirty="0"/>
+              <a:t>名刺管理アプリ　</a:t>
+            </a:r>
+            <a:endParaRPr kumimoji="1" lang="en-US" altLang="ja-JP" dirty="0"/>
+          </a:p>
+          <a:p>
+            <a:endParaRPr kumimoji="1" lang="en-US" altLang="ja-JP" dirty="0"/>
+          </a:p>
+        </p:txBody>
+      </p:sp>
+    </p:spTree>
+    <p:extLst>
+      <p:ext uri="{BB962C8B-B14F-4D97-AF65-F5344CB8AC3E}">
+        <p14:creationId xmlns:p14="http://schemas.microsoft.com/office/powerpoint/2010/main" val="3036966548"/>
+      </p:ext>
+    </p:extLst>
   </p:cSld>
   <p:clrMapOvr>
     <a:masterClrMapping/>
@@ -14949,6 +14845,7 @@
         <a:solidFill>
           <a:srgbClr val="FFFFFF"/>
         </a:solidFill>
+        <a:effectLst/>
       </p:bgPr>
     </p:bg>
     <p:spTree>
@@ -14986,7 +14883,7 @@
           <a:bodyPr wrap="square" lIns="0" tIns="0" rIns="0" bIns="0" rtlCol="0" anchor="ctr"/>
           <a:lstStyle/>
           <a:p>
-            <a:pPr indent="0" marL="0">
+            <a:pPr marL="0" indent="0">
               <a:buNone/>
             </a:pPr>
             <a:r>
@@ -15025,7 +14922,7 @@
           <a:bodyPr wrap="square" lIns="0" tIns="0" rIns="0" bIns="0" rtlCol="0" anchor="ctr"/>
           <a:lstStyle/>
           <a:p>
-            <a:pPr indent="0" marL="0">
+            <a:pPr marL="0" indent="0">
               <a:buNone/>
             </a:pPr>
             <a:r>
@@ -15091,7 +14988,7 @@
           <a:bodyPr wrap="square" lIns="0" tIns="0" rIns="0" bIns="0" rtlCol="0" anchor="ctr"/>
           <a:lstStyle/>
           <a:p>
-            <a:pPr indent="0" marL="0">
+            <a:pPr marL="0" indent="0">
               <a:buNone/>
             </a:pPr>
             <a:r>
@@ -15130,7 +15027,7 @@
           <a:bodyPr wrap="square" lIns="0" tIns="0" rIns="0" bIns="0" rtlCol="0" anchor="ctr"/>
           <a:lstStyle/>
           <a:p>
-            <a:pPr indent="0" marL="0">
+            <a:pPr marL="0" indent="0">
               <a:buNone/>
             </a:pPr>
             <a:r>
@@ -15169,7 +15066,7 @@
           <a:bodyPr wrap="square" lIns="0" tIns="0" rIns="0" bIns="0" rtlCol="0" anchor="ctr"/>
           <a:lstStyle/>
           <a:p>
-            <a:pPr indent="0" marL="0">
+            <a:pPr marL="0" indent="0">
               <a:lnSpc>
                 <a:spcPct val="120000"/>
               </a:lnSpc>
@@ -15189,7 +15086,7 @@
             <a:endParaRPr lang="en-US" sz="1300" dirty="0"/>
           </a:p>
           <a:p>
-            <a:pPr indent="0" marL="0">
+            <a:pPr marL="0" indent="0">
               <a:lnSpc>
                 <a:spcPct val="120000"/>
               </a:lnSpc>
@@ -15256,7 +15153,7 @@
           <a:bodyPr wrap="square" lIns="0" tIns="0" rIns="0" bIns="0" rtlCol="0" anchor="ctr"/>
           <a:lstStyle/>
           <a:p>
-            <a:pPr indent="0" marL="0">
+            <a:pPr marL="0" indent="0">
               <a:lnSpc>
                 <a:spcPct val="120000"/>
               </a:lnSpc>
@@ -15276,7 +15173,7 @@
             <a:endParaRPr lang="en-US" sz="1300" dirty="0"/>
           </a:p>
           <a:p>
-            <a:pPr indent="0" marL="0">
+            <a:pPr marL="0" indent="0">
               <a:lnSpc>
                 <a:spcPct val="120000"/>
               </a:lnSpc>
@@ -15296,7 +15193,7 @@
             <a:endParaRPr lang="en-US" sz="1300" dirty="0"/>
           </a:p>
           <a:p>
-            <a:pPr indent="0" marL="0">
+            <a:pPr marL="0" indent="0">
               <a:lnSpc>
                 <a:spcPct val="120000"/>
               </a:lnSpc>
@@ -15365,7 +15262,7 @@
           <a:bodyPr wrap="square" lIns="0" tIns="0" rIns="0" bIns="0" rtlCol="0" anchor="ctr"/>
           <a:lstStyle/>
           <a:p>
-            <a:pPr indent="0" marL="0">
+            <a:pPr marL="0" indent="0">
               <a:buNone/>
             </a:pPr>
             <a:r>
@@ -15404,7 +15301,7 @@
           <a:bodyPr wrap="square" lIns="0" tIns="0" rIns="0" bIns="0" rtlCol="0" anchor="ctr"/>
           <a:lstStyle/>
           <a:p>
-            <a:pPr indent="0" marL="0">
+            <a:pPr marL="0" indent="0">
               <a:buNone/>
             </a:pPr>
             <a:r>
@@ -15443,7 +15340,7 @@
           <a:bodyPr wrap="square" lIns="0" tIns="0" rIns="0" bIns="0" rtlCol="0" anchor="ctr"/>
           <a:lstStyle/>
           <a:p>
-            <a:pPr indent="0" marL="0">
+            <a:pPr marL="0" indent="0">
               <a:lnSpc>
                 <a:spcPct val="120000"/>
               </a:lnSpc>
@@ -15463,7 +15360,7 @@
             <a:endParaRPr lang="en-US" sz="1300" dirty="0"/>
           </a:p>
           <a:p>
-            <a:pPr indent="0" marL="0">
+            <a:pPr marL="0" indent="0">
               <a:lnSpc>
                 <a:spcPct val="120000"/>
               </a:lnSpc>
@@ -15483,7 +15380,7 @@
             <a:endParaRPr lang="en-US" sz="1300" dirty="0"/>
           </a:p>
           <a:p>
-            <a:pPr indent="0" marL="0">
+            <a:pPr marL="0" indent="0">
               <a:lnSpc>
                 <a:spcPct val="120000"/>
               </a:lnSpc>
@@ -15550,7 +15447,7 @@
           <a:bodyPr wrap="square" lIns="0" tIns="0" rIns="0" bIns="0" rtlCol="0" anchor="ctr"/>
           <a:lstStyle/>
           <a:p>
-            <a:pPr indent="0" marL="0">
+            <a:pPr marL="0" indent="0">
               <a:lnSpc>
                 <a:spcPct val="120000"/>
               </a:lnSpc>
@@ -15570,7 +15467,7 @@
             <a:endParaRPr lang="en-US" sz="1300" dirty="0"/>
           </a:p>
           <a:p>
-            <a:pPr indent="0" marL="0">
+            <a:pPr marL="0" indent="0">
               <a:lnSpc>
                 <a:spcPct val="120000"/>
               </a:lnSpc>
@@ -15590,7 +15487,7 @@
             <a:endParaRPr lang="en-US" sz="1300" dirty="0"/>
           </a:p>
           <a:p>
-            <a:pPr indent="0" marL="0">
+            <a:pPr marL="0" indent="0">
               <a:lnSpc>
                 <a:spcPct val="120000"/>
               </a:lnSpc>
@@ -15659,7 +15556,7 @@
           <a:bodyPr wrap="square" lIns="0" tIns="0" rIns="0" bIns="0" rtlCol="0" anchor="ctr"/>
           <a:lstStyle/>
           <a:p>
-            <a:pPr indent="0" marL="0">
+            <a:pPr marL="0" indent="0">
               <a:buNone/>
             </a:pPr>
             <a:r>
@@ -15698,7 +15595,7 @@
           <a:bodyPr wrap="square" lIns="0" tIns="0" rIns="0" bIns="0" rtlCol="0" anchor="ctr"/>
           <a:lstStyle/>
           <a:p>
-            <a:pPr indent="0" marL="0">
+            <a:pPr marL="0" indent="0">
               <a:buNone/>
             </a:pPr>
             <a:r>
@@ -15737,7 +15634,7 @@
           <a:bodyPr wrap="square" lIns="0" tIns="0" rIns="0" bIns="0" rtlCol="0" anchor="ctr"/>
           <a:lstStyle/>
           <a:p>
-            <a:pPr indent="0" marL="0">
+            <a:pPr marL="0" indent="0">
               <a:lnSpc>
                 <a:spcPct val="120000"/>
               </a:lnSpc>
@@ -15757,7 +15654,7 @@
             <a:endParaRPr lang="en-US" sz="1300" dirty="0"/>
           </a:p>
           <a:p>
-            <a:pPr indent="0" marL="0">
+            <a:pPr marL="0" indent="0">
               <a:lnSpc>
                 <a:spcPct val="120000"/>
               </a:lnSpc>
@@ -15824,7 +15721,7 @@
           <a:bodyPr wrap="square" lIns="0" tIns="0" rIns="0" bIns="0" rtlCol="0" anchor="ctr"/>
           <a:lstStyle/>
           <a:p>
-            <a:pPr indent="0" marL="0">
+            <a:pPr marL="0" indent="0">
               <a:lnSpc>
                 <a:spcPct val="120000"/>
               </a:lnSpc>
@@ -15844,7 +15741,7 @@
             <a:endParaRPr lang="en-US" sz="1300" dirty="0"/>
           </a:p>
           <a:p>
-            <a:pPr indent="0" marL="0">
+            <a:pPr marL="0" indent="0">
               <a:lnSpc>
                 <a:spcPct val="120000"/>
               </a:lnSpc>
@@ -15913,7 +15810,7 @@
           <a:bodyPr wrap="square" lIns="0" tIns="0" rIns="0" bIns="0" rtlCol="0" anchor="ctr"/>
           <a:lstStyle/>
           <a:p>
-            <a:pPr indent="0" marL="0">
+            <a:pPr marL="0" indent="0">
               <a:buNone/>
             </a:pPr>
             <a:r>
@@ -15952,7 +15849,7 @@
           <a:bodyPr wrap="square" lIns="0" tIns="0" rIns="0" bIns="0" rtlCol="0" anchor="ctr"/>
           <a:lstStyle/>
           <a:p>
-            <a:pPr indent="0" marL="0">
+            <a:pPr marL="0" indent="0">
               <a:buNone/>
             </a:pPr>
             <a:r>
@@ -15986,6 +15883,7 @@
         <a:solidFill>
           <a:srgbClr val="FFFFFF"/>
         </a:solidFill>
+        <a:effectLst/>
       </p:bgPr>
     </p:bg>
     <p:spTree>
@@ -16023,7 +15921,7 @@
           <a:bodyPr wrap="square" lIns="0" tIns="0" rIns="0" bIns="0" rtlCol="0" anchor="ctr"/>
           <a:lstStyle/>
           <a:p>
-            <a:pPr indent="0" marL="0">
+            <a:pPr marL="0" indent="0">
               <a:buNone/>
             </a:pPr>
             <a:r>
@@ -16062,7 +15960,7 @@
           <a:bodyPr wrap="square" lIns="0" tIns="0" rIns="0" bIns="0" rtlCol="0" anchor="ctr"/>
           <a:lstStyle/>
           <a:p>
-            <a:pPr indent="0" marL="0">
+            <a:pPr marL="0" indent="0">
               <a:buNone/>
             </a:pPr>
             <a:r>
@@ -16126,7 +16024,7 @@
           <a:bodyPr wrap="square" lIns="0" tIns="0" rIns="0" bIns="0" rtlCol="0" anchor="ctr"/>
           <a:lstStyle/>
           <a:p>
-            <a:pPr algn="ctr" indent="0" marL="0">
+            <a:pPr marL="0" indent="0" algn="ctr">
               <a:buNone/>
             </a:pPr>
             <a:r>
@@ -16165,7 +16063,7 @@
           <a:bodyPr wrap="square" lIns="0" tIns="0" rIns="0" bIns="0" rtlCol="0" anchor="ctr"/>
           <a:lstStyle/>
           <a:p>
-            <a:pPr indent="0" marL="0">
+            <a:pPr marL="0" indent="0">
               <a:buNone/>
             </a:pPr>
             <a:r>
@@ -16204,7 +16102,7 @@
           <a:bodyPr wrap="square" lIns="0" tIns="0" rIns="0" bIns="0" rtlCol="0" anchor="ctr"/>
           <a:lstStyle/>
           <a:p>
-            <a:pPr indent="0" marL="0">
+            <a:pPr marL="0" indent="0">
               <a:lnSpc>
                 <a:spcPct val="120000"/>
               </a:lnSpc>
@@ -16224,7 +16122,7 @@
             <a:endParaRPr lang="en-US" sz="1350" dirty="0"/>
           </a:p>
           <a:p>
-            <a:pPr indent="0" marL="0">
+            <a:pPr marL="0" indent="0">
               <a:lnSpc>
                 <a:spcPct val="120000"/>
               </a:lnSpc>
@@ -16291,7 +16189,7 @@
           <a:bodyPr wrap="square" lIns="0" tIns="0" rIns="0" bIns="0" rtlCol="0" anchor="ctr"/>
           <a:lstStyle/>
           <a:p>
-            <a:pPr algn="ctr" indent="0" marL="0">
+            <a:pPr marL="0" indent="0" algn="ctr">
               <a:buNone/>
             </a:pPr>
             <a:r>
@@ -16330,7 +16228,7 @@
           <a:bodyPr wrap="square" lIns="0" tIns="0" rIns="0" bIns="0" rtlCol="0" anchor="ctr"/>
           <a:lstStyle/>
           <a:p>
-            <a:pPr indent="0" marL="0">
+            <a:pPr marL="0" indent="0">
               <a:buNone/>
             </a:pPr>
             <a:r>
@@ -16369,7 +16267,7 @@
           <a:bodyPr wrap="square" lIns="0" tIns="0" rIns="0" bIns="0" rtlCol="0" anchor="ctr"/>
           <a:lstStyle/>
           <a:p>
-            <a:pPr indent="0" marL="0">
+            <a:pPr marL="0" indent="0">
               <a:lnSpc>
                 <a:spcPct val="120000"/>
               </a:lnSpc>
@@ -16389,7 +16287,7 @@
             <a:endParaRPr lang="en-US" sz="1350" dirty="0"/>
           </a:p>
           <a:p>
-            <a:pPr indent="0" marL="0">
+            <a:pPr marL="0" indent="0">
               <a:lnSpc>
                 <a:spcPct val="120000"/>
               </a:lnSpc>
@@ -16409,7 +16307,7 @@
             <a:endParaRPr lang="en-US" sz="1350" dirty="0"/>
           </a:p>
           <a:p>
-            <a:pPr indent="0" marL="0">
+            <a:pPr marL="0" indent="0">
               <a:lnSpc>
                 <a:spcPct val="120000"/>
               </a:lnSpc>
@@ -16476,7 +16374,7 @@
           <a:bodyPr wrap="square" lIns="0" tIns="0" rIns="0" bIns="0" rtlCol="0" anchor="ctr"/>
           <a:lstStyle/>
           <a:p>
-            <a:pPr algn="ctr" indent="0" marL="0">
+            <a:pPr marL="0" indent="0" algn="ctr">
               <a:buNone/>
             </a:pPr>
             <a:r>
@@ -16515,7 +16413,7 @@
           <a:bodyPr wrap="square" lIns="0" tIns="0" rIns="0" bIns="0" rtlCol="0" anchor="ctr"/>
           <a:lstStyle/>
           <a:p>
-            <a:pPr indent="0" marL="0">
+            <a:pPr marL="0" indent="0">
               <a:buNone/>
             </a:pPr>
             <a:r>
@@ -16554,7 +16452,7 @@
           <a:bodyPr wrap="square" lIns="0" tIns="0" rIns="0" bIns="0" rtlCol="0" anchor="ctr"/>
           <a:lstStyle/>
           <a:p>
-            <a:pPr indent="0" marL="0">
+            <a:pPr marL="0" indent="0">
               <a:lnSpc>
                 <a:spcPct val="120000"/>
               </a:lnSpc>
@@ -16574,7 +16472,7 @@
             <a:endParaRPr lang="en-US" sz="1350" dirty="0"/>
           </a:p>
           <a:p>
-            <a:pPr indent="0" marL="0">
+            <a:pPr marL="0" indent="0">
               <a:lnSpc>
                 <a:spcPct val="120000"/>
               </a:lnSpc>
@@ -16594,7 +16492,7 @@
             <a:endParaRPr lang="en-US" sz="1350" dirty="0"/>
           </a:p>
           <a:p>
-            <a:pPr indent="0" marL="0">
+            <a:pPr marL="0" indent="0">
               <a:lnSpc>
                 <a:spcPct val="120000"/>
               </a:lnSpc>
@@ -16663,7 +16561,7 @@
           <a:bodyPr wrap="square" lIns="0" tIns="0" rIns="0" bIns="0" rtlCol="0" anchor="ctr"/>
           <a:lstStyle/>
           <a:p>
-            <a:pPr indent="0" marL="0">
+            <a:pPr marL="0" indent="0">
               <a:buNone/>
             </a:pPr>
             <a:r>
@@ -16697,6 +16595,7 @@
         <a:solidFill>
           <a:srgbClr val="FFFFFF"/>
         </a:solidFill>
+        <a:effectLst/>
       </p:bgPr>
     </p:bg>
     <p:spTree>
@@ -16734,7 +16633,7 @@
           <a:bodyPr wrap="square" lIns="0" tIns="0" rIns="0" bIns="0" rtlCol="0" anchor="ctr"/>
           <a:lstStyle/>
           <a:p>
-            <a:pPr indent="0" marL="0">
+            <a:pPr marL="0" indent="0">
               <a:buNone/>
             </a:pPr>
             <a:r>
@@ -16773,7 +16672,7 @@
           <a:bodyPr wrap="square" lIns="0" tIns="0" rIns="0" bIns="0" rtlCol="0" anchor="ctr"/>
           <a:lstStyle/>
           <a:p>
-            <a:pPr indent="0" marL="0">
+            <a:pPr marL="0" indent="0">
               <a:buNone/>
             </a:pPr>
             <a:r>
@@ -16864,7 +16763,7 @@
           <a:bodyPr wrap="square" lIns="0" tIns="0" rIns="0" bIns="0" rtlCol="0" anchor="ctr"/>
           <a:lstStyle/>
           <a:p>
-            <a:pPr algn="ctr" indent="0" marL="0">
+            <a:pPr marL="0" indent="0" algn="ctr">
               <a:buNone/>
             </a:pPr>
             <a:r>
@@ -16903,7 +16802,7 @@
           <a:bodyPr wrap="square" lIns="0" tIns="0" rIns="0" bIns="0" rtlCol="0" anchor="ctr"/>
           <a:lstStyle/>
           <a:p>
-            <a:pPr algn="ctr" indent="0" marL="0">
+            <a:pPr marL="0" indent="0" algn="ctr">
               <a:buNone/>
             </a:pPr>
             <a:r>
@@ -17019,7 +16918,7 @@
           <a:bodyPr wrap="square" lIns="0" tIns="0" rIns="0" bIns="0" rtlCol="0" anchor="ctr"/>
           <a:lstStyle/>
           <a:p>
-            <a:pPr algn="ctr" indent="0" marL="0">
+            <a:pPr marL="0" indent="0" algn="ctr">
               <a:buNone/>
             </a:pPr>
             <a:r>
@@ -17058,7 +16957,7 @@
           <a:bodyPr wrap="square" lIns="0" tIns="0" rIns="0" bIns="0" rtlCol="0" anchor="ctr"/>
           <a:lstStyle/>
           <a:p>
-            <a:pPr algn="ctr" indent="0" marL="0">
+            <a:pPr marL="0" indent="0" algn="ctr">
               <a:buNone/>
             </a:pPr>
             <a:r>
@@ -17174,7 +17073,7 @@
           <a:bodyPr wrap="square" lIns="0" tIns="0" rIns="0" bIns="0" rtlCol="0" anchor="ctr"/>
           <a:lstStyle/>
           <a:p>
-            <a:pPr algn="ctr" indent="0" marL="0">
+            <a:pPr marL="0" indent="0" algn="ctr">
               <a:buNone/>
             </a:pPr>
             <a:r>
@@ -17213,7 +17112,7 @@
           <a:bodyPr wrap="square" lIns="0" tIns="0" rIns="0" bIns="0" rtlCol="0" anchor="ctr"/>
           <a:lstStyle/>
           <a:p>
-            <a:pPr algn="ctr" indent="0" marL="0">
+            <a:pPr marL="0" indent="0" algn="ctr">
               <a:buNone/>
             </a:pPr>
             <a:r>
@@ -17329,7 +17228,7 @@
           <a:bodyPr wrap="square" lIns="0" tIns="0" rIns="0" bIns="0" rtlCol="0" anchor="ctr"/>
           <a:lstStyle/>
           <a:p>
-            <a:pPr algn="ctr" indent="0" marL="0">
+            <a:pPr marL="0" indent="0" algn="ctr">
               <a:buNone/>
             </a:pPr>
             <a:r>
@@ -17368,7 +17267,7 @@
           <a:bodyPr wrap="square" lIns="0" tIns="0" rIns="0" bIns="0" rtlCol="0" anchor="ctr"/>
           <a:lstStyle/>
           <a:p>
-            <a:pPr algn="ctr" indent="0" marL="0">
+            <a:pPr marL="0" indent="0" algn="ctr">
               <a:buNone/>
             </a:pPr>
             <a:r>
@@ -17484,7 +17383,7 @@
           <a:bodyPr wrap="square" lIns="0" tIns="0" rIns="0" bIns="0" rtlCol="0" anchor="ctr"/>
           <a:lstStyle/>
           <a:p>
-            <a:pPr algn="ctr" indent="0" marL="0">
+            <a:pPr marL="0" indent="0" algn="ctr">
               <a:buNone/>
             </a:pPr>
             <a:r>
@@ -17523,7 +17422,7 @@
           <a:bodyPr wrap="square" lIns="0" tIns="0" rIns="0" bIns="0" rtlCol="0" anchor="ctr"/>
           <a:lstStyle/>
           <a:p>
-            <a:pPr algn="ctr" indent="0" marL="0">
+            <a:pPr marL="0" indent="0" algn="ctr">
               <a:buNone/>
             </a:pPr>
             <a:r>
@@ -17589,7 +17488,7 @@
           <a:bodyPr wrap="square" lIns="0" tIns="0" rIns="0" bIns="0" rtlCol="0" anchor="ctr"/>
           <a:lstStyle/>
           <a:p>
-            <a:pPr indent="0" marL="0">
+            <a:pPr marL="0" indent="0">
               <a:buNone/>
             </a:pPr>
             <a:r>
@@ -17628,7 +17527,7 @@
           <a:bodyPr wrap="square" lIns="0" tIns="0" rIns="0" bIns="0" rtlCol="0" anchor="ctr"/>
           <a:lstStyle/>
           <a:p>
-            <a:pPr indent="0" marL="0">
+            <a:pPr marL="0" indent="0">
               <a:buNone/>
             </a:pPr>
             <a:r>
@@ -17667,7 +17566,7 @@
           <a:bodyPr wrap="square" lIns="0" tIns="0" rIns="0" bIns="0" rtlCol="0" anchor="ctr"/>
           <a:lstStyle/>
           <a:p>
-            <a:pPr indent="0" marL="0">
+            <a:pPr marL="0" indent="0">
               <a:buNone/>
             </a:pPr>
             <a:r>
@@ -17706,7 +17605,7 @@
           <a:bodyPr wrap="square" lIns="0" tIns="0" rIns="0" bIns="0" rtlCol="0" anchor="ctr"/>
           <a:lstStyle/>
           <a:p>
-            <a:pPr indent="0" marL="0">
+            <a:pPr marL="0" indent="0">
               <a:buNone/>
             </a:pPr>
             <a:r>
@@ -17745,7 +17644,7 @@
           <a:bodyPr wrap="square" lIns="0" tIns="0" rIns="0" bIns="0" rtlCol="0" anchor="ctr"/>
           <a:lstStyle/>
           <a:p>
-            <a:pPr indent="0" marL="0">
+            <a:pPr marL="0" indent="0">
               <a:buNone/>
             </a:pPr>
             <a:r>
@@ -17784,7 +17683,7 @@
           <a:bodyPr wrap="square" lIns="0" tIns="0" rIns="0" bIns="0" rtlCol="0" anchor="ctr"/>
           <a:lstStyle/>
           <a:p>
-            <a:pPr indent="0" marL="0">
+            <a:pPr marL="0" indent="0">
               <a:buNone/>
             </a:pPr>
             <a:r>
@@ -17823,7 +17722,7 @@
           <a:bodyPr wrap="square" lIns="0" tIns="0" rIns="0" bIns="0" rtlCol="0" anchor="ctr"/>
           <a:lstStyle/>
           <a:p>
-            <a:pPr indent="0" marL="0">
+            <a:pPr marL="0" indent="0">
               <a:buNone/>
             </a:pPr>
             <a:r>
@@ -17862,7 +17761,7 @@
           <a:bodyPr wrap="square" lIns="0" tIns="0" rIns="0" bIns="0" rtlCol="0" anchor="ctr"/>
           <a:lstStyle/>
           <a:p>
-            <a:pPr indent="0" marL="0">
+            <a:pPr marL="0" indent="0">
               <a:buNone/>
             </a:pPr>
             <a:r>
@@ -17896,6 +17795,7 @@
         <a:solidFill>
           <a:srgbClr val="FFFFFF"/>
         </a:solidFill>
+        <a:effectLst/>
       </p:bgPr>
     </p:bg>
     <p:spTree>
@@ -17933,7 +17833,7 @@
           <a:bodyPr wrap="square" lIns="0" tIns="0" rIns="0" bIns="0" rtlCol="0" anchor="ctr"/>
           <a:lstStyle/>
           <a:p>
-            <a:pPr indent="0" marL="0">
+            <a:pPr marL="0" indent="0">
               <a:buNone/>
             </a:pPr>
             <a:r>
@@ -17972,7 +17872,7 @@
           <a:bodyPr wrap="square" lIns="0" tIns="0" rIns="0" bIns="0" rtlCol="0" anchor="ctr"/>
           <a:lstStyle/>
           <a:p>
-            <a:pPr indent="0" marL="0">
+            <a:pPr marL="0" indent="0">
               <a:buNone/>
             </a:pPr>
             <a:r>
@@ -18063,7 +17963,7 @@
           <a:bodyPr wrap="square" lIns="0" tIns="0" rIns="0" bIns="0" rtlCol="0" anchor="ctr"/>
           <a:lstStyle/>
           <a:p>
-            <a:pPr algn="ctr" indent="0" marL="0">
+            <a:pPr marL="0" indent="0" algn="ctr">
               <a:buNone/>
             </a:pPr>
             <a:r>
@@ -18102,7 +18002,7 @@
           <a:bodyPr wrap="square" lIns="0" tIns="0" rIns="0" bIns="0" rtlCol="0" anchor="ctr"/>
           <a:lstStyle/>
           <a:p>
-            <a:pPr indent="0" marL="0">
+            <a:pPr marL="0" indent="0">
               <a:buNone/>
             </a:pPr>
             <a:r>
@@ -18141,7 +18041,7 @@
           <a:bodyPr wrap="square" lIns="0" tIns="0" rIns="0" bIns="0" rtlCol="0" anchor="ctr"/>
           <a:lstStyle/>
           <a:p>
-            <a:pPr indent="0" marL="0">
+            <a:pPr marL="0" indent="0">
               <a:lnSpc>
                 <a:spcPct val="120000"/>
               </a:lnSpc>
@@ -18161,7 +18061,7 @@
             <a:endParaRPr lang="en-US" sz="1200" dirty="0"/>
           </a:p>
           <a:p>
-            <a:pPr indent="0" marL="0">
+            <a:pPr marL="0" indent="0">
               <a:lnSpc>
                 <a:spcPct val="120000"/>
               </a:lnSpc>
@@ -18255,7 +18155,7 @@
           <a:bodyPr wrap="square" lIns="0" tIns="0" rIns="0" bIns="0" rtlCol="0" anchor="ctr"/>
           <a:lstStyle/>
           <a:p>
-            <a:pPr algn="ctr" indent="0" marL="0">
+            <a:pPr marL="0" indent="0" algn="ctr">
               <a:buNone/>
             </a:pPr>
             <a:r>
@@ -18294,7 +18194,7 @@
           <a:bodyPr wrap="square" lIns="0" tIns="0" rIns="0" bIns="0" rtlCol="0" anchor="ctr"/>
           <a:lstStyle/>
           <a:p>
-            <a:pPr indent="0" marL="0">
+            <a:pPr marL="0" indent="0">
               <a:buNone/>
             </a:pPr>
             <a:r>
@@ -18333,7 +18233,7 @@
           <a:bodyPr wrap="square" lIns="0" tIns="0" rIns="0" bIns="0" rtlCol="0" anchor="ctr"/>
           <a:lstStyle/>
           <a:p>
-            <a:pPr indent="0" marL="0">
+            <a:pPr marL="0" indent="0">
               <a:lnSpc>
                 <a:spcPct val="120000"/>
               </a:lnSpc>
@@ -18353,7 +18253,7 @@
             <a:endParaRPr lang="en-US" sz="1200" dirty="0"/>
           </a:p>
           <a:p>
-            <a:pPr indent="0" marL="0">
+            <a:pPr marL="0" indent="0">
               <a:lnSpc>
                 <a:spcPct val="120000"/>
               </a:lnSpc>
@@ -18447,7 +18347,7 @@
           <a:bodyPr wrap="square" lIns="0" tIns="0" rIns="0" bIns="0" rtlCol="0" anchor="ctr"/>
           <a:lstStyle/>
           <a:p>
-            <a:pPr algn="ctr" indent="0" marL="0">
+            <a:pPr marL="0" indent="0" algn="ctr">
               <a:buNone/>
             </a:pPr>
             <a:r>
@@ -18486,7 +18386,7 @@
           <a:bodyPr wrap="square" lIns="0" tIns="0" rIns="0" bIns="0" rtlCol="0" anchor="ctr"/>
           <a:lstStyle/>
           <a:p>
-            <a:pPr indent="0" marL="0">
+            <a:pPr marL="0" indent="0">
               <a:buNone/>
             </a:pPr>
             <a:r>
@@ -18525,7 +18425,7 @@
           <a:bodyPr wrap="square" lIns="0" tIns="0" rIns="0" bIns="0" rtlCol="0" anchor="ctr"/>
           <a:lstStyle/>
           <a:p>
-            <a:pPr indent="0" marL="0">
+            <a:pPr marL="0" indent="0">
               <a:lnSpc>
                 <a:spcPct val="120000"/>
               </a:lnSpc>
@@ -18545,7 +18445,7 @@
             <a:endParaRPr lang="en-US" sz="1200" dirty="0"/>
           </a:p>
           <a:p>
-            <a:pPr indent="0" marL="0">
+            <a:pPr marL="0" indent="0">
               <a:lnSpc>
                 <a:spcPct val="120000"/>
               </a:lnSpc>
@@ -18565,7 +18465,7 @@
             <a:endParaRPr lang="en-US" sz="1200" dirty="0"/>
           </a:p>
           <a:p>
-            <a:pPr indent="0" marL="0">
+            <a:pPr marL="0" indent="0">
               <a:lnSpc>
                 <a:spcPct val="120000"/>
               </a:lnSpc>
@@ -18659,7 +18559,7 @@
           <a:bodyPr wrap="square" lIns="0" tIns="0" rIns="0" bIns="0" rtlCol="0" anchor="ctr"/>
           <a:lstStyle/>
           <a:p>
-            <a:pPr algn="ctr" indent="0" marL="0">
+            <a:pPr marL="0" indent="0" algn="ctr">
               <a:buNone/>
             </a:pPr>
             <a:r>
@@ -18698,7 +18598,7 @@
           <a:bodyPr wrap="square" lIns="0" tIns="0" rIns="0" bIns="0" rtlCol="0" anchor="ctr"/>
           <a:lstStyle/>
           <a:p>
-            <a:pPr indent="0" marL="0">
+            <a:pPr marL="0" indent="0">
               <a:buNone/>
             </a:pPr>
             <a:r>
@@ -18737,7 +18637,7 @@
           <a:bodyPr wrap="square" lIns="0" tIns="0" rIns="0" bIns="0" rtlCol="0" anchor="ctr"/>
           <a:lstStyle/>
           <a:p>
-            <a:pPr indent="0" marL="0">
+            <a:pPr marL="0" indent="0">
               <a:lnSpc>
                 <a:spcPct val="120000"/>
               </a:lnSpc>
@@ -18757,7 +18657,7 @@
             <a:endParaRPr lang="en-US" sz="1200" dirty="0"/>
           </a:p>
           <a:p>
-            <a:pPr indent="0" marL="0">
+            <a:pPr marL="0" indent="0">
               <a:lnSpc>
                 <a:spcPct val="120000"/>
               </a:lnSpc>
@@ -18851,7 +18751,7 @@
           <a:bodyPr wrap="square" lIns="0" tIns="0" rIns="0" bIns="0" rtlCol="0" anchor="ctr"/>
           <a:lstStyle/>
           <a:p>
-            <a:pPr algn="ctr" indent="0" marL="0">
+            <a:pPr marL="0" indent="0" algn="ctr">
               <a:buNone/>
             </a:pPr>
             <a:r>
@@ -18890,7 +18790,7 @@
           <a:bodyPr wrap="square" lIns="0" tIns="0" rIns="0" bIns="0" rtlCol="0" anchor="ctr"/>
           <a:lstStyle/>
           <a:p>
-            <a:pPr indent="0" marL="0">
+            <a:pPr marL="0" indent="0">
               <a:buNone/>
             </a:pPr>
             <a:r>
@@ -18929,7 +18829,7 @@
           <a:bodyPr wrap="square" lIns="0" tIns="0" rIns="0" bIns="0" rtlCol="0" anchor="ctr"/>
           <a:lstStyle/>
           <a:p>
-            <a:pPr indent="0" marL="0">
+            <a:pPr marL="0" indent="0">
               <a:lnSpc>
                 <a:spcPct val="120000"/>
               </a:lnSpc>
@@ -18949,7 +18849,7 @@
             <a:endParaRPr lang="en-US" sz="1200" dirty="0"/>
           </a:p>
           <a:p>
-            <a:pPr indent="0" marL="0">
+            <a:pPr marL="0" indent="0">
               <a:lnSpc>
                 <a:spcPct val="120000"/>
               </a:lnSpc>
@@ -18969,7 +18869,7 @@
             <a:endParaRPr lang="en-US" sz="1200" dirty="0"/>
           </a:p>
           <a:p>
-            <a:pPr indent="0" marL="0">
+            <a:pPr marL="0" indent="0">
               <a:lnSpc>
                 <a:spcPct val="120000"/>
               </a:lnSpc>
@@ -19063,7 +18963,7 @@
           <a:bodyPr wrap="square" lIns="0" tIns="0" rIns="0" bIns="0" rtlCol="0" anchor="ctr"/>
           <a:lstStyle/>
           <a:p>
-            <a:pPr algn="ctr" indent="0" marL="0">
+            <a:pPr marL="0" indent="0" algn="ctr">
               <a:buNone/>
             </a:pPr>
             <a:r>
@@ -19102,7 +19002,7 @@
           <a:bodyPr wrap="square" lIns="0" tIns="0" rIns="0" bIns="0" rtlCol="0" anchor="ctr"/>
           <a:lstStyle/>
           <a:p>
-            <a:pPr indent="0" marL="0">
+            <a:pPr marL="0" indent="0">
               <a:buNone/>
             </a:pPr>
             <a:r>
@@ -19141,7 +19041,7 @@
           <a:bodyPr wrap="square" lIns="0" tIns="0" rIns="0" bIns="0" rtlCol="0" anchor="ctr"/>
           <a:lstStyle/>
           <a:p>
-            <a:pPr indent="0" marL="0">
+            <a:pPr marL="0" indent="0">
               <a:lnSpc>
                 <a:spcPct val="120000"/>
               </a:lnSpc>
@@ -19161,7 +19061,7 @@
             <a:endParaRPr lang="en-US" sz="1200" dirty="0"/>
           </a:p>
           <a:p>
-            <a:pPr indent="0" marL="0">
+            <a:pPr marL="0" indent="0">
               <a:lnSpc>
                 <a:spcPct val="120000"/>
               </a:lnSpc>
@@ -19255,7 +19155,7 @@
           <a:bodyPr wrap="square" lIns="0" tIns="0" rIns="0" bIns="0" rtlCol="0" anchor="ctr"/>
           <a:lstStyle/>
           <a:p>
-            <a:pPr algn="ctr" indent="0" marL="0">
+            <a:pPr marL="0" indent="0" algn="ctr">
               <a:buNone/>
             </a:pPr>
             <a:r>
@@ -19294,7 +19194,7 @@
           <a:bodyPr wrap="square" lIns="0" tIns="0" rIns="0" bIns="0" rtlCol="0" anchor="ctr"/>
           <a:lstStyle/>
           <a:p>
-            <a:pPr indent="0" marL="0">
+            <a:pPr marL="0" indent="0">
               <a:buNone/>
             </a:pPr>
             <a:r>
@@ -19333,7 +19233,7 @@
           <a:bodyPr wrap="square" lIns="0" tIns="0" rIns="0" bIns="0" rtlCol="0" anchor="ctr"/>
           <a:lstStyle/>
           <a:p>
-            <a:pPr indent="0" marL="0">
+            <a:pPr marL="0" indent="0">
               <a:lnSpc>
                 <a:spcPct val="120000"/>
               </a:lnSpc>
@@ -19353,7 +19253,7 @@
             <a:endParaRPr lang="en-US" sz="1200" dirty="0"/>
           </a:p>
           <a:p>
-            <a:pPr indent="0" marL="0">
+            <a:pPr marL="0" indent="0">
               <a:lnSpc>
                 <a:spcPct val="120000"/>
               </a:lnSpc>
@@ -19447,7 +19347,7 @@
           <a:bodyPr wrap="square" lIns="0" tIns="0" rIns="0" bIns="0" rtlCol="0" anchor="ctr"/>
           <a:lstStyle/>
           <a:p>
-            <a:pPr algn="ctr" indent="0" marL="0">
+            <a:pPr marL="0" indent="0" algn="ctr">
               <a:buNone/>
             </a:pPr>
             <a:r>
@@ -19486,7 +19386,7 @@
           <a:bodyPr wrap="square" lIns="0" tIns="0" rIns="0" bIns="0" rtlCol="0" anchor="ctr"/>
           <a:lstStyle/>
           <a:p>
-            <a:pPr indent="0" marL="0">
+            <a:pPr marL="0" indent="0">
               <a:buNone/>
             </a:pPr>
             <a:r>
@@ -19525,7 +19425,7 @@
           <a:bodyPr wrap="square" lIns="0" tIns="0" rIns="0" bIns="0" rtlCol="0" anchor="ctr"/>
           <a:lstStyle/>
           <a:p>
-            <a:pPr indent="0" marL="0">
+            <a:pPr marL="0" indent="0">
               <a:lnSpc>
                 <a:spcPct val="120000"/>
               </a:lnSpc>
@@ -19545,7 +19445,7 @@
             <a:endParaRPr lang="en-US" sz="1200" dirty="0"/>
           </a:p>
           <a:p>
-            <a:pPr indent="0" marL="0">
+            <a:pPr marL="0" indent="0">
               <a:lnSpc>
                 <a:spcPct val="120000"/>
               </a:lnSpc>
@@ -19587,7 +19487,7 @@
           <a:bodyPr wrap="square" lIns="0" tIns="0" rIns="0" bIns="0" rtlCol="0" anchor="ctr"/>
           <a:lstStyle/>
           <a:p>
-            <a:pPr indent="0" marL="0">
+            <a:pPr marL="0" indent="0">
               <a:buNone/>
             </a:pPr>
             <a:r>
@@ -19626,7 +19526,7 @@
           <a:bodyPr wrap="square" lIns="0" tIns="0" rIns="0" bIns="0" rtlCol="0" anchor="ctr"/>
           <a:lstStyle/>
           <a:p>
-            <a:pPr indent="0" marL="0">
+            <a:pPr marL="0" indent="0">
               <a:buNone/>
             </a:pPr>
             <a:r>
@@ -19660,6 +19560,7 @@
         <a:solidFill>
           <a:srgbClr val="FFFFFF"/>
         </a:solidFill>
+        <a:effectLst/>
       </p:bgPr>
     </p:bg>
     <p:spTree>
@@ -19697,7 +19598,7 @@
           <a:bodyPr wrap="square" lIns="0" tIns="0" rIns="0" bIns="0" rtlCol="0" anchor="ctr"/>
           <a:lstStyle/>
           <a:p>
-            <a:pPr indent="0" marL="0">
+            <a:pPr marL="0" indent="0">
               <a:buNone/>
             </a:pPr>
             <a:r>
@@ -19736,7 +19637,7 @@
           <a:bodyPr wrap="square" lIns="0" tIns="0" rIns="0" bIns="0" rtlCol="0" anchor="ctr"/>
           <a:lstStyle/>
           <a:p>
-            <a:pPr indent="0" marL="0">
+            <a:pPr marL="0" indent="0">
               <a:buNone/>
             </a:pPr>
             <a:r>
@@ -19802,7 +19703,7 @@
           <a:bodyPr wrap="square" lIns="0" tIns="0" rIns="0" bIns="0" rtlCol="0" anchor="ctr"/>
           <a:lstStyle/>
           <a:p>
-            <a:pPr indent="0" marL="0">
+            <a:pPr marL="0" indent="0">
               <a:buNone/>
             </a:pPr>
             <a:r>
@@ -19866,7 +19767,7 @@
           <a:bodyPr wrap="square" lIns="0" tIns="0" rIns="0" bIns="0" rtlCol="0" anchor="ctr"/>
           <a:lstStyle/>
           <a:p>
-            <a:pPr algn="ctr" indent="0" marL="0">
+            <a:pPr marL="0" indent="0" algn="ctr">
               <a:buNone/>
             </a:pPr>
             <a:r>
@@ -19905,7 +19806,7 @@
           <a:bodyPr wrap="square" lIns="0" tIns="0" rIns="0" bIns="0" rtlCol="0" anchor="ctr"/>
           <a:lstStyle/>
           <a:p>
-            <a:pPr indent="0" marL="0">
+            <a:pPr marL="0" indent="0">
               <a:buNone/>
             </a:pPr>
             <a:r>
@@ -19969,7 +19870,7 @@
           <a:bodyPr wrap="square" lIns="0" tIns="0" rIns="0" bIns="0" rtlCol="0" anchor="ctr"/>
           <a:lstStyle/>
           <a:p>
-            <a:pPr algn="ctr" indent="0" marL="0">
+            <a:pPr marL="0" indent="0" algn="ctr">
               <a:buNone/>
             </a:pPr>
             <a:r>
@@ -20008,7 +19909,7 @@
           <a:bodyPr wrap="square" lIns="0" tIns="0" rIns="0" bIns="0" rtlCol="0" anchor="ctr"/>
           <a:lstStyle/>
           <a:p>
-            <a:pPr indent="0" marL="0">
+            <a:pPr marL="0" indent="0">
               <a:buNone/>
             </a:pPr>
             <a:r>
@@ -20072,7 +19973,7 @@
           <a:bodyPr wrap="square" lIns="0" tIns="0" rIns="0" bIns="0" rtlCol="0" anchor="ctr"/>
           <a:lstStyle/>
           <a:p>
-            <a:pPr algn="ctr" indent="0" marL="0">
+            <a:pPr marL="0" indent="0" algn="ctr">
               <a:buNone/>
             </a:pPr>
             <a:r>
@@ -20111,7 +20012,7 @@
           <a:bodyPr wrap="square" lIns="0" tIns="0" rIns="0" bIns="0" rtlCol="0" anchor="ctr"/>
           <a:lstStyle/>
           <a:p>
-            <a:pPr indent="0" marL="0">
+            <a:pPr marL="0" indent="0">
               <a:buNone/>
             </a:pPr>
             <a:r>
@@ -20227,7 +20128,7 @@
           <a:bodyPr wrap="square" lIns="0" tIns="0" rIns="0" bIns="0" rtlCol="0" anchor="ctr"/>
           <a:lstStyle/>
           <a:p>
-            <a:pPr indent="0" marL="0">
+            <a:pPr marL="0" indent="0">
               <a:buNone/>
             </a:pPr>
             <a:r>
@@ -20266,7 +20167,7 @@
           <a:bodyPr wrap="square" lIns="0" tIns="0" rIns="0" bIns="0" rtlCol="0" anchor="ctr"/>
           <a:lstStyle/>
           <a:p>
-            <a:pPr indent="0" marL="0">
+            <a:pPr marL="0" indent="0">
               <a:buNone/>
             </a:pPr>
             <a:r>
@@ -20357,7 +20258,7 @@
           <a:bodyPr wrap="square" lIns="0" tIns="0" rIns="0" bIns="0" rtlCol="0" anchor="ctr"/>
           <a:lstStyle/>
           <a:p>
-            <a:pPr indent="0" marL="0">
+            <a:pPr marL="0" indent="0">
               <a:buNone/>
             </a:pPr>
             <a:r>
@@ -20396,7 +20297,7 @@
           <a:bodyPr wrap="square" lIns="0" tIns="0" rIns="0" bIns="0" rtlCol="0" anchor="ctr"/>
           <a:lstStyle/>
           <a:p>
-            <a:pPr indent="0" marL="0">
+            <a:pPr marL="0" indent="0">
               <a:buNone/>
             </a:pPr>
             <a:r>
@@ -20487,7 +20388,7 @@
           <a:bodyPr wrap="square" lIns="0" tIns="0" rIns="0" bIns="0" rtlCol="0" anchor="ctr"/>
           <a:lstStyle/>
           <a:p>
-            <a:pPr indent="0" marL="0">
+            <a:pPr marL="0" indent="0">
               <a:buNone/>
             </a:pPr>
             <a:r>
@@ -20526,7 +20427,7 @@
           <a:bodyPr wrap="square" lIns="0" tIns="0" rIns="0" bIns="0" rtlCol="0" anchor="ctr"/>
           <a:lstStyle/>
           <a:p>
-            <a:pPr indent="0" marL="0">
+            <a:pPr marL="0" indent="0">
               <a:buNone/>
             </a:pPr>
             <a:r>
@@ -20592,7 +20493,7 @@
           <a:bodyPr wrap="square" lIns="0" tIns="0" rIns="0" bIns="0" rtlCol="0" anchor="ctr"/>
           <a:lstStyle/>
           <a:p>
-            <a:pPr indent="0" marL="0">
+            <a:pPr marL="0" indent="0">
               <a:buNone/>
             </a:pPr>
             <a:r>
@@ -20631,7 +20532,7 @@
           <a:bodyPr wrap="square" lIns="0" tIns="0" rIns="0" bIns="0" rtlCol="0" anchor="ctr"/>
           <a:lstStyle/>
           <a:p>
-            <a:pPr indent="0" marL="0">
+            <a:pPr marL="0" indent="0">
               <a:buNone/>
             </a:pPr>
             <a:r>
@@ -20665,6 +20566,7 @@
         <a:solidFill>
           <a:srgbClr val="FFFFFF"/>
         </a:solidFill>
+        <a:effectLst/>
       </p:bgPr>
     </p:bg>
     <p:spTree>
@@ -20702,7 +20604,7 @@
           <a:bodyPr wrap="square" lIns="0" tIns="0" rIns="0" bIns="0" rtlCol="0" anchor="ctr"/>
           <a:lstStyle/>
           <a:p>
-            <a:pPr indent="0" marL="0">
+            <a:pPr marL="0" indent="0">
               <a:buNone/>
             </a:pPr>
             <a:r>
@@ -20741,7 +20643,7 @@
           <a:bodyPr wrap="square" lIns="0" tIns="0" rIns="0" bIns="0" rtlCol="0" anchor="ctr"/>
           <a:lstStyle/>
           <a:p>
-            <a:pPr indent="0" marL="0">
+            <a:pPr marL="0" indent="0">
               <a:buNone/>
             </a:pPr>
             <a:r>
@@ -20807,7 +20709,7 @@
           <a:bodyPr wrap="square" lIns="0" tIns="0" rIns="0" bIns="0" rtlCol="0" anchor="ctr"/>
           <a:lstStyle/>
           <a:p>
-            <a:pPr indent="0" marL="0">
+            <a:pPr marL="0" indent="0">
               <a:lnSpc>
                 <a:spcPct val="110000"/>
               </a:lnSpc>
@@ -20849,7 +20751,7 @@
           <a:bodyPr wrap="square" lIns="0" tIns="0" rIns="0" bIns="0" rtlCol="0" anchor="ctr"/>
           <a:lstStyle/>
           <a:p>
-            <a:pPr indent="0" marL="0">
+            <a:pPr marL="0" indent="0">
               <a:lnSpc>
                 <a:spcPct val="120000"/>
               </a:lnSpc>
@@ -20869,7 +20771,7 @@
             <a:endParaRPr lang="en-US" sz="1400" dirty="0"/>
           </a:p>
           <a:p>
-            <a:pPr indent="0" marL="0">
+            <a:pPr marL="0" indent="0">
               <a:lnSpc>
                 <a:spcPct val="120000"/>
               </a:lnSpc>
@@ -20938,7 +20840,7 @@
           <a:bodyPr wrap="square" lIns="0" tIns="0" rIns="0" bIns="0" rtlCol="0" anchor="ctr"/>
           <a:lstStyle/>
           <a:p>
-            <a:pPr indent="0" marL="0">
+            <a:pPr marL="0" indent="0">
               <a:lnSpc>
                 <a:spcPct val="110000"/>
               </a:lnSpc>
@@ -20958,7 +20860,7 @@
             <a:endParaRPr lang="en-US" sz="1700" dirty="0"/>
           </a:p>
           <a:p>
-            <a:pPr indent="0" marL="0">
+            <a:pPr marL="0" indent="0">
               <a:lnSpc>
                 <a:spcPct val="110000"/>
               </a:lnSpc>
@@ -21000,7 +20902,7 @@
           <a:bodyPr wrap="square" lIns="0" tIns="0" rIns="0" bIns="0" rtlCol="0" anchor="ctr"/>
           <a:lstStyle/>
           <a:p>
-            <a:pPr indent="0" marL="0">
+            <a:pPr marL="0" indent="0">
               <a:lnSpc>
                 <a:spcPct val="120000"/>
               </a:lnSpc>
@@ -21020,7 +20922,7 @@
             <a:endParaRPr lang="en-US" sz="1400" dirty="0"/>
           </a:p>
           <a:p>
-            <a:pPr indent="0" marL="0">
+            <a:pPr marL="0" indent="0">
               <a:lnSpc>
                 <a:spcPct val="120000"/>
               </a:lnSpc>
@@ -21089,7 +20991,7 @@
           <a:bodyPr wrap="square" lIns="0" tIns="0" rIns="0" bIns="0" rtlCol="0" anchor="ctr"/>
           <a:lstStyle/>
           <a:p>
-            <a:pPr indent="0" marL="0">
+            <a:pPr marL="0" indent="0">
               <a:lnSpc>
                 <a:spcPct val="110000"/>
               </a:lnSpc>
@@ -21131,7 +21033,7 @@
           <a:bodyPr wrap="square" lIns="0" tIns="0" rIns="0" bIns="0" rtlCol="0" anchor="ctr"/>
           <a:lstStyle/>
           <a:p>
-            <a:pPr indent="0" marL="0">
+            <a:pPr marL="0" indent="0">
               <a:lnSpc>
                 <a:spcPct val="120000"/>
               </a:lnSpc>
@@ -21151,7 +21053,7 @@
             <a:endParaRPr lang="en-US" sz="1400" dirty="0"/>
           </a:p>
           <a:p>
-            <a:pPr indent="0" marL="0">
+            <a:pPr marL="0" indent="0">
               <a:lnSpc>
                 <a:spcPct val="120000"/>
               </a:lnSpc>
@@ -21193,7 +21095,7 @@
           <a:bodyPr wrap="square" lIns="0" tIns="0" rIns="0" bIns="0" rtlCol="0" anchor="ctr"/>
           <a:lstStyle/>
           <a:p>
-            <a:pPr indent="0" marL="0">
+            <a:pPr marL="0" indent="0">
               <a:buNone/>
             </a:pPr>
             <a:r>
@@ -21232,7 +21134,7 @@
           <a:bodyPr wrap="square" lIns="0" tIns="0" rIns="0" bIns="0" rtlCol="0" anchor="ctr"/>
           <a:lstStyle/>
           <a:p>
-            <a:pPr indent="0" marL="0">
+            <a:pPr marL="0" indent="0">
               <a:buNone/>
             </a:pPr>
             <a:r>
@@ -21271,7 +21173,7 @@
           <a:bodyPr wrap="square" lIns="0" tIns="0" rIns="0" bIns="0" rtlCol="0" anchor="ctr"/>
           <a:lstStyle/>
           <a:p>
-            <a:pPr indent="0" marL="0">
+            <a:pPr marL="0" indent="0">
               <a:buNone/>
             </a:pPr>
             <a:r>
@@ -21310,7 +21212,7 @@
           <a:bodyPr wrap="square" lIns="0" tIns="0" rIns="0" bIns="0" rtlCol="0" anchor="ctr"/>
           <a:lstStyle/>
           <a:p>
-            <a:pPr indent="0" marL="0">
+            <a:pPr marL="0" indent="0">
               <a:buNone/>
             </a:pPr>
             <a:r>
@@ -21349,7 +21251,7 @@
           <a:bodyPr wrap="square" lIns="0" tIns="0" rIns="0" bIns="0" rtlCol="0" anchor="ctr"/>
           <a:lstStyle/>
           <a:p>
-            <a:pPr indent="0" marL="0">
+            <a:pPr marL="0" indent="0">
               <a:buNone/>
             </a:pPr>
             <a:r>
@@ -21388,7 +21290,7 @@
           <a:bodyPr wrap="square" lIns="0" tIns="0" rIns="0" bIns="0" rtlCol="0" anchor="ctr"/>
           <a:lstStyle/>
           <a:p>
-            <a:pPr indent="0" marL="0">
+            <a:pPr marL="0" indent="0">
               <a:buNone/>
             </a:pPr>
             <a:r>
@@ -21454,7 +21356,7 @@
           <a:bodyPr wrap="square" lIns="0" tIns="0" rIns="0" bIns="0" rtlCol="0" anchor="ctr"/>
           <a:lstStyle/>
           <a:p>
-            <a:pPr indent="0" marL="0">
+            <a:pPr marL="0" indent="0">
               <a:buNone/>
             </a:pPr>
             <a:r>
@@ -21493,7 +21395,7 @@
           <a:bodyPr wrap="square" lIns="0" tIns="0" rIns="0" bIns="0" rtlCol="0" anchor="ctr"/>
           <a:lstStyle/>
           <a:p>
-            <a:pPr indent="0" marL="0">
+            <a:pPr marL="0" indent="0">
               <a:buNone/>
             </a:pPr>
             <a:r>
@@ -21527,6 +21429,7 @@
         <a:solidFill>
           <a:srgbClr val="14504B"/>
         </a:solidFill>
+        <a:effectLst/>
       </p:bgPr>
     </p:bg>
     <p:spTree>
@@ -21564,7 +21467,7 @@
           <a:bodyPr wrap="square" lIns="0" tIns="0" rIns="0" bIns="0" rtlCol="0" anchor="ctr"/>
           <a:lstStyle/>
           <a:p>
-            <a:pPr indent="0" marL="0">
+            <a:pPr marL="0" indent="0">
               <a:buNone/>
             </a:pPr>
             <a:r>
@@ -21603,7 +21506,7 @@
           <a:bodyPr wrap="square" lIns="0" tIns="0" rIns="0" bIns="0" rtlCol="0" anchor="ctr"/>
           <a:lstStyle/>
           <a:p>
-            <a:pPr indent="0" marL="0">
+            <a:pPr marL="0" indent="0">
               <a:buNone/>
             </a:pPr>
             <a:r>
@@ -21694,7 +21597,7 @@
           <a:bodyPr wrap="square" lIns="0" tIns="0" rIns="0" bIns="0" rtlCol="0" anchor="ctr"/>
           <a:lstStyle/>
           <a:p>
-            <a:pPr algn="ctr" indent="0" marL="0">
+            <a:pPr marL="0" indent="0" algn="ctr">
               <a:buNone/>
             </a:pPr>
             <a:r>
@@ -21733,7 +21636,7 @@
           <a:bodyPr wrap="square" lIns="0" tIns="0" rIns="0" bIns="0" rtlCol="0" anchor="ctr"/>
           <a:lstStyle/>
           <a:p>
-            <a:pPr indent="0" marL="0">
+            <a:pPr marL="0" indent="0">
               <a:buNone/>
             </a:pPr>
             <a:r>
@@ -21772,7 +21675,7 @@
           <a:bodyPr wrap="square" lIns="0" tIns="0" rIns="0" bIns="0" rtlCol="0" anchor="ctr"/>
           <a:lstStyle/>
           <a:p>
-            <a:pPr indent="0" marL="0">
+            <a:pPr marL="0" indent="0">
               <a:lnSpc>
                 <a:spcPct val="115000"/>
               </a:lnSpc>
@@ -21792,7 +21695,7 @@
             <a:endParaRPr lang="en-US" sz="1400" dirty="0"/>
           </a:p>
           <a:p>
-            <a:pPr indent="0" marL="0">
+            <a:pPr marL="0" indent="0">
               <a:lnSpc>
                 <a:spcPct val="115000"/>
               </a:lnSpc>
@@ -21834,7 +21737,7 @@
           <a:bodyPr wrap="square" lIns="0" tIns="0" rIns="0" bIns="0" rtlCol="0" anchor="ctr"/>
           <a:lstStyle/>
           <a:p>
-            <a:pPr indent="0" marL="0">
+            <a:pPr marL="0" indent="0">
               <a:lnSpc>
                 <a:spcPct val="115000"/>
               </a:lnSpc>
@@ -21854,7 +21757,7 @@
             <a:endParaRPr lang="en-US" sz="1400" dirty="0"/>
           </a:p>
           <a:p>
-            <a:pPr indent="0" marL="0">
+            <a:pPr marL="0" indent="0">
               <a:lnSpc>
                 <a:spcPct val="115000"/>
               </a:lnSpc>
@@ -21948,7 +21851,7 @@
           <a:bodyPr wrap="square" lIns="0" tIns="0" rIns="0" bIns="0" rtlCol="0" anchor="ctr"/>
           <a:lstStyle/>
           <a:p>
-            <a:pPr algn="ctr" indent="0" marL="0">
+            <a:pPr marL="0" indent="0" algn="ctr">
               <a:buNone/>
             </a:pPr>
             <a:r>
@@ -21987,7 +21890,7 @@
           <a:bodyPr wrap="square" lIns="0" tIns="0" rIns="0" bIns="0" rtlCol="0" anchor="ctr"/>
           <a:lstStyle/>
           <a:p>
-            <a:pPr indent="0" marL="0">
+            <a:pPr marL="0" indent="0">
               <a:buNone/>
             </a:pPr>
             <a:r>
@@ -22026,7 +21929,7 @@
           <a:bodyPr wrap="square" lIns="0" tIns="0" rIns="0" bIns="0" rtlCol="0" anchor="ctr"/>
           <a:lstStyle/>
           <a:p>
-            <a:pPr indent="0" marL="0">
+            <a:pPr marL="0" indent="0">
               <a:lnSpc>
                 <a:spcPct val="115000"/>
               </a:lnSpc>
@@ -22068,7 +21971,7 @@
           <a:bodyPr wrap="square" lIns="0" tIns="0" rIns="0" bIns="0" rtlCol="0" anchor="ctr"/>
           <a:lstStyle/>
           <a:p>
-            <a:pPr indent="0" marL="0">
+            <a:pPr marL="0" indent="0">
               <a:lnSpc>
                 <a:spcPct val="115000"/>
               </a:lnSpc>
@@ -22110,7 +22013,7 @@
           <a:bodyPr wrap="square" lIns="0" tIns="0" rIns="0" bIns="0" rtlCol="0" anchor="ctr"/>
           <a:lstStyle/>
           <a:p>
-            <a:pPr indent="0" marL="0">
+            <a:pPr marL="0" indent="0">
               <a:lnSpc>
                 <a:spcPct val="115000"/>
               </a:lnSpc>
@@ -22432,4 +22335,299 @@
     </a:ext>
   </a:extLst>
 </a:theme>
+</file>
+
+<file path=ppt/theme/theme2.xml><?xml version="1.0" encoding="utf-8"?>
+<a:theme xmlns:a="http://schemas.openxmlformats.org/drawingml/2006/main" name="Office テーマ">
+  <a:themeElements>
+    <a:clrScheme name="Office">
+      <a:dk1>
+        <a:sysClr val="windowText" lastClr="000000"/>
+      </a:dk1>
+      <a:lt1>
+        <a:sysClr val="window" lastClr="FFFFFF"/>
+      </a:lt1>
+      <a:dk2>
+        <a:srgbClr val="44546A"/>
+      </a:dk2>
+      <a:lt2>
+        <a:srgbClr val="E7E6E6"/>
+      </a:lt2>
+      <a:accent1>
+        <a:srgbClr val="4472C4"/>
+      </a:accent1>
+      <a:accent2>
+        <a:srgbClr val="ED7D31"/>
+      </a:accent2>
+      <a:accent3>
+        <a:srgbClr val="A5A5A5"/>
+      </a:accent3>
+      <a:accent4>
+        <a:srgbClr val="FFC000"/>
+      </a:accent4>
+      <a:accent5>
+        <a:srgbClr val="5B9BD5"/>
+      </a:accent5>
+      <a:accent6>
+        <a:srgbClr val="70AD47"/>
+      </a:accent6>
+      <a:hlink>
+        <a:srgbClr val="0563C1"/>
+      </a:hlink>
+      <a:folHlink>
+        <a:srgbClr val="954F72"/>
+      </a:folHlink>
+    </a:clrScheme>
+    <a:fontScheme name="Office">
+      <a:majorFont>
+        <a:latin typeface="游ゴシック Light" panose="020F0302020204030204"/>
+        <a:ea typeface=""/>
+        <a:cs typeface=""/>
+        <a:font script="Jpan" typeface="游ゴシック Light"/>
+        <a:font script="Hang" typeface="맑은 고딕"/>
+        <a:font script="Hans" typeface="等线 Light"/>
+        <a:font script="Hant" typeface="新細明體"/>
+        <a:font script="Arab" typeface="Times New Roman"/>
+        <a:font script="Hebr" typeface="Times New Roman"/>
+        <a:font script="Thai" typeface="Angsana New"/>
+        <a:font script="Ethi" typeface="Nyala"/>
+        <a:font script="Beng" typeface="Vrinda"/>
+        <a:font script="Gujr" typeface="Shruti"/>
+        <a:font script="Khmr" typeface="MoolBoran"/>
+        <a:font script="Knda" typeface="Tunga"/>
+        <a:font script="Guru" typeface="Raavi"/>
+        <a:font script="Cans" typeface="Euphemia"/>
+        <a:font script="Cher" typeface="Plantagenet Cherokee"/>
+        <a:font script="Yiii" typeface="Microsoft Yi Baiti"/>
+        <a:font script="Tibt" typeface="Microsoft Himalaya"/>
+        <a:font script="Thaa" typeface="MV Boli"/>
+        <a:font script="Deva" typeface="Mangal"/>
+        <a:font script="Telu" typeface="Gautami"/>
+        <a:font script="Taml" typeface="Latha"/>
+        <a:font script="Syrc" typeface="Estrangelo Edessa"/>
+        <a:font script="Orya" typeface="Kalinga"/>
+        <a:font script="Mlym" typeface="Kartika"/>
+        <a:font script="Laoo" typeface="DokChampa"/>
+        <a:font script="Sinh" typeface="Iskoola Pota"/>
+        <a:font script="Mong" typeface="Mongolian Baiti"/>
+        <a:font script="Viet" typeface="Times New Roman"/>
+        <a:font script="Uigh" typeface="Microsoft Uighur"/>
+        <a:font script="Geor" typeface="Sylfaen"/>
+        <a:font script="Armn" typeface="Arial"/>
+        <a:font script="Bugi" typeface="Leelawadee UI"/>
+        <a:font script="Bopo" typeface="Microsoft JhengHei"/>
+        <a:font script="Java" typeface="Javanese Text"/>
+        <a:font script="Lisu" typeface="Segoe UI"/>
+        <a:font script="Mymr" typeface="Myanmar Text"/>
+        <a:font script="Nkoo" typeface="Ebrima"/>
+        <a:font script="Olck" typeface="Nirmala UI"/>
+        <a:font script="Osma" typeface="Ebrima"/>
+        <a:font script="Phag" typeface="Phagspa"/>
+        <a:font script="Syrn" typeface="Estrangelo Edessa"/>
+        <a:font script="Syrj" typeface="Estrangelo Edessa"/>
+        <a:font script="Syre" typeface="Estrangelo Edessa"/>
+        <a:font script="Sora" typeface="Nirmala UI"/>
+        <a:font script="Tale" typeface="Microsoft Tai Le"/>
+        <a:font script="Talu" typeface="Microsoft New Tai Lue"/>
+        <a:font script="Tfng" typeface="Ebrima"/>
+      </a:majorFont>
+      <a:minorFont>
+        <a:latin typeface="游ゴシック" panose="020F0502020204030204"/>
+        <a:ea typeface=""/>
+        <a:cs typeface=""/>
+        <a:font script="Jpan" typeface="游ゴシック"/>
+        <a:font script="Hang" typeface="맑은 고딕"/>
+        <a:font script="Hans" typeface="等线"/>
+        <a:font script="Hant" typeface="新細明體"/>
+        <a:font script="Arab" typeface="Arial"/>
+        <a:font script="Hebr" typeface="Arial"/>
+        <a:font script="Thai" typeface="Cordia New"/>
+        <a:font script="Ethi" typeface="Nyala"/>
+        <a:font script="Beng" typeface="Vrinda"/>
+        <a:font script="Gujr" typeface="Shruti"/>
+        <a:font script="Khmr" typeface="DaunPenh"/>
+        <a:font script="Knda" typeface="Tunga"/>
+        <a:font script="Guru" typeface="Raavi"/>
+        <a:font script="Cans" typeface="Euphemia"/>
+        <a:font script="Cher" typeface="Plantagenet Cherokee"/>
+        <a:font script="Yiii" typeface="Microsoft Yi Baiti"/>
+        <a:font script="Tibt" typeface="Microsoft Himalaya"/>
+        <a:font script="Thaa" typeface="MV Boli"/>
+        <a:font script="Deva" typeface="Mangal"/>
+        <a:font script="Telu" typeface="Gautami"/>
+        <a:font script="Taml" typeface="Latha"/>
+        <a:font script="Syrc" typeface="Estrangelo Edessa"/>
+        <a:font script="Orya" typeface="Kalinga"/>
+        <a:font script="Mlym" typeface="Kartika"/>
+        <a:font script="Laoo" typeface="DokChampa"/>
+        <a:font script="Sinh" typeface="Iskoola Pota"/>
+        <a:font script="Mong" typeface="Mongolian Baiti"/>
+        <a:font script="Viet" typeface="Arial"/>
+        <a:font script="Uigh" typeface="Microsoft Uighur"/>
+        <a:font script="Geor" typeface="Sylfaen"/>
+        <a:font script="Armn" typeface="Arial"/>
+        <a:font script="Bugi" typeface="Leelawadee UI"/>
+        <a:font script="Bopo" typeface="Microsoft JhengHei"/>
+        <a:font script="Java" typeface="Javanese Text"/>
+        <a:font script="Lisu" typeface="Segoe UI"/>
+        <a:font script="Mymr" typeface="Myanmar Text"/>
+        <a:font script="Nkoo" typeface="Ebrima"/>
+        <a:font script="Olck" typeface="Nirmala UI"/>
+        <a:font script="Osma" typeface="Ebrima"/>
+        <a:font script="Phag" typeface="Phagspa"/>
+        <a:font script="Syrn" typeface="Estrangelo Edessa"/>
+        <a:font script="Syrj" typeface="Estrangelo Edessa"/>
+        <a:font script="Syre" typeface="Estrangelo Edessa"/>
+        <a:font script="Sora" typeface="Nirmala UI"/>
+        <a:font script="Tale" typeface="Microsoft Tai Le"/>
+        <a:font script="Talu" typeface="Microsoft New Tai Lue"/>
+        <a:font script="Tfng" typeface="Ebrima"/>
+      </a:minorFont>
+    </a:fontScheme>
+    <a:fmtScheme name="Office">
+      <a:fillStyleLst>
+        <a:solidFill>
+          <a:schemeClr val="phClr"/>
+        </a:solidFill>
+        <a:gradFill rotWithShape="1">
+          <a:gsLst>
+            <a:gs pos="0">
+              <a:schemeClr val="phClr">
+                <a:lumMod val="110000"/>
+                <a:satMod val="105000"/>
+                <a:tint val="67000"/>
+              </a:schemeClr>
+            </a:gs>
+            <a:gs pos="50000">
+              <a:schemeClr val="phClr">
+                <a:lumMod val="105000"/>
+                <a:satMod val="103000"/>
+                <a:tint val="73000"/>
+              </a:schemeClr>
+            </a:gs>
+            <a:gs pos="100000">
+              <a:schemeClr val="phClr">
+                <a:lumMod val="105000"/>
+                <a:satMod val="109000"/>
+                <a:tint val="81000"/>
+              </a:schemeClr>
+            </a:gs>
+          </a:gsLst>
+          <a:lin ang="5400000" scaled="0"/>
+        </a:gradFill>
+        <a:gradFill rotWithShape="1">
+          <a:gsLst>
+            <a:gs pos="0">
+              <a:schemeClr val="phClr">
+                <a:satMod val="103000"/>
+                <a:lumMod val="102000"/>
+                <a:tint val="94000"/>
+              </a:schemeClr>
+            </a:gs>
+            <a:gs pos="50000">
+              <a:schemeClr val="phClr">
+                <a:satMod val="110000"/>
+                <a:lumMod val="100000"/>
+                <a:shade val="100000"/>
+              </a:schemeClr>
+            </a:gs>
+            <a:gs pos="100000">
+              <a:schemeClr val="phClr">
+                <a:lumMod val="99000"/>
+                <a:satMod val="120000"/>
+                <a:shade val="78000"/>
+              </a:schemeClr>
+            </a:gs>
+          </a:gsLst>
+          <a:lin ang="5400000" scaled="0"/>
+        </a:gradFill>
+      </a:fillStyleLst>
+      <a:lnStyleLst>
+        <a:ln w="6350" cap="flat" cmpd="sng" algn="ctr">
+          <a:solidFill>
+            <a:schemeClr val="phClr"/>
+          </a:solidFill>
+          <a:prstDash val="solid"/>
+          <a:miter lim="800000"/>
+        </a:ln>
+        <a:ln w="12700" cap="flat" cmpd="sng" algn="ctr">
+          <a:solidFill>
+            <a:schemeClr val="phClr"/>
+          </a:solidFill>
+          <a:prstDash val="solid"/>
+          <a:miter lim="800000"/>
+        </a:ln>
+        <a:ln w="19050" cap="flat" cmpd="sng" algn="ctr">
+          <a:solidFill>
+            <a:schemeClr val="phClr"/>
+          </a:solidFill>
+          <a:prstDash val="solid"/>
+          <a:miter lim="800000"/>
+        </a:ln>
+      </a:lnStyleLst>
+      <a:effectStyleLst>
+        <a:effectStyle>
+          <a:effectLst/>
+        </a:effectStyle>
+        <a:effectStyle>
+          <a:effectLst/>
+        </a:effectStyle>
+        <a:effectStyle>
+          <a:effectLst>
+            <a:outerShdw blurRad="57150" dist="19050" dir="5400000" algn="ctr" rotWithShape="0">
+              <a:srgbClr val="000000">
+                <a:alpha val="63000"/>
+              </a:srgbClr>
+            </a:outerShdw>
+          </a:effectLst>
+        </a:effectStyle>
+      </a:effectStyleLst>
+      <a:bgFillStyleLst>
+        <a:solidFill>
+          <a:schemeClr val="phClr"/>
+        </a:solidFill>
+        <a:solidFill>
+          <a:schemeClr val="phClr">
+            <a:tint val="95000"/>
+            <a:satMod val="170000"/>
+          </a:schemeClr>
+        </a:solidFill>
+        <a:gradFill rotWithShape="1">
+          <a:gsLst>
+            <a:gs pos="0">
+              <a:schemeClr val="phClr">
+                <a:tint val="93000"/>
+                <a:satMod val="150000"/>
+                <a:shade val="98000"/>
+                <a:lumMod val="102000"/>
+              </a:schemeClr>
+            </a:gs>
+            <a:gs pos="50000">
+              <a:schemeClr val="phClr">
+                <a:tint val="98000"/>
+                <a:satMod val="130000"/>
+                <a:shade val="90000"/>
+                <a:lumMod val="103000"/>
+              </a:schemeClr>
+            </a:gs>
+            <a:gs pos="100000">
+              <a:schemeClr val="phClr">
+                <a:shade val="63000"/>
+                <a:satMod val="120000"/>
+              </a:schemeClr>
+            </a:gs>
+          </a:gsLst>
+          <a:lin ang="5400000" scaled="0"/>
+        </a:gradFill>
+      </a:bgFillStyleLst>
+    </a:fmtScheme>
+  </a:themeElements>
+  <a:objectDefaults/>
+  <a:extraClrSchemeLst/>
+  <a:extLst>
+    <a:ext uri="{05A4C25C-085E-4340-85A3-A5531E510DB2}">
+      <thm15:themeFamily xmlns:thm15="http://schemas.microsoft.com/office/thememl/2012/main" name="Office Theme" id="{62F939B6-93AF-4DB8-9C6B-D6C7DFDC589F}" vid="{4A3C46E8-61CC-4603-A589-7422A47A8E4A}"/>
+    </a:ext>
+  </a:extLst>
+</a:theme>
 </file>